--- a/static/audit_presentation_btg.pptx
+++ b/static/audit_presentation_btg.pptx
@@ -2,20 +2,20 @@
 <file path=ppt/presentation.xml><?xml version="1.0" encoding="utf-8"?>
 <p:presentation xmlns:p="http://schemas.openxmlformats.org/presentationml/2006/main">
   <p:sldMasterIdLst>
-    <p:sldMasterId xmlns:r="http://schemas.openxmlformats.org/officeDocument/2006/relationships" id="2147483648" r:id="R361ab93083404be1"/>
+    <p:sldMasterId xmlns:r="http://schemas.openxmlformats.org/officeDocument/2006/relationships" id="2147483648" r:id="R7ebf56ca6f4044bb"/>
   </p:sldMasterIdLst>
   <p:notesMasterIdLst>
-    <p:notesMasterId xmlns:r="http://schemas.openxmlformats.org/officeDocument/2006/relationships" r:id="Rd3cc0b4b5bfe48a5"/>
+    <p:notesMasterId xmlns:r="http://schemas.openxmlformats.org/officeDocument/2006/relationships" r:id="R40b92e844a384268"/>
   </p:notesMasterIdLst>
   <p:sldIdLst>
-    <p:sldId xmlns:r="http://schemas.openxmlformats.org/officeDocument/2006/relationships" id="256" r:id="Rd464755501a24d9c"/>
-    <p:sldId xmlns:r="http://schemas.openxmlformats.org/officeDocument/2006/relationships" id="257" r:id="Rd9a54a4bc52e4513"/>
-    <p:sldId xmlns:r="http://schemas.openxmlformats.org/officeDocument/2006/relationships" id="258" r:id="R209eea986d0041fb"/>
-    <p:sldId xmlns:r="http://schemas.openxmlformats.org/officeDocument/2006/relationships" id="259" r:id="R657554975f2e46f7"/>
-    <p:sldId xmlns:r="http://schemas.openxmlformats.org/officeDocument/2006/relationships" id="260" r:id="Rfb26e0c4256b47b7"/>
-    <p:sldId xmlns:r="http://schemas.openxmlformats.org/officeDocument/2006/relationships" id="261" r:id="R3217245c6d514c01"/>
-    <p:sldId xmlns:r="http://schemas.openxmlformats.org/officeDocument/2006/relationships" id="262" r:id="Rb43e522e31874da2"/>
-    <p:sldId xmlns:r="http://schemas.openxmlformats.org/officeDocument/2006/relationships" id="263" r:id="Rf99657e0432e4a08"/>
+    <p:sldId xmlns:r="http://schemas.openxmlformats.org/officeDocument/2006/relationships" id="256" r:id="R40031d89b2304b2b"/>
+    <p:sldId xmlns:r="http://schemas.openxmlformats.org/officeDocument/2006/relationships" id="257" r:id="Rb0ed26fc59d74cb8"/>
+    <p:sldId xmlns:r="http://schemas.openxmlformats.org/officeDocument/2006/relationships" id="258" r:id="Rf50829e1b7e94926"/>
+    <p:sldId xmlns:r="http://schemas.openxmlformats.org/officeDocument/2006/relationships" id="259" r:id="R59ed6b84ab7c40d2"/>
+    <p:sldId xmlns:r="http://schemas.openxmlformats.org/officeDocument/2006/relationships" id="260" r:id="R2af4b4d8fc874f6a"/>
+    <p:sldId xmlns:r="http://schemas.openxmlformats.org/officeDocument/2006/relationships" id="261" r:id="R08d7dad73ac14605"/>
+    <p:sldId xmlns:r="http://schemas.openxmlformats.org/officeDocument/2006/relationships" id="262" r:id="Ra33135399bb144ce"/>
+    <p:sldId xmlns:r="http://schemas.openxmlformats.org/officeDocument/2006/relationships" id="263" r:id="R1bf44685ace14cc2"/>
   </p:sldIdLst>
   <p:sldSz cx="12192000" cy="6858000"/>
   <p:notesSz cx="6858000" cy="9144000"/>
@@ -1070,7 +1070,7 @@
   </p:cSld>
   <p:clrMap bg1="lt1" tx1="dk1" bg2="lt2" tx2="dk2" accent1="accent1" accent2="accent2" accent3="accent3" accent4="accent4" accent5="accent5" accent6="accent6" hlink="hlink" folHlink="folHlink"/>
   <p:sldLayoutIdLst>
-    <p:sldLayoutId xmlns:r="http://schemas.openxmlformats.org/officeDocument/2006/relationships" id="2147483649" r:id="Rd4925ce1293a4923"/>
+    <p:sldLayoutId xmlns:r="http://schemas.openxmlformats.org/officeDocument/2006/relationships" id="2147483649" r:id="Ra3e140d22e3f411d"/>
   </p:sldLayoutIdLst>
   <p:txStyles>
     <p:titleStyle>
@@ -1621,7 +1621,7 @@
           <p:cNvPr id="1" name="">
             <a:extLst xmlns:a="http://schemas.openxmlformats.org/drawingml/2006/main">
               <a:ext uri="{FF2B5EF4-FFF2-40B4-BE49-F238E27FC236}">
-                <a16:creationId xmlns:a16="http://schemas.microsoft.com/office/drawing/2014/main" id="{A1A8D420-9547-4D9F-ADFA-8E55C03D43B7}"/>
+                <a16:creationId xmlns:a16="http://schemas.microsoft.com/office/drawing/2014/main" id="{6AD3083B-BA1D-4491-BFB8-D29E522C571C}"/>
               </a:ext>
             </a:extLst>
           </p:cNvPr>
@@ -1652,7 +1652,7 @@
           <p:cNvPr id="2" name="">
             <a:extLst xmlns:a="http://schemas.openxmlformats.org/drawingml/2006/main">
               <a:ext uri="{FF2B5EF4-FFF2-40B4-BE49-F238E27FC236}">
-                <a16:creationId xmlns:a16="http://schemas.microsoft.com/office/drawing/2014/main" id="{911C3DCE-482D-4430-B80C-C0DE166E27EC}"/>
+                <a16:creationId xmlns:a16="http://schemas.microsoft.com/office/drawing/2014/main" id="{CE8690DA-3F64-40DD-B316-603CCC0023CF}"/>
               </a:ext>
             </a:extLst>
           </p:cNvPr>
@@ -1680,14 +1680,14 @@
       </p:sp>
       <p:pic>
         <p:nvPicPr>
-          <p:cNvPr id="16" name=""/>
+          <p:cNvPr id="19" name=""/>
           <p:cNvPicPr>
             <a:picLocks xmlns:a="http://schemas.openxmlformats.org/drawingml/2006/main" noChangeAspect="1"/>
           </p:cNvPicPr>
           <p:nvPr/>
         </p:nvPicPr>
         <p:blipFill>
-          <a:blip xmlns:r="http://schemas.openxmlformats.org/officeDocument/2006/relationships" xmlns:a="http://schemas.openxmlformats.org/drawingml/2006/main" r:embed="R9205fbe02aae400e"/>
+          <a:blip xmlns:r="http://schemas.openxmlformats.org/officeDocument/2006/relationships" xmlns:a="http://schemas.openxmlformats.org/drawingml/2006/main" r:embed="Rc7480c3ccc364f10"/>
           <a:stretch xmlns:a="http://schemas.openxmlformats.org/drawingml/2006/main"/>
         </p:blipFill>
         <p:spPr>
@@ -1705,7 +1705,7 @@
           <p:cNvPr id="4" name="">
             <a:extLst xmlns:a="http://schemas.openxmlformats.org/drawingml/2006/main">
               <a:ext uri="{FF2B5EF4-FFF2-40B4-BE49-F238E27FC236}">
-                <a16:creationId xmlns:a16="http://schemas.microsoft.com/office/drawing/2014/main" id="{F075B8A2-580C-4255-8F40-62C2DDFA0D79}"/>
+                <a16:creationId xmlns:a16="http://schemas.microsoft.com/office/drawing/2014/main" id="{638C7E3F-A743-4F13-925F-F5F0DC378823}"/>
               </a:ext>
             </a:extLst>
           </p:cNvPr>
@@ -1755,7 +1755,7 @@
           <p:cNvPr id="5" name="">
             <a:extLst xmlns:a="http://schemas.openxmlformats.org/drawingml/2006/main">
               <a:ext uri="{FF2B5EF4-FFF2-40B4-BE49-F238E27FC236}">
-                <a16:creationId xmlns:a16="http://schemas.microsoft.com/office/drawing/2014/main" id="{82615F47-D530-46DD-B223-D9C2BB469D3B}"/>
+                <a16:creationId xmlns:a16="http://schemas.microsoft.com/office/drawing/2014/main" id="{90BAD9E0-4AAE-45AD-9A43-54918C500E71}"/>
               </a:ext>
             </a:extLst>
           </p:cNvPr>
@@ -1805,7 +1805,7 @@
           <p:cNvPr id="6" name="">
             <a:extLst xmlns:a="http://schemas.openxmlformats.org/drawingml/2006/main">
               <a:ext uri="{FF2B5EF4-FFF2-40B4-BE49-F238E27FC236}">
-                <a16:creationId xmlns:a16="http://schemas.microsoft.com/office/drawing/2014/main" id="{3FFF5622-ACFB-4F7C-A486-BCDE1FC8EE62}"/>
+                <a16:creationId xmlns:a16="http://schemas.microsoft.com/office/drawing/2014/main" id="{00972532-12D3-4295-B072-08CDA642F70D}"/>
               </a:ext>
             </a:extLst>
           </p:cNvPr>
@@ -1855,7 +1855,7 @@
           <p:cNvPr id="7" name="">
             <a:extLst xmlns:a="http://schemas.openxmlformats.org/drawingml/2006/main">
               <a:ext uri="{FF2B5EF4-FFF2-40B4-BE49-F238E27FC236}">
-                <a16:creationId xmlns:a16="http://schemas.microsoft.com/office/drawing/2014/main" id="{E4B9A805-7249-472D-8EAA-1AB885DA9F5D}"/>
+                <a16:creationId xmlns:a16="http://schemas.microsoft.com/office/drawing/2014/main" id="{12B577D0-61A8-4DFA-B268-930C74F03C6A}"/>
               </a:ext>
             </a:extLst>
           </p:cNvPr>
@@ -1867,7 +1867,7 @@
         <p:spPr>
           <a:xfrm xmlns:a="http://schemas.openxmlformats.org/drawingml/2006/main">
             <a:off x="685800" y="4714875"/>
-            <a:ext cx="1962150" cy="990600"/>
+            <a:ext cx="1809750" cy="990600"/>
           </a:xfrm>
           <a:prstGeom xmlns:a="http://schemas.openxmlformats.org/drawingml/2006/main" prst="roundRect">
             <a:avLst>
@@ -1875,6 +1875,139 @@
             </a:avLst>
           </a:prstGeom>
           <a:solidFill xmlns:a="http://schemas.openxmlformats.org/drawingml/2006/main">
+            <a:srgbClr val="102A63"/>
+          </a:solidFill>
+          <a:ln xmlns:a="http://schemas.openxmlformats.org/drawingml/2006/main" w="0">
+            <a:noFill/>
+            <a:prstDash val="solid"/>
+          </a:ln>
+        </p:spPr>
+      </p:sp>
+      <p:sp>
+        <p:nvSpPr>
+          <p:cNvPr id="8" name="">
+            <a:extLst xmlns:a="http://schemas.openxmlformats.org/drawingml/2006/main">
+              <a:ext uri="{FF2B5EF4-FFF2-40B4-BE49-F238E27FC236}">
+                <a16:creationId xmlns:a16="http://schemas.microsoft.com/office/drawing/2014/main" id="{E971033E-5917-4110-BCDD-69FA283E0629}"/>
+              </a:ext>
+            </a:extLst>
+          </p:cNvPr>
+          <p:cNvSpPr>
+            <a:spLocks xmlns:a="http://schemas.openxmlformats.org/drawingml/2006/main" noGrp="1"/>
+          </p:cNvSpPr>
+          <p:nvPr/>
+        </p:nvSpPr>
+        <p:spPr>
+          <a:xfrm xmlns:a="http://schemas.openxmlformats.org/drawingml/2006/main">
+            <a:off x="838200" y="4876800"/>
+            <a:ext cx="1504950" cy="238125"/>
+          </a:xfrm>
+          <a:prstGeom xmlns:a="http://schemas.openxmlformats.org/drawingml/2006/main" prst="rect">
+            <a:avLst/>
+          </a:prstGeom>
+          <a:noFill xmlns:a="http://schemas.openxmlformats.org/drawingml/2006/main"/>
+          <a:ln xmlns:a="http://schemas.openxmlformats.org/drawingml/2006/main" w="0">
+            <a:noFill/>
+            <a:prstDash val="solid"/>
+          </a:ln>
+        </p:spPr>
+        <p:txBody>
+          <a:bodyPr xmlns:a="http://schemas.openxmlformats.org/drawingml/2006/main"/>
+          <a:lstStyle xmlns:a="http://schemas.openxmlformats.org/drawingml/2006/main"/>
+          <a:p xmlns:a="http://schemas.openxmlformats.org/drawingml/2006/main">
+            <a:pPr algn="ctr">
+              <a:defRPr sz="1125" b="1">
+                <a:solidFill>
+                  <a:srgbClr val="FFFFFF"/>
+                </a:solidFill>
+              </a:defRPr>
+            </a:pPr>
+            <a:r>
+              <a:rPr sz="1125" b="1">
+                <a:solidFill>
+                  <a:srgbClr val="FFFFFF"/>
+                </a:solidFill>
+              </a:rPr>
+              <a:t>Зрелость ИТ</a:t>
+            </a:r>
+          </a:p>
+        </p:txBody>
+      </p:sp>
+      <p:sp>
+        <p:nvSpPr>
+          <p:cNvPr id="9" name="">
+            <a:extLst xmlns:a="http://schemas.openxmlformats.org/drawingml/2006/main">
+              <a:ext uri="{FF2B5EF4-FFF2-40B4-BE49-F238E27FC236}">
+                <a16:creationId xmlns:a16="http://schemas.microsoft.com/office/drawing/2014/main" id="{199EDEF5-6BB9-4A19-B43D-4B110D79F47E}"/>
+              </a:ext>
+            </a:extLst>
+          </p:cNvPr>
+          <p:cNvSpPr>
+            <a:spLocks xmlns:a="http://schemas.openxmlformats.org/drawingml/2006/main" noGrp="1"/>
+          </p:cNvSpPr>
+          <p:nvPr/>
+        </p:nvSpPr>
+        <p:spPr>
+          <a:xfrm xmlns:a="http://schemas.openxmlformats.org/drawingml/2006/main">
+            <a:off x="838200" y="5153025"/>
+            <a:ext cx="1504950" cy="419100"/>
+          </a:xfrm>
+          <a:prstGeom xmlns:a="http://schemas.openxmlformats.org/drawingml/2006/main" prst="rect">
+            <a:avLst/>
+          </a:prstGeom>
+          <a:noFill xmlns:a="http://schemas.openxmlformats.org/drawingml/2006/main"/>
+          <a:ln xmlns:a="http://schemas.openxmlformats.org/drawingml/2006/main" w="0">
+            <a:noFill/>
+            <a:prstDash val="solid"/>
+          </a:ln>
+        </p:spPr>
+        <p:txBody>
+          <a:bodyPr xmlns:a="http://schemas.openxmlformats.org/drawingml/2006/main"/>
+          <a:lstStyle xmlns:a="http://schemas.openxmlformats.org/drawingml/2006/main"/>
+          <a:p xmlns:a="http://schemas.openxmlformats.org/drawingml/2006/main">
+            <a:pPr algn="ctr">
+              <a:defRPr sz="2550" b="1">
+                <a:solidFill>
+                  <a:srgbClr val="FFFFFF"/>
+                </a:solidFill>
+              </a:defRPr>
+            </a:pPr>
+            <a:r>
+              <a:rPr sz="2550" b="1">
+                <a:solidFill>
+                  <a:srgbClr val="FFFFFF"/>
+                </a:solidFill>
+              </a:rPr>
+              <a:t>{{IT_SCORE}}%</a:t>
+            </a:r>
+          </a:p>
+        </p:txBody>
+      </p:sp>
+      <p:sp>
+        <p:nvSpPr>
+          <p:cNvPr id="10" name="">
+            <a:extLst xmlns:a="http://schemas.openxmlformats.org/drawingml/2006/main">
+              <a:ext uri="{FF2B5EF4-FFF2-40B4-BE49-F238E27FC236}">
+                <a16:creationId xmlns:a16="http://schemas.microsoft.com/office/drawing/2014/main" id="{EAA26A8D-654D-4230-8656-9FDB7D65347A}"/>
+              </a:ext>
+            </a:extLst>
+          </p:cNvPr>
+          <p:cNvSpPr>
+            <a:spLocks xmlns:a="http://schemas.openxmlformats.org/drawingml/2006/main" noGrp="1"/>
+          </p:cNvSpPr>
+          <p:nvPr/>
+        </p:nvSpPr>
+        <p:spPr>
+          <a:xfrm xmlns:a="http://schemas.openxmlformats.org/drawingml/2006/main">
+            <a:off x="2647950" y="4714875"/>
+            <a:ext cx="1809750" cy="990600"/>
+          </a:xfrm>
+          <a:prstGeom xmlns:a="http://schemas.openxmlformats.org/drawingml/2006/main" prst="roundRect">
+            <a:avLst>
+              <a:gd name="adj" fmla="val 11538"/>
+            </a:avLst>
+          </a:prstGeom>
+          <a:solidFill xmlns:a="http://schemas.openxmlformats.org/drawingml/2006/main">
             <a:srgbClr val="2048A8"/>
           </a:solidFill>
           <a:ln xmlns:a="http://schemas.openxmlformats.org/drawingml/2006/main" w="0">
@@ -1885,22 +2018,22 @@
       </p:sp>
       <p:sp>
         <p:nvSpPr>
-          <p:cNvPr id="8" name="">
-            <a:extLst xmlns:a="http://schemas.openxmlformats.org/drawingml/2006/main">
-              <a:ext uri="{FF2B5EF4-FFF2-40B4-BE49-F238E27FC236}">
-                <a16:creationId xmlns:a16="http://schemas.microsoft.com/office/drawing/2014/main" id="{F1893231-6578-460F-8EB7-C925BD141AA7}"/>
-              </a:ext>
-            </a:extLst>
-          </p:cNvPr>
-          <p:cNvSpPr>
-            <a:spLocks xmlns:a="http://schemas.openxmlformats.org/drawingml/2006/main" noGrp="1"/>
-          </p:cNvSpPr>
-          <p:nvPr/>
-        </p:nvSpPr>
-        <p:spPr>
-          <a:xfrm xmlns:a="http://schemas.openxmlformats.org/drawingml/2006/main">
-            <a:off x="876300" y="4876800"/>
-            <a:ext cx="1581150" cy="238125"/>
+          <p:cNvPr id="11" name="">
+            <a:extLst xmlns:a="http://schemas.openxmlformats.org/drawingml/2006/main">
+              <a:ext uri="{FF2B5EF4-FFF2-40B4-BE49-F238E27FC236}">
+                <a16:creationId xmlns:a16="http://schemas.microsoft.com/office/drawing/2014/main" id="{2B3EE739-D44D-46EC-A7C7-79A63C0394D1}"/>
+              </a:ext>
+            </a:extLst>
+          </p:cNvPr>
+          <p:cNvSpPr>
+            <a:spLocks xmlns:a="http://schemas.openxmlformats.org/drawingml/2006/main" noGrp="1"/>
+          </p:cNvSpPr>
+          <p:nvPr/>
+        </p:nvSpPr>
+        <p:spPr>
+          <a:xfrm xmlns:a="http://schemas.openxmlformats.org/drawingml/2006/main">
+            <a:off x="2800350" y="4876800"/>
+            <a:ext cx="1504950" cy="238125"/>
           </a:xfrm>
           <a:prstGeom xmlns:a="http://schemas.openxmlformats.org/drawingml/2006/main" prst="rect">
             <a:avLst/>
@@ -1935,22 +2068,22 @@
       </p:sp>
       <p:sp>
         <p:nvSpPr>
-          <p:cNvPr id="9" name="">
-            <a:extLst xmlns:a="http://schemas.openxmlformats.org/drawingml/2006/main">
-              <a:ext uri="{FF2B5EF4-FFF2-40B4-BE49-F238E27FC236}">
-                <a16:creationId xmlns:a16="http://schemas.microsoft.com/office/drawing/2014/main" id="{7CEB6897-49BA-4890-A2EE-F80F95D5D312}"/>
-              </a:ext>
-            </a:extLst>
-          </p:cNvPr>
-          <p:cNvSpPr>
-            <a:spLocks xmlns:a="http://schemas.openxmlformats.org/drawingml/2006/main" noGrp="1"/>
-          </p:cNvSpPr>
-          <p:nvPr/>
-        </p:nvSpPr>
-        <p:spPr>
-          <a:xfrm xmlns:a="http://schemas.openxmlformats.org/drawingml/2006/main">
-            <a:off x="876300" y="5153025"/>
-            <a:ext cx="1581150" cy="419100"/>
+          <p:cNvPr id="12" name="">
+            <a:extLst xmlns:a="http://schemas.openxmlformats.org/drawingml/2006/main">
+              <a:ext uri="{FF2B5EF4-FFF2-40B4-BE49-F238E27FC236}">
+                <a16:creationId xmlns:a16="http://schemas.microsoft.com/office/drawing/2014/main" id="{C97C708F-E113-49B5-A6C2-FAE0931FFCB7}"/>
+              </a:ext>
+            </a:extLst>
+          </p:cNvPr>
+          <p:cNvSpPr>
+            <a:spLocks xmlns:a="http://schemas.openxmlformats.org/drawingml/2006/main" noGrp="1"/>
+          </p:cNvSpPr>
+          <p:nvPr/>
+        </p:nvSpPr>
+        <p:spPr>
+          <a:xfrm xmlns:a="http://schemas.openxmlformats.org/drawingml/2006/main">
+            <a:off x="2800350" y="5153025"/>
+            <a:ext cx="1504950" cy="419100"/>
           </a:xfrm>
           <a:prstGeom xmlns:a="http://schemas.openxmlformats.org/drawingml/2006/main" prst="rect">
             <a:avLst/>
@@ -1985,22 +2118,22 @@
       </p:sp>
       <p:sp>
         <p:nvSpPr>
-          <p:cNvPr id="10" name="">
-            <a:extLst xmlns:a="http://schemas.openxmlformats.org/drawingml/2006/main">
-              <a:ext uri="{FF2B5EF4-FFF2-40B4-BE49-F238E27FC236}">
-                <a16:creationId xmlns:a16="http://schemas.microsoft.com/office/drawing/2014/main" id="{86A90665-4721-4D0A-AE12-061B07791CFC}"/>
-              </a:ext>
-            </a:extLst>
-          </p:cNvPr>
-          <p:cNvSpPr>
-            <a:spLocks xmlns:a="http://schemas.openxmlformats.org/drawingml/2006/main" noGrp="1"/>
-          </p:cNvSpPr>
-          <p:nvPr/>
-        </p:nvSpPr>
-        <p:spPr>
-          <a:xfrm xmlns:a="http://schemas.openxmlformats.org/drawingml/2006/main">
-            <a:off x="3009900" y="5162550"/>
-            <a:ext cx="2000250" cy="323850"/>
+          <p:cNvPr id="13" name="">
+            <a:extLst xmlns:a="http://schemas.openxmlformats.org/drawingml/2006/main">
+              <a:ext uri="{FF2B5EF4-FFF2-40B4-BE49-F238E27FC236}">
+                <a16:creationId xmlns:a16="http://schemas.microsoft.com/office/drawing/2014/main" id="{6975FC5C-6552-47E6-9325-48C9304636EE}"/>
+              </a:ext>
+            </a:extLst>
+          </p:cNvPr>
+          <p:cNvSpPr>
+            <a:spLocks xmlns:a="http://schemas.openxmlformats.org/drawingml/2006/main" noGrp="1"/>
+          </p:cNvSpPr>
+          <p:nvPr/>
+        </p:nvSpPr>
+        <p:spPr>
+          <a:xfrm xmlns:a="http://schemas.openxmlformats.org/drawingml/2006/main">
+            <a:off x="4810125" y="5162550"/>
+            <a:ext cx="1714500" cy="323850"/>
           </a:xfrm>
           <a:prstGeom xmlns:a="http://schemas.openxmlformats.org/drawingml/2006/main" prst="rect">
             <a:avLst/>
@@ -2035,14 +2168,14 @@
       </p:sp>
       <p:pic>
         <p:nvPicPr>
-          <p:cNvPr id="24" name=""/>
+          <p:cNvPr id="30" name=""/>
           <p:cNvPicPr>
             <a:picLocks xmlns:a="http://schemas.openxmlformats.org/drawingml/2006/main" noChangeAspect="1"/>
           </p:cNvPicPr>
           <p:nvPr/>
         </p:nvPicPr>
         <p:blipFill>
-          <a:blip xmlns:r="http://schemas.openxmlformats.org/officeDocument/2006/relationships" xmlns:a="http://schemas.openxmlformats.org/drawingml/2006/main" r:embed="R6530b40dbbb0447a"/>
+          <a:blip xmlns:r="http://schemas.openxmlformats.org/officeDocument/2006/relationships" xmlns:a="http://schemas.openxmlformats.org/drawingml/2006/main" r:embed="R8d15ca23a79146ed"/>
           <a:srcRect xmlns:a="http://schemas.openxmlformats.org/drawingml/2006/main" l="0" t="132" r="0" b="132"/>
           <a:stretch xmlns:a="http://schemas.openxmlformats.org/drawingml/2006/main">
             <a:fillRect l="0" t="0" r="0" b="0"/>
@@ -2060,10 +2193,10 @@
       </p:pic>
       <p:sp>
         <p:nvSpPr>
-          <p:cNvPr id="12" name="">
-            <a:extLst xmlns:a="http://schemas.openxmlformats.org/drawingml/2006/main">
-              <a:ext uri="{FF2B5EF4-FFF2-40B4-BE49-F238E27FC236}">
-                <a16:creationId xmlns:a16="http://schemas.microsoft.com/office/drawing/2014/main" id="{6E2A16FC-3A14-4ECA-AFFA-00F0CB25AACB}"/>
+          <p:cNvPr id="15" name="">
+            <a:extLst xmlns:a="http://schemas.openxmlformats.org/drawingml/2006/main">
+              <a:ext uri="{FF2B5EF4-FFF2-40B4-BE49-F238E27FC236}">
+                <a16:creationId xmlns:a16="http://schemas.microsoft.com/office/drawing/2014/main" id="{FD628EEB-A6A3-4E7A-B8AB-BB04EA0FF224}"/>
               </a:ext>
             </a:extLst>
           </p:cNvPr>
@@ -2091,10 +2224,10 @@
       </p:sp>
       <p:sp>
         <p:nvSpPr>
-          <p:cNvPr id="13" name="">
-            <a:extLst xmlns:a="http://schemas.openxmlformats.org/drawingml/2006/main">
-              <a:ext uri="{FF2B5EF4-FFF2-40B4-BE49-F238E27FC236}">
-                <a16:creationId xmlns:a16="http://schemas.microsoft.com/office/drawing/2014/main" id="{9D38D98B-4E39-4A2C-8B70-3C655D872930}"/>
+          <p:cNvPr id="16" name="">
+            <a:extLst xmlns:a="http://schemas.openxmlformats.org/drawingml/2006/main">
+              <a:ext uri="{FF2B5EF4-FFF2-40B4-BE49-F238E27FC236}">
+                <a16:creationId xmlns:a16="http://schemas.microsoft.com/office/drawing/2014/main" id="{A3198B0E-9CCF-4A37-9996-48C962621D1E}"/>
               </a:ext>
             </a:extLst>
           </p:cNvPr>
@@ -2142,7 +2275,7 @@
     </p:spTree>
     <p:extLst>
       <p:ext uri="{BB962C8B-B14F-4D97-AF65-F5344CB8AC3E}">
-        <p14:creationId xmlns:p14="http://schemas.microsoft.com/office/powerpoint/2010/main" val="482009543"/>
+        <p14:creationId xmlns:p14="http://schemas.microsoft.com/office/powerpoint/2010/main" val="1965718783"/>
       </p:ext>
     </p:extLst>
   </p:cSld>
@@ -2173,7 +2306,7 @@
           <p:cNvPr id="1" name="">
             <a:extLst xmlns:a="http://schemas.openxmlformats.org/drawingml/2006/main">
               <a:ext uri="{FF2B5EF4-FFF2-40B4-BE49-F238E27FC236}">
-                <a16:creationId xmlns:a16="http://schemas.microsoft.com/office/drawing/2014/main" id="{05AEBE85-4563-46F6-A9FA-5FEFB13DA8AD}"/>
+                <a16:creationId xmlns:a16="http://schemas.microsoft.com/office/drawing/2014/main" id="{C88E1078-7AF0-4EB0-95CF-5339386DBF18}"/>
               </a:ext>
             </a:extLst>
           </p:cNvPr>
@@ -2208,7 +2341,7 @@
           <p:nvPr/>
         </p:nvPicPr>
         <p:blipFill>
-          <a:blip xmlns:r="http://schemas.openxmlformats.org/officeDocument/2006/relationships" xmlns:a="http://schemas.openxmlformats.org/drawingml/2006/main" r:embed="R1c94bf46e6174a27"/>
+          <a:blip xmlns:r="http://schemas.openxmlformats.org/officeDocument/2006/relationships" xmlns:a="http://schemas.openxmlformats.org/drawingml/2006/main" r:embed="R11d45b6c9eae4967"/>
           <a:stretch xmlns:a="http://schemas.openxmlformats.org/drawingml/2006/main"/>
         </p:blipFill>
         <p:spPr>
@@ -2226,7 +2359,7 @@
           <p:cNvPr id="3" name="">
             <a:extLst xmlns:a="http://schemas.openxmlformats.org/drawingml/2006/main">
               <a:ext uri="{FF2B5EF4-FFF2-40B4-BE49-F238E27FC236}">
-                <a16:creationId xmlns:a16="http://schemas.microsoft.com/office/drawing/2014/main" id="{694E9570-5AAB-43E7-A708-F606E97D8207}"/>
+                <a16:creationId xmlns:a16="http://schemas.microsoft.com/office/drawing/2014/main" id="{76B5E1D0-CDEB-42F4-9D5B-C0CBE7AAE330}"/>
               </a:ext>
             </a:extLst>
           </p:cNvPr>
@@ -2276,7 +2409,7 @@
           <p:cNvPr id="4" name="">
             <a:extLst xmlns:a="http://schemas.openxmlformats.org/drawingml/2006/main">
               <a:ext uri="{FF2B5EF4-FFF2-40B4-BE49-F238E27FC236}">
-                <a16:creationId xmlns:a16="http://schemas.microsoft.com/office/drawing/2014/main" id="{95DDDC35-F862-43D1-8377-1D49F3D1FA22}"/>
+                <a16:creationId xmlns:a16="http://schemas.microsoft.com/office/drawing/2014/main" id="{0489AE89-C5C4-4DB3-912E-B37C76D0C04B}"/>
               </a:ext>
             </a:extLst>
           </p:cNvPr>
@@ -2309,7 +2442,7 @@
           <p:cNvPr id="5" name="">
             <a:extLst xmlns:a="http://schemas.openxmlformats.org/drawingml/2006/main">
               <a:ext uri="{FF2B5EF4-FFF2-40B4-BE49-F238E27FC236}">
-                <a16:creationId xmlns:a16="http://schemas.microsoft.com/office/drawing/2014/main" id="{AADE5B6F-62F2-48B0-B4FA-85B410DAACB1}"/>
+                <a16:creationId xmlns:a16="http://schemas.microsoft.com/office/drawing/2014/main" id="{07EFE5CA-0BF5-4DE8-8F83-AE9D4F3676A4}"/>
               </a:ext>
             </a:extLst>
           </p:cNvPr>
@@ -2340,7 +2473,7 @@
           <p:cNvPr id="6" name="">
             <a:extLst xmlns:a="http://schemas.openxmlformats.org/drawingml/2006/main">
               <a:ext uri="{FF2B5EF4-FFF2-40B4-BE49-F238E27FC236}">
-                <a16:creationId xmlns:a16="http://schemas.microsoft.com/office/drawing/2014/main" id="{CC548A7B-5D23-4F3B-83EC-FEB9D659AF69}"/>
+                <a16:creationId xmlns:a16="http://schemas.microsoft.com/office/drawing/2014/main" id="{9E941CEC-7A2B-4FDB-BEBF-C75DA0C1328E}"/>
               </a:ext>
             </a:extLst>
           </p:cNvPr>
@@ -2390,7 +2523,7 @@
           <p:cNvPr id="7" name="">
             <a:extLst xmlns:a="http://schemas.openxmlformats.org/drawingml/2006/main">
               <a:ext uri="{FF2B5EF4-FFF2-40B4-BE49-F238E27FC236}">
-                <a16:creationId xmlns:a16="http://schemas.microsoft.com/office/drawing/2014/main" id="{0C82ACA0-FF62-45C6-8F6C-9AC918CBB199}"/>
+                <a16:creationId xmlns:a16="http://schemas.microsoft.com/office/drawing/2014/main" id="{9A6F449D-4640-42CB-8324-B9BADB1CADA2}"/>
               </a:ext>
             </a:extLst>
           </p:cNvPr>
@@ -2440,7 +2573,7 @@
           <p:cNvPr id="8" name="">
             <a:extLst xmlns:a="http://schemas.openxmlformats.org/drawingml/2006/main">
               <a:ext uri="{FF2B5EF4-FFF2-40B4-BE49-F238E27FC236}">
-                <a16:creationId xmlns:a16="http://schemas.microsoft.com/office/drawing/2014/main" id="{3A3DD646-80BD-4AC6-BEAB-E44113115704}"/>
+                <a16:creationId xmlns:a16="http://schemas.microsoft.com/office/drawing/2014/main" id="{C312A747-84A5-48EF-B76D-F2873BB1B912}"/>
               </a:ext>
             </a:extLst>
           </p:cNvPr>
@@ -2490,7 +2623,7 @@
           <p:cNvPr id="9" name="">
             <a:extLst xmlns:a="http://schemas.openxmlformats.org/drawingml/2006/main">
               <a:ext uri="{FF2B5EF4-FFF2-40B4-BE49-F238E27FC236}">
-                <a16:creationId xmlns:a16="http://schemas.microsoft.com/office/drawing/2014/main" id="{5263588A-F75A-4E29-B157-B9D1A948FA41}"/>
+                <a16:creationId xmlns:a16="http://schemas.microsoft.com/office/drawing/2014/main" id="{EC892B84-4789-4B26-8C8A-788FB66A1F42}"/>
               </a:ext>
             </a:extLst>
           </p:cNvPr>
@@ -2540,7 +2673,7 @@
           <p:cNvPr id="10" name="">
             <a:extLst xmlns:a="http://schemas.openxmlformats.org/drawingml/2006/main">
               <a:ext uri="{FF2B5EF4-FFF2-40B4-BE49-F238E27FC236}">
-                <a16:creationId xmlns:a16="http://schemas.microsoft.com/office/drawing/2014/main" id="{2DACD7C1-90CC-4F3A-9AA3-2CACBEBA9525}"/>
+                <a16:creationId xmlns:a16="http://schemas.microsoft.com/office/drawing/2014/main" id="{B53BF934-885F-4AED-8900-44069AF9FB11}"/>
               </a:ext>
             </a:extLst>
           </p:cNvPr>
@@ -2590,7 +2723,7 @@
           <p:cNvPr id="11" name="">
             <a:extLst xmlns:a="http://schemas.openxmlformats.org/drawingml/2006/main">
               <a:ext uri="{FF2B5EF4-FFF2-40B4-BE49-F238E27FC236}">
-                <a16:creationId xmlns:a16="http://schemas.microsoft.com/office/drawing/2014/main" id="{BCD91570-F092-46D2-89F3-7B7467FF9511}"/>
+                <a16:creationId xmlns:a16="http://schemas.microsoft.com/office/drawing/2014/main" id="{DF1A639E-DB5F-455F-83EE-E9BDD3C4F1DA}"/>
               </a:ext>
             </a:extLst>
           </p:cNvPr>
@@ -2621,7 +2754,7 @@
           <p:cNvPr id="12" name="">
             <a:extLst xmlns:a="http://schemas.openxmlformats.org/drawingml/2006/main">
               <a:ext uri="{FF2B5EF4-FFF2-40B4-BE49-F238E27FC236}">
-                <a16:creationId xmlns:a16="http://schemas.microsoft.com/office/drawing/2014/main" id="{A2D37E12-C4C8-4945-822A-6FFFB5B029A6}"/>
+                <a16:creationId xmlns:a16="http://schemas.microsoft.com/office/drawing/2014/main" id="{9BECC34F-A7C5-4C30-859D-3503B87029D6}"/>
               </a:ext>
             </a:extLst>
           </p:cNvPr>
@@ -2671,7 +2804,7 @@
           <p:cNvPr id="13" name="">
             <a:extLst xmlns:a="http://schemas.openxmlformats.org/drawingml/2006/main">
               <a:ext uri="{FF2B5EF4-FFF2-40B4-BE49-F238E27FC236}">
-                <a16:creationId xmlns:a16="http://schemas.microsoft.com/office/drawing/2014/main" id="{0CC82BBF-444D-4AE7-A3FE-C34653F8192C}"/>
+                <a16:creationId xmlns:a16="http://schemas.microsoft.com/office/drawing/2014/main" id="{3D1A74D5-7AD7-49CC-93D2-49A56493B92C}"/>
               </a:ext>
             </a:extLst>
           </p:cNvPr>
@@ -2721,7 +2854,7 @@
           <p:cNvPr id="14" name="">
             <a:extLst xmlns:a="http://schemas.openxmlformats.org/drawingml/2006/main">
               <a:ext uri="{FF2B5EF4-FFF2-40B4-BE49-F238E27FC236}">
-                <a16:creationId xmlns:a16="http://schemas.microsoft.com/office/drawing/2014/main" id="{778F8B10-FA64-4758-AE77-ED59AD42FB23}"/>
+                <a16:creationId xmlns:a16="http://schemas.microsoft.com/office/drawing/2014/main" id="{84B70247-D6D1-4B4F-9738-977E596E42AF}"/>
               </a:ext>
             </a:extLst>
           </p:cNvPr>
@@ -2752,7 +2885,7 @@
           <p:cNvPr id="15" name="">
             <a:extLst xmlns:a="http://schemas.openxmlformats.org/drawingml/2006/main">
               <a:ext uri="{FF2B5EF4-FFF2-40B4-BE49-F238E27FC236}">
-                <a16:creationId xmlns:a16="http://schemas.microsoft.com/office/drawing/2014/main" id="{E6095C1B-0D82-4BBB-A64E-FE09B5866606}"/>
+                <a16:creationId xmlns:a16="http://schemas.microsoft.com/office/drawing/2014/main" id="{C8780495-FC39-4F9C-8AA7-235F49673215}"/>
               </a:ext>
             </a:extLst>
           </p:cNvPr>
@@ -2802,7 +2935,7 @@
           <p:cNvPr id="16" name="">
             <a:extLst xmlns:a="http://schemas.openxmlformats.org/drawingml/2006/main">
               <a:ext uri="{FF2B5EF4-FFF2-40B4-BE49-F238E27FC236}">
-                <a16:creationId xmlns:a16="http://schemas.microsoft.com/office/drawing/2014/main" id="{09BE3299-56D1-453C-BBA5-B8B70CCE6AF8}"/>
+                <a16:creationId xmlns:a16="http://schemas.microsoft.com/office/drawing/2014/main" id="{C2C38120-3C52-4F9E-8533-63DB73489C8F}"/>
               </a:ext>
             </a:extLst>
           </p:cNvPr>
@@ -2852,7 +2985,7 @@
           <p:cNvPr id="17" name="">
             <a:extLst xmlns:a="http://schemas.openxmlformats.org/drawingml/2006/main">
               <a:ext uri="{FF2B5EF4-FFF2-40B4-BE49-F238E27FC236}">
-                <a16:creationId xmlns:a16="http://schemas.microsoft.com/office/drawing/2014/main" id="{BDE982CD-1A36-4567-94D9-CB891E0D0772}"/>
+                <a16:creationId xmlns:a16="http://schemas.microsoft.com/office/drawing/2014/main" id="{039CDFBF-5C9C-4DFC-BA0F-46F8400F06E6}"/>
               </a:ext>
             </a:extLst>
           </p:cNvPr>
@@ -2883,7 +3016,7 @@
           <p:cNvPr id="18" name="">
             <a:extLst xmlns:a="http://schemas.openxmlformats.org/drawingml/2006/main">
               <a:ext uri="{FF2B5EF4-FFF2-40B4-BE49-F238E27FC236}">
-                <a16:creationId xmlns:a16="http://schemas.microsoft.com/office/drawing/2014/main" id="{34339D3D-DC79-4F87-9E74-5C637DF7A271}"/>
+                <a16:creationId xmlns:a16="http://schemas.microsoft.com/office/drawing/2014/main" id="{49A99218-C2B0-47F4-B496-47E88CDB72CB}"/>
               </a:ext>
             </a:extLst>
           </p:cNvPr>
@@ -2933,7 +3066,7 @@
           <p:cNvPr id="19" name="">
             <a:extLst xmlns:a="http://schemas.openxmlformats.org/drawingml/2006/main">
               <a:ext uri="{FF2B5EF4-FFF2-40B4-BE49-F238E27FC236}">
-                <a16:creationId xmlns:a16="http://schemas.microsoft.com/office/drawing/2014/main" id="{BEC3D4F1-9C31-41A9-8663-7F03C4DDA4B7}"/>
+                <a16:creationId xmlns:a16="http://schemas.microsoft.com/office/drawing/2014/main" id="{CE004AE1-73E4-485A-AC6F-BE310AE25324}"/>
               </a:ext>
             </a:extLst>
           </p:cNvPr>
@@ -2981,7 +3114,7 @@
     </p:spTree>
     <p:extLst>
       <p:ext uri="{BB962C8B-B14F-4D97-AF65-F5344CB8AC3E}">
-        <p14:creationId xmlns:p14="http://schemas.microsoft.com/office/powerpoint/2010/main" val="430439994"/>
+        <p14:creationId xmlns:p14="http://schemas.microsoft.com/office/powerpoint/2010/main" val="1426720485"/>
       </p:ext>
     </p:extLst>
   </p:cSld>
@@ -3012,7 +3145,7 @@
           <p:cNvPr id="1" name="">
             <a:extLst xmlns:a="http://schemas.openxmlformats.org/drawingml/2006/main">
               <a:ext uri="{FF2B5EF4-FFF2-40B4-BE49-F238E27FC236}">
-                <a16:creationId xmlns:a16="http://schemas.microsoft.com/office/drawing/2014/main" id="{ADA9C31D-970B-4A40-A24B-C0AC786BF63F}"/>
+                <a16:creationId xmlns:a16="http://schemas.microsoft.com/office/drawing/2014/main" id="{1062FE69-11FB-46BB-95F9-5BF8520D73E2}"/>
               </a:ext>
             </a:extLst>
           </p:cNvPr>
@@ -3047,7 +3180,7 @@
           <p:nvPr/>
         </p:nvPicPr>
         <p:blipFill>
-          <a:blip xmlns:r="http://schemas.openxmlformats.org/officeDocument/2006/relationships" xmlns:a="http://schemas.openxmlformats.org/drawingml/2006/main" r:embed="Rd4364582ad124478"/>
+          <a:blip xmlns:r="http://schemas.openxmlformats.org/officeDocument/2006/relationships" xmlns:a="http://schemas.openxmlformats.org/drawingml/2006/main" r:embed="R0669ac406e4b47e8"/>
           <a:stretch xmlns:a="http://schemas.openxmlformats.org/drawingml/2006/main"/>
         </p:blipFill>
         <p:spPr>
@@ -3065,7 +3198,7 @@
           <p:cNvPr id="3" name="">
             <a:extLst xmlns:a="http://schemas.openxmlformats.org/drawingml/2006/main">
               <a:ext uri="{FF2B5EF4-FFF2-40B4-BE49-F238E27FC236}">
-                <a16:creationId xmlns:a16="http://schemas.microsoft.com/office/drawing/2014/main" id="{D0BFA161-A7E6-4B38-BED3-50517296D4FD}"/>
+                <a16:creationId xmlns:a16="http://schemas.microsoft.com/office/drawing/2014/main" id="{BC635638-6831-4DF1-BB99-A1FA1B11FECF}"/>
               </a:ext>
             </a:extLst>
           </p:cNvPr>
@@ -3115,7 +3248,7 @@
           <p:cNvPr id="4" name="">
             <a:extLst xmlns:a="http://schemas.openxmlformats.org/drawingml/2006/main">
               <a:ext uri="{FF2B5EF4-FFF2-40B4-BE49-F238E27FC236}">
-                <a16:creationId xmlns:a16="http://schemas.microsoft.com/office/drawing/2014/main" id="{0185BDF5-13F6-4FDF-BF9F-1FC7ACE8E217}"/>
+                <a16:creationId xmlns:a16="http://schemas.microsoft.com/office/drawing/2014/main" id="{C218C487-192A-4A08-992B-098E03A9ACEC}"/>
               </a:ext>
             </a:extLst>
           </p:cNvPr>
@@ -3148,7 +3281,7 @@
           <p:cNvPr id="5" name="">
             <a:extLst xmlns:a="http://schemas.openxmlformats.org/drawingml/2006/main">
               <a:ext uri="{FF2B5EF4-FFF2-40B4-BE49-F238E27FC236}">
-                <a16:creationId xmlns:a16="http://schemas.microsoft.com/office/drawing/2014/main" id="{0BAEAADB-8810-4DE1-8766-8666650F0D24}"/>
+                <a16:creationId xmlns:a16="http://schemas.microsoft.com/office/drawing/2014/main" id="{71E6C933-B606-49A6-8729-1F414A53F8FB}"/>
               </a:ext>
             </a:extLst>
           </p:cNvPr>
@@ -3179,7 +3312,7 @@
           <p:cNvPr id="6" name="">
             <a:extLst xmlns:a="http://schemas.openxmlformats.org/drawingml/2006/main">
               <a:ext uri="{FF2B5EF4-FFF2-40B4-BE49-F238E27FC236}">
-                <a16:creationId xmlns:a16="http://schemas.microsoft.com/office/drawing/2014/main" id="{F46CF620-0A32-449D-804A-CB89178C5367}"/>
+                <a16:creationId xmlns:a16="http://schemas.microsoft.com/office/drawing/2014/main" id="{5C0A84F0-CBCC-4EAD-9DD6-C2664C190E45}"/>
               </a:ext>
             </a:extLst>
           </p:cNvPr>
@@ -3229,7 +3362,7 @@
           <p:cNvPr id="7" name="">
             <a:extLst xmlns:a="http://schemas.openxmlformats.org/drawingml/2006/main">
               <a:ext uri="{FF2B5EF4-FFF2-40B4-BE49-F238E27FC236}">
-                <a16:creationId xmlns:a16="http://schemas.microsoft.com/office/drawing/2014/main" id="{04F907D2-DC70-4952-BCFE-A779F41623CA}"/>
+                <a16:creationId xmlns:a16="http://schemas.microsoft.com/office/drawing/2014/main" id="{623148CC-C0A7-4F90-9E72-0BCECA849F2D}"/>
               </a:ext>
             </a:extLst>
           </p:cNvPr>
@@ -3279,7 +3412,7 @@
           <p:cNvPr id="8" name="">
             <a:extLst xmlns:a="http://schemas.openxmlformats.org/drawingml/2006/main">
               <a:ext uri="{FF2B5EF4-FFF2-40B4-BE49-F238E27FC236}">
-                <a16:creationId xmlns:a16="http://schemas.microsoft.com/office/drawing/2014/main" id="{A44177CA-605F-490A-AB0E-8CF324DD816F}"/>
+                <a16:creationId xmlns:a16="http://schemas.microsoft.com/office/drawing/2014/main" id="{7509A88E-E32A-4EB5-A535-9B416F8064EE}"/>
               </a:ext>
             </a:extLst>
           </p:cNvPr>
@@ -3314,7 +3447,7 @@
           <p:cNvPr id="9" name="">
             <a:extLst xmlns:a="http://schemas.openxmlformats.org/drawingml/2006/main">
               <a:ext uri="{FF2B5EF4-FFF2-40B4-BE49-F238E27FC236}">
-                <a16:creationId xmlns:a16="http://schemas.microsoft.com/office/drawing/2014/main" id="{409F7989-1771-4CE1-8DC2-CA39B13EE609}"/>
+                <a16:creationId xmlns:a16="http://schemas.microsoft.com/office/drawing/2014/main" id="{24D4E6EB-D0BF-47A1-A639-A1B2A8E171C6}"/>
               </a:ext>
             </a:extLst>
           </p:cNvPr>
@@ -3364,7 +3497,7 @@
           <p:cNvPr id="10" name="">
             <a:extLst xmlns:a="http://schemas.openxmlformats.org/drawingml/2006/main">
               <a:ext uri="{FF2B5EF4-FFF2-40B4-BE49-F238E27FC236}">
-                <a16:creationId xmlns:a16="http://schemas.microsoft.com/office/drawing/2014/main" id="{FC278B11-48AF-484D-B801-DB2F8958AF1F}"/>
+                <a16:creationId xmlns:a16="http://schemas.microsoft.com/office/drawing/2014/main" id="{ABE06EBC-FA7E-4249-A7E4-A01F2A3C3216}"/>
               </a:ext>
             </a:extLst>
           </p:cNvPr>
@@ -3414,7 +3547,7 @@
           <p:cNvPr id="11" name="">
             <a:extLst xmlns:a="http://schemas.openxmlformats.org/drawingml/2006/main">
               <a:ext uri="{FF2B5EF4-FFF2-40B4-BE49-F238E27FC236}">
-                <a16:creationId xmlns:a16="http://schemas.microsoft.com/office/drawing/2014/main" id="{A9C6E0E3-505E-4F9D-8D82-91843869E3BE}"/>
+                <a16:creationId xmlns:a16="http://schemas.microsoft.com/office/drawing/2014/main" id="{5DF5A8AD-9E22-405F-973D-AB6C86969884}"/>
               </a:ext>
             </a:extLst>
           </p:cNvPr>
@@ -3449,7 +3582,7 @@
           <p:cNvPr id="12" name="">
             <a:extLst xmlns:a="http://schemas.openxmlformats.org/drawingml/2006/main">
               <a:ext uri="{FF2B5EF4-FFF2-40B4-BE49-F238E27FC236}">
-                <a16:creationId xmlns:a16="http://schemas.microsoft.com/office/drawing/2014/main" id="{5FD99446-80FF-4266-B53E-A716E1B823A1}"/>
+                <a16:creationId xmlns:a16="http://schemas.microsoft.com/office/drawing/2014/main" id="{23740950-F759-4C5B-9DC5-4043EDEE87DB}"/>
               </a:ext>
             </a:extLst>
           </p:cNvPr>
@@ -3499,7 +3632,7 @@
           <p:cNvPr id="13" name="">
             <a:extLst xmlns:a="http://schemas.openxmlformats.org/drawingml/2006/main">
               <a:ext uri="{FF2B5EF4-FFF2-40B4-BE49-F238E27FC236}">
-                <a16:creationId xmlns:a16="http://schemas.microsoft.com/office/drawing/2014/main" id="{9935E125-7F65-4F71-9F50-EA271765F3D9}"/>
+                <a16:creationId xmlns:a16="http://schemas.microsoft.com/office/drawing/2014/main" id="{2E2B818F-4A53-4D12-85B3-8EED1BB118EF}"/>
               </a:ext>
             </a:extLst>
           </p:cNvPr>
@@ -3549,7 +3682,7 @@
           <p:cNvPr id="14" name="">
             <a:extLst xmlns:a="http://schemas.openxmlformats.org/drawingml/2006/main">
               <a:ext uri="{FF2B5EF4-FFF2-40B4-BE49-F238E27FC236}">
-                <a16:creationId xmlns:a16="http://schemas.microsoft.com/office/drawing/2014/main" id="{9BE3E004-CA84-4F45-9DBE-BC79C5C47F3B}"/>
+                <a16:creationId xmlns:a16="http://schemas.microsoft.com/office/drawing/2014/main" id="{89B1FE2E-C544-4BD1-8F3B-9C9F211C6C48}"/>
               </a:ext>
             </a:extLst>
           </p:cNvPr>
@@ -3584,7 +3717,7 @@
           <p:cNvPr id="15" name="">
             <a:extLst xmlns:a="http://schemas.openxmlformats.org/drawingml/2006/main">
               <a:ext uri="{FF2B5EF4-FFF2-40B4-BE49-F238E27FC236}">
-                <a16:creationId xmlns:a16="http://schemas.microsoft.com/office/drawing/2014/main" id="{93F474D1-9756-4F7D-A9A4-524ADC2FB08D}"/>
+                <a16:creationId xmlns:a16="http://schemas.microsoft.com/office/drawing/2014/main" id="{91ECFFAD-212B-4061-87DC-2BD1839E3238}"/>
               </a:ext>
             </a:extLst>
           </p:cNvPr>
@@ -3634,7 +3767,7 @@
           <p:cNvPr id="16" name="">
             <a:extLst xmlns:a="http://schemas.openxmlformats.org/drawingml/2006/main">
               <a:ext uri="{FF2B5EF4-FFF2-40B4-BE49-F238E27FC236}">
-                <a16:creationId xmlns:a16="http://schemas.microsoft.com/office/drawing/2014/main" id="{CAAE1E3B-6673-4411-897C-9B865E374B7E}"/>
+                <a16:creationId xmlns:a16="http://schemas.microsoft.com/office/drawing/2014/main" id="{F2DC019A-7D97-4655-B75D-C24F592C4F15}"/>
               </a:ext>
             </a:extLst>
           </p:cNvPr>
@@ -3684,7 +3817,7 @@
           <p:cNvPr id="17" name="">
             <a:extLst xmlns:a="http://schemas.openxmlformats.org/drawingml/2006/main">
               <a:ext uri="{FF2B5EF4-FFF2-40B4-BE49-F238E27FC236}">
-                <a16:creationId xmlns:a16="http://schemas.microsoft.com/office/drawing/2014/main" id="{E249E1BD-0C86-423D-9CAC-F474B5262E0E}"/>
+                <a16:creationId xmlns:a16="http://schemas.microsoft.com/office/drawing/2014/main" id="{5509163A-7F70-48E0-AA45-8A5E2F879B8C}"/>
               </a:ext>
             </a:extLst>
           </p:cNvPr>
@@ -3719,7 +3852,7 @@
           <p:cNvPr id="18" name="">
             <a:extLst xmlns:a="http://schemas.openxmlformats.org/drawingml/2006/main">
               <a:ext uri="{FF2B5EF4-FFF2-40B4-BE49-F238E27FC236}">
-                <a16:creationId xmlns:a16="http://schemas.microsoft.com/office/drawing/2014/main" id="{B67A4468-2A9E-42DF-8BB5-8EBFEA25E400}"/>
+                <a16:creationId xmlns:a16="http://schemas.microsoft.com/office/drawing/2014/main" id="{441C8D9D-68F2-42D0-B11C-5A87911481F3}"/>
               </a:ext>
             </a:extLst>
           </p:cNvPr>
@@ -3769,7 +3902,7 @@
           <p:cNvPr id="19" name="">
             <a:extLst xmlns:a="http://schemas.openxmlformats.org/drawingml/2006/main">
               <a:ext uri="{FF2B5EF4-FFF2-40B4-BE49-F238E27FC236}">
-                <a16:creationId xmlns:a16="http://schemas.microsoft.com/office/drawing/2014/main" id="{40509FDF-C0DF-4174-93D8-6B4DBF082DB0}"/>
+                <a16:creationId xmlns:a16="http://schemas.microsoft.com/office/drawing/2014/main" id="{90ED9B56-E5DB-4238-835C-EA0400B1C6EA}"/>
               </a:ext>
             </a:extLst>
           </p:cNvPr>
@@ -3819,7 +3952,7 @@
           <p:cNvPr id="20" name="">
             <a:extLst xmlns:a="http://schemas.openxmlformats.org/drawingml/2006/main">
               <a:ext uri="{FF2B5EF4-FFF2-40B4-BE49-F238E27FC236}">
-                <a16:creationId xmlns:a16="http://schemas.microsoft.com/office/drawing/2014/main" id="{28399432-D55C-4BD6-B3EF-CFC65252A7AF}"/>
+                <a16:creationId xmlns:a16="http://schemas.microsoft.com/office/drawing/2014/main" id="{D9EAFEC3-69E4-4008-90A9-F1FB8D8CC9C1}"/>
               </a:ext>
             </a:extLst>
           </p:cNvPr>
@@ -3869,7 +4002,7 @@
           <p:cNvPr id="21" name="">
             <a:extLst xmlns:a="http://schemas.openxmlformats.org/drawingml/2006/main">
               <a:ext uri="{FF2B5EF4-FFF2-40B4-BE49-F238E27FC236}">
-                <a16:creationId xmlns:a16="http://schemas.microsoft.com/office/drawing/2014/main" id="{20A518A5-E1D3-42B7-959F-5C75A083145C}"/>
+                <a16:creationId xmlns:a16="http://schemas.microsoft.com/office/drawing/2014/main" id="{88369B4E-EEAB-4507-BB1B-16EC03B73C7B}"/>
               </a:ext>
             </a:extLst>
           </p:cNvPr>
@@ -3919,7 +4052,7 @@
           <p:cNvPr id="22" name="">
             <a:extLst xmlns:a="http://schemas.openxmlformats.org/drawingml/2006/main">
               <a:ext uri="{FF2B5EF4-FFF2-40B4-BE49-F238E27FC236}">
-                <a16:creationId xmlns:a16="http://schemas.microsoft.com/office/drawing/2014/main" id="{50AFFD54-310E-4516-8347-67028B43A57E}"/>
+                <a16:creationId xmlns:a16="http://schemas.microsoft.com/office/drawing/2014/main" id="{769C72F9-650A-44C5-9A4F-FF0622329B2C}"/>
               </a:ext>
             </a:extLst>
           </p:cNvPr>
@@ -3969,7 +4102,7 @@
           <p:cNvPr id="23" name="">
             <a:extLst xmlns:a="http://schemas.openxmlformats.org/drawingml/2006/main">
               <a:ext uri="{FF2B5EF4-FFF2-40B4-BE49-F238E27FC236}">
-                <a16:creationId xmlns:a16="http://schemas.microsoft.com/office/drawing/2014/main" id="{32D7B6E6-33E3-4C68-AB82-474CA450A43E}"/>
+                <a16:creationId xmlns:a16="http://schemas.microsoft.com/office/drawing/2014/main" id="{7A57BE6C-B20C-4BE2-9FE0-E6B3D1B7A5E3}"/>
               </a:ext>
             </a:extLst>
           </p:cNvPr>
@@ -4017,7 +4150,7 @@
     </p:spTree>
     <p:extLst>
       <p:ext uri="{BB962C8B-B14F-4D97-AF65-F5344CB8AC3E}">
-        <p14:creationId xmlns:p14="http://schemas.microsoft.com/office/powerpoint/2010/main" val="2109899504"/>
+        <p14:creationId xmlns:p14="http://schemas.microsoft.com/office/powerpoint/2010/main" val="1897248929"/>
       </p:ext>
     </p:extLst>
   </p:cSld>
@@ -4048,7 +4181,7 @@
           <p:cNvPr id="1" name="">
             <a:extLst xmlns:a="http://schemas.openxmlformats.org/drawingml/2006/main">
               <a:ext uri="{FF2B5EF4-FFF2-40B4-BE49-F238E27FC236}">
-                <a16:creationId xmlns:a16="http://schemas.microsoft.com/office/drawing/2014/main" id="{8108E668-A296-45CA-B55F-ADDF92553F11}"/>
+                <a16:creationId xmlns:a16="http://schemas.microsoft.com/office/drawing/2014/main" id="{96277B7B-8AA1-4934-99EF-9B23B9B64478}"/>
               </a:ext>
             </a:extLst>
           </p:cNvPr>
@@ -4083,7 +4216,7 @@
           <p:nvPr/>
         </p:nvPicPr>
         <p:blipFill>
-          <a:blip xmlns:r="http://schemas.openxmlformats.org/officeDocument/2006/relationships" xmlns:a="http://schemas.openxmlformats.org/drawingml/2006/main" r:embed="R90f4e62940d64d37"/>
+          <a:blip xmlns:r="http://schemas.openxmlformats.org/officeDocument/2006/relationships" xmlns:a="http://schemas.openxmlformats.org/drawingml/2006/main" r:embed="Re8b940f96f7e4d6e"/>
           <a:stretch xmlns:a="http://schemas.openxmlformats.org/drawingml/2006/main"/>
         </p:blipFill>
         <p:spPr>
@@ -4101,7 +4234,7 @@
           <p:cNvPr id="3" name="">
             <a:extLst xmlns:a="http://schemas.openxmlformats.org/drawingml/2006/main">
               <a:ext uri="{FF2B5EF4-FFF2-40B4-BE49-F238E27FC236}">
-                <a16:creationId xmlns:a16="http://schemas.microsoft.com/office/drawing/2014/main" id="{EDB24E99-C83F-4A77-BB84-CD1BBFBA2997}"/>
+                <a16:creationId xmlns:a16="http://schemas.microsoft.com/office/drawing/2014/main" id="{1B250F2A-D978-4ACB-B6C4-6BC2C79FFFDE}"/>
               </a:ext>
             </a:extLst>
           </p:cNvPr>
@@ -4151,7 +4284,7 @@
           <p:cNvPr id="4" name="">
             <a:extLst xmlns:a="http://schemas.openxmlformats.org/drawingml/2006/main">
               <a:ext uri="{FF2B5EF4-FFF2-40B4-BE49-F238E27FC236}">
-                <a16:creationId xmlns:a16="http://schemas.microsoft.com/office/drawing/2014/main" id="{DA40DEE7-5E63-4326-85C3-12350056BBA5}"/>
+                <a16:creationId xmlns:a16="http://schemas.microsoft.com/office/drawing/2014/main" id="{7B614BA7-C553-4F56-B335-C0E488E9D897}"/>
               </a:ext>
             </a:extLst>
           </p:cNvPr>
@@ -4184,7 +4317,7 @@
           <p:cNvPr id="5" name="">
             <a:extLst xmlns:a="http://schemas.openxmlformats.org/drawingml/2006/main">
               <a:ext uri="{FF2B5EF4-FFF2-40B4-BE49-F238E27FC236}">
-                <a16:creationId xmlns:a16="http://schemas.microsoft.com/office/drawing/2014/main" id="{7BACE4A3-9F4D-4AE0-BEBE-021DF73EA473}"/>
+                <a16:creationId xmlns:a16="http://schemas.microsoft.com/office/drawing/2014/main" id="{4ABD742A-ED69-48DF-87C6-634CBC3D7085}"/>
               </a:ext>
             </a:extLst>
           </p:cNvPr>
@@ -4215,7 +4348,7 @@
           <p:cNvPr id="6" name="">
             <a:extLst xmlns:a="http://schemas.openxmlformats.org/drawingml/2006/main">
               <a:ext uri="{FF2B5EF4-FFF2-40B4-BE49-F238E27FC236}">
-                <a16:creationId xmlns:a16="http://schemas.microsoft.com/office/drawing/2014/main" id="{ED511EE1-4DEE-4212-A9AF-3C315E448A10}"/>
+                <a16:creationId xmlns:a16="http://schemas.microsoft.com/office/drawing/2014/main" id="{A0FF6EF0-FBF4-4FEE-948A-FA54B4E1A1DB}"/>
               </a:ext>
             </a:extLst>
           </p:cNvPr>
@@ -4265,7 +4398,7 @@
           <p:cNvPr id="7" name="">
             <a:extLst xmlns:a="http://schemas.openxmlformats.org/drawingml/2006/main">
               <a:ext uri="{FF2B5EF4-FFF2-40B4-BE49-F238E27FC236}">
-                <a16:creationId xmlns:a16="http://schemas.microsoft.com/office/drawing/2014/main" id="{ABBF014E-19AE-4A21-A6DC-BFF2C4323910}"/>
+                <a16:creationId xmlns:a16="http://schemas.microsoft.com/office/drawing/2014/main" id="{64443FC9-6AF5-462A-8120-F6586471FF55}"/>
               </a:ext>
             </a:extLst>
           </p:cNvPr>
@@ -4315,7 +4448,7 @@
           <p:cNvPr id="8" name="">
             <a:extLst xmlns:a="http://schemas.openxmlformats.org/drawingml/2006/main">
               <a:ext uri="{FF2B5EF4-FFF2-40B4-BE49-F238E27FC236}">
-                <a16:creationId xmlns:a16="http://schemas.microsoft.com/office/drawing/2014/main" id="{8E116302-B2D6-41B8-B17B-C37F5CA72704}"/>
+                <a16:creationId xmlns:a16="http://schemas.microsoft.com/office/drawing/2014/main" id="{770D5FD0-7B7D-43E1-A879-678EE3F3A5DF}"/>
               </a:ext>
             </a:extLst>
           </p:cNvPr>
@@ -4348,7 +4481,7 @@
           <p:cNvPr id="9" name="">
             <a:extLst xmlns:a="http://schemas.openxmlformats.org/drawingml/2006/main">
               <a:ext uri="{FF2B5EF4-FFF2-40B4-BE49-F238E27FC236}">
-                <a16:creationId xmlns:a16="http://schemas.microsoft.com/office/drawing/2014/main" id="{0DDA1895-FEBA-4BA0-96B5-99F6EA89274A}"/>
+                <a16:creationId xmlns:a16="http://schemas.microsoft.com/office/drawing/2014/main" id="{8F74D888-2CD4-48DD-8826-A842BB1A7A32}"/>
               </a:ext>
             </a:extLst>
           </p:cNvPr>
@@ -4398,7 +4531,7 @@
           <p:cNvPr id="10" name="">
             <a:extLst xmlns:a="http://schemas.openxmlformats.org/drawingml/2006/main">
               <a:ext uri="{FF2B5EF4-FFF2-40B4-BE49-F238E27FC236}">
-                <a16:creationId xmlns:a16="http://schemas.microsoft.com/office/drawing/2014/main" id="{9FE91989-3347-40FA-969F-138B4536B4F6}"/>
+                <a16:creationId xmlns:a16="http://schemas.microsoft.com/office/drawing/2014/main" id="{313C807F-F2D9-409C-B0AC-0DF3C4C125DF}"/>
               </a:ext>
             </a:extLst>
           </p:cNvPr>
@@ -4448,7 +4581,7 @@
           <p:cNvPr id="11" name="">
             <a:extLst xmlns:a="http://schemas.openxmlformats.org/drawingml/2006/main">
               <a:ext uri="{FF2B5EF4-FFF2-40B4-BE49-F238E27FC236}">
-                <a16:creationId xmlns:a16="http://schemas.microsoft.com/office/drawing/2014/main" id="{8D30F24E-8EAB-4DA0-84A4-9ADF5FFC3626}"/>
+                <a16:creationId xmlns:a16="http://schemas.microsoft.com/office/drawing/2014/main" id="{9DD27C29-82DB-4529-B434-65360AFFCBF7}"/>
               </a:ext>
             </a:extLst>
           </p:cNvPr>
@@ -4498,7 +4631,7 @@
           <p:cNvPr id="12" name="">
             <a:extLst xmlns:a="http://schemas.openxmlformats.org/drawingml/2006/main">
               <a:ext uri="{FF2B5EF4-FFF2-40B4-BE49-F238E27FC236}">
-                <a16:creationId xmlns:a16="http://schemas.microsoft.com/office/drawing/2014/main" id="{FB18B6FB-496B-4DB7-B1C5-898D8188221A}"/>
+                <a16:creationId xmlns:a16="http://schemas.microsoft.com/office/drawing/2014/main" id="{BF569D34-6566-4A6A-B676-45D14F7380B1}"/>
               </a:ext>
             </a:extLst>
           </p:cNvPr>
@@ -4529,7 +4662,7 @@
           <p:cNvPr id="13" name="">
             <a:extLst xmlns:a="http://schemas.openxmlformats.org/drawingml/2006/main">
               <a:ext uri="{FF2B5EF4-FFF2-40B4-BE49-F238E27FC236}">
-                <a16:creationId xmlns:a16="http://schemas.microsoft.com/office/drawing/2014/main" id="{EB4B28A9-4D14-43E2-BD1E-B1B5DBB32EE5}"/>
+                <a16:creationId xmlns:a16="http://schemas.microsoft.com/office/drawing/2014/main" id="{B2BDFC0D-9C85-47D5-9853-CD99236DABFA}"/>
               </a:ext>
             </a:extLst>
           </p:cNvPr>
@@ -4562,7 +4695,7 @@
           <p:cNvPr id="14" name="">
             <a:extLst xmlns:a="http://schemas.openxmlformats.org/drawingml/2006/main">
               <a:ext uri="{FF2B5EF4-FFF2-40B4-BE49-F238E27FC236}">
-                <a16:creationId xmlns:a16="http://schemas.microsoft.com/office/drawing/2014/main" id="{B01AE8B9-05D7-4DAB-9477-4BAD519DE88A}"/>
+                <a16:creationId xmlns:a16="http://schemas.microsoft.com/office/drawing/2014/main" id="{26C74461-CCEB-4A9E-8336-A70703D1FD79}"/>
               </a:ext>
             </a:extLst>
           </p:cNvPr>
@@ -4612,7 +4745,7 @@
           <p:cNvPr id="15" name="">
             <a:extLst xmlns:a="http://schemas.openxmlformats.org/drawingml/2006/main">
               <a:ext uri="{FF2B5EF4-FFF2-40B4-BE49-F238E27FC236}">
-                <a16:creationId xmlns:a16="http://schemas.microsoft.com/office/drawing/2014/main" id="{0AA470D0-74FE-4A50-921D-7E17EC3FDFCC}"/>
+                <a16:creationId xmlns:a16="http://schemas.microsoft.com/office/drawing/2014/main" id="{B8A1A0F7-A107-4F73-91DF-D0E5B5B57595}"/>
               </a:ext>
             </a:extLst>
           </p:cNvPr>
@@ -4662,7 +4795,7 @@
           <p:cNvPr id="16" name="">
             <a:extLst xmlns:a="http://schemas.openxmlformats.org/drawingml/2006/main">
               <a:ext uri="{FF2B5EF4-FFF2-40B4-BE49-F238E27FC236}">
-                <a16:creationId xmlns:a16="http://schemas.microsoft.com/office/drawing/2014/main" id="{62A0765C-31F7-4708-B814-42AEF3C97AF9}"/>
+                <a16:creationId xmlns:a16="http://schemas.microsoft.com/office/drawing/2014/main" id="{1B0A375E-0F5B-4F9F-AA8B-A8ACFFEAFA6F}"/>
               </a:ext>
             </a:extLst>
           </p:cNvPr>
@@ -4712,7 +4845,7 @@
           <p:cNvPr id="17" name="">
             <a:extLst xmlns:a="http://schemas.openxmlformats.org/drawingml/2006/main">
               <a:ext uri="{FF2B5EF4-FFF2-40B4-BE49-F238E27FC236}">
-                <a16:creationId xmlns:a16="http://schemas.microsoft.com/office/drawing/2014/main" id="{D44AB9DC-972C-407E-98F0-5E24C1173007}"/>
+                <a16:creationId xmlns:a16="http://schemas.microsoft.com/office/drawing/2014/main" id="{8D753C45-88AE-41F7-9393-B6B3FF2D602B}"/>
               </a:ext>
             </a:extLst>
           </p:cNvPr>
@@ -4743,7 +4876,7 @@
           <p:cNvPr id="18" name="">
             <a:extLst xmlns:a="http://schemas.openxmlformats.org/drawingml/2006/main">
               <a:ext uri="{FF2B5EF4-FFF2-40B4-BE49-F238E27FC236}">
-                <a16:creationId xmlns:a16="http://schemas.microsoft.com/office/drawing/2014/main" id="{3D391A7C-963E-488C-8709-788285749ABA}"/>
+                <a16:creationId xmlns:a16="http://schemas.microsoft.com/office/drawing/2014/main" id="{16B9914D-157F-40F8-BBB4-2C484537ECAC}"/>
               </a:ext>
             </a:extLst>
           </p:cNvPr>
@@ -4776,7 +4909,7 @@
           <p:cNvPr id="19" name="">
             <a:extLst xmlns:a="http://schemas.openxmlformats.org/drawingml/2006/main">
               <a:ext uri="{FF2B5EF4-FFF2-40B4-BE49-F238E27FC236}">
-                <a16:creationId xmlns:a16="http://schemas.microsoft.com/office/drawing/2014/main" id="{38ACFFA4-E6F9-4166-A5CF-FEAF04E5D166}"/>
+                <a16:creationId xmlns:a16="http://schemas.microsoft.com/office/drawing/2014/main" id="{ECA98348-50C4-4C1B-A210-99D6786523F4}"/>
               </a:ext>
             </a:extLst>
           </p:cNvPr>
@@ -4826,7 +4959,7 @@
           <p:cNvPr id="20" name="">
             <a:extLst xmlns:a="http://schemas.openxmlformats.org/drawingml/2006/main">
               <a:ext uri="{FF2B5EF4-FFF2-40B4-BE49-F238E27FC236}">
-                <a16:creationId xmlns:a16="http://schemas.microsoft.com/office/drawing/2014/main" id="{BA1ACB09-884B-4168-B54A-500C74ABF301}"/>
+                <a16:creationId xmlns:a16="http://schemas.microsoft.com/office/drawing/2014/main" id="{6DD72AEC-D117-4C1B-905D-064D744F1822}"/>
               </a:ext>
             </a:extLst>
           </p:cNvPr>
@@ -4876,7 +5009,7 @@
           <p:cNvPr id="21" name="">
             <a:extLst xmlns:a="http://schemas.openxmlformats.org/drawingml/2006/main">
               <a:ext uri="{FF2B5EF4-FFF2-40B4-BE49-F238E27FC236}">
-                <a16:creationId xmlns:a16="http://schemas.microsoft.com/office/drawing/2014/main" id="{56CC67E0-A49C-4269-8E6F-F0F471E71E95}"/>
+                <a16:creationId xmlns:a16="http://schemas.microsoft.com/office/drawing/2014/main" id="{E6A9997D-ADE7-4556-B578-9AB429357976}"/>
               </a:ext>
             </a:extLst>
           </p:cNvPr>
@@ -4926,7 +5059,7 @@
           <p:cNvPr id="22" name="">
             <a:extLst xmlns:a="http://schemas.openxmlformats.org/drawingml/2006/main">
               <a:ext uri="{FF2B5EF4-FFF2-40B4-BE49-F238E27FC236}">
-                <a16:creationId xmlns:a16="http://schemas.microsoft.com/office/drawing/2014/main" id="{2268C45A-31D0-4489-BB58-E4AEA4F9C4B2}"/>
+                <a16:creationId xmlns:a16="http://schemas.microsoft.com/office/drawing/2014/main" id="{8934D575-E699-4DB4-B3C9-9EEB60A0D08C}"/>
               </a:ext>
             </a:extLst>
           </p:cNvPr>
@@ -4957,7 +5090,7 @@
           <p:cNvPr id="23" name="">
             <a:extLst xmlns:a="http://schemas.openxmlformats.org/drawingml/2006/main">
               <a:ext uri="{FF2B5EF4-FFF2-40B4-BE49-F238E27FC236}">
-                <a16:creationId xmlns:a16="http://schemas.microsoft.com/office/drawing/2014/main" id="{66BA01F0-E660-42CD-8EF8-A6AB19B746F8}"/>
+                <a16:creationId xmlns:a16="http://schemas.microsoft.com/office/drawing/2014/main" id="{8B2E6899-CEA8-4F75-BD05-96FC528B742D}"/>
               </a:ext>
             </a:extLst>
           </p:cNvPr>
@@ -4990,7 +5123,7 @@
           <p:cNvPr id="24" name="">
             <a:extLst xmlns:a="http://schemas.openxmlformats.org/drawingml/2006/main">
               <a:ext uri="{FF2B5EF4-FFF2-40B4-BE49-F238E27FC236}">
-                <a16:creationId xmlns:a16="http://schemas.microsoft.com/office/drawing/2014/main" id="{B9B5CC66-8EAE-4FB0-92E4-8BC95FBE92B5}"/>
+                <a16:creationId xmlns:a16="http://schemas.microsoft.com/office/drawing/2014/main" id="{5340BD81-1718-4316-B291-E3CA547F64CB}"/>
               </a:ext>
             </a:extLst>
           </p:cNvPr>
@@ -5040,7 +5173,7 @@
           <p:cNvPr id="25" name="">
             <a:extLst xmlns:a="http://schemas.openxmlformats.org/drawingml/2006/main">
               <a:ext uri="{FF2B5EF4-FFF2-40B4-BE49-F238E27FC236}">
-                <a16:creationId xmlns:a16="http://schemas.microsoft.com/office/drawing/2014/main" id="{4D20C237-B8F0-4C23-975D-3B028670AC00}"/>
+                <a16:creationId xmlns:a16="http://schemas.microsoft.com/office/drawing/2014/main" id="{B51364AE-7ADA-4B2A-BA06-9F1FBD4CFD13}"/>
               </a:ext>
             </a:extLst>
           </p:cNvPr>
@@ -5090,7 +5223,7 @@
           <p:cNvPr id="26" name="">
             <a:extLst xmlns:a="http://schemas.openxmlformats.org/drawingml/2006/main">
               <a:ext uri="{FF2B5EF4-FFF2-40B4-BE49-F238E27FC236}">
-                <a16:creationId xmlns:a16="http://schemas.microsoft.com/office/drawing/2014/main" id="{E3306275-B40E-4D6F-970E-6671A65FE8C2}"/>
+                <a16:creationId xmlns:a16="http://schemas.microsoft.com/office/drawing/2014/main" id="{FC5E1AE6-CFC6-488C-BFAC-8388554F2BE4}"/>
               </a:ext>
             </a:extLst>
           </p:cNvPr>
@@ -5138,7 +5271,7 @@
     </p:spTree>
     <p:extLst>
       <p:ext uri="{BB962C8B-B14F-4D97-AF65-F5344CB8AC3E}">
-        <p14:creationId xmlns:p14="http://schemas.microsoft.com/office/powerpoint/2010/main" val="217273041"/>
+        <p14:creationId xmlns:p14="http://schemas.microsoft.com/office/powerpoint/2010/main" val="1921029292"/>
       </p:ext>
     </p:extLst>
   </p:cSld>
@@ -5169,7 +5302,7 @@
           <p:cNvPr id="1" name="">
             <a:extLst xmlns:a="http://schemas.openxmlformats.org/drawingml/2006/main">
               <a:ext uri="{FF2B5EF4-FFF2-40B4-BE49-F238E27FC236}">
-                <a16:creationId xmlns:a16="http://schemas.microsoft.com/office/drawing/2014/main" id="{7C1303C6-9D1E-4886-8EFE-AD003D14F7DF}"/>
+                <a16:creationId xmlns:a16="http://schemas.microsoft.com/office/drawing/2014/main" id="{19F381DC-E1D4-42F2-B78F-655873522242}"/>
               </a:ext>
             </a:extLst>
           </p:cNvPr>
@@ -5197,14 +5330,14 @@
       </p:sp>
       <p:pic>
         <p:nvPicPr>
-          <p:cNvPr id="20" name=""/>
+          <p:cNvPr id="40" name=""/>
           <p:cNvPicPr>
             <a:picLocks xmlns:a="http://schemas.openxmlformats.org/drawingml/2006/main" noChangeAspect="1"/>
           </p:cNvPicPr>
           <p:nvPr/>
         </p:nvPicPr>
         <p:blipFill>
-          <a:blip xmlns:r="http://schemas.openxmlformats.org/officeDocument/2006/relationships" xmlns:a="http://schemas.openxmlformats.org/drawingml/2006/main" r:embed="Re1ae90203337402a"/>
+          <a:blip xmlns:r="http://schemas.openxmlformats.org/officeDocument/2006/relationships" xmlns:a="http://schemas.openxmlformats.org/drawingml/2006/main" r:embed="R0450f1ee05b5433b"/>
           <a:stretch xmlns:a="http://schemas.openxmlformats.org/drawingml/2006/main"/>
         </p:blipFill>
         <p:spPr>
@@ -5222,7 +5355,7 @@
           <p:cNvPr id="3" name="">
             <a:extLst xmlns:a="http://schemas.openxmlformats.org/drawingml/2006/main">
               <a:ext uri="{FF2B5EF4-FFF2-40B4-BE49-F238E27FC236}">
-                <a16:creationId xmlns:a16="http://schemas.microsoft.com/office/drawing/2014/main" id="{3391BC92-B813-4E14-AD99-00FE6C5327F7}"/>
+                <a16:creationId xmlns:a16="http://schemas.microsoft.com/office/drawing/2014/main" id="{594D9933-E7F6-42DF-92E5-DFA229706606}"/>
               </a:ext>
             </a:extLst>
           </p:cNvPr>
@@ -5272,7 +5405,7 @@
           <p:cNvPr id="4" name="">
             <a:extLst xmlns:a="http://schemas.openxmlformats.org/drawingml/2006/main">
               <a:ext uri="{FF2B5EF4-FFF2-40B4-BE49-F238E27FC236}">
-                <a16:creationId xmlns:a16="http://schemas.microsoft.com/office/drawing/2014/main" id="{6AC16F1F-3B33-4774-83B7-897BED76A08B}"/>
+                <a16:creationId xmlns:a16="http://schemas.microsoft.com/office/drawing/2014/main" id="{0CBF9D17-A0D5-4BD0-9C77-D3E0996208C1}"/>
               </a:ext>
             </a:extLst>
           </p:cNvPr>
@@ -5305,7 +5438,7 @@
           <p:cNvPr id="5" name="">
             <a:extLst xmlns:a="http://schemas.openxmlformats.org/drawingml/2006/main">
               <a:ext uri="{FF2B5EF4-FFF2-40B4-BE49-F238E27FC236}">
-                <a16:creationId xmlns:a16="http://schemas.microsoft.com/office/drawing/2014/main" id="{526AF94E-F57E-46C9-8F57-D9D50742C479}"/>
+                <a16:creationId xmlns:a16="http://schemas.microsoft.com/office/drawing/2014/main" id="{D903A163-5A8A-49BE-8780-71B714581E0E}"/>
               </a:ext>
             </a:extLst>
           </p:cNvPr>
@@ -5336,7 +5469,7 @@
           <p:cNvPr id="6" name="">
             <a:extLst xmlns:a="http://schemas.openxmlformats.org/drawingml/2006/main">
               <a:ext uri="{FF2B5EF4-FFF2-40B4-BE49-F238E27FC236}">
-                <a16:creationId xmlns:a16="http://schemas.microsoft.com/office/drawing/2014/main" id="{E62C6931-9570-4570-A61E-E47A709A9F31}"/>
+                <a16:creationId xmlns:a16="http://schemas.microsoft.com/office/drawing/2014/main" id="{32DC28AB-F08C-4987-9AFB-D3DAA07EA813}"/>
               </a:ext>
             </a:extLst>
           </p:cNvPr>
@@ -5386,7 +5519,7 @@
           <p:cNvPr id="7" name="">
             <a:extLst xmlns:a="http://schemas.openxmlformats.org/drawingml/2006/main">
               <a:ext uri="{FF2B5EF4-FFF2-40B4-BE49-F238E27FC236}">
-                <a16:creationId xmlns:a16="http://schemas.microsoft.com/office/drawing/2014/main" id="{AE4FBF3B-D177-4980-B766-C737B009F6BD}"/>
+                <a16:creationId xmlns:a16="http://schemas.microsoft.com/office/drawing/2014/main" id="{41ABF210-2D34-4D31-BD70-365858AF49E5}"/>
               </a:ext>
             </a:extLst>
           </p:cNvPr>
@@ -5436,18 +5569,18 @@
           <p:cNvPr id="8" name="">
             <a:extLst xmlns:a="http://schemas.openxmlformats.org/drawingml/2006/main">
               <a:ext uri="{FF2B5EF4-FFF2-40B4-BE49-F238E27FC236}">
-                <a16:creationId xmlns:a16="http://schemas.microsoft.com/office/drawing/2014/main" id="{5A701A6A-EA04-47D7-9C66-F591B29906A1}"/>
-              </a:ext>
-            </a:extLst>
-          </p:cNvPr>
-          <p:cNvSpPr>
-            <a:spLocks xmlns:a="http://schemas.openxmlformats.org/drawingml/2006/main" noGrp="1"/>
-          </p:cNvSpPr>
-          <p:nvPr/>
-        </p:nvSpPr>
-        <p:spPr>
-          <a:xfrm xmlns:a="http://schemas.openxmlformats.org/drawingml/2006/main">
-            <a:off x="609600" y="1638300"/>
+                <a16:creationId xmlns:a16="http://schemas.microsoft.com/office/drawing/2014/main" id="{853A02EE-85B9-42D9-8521-73F6FACCEE22}"/>
+              </a:ext>
+            </a:extLst>
+          </p:cNvPr>
+          <p:cNvSpPr>
+            <a:spLocks xmlns:a="http://schemas.openxmlformats.org/drawingml/2006/main" noGrp="1"/>
+          </p:cNvSpPr>
+          <p:nvPr/>
+        </p:nvSpPr>
+        <p:spPr>
+          <a:xfrm xmlns:a="http://schemas.openxmlformats.org/drawingml/2006/main">
+            <a:off x="609600" y="1466850"/>
             <a:ext cx="457200" cy="266700"/>
           </a:xfrm>
           <a:prstGeom xmlns:a="http://schemas.openxmlformats.org/drawingml/2006/main" prst="rect">
@@ -5464,14 +5597,14 @@
           <a:lstStyle xmlns:a="http://schemas.openxmlformats.org/drawingml/2006/main"/>
           <a:p xmlns:a="http://schemas.openxmlformats.org/drawingml/2006/main">
             <a:pPr>
-              <a:defRPr sz="1275" b="1">
+              <a:defRPr sz="1200" b="1">
                 <a:solidFill>
                   <a:srgbClr val="2048A8"/>
                 </a:solidFill>
               </a:defRPr>
             </a:pPr>
             <a:r>
-              <a:rPr sz="1275" b="1">
+              <a:rPr sz="1200" b="1">
                 <a:solidFill>
                   <a:srgbClr val="2048A8"/>
                 </a:solidFill>
@@ -5486,19 +5619,19 @@
           <p:cNvPr id="9" name="">
             <a:extLst xmlns:a="http://schemas.openxmlformats.org/drawingml/2006/main">
               <a:ext uri="{FF2B5EF4-FFF2-40B4-BE49-F238E27FC236}">
-                <a16:creationId xmlns:a16="http://schemas.microsoft.com/office/drawing/2014/main" id="{7CB919E4-4703-4863-945B-09C28614CF86}"/>
-              </a:ext>
-            </a:extLst>
-          </p:cNvPr>
-          <p:cNvSpPr>
-            <a:spLocks xmlns:a="http://schemas.openxmlformats.org/drawingml/2006/main" noGrp="1"/>
-          </p:cNvSpPr>
-          <p:nvPr/>
-        </p:nvSpPr>
-        <p:spPr>
-          <a:xfrm xmlns:a="http://schemas.openxmlformats.org/drawingml/2006/main">
-            <a:off x="1200150" y="1581150"/>
-            <a:ext cx="10048875" cy="1028700"/>
+                <a16:creationId xmlns:a16="http://schemas.microsoft.com/office/drawing/2014/main" id="{4B3A5439-3FCE-456D-989A-3E0A4F02B673}"/>
+              </a:ext>
+            </a:extLst>
+          </p:cNvPr>
+          <p:cNvSpPr>
+            <a:spLocks xmlns:a="http://schemas.openxmlformats.org/drawingml/2006/main" noGrp="1"/>
+          </p:cNvSpPr>
+          <p:nvPr/>
+        </p:nvSpPr>
+        <p:spPr>
+          <a:xfrm xmlns:a="http://schemas.openxmlformats.org/drawingml/2006/main">
+            <a:off x="1200150" y="1409700"/>
+            <a:ext cx="9982200" cy="266700"/>
           </a:xfrm>
           <a:prstGeom xmlns:a="http://schemas.openxmlformats.org/drawingml/2006/main" prst="rect">
             <a:avLst/>
@@ -5514,19 +5647,19 @@
           <a:lstStyle xmlns:a="http://schemas.openxmlformats.org/drawingml/2006/main"/>
           <a:p xmlns:a="http://schemas.openxmlformats.org/drawingml/2006/main">
             <a:pPr>
-              <a:defRPr sz="1350">
+              <a:defRPr sz="1425" b="1">
                 <a:solidFill>
                   <a:srgbClr val="102A63"/>
                 </a:solidFill>
               </a:defRPr>
             </a:pPr>
             <a:r>
-              <a:rPr sz="1350">
+              <a:rPr sz="1425" b="1">
                 <a:solidFill>
                   <a:srgbClr val="102A63"/>
                 </a:solidFill>
               </a:rPr>
-              <a:t>{{IT_1}}</a:t>
+              <a:t>{{IT_1_TITLE}}</a:t>
             </a:r>
           </a:p>
         </p:txBody>
@@ -5536,19 +5669,269 @@
           <p:cNvPr id="10" name="">
             <a:extLst xmlns:a="http://schemas.openxmlformats.org/drawingml/2006/main">
               <a:ext uri="{FF2B5EF4-FFF2-40B4-BE49-F238E27FC236}">
-                <a16:creationId xmlns:a16="http://schemas.microsoft.com/office/drawing/2014/main" id="{353F06F3-AF33-4CD2-8894-9D483945CA3E}"/>
-              </a:ext>
-            </a:extLst>
-          </p:cNvPr>
-          <p:cNvSpPr>
-            <a:spLocks xmlns:a="http://schemas.openxmlformats.org/drawingml/2006/main" noGrp="1"/>
-          </p:cNvSpPr>
-          <p:nvPr/>
-        </p:nvSpPr>
-        <p:spPr>
-          <a:xfrm xmlns:a="http://schemas.openxmlformats.org/drawingml/2006/main">
-            <a:off x="1200150" y="2571750"/>
-            <a:ext cx="10048875" cy="9525"/>
+                <a16:creationId xmlns:a16="http://schemas.microsoft.com/office/drawing/2014/main" id="{731E00D4-9F00-44BB-98C3-E2B2B39C7F1F}"/>
+              </a:ext>
+            </a:extLst>
+          </p:cNvPr>
+          <p:cNvSpPr>
+            <a:spLocks xmlns:a="http://schemas.openxmlformats.org/drawingml/2006/main" noGrp="1"/>
+          </p:cNvSpPr>
+          <p:nvPr/>
+        </p:nvSpPr>
+        <p:spPr>
+          <a:xfrm xmlns:a="http://schemas.openxmlformats.org/drawingml/2006/main">
+            <a:off x="1200150" y="1704975"/>
+            <a:ext cx="9982200" cy="400050"/>
+          </a:xfrm>
+          <a:prstGeom xmlns:a="http://schemas.openxmlformats.org/drawingml/2006/main" prst="rect">
+            <a:avLst/>
+          </a:prstGeom>
+          <a:noFill xmlns:a="http://schemas.openxmlformats.org/drawingml/2006/main"/>
+          <a:ln xmlns:a="http://schemas.openxmlformats.org/drawingml/2006/main" w="0">
+            <a:noFill/>
+            <a:prstDash val="solid"/>
+          </a:ln>
+        </p:spPr>
+        <p:txBody>
+          <a:bodyPr xmlns:a="http://schemas.openxmlformats.org/drawingml/2006/main"/>
+          <a:lstStyle xmlns:a="http://schemas.openxmlformats.org/drawingml/2006/main"/>
+          <a:p xmlns:a="http://schemas.openxmlformats.org/drawingml/2006/main">
+            <a:pPr>
+              <a:defRPr sz="1125">
+                <a:solidFill>
+                  <a:srgbClr val="596780"/>
+                </a:solidFill>
+              </a:defRPr>
+            </a:pPr>
+            <a:r>
+              <a:rPr sz="1125">
+                <a:solidFill>
+                  <a:srgbClr val="596780"/>
+                </a:solidFill>
+              </a:rPr>
+              <a:t>{{IT_1_ACTION}}</a:t>
+            </a:r>
+          </a:p>
+        </p:txBody>
+      </p:sp>
+      <p:sp>
+        <p:nvSpPr>
+          <p:cNvPr id="11" name="">
+            <a:extLst xmlns:a="http://schemas.openxmlformats.org/drawingml/2006/main">
+              <a:ext uri="{FF2B5EF4-FFF2-40B4-BE49-F238E27FC236}">
+                <a16:creationId xmlns:a16="http://schemas.microsoft.com/office/drawing/2014/main" id="{35CFD71D-A3AE-4C09-99E8-435379140FC0}"/>
+              </a:ext>
+            </a:extLst>
+          </p:cNvPr>
+          <p:cNvSpPr>
+            <a:spLocks xmlns:a="http://schemas.openxmlformats.org/drawingml/2006/main" noGrp="1"/>
+          </p:cNvSpPr>
+          <p:nvPr/>
+        </p:nvSpPr>
+        <p:spPr>
+          <a:xfrm xmlns:a="http://schemas.openxmlformats.org/drawingml/2006/main">
+            <a:off x="1200150" y="2171700"/>
+            <a:ext cx="742950" cy="190500"/>
+          </a:xfrm>
+          <a:prstGeom xmlns:a="http://schemas.openxmlformats.org/drawingml/2006/main" prst="rect">
+            <a:avLst/>
+          </a:prstGeom>
+          <a:noFill xmlns:a="http://schemas.openxmlformats.org/drawingml/2006/main"/>
+          <a:ln xmlns:a="http://schemas.openxmlformats.org/drawingml/2006/main" w="0">
+            <a:noFill/>
+            <a:prstDash val="solid"/>
+          </a:ln>
+        </p:spPr>
+        <p:txBody>
+          <a:bodyPr xmlns:a="http://schemas.openxmlformats.org/drawingml/2006/main"/>
+          <a:lstStyle xmlns:a="http://schemas.openxmlformats.org/drawingml/2006/main"/>
+          <a:p xmlns:a="http://schemas.openxmlformats.org/drawingml/2006/main">
+            <a:pPr>
+              <a:defRPr sz="975" b="1">
+                <a:solidFill>
+                  <a:srgbClr val="2048A8"/>
+                </a:solidFill>
+              </a:defRPr>
+            </a:pPr>
+            <a:r>
+              <a:rPr sz="975" b="1">
+                <a:solidFill>
+                  <a:srgbClr val="2048A8"/>
+                </a:solidFill>
+              </a:rPr>
+              <a:t>Решение</a:t>
+            </a:r>
+          </a:p>
+        </p:txBody>
+      </p:sp>
+      <p:sp>
+        <p:nvSpPr>
+          <p:cNvPr id="12" name="">
+            <a:extLst xmlns:a="http://schemas.openxmlformats.org/drawingml/2006/main">
+              <a:ext uri="{FF2B5EF4-FFF2-40B4-BE49-F238E27FC236}">
+                <a16:creationId xmlns:a16="http://schemas.microsoft.com/office/drawing/2014/main" id="{085D3106-365B-4297-B641-C9DACE75B9B0}"/>
+              </a:ext>
+            </a:extLst>
+          </p:cNvPr>
+          <p:cNvSpPr>
+            <a:spLocks xmlns:a="http://schemas.openxmlformats.org/drawingml/2006/main" noGrp="1"/>
+          </p:cNvSpPr>
+          <p:nvPr/>
+        </p:nvSpPr>
+        <p:spPr>
+          <a:xfrm xmlns:a="http://schemas.openxmlformats.org/drawingml/2006/main">
+            <a:off x="1962150" y="2152650"/>
+            <a:ext cx="3810000" cy="323850"/>
+          </a:xfrm>
+          <a:prstGeom xmlns:a="http://schemas.openxmlformats.org/drawingml/2006/main" prst="rect">
+            <a:avLst/>
+          </a:prstGeom>
+          <a:noFill xmlns:a="http://schemas.openxmlformats.org/drawingml/2006/main"/>
+          <a:ln xmlns:a="http://schemas.openxmlformats.org/drawingml/2006/main" w="0">
+            <a:noFill/>
+            <a:prstDash val="solid"/>
+          </a:ln>
+        </p:spPr>
+        <p:txBody>
+          <a:bodyPr xmlns:a="http://schemas.openxmlformats.org/drawingml/2006/main"/>
+          <a:lstStyle xmlns:a="http://schemas.openxmlformats.org/drawingml/2006/main"/>
+          <a:p xmlns:a="http://schemas.openxmlformats.org/drawingml/2006/main">
+            <a:pPr>
+              <a:defRPr sz="1050" b="1">
+                <a:solidFill>
+                  <a:srgbClr val="102A63"/>
+                </a:solidFill>
+              </a:defRPr>
+            </a:pPr>
+            <a:r>
+              <a:rPr sz="1050" b="1">
+                <a:solidFill>
+                  <a:srgbClr val="102A63"/>
+                </a:solidFill>
+              </a:rPr>
+              <a:t>{{IT_1_SOLUTION}}</a:t>
+            </a:r>
+          </a:p>
+        </p:txBody>
+      </p:sp>
+      <p:sp>
+        <p:nvSpPr>
+          <p:cNvPr id="13" name="">
+            <a:extLst xmlns:a="http://schemas.openxmlformats.org/drawingml/2006/main">
+              <a:ext uri="{FF2B5EF4-FFF2-40B4-BE49-F238E27FC236}">
+                <a16:creationId xmlns:a16="http://schemas.microsoft.com/office/drawing/2014/main" id="{BBDCC388-D6D5-45F4-AB5F-72B817F58162}"/>
+              </a:ext>
+            </a:extLst>
+          </p:cNvPr>
+          <p:cNvSpPr>
+            <a:spLocks xmlns:a="http://schemas.openxmlformats.org/drawingml/2006/main" noGrp="1"/>
+          </p:cNvSpPr>
+          <p:nvPr/>
+        </p:nvSpPr>
+        <p:spPr>
+          <a:xfrm xmlns:a="http://schemas.openxmlformats.org/drawingml/2006/main">
+            <a:off x="6019800" y="2171700"/>
+            <a:ext cx="1104900" cy="190500"/>
+          </a:xfrm>
+          <a:prstGeom xmlns:a="http://schemas.openxmlformats.org/drawingml/2006/main" prst="rect">
+            <a:avLst/>
+          </a:prstGeom>
+          <a:noFill xmlns:a="http://schemas.openxmlformats.org/drawingml/2006/main"/>
+          <a:ln xmlns:a="http://schemas.openxmlformats.org/drawingml/2006/main" w="0">
+            <a:noFill/>
+            <a:prstDash val="solid"/>
+          </a:ln>
+        </p:spPr>
+        <p:txBody>
+          <a:bodyPr xmlns:a="http://schemas.openxmlformats.org/drawingml/2006/main"/>
+          <a:lstStyle xmlns:a="http://schemas.openxmlformats.org/drawingml/2006/main"/>
+          <a:p xmlns:a="http://schemas.openxmlformats.org/drawingml/2006/main">
+            <a:pPr>
+              <a:defRPr sz="975" b="1">
+                <a:solidFill>
+                  <a:srgbClr val="2048A8"/>
+                </a:solidFill>
+              </a:defRPr>
+            </a:pPr>
+            <a:r>
+              <a:rPr sz="975" b="1">
+                <a:solidFill>
+                  <a:srgbClr val="2048A8"/>
+                </a:solidFill>
+              </a:rPr>
+              <a:t>Производители</a:t>
+            </a:r>
+          </a:p>
+        </p:txBody>
+      </p:sp>
+      <p:sp>
+        <p:nvSpPr>
+          <p:cNvPr id="14" name="">
+            <a:extLst xmlns:a="http://schemas.openxmlformats.org/drawingml/2006/main">
+              <a:ext uri="{FF2B5EF4-FFF2-40B4-BE49-F238E27FC236}">
+                <a16:creationId xmlns:a16="http://schemas.microsoft.com/office/drawing/2014/main" id="{11338DC1-3D6B-4175-ADC6-FBC4B06DB760}"/>
+              </a:ext>
+            </a:extLst>
+          </p:cNvPr>
+          <p:cNvSpPr>
+            <a:spLocks xmlns:a="http://schemas.openxmlformats.org/drawingml/2006/main" noGrp="1"/>
+          </p:cNvSpPr>
+          <p:nvPr/>
+        </p:nvSpPr>
+        <p:spPr>
+          <a:xfrm xmlns:a="http://schemas.openxmlformats.org/drawingml/2006/main">
+            <a:off x="7181850" y="2152650"/>
+            <a:ext cx="4000500" cy="323850"/>
+          </a:xfrm>
+          <a:prstGeom xmlns:a="http://schemas.openxmlformats.org/drawingml/2006/main" prst="rect">
+            <a:avLst/>
+          </a:prstGeom>
+          <a:noFill xmlns:a="http://schemas.openxmlformats.org/drawingml/2006/main"/>
+          <a:ln xmlns:a="http://schemas.openxmlformats.org/drawingml/2006/main" w="0">
+            <a:noFill/>
+            <a:prstDash val="solid"/>
+          </a:ln>
+        </p:spPr>
+        <p:txBody>
+          <a:bodyPr xmlns:a="http://schemas.openxmlformats.org/drawingml/2006/main"/>
+          <a:lstStyle xmlns:a="http://schemas.openxmlformats.org/drawingml/2006/main"/>
+          <a:p xmlns:a="http://schemas.openxmlformats.org/drawingml/2006/main">
+            <a:pPr>
+              <a:defRPr sz="1050" b="1">
+                <a:solidFill>
+                  <a:srgbClr val="102A63"/>
+                </a:solidFill>
+              </a:defRPr>
+            </a:pPr>
+            <a:r>
+              <a:rPr sz="1050" b="1">
+                <a:solidFill>
+                  <a:srgbClr val="102A63"/>
+                </a:solidFill>
+              </a:rPr>
+              <a:t>{{IT_1_VENDORS}}</a:t>
+            </a:r>
+          </a:p>
+        </p:txBody>
+      </p:sp>
+      <p:sp>
+        <p:nvSpPr>
+          <p:cNvPr id="15" name="">
+            <a:extLst xmlns:a="http://schemas.openxmlformats.org/drawingml/2006/main">
+              <a:ext uri="{FF2B5EF4-FFF2-40B4-BE49-F238E27FC236}">
+                <a16:creationId xmlns:a16="http://schemas.microsoft.com/office/drawing/2014/main" id="{D0FBBB60-61BF-4B06-805C-5F3A35C5079D}"/>
+              </a:ext>
+            </a:extLst>
+          </p:cNvPr>
+          <p:cNvSpPr>
+            <a:spLocks xmlns:a="http://schemas.openxmlformats.org/drawingml/2006/main" noGrp="1"/>
+          </p:cNvSpPr>
+          <p:nvPr/>
+        </p:nvSpPr>
+        <p:spPr>
+          <a:xfrm xmlns:a="http://schemas.openxmlformats.org/drawingml/2006/main">
+            <a:off x="1200150" y="2552700"/>
+            <a:ext cx="9982200" cy="9525"/>
           </a:xfrm>
           <a:prstGeom xmlns:a="http://schemas.openxmlformats.org/drawingml/2006/main" prst="rect">
             <a:avLst/>
@@ -5564,21 +5947,21 @@
       </p:sp>
       <p:sp>
         <p:nvSpPr>
-          <p:cNvPr id="11" name="">
-            <a:extLst xmlns:a="http://schemas.openxmlformats.org/drawingml/2006/main">
-              <a:ext uri="{FF2B5EF4-FFF2-40B4-BE49-F238E27FC236}">
-                <a16:creationId xmlns:a16="http://schemas.microsoft.com/office/drawing/2014/main" id="{3403B6FB-08EB-4E10-BA87-7D8748CD919D}"/>
-              </a:ext>
-            </a:extLst>
-          </p:cNvPr>
-          <p:cNvSpPr>
-            <a:spLocks xmlns:a="http://schemas.openxmlformats.org/drawingml/2006/main" noGrp="1"/>
-          </p:cNvSpPr>
-          <p:nvPr/>
-        </p:nvSpPr>
-        <p:spPr>
-          <a:xfrm xmlns:a="http://schemas.openxmlformats.org/drawingml/2006/main">
-            <a:off x="609600" y="2800350"/>
+          <p:cNvPr id="16" name="">
+            <a:extLst xmlns:a="http://schemas.openxmlformats.org/drawingml/2006/main">
+              <a:ext uri="{FF2B5EF4-FFF2-40B4-BE49-F238E27FC236}">
+                <a16:creationId xmlns:a16="http://schemas.microsoft.com/office/drawing/2014/main" id="{E037C160-F9AA-43EF-A493-5E88FB2B4D11}"/>
+              </a:ext>
+            </a:extLst>
+          </p:cNvPr>
+          <p:cNvSpPr>
+            <a:spLocks xmlns:a="http://schemas.openxmlformats.org/drawingml/2006/main" noGrp="1"/>
+          </p:cNvSpPr>
+          <p:nvPr/>
+        </p:nvSpPr>
+        <p:spPr>
+          <a:xfrm xmlns:a="http://schemas.openxmlformats.org/drawingml/2006/main">
+            <a:off x="609600" y="2724150"/>
             <a:ext cx="457200" cy="266700"/>
           </a:xfrm>
           <a:prstGeom xmlns:a="http://schemas.openxmlformats.org/drawingml/2006/main" prst="rect">
@@ -5595,14 +5978,14 @@
           <a:lstStyle xmlns:a="http://schemas.openxmlformats.org/drawingml/2006/main"/>
           <a:p xmlns:a="http://schemas.openxmlformats.org/drawingml/2006/main">
             <a:pPr>
-              <a:defRPr sz="1275" b="1">
+              <a:defRPr sz="1200" b="1">
                 <a:solidFill>
                   <a:srgbClr val="2048A8"/>
                 </a:solidFill>
               </a:defRPr>
             </a:pPr>
             <a:r>
-              <a:rPr sz="1275" b="1">
+              <a:rPr sz="1200" b="1">
                 <a:solidFill>
                   <a:srgbClr val="2048A8"/>
                 </a:solidFill>
@@ -5614,22 +5997,22 @@
       </p:sp>
       <p:sp>
         <p:nvSpPr>
-          <p:cNvPr id="12" name="">
-            <a:extLst xmlns:a="http://schemas.openxmlformats.org/drawingml/2006/main">
-              <a:ext uri="{FF2B5EF4-FFF2-40B4-BE49-F238E27FC236}">
-                <a16:creationId xmlns:a16="http://schemas.microsoft.com/office/drawing/2014/main" id="{8B15C34A-8312-475B-8647-78825484867C}"/>
-              </a:ext>
-            </a:extLst>
-          </p:cNvPr>
-          <p:cNvSpPr>
-            <a:spLocks xmlns:a="http://schemas.openxmlformats.org/drawingml/2006/main" noGrp="1"/>
-          </p:cNvSpPr>
-          <p:nvPr/>
-        </p:nvSpPr>
-        <p:spPr>
-          <a:xfrm xmlns:a="http://schemas.openxmlformats.org/drawingml/2006/main">
-            <a:off x="1200150" y="2743200"/>
-            <a:ext cx="10048875" cy="1028700"/>
+          <p:cNvPr id="17" name="">
+            <a:extLst xmlns:a="http://schemas.openxmlformats.org/drawingml/2006/main">
+              <a:ext uri="{FF2B5EF4-FFF2-40B4-BE49-F238E27FC236}">
+                <a16:creationId xmlns:a16="http://schemas.microsoft.com/office/drawing/2014/main" id="{BCD6E0ED-43BA-4D7D-9AED-B2603D78A012}"/>
+              </a:ext>
+            </a:extLst>
+          </p:cNvPr>
+          <p:cNvSpPr>
+            <a:spLocks xmlns:a="http://schemas.openxmlformats.org/drawingml/2006/main" noGrp="1"/>
+          </p:cNvSpPr>
+          <p:nvPr/>
+        </p:nvSpPr>
+        <p:spPr>
+          <a:xfrm xmlns:a="http://schemas.openxmlformats.org/drawingml/2006/main">
+            <a:off x="1200150" y="2667000"/>
+            <a:ext cx="9982200" cy="266700"/>
           </a:xfrm>
           <a:prstGeom xmlns:a="http://schemas.openxmlformats.org/drawingml/2006/main" prst="rect">
             <a:avLst/>
@@ -5645,41 +6028,291 @@
           <a:lstStyle xmlns:a="http://schemas.openxmlformats.org/drawingml/2006/main"/>
           <a:p xmlns:a="http://schemas.openxmlformats.org/drawingml/2006/main">
             <a:pPr>
-              <a:defRPr sz="1350">
+              <a:defRPr sz="1425" b="1">
                 <a:solidFill>
                   <a:srgbClr val="102A63"/>
                 </a:solidFill>
               </a:defRPr>
             </a:pPr>
             <a:r>
-              <a:rPr sz="1350">
+              <a:rPr sz="1425" b="1">
                 <a:solidFill>
                   <a:srgbClr val="102A63"/>
                 </a:solidFill>
               </a:rPr>
-              <a:t>{{IT_2}}</a:t>
-            </a:r>
-          </a:p>
-        </p:txBody>
-      </p:sp>
-      <p:sp>
-        <p:nvSpPr>
-          <p:cNvPr id="13" name="">
-            <a:extLst xmlns:a="http://schemas.openxmlformats.org/drawingml/2006/main">
-              <a:ext uri="{FF2B5EF4-FFF2-40B4-BE49-F238E27FC236}">
-                <a16:creationId xmlns:a16="http://schemas.microsoft.com/office/drawing/2014/main" id="{56F21FF6-3656-432F-970B-F125FF215E55}"/>
-              </a:ext>
-            </a:extLst>
-          </p:cNvPr>
-          <p:cNvSpPr>
-            <a:spLocks xmlns:a="http://schemas.openxmlformats.org/drawingml/2006/main" noGrp="1"/>
-          </p:cNvSpPr>
-          <p:nvPr/>
-        </p:nvSpPr>
-        <p:spPr>
-          <a:xfrm xmlns:a="http://schemas.openxmlformats.org/drawingml/2006/main">
-            <a:off x="1200150" y="3733800"/>
-            <a:ext cx="10048875" cy="9525"/>
+              <a:t>{{IT_2_TITLE}}</a:t>
+            </a:r>
+          </a:p>
+        </p:txBody>
+      </p:sp>
+      <p:sp>
+        <p:nvSpPr>
+          <p:cNvPr id="18" name="">
+            <a:extLst xmlns:a="http://schemas.openxmlformats.org/drawingml/2006/main">
+              <a:ext uri="{FF2B5EF4-FFF2-40B4-BE49-F238E27FC236}">
+                <a16:creationId xmlns:a16="http://schemas.microsoft.com/office/drawing/2014/main" id="{092723CB-97C3-4B7A-8D8F-9D5994800A9A}"/>
+              </a:ext>
+            </a:extLst>
+          </p:cNvPr>
+          <p:cNvSpPr>
+            <a:spLocks xmlns:a="http://schemas.openxmlformats.org/drawingml/2006/main" noGrp="1"/>
+          </p:cNvSpPr>
+          <p:nvPr/>
+        </p:nvSpPr>
+        <p:spPr>
+          <a:xfrm xmlns:a="http://schemas.openxmlformats.org/drawingml/2006/main">
+            <a:off x="1200150" y="2962275"/>
+            <a:ext cx="9982200" cy="400050"/>
+          </a:xfrm>
+          <a:prstGeom xmlns:a="http://schemas.openxmlformats.org/drawingml/2006/main" prst="rect">
+            <a:avLst/>
+          </a:prstGeom>
+          <a:noFill xmlns:a="http://schemas.openxmlformats.org/drawingml/2006/main"/>
+          <a:ln xmlns:a="http://schemas.openxmlformats.org/drawingml/2006/main" w="0">
+            <a:noFill/>
+            <a:prstDash val="solid"/>
+          </a:ln>
+        </p:spPr>
+        <p:txBody>
+          <a:bodyPr xmlns:a="http://schemas.openxmlformats.org/drawingml/2006/main"/>
+          <a:lstStyle xmlns:a="http://schemas.openxmlformats.org/drawingml/2006/main"/>
+          <a:p xmlns:a="http://schemas.openxmlformats.org/drawingml/2006/main">
+            <a:pPr>
+              <a:defRPr sz="1125">
+                <a:solidFill>
+                  <a:srgbClr val="596780"/>
+                </a:solidFill>
+              </a:defRPr>
+            </a:pPr>
+            <a:r>
+              <a:rPr sz="1125">
+                <a:solidFill>
+                  <a:srgbClr val="596780"/>
+                </a:solidFill>
+              </a:rPr>
+              <a:t>{{IT_2_ACTION}}</a:t>
+            </a:r>
+          </a:p>
+        </p:txBody>
+      </p:sp>
+      <p:sp>
+        <p:nvSpPr>
+          <p:cNvPr id="19" name="">
+            <a:extLst xmlns:a="http://schemas.openxmlformats.org/drawingml/2006/main">
+              <a:ext uri="{FF2B5EF4-FFF2-40B4-BE49-F238E27FC236}">
+                <a16:creationId xmlns:a16="http://schemas.microsoft.com/office/drawing/2014/main" id="{2E187365-00DF-43FE-AC5B-C019129D57A9}"/>
+              </a:ext>
+            </a:extLst>
+          </p:cNvPr>
+          <p:cNvSpPr>
+            <a:spLocks xmlns:a="http://schemas.openxmlformats.org/drawingml/2006/main" noGrp="1"/>
+          </p:cNvSpPr>
+          <p:nvPr/>
+        </p:nvSpPr>
+        <p:spPr>
+          <a:xfrm xmlns:a="http://schemas.openxmlformats.org/drawingml/2006/main">
+            <a:off x="1200150" y="3429000"/>
+            <a:ext cx="742950" cy="190500"/>
+          </a:xfrm>
+          <a:prstGeom xmlns:a="http://schemas.openxmlformats.org/drawingml/2006/main" prst="rect">
+            <a:avLst/>
+          </a:prstGeom>
+          <a:noFill xmlns:a="http://schemas.openxmlformats.org/drawingml/2006/main"/>
+          <a:ln xmlns:a="http://schemas.openxmlformats.org/drawingml/2006/main" w="0">
+            <a:noFill/>
+            <a:prstDash val="solid"/>
+          </a:ln>
+        </p:spPr>
+        <p:txBody>
+          <a:bodyPr xmlns:a="http://schemas.openxmlformats.org/drawingml/2006/main"/>
+          <a:lstStyle xmlns:a="http://schemas.openxmlformats.org/drawingml/2006/main"/>
+          <a:p xmlns:a="http://schemas.openxmlformats.org/drawingml/2006/main">
+            <a:pPr>
+              <a:defRPr sz="975" b="1">
+                <a:solidFill>
+                  <a:srgbClr val="2048A8"/>
+                </a:solidFill>
+              </a:defRPr>
+            </a:pPr>
+            <a:r>
+              <a:rPr sz="975" b="1">
+                <a:solidFill>
+                  <a:srgbClr val="2048A8"/>
+                </a:solidFill>
+              </a:rPr>
+              <a:t>Решение</a:t>
+            </a:r>
+          </a:p>
+        </p:txBody>
+      </p:sp>
+      <p:sp>
+        <p:nvSpPr>
+          <p:cNvPr id="20" name="">
+            <a:extLst xmlns:a="http://schemas.openxmlformats.org/drawingml/2006/main">
+              <a:ext uri="{FF2B5EF4-FFF2-40B4-BE49-F238E27FC236}">
+                <a16:creationId xmlns:a16="http://schemas.microsoft.com/office/drawing/2014/main" id="{BA506CE6-6139-46F4-949A-1AB79E3C1634}"/>
+              </a:ext>
+            </a:extLst>
+          </p:cNvPr>
+          <p:cNvSpPr>
+            <a:spLocks xmlns:a="http://schemas.openxmlformats.org/drawingml/2006/main" noGrp="1"/>
+          </p:cNvSpPr>
+          <p:nvPr/>
+        </p:nvSpPr>
+        <p:spPr>
+          <a:xfrm xmlns:a="http://schemas.openxmlformats.org/drawingml/2006/main">
+            <a:off x="1962150" y="3409950"/>
+            <a:ext cx="3810000" cy="323850"/>
+          </a:xfrm>
+          <a:prstGeom xmlns:a="http://schemas.openxmlformats.org/drawingml/2006/main" prst="rect">
+            <a:avLst/>
+          </a:prstGeom>
+          <a:noFill xmlns:a="http://schemas.openxmlformats.org/drawingml/2006/main"/>
+          <a:ln xmlns:a="http://schemas.openxmlformats.org/drawingml/2006/main" w="0">
+            <a:noFill/>
+            <a:prstDash val="solid"/>
+          </a:ln>
+        </p:spPr>
+        <p:txBody>
+          <a:bodyPr xmlns:a="http://schemas.openxmlformats.org/drawingml/2006/main"/>
+          <a:lstStyle xmlns:a="http://schemas.openxmlformats.org/drawingml/2006/main"/>
+          <a:p xmlns:a="http://schemas.openxmlformats.org/drawingml/2006/main">
+            <a:pPr>
+              <a:defRPr sz="1050" b="1">
+                <a:solidFill>
+                  <a:srgbClr val="102A63"/>
+                </a:solidFill>
+              </a:defRPr>
+            </a:pPr>
+            <a:r>
+              <a:rPr sz="1050" b="1">
+                <a:solidFill>
+                  <a:srgbClr val="102A63"/>
+                </a:solidFill>
+              </a:rPr>
+              <a:t>{{IT_2_SOLUTION}}</a:t>
+            </a:r>
+          </a:p>
+        </p:txBody>
+      </p:sp>
+      <p:sp>
+        <p:nvSpPr>
+          <p:cNvPr id="21" name="">
+            <a:extLst xmlns:a="http://schemas.openxmlformats.org/drawingml/2006/main">
+              <a:ext uri="{FF2B5EF4-FFF2-40B4-BE49-F238E27FC236}">
+                <a16:creationId xmlns:a16="http://schemas.microsoft.com/office/drawing/2014/main" id="{05E06517-937C-4AD3-B217-8EA5DD7BE668}"/>
+              </a:ext>
+            </a:extLst>
+          </p:cNvPr>
+          <p:cNvSpPr>
+            <a:spLocks xmlns:a="http://schemas.openxmlformats.org/drawingml/2006/main" noGrp="1"/>
+          </p:cNvSpPr>
+          <p:nvPr/>
+        </p:nvSpPr>
+        <p:spPr>
+          <a:xfrm xmlns:a="http://schemas.openxmlformats.org/drawingml/2006/main">
+            <a:off x="6019800" y="3429000"/>
+            <a:ext cx="1104900" cy="190500"/>
+          </a:xfrm>
+          <a:prstGeom xmlns:a="http://schemas.openxmlformats.org/drawingml/2006/main" prst="rect">
+            <a:avLst/>
+          </a:prstGeom>
+          <a:noFill xmlns:a="http://schemas.openxmlformats.org/drawingml/2006/main"/>
+          <a:ln xmlns:a="http://schemas.openxmlformats.org/drawingml/2006/main" w="0">
+            <a:noFill/>
+            <a:prstDash val="solid"/>
+          </a:ln>
+        </p:spPr>
+        <p:txBody>
+          <a:bodyPr xmlns:a="http://schemas.openxmlformats.org/drawingml/2006/main"/>
+          <a:lstStyle xmlns:a="http://schemas.openxmlformats.org/drawingml/2006/main"/>
+          <a:p xmlns:a="http://schemas.openxmlformats.org/drawingml/2006/main">
+            <a:pPr>
+              <a:defRPr sz="975" b="1">
+                <a:solidFill>
+                  <a:srgbClr val="2048A8"/>
+                </a:solidFill>
+              </a:defRPr>
+            </a:pPr>
+            <a:r>
+              <a:rPr sz="975" b="1">
+                <a:solidFill>
+                  <a:srgbClr val="2048A8"/>
+                </a:solidFill>
+              </a:rPr>
+              <a:t>Производители</a:t>
+            </a:r>
+          </a:p>
+        </p:txBody>
+      </p:sp>
+      <p:sp>
+        <p:nvSpPr>
+          <p:cNvPr id="22" name="">
+            <a:extLst xmlns:a="http://schemas.openxmlformats.org/drawingml/2006/main">
+              <a:ext uri="{FF2B5EF4-FFF2-40B4-BE49-F238E27FC236}">
+                <a16:creationId xmlns:a16="http://schemas.microsoft.com/office/drawing/2014/main" id="{49D563F1-F507-435A-BD31-5EF7395B66D8}"/>
+              </a:ext>
+            </a:extLst>
+          </p:cNvPr>
+          <p:cNvSpPr>
+            <a:spLocks xmlns:a="http://schemas.openxmlformats.org/drawingml/2006/main" noGrp="1"/>
+          </p:cNvSpPr>
+          <p:nvPr/>
+        </p:nvSpPr>
+        <p:spPr>
+          <a:xfrm xmlns:a="http://schemas.openxmlformats.org/drawingml/2006/main">
+            <a:off x="7181850" y="3409950"/>
+            <a:ext cx="4000500" cy="323850"/>
+          </a:xfrm>
+          <a:prstGeom xmlns:a="http://schemas.openxmlformats.org/drawingml/2006/main" prst="rect">
+            <a:avLst/>
+          </a:prstGeom>
+          <a:noFill xmlns:a="http://schemas.openxmlformats.org/drawingml/2006/main"/>
+          <a:ln xmlns:a="http://schemas.openxmlformats.org/drawingml/2006/main" w="0">
+            <a:noFill/>
+            <a:prstDash val="solid"/>
+          </a:ln>
+        </p:spPr>
+        <p:txBody>
+          <a:bodyPr xmlns:a="http://schemas.openxmlformats.org/drawingml/2006/main"/>
+          <a:lstStyle xmlns:a="http://schemas.openxmlformats.org/drawingml/2006/main"/>
+          <a:p xmlns:a="http://schemas.openxmlformats.org/drawingml/2006/main">
+            <a:pPr>
+              <a:defRPr sz="1050" b="1">
+                <a:solidFill>
+                  <a:srgbClr val="102A63"/>
+                </a:solidFill>
+              </a:defRPr>
+            </a:pPr>
+            <a:r>
+              <a:rPr sz="1050" b="1">
+                <a:solidFill>
+                  <a:srgbClr val="102A63"/>
+                </a:solidFill>
+              </a:rPr>
+              <a:t>{{IT_2_VENDORS}}</a:t>
+            </a:r>
+          </a:p>
+        </p:txBody>
+      </p:sp>
+      <p:sp>
+        <p:nvSpPr>
+          <p:cNvPr id="23" name="">
+            <a:extLst xmlns:a="http://schemas.openxmlformats.org/drawingml/2006/main">
+              <a:ext uri="{FF2B5EF4-FFF2-40B4-BE49-F238E27FC236}">
+                <a16:creationId xmlns:a16="http://schemas.microsoft.com/office/drawing/2014/main" id="{FE8A17A2-3929-438F-A489-69C87CBCDF02}"/>
+              </a:ext>
+            </a:extLst>
+          </p:cNvPr>
+          <p:cNvSpPr>
+            <a:spLocks xmlns:a="http://schemas.openxmlformats.org/drawingml/2006/main" noGrp="1"/>
+          </p:cNvSpPr>
+          <p:nvPr/>
+        </p:nvSpPr>
+        <p:spPr>
+          <a:xfrm xmlns:a="http://schemas.openxmlformats.org/drawingml/2006/main">
+            <a:off x="1200150" y="3810000"/>
+            <a:ext cx="9982200" cy="9525"/>
           </a:xfrm>
           <a:prstGeom xmlns:a="http://schemas.openxmlformats.org/drawingml/2006/main" prst="rect">
             <a:avLst/>
@@ -5695,21 +6328,21 @@
       </p:sp>
       <p:sp>
         <p:nvSpPr>
-          <p:cNvPr id="14" name="">
-            <a:extLst xmlns:a="http://schemas.openxmlformats.org/drawingml/2006/main">
-              <a:ext uri="{FF2B5EF4-FFF2-40B4-BE49-F238E27FC236}">
-                <a16:creationId xmlns:a16="http://schemas.microsoft.com/office/drawing/2014/main" id="{B960F839-9122-4B0B-8FEC-3063FB9F1192}"/>
-              </a:ext>
-            </a:extLst>
-          </p:cNvPr>
-          <p:cNvSpPr>
-            <a:spLocks xmlns:a="http://schemas.openxmlformats.org/drawingml/2006/main" noGrp="1"/>
-          </p:cNvSpPr>
-          <p:nvPr/>
-        </p:nvSpPr>
-        <p:spPr>
-          <a:xfrm xmlns:a="http://schemas.openxmlformats.org/drawingml/2006/main">
-            <a:off x="609600" y="3962400"/>
+          <p:cNvPr id="24" name="">
+            <a:extLst xmlns:a="http://schemas.openxmlformats.org/drawingml/2006/main">
+              <a:ext uri="{FF2B5EF4-FFF2-40B4-BE49-F238E27FC236}">
+                <a16:creationId xmlns:a16="http://schemas.microsoft.com/office/drawing/2014/main" id="{C67F24B3-1ABB-46AF-BB91-9C6261879DB3}"/>
+              </a:ext>
+            </a:extLst>
+          </p:cNvPr>
+          <p:cNvSpPr>
+            <a:spLocks xmlns:a="http://schemas.openxmlformats.org/drawingml/2006/main" noGrp="1"/>
+          </p:cNvSpPr>
+          <p:nvPr/>
+        </p:nvSpPr>
+        <p:spPr>
+          <a:xfrm xmlns:a="http://schemas.openxmlformats.org/drawingml/2006/main">
+            <a:off x="609600" y="3981450"/>
             <a:ext cx="457200" cy="266700"/>
           </a:xfrm>
           <a:prstGeom xmlns:a="http://schemas.openxmlformats.org/drawingml/2006/main" prst="rect">
@@ -5726,14 +6359,14 @@
           <a:lstStyle xmlns:a="http://schemas.openxmlformats.org/drawingml/2006/main"/>
           <a:p xmlns:a="http://schemas.openxmlformats.org/drawingml/2006/main">
             <a:pPr>
-              <a:defRPr sz="1275" b="1">
+              <a:defRPr sz="1200" b="1">
                 <a:solidFill>
                   <a:srgbClr val="2048A8"/>
                 </a:solidFill>
               </a:defRPr>
             </a:pPr>
             <a:r>
-              <a:rPr sz="1275" b="1">
+              <a:rPr sz="1200" b="1">
                 <a:solidFill>
                   <a:srgbClr val="2048A8"/>
                 </a:solidFill>
@@ -5745,22 +6378,22 @@
       </p:sp>
       <p:sp>
         <p:nvSpPr>
-          <p:cNvPr id="15" name="">
-            <a:extLst xmlns:a="http://schemas.openxmlformats.org/drawingml/2006/main">
-              <a:ext uri="{FF2B5EF4-FFF2-40B4-BE49-F238E27FC236}">
-                <a16:creationId xmlns:a16="http://schemas.microsoft.com/office/drawing/2014/main" id="{F6240B41-E8D8-4F11-A78D-DD615C130FBA}"/>
-              </a:ext>
-            </a:extLst>
-          </p:cNvPr>
-          <p:cNvSpPr>
-            <a:spLocks xmlns:a="http://schemas.openxmlformats.org/drawingml/2006/main" noGrp="1"/>
-          </p:cNvSpPr>
-          <p:nvPr/>
-        </p:nvSpPr>
-        <p:spPr>
-          <a:xfrm xmlns:a="http://schemas.openxmlformats.org/drawingml/2006/main">
-            <a:off x="1200150" y="3905250"/>
-            <a:ext cx="10048875" cy="1028700"/>
+          <p:cNvPr id="25" name="">
+            <a:extLst xmlns:a="http://schemas.openxmlformats.org/drawingml/2006/main">
+              <a:ext uri="{FF2B5EF4-FFF2-40B4-BE49-F238E27FC236}">
+                <a16:creationId xmlns:a16="http://schemas.microsoft.com/office/drawing/2014/main" id="{EBD481EB-365F-46BB-83AF-FC2655078A16}"/>
+              </a:ext>
+            </a:extLst>
+          </p:cNvPr>
+          <p:cNvSpPr>
+            <a:spLocks xmlns:a="http://schemas.openxmlformats.org/drawingml/2006/main" noGrp="1"/>
+          </p:cNvSpPr>
+          <p:nvPr/>
+        </p:nvSpPr>
+        <p:spPr>
+          <a:xfrm xmlns:a="http://schemas.openxmlformats.org/drawingml/2006/main">
+            <a:off x="1200150" y="3924300"/>
+            <a:ext cx="9982200" cy="266700"/>
           </a:xfrm>
           <a:prstGeom xmlns:a="http://schemas.openxmlformats.org/drawingml/2006/main" prst="rect">
             <a:avLst/>
@@ -5776,41 +6409,291 @@
           <a:lstStyle xmlns:a="http://schemas.openxmlformats.org/drawingml/2006/main"/>
           <a:p xmlns:a="http://schemas.openxmlformats.org/drawingml/2006/main">
             <a:pPr>
-              <a:defRPr sz="1350">
+              <a:defRPr sz="1425" b="1">
                 <a:solidFill>
                   <a:srgbClr val="102A63"/>
                 </a:solidFill>
               </a:defRPr>
             </a:pPr>
             <a:r>
-              <a:rPr sz="1350">
+              <a:rPr sz="1425" b="1">
                 <a:solidFill>
                   <a:srgbClr val="102A63"/>
                 </a:solidFill>
               </a:rPr>
-              <a:t>{{IT_3}}</a:t>
-            </a:r>
-          </a:p>
-        </p:txBody>
-      </p:sp>
-      <p:sp>
-        <p:nvSpPr>
-          <p:cNvPr id="16" name="">
-            <a:extLst xmlns:a="http://schemas.openxmlformats.org/drawingml/2006/main">
-              <a:ext uri="{FF2B5EF4-FFF2-40B4-BE49-F238E27FC236}">
-                <a16:creationId xmlns:a16="http://schemas.microsoft.com/office/drawing/2014/main" id="{68DCD652-56BB-444F-9C5A-BA369696147E}"/>
-              </a:ext>
-            </a:extLst>
-          </p:cNvPr>
-          <p:cNvSpPr>
-            <a:spLocks xmlns:a="http://schemas.openxmlformats.org/drawingml/2006/main" noGrp="1"/>
-          </p:cNvSpPr>
-          <p:nvPr/>
-        </p:nvSpPr>
-        <p:spPr>
-          <a:xfrm xmlns:a="http://schemas.openxmlformats.org/drawingml/2006/main">
-            <a:off x="1200150" y="4895850"/>
-            <a:ext cx="10048875" cy="9525"/>
+              <a:t>{{IT_3_TITLE}}</a:t>
+            </a:r>
+          </a:p>
+        </p:txBody>
+      </p:sp>
+      <p:sp>
+        <p:nvSpPr>
+          <p:cNvPr id="26" name="">
+            <a:extLst xmlns:a="http://schemas.openxmlformats.org/drawingml/2006/main">
+              <a:ext uri="{FF2B5EF4-FFF2-40B4-BE49-F238E27FC236}">
+                <a16:creationId xmlns:a16="http://schemas.microsoft.com/office/drawing/2014/main" id="{EA7FB809-48B6-4DE0-9F65-EB6CA5C131E4}"/>
+              </a:ext>
+            </a:extLst>
+          </p:cNvPr>
+          <p:cNvSpPr>
+            <a:spLocks xmlns:a="http://schemas.openxmlformats.org/drawingml/2006/main" noGrp="1"/>
+          </p:cNvSpPr>
+          <p:nvPr/>
+        </p:nvSpPr>
+        <p:spPr>
+          <a:xfrm xmlns:a="http://schemas.openxmlformats.org/drawingml/2006/main">
+            <a:off x="1200150" y="4219575"/>
+            <a:ext cx="9982200" cy="400050"/>
+          </a:xfrm>
+          <a:prstGeom xmlns:a="http://schemas.openxmlformats.org/drawingml/2006/main" prst="rect">
+            <a:avLst/>
+          </a:prstGeom>
+          <a:noFill xmlns:a="http://schemas.openxmlformats.org/drawingml/2006/main"/>
+          <a:ln xmlns:a="http://schemas.openxmlformats.org/drawingml/2006/main" w="0">
+            <a:noFill/>
+            <a:prstDash val="solid"/>
+          </a:ln>
+        </p:spPr>
+        <p:txBody>
+          <a:bodyPr xmlns:a="http://schemas.openxmlformats.org/drawingml/2006/main"/>
+          <a:lstStyle xmlns:a="http://schemas.openxmlformats.org/drawingml/2006/main"/>
+          <a:p xmlns:a="http://schemas.openxmlformats.org/drawingml/2006/main">
+            <a:pPr>
+              <a:defRPr sz="1125">
+                <a:solidFill>
+                  <a:srgbClr val="596780"/>
+                </a:solidFill>
+              </a:defRPr>
+            </a:pPr>
+            <a:r>
+              <a:rPr sz="1125">
+                <a:solidFill>
+                  <a:srgbClr val="596780"/>
+                </a:solidFill>
+              </a:rPr>
+              <a:t>{{IT_3_ACTION}}</a:t>
+            </a:r>
+          </a:p>
+        </p:txBody>
+      </p:sp>
+      <p:sp>
+        <p:nvSpPr>
+          <p:cNvPr id="27" name="">
+            <a:extLst xmlns:a="http://schemas.openxmlformats.org/drawingml/2006/main">
+              <a:ext uri="{FF2B5EF4-FFF2-40B4-BE49-F238E27FC236}">
+                <a16:creationId xmlns:a16="http://schemas.microsoft.com/office/drawing/2014/main" id="{FA374D2C-FD11-45B0-B497-6DF2BF1A7648}"/>
+              </a:ext>
+            </a:extLst>
+          </p:cNvPr>
+          <p:cNvSpPr>
+            <a:spLocks xmlns:a="http://schemas.openxmlformats.org/drawingml/2006/main" noGrp="1"/>
+          </p:cNvSpPr>
+          <p:nvPr/>
+        </p:nvSpPr>
+        <p:spPr>
+          <a:xfrm xmlns:a="http://schemas.openxmlformats.org/drawingml/2006/main">
+            <a:off x="1200150" y="4686300"/>
+            <a:ext cx="742950" cy="190500"/>
+          </a:xfrm>
+          <a:prstGeom xmlns:a="http://schemas.openxmlformats.org/drawingml/2006/main" prst="rect">
+            <a:avLst/>
+          </a:prstGeom>
+          <a:noFill xmlns:a="http://schemas.openxmlformats.org/drawingml/2006/main"/>
+          <a:ln xmlns:a="http://schemas.openxmlformats.org/drawingml/2006/main" w="0">
+            <a:noFill/>
+            <a:prstDash val="solid"/>
+          </a:ln>
+        </p:spPr>
+        <p:txBody>
+          <a:bodyPr xmlns:a="http://schemas.openxmlformats.org/drawingml/2006/main"/>
+          <a:lstStyle xmlns:a="http://schemas.openxmlformats.org/drawingml/2006/main"/>
+          <a:p xmlns:a="http://schemas.openxmlformats.org/drawingml/2006/main">
+            <a:pPr>
+              <a:defRPr sz="975" b="1">
+                <a:solidFill>
+                  <a:srgbClr val="2048A8"/>
+                </a:solidFill>
+              </a:defRPr>
+            </a:pPr>
+            <a:r>
+              <a:rPr sz="975" b="1">
+                <a:solidFill>
+                  <a:srgbClr val="2048A8"/>
+                </a:solidFill>
+              </a:rPr>
+              <a:t>Решение</a:t>
+            </a:r>
+          </a:p>
+        </p:txBody>
+      </p:sp>
+      <p:sp>
+        <p:nvSpPr>
+          <p:cNvPr id="28" name="">
+            <a:extLst xmlns:a="http://schemas.openxmlformats.org/drawingml/2006/main">
+              <a:ext uri="{FF2B5EF4-FFF2-40B4-BE49-F238E27FC236}">
+                <a16:creationId xmlns:a16="http://schemas.microsoft.com/office/drawing/2014/main" id="{C924843B-9491-41AE-ABA8-493F34A598E2}"/>
+              </a:ext>
+            </a:extLst>
+          </p:cNvPr>
+          <p:cNvSpPr>
+            <a:spLocks xmlns:a="http://schemas.openxmlformats.org/drawingml/2006/main" noGrp="1"/>
+          </p:cNvSpPr>
+          <p:nvPr/>
+        </p:nvSpPr>
+        <p:spPr>
+          <a:xfrm xmlns:a="http://schemas.openxmlformats.org/drawingml/2006/main">
+            <a:off x="1962150" y="4667250"/>
+            <a:ext cx="3810000" cy="323850"/>
+          </a:xfrm>
+          <a:prstGeom xmlns:a="http://schemas.openxmlformats.org/drawingml/2006/main" prst="rect">
+            <a:avLst/>
+          </a:prstGeom>
+          <a:noFill xmlns:a="http://schemas.openxmlformats.org/drawingml/2006/main"/>
+          <a:ln xmlns:a="http://schemas.openxmlformats.org/drawingml/2006/main" w="0">
+            <a:noFill/>
+            <a:prstDash val="solid"/>
+          </a:ln>
+        </p:spPr>
+        <p:txBody>
+          <a:bodyPr xmlns:a="http://schemas.openxmlformats.org/drawingml/2006/main"/>
+          <a:lstStyle xmlns:a="http://schemas.openxmlformats.org/drawingml/2006/main"/>
+          <a:p xmlns:a="http://schemas.openxmlformats.org/drawingml/2006/main">
+            <a:pPr>
+              <a:defRPr sz="1050" b="1">
+                <a:solidFill>
+                  <a:srgbClr val="102A63"/>
+                </a:solidFill>
+              </a:defRPr>
+            </a:pPr>
+            <a:r>
+              <a:rPr sz="1050" b="1">
+                <a:solidFill>
+                  <a:srgbClr val="102A63"/>
+                </a:solidFill>
+              </a:rPr>
+              <a:t>{{IT_3_SOLUTION}}</a:t>
+            </a:r>
+          </a:p>
+        </p:txBody>
+      </p:sp>
+      <p:sp>
+        <p:nvSpPr>
+          <p:cNvPr id="29" name="">
+            <a:extLst xmlns:a="http://schemas.openxmlformats.org/drawingml/2006/main">
+              <a:ext uri="{FF2B5EF4-FFF2-40B4-BE49-F238E27FC236}">
+                <a16:creationId xmlns:a16="http://schemas.microsoft.com/office/drawing/2014/main" id="{364CBE8E-58E5-4A00-8ADE-716D8253E640}"/>
+              </a:ext>
+            </a:extLst>
+          </p:cNvPr>
+          <p:cNvSpPr>
+            <a:spLocks xmlns:a="http://schemas.openxmlformats.org/drawingml/2006/main" noGrp="1"/>
+          </p:cNvSpPr>
+          <p:nvPr/>
+        </p:nvSpPr>
+        <p:spPr>
+          <a:xfrm xmlns:a="http://schemas.openxmlformats.org/drawingml/2006/main">
+            <a:off x="6019800" y="4686300"/>
+            <a:ext cx="1104900" cy="190500"/>
+          </a:xfrm>
+          <a:prstGeom xmlns:a="http://schemas.openxmlformats.org/drawingml/2006/main" prst="rect">
+            <a:avLst/>
+          </a:prstGeom>
+          <a:noFill xmlns:a="http://schemas.openxmlformats.org/drawingml/2006/main"/>
+          <a:ln xmlns:a="http://schemas.openxmlformats.org/drawingml/2006/main" w="0">
+            <a:noFill/>
+            <a:prstDash val="solid"/>
+          </a:ln>
+        </p:spPr>
+        <p:txBody>
+          <a:bodyPr xmlns:a="http://schemas.openxmlformats.org/drawingml/2006/main"/>
+          <a:lstStyle xmlns:a="http://schemas.openxmlformats.org/drawingml/2006/main"/>
+          <a:p xmlns:a="http://schemas.openxmlformats.org/drawingml/2006/main">
+            <a:pPr>
+              <a:defRPr sz="975" b="1">
+                <a:solidFill>
+                  <a:srgbClr val="2048A8"/>
+                </a:solidFill>
+              </a:defRPr>
+            </a:pPr>
+            <a:r>
+              <a:rPr sz="975" b="1">
+                <a:solidFill>
+                  <a:srgbClr val="2048A8"/>
+                </a:solidFill>
+              </a:rPr>
+              <a:t>Производители</a:t>
+            </a:r>
+          </a:p>
+        </p:txBody>
+      </p:sp>
+      <p:sp>
+        <p:nvSpPr>
+          <p:cNvPr id="30" name="">
+            <a:extLst xmlns:a="http://schemas.openxmlformats.org/drawingml/2006/main">
+              <a:ext uri="{FF2B5EF4-FFF2-40B4-BE49-F238E27FC236}">
+                <a16:creationId xmlns:a16="http://schemas.microsoft.com/office/drawing/2014/main" id="{D9DC8B40-3FBA-4DFD-965E-0B785F93C871}"/>
+              </a:ext>
+            </a:extLst>
+          </p:cNvPr>
+          <p:cNvSpPr>
+            <a:spLocks xmlns:a="http://schemas.openxmlformats.org/drawingml/2006/main" noGrp="1"/>
+          </p:cNvSpPr>
+          <p:nvPr/>
+        </p:nvSpPr>
+        <p:spPr>
+          <a:xfrm xmlns:a="http://schemas.openxmlformats.org/drawingml/2006/main">
+            <a:off x="7181850" y="4667250"/>
+            <a:ext cx="4000500" cy="323850"/>
+          </a:xfrm>
+          <a:prstGeom xmlns:a="http://schemas.openxmlformats.org/drawingml/2006/main" prst="rect">
+            <a:avLst/>
+          </a:prstGeom>
+          <a:noFill xmlns:a="http://schemas.openxmlformats.org/drawingml/2006/main"/>
+          <a:ln xmlns:a="http://schemas.openxmlformats.org/drawingml/2006/main" w="0">
+            <a:noFill/>
+            <a:prstDash val="solid"/>
+          </a:ln>
+        </p:spPr>
+        <p:txBody>
+          <a:bodyPr xmlns:a="http://schemas.openxmlformats.org/drawingml/2006/main"/>
+          <a:lstStyle xmlns:a="http://schemas.openxmlformats.org/drawingml/2006/main"/>
+          <a:p xmlns:a="http://schemas.openxmlformats.org/drawingml/2006/main">
+            <a:pPr>
+              <a:defRPr sz="1050" b="1">
+                <a:solidFill>
+                  <a:srgbClr val="102A63"/>
+                </a:solidFill>
+              </a:defRPr>
+            </a:pPr>
+            <a:r>
+              <a:rPr sz="1050" b="1">
+                <a:solidFill>
+                  <a:srgbClr val="102A63"/>
+                </a:solidFill>
+              </a:rPr>
+              <a:t>{{IT_3_VENDORS}}</a:t>
+            </a:r>
+          </a:p>
+        </p:txBody>
+      </p:sp>
+      <p:sp>
+        <p:nvSpPr>
+          <p:cNvPr id="31" name="">
+            <a:extLst xmlns:a="http://schemas.openxmlformats.org/drawingml/2006/main">
+              <a:ext uri="{FF2B5EF4-FFF2-40B4-BE49-F238E27FC236}">
+                <a16:creationId xmlns:a16="http://schemas.microsoft.com/office/drawing/2014/main" id="{8AA0174E-01A0-4DE8-A20E-39BACC818F15}"/>
+              </a:ext>
+            </a:extLst>
+          </p:cNvPr>
+          <p:cNvSpPr>
+            <a:spLocks xmlns:a="http://schemas.openxmlformats.org/drawingml/2006/main" noGrp="1"/>
+          </p:cNvSpPr>
+          <p:nvPr/>
+        </p:nvSpPr>
+        <p:spPr>
+          <a:xfrm xmlns:a="http://schemas.openxmlformats.org/drawingml/2006/main">
+            <a:off x="1200150" y="5067300"/>
+            <a:ext cx="9982200" cy="9525"/>
           </a:xfrm>
           <a:prstGeom xmlns:a="http://schemas.openxmlformats.org/drawingml/2006/main" prst="rect">
             <a:avLst/>
@@ -5826,21 +6709,21 @@
       </p:sp>
       <p:sp>
         <p:nvSpPr>
-          <p:cNvPr id="17" name="">
-            <a:extLst xmlns:a="http://schemas.openxmlformats.org/drawingml/2006/main">
-              <a:ext uri="{FF2B5EF4-FFF2-40B4-BE49-F238E27FC236}">
-                <a16:creationId xmlns:a16="http://schemas.microsoft.com/office/drawing/2014/main" id="{6E400402-7699-4232-B22A-7636FD2FC545}"/>
-              </a:ext>
-            </a:extLst>
-          </p:cNvPr>
-          <p:cNvSpPr>
-            <a:spLocks xmlns:a="http://schemas.openxmlformats.org/drawingml/2006/main" noGrp="1"/>
-          </p:cNvSpPr>
-          <p:nvPr/>
-        </p:nvSpPr>
-        <p:spPr>
-          <a:xfrm xmlns:a="http://schemas.openxmlformats.org/drawingml/2006/main">
-            <a:off x="609600" y="5124450"/>
+          <p:cNvPr id="32" name="">
+            <a:extLst xmlns:a="http://schemas.openxmlformats.org/drawingml/2006/main">
+              <a:ext uri="{FF2B5EF4-FFF2-40B4-BE49-F238E27FC236}">
+                <a16:creationId xmlns:a16="http://schemas.microsoft.com/office/drawing/2014/main" id="{AED3055E-80C3-446A-851D-8576D1C9ECCA}"/>
+              </a:ext>
+            </a:extLst>
+          </p:cNvPr>
+          <p:cNvSpPr>
+            <a:spLocks xmlns:a="http://schemas.openxmlformats.org/drawingml/2006/main" noGrp="1"/>
+          </p:cNvSpPr>
+          <p:nvPr/>
+        </p:nvSpPr>
+        <p:spPr>
+          <a:xfrm xmlns:a="http://schemas.openxmlformats.org/drawingml/2006/main">
+            <a:off x="609600" y="5238750"/>
             <a:ext cx="457200" cy="266700"/>
           </a:xfrm>
           <a:prstGeom xmlns:a="http://schemas.openxmlformats.org/drawingml/2006/main" prst="rect">
@@ -5857,14 +6740,14 @@
           <a:lstStyle xmlns:a="http://schemas.openxmlformats.org/drawingml/2006/main"/>
           <a:p xmlns:a="http://schemas.openxmlformats.org/drawingml/2006/main">
             <a:pPr>
-              <a:defRPr sz="1275" b="1">
+              <a:defRPr sz="1200" b="1">
                 <a:solidFill>
                   <a:srgbClr val="2048A8"/>
                 </a:solidFill>
               </a:defRPr>
             </a:pPr>
             <a:r>
-              <a:rPr sz="1275" b="1">
+              <a:rPr sz="1200" b="1">
                 <a:solidFill>
                   <a:srgbClr val="2048A8"/>
                 </a:solidFill>
@@ -5876,22 +6759,22 @@
       </p:sp>
       <p:sp>
         <p:nvSpPr>
-          <p:cNvPr id="18" name="">
-            <a:extLst xmlns:a="http://schemas.openxmlformats.org/drawingml/2006/main">
-              <a:ext uri="{FF2B5EF4-FFF2-40B4-BE49-F238E27FC236}">
-                <a16:creationId xmlns:a16="http://schemas.microsoft.com/office/drawing/2014/main" id="{575A91EC-038F-4BB5-96AE-89AFD8942EDA}"/>
-              </a:ext>
-            </a:extLst>
-          </p:cNvPr>
-          <p:cNvSpPr>
-            <a:spLocks xmlns:a="http://schemas.openxmlformats.org/drawingml/2006/main" noGrp="1"/>
-          </p:cNvSpPr>
-          <p:nvPr/>
-        </p:nvSpPr>
-        <p:spPr>
-          <a:xfrm xmlns:a="http://schemas.openxmlformats.org/drawingml/2006/main">
-            <a:off x="1200150" y="5067300"/>
-            <a:ext cx="10048875" cy="1028700"/>
+          <p:cNvPr id="33" name="">
+            <a:extLst xmlns:a="http://schemas.openxmlformats.org/drawingml/2006/main">
+              <a:ext uri="{FF2B5EF4-FFF2-40B4-BE49-F238E27FC236}">
+                <a16:creationId xmlns:a16="http://schemas.microsoft.com/office/drawing/2014/main" id="{7179560C-8263-45E3-88CE-1BBCD2A7E913}"/>
+              </a:ext>
+            </a:extLst>
+          </p:cNvPr>
+          <p:cNvSpPr>
+            <a:spLocks xmlns:a="http://schemas.openxmlformats.org/drawingml/2006/main" noGrp="1"/>
+          </p:cNvSpPr>
+          <p:nvPr/>
+        </p:nvSpPr>
+        <p:spPr>
+          <a:xfrm xmlns:a="http://schemas.openxmlformats.org/drawingml/2006/main">
+            <a:off x="1200150" y="5181600"/>
+            <a:ext cx="9982200" cy="266700"/>
           </a:xfrm>
           <a:prstGeom xmlns:a="http://schemas.openxmlformats.org/drawingml/2006/main" prst="rect">
             <a:avLst/>
@@ -5907,19 +6790,269 @@
           <a:lstStyle xmlns:a="http://schemas.openxmlformats.org/drawingml/2006/main"/>
           <a:p xmlns:a="http://schemas.openxmlformats.org/drawingml/2006/main">
             <a:pPr>
-              <a:defRPr sz="1350">
+              <a:defRPr sz="1425" b="1">
                 <a:solidFill>
                   <a:srgbClr val="102A63"/>
                 </a:solidFill>
               </a:defRPr>
             </a:pPr>
             <a:r>
-              <a:rPr sz="1350">
+              <a:rPr sz="1425" b="1">
                 <a:solidFill>
                   <a:srgbClr val="102A63"/>
                 </a:solidFill>
               </a:rPr>
-              <a:t>{{IT_4}}</a:t>
+              <a:t>{{IT_4_TITLE}}</a:t>
+            </a:r>
+          </a:p>
+        </p:txBody>
+      </p:sp>
+      <p:sp>
+        <p:nvSpPr>
+          <p:cNvPr id="34" name="">
+            <a:extLst xmlns:a="http://schemas.openxmlformats.org/drawingml/2006/main">
+              <a:ext uri="{FF2B5EF4-FFF2-40B4-BE49-F238E27FC236}">
+                <a16:creationId xmlns:a16="http://schemas.microsoft.com/office/drawing/2014/main" id="{892907C9-2C36-4F98-AC21-CBE9744B36FC}"/>
+              </a:ext>
+            </a:extLst>
+          </p:cNvPr>
+          <p:cNvSpPr>
+            <a:spLocks xmlns:a="http://schemas.openxmlformats.org/drawingml/2006/main" noGrp="1"/>
+          </p:cNvSpPr>
+          <p:nvPr/>
+        </p:nvSpPr>
+        <p:spPr>
+          <a:xfrm xmlns:a="http://schemas.openxmlformats.org/drawingml/2006/main">
+            <a:off x="1200150" y="5476875"/>
+            <a:ext cx="9982200" cy="400050"/>
+          </a:xfrm>
+          <a:prstGeom xmlns:a="http://schemas.openxmlformats.org/drawingml/2006/main" prst="rect">
+            <a:avLst/>
+          </a:prstGeom>
+          <a:noFill xmlns:a="http://schemas.openxmlformats.org/drawingml/2006/main"/>
+          <a:ln xmlns:a="http://schemas.openxmlformats.org/drawingml/2006/main" w="0">
+            <a:noFill/>
+            <a:prstDash val="solid"/>
+          </a:ln>
+        </p:spPr>
+        <p:txBody>
+          <a:bodyPr xmlns:a="http://schemas.openxmlformats.org/drawingml/2006/main"/>
+          <a:lstStyle xmlns:a="http://schemas.openxmlformats.org/drawingml/2006/main"/>
+          <a:p xmlns:a="http://schemas.openxmlformats.org/drawingml/2006/main">
+            <a:pPr>
+              <a:defRPr sz="1125">
+                <a:solidFill>
+                  <a:srgbClr val="596780"/>
+                </a:solidFill>
+              </a:defRPr>
+            </a:pPr>
+            <a:r>
+              <a:rPr sz="1125">
+                <a:solidFill>
+                  <a:srgbClr val="596780"/>
+                </a:solidFill>
+              </a:rPr>
+              <a:t>{{IT_4_ACTION}}</a:t>
+            </a:r>
+          </a:p>
+        </p:txBody>
+      </p:sp>
+      <p:sp>
+        <p:nvSpPr>
+          <p:cNvPr id="35" name="">
+            <a:extLst xmlns:a="http://schemas.openxmlformats.org/drawingml/2006/main">
+              <a:ext uri="{FF2B5EF4-FFF2-40B4-BE49-F238E27FC236}">
+                <a16:creationId xmlns:a16="http://schemas.microsoft.com/office/drawing/2014/main" id="{A364AE7E-A967-4405-840B-05B8AF61E99E}"/>
+              </a:ext>
+            </a:extLst>
+          </p:cNvPr>
+          <p:cNvSpPr>
+            <a:spLocks xmlns:a="http://schemas.openxmlformats.org/drawingml/2006/main" noGrp="1"/>
+          </p:cNvSpPr>
+          <p:nvPr/>
+        </p:nvSpPr>
+        <p:spPr>
+          <a:xfrm xmlns:a="http://schemas.openxmlformats.org/drawingml/2006/main">
+            <a:off x="1200150" y="5943600"/>
+            <a:ext cx="742950" cy="190500"/>
+          </a:xfrm>
+          <a:prstGeom xmlns:a="http://schemas.openxmlformats.org/drawingml/2006/main" prst="rect">
+            <a:avLst/>
+          </a:prstGeom>
+          <a:noFill xmlns:a="http://schemas.openxmlformats.org/drawingml/2006/main"/>
+          <a:ln xmlns:a="http://schemas.openxmlformats.org/drawingml/2006/main" w="0">
+            <a:noFill/>
+            <a:prstDash val="solid"/>
+          </a:ln>
+        </p:spPr>
+        <p:txBody>
+          <a:bodyPr xmlns:a="http://schemas.openxmlformats.org/drawingml/2006/main"/>
+          <a:lstStyle xmlns:a="http://schemas.openxmlformats.org/drawingml/2006/main"/>
+          <a:p xmlns:a="http://schemas.openxmlformats.org/drawingml/2006/main">
+            <a:pPr>
+              <a:defRPr sz="975" b="1">
+                <a:solidFill>
+                  <a:srgbClr val="2048A8"/>
+                </a:solidFill>
+              </a:defRPr>
+            </a:pPr>
+            <a:r>
+              <a:rPr sz="975" b="1">
+                <a:solidFill>
+                  <a:srgbClr val="2048A8"/>
+                </a:solidFill>
+              </a:rPr>
+              <a:t>Решение</a:t>
+            </a:r>
+          </a:p>
+        </p:txBody>
+      </p:sp>
+      <p:sp>
+        <p:nvSpPr>
+          <p:cNvPr id="36" name="">
+            <a:extLst xmlns:a="http://schemas.openxmlformats.org/drawingml/2006/main">
+              <a:ext uri="{FF2B5EF4-FFF2-40B4-BE49-F238E27FC236}">
+                <a16:creationId xmlns:a16="http://schemas.microsoft.com/office/drawing/2014/main" id="{F3DA280D-0219-42BA-A088-FCA0702218DA}"/>
+              </a:ext>
+            </a:extLst>
+          </p:cNvPr>
+          <p:cNvSpPr>
+            <a:spLocks xmlns:a="http://schemas.openxmlformats.org/drawingml/2006/main" noGrp="1"/>
+          </p:cNvSpPr>
+          <p:nvPr/>
+        </p:nvSpPr>
+        <p:spPr>
+          <a:xfrm xmlns:a="http://schemas.openxmlformats.org/drawingml/2006/main">
+            <a:off x="1962150" y="5924550"/>
+            <a:ext cx="3810000" cy="323850"/>
+          </a:xfrm>
+          <a:prstGeom xmlns:a="http://schemas.openxmlformats.org/drawingml/2006/main" prst="rect">
+            <a:avLst/>
+          </a:prstGeom>
+          <a:noFill xmlns:a="http://schemas.openxmlformats.org/drawingml/2006/main"/>
+          <a:ln xmlns:a="http://schemas.openxmlformats.org/drawingml/2006/main" w="0">
+            <a:noFill/>
+            <a:prstDash val="solid"/>
+          </a:ln>
+        </p:spPr>
+        <p:txBody>
+          <a:bodyPr xmlns:a="http://schemas.openxmlformats.org/drawingml/2006/main"/>
+          <a:lstStyle xmlns:a="http://schemas.openxmlformats.org/drawingml/2006/main"/>
+          <a:p xmlns:a="http://schemas.openxmlformats.org/drawingml/2006/main">
+            <a:pPr>
+              <a:defRPr sz="1050" b="1">
+                <a:solidFill>
+                  <a:srgbClr val="102A63"/>
+                </a:solidFill>
+              </a:defRPr>
+            </a:pPr>
+            <a:r>
+              <a:rPr sz="1050" b="1">
+                <a:solidFill>
+                  <a:srgbClr val="102A63"/>
+                </a:solidFill>
+              </a:rPr>
+              <a:t>{{IT_4_SOLUTION}}</a:t>
+            </a:r>
+          </a:p>
+        </p:txBody>
+      </p:sp>
+      <p:sp>
+        <p:nvSpPr>
+          <p:cNvPr id="37" name="">
+            <a:extLst xmlns:a="http://schemas.openxmlformats.org/drawingml/2006/main">
+              <a:ext uri="{FF2B5EF4-FFF2-40B4-BE49-F238E27FC236}">
+                <a16:creationId xmlns:a16="http://schemas.microsoft.com/office/drawing/2014/main" id="{7B750472-18AE-4F3C-ADC9-B7F9E0F82E4E}"/>
+              </a:ext>
+            </a:extLst>
+          </p:cNvPr>
+          <p:cNvSpPr>
+            <a:spLocks xmlns:a="http://schemas.openxmlformats.org/drawingml/2006/main" noGrp="1"/>
+          </p:cNvSpPr>
+          <p:nvPr/>
+        </p:nvSpPr>
+        <p:spPr>
+          <a:xfrm xmlns:a="http://schemas.openxmlformats.org/drawingml/2006/main">
+            <a:off x="6019800" y="5943600"/>
+            <a:ext cx="1104900" cy="190500"/>
+          </a:xfrm>
+          <a:prstGeom xmlns:a="http://schemas.openxmlformats.org/drawingml/2006/main" prst="rect">
+            <a:avLst/>
+          </a:prstGeom>
+          <a:noFill xmlns:a="http://schemas.openxmlformats.org/drawingml/2006/main"/>
+          <a:ln xmlns:a="http://schemas.openxmlformats.org/drawingml/2006/main" w="0">
+            <a:noFill/>
+            <a:prstDash val="solid"/>
+          </a:ln>
+        </p:spPr>
+        <p:txBody>
+          <a:bodyPr xmlns:a="http://schemas.openxmlformats.org/drawingml/2006/main"/>
+          <a:lstStyle xmlns:a="http://schemas.openxmlformats.org/drawingml/2006/main"/>
+          <a:p xmlns:a="http://schemas.openxmlformats.org/drawingml/2006/main">
+            <a:pPr>
+              <a:defRPr sz="975" b="1">
+                <a:solidFill>
+                  <a:srgbClr val="2048A8"/>
+                </a:solidFill>
+              </a:defRPr>
+            </a:pPr>
+            <a:r>
+              <a:rPr sz="975" b="1">
+                <a:solidFill>
+                  <a:srgbClr val="2048A8"/>
+                </a:solidFill>
+              </a:rPr>
+              <a:t>Производители</a:t>
+            </a:r>
+          </a:p>
+        </p:txBody>
+      </p:sp>
+      <p:sp>
+        <p:nvSpPr>
+          <p:cNvPr id="38" name="">
+            <a:extLst xmlns:a="http://schemas.openxmlformats.org/drawingml/2006/main">
+              <a:ext uri="{FF2B5EF4-FFF2-40B4-BE49-F238E27FC236}">
+                <a16:creationId xmlns:a16="http://schemas.microsoft.com/office/drawing/2014/main" id="{2FA63911-AB8A-4865-BE32-286F8AD3AEBD}"/>
+              </a:ext>
+            </a:extLst>
+          </p:cNvPr>
+          <p:cNvSpPr>
+            <a:spLocks xmlns:a="http://schemas.openxmlformats.org/drawingml/2006/main" noGrp="1"/>
+          </p:cNvSpPr>
+          <p:nvPr/>
+        </p:nvSpPr>
+        <p:spPr>
+          <a:xfrm xmlns:a="http://schemas.openxmlformats.org/drawingml/2006/main">
+            <a:off x="7181850" y="5924550"/>
+            <a:ext cx="4000500" cy="323850"/>
+          </a:xfrm>
+          <a:prstGeom xmlns:a="http://schemas.openxmlformats.org/drawingml/2006/main" prst="rect">
+            <a:avLst/>
+          </a:prstGeom>
+          <a:noFill xmlns:a="http://schemas.openxmlformats.org/drawingml/2006/main"/>
+          <a:ln xmlns:a="http://schemas.openxmlformats.org/drawingml/2006/main" w="0">
+            <a:noFill/>
+            <a:prstDash val="solid"/>
+          </a:ln>
+        </p:spPr>
+        <p:txBody>
+          <a:bodyPr xmlns:a="http://schemas.openxmlformats.org/drawingml/2006/main"/>
+          <a:lstStyle xmlns:a="http://schemas.openxmlformats.org/drawingml/2006/main"/>
+          <a:p xmlns:a="http://schemas.openxmlformats.org/drawingml/2006/main">
+            <a:pPr>
+              <a:defRPr sz="1050" b="1">
+                <a:solidFill>
+                  <a:srgbClr val="102A63"/>
+                </a:solidFill>
+              </a:defRPr>
+            </a:pPr>
+            <a:r>
+              <a:rPr sz="1050" b="1">
+                <a:solidFill>
+                  <a:srgbClr val="102A63"/>
+                </a:solidFill>
+              </a:rPr>
+              <a:t>{{IT_4_VENDORS}}</a:t>
             </a:r>
           </a:p>
         </p:txBody>
@@ -5927,7 +7060,7 @@
     </p:spTree>
     <p:extLst>
       <p:ext uri="{BB962C8B-B14F-4D97-AF65-F5344CB8AC3E}">
-        <p14:creationId xmlns:p14="http://schemas.microsoft.com/office/powerpoint/2010/main" val="856346500"/>
+        <p14:creationId xmlns:p14="http://schemas.microsoft.com/office/powerpoint/2010/main" val="1410818734"/>
       </p:ext>
     </p:extLst>
   </p:cSld>
@@ -5958,7 +7091,7 @@
           <p:cNvPr id="1" name="">
             <a:extLst xmlns:a="http://schemas.openxmlformats.org/drawingml/2006/main">
               <a:ext uri="{FF2B5EF4-FFF2-40B4-BE49-F238E27FC236}">
-                <a16:creationId xmlns:a16="http://schemas.microsoft.com/office/drawing/2014/main" id="{D696C02B-03C9-4560-9B9E-AC3046C9B03A}"/>
+                <a16:creationId xmlns:a16="http://schemas.microsoft.com/office/drawing/2014/main" id="{46042D66-DD95-414C-825C-B13003D4F591}"/>
               </a:ext>
             </a:extLst>
           </p:cNvPr>
@@ -5986,14 +7119,14 @@
       </p:sp>
       <p:pic>
         <p:nvPicPr>
-          <p:cNvPr id="20" name=""/>
+          <p:cNvPr id="40" name=""/>
           <p:cNvPicPr>
             <a:picLocks xmlns:a="http://schemas.openxmlformats.org/drawingml/2006/main" noChangeAspect="1"/>
           </p:cNvPicPr>
           <p:nvPr/>
         </p:nvPicPr>
         <p:blipFill>
-          <a:blip xmlns:r="http://schemas.openxmlformats.org/officeDocument/2006/relationships" xmlns:a="http://schemas.openxmlformats.org/drawingml/2006/main" r:embed="R582d8399cc374361"/>
+          <a:blip xmlns:r="http://schemas.openxmlformats.org/officeDocument/2006/relationships" xmlns:a="http://schemas.openxmlformats.org/drawingml/2006/main" r:embed="R57257165ae534491"/>
           <a:stretch xmlns:a="http://schemas.openxmlformats.org/drawingml/2006/main"/>
         </p:blipFill>
         <p:spPr>
@@ -6011,7 +7144,7 @@
           <p:cNvPr id="3" name="">
             <a:extLst xmlns:a="http://schemas.openxmlformats.org/drawingml/2006/main">
               <a:ext uri="{FF2B5EF4-FFF2-40B4-BE49-F238E27FC236}">
-                <a16:creationId xmlns:a16="http://schemas.microsoft.com/office/drawing/2014/main" id="{906E0850-E65E-4A1B-9830-48932085D699}"/>
+                <a16:creationId xmlns:a16="http://schemas.microsoft.com/office/drawing/2014/main" id="{18FA2A4E-A039-4E1A-B7A2-50BC33A00074}"/>
               </a:ext>
             </a:extLst>
           </p:cNvPr>
@@ -6061,7 +7194,7 @@
           <p:cNvPr id="4" name="">
             <a:extLst xmlns:a="http://schemas.openxmlformats.org/drawingml/2006/main">
               <a:ext uri="{FF2B5EF4-FFF2-40B4-BE49-F238E27FC236}">
-                <a16:creationId xmlns:a16="http://schemas.microsoft.com/office/drawing/2014/main" id="{368EE4F8-21D0-479F-A6AF-D96FB17B1005}"/>
+                <a16:creationId xmlns:a16="http://schemas.microsoft.com/office/drawing/2014/main" id="{EF8A6CE7-E6E3-414C-927C-3D98BAF70C24}"/>
               </a:ext>
             </a:extLst>
           </p:cNvPr>
@@ -6094,7 +7227,7 @@
           <p:cNvPr id="5" name="">
             <a:extLst xmlns:a="http://schemas.openxmlformats.org/drawingml/2006/main">
               <a:ext uri="{FF2B5EF4-FFF2-40B4-BE49-F238E27FC236}">
-                <a16:creationId xmlns:a16="http://schemas.microsoft.com/office/drawing/2014/main" id="{358AA138-71EB-46AE-BF9D-C9B2B19FCEE5}"/>
+                <a16:creationId xmlns:a16="http://schemas.microsoft.com/office/drawing/2014/main" id="{666CEC1D-4BB5-4E81-8813-9C94723126F7}"/>
               </a:ext>
             </a:extLst>
           </p:cNvPr>
@@ -6125,7 +7258,7 @@
           <p:cNvPr id="6" name="">
             <a:extLst xmlns:a="http://schemas.openxmlformats.org/drawingml/2006/main">
               <a:ext uri="{FF2B5EF4-FFF2-40B4-BE49-F238E27FC236}">
-                <a16:creationId xmlns:a16="http://schemas.microsoft.com/office/drawing/2014/main" id="{CA860569-6BCA-4294-98B9-06381C64F241}"/>
+                <a16:creationId xmlns:a16="http://schemas.microsoft.com/office/drawing/2014/main" id="{DFA06336-7D3C-4E63-A706-A9CEA9F51C69}"/>
               </a:ext>
             </a:extLst>
           </p:cNvPr>
@@ -6175,7 +7308,7 @@
           <p:cNvPr id="7" name="">
             <a:extLst xmlns:a="http://schemas.openxmlformats.org/drawingml/2006/main">
               <a:ext uri="{FF2B5EF4-FFF2-40B4-BE49-F238E27FC236}">
-                <a16:creationId xmlns:a16="http://schemas.microsoft.com/office/drawing/2014/main" id="{82866EA2-5B7A-4FCD-8D2E-DD105E027F36}"/>
+                <a16:creationId xmlns:a16="http://schemas.microsoft.com/office/drawing/2014/main" id="{5E76E690-54D7-45AA-8BBF-763AE5C08120}"/>
               </a:ext>
             </a:extLst>
           </p:cNvPr>
@@ -6225,18 +7358,18 @@
           <p:cNvPr id="8" name="">
             <a:extLst xmlns:a="http://schemas.openxmlformats.org/drawingml/2006/main">
               <a:ext uri="{FF2B5EF4-FFF2-40B4-BE49-F238E27FC236}">
-                <a16:creationId xmlns:a16="http://schemas.microsoft.com/office/drawing/2014/main" id="{4F031BE8-8D9D-4C87-85F7-B20D566CE4F2}"/>
-              </a:ext>
-            </a:extLst>
-          </p:cNvPr>
-          <p:cNvSpPr>
-            <a:spLocks xmlns:a="http://schemas.openxmlformats.org/drawingml/2006/main" noGrp="1"/>
-          </p:cNvSpPr>
-          <p:nvPr/>
-        </p:nvSpPr>
-        <p:spPr>
-          <a:xfrm xmlns:a="http://schemas.openxmlformats.org/drawingml/2006/main">
-            <a:off x="609600" y="1638300"/>
+                <a16:creationId xmlns:a16="http://schemas.microsoft.com/office/drawing/2014/main" id="{0D22BCCF-13EC-49CA-A2EB-EE693EB1CB5B}"/>
+              </a:ext>
+            </a:extLst>
+          </p:cNvPr>
+          <p:cNvSpPr>
+            <a:spLocks xmlns:a="http://schemas.openxmlformats.org/drawingml/2006/main" noGrp="1"/>
+          </p:cNvSpPr>
+          <p:nvPr/>
+        </p:nvSpPr>
+        <p:spPr>
+          <a:xfrm xmlns:a="http://schemas.openxmlformats.org/drawingml/2006/main">
+            <a:off x="609600" y="1466850"/>
             <a:ext cx="457200" cy="266700"/>
           </a:xfrm>
           <a:prstGeom xmlns:a="http://schemas.openxmlformats.org/drawingml/2006/main" prst="rect">
@@ -6253,14 +7386,14 @@
           <a:lstStyle xmlns:a="http://schemas.openxmlformats.org/drawingml/2006/main"/>
           <a:p xmlns:a="http://schemas.openxmlformats.org/drawingml/2006/main">
             <a:pPr>
-              <a:defRPr sz="1275" b="1">
+              <a:defRPr sz="1200" b="1">
                 <a:solidFill>
                   <a:srgbClr val="2048A8"/>
                 </a:solidFill>
               </a:defRPr>
             </a:pPr>
             <a:r>
-              <a:rPr sz="1275" b="1">
+              <a:rPr sz="1200" b="1">
                 <a:solidFill>
                   <a:srgbClr val="2048A8"/>
                 </a:solidFill>
@@ -6275,19 +7408,19 @@
           <p:cNvPr id="9" name="">
             <a:extLst xmlns:a="http://schemas.openxmlformats.org/drawingml/2006/main">
               <a:ext uri="{FF2B5EF4-FFF2-40B4-BE49-F238E27FC236}">
-                <a16:creationId xmlns:a16="http://schemas.microsoft.com/office/drawing/2014/main" id="{4607DDB8-47C1-4A6E-B8AD-6E057CD1AC53}"/>
-              </a:ext>
-            </a:extLst>
-          </p:cNvPr>
-          <p:cNvSpPr>
-            <a:spLocks xmlns:a="http://schemas.openxmlformats.org/drawingml/2006/main" noGrp="1"/>
-          </p:cNvSpPr>
-          <p:nvPr/>
-        </p:nvSpPr>
-        <p:spPr>
-          <a:xfrm xmlns:a="http://schemas.openxmlformats.org/drawingml/2006/main">
-            <a:off x="1200150" y="1581150"/>
-            <a:ext cx="10048875" cy="1028700"/>
+                <a16:creationId xmlns:a16="http://schemas.microsoft.com/office/drawing/2014/main" id="{F3572C6B-D38F-42AF-83F0-F0907A2A815A}"/>
+              </a:ext>
+            </a:extLst>
+          </p:cNvPr>
+          <p:cNvSpPr>
+            <a:spLocks xmlns:a="http://schemas.openxmlformats.org/drawingml/2006/main" noGrp="1"/>
+          </p:cNvSpPr>
+          <p:nvPr/>
+        </p:nvSpPr>
+        <p:spPr>
+          <a:xfrm xmlns:a="http://schemas.openxmlformats.org/drawingml/2006/main">
+            <a:off x="1200150" y="1409700"/>
+            <a:ext cx="9982200" cy="266700"/>
           </a:xfrm>
           <a:prstGeom xmlns:a="http://schemas.openxmlformats.org/drawingml/2006/main" prst="rect">
             <a:avLst/>
@@ -6303,19 +7436,19 @@
           <a:lstStyle xmlns:a="http://schemas.openxmlformats.org/drawingml/2006/main"/>
           <a:p xmlns:a="http://schemas.openxmlformats.org/drawingml/2006/main">
             <a:pPr>
-              <a:defRPr sz="1350">
+              <a:defRPr sz="1425" b="1">
                 <a:solidFill>
                   <a:srgbClr val="102A63"/>
                 </a:solidFill>
               </a:defRPr>
             </a:pPr>
             <a:r>
-              <a:rPr sz="1350">
+              <a:rPr sz="1425" b="1">
                 <a:solidFill>
                   <a:srgbClr val="102A63"/>
                 </a:solidFill>
               </a:rPr>
-              <a:t>{{SEC_1}}</a:t>
+              <a:t>{{SEC_1_TITLE}}</a:t>
             </a:r>
           </a:p>
         </p:txBody>
@@ -6325,19 +7458,269 @@
           <p:cNvPr id="10" name="">
             <a:extLst xmlns:a="http://schemas.openxmlformats.org/drawingml/2006/main">
               <a:ext uri="{FF2B5EF4-FFF2-40B4-BE49-F238E27FC236}">
-                <a16:creationId xmlns:a16="http://schemas.microsoft.com/office/drawing/2014/main" id="{201A5C83-992C-41CB-A721-9AAC6E7BF51A}"/>
-              </a:ext>
-            </a:extLst>
-          </p:cNvPr>
-          <p:cNvSpPr>
-            <a:spLocks xmlns:a="http://schemas.openxmlformats.org/drawingml/2006/main" noGrp="1"/>
-          </p:cNvSpPr>
-          <p:nvPr/>
-        </p:nvSpPr>
-        <p:spPr>
-          <a:xfrm xmlns:a="http://schemas.openxmlformats.org/drawingml/2006/main">
-            <a:off x="1200150" y="2571750"/>
-            <a:ext cx="10048875" cy="9525"/>
+                <a16:creationId xmlns:a16="http://schemas.microsoft.com/office/drawing/2014/main" id="{1F436D7B-F24E-418F-80DA-A740A8D40B4A}"/>
+              </a:ext>
+            </a:extLst>
+          </p:cNvPr>
+          <p:cNvSpPr>
+            <a:spLocks xmlns:a="http://schemas.openxmlformats.org/drawingml/2006/main" noGrp="1"/>
+          </p:cNvSpPr>
+          <p:nvPr/>
+        </p:nvSpPr>
+        <p:spPr>
+          <a:xfrm xmlns:a="http://schemas.openxmlformats.org/drawingml/2006/main">
+            <a:off x="1200150" y="1704975"/>
+            <a:ext cx="9982200" cy="400050"/>
+          </a:xfrm>
+          <a:prstGeom xmlns:a="http://schemas.openxmlformats.org/drawingml/2006/main" prst="rect">
+            <a:avLst/>
+          </a:prstGeom>
+          <a:noFill xmlns:a="http://schemas.openxmlformats.org/drawingml/2006/main"/>
+          <a:ln xmlns:a="http://schemas.openxmlformats.org/drawingml/2006/main" w="0">
+            <a:noFill/>
+            <a:prstDash val="solid"/>
+          </a:ln>
+        </p:spPr>
+        <p:txBody>
+          <a:bodyPr xmlns:a="http://schemas.openxmlformats.org/drawingml/2006/main"/>
+          <a:lstStyle xmlns:a="http://schemas.openxmlformats.org/drawingml/2006/main"/>
+          <a:p xmlns:a="http://schemas.openxmlformats.org/drawingml/2006/main">
+            <a:pPr>
+              <a:defRPr sz="1125">
+                <a:solidFill>
+                  <a:srgbClr val="596780"/>
+                </a:solidFill>
+              </a:defRPr>
+            </a:pPr>
+            <a:r>
+              <a:rPr sz="1125">
+                <a:solidFill>
+                  <a:srgbClr val="596780"/>
+                </a:solidFill>
+              </a:rPr>
+              <a:t>{{SEC_1_ACTION}}</a:t>
+            </a:r>
+          </a:p>
+        </p:txBody>
+      </p:sp>
+      <p:sp>
+        <p:nvSpPr>
+          <p:cNvPr id="11" name="">
+            <a:extLst xmlns:a="http://schemas.openxmlformats.org/drawingml/2006/main">
+              <a:ext uri="{FF2B5EF4-FFF2-40B4-BE49-F238E27FC236}">
+                <a16:creationId xmlns:a16="http://schemas.microsoft.com/office/drawing/2014/main" id="{57A7D474-04BE-4084-BE92-DEAEEF2EDDEA}"/>
+              </a:ext>
+            </a:extLst>
+          </p:cNvPr>
+          <p:cNvSpPr>
+            <a:spLocks xmlns:a="http://schemas.openxmlformats.org/drawingml/2006/main" noGrp="1"/>
+          </p:cNvSpPr>
+          <p:nvPr/>
+        </p:nvSpPr>
+        <p:spPr>
+          <a:xfrm xmlns:a="http://schemas.openxmlformats.org/drawingml/2006/main">
+            <a:off x="1200150" y="2171700"/>
+            <a:ext cx="742950" cy="190500"/>
+          </a:xfrm>
+          <a:prstGeom xmlns:a="http://schemas.openxmlformats.org/drawingml/2006/main" prst="rect">
+            <a:avLst/>
+          </a:prstGeom>
+          <a:noFill xmlns:a="http://schemas.openxmlformats.org/drawingml/2006/main"/>
+          <a:ln xmlns:a="http://schemas.openxmlformats.org/drawingml/2006/main" w="0">
+            <a:noFill/>
+            <a:prstDash val="solid"/>
+          </a:ln>
+        </p:spPr>
+        <p:txBody>
+          <a:bodyPr xmlns:a="http://schemas.openxmlformats.org/drawingml/2006/main"/>
+          <a:lstStyle xmlns:a="http://schemas.openxmlformats.org/drawingml/2006/main"/>
+          <a:p xmlns:a="http://schemas.openxmlformats.org/drawingml/2006/main">
+            <a:pPr>
+              <a:defRPr sz="975" b="1">
+                <a:solidFill>
+                  <a:srgbClr val="2048A8"/>
+                </a:solidFill>
+              </a:defRPr>
+            </a:pPr>
+            <a:r>
+              <a:rPr sz="975" b="1">
+                <a:solidFill>
+                  <a:srgbClr val="2048A8"/>
+                </a:solidFill>
+              </a:rPr>
+              <a:t>Решение</a:t>
+            </a:r>
+          </a:p>
+        </p:txBody>
+      </p:sp>
+      <p:sp>
+        <p:nvSpPr>
+          <p:cNvPr id="12" name="">
+            <a:extLst xmlns:a="http://schemas.openxmlformats.org/drawingml/2006/main">
+              <a:ext uri="{FF2B5EF4-FFF2-40B4-BE49-F238E27FC236}">
+                <a16:creationId xmlns:a16="http://schemas.microsoft.com/office/drawing/2014/main" id="{4134A6C2-35BE-46B5-9545-25E7E742D6CB}"/>
+              </a:ext>
+            </a:extLst>
+          </p:cNvPr>
+          <p:cNvSpPr>
+            <a:spLocks xmlns:a="http://schemas.openxmlformats.org/drawingml/2006/main" noGrp="1"/>
+          </p:cNvSpPr>
+          <p:nvPr/>
+        </p:nvSpPr>
+        <p:spPr>
+          <a:xfrm xmlns:a="http://schemas.openxmlformats.org/drawingml/2006/main">
+            <a:off x="1962150" y="2152650"/>
+            <a:ext cx="3810000" cy="323850"/>
+          </a:xfrm>
+          <a:prstGeom xmlns:a="http://schemas.openxmlformats.org/drawingml/2006/main" prst="rect">
+            <a:avLst/>
+          </a:prstGeom>
+          <a:noFill xmlns:a="http://schemas.openxmlformats.org/drawingml/2006/main"/>
+          <a:ln xmlns:a="http://schemas.openxmlformats.org/drawingml/2006/main" w="0">
+            <a:noFill/>
+            <a:prstDash val="solid"/>
+          </a:ln>
+        </p:spPr>
+        <p:txBody>
+          <a:bodyPr xmlns:a="http://schemas.openxmlformats.org/drawingml/2006/main"/>
+          <a:lstStyle xmlns:a="http://schemas.openxmlformats.org/drawingml/2006/main"/>
+          <a:p xmlns:a="http://schemas.openxmlformats.org/drawingml/2006/main">
+            <a:pPr>
+              <a:defRPr sz="1050" b="1">
+                <a:solidFill>
+                  <a:srgbClr val="102A63"/>
+                </a:solidFill>
+              </a:defRPr>
+            </a:pPr>
+            <a:r>
+              <a:rPr sz="1050" b="1">
+                <a:solidFill>
+                  <a:srgbClr val="102A63"/>
+                </a:solidFill>
+              </a:rPr>
+              <a:t>{{SEC_1_SOLUTION}}</a:t>
+            </a:r>
+          </a:p>
+        </p:txBody>
+      </p:sp>
+      <p:sp>
+        <p:nvSpPr>
+          <p:cNvPr id="13" name="">
+            <a:extLst xmlns:a="http://schemas.openxmlformats.org/drawingml/2006/main">
+              <a:ext uri="{FF2B5EF4-FFF2-40B4-BE49-F238E27FC236}">
+                <a16:creationId xmlns:a16="http://schemas.microsoft.com/office/drawing/2014/main" id="{28ADFFF6-BE4D-4EAB-AF88-53FACA68B474}"/>
+              </a:ext>
+            </a:extLst>
+          </p:cNvPr>
+          <p:cNvSpPr>
+            <a:spLocks xmlns:a="http://schemas.openxmlformats.org/drawingml/2006/main" noGrp="1"/>
+          </p:cNvSpPr>
+          <p:nvPr/>
+        </p:nvSpPr>
+        <p:spPr>
+          <a:xfrm xmlns:a="http://schemas.openxmlformats.org/drawingml/2006/main">
+            <a:off x="6019800" y="2171700"/>
+            <a:ext cx="1104900" cy="190500"/>
+          </a:xfrm>
+          <a:prstGeom xmlns:a="http://schemas.openxmlformats.org/drawingml/2006/main" prst="rect">
+            <a:avLst/>
+          </a:prstGeom>
+          <a:noFill xmlns:a="http://schemas.openxmlformats.org/drawingml/2006/main"/>
+          <a:ln xmlns:a="http://schemas.openxmlformats.org/drawingml/2006/main" w="0">
+            <a:noFill/>
+            <a:prstDash val="solid"/>
+          </a:ln>
+        </p:spPr>
+        <p:txBody>
+          <a:bodyPr xmlns:a="http://schemas.openxmlformats.org/drawingml/2006/main"/>
+          <a:lstStyle xmlns:a="http://schemas.openxmlformats.org/drawingml/2006/main"/>
+          <a:p xmlns:a="http://schemas.openxmlformats.org/drawingml/2006/main">
+            <a:pPr>
+              <a:defRPr sz="975" b="1">
+                <a:solidFill>
+                  <a:srgbClr val="2048A8"/>
+                </a:solidFill>
+              </a:defRPr>
+            </a:pPr>
+            <a:r>
+              <a:rPr sz="975" b="1">
+                <a:solidFill>
+                  <a:srgbClr val="2048A8"/>
+                </a:solidFill>
+              </a:rPr>
+              <a:t>Производители</a:t>
+            </a:r>
+          </a:p>
+        </p:txBody>
+      </p:sp>
+      <p:sp>
+        <p:nvSpPr>
+          <p:cNvPr id="14" name="">
+            <a:extLst xmlns:a="http://schemas.openxmlformats.org/drawingml/2006/main">
+              <a:ext uri="{FF2B5EF4-FFF2-40B4-BE49-F238E27FC236}">
+                <a16:creationId xmlns:a16="http://schemas.microsoft.com/office/drawing/2014/main" id="{991F7450-FE8F-4605-BFBF-09BD313555E7}"/>
+              </a:ext>
+            </a:extLst>
+          </p:cNvPr>
+          <p:cNvSpPr>
+            <a:spLocks xmlns:a="http://schemas.openxmlformats.org/drawingml/2006/main" noGrp="1"/>
+          </p:cNvSpPr>
+          <p:nvPr/>
+        </p:nvSpPr>
+        <p:spPr>
+          <a:xfrm xmlns:a="http://schemas.openxmlformats.org/drawingml/2006/main">
+            <a:off x="7181850" y="2152650"/>
+            <a:ext cx="4000500" cy="323850"/>
+          </a:xfrm>
+          <a:prstGeom xmlns:a="http://schemas.openxmlformats.org/drawingml/2006/main" prst="rect">
+            <a:avLst/>
+          </a:prstGeom>
+          <a:noFill xmlns:a="http://schemas.openxmlformats.org/drawingml/2006/main"/>
+          <a:ln xmlns:a="http://schemas.openxmlformats.org/drawingml/2006/main" w="0">
+            <a:noFill/>
+            <a:prstDash val="solid"/>
+          </a:ln>
+        </p:spPr>
+        <p:txBody>
+          <a:bodyPr xmlns:a="http://schemas.openxmlformats.org/drawingml/2006/main"/>
+          <a:lstStyle xmlns:a="http://schemas.openxmlformats.org/drawingml/2006/main"/>
+          <a:p xmlns:a="http://schemas.openxmlformats.org/drawingml/2006/main">
+            <a:pPr>
+              <a:defRPr sz="1050" b="1">
+                <a:solidFill>
+                  <a:srgbClr val="102A63"/>
+                </a:solidFill>
+              </a:defRPr>
+            </a:pPr>
+            <a:r>
+              <a:rPr sz="1050" b="1">
+                <a:solidFill>
+                  <a:srgbClr val="102A63"/>
+                </a:solidFill>
+              </a:rPr>
+              <a:t>{{SEC_1_VENDORS}}</a:t>
+            </a:r>
+          </a:p>
+        </p:txBody>
+      </p:sp>
+      <p:sp>
+        <p:nvSpPr>
+          <p:cNvPr id="15" name="">
+            <a:extLst xmlns:a="http://schemas.openxmlformats.org/drawingml/2006/main">
+              <a:ext uri="{FF2B5EF4-FFF2-40B4-BE49-F238E27FC236}">
+                <a16:creationId xmlns:a16="http://schemas.microsoft.com/office/drawing/2014/main" id="{FDBB4DAC-60E5-477E-839D-E3D1DFF7E35C}"/>
+              </a:ext>
+            </a:extLst>
+          </p:cNvPr>
+          <p:cNvSpPr>
+            <a:spLocks xmlns:a="http://schemas.openxmlformats.org/drawingml/2006/main" noGrp="1"/>
+          </p:cNvSpPr>
+          <p:nvPr/>
+        </p:nvSpPr>
+        <p:spPr>
+          <a:xfrm xmlns:a="http://schemas.openxmlformats.org/drawingml/2006/main">
+            <a:off x="1200150" y="2552700"/>
+            <a:ext cx="9982200" cy="9525"/>
           </a:xfrm>
           <a:prstGeom xmlns:a="http://schemas.openxmlformats.org/drawingml/2006/main" prst="rect">
             <a:avLst/>
@@ -6353,21 +7736,21 @@
       </p:sp>
       <p:sp>
         <p:nvSpPr>
-          <p:cNvPr id="11" name="">
-            <a:extLst xmlns:a="http://schemas.openxmlformats.org/drawingml/2006/main">
-              <a:ext uri="{FF2B5EF4-FFF2-40B4-BE49-F238E27FC236}">
-                <a16:creationId xmlns:a16="http://schemas.microsoft.com/office/drawing/2014/main" id="{F3898770-4CDD-407F-AA82-61AA5A99DE8B}"/>
-              </a:ext>
-            </a:extLst>
-          </p:cNvPr>
-          <p:cNvSpPr>
-            <a:spLocks xmlns:a="http://schemas.openxmlformats.org/drawingml/2006/main" noGrp="1"/>
-          </p:cNvSpPr>
-          <p:nvPr/>
-        </p:nvSpPr>
-        <p:spPr>
-          <a:xfrm xmlns:a="http://schemas.openxmlformats.org/drawingml/2006/main">
-            <a:off x="609600" y="2800350"/>
+          <p:cNvPr id="16" name="">
+            <a:extLst xmlns:a="http://schemas.openxmlformats.org/drawingml/2006/main">
+              <a:ext uri="{FF2B5EF4-FFF2-40B4-BE49-F238E27FC236}">
+                <a16:creationId xmlns:a16="http://schemas.microsoft.com/office/drawing/2014/main" id="{56ECD0E7-BE61-4D73-8544-03E81B2421BE}"/>
+              </a:ext>
+            </a:extLst>
+          </p:cNvPr>
+          <p:cNvSpPr>
+            <a:spLocks xmlns:a="http://schemas.openxmlformats.org/drawingml/2006/main" noGrp="1"/>
+          </p:cNvSpPr>
+          <p:nvPr/>
+        </p:nvSpPr>
+        <p:spPr>
+          <a:xfrm xmlns:a="http://schemas.openxmlformats.org/drawingml/2006/main">
+            <a:off x="609600" y="2724150"/>
             <a:ext cx="457200" cy="266700"/>
           </a:xfrm>
           <a:prstGeom xmlns:a="http://schemas.openxmlformats.org/drawingml/2006/main" prst="rect">
@@ -6384,14 +7767,14 @@
           <a:lstStyle xmlns:a="http://schemas.openxmlformats.org/drawingml/2006/main"/>
           <a:p xmlns:a="http://schemas.openxmlformats.org/drawingml/2006/main">
             <a:pPr>
-              <a:defRPr sz="1275" b="1">
+              <a:defRPr sz="1200" b="1">
                 <a:solidFill>
                   <a:srgbClr val="2048A8"/>
                 </a:solidFill>
               </a:defRPr>
             </a:pPr>
             <a:r>
-              <a:rPr sz="1275" b="1">
+              <a:rPr sz="1200" b="1">
                 <a:solidFill>
                   <a:srgbClr val="2048A8"/>
                 </a:solidFill>
@@ -6403,22 +7786,22 @@
       </p:sp>
       <p:sp>
         <p:nvSpPr>
-          <p:cNvPr id="12" name="">
-            <a:extLst xmlns:a="http://schemas.openxmlformats.org/drawingml/2006/main">
-              <a:ext uri="{FF2B5EF4-FFF2-40B4-BE49-F238E27FC236}">
-                <a16:creationId xmlns:a16="http://schemas.microsoft.com/office/drawing/2014/main" id="{D18E7F69-7AE7-4AC0-817A-8D26A63502E1}"/>
-              </a:ext>
-            </a:extLst>
-          </p:cNvPr>
-          <p:cNvSpPr>
-            <a:spLocks xmlns:a="http://schemas.openxmlformats.org/drawingml/2006/main" noGrp="1"/>
-          </p:cNvSpPr>
-          <p:nvPr/>
-        </p:nvSpPr>
-        <p:spPr>
-          <a:xfrm xmlns:a="http://schemas.openxmlformats.org/drawingml/2006/main">
-            <a:off x="1200150" y="2743200"/>
-            <a:ext cx="10048875" cy="1028700"/>
+          <p:cNvPr id="17" name="">
+            <a:extLst xmlns:a="http://schemas.openxmlformats.org/drawingml/2006/main">
+              <a:ext uri="{FF2B5EF4-FFF2-40B4-BE49-F238E27FC236}">
+                <a16:creationId xmlns:a16="http://schemas.microsoft.com/office/drawing/2014/main" id="{9647DE8C-A184-4B11-B2F7-9E6D36974EDA}"/>
+              </a:ext>
+            </a:extLst>
+          </p:cNvPr>
+          <p:cNvSpPr>
+            <a:spLocks xmlns:a="http://schemas.openxmlformats.org/drawingml/2006/main" noGrp="1"/>
+          </p:cNvSpPr>
+          <p:nvPr/>
+        </p:nvSpPr>
+        <p:spPr>
+          <a:xfrm xmlns:a="http://schemas.openxmlformats.org/drawingml/2006/main">
+            <a:off x="1200150" y="2667000"/>
+            <a:ext cx="9982200" cy="266700"/>
           </a:xfrm>
           <a:prstGeom xmlns:a="http://schemas.openxmlformats.org/drawingml/2006/main" prst="rect">
             <a:avLst/>
@@ -6434,41 +7817,291 @@
           <a:lstStyle xmlns:a="http://schemas.openxmlformats.org/drawingml/2006/main"/>
           <a:p xmlns:a="http://schemas.openxmlformats.org/drawingml/2006/main">
             <a:pPr>
-              <a:defRPr sz="1350">
+              <a:defRPr sz="1425" b="1">
                 <a:solidFill>
                   <a:srgbClr val="102A63"/>
                 </a:solidFill>
               </a:defRPr>
             </a:pPr>
             <a:r>
-              <a:rPr sz="1350">
+              <a:rPr sz="1425" b="1">
                 <a:solidFill>
                   <a:srgbClr val="102A63"/>
                 </a:solidFill>
               </a:rPr>
-              <a:t>{{SEC_2}}</a:t>
-            </a:r>
-          </a:p>
-        </p:txBody>
-      </p:sp>
-      <p:sp>
-        <p:nvSpPr>
-          <p:cNvPr id="13" name="">
-            <a:extLst xmlns:a="http://schemas.openxmlformats.org/drawingml/2006/main">
-              <a:ext uri="{FF2B5EF4-FFF2-40B4-BE49-F238E27FC236}">
-                <a16:creationId xmlns:a16="http://schemas.microsoft.com/office/drawing/2014/main" id="{989BD021-0B12-456C-9219-8274482D27BF}"/>
-              </a:ext>
-            </a:extLst>
-          </p:cNvPr>
-          <p:cNvSpPr>
-            <a:spLocks xmlns:a="http://schemas.openxmlformats.org/drawingml/2006/main" noGrp="1"/>
-          </p:cNvSpPr>
-          <p:nvPr/>
-        </p:nvSpPr>
-        <p:spPr>
-          <a:xfrm xmlns:a="http://schemas.openxmlformats.org/drawingml/2006/main">
-            <a:off x="1200150" y="3733800"/>
-            <a:ext cx="10048875" cy="9525"/>
+              <a:t>{{SEC_2_TITLE}}</a:t>
+            </a:r>
+          </a:p>
+        </p:txBody>
+      </p:sp>
+      <p:sp>
+        <p:nvSpPr>
+          <p:cNvPr id="18" name="">
+            <a:extLst xmlns:a="http://schemas.openxmlformats.org/drawingml/2006/main">
+              <a:ext uri="{FF2B5EF4-FFF2-40B4-BE49-F238E27FC236}">
+                <a16:creationId xmlns:a16="http://schemas.microsoft.com/office/drawing/2014/main" id="{F7F8B478-7CE2-4825-96BD-F18D4DEE6A6B}"/>
+              </a:ext>
+            </a:extLst>
+          </p:cNvPr>
+          <p:cNvSpPr>
+            <a:spLocks xmlns:a="http://schemas.openxmlformats.org/drawingml/2006/main" noGrp="1"/>
+          </p:cNvSpPr>
+          <p:nvPr/>
+        </p:nvSpPr>
+        <p:spPr>
+          <a:xfrm xmlns:a="http://schemas.openxmlformats.org/drawingml/2006/main">
+            <a:off x="1200150" y="2962275"/>
+            <a:ext cx="9982200" cy="400050"/>
+          </a:xfrm>
+          <a:prstGeom xmlns:a="http://schemas.openxmlformats.org/drawingml/2006/main" prst="rect">
+            <a:avLst/>
+          </a:prstGeom>
+          <a:noFill xmlns:a="http://schemas.openxmlformats.org/drawingml/2006/main"/>
+          <a:ln xmlns:a="http://schemas.openxmlformats.org/drawingml/2006/main" w="0">
+            <a:noFill/>
+            <a:prstDash val="solid"/>
+          </a:ln>
+        </p:spPr>
+        <p:txBody>
+          <a:bodyPr xmlns:a="http://schemas.openxmlformats.org/drawingml/2006/main"/>
+          <a:lstStyle xmlns:a="http://schemas.openxmlformats.org/drawingml/2006/main"/>
+          <a:p xmlns:a="http://schemas.openxmlformats.org/drawingml/2006/main">
+            <a:pPr>
+              <a:defRPr sz="1125">
+                <a:solidFill>
+                  <a:srgbClr val="596780"/>
+                </a:solidFill>
+              </a:defRPr>
+            </a:pPr>
+            <a:r>
+              <a:rPr sz="1125">
+                <a:solidFill>
+                  <a:srgbClr val="596780"/>
+                </a:solidFill>
+              </a:rPr>
+              <a:t>{{SEC_2_ACTION}}</a:t>
+            </a:r>
+          </a:p>
+        </p:txBody>
+      </p:sp>
+      <p:sp>
+        <p:nvSpPr>
+          <p:cNvPr id="19" name="">
+            <a:extLst xmlns:a="http://schemas.openxmlformats.org/drawingml/2006/main">
+              <a:ext uri="{FF2B5EF4-FFF2-40B4-BE49-F238E27FC236}">
+                <a16:creationId xmlns:a16="http://schemas.microsoft.com/office/drawing/2014/main" id="{F242A56F-01B7-4646-A5F4-F9325201279B}"/>
+              </a:ext>
+            </a:extLst>
+          </p:cNvPr>
+          <p:cNvSpPr>
+            <a:spLocks xmlns:a="http://schemas.openxmlformats.org/drawingml/2006/main" noGrp="1"/>
+          </p:cNvSpPr>
+          <p:nvPr/>
+        </p:nvSpPr>
+        <p:spPr>
+          <a:xfrm xmlns:a="http://schemas.openxmlformats.org/drawingml/2006/main">
+            <a:off x="1200150" y="3429000"/>
+            <a:ext cx="742950" cy="190500"/>
+          </a:xfrm>
+          <a:prstGeom xmlns:a="http://schemas.openxmlformats.org/drawingml/2006/main" prst="rect">
+            <a:avLst/>
+          </a:prstGeom>
+          <a:noFill xmlns:a="http://schemas.openxmlformats.org/drawingml/2006/main"/>
+          <a:ln xmlns:a="http://schemas.openxmlformats.org/drawingml/2006/main" w="0">
+            <a:noFill/>
+            <a:prstDash val="solid"/>
+          </a:ln>
+        </p:spPr>
+        <p:txBody>
+          <a:bodyPr xmlns:a="http://schemas.openxmlformats.org/drawingml/2006/main"/>
+          <a:lstStyle xmlns:a="http://schemas.openxmlformats.org/drawingml/2006/main"/>
+          <a:p xmlns:a="http://schemas.openxmlformats.org/drawingml/2006/main">
+            <a:pPr>
+              <a:defRPr sz="975" b="1">
+                <a:solidFill>
+                  <a:srgbClr val="2048A8"/>
+                </a:solidFill>
+              </a:defRPr>
+            </a:pPr>
+            <a:r>
+              <a:rPr sz="975" b="1">
+                <a:solidFill>
+                  <a:srgbClr val="2048A8"/>
+                </a:solidFill>
+              </a:rPr>
+              <a:t>Решение</a:t>
+            </a:r>
+          </a:p>
+        </p:txBody>
+      </p:sp>
+      <p:sp>
+        <p:nvSpPr>
+          <p:cNvPr id="20" name="">
+            <a:extLst xmlns:a="http://schemas.openxmlformats.org/drawingml/2006/main">
+              <a:ext uri="{FF2B5EF4-FFF2-40B4-BE49-F238E27FC236}">
+                <a16:creationId xmlns:a16="http://schemas.microsoft.com/office/drawing/2014/main" id="{9647FAD5-F46C-4DF7-8DC0-CFB1BA686DB9}"/>
+              </a:ext>
+            </a:extLst>
+          </p:cNvPr>
+          <p:cNvSpPr>
+            <a:spLocks xmlns:a="http://schemas.openxmlformats.org/drawingml/2006/main" noGrp="1"/>
+          </p:cNvSpPr>
+          <p:nvPr/>
+        </p:nvSpPr>
+        <p:spPr>
+          <a:xfrm xmlns:a="http://schemas.openxmlformats.org/drawingml/2006/main">
+            <a:off x="1962150" y="3409950"/>
+            <a:ext cx="3810000" cy="323850"/>
+          </a:xfrm>
+          <a:prstGeom xmlns:a="http://schemas.openxmlformats.org/drawingml/2006/main" prst="rect">
+            <a:avLst/>
+          </a:prstGeom>
+          <a:noFill xmlns:a="http://schemas.openxmlformats.org/drawingml/2006/main"/>
+          <a:ln xmlns:a="http://schemas.openxmlformats.org/drawingml/2006/main" w="0">
+            <a:noFill/>
+            <a:prstDash val="solid"/>
+          </a:ln>
+        </p:spPr>
+        <p:txBody>
+          <a:bodyPr xmlns:a="http://schemas.openxmlformats.org/drawingml/2006/main"/>
+          <a:lstStyle xmlns:a="http://schemas.openxmlformats.org/drawingml/2006/main"/>
+          <a:p xmlns:a="http://schemas.openxmlformats.org/drawingml/2006/main">
+            <a:pPr>
+              <a:defRPr sz="1050" b="1">
+                <a:solidFill>
+                  <a:srgbClr val="102A63"/>
+                </a:solidFill>
+              </a:defRPr>
+            </a:pPr>
+            <a:r>
+              <a:rPr sz="1050" b="1">
+                <a:solidFill>
+                  <a:srgbClr val="102A63"/>
+                </a:solidFill>
+              </a:rPr>
+              <a:t>{{SEC_2_SOLUTION}}</a:t>
+            </a:r>
+          </a:p>
+        </p:txBody>
+      </p:sp>
+      <p:sp>
+        <p:nvSpPr>
+          <p:cNvPr id="21" name="">
+            <a:extLst xmlns:a="http://schemas.openxmlformats.org/drawingml/2006/main">
+              <a:ext uri="{FF2B5EF4-FFF2-40B4-BE49-F238E27FC236}">
+                <a16:creationId xmlns:a16="http://schemas.microsoft.com/office/drawing/2014/main" id="{CFB95DF1-B9D0-4F2D-B1E8-EA18169A2DE2}"/>
+              </a:ext>
+            </a:extLst>
+          </p:cNvPr>
+          <p:cNvSpPr>
+            <a:spLocks xmlns:a="http://schemas.openxmlformats.org/drawingml/2006/main" noGrp="1"/>
+          </p:cNvSpPr>
+          <p:nvPr/>
+        </p:nvSpPr>
+        <p:spPr>
+          <a:xfrm xmlns:a="http://schemas.openxmlformats.org/drawingml/2006/main">
+            <a:off x="6019800" y="3429000"/>
+            <a:ext cx="1104900" cy="190500"/>
+          </a:xfrm>
+          <a:prstGeom xmlns:a="http://schemas.openxmlformats.org/drawingml/2006/main" prst="rect">
+            <a:avLst/>
+          </a:prstGeom>
+          <a:noFill xmlns:a="http://schemas.openxmlformats.org/drawingml/2006/main"/>
+          <a:ln xmlns:a="http://schemas.openxmlformats.org/drawingml/2006/main" w="0">
+            <a:noFill/>
+            <a:prstDash val="solid"/>
+          </a:ln>
+        </p:spPr>
+        <p:txBody>
+          <a:bodyPr xmlns:a="http://schemas.openxmlformats.org/drawingml/2006/main"/>
+          <a:lstStyle xmlns:a="http://schemas.openxmlformats.org/drawingml/2006/main"/>
+          <a:p xmlns:a="http://schemas.openxmlformats.org/drawingml/2006/main">
+            <a:pPr>
+              <a:defRPr sz="975" b="1">
+                <a:solidFill>
+                  <a:srgbClr val="2048A8"/>
+                </a:solidFill>
+              </a:defRPr>
+            </a:pPr>
+            <a:r>
+              <a:rPr sz="975" b="1">
+                <a:solidFill>
+                  <a:srgbClr val="2048A8"/>
+                </a:solidFill>
+              </a:rPr>
+              <a:t>Производители</a:t>
+            </a:r>
+          </a:p>
+        </p:txBody>
+      </p:sp>
+      <p:sp>
+        <p:nvSpPr>
+          <p:cNvPr id="22" name="">
+            <a:extLst xmlns:a="http://schemas.openxmlformats.org/drawingml/2006/main">
+              <a:ext uri="{FF2B5EF4-FFF2-40B4-BE49-F238E27FC236}">
+                <a16:creationId xmlns:a16="http://schemas.microsoft.com/office/drawing/2014/main" id="{12811F30-E2C1-40D7-9056-BA69AAAFCD2B}"/>
+              </a:ext>
+            </a:extLst>
+          </p:cNvPr>
+          <p:cNvSpPr>
+            <a:spLocks xmlns:a="http://schemas.openxmlformats.org/drawingml/2006/main" noGrp="1"/>
+          </p:cNvSpPr>
+          <p:nvPr/>
+        </p:nvSpPr>
+        <p:spPr>
+          <a:xfrm xmlns:a="http://schemas.openxmlformats.org/drawingml/2006/main">
+            <a:off x="7181850" y="3409950"/>
+            <a:ext cx="4000500" cy="323850"/>
+          </a:xfrm>
+          <a:prstGeom xmlns:a="http://schemas.openxmlformats.org/drawingml/2006/main" prst="rect">
+            <a:avLst/>
+          </a:prstGeom>
+          <a:noFill xmlns:a="http://schemas.openxmlformats.org/drawingml/2006/main"/>
+          <a:ln xmlns:a="http://schemas.openxmlformats.org/drawingml/2006/main" w="0">
+            <a:noFill/>
+            <a:prstDash val="solid"/>
+          </a:ln>
+        </p:spPr>
+        <p:txBody>
+          <a:bodyPr xmlns:a="http://schemas.openxmlformats.org/drawingml/2006/main"/>
+          <a:lstStyle xmlns:a="http://schemas.openxmlformats.org/drawingml/2006/main"/>
+          <a:p xmlns:a="http://schemas.openxmlformats.org/drawingml/2006/main">
+            <a:pPr>
+              <a:defRPr sz="1050" b="1">
+                <a:solidFill>
+                  <a:srgbClr val="102A63"/>
+                </a:solidFill>
+              </a:defRPr>
+            </a:pPr>
+            <a:r>
+              <a:rPr sz="1050" b="1">
+                <a:solidFill>
+                  <a:srgbClr val="102A63"/>
+                </a:solidFill>
+              </a:rPr>
+              <a:t>{{SEC_2_VENDORS}}</a:t>
+            </a:r>
+          </a:p>
+        </p:txBody>
+      </p:sp>
+      <p:sp>
+        <p:nvSpPr>
+          <p:cNvPr id="23" name="">
+            <a:extLst xmlns:a="http://schemas.openxmlformats.org/drawingml/2006/main">
+              <a:ext uri="{FF2B5EF4-FFF2-40B4-BE49-F238E27FC236}">
+                <a16:creationId xmlns:a16="http://schemas.microsoft.com/office/drawing/2014/main" id="{550EF1B8-0128-41E1-960A-FD9A3AEEEE7C}"/>
+              </a:ext>
+            </a:extLst>
+          </p:cNvPr>
+          <p:cNvSpPr>
+            <a:spLocks xmlns:a="http://schemas.openxmlformats.org/drawingml/2006/main" noGrp="1"/>
+          </p:cNvSpPr>
+          <p:nvPr/>
+        </p:nvSpPr>
+        <p:spPr>
+          <a:xfrm xmlns:a="http://schemas.openxmlformats.org/drawingml/2006/main">
+            <a:off x="1200150" y="3810000"/>
+            <a:ext cx="9982200" cy="9525"/>
           </a:xfrm>
           <a:prstGeom xmlns:a="http://schemas.openxmlformats.org/drawingml/2006/main" prst="rect">
             <a:avLst/>
@@ -6484,21 +8117,21 @@
       </p:sp>
       <p:sp>
         <p:nvSpPr>
-          <p:cNvPr id="14" name="">
-            <a:extLst xmlns:a="http://schemas.openxmlformats.org/drawingml/2006/main">
-              <a:ext uri="{FF2B5EF4-FFF2-40B4-BE49-F238E27FC236}">
-                <a16:creationId xmlns:a16="http://schemas.microsoft.com/office/drawing/2014/main" id="{FEB687FE-D90E-4CF6-AE49-D52B7DCE63DF}"/>
-              </a:ext>
-            </a:extLst>
-          </p:cNvPr>
-          <p:cNvSpPr>
-            <a:spLocks xmlns:a="http://schemas.openxmlformats.org/drawingml/2006/main" noGrp="1"/>
-          </p:cNvSpPr>
-          <p:nvPr/>
-        </p:nvSpPr>
-        <p:spPr>
-          <a:xfrm xmlns:a="http://schemas.openxmlformats.org/drawingml/2006/main">
-            <a:off x="609600" y="3962400"/>
+          <p:cNvPr id="24" name="">
+            <a:extLst xmlns:a="http://schemas.openxmlformats.org/drawingml/2006/main">
+              <a:ext uri="{FF2B5EF4-FFF2-40B4-BE49-F238E27FC236}">
+                <a16:creationId xmlns:a16="http://schemas.microsoft.com/office/drawing/2014/main" id="{E99DB173-393A-4926-8DC2-C11E5D85742F}"/>
+              </a:ext>
+            </a:extLst>
+          </p:cNvPr>
+          <p:cNvSpPr>
+            <a:spLocks xmlns:a="http://schemas.openxmlformats.org/drawingml/2006/main" noGrp="1"/>
+          </p:cNvSpPr>
+          <p:nvPr/>
+        </p:nvSpPr>
+        <p:spPr>
+          <a:xfrm xmlns:a="http://schemas.openxmlformats.org/drawingml/2006/main">
+            <a:off x="609600" y="3981450"/>
             <a:ext cx="457200" cy="266700"/>
           </a:xfrm>
           <a:prstGeom xmlns:a="http://schemas.openxmlformats.org/drawingml/2006/main" prst="rect">
@@ -6515,14 +8148,14 @@
           <a:lstStyle xmlns:a="http://schemas.openxmlformats.org/drawingml/2006/main"/>
           <a:p xmlns:a="http://schemas.openxmlformats.org/drawingml/2006/main">
             <a:pPr>
-              <a:defRPr sz="1275" b="1">
+              <a:defRPr sz="1200" b="1">
                 <a:solidFill>
                   <a:srgbClr val="2048A8"/>
                 </a:solidFill>
               </a:defRPr>
             </a:pPr>
             <a:r>
-              <a:rPr sz="1275" b="1">
+              <a:rPr sz="1200" b="1">
                 <a:solidFill>
                   <a:srgbClr val="2048A8"/>
                 </a:solidFill>
@@ -6534,22 +8167,22 @@
       </p:sp>
       <p:sp>
         <p:nvSpPr>
-          <p:cNvPr id="15" name="">
-            <a:extLst xmlns:a="http://schemas.openxmlformats.org/drawingml/2006/main">
-              <a:ext uri="{FF2B5EF4-FFF2-40B4-BE49-F238E27FC236}">
-                <a16:creationId xmlns:a16="http://schemas.microsoft.com/office/drawing/2014/main" id="{E1C43937-B1D8-4E27-B3D4-033859BDA92F}"/>
-              </a:ext>
-            </a:extLst>
-          </p:cNvPr>
-          <p:cNvSpPr>
-            <a:spLocks xmlns:a="http://schemas.openxmlformats.org/drawingml/2006/main" noGrp="1"/>
-          </p:cNvSpPr>
-          <p:nvPr/>
-        </p:nvSpPr>
-        <p:spPr>
-          <a:xfrm xmlns:a="http://schemas.openxmlformats.org/drawingml/2006/main">
-            <a:off x="1200150" y="3905250"/>
-            <a:ext cx="10048875" cy="1028700"/>
+          <p:cNvPr id="25" name="">
+            <a:extLst xmlns:a="http://schemas.openxmlformats.org/drawingml/2006/main">
+              <a:ext uri="{FF2B5EF4-FFF2-40B4-BE49-F238E27FC236}">
+                <a16:creationId xmlns:a16="http://schemas.microsoft.com/office/drawing/2014/main" id="{4B125B24-35D3-4D4E-A124-52C266C3F5E0}"/>
+              </a:ext>
+            </a:extLst>
+          </p:cNvPr>
+          <p:cNvSpPr>
+            <a:spLocks xmlns:a="http://schemas.openxmlformats.org/drawingml/2006/main" noGrp="1"/>
+          </p:cNvSpPr>
+          <p:nvPr/>
+        </p:nvSpPr>
+        <p:spPr>
+          <a:xfrm xmlns:a="http://schemas.openxmlformats.org/drawingml/2006/main">
+            <a:off x="1200150" y="3924300"/>
+            <a:ext cx="9982200" cy="266700"/>
           </a:xfrm>
           <a:prstGeom xmlns:a="http://schemas.openxmlformats.org/drawingml/2006/main" prst="rect">
             <a:avLst/>
@@ -6565,41 +8198,291 @@
           <a:lstStyle xmlns:a="http://schemas.openxmlformats.org/drawingml/2006/main"/>
           <a:p xmlns:a="http://schemas.openxmlformats.org/drawingml/2006/main">
             <a:pPr>
-              <a:defRPr sz="1350">
+              <a:defRPr sz="1425" b="1">
                 <a:solidFill>
                   <a:srgbClr val="102A63"/>
                 </a:solidFill>
               </a:defRPr>
             </a:pPr>
             <a:r>
-              <a:rPr sz="1350">
+              <a:rPr sz="1425" b="1">
                 <a:solidFill>
                   <a:srgbClr val="102A63"/>
                 </a:solidFill>
               </a:rPr>
-              <a:t>{{SEC_3}}</a:t>
-            </a:r>
-          </a:p>
-        </p:txBody>
-      </p:sp>
-      <p:sp>
-        <p:nvSpPr>
-          <p:cNvPr id="16" name="">
-            <a:extLst xmlns:a="http://schemas.openxmlformats.org/drawingml/2006/main">
-              <a:ext uri="{FF2B5EF4-FFF2-40B4-BE49-F238E27FC236}">
-                <a16:creationId xmlns:a16="http://schemas.microsoft.com/office/drawing/2014/main" id="{CAED15D0-65D3-4A69-81A3-A6FA9C848383}"/>
-              </a:ext>
-            </a:extLst>
-          </p:cNvPr>
-          <p:cNvSpPr>
-            <a:spLocks xmlns:a="http://schemas.openxmlformats.org/drawingml/2006/main" noGrp="1"/>
-          </p:cNvSpPr>
-          <p:nvPr/>
-        </p:nvSpPr>
-        <p:spPr>
-          <a:xfrm xmlns:a="http://schemas.openxmlformats.org/drawingml/2006/main">
-            <a:off x="1200150" y="4895850"/>
-            <a:ext cx="10048875" cy="9525"/>
+              <a:t>{{SEC_3_TITLE}}</a:t>
+            </a:r>
+          </a:p>
+        </p:txBody>
+      </p:sp>
+      <p:sp>
+        <p:nvSpPr>
+          <p:cNvPr id="26" name="">
+            <a:extLst xmlns:a="http://schemas.openxmlformats.org/drawingml/2006/main">
+              <a:ext uri="{FF2B5EF4-FFF2-40B4-BE49-F238E27FC236}">
+                <a16:creationId xmlns:a16="http://schemas.microsoft.com/office/drawing/2014/main" id="{CBEF66DF-762C-44BA-8282-C483AA34CB5D}"/>
+              </a:ext>
+            </a:extLst>
+          </p:cNvPr>
+          <p:cNvSpPr>
+            <a:spLocks xmlns:a="http://schemas.openxmlformats.org/drawingml/2006/main" noGrp="1"/>
+          </p:cNvSpPr>
+          <p:nvPr/>
+        </p:nvSpPr>
+        <p:spPr>
+          <a:xfrm xmlns:a="http://schemas.openxmlformats.org/drawingml/2006/main">
+            <a:off x="1200150" y="4219575"/>
+            <a:ext cx="9982200" cy="400050"/>
+          </a:xfrm>
+          <a:prstGeom xmlns:a="http://schemas.openxmlformats.org/drawingml/2006/main" prst="rect">
+            <a:avLst/>
+          </a:prstGeom>
+          <a:noFill xmlns:a="http://schemas.openxmlformats.org/drawingml/2006/main"/>
+          <a:ln xmlns:a="http://schemas.openxmlformats.org/drawingml/2006/main" w="0">
+            <a:noFill/>
+            <a:prstDash val="solid"/>
+          </a:ln>
+        </p:spPr>
+        <p:txBody>
+          <a:bodyPr xmlns:a="http://schemas.openxmlformats.org/drawingml/2006/main"/>
+          <a:lstStyle xmlns:a="http://schemas.openxmlformats.org/drawingml/2006/main"/>
+          <a:p xmlns:a="http://schemas.openxmlformats.org/drawingml/2006/main">
+            <a:pPr>
+              <a:defRPr sz="1125">
+                <a:solidFill>
+                  <a:srgbClr val="596780"/>
+                </a:solidFill>
+              </a:defRPr>
+            </a:pPr>
+            <a:r>
+              <a:rPr sz="1125">
+                <a:solidFill>
+                  <a:srgbClr val="596780"/>
+                </a:solidFill>
+              </a:rPr>
+              <a:t>{{SEC_3_ACTION}}</a:t>
+            </a:r>
+          </a:p>
+        </p:txBody>
+      </p:sp>
+      <p:sp>
+        <p:nvSpPr>
+          <p:cNvPr id="27" name="">
+            <a:extLst xmlns:a="http://schemas.openxmlformats.org/drawingml/2006/main">
+              <a:ext uri="{FF2B5EF4-FFF2-40B4-BE49-F238E27FC236}">
+                <a16:creationId xmlns:a16="http://schemas.microsoft.com/office/drawing/2014/main" id="{8D244DFF-8699-4814-A22F-1F79DBFDA980}"/>
+              </a:ext>
+            </a:extLst>
+          </p:cNvPr>
+          <p:cNvSpPr>
+            <a:spLocks xmlns:a="http://schemas.openxmlformats.org/drawingml/2006/main" noGrp="1"/>
+          </p:cNvSpPr>
+          <p:nvPr/>
+        </p:nvSpPr>
+        <p:spPr>
+          <a:xfrm xmlns:a="http://schemas.openxmlformats.org/drawingml/2006/main">
+            <a:off x="1200150" y="4686300"/>
+            <a:ext cx="742950" cy="190500"/>
+          </a:xfrm>
+          <a:prstGeom xmlns:a="http://schemas.openxmlformats.org/drawingml/2006/main" prst="rect">
+            <a:avLst/>
+          </a:prstGeom>
+          <a:noFill xmlns:a="http://schemas.openxmlformats.org/drawingml/2006/main"/>
+          <a:ln xmlns:a="http://schemas.openxmlformats.org/drawingml/2006/main" w="0">
+            <a:noFill/>
+            <a:prstDash val="solid"/>
+          </a:ln>
+        </p:spPr>
+        <p:txBody>
+          <a:bodyPr xmlns:a="http://schemas.openxmlformats.org/drawingml/2006/main"/>
+          <a:lstStyle xmlns:a="http://schemas.openxmlformats.org/drawingml/2006/main"/>
+          <a:p xmlns:a="http://schemas.openxmlformats.org/drawingml/2006/main">
+            <a:pPr>
+              <a:defRPr sz="975" b="1">
+                <a:solidFill>
+                  <a:srgbClr val="2048A8"/>
+                </a:solidFill>
+              </a:defRPr>
+            </a:pPr>
+            <a:r>
+              <a:rPr sz="975" b="1">
+                <a:solidFill>
+                  <a:srgbClr val="2048A8"/>
+                </a:solidFill>
+              </a:rPr>
+              <a:t>Решение</a:t>
+            </a:r>
+          </a:p>
+        </p:txBody>
+      </p:sp>
+      <p:sp>
+        <p:nvSpPr>
+          <p:cNvPr id="28" name="">
+            <a:extLst xmlns:a="http://schemas.openxmlformats.org/drawingml/2006/main">
+              <a:ext uri="{FF2B5EF4-FFF2-40B4-BE49-F238E27FC236}">
+                <a16:creationId xmlns:a16="http://schemas.microsoft.com/office/drawing/2014/main" id="{E4B801EC-4BE4-414E-B200-858B4909E968}"/>
+              </a:ext>
+            </a:extLst>
+          </p:cNvPr>
+          <p:cNvSpPr>
+            <a:spLocks xmlns:a="http://schemas.openxmlformats.org/drawingml/2006/main" noGrp="1"/>
+          </p:cNvSpPr>
+          <p:nvPr/>
+        </p:nvSpPr>
+        <p:spPr>
+          <a:xfrm xmlns:a="http://schemas.openxmlformats.org/drawingml/2006/main">
+            <a:off x="1962150" y="4667250"/>
+            <a:ext cx="3810000" cy="323850"/>
+          </a:xfrm>
+          <a:prstGeom xmlns:a="http://schemas.openxmlformats.org/drawingml/2006/main" prst="rect">
+            <a:avLst/>
+          </a:prstGeom>
+          <a:noFill xmlns:a="http://schemas.openxmlformats.org/drawingml/2006/main"/>
+          <a:ln xmlns:a="http://schemas.openxmlformats.org/drawingml/2006/main" w="0">
+            <a:noFill/>
+            <a:prstDash val="solid"/>
+          </a:ln>
+        </p:spPr>
+        <p:txBody>
+          <a:bodyPr xmlns:a="http://schemas.openxmlformats.org/drawingml/2006/main"/>
+          <a:lstStyle xmlns:a="http://schemas.openxmlformats.org/drawingml/2006/main"/>
+          <a:p xmlns:a="http://schemas.openxmlformats.org/drawingml/2006/main">
+            <a:pPr>
+              <a:defRPr sz="1050" b="1">
+                <a:solidFill>
+                  <a:srgbClr val="102A63"/>
+                </a:solidFill>
+              </a:defRPr>
+            </a:pPr>
+            <a:r>
+              <a:rPr sz="1050" b="1">
+                <a:solidFill>
+                  <a:srgbClr val="102A63"/>
+                </a:solidFill>
+              </a:rPr>
+              <a:t>{{SEC_3_SOLUTION}}</a:t>
+            </a:r>
+          </a:p>
+        </p:txBody>
+      </p:sp>
+      <p:sp>
+        <p:nvSpPr>
+          <p:cNvPr id="29" name="">
+            <a:extLst xmlns:a="http://schemas.openxmlformats.org/drawingml/2006/main">
+              <a:ext uri="{FF2B5EF4-FFF2-40B4-BE49-F238E27FC236}">
+                <a16:creationId xmlns:a16="http://schemas.microsoft.com/office/drawing/2014/main" id="{C85DD380-8155-44E2-B6EC-A8772B180619}"/>
+              </a:ext>
+            </a:extLst>
+          </p:cNvPr>
+          <p:cNvSpPr>
+            <a:spLocks xmlns:a="http://schemas.openxmlformats.org/drawingml/2006/main" noGrp="1"/>
+          </p:cNvSpPr>
+          <p:nvPr/>
+        </p:nvSpPr>
+        <p:spPr>
+          <a:xfrm xmlns:a="http://schemas.openxmlformats.org/drawingml/2006/main">
+            <a:off x="6019800" y="4686300"/>
+            <a:ext cx="1104900" cy="190500"/>
+          </a:xfrm>
+          <a:prstGeom xmlns:a="http://schemas.openxmlformats.org/drawingml/2006/main" prst="rect">
+            <a:avLst/>
+          </a:prstGeom>
+          <a:noFill xmlns:a="http://schemas.openxmlformats.org/drawingml/2006/main"/>
+          <a:ln xmlns:a="http://schemas.openxmlformats.org/drawingml/2006/main" w="0">
+            <a:noFill/>
+            <a:prstDash val="solid"/>
+          </a:ln>
+        </p:spPr>
+        <p:txBody>
+          <a:bodyPr xmlns:a="http://schemas.openxmlformats.org/drawingml/2006/main"/>
+          <a:lstStyle xmlns:a="http://schemas.openxmlformats.org/drawingml/2006/main"/>
+          <a:p xmlns:a="http://schemas.openxmlformats.org/drawingml/2006/main">
+            <a:pPr>
+              <a:defRPr sz="975" b="1">
+                <a:solidFill>
+                  <a:srgbClr val="2048A8"/>
+                </a:solidFill>
+              </a:defRPr>
+            </a:pPr>
+            <a:r>
+              <a:rPr sz="975" b="1">
+                <a:solidFill>
+                  <a:srgbClr val="2048A8"/>
+                </a:solidFill>
+              </a:rPr>
+              <a:t>Производители</a:t>
+            </a:r>
+          </a:p>
+        </p:txBody>
+      </p:sp>
+      <p:sp>
+        <p:nvSpPr>
+          <p:cNvPr id="30" name="">
+            <a:extLst xmlns:a="http://schemas.openxmlformats.org/drawingml/2006/main">
+              <a:ext uri="{FF2B5EF4-FFF2-40B4-BE49-F238E27FC236}">
+                <a16:creationId xmlns:a16="http://schemas.microsoft.com/office/drawing/2014/main" id="{C4089DA9-CF15-4030-9D08-817890F696F4}"/>
+              </a:ext>
+            </a:extLst>
+          </p:cNvPr>
+          <p:cNvSpPr>
+            <a:spLocks xmlns:a="http://schemas.openxmlformats.org/drawingml/2006/main" noGrp="1"/>
+          </p:cNvSpPr>
+          <p:nvPr/>
+        </p:nvSpPr>
+        <p:spPr>
+          <a:xfrm xmlns:a="http://schemas.openxmlformats.org/drawingml/2006/main">
+            <a:off x="7181850" y="4667250"/>
+            <a:ext cx="4000500" cy="323850"/>
+          </a:xfrm>
+          <a:prstGeom xmlns:a="http://schemas.openxmlformats.org/drawingml/2006/main" prst="rect">
+            <a:avLst/>
+          </a:prstGeom>
+          <a:noFill xmlns:a="http://schemas.openxmlformats.org/drawingml/2006/main"/>
+          <a:ln xmlns:a="http://schemas.openxmlformats.org/drawingml/2006/main" w="0">
+            <a:noFill/>
+            <a:prstDash val="solid"/>
+          </a:ln>
+        </p:spPr>
+        <p:txBody>
+          <a:bodyPr xmlns:a="http://schemas.openxmlformats.org/drawingml/2006/main"/>
+          <a:lstStyle xmlns:a="http://schemas.openxmlformats.org/drawingml/2006/main"/>
+          <a:p xmlns:a="http://schemas.openxmlformats.org/drawingml/2006/main">
+            <a:pPr>
+              <a:defRPr sz="1050" b="1">
+                <a:solidFill>
+                  <a:srgbClr val="102A63"/>
+                </a:solidFill>
+              </a:defRPr>
+            </a:pPr>
+            <a:r>
+              <a:rPr sz="1050" b="1">
+                <a:solidFill>
+                  <a:srgbClr val="102A63"/>
+                </a:solidFill>
+              </a:rPr>
+              <a:t>{{SEC_3_VENDORS}}</a:t>
+            </a:r>
+          </a:p>
+        </p:txBody>
+      </p:sp>
+      <p:sp>
+        <p:nvSpPr>
+          <p:cNvPr id="31" name="">
+            <a:extLst xmlns:a="http://schemas.openxmlformats.org/drawingml/2006/main">
+              <a:ext uri="{FF2B5EF4-FFF2-40B4-BE49-F238E27FC236}">
+                <a16:creationId xmlns:a16="http://schemas.microsoft.com/office/drawing/2014/main" id="{9EA93F98-9B3E-4994-84A7-4C3F5EBAD5B1}"/>
+              </a:ext>
+            </a:extLst>
+          </p:cNvPr>
+          <p:cNvSpPr>
+            <a:spLocks xmlns:a="http://schemas.openxmlformats.org/drawingml/2006/main" noGrp="1"/>
+          </p:cNvSpPr>
+          <p:nvPr/>
+        </p:nvSpPr>
+        <p:spPr>
+          <a:xfrm xmlns:a="http://schemas.openxmlformats.org/drawingml/2006/main">
+            <a:off x="1200150" y="5067300"/>
+            <a:ext cx="9982200" cy="9525"/>
           </a:xfrm>
           <a:prstGeom xmlns:a="http://schemas.openxmlformats.org/drawingml/2006/main" prst="rect">
             <a:avLst/>
@@ -6615,21 +8498,21 @@
       </p:sp>
       <p:sp>
         <p:nvSpPr>
-          <p:cNvPr id="17" name="">
-            <a:extLst xmlns:a="http://schemas.openxmlformats.org/drawingml/2006/main">
-              <a:ext uri="{FF2B5EF4-FFF2-40B4-BE49-F238E27FC236}">
-                <a16:creationId xmlns:a16="http://schemas.microsoft.com/office/drawing/2014/main" id="{A1F8E3AB-3969-4C0F-AB09-22008BC01E28}"/>
-              </a:ext>
-            </a:extLst>
-          </p:cNvPr>
-          <p:cNvSpPr>
-            <a:spLocks xmlns:a="http://schemas.openxmlformats.org/drawingml/2006/main" noGrp="1"/>
-          </p:cNvSpPr>
-          <p:nvPr/>
-        </p:nvSpPr>
-        <p:spPr>
-          <a:xfrm xmlns:a="http://schemas.openxmlformats.org/drawingml/2006/main">
-            <a:off x="609600" y="5124450"/>
+          <p:cNvPr id="32" name="">
+            <a:extLst xmlns:a="http://schemas.openxmlformats.org/drawingml/2006/main">
+              <a:ext uri="{FF2B5EF4-FFF2-40B4-BE49-F238E27FC236}">
+                <a16:creationId xmlns:a16="http://schemas.microsoft.com/office/drawing/2014/main" id="{1AC19C4D-8A2C-4ED9-A26F-13BED182F883}"/>
+              </a:ext>
+            </a:extLst>
+          </p:cNvPr>
+          <p:cNvSpPr>
+            <a:spLocks xmlns:a="http://schemas.openxmlformats.org/drawingml/2006/main" noGrp="1"/>
+          </p:cNvSpPr>
+          <p:nvPr/>
+        </p:nvSpPr>
+        <p:spPr>
+          <a:xfrm xmlns:a="http://schemas.openxmlformats.org/drawingml/2006/main">
+            <a:off x="609600" y="5238750"/>
             <a:ext cx="457200" cy="266700"/>
           </a:xfrm>
           <a:prstGeom xmlns:a="http://schemas.openxmlformats.org/drawingml/2006/main" prst="rect">
@@ -6646,14 +8529,14 @@
           <a:lstStyle xmlns:a="http://schemas.openxmlformats.org/drawingml/2006/main"/>
           <a:p xmlns:a="http://schemas.openxmlformats.org/drawingml/2006/main">
             <a:pPr>
-              <a:defRPr sz="1275" b="1">
+              <a:defRPr sz="1200" b="1">
                 <a:solidFill>
                   <a:srgbClr val="2048A8"/>
                 </a:solidFill>
               </a:defRPr>
             </a:pPr>
             <a:r>
-              <a:rPr sz="1275" b="1">
+              <a:rPr sz="1200" b="1">
                 <a:solidFill>
                   <a:srgbClr val="2048A8"/>
                 </a:solidFill>
@@ -6665,22 +8548,22 @@
       </p:sp>
       <p:sp>
         <p:nvSpPr>
-          <p:cNvPr id="18" name="">
-            <a:extLst xmlns:a="http://schemas.openxmlformats.org/drawingml/2006/main">
-              <a:ext uri="{FF2B5EF4-FFF2-40B4-BE49-F238E27FC236}">
-                <a16:creationId xmlns:a16="http://schemas.microsoft.com/office/drawing/2014/main" id="{4DCB8A63-AD32-49FA-B775-CC196ED84ACB}"/>
-              </a:ext>
-            </a:extLst>
-          </p:cNvPr>
-          <p:cNvSpPr>
-            <a:spLocks xmlns:a="http://schemas.openxmlformats.org/drawingml/2006/main" noGrp="1"/>
-          </p:cNvSpPr>
-          <p:nvPr/>
-        </p:nvSpPr>
-        <p:spPr>
-          <a:xfrm xmlns:a="http://schemas.openxmlformats.org/drawingml/2006/main">
-            <a:off x="1200150" y="5067300"/>
-            <a:ext cx="10048875" cy="1028700"/>
+          <p:cNvPr id="33" name="">
+            <a:extLst xmlns:a="http://schemas.openxmlformats.org/drawingml/2006/main">
+              <a:ext uri="{FF2B5EF4-FFF2-40B4-BE49-F238E27FC236}">
+                <a16:creationId xmlns:a16="http://schemas.microsoft.com/office/drawing/2014/main" id="{E02BC3D0-A0B6-4315-8A28-05FBE64DBF39}"/>
+              </a:ext>
+            </a:extLst>
+          </p:cNvPr>
+          <p:cNvSpPr>
+            <a:spLocks xmlns:a="http://schemas.openxmlformats.org/drawingml/2006/main" noGrp="1"/>
+          </p:cNvSpPr>
+          <p:nvPr/>
+        </p:nvSpPr>
+        <p:spPr>
+          <a:xfrm xmlns:a="http://schemas.openxmlformats.org/drawingml/2006/main">
+            <a:off x="1200150" y="5181600"/>
+            <a:ext cx="9982200" cy="266700"/>
           </a:xfrm>
           <a:prstGeom xmlns:a="http://schemas.openxmlformats.org/drawingml/2006/main" prst="rect">
             <a:avLst/>
@@ -6696,19 +8579,269 @@
           <a:lstStyle xmlns:a="http://schemas.openxmlformats.org/drawingml/2006/main"/>
           <a:p xmlns:a="http://schemas.openxmlformats.org/drawingml/2006/main">
             <a:pPr>
-              <a:defRPr sz="1350">
+              <a:defRPr sz="1425" b="1">
                 <a:solidFill>
                   <a:srgbClr val="102A63"/>
                 </a:solidFill>
               </a:defRPr>
             </a:pPr>
             <a:r>
-              <a:rPr sz="1350">
+              <a:rPr sz="1425" b="1">
                 <a:solidFill>
                   <a:srgbClr val="102A63"/>
                 </a:solidFill>
               </a:rPr>
-              <a:t>{{SEC_4}}</a:t>
+              <a:t>{{SEC_4_TITLE}}</a:t>
+            </a:r>
+          </a:p>
+        </p:txBody>
+      </p:sp>
+      <p:sp>
+        <p:nvSpPr>
+          <p:cNvPr id="34" name="">
+            <a:extLst xmlns:a="http://schemas.openxmlformats.org/drawingml/2006/main">
+              <a:ext uri="{FF2B5EF4-FFF2-40B4-BE49-F238E27FC236}">
+                <a16:creationId xmlns:a16="http://schemas.microsoft.com/office/drawing/2014/main" id="{CF94DC58-7ABF-455D-BCA1-1325E4DD69A7}"/>
+              </a:ext>
+            </a:extLst>
+          </p:cNvPr>
+          <p:cNvSpPr>
+            <a:spLocks xmlns:a="http://schemas.openxmlformats.org/drawingml/2006/main" noGrp="1"/>
+          </p:cNvSpPr>
+          <p:nvPr/>
+        </p:nvSpPr>
+        <p:spPr>
+          <a:xfrm xmlns:a="http://schemas.openxmlformats.org/drawingml/2006/main">
+            <a:off x="1200150" y="5476875"/>
+            <a:ext cx="9982200" cy="400050"/>
+          </a:xfrm>
+          <a:prstGeom xmlns:a="http://schemas.openxmlformats.org/drawingml/2006/main" prst="rect">
+            <a:avLst/>
+          </a:prstGeom>
+          <a:noFill xmlns:a="http://schemas.openxmlformats.org/drawingml/2006/main"/>
+          <a:ln xmlns:a="http://schemas.openxmlformats.org/drawingml/2006/main" w="0">
+            <a:noFill/>
+            <a:prstDash val="solid"/>
+          </a:ln>
+        </p:spPr>
+        <p:txBody>
+          <a:bodyPr xmlns:a="http://schemas.openxmlformats.org/drawingml/2006/main"/>
+          <a:lstStyle xmlns:a="http://schemas.openxmlformats.org/drawingml/2006/main"/>
+          <a:p xmlns:a="http://schemas.openxmlformats.org/drawingml/2006/main">
+            <a:pPr>
+              <a:defRPr sz="1125">
+                <a:solidFill>
+                  <a:srgbClr val="596780"/>
+                </a:solidFill>
+              </a:defRPr>
+            </a:pPr>
+            <a:r>
+              <a:rPr sz="1125">
+                <a:solidFill>
+                  <a:srgbClr val="596780"/>
+                </a:solidFill>
+              </a:rPr>
+              <a:t>{{SEC_4_ACTION}}</a:t>
+            </a:r>
+          </a:p>
+        </p:txBody>
+      </p:sp>
+      <p:sp>
+        <p:nvSpPr>
+          <p:cNvPr id="35" name="">
+            <a:extLst xmlns:a="http://schemas.openxmlformats.org/drawingml/2006/main">
+              <a:ext uri="{FF2B5EF4-FFF2-40B4-BE49-F238E27FC236}">
+                <a16:creationId xmlns:a16="http://schemas.microsoft.com/office/drawing/2014/main" id="{F322D6F2-83BE-455C-A0A7-D39CAF979FFF}"/>
+              </a:ext>
+            </a:extLst>
+          </p:cNvPr>
+          <p:cNvSpPr>
+            <a:spLocks xmlns:a="http://schemas.openxmlformats.org/drawingml/2006/main" noGrp="1"/>
+          </p:cNvSpPr>
+          <p:nvPr/>
+        </p:nvSpPr>
+        <p:spPr>
+          <a:xfrm xmlns:a="http://schemas.openxmlformats.org/drawingml/2006/main">
+            <a:off x="1200150" y="5943600"/>
+            <a:ext cx="742950" cy="190500"/>
+          </a:xfrm>
+          <a:prstGeom xmlns:a="http://schemas.openxmlformats.org/drawingml/2006/main" prst="rect">
+            <a:avLst/>
+          </a:prstGeom>
+          <a:noFill xmlns:a="http://schemas.openxmlformats.org/drawingml/2006/main"/>
+          <a:ln xmlns:a="http://schemas.openxmlformats.org/drawingml/2006/main" w="0">
+            <a:noFill/>
+            <a:prstDash val="solid"/>
+          </a:ln>
+        </p:spPr>
+        <p:txBody>
+          <a:bodyPr xmlns:a="http://schemas.openxmlformats.org/drawingml/2006/main"/>
+          <a:lstStyle xmlns:a="http://schemas.openxmlformats.org/drawingml/2006/main"/>
+          <a:p xmlns:a="http://schemas.openxmlformats.org/drawingml/2006/main">
+            <a:pPr>
+              <a:defRPr sz="975" b="1">
+                <a:solidFill>
+                  <a:srgbClr val="2048A8"/>
+                </a:solidFill>
+              </a:defRPr>
+            </a:pPr>
+            <a:r>
+              <a:rPr sz="975" b="1">
+                <a:solidFill>
+                  <a:srgbClr val="2048A8"/>
+                </a:solidFill>
+              </a:rPr>
+              <a:t>Решение</a:t>
+            </a:r>
+          </a:p>
+        </p:txBody>
+      </p:sp>
+      <p:sp>
+        <p:nvSpPr>
+          <p:cNvPr id="36" name="">
+            <a:extLst xmlns:a="http://schemas.openxmlformats.org/drawingml/2006/main">
+              <a:ext uri="{FF2B5EF4-FFF2-40B4-BE49-F238E27FC236}">
+                <a16:creationId xmlns:a16="http://schemas.microsoft.com/office/drawing/2014/main" id="{0B151879-2718-4C6B-8299-15B5A55F9335}"/>
+              </a:ext>
+            </a:extLst>
+          </p:cNvPr>
+          <p:cNvSpPr>
+            <a:spLocks xmlns:a="http://schemas.openxmlformats.org/drawingml/2006/main" noGrp="1"/>
+          </p:cNvSpPr>
+          <p:nvPr/>
+        </p:nvSpPr>
+        <p:spPr>
+          <a:xfrm xmlns:a="http://schemas.openxmlformats.org/drawingml/2006/main">
+            <a:off x="1962150" y="5924550"/>
+            <a:ext cx="3810000" cy="323850"/>
+          </a:xfrm>
+          <a:prstGeom xmlns:a="http://schemas.openxmlformats.org/drawingml/2006/main" prst="rect">
+            <a:avLst/>
+          </a:prstGeom>
+          <a:noFill xmlns:a="http://schemas.openxmlformats.org/drawingml/2006/main"/>
+          <a:ln xmlns:a="http://schemas.openxmlformats.org/drawingml/2006/main" w="0">
+            <a:noFill/>
+            <a:prstDash val="solid"/>
+          </a:ln>
+        </p:spPr>
+        <p:txBody>
+          <a:bodyPr xmlns:a="http://schemas.openxmlformats.org/drawingml/2006/main"/>
+          <a:lstStyle xmlns:a="http://schemas.openxmlformats.org/drawingml/2006/main"/>
+          <a:p xmlns:a="http://schemas.openxmlformats.org/drawingml/2006/main">
+            <a:pPr>
+              <a:defRPr sz="1050" b="1">
+                <a:solidFill>
+                  <a:srgbClr val="102A63"/>
+                </a:solidFill>
+              </a:defRPr>
+            </a:pPr>
+            <a:r>
+              <a:rPr sz="1050" b="1">
+                <a:solidFill>
+                  <a:srgbClr val="102A63"/>
+                </a:solidFill>
+              </a:rPr>
+              <a:t>{{SEC_4_SOLUTION}}</a:t>
+            </a:r>
+          </a:p>
+        </p:txBody>
+      </p:sp>
+      <p:sp>
+        <p:nvSpPr>
+          <p:cNvPr id="37" name="">
+            <a:extLst xmlns:a="http://schemas.openxmlformats.org/drawingml/2006/main">
+              <a:ext uri="{FF2B5EF4-FFF2-40B4-BE49-F238E27FC236}">
+                <a16:creationId xmlns:a16="http://schemas.microsoft.com/office/drawing/2014/main" id="{D360B97E-6FEA-488E-92CB-4CF561324B47}"/>
+              </a:ext>
+            </a:extLst>
+          </p:cNvPr>
+          <p:cNvSpPr>
+            <a:spLocks xmlns:a="http://schemas.openxmlformats.org/drawingml/2006/main" noGrp="1"/>
+          </p:cNvSpPr>
+          <p:nvPr/>
+        </p:nvSpPr>
+        <p:spPr>
+          <a:xfrm xmlns:a="http://schemas.openxmlformats.org/drawingml/2006/main">
+            <a:off x="6019800" y="5943600"/>
+            <a:ext cx="1104900" cy="190500"/>
+          </a:xfrm>
+          <a:prstGeom xmlns:a="http://schemas.openxmlformats.org/drawingml/2006/main" prst="rect">
+            <a:avLst/>
+          </a:prstGeom>
+          <a:noFill xmlns:a="http://schemas.openxmlformats.org/drawingml/2006/main"/>
+          <a:ln xmlns:a="http://schemas.openxmlformats.org/drawingml/2006/main" w="0">
+            <a:noFill/>
+            <a:prstDash val="solid"/>
+          </a:ln>
+        </p:spPr>
+        <p:txBody>
+          <a:bodyPr xmlns:a="http://schemas.openxmlformats.org/drawingml/2006/main"/>
+          <a:lstStyle xmlns:a="http://schemas.openxmlformats.org/drawingml/2006/main"/>
+          <a:p xmlns:a="http://schemas.openxmlformats.org/drawingml/2006/main">
+            <a:pPr>
+              <a:defRPr sz="975" b="1">
+                <a:solidFill>
+                  <a:srgbClr val="2048A8"/>
+                </a:solidFill>
+              </a:defRPr>
+            </a:pPr>
+            <a:r>
+              <a:rPr sz="975" b="1">
+                <a:solidFill>
+                  <a:srgbClr val="2048A8"/>
+                </a:solidFill>
+              </a:rPr>
+              <a:t>Производители</a:t>
+            </a:r>
+          </a:p>
+        </p:txBody>
+      </p:sp>
+      <p:sp>
+        <p:nvSpPr>
+          <p:cNvPr id="38" name="">
+            <a:extLst xmlns:a="http://schemas.openxmlformats.org/drawingml/2006/main">
+              <a:ext uri="{FF2B5EF4-FFF2-40B4-BE49-F238E27FC236}">
+                <a16:creationId xmlns:a16="http://schemas.microsoft.com/office/drawing/2014/main" id="{4A65C7D4-0281-4EE8-B5B1-CDF402A7B9D5}"/>
+              </a:ext>
+            </a:extLst>
+          </p:cNvPr>
+          <p:cNvSpPr>
+            <a:spLocks xmlns:a="http://schemas.openxmlformats.org/drawingml/2006/main" noGrp="1"/>
+          </p:cNvSpPr>
+          <p:nvPr/>
+        </p:nvSpPr>
+        <p:spPr>
+          <a:xfrm xmlns:a="http://schemas.openxmlformats.org/drawingml/2006/main">
+            <a:off x="7181850" y="5924550"/>
+            <a:ext cx="4000500" cy="323850"/>
+          </a:xfrm>
+          <a:prstGeom xmlns:a="http://schemas.openxmlformats.org/drawingml/2006/main" prst="rect">
+            <a:avLst/>
+          </a:prstGeom>
+          <a:noFill xmlns:a="http://schemas.openxmlformats.org/drawingml/2006/main"/>
+          <a:ln xmlns:a="http://schemas.openxmlformats.org/drawingml/2006/main" w="0">
+            <a:noFill/>
+            <a:prstDash val="solid"/>
+          </a:ln>
+        </p:spPr>
+        <p:txBody>
+          <a:bodyPr xmlns:a="http://schemas.openxmlformats.org/drawingml/2006/main"/>
+          <a:lstStyle xmlns:a="http://schemas.openxmlformats.org/drawingml/2006/main"/>
+          <a:p xmlns:a="http://schemas.openxmlformats.org/drawingml/2006/main">
+            <a:pPr>
+              <a:defRPr sz="1050" b="1">
+                <a:solidFill>
+                  <a:srgbClr val="102A63"/>
+                </a:solidFill>
+              </a:defRPr>
+            </a:pPr>
+            <a:r>
+              <a:rPr sz="1050" b="1">
+                <a:solidFill>
+                  <a:srgbClr val="102A63"/>
+                </a:solidFill>
+              </a:rPr>
+              <a:t>{{SEC_4_VENDORS}}</a:t>
             </a:r>
           </a:p>
         </p:txBody>
@@ -6716,7 +8849,7 @@
     </p:spTree>
     <p:extLst>
       <p:ext uri="{BB962C8B-B14F-4D97-AF65-F5344CB8AC3E}">
-        <p14:creationId xmlns:p14="http://schemas.microsoft.com/office/powerpoint/2010/main" val="973998347"/>
+        <p14:creationId xmlns:p14="http://schemas.microsoft.com/office/powerpoint/2010/main" val="2111637941"/>
       </p:ext>
     </p:extLst>
   </p:cSld>
@@ -6747,7 +8880,7 @@
           <p:cNvPr id="1" name="">
             <a:extLst xmlns:a="http://schemas.openxmlformats.org/drawingml/2006/main">
               <a:ext uri="{FF2B5EF4-FFF2-40B4-BE49-F238E27FC236}">
-                <a16:creationId xmlns:a16="http://schemas.microsoft.com/office/drawing/2014/main" id="{6B27FB0D-61DF-45D8-B7C8-83013FDF6EAA}"/>
+                <a16:creationId xmlns:a16="http://schemas.microsoft.com/office/drawing/2014/main" id="{7EBC47E2-1CBA-418B-83FC-D5AD4723A91B}"/>
               </a:ext>
             </a:extLst>
           </p:cNvPr>
@@ -6782,7 +8915,7 @@
           <p:nvPr/>
         </p:nvPicPr>
         <p:blipFill>
-          <a:blip xmlns:r="http://schemas.openxmlformats.org/officeDocument/2006/relationships" xmlns:a="http://schemas.openxmlformats.org/drawingml/2006/main" r:embed="R74b6b411de614abc"/>
+          <a:blip xmlns:r="http://schemas.openxmlformats.org/officeDocument/2006/relationships" xmlns:a="http://schemas.openxmlformats.org/drawingml/2006/main" r:embed="R8d065405e09e4dae"/>
           <a:stretch xmlns:a="http://schemas.openxmlformats.org/drawingml/2006/main"/>
         </p:blipFill>
         <p:spPr>
@@ -6800,7 +8933,7 @@
           <p:cNvPr id="3" name="">
             <a:extLst xmlns:a="http://schemas.openxmlformats.org/drawingml/2006/main">
               <a:ext uri="{FF2B5EF4-FFF2-40B4-BE49-F238E27FC236}">
-                <a16:creationId xmlns:a16="http://schemas.microsoft.com/office/drawing/2014/main" id="{F8B46A99-8D2B-4D2F-B0B9-8690506871F3}"/>
+                <a16:creationId xmlns:a16="http://schemas.microsoft.com/office/drawing/2014/main" id="{68A55B2B-D9E6-40C3-9F98-F88215C20EAF}"/>
               </a:ext>
             </a:extLst>
           </p:cNvPr>
@@ -6850,7 +8983,7 @@
           <p:cNvPr id="4" name="">
             <a:extLst xmlns:a="http://schemas.openxmlformats.org/drawingml/2006/main">
               <a:ext uri="{FF2B5EF4-FFF2-40B4-BE49-F238E27FC236}">
-                <a16:creationId xmlns:a16="http://schemas.microsoft.com/office/drawing/2014/main" id="{5AB2EEB0-516B-4698-8A3C-625395692FDB}"/>
+                <a16:creationId xmlns:a16="http://schemas.microsoft.com/office/drawing/2014/main" id="{D9C0B251-D6F2-4D98-AE53-239F676708AC}"/>
               </a:ext>
             </a:extLst>
           </p:cNvPr>
@@ -6883,7 +9016,7 @@
           <p:cNvPr id="5" name="">
             <a:extLst xmlns:a="http://schemas.openxmlformats.org/drawingml/2006/main">
               <a:ext uri="{FF2B5EF4-FFF2-40B4-BE49-F238E27FC236}">
-                <a16:creationId xmlns:a16="http://schemas.microsoft.com/office/drawing/2014/main" id="{BACDD614-922D-4991-9AD6-A2ECD29A9B7C}"/>
+                <a16:creationId xmlns:a16="http://schemas.microsoft.com/office/drawing/2014/main" id="{07CEC858-FFDF-4566-94B7-BA2B0C3C154B}"/>
               </a:ext>
             </a:extLst>
           </p:cNvPr>
@@ -6914,7 +9047,7 @@
           <p:cNvPr id="6" name="">
             <a:extLst xmlns:a="http://schemas.openxmlformats.org/drawingml/2006/main">
               <a:ext uri="{FF2B5EF4-FFF2-40B4-BE49-F238E27FC236}">
-                <a16:creationId xmlns:a16="http://schemas.microsoft.com/office/drawing/2014/main" id="{A2AD9268-0DFA-4F89-B98A-A8C879352E7C}"/>
+                <a16:creationId xmlns:a16="http://schemas.microsoft.com/office/drawing/2014/main" id="{A3C874F5-84A1-4EF1-97E7-751FE1A728CE}"/>
               </a:ext>
             </a:extLst>
           </p:cNvPr>
@@ -6964,7 +9097,7 @@
           <p:cNvPr id="7" name="">
             <a:extLst xmlns:a="http://schemas.openxmlformats.org/drawingml/2006/main">
               <a:ext uri="{FF2B5EF4-FFF2-40B4-BE49-F238E27FC236}">
-                <a16:creationId xmlns:a16="http://schemas.microsoft.com/office/drawing/2014/main" id="{BA313AFA-DEBD-46E5-9695-59BE90AD482E}"/>
+                <a16:creationId xmlns:a16="http://schemas.microsoft.com/office/drawing/2014/main" id="{E26B14BE-1B12-4EF7-9AFC-2ACFCDE72235}"/>
               </a:ext>
             </a:extLst>
           </p:cNvPr>
@@ -7014,7 +9147,7 @@
           <p:cNvPr id="8" name="">
             <a:extLst xmlns:a="http://schemas.openxmlformats.org/drawingml/2006/main">
               <a:ext uri="{FF2B5EF4-FFF2-40B4-BE49-F238E27FC236}">
-                <a16:creationId xmlns:a16="http://schemas.microsoft.com/office/drawing/2014/main" id="{F0087245-076C-4088-B646-0CB86D2665B2}"/>
+                <a16:creationId xmlns:a16="http://schemas.microsoft.com/office/drawing/2014/main" id="{57389591-C8DD-4BB4-8B4E-F923C9F3425F}"/>
               </a:ext>
             </a:extLst>
           </p:cNvPr>
@@ -7049,7 +9182,7 @@
           <p:cNvPr id="9" name="">
             <a:extLst xmlns:a="http://schemas.openxmlformats.org/drawingml/2006/main">
               <a:ext uri="{FF2B5EF4-FFF2-40B4-BE49-F238E27FC236}">
-                <a16:creationId xmlns:a16="http://schemas.microsoft.com/office/drawing/2014/main" id="{7C5189A5-EABF-4E14-8FB2-E88C8E526B54}"/>
+                <a16:creationId xmlns:a16="http://schemas.microsoft.com/office/drawing/2014/main" id="{10AB9D1F-3CC7-4291-A636-97BC00F66F97}"/>
               </a:ext>
             </a:extLst>
           </p:cNvPr>
@@ -7082,7 +9215,7 @@
           <p:cNvPr id="10" name="">
             <a:extLst xmlns:a="http://schemas.openxmlformats.org/drawingml/2006/main">
               <a:ext uri="{FF2B5EF4-FFF2-40B4-BE49-F238E27FC236}">
-                <a16:creationId xmlns:a16="http://schemas.microsoft.com/office/drawing/2014/main" id="{93B17514-7474-402A-8624-A0B52247FF9A}"/>
+                <a16:creationId xmlns:a16="http://schemas.microsoft.com/office/drawing/2014/main" id="{68870728-EC2D-4DCF-96D2-AFF50FFC14A9}"/>
               </a:ext>
             </a:extLst>
           </p:cNvPr>
@@ -7132,7 +9265,7 @@
           <p:cNvPr id="11" name="">
             <a:extLst xmlns:a="http://schemas.openxmlformats.org/drawingml/2006/main">
               <a:ext uri="{FF2B5EF4-FFF2-40B4-BE49-F238E27FC236}">
-                <a16:creationId xmlns:a16="http://schemas.microsoft.com/office/drawing/2014/main" id="{3DDC0235-0C5B-4DB3-97FA-4F04B5C16AD1}"/>
+                <a16:creationId xmlns:a16="http://schemas.microsoft.com/office/drawing/2014/main" id="{8AAD752B-3860-4744-AA47-4E87AFFBCB7F}"/>
               </a:ext>
             </a:extLst>
           </p:cNvPr>
@@ -7182,7 +9315,7 @@
           <p:cNvPr id="12" name="">
             <a:extLst xmlns:a="http://schemas.openxmlformats.org/drawingml/2006/main">
               <a:ext uri="{FF2B5EF4-FFF2-40B4-BE49-F238E27FC236}">
-                <a16:creationId xmlns:a16="http://schemas.microsoft.com/office/drawing/2014/main" id="{4F44DE1A-4B96-482F-958C-A51676FCA6CD}"/>
+                <a16:creationId xmlns:a16="http://schemas.microsoft.com/office/drawing/2014/main" id="{900CD946-F289-41C6-8F7F-59696A7CB4CA}"/>
               </a:ext>
             </a:extLst>
           </p:cNvPr>
@@ -7232,7 +9365,7 @@
           <p:cNvPr id="13" name="">
             <a:extLst xmlns:a="http://schemas.openxmlformats.org/drawingml/2006/main">
               <a:ext uri="{FF2B5EF4-FFF2-40B4-BE49-F238E27FC236}">
-                <a16:creationId xmlns:a16="http://schemas.microsoft.com/office/drawing/2014/main" id="{0634DE41-FE40-48C6-AE46-9B5026802489}"/>
+                <a16:creationId xmlns:a16="http://schemas.microsoft.com/office/drawing/2014/main" id="{75D02642-8FEE-4BFD-A5DB-EF311046E872}"/>
               </a:ext>
             </a:extLst>
           </p:cNvPr>
@@ -7263,7 +9396,7 @@
           <p:cNvPr id="14" name="">
             <a:extLst xmlns:a="http://schemas.openxmlformats.org/drawingml/2006/main">
               <a:ext uri="{FF2B5EF4-FFF2-40B4-BE49-F238E27FC236}">
-                <a16:creationId xmlns:a16="http://schemas.microsoft.com/office/drawing/2014/main" id="{05A18051-7D1A-42F5-8603-0CBC2A629DF4}"/>
+                <a16:creationId xmlns:a16="http://schemas.microsoft.com/office/drawing/2014/main" id="{B111CEA5-B24D-47BB-AE29-1D750324526C}"/>
               </a:ext>
             </a:extLst>
           </p:cNvPr>
@@ -7313,7 +9446,7 @@
           <p:cNvPr id="15" name="">
             <a:extLst xmlns:a="http://schemas.openxmlformats.org/drawingml/2006/main">
               <a:ext uri="{FF2B5EF4-FFF2-40B4-BE49-F238E27FC236}">
-                <a16:creationId xmlns:a16="http://schemas.microsoft.com/office/drawing/2014/main" id="{47F18912-FF0F-4E65-A03A-234CF0F3B822}"/>
+                <a16:creationId xmlns:a16="http://schemas.microsoft.com/office/drawing/2014/main" id="{176F4A9E-7F30-4970-8409-9F21C84B9ED8}"/>
               </a:ext>
             </a:extLst>
           </p:cNvPr>
@@ -7363,7 +9496,7 @@
           <p:cNvPr id="16" name="">
             <a:extLst xmlns:a="http://schemas.openxmlformats.org/drawingml/2006/main">
               <a:ext uri="{FF2B5EF4-FFF2-40B4-BE49-F238E27FC236}">
-                <a16:creationId xmlns:a16="http://schemas.microsoft.com/office/drawing/2014/main" id="{B5A3B469-3280-4FE1-A8BF-720A505087A5}"/>
+                <a16:creationId xmlns:a16="http://schemas.microsoft.com/office/drawing/2014/main" id="{31A54852-7400-4FA1-8E52-2C423E6510C8}"/>
               </a:ext>
             </a:extLst>
           </p:cNvPr>
@@ -7398,7 +9531,7 @@
           <p:cNvPr id="17" name="">
             <a:extLst xmlns:a="http://schemas.openxmlformats.org/drawingml/2006/main">
               <a:ext uri="{FF2B5EF4-FFF2-40B4-BE49-F238E27FC236}">
-                <a16:creationId xmlns:a16="http://schemas.microsoft.com/office/drawing/2014/main" id="{055ACD66-2A7D-400A-909E-87FDCC3DB513}"/>
+                <a16:creationId xmlns:a16="http://schemas.microsoft.com/office/drawing/2014/main" id="{DC83241C-C1B4-4910-9FE4-A4314E6A3482}"/>
               </a:ext>
             </a:extLst>
           </p:cNvPr>
@@ -7431,7 +9564,7 @@
           <p:cNvPr id="18" name="">
             <a:extLst xmlns:a="http://schemas.openxmlformats.org/drawingml/2006/main">
               <a:ext uri="{FF2B5EF4-FFF2-40B4-BE49-F238E27FC236}">
-                <a16:creationId xmlns:a16="http://schemas.microsoft.com/office/drawing/2014/main" id="{A2FC6713-F414-4C4E-B241-A1D56382A5D6}"/>
+                <a16:creationId xmlns:a16="http://schemas.microsoft.com/office/drawing/2014/main" id="{17C4727F-2C8B-4FA7-87FF-37C29E715B9D}"/>
               </a:ext>
             </a:extLst>
           </p:cNvPr>
@@ -7481,7 +9614,7 @@
           <p:cNvPr id="19" name="">
             <a:extLst xmlns:a="http://schemas.openxmlformats.org/drawingml/2006/main">
               <a:ext uri="{FF2B5EF4-FFF2-40B4-BE49-F238E27FC236}">
-                <a16:creationId xmlns:a16="http://schemas.microsoft.com/office/drawing/2014/main" id="{15286D9E-0066-4E8F-928F-6F40634556F4}"/>
+                <a16:creationId xmlns:a16="http://schemas.microsoft.com/office/drawing/2014/main" id="{B5699C43-EEFD-4BE9-9918-EAEDEB29DCC5}"/>
               </a:ext>
             </a:extLst>
           </p:cNvPr>
@@ -7531,7 +9664,7 @@
           <p:cNvPr id="20" name="">
             <a:extLst xmlns:a="http://schemas.openxmlformats.org/drawingml/2006/main">
               <a:ext uri="{FF2B5EF4-FFF2-40B4-BE49-F238E27FC236}">
-                <a16:creationId xmlns:a16="http://schemas.microsoft.com/office/drawing/2014/main" id="{7FC90D6A-3388-4F33-BF22-FC2D89901136}"/>
+                <a16:creationId xmlns:a16="http://schemas.microsoft.com/office/drawing/2014/main" id="{C898DEFB-5D17-4524-B623-EFCEBFFC38B9}"/>
               </a:ext>
             </a:extLst>
           </p:cNvPr>
@@ -7581,7 +9714,7 @@
           <p:cNvPr id="21" name="">
             <a:extLst xmlns:a="http://schemas.openxmlformats.org/drawingml/2006/main">
               <a:ext uri="{FF2B5EF4-FFF2-40B4-BE49-F238E27FC236}">
-                <a16:creationId xmlns:a16="http://schemas.microsoft.com/office/drawing/2014/main" id="{E5B33C43-9377-4CC0-BEC2-DA85F6C14DEB}"/>
+                <a16:creationId xmlns:a16="http://schemas.microsoft.com/office/drawing/2014/main" id="{30876C6F-5DEF-4571-BB0F-8342DC2512DC}"/>
               </a:ext>
             </a:extLst>
           </p:cNvPr>
@@ -7612,7 +9745,7 @@
           <p:cNvPr id="22" name="">
             <a:extLst xmlns:a="http://schemas.openxmlformats.org/drawingml/2006/main">
               <a:ext uri="{FF2B5EF4-FFF2-40B4-BE49-F238E27FC236}">
-                <a16:creationId xmlns:a16="http://schemas.microsoft.com/office/drawing/2014/main" id="{67B75312-F486-470C-A8A7-9E8CD855A2B3}"/>
+                <a16:creationId xmlns:a16="http://schemas.microsoft.com/office/drawing/2014/main" id="{3309268E-FA3D-4F65-96C7-40DE9FB882E1}"/>
               </a:ext>
             </a:extLst>
           </p:cNvPr>
@@ -7662,7 +9795,7 @@
           <p:cNvPr id="23" name="">
             <a:extLst xmlns:a="http://schemas.openxmlformats.org/drawingml/2006/main">
               <a:ext uri="{FF2B5EF4-FFF2-40B4-BE49-F238E27FC236}">
-                <a16:creationId xmlns:a16="http://schemas.microsoft.com/office/drawing/2014/main" id="{60523299-9139-4D04-8876-0E024EC74410}"/>
+                <a16:creationId xmlns:a16="http://schemas.microsoft.com/office/drawing/2014/main" id="{AB184B90-879D-4406-ACBD-53837C17CA96}"/>
               </a:ext>
             </a:extLst>
           </p:cNvPr>
@@ -7712,7 +9845,7 @@
           <p:cNvPr id="24" name="">
             <a:extLst xmlns:a="http://schemas.openxmlformats.org/drawingml/2006/main">
               <a:ext uri="{FF2B5EF4-FFF2-40B4-BE49-F238E27FC236}">
-                <a16:creationId xmlns:a16="http://schemas.microsoft.com/office/drawing/2014/main" id="{0DA2433D-244B-4798-B6E4-3A93E5B64F6C}"/>
+                <a16:creationId xmlns:a16="http://schemas.microsoft.com/office/drawing/2014/main" id="{7E6E716C-27C8-4CC8-8685-6A90C11CB761}"/>
               </a:ext>
             </a:extLst>
           </p:cNvPr>
@@ -7747,7 +9880,7 @@
           <p:cNvPr id="25" name="">
             <a:extLst xmlns:a="http://schemas.openxmlformats.org/drawingml/2006/main">
               <a:ext uri="{FF2B5EF4-FFF2-40B4-BE49-F238E27FC236}">
-                <a16:creationId xmlns:a16="http://schemas.microsoft.com/office/drawing/2014/main" id="{42168678-77EC-47E4-960A-B4584E09FFB5}"/>
+                <a16:creationId xmlns:a16="http://schemas.microsoft.com/office/drawing/2014/main" id="{54FCF885-9F86-4B11-80FD-7C1DB1A74379}"/>
               </a:ext>
             </a:extLst>
           </p:cNvPr>
@@ -7780,7 +9913,7 @@
           <p:cNvPr id="26" name="">
             <a:extLst xmlns:a="http://schemas.openxmlformats.org/drawingml/2006/main">
               <a:ext uri="{FF2B5EF4-FFF2-40B4-BE49-F238E27FC236}">
-                <a16:creationId xmlns:a16="http://schemas.microsoft.com/office/drawing/2014/main" id="{487F9AA4-C6B7-441C-925D-F9414AB5A718}"/>
+                <a16:creationId xmlns:a16="http://schemas.microsoft.com/office/drawing/2014/main" id="{0247232B-A9BB-4E49-BC45-18DE2449717F}"/>
               </a:ext>
             </a:extLst>
           </p:cNvPr>
@@ -7830,7 +9963,7 @@
           <p:cNvPr id="27" name="">
             <a:extLst xmlns:a="http://schemas.openxmlformats.org/drawingml/2006/main">
               <a:ext uri="{FF2B5EF4-FFF2-40B4-BE49-F238E27FC236}">
-                <a16:creationId xmlns:a16="http://schemas.microsoft.com/office/drawing/2014/main" id="{2FC6A8FB-26BB-406A-B5CE-61297C500493}"/>
+                <a16:creationId xmlns:a16="http://schemas.microsoft.com/office/drawing/2014/main" id="{B2CF929E-908D-4BB8-999B-CEE6D8E080C1}"/>
               </a:ext>
             </a:extLst>
           </p:cNvPr>
@@ -7880,7 +10013,7 @@
           <p:cNvPr id="28" name="">
             <a:extLst xmlns:a="http://schemas.openxmlformats.org/drawingml/2006/main">
               <a:ext uri="{FF2B5EF4-FFF2-40B4-BE49-F238E27FC236}">
-                <a16:creationId xmlns:a16="http://schemas.microsoft.com/office/drawing/2014/main" id="{EEE96FB2-3B43-4ABE-B6F7-37BD688756EE}"/>
+                <a16:creationId xmlns:a16="http://schemas.microsoft.com/office/drawing/2014/main" id="{97A0E782-CF7A-4884-9B9A-4D60F0502756}"/>
               </a:ext>
             </a:extLst>
           </p:cNvPr>
@@ -7930,7 +10063,7 @@
           <p:cNvPr id="29" name="">
             <a:extLst xmlns:a="http://schemas.openxmlformats.org/drawingml/2006/main">
               <a:ext uri="{FF2B5EF4-FFF2-40B4-BE49-F238E27FC236}">
-                <a16:creationId xmlns:a16="http://schemas.microsoft.com/office/drawing/2014/main" id="{64A7FC66-B0A7-41C3-A915-87252EEBBE1E}"/>
+                <a16:creationId xmlns:a16="http://schemas.microsoft.com/office/drawing/2014/main" id="{1FE96296-914A-4E4C-923A-5EBA91BC27E7}"/>
               </a:ext>
             </a:extLst>
           </p:cNvPr>
@@ -7961,7 +10094,7 @@
           <p:cNvPr id="30" name="">
             <a:extLst xmlns:a="http://schemas.openxmlformats.org/drawingml/2006/main">
               <a:ext uri="{FF2B5EF4-FFF2-40B4-BE49-F238E27FC236}">
-                <a16:creationId xmlns:a16="http://schemas.microsoft.com/office/drawing/2014/main" id="{0EAAE7C8-1718-429E-BE2C-5DE01F347596}"/>
+                <a16:creationId xmlns:a16="http://schemas.microsoft.com/office/drawing/2014/main" id="{F1E88763-FB6A-42ED-BD05-7771BB618FBE}"/>
               </a:ext>
             </a:extLst>
           </p:cNvPr>
@@ -8011,7 +10144,7 @@
           <p:cNvPr id="31" name="">
             <a:extLst xmlns:a="http://schemas.openxmlformats.org/drawingml/2006/main">
               <a:ext uri="{FF2B5EF4-FFF2-40B4-BE49-F238E27FC236}">
-                <a16:creationId xmlns:a16="http://schemas.microsoft.com/office/drawing/2014/main" id="{4A6EFDF0-0217-4FD5-9D58-AE630F2A3A13}"/>
+                <a16:creationId xmlns:a16="http://schemas.microsoft.com/office/drawing/2014/main" id="{438FB042-05FB-445D-ADD4-AE0A8391F38B}"/>
               </a:ext>
             </a:extLst>
           </p:cNvPr>
@@ -8059,7 +10192,7 @@
     </p:spTree>
     <p:extLst>
       <p:ext uri="{BB962C8B-B14F-4D97-AF65-F5344CB8AC3E}">
-        <p14:creationId xmlns:p14="http://schemas.microsoft.com/office/powerpoint/2010/main" val="1068576620"/>
+        <p14:creationId xmlns:p14="http://schemas.microsoft.com/office/powerpoint/2010/main" val="1986962878"/>
       </p:ext>
     </p:extLst>
   </p:cSld>
@@ -8072,7 +10205,7 @@
     <p:bg>
       <p:bgPr>
         <a:solidFill xmlns:a="http://schemas.openxmlformats.org/drawingml/2006/main">
-          <a:srgbClr val="102A63"/>
+          <a:srgbClr val="FFFFFF"/>
         </a:solidFill>
       </p:bgPr>
     </p:bg>
@@ -8090,7 +10223,7 @@
           <p:cNvPr id="1" name="">
             <a:extLst xmlns:a="http://schemas.openxmlformats.org/drawingml/2006/main">
               <a:ext uri="{FF2B5EF4-FFF2-40B4-BE49-F238E27FC236}">
-                <a16:creationId xmlns:a16="http://schemas.microsoft.com/office/drawing/2014/main" id="{DA8C2A0C-F63E-42C6-AA2C-55496CB89524}"/>
+                <a16:creationId xmlns:a16="http://schemas.microsoft.com/office/drawing/2014/main" id="{2736C115-410D-4886-A9D9-0755D1D7AE33}"/>
               </a:ext>
             </a:extLst>
           </p:cNvPr>
@@ -8102,7 +10235,7 @@
         <p:spPr>
           <a:xfrm xmlns:a="http://schemas.openxmlformats.org/drawingml/2006/main">
             <a:off x="0" y="0"/>
-            <a:ext cx="209550" cy="6858000"/>
+            <a:ext cx="171450" cy="6858000"/>
           </a:xfrm>
           <a:prstGeom xmlns:a="http://schemas.openxmlformats.org/drawingml/2006/main" prst="rect">
             <a:avLst/>
@@ -8118,20 +10251,20 @@
       </p:sp>
       <p:pic>
         <p:nvPicPr>
-          <p:cNvPr id="17" name=""/>
+          <p:cNvPr id="27" name=""/>
           <p:cNvPicPr>
             <a:picLocks xmlns:a="http://schemas.openxmlformats.org/drawingml/2006/main" noChangeAspect="1"/>
           </p:cNvPicPr>
           <p:nvPr/>
         </p:nvPicPr>
         <p:blipFill>
-          <a:blip xmlns:r="http://schemas.openxmlformats.org/officeDocument/2006/relationships" xmlns:a="http://schemas.openxmlformats.org/drawingml/2006/main" r:embed="Ra40c781c3b6e4173"/>
+          <a:blip xmlns:r="http://schemas.openxmlformats.org/officeDocument/2006/relationships" xmlns:a="http://schemas.openxmlformats.org/drawingml/2006/main" r:embed="Rb67dc194222f4676"/>
           <a:stretch xmlns:a="http://schemas.openxmlformats.org/drawingml/2006/main"/>
         </p:blipFill>
         <p:spPr>
           <a:xfrm xmlns:a="http://schemas.openxmlformats.org/drawingml/2006/main">
-            <a:off x="9682843" y="342900"/>
-            <a:ext cx="1494064" cy="685800"/>
+            <a:off x="10093098" y="247650"/>
+            <a:ext cx="1245054" cy="571500"/>
           </a:xfrm>
           <a:prstGeom xmlns:a="http://schemas.openxmlformats.org/drawingml/2006/main" prst="rect">
             <a:avLst/>
@@ -8143,19 +10276,19 @@
           <p:cNvPr id="3" name="">
             <a:extLst xmlns:a="http://schemas.openxmlformats.org/drawingml/2006/main">
               <a:ext uri="{FF2B5EF4-FFF2-40B4-BE49-F238E27FC236}">
-                <a16:creationId xmlns:a16="http://schemas.microsoft.com/office/drawing/2014/main" id="{B591947A-76F7-4A5A-8DEA-55FA31F6AA58}"/>
-              </a:ext>
-            </a:extLst>
-          </p:cNvPr>
-          <p:cNvSpPr>
-            <a:spLocks xmlns:a="http://schemas.openxmlformats.org/drawingml/2006/main" noGrp="1"/>
-          </p:cNvSpPr>
-          <p:nvPr/>
-        </p:nvSpPr>
-        <p:spPr>
-          <a:xfrm xmlns:a="http://schemas.openxmlformats.org/drawingml/2006/main">
-            <a:off x="628650" y="552450"/>
-            <a:ext cx="7810500" cy="552450"/>
+                <a16:creationId xmlns:a16="http://schemas.microsoft.com/office/drawing/2014/main" id="{DE157567-0F5B-449E-A6ED-7E8FB30C1276}"/>
+              </a:ext>
+            </a:extLst>
+          </p:cNvPr>
+          <p:cNvSpPr>
+            <a:spLocks xmlns:a="http://schemas.openxmlformats.org/drawingml/2006/main" noGrp="1"/>
+          </p:cNvSpPr>
+          <p:nvPr/>
+        </p:nvSpPr>
+        <p:spPr>
+          <a:xfrm xmlns:a="http://schemas.openxmlformats.org/drawingml/2006/main">
+            <a:off x="552450" y="419100"/>
+            <a:ext cx="8286750" cy="533400"/>
           </a:xfrm>
           <a:prstGeom xmlns:a="http://schemas.openxmlformats.org/drawingml/2006/main" prst="rect">
             <a:avLst/>
@@ -8171,19 +10304,19 @@
           <a:lstStyle xmlns:a="http://schemas.openxmlformats.org/drawingml/2006/main"/>
           <a:p xmlns:a="http://schemas.openxmlformats.org/drawingml/2006/main">
             <a:pPr>
-              <a:defRPr sz="2700" b="1">
-                <a:solidFill>
-                  <a:srgbClr val="FFFFFF"/>
-                </a:solidFill>
-              </a:defRPr>
-            </a:pPr>
-            <a:r>
-              <a:rPr sz="2700" b="1">
-                <a:solidFill>
-                  <a:srgbClr val="FFFFFF"/>
-                </a:solidFill>
-              </a:rPr>
-              <a:t>Решения, которые стоит принять сейчас</a:t>
+              <a:defRPr sz="2550" b="1">
+                <a:solidFill>
+                  <a:srgbClr val="102A63"/>
+                </a:solidFill>
+              </a:defRPr>
+            </a:pPr>
+            <a:r>
+              <a:rPr sz="2550" b="1">
+                <a:solidFill>
+                  <a:srgbClr val="102A63"/>
+                </a:solidFill>
+              </a:rPr>
+              <a:t>Зафиксируйте решения и следующий шаг</a:t>
             </a:r>
           </a:p>
         </p:txBody>
@@ -8193,19 +10326,19 @@
           <p:cNvPr id="4" name="">
             <a:extLst xmlns:a="http://schemas.openxmlformats.org/drawingml/2006/main">
               <a:ext uri="{FF2B5EF4-FFF2-40B4-BE49-F238E27FC236}">
-                <a16:creationId xmlns:a16="http://schemas.microsoft.com/office/drawing/2014/main" id="{7FF614B9-FB92-4C3B-B32A-4E55954ECD15}"/>
-              </a:ext>
-            </a:extLst>
-          </p:cNvPr>
-          <p:cNvSpPr>
-            <a:spLocks xmlns:a="http://schemas.openxmlformats.org/drawingml/2006/main" noGrp="1"/>
-          </p:cNvSpPr>
-          <p:nvPr/>
-        </p:nvSpPr>
-        <p:spPr>
-          <a:xfrm xmlns:a="http://schemas.openxmlformats.org/drawingml/2006/main">
-            <a:off x="628650" y="1276350"/>
-            <a:ext cx="1066800" cy="76200"/>
+                <a16:creationId xmlns:a16="http://schemas.microsoft.com/office/drawing/2014/main" id="{75BEB26F-050F-4E86-B2FD-3633137B1870}"/>
+              </a:ext>
+            </a:extLst>
+          </p:cNvPr>
+          <p:cNvSpPr>
+            <a:spLocks xmlns:a="http://schemas.openxmlformats.org/drawingml/2006/main" noGrp="1"/>
+          </p:cNvSpPr>
+          <p:nvPr/>
+        </p:nvSpPr>
+        <p:spPr>
+          <a:xfrm xmlns:a="http://schemas.openxmlformats.org/drawingml/2006/main">
+            <a:off x="552450" y="1066800"/>
+            <a:ext cx="990600" cy="66675"/>
           </a:xfrm>
           <a:prstGeom xmlns:a="http://schemas.openxmlformats.org/drawingml/2006/main" prst="roundRect">
             <a:avLst>
@@ -8226,424 +10359,22 @@
           <p:cNvPr id="5" name="">
             <a:extLst xmlns:a="http://schemas.openxmlformats.org/drawingml/2006/main">
               <a:ext uri="{FF2B5EF4-FFF2-40B4-BE49-F238E27FC236}">
-                <a16:creationId xmlns:a16="http://schemas.microsoft.com/office/drawing/2014/main" id="{D5302694-F479-477D-AE6E-BE07897C04F6}"/>
-              </a:ext>
-            </a:extLst>
-          </p:cNvPr>
-          <p:cNvSpPr>
-            <a:spLocks xmlns:a="http://schemas.openxmlformats.org/drawingml/2006/main" noGrp="1"/>
-          </p:cNvSpPr>
-          <p:nvPr/>
-        </p:nvSpPr>
-        <p:spPr>
-          <a:xfrm xmlns:a="http://schemas.openxmlformats.org/drawingml/2006/main">
-            <a:off x="628650" y="1752600"/>
-            <a:ext cx="457200" cy="285750"/>
-          </a:xfrm>
-          <a:prstGeom xmlns:a="http://schemas.openxmlformats.org/drawingml/2006/main" prst="rect">
-            <a:avLst/>
-          </a:prstGeom>
-          <a:noFill xmlns:a="http://schemas.openxmlformats.org/drawingml/2006/main"/>
-          <a:ln xmlns:a="http://schemas.openxmlformats.org/drawingml/2006/main" w="0">
-            <a:noFill/>
-            <a:prstDash val="solid"/>
-          </a:ln>
-        </p:spPr>
-        <p:txBody>
-          <a:bodyPr xmlns:a="http://schemas.openxmlformats.org/drawingml/2006/main"/>
-          <a:lstStyle xmlns:a="http://schemas.openxmlformats.org/drawingml/2006/main"/>
-          <a:p xmlns:a="http://schemas.openxmlformats.org/drawingml/2006/main">
-            <a:pPr>
-              <a:defRPr sz="1200" b="1">
-                <a:solidFill>
-                  <a:srgbClr val="2048A8"/>
-                </a:solidFill>
-              </a:defRPr>
-            </a:pPr>
-            <a:r>
-              <a:rPr sz="1200" b="1">
-                <a:solidFill>
-                  <a:srgbClr val="2048A8"/>
-                </a:solidFill>
-              </a:rPr>
-              <a:t>01</a:t>
-            </a:r>
-          </a:p>
-        </p:txBody>
-      </p:sp>
-      <p:sp>
-        <p:nvSpPr>
-          <p:cNvPr id="6" name="">
-            <a:extLst xmlns:a="http://schemas.openxmlformats.org/drawingml/2006/main">
-              <a:ext uri="{FF2B5EF4-FFF2-40B4-BE49-F238E27FC236}">
-                <a16:creationId xmlns:a16="http://schemas.microsoft.com/office/drawing/2014/main" id="{6CFF5EC5-A32A-4757-A1D8-685E0BA7DF7E}"/>
-              </a:ext>
-            </a:extLst>
-          </p:cNvPr>
-          <p:cNvSpPr>
-            <a:spLocks xmlns:a="http://schemas.openxmlformats.org/drawingml/2006/main" noGrp="1"/>
-          </p:cNvSpPr>
-          <p:nvPr/>
-        </p:nvSpPr>
-        <p:spPr>
-          <a:xfrm xmlns:a="http://schemas.openxmlformats.org/drawingml/2006/main">
-            <a:off x="1238250" y="1714500"/>
-            <a:ext cx="9715500" cy="647700"/>
-          </a:xfrm>
-          <a:prstGeom xmlns:a="http://schemas.openxmlformats.org/drawingml/2006/main" prst="rect">
-            <a:avLst/>
-          </a:prstGeom>
-          <a:noFill xmlns:a="http://schemas.openxmlformats.org/drawingml/2006/main"/>
-          <a:ln xmlns:a="http://schemas.openxmlformats.org/drawingml/2006/main" w="0">
-            <a:noFill/>
-            <a:prstDash val="solid"/>
-          </a:ln>
-        </p:spPr>
-        <p:txBody>
-          <a:bodyPr xmlns:a="http://schemas.openxmlformats.org/drawingml/2006/main"/>
-          <a:lstStyle xmlns:a="http://schemas.openxmlformats.org/drawingml/2006/main"/>
-          <a:p xmlns:a="http://schemas.openxmlformats.org/drawingml/2006/main">
-            <a:pPr>
-              <a:defRPr sz="1425">
-                <a:solidFill>
-                  <a:srgbClr val="FFFFFF"/>
-                </a:solidFill>
-              </a:defRPr>
-            </a:pPr>
-            <a:r>
-              <a:rPr sz="1425">
-                <a:solidFill>
-                  <a:srgbClr val="FFFFFF"/>
-                </a:solidFill>
-              </a:rPr>
-              <a:t>{{DECISION_1}}</a:t>
-            </a:r>
-          </a:p>
-        </p:txBody>
-      </p:sp>
-      <p:sp>
-        <p:nvSpPr>
-          <p:cNvPr id="7" name="">
-            <a:extLst xmlns:a="http://schemas.openxmlformats.org/drawingml/2006/main">
-              <a:ext uri="{FF2B5EF4-FFF2-40B4-BE49-F238E27FC236}">
-                <a16:creationId xmlns:a16="http://schemas.microsoft.com/office/drawing/2014/main" id="{3D73DCB6-086F-4814-96CB-050752476428}"/>
-              </a:ext>
-            </a:extLst>
-          </p:cNvPr>
-          <p:cNvSpPr>
-            <a:spLocks xmlns:a="http://schemas.openxmlformats.org/drawingml/2006/main" noGrp="1"/>
-          </p:cNvSpPr>
-          <p:nvPr/>
-        </p:nvSpPr>
-        <p:spPr>
-          <a:xfrm xmlns:a="http://schemas.openxmlformats.org/drawingml/2006/main">
-            <a:off x="628650" y="2628900"/>
-            <a:ext cx="457200" cy="285750"/>
-          </a:xfrm>
-          <a:prstGeom xmlns:a="http://schemas.openxmlformats.org/drawingml/2006/main" prst="rect">
-            <a:avLst/>
-          </a:prstGeom>
-          <a:noFill xmlns:a="http://schemas.openxmlformats.org/drawingml/2006/main"/>
-          <a:ln xmlns:a="http://schemas.openxmlformats.org/drawingml/2006/main" w="0">
-            <a:noFill/>
-            <a:prstDash val="solid"/>
-          </a:ln>
-        </p:spPr>
-        <p:txBody>
-          <a:bodyPr xmlns:a="http://schemas.openxmlformats.org/drawingml/2006/main"/>
-          <a:lstStyle xmlns:a="http://schemas.openxmlformats.org/drawingml/2006/main"/>
-          <a:p xmlns:a="http://schemas.openxmlformats.org/drawingml/2006/main">
-            <a:pPr>
-              <a:defRPr sz="1200" b="1">
-                <a:solidFill>
-                  <a:srgbClr val="2048A8"/>
-                </a:solidFill>
-              </a:defRPr>
-            </a:pPr>
-            <a:r>
-              <a:rPr sz="1200" b="1">
-                <a:solidFill>
-                  <a:srgbClr val="2048A8"/>
-                </a:solidFill>
-              </a:rPr>
-              <a:t>02</a:t>
-            </a:r>
-          </a:p>
-        </p:txBody>
-      </p:sp>
-      <p:sp>
-        <p:nvSpPr>
-          <p:cNvPr id="8" name="">
-            <a:extLst xmlns:a="http://schemas.openxmlformats.org/drawingml/2006/main">
-              <a:ext uri="{FF2B5EF4-FFF2-40B4-BE49-F238E27FC236}">
-                <a16:creationId xmlns:a16="http://schemas.microsoft.com/office/drawing/2014/main" id="{0EDBAD68-9412-4624-870A-DE8F3B760C8C}"/>
-              </a:ext>
-            </a:extLst>
-          </p:cNvPr>
-          <p:cNvSpPr>
-            <a:spLocks xmlns:a="http://schemas.openxmlformats.org/drawingml/2006/main" noGrp="1"/>
-          </p:cNvSpPr>
-          <p:nvPr/>
-        </p:nvSpPr>
-        <p:spPr>
-          <a:xfrm xmlns:a="http://schemas.openxmlformats.org/drawingml/2006/main">
-            <a:off x="1238250" y="2590800"/>
-            <a:ext cx="9715500" cy="647700"/>
-          </a:xfrm>
-          <a:prstGeom xmlns:a="http://schemas.openxmlformats.org/drawingml/2006/main" prst="rect">
-            <a:avLst/>
-          </a:prstGeom>
-          <a:noFill xmlns:a="http://schemas.openxmlformats.org/drawingml/2006/main"/>
-          <a:ln xmlns:a="http://schemas.openxmlformats.org/drawingml/2006/main" w="0">
-            <a:noFill/>
-            <a:prstDash val="solid"/>
-          </a:ln>
-        </p:spPr>
-        <p:txBody>
-          <a:bodyPr xmlns:a="http://schemas.openxmlformats.org/drawingml/2006/main"/>
-          <a:lstStyle xmlns:a="http://schemas.openxmlformats.org/drawingml/2006/main"/>
-          <a:p xmlns:a="http://schemas.openxmlformats.org/drawingml/2006/main">
-            <a:pPr>
-              <a:defRPr sz="1425">
-                <a:solidFill>
-                  <a:srgbClr val="FFFFFF"/>
-                </a:solidFill>
-              </a:defRPr>
-            </a:pPr>
-            <a:r>
-              <a:rPr sz="1425">
-                <a:solidFill>
-                  <a:srgbClr val="FFFFFF"/>
-                </a:solidFill>
-              </a:rPr>
-              <a:t>{{DECISION_2}}</a:t>
-            </a:r>
-          </a:p>
-        </p:txBody>
-      </p:sp>
-      <p:sp>
-        <p:nvSpPr>
-          <p:cNvPr id="9" name="">
-            <a:extLst xmlns:a="http://schemas.openxmlformats.org/drawingml/2006/main">
-              <a:ext uri="{FF2B5EF4-FFF2-40B4-BE49-F238E27FC236}">
-                <a16:creationId xmlns:a16="http://schemas.microsoft.com/office/drawing/2014/main" id="{B3B57C00-59DF-49AB-8B41-D9ED13F74334}"/>
-              </a:ext>
-            </a:extLst>
-          </p:cNvPr>
-          <p:cNvSpPr>
-            <a:spLocks xmlns:a="http://schemas.openxmlformats.org/drawingml/2006/main" noGrp="1"/>
-          </p:cNvSpPr>
-          <p:nvPr/>
-        </p:nvSpPr>
-        <p:spPr>
-          <a:xfrm xmlns:a="http://schemas.openxmlformats.org/drawingml/2006/main">
-            <a:off x="628650" y="3505200"/>
-            <a:ext cx="457200" cy="285750"/>
-          </a:xfrm>
-          <a:prstGeom xmlns:a="http://schemas.openxmlformats.org/drawingml/2006/main" prst="rect">
-            <a:avLst/>
-          </a:prstGeom>
-          <a:noFill xmlns:a="http://schemas.openxmlformats.org/drawingml/2006/main"/>
-          <a:ln xmlns:a="http://schemas.openxmlformats.org/drawingml/2006/main" w="0">
-            <a:noFill/>
-            <a:prstDash val="solid"/>
-          </a:ln>
-        </p:spPr>
-        <p:txBody>
-          <a:bodyPr xmlns:a="http://schemas.openxmlformats.org/drawingml/2006/main"/>
-          <a:lstStyle xmlns:a="http://schemas.openxmlformats.org/drawingml/2006/main"/>
-          <a:p xmlns:a="http://schemas.openxmlformats.org/drawingml/2006/main">
-            <a:pPr>
-              <a:defRPr sz="1200" b="1">
-                <a:solidFill>
-                  <a:srgbClr val="2048A8"/>
-                </a:solidFill>
-              </a:defRPr>
-            </a:pPr>
-            <a:r>
-              <a:rPr sz="1200" b="1">
-                <a:solidFill>
-                  <a:srgbClr val="2048A8"/>
-                </a:solidFill>
-              </a:rPr>
-              <a:t>03</a:t>
-            </a:r>
-          </a:p>
-        </p:txBody>
-      </p:sp>
-      <p:sp>
-        <p:nvSpPr>
-          <p:cNvPr id="10" name="">
-            <a:extLst xmlns:a="http://schemas.openxmlformats.org/drawingml/2006/main">
-              <a:ext uri="{FF2B5EF4-FFF2-40B4-BE49-F238E27FC236}">
-                <a16:creationId xmlns:a16="http://schemas.microsoft.com/office/drawing/2014/main" id="{C4CC9CF0-3683-4CF4-BB7D-73ACF11A10C3}"/>
-              </a:ext>
-            </a:extLst>
-          </p:cNvPr>
-          <p:cNvSpPr>
-            <a:spLocks xmlns:a="http://schemas.openxmlformats.org/drawingml/2006/main" noGrp="1"/>
-          </p:cNvSpPr>
-          <p:nvPr/>
-        </p:nvSpPr>
-        <p:spPr>
-          <a:xfrm xmlns:a="http://schemas.openxmlformats.org/drawingml/2006/main">
-            <a:off x="1238250" y="3467100"/>
-            <a:ext cx="9715500" cy="647700"/>
-          </a:xfrm>
-          <a:prstGeom xmlns:a="http://schemas.openxmlformats.org/drawingml/2006/main" prst="rect">
-            <a:avLst/>
-          </a:prstGeom>
-          <a:noFill xmlns:a="http://schemas.openxmlformats.org/drawingml/2006/main"/>
-          <a:ln xmlns:a="http://schemas.openxmlformats.org/drawingml/2006/main" w="0">
-            <a:noFill/>
-            <a:prstDash val="solid"/>
-          </a:ln>
-        </p:spPr>
-        <p:txBody>
-          <a:bodyPr xmlns:a="http://schemas.openxmlformats.org/drawingml/2006/main"/>
-          <a:lstStyle xmlns:a="http://schemas.openxmlformats.org/drawingml/2006/main"/>
-          <a:p xmlns:a="http://schemas.openxmlformats.org/drawingml/2006/main">
-            <a:pPr>
-              <a:defRPr sz="1425">
-                <a:solidFill>
-                  <a:srgbClr val="FFFFFF"/>
-                </a:solidFill>
-              </a:defRPr>
-            </a:pPr>
-            <a:r>
-              <a:rPr sz="1425">
-                <a:solidFill>
-                  <a:srgbClr val="FFFFFF"/>
-                </a:solidFill>
-              </a:rPr>
-              <a:t>{{DECISION_3}}</a:t>
-            </a:r>
-          </a:p>
-        </p:txBody>
-      </p:sp>
-      <p:sp>
-        <p:nvSpPr>
-          <p:cNvPr id="11" name="">
-            <a:extLst xmlns:a="http://schemas.openxmlformats.org/drawingml/2006/main">
-              <a:ext uri="{FF2B5EF4-FFF2-40B4-BE49-F238E27FC236}">
-                <a16:creationId xmlns:a16="http://schemas.microsoft.com/office/drawing/2014/main" id="{7222121F-4E7B-4F51-AEE1-DF48080F0B53}"/>
-              </a:ext>
-            </a:extLst>
-          </p:cNvPr>
-          <p:cNvSpPr>
-            <a:spLocks xmlns:a="http://schemas.openxmlformats.org/drawingml/2006/main" noGrp="1"/>
-          </p:cNvSpPr>
-          <p:nvPr/>
-        </p:nvSpPr>
-        <p:spPr>
-          <a:xfrm xmlns:a="http://schemas.openxmlformats.org/drawingml/2006/main">
-            <a:off x="628650" y="4381500"/>
-            <a:ext cx="457200" cy="285750"/>
-          </a:xfrm>
-          <a:prstGeom xmlns:a="http://schemas.openxmlformats.org/drawingml/2006/main" prst="rect">
-            <a:avLst/>
-          </a:prstGeom>
-          <a:noFill xmlns:a="http://schemas.openxmlformats.org/drawingml/2006/main"/>
-          <a:ln xmlns:a="http://schemas.openxmlformats.org/drawingml/2006/main" w="0">
-            <a:noFill/>
-            <a:prstDash val="solid"/>
-          </a:ln>
-        </p:spPr>
-        <p:txBody>
-          <a:bodyPr xmlns:a="http://schemas.openxmlformats.org/drawingml/2006/main"/>
-          <a:lstStyle xmlns:a="http://schemas.openxmlformats.org/drawingml/2006/main"/>
-          <a:p xmlns:a="http://schemas.openxmlformats.org/drawingml/2006/main">
-            <a:pPr>
-              <a:defRPr sz="1200" b="1">
-                <a:solidFill>
-                  <a:srgbClr val="2048A8"/>
-                </a:solidFill>
-              </a:defRPr>
-            </a:pPr>
-            <a:r>
-              <a:rPr sz="1200" b="1">
-                <a:solidFill>
-                  <a:srgbClr val="2048A8"/>
-                </a:solidFill>
-              </a:rPr>
-              <a:t>04</a:t>
-            </a:r>
-          </a:p>
-        </p:txBody>
-      </p:sp>
-      <p:sp>
-        <p:nvSpPr>
-          <p:cNvPr id="12" name="">
-            <a:extLst xmlns:a="http://schemas.openxmlformats.org/drawingml/2006/main">
-              <a:ext uri="{FF2B5EF4-FFF2-40B4-BE49-F238E27FC236}">
-                <a16:creationId xmlns:a16="http://schemas.microsoft.com/office/drawing/2014/main" id="{C27C9806-8E9E-4D9F-B296-12B7F7764646}"/>
-              </a:ext>
-            </a:extLst>
-          </p:cNvPr>
-          <p:cNvSpPr>
-            <a:spLocks xmlns:a="http://schemas.openxmlformats.org/drawingml/2006/main" noGrp="1"/>
-          </p:cNvSpPr>
-          <p:nvPr/>
-        </p:nvSpPr>
-        <p:spPr>
-          <a:xfrm xmlns:a="http://schemas.openxmlformats.org/drawingml/2006/main">
-            <a:off x="1238250" y="4343400"/>
-            <a:ext cx="9715500" cy="647700"/>
-          </a:xfrm>
-          <a:prstGeom xmlns:a="http://schemas.openxmlformats.org/drawingml/2006/main" prst="rect">
-            <a:avLst/>
-          </a:prstGeom>
-          <a:noFill xmlns:a="http://schemas.openxmlformats.org/drawingml/2006/main"/>
-          <a:ln xmlns:a="http://schemas.openxmlformats.org/drawingml/2006/main" w="0">
-            <a:noFill/>
-            <a:prstDash val="solid"/>
-          </a:ln>
-        </p:spPr>
-        <p:txBody>
-          <a:bodyPr xmlns:a="http://schemas.openxmlformats.org/drawingml/2006/main"/>
-          <a:lstStyle xmlns:a="http://schemas.openxmlformats.org/drawingml/2006/main"/>
-          <a:p xmlns:a="http://schemas.openxmlformats.org/drawingml/2006/main">
-            <a:pPr>
-              <a:defRPr sz="1425">
-                <a:solidFill>
-                  <a:srgbClr val="FFFFFF"/>
-                </a:solidFill>
-              </a:defRPr>
-            </a:pPr>
-            <a:r>
-              <a:rPr sz="1425">
-                <a:solidFill>
-                  <a:srgbClr val="FFFFFF"/>
-                </a:solidFill>
-              </a:rPr>
-              <a:t>{{DECISION_4}}</a:t>
-            </a:r>
-          </a:p>
-        </p:txBody>
-      </p:sp>
-      <p:sp>
-        <p:nvSpPr>
-          <p:cNvPr id="13" name="">
-            <a:extLst xmlns:a="http://schemas.openxmlformats.org/drawingml/2006/main">
-              <a:ext uri="{FF2B5EF4-FFF2-40B4-BE49-F238E27FC236}">
-                <a16:creationId xmlns:a16="http://schemas.microsoft.com/office/drawing/2014/main" id="{72D4DB48-80C8-41FA-89AD-D8161E746C45}"/>
-              </a:ext>
-            </a:extLst>
-          </p:cNvPr>
-          <p:cNvSpPr>
-            <a:spLocks xmlns:a="http://schemas.openxmlformats.org/drawingml/2006/main" noGrp="1"/>
-          </p:cNvSpPr>
-          <p:nvPr/>
-        </p:nvSpPr>
-        <p:spPr>
-          <a:xfrm xmlns:a="http://schemas.openxmlformats.org/drawingml/2006/main">
-            <a:off x="628650" y="5543550"/>
-            <a:ext cx="5429250" cy="704850"/>
-          </a:xfrm>
-          <a:prstGeom xmlns:a="http://schemas.openxmlformats.org/drawingml/2006/main" prst="roundRect">
-            <a:avLst>
-              <a:gd name="adj" fmla="val 10811"/>
-            </a:avLst>
+                <a16:creationId xmlns:a16="http://schemas.microsoft.com/office/drawing/2014/main" id="{7B4D2CEB-99DD-4380-9857-45C35C1944B8}"/>
+              </a:ext>
+            </a:extLst>
+          </p:cNvPr>
+          <p:cNvSpPr>
+            <a:spLocks xmlns:a="http://schemas.openxmlformats.org/drawingml/2006/main" noGrp="1"/>
+          </p:cNvSpPr>
+          <p:nvPr/>
+        </p:nvSpPr>
+        <p:spPr>
+          <a:xfrm xmlns:a="http://schemas.openxmlformats.org/drawingml/2006/main">
+            <a:off x="0" y="6629400"/>
+            <a:ext cx="12192000" cy="228600"/>
+          </a:xfrm>
+          <a:prstGeom xmlns:a="http://schemas.openxmlformats.org/drawingml/2006/main" prst="rect">
+            <a:avLst/>
           </a:prstGeom>
           <a:solidFill xmlns:a="http://schemas.openxmlformats.org/drawingml/2006/main">
             <a:srgbClr val="2048A8"/>
@@ -8656,22 +10387,650 @@
       </p:sp>
       <p:sp>
         <p:nvSpPr>
+          <p:cNvPr id="6" name="">
+            <a:extLst xmlns:a="http://schemas.openxmlformats.org/drawingml/2006/main">
+              <a:ext uri="{FF2B5EF4-FFF2-40B4-BE49-F238E27FC236}">
+                <a16:creationId xmlns:a16="http://schemas.microsoft.com/office/drawing/2014/main" id="{96CFE90A-23E5-410E-BBC9-63D41D192BC1}"/>
+              </a:ext>
+            </a:extLst>
+          </p:cNvPr>
+          <p:cNvSpPr>
+            <a:spLocks xmlns:a="http://schemas.openxmlformats.org/drawingml/2006/main" noGrp="1"/>
+          </p:cNvSpPr>
+          <p:nvPr/>
+        </p:nvSpPr>
+        <p:spPr>
+          <a:xfrm xmlns:a="http://schemas.openxmlformats.org/drawingml/2006/main">
+            <a:off x="400050" y="6657975"/>
+            <a:ext cx="5715000" cy="152400"/>
+          </a:xfrm>
+          <a:prstGeom xmlns:a="http://schemas.openxmlformats.org/drawingml/2006/main" prst="rect">
+            <a:avLst/>
+          </a:prstGeom>
+          <a:noFill xmlns:a="http://schemas.openxmlformats.org/drawingml/2006/main"/>
+          <a:ln xmlns:a="http://schemas.openxmlformats.org/drawingml/2006/main" w="0">
+            <a:noFill/>
+            <a:prstDash val="solid"/>
+          </a:ln>
+        </p:spPr>
+        <p:txBody>
+          <a:bodyPr xmlns:a="http://schemas.openxmlformats.org/drawingml/2006/main"/>
+          <a:lstStyle xmlns:a="http://schemas.openxmlformats.org/drawingml/2006/main"/>
+          <a:p xmlns:a="http://schemas.openxmlformats.org/drawingml/2006/main">
+            <a:pPr>
+              <a:defRPr sz="750" b="1">
+                <a:solidFill>
+                  <a:srgbClr val="FFFFFF"/>
+                </a:solidFill>
+              </a:defRPr>
+            </a:pPr>
+            <a:r>
+              <a:rPr sz="750" b="1">
+                <a:solidFill>
+                  <a:srgbClr val="FFFFFF"/>
+                </a:solidFill>
+              </a:rPr>
+              <a:t>BTG Audit System  |  by Ivan Rudoy</a:t>
+            </a:r>
+          </a:p>
+        </p:txBody>
+      </p:sp>
+      <p:sp>
+        <p:nvSpPr>
+          <p:cNvPr id="7" name="">
+            <a:extLst xmlns:a="http://schemas.openxmlformats.org/drawingml/2006/main">
+              <a:ext uri="{FF2B5EF4-FFF2-40B4-BE49-F238E27FC236}">
+                <a16:creationId xmlns:a16="http://schemas.microsoft.com/office/drawing/2014/main" id="{54907199-FC28-43A6-8166-F8004ACEBBA4}"/>
+              </a:ext>
+            </a:extLst>
+          </p:cNvPr>
+          <p:cNvSpPr>
+            <a:spLocks xmlns:a="http://schemas.openxmlformats.org/drawingml/2006/main" noGrp="1"/>
+          </p:cNvSpPr>
+          <p:nvPr/>
+        </p:nvSpPr>
+        <p:spPr>
+          <a:xfrm xmlns:a="http://schemas.openxmlformats.org/drawingml/2006/main">
+            <a:off x="11334750" y="6657975"/>
+            <a:ext cx="428625" cy="152400"/>
+          </a:xfrm>
+          <a:prstGeom xmlns:a="http://schemas.openxmlformats.org/drawingml/2006/main" prst="rect">
+            <a:avLst/>
+          </a:prstGeom>
+          <a:noFill xmlns:a="http://schemas.openxmlformats.org/drawingml/2006/main"/>
+          <a:ln xmlns:a="http://schemas.openxmlformats.org/drawingml/2006/main" w="0">
+            <a:noFill/>
+            <a:prstDash val="solid"/>
+          </a:ln>
+        </p:spPr>
+        <p:txBody>
+          <a:bodyPr xmlns:a="http://schemas.openxmlformats.org/drawingml/2006/main"/>
+          <a:lstStyle xmlns:a="http://schemas.openxmlformats.org/drawingml/2006/main"/>
+          <a:p xmlns:a="http://schemas.openxmlformats.org/drawingml/2006/main">
+            <a:pPr algn="r">
+              <a:defRPr sz="750" b="1">
+                <a:solidFill>
+                  <a:srgbClr val="FFFFFF"/>
+                </a:solidFill>
+              </a:defRPr>
+            </a:pPr>
+            <a:r>
+              <a:rPr sz="750" b="1">
+                <a:solidFill>
+                  <a:srgbClr val="FFFFFF"/>
+                </a:solidFill>
+              </a:rPr>
+              <a:t>08</a:t>
+            </a:r>
+          </a:p>
+        </p:txBody>
+      </p:sp>
+      <p:sp>
+        <p:nvSpPr>
+          <p:cNvPr id="8" name="">
+            <a:extLst xmlns:a="http://schemas.openxmlformats.org/drawingml/2006/main">
+              <a:ext uri="{FF2B5EF4-FFF2-40B4-BE49-F238E27FC236}">
+                <a16:creationId xmlns:a16="http://schemas.microsoft.com/office/drawing/2014/main" id="{52200796-AA6F-451D-8AB6-42BE84CC9187}"/>
+              </a:ext>
+            </a:extLst>
+          </p:cNvPr>
+          <p:cNvSpPr>
+            <a:spLocks xmlns:a="http://schemas.openxmlformats.org/drawingml/2006/main" noGrp="1"/>
+          </p:cNvSpPr>
+          <p:nvPr/>
+        </p:nvSpPr>
+        <p:spPr>
+          <a:xfrm xmlns:a="http://schemas.openxmlformats.org/drawingml/2006/main">
+            <a:off x="552450" y="1562100"/>
+            <a:ext cx="457200" cy="285750"/>
+          </a:xfrm>
+          <a:prstGeom xmlns:a="http://schemas.openxmlformats.org/drawingml/2006/main" prst="rect">
+            <a:avLst/>
+          </a:prstGeom>
+          <a:noFill xmlns:a="http://schemas.openxmlformats.org/drawingml/2006/main"/>
+          <a:ln xmlns:a="http://schemas.openxmlformats.org/drawingml/2006/main" w="0">
+            <a:noFill/>
+            <a:prstDash val="solid"/>
+          </a:ln>
+        </p:spPr>
+        <p:txBody>
+          <a:bodyPr xmlns:a="http://schemas.openxmlformats.org/drawingml/2006/main"/>
+          <a:lstStyle xmlns:a="http://schemas.openxmlformats.org/drawingml/2006/main"/>
+          <a:p xmlns:a="http://schemas.openxmlformats.org/drawingml/2006/main">
+            <a:pPr>
+              <a:defRPr sz="1200" b="1">
+                <a:solidFill>
+                  <a:srgbClr val="2048A8"/>
+                </a:solidFill>
+              </a:defRPr>
+            </a:pPr>
+            <a:r>
+              <a:rPr sz="1200" b="1">
+                <a:solidFill>
+                  <a:srgbClr val="2048A8"/>
+                </a:solidFill>
+              </a:rPr>
+              <a:t>01</a:t>
+            </a:r>
+          </a:p>
+        </p:txBody>
+      </p:sp>
+      <p:sp>
+        <p:nvSpPr>
+          <p:cNvPr id="9" name="">
+            <a:extLst xmlns:a="http://schemas.openxmlformats.org/drawingml/2006/main">
+              <a:ext uri="{FF2B5EF4-FFF2-40B4-BE49-F238E27FC236}">
+                <a16:creationId xmlns:a16="http://schemas.microsoft.com/office/drawing/2014/main" id="{91057391-1A10-4A45-AD09-6148B5C40EE5}"/>
+              </a:ext>
+            </a:extLst>
+          </p:cNvPr>
+          <p:cNvSpPr>
+            <a:spLocks xmlns:a="http://schemas.openxmlformats.org/drawingml/2006/main" noGrp="1"/>
+          </p:cNvSpPr>
+          <p:nvPr/>
+        </p:nvSpPr>
+        <p:spPr>
+          <a:xfrm xmlns:a="http://schemas.openxmlformats.org/drawingml/2006/main">
+            <a:off x="1104900" y="1524000"/>
+            <a:ext cx="6419850" cy="742950"/>
+          </a:xfrm>
+          <a:prstGeom xmlns:a="http://schemas.openxmlformats.org/drawingml/2006/main" prst="rect">
+            <a:avLst/>
+          </a:prstGeom>
+          <a:noFill xmlns:a="http://schemas.openxmlformats.org/drawingml/2006/main"/>
+          <a:ln xmlns:a="http://schemas.openxmlformats.org/drawingml/2006/main" w="0">
+            <a:noFill/>
+            <a:prstDash val="solid"/>
+          </a:ln>
+        </p:spPr>
+        <p:txBody>
+          <a:bodyPr xmlns:a="http://schemas.openxmlformats.org/drawingml/2006/main"/>
+          <a:lstStyle xmlns:a="http://schemas.openxmlformats.org/drawingml/2006/main"/>
+          <a:p xmlns:a="http://schemas.openxmlformats.org/drawingml/2006/main">
+            <a:pPr>
+              <a:defRPr sz="1275">
+                <a:solidFill>
+                  <a:srgbClr val="102A63"/>
+                </a:solidFill>
+              </a:defRPr>
+            </a:pPr>
+            <a:r>
+              <a:rPr sz="1275">
+                <a:solidFill>
+                  <a:srgbClr val="102A63"/>
+                </a:solidFill>
+              </a:rPr>
+              <a:t>{{DECISION_1}}</a:t>
+            </a:r>
+          </a:p>
+        </p:txBody>
+      </p:sp>
+      <p:sp>
+        <p:nvSpPr>
+          <p:cNvPr id="10" name="">
+            <a:extLst xmlns:a="http://schemas.openxmlformats.org/drawingml/2006/main">
+              <a:ext uri="{FF2B5EF4-FFF2-40B4-BE49-F238E27FC236}">
+                <a16:creationId xmlns:a16="http://schemas.microsoft.com/office/drawing/2014/main" id="{3B1C1D65-21C4-44F6-8016-6857AB81F2E3}"/>
+              </a:ext>
+            </a:extLst>
+          </p:cNvPr>
+          <p:cNvSpPr>
+            <a:spLocks xmlns:a="http://schemas.openxmlformats.org/drawingml/2006/main" noGrp="1"/>
+          </p:cNvSpPr>
+          <p:nvPr/>
+        </p:nvSpPr>
+        <p:spPr>
+          <a:xfrm xmlns:a="http://schemas.openxmlformats.org/drawingml/2006/main">
+            <a:off x="1104900" y="2400300"/>
+            <a:ext cx="6419850" cy="9525"/>
+          </a:xfrm>
+          <a:prstGeom xmlns:a="http://schemas.openxmlformats.org/drawingml/2006/main" prst="rect">
+            <a:avLst/>
+          </a:prstGeom>
+          <a:solidFill xmlns:a="http://schemas.openxmlformats.org/drawingml/2006/main">
+            <a:srgbClr val="D7E0F2"/>
+          </a:solidFill>
+          <a:ln xmlns:a="http://schemas.openxmlformats.org/drawingml/2006/main" w="0">
+            <a:noFill/>
+            <a:prstDash val="solid"/>
+          </a:ln>
+        </p:spPr>
+      </p:sp>
+      <p:sp>
+        <p:nvSpPr>
+          <p:cNvPr id="11" name="">
+            <a:extLst xmlns:a="http://schemas.openxmlformats.org/drawingml/2006/main">
+              <a:ext uri="{FF2B5EF4-FFF2-40B4-BE49-F238E27FC236}">
+                <a16:creationId xmlns:a16="http://schemas.microsoft.com/office/drawing/2014/main" id="{89190255-B4B5-4172-B02D-EE3668C87756}"/>
+              </a:ext>
+            </a:extLst>
+          </p:cNvPr>
+          <p:cNvSpPr>
+            <a:spLocks xmlns:a="http://schemas.openxmlformats.org/drawingml/2006/main" noGrp="1"/>
+          </p:cNvSpPr>
+          <p:nvPr/>
+        </p:nvSpPr>
+        <p:spPr>
+          <a:xfrm xmlns:a="http://schemas.openxmlformats.org/drawingml/2006/main">
+            <a:off x="552450" y="2628900"/>
+            <a:ext cx="457200" cy="285750"/>
+          </a:xfrm>
+          <a:prstGeom xmlns:a="http://schemas.openxmlformats.org/drawingml/2006/main" prst="rect">
+            <a:avLst/>
+          </a:prstGeom>
+          <a:noFill xmlns:a="http://schemas.openxmlformats.org/drawingml/2006/main"/>
+          <a:ln xmlns:a="http://schemas.openxmlformats.org/drawingml/2006/main" w="0">
+            <a:noFill/>
+            <a:prstDash val="solid"/>
+          </a:ln>
+        </p:spPr>
+        <p:txBody>
+          <a:bodyPr xmlns:a="http://schemas.openxmlformats.org/drawingml/2006/main"/>
+          <a:lstStyle xmlns:a="http://schemas.openxmlformats.org/drawingml/2006/main"/>
+          <a:p xmlns:a="http://schemas.openxmlformats.org/drawingml/2006/main">
+            <a:pPr>
+              <a:defRPr sz="1200" b="1">
+                <a:solidFill>
+                  <a:srgbClr val="2048A8"/>
+                </a:solidFill>
+              </a:defRPr>
+            </a:pPr>
+            <a:r>
+              <a:rPr sz="1200" b="1">
+                <a:solidFill>
+                  <a:srgbClr val="2048A8"/>
+                </a:solidFill>
+              </a:rPr>
+              <a:t>02</a:t>
+            </a:r>
+          </a:p>
+        </p:txBody>
+      </p:sp>
+      <p:sp>
+        <p:nvSpPr>
+          <p:cNvPr id="12" name="">
+            <a:extLst xmlns:a="http://schemas.openxmlformats.org/drawingml/2006/main">
+              <a:ext uri="{FF2B5EF4-FFF2-40B4-BE49-F238E27FC236}">
+                <a16:creationId xmlns:a16="http://schemas.microsoft.com/office/drawing/2014/main" id="{EA002E77-ABF7-4032-A87C-378D640AA0D1}"/>
+              </a:ext>
+            </a:extLst>
+          </p:cNvPr>
+          <p:cNvSpPr>
+            <a:spLocks xmlns:a="http://schemas.openxmlformats.org/drawingml/2006/main" noGrp="1"/>
+          </p:cNvSpPr>
+          <p:nvPr/>
+        </p:nvSpPr>
+        <p:spPr>
+          <a:xfrm xmlns:a="http://schemas.openxmlformats.org/drawingml/2006/main">
+            <a:off x="1104900" y="2590800"/>
+            <a:ext cx="6419850" cy="742950"/>
+          </a:xfrm>
+          <a:prstGeom xmlns:a="http://schemas.openxmlformats.org/drawingml/2006/main" prst="rect">
+            <a:avLst/>
+          </a:prstGeom>
+          <a:noFill xmlns:a="http://schemas.openxmlformats.org/drawingml/2006/main"/>
+          <a:ln xmlns:a="http://schemas.openxmlformats.org/drawingml/2006/main" w="0">
+            <a:noFill/>
+            <a:prstDash val="solid"/>
+          </a:ln>
+        </p:spPr>
+        <p:txBody>
+          <a:bodyPr xmlns:a="http://schemas.openxmlformats.org/drawingml/2006/main"/>
+          <a:lstStyle xmlns:a="http://schemas.openxmlformats.org/drawingml/2006/main"/>
+          <a:p xmlns:a="http://schemas.openxmlformats.org/drawingml/2006/main">
+            <a:pPr>
+              <a:defRPr sz="1275">
+                <a:solidFill>
+                  <a:srgbClr val="102A63"/>
+                </a:solidFill>
+              </a:defRPr>
+            </a:pPr>
+            <a:r>
+              <a:rPr sz="1275">
+                <a:solidFill>
+                  <a:srgbClr val="102A63"/>
+                </a:solidFill>
+              </a:rPr>
+              <a:t>{{DECISION_2}}</a:t>
+            </a:r>
+          </a:p>
+        </p:txBody>
+      </p:sp>
+      <p:sp>
+        <p:nvSpPr>
+          <p:cNvPr id="13" name="">
+            <a:extLst xmlns:a="http://schemas.openxmlformats.org/drawingml/2006/main">
+              <a:ext uri="{FF2B5EF4-FFF2-40B4-BE49-F238E27FC236}">
+                <a16:creationId xmlns:a16="http://schemas.microsoft.com/office/drawing/2014/main" id="{A7B28B97-44A9-463D-BED1-8350FCF362C7}"/>
+              </a:ext>
+            </a:extLst>
+          </p:cNvPr>
+          <p:cNvSpPr>
+            <a:spLocks xmlns:a="http://schemas.openxmlformats.org/drawingml/2006/main" noGrp="1"/>
+          </p:cNvSpPr>
+          <p:nvPr/>
+        </p:nvSpPr>
+        <p:spPr>
+          <a:xfrm xmlns:a="http://schemas.openxmlformats.org/drawingml/2006/main">
+            <a:off x="1104900" y="3467100"/>
+            <a:ext cx="6419850" cy="9525"/>
+          </a:xfrm>
+          <a:prstGeom xmlns:a="http://schemas.openxmlformats.org/drawingml/2006/main" prst="rect">
+            <a:avLst/>
+          </a:prstGeom>
+          <a:solidFill xmlns:a="http://schemas.openxmlformats.org/drawingml/2006/main">
+            <a:srgbClr val="D7E0F2"/>
+          </a:solidFill>
+          <a:ln xmlns:a="http://schemas.openxmlformats.org/drawingml/2006/main" w="0">
+            <a:noFill/>
+            <a:prstDash val="solid"/>
+          </a:ln>
+        </p:spPr>
+      </p:sp>
+      <p:sp>
+        <p:nvSpPr>
           <p:cNvPr id="14" name="">
             <a:extLst xmlns:a="http://schemas.openxmlformats.org/drawingml/2006/main">
               <a:ext uri="{FF2B5EF4-FFF2-40B4-BE49-F238E27FC236}">
-                <a16:creationId xmlns:a16="http://schemas.microsoft.com/office/drawing/2014/main" id="{53B211BB-09B5-4379-BFBE-15D2A4F9AAAA}"/>
-              </a:ext>
-            </a:extLst>
-          </p:cNvPr>
-          <p:cNvSpPr>
-            <a:spLocks xmlns:a="http://schemas.openxmlformats.org/drawingml/2006/main" noGrp="1"/>
-          </p:cNvSpPr>
-          <p:nvPr/>
-        </p:nvSpPr>
-        <p:spPr>
-          <a:xfrm xmlns:a="http://schemas.openxmlformats.org/drawingml/2006/main">
-            <a:off x="838200" y="5724525"/>
-            <a:ext cx="5010150" cy="400050"/>
+                <a16:creationId xmlns:a16="http://schemas.microsoft.com/office/drawing/2014/main" id="{8E4D822E-A4B0-4255-A524-F78E98FAF365}"/>
+              </a:ext>
+            </a:extLst>
+          </p:cNvPr>
+          <p:cNvSpPr>
+            <a:spLocks xmlns:a="http://schemas.openxmlformats.org/drawingml/2006/main" noGrp="1"/>
+          </p:cNvSpPr>
+          <p:nvPr/>
+        </p:nvSpPr>
+        <p:spPr>
+          <a:xfrm xmlns:a="http://schemas.openxmlformats.org/drawingml/2006/main">
+            <a:off x="552450" y="3695700"/>
+            <a:ext cx="457200" cy="285750"/>
+          </a:xfrm>
+          <a:prstGeom xmlns:a="http://schemas.openxmlformats.org/drawingml/2006/main" prst="rect">
+            <a:avLst/>
+          </a:prstGeom>
+          <a:noFill xmlns:a="http://schemas.openxmlformats.org/drawingml/2006/main"/>
+          <a:ln xmlns:a="http://schemas.openxmlformats.org/drawingml/2006/main" w="0">
+            <a:noFill/>
+            <a:prstDash val="solid"/>
+          </a:ln>
+        </p:spPr>
+        <p:txBody>
+          <a:bodyPr xmlns:a="http://schemas.openxmlformats.org/drawingml/2006/main"/>
+          <a:lstStyle xmlns:a="http://schemas.openxmlformats.org/drawingml/2006/main"/>
+          <a:p xmlns:a="http://schemas.openxmlformats.org/drawingml/2006/main">
+            <a:pPr>
+              <a:defRPr sz="1200" b="1">
+                <a:solidFill>
+                  <a:srgbClr val="2048A8"/>
+                </a:solidFill>
+              </a:defRPr>
+            </a:pPr>
+            <a:r>
+              <a:rPr sz="1200" b="1">
+                <a:solidFill>
+                  <a:srgbClr val="2048A8"/>
+                </a:solidFill>
+              </a:rPr>
+              <a:t>03</a:t>
+            </a:r>
+          </a:p>
+        </p:txBody>
+      </p:sp>
+      <p:sp>
+        <p:nvSpPr>
+          <p:cNvPr id="15" name="">
+            <a:extLst xmlns:a="http://schemas.openxmlformats.org/drawingml/2006/main">
+              <a:ext uri="{FF2B5EF4-FFF2-40B4-BE49-F238E27FC236}">
+                <a16:creationId xmlns:a16="http://schemas.microsoft.com/office/drawing/2014/main" id="{33F9800E-9CC4-4CD1-B36D-5B1C3000695B}"/>
+              </a:ext>
+            </a:extLst>
+          </p:cNvPr>
+          <p:cNvSpPr>
+            <a:spLocks xmlns:a="http://schemas.openxmlformats.org/drawingml/2006/main" noGrp="1"/>
+          </p:cNvSpPr>
+          <p:nvPr/>
+        </p:nvSpPr>
+        <p:spPr>
+          <a:xfrm xmlns:a="http://schemas.openxmlformats.org/drawingml/2006/main">
+            <a:off x="1104900" y="3657600"/>
+            <a:ext cx="6419850" cy="742950"/>
+          </a:xfrm>
+          <a:prstGeom xmlns:a="http://schemas.openxmlformats.org/drawingml/2006/main" prst="rect">
+            <a:avLst/>
+          </a:prstGeom>
+          <a:noFill xmlns:a="http://schemas.openxmlformats.org/drawingml/2006/main"/>
+          <a:ln xmlns:a="http://schemas.openxmlformats.org/drawingml/2006/main" w="0">
+            <a:noFill/>
+            <a:prstDash val="solid"/>
+          </a:ln>
+        </p:spPr>
+        <p:txBody>
+          <a:bodyPr xmlns:a="http://schemas.openxmlformats.org/drawingml/2006/main"/>
+          <a:lstStyle xmlns:a="http://schemas.openxmlformats.org/drawingml/2006/main"/>
+          <a:p xmlns:a="http://schemas.openxmlformats.org/drawingml/2006/main">
+            <a:pPr>
+              <a:defRPr sz="1275">
+                <a:solidFill>
+                  <a:srgbClr val="102A63"/>
+                </a:solidFill>
+              </a:defRPr>
+            </a:pPr>
+            <a:r>
+              <a:rPr sz="1275">
+                <a:solidFill>
+                  <a:srgbClr val="102A63"/>
+                </a:solidFill>
+              </a:rPr>
+              <a:t>{{DECISION_3}}</a:t>
+            </a:r>
+          </a:p>
+        </p:txBody>
+      </p:sp>
+      <p:sp>
+        <p:nvSpPr>
+          <p:cNvPr id="16" name="">
+            <a:extLst xmlns:a="http://schemas.openxmlformats.org/drawingml/2006/main">
+              <a:ext uri="{FF2B5EF4-FFF2-40B4-BE49-F238E27FC236}">
+                <a16:creationId xmlns:a16="http://schemas.microsoft.com/office/drawing/2014/main" id="{14D73D23-341A-4001-B09B-37CCA2B18574}"/>
+              </a:ext>
+            </a:extLst>
+          </p:cNvPr>
+          <p:cNvSpPr>
+            <a:spLocks xmlns:a="http://schemas.openxmlformats.org/drawingml/2006/main" noGrp="1"/>
+          </p:cNvSpPr>
+          <p:nvPr/>
+        </p:nvSpPr>
+        <p:spPr>
+          <a:xfrm xmlns:a="http://schemas.openxmlformats.org/drawingml/2006/main">
+            <a:off x="1104900" y="4533900"/>
+            <a:ext cx="6419850" cy="9525"/>
+          </a:xfrm>
+          <a:prstGeom xmlns:a="http://schemas.openxmlformats.org/drawingml/2006/main" prst="rect">
+            <a:avLst/>
+          </a:prstGeom>
+          <a:solidFill xmlns:a="http://schemas.openxmlformats.org/drawingml/2006/main">
+            <a:srgbClr val="D7E0F2"/>
+          </a:solidFill>
+          <a:ln xmlns:a="http://schemas.openxmlformats.org/drawingml/2006/main" w="0">
+            <a:noFill/>
+            <a:prstDash val="solid"/>
+          </a:ln>
+        </p:spPr>
+      </p:sp>
+      <p:sp>
+        <p:nvSpPr>
+          <p:cNvPr id="17" name="">
+            <a:extLst xmlns:a="http://schemas.openxmlformats.org/drawingml/2006/main">
+              <a:ext uri="{FF2B5EF4-FFF2-40B4-BE49-F238E27FC236}">
+                <a16:creationId xmlns:a16="http://schemas.microsoft.com/office/drawing/2014/main" id="{324B53C1-09C7-4E5B-B5E2-C0C4B2B41FC8}"/>
+              </a:ext>
+            </a:extLst>
+          </p:cNvPr>
+          <p:cNvSpPr>
+            <a:spLocks xmlns:a="http://schemas.openxmlformats.org/drawingml/2006/main" noGrp="1"/>
+          </p:cNvSpPr>
+          <p:nvPr/>
+        </p:nvSpPr>
+        <p:spPr>
+          <a:xfrm xmlns:a="http://schemas.openxmlformats.org/drawingml/2006/main">
+            <a:off x="552450" y="4762500"/>
+            <a:ext cx="457200" cy="285750"/>
+          </a:xfrm>
+          <a:prstGeom xmlns:a="http://schemas.openxmlformats.org/drawingml/2006/main" prst="rect">
+            <a:avLst/>
+          </a:prstGeom>
+          <a:noFill xmlns:a="http://schemas.openxmlformats.org/drawingml/2006/main"/>
+          <a:ln xmlns:a="http://schemas.openxmlformats.org/drawingml/2006/main" w="0">
+            <a:noFill/>
+            <a:prstDash val="solid"/>
+          </a:ln>
+        </p:spPr>
+        <p:txBody>
+          <a:bodyPr xmlns:a="http://schemas.openxmlformats.org/drawingml/2006/main"/>
+          <a:lstStyle xmlns:a="http://schemas.openxmlformats.org/drawingml/2006/main"/>
+          <a:p xmlns:a="http://schemas.openxmlformats.org/drawingml/2006/main">
+            <a:pPr>
+              <a:defRPr sz="1200" b="1">
+                <a:solidFill>
+                  <a:srgbClr val="2048A8"/>
+                </a:solidFill>
+              </a:defRPr>
+            </a:pPr>
+            <a:r>
+              <a:rPr sz="1200" b="1">
+                <a:solidFill>
+                  <a:srgbClr val="2048A8"/>
+                </a:solidFill>
+              </a:rPr>
+              <a:t>04</a:t>
+            </a:r>
+          </a:p>
+        </p:txBody>
+      </p:sp>
+      <p:sp>
+        <p:nvSpPr>
+          <p:cNvPr id="18" name="">
+            <a:extLst xmlns:a="http://schemas.openxmlformats.org/drawingml/2006/main">
+              <a:ext uri="{FF2B5EF4-FFF2-40B4-BE49-F238E27FC236}">
+                <a16:creationId xmlns:a16="http://schemas.microsoft.com/office/drawing/2014/main" id="{BA041544-1FA0-4049-AA76-FE963A44BD0A}"/>
+              </a:ext>
+            </a:extLst>
+          </p:cNvPr>
+          <p:cNvSpPr>
+            <a:spLocks xmlns:a="http://schemas.openxmlformats.org/drawingml/2006/main" noGrp="1"/>
+          </p:cNvSpPr>
+          <p:nvPr/>
+        </p:nvSpPr>
+        <p:spPr>
+          <a:xfrm xmlns:a="http://schemas.openxmlformats.org/drawingml/2006/main">
+            <a:off x="1104900" y="4724400"/>
+            <a:ext cx="6419850" cy="742950"/>
+          </a:xfrm>
+          <a:prstGeom xmlns:a="http://schemas.openxmlformats.org/drawingml/2006/main" prst="rect">
+            <a:avLst/>
+          </a:prstGeom>
+          <a:noFill xmlns:a="http://schemas.openxmlformats.org/drawingml/2006/main"/>
+          <a:ln xmlns:a="http://schemas.openxmlformats.org/drawingml/2006/main" w="0">
+            <a:noFill/>
+            <a:prstDash val="solid"/>
+          </a:ln>
+        </p:spPr>
+        <p:txBody>
+          <a:bodyPr xmlns:a="http://schemas.openxmlformats.org/drawingml/2006/main"/>
+          <a:lstStyle xmlns:a="http://schemas.openxmlformats.org/drawingml/2006/main"/>
+          <a:p xmlns:a="http://schemas.openxmlformats.org/drawingml/2006/main">
+            <a:pPr>
+              <a:defRPr sz="1275">
+                <a:solidFill>
+                  <a:srgbClr val="102A63"/>
+                </a:solidFill>
+              </a:defRPr>
+            </a:pPr>
+            <a:r>
+              <a:rPr sz="1275">
+                <a:solidFill>
+                  <a:srgbClr val="102A63"/>
+                </a:solidFill>
+              </a:rPr>
+              <a:t>{{DECISION_4}}</a:t>
+            </a:r>
+          </a:p>
+        </p:txBody>
+      </p:sp>
+      <p:sp>
+        <p:nvSpPr>
+          <p:cNvPr id="19" name="">
+            <a:extLst xmlns:a="http://schemas.openxmlformats.org/drawingml/2006/main">
+              <a:ext uri="{FF2B5EF4-FFF2-40B4-BE49-F238E27FC236}">
+                <a16:creationId xmlns:a16="http://schemas.microsoft.com/office/drawing/2014/main" id="{58E7904B-00B2-4F38-B1B9-D17A7285014D}"/>
+              </a:ext>
+            </a:extLst>
+          </p:cNvPr>
+          <p:cNvSpPr>
+            <a:spLocks xmlns:a="http://schemas.openxmlformats.org/drawingml/2006/main" noGrp="1"/>
+          </p:cNvSpPr>
+          <p:nvPr/>
+        </p:nvSpPr>
+        <p:spPr>
+          <a:xfrm xmlns:a="http://schemas.openxmlformats.org/drawingml/2006/main">
+            <a:off x="7905750" y="1390650"/>
+            <a:ext cx="3467100" cy="4705350"/>
+          </a:xfrm>
+          <a:prstGeom xmlns:a="http://schemas.openxmlformats.org/drawingml/2006/main" prst="roundRect">
+            <a:avLst>
+              <a:gd name="adj" fmla="val 3297"/>
+            </a:avLst>
+          </a:prstGeom>
+          <a:solidFill xmlns:a="http://schemas.openxmlformats.org/drawingml/2006/main">
+            <a:srgbClr val="EEF3FF"/>
+          </a:solidFill>
+          <a:ln xmlns:a="http://schemas.openxmlformats.org/drawingml/2006/main" w="9525">
+            <a:solidFill>
+              <a:srgbClr val="D7E0F2"/>
+            </a:solidFill>
+            <a:prstDash val="solid"/>
+          </a:ln>
+        </p:spPr>
+      </p:sp>
+      <p:sp>
+        <p:nvSpPr>
+          <p:cNvPr id="20" name="">
+            <a:extLst xmlns:a="http://schemas.openxmlformats.org/drawingml/2006/main">
+              <a:ext uri="{FF2B5EF4-FFF2-40B4-BE49-F238E27FC236}">
+                <a16:creationId xmlns:a16="http://schemas.microsoft.com/office/drawing/2014/main" id="{52EB316A-C92B-4246-96EB-ED454014D881}"/>
+              </a:ext>
+            </a:extLst>
+          </p:cNvPr>
+          <p:cNvSpPr>
+            <a:spLocks xmlns:a="http://schemas.openxmlformats.org/drawingml/2006/main" noGrp="1"/>
+          </p:cNvSpPr>
+          <p:nvPr/>
+        </p:nvSpPr>
+        <p:spPr>
+          <a:xfrm xmlns:a="http://schemas.openxmlformats.org/drawingml/2006/main">
+            <a:off x="8210550" y="1657350"/>
+            <a:ext cx="2857500" cy="628650"/>
           </a:xfrm>
           <a:prstGeom xmlns:a="http://schemas.openxmlformats.org/drawingml/2006/main" prst="rect">
             <a:avLst/>
@@ -8687,69 +11046,241 @@
           <a:lstStyle xmlns:a="http://schemas.openxmlformats.org/drawingml/2006/main"/>
           <a:p xmlns:a="http://schemas.openxmlformats.org/drawingml/2006/main">
             <a:pPr algn="ctr">
-              <a:defRPr sz="1275" b="1">
-                <a:solidFill>
-                  <a:srgbClr val="FFFFFF"/>
-                </a:solidFill>
-              </a:defRPr>
-            </a:pPr>
-            <a:r>
-              <a:rPr sz="1275" b="1">
-                <a:solidFill>
-                  <a:srgbClr val="FFFFFF"/>
-                </a:solidFill>
-              </a:rPr>
-              <a:t>Следующий шаг: согласовать приоритеты, владельцев и критерии результата</a:t>
-            </a:r>
-          </a:p>
-        </p:txBody>
-      </p:sp>
-      <p:sp>
-        <p:nvSpPr>
-          <p:cNvPr id="15" name="">
-            <a:extLst xmlns:a="http://schemas.openxmlformats.org/drawingml/2006/main">
-              <a:ext uri="{FF2B5EF4-FFF2-40B4-BE49-F238E27FC236}">
-                <a16:creationId xmlns:a16="http://schemas.microsoft.com/office/drawing/2014/main" id="{72A945D9-5183-4994-83FC-60C5201028F0}"/>
-              </a:ext>
-            </a:extLst>
-          </p:cNvPr>
-          <p:cNvSpPr>
-            <a:spLocks xmlns:a="http://schemas.openxmlformats.org/drawingml/2006/main" noGrp="1"/>
-          </p:cNvSpPr>
-          <p:nvPr/>
-        </p:nvSpPr>
-        <p:spPr>
-          <a:xfrm xmlns:a="http://schemas.openxmlformats.org/drawingml/2006/main">
-            <a:off x="7239000" y="5876925"/>
-            <a:ext cx="4286250" cy="228600"/>
-          </a:xfrm>
-          <a:prstGeom xmlns:a="http://schemas.openxmlformats.org/drawingml/2006/main" prst="rect">
-            <a:avLst/>
-          </a:prstGeom>
-          <a:noFill xmlns:a="http://schemas.openxmlformats.org/drawingml/2006/main"/>
-          <a:ln xmlns:a="http://schemas.openxmlformats.org/drawingml/2006/main" w="0">
-            <a:noFill/>
-            <a:prstDash val="solid"/>
-          </a:ln>
-        </p:spPr>
-        <p:txBody>
-          <a:bodyPr xmlns:a="http://schemas.openxmlformats.org/drawingml/2006/main"/>
-          <a:lstStyle xmlns:a="http://schemas.openxmlformats.org/drawingml/2006/main"/>
-          <a:p xmlns:a="http://schemas.openxmlformats.org/drawingml/2006/main">
-            <a:pPr algn="r">
-              <a:defRPr sz="975" b="1">
-                <a:solidFill>
-                  <a:srgbClr val="FFFFFF"/>
-                </a:solidFill>
-              </a:defRPr>
-            </a:pPr>
-            <a:r>
-              <a:rPr sz="975" b="1">
-                <a:solidFill>
-                  <a:srgbClr val="FFFFFF"/>
-                </a:solidFill>
-              </a:rPr>
-              <a:t>BTG Audit System  |  by Ivan Rudoy</a:t>
+              <a:defRPr sz="1875" b="1">
+                <a:solidFill>
+                  <a:srgbClr val="102A63"/>
+                </a:solidFill>
+              </a:defRPr>
+            </a:pPr>
+            <a:r>
+              <a:rPr sz="1875" b="1">
+                <a:solidFill>
+                  <a:srgbClr val="102A63"/>
+                </a:solidFill>
+              </a:rPr>
+              <a:t>Хотите получить больше сведений?</a:t>
+            </a:r>
+          </a:p>
+        </p:txBody>
+      </p:sp>
+      <p:sp>
+        <p:nvSpPr>
+          <p:cNvPr id="21" name="">
+            <a:extLst xmlns:a="http://schemas.openxmlformats.org/drawingml/2006/main">
+              <a:ext uri="{FF2B5EF4-FFF2-40B4-BE49-F238E27FC236}">
+                <a16:creationId xmlns:a16="http://schemas.microsoft.com/office/drawing/2014/main" id="{E5809F09-E85B-4049-99B3-1E2EB2039D34}"/>
+              </a:ext>
+            </a:extLst>
+          </p:cNvPr>
+          <p:cNvSpPr>
+            <a:spLocks xmlns:a="http://schemas.openxmlformats.org/drawingml/2006/main" noGrp="1"/>
+          </p:cNvSpPr>
+          <p:nvPr/>
+        </p:nvSpPr>
+        <p:spPr>
+          <a:xfrm xmlns:a="http://schemas.openxmlformats.org/drawingml/2006/main">
+            <a:off x="8248650" y="2305050"/>
+            <a:ext cx="2781300" cy="571500"/>
+          </a:xfrm>
+          <a:prstGeom xmlns:a="http://schemas.openxmlformats.org/drawingml/2006/main" prst="rect">
+            <a:avLst/>
+          </a:prstGeom>
+          <a:noFill xmlns:a="http://schemas.openxmlformats.org/drawingml/2006/main"/>
+          <a:ln xmlns:a="http://schemas.openxmlformats.org/drawingml/2006/main" w="0">
+            <a:noFill/>
+            <a:prstDash val="solid"/>
+          </a:ln>
+        </p:spPr>
+        <p:txBody>
+          <a:bodyPr xmlns:a="http://schemas.openxmlformats.org/drawingml/2006/main"/>
+          <a:lstStyle xmlns:a="http://schemas.openxmlformats.org/drawingml/2006/main"/>
+          <a:p xmlns:a="http://schemas.openxmlformats.org/drawingml/2006/main">
+            <a:pPr algn="ctr">
+              <a:defRPr sz="1200">
+                <a:solidFill>
+                  <a:srgbClr val="596780"/>
+                </a:solidFill>
+              </a:defRPr>
+            </a:pPr>
+            <a:r>
+              <a:rPr sz="1200">
+                <a:solidFill>
+                  <a:srgbClr val="596780"/>
+                </a:solidFill>
+              </a:rPr>
+              <a:t>Обсудим приоритеты, варианты решений и практический план внедрения.</a:t>
+            </a:r>
+          </a:p>
+        </p:txBody>
+      </p:sp>
+      <p:pic>
+        <p:nvPicPr>
+          <p:cNvPr id="47" name=""/>
+          <p:cNvPicPr>
+            <a:picLocks xmlns:a="http://schemas.openxmlformats.org/drawingml/2006/main" noChangeAspect="1"/>
+          </p:cNvPicPr>
+          <p:nvPr/>
+        </p:nvPicPr>
+        <p:blipFill>
+          <a:blip xmlns:r="http://schemas.openxmlformats.org/officeDocument/2006/relationships" xmlns:a="http://schemas.openxmlformats.org/drawingml/2006/main" r:embed="R56473b8fbf4f457e"/>
+          <a:stretch xmlns:a="http://schemas.openxmlformats.org/drawingml/2006/main"/>
+        </p:blipFill>
+        <p:spPr>
+          <a:xfrm xmlns:a="http://schemas.openxmlformats.org/drawingml/2006/main">
+            <a:off x="8705850" y="2990850"/>
+            <a:ext cx="1866900" cy="1866900"/>
+          </a:xfrm>
+          <a:prstGeom xmlns:a="http://schemas.openxmlformats.org/drawingml/2006/main" prst="rect">
+            <a:avLst/>
+          </a:prstGeom>
+        </p:spPr>
+      </p:pic>
+      <p:sp>
+        <p:nvSpPr>
+          <p:cNvPr id="23" name="">
+            <a:extLst xmlns:a="http://schemas.openxmlformats.org/drawingml/2006/main">
+              <a:ext uri="{FF2B5EF4-FFF2-40B4-BE49-F238E27FC236}">
+                <a16:creationId xmlns:a16="http://schemas.microsoft.com/office/drawing/2014/main" id="{75135BAA-7C21-4041-8F97-43EE149FBED8}"/>
+              </a:ext>
+            </a:extLst>
+          </p:cNvPr>
+          <p:cNvSpPr>
+            <a:spLocks xmlns:a="http://schemas.openxmlformats.org/drawingml/2006/main" noGrp="1"/>
+          </p:cNvSpPr>
+          <p:nvPr/>
+        </p:nvSpPr>
+        <p:spPr>
+          <a:xfrm xmlns:a="http://schemas.openxmlformats.org/drawingml/2006/main">
+            <a:off x="8191500" y="4953000"/>
+            <a:ext cx="2895600" cy="266700"/>
+          </a:xfrm>
+          <a:prstGeom xmlns:a="http://schemas.openxmlformats.org/drawingml/2006/main" prst="rect">
+            <a:avLst/>
+          </a:prstGeom>
+          <a:noFill xmlns:a="http://schemas.openxmlformats.org/drawingml/2006/main"/>
+          <a:ln xmlns:a="http://schemas.openxmlformats.org/drawingml/2006/main" w="0">
+            <a:noFill/>
+            <a:prstDash val="solid"/>
+          </a:ln>
+        </p:spPr>
+        <p:txBody>
+          <a:bodyPr xmlns:a="http://schemas.openxmlformats.org/drawingml/2006/main"/>
+          <a:lstStyle xmlns:a="http://schemas.openxmlformats.org/drawingml/2006/main"/>
+          <a:p xmlns:a="http://schemas.openxmlformats.org/drawingml/2006/main">
+            <a:pPr algn="ctr">
+              <a:defRPr sz="975">
+                <a:solidFill>
+                  <a:srgbClr val="596780"/>
+                </a:solidFill>
+              </a:defRPr>
+            </a:pPr>
+            <a:r>
+              <a:rPr sz="975">
+                <a:solidFill>
+                  <a:srgbClr val="596780"/>
+                </a:solidFill>
+              </a:rPr>
+              <a:t>Сканируйте QR, чтобы сохранить контакты</a:t>
+            </a:r>
+          </a:p>
+        </p:txBody>
+      </p:sp>
+      <p:sp>
+        <p:nvSpPr>
+          <p:cNvPr id="24" name="">
+            <a:extLst xmlns:a="http://schemas.openxmlformats.org/drawingml/2006/main">
+              <a:ext uri="{FF2B5EF4-FFF2-40B4-BE49-F238E27FC236}">
+                <a16:creationId xmlns:a16="http://schemas.microsoft.com/office/drawing/2014/main" id="{1DB84DB4-A4A6-4CF3-B984-DA388D794948}"/>
+              </a:ext>
+            </a:extLst>
+          </p:cNvPr>
+          <p:cNvSpPr>
+            <a:spLocks xmlns:a="http://schemas.openxmlformats.org/drawingml/2006/main" noGrp="1"/>
+          </p:cNvSpPr>
+          <p:nvPr/>
+        </p:nvSpPr>
+        <p:spPr>
+          <a:xfrm xmlns:a="http://schemas.openxmlformats.org/drawingml/2006/main">
+            <a:off x="8134350" y="5314950"/>
+            <a:ext cx="3009900" cy="228600"/>
+          </a:xfrm>
+          <a:prstGeom xmlns:a="http://schemas.openxmlformats.org/drawingml/2006/main" prst="rect">
+            <a:avLst/>
+          </a:prstGeom>
+          <a:noFill xmlns:a="http://schemas.openxmlformats.org/drawingml/2006/main"/>
+          <a:ln xmlns:a="http://schemas.openxmlformats.org/drawingml/2006/main" w="0">
+            <a:noFill/>
+            <a:prstDash val="solid"/>
+          </a:ln>
+        </p:spPr>
+        <p:txBody>
+          <a:bodyPr xmlns:a="http://schemas.openxmlformats.org/drawingml/2006/main"/>
+          <a:lstStyle xmlns:a="http://schemas.openxmlformats.org/drawingml/2006/main"/>
+          <a:p xmlns:a="http://schemas.openxmlformats.org/drawingml/2006/main">
+            <a:pPr algn="ctr">
+              <a:defRPr sz="1125" b="1">
+                <a:solidFill>
+                  <a:srgbClr val="2048A8"/>
+                </a:solidFill>
+              </a:defRPr>
+            </a:pPr>
+            <a:r>
+              <a:rPr sz="1125" b="1">
+                <a:solidFill>
+                  <a:srgbClr val="2048A8"/>
+                </a:solidFill>
+              </a:rPr>
+              <a:t>info@btgroup.kz</a:t>
+            </a:r>
+          </a:p>
+        </p:txBody>
+      </p:sp>
+      <p:sp>
+        <p:nvSpPr>
+          <p:cNvPr id="25" name="">
+            <a:extLst xmlns:a="http://schemas.openxmlformats.org/drawingml/2006/main">
+              <a:ext uri="{FF2B5EF4-FFF2-40B4-BE49-F238E27FC236}">
+                <a16:creationId xmlns:a16="http://schemas.microsoft.com/office/drawing/2014/main" id="{884B5F15-AC7E-4451-A3F9-8681AF6CBDB4}"/>
+              </a:ext>
+            </a:extLst>
+          </p:cNvPr>
+          <p:cNvSpPr>
+            <a:spLocks xmlns:a="http://schemas.openxmlformats.org/drawingml/2006/main" noGrp="1"/>
+          </p:cNvSpPr>
+          <p:nvPr/>
+        </p:nvSpPr>
+        <p:spPr>
+          <a:xfrm xmlns:a="http://schemas.openxmlformats.org/drawingml/2006/main">
+            <a:off x="8134350" y="5581650"/>
+            <a:ext cx="3009900" cy="228600"/>
+          </a:xfrm>
+          <a:prstGeom xmlns:a="http://schemas.openxmlformats.org/drawingml/2006/main" prst="rect">
+            <a:avLst/>
+          </a:prstGeom>
+          <a:noFill xmlns:a="http://schemas.openxmlformats.org/drawingml/2006/main"/>
+          <a:ln xmlns:a="http://schemas.openxmlformats.org/drawingml/2006/main" w="0">
+            <a:noFill/>
+            <a:prstDash val="solid"/>
+          </a:ln>
+        </p:spPr>
+        <p:txBody>
+          <a:bodyPr xmlns:a="http://schemas.openxmlformats.org/drawingml/2006/main"/>
+          <a:lstStyle xmlns:a="http://schemas.openxmlformats.org/drawingml/2006/main"/>
+          <a:p xmlns:a="http://schemas.openxmlformats.org/drawingml/2006/main">
+            <a:pPr algn="ctr">
+              <a:defRPr sz="1125" b="1">
+                <a:solidFill>
+                  <a:srgbClr val="102A63"/>
+                </a:solidFill>
+              </a:defRPr>
+            </a:pPr>
+            <a:r>
+              <a:rPr sz="1125" b="1">
+                <a:solidFill>
+                  <a:srgbClr val="102A63"/>
+                </a:solidFill>
+              </a:rPr>
+              <a:t>+7 706 700 48 35</a:t>
             </a:r>
           </a:p>
         </p:txBody>
@@ -8757,7 +11288,7 @@
     </p:spTree>
     <p:extLst>
       <p:ext uri="{BB962C8B-B14F-4D97-AF65-F5344CB8AC3E}">
-        <p14:creationId xmlns:p14="http://schemas.microsoft.com/office/powerpoint/2010/main" val="2114454485"/>
+        <p14:creationId xmlns:p14="http://schemas.microsoft.com/office/powerpoint/2010/main" val="1827306057"/>
       </p:ext>
     </p:extLst>
   </p:cSld>

--- a/static/audit_presentation_btg.pptx
+++ b/static/audit_presentation_btg.pptx
@@ -2,20 +2,20 @@
 <file path=ppt/presentation.xml><?xml version="1.0" encoding="utf-8"?>
 <p:presentation xmlns:p="http://schemas.openxmlformats.org/presentationml/2006/main">
   <p:sldMasterIdLst>
-    <p:sldMasterId xmlns:r="http://schemas.openxmlformats.org/officeDocument/2006/relationships" id="2147483648" r:id="R7ebf56ca6f4044bb"/>
+    <p:sldMasterId xmlns:r="http://schemas.openxmlformats.org/officeDocument/2006/relationships" id="2147483648" r:id="Rb92b16f56e494d96"/>
   </p:sldMasterIdLst>
   <p:notesMasterIdLst>
-    <p:notesMasterId xmlns:r="http://schemas.openxmlformats.org/officeDocument/2006/relationships" r:id="R40b92e844a384268"/>
+    <p:notesMasterId xmlns:r="http://schemas.openxmlformats.org/officeDocument/2006/relationships" r:id="R6ea223bf962246e6"/>
   </p:notesMasterIdLst>
   <p:sldIdLst>
-    <p:sldId xmlns:r="http://schemas.openxmlformats.org/officeDocument/2006/relationships" id="256" r:id="R40031d89b2304b2b"/>
-    <p:sldId xmlns:r="http://schemas.openxmlformats.org/officeDocument/2006/relationships" id="257" r:id="Rb0ed26fc59d74cb8"/>
-    <p:sldId xmlns:r="http://schemas.openxmlformats.org/officeDocument/2006/relationships" id="258" r:id="Rf50829e1b7e94926"/>
-    <p:sldId xmlns:r="http://schemas.openxmlformats.org/officeDocument/2006/relationships" id="259" r:id="R59ed6b84ab7c40d2"/>
-    <p:sldId xmlns:r="http://schemas.openxmlformats.org/officeDocument/2006/relationships" id="260" r:id="R2af4b4d8fc874f6a"/>
-    <p:sldId xmlns:r="http://schemas.openxmlformats.org/officeDocument/2006/relationships" id="261" r:id="R08d7dad73ac14605"/>
-    <p:sldId xmlns:r="http://schemas.openxmlformats.org/officeDocument/2006/relationships" id="262" r:id="Ra33135399bb144ce"/>
-    <p:sldId xmlns:r="http://schemas.openxmlformats.org/officeDocument/2006/relationships" id="263" r:id="R1bf44685ace14cc2"/>
+    <p:sldId xmlns:r="http://schemas.openxmlformats.org/officeDocument/2006/relationships" id="256" r:id="R215aa688b9d948a9"/>
+    <p:sldId xmlns:r="http://schemas.openxmlformats.org/officeDocument/2006/relationships" id="257" r:id="R14b314a5886040cc"/>
+    <p:sldId xmlns:r="http://schemas.openxmlformats.org/officeDocument/2006/relationships" id="258" r:id="Rebfb6ea8e71a43e8"/>
+    <p:sldId xmlns:r="http://schemas.openxmlformats.org/officeDocument/2006/relationships" id="259" r:id="R08a0476d0b5d4f5d"/>
+    <p:sldId xmlns:r="http://schemas.openxmlformats.org/officeDocument/2006/relationships" id="260" r:id="R8cfe9475afa14dc3"/>
+    <p:sldId xmlns:r="http://schemas.openxmlformats.org/officeDocument/2006/relationships" id="261" r:id="R6e4dd29e9b024a8c"/>
+    <p:sldId xmlns:r="http://schemas.openxmlformats.org/officeDocument/2006/relationships" id="262" r:id="R3898df736dab449c"/>
+    <p:sldId xmlns:r="http://schemas.openxmlformats.org/officeDocument/2006/relationships" id="263" r:id="Ra2217400851d43f1"/>
   </p:sldIdLst>
   <p:sldSz cx="12192000" cy="6858000"/>
   <p:notesSz cx="6858000" cy="9144000"/>
@@ -1070,7 +1070,7 @@
   </p:cSld>
   <p:clrMap bg1="lt1" tx1="dk1" bg2="lt2" tx2="dk2" accent1="accent1" accent2="accent2" accent3="accent3" accent4="accent4" accent5="accent5" accent6="accent6" hlink="hlink" folHlink="folHlink"/>
   <p:sldLayoutIdLst>
-    <p:sldLayoutId xmlns:r="http://schemas.openxmlformats.org/officeDocument/2006/relationships" id="2147483649" r:id="Ra3e140d22e3f411d"/>
+    <p:sldLayoutId xmlns:r="http://schemas.openxmlformats.org/officeDocument/2006/relationships" id="2147483649" r:id="R9712ea39ec71417c"/>
   </p:sldLayoutIdLst>
   <p:txStyles>
     <p:titleStyle>
@@ -1621,7 +1621,7 @@
           <p:cNvPr id="1" name="">
             <a:extLst xmlns:a="http://schemas.openxmlformats.org/drawingml/2006/main">
               <a:ext uri="{FF2B5EF4-FFF2-40B4-BE49-F238E27FC236}">
-                <a16:creationId xmlns:a16="http://schemas.microsoft.com/office/drawing/2014/main" id="{6AD3083B-BA1D-4491-BFB8-D29E522C571C}"/>
+                <a16:creationId xmlns:a16="http://schemas.microsoft.com/office/drawing/2014/main" id="{E4247490-F761-4A4C-99E4-225AE90F0B5B}"/>
               </a:ext>
             </a:extLst>
           </p:cNvPr>
@@ -1652,7 +1652,7 @@
           <p:cNvPr id="2" name="">
             <a:extLst xmlns:a="http://schemas.openxmlformats.org/drawingml/2006/main">
               <a:ext uri="{FF2B5EF4-FFF2-40B4-BE49-F238E27FC236}">
-                <a16:creationId xmlns:a16="http://schemas.microsoft.com/office/drawing/2014/main" id="{CE8690DA-3F64-40DD-B316-603CCC0023CF}"/>
+                <a16:creationId xmlns:a16="http://schemas.microsoft.com/office/drawing/2014/main" id="{D7DE3161-BCC9-427B-958B-C1890043D5D1}"/>
               </a:ext>
             </a:extLst>
           </p:cNvPr>
@@ -1687,7 +1687,7 @@
           <p:nvPr/>
         </p:nvPicPr>
         <p:blipFill>
-          <a:blip xmlns:r="http://schemas.openxmlformats.org/officeDocument/2006/relationships" xmlns:a="http://schemas.openxmlformats.org/drawingml/2006/main" r:embed="Rc7480c3ccc364f10"/>
+          <a:blip xmlns:r="http://schemas.openxmlformats.org/officeDocument/2006/relationships" xmlns:a="http://schemas.openxmlformats.org/drawingml/2006/main" r:embed="R130b0835bc3c441e"/>
           <a:stretch xmlns:a="http://schemas.openxmlformats.org/drawingml/2006/main"/>
         </p:blipFill>
         <p:spPr>
@@ -1705,7 +1705,7 @@
           <p:cNvPr id="4" name="">
             <a:extLst xmlns:a="http://schemas.openxmlformats.org/drawingml/2006/main">
               <a:ext uri="{FF2B5EF4-FFF2-40B4-BE49-F238E27FC236}">
-                <a16:creationId xmlns:a16="http://schemas.microsoft.com/office/drawing/2014/main" id="{638C7E3F-A743-4F13-925F-F5F0DC378823}"/>
+                <a16:creationId xmlns:a16="http://schemas.microsoft.com/office/drawing/2014/main" id="{3830A0C7-18E8-4AA0-A5C2-7C820A0A6D0F}"/>
               </a:ext>
             </a:extLst>
           </p:cNvPr>
@@ -1755,7 +1755,7 @@
           <p:cNvPr id="5" name="">
             <a:extLst xmlns:a="http://schemas.openxmlformats.org/drawingml/2006/main">
               <a:ext uri="{FF2B5EF4-FFF2-40B4-BE49-F238E27FC236}">
-                <a16:creationId xmlns:a16="http://schemas.microsoft.com/office/drawing/2014/main" id="{90BAD9E0-4AAE-45AD-9A43-54918C500E71}"/>
+                <a16:creationId xmlns:a16="http://schemas.microsoft.com/office/drawing/2014/main" id="{6C8F820E-C6E6-487B-9BBC-DC7E85FFCBA7}"/>
               </a:ext>
             </a:extLst>
           </p:cNvPr>
@@ -1805,7 +1805,7 @@
           <p:cNvPr id="6" name="">
             <a:extLst xmlns:a="http://schemas.openxmlformats.org/drawingml/2006/main">
               <a:ext uri="{FF2B5EF4-FFF2-40B4-BE49-F238E27FC236}">
-                <a16:creationId xmlns:a16="http://schemas.microsoft.com/office/drawing/2014/main" id="{00972532-12D3-4295-B072-08CDA642F70D}"/>
+                <a16:creationId xmlns:a16="http://schemas.microsoft.com/office/drawing/2014/main" id="{BDBE9944-B090-400E-A180-970DF0C34771}"/>
               </a:ext>
             </a:extLst>
           </p:cNvPr>
@@ -1855,7 +1855,7 @@
           <p:cNvPr id="7" name="">
             <a:extLst xmlns:a="http://schemas.openxmlformats.org/drawingml/2006/main">
               <a:ext uri="{FF2B5EF4-FFF2-40B4-BE49-F238E27FC236}">
-                <a16:creationId xmlns:a16="http://schemas.microsoft.com/office/drawing/2014/main" id="{12B577D0-61A8-4DFA-B268-930C74F03C6A}"/>
+                <a16:creationId xmlns:a16="http://schemas.microsoft.com/office/drawing/2014/main" id="{2B813D93-3168-44B9-AEFD-52439EE7A1B6}"/>
               </a:ext>
             </a:extLst>
           </p:cNvPr>
@@ -1888,7 +1888,7 @@
           <p:cNvPr id="8" name="">
             <a:extLst xmlns:a="http://schemas.openxmlformats.org/drawingml/2006/main">
               <a:ext uri="{FF2B5EF4-FFF2-40B4-BE49-F238E27FC236}">
-                <a16:creationId xmlns:a16="http://schemas.microsoft.com/office/drawing/2014/main" id="{E971033E-5917-4110-BCDD-69FA283E0629}"/>
+                <a16:creationId xmlns:a16="http://schemas.microsoft.com/office/drawing/2014/main" id="{C9776CA6-BC99-47FB-BEC7-C0F74435EB29}"/>
               </a:ext>
             </a:extLst>
           </p:cNvPr>
@@ -1938,7 +1938,7 @@
           <p:cNvPr id="9" name="">
             <a:extLst xmlns:a="http://schemas.openxmlformats.org/drawingml/2006/main">
               <a:ext uri="{FF2B5EF4-FFF2-40B4-BE49-F238E27FC236}">
-                <a16:creationId xmlns:a16="http://schemas.microsoft.com/office/drawing/2014/main" id="{199EDEF5-6BB9-4A19-B43D-4B110D79F47E}"/>
+                <a16:creationId xmlns:a16="http://schemas.microsoft.com/office/drawing/2014/main" id="{ED138E17-6763-4B5D-A1C3-91FDC790831A}"/>
               </a:ext>
             </a:extLst>
           </p:cNvPr>
@@ -1988,7 +1988,7 @@
           <p:cNvPr id="10" name="">
             <a:extLst xmlns:a="http://schemas.openxmlformats.org/drawingml/2006/main">
               <a:ext uri="{FF2B5EF4-FFF2-40B4-BE49-F238E27FC236}">
-                <a16:creationId xmlns:a16="http://schemas.microsoft.com/office/drawing/2014/main" id="{EAA26A8D-654D-4230-8656-9FDB7D65347A}"/>
+                <a16:creationId xmlns:a16="http://schemas.microsoft.com/office/drawing/2014/main" id="{650C40F3-1F6C-4C13-BBFE-F9BFBD58B5FA}"/>
               </a:ext>
             </a:extLst>
           </p:cNvPr>
@@ -2021,7 +2021,7 @@
           <p:cNvPr id="11" name="">
             <a:extLst xmlns:a="http://schemas.openxmlformats.org/drawingml/2006/main">
               <a:ext uri="{FF2B5EF4-FFF2-40B4-BE49-F238E27FC236}">
-                <a16:creationId xmlns:a16="http://schemas.microsoft.com/office/drawing/2014/main" id="{2B3EE739-D44D-46EC-A7C7-79A63C0394D1}"/>
+                <a16:creationId xmlns:a16="http://schemas.microsoft.com/office/drawing/2014/main" id="{DA172E7E-D900-49D7-B254-61EA28D9B811}"/>
               </a:ext>
             </a:extLst>
           </p:cNvPr>
@@ -2071,7 +2071,7 @@
           <p:cNvPr id="12" name="">
             <a:extLst xmlns:a="http://schemas.openxmlformats.org/drawingml/2006/main">
               <a:ext uri="{FF2B5EF4-FFF2-40B4-BE49-F238E27FC236}">
-                <a16:creationId xmlns:a16="http://schemas.microsoft.com/office/drawing/2014/main" id="{C97C708F-E113-49B5-A6C2-FAE0931FFCB7}"/>
+                <a16:creationId xmlns:a16="http://schemas.microsoft.com/office/drawing/2014/main" id="{63AFDE95-84E6-4EB3-B0F6-AC75E379B9CF}"/>
               </a:ext>
             </a:extLst>
           </p:cNvPr>
@@ -2121,7 +2121,7 @@
           <p:cNvPr id="13" name="">
             <a:extLst xmlns:a="http://schemas.openxmlformats.org/drawingml/2006/main">
               <a:ext uri="{FF2B5EF4-FFF2-40B4-BE49-F238E27FC236}">
-                <a16:creationId xmlns:a16="http://schemas.microsoft.com/office/drawing/2014/main" id="{6975FC5C-6552-47E6-9325-48C9304636EE}"/>
+                <a16:creationId xmlns:a16="http://schemas.microsoft.com/office/drawing/2014/main" id="{362E816C-9216-4DCF-828D-FBCF32584937}"/>
               </a:ext>
             </a:extLst>
           </p:cNvPr>
@@ -2175,7 +2175,7 @@
           <p:nvPr/>
         </p:nvPicPr>
         <p:blipFill>
-          <a:blip xmlns:r="http://schemas.openxmlformats.org/officeDocument/2006/relationships" xmlns:a="http://schemas.openxmlformats.org/drawingml/2006/main" r:embed="R8d15ca23a79146ed"/>
+          <a:blip xmlns:r="http://schemas.openxmlformats.org/officeDocument/2006/relationships" xmlns:a="http://schemas.openxmlformats.org/drawingml/2006/main" r:embed="R03955b8dd0a5481a"/>
           <a:srcRect xmlns:a="http://schemas.openxmlformats.org/drawingml/2006/main" l="0" t="132" r="0" b="132"/>
           <a:stretch xmlns:a="http://schemas.openxmlformats.org/drawingml/2006/main">
             <a:fillRect l="0" t="0" r="0" b="0"/>
@@ -2196,7 +2196,7 @@
           <p:cNvPr id="15" name="">
             <a:extLst xmlns:a="http://schemas.openxmlformats.org/drawingml/2006/main">
               <a:ext uri="{FF2B5EF4-FFF2-40B4-BE49-F238E27FC236}">
-                <a16:creationId xmlns:a16="http://schemas.microsoft.com/office/drawing/2014/main" id="{FD628EEB-A6A3-4E7A-B8AB-BB04EA0FF224}"/>
+                <a16:creationId xmlns:a16="http://schemas.microsoft.com/office/drawing/2014/main" id="{BADC5036-F3D9-4C7B-ACE1-160013D92693}"/>
               </a:ext>
             </a:extLst>
           </p:cNvPr>
@@ -2227,7 +2227,7 @@
           <p:cNvPr id="16" name="">
             <a:extLst xmlns:a="http://schemas.openxmlformats.org/drawingml/2006/main">
               <a:ext uri="{FF2B5EF4-FFF2-40B4-BE49-F238E27FC236}">
-                <a16:creationId xmlns:a16="http://schemas.microsoft.com/office/drawing/2014/main" id="{A3198B0E-9CCF-4A37-9996-48C962621D1E}"/>
+                <a16:creationId xmlns:a16="http://schemas.microsoft.com/office/drawing/2014/main" id="{56C34947-4CE2-435D-9AC2-441148F2A653}"/>
               </a:ext>
             </a:extLst>
           </p:cNvPr>
@@ -2275,7 +2275,7 @@
     </p:spTree>
     <p:extLst>
       <p:ext uri="{BB962C8B-B14F-4D97-AF65-F5344CB8AC3E}">
-        <p14:creationId xmlns:p14="http://schemas.microsoft.com/office/powerpoint/2010/main" val="1965718783"/>
+        <p14:creationId xmlns:p14="http://schemas.microsoft.com/office/powerpoint/2010/main" val="2056936034"/>
       </p:ext>
     </p:extLst>
   </p:cSld>
@@ -2306,7 +2306,7 @@
           <p:cNvPr id="1" name="">
             <a:extLst xmlns:a="http://schemas.openxmlformats.org/drawingml/2006/main">
               <a:ext uri="{FF2B5EF4-FFF2-40B4-BE49-F238E27FC236}">
-                <a16:creationId xmlns:a16="http://schemas.microsoft.com/office/drawing/2014/main" id="{C88E1078-7AF0-4EB0-95CF-5339386DBF18}"/>
+                <a16:creationId xmlns:a16="http://schemas.microsoft.com/office/drawing/2014/main" id="{764565F4-D6F5-4861-BF0E-05C2ED940A14}"/>
               </a:ext>
             </a:extLst>
           </p:cNvPr>
@@ -2341,7 +2341,7 @@
           <p:nvPr/>
         </p:nvPicPr>
         <p:blipFill>
-          <a:blip xmlns:r="http://schemas.openxmlformats.org/officeDocument/2006/relationships" xmlns:a="http://schemas.openxmlformats.org/drawingml/2006/main" r:embed="R11d45b6c9eae4967"/>
+          <a:blip xmlns:r="http://schemas.openxmlformats.org/officeDocument/2006/relationships" xmlns:a="http://schemas.openxmlformats.org/drawingml/2006/main" r:embed="R39f7ecf94af94942"/>
           <a:stretch xmlns:a="http://schemas.openxmlformats.org/drawingml/2006/main"/>
         </p:blipFill>
         <p:spPr>
@@ -2359,7 +2359,7 @@
           <p:cNvPr id="3" name="">
             <a:extLst xmlns:a="http://schemas.openxmlformats.org/drawingml/2006/main">
               <a:ext uri="{FF2B5EF4-FFF2-40B4-BE49-F238E27FC236}">
-                <a16:creationId xmlns:a16="http://schemas.microsoft.com/office/drawing/2014/main" id="{76B5E1D0-CDEB-42F4-9D5B-C0CBE7AAE330}"/>
+                <a16:creationId xmlns:a16="http://schemas.microsoft.com/office/drawing/2014/main" id="{29AA5E86-AB31-49BC-B244-DE333991DB67}"/>
               </a:ext>
             </a:extLst>
           </p:cNvPr>
@@ -2409,7 +2409,7 @@
           <p:cNvPr id="4" name="">
             <a:extLst xmlns:a="http://schemas.openxmlformats.org/drawingml/2006/main">
               <a:ext uri="{FF2B5EF4-FFF2-40B4-BE49-F238E27FC236}">
-                <a16:creationId xmlns:a16="http://schemas.microsoft.com/office/drawing/2014/main" id="{0489AE89-C5C4-4DB3-912E-B37C76D0C04B}"/>
+                <a16:creationId xmlns:a16="http://schemas.microsoft.com/office/drawing/2014/main" id="{9E6E9070-4BB0-42C7-836A-B7C35BC85822}"/>
               </a:ext>
             </a:extLst>
           </p:cNvPr>
@@ -2442,7 +2442,7 @@
           <p:cNvPr id="5" name="">
             <a:extLst xmlns:a="http://schemas.openxmlformats.org/drawingml/2006/main">
               <a:ext uri="{FF2B5EF4-FFF2-40B4-BE49-F238E27FC236}">
-                <a16:creationId xmlns:a16="http://schemas.microsoft.com/office/drawing/2014/main" id="{07EFE5CA-0BF5-4DE8-8F83-AE9D4F3676A4}"/>
+                <a16:creationId xmlns:a16="http://schemas.microsoft.com/office/drawing/2014/main" id="{B7B22637-358C-4605-9CD7-656171C94A2C}"/>
               </a:ext>
             </a:extLst>
           </p:cNvPr>
@@ -2473,7 +2473,7 @@
           <p:cNvPr id="6" name="">
             <a:extLst xmlns:a="http://schemas.openxmlformats.org/drawingml/2006/main">
               <a:ext uri="{FF2B5EF4-FFF2-40B4-BE49-F238E27FC236}">
-                <a16:creationId xmlns:a16="http://schemas.microsoft.com/office/drawing/2014/main" id="{9E941CEC-7A2B-4FDB-BEBF-C75DA0C1328E}"/>
+                <a16:creationId xmlns:a16="http://schemas.microsoft.com/office/drawing/2014/main" id="{5917FDA9-3D11-4DDA-93BD-8278CA6804E2}"/>
               </a:ext>
             </a:extLst>
           </p:cNvPr>
@@ -2523,7 +2523,7 @@
           <p:cNvPr id="7" name="">
             <a:extLst xmlns:a="http://schemas.openxmlformats.org/drawingml/2006/main">
               <a:ext uri="{FF2B5EF4-FFF2-40B4-BE49-F238E27FC236}">
-                <a16:creationId xmlns:a16="http://schemas.microsoft.com/office/drawing/2014/main" id="{9A6F449D-4640-42CB-8324-B9BADB1CADA2}"/>
+                <a16:creationId xmlns:a16="http://schemas.microsoft.com/office/drawing/2014/main" id="{E448B0E5-6707-4B37-8FF4-041341FF6DB0}"/>
               </a:ext>
             </a:extLst>
           </p:cNvPr>
@@ -2573,7 +2573,7 @@
           <p:cNvPr id="8" name="">
             <a:extLst xmlns:a="http://schemas.openxmlformats.org/drawingml/2006/main">
               <a:ext uri="{FF2B5EF4-FFF2-40B4-BE49-F238E27FC236}">
-                <a16:creationId xmlns:a16="http://schemas.microsoft.com/office/drawing/2014/main" id="{C312A747-84A5-48EF-B76D-F2873BB1B912}"/>
+                <a16:creationId xmlns:a16="http://schemas.microsoft.com/office/drawing/2014/main" id="{EF60FBB7-B36D-4F7F-8C08-E4673E3556A9}"/>
               </a:ext>
             </a:extLst>
           </p:cNvPr>
@@ -2623,7 +2623,7 @@
           <p:cNvPr id="9" name="">
             <a:extLst xmlns:a="http://schemas.openxmlformats.org/drawingml/2006/main">
               <a:ext uri="{FF2B5EF4-FFF2-40B4-BE49-F238E27FC236}">
-                <a16:creationId xmlns:a16="http://schemas.microsoft.com/office/drawing/2014/main" id="{EC892B84-4789-4B26-8C8A-788FB66A1F42}"/>
+                <a16:creationId xmlns:a16="http://schemas.microsoft.com/office/drawing/2014/main" id="{A00B6515-6FF4-47A8-BB99-230959308D6B}"/>
               </a:ext>
             </a:extLst>
           </p:cNvPr>
@@ -2673,7 +2673,7 @@
           <p:cNvPr id="10" name="">
             <a:extLst xmlns:a="http://schemas.openxmlformats.org/drawingml/2006/main">
               <a:ext uri="{FF2B5EF4-FFF2-40B4-BE49-F238E27FC236}">
-                <a16:creationId xmlns:a16="http://schemas.microsoft.com/office/drawing/2014/main" id="{B53BF934-885F-4AED-8900-44069AF9FB11}"/>
+                <a16:creationId xmlns:a16="http://schemas.microsoft.com/office/drawing/2014/main" id="{26F3FC8E-F17B-468F-9F0D-BB44D3B8BCCA}"/>
               </a:ext>
             </a:extLst>
           </p:cNvPr>
@@ -2723,7 +2723,7 @@
           <p:cNvPr id="11" name="">
             <a:extLst xmlns:a="http://schemas.openxmlformats.org/drawingml/2006/main">
               <a:ext uri="{FF2B5EF4-FFF2-40B4-BE49-F238E27FC236}">
-                <a16:creationId xmlns:a16="http://schemas.microsoft.com/office/drawing/2014/main" id="{DF1A639E-DB5F-455F-83EE-E9BDD3C4F1DA}"/>
+                <a16:creationId xmlns:a16="http://schemas.microsoft.com/office/drawing/2014/main" id="{6570680B-4C7B-4D20-8B27-DE8EA9AC9526}"/>
               </a:ext>
             </a:extLst>
           </p:cNvPr>
@@ -2754,7 +2754,7 @@
           <p:cNvPr id="12" name="">
             <a:extLst xmlns:a="http://schemas.openxmlformats.org/drawingml/2006/main">
               <a:ext uri="{FF2B5EF4-FFF2-40B4-BE49-F238E27FC236}">
-                <a16:creationId xmlns:a16="http://schemas.microsoft.com/office/drawing/2014/main" id="{9BECC34F-A7C5-4C30-859D-3503B87029D6}"/>
+                <a16:creationId xmlns:a16="http://schemas.microsoft.com/office/drawing/2014/main" id="{76D3A85A-ECC6-424A-BF0D-A0564613FB48}"/>
               </a:ext>
             </a:extLst>
           </p:cNvPr>
@@ -2804,7 +2804,7 @@
           <p:cNvPr id="13" name="">
             <a:extLst xmlns:a="http://schemas.openxmlformats.org/drawingml/2006/main">
               <a:ext uri="{FF2B5EF4-FFF2-40B4-BE49-F238E27FC236}">
-                <a16:creationId xmlns:a16="http://schemas.microsoft.com/office/drawing/2014/main" id="{3D1A74D5-7AD7-49CC-93D2-49A56493B92C}"/>
+                <a16:creationId xmlns:a16="http://schemas.microsoft.com/office/drawing/2014/main" id="{4C02B46C-6E7A-4F48-AB61-3F15C6EC5F49}"/>
               </a:ext>
             </a:extLst>
           </p:cNvPr>
@@ -2854,7 +2854,7 @@
           <p:cNvPr id="14" name="">
             <a:extLst xmlns:a="http://schemas.openxmlformats.org/drawingml/2006/main">
               <a:ext uri="{FF2B5EF4-FFF2-40B4-BE49-F238E27FC236}">
-                <a16:creationId xmlns:a16="http://schemas.microsoft.com/office/drawing/2014/main" id="{84B70247-D6D1-4B4F-9738-977E596E42AF}"/>
+                <a16:creationId xmlns:a16="http://schemas.microsoft.com/office/drawing/2014/main" id="{5D0F2CB4-D8D7-4C98-B3CF-D661CC517491}"/>
               </a:ext>
             </a:extLst>
           </p:cNvPr>
@@ -2885,7 +2885,7 @@
           <p:cNvPr id="15" name="">
             <a:extLst xmlns:a="http://schemas.openxmlformats.org/drawingml/2006/main">
               <a:ext uri="{FF2B5EF4-FFF2-40B4-BE49-F238E27FC236}">
-                <a16:creationId xmlns:a16="http://schemas.microsoft.com/office/drawing/2014/main" id="{C8780495-FC39-4F9C-8AA7-235F49673215}"/>
+                <a16:creationId xmlns:a16="http://schemas.microsoft.com/office/drawing/2014/main" id="{AA41C197-B490-4E33-89C1-7E330726E12E}"/>
               </a:ext>
             </a:extLst>
           </p:cNvPr>
@@ -2935,7 +2935,7 @@
           <p:cNvPr id="16" name="">
             <a:extLst xmlns:a="http://schemas.openxmlformats.org/drawingml/2006/main">
               <a:ext uri="{FF2B5EF4-FFF2-40B4-BE49-F238E27FC236}">
-                <a16:creationId xmlns:a16="http://schemas.microsoft.com/office/drawing/2014/main" id="{C2C38120-3C52-4F9E-8533-63DB73489C8F}"/>
+                <a16:creationId xmlns:a16="http://schemas.microsoft.com/office/drawing/2014/main" id="{BB47C168-4418-42C5-9DBE-AD9951B10B0B}"/>
               </a:ext>
             </a:extLst>
           </p:cNvPr>
@@ -2985,7 +2985,7 @@
           <p:cNvPr id="17" name="">
             <a:extLst xmlns:a="http://schemas.openxmlformats.org/drawingml/2006/main">
               <a:ext uri="{FF2B5EF4-FFF2-40B4-BE49-F238E27FC236}">
-                <a16:creationId xmlns:a16="http://schemas.microsoft.com/office/drawing/2014/main" id="{039CDFBF-5C9C-4DFC-BA0F-46F8400F06E6}"/>
+                <a16:creationId xmlns:a16="http://schemas.microsoft.com/office/drawing/2014/main" id="{0AFFF66F-55A9-4DAD-9306-AFEDC1BD89D8}"/>
               </a:ext>
             </a:extLst>
           </p:cNvPr>
@@ -3016,7 +3016,7 @@
           <p:cNvPr id="18" name="">
             <a:extLst xmlns:a="http://schemas.openxmlformats.org/drawingml/2006/main">
               <a:ext uri="{FF2B5EF4-FFF2-40B4-BE49-F238E27FC236}">
-                <a16:creationId xmlns:a16="http://schemas.microsoft.com/office/drawing/2014/main" id="{49A99218-C2B0-47F4-B496-47E88CDB72CB}"/>
+                <a16:creationId xmlns:a16="http://schemas.microsoft.com/office/drawing/2014/main" id="{FECEF7B8-7EF8-4D67-B949-6F3E6447DA93}"/>
               </a:ext>
             </a:extLst>
           </p:cNvPr>
@@ -3066,7 +3066,7 @@
           <p:cNvPr id="19" name="">
             <a:extLst xmlns:a="http://schemas.openxmlformats.org/drawingml/2006/main">
               <a:ext uri="{FF2B5EF4-FFF2-40B4-BE49-F238E27FC236}">
-                <a16:creationId xmlns:a16="http://schemas.microsoft.com/office/drawing/2014/main" id="{CE004AE1-73E4-485A-AC6F-BE310AE25324}"/>
+                <a16:creationId xmlns:a16="http://schemas.microsoft.com/office/drawing/2014/main" id="{1538533E-2F45-4EC3-AF44-F5C5998B449A}"/>
               </a:ext>
             </a:extLst>
           </p:cNvPr>
@@ -3114,7 +3114,7 @@
     </p:spTree>
     <p:extLst>
       <p:ext uri="{BB962C8B-B14F-4D97-AF65-F5344CB8AC3E}">
-        <p14:creationId xmlns:p14="http://schemas.microsoft.com/office/powerpoint/2010/main" val="1426720485"/>
+        <p14:creationId xmlns:p14="http://schemas.microsoft.com/office/powerpoint/2010/main" val="468626104"/>
       </p:ext>
     </p:extLst>
   </p:cSld>
@@ -3145,7 +3145,7 @@
           <p:cNvPr id="1" name="">
             <a:extLst xmlns:a="http://schemas.openxmlformats.org/drawingml/2006/main">
               <a:ext uri="{FF2B5EF4-FFF2-40B4-BE49-F238E27FC236}">
-                <a16:creationId xmlns:a16="http://schemas.microsoft.com/office/drawing/2014/main" id="{1062FE69-11FB-46BB-95F9-5BF8520D73E2}"/>
+                <a16:creationId xmlns:a16="http://schemas.microsoft.com/office/drawing/2014/main" id="{B95A8354-EBDC-47D2-94DE-5D48F5609522}"/>
               </a:ext>
             </a:extLst>
           </p:cNvPr>
@@ -3173,14 +3173,14 @@
       </p:sp>
       <p:pic>
         <p:nvPicPr>
-          <p:cNvPr id="25" name=""/>
+          <p:cNvPr id="33" name=""/>
           <p:cNvPicPr>
             <a:picLocks xmlns:a="http://schemas.openxmlformats.org/drawingml/2006/main" noChangeAspect="1"/>
           </p:cNvPicPr>
           <p:nvPr/>
         </p:nvPicPr>
         <p:blipFill>
-          <a:blip xmlns:r="http://schemas.openxmlformats.org/officeDocument/2006/relationships" xmlns:a="http://schemas.openxmlformats.org/drawingml/2006/main" r:embed="R0669ac406e4b47e8"/>
+          <a:blip xmlns:r="http://schemas.openxmlformats.org/officeDocument/2006/relationships" xmlns:a="http://schemas.openxmlformats.org/drawingml/2006/main" r:embed="R19c6331b73e7402d"/>
           <a:stretch xmlns:a="http://schemas.openxmlformats.org/drawingml/2006/main"/>
         </p:blipFill>
         <p:spPr>
@@ -3198,7 +3198,7 @@
           <p:cNvPr id="3" name="">
             <a:extLst xmlns:a="http://schemas.openxmlformats.org/drawingml/2006/main">
               <a:ext uri="{FF2B5EF4-FFF2-40B4-BE49-F238E27FC236}">
-                <a16:creationId xmlns:a16="http://schemas.microsoft.com/office/drawing/2014/main" id="{BC635638-6831-4DF1-BB99-A1FA1B11FECF}"/>
+                <a16:creationId xmlns:a16="http://schemas.microsoft.com/office/drawing/2014/main" id="{A47A299F-F7BB-4C61-B147-8E6520FAA949}"/>
               </a:ext>
             </a:extLst>
           </p:cNvPr>
@@ -3238,7 +3238,7 @@
                   <a:srgbClr val="102A63"/>
                 </a:solidFill>
               </a:rPr>
-              <a:t>Контекст инфраструктуры определяет приоритеты</a:t>
+              <a:t>Масштаб инфраструктуры задает три приоритета</a:t>
             </a:r>
           </a:p>
         </p:txBody>
@@ -3248,7 +3248,7 @@
           <p:cNvPr id="4" name="">
             <a:extLst xmlns:a="http://schemas.openxmlformats.org/drawingml/2006/main">
               <a:ext uri="{FF2B5EF4-FFF2-40B4-BE49-F238E27FC236}">
-                <a16:creationId xmlns:a16="http://schemas.microsoft.com/office/drawing/2014/main" id="{C218C487-192A-4A08-992B-098E03A9ACEC}"/>
+                <a16:creationId xmlns:a16="http://schemas.microsoft.com/office/drawing/2014/main" id="{ED8A963C-0638-4FD3-82A2-4C04D04DB0C6}"/>
               </a:ext>
             </a:extLst>
           </p:cNvPr>
@@ -3281,7 +3281,7 @@
           <p:cNvPr id="5" name="">
             <a:extLst xmlns:a="http://schemas.openxmlformats.org/drawingml/2006/main">
               <a:ext uri="{FF2B5EF4-FFF2-40B4-BE49-F238E27FC236}">
-                <a16:creationId xmlns:a16="http://schemas.microsoft.com/office/drawing/2014/main" id="{71E6C933-B606-49A6-8729-1F414A53F8FB}"/>
+                <a16:creationId xmlns:a16="http://schemas.microsoft.com/office/drawing/2014/main" id="{4223DDC8-EA2A-4B9E-B65E-5CAC2EF1945F}"/>
               </a:ext>
             </a:extLst>
           </p:cNvPr>
@@ -3312,7 +3312,7 @@
           <p:cNvPr id="6" name="">
             <a:extLst xmlns:a="http://schemas.openxmlformats.org/drawingml/2006/main">
               <a:ext uri="{FF2B5EF4-FFF2-40B4-BE49-F238E27FC236}">
-                <a16:creationId xmlns:a16="http://schemas.microsoft.com/office/drawing/2014/main" id="{5C0A84F0-CBCC-4EAD-9DD6-C2664C190E45}"/>
+                <a16:creationId xmlns:a16="http://schemas.microsoft.com/office/drawing/2014/main" id="{2C229A54-E2F6-4ABA-95C5-823C6B10E71F}"/>
               </a:ext>
             </a:extLst>
           </p:cNvPr>
@@ -3362,7 +3362,7 @@
           <p:cNvPr id="7" name="">
             <a:extLst xmlns:a="http://schemas.openxmlformats.org/drawingml/2006/main">
               <a:ext uri="{FF2B5EF4-FFF2-40B4-BE49-F238E27FC236}">
-                <a16:creationId xmlns:a16="http://schemas.microsoft.com/office/drawing/2014/main" id="{623148CC-C0A7-4F90-9E72-0BCECA849F2D}"/>
+                <a16:creationId xmlns:a16="http://schemas.microsoft.com/office/drawing/2014/main" id="{D29B7FF6-D165-4401-88B2-86BB9AF748CC}"/>
               </a:ext>
             </a:extLst>
           </p:cNvPr>
@@ -3412,7 +3412,7 @@
           <p:cNvPr id="8" name="">
             <a:extLst xmlns:a="http://schemas.openxmlformats.org/drawingml/2006/main">
               <a:ext uri="{FF2B5EF4-FFF2-40B4-BE49-F238E27FC236}">
-                <a16:creationId xmlns:a16="http://schemas.microsoft.com/office/drawing/2014/main" id="{7509A88E-E32A-4EB5-A535-9B416F8064EE}"/>
+                <a16:creationId xmlns:a16="http://schemas.microsoft.com/office/drawing/2014/main" id="{CC3AD868-43A5-4A69-A8AA-093E93F79451}"/>
               </a:ext>
             </a:extLst>
           </p:cNvPr>
@@ -3447,7 +3447,7 @@
           <p:cNvPr id="9" name="">
             <a:extLst xmlns:a="http://schemas.openxmlformats.org/drawingml/2006/main">
               <a:ext uri="{FF2B5EF4-FFF2-40B4-BE49-F238E27FC236}">
-                <a16:creationId xmlns:a16="http://schemas.microsoft.com/office/drawing/2014/main" id="{24D4E6EB-D0BF-47A1-A639-A1B2A8E171C6}"/>
+                <a16:creationId xmlns:a16="http://schemas.microsoft.com/office/drawing/2014/main" id="{0803FB77-0E4B-484B-88EA-052833A9FE42}"/>
               </a:ext>
             </a:extLst>
           </p:cNvPr>
@@ -3497,7 +3497,7 @@
           <p:cNvPr id="10" name="">
             <a:extLst xmlns:a="http://schemas.openxmlformats.org/drawingml/2006/main">
               <a:ext uri="{FF2B5EF4-FFF2-40B4-BE49-F238E27FC236}">
-                <a16:creationId xmlns:a16="http://schemas.microsoft.com/office/drawing/2014/main" id="{ABE06EBC-FA7E-4249-A7E4-A01F2A3C3216}"/>
+                <a16:creationId xmlns:a16="http://schemas.microsoft.com/office/drawing/2014/main" id="{58DDE35C-42A4-438E-8227-0198D0C46E72}"/>
               </a:ext>
             </a:extLst>
           </p:cNvPr>
@@ -3547,7 +3547,7 @@
           <p:cNvPr id="11" name="">
             <a:extLst xmlns:a="http://schemas.openxmlformats.org/drawingml/2006/main">
               <a:ext uri="{FF2B5EF4-FFF2-40B4-BE49-F238E27FC236}">
-                <a16:creationId xmlns:a16="http://schemas.microsoft.com/office/drawing/2014/main" id="{5DF5A8AD-9E22-405F-973D-AB6C86969884}"/>
+                <a16:creationId xmlns:a16="http://schemas.microsoft.com/office/drawing/2014/main" id="{396EB12D-9DB9-46F7-ACB7-F69FCD4D041D}"/>
               </a:ext>
             </a:extLst>
           </p:cNvPr>
@@ -3582,7 +3582,7 @@
           <p:cNvPr id="12" name="">
             <a:extLst xmlns:a="http://schemas.openxmlformats.org/drawingml/2006/main">
               <a:ext uri="{FF2B5EF4-FFF2-40B4-BE49-F238E27FC236}">
-                <a16:creationId xmlns:a16="http://schemas.microsoft.com/office/drawing/2014/main" id="{23740950-F759-4C5B-9DC5-4043EDEE87DB}"/>
+                <a16:creationId xmlns:a16="http://schemas.microsoft.com/office/drawing/2014/main" id="{7EAEC66F-042E-480F-BF0A-3525F3081FED}"/>
               </a:ext>
             </a:extLst>
           </p:cNvPr>
@@ -3632,7 +3632,7 @@
           <p:cNvPr id="13" name="">
             <a:extLst xmlns:a="http://schemas.openxmlformats.org/drawingml/2006/main">
               <a:ext uri="{FF2B5EF4-FFF2-40B4-BE49-F238E27FC236}">
-                <a16:creationId xmlns:a16="http://schemas.microsoft.com/office/drawing/2014/main" id="{2E2B818F-4A53-4D12-85B3-8EED1BB118EF}"/>
+                <a16:creationId xmlns:a16="http://schemas.microsoft.com/office/drawing/2014/main" id="{AB5D3495-58A7-4D72-99C7-FBD07876AF72}"/>
               </a:ext>
             </a:extLst>
           </p:cNvPr>
@@ -3682,7 +3682,7 @@
           <p:cNvPr id="14" name="">
             <a:extLst xmlns:a="http://schemas.openxmlformats.org/drawingml/2006/main">
               <a:ext uri="{FF2B5EF4-FFF2-40B4-BE49-F238E27FC236}">
-                <a16:creationId xmlns:a16="http://schemas.microsoft.com/office/drawing/2014/main" id="{89B1FE2E-C544-4BD1-8F3B-9C9F211C6C48}"/>
+                <a16:creationId xmlns:a16="http://schemas.microsoft.com/office/drawing/2014/main" id="{6F2A9FE9-0C91-495F-B209-8B9F94E89604}"/>
               </a:ext>
             </a:extLst>
           </p:cNvPr>
@@ -3717,7 +3717,7 @@
           <p:cNvPr id="15" name="">
             <a:extLst xmlns:a="http://schemas.openxmlformats.org/drawingml/2006/main">
               <a:ext uri="{FF2B5EF4-FFF2-40B4-BE49-F238E27FC236}">
-                <a16:creationId xmlns:a16="http://schemas.microsoft.com/office/drawing/2014/main" id="{91ECFFAD-212B-4061-87DC-2BD1839E3238}"/>
+                <a16:creationId xmlns:a16="http://schemas.microsoft.com/office/drawing/2014/main" id="{401B7875-D277-4A6F-9F2F-1FFA47BA5D6F}"/>
               </a:ext>
             </a:extLst>
           </p:cNvPr>
@@ -3767,7 +3767,7 @@
           <p:cNvPr id="16" name="">
             <a:extLst xmlns:a="http://schemas.openxmlformats.org/drawingml/2006/main">
               <a:ext uri="{FF2B5EF4-FFF2-40B4-BE49-F238E27FC236}">
-                <a16:creationId xmlns:a16="http://schemas.microsoft.com/office/drawing/2014/main" id="{F2DC019A-7D97-4655-B75D-C24F592C4F15}"/>
+                <a16:creationId xmlns:a16="http://schemas.microsoft.com/office/drawing/2014/main" id="{3D07B4B3-1A85-4A0C-B441-4FECF1982FB3}"/>
               </a:ext>
             </a:extLst>
           </p:cNvPr>
@@ -3817,7 +3817,7 @@
           <p:cNvPr id="17" name="">
             <a:extLst xmlns:a="http://schemas.openxmlformats.org/drawingml/2006/main">
               <a:ext uri="{FF2B5EF4-FFF2-40B4-BE49-F238E27FC236}">
-                <a16:creationId xmlns:a16="http://schemas.microsoft.com/office/drawing/2014/main" id="{5509163A-7F70-48E0-AA45-8A5E2F879B8C}"/>
+                <a16:creationId xmlns:a16="http://schemas.microsoft.com/office/drawing/2014/main" id="{5259474E-8B67-43BC-91A5-6C89DCF7F78A}"/>
               </a:ext>
             </a:extLst>
           </p:cNvPr>
@@ -3852,7 +3852,7 @@
           <p:cNvPr id="18" name="">
             <a:extLst xmlns:a="http://schemas.openxmlformats.org/drawingml/2006/main">
               <a:ext uri="{FF2B5EF4-FFF2-40B4-BE49-F238E27FC236}">
-                <a16:creationId xmlns:a16="http://schemas.microsoft.com/office/drawing/2014/main" id="{441C8D9D-68F2-42D0-B11C-5A87911481F3}"/>
+                <a16:creationId xmlns:a16="http://schemas.microsoft.com/office/drawing/2014/main" id="{2ABF34AD-32B2-4A18-944A-B0CE650B8525}"/>
               </a:ext>
             </a:extLst>
           </p:cNvPr>
@@ -3902,7 +3902,7 @@
           <p:cNvPr id="19" name="">
             <a:extLst xmlns:a="http://schemas.openxmlformats.org/drawingml/2006/main">
               <a:ext uri="{FF2B5EF4-FFF2-40B4-BE49-F238E27FC236}">
-                <a16:creationId xmlns:a16="http://schemas.microsoft.com/office/drawing/2014/main" id="{90ED9B56-E5DB-4238-835C-EA0400B1C6EA}"/>
+                <a16:creationId xmlns:a16="http://schemas.microsoft.com/office/drawing/2014/main" id="{D4227BC3-131D-4F65-B8E2-D2342C3D5561}"/>
               </a:ext>
             </a:extLst>
           </p:cNvPr>
@@ -3952,19 +3952,69 @@
           <p:cNvPr id="20" name="">
             <a:extLst xmlns:a="http://schemas.openxmlformats.org/drawingml/2006/main">
               <a:ext uri="{FF2B5EF4-FFF2-40B4-BE49-F238E27FC236}">
-                <a16:creationId xmlns:a16="http://schemas.microsoft.com/office/drawing/2014/main" id="{D9EAFEC3-69E4-4008-90A9-F1FB8D8CC9C1}"/>
-              </a:ext>
-            </a:extLst>
-          </p:cNvPr>
-          <p:cNvSpPr>
-            <a:spLocks xmlns:a="http://schemas.openxmlformats.org/drawingml/2006/main" noGrp="1"/>
-          </p:cNvSpPr>
-          <p:nvPr/>
-        </p:nvSpPr>
-        <p:spPr>
-          <a:xfrm xmlns:a="http://schemas.openxmlformats.org/drawingml/2006/main">
-            <a:off x="552450" y="3143250"/>
-            <a:ext cx="1714500" cy="285750"/>
+                <a16:creationId xmlns:a16="http://schemas.microsoft.com/office/drawing/2014/main" id="{74F4A8F4-7C06-4456-91B4-8E0B50A77E92}"/>
+              </a:ext>
+            </a:extLst>
+          </p:cNvPr>
+          <p:cNvSpPr>
+            <a:spLocks xmlns:a="http://schemas.openxmlformats.org/drawingml/2006/main" noGrp="1"/>
+          </p:cNvSpPr>
+          <p:nvPr/>
+        </p:nvSpPr>
+        <p:spPr>
+          <a:xfrm xmlns:a="http://schemas.openxmlformats.org/drawingml/2006/main">
+            <a:off x="552450" y="3009900"/>
+            <a:ext cx="1714500" cy="247650"/>
+          </a:xfrm>
+          <a:prstGeom xmlns:a="http://schemas.openxmlformats.org/drawingml/2006/main" prst="rect">
+            <a:avLst/>
+          </a:prstGeom>
+          <a:noFill xmlns:a="http://schemas.openxmlformats.org/drawingml/2006/main"/>
+          <a:ln xmlns:a="http://schemas.openxmlformats.org/drawingml/2006/main" w="0">
+            <a:noFill/>
+            <a:prstDash val="solid"/>
+          </a:ln>
+        </p:spPr>
+        <p:txBody>
+          <a:bodyPr xmlns:a="http://schemas.openxmlformats.org/drawingml/2006/main"/>
+          <a:lstStyle xmlns:a="http://schemas.openxmlformats.org/drawingml/2006/main"/>
+          <a:p xmlns:a="http://schemas.openxmlformats.org/drawingml/2006/main">
+            <a:pPr>
+              <a:defRPr sz="1275" b="1">
+                <a:solidFill>
+                  <a:srgbClr val="2048A8"/>
+                </a:solidFill>
+              </a:defRPr>
+            </a:pPr>
+            <a:r>
+              <a:rPr sz="1275" b="1">
+                <a:solidFill>
+                  <a:srgbClr val="2048A8"/>
+                </a:solidFill>
+              </a:rPr>
+              <a:t>Профиль</a:t>
+            </a:r>
+          </a:p>
+        </p:txBody>
+      </p:sp>
+      <p:sp>
+        <p:nvSpPr>
+          <p:cNvPr id="21" name="">
+            <a:extLst xmlns:a="http://schemas.openxmlformats.org/drawingml/2006/main">
+              <a:ext uri="{FF2B5EF4-FFF2-40B4-BE49-F238E27FC236}">
+                <a16:creationId xmlns:a16="http://schemas.microsoft.com/office/drawing/2014/main" id="{49DFAF70-8774-4DA8-BFEC-DD486052827C}"/>
+              </a:ext>
+            </a:extLst>
+          </p:cNvPr>
+          <p:cNvSpPr>
+            <a:spLocks xmlns:a="http://schemas.openxmlformats.org/drawingml/2006/main" noGrp="1"/>
+          </p:cNvSpPr>
+          <p:nvPr/>
+        </p:nvSpPr>
+        <p:spPr>
+          <a:xfrm xmlns:a="http://schemas.openxmlformats.org/drawingml/2006/main">
+            <a:off x="552450" y="3314700"/>
+            <a:ext cx="10648950" cy="590550"/>
           </a:xfrm>
           <a:prstGeom xmlns:a="http://schemas.openxmlformats.org/drawingml/2006/main" prst="rect">
             <a:avLst/>
@@ -3982,6 +4032,56 @@
             <a:pPr>
               <a:defRPr sz="1350" b="1">
                 <a:solidFill>
+                  <a:srgbClr val="102A63"/>
+                </a:solidFill>
+              </a:defRPr>
+            </a:pPr>
+            <a:r>
+              <a:rPr sz="1350" b="1">
+                <a:solidFill>
+                  <a:srgbClr val="102A63"/>
+                </a:solidFill>
+              </a:rPr>
+              <a:t>{{PROFILE}}</a:t>
+            </a:r>
+          </a:p>
+        </p:txBody>
+      </p:sp>
+      <p:sp>
+        <p:nvSpPr>
+          <p:cNvPr id="22" name="">
+            <a:extLst xmlns:a="http://schemas.openxmlformats.org/drawingml/2006/main">
+              <a:ext uri="{FF2B5EF4-FFF2-40B4-BE49-F238E27FC236}">
+                <a16:creationId xmlns:a16="http://schemas.microsoft.com/office/drawing/2014/main" id="{F43AEE82-B152-4763-9B8D-A622E541C7BF}"/>
+              </a:ext>
+            </a:extLst>
+          </p:cNvPr>
+          <p:cNvSpPr>
+            <a:spLocks xmlns:a="http://schemas.openxmlformats.org/drawingml/2006/main" noGrp="1"/>
+          </p:cNvSpPr>
+          <p:nvPr/>
+        </p:nvSpPr>
+        <p:spPr>
+          <a:xfrm xmlns:a="http://schemas.openxmlformats.org/drawingml/2006/main">
+            <a:off x="552450" y="4114800"/>
+            <a:ext cx="2857500" cy="266700"/>
+          </a:xfrm>
+          <a:prstGeom xmlns:a="http://schemas.openxmlformats.org/drawingml/2006/main" prst="rect">
+            <a:avLst/>
+          </a:prstGeom>
+          <a:noFill xmlns:a="http://schemas.openxmlformats.org/drawingml/2006/main"/>
+          <a:ln xmlns:a="http://schemas.openxmlformats.org/drawingml/2006/main" w="0">
+            <a:noFill/>
+            <a:prstDash val="solid"/>
+          </a:ln>
+        </p:spPr>
+        <p:txBody>
+          <a:bodyPr xmlns:a="http://schemas.openxmlformats.org/drawingml/2006/main"/>
+          <a:lstStyle xmlns:a="http://schemas.openxmlformats.org/drawingml/2006/main"/>
+          <a:p xmlns:a="http://schemas.openxmlformats.org/drawingml/2006/main">
+            <a:pPr>
+              <a:defRPr sz="1350" b="1">
+                <a:solidFill>
                   <a:srgbClr val="2048A8"/>
                 </a:solidFill>
               </a:defRPr>
@@ -3992,79 +4092,62 @@
                   <a:srgbClr val="2048A8"/>
                 </a:solidFill>
               </a:rPr>
-              <a:t>Профиль</a:t>
-            </a:r>
-          </a:p>
-        </p:txBody>
-      </p:sp>
-      <p:sp>
-        <p:nvSpPr>
-          <p:cNvPr id="21" name="">
-            <a:extLst xmlns:a="http://schemas.openxmlformats.org/drawingml/2006/main">
-              <a:ext uri="{FF2B5EF4-FFF2-40B4-BE49-F238E27FC236}">
-                <a16:creationId xmlns:a16="http://schemas.microsoft.com/office/drawing/2014/main" id="{88369B4E-EEAB-4507-BB1B-16EC03B73C7B}"/>
-              </a:ext>
-            </a:extLst>
-          </p:cNvPr>
-          <p:cNvSpPr>
-            <a:spLocks xmlns:a="http://schemas.openxmlformats.org/drawingml/2006/main" noGrp="1"/>
-          </p:cNvSpPr>
-          <p:nvPr/>
-        </p:nvSpPr>
-        <p:spPr>
-          <a:xfrm xmlns:a="http://schemas.openxmlformats.org/drawingml/2006/main">
-            <a:off x="552450" y="3543300"/>
-            <a:ext cx="10648950" cy="781050"/>
-          </a:xfrm>
-          <a:prstGeom xmlns:a="http://schemas.openxmlformats.org/drawingml/2006/main" prst="rect">
-            <a:avLst/>
-          </a:prstGeom>
-          <a:noFill xmlns:a="http://schemas.openxmlformats.org/drawingml/2006/main"/>
-          <a:ln xmlns:a="http://schemas.openxmlformats.org/drawingml/2006/main" w="0">
-            <a:noFill/>
-            <a:prstDash val="solid"/>
-          </a:ln>
-        </p:spPr>
-        <p:txBody>
-          <a:bodyPr xmlns:a="http://schemas.openxmlformats.org/drawingml/2006/main"/>
-          <a:lstStyle xmlns:a="http://schemas.openxmlformats.org/drawingml/2006/main"/>
-          <a:p xmlns:a="http://schemas.openxmlformats.org/drawingml/2006/main">
-            <a:pPr>
-              <a:defRPr sz="1500" b="1">
-                <a:solidFill>
-                  <a:srgbClr val="102A63"/>
-                </a:solidFill>
-              </a:defRPr>
-            </a:pPr>
-            <a:r>
-              <a:rPr sz="1500" b="1">
-                <a:solidFill>
-                  <a:srgbClr val="102A63"/>
-                </a:solidFill>
-              </a:rPr>
-              <a:t>{{PROFILE}}</a:t>
-            </a:r>
-          </a:p>
-        </p:txBody>
-      </p:sp>
-      <p:sp>
-        <p:nvSpPr>
-          <p:cNvPr id="22" name="">
-            <a:extLst xmlns:a="http://schemas.openxmlformats.org/drawingml/2006/main">
-              <a:ext uri="{FF2B5EF4-FFF2-40B4-BE49-F238E27FC236}">
-                <a16:creationId xmlns:a16="http://schemas.microsoft.com/office/drawing/2014/main" id="{769C72F9-650A-44C5-9A4F-FF0622329B2C}"/>
-              </a:ext>
-            </a:extLst>
-          </p:cNvPr>
-          <p:cNvSpPr>
-            <a:spLocks xmlns:a="http://schemas.openxmlformats.org/drawingml/2006/main" noGrp="1"/>
-          </p:cNvSpPr>
-          <p:nvPr/>
-        </p:nvSpPr>
-        <p:spPr>
-          <a:xfrm xmlns:a="http://schemas.openxmlformats.org/drawingml/2006/main">
-            <a:off x="552450" y="4667250"/>
-            <a:ext cx="2286000" cy="285750"/>
+              <a:t>Управленческий фокус</a:t>
+            </a:r>
+          </a:p>
+        </p:txBody>
+      </p:sp>
+      <p:sp>
+        <p:nvSpPr>
+          <p:cNvPr id="23" name="">
+            <a:extLst xmlns:a="http://schemas.openxmlformats.org/drawingml/2006/main">
+              <a:ext uri="{FF2B5EF4-FFF2-40B4-BE49-F238E27FC236}">
+                <a16:creationId xmlns:a16="http://schemas.microsoft.com/office/drawing/2014/main" id="{6BD829B5-117C-4FFC-9919-E25899D4D733}"/>
+              </a:ext>
+            </a:extLst>
+          </p:cNvPr>
+          <p:cNvSpPr>
+            <a:spLocks xmlns:a="http://schemas.openxmlformats.org/drawingml/2006/main" noGrp="1"/>
+          </p:cNvSpPr>
+          <p:nvPr/>
+        </p:nvSpPr>
+        <p:spPr>
+          <a:xfrm xmlns:a="http://schemas.openxmlformats.org/drawingml/2006/main">
+            <a:off x="552450" y="4591050"/>
+            <a:ext cx="66675" cy="1333500"/>
+          </a:xfrm>
+          <a:prstGeom xmlns:a="http://schemas.openxmlformats.org/drawingml/2006/main" prst="roundRect">
+            <a:avLst>
+              <a:gd name="adj" fmla="val 50000"/>
+            </a:avLst>
+          </a:prstGeom>
+          <a:solidFill xmlns:a="http://schemas.openxmlformats.org/drawingml/2006/main">
+            <a:srgbClr val="2048A8"/>
+          </a:solidFill>
+          <a:ln xmlns:a="http://schemas.openxmlformats.org/drawingml/2006/main" w="0">
+            <a:noFill/>
+            <a:prstDash val="solid"/>
+          </a:ln>
+        </p:spPr>
+      </p:sp>
+      <p:sp>
+        <p:nvSpPr>
+          <p:cNvPr id="24" name="">
+            <a:extLst xmlns:a="http://schemas.openxmlformats.org/drawingml/2006/main">
+              <a:ext uri="{FF2B5EF4-FFF2-40B4-BE49-F238E27FC236}">
+                <a16:creationId xmlns:a16="http://schemas.microsoft.com/office/drawing/2014/main" id="{B9BD050C-7FC8-4DA4-A06F-AAAA9E4FCB94}"/>
+              </a:ext>
+            </a:extLst>
+          </p:cNvPr>
+          <p:cNvSpPr>
+            <a:spLocks xmlns:a="http://schemas.openxmlformats.org/drawingml/2006/main" noGrp="1"/>
+          </p:cNvSpPr>
+          <p:nvPr/>
+        </p:nvSpPr>
+        <p:spPr>
+          <a:xfrm xmlns:a="http://schemas.openxmlformats.org/drawingml/2006/main">
+            <a:off x="781050" y="4552950"/>
+            <a:ext cx="3105150" cy="361950"/>
           </a:xfrm>
           <a:prstGeom xmlns:a="http://schemas.openxmlformats.org/drawingml/2006/main" prst="rect">
             <a:avLst/>
@@ -4082,67 +4165,333 @@
             <a:pPr>
               <a:defRPr sz="1350" b="1">
                 <a:solidFill>
-                  <a:srgbClr val="2048A8"/>
+                  <a:srgbClr val="102A63"/>
                 </a:solidFill>
               </a:defRPr>
             </a:pPr>
             <a:r>
               <a:rPr sz="1350" b="1">
                 <a:solidFill>
-                  <a:srgbClr val="2048A8"/>
-                </a:solidFill>
-              </a:rPr>
-              <a:t>Что это означает</a:t>
-            </a:r>
-          </a:p>
-        </p:txBody>
-      </p:sp>
-      <p:sp>
-        <p:nvSpPr>
-          <p:cNvPr id="23" name="">
-            <a:extLst xmlns:a="http://schemas.openxmlformats.org/drawingml/2006/main">
-              <a:ext uri="{FF2B5EF4-FFF2-40B4-BE49-F238E27FC236}">
-                <a16:creationId xmlns:a16="http://schemas.microsoft.com/office/drawing/2014/main" id="{7A57BE6C-B20C-4BE2-9FE0-E6B3D1B7A5E3}"/>
-              </a:ext>
-            </a:extLst>
-          </p:cNvPr>
-          <p:cNvSpPr>
-            <a:spLocks xmlns:a="http://schemas.openxmlformats.org/drawingml/2006/main" noGrp="1"/>
-          </p:cNvSpPr>
-          <p:nvPr/>
-        </p:nvSpPr>
-        <p:spPr>
-          <a:xfrm xmlns:a="http://schemas.openxmlformats.org/drawingml/2006/main">
-            <a:off x="552450" y="5067300"/>
-            <a:ext cx="10648950" cy="990600"/>
-          </a:xfrm>
-          <a:prstGeom xmlns:a="http://schemas.openxmlformats.org/drawingml/2006/main" prst="rect">
-            <a:avLst/>
-          </a:prstGeom>
-          <a:noFill xmlns:a="http://schemas.openxmlformats.org/drawingml/2006/main"/>
-          <a:ln xmlns:a="http://schemas.openxmlformats.org/drawingml/2006/main" w="0">
-            <a:noFill/>
-            <a:prstDash val="solid"/>
-          </a:ln>
-        </p:spPr>
-        <p:txBody>
-          <a:bodyPr xmlns:a="http://schemas.openxmlformats.org/drawingml/2006/main"/>
-          <a:lstStyle xmlns:a="http://schemas.openxmlformats.org/drawingml/2006/main"/>
-          <a:p xmlns:a="http://schemas.openxmlformats.org/drawingml/2006/main">
-            <a:pPr>
-              <a:defRPr sz="1425">
-                <a:solidFill>
-                  <a:srgbClr val="102A63"/>
-                </a:solidFill>
-              </a:defRPr>
-            </a:pPr>
-            <a:r>
-              <a:rPr sz="1425">
-                <a:solidFill>
-                  <a:srgbClr val="102A63"/>
-                </a:solidFill>
-              </a:rPr>
-              <a:t>{{PROFILE_IMPLICATION}}</a:t>
+                  <a:srgbClr val="102A63"/>
+                </a:solidFill>
+              </a:rPr>
+              <a:t>{{FOCUS_1_TITLE}}</a:t>
+            </a:r>
+          </a:p>
+        </p:txBody>
+      </p:sp>
+      <p:sp>
+        <p:nvSpPr>
+          <p:cNvPr id="25" name="">
+            <a:extLst xmlns:a="http://schemas.openxmlformats.org/drawingml/2006/main">
+              <a:ext uri="{FF2B5EF4-FFF2-40B4-BE49-F238E27FC236}">
+                <a16:creationId xmlns:a16="http://schemas.microsoft.com/office/drawing/2014/main" id="{D3A3A16C-0320-4599-9D3C-020C2F0794A8}"/>
+              </a:ext>
+            </a:extLst>
+          </p:cNvPr>
+          <p:cNvSpPr>
+            <a:spLocks xmlns:a="http://schemas.openxmlformats.org/drawingml/2006/main" noGrp="1"/>
+          </p:cNvSpPr>
+          <p:nvPr/>
+        </p:nvSpPr>
+        <p:spPr>
+          <a:xfrm xmlns:a="http://schemas.openxmlformats.org/drawingml/2006/main">
+            <a:off x="781050" y="5000625"/>
+            <a:ext cx="3105150" cy="933450"/>
+          </a:xfrm>
+          <a:prstGeom xmlns:a="http://schemas.openxmlformats.org/drawingml/2006/main" prst="rect">
+            <a:avLst/>
+          </a:prstGeom>
+          <a:noFill xmlns:a="http://schemas.openxmlformats.org/drawingml/2006/main"/>
+          <a:ln xmlns:a="http://schemas.openxmlformats.org/drawingml/2006/main" w="0">
+            <a:noFill/>
+            <a:prstDash val="solid"/>
+          </a:ln>
+        </p:spPr>
+        <p:txBody>
+          <a:bodyPr xmlns:a="http://schemas.openxmlformats.org/drawingml/2006/main"/>
+          <a:lstStyle xmlns:a="http://schemas.openxmlformats.org/drawingml/2006/main"/>
+          <a:p xmlns:a="http://schemas.openxmlformats.org/drawingml/2006/main">
+            <a:pPr>
+              <a:defRPr sz="1125">
+                <a:solidFill>
+                  <a:srgbClr val="596780"/>
+                </a:solidFill>
+              </a:defRPr>
+            </a:pPr>
+            <a:r>
+              <a:rPr sz="1125">
+                <a:solidFill>
+                  <a:srgbClr val="596780"/>
+                </a:solidFill>
+              </a:rPr>
+              <a:t>{{FOCUS_1_TEXT}}</a:t>
+            </a:r>
+          </a:p>
+        </p:txBody>
+      </p:sp>
+      <p:sp>
+        <p:nvSpPr>
+          <p:cNvPr id="26" name="">
+            <a:extLst xmlns:a="http://schemas.openxmlformats.org/drawingml/2006/main">
+              <a:ext uri="{FF2B5EF4-FFF2-40B4-BE49-F238E27FC236}">
+                <a16:creationId xmlns:a16="http://schemas.microsoft.com/office/drawing/2014/main" id="{94EC682B-E118-4B92-AE6F-F75086AA96AE}"/>
+              </a:ext>
+            </a:extLst>
+          </p:cNvPr>
+          <p:cNvSpPr>
+            <a:spLocks xmlns:a="http://schemas.openxmlformats.org/drawingml/2006/main" noGrp="1"/>
+          </p:cNvSpPr>
+          <p:nvPr/>
+        </p:nvSpPr>
+        <p:spPr>
+          <a:xfrm xmlns:a="http://schemas.openxmlformats.org/drawingml/2006/main">
+            <a:off x="4191000" y="4591050"/>
+            <a:ext cx="66675" cy="1333500"/>
+          </a:xfrm>
+          <a:prstGeom xmlns:a="http://schemas.openxmlformats.org/drawingml/2006/main" prst="roundRect">
+            <a:avLst>
+              <a:gd name="adj" fmla="val 50000"/>
+            </a:avLst>
+          </a:prstGeom>
+          <a:solidFill xmlns:a="http://schemas.openxmlformats.org/drawingml/2006/main">
+            <a:srgbClr val="2048A8"/>
+          </a:solidFill>
+          <a:ln xmlns:a="http://schemas.openxmlformats.org/drawingml/2006/main" w="0">
+            <a:noFill/>
+            <a:prstDash val="solid"/>
+          </a:ln>
+        </p:spPr>
+      </p:sp>
+      <p:sp>
+        <p:nvSpPr>
+          <p:cNvPr id="27" name="">
+            <a:extLst xmlns:a="http://schemas.openxmlformats.org/drawingml/2006/main">
+              <a:ext uri="{FF2B5EF4-FFF2-40B4-BE49-F238E27FC236}">
+                <a16:creationId xmlns:a16="http://schemas.microsoft.com/office/drawing/2014/main" id="{64F1D1B9-8299-4BCD-9E7B-D81A9EE97272}"/>
+              </a:ext>
+            </a:extLst>
+          </p:cNvPr>
+          <p:cNvSpPr>
+            <a:spLocks xmlns:a="http://schemas.openxmlformats.org/drawingml/2006/main" noGrp="1"/>
+          </p:cNvSpPr>
+          <p:nvPr/>
+        </p:nvSpPr>
+        <p:spPr>
+          <a:xfrm xmlns:a="http://schemas.openxmlformats.org/drawingml/2006/main">
+            <a:off x="4419600" y="4552950"/>
+            <a:ext cx="3105150" cy="361950"/>
+          </a:xfrm>
+          <a:prstGeom xmlns:a="http://schemas.openxmlformats.org/drawingml/2006/main" prst="rect">
+            <a:avLst/>
+          </a:prstGeom>
+          <a:noFill xmlns:a="http://schemas.openxmlformats.org/drawingml/2006/main"/>
+          <a:ln xmlns:a="http://schemas.openxmlformats.org/drawingml/2006/main" w="0">
+            <a:noFill/>
+            <a:prstDash val="solid"/>
+          </a:ln>
+        </p:spPr>
+        <p:txBody>
+          <a:bodyPr xmlns:a="http://schemas.openxmlformats.org/drawingml/2006/main"/>
+          <a:lstStyle xmlns:a="http://schemas.openxmlformats.org/drawingml/2006/main"/>
+          <a:p xmlns:a="http://schemas.openxmlformats.org/drawingml/2006/main">
+            <a:pPr>
+              <a:defRPr sz="1350" b="1">
+                <a:solidFill>
+                  <a:srgbClr val="102A63"/>
+                </a:solidFill>
+              </a:defRPr>
+            </a:pPr>
+            <a:r>
+              <a:rPr sz="1350" b="1">
+                <a:solidFill>
+                  <a:srgbClr val="102A63"/>
+                </a:solidFill>
+              </a:rPr>
+              <a:t>{{FOCUS_2_TITLE}}</a:t>
+            </a:r>
+          </a:p>
+        </p:txBody>
+      </p:sp>
+      <p:sp>
+        <p:nvSpPr>
+          <p:cNvPr id="28" name="">
+            <a:extLst xmlns:a="http://schemas.openxmlformats.org/drawingml/2006/main">
+              <a:ext uri="{FF2B5EF4-FFF2-40B4-BE49-F238E27FC236}">
+                <a16:creationId xmlns:a16="http://schemas.microsoft.com/office/drawing/2014/main" id="{4FD4CEB9-553D-4462-BA73-7B11E319B003}"/>
+              </a:ext>
+            </a:extLst>
+          </p:cNvPr>
+          <p:cNvSpPr>
+            <a:spLocks xmlns:a="http://schemas.openxmlformats.org/drawingml/2006/main" noGrp="1"/>
+          </p:cNvSpPr>
+          <p:nvPr/>
+        </p:nvSpPr>
+        <p:spPr>
+          <a:xfrm xmlns:a="http://schemas.openxmlformats.org/drawingml/2006/main">
+            <a:off x="4419600" y="5000625"/>
+            <a:ext cx="3105150" cy="933450"/>
+          </a:xfrm>
+          <a:prstGeom xmlns:a="http://schemas.openxmlformats.org/drawingml/2006/main" prst="rect">
+            <a:avLst/>
+          </a:prstGeom>
+          <a:noFill xmlns:a="http://schemas.openxmlformats.org/drawingml/2006/main"/>
+          <a:ln xmlns:a="http://schemas.openxmlformats.org/drawingml/2006/main" w="0">
+            <a:noFill/>
+            <a:prstDash val="solid"/>
+          </a:ln>
+        </p:spPr>
+        <p:txBody>
+          <a:bodyPr xmlns:a="http://schemas.openxmlformats.org/drawingml/2006/main"/>
+          <a:lstStyle xmlns:a="http://schemas.openxmlformats.org/drawingml/2006/main"/>
+          <a:p xmlns:a="http://schemas.openxmlformats.org/drawingml/2006/main">
+            <a:pPr>
+              <a:defRPr sz="1125">
+                <a:solidFill>
+                  <a:srgbClr val="596780"/>
+                </a:solidFill>
+              </a:defRPr>
+            </a:pPr>
+            <a:r>
+              <a:rPr sz="1125">
+                <a:solidFill>
+                  <a:srgbClr val="596780"/>
+                </a:solidFill>
+              </a:rPr>
+              <a:t>{{FOCUS_2_TEXT}}</a:t>
+            </a:r>
+          </a:p>
+        </p:txBody>
+      </p:sp>
+      <p:sp>
+        <p:nvSpPr>
+          <p:cNvPr id="29" name="">
+            <a:extLst xmlns:a="http://schemas.openxmlformats.org/drawingml/2006/main">
+              <a:ext uri="{FF2B5EF4-FFF2-40B4-BE49-F238E27FC236}">
+                <a16:creationId xmlns:a16="http://schemas.microsoft.com/office/drawing/2014/main" id="{32C675DE-5166-4799-9421-0057E73EBEF8}"/>
+              </a:ext>
+            </a:extLst>
+          </p:cNvPr>
+          <p:cNvSpPr>
+            <a:spLocks xmlns:a="http://schemas.openxmlformats.org/drawingml/2006/main" noGrp="1"/>
+          </p:cNvSpPr>
+          <p:nvPr/>
+        </p:nvSpPr>
+        <p:spPr>
+          <a:xfrm xmlns:a="http://schemas.openxmlformats.org/drawingml/2006/main">
+            <a:off x="7829550" y="4591050"/>
+            <a:ext cx="66675" cy="1333500"/>
+          </a:xfrm>
+          <a:prstGeom xmlns:a="http://schemas.openxmlformats.org/drawingml/2006/main" prst="roundRect">
+            <a:avLst>
+              <a:gd name="adj" fmla="val 50000"/>
+            </a:avLst>
+          </a:prstGeom>
+          <a:solidFill xmlns:a="http://schemas.openxmlformats.org/drawingml/2006/main">
+            <a:srgbClr val="2048A8"/>
+          </a:solidFill>
+          <a:ln xmlns:a="http://schemas.openxmlformats.org/drawingml/2006/main" w="0">
+            <a:noFill/>
+            <a:prstDash val="solid"/>
+          </a:ln>
+        </p:spPr>
+      </p:sp>
+      <p:sp>
+        <p:nvSpPr>
+          <p:cNvPr id="30" name="">
+            <a:extLst xmlns:a="http://schemas.openxmlformats.org/drawingml/2006/main">
+              <a:ext uri="{FF2B5EF4-FFF2-40B4-BE49-F238E27FC236}">
+                <a16:creationId xmlns:a16="http://schemas.microsoft.com/office/drawing/2014/main" id="{FB67D277-7085-4828-AC73-13DC31CBDA3E}"/>
+              </a:ext>
+            </a:extLst>
+          </p:cNvPr>
+          <p:cNvSpPr>
+            <a:spLocks xmlns:a="http://schemas.openxmlformats.org/drawingml/2006/main" noGrp="1"/>
+          </p:cNvSpPr>
+          <p:nvPr/>
+        </p:nvSpPr>
+        <p:spPr>
+          <a:xfrm xmlns:a="http://schemas.openxmlformats.org/drawingml/2006/main">
+            <a:off x="8058150" y="4552950"/>
+            <a:ext cx="3105150" cy="361950"/>
+          </a:xfrm>
+          <a:prstGeom xmlns:a="http://schemas.openxmlformats.org/drawingml/2006/main" prst="rect">
+            <a:avLst/>
+          </a:prstGeom>
+          <a:noFill xmlns:a="http://schemas.openxmlformats.org/drawingml/2006/main"/>
+          <a:ln xmlns:a="http://schemas.openxmlformats.org/drawingml/2006/main" w="0">
+            <a:noFill/>
+            <a:prstDash val="solid"/>
+          </a:ln>
+        </p:spPr>
+        <p:txBody>
+          <a:bodyPr xmlns:a="http://schemas.openxmlformats.org/drawingml/2006/main"/>
+          <a:lstStyle xmlns:a="http://schemas.openxmlformats.org/drawingml/2006/main"/>
+          <a:p xmlns:a="http://schemas.openxmlformats.org/drawingml/2006/main">
+            <a:pPr>
+              <a:defRPr sz="1350" b="1">
+                <a:solidFill>
+                  <a:srgbClr val="102A63"/>
+                </a:solidFill>
+              </a:defRPr>
+            </a:pPr>
+            <a:r>
+              <a:rPr sz="1350" b="1">
+                <a:solidFill>
+                  <a:srgbClr val="102A63"/>
+                </a:solidFill>
+              </a:rPr>
+              <a:t>{{FOCUS_3_TITLE}}</a:t>
+            </a:r>
+          </a:p>
+        </p:txBody>
+      </p:sp>
+      <p:sp>
+        <p:nvSpPr>
+          <p:cNvPr id="31" name="">
+            <a:extLst xmlns:a="http://schemas.openxmlformats.org/drawingml/2006/main">
+              <a:ext uri="{FF2B5EF4-FFF2-40B4-BE49-F238E27FC236}">
+                <a16:creationId xmlns:a16="http://schemas.microsoft.com/office/drawing/2014/main" id="{4BAB5495-042E-4500-B25A-67F2D1DA35FA}"/>
+              </a:ext>
+            </a:extLst>
+          </p:cNvPr>
+          <p:cNvSpPr>
+            <a:spLocks xmlns:a="http://schemas.openxmlformats.org/drawingml/2006/main" noGrp="1"/>
+          </p:cNvSpPr>
+          <p:nvPr/>
+        </p:nvSpPr>
+        <p:spPr>
+          <a:xfrm xmlns:a="http://schemas.openxmlformats.org/drawingml/2006/main">
+            <a:off x="8058150" y="5000625"/>
+            <a:ext cx="3105150" cy="933450"/>
+          </a:xfrm>
+          <a:prstGeom xmlns:a="http://schemas.openxmlformats.org/drawingml/2006/main" prst="rect">
+            <a:avLst/>
+          </a:prstGeom>
+          <a:noFill xmlns:a="http://schemas.openxmlformats.org/drawingml/2006/main"/>
+          <a:ln xmlns:a="http://schemas.openxmlformats.org/drawingml/2006/main" w="0">
+            <a:noFill/>
+            <a:prstDash val="solid"/>
+          </a:ln>
+        </p:spPr>
+        <p:txBody>
+          <a:bodyPr xmlns:a="http://schemas.openxmlformats.org/drawingml/2006/main"/>
+          <a:lstStyle xmlns:a="http://schemas.openxmlformats.org/drawingml/2006/main"/>
+          <a:p xmlns:a="http://schemas.openxmlformats.org/drawingml/2006/main">
+            <a:pPr>
+              <a:defRPr sz="1125">
+                <a:solidFill>
+                  <a:srgbClr val="596780"/>
+                </a:solidFill>
+              </a:defRPr>
+            </a:pPr>
+            <a:r>
+              <a:rPr sz="1125">
+                <a:solidFill>
+                  <a:srgbClr val="596780"/>
+                </a:solidFill>
+              </a:rPr>
+              <a:t>{{FOCUS_3_TEXT}}</a:t>
             </a:r>
           </a:p>
         </p:txBody>
@@ -4150,7 +4499,7 @@
     </p:spTree>
     <p:extLst>
       <p:ext uri="{BB962C8B-B14F-4D97-AF65-F5344CB8AC3E}">
-        <p14:creationId xmlns:p14="http://schemas.microsoft.com/office/powerpoint/2010/main" val="1897248929"/>
+        <p14:creationId xmlns:p14="http://schemas.microsoft.com/office/powerpoint/2010/main" val="1488137330"/>
       </p:ext>
     </p:extLst>
   </p:cSld>
@@ -4181,7 +4530,7 @@
           <p:cNvPr id="1" name="">
             <a:extLst xmlns:a="http://schemas.openxmlformats.org/drawingml/2006/main">
               <a:ext uri="{FF2B5EF4-FFF2-40B4-BE49-F238E27FC236}">
-                <a16:creationId xmlns:a16="http://schemas.microsoft.com/office/drawing/2014/main" id="{96277B7B-8AA1-4934-99EF-9B23B9B64478}"/>
+                <a16:creationId xmlns:a16="http://schemas.microsoft.com/office/drawing/2014/main" id="{CCF4669F-5E78-499A-A61B-1D01C8396892}"/>
               </a:ext>
             </a:extLst>
           </p:cNvPr>
@@ -4209,14 +4558,14 @@
       </p:sp>
       <p:pic>
         <p:nvPicPr>
-          <p:cNvPr id="28" name=""/>
+          <p:cNvPr id="36" name=""/>
           <p:cNvPicPr>
             <a:picLocks xmlns:a="http://schemas.openxmlformats.org/drawingml/2006/main" noChangeAspect="1"/>
           </p:cNvPicPr>
           <p:nvPr/>
         </p:nvPicPr>
         <p:blipFill>
-          <a:blip xmlns:r="http://schemas.openxmlformats.org/officeDocument/2006/relationships" xmlns:a="http://schemas.openxmlformats.org/drawingml/2006/main" r:embed="Re8b940f96f7e4d6e"/>
+          <a:blip xmlns:r="http://schemas.openxmlformats.org/officeDocument/2006/relationships" xmlns:a="http://schemas.openxmlformats.org/drawingml/2006/main" r:embed="R59144fc7510c47f1"/>
           <a:stretch xmlns:a="http://schemas.openxmlformats.org/drawingml/2006/main"/>
         </p:blipFill>
         <p:spPr>
@@ -4234,7 +4583,7 @@
           <p:cNvPr id="3" name="">
             <a:extLst xmlns:a="http://schemas.openxmlformats.org/drawingml/2006/main">
               <a:ext uri="{FF2B5EF4-FFF2-40B4-BE49-F238E27FC236}">
-                <a16:creationId xmlns:a16="http://schemas.microsoft.com/office/drawing/2014/main" id="{1B250F2A-D978-4ACB-B6C4-6BC2C79FFFDE}"/>
+                <a16:creationId xmlns:a16="http://schemas.microsoft.com/office/drawing/2014/main" id="{4EB9BA62-BC88-4A63-ADD9-5D02A1433FAA}"/>
               </a:ext>
             </a:extLst>
           </p:cNvPr>
@@ -4284,7 +4633,7 @@
           <p:cNvPr id="4" name="">
             <a:extLst xmlns:a="http://schemas.openxmlformats.org/drawingml/2006/main">
               <a:ext uri="{FF2B5EF4-FFF2-40B4-BE49-F238E27FC236}">
-                <a16:creationId xmlns:a16="http://schemas.microsoft.com/office/drawing/2014/main" id="{7B614BA7-C553-4F56-B335-C0E488E9D897}"/>
+                <a16:creationId xmlns:a16="http://schemas.microsoft.com/office/drawing/2014/main" id="{0AD146DF-E714-4E99-A135-AA6B712B18CD}"/>
               </a:ext>
             </a:extLst>
           </p:cNvPr>
@@ -4317,7 +4666,7 @@
           <p:cNvPr id="5" name="">
             <a:extLst xmlns:a="http://schemas.openxmlformats.org/drawingml/2006/main">
               <a:ext uri="{FF2B5EF4-FFF2-40B4-BE49-F238E27FC236}">
-                <a16:creationId xmlns:a16="http://schemas.microsoft.com/office/drawing/2014/main" id="{4ABD742A-ED69-48DF-87C6-634CBC3D7085}"/>
+                <a16:creationId xmlns:a16="http://schemas.microsoft.com/office/drawing/2014/main" id="{DF2824FB-8C8D-45B7-8A03-915C1AC84C5D}"/>
               </a:ext>
             </a:extLst>
           </p:cNvPr>
@@ -4348,7 +4697,7 @@
           <p:cNvPr id="6" name="">
             <a:extLst xmlns:a="http://schemas.openxmlformats.org/drawingml/2006/main">
               <a:ext uri="{FF2B5EF4-FFF2-40B4-BE49-F238E27FC236}">
-                <a16:creationId xmlns:a16="http://schemas.microsoft.com/office/drawing/2014/main" id="{A0FF6EF0-FBF4-4FEE-948A-FA54B4E1A1DB}"/>
+                <a16:creationId xmlns:a16="http://schemas.microsoft.com/office/drawing/2014/main" id="{A572E13F-2713-4488-A79C-356148D9FCE5}"/>
               </a:ext>
             </a:extLst>
           </p:cNvPr>
@@ -4398,7 +4747,7 @@
           <p:cNvPr id="7" name="">
             <a:extLst xmlns:a="http://schemas.openxmlformats.org/drawingml/2006/main">
               <a:ext uri="{FF2B5EF4-FFF2-40B4-BE49-F238E27FC236}">
-                <a16:creationId xmlns:a16="http://schemas.microsoft.com/office/drawing/2014/main" id="{64443FC9-6AF5-462A-8120-F6586471FF55}"/>
+                <a16:creationId xmlns:a16="http://schemas.microsoft.com/office/drawing/2014/main" id="{99E7CD97-CE9F-438F-919C-FC0FA7C4C0F7}"/>
               </a:ext>
             </a:extLst>
           </p:cNvPr>
@@ -4448,23 +4797,23 @@
           <p:cNvPr id="8" name="">
             <a:extLst xmlns:a="http://schemas.openxmlformats.org/drawingml/2006/main">
               <a:ext uri="{FF2B5EF4-FFF2-40B4-BE49-F238E27FC236}">
-                <a16:creationId xmlns:a16="http://schemas.microsoft.com/office/drawing/2014/main" id="{770D5FD0-7B7D-43E1-A879-678EE3F3A5DF}"/>
-              </a:ext>
-            </a:extLst>
-          </p:cNvPr>
-          <p:cNvSpPr>
-            <a:spLocks xmlns:a="http://schemas.openxmlformats.org/drawingml/2006/main" noGrp="1"/>
-          </p:cNvSpPr>
-          <p:nvPr/>
-        </p:nvSpPr>
-        <p:spPr>
-          <a:xfrm xmlns:a="http://schemas.openxmlformats.org/drawingml/2006/main">
-            <a:off x="552450" y="1409700"/>
-            <a:ext cx="1047750" cy="895350"/>
+                <a16:creationId xmlns:a16="http://schemas.microsoft.com/office/drawing/2014/main" id="{001296BC-506B-403F-99F6-6BE52CB1DB39}"/>
+              </a:ext>
+            </a:extLst>
+          </p:cNvPr>
+          <p:cNvSpPr>
+            <a:spLocks xmlns:a="http://schemas.openxmlformats.org/drawingml/2006/main" noGrp="1"/>
+          </p:cNvSpPr>
+          <p:nvPr/>
+        </p:nvSpPr>
+        <p:spPr>
+          <a:xfrm xmlns:a="http://schemas.openxmlformats.org/drawingml/2006/main">
+            <a:off x="552450" y="1390650"/>
+            <a:ext cx="1047750" cy="1009650"/>
           </a:xfrm>
           <a:prstGeom xmlns:a="http://schemas.openxmlformats.org/drawingml/2006/main" prst="roundRect">
             <a:avLst>
-              <a:gd name="adj" fmla="val 8511"/>
+              <a:gd name="adj" fmla="val 7547"/>
             </a:avLst>
           </a:prstGeom>
           <a:solidFill xmlns:a="http://schemas.openxmlformats.org/drawingml/2006/main">
@@ -4481,18 +4830,18 @@
           <p:cNvPr id="9" name="">
             <a:extLst xmlns:a="http://schemas.openxmlformats.org/drawingml/2006/main">
               <a:ext uri="{FF2B5EF4-FFF2-40B4-BE49-F238E27FC236}">
-                <a16:creationId xmlns:a16="http://schemas.microsoft.com/office/drawing/2014/main" id="{8F74D888-2CD4-48DD-8826-A842BB1A7A32}"/>
-              </a:ext>
-            </a:extLst>
-          </p:cNvPr>
-          <p:cNvSpPr>
-            <a:spLocks xmlns:a="http://schemas.openxmlformats.org/drawingml/2006/main" noGrp="1"/>
-          </p:cNvSpPr>
-          <p:nvPr/>
-        </p:nvSpPr>
-        <p:spPr>
-          <a:xfrm xmlns:a="http://schemas.openxmlformats.org/drawingml/2006/main">
-            <a:off x="647700" y="1704975"/>
+                <a16:creationId xmlns:a16="http://schemas.microsoft.com/office/drawing/2014/main" id="{D7BC1CA2-AB60-4929-B0F1-F46C17A8DA1B}"/>
+              </a:ext>
+            </a:extLst>
+          </p:cNvPr>
+          <p:cNvSpPr>
+            <a:spLocks xmlns:a="http://schemas.openxmlformats.org/drawingml/2006/main" noGrp="1"/>
+          </p:cNvSpPr>
+          <p:nvPr/>
+        </p:nvSpPr>
+        <p:spPr>
+          <a:xfrm xmlns:a="http://schemas.openxmlformats.org/drawingml/2006/main">
+            <a:off x="647700" y="1743075"/>
             <a:ext cx="857250" cy="266700"/>
           </a:xfrm>
           <a:prstGeom xmlns:a="http://schemas.openxmlformats.org/drawingml/2006/main" prst="rect">
@@ -4531,42 +4880,42 @@
           <p:cNvPr id="10" name="">
             <a:extLst xmlns:a="http://schemas.openxmlformats.org/drawingml/2006/main">
               <a:ext uri="{FF2B5EF4-FFF2-40B4-BE49-F238E27FC236}">
-                <a16:creationId xmlns:a16="http://schemas.microsoft.com/office/drawing/2014/main" id="{313C807F-F2D9-409C-B0AC-0DF3C4C125DF}"/>
-              </a:ext>
-            </a:extLst>
-          </p:cNvPr>
-          <p:cNvSpPr>
-            <a:spLocks xmlns:a="http://schemas.openxmlformats.org/drawingml/2006/main" noGrp="1"/>
-          </p:cNvSpPr>
-          <p:nvPr/>
-        </p:nvSpPr>
-        <p:spPr>
-          <a:xfrm xmlns:a="http://schemas.openxmlformats.org/drawingml/2006/main">
-            <a:off x="1866900" y="1409700"/>
-            <a:ext cx="3905250" cy="381000"/>
-          </a:xfrm>
-          <a:prstGeom xmlns:a="http://schemas.openxmlformats.org/drawingml/2006/main" prst="rect">
-            <a:avLst/>
-          </a:prstGeom>
-          <a:noFill xmlns:a="http://schemas.openxmlformats.org/drawingml/2006/main"/>
-          <a:ln xmlns:a="http://schemas.openxmlformats.org/drawingml/2006/main" w="0">
-            <a:noFill/>
-            <a:prstDash val="solid"/>
-          </a:ln>
-        </p:spPr>
-        <p:txBody>
-          <a:bodyPr xmlns:a="http://schemas.openxmlformats.org/drawingml/2006/main"/>
-          <a:lstStyle xmlns:a="http://schemas.openxmlformats.org/drawingml/2006/main"/>
-          <a:p xmlns:a="http://schemas.openxmlformats.org/drawingml/2006/main">
-            <a:pPr>
-              <a:defRPr sz="1500" b="1">
-                <a:solidFill>
-                  <a:srgbClr val="102A63"/>
-                </a:solidFill>
-              </a:defRPr>
-            </a:pPr>
-            <a:r>
-              <a:rPr sz="1500" b="1">
+                <a16:creationId xmlns:a16="http://schemas.microsoft.com/office/drawing/2014/main" id="{9F8FDD90-FC3C-4D26-93EE-D49775002148}"/>
+              </a:ext>
+            </a:extLst>
+          </p:cNvPr>
+          <p:cNvSpPr>
+            <a:spLocks xmlns:a="http://schemas.openxmlformats.org/drawingml/2006/main" noGrp="1"/>
+          </p:cNvSpPr>
+          <p:nvPr/>
+        </p:nvSpPr>
+        <p:spPr>
+          <a:xfrm xmlns:a="http://schemas.openxmlformats.org/drawingml/2006/main">
+            <a:off x="1866900" y="1390650"/>
+            <a:ext cx="9334500" cy="295275"/>
+          </a:xfrm>
+          <a:prstGeom xmlns:a="http://schemas.openxmlformats.org/drawingml/2006/main" prst="rect">
+            <a:avLst/>
+          </a:prstGeom>
+          <a:noFill xmlns:a="http://schemas.openxmlformats.org/drawingml/2006/main"/>
+          <a:ln xmlns:a="http://schemas.openxmlformats.org/drawingml/2006/main" w="0">
+            <a:noFill/>
+            <a:prstDash val="solid"/>
+          </a:ln>
+        </p:spPr>
+        <p:txBody>
+          <a:bodyPr xmlns:a="http://schemas.openxmlformats.org/drawingml/2006/main"/>
+          <a:lstStyle xmlns:a="http://schemas.openxmlformats.org/drawingml/2006/main"/>
+          <a:p xmlns:a="http://schemas.openxmlformats.org/drawingml/2006/main">
+            <a:pPr>
+              <a:defRPr sz="1350" b="1">
+                <a:solidFill>
+                  <a:srgbClr val="102A63"/>
+                </a:solidFill>
+              </a:defRPr>
+            </a:pPr>
+            <a:r>
+              <a:rPr sz="1350" b="1">
                 <a:solidFill>
                   <a:srgbClr val="102A63"/>
                 </a:solidFill>
@@ -4581,42 +4930,42 @@
           <p:cNvPr id="11" name="">
             <a:extLst xmlns:a="http://schemas.openxmlformats.org/drawingml/2006/main">
               <a:ext uri="{FF2B5EF4-FFF2-40B4-BE49-F238E27FC236}">
-                <a16:creationId xmlns:a16="http://schemas.microsoft.com/office/drawing/2014/main" id="{9DD27C29-82DB-4529-B434-65360AFFCBF7}"/>
-              </a:ext>
-            </a:extLst>
-          </p:cNvPr>
-          <p:cNvSpPr>
-            <a:spLocks xmlns:a="http://schemas.openxmlformats.org/drawingml/2006/main" noGrp="1"/>
-          </p:cNvSpPr>
-          <p:nvPr/>
-        </p:nvSpPr>
-        <p:spPr>
-          <a:xfrm xmlns:a="http://schemas.openxmlformats.org/drawingml/2006/main">
-            <a:off x="1866900" y="1809750"/>
-            <a:ext cx="9334500" cy="552450"/>
-          </a:xfrm>
-          <a:prstGeom xmlns:a="http://schemas.openxmlformats.org/drawingml/2006/main" prst="rect">
-            <a:avLst/>
-          </a:prstGeom>
-          <a:noFill xmlns:a="http://schemas.openxmlformats.org/drawingml/2006/main"/>
-          <a:ln xmlns:a="http://schemas.openxmlformats.org/drawingml/2006/main" w="0">
-            <a:noFill/>
-            <a:prstDash val="solid"/>
-          </a:ln>
-        </p:spPr>
-        <p:txBody>
-          <a:bodyPr xmlns:a="http://schemas.openxmlformats.org/drawingml/2006/main"/>
-          <a:lstStyle xmlns:a="http://schemas.openxmlformats.org/drawingml/2006/main"/>
-          <a:p xmlns:a="http://schemas.openxmlformats.org/drawingml/2006/main">
-            <a:pPr>
-              <a:defRPr sz="1200">
+                <a16:creationId xmlns:a16="http://schemas.microsoft.com/office/drawing/2014/main" id="{03D69351-C633-49DB-A383-4FEA67D11AD2}"/>
+              </a:ext>
+            </a:extLst>
+          </p:cNvPr>
+          <p:cNvSpPr>
+            <a:spLocks xmlns:a="http://schemas.openxmlformats.org/drawingml/2006/main" noGrp="1"/>
+          </p:cNvSpPr>
+          <p:nvPr/>
+        </p:nvSpPr>
+        <p:spPr>
+          <a:xfrm xmlns:a="http://schemas.openxmlformats.org/drawingml/2006/main">
+            <a:off x="1866900" y="1695450"/>
+            <a:ext cx="9334500" cy="333375"/>
+          </a:xfrm>
+          <a:prstGeom xmlns:a="http://schemas.openxmlformats.org/drawingml/2006/main" prst="rect">
+            <a:avLst/>
+          </a:prstGeom>
+          <a:noFill xmlns:a="http://schemas.openxmlformats.org/drawingml/2006/main"/>
+          <a:ln xmlns:a="http://schemas.openxmlformats.org/drawingml/2006/main" w="0">
+            <a:noFill/>
+            <a:prstDash val="solid"/>
+          </a:ln>
+        </p:spPr>
+        <p:txBody>
+          <a:bodyPr xmlns:a="http://schemas.openxmlformats.org/drawingml/2006/main"/>
+          <a:lstStyle xmlns:a="http://schemas.openxmlformats.org/drawingml/2006/main"/>
+          <a:p xmlns:a="http://schemas.openxmlformats.org/drawingml/2006/main">
+            <a:pPr>
+              <a:defRPr sz="1050">
                 <a:solidFill>
                   <a:srgbClr val="596780"/>
                 </a:solidFill>
               </a:defRPr>
             </a:pPr>
             <a:r>
-              <a:rPr sz="1200">
+              <a:rPr sz="1050">
                 <a:solidFill>
                   <a:srgbClr val="596780"/>
                 </a:solidFill>
@@ -4631,18 +4980,118 @@
           <p:cNvPr id="12" name="">
             <a:extLst xmlns:a="http://schemas.openxmlformats.org/drawingml/2006/main">
               <a:ext uri="{FF2B5EF4-FFF2-40B4-BE49-F238E27FC236}">
-                <a16:creationId xmlns:a16="http://schemas.microsoft.com/office/drawing/2014/main" id="{BF569D34-6566-4A6A-B676-45D14F7380B1}"/>
-              </a:ext>
-            </a:extLst>
-          </p:cNvPr>
-          <p:cNvSpPr>
-            <a:spLocks xmlns:a="http://schemas.openxmlformats.org/drawingml/2006/main" noGrp="1"/>
-          </p:cNvSpPr>
-          <p:nvPr/>
-        </p:nvSpPr>
-        <p:spPr>
-          <a:xfrm xmlns:a="http://schemas.openxmlformats.org/drawingml/2006/main">
-            <a:off x="1866900" y="2476500"/>
+                <a16:creationId xmlns:a16="http://schemas.microsoft.com/office/drawing/2014/main" id="{E95CFC5B-4DE4-4B91-9158-9131B596F34B}"/>
+              </a:ext>
+            </a:extLst>
+          </p:cNvPr>
+          <p:cNvSpPr>
+            <a:spLocks xmlns:a="http://schemas.openxmlformats.org/drawingml/2006/main" noGrp="1"/>
+          </p:cNvSpPr>
+          <p:nvPr/>
+        </p:nvSpPr>
+        <p:spPr>
+          <a:xfrm xmlns:a="http://schemas.openxmlformats.org/drawingml/2006/main">
+            <a:off x="1866900" y="2114550"/>
+            <a:ext cx="990600" cy="190500"/>
+          </a:xfrm>
+          <a:prstGeom xmlns:a="http://schemas.openxmlformats.org/drawingml/2006/main" prst="rect">
+            <a:avLst/>
+          </a:prstGeom>
+          <a:noFill xmlns:a="http://schemas.openxmlformats.org/drawingml/2006/main"/>
+          <a:ln xmlns:a="http://schemas.openxmlformats.org/drawingml/2006/main" w="0">
+            <a:noFill/>
+            <a:prstDash val="solid"/>
+          </a:ln>
+        </p:spPr>
+        <p:txBody>
+          <a:bodyPr xmlns:a="http://schemas.openxmlformats.org/drawingml/2006/main"/>
+          <a:lstStyle xmlns:a="http://schemas.openxmlformats.org/drawingml/2006/main"/>
+          <a:p xmlns:a="http://schemas.openxmlformats.org/drawingml/2006/main">
+            <a:pPr>
+              <a:defRPr sz="975" b="1">
+                <a:solidFill>
+                  <a:srgbClr val="2048A8"/>
+                </a:solidFill>
+              </a:defRPr>
+            </a:pPr>
+            <a:r>
+              <a:rPr sz="975" b="1">
+                <a:solidFill>
+                  <a:srgbClr val="2048A8"/>
+                </a:solidFill>
+              </a:rPr>
+              <a:t>Рекомендуем</a:t>
+            </a:r>
+          </a:p>
+        </p:txBody>
+      </p:sp>
+      <p:sp>
+        <p:nvSpPr>
+          <p:cNvPr id="13" name="">
+            <a:extLst xmlns:a="http://schemas.openxmlformats.org/drawingml/2006/main">
+              <a:ext uri="{FF2B5EF4-FFF2-40B4-BE49-F238E27FC236}">
+                <a16:creationId xmlns:a16="http://schemas.microsoft.com/office/drawing/2014/main" id="{82D7CBB7-9F1E-490E-99E0-AF4DD1ECAB03}"/>
+              </a:ext>
+            </a:extLst>
+          </p:cNvPr>
+          <p:cNvSpPr>
+            <a:spLocks xmlns:a="http://schemas.openxmlformats.org/drawingml/2006/main" noGrp="1"/>
+          </p:cNvSpPr>
+          <p:nvPr/>
+        </p:nvSpPr>
+        <p:spPr>
+          <a:xfrm xmlns:a="http://schemas.openxmlformats.org/drawingml/2006/main">
+            <a:off x="2895600" y="2076450"/>
+            <a:ext cx="8305800" cy="323850"/>
+          </a:xfrm>
+          <a:prstGeom xmlns:a="http://schemas.openxmlformats.org/drawingml/2006/main" prst="rect">
+            <a:avLst/>
+          </a:prstGeom>
+          <a:noFill xmlns:a="http://schemas.openxmlformats.org/drawingml/2006/main"/>
+          <a:ln xmlns:a="http://schemas.openxmlformats.org/drawingml/2006/main" w="0">
+            <a:noFill/>
+            <a:prstDash val="solid"/>
+          </a:ln>
+        </p:spPr>
+        <p:txBody>
+          <a:bodyPr xmlns:a="http://schemas.openxmlformats.org/drawingml/2006/main"/>
+          <a:lstStyle xmlns:a="http://schemas.openxmlformats.org/drawingml/2006/main"/>
+          <a:p xmlns:a="http://schemas.openxmlformats.org/drawingml/2006/main">
+            <a:pPr>
+              <a:defRPr sz="1050" b="1">
+                <a:solidFill>
+                  <a:srgbClr val="102A63"/>
+                </a:solidFill>
+              </a:defRPr>
+            </a:pPr>
+            <a:r>
+              <a:rPr sz="1050" b="1">
+                <a:solidFill>
+                  <a:srgbClr val="102A63"/>
+                </a:solidFill>
+              </a:rPr>
+              <a:t>{{RISK_1_RECOMMENDATION}}</a:t>
+            </a:r>
+          </a:p>
+        </p:txBody>
+      </p:sp>
+      <p:sp>
+        <p:nvSpPr>
+          <p:cNvPr id="14" name="">
+            <a:extLst xmlns:a="http://schemas.openxmlformats.org/drawingml/2006/main">
+              <a:ext uri="{FF2B5EF4-FFF2-40B4-BE49-F238E27FC236}">
+                <a16:creationId xmlns:a16="http://schemas.microsoft.com/office/drawing/2014/main" id="{20A14862-8300-468A-9F8A-1472FB0A1EF7}"/>
+              </a:ext>
+            </a:extLst>
+          </p:cNvPr>
+          <p:cNvSpPr>
+            <a:spLocks xmlns:a="http://schemas.openxmlformats.org/drawingml/2006/main" noGrp="1"/>
+          </p:cNvSpPr>
+          <p:nvPr/>
+        </p:nvSpPr>
+        <p:spPr>
+          <a:xfrm xmlns:a="http://schemas.openxmlformats.org/drawingml/2006/main">
+            <a:off x="1866900" y="2495550"/>
             <a:ext cx="9334500" cy="9525"/>
           </a:xfrm>
           <a:prstGeom xmlns:a="http://schemas.openxmlformats.org/drawingml/2006/main" prst="rect">
@@ -4659,10 +5108,10 @@
       </p:sp>
       <p:sp>
         <p:nvSpPr>
-          <p:cNvPr id="13" name="">
-            <a:extLst xmlns:a="http://schemas.openxmlformats.org/drawingml/2006/main">
-              <a:ext uri="{FF2B5EF4-FFF2-40B4-BE49-F238E27FC236}">
-                <a16:creationId xmlns:a16="http://schemas.microsoft.com/office/drawing/2014/main" id="{B2BDFC0D-9C85-47D5-9853-CD99236DABFA}"/>
+          <p:cNvPr id="15" name="">
+            <a:extLst xmlns:a="http://schemas.openxmlformats.org/drawingml/2006/main">
+              <a:ext uri="{FF2B5EF4-FFF2-40B4-BE49-F238E27FC236}">
+                <a16:creationId xmlns:a16="http://schemas.microsoft.com/office/drawing/2014/main" id="{0B4E6F1E-0948-4821-8416-7FD332D4151F}"/>
               </a:ext>
             </a:extLst>
           </p:cNvPr>
@@ -4674,11 +5123,11 @@
         <p:spPr>
           <a:xfrm xmlns:a="http://schemas.openxmlformats.org/drawingml/2006/main">
             <a:off x="552450" y="2609850"/>
-            <a:ext cx="1047750" cy="895350"/>
+            <a:ext cx="1047750" cy="1009650"/>
           </a:xfrm>
           <a:prstGeom xmlns:a="http://schemas.openxmlformats.org/drawingml/2006/main" prst="roundRect">
             <a:avLst>
-              <a:gd name="adj" fmla="val 8511"/>
+              <a:gd name="adj" fmla="val 7547"/>
             </a:avLst>
           </a:prstGeom>
           <a:solidFill xmlns:a="http://schemas.openxmlformats.org/drawingml/2006/main">
@@ -4692,21 +5141,21 @@
       </p:sp>
       <p:sp>
         <p:nvSpPr>
-          <p:cNvPr id="14" name="">
-            <a:extLst xmlns:a="http://schemas.openxmlformats.org/drawingml/2006/main">
-              <a:ext uri="{FF2B5EF4-FFF2-40B4-BE49-F238E27FC236}">
-                <a16:creationId xmlns:a16="http://schemas.microsoft.com/office/drawing/2014/main" id="{26C74461-CCEB-4A9E-8336-A70703D1FD79}"/>
-              </a:ext>
-            </a:extLst>
-          </p:cNvPr>
-          <p:cNvSpPr>
-            <a:spLocks xmlns:a="http://schemas.openxmlformats.org/drawingml/2006/main" noGrp="1"/>
-          </p:cNvSpPr>
-          <p:nvPr/>
-        </p:nvSpPr>
-        <p:spPr>
-          <a:xfrm xmlns:a="http://schemas.openxmlformats.org/drawingml/2006/main">
-            <a:off x="647700" y="2905125"/>
+          <p:cNvPr id="16" name="">
+            <a:extLst xmlns:a="http://schemas.openxmlformats.org/drawingml/2006/main">
+              <a:ext uri="{FF2B5EF4-FFF2-40B4-BE49-F238E27FC236}">
+                <a16:creationId xmlns:a16="http://schemas.microsoft.com/office/drawing/2014/main" id="{F40F2543-BC04-41DE-B9DE-A33049E448FE}"/>
+              </a:ext>
+            </a:extLst>
+          </p:cNvPr>
+          <p:cNvSpPr>
+            <a:spLocks xmlns:a="http://schemas.openxmlformats.org/drawingml/2006/main" noGrp="1"/>
+          </p:cNvSpPr>
+          <p:nvPr/>
+        </p:nvSpPr>
+        <p:spPr>
+          <a:xfrm xmlns:a="http://schemas.openxmlformats.org/drawingml/2006/main">
+            <a:off x="647700" y="2962275"/>
             <a:ext cx="857250" cy="266700"/>
           </a:xfrm>
           <a:prstGeom xmlns:a="http://schemas.openxmlformats.org/drawingml/2006/main" prst="rect">
@@ -4742,10 +5191,10 @@
       </p:sp>
       <p:sp>
         <p:nvSpPr>
-          <p:cNvPr id="15" name="">
-            <a:extLst xmlns:a="http://schemas.openxmlformats.org/drawingml/2006/main">
-              <a:ext uri="{FF2B5EF4-FFF2-40B4-BE49-F238E27FC236}">
-                <a16:creationId xmlns:a16="http://schemas.microsoft.com/office/drawing/2014/main" id="{B8A1A0F7-A107-4F73-91DF-D0E5B5B57595}"/>
+          <p:cNvPr id="17" name="">
+            <a:extLst xmlns:a="http://schemas.openxmlformats.org/drawingml/2006/main">
+              <a:ext uri="{FF2B5EF4-FFF2-40B4-BE49-F238E27FC236}">
+                <a16:creationId xmlns:a16="http://schemas.microsoft.com/office/drawing/2014/main" id="{6FB02096-D704-4B5F-9587-69F7BDE8CA86}"/>
               </a:ext>
             </a:extLst>
           </p:cNvPr>
@@ -4757,30 +5206,30 @@
         <p:spPr>
           <a:xfrm xmlns:a="http://schemas.openxmlformats.org/drawingml/2006/main">
             <a:off x="1866900" y="2609850"/>
-            <a:ext cx="3905250" cy="381000"/>
-          </a:xfrm>
-          <a:prstGeom xmlns:a="http://schemas.openxmlformats.org/drawingml/2006/main" prst="rect">
-            <a:avLst/>
-          </a:prstGeom>
-          <a:noFill xmlns:a="http://schemas.openxmlformats.org/drawingml/2006/main"/>
-          <a:ln xmlns:a="http://schemas.openxmlformats.org/drawingml/2006/main" w="0">
-            <a:noFill/>
-            <a:prstDash val="solid"/>
-          </a:ln>
-        </p:spPr>
-        <p:txBody>
-          <a:bodyPr xmlns:a="http://schemas.openxmlformats.org/drawingml/2006/main"/>
-          <a:lstStyle xmlns:a="http://schemas.openxmlformats.org/drawingml/2006/main"/>
-          <a:p xmlns:a="http://schemas.openxmlformats.org/drawingml/2006/main">
-            <a:pPr>
-              <a:defRPr sz="1500" b="1">
-                <a:solidFill>
-                  <a:srgbClr val="102A63"/>
-                </a:solidFill>
-              </a:defRPr>
-            </a:pPr>
-            <a:r>
-              <a:rPr sz="1500" b="1">
+            <a:ext cx="9334500" cy="295275"/>
+          </a:xfrm>
+          <a:prstGeom xmlns:a="http://schemas.openxmlformats.org/drawingml/2006/main" prst="rect">
+            <a:avLst/>
+          </a:prstGeom>
+          <a:noFill xmlns:a="http://schemas.openxmlformats.org/drawingml/2006/main"/>
+          <a:ln xmlns:a="http://schemas.openxmlformats.org/drawingml/2006/main" w="0">
+            <a:noFill/>
+            <a:prstDash val="solid"/>
+          </a:ln>
+        </p:spPr>
+        <p:txBody>
+          <a:bodyPr xmlns:a="http://schemas.openxmlformats.org/drawingml/2006/main"/>
+          <a:lstStyle xmlns:a="http://schemas.openxmlformats.org/drawingml/2006/main"/>
+          <a:p xmlns:a="http://schemas.openxmlformats.org/drawingml/2006/main">
+            <a:pPr>
+              <a:defRPr sz="1350" b="1">
+                <a:solidFill>
+                  <a:srgbClr val="102A63"/>
+                </a:solidFill>
+              </a:defRPr>
+            </a:pPr>
+            <a:r>
+              <a:rPr sz="1350" b="1">
                 <a:solidFill>
                   <a:srgbClr val="102A63"/>
                 </a:solidFill>
@@ -4792,45 +5241,45 @@
       </p:sp>
       <p:sp>
         <p:nvSpPr>
-          <p:cNvPr id="16" name="">
-            <a:extLst xmlns:a="http://schemas.openxmlformats.org/drawingml/2006/main">
-              <a:ext uri="{FF2B5EF4-FFF2-40B4-BE49-F238E27FC236}">
-                <a16:creationId xmlns:a16="http://schemas.microsoft.com/office/drawing/2014/main" id="{1B0A375E-0F5B-4F9F-AA8B-A8ACFFEAFA6F}"/>
-              </a:ext>
-            </a:extLst>
-          </p:cNvPr>
-          <p:cNvSpPr>
-            <a:spLocks xmlns:a="http://schemas.openxmlformats.org/drawingml/2006/main" noGrp="1"/>
-          </p:cNvSpPr>
-          <p:nvPr/>
-        </p:nvSpPr>
-        <p:spPr>
-          <a:xfrm xmlns:a="http://schemas.openxmlformats.org/drawingml/2006/main">
-            <a:off x="1866900" y="3009900"/>
-            <a:ext cx="9334500" cy="552450"/>
-          </a:xfrm>
-          <a:prstGeom xmlns:a="http://schemas.openxmlformats.org/drawingml/2006/main" prst="rect">
-            <a:avLst/>
-          </a:prstGeom>
-          <a:noFill xmlns:a="http://schemas.openxmlformats.org/drawingml/2006/main"/>
-          <a:ln xmlns:a="http://schemas.openxmlformats.org/drawingml/2006/main" w="0">
-            <a:noFill/>
-            <a:prstDash val="solid"/>
-          </a:ln>
-        </p:spPr>
-        <p:txBody>
-          <a:bodyPr xmlns:a="http://schemas.openxmlformats.org/drawingml/2006/main"/>
-          <a:lstStyle xmlns:a="http://schemas.openxmlformats.org/drawingml/2006/main"/>
-          <a:p xmlns:a="http://schemas.openxmlformats.org/drawingml/2006/main">
-            <a:pPr>
-              <a:defRPr sz="1200">
+          <p:cNvPr id="18" name="">
+            <a:extLst xmlns:a="http://schemas.openxmlformats.org/drawingml/2006/main">
+              <a:ext uri="{FF2B5EF4-FFF2-40B4-BE49-F238E27FC236}">
+                <a16:creationId xmlns:a16="http://schemas.microsoft.com/office/drawing/2014/main" id="{9A0A8CF5-85E4-48F9-AE57-15ED2CBE565B}"/>
+              </a:ext>
+            </a:extLst>
+          </p:cNvPr>
+          <p:cNvSpPr>
+            <a:spLocks xmlns:a="http://schemas.openxmlformats.org/drawingml/2006/main" noGrp="1"/>
+          </p:cNvSpPr>
+          <p:nvPr/>
+        </p:nvSpPr>
+        <p:spPr>
+          <a:xfrm xmlns:a="http://schemas.openxmlformats.org/drawingml/2006/main">
+            <a:off x="1866900" y="2914650"/>
+            <a:ext cx="9334500" cy="333375"/>
+          </a:xfrm>
+          <a:prstGeom xmlns:a="http://schemas.openxmlformats.org/drawingml/2006/main" prst="rect">
+            <a:avLst/>
+          </a:prstGeom>
+          <a:noFill xmlns:a="http://schemas.openxmlformats.org/drawingml/2006/main"/>
+          <a:ln xmlns:a="http://schemas.openxmlformats.org/drawingml/2006/main" w="0">
+            <a:noFill/>
+            <a:prstDash val="solid"/>
+          </a:ln>
+        </p:spPr>
+        <p:txBody>
+          <a:bodyPr xmlns:a="http://schemas.openxmlformats.org/drawingml/2006/main"/>
+          <a:lstStyle xmlns:a="http://schemas.openxmlformats.org/drawingml/2006/main"/>
+          <a:p xmlns:a="http://schemas.openxmlformats.org/drawingml/2006/main">
+            <a:pPr>
+              <a:defRPr sz="1050">
                 <a:solidFill>
                   <a:srgbClr val="596780"/>
                 </a:solidFill>
               </a:defRPr>
             </a:pPr>
             <a:r>
-              <a:rPr sz="1200">
+              <a:rPr sz="1050">
                 <a:solidFill>
                   <a:srgbClr val="596780"/>
                 </a:solidFill>
@@ -4842,21 +5291,121 @@
       </p:sp>
       <p:sp>
         <p:nvSpPr>
-          <p:cNvPr id="17" name="">
-            <a:extLst xmlns:a="http://schemas.openxmlformats.org/drawingml/2006/main">
-              <a:ext uri="{FF2B5EF4-FFF2-40B4-BE49-F238E27FC236}">
-                <a16:creationId xmlns:a16="http://schemas.microsoft.com/office/drawing/2014/main" id="{8D753C45-88AE-41F7-9393-B6B3FF2D602B}"/>
-              </a:ext>
-            </a:extLst>
-          </p:cNvPr>
-          <p:cNvSpPr>
-            <a:spLocks xmlns:a="http://schemas.openxmlformats.org/drawingml/2006/main" noGrp="1"/>
-          </p:cNvSpPr>
-          <p:nvPr/>
-        </p:nvSpPr>
-        <p:spPr>
-          <a:xfrm xmlns:a="http://schemas.openxmlformats.org/drawingml/2006/main">
-            <a:off x="1866900" y="3676650"/>
+          <p:cNvPr id="19" name="">
+            <a:extLst xmlns:a="http://schemas.openxmlformats.org/drawingml/2006/main">
+              <a:ext uri="{FF2B5EF4-FFF2-40B4-BE49-F238E27FC236}">
+                <a16:creationId xmlns:a16="http://schemas.microsoft.com/office/drawing/2014/main" id="{3FFFD202-7ECD-49D7-8D37-FDB10EF9E382}"/>
+              </a:ext>
+            </a:extLst>
+          </p:cNvPr>
+          <p:cNvSpPr>
+            <a:spLocks xmlns:a="http://schemas.openxmlformats.org/drawingml/2006/main" noGrp="1"/>
+          </p:cNvSpPr>
+          <p:nvPr/>
+        </p:nvSpPr>
+        <p:spPr>
+          <a:xfrm xmlns:a="http://schemas.openxmlformats.org/drawingml/2006/main">
+            <a:off x="1866900" y="3333750"/>
+            <a:ext cx="990600" cy="190500"/>
+          </a:xfrm>
+          <a:prstGeom xmlns:a="http://schemas.openxmlformats.org/drawingml/2006/main" prst="rect">
+            <a:avLst/>
+          </a:prstGeom>
+          <a:noFill xmlns:a="http://schemas.openxmlformats.org/drawingml/2006/main"/>
+          <a:ln xmlns:a="http://schemas.openxmlformats.org/drawingml/2006/main" w="0">
+            <a:noFill/>
+            <a:prstDash val="solid"/>
+          </a:ln>
+        </p:spPr>
+        <p:txBody>
+          <a:bodyPr xmlns:a="http://schemas.openxmlformats.org/drawingml/2006/main"/>
+          <a:lstStyle xmlns:a="http://schemas.openxmlformats.org/drawingml/2006/main"/>
+          <a:p xmlns:a="http://schemas.openxmlformats.org/drawingml/2006/main">
+            <a:pPr>
+              <a:defRPr sz="975" b="1">
+                <a:solidFill>
+                  <a:srgbClr val="2048A8"/>
+                </a:solidFill>
+              </a:defRPr>
+            </a:pPr>
+            <a:r>
+              <a:rPr sz="975" b="1">
+                <a:solidFill>
+                  <a:srgbClr val="2048A8"/>
+                </a:solidFill>
+              </a:rPr>
+              <a:t>Рекомендуем</a:t>
+            </a:r>
+          </a:p>
+        </p:txBody>
+      </p:sp>
+      <p:sp>
+        <p:nvSpPr>
+          <p:cNvPr id="20" name="">
+            <a:extLst xmlns:a="http://schemas.openxmlformats.org/drawingml/2006/main">
+              <a:ext uri="{FF2B5EF4-FFF2-40B4-BE49-F238E27FC236}">
+                <a16:creationId xmlns:a16="http://schemas.microsoft.com/office/drawing/2014/main" id="{5B1AE4DE-D254-4451-AD14-560CA221C65D}"/>
+              </a:ext>
+            </a:extLst>
+          </p:cNvPr>
+          <p:cNvSpPr>
+            <a:spLocks xmlns:a="http://schemas.openxmlformats.org/drawingml/2006/main" noGrp="1"/>
+          </p:cNvSpPr>
+          <p:nvPr/>
+        </p:nvSpPr>
+        <p:spPr>
+          <a:xfrm xmlns:a="http://schemas.openxmlformats.org/drawingml/2006/main">
+            <a:off x="2895600" y="3295650"/>
+            <a:ext cx="8305800" cy="323850"/>
+          </a:xfrm>
+          <a:prstGeom xmlns:a="http://schemas.openxmlformats.org/drawingml/2006/main" prst="rect">
+            <a:avLst/>
+          </a:prstGeom>
+          <a:noFill xmlns:a="http://schemas.openxmlformats.org/drawingml/2006/main"/>
+          <a:ln xmlns:a="http://schemas.openxmlformats.org/drawingml/2006/main" w="0">
+            <a:noFill/>
+            <a:prstDash val="solid"/>
+          </a:ln>
+        </p:spPr>
+        <p:txBody>
+          <a:bodyPr xmlns:a="http://schemas.openxmlformats.org/drawingml/2006/main"/>
+          <a:lstStyle xmlns:a="http://schemas.openxmlformats.org/drawingml/2006/main"/>
+          <a:p xmlns:a="http://schemas.openxmlformats.org/drawingml/2006/main">
+            <a:pPr>
+              <a:defRPr sz="1050" b="1">
+                <a:solidFill>
+                  <a:srgbClr val="102A63"/>
+                </a:solidFill>
+              </a:defRPr>
+            </a:pPr>
+            <a:r>
+              <a:rPr sz="1050" b="1">
+                <a:solidFill>
+                  <a:srgbClr val="102A63"/>
+                </a:solidFill>
+              </a:rPr>
+              <a:t>{{RISK_2_RECOMMENDATION}}</a:t>
+            </a:r>
+          </a:p>
+        </p:txBody>
+      </p:sp>
+      <p:sp>
+        <p:nvSpPr>
+          <p:cNvPr id="21" name="">
+            <a:extLst xmlns:a="http://schemas.openxmlformats.org/drawingml/2006/main">
+              <a:ext uri="{FF2B5EF4-FFF2-40B4-BE49-F238E27FC236}">
+                <a16:creationId xmlns:a16="http://schemas.microsoft.com/office/drawing/2014/main" id="{01E42D95-887F-4B35-8E1C-F057A3EE8796}"/>
+              </a:ext>
+            </a:extLst>
+          </p:cNvPr>
+          <p:cNvSpPr>
+            <a:spLocks xmlns:a="http://schemas.openxmlformats.org/drawingml/2006/main" noGrp="1"/>
+          </p:cNvSpPr>
+          <p:nvPr/>
+        </p:nvSpPr>
+        <p:spPr>
+          <a:xfrm xmlns:a="http://schemas.openxmlformats.org/drawingml/2006/main">
+            <a:off x="1866900" y="3714750"/>
             <a:ext cx="9334500" cy="9525"/>
           </a:xfrm>
           <a:prstGeom xmlns:a="http://schemas.openxmlformats.org/drawingml/2006/main" prst="rect">
@@ -4873,26 +5422,26 @@
       </p:sp>
       <p:sp>
         <p:nvSpPr>
-          <p:cNvPr id="18" name="">
-            <a:extLst xmlns:a="http://schemas.openxmlformats.org/drawingml/2006/main">
-              <a:ext uri="{FF2B5EF4-FFF2-40B4-BE49-F238E27FC236}">
-                <a16:creationId xmlns:a16="http://schemas.microsoft.com/office/drawing/2014/main" id="{16B9914D-157F-40F8-BBB4-2C484537ECAC}"/>
-              </a:ext>
-            </a:extLst>
-          </p:cNvPr>
-          <p:cNvSpPr>
-            <a:spLocks xmlns:a="http://schemas.openxmlformats.org/drawingml/2006/main" noGrp="1"/>
-          </p:cNvSpPr>
-          <p:nvPr/>
-        </p:nvSpPr>
-        <p:spPr>
-          <a:xfrm xmlns:a="http://schemas.openxmlformats.org/drawingml/2006/main">
-            <a:off x="552450" y="3810000"/>
-            <a:ext cx="1047750" cy="895350"/>
+          <p:cNvPr id="22" name="">
+            <a:extLst xmlns:a="http://schemas.openxmlformats.org/drawingml/2006/main">
+              <a:ext uri="{FF2B5EF4-FFF2-40B4-BE49-F238E27FC236}">
+                <a16:creationId xmlns:a16="http://schemas.microsoft.com/office/drawing/2014/main" id="{C3B2EEA0-9A6C-4752-B0AD-5FB7109A237A}"/>
+              </a:ext>
+            </a:extLst>
+          </p:cNvPr>
+          <p:cNvSpPr>
+            <a:spLocks xmlns:a="http://schemas.openxmlformats.org/drawingml/2006/main" noGrp="1"/>
+          </p:cNvSpPr>
+          <p:nvPr/>
+        </p:nvSpPr>
+        <p:spPr>
+          <a:xfrm xmlns:a="http://schemas.openxmlformats.org/drawingml/2006/main">
+            <a:off x="552450" y="3829050"/>
+            <a:ext cx="1047750" cy="1009650"/>
           </a:xfrm>
           <a:prstGeom xmlns:a="http://schemas.openxmlformats.org/drawingml/2006/main" prst="roundRect">
             <a:avLst>
-              <a:gd name="adj" fmla="val 8511"/>
+              <a:gd name="adj" fmla="val 7547"/>
             </a:avLst>
           </a:prstGeom>
           <a:solidFill xmlns:a="http://schemas.openxmlformats.org/drawingml/2006/main">
@@ -4906,21 +5455,21 @@
       </p:sp>
       <p:sp>
         <p:nvSpPr>
-          <p:cNvPr id="19" name="">
-            <a:extLst xmlns:a="http://schemas.openxmlformats.org/drawingml/2006/main">
-              <a:ext uri="{FF2B5EF4-FFF2-40B4-BE49-F238E27FC236}">
-                <a16:creationId xmlns:a16="http://schemas.microsoft.com/office/drawing/2014/main" id="{ECA98348-50C4-4C1B-A210-99D6786523F4}"/>
-              </a:ext>
-            </a:extLst>
-          </p:cNvPr>
-          <p:cNvSpPr>
-            <a:spLocks xmlns:a="http://schemas.openxmlformats.org/drawingml/2006/main" noGrp="1"/>
-          </p:cNvSpPr>
-          <p:nvPr/>
-        </p:nvSpPr>
-        <p:spPr>
-          <a:xfrm xmlns:a="http://schemas.openxmlformats.org/drawingml/2006/main">
-            <a:off x="647700" y="4105275"/>
+          <p:cNvPr id="23" name="">
+            <a:extLst xmlns:a="http://schemas.openxmlformats.org/drawingml/2006/main">
+              <a:ext uri="{FF2B5EF4-FFF2-40B4-BE49-F238E27FC236}">
+                <a16:creationId xmlns:a16="http://schemas.microsoft.com/office/drawing/2014/main" id="{BF31705E-6F20-4AF6-93EB-30F980E83152}"/>
+              </a:ext>
+            </a:extLst>
+          </p:cNvPr>
+          <p:cNvSpPr>
+            <a:spLocks xmlns:a="http://schemas.openxmlformats.org/drawingml/2006/main" noGrp="1"/>
+          </p:cNvSpPr>
+          <p:nvPr/>
+        </p:nvSpPr>
+        <p:spPr>
+          <a:xfrm xmlns:a="http://schemas.openxmlformats.org/drawingml/2006/main">
+            <a:off x="647700" y="4181475"/>
             <a:ext cx="857250" cy="266700"/>
           </a:xfrm>
           <a:prstGeom xmlns:a="http://schemas.openxmlformats.org/drawingml/2006/main" prst="rect">
@@ -4956,45 +5505,45 @@
       </p:sp>
       <p:sp>
         <p:nvSpPr>
-          <p:cNvPr id="20" name="">
-            <a:extLst xmlns:a="http://schemas.openxmlformats.org/drawingml/2006/main">
-              <a:ext uri="{FF2B5EF4-FFF2-40B4-BE49-F238E27FC236}">
-                <a16:creationId xmlns:a16="http://schemas.microsoft.com/office/drawing/2014/main" id="{6DD72AEC-D117-4C1B-905D-064D744F1822}"/>
-              </a:ext>
-            </a:extLst>
-          </p:cNvPr>
-          <p:cNvSpPr>
-            <a:spLocks xmlns:a="http://schemas.openxmlformats.org/drawingml/2006/main" noGrp="1"/>
-          </p:cNvSpPr>
-          <p:nvPr/>
-        </p:nvSpPr>
-        <p:spPr>
-          <a:xfrm xmlns:a="http://schemas.openxmlformats.org/drawingml/2006/main">
-            <a:off x="1866900" y="3810000"/>
-            <a:ext cx="3905250" cy="381000"/>
-          </a:xfrm>
-          <a:prstGeom xmlns:a="http://schemas.openxmlformats.org/drawingml/2006/main" prst="rect">
-            <a:avLst/>
-          </a:prstGeom>
-          <a:noFill xmlns:a="http://schemas.openxmlformats.org/drawingml/2006/main"/>
-          <a:ln xmlns:a="http://schemas.openxmlformats.org/drawingml/2006/main" w="0">
-            <a:noFill/>
-            <a:prstDash val="solid"/>
-          </a:ln>
-        </p:spPr>
-        <p:txBody>
-          <a:bodyPr xmlns:a="http://schemas.openxmlformats.org/drawingml/2006/main"/>
-          <a:lstStyle xmlns:a="http://schemas.openxmlformats.org/drawingml/2006/main"/>
-          <a:p xmlns:a="http://schemas.openxmlformats.org/drawingml/2006/main">
-            <a:pPr>
-              <a:defRPr sz="1500" b="1">
-                <a:solidFill>
-                  <a:srgbClr val="102A63"/>
-                </a:solidFill>
-              </a:defRPr>
-            </a:pPr>
-            <a:r>
-              <a:rPr sz="1500" b="1">
+          <p:cNvPr id="24" name="">
+            <a:extLst xmlns:a="http://schemas.openxmlformats.org/drawingml/2006/main">
+              <a:ext uri="{FF2B5EF4-FFF2-40B4-BE49-F238E27FC236}">
+                <a16:creationId xmlns:a16="http://schemas.microsoft.com/office/drawing/2014/main" id="{18B66107-4598-4697-A711-6801C85F4E9A}"/>
+              </a:ext>
+            </a:extLst>
+          </p:cNvPr>
+          <p:cNvSpPr>
+            <a:spLocks xmlns:a="http://schemas.openxmlformats.org/drawingml/2006/main" noGrp="1"/>
+          </p:cNvSpPr>
+          <p:nvPr/>
+        </p:nvSpPr>
+        <p:spPr>
+          <a:xfrm xmlns:a="http://schemas.openxmlformats.org/drawingml/2006/main">
+            <a:off x="1866900" y="3829050"/>
+            <a:ext cx="9334500" cy="295275"/>
+          </a:xfrm>
+          <a:prstGeom xmlns:a="http://schemas.openxmlformats.org/drawingml/2006/main" prst="rect">
+            <a:avLst/>
+          </a:prstGeom>
+          <a:noFill xmlns:a="http://schemas.openxmlformats.org/drawingml/2006/main"/>
+          <a:ln xmlns:a="http://schemas.openxmlformats.org/drawingml/2006/main" w="0">
+            <a:noFill/>
+            <a:prstDash val="solid"/>
+          </a:ln>
+        </p:spPr>
+        <p:txBody>
+          <a:bodyPr xmlns:a="http://schemas.openxmlformats.org/drawingml/2006/main"/>
+          <a:lstStyle xmlns:a="http://schemas.openxmlformats.org/drawingml/2006/main"/>
+          <a:p xmlns:a="http://schemas.openxmlformats.org/drawingml/2006/main">
+            <a:pPr>
+              <a:defRPr sz="1350" b="1">
+                <a:solidFill>
+                  <a:srgbClr val="102A63"/>
+                </a:solidFill>
+              </a:defRPr>
+            </a:pPr>
+            <a:r>
+              <a:rPr sz="1350" b="1">
                 <a:solidFill>
                   <a:srgbClr val="102A63"/>
                 </a:solidFill>
@@ -5006,45 +5555,45 @@
       </p:sp>
       <p:sp>
         <p:nvSpPr>
-          <p:cNvPr id="21" name="">
-            <a:extLst xmlns:a="http://schemas.openxmlformats.org/drawingml/2006/main">
-              <a:ext uri="{FF2B5EF4-FFF2-40B4-BE49-F238E27FC236}">
-                <a16:creationId xmlns:a16="http://schemas.microsoft.com/office/drawing/2014/main" id="{E6A9997D-ADE7-4556-B578-9AB429357976}"/>
-              </a:ext>
-            </a:extLst>
-          </p:cNvPr>
-          <p:cNvSpPr>
-            <a:spLocks xmlns:a="http://schemas.openxmlformats.org/drawingml/2006/main" noGrp="1"/>
-          </p:cNvSpPr>
-          <p:nvPr/>
-        </p:nvSpPr>
-        <p:spPr>
-          <a:xfrm xmlns:a="http://schemas.openxmlformats.org/drawingml/2006/main">
-            <a:off x="1866900" y="4210050"/>
-            <a:ext cx="9334500" cy="552450"/>
-          </a:xfrm>
-          <a:prstGeom xmlns:a="http://schemas.openxmlformats.org/drawingml/2006/main" prst="rect">
-            <a:avLst/>
-          </a:prstGeom>
-          <a:noFill xmlns:a="http://schemas.openxmlformats.org/drawingml/2006/main"/>
-          <a:ln xmlns:a="http://schemas.openxmlformats.org/drawingml/2006/main" w="0">
-            <a:noFill/>
-            <a:prstDash val="solid"/>
-          </a:ln>
-        </p:spPr>
-        <p:txBody>
-          <a:bodyPr xmlns:a="http://schemas.openxmlformats.org/drawingml/2006/main"/>
-          <a:lstStyle xmlns:a="http://schemas.openxmlformats.org/drawingml/2006/main"/>
-          <a:p xmlns:a="http://schemas.openxmlformats.org/drawingml/2006/main">
-            <a:pPr>
-              <a:defRPr sz="1200">
+          <p:cNvPr id="25" name="">
+            <a:extLst xmlns:a="http://schemas.openxmlformats.org/drawingml/2006/main">
+              <a:ext uri="{FF2B5EF4-FFF2-40B4-BE49-F238E27FC236}">
+                <a16:creationId xmlns:a16="http://schemas.microsoft.com/office/drawing/2014/main" id="{AC25A767-520C-4C18-B306-E4E826B0036F}"/>
+              </a:ext>
+            </a:extLst>
+          </p:cNvPr>
+          <p:cNvSpPr>
+            <a:spLocks xmlns:a="http://schemas.openxmlformats.org/drawingml/2006/main" noGrp="1"/>
+          </p:cNvSpPr>
+          <p:nvPr/>
+        </p:nvSpPr>
+        <p:spPr>
+          <a:xfrm xmlns:a="http://schemas.openxmlformats.org/drawingml/2006/main">
+            <a:off x="1866900" y="4133850"/>
+            <a:ext cx="9334500" cy="333375"/>
+          </a:xfrm>
+          <a:prstGeom xmlns:a="http://schemas.openxmlformats.org/drawingml/2006/main" prst="rect">
+            <a:avLst/>
+          </a:prstGeom>
+          <a:noFill xmlns:a="http://schemas.openxmlformats.org/drawingml/2006/main"/>
+          <a:ln xmlns:a="http://schemas.openxmlformats.org/drawingml/2006/main" w="0">
+            <a:noFill/>
+            <a:prstDash val="solid"/>
+          </a:ln>
+        </p:spPr>
+        <p:txBody>
+          <a:bodyPr xmlns:a="http://schemas.openxmlformats.org/drawingml/2006/main"/>
+          <a:lstStyle xmlns:a="http://schemas.openxmlformats.org/drawingml/2006/main"/>
+          <a:p xmlns:a="http://schemas.openxmlformats.org/drawingml/2006/main">
+            <a:pPr>
+              <a:defRPr sz="1050">
                 <a:solidFill>
                   <a:srgbClr val="596780"/>
                 </a:solidFill>
               </a:defRPr>
             </a:pPr>
             <a:r>
-              <a:rPr sz="1200">
+              <a:rPr sz="1050">
                 <a:solidFill>
                   <a:srgbClr val="596780"/>
                 </a:solidFill>
@@ -5056,21 +5605,121 @@
       </p:sp>
       <p:sp>
         <p:nvSpPr>
-          <p:cNvPr id="22" name="">
-            <a:extLst xmlns:a="http://schemas.openxmlformats.org/drawingml/2006/main">
-              <a:ext uri="{FF2B5EF4-FFF2-40B4-BE49-F238E27FC236}">
-                <a16:creationId xmlns:a16="http://schemas.microsoft.com/office/drawing/2014/main" id="{8934D575-E699-4DB4-B3C9-9EEB60A0D08C}"/>
-              </a:ext>
-            </a:extLst>
-          </p:cNvPr>
-          <p:cNvSpPr>
-            <a:spLocks xmlns:a="http://schemas.openxmlformats.org/drawingml/2006/main" noGrp="1"/>
-          </p:cNvSpPr>
-          <p:nvPr/>
-        </p:nvSpPr>
-        <p:spPr>
-          <a:xfrm xmlns:a="http://schemas.openxmlformats.org/drawingml/2006/main">
-            <a:off x="1866900" y="4876800"/>
+          <p:cNvPr id="26" name="">
+            <a:extLst xmlns:a="http://schemas.openxmlformats.org/drawingml/2006/main">
+              <a:ext uri="{FF2B5EF4-FFF2-40B4-BE49-F238E27FC236}">
+                <a16:creationId xmlns:a16="http://schemas.microsoft.com/office/drawing/2014/main" id="{DF5B669B-8927-4A18-AE03-3C6EFCFBBF0E}"/>
+              </a:ext>
+            </a:extLst>
+          </p:cNvPr>
+          <p:cNvSpPr>
+            <a:spLocks xmlns:a="http://schemas.openxmlformats.org/drawingml/2006/main" noGrp="1"/>
+          </p:cNvSpPr>
+          <p:nvPr/>
+        </p:nvSpPr>
+        <p:spPr>
+          <a:xfrm xmlns:a="http://schemas.openxmlformats.org/drawingml/2006/main">
+            <a:off x="1866900" y="4552950"/>
+            <a:ext cx="990600" cy="190500"/>
+          </a:xfrm>
+          <a:prstGeom xmlns:a="http://schemas.openxmlformats.org/drawingml/2006/main" prst="rect">
+            <a:avLst/>
+          </a:prstGeom>
+          <a:noFill xmlns:a="http://schemas.openxmlformats.org/drawingml/2006/main"/>
+          <a:ln xmlns:a="http://schemas.openxmlformats.org/drawingml/2006/main" w="0">
+            <a:noFill/>
+            <a:prstDash val="solid"/>
+          </a:ln>
+        </p:spPr>
+        <p:txBody>
+          <a:bodyPr xmlns:a="http://schemas.openxmlformats.org/drawingml/2006/main"/>
+          <a:lstStyle xmlns:a="http://schemas.openxmlformats.org/drawingml/2006/main"/>
+          <a:p xmlns:a="http://schemas.openxmlformats.org/drawingml/2006/main">
+            <a:pPr>
+              <a:defRPr sz="975" b="1">
+                <a:solidFill>
+                  <a:srgbClr val="2048A8"/>
+                </a:solidFill>
+              </a:defRPr>
+            </a:pPr>
+            <a:r>
+              <a:rPr sz="975" b="1">
+                <a:solidFill>
+                  <a:srgbClr val="2048A8"/>
+                </a:solidFill>
+              </a:rPr>
+              <a:t>Рекомендуем</a:t>
+            </a:r>
+          </a:p>
+        </p:txBody>
+      </p:sp>
+      <p:sp>
+        <p:nvSpPr>
+          <p:cNvPr id="27" name="">
+            <a:extLst xmlns:a="http://schemas.openxmlformats.org/drawingml/2006/main">
+              <a:ext uri="{FF2B5EF4-FFF2-40B4-BE49-F238E27FC236}">
+                <a16:creationId xmlns:a16="http://schemas.microsoft.com/office/drawing/2014/main" id="{FB34A131-FA12-4118-906A-CF186D5EB7BF}"/>
+              </a:ext>
+            </a:extLst>
+          </p:cNvPr>
+          <p:cNvSpPr>
+            <a:spLocks xmlns:a="http://schemas.openxmlformats.org/drawingml/2006/main" noGrp="1"/>
+          </p:cNvSpPr>
+          <p:nvPr/>
+        </p:nvSpPr>
+        <p:spPr>
+          <a:xfrm xmlns:a="http://schemas.openxmlformats.org/drawingml/2006/main">
+            <a:off x="2895600" y="4514850"/>
+            <a:ext cx="8305800" cy="323850"/>
+          </a:xfrm>
+          <a:prstGeom xmlns:a="http://schemas.openxmlformats.org/drawingml/2006/main" prst="rect">
+            <a:avLst/>
+          </a:prstGeom>
+          <a:noFill xmlns:a="http://schemas.openxmlformats.org/drawingml/2006/main"/>
+          <a:ln xmlns:a="http://schemas.openxmlformats.org/drawingml/2006/main" w="0">
+            <a:noFill/>
+            <a:prstDash val="solid"/>
+          </a:ln>
+        </p:spPr>
+        <p:txBody>
+          <a:bodyPr xmlns:a="http://schemas.openxmlformats.org/drawingml/2006/main"/>
+          <a:lstStyle xmlns:a="http://schemas.openxmlformats.org/drawingml/2006/main"/>
+          <a:p xmlns:a="http://schemas.openxmlformats.org/drawingml/2006/main">
+            <a:pPr>
+              <a:defRPr sz="1050" b="1">
+                <a:solidFill>
+                  <a:srgbClr val="102A63"/>
+                </a:solidFill>
+              </a:defRPr>
+            </a:pPr>
+            <a:r>
+              <a:rPr sz="1050" b="1">
+                <a:solidFill>
+                  <a:srgbClr val="102A63"/>
+                </a:solidFill>
+              </a:rPr>
+              <a:t>{{RISK_3_RECOMMENDATION}}</a:t>
+            </a:r>
+          </a:p>
+        </p:txBody>
+      </p:sp>
+      <p:sp>
+        <p:nvSpPr>
+          <p:cNvPr id="28" name="">
+            <a:extLst xmlns:a="http://schemas.openxmlformats.org/drawingml/2006/main">
+              <a:ext uri="{FF2B5EF4-FFF2-40B4-BE49-F238E27FC236}">
+                <a16:creationId xmlns:a16="http://schemas.microsoft.com/office/drawing/2014/main" id="{D3AC26B3-379F-48A4-9594-BE3E2FF0DD80}"/>
+              </a:ext>
+            </a:extLst>
+          </p:cNvPr>
+          <p:cNvSpPr>
+            <a:spLocks xmlns:a="http://schemas.openxmlformats.org/drawingml/2006/main" noGrp="1"/>
+          </p:cNvSpPr>
+          <p:nvPr/>
+        </p:nvSpPr>
+        <p:spPr>
+          <a:xfrm xmlns:a="http://schemas.openxmlformats.org/drawingml/2006/main">
+            <a:off x="1866900" y="4933950"/>
             <a:ext cx="9334500" cy="9525"/>
           </a:xfrm>
           <a:prstGeom xmlns:a="http://schemas.openxmlformats.org/drawingml/2006/main" prst="rect">
@@ -5087,26 +5736,26 @@
       </p:sp>
       <p:sp>
         <p:nvSpPr>
-          <p:cNvPr id="23" name="">
-            <a:extLst xmlns:a="http://schemas.openxmlformats.org/drawingml/2006/main">
-              <a:ext uri="{FF2B5EF4-FFF2-40B4-BE49-F238E27FC236}">
-                <a16:creationId xmlns:a16="http://schemas.microsoft.com/office/drawing/2014/main" id="{8B2E6899-CEA8-4F75-BD05-96FC528B742D}"/>
-              </a:ext>
-            </a:extLst>
-          </p:cNvPr>
-          <p:cNvSpPr>
-            <a:spLocks xmlns:a="http://schemas.openxmlformats.org/drawingml/2006/main" noGrp="1"/>
-          </p:cNvSpPr>
-          <p:nvPr/>
-        </p:nvSpPr>
-        <p:spPr>
-          <a:xfrm xmlns:a="http://schemas.openxmlformats.org/drawingml/2006/main">
-            <a:off x="552450" y="5010150"/>
-            <a:ext cx="1047750" cy="895350"/>
+          <p:cNvPr id="29" name="">
+            <a:extLst xmlns:a="http://schemas.openxmlformats.org/drawingml/2006/main">
+              <a:ext uri="{FF2B5EF4-FFF2-40B4-BE49-F238E27FC236}">
+                <a16:creationId xmlns:a16="http://schemas.microsoft.com/office/drawing/2014/main" id="{EB406246-FAC9-456D-9F8B-17A24C09ADA3}"/>
+              </a:ext>
+            </a:extLst>
+          </p:cNvPr>
+          <p:cNvSpPr>
+            <a:spLocks xmlns:a="http://schemas.openxmlformats.org/drawingml/2006/main" noGrp="1"/>
+          </p:cNvSpPr>
+          <p:nvPr/>
+        </p:nvSpPr>
+        <p:spPr>
+          <a:xfrm xmlns:a="http://schemas.openxmlformats.org/drawingml/2006/main">
+            <a:off x="552450" y="5048250"/>
+            <a:ext cx="1047750" cy="1009650"/>
           </a:xfrm>
           <a:prstGeom xmlns:a="http://schemas.openxmlformats.org/drawingml/2006/main" prst="roundRect">
             <a:avLst>
-              <a:gd name="adj" fmla="val 8511"/>
+              <a:gd name="adj" fmla="val 7547"/>
             </a:avLst>
           </a:prstGeom>
           <a:solidFill xmlns:a="http://schemas.openxmlformats.org/drawingml/2006/main">
@@ -5120,21 +5769,21 @@
       </p:sp>
       <p:sp>
         <p:nvSpPr>
-          <p:cNvPr id="24" name="">
-            <a:extLst xmlns:a="http://schemas.openxmlformats.org/drawingml/2006/main">
-              <a:ext uri="{FF2B5EF4-FFF2-40B4-BE49-F238E27FC236}">
-                <a16:creationId xmlns:a16="http://schemas.microsoft.com/office/drawing/2014/main" id="{5340BD81-1718-4316-B291-E3CA547F64CB}"/>
-              </a:ext>
-            </a:extLst>
-          </p:cNvPr>
-          <p:cNvSpPr>
-            <a:spLocks xmlns:a="http://schemas.openxmlformats.org/drawingml/2006/main" noGrp="1"/>
-          </p:cNvSpPr>
-          <p:nvPr/>
-        </p:nvSpPr>
-        <p:spPr>
-          <a:xfrm xmlns:a="http://schemas.openxmlformats.org/drawingml/2006/main">
-            <a:off x="647700" y="5305425"/>
+          <p:cNvPr id="30" name="">
+            <a:extLst xmlns:a="http://schemas.openxmlformats.org/drawingml/2006/main">
+              <a:ext uri="{FF2B5EF4-FFF2-40B4-BE49-F238E27FC236}">
+                <a16:creationId xmlns:a16="http://schemas.microsoft.com/office/drawing/2014/main" id="{332E8E90-530D-4BC4-B178-E5AE92E214CA}"/>
+              </a:ext>
+            </a:extLst>
+          </p:cNvPr>
+          <p:cNvSpPr>
+            <a:spLocks xmlns:a="http://schemas.openxmlformats.org/drawingml/2006/main" noGrp="1"/>
+          </p:cNvSpPr>
+          <p:nvPr/>
+        </p:nvSpPr>
+        <p:spPr>
+          <a:xfrm xmlns:a="http://schemas.openxmlformats.org/drawingml/2006/main">
+            <a:off x="647700" y="5400675"/>
             <a:ext cx="857250" cy="266700"/>
           </a:xfrm>
           <a:prstGeom xmlns:a="http://schemas.openxmlformats.org/drawingml/2006/main" prst="rect">
@@ -5170,45 +5819,45 @@
       </p:sp>
       <p:sp>
         <p:nvSpPr>
-          <p:cNvPr id="25" name="">
-            <a:extLst xmlns:a="http://schemas.openxmlformats.org/drawingml/2006/main">
-              <a:ext uri="{FF2B5EF4-FFF2-40B4-BE49-F238E27FC236}">
-                <a16:creationId xmlns:a16="http://schemas.microsoft.com/office/drawing/2014/main" id="{B51364AE-7ADA-4B2A-BA06-9F1FBD4CFD13}"/>
-              </a:ext>
-            </a:extLst>
-          </p:cNvPr>
-          <p:cNvSpPr>
-            <a:spLocks xmlns:a="http://schemas.openxmlformats.org/drawingml/2006/main" noGrp="1"/>
-          </p:cNvSpPr>
-          <p:nvPr/>
-        </p:nvSpPr>
-        <p:spPr>
-          <a:xfrm xmlns:a="http://schemas.openxmlformats.org/drawingml/2006/main">
-            <a:off x="1866900" y="5010150"/>
-            <a:ext cx="3905250" cy="381000"/>
-          </a:xfrm>
-          <a:prstGeom xmlns:a="http://schemas.openxmlformats.org/drawingml/2006/main" prst="rect">
-            <a:avLst/>
-          </a:prstGeom>
-          <a:noFill xmlns:a="http://schemas.openxmlformats.org/drawingml/2006/main"/>
-          <a:ln xmlns:a="http://schemas.openxmlformats.org/drawingml/2006/main" w="0">
-            <a:noFill/>
-            <a:prstDash val="solid"/>
-          </a:ln>
-        </p:spPr>
-        <p:txBody>
-          <a:bodyPr xmlns:a="http://schemas.openxmlformats.org/drawingml/2006/main"/>
-          <a:lstStyle xmlns:a="http://schemas.openxmlformats.org/drawingml/2006/main"/>
-          <a:p xmlns:a="http://schemas.openxmlformats.org/drawingml/2006/main">
-            <a:pPr>
-              <a:defRPr sz="1500" b="1">
-                <a:solidFill>
-                  <a:srgbClr val="102A63"/>
-                </a:solidFill>
-              </a:defRPr>
-            </a:pPr>
-            <a:r>
-              <a:rPr sz="1500" b="1">
+          <p:cNvPr id="31" name="">
+            <a:extLst xmlns:a="http://schemas.openxmlformats.org/drawingml/2006/main">
+              <a:ext uri="{FF2B5EF4-FFF2-40B4-BE49-F238E27FC236}">
+                <a16:creationId xmlns:a16="http://schemas.microsoft.com/office/drawing/2014/main" id="{5DB87B46-25AF-458F-BA89-7BD67A83DF15}"/>
+              </a:ext>
+            </a:extLst>
+          </p:cNvPr>
+          <p:cNvSpPr>
+            <a:spLocks xmlns:a="http://schemas.openxmlformats.org/drawingml/2006/main" noGrp="1"/>
+          </p:cNvSpPr>
+          <p:nvPr/>
+        </p:nvSpPr>
+        <p:spPr>
+          <a:xfrm xmlns:a="http://schemas.openxmlformats.org/drawingml/2006/main">
+            <a:off x="1866900" y="5048250"/>
+            <a:ext cx="9334500" cy="295275"/>
+          </a:xfrm>
+          <a:prstGeom xmlns:a="http://schemas.openxmlformats.org/drawingml/2006/main" prst="rect">
+            <a:avLst/>
+          </a:prstGeom>
+          <a:noFill xmlns:a="http://schemas.openxmlformats.org/drawingml/2006/main"/>
+          <a:ln xmlns:a="http://schemas.openxmlformats.org/drawingml/2006/main" w="0">
+            <a:noFill/>
+            <a:prstDash val="solid"/>
+          </a:ln>
+        </p:spPr>
+        <p:txBody>
+          <a:bodyPr xmlns:a="http://schemas.openxmlformats.org/drawingml/2006/main"/>
+          <a:lstStyle xmlns:a="http://schemas.openxmlformats.org/drawingml/2006/main"/>
+          <a:p xmlns:a="http://schemas.openxmlformats.org/drawingml/2006/main">
+            <a:pPr>
+              <a:defRPr sz="1350" b="1">
+                <a:solidFill>
+                  <a:srgbClr val="102A63"/>
+                </a:solidFill>
+              </a:defRPr>
+            </a:pPr>
+            <a:r>
+              <a:rPr sz="1350" b="1">
                 <a:solidFill>
                   <a:srgbClr val="102A63"/>
                 </a:solidFill>
@@ -5220,50 +5869,150 @@
       </p:sp>
       <p:sp>
         <p:nvSpPr>
-          <p:cNvPr id="26" name="">
-            <a:extLst xmlns:a="http://schemas.openxmlformats.org/drawingml/2006/main">
-              <a:ext uri="{FF2B5EF4-FFF2-40B4-BE49-F238E27FC236}">
-                <a16:creationId xmlns:a16="http://schemas.microsoft.com/office/drawing/2014/main" id="{FC5E1AE6-CFC6-488C-BFAC-8388554F2BE4}"/>
-              </a:ext>
-            </a:extLst>
-          </p:cNvPr>
-          <p:cNvSpPr>
-            <a:spLocks xmlns:a="http://schemas.openxmlformats.org/drawingml/2006/main" noGrp="1"/>
-          </p:cNvSpPr>
-          <p:nvPr/>
-        </p:nvSpPr>
-        <p:spPr>
-          <a:xfrm xmlns:a="http://schemas.openxmlformats.org/drawingml/2006/main">
-            <a:off x="1866900" y="5410200"/>
-            <a:ext cx="9334500" cy="552450"/>
-          </a:xfrm>
-          <a:prstGeom xmlns:a="http://schemas.openxmlformats.org/drawingml/2006/main" prst="rect">
-            <a:avLst/>
-          </a:prstGeom>
-          <a:noFill xmlns:a="http://schemas.openxmlformats.org/drawingml/2006/main"/>
-          <a:ln xmlns:a="http://schemas.openxmlformats.org/drawingml/2006/main" w="0">
-            <a:noFill/>
-            <a:prstDash val="solid"/>
-          </a:ln>
-        </p:spPr>
-        <p:txBody>
-          <a:bodyPr xmlns:a="http://schemas.openxmlformats.org/drawingml/2006/main"/>
-          <a:lstStyle xmlns:a="http://schemas.openxmlformats.org/drawingml/2006/main"/>
-          <a:p xmlns:a="http://schemas.openxmlformats.org/drawingml/2006/main">
-            <a:pPr>
-              <a:defRPr sz="1200">
+          <p:cNvPr id="32" name="">
+            <a:extLst xmlns:a="http://schemas.openxmlformats.org/drawingml/2006/main">
+              <a:ext uri="{FF2B5EF4-FFF2-40B4-BE49-F238E27FC236}">
+                <a16:creationId xmlns:a16="http://schemas.microsoft.com/office/drawing/2014/main" id="{BE582CB0-C902-4E51-9BB5-CCC2DFE3202C}"/>
+              </a:ext>
+            </a:extLst>
+          </p:cNvPr>
+          <p:cNvSpPr>
+            <a:spLocks xmlns:a="http://schemas.openxmlformats.org/drawingml/2006/main" noGrp="1"/>
+          </p:cNvSpPr>
+          <p:nvPr/>
+        </p:nvSpPr>
+        <p:spPr>
+          <a:xfrm xmlns:a="http://schemas.openxmlformats.org/drawingml/2006/main">
+            <a:off x="1866900" y="5353050"/>
+            <a:ext cx="9334500" cy="333375"/>
+          </a:xfrm>
+          <a:prstGeom xmlns:a="http://schemas.openxmlformats.org/drawingml/2006/main" prst="rect">
+            <a:avLst/>
+          </a:prstGeom>
+          <a:noFill xmlns:a="http://schemas.openxmlformats.org/drawingml/2006/main"/>
+          <a:ln xmlns:a="http://schemas.openxmlformats.org/drawingml/2006/main" w="0">
+            <a:noFill/>
+            <a:prstDash val="solid"/>
+          </a:ln>
+        </p:spPr>
+        <p:txBody>
+          <a:bodyPr xmlns:a="http://schemas.openxmlformats.org/drawingml/2006/main"/>
+          <a:lstStyle xmlns:a="http://schemas.openxmlformats.org/drawingml/2006/main"/>
+          <a:p xmlns:a="http://schemas.openxmlformats.org/drawingml/2006/main">
+            <a:pPr>
+              <a:defRPr sz="1050">
                 <a:solidFill>
                   <a:srgbClr val="596780"/>
                 </a:solidFill>
               </a:defRPr>
             </a:pPr>
             <a:r>
-              <a:rPr sz="1200">
+              <a:rPr sz="1050">
                 <a:solidFill>
                   <a:srgbClr val="596780"/>
                 </a:solidFill>
               </a:rPr>
               <a:t>{{RISK_4_IMPACT}}</a:t>
+            </a:r>
+          </a:p>
+        </p:txBody>
+      </p:sp>
+      <p:sp>
+        <p:nvSpPr>
+          <p:cNvPr id="33" name="">
+            <a:extLst xmlns:a="http://schemas.openxmlformats.org/drawingml/2006/main">
+              <a:ext uri="{FF2B5EF4-FFF2-40B4-BE49-F238E27FC236}">
+                <a16:creationId xmlns:a16="http://schemas.microsoft.com/office/drawing/2014/main" id="{DF1E331C-C886-484A-BA6B-A84189FB571D}"/>
+              </a:ext>
+            </a:extLst>
+          </p:cNvPr>
+          <p:cNvSpPr>
+            <a:spLocks xmlns:a="http://schemas.openxmlformats.org/drawingml/2006/main" noGrp="1"/>
+          </p:cNvSpPr>
+          <p:nvPr/>
+        </p:nvSpPr>
+        <p:spPr>
+          <a:xfrm xmlns:a="http://schemas.openxmlformats.org/drawingml/2006/main">
+            <a:off x="1866900" y="5772150"/>
+            <a:ext cx="990600" cy="190500"/>
+          </a:xfrm>
+          <a:prstGeom xmlns:a="http://schemas.openxmlformats.org/drawingml/2006/main" prst="rect">
+            <a:avLst/>
+          </a:prstGeom>
+          <a:noFill xmlns:a="http://schemas.openxmlformats.org/drawingml/2006/main"/>
+          <a:ln xmlns:a="http://schemas.openxmlformats.org/drawingml/2006/main" w="0">
+            <a:noFill/>
+            <a:prstDash val="solid"/>
+          </a:ln>
+        </p:spPr>
+        <p:txBody>
+          <a:bodyPr xmlns:a="http://schemas.openxmlformats.org/drawingml/2006/main"/>
+          <a:lstStyle xmlns:a="http://schemas.openxmlformats.org/drawingml/2006/main"/>
+          <a:p xmlns:a="http://schemas.openxmlformats.org/drawingml/2006/main">
+            <a:pPr>
+              <a:defRPr sz="975" b="1">
+                <a:solidFill>
+                  <a:srgbClr val="2048A8"/>
+                </a:solidFill>
+              </a:defRPr>
+            </a:pPr>
+            <a:r>
+              <a:rPr sz="975" b="1">
+                <a:solidFill>
+                  <a:srgbClr val="2048A8"/>
+                </a:solidFill>
+              </a:rPr>
+              <a:t>Рекомендуем</a:t>
+            </a:r>
+          </a:p>
+        </p:txBody>
+      </p:sp>
+      <p:sp>
+        <p:nvSpPr>
+          <p:cNvPr id="34" name="">
+            <a:extLst xmlns:a="http://schemas.openxmlformats.org/drawingml/2006/main">
+              <a:ext uri="{FF2B5EF4-FFF2-40B4-BE49-F238E27FC236}">
+                <a16:creationId xmlns:a16="http://schemas.microsoft.com/office/drawing/2014/main" id="{7DAF95D7-AA6A-4161-B8BF-80CF7A857BE7}"/>
+              </a:ext>
+            </a:extLst>
+          </p:cNvPr>
+          <p:cNvSpPr>
+            <a:spLocks xmlns:a="http://schemas.openxmlformats.org/drawingml/2006/main" noGrp="1"/>
+          </p:cNvSpPr>
+          <p:nvPr/>
+        </p:nvSpPr>
+        <p:spPr>
+          <a:xfrm xmlns:a="http://schemas.openxmlformats.org/drawingml/2006/main">
+            <a:off x="2895600" y="5734050"/>
+            <a:ext cx="8305800" cy="323850"/>
+          </a:xfrm>
+          <a:prstGeom xmlns:a="http://schemas.openxmlformats.org/drawingml/2006/main" prst="rect">
+            <a:avLst/>
+          </a:prstGeom>
+          <a:noFill xmlns:a="http://schemas.openxmlformats.org/drawingml/2006/main"/>
+          <a:ln xmlns:a="http://schemas.openxmlformats.org/drawingml/2006/main" w="0">
+            <a:noFill/>
+            <a:prstDash val="solid"/>
+          </a:ln>
+        </p:spPr>
+        <p:txBody>
+          <a:bodyPr xmlns:a="http://schemas.openxmlformats.org/drawingml/2006/main"/>
+          <a:lstStyle xmlns:a="http://schemas.openxmlformats.org/drawingml/2006/main"/>
+          <a:p xmlns:a="http://schemas.openxmlformats.org/drawingml/2006/main">
+            <a:pPr>
+              <a:defRPr sz="1050" b="1">
+                <a:solidFill>
+                  <a:srgbClr val="102A63"/>
+                </a:solidFill>
+              </a:defRPr>
+            </a:pPr>
+            <a:r>
+              <a:rPr sz="1050" b="1">
+                <a:solidFill>
+                  <a:srgbClr val="102A63"/>
+                </a:solidFill>
+              </a:rPr>
+              <a:t>{{RISK_4_RECOMMENDATION}}</a:t>
             </a:r>
           </a:p>
         </p:txBody>
@@ -5271,7 +6020,7 @@
     </p:spTree>
     <p:extLst>
       <p:ext uri="{BB962C8B-B14F-4D97-AF65-F5344CB8AC3E}">
-        <p14:creationId xmlns:p14="http://schemas.microsoft.com/office/powerpoint/2010/main" val="1921029292"/>
+        <p14:creationId xmlns:p14="http://schemas.microsoft.com/office/powerpoint/2010/main" val="1779703121"/>
       </p:ext>
     </p:extLst>
   </p:cSld>
@@ -5302,7 +6051,7 @@
           <p:cNvPr id="1" name="">
             <a:extLst xmlns:a="http://schemas.openxmlformats.org/drawingml/2006/main">
               <a:ext uri="{FF2B5EF4-FFF2-40B4-BE49-F238E27FC236}">
-                <a16:creationId xmlns:a16="http://schemas.microsoft.com/office/drawing/2014/main" id="{19F381DC-E1D4-42F2-B78F-655873522242}"/>
+                <a16:creationId xmlns:a16="http://schemas.microsoft.com/office/drawing/2014/main" id="{1C0D48BE-FD1C-4419-BC65-C8F046F93514}"/>
               </a:ext>
             </a:extLst>
           </p:cNvPr>
@@ -5330,14 +6079,14 @@
       </p:sp>
       <p:pic>
         <p:nvPicPr>
-          <p:cNvPr id="40" name=""/>
+          <p:cNvPr id="45" name=""/>
           <p:cNvPicPr>
             <a:picLocks xmlns:a="http://schemas.openxmlformats.org/drawingml/2006/main" noChangeAspect="1"/>
           </p:cNvPicPr>
           <p:nvPr/>
         </p:nvPicPr>
         <p:blipFill>
-          <a:blip xmlns:r="http://schemas.openxmlformats.org/officeDocument/2006/relationships" xmlns:a="http://schemas.openxmlformats.org/drawingml/2006/main" r:embed="R0450f1ee05b5433b"/>
+          <a:blip xmlns:r="http://schemas.openxmlformats.org/officeDocument/2006/relationships" xmlns:a="http://schemas.openxmlformats.org/drawingml/2006/main" r:embed="R987e2cfed6e34791"/>
           <a:stretch xmlns:a="http://schemas.openxmlformats.org/drawingml/2006/main"/>
         </p:blipFill>
         <p:spPr>
@@ -5355,7 +6104,7 @@
           <p:cNvPr id="3" name="">
             <a:extLst xmlns:a="http://schemas.openxmlformats.org/drawingml/2006/main">
               <a:ext uri="{FF2B5EF4-FFF2-40B4-BE49-F238E27FC236}">
-                <a16:creationId xmlns:a16="http://schemas.microsoft.com/office/drawing/2014/main" id="{594D9933-E7F6-42DF-92E5-DFA229706606}"/>
+                <a16:creationId xmlns:a16="http://schemas.microsoft.com/office/drawing/2014/main" id="{C4C8859E-0C1D-47E3-9026-4C9466687F15}"/>
               </a:ext>
             </a:extLst>
           </p:cNvPr>
@@ -5395,7 +6144,7 @@
                   <a:srgbClr val="102A63"/>
                 </a:solidFill>
               </a:rPr>
-              <a:t>ИТ-рекомендации укрепляют управляемость среды</a:t>
+              <a:t>Рекомендации: первоочередные меры</a:t>
             </a:r>
           </a:p>
         </p:txBody>
@@ -5405,7 +6154,7 @@
           <p:cNvPr id="4" name="">
             <a:extLst xmlns:a="http://schemas.openxmlformats.org/drawingml/2006/main">
               <a:ext uri="{FF2B5EF4-FFF2-40B4-BE49-F238E27FC236}">
-                <a16:creationId xmlns:a16="http://schemas.microsoft.com/office/drawing/2014/main" id="{0CBF9D17-A0D5-4BD0-9C77-D3E0996208C1}"/>
+                <a16:creationId xmlns:a16="http://schemas.microsoft.com/office/drawing/2014/main" id="{873149E4-E857-4BD9-A173-8EFB1E060F9C}"/>
               </a:ext>
             </a:extLst>
           </p:cNvPr>
@@ -5438,7 +6187,7 @@
           <p:cNvPr id="5" name="">
             <a:extLst xmlns:a="http://schemas.openxmlformats.org/drawingml/2006/main">
               <a:ext uri="{FF2B5EF4-FFF2-40B4-BE49-F238E27FC236}">
-                <a16:creationId xmlns:a16="http://schemas.microsoft.com/office/drawing/2014/main" id="{D903A163-5A8A-49BE-8780-71B714581E0E}"/>
+                <a16:creationId xmlns:a16="http://schemas.microsoft.com/office/drawing/2014/main" id="{27604267-0DA3-47FE-A392-CBDE32DD0D89}"/>
               </a:ext>
             </a:extLst>
           </p:cNvPr>
@@ -5469,7 +6218,7 @@
           <p:cNvPr id="6" name="">
             <a:extLst xmlns:a="http://schemas.openxmlformats.org/drawingml/2006/main">
               <a:ext uri="{FF2B5EF4-FFF2-40B4-BE49-F238E27FC236}">
-                <a16:creationId xmlns:a16="http://schemas.microsoft.com/office/drawing/2014/main" id="{32DC28AB-F08C-4987-9AFB-D3DAA07EA813}"/>
+                <a16:creationId xmlns:a16="http://schemas.microsoft.com/office/drawing/2014/main" id="{CE6D529E-6360-41B0-90AA-1DA4FAD49EBD}"/>
               </a:ext>
             </a:extLst>
           </p:cNvPr>
@@ -5519,7 +6268,7 @@
           <p:cNvPr id="7" name="">
             <a:extLst xmlns:a="http://schemas.openxmlformats.org/drawingml/2006/main">
               <a:ext uri="{FF2B5EF4-FFF2-40B4-BE49-F238E27FC236}">
-                <a16:creationId xmlns:a16="http://schemas.microsoft.com/office/drawing/2014/main" id="{41ABF210-2D34-4D31-BD70-365858AF49E5}"/>
+                <a16:creationId xmlns:a16="http://schemas.microsoft.com/office/drawing/2014/main" id="{05ED7B16-B5F8-48D9-A3B6-AC753ACCB297}"/>
               </a:ext>
             </a:extLst>
           </p:cNvPr>
@@ -5569,19 +6318,54 @@
           <p:cNvPr id="8" name="">
             <a:extLst xmlns:a="http://schemas.openxmlformats.org/drawingml/2006/main">
               <a:ext uri="{FF2B5EF4-FFF2-40B4-BE49-F238E27FC236}">
-                <a16:creationId xmlns:a16="http://schemas.microsoft.com/office/drawing/2014/main" id="{853A02EE-85B9-42D9-8521-73F6FACCEE22}"/>
-              </a:ext>
-            </a:extLst>
-          </p:cNvPr>
-          <p:cNvSpPr>
-            <a:spLocks xmlns:a="http://schemas.openxmlformats.org/drawingml/2006/main" noGrp="1"/>
-          </p:cNvSpPr>
-          <p:nvPr/>
-        </p:nvSpPr>
-        <p:spPr>
-          <a:xfrm xmlns:a="http://schemas.openxmlformats.org/drawingml/2006/main">
-            <a:off x="609600" y="1466850"/>
-            <a:ext cx="457200" cy="266700"/>
+                <a16:creationId xmlns:a16="http://schemas.microsoft.com/office/drawing/2014/main" id="{8CA1AC03-D7A1-481C-B250-729512BED85D}"/>
+              </a:ext>
+            </a:extLst>
+          </p:cNvPr>
+          <p:cNvSpPr>
+            <a:spLocks xmlns:a="http://schemas.openxmlformats.org/drawingml/2006/main" noGrp="1"/>
+          </p:cNvSpPr>
+          <p:nvPr/>
+        </p:nvSpPr>
+        <p:spPr>
+          <a:xfrm xmlns:a="http://schemas.openxmlformats.org/drawingml/2006/main">
+            <a:off x="552450" y="1428750"/>
+            <a:ext cx="5162550" cy="2143125"/>
+          </a:xfrm>
+          <a:prstGeom xmlns:a="http://schemas.openxmlformats.org/drawingml/2006/main" prst="roundRect">
+            <a:avLst>
+              <a:gd name="adj" fmla="val 3556"/>
+            </a:avLst>
+          </a:prstGeom>
+          <a:solidFill xmlns:a="http://schemas.openxmlformats.org/drawingml/2006/main">
+            <a:srgbClr val="FFFFFF"/>
+          </a:solidFill>
+          <a:ln xmlns:a="http://schemas.openxmlformats.org/drawingml/2006/main" w="9525">
+            <a:solidFill>
+              <a:srgbClr val="D7E0F2"/>
+            </a:solidFill>
+            <a:prstDash val="solid"/>
+          </a:ln>
+        </p:spPr>
+      </p:sp>
+      <p:sp>
+        <p:nvSpPr>
+          <p:cNvPr id="9" name="">
+            <a:extLst xmlns:a="http://schemas.openxmlformats.org/drawingml/2006/main">
+              <a:ext uri="{FF2B5EF4-FFF2-40B4-BE49-F238E27FC236}">
+                <a16:creationId xmlns:a16="http://schemas.microsoft.com/office/drawing/2014/main" id="{0DF7BB3B-0870-409C-BEF6-EA09197581D6}"/>
+              </a:ext>
+            </a:extLst>
+          </p:cNvPr>
+          <p:cNvSpPr>
+            <a:spLocks xmlns:a="http://schemas.openxmlformats.org/drawingml/2006/main" noGrp="1"/>
+          </p:cNvSpPr>
+          <p:nvPr/>
+        </p:nvSpPr>
+        <p:spPr>
+          <a:xfrm xmlns:a="http://schemas.openxmlformats.org/drawingml/2006/main">
+            <a:off x="742950" y="1600200"/>
+            <a:ext cx="361950" cy="247650"/>
           </a:xfrm>
           <a:prstGeom xmlns:a="http://schemas.openxmlformats.org/drawingml/2006/main" prst="rect">
             <a:avLst/>
@@ -5616,72 +6400,72 @@
       </p:sp>
       <p:sp>
         <p:nvSpPr>
-          <p:cNvPr id="9" name="">
-            <a:extLst xmlns:a="http://schemas.openxmlformats.org/drawingml/2006/main">
-              <a:ext uri="{FF2B5EF4-FFF2-40B4-BE49-F238E27FC236}">
-                <a16:creationId xmlns:a16="http://schemas.microsoft.com/office/drawing/2014/main" id="{4B3A5439-3FCE-456D-989A-3E0A4F02B673}"/>
-              </a:ext>
-            </a:extLst>
-          </p:cNvPr>
-          <p:cNvSpPr>
-            <a:spLocks xmlns:a="http://schemas.openxmlformats.org/drawingml/2006/main" noGrp="1"/>
-          </p:cNvSpPr>
-          <p:nvPr/>
-        </p:nvSpPr>
-        <p:spPr>
-          <a:xfrm xmlns:a="http://schemas.openxmlformats.org/drawingml/2006/main">
-            <a:off x="1200150" y="1409700"/>
-            <a:ext cx="9982200" cy="266700"/>
-          </a:xfrm>
-          <a:prstGeom xmlns:a="http://schemas.openxmlformats.org/drawingml/2006/main" prst="rect">
-            <a:avLst/>
-          </a:prstGeom>
-          <a:noFill xmlns:a="http://schemas.openxmlformats.org/drawingml/2006/main"/>
-          <a:ln xmlns:a="http://schemas.openxmlformats.org/drawingml/2006/main" w="0">
-            <a:noFill/>
-            <a:prstDash val="solid"/>
-          </a:ln>
-        </p:spPr>
-        <p:txBody>
-          <a:bodyPr xmlns:a="http://schemas.openxmlformats.org/drawingml/2006/main"/>
-          <a:lstStyle xmlns:a="http://schemas.openxmlformats.org/drawingml/2006/main"/>
-          <a:p xmlns:a="http://schemas.openxmlformats.org/drawingml/2006/main">
-            <a:pPr>
-              <a:defRPr sz="1425" b="1">
-                <a:solidFill>
-                  <a:srgbClr val="102A63"/>
-                </a:solidFill>
-              </a:defRPr>
-            </a:pPr>
-            <a:r>
-              <a:rPr sz="1425" b="1">
-                <a:solidFill>
-                  <a:srgbClr val="102A63"/>
-                </a:solidFill>
-              </a:rPr>
-              <a:t>{{IT_1_TITLE}}</a:t>
-            </a:r>
-          </a:p>
-        </p:txBody>
-      </p:sp>
-      <p:sp>
-        <p:nvSpPr>
           <p:cNvPr id="10" name="">
             <a:extLst xmlns:a="http://schemas.openxmlformats.org/drawingml/2006/main">
               <a:ext uri="{FF2B5EF4-FFF2-40B4-BE49-F238E27FC236}">
-                <a16:creationId xmlns:a16="http://schemas.microsoft.com/office/drawing/2014/main" id="{731E00D4-9F00-44BB-98C3-E2B2B39C7F1F}"/>
-              </a:ext>
-            </a:extLst>
-          </p:cNvPr>
-          <p:cNvSpPr>
-            <a:spLocks xmlns:a="http://schemas.openxmlformats.org/drawingml/2006/main" noGrp="1"/>
-          </p:cNvSpPr>
-          <p:nvPr/>
-        </p:nvSpPr>
-        <p:spPr>
-          <a:xfrm xmlns:a="http://schemas.openxmlformats.org/drawingml/2006/main">
-            <a:off x="1200150" y="1704975"/>
-            <a:ext cx="9982200" cy="400050"/>
+                <a16:creationId xmlns:a16="http://schemas.microsoft.com/office/drawing/2014/main" id="{2F91B07F-51E6-437A-8EF2-5DA97A8E0585}"/>
+              </a:ext>
+            </a:extLst>
+          </p:cNvPr>
+          <p:cNvSpPr>
+            <a:spLocks xmlns:a="http://schemas.openxmlformats.org/drawingml/2006/main" noGrp="1"/>
+          </p:cNvSpPr>
+          <p:nvPr/>
+        </p:nvSpPr>
+        <p:spPr>
+          <a:xfrm xmlns:a="http://schemas.openxmlformats.org/drawingml/2006/main">
+            <a:off x="1162050" y="1571625"/>
+            <a:ext cx="4324350" cy="400050"/>
+          </a:xfrm>
+          <a:prstGeom xmlns:a="http://schemas.openxmlformats.org/drawingml/2006/main" prst="rect">
+            <a:avLst/>
+          </a:prstGeom>
+          <a:noFill xmlns:a="http://schemas.openxmlformats.org/drawingml/2006/main"/>
+          <a:ln xmlns:a="http://schemas.openxmlformats.org/drawingml/2006/main" w="0">
+            <a:noFill/>
+            <a:prstDash val="solid"/>
+          </a:ln>
+        </p:spPr>
+        <p:txBody>
+          <a:bodyPr xmlns:a="http://schemas.openxmlformats.org/drawingml/2006/main"/>
+          <a:lstStyle xmlns:a="http://schemas.openxmlformats.org/drawingml/2006/main"/>
+          <a:p xmlns:a="http://schemas.openxmlformats.org/drawingml/2006/main">
+            <a:pPr>
+              <a:defRPr sz="1350" b="1">
+                <a:solidFill>
+                  <a:srgbClr val="102A63"/>
+                </a:solidFill>
+              </a:defRPr>
+            </a:pPr>
+            <a:r>
+              <a:rPr sz="1350" b="1">
+                <a:solidFill>
+                  <a:srgbClr val="102A63"/>
+                </a:solidFill>
+              </a:rPr>
+              <a:t>{{REC_1_TITLE}}</a:t>
+            </a:r>
+          </a:p>
+        </p:txBody>
+      </p:sp>
+      <p:sp>
+        <p:nvSpPr>
+          <p:cNvPr id="11" name="">
+            <a:extLst xmlns:a="http://schemas.openxmlformats.org/drawingml/2006/main">
+              <a:ext uri="{FF2B5EF4-FFF2-40B4-BE49-F238E27FC236}">
+                <a16:creationId xmlns:a16="http://schemas.microsoft.com/office/drawing/2014/main" id="{128C0232-2973-44DB-A694-B3F0E40596D8}"/>
+              </a:ext>
+            </a:extLst>
+          </p:cNvPr>
+          <p:cNvSpPr>
+            <a:spLocks xmlns:a="http://schemas.openxmlformats.org/drawingml/2006/main" noGrp="1"/>
+          </p:cNvSpPr>
+          <p:nvPr/>
+        </p:nvSpPr>
+        <p:spPr>
+          <a:xfrm xmlns:a="http://schemas.openxmlformats.org/drawingml/2006/main">
+            <a:off x="762000" y="2047875"/>
+            <a:ext cx="4743450" cy="552450"/>
           </a:xfrm>
           <a:prstGeom xmlns:a="http://schemas.openxmlformats.org/drawingml/2006/main" prst="rect">
             <a:avLst/>
@@ -5709,57 +6493,7 @@
                   <a:srgbClr val="596780"/>
                 </a:solidFill>
               </a:rPr>
-              <a:t>{{IT_1_ACTION}}</a:t>
-            </a:r>
-          </a:p>
-        </p:txBody>
-      </p:sp>
-      <p:sp>
-        <p:nvSpPr>
-          <p:cNvPr id="11" name="">
-            <a:extLst xmlns:a="http://schemas.openxmlformats.org/drawingml/2006/main">
-              <a:ext uri="{FF2B5EF4-FFF2-40B4-BE49-F238E27FC236}">
-                <a16:creationId xmlns:a16="http://schemas.microsoft.com/office/drawing/2014/main" id="{35CFD71D-A3AE-4C09-99E8-435379140FC0}"/>
-              </a:ext>
-            </a:extLst>
-          </p:cNvPr>
-          <p:cNvSpPr>
-            <a:spLocks xmlns:a="http://schemas.openxmlformats.org/drawingml/2006/main" noGrp="1"/>
-          </p:cNvSpPr>
-          <p:nvPr/>
-        </p:nvSpPr>
-        <p:spPr>
-          <a:xfrm xmlns:a="http://schemas.openxmlformats.org/drawingml/2006/main">
-            <a:off x="1200150" y="2171700"/>
-            <a:ext cx="742950" cy="190500"/>
-          </a:xfrm>
-          <a:prstGeom xmlns:a="http://schemas.openxmlformats.org/drawingml/2006/main" prst="rect">
-            <a:avLst/>
-          </a:prstGeom>
-          <a:noFill xmlns:a="http://schemas.openxmlformats.org/drawingml/2006/main"/>
-          <a:ln xmlns:a="http://schemas.openxmlformats.org/drawingml/2006/main" w="0">
-            <a:noFill/>
-            <a:prstDash val="solid"/>
-          </a:ln>
-        </p:spPr>
-        <p:txBody>
-          <a:bodyPr xmlns:a="http://schemas.openxmlformats.org/drawingml/2006/main"/>
-          <a:lstStyle xmlns:a="http://schemas.openxmlformats.org/drawingml/2006/main"/>
-          <a:p xmlns:a="http://schemas.openxmlformats.org/drawingml/2006/main">
-            <a:pPr>
-              <a:defRPr sz="975" b="1">
-                <a:solidFill>
-                  <a:srgbClr val="2048A8"/>
-                </a:solidFill>
-              </a:defRPr>
-            </a:pPr>
-            <a:r>
-              <a:rPr sz="975" b="1">
-                <a:solidFill>
-                  <a:srgbClr val="2048A8"/>
-                </a:solidFill>
-              </a:rPr>
-              <a:t>Решение</a:t>
+              <a:t>{{REC_1_ACTION}}</a:t>
             </a:r>
           </a:p>
         </p:txBody>
@@ -5769,169 +6503,19 @@
           <p:cNvPr id="12" name="">
             <a:extLst xmlns:a="http://schemas.openxmlformats.org/drawingml/2006/main">
               <a:ext uri="{FF2B5EF4-FFF2-40B4-BE49-F238E27FC236}">
-                <a16:creationId xmlns:a16="http://schemas.microsoft.com/office/drawing/2014/main" id="{085D3106-365B-4297-B641-C9DACE75B9B0}"/>
-              </a:ext>
-            </a:extLst>
-          </p:cNvPr>
-          <p:cNvSpPr>
-            <a:spLocks xmlns:a="http://schemas.openxmlformats.org/drawingml/2006/main" noGrp="1"/>
-          </p:cNvSpPr>
-          <p:nvPr/>
-        </p:nvSpPr>
-        <p:spPr>
-          <a:xfrm xmlns:a="http://schemas.openxmlformats.org/drawingml/2006/main">
-            <a:off x="1962150" y="2152650"/>
-            <a:ext cx="3810000" cy="323850"/>
-          </a:xfrm>
-          <a:prstGeom xmlns:a="http://schemas.openxmlformats.org/drawingml/2006/main" prst="rect">
-            <a:avLst/>
-          </a:prstGeom>
-          <a:noFill xmlns:a="http://schemas.openxmlformats.org/drawingml/2006/main"/>
-          <a:ln xmlns:a="http://schemas.openxmlformats.org/drawingml/2006/main" w="0">
-            <a:noFill/>
-            <a:prstDash val="solid"/>
-          </a:ln>
-        </p:spPr>
-        <p:txBody>
-          <a:bodyPr xmlns:a="http://schemas.openxmlformats.org/drawingml/2006/main"/>
-          <a:lstStyle xmlns:a="http://schemas.openxmlformats.org/drawingml/2006/main"/>
-          <a:p xmlns:a="http://schemas.openxmlformats.org/drawingml/2006/main">
-            <a:pPr>
-              <a:defRPr sz="1050" b="1">
-                <a:solidFill>
-                  <a:srgbClr val="102A63"/>
-                </a:solidFill>
-              </a:defRPr>
-            </a:pPr>
-            <a:r>
-              <a:rPr sz="1050" b="1">
-                <a:solidFill>
-                  <a:srgbClr val="102A63"/>
-                </a:solidFill>
-              </a:rPr>
-              <a:t>{{IT_1_SOLUTION}}</a:t>
-            </a:r>
-          </a:p>
-        </p:txBody>
-      </p:sp>
-      <p:sp>
-        <p:nvSpPr>
-          <p:cNvPr id="13" name="">
-            <a:extLst xmlns:a="http://schemas.openxmlformats.org/drawingml/2006/main">
-              <a:ext uri="{FF2B5EF4-FFF2-40B4-BE49-F238E27FC236}">
-                <a16:creationId xmlns:a16="http://schemas.microsoft.com/office/drawing/2014/main" id="{BBDCC388-D6D5-45F4-AB5F-72B817F58162}"/>
-              </a:ext>
-            </a:extLst>
-          </p:cNvPr>
-          <p:cNvSpPr>
-            <a:spLocks xmlns:a="http://schemas.openxmlformats.org/drawingml/2006/main" noGrp="1"/>
-          </p:cNvSpPr>
-          <p:nvPr/>
-        </p:nvSpPr>
-        <p:spPr>
-          <a:xfrm xmlns:a="http://schemas.openxmlformats.org/drawingml/2006/main">
-            <a:off x="6019800" y="2171700"/>
-            <a:ext cx="1104900" cy="190500"/>
-          </a:xfrm>
-          <a:prstGeom xmlns:a="http://schemas.openxmlformats.org/drawingml/2006/main" prst="rect">
-            <a:avLst/>
-          </a:prstGeom>
-          <a:noFill xmlns:a="http://schemas.openxmlformats.org/drawingml/2006/main"/>
-          <a:ln xmlns:a="http://schemas.openxmlformats.org/drawingml/2006/main" w="0">
-            <a:noFill/>
-            <a:prstDash val="solid"/>
-          </a:ln>
-        </p:spPr>
-        <p:txBody>
-          <a:bodyPr xmlns:a="http://schemas.openxmlformats.org/drawingml/2006/main"/>
-          <a:lstStyle xmlns:a="http://schemas.openxmlformats.org/drawingml/2006/main"/>
-          <a:p xmlns:a="http://schemas.openxmlformats.org/drawingml/2006/main">
-            <a:pPr>
-              <a:defRPr sz="975" b="1">
-                <a:solidFill>
-                  <a:srgbClr val="2048A8"/>
-                </a:solidFill>
-              </a:defRPr>
-            </a:pPr>
-            <a:r>
-              <a:rPr sz="975" b="1">
-                <a:solidFill>
-                  <a:srgbClr val="2048A8"/>
-                </a:solidFill>
-              </a:rPr>
-              <a:t>Производители</a:t>
-            </a:r>
-          </a:p>
-        </p:txBody>
-      </p:sp>
-      <p:sp>
-        <p:nvSpPr>
-          <p:cNvPr id="14" name="">
-            <a:extLst xmlns:a="http://schemas.openxmlformats.org/drawingml/2006/main">
-              <a:ext uri="{FF2B5EF4-FFF2-40B4-BE49-F238E27FC236}">
-                <a16:creationId xmlns:a16="http://schemas.microsoft.com/office/drawing/2014/main" id="{11338DC1-3D6B-4175-ADC6-FBC4B06DB760}"/>
-              </a:ext>
-            </a:extLst>
-          </p:cNvPr>
-          <p:cNvSpPr>
-            <a:spLocks xmlns:a="http://schemas.openxmlformats.org/drawingml/2006/main" noGrp="1"/>
-          </p:cNvSpPr>
-          <p:nvPr/>
-        </p:nvSpPr>
-        <p:spPr>
-          <a:xfrm xmlns:a="http://schemas.openxmlformats.org/drawingml/2006/main">
-            <a:off x="7181850" y="2152650"/>
-            <a:ext cx="4000500" cy="323850"/>
-          </a:xfrm>
-          <a:prstGeom xmlns:a="http://schemas.openxmlformats.org/drawingml/2006/main" prst="rect">
-            <a:avLst/>
-          </a:prstGeom>
-          <a:noFill xmlns:a="http://schemas.openxmlformats.org/drawingml/2006/main"/>
-          <a:ln xmlns:a="http://schemas.openxmlformats.org/drawingml/2006/main" w="0">
-            <a:noFill/>
-            <a:prstDash val="solid"/>
-          </a:ln>
-        </p:spPr>
-        <p:txBody>
-          <a:bodyPr xmlns:a="http://schemas.openxmlformats.org/drawingml/2006/main"/>
-          <a:lstStyle xmlns:a="http://schemas.openxmlformats.org/drawingml/2006/main"/>
-          <a:p xmlns:a="http://schemas.openxmlformats.org/drawingml/2006/main">
-            <a:pPr>
-              <a:defRPr sz="1050" b="1">
-                <a:solidFill>
-                  <a:srgbClr val="102A63"/>
-                </a:solidFill>
-              </a:defRPr>
-            </a:pPr>
-            <a:r>
-              <a:rPr sz="1050" b="1">
-                <a:solidFill>
-                  <a:srgbClr val="102A63"/>
-                </a:solidFill>
-              </a:rPr>
-              <a:t>{{IT_1_VENDORS}}</a:t>
-            </a:r>
-          </a:p>
-        </p:txBody>
-      </p:sp>
-      <p:sp>
-        <p:nvSpPr>
-          <p:cNvPr id="15" name="">
-            <a:extLst xmlns:a="http://schemas.openxmlformats.org/drawingml/2006/main">
-              <a:ext uri="{FF2B5EF4-FFF2-40B4-BE49-F238E27FC236}">
-                <a16:creationId xmlns:a16="http://schemas.microsoft.com/office/drawing/2014/main" id="{D0FBBB60-61BF-4B06-805C-5F3A35C5079D}"/>
-              </a:ext>
-            </a:extLst>
-          </p:cNvPr>
-          <p:cNvSpPr>
-            <a:spLocks xmlns:a="http://schemas.openxmlformats.org/drawingml/2006/main" noGrp="1"/>
-          </p:cNvSpPr>
-          <p:nvPr/>
-        </p:nvSpPr>
-        <p:spPr>
-          <a:xfrm xmlns:a="http://schemas.openxmlformats.org/drawingml/2006/main">
-            <a:off x="1200150" y="2552700"/>
-            <a:ext cx="9982200" cy="9525"/>
+                <a16:creationId xmlns:a16="http://schemas.microsoft.com/office/drawing/2014/main" id="{F14B5D41-AB17-4852-A570-26DC3CD303C4}"/>
+              </a:ext>
+            </a:extLst>
+          </p:cNvPr>
+          <p:cNvSpPr>
+            <a:spLocks xmlns:a="http://schemas.openxmlformats.org/drawingml/2006/main" noGrp="1"/>
+          </p:cNvSpPr>
+          <p:nvPr/>
+        </p:nvSpPr>
+        <p:spPr>
+          <a:xfrm xmlns:a="http://schemas.openxmlformats.org/drawingml/2006/main">
+            <a:off x="762000" y="2686050"/>
+            <a:ext cx="4743450" cy="9525"/>
           </a:xfrm>
           <a:prstGeom xmlns:a="http://schemas.openxmlformats.org/drawingml/2006/main" prst="rect">
             <a:avLst/>
@@ -5947,22 +6531,257 @@
       </p:sp>
       <p:sp>
         <p:nvSpPr>
+          <p:cNvPr id="13" name="">
+            <a:extLst xmlns:a="http://schemas.openxmlformats.org/drawingml/2006/main">
+              <a:ext uri="{FF2B5EF4-FFF2-40B4-BE49-F238E27FC236}">
+                <a16:creationId xmlns:a16="http://schemas.microsoft.com/office/drawing/2014/main" id="{A9BCBB43-5AE0-4C9F-82BA-8215BD5583CC}"/>
+              </a:ext>
+            </a:extLst>
+          </p:cNvPr>
+          <p:cNvSpPr>
+            <a:spLocks xmlns:a="http://schemas.openxmlformats.org/drawingml/2006/main" noGrp="1"/>
+          </p:cNvSpPr>
+          <p:nvPr/>
+        </p:nvSpPr>
+        <p:spPr>
+          <a:xfrm xmlns:a="http://schemas.openxmlformats.org/drawingml/2006/main">
+            <a:off x="762000" y="2819400"/>
+            <a:ext cx="2171700" cy="171450"/>
+          </a:xfrm>
+          <a:prstGeom xmlns:a="http://schemas.openxmlformats.org/drawingml/2006/main" prst="rect">
+            <a:avLst/>
+          </a:prstGeom>
+          <a:noFill xmlns:a="http://schemas.openxmlformats.org/drawingml/2006/main"/>
+          <a:ln xmlns:a="http://schemas.openxmlformats.org/drawingml/2006/main" w="0">
+            <a:noFill/>
+            <a:prstDash val="solid"/>
+          </a:ln>
+        </p:spPr>
+        <p:txBody>
+          <a:bodyPr xmlns:a="http://schemas.openxmlformats.org/drawingml/2006/main"/>
+          <a:lstStyle xmlns:a="http://schemas.openxmlformats.org/drawingml/2006/main"/>
+          <a:p xmlns:a="http://schemas.openxmlformats.org/drawingml/2006/main">
+            <a:pPr>
+              <a:defRPr sz="900" b="1">
+                <a:solidFill>
+                  <a:srgbClr val="2048A8"/>
+                </a:solidFill>
+              </a:defRPr>
+            </a:pPr>
+            <a:r>
+              <a:rPr sz="900" b="1">
+                <a:solidFill>
+                  <a:srgbClr val="2048A8"/>
+                </a:solidFill>
+              </a:rPr>
+              <a:t>Решение</a:t>
+            </a:r>
+          </a:p>
+        </p:txBody>
+      </p:sp>
+      <p:sp>
+        <p:nvSpPr>
+          <p:cNvPr id="14" name="">
+            <a:extLst xmlns:a="http://schemas.openxmlformats.org/drawingml/2006/main">
+              <a:ext uri="{FF2B5EF4-FFF2-40B4-BE49-F238E27FC236}">
+                <a16:creationId xmlns:a16="http://schemas.microsoft.com/office/drawing/2014/main" id="{39FE9766-07DD-4362-AB9D-EC885ED88A14}"/>
+              </a:ext>
+            </a:extLst>
+          </p:cNvPr>
+          <p:cNvSpPr>
+            <a:spLocks xmlns:a="http://schemas.openxmlformats.org/drawingml/2006/main" noGrp="1"/>
+          </p:cNvSpPr>
+          <p:nvPr/>
+        </p:nvSpPr>
+        <p:spPr>
+          <a:xfrm xmlns:a="http://schemas.openxmlformats.org/drawingml/2006/main">
+            <a:off x="762000" y="3009900"/>
+            <a:ext cx="2266950" cy="409575"/>
+          </a:xfrm>
+          <a:prstGeom xmlns:a="http://schemas.openxmlformats.org/drawingml/2006/main" prst="rect">
+            <a:avLst/>
+          </a:prstGeom>
+          <a:noFill xmlns:a="http://schemas.openxmlformats.org/drawingml/2006/main"/>
+          <a:ln xmlns:a="http://schemas.openxmlformats.org/drawingml/2006/main" w="0">
+            <a:noFill/>
+            <a:prstDash val="solid"/>
+          </a:ln>
+        </p:spPr>
+        <p:txBody>
+          <a:bodyPr xmlns:a="http://schemas.openxmlformats.org/drawingml/2006/main"/>
+          <a:lstStyle xmlns:a="http://schemas.openxmlformats.org/drawingml/2006/main"/>
+          <a:p xmlns:a="http://schemas.openxmlformats.org/drawingml/2006/main">
+            <a:pPr>
+              <a:defRPr sz="1050" b="1">
+                <a:solidFill>
+                  <a:srgbClr val="102A63"/>
+                </a:solidFill>
+              </a:defRPr>
+            </a:pPr>
+            <a:r>
+              <a:rPr sz="1050" b="1">
+                <a:solidFill>
+                  <a:srgbClr val="102A63"/>
+                </a:solidFill>
+              </a:rPr>
+              <a:t>{{REC_1_SOLUTION}}</a:t>
+            </a:r>
+          </a:p>
+        </p:txBody>
+      </p:sp>
+      <p:sp>
+        <p:nvSpPr>
+          <p:cNvPr id="15" name="">
+            <a:extLst xmlns:a="http://schemas.openxmlformats.org/drawingml/2006/main">
+              <a:ext uri="{FF2B5EF4-FFF2-40B4-BE49-F238E27FC236}">
+                <a16:creationId xmlns:a16="http://schemas.microsoft.com/office/drawing/2014/main" id="{C1F18583-243F-4694-B4E2-EC72CF4B5B70}"/>
+              </a:ext>
+            </a:extLst>
+          </p:cNvPr>
+          <p:cNvSpPr>
+            <a:spLocks xmlns:a="http://schemas.openxmlformats.org/drawingml/2006/main" noGrp="1"/>
+          </p:cNvSpPr>
+          <p:nvPr/>
+        </p:nvSpPr>
+        <p:spPr>
+          <a:xfrm xmlns:a="http://schemas.openxmlformats.org/drawingml/2006/main">
+            <a:off x="3219450" y="2819400"/>
+            <a:ext cx="2266950" cy="171450"/>
+          </a:xfrm>
+          <a:prstGeom xmlns:a="http://schemas.openxmlformats.org/drawingml/2006/main" prst="rect">
+            <a:avLst/>
+          </a:prstGeom>
+          <a:noFill xmlns:a="http://schemas.openxmlformats.org/drawingml/2006/main"/>
+          <a:ln xmlns:a="http://schemas.openxmlformats.org/drawingml/2006/main" w="0">
+            <a:noFill/>
+            <a:prstDash val="solid"/>
+          </a:ln>
+        </p:spPr>
+        <p:txBody>
+          <a:bodyPr xmlns:a="http://schemas.openxmlformats.org/drawingml/2006/main"/>
+          <a:lstStyle xmlns:a="http://schemas.openxmlformats.org/drawingml/2006/main"/>
+          <a:p xmlns:a="http://schemas.openxmlformats.org/drawingml/2006/main">
+            <a:pPr>
+              <a:defRPr sz="900" b="1">
+                <a:solidFill>
+                  <a:srgbClr val="2048A8"/>
+                </a:solidFill>
+              </a:defRPr>
+            </a:pPr>
+            <a:r>
+              <a:rPr sz="900" b="1">
+                <a:solidFill>
+                  <a:srgbClr val="2048A8"/>
+                </a:solidFill>
+              </a:rPr>
+              <a:t>Производители</a:t>
+            </a:r>
+          </a:p>
+        </p:txBody>
+      </p:sp>
+      <p:sp>
+        <p:nvSpPr>
           <p:cNvPr id="16" name="">
             <a:extLst xmlns:a="http://schemas.openxmlformats.org/drawingml/2006/main">
               <a:ext uri="{FF2B5EF4-FFF2-40B4-BE49-F238E27FC236}">
-                <a16:creationId xmlns:a16="http://schemas.microsoft.com/office/drawing/2014/main" id="{E037C160-F9AA-43EF-A493-5E88FB2B4D11}"/>
-              </a:ext>
-            </a:extLst>
-          </p:cNvPr>
-          <p:cNvSpPr>
-            <a:spLocks xmlns:a="http://schemas.openxmlformats.org/drawingml/2006/main" noGrp="1"/>
-          </p:cNvSpPr>
-          <p:nvPr/>
-        </p:nvSpPr>
-        <p:spPr>
-          <a:xfrm xmlns:a="http://schemas.openxmlformats.org/drawingml/2006/main">
-            <a:off x="609600" y="2724150"/>
-            <a:ext cx="457200" cy="266700"/>
+                <a16:creationId xmlns:a16="http://schemas.microsoft.com/office/drawing/2014/main" id="{20AB6DB5-E0A8-470D-A90F-6953A6581459}"/>
+              </a:ext>
+            </a:extLst>
+          </p:cNvPr>
+          <p:cNvSpPr>
+            <a:spLocks xmlns:a="http://schemas.openxmlformats.org/drawingml/2006/main" noGrp="1"/>
+          </p:cNvSpPr>
+          <p:nvPr/>
+        </p:nvSpPr>
+        <p:spPr>
+          <a:xfrm xmlns:a="http://schemas.openxmlformats.org/drawingml/2006/main">
+            <a:off x="3219450" y="3009900"/>
+            <a:ext cx="2266950" cy="409575"/>
+          </a:xfrm>
+          <a:prstGeom xmlns:a="http://schemas.openxmlformats.org/drawingml/2006/main" prst="rect">
+            <a:avLst/>
+          </a:prstGeom>
+          <a:noFill xmlns:a="http://schemas.openxmlformats.org/drawingml/2006/main"/>
+          <a:ln xmlns:a="http://schemas.openxmlformats.org/drawingml/2006/main" w="0">
+            <a:noFill/>
+            <a:prstDash val="solid"/>
+          </a:ln>
+        </p:spPr>
+        <p:txBody>
+          <a:bodyPr xmlns:a="http://schemas.openxmlformats.org/drawingml/2006/main"/>
+          <a:lstStyle xmlns:a="http://schemas.openxmlformats.org/drawingml/2006/main"/>
+          <a:p xmlns:a="http://schemas.openxmlformats.org/drawingml/2006/main">
+            <a:pPr>
+              <a:defRPr sz="1050" b="1">
+                <a:solidFill>
+                  <a:srgbClr val="102A63"/>
+                </a:solidFill>
+              </a:defRPr>
+            </a:pPr>
+            <a:r>
+              <a:rPr sz="1050" b="1">
+                <a:solidFill>
+                  <a:srgbClr val="102A63"/>
+                </a:solidFill>
+              </a:rPr>
+              <a:t>{{REC_1_VENDORS}}</a:t>
+            </a:r>
+          </a:p>
+        </p:txBody>
+      </p:sp>
+      <p:sp>
+        <p:nvSpPr>
+          <p:cNvPr id="17" name="">
+            <a:extLst xmlns:a="http://schemas.openxmlformats.org/drawingml/2006/main">
+              <a:ext uri="{FF2B5EF4-FFF2-40B4-BE49-F238E27FC236}">
+                <a16:creationId xmlns:a16="http://schemas.microsoft.com/office/drawing/2014/main" id="{FCC6B26B-CFF3-4C7B-A60B-5A707CCB9CCB}"/>
+              </a:ext>
+            </a:extLst>
+          </p:cNvPr>
+          <p:cNvSpPr>
+            <a:spLocks xmlns:a="http://schemas.openxmlformats.org/drawingml/2006/main" noGrp="1"/>
+          </p:cNvSpPr>
+          <p:nvPr/>
+        </p:nvSpPr>
+        <p:spPr>
+          <a:xfrm xmlns:a="http://schemas.openxmlformats.org/drawingml/2006/main">
+            <a:off x="6076950" y="1428750"/>
+            <a:ext cx="5162550" cy="2143125"/>
+          </a:xfrm>
+          <a:prstGeom xmlns:a="http://schemas.openxmlformats.org/drawingml/2006/main" prst="roundRect">
+            <a:avLst>
+              <a:gd name="adj" fmla="val 3556"/>
+            </a:avLst>
+          </a:prstGeom>
+          <a:solidFill xmlns:a="http://schemas.openxmlformats.org/drawingml/2006/main">
+            <a:srgbClr val="FFFFFF"/>
+          </a:solidFill>
+          <a:ln xmlns:a="http://schemas.openxmlformats.org/drawingml/2006/main" w="9525">
+            <a:solidFill>
+              <a:srgbClr val="D7E0F2"/>
+            </a:solidFill>
+            <a:prstDash val="solid"/>
+          </a:ln>
+        </p:spPr>
+      </p:sp>
+      <p:sp>
+        <p:nvSpPr>
+          <p:cNvPr id="18" name="">
+            <a:extLst xmlns:a="http://schemas.openxmlformats.org/drawingml/2006/main">
+              <a:ext uri="{FF2B5EF4-FFF2-40B4-BE49-F238E27FC236}">
+                <a16:creationId xmlns:a16="http://schemas.microsoft.com/office/drawing/2014/main" id="{CB5681D5-6C2B-4D7E-B1F7-4B2F6B77BAAB}"/>
+              </a:ext>
+            </a:extLst>
+          </p:cNvPr>
+          <p:cNvSpPr>
+            <a:spLocks xmlns:a="http://schemas.openxmlformats.org/drawingml/2006/main" noGrp="1"/>
+          </p:cNvSpPr>
+          <p:nvPr/>
+        </p:nvSpPr>
+        <p:spPr>
+          <a:xfrm xmlns:a="http://schemas.openxmlformats.org/drawingml/2006/main">
+            <a:off x="6267450" y="1600200"/>
+            <a:ext cx="361950" cy="247650"/>
           </a:xfrm>
           <a:prstGeom xmlns:a="http://schemas.openxmlformats.org/drawingml/2006/main" prst="rect">
             <a:avLst/>
@@ -5997,72 +6816,72 @@
       </p:sp>
       <p:sp>
         <p:nvSpPr>
-          <p:cNvPr id="17" name="">
-            <a:extLst xmlns:a="http://schemas.openxmlformats.org/drawingml/2006/main">
-              <a:ext uri="{FF2B5EF4-FFF2-40B4-BE49-F238E27FC236}">
-                <a16:creationId xmlns:a16="http://schemas.microsoft.com/office/drawing/2014/main" id="{BCD6E0ED-43BA-4D7D-9AED-B2603D78A012}"/>
-              </a:ext>
-            </a:extLst>
-          </p:cNvPr>
-          <p:cNvSpPr>
-            <a:spLocks xmlns:a="http://schemas.openxmlformats.org/drawingml/2006/main" noGrp="1"/>
-          </p:cNvSpPr>
-          <p:nvPr/>
-        </p:nvSpPr>
-        <p:spPr>
-          <a:xfrm xmlns:a="http://schemas.openxmlformats.org/drawingml/2006/main">
-            <a:off x="1200150" y="2667000"/>
-            <a:ext cx="9982200" cy="266700"/>
-          </a:xfrm>
-          <a:prstGeom xmlns:a="http://schemas.openxmlformats.org/drawingml/2006/main" prst="rect">
-            <a:avLst/>
-          </a:prstGeom>
-          <a:noFill xmlns:a="http://schemas.openxmlformats.org/drawingml/2006/main"/>
-          <a:ln xmlns:a="http://schemas.openxmlformats.org/drawingml/2006/main" w="0">
-            <a:noFill/>
-            <a:prstDash val="solid"/>
-          </a:ln>
-        </p:spPr>
-        <p:txBody>
-          <a:bodyPr xmlns:a="http://schemas.openxmlformats.org/drawingml/2006/main"/>
-          <a:lstStyle xmlns:a="http://schemas.openxmlformats.org/drawingml/2006/main"/>
-          <a:p xmlns:a="http://schemas.openxmlformats.org/drawingml/2006/main">
-            <a:pPr>
-              <a:defRPr sz="1425" b="1">
-                <a:solidFill>
-                  <a:srgbClr val="102A63"/>
-                </a:solidFill>
-              </a:defRPr>
-            </a:pPr>
-            <a:r>
-              <a:rPr sz="1425" b="1">
-                <a:solidFill>
-                  <a:srgbClr val="102A63"/>
-                </a:solidFill>
-              </a:rPr>
-              <a:t>{{IT_2_TITLE}}</a:t>
-            </a:r>
-          </a:p>
-        </p:txBody>
-      </p:sp>
-      <p:sp>
-        <p:nvSpPr>
-          <p:cNvPr id="18" name="">
-            <a:extLst xmlns:a="http://schemas.openxmlformats.org/drawingml/2006/main">
-              <a:ext uri="{FF2B5EF4-FFF2-40B4-BE49-F238E27FC236}">
-                <a16:creationId xmlns:a16="http://schemas.microsoft.com/office/drawing/2014/main" id="{092723CB-97C3-4B7A-8D8F-9D5994800A9A}"/>
-              </a:ext>
-            </a:extLst>
-          </p:cNvPr>
-          <p:cNvSpPr>
-            <a:spLocks xmlns:a="http://schemas.openxmlformats.org/drawingml/2006/main" noGrp="1"/>
-          </p:cNvSpPr>
-          <p:nvPr/>
-        </p:nvSpPr>
-        <p:spPr>
-          <a:xfrm xmlns:a="http://schemas.openxmlformats.org/drawingml/2006/main">
-            <a:off x="1200150" y="2962275"/>
-            <a:ext cx="9982200" cy="400050"/>
+          <p:cNvPr id="19" name="">
+            <a:extLst xmlns:a="http://schemas.openxmlformats.org/drawingml/2006/main">
+              <a:ext uri="{FF2B5EF4-FFF2-40B4-BE49-F238E27FC236}">
+                <a16:creationId xmlns:a16="http://schemas.microsoft.com/office/drawing/2014/main" id="{4C724C0F-2B2F-4D28-9EC9-938F2BF138BB}"/>
+              </a:ext>
+            </a:extLst>
+          </p:cNvPr>
+          <p:cNvSpPr>
+            <a:spLocks xmlns:a="http://schemas.openxmlformats.org/drawingml/2006/main" noGrp="1"/>
+          </p:cNvSpPr>
+          <p:nvPr/>
+        </p:nvSpPr>
+        <p:spPr>
+          <a:xfrm xmlns:a="http://schemas.openxmlformats.org/drawingml/2006/main">
+            <a:off x="6686550" y="1571625"/>
+            <a:ext cx="4324350" cy="400050"/>
+          </a:xfrm>
+          <a:prstGeom xmlns:a="http://schemas.openxmlformats.org/drawingml/2006/main" prst="rect">
+            <a:avLst/>
+          </a:prstGeom>
+          <a:noFill xmlns:a="http://schemas.openxmlformats.org/drawingml/2006/main"/>
+          <a:ln xmlns:a="http://schemas.openxmlformats.org/drawingml/2006/main" w="0">
+            <a:noFill/>
+            <a:prstDash val="solid"/>
+          </a:ln>
+        </p:spPr>
+        <p:txBody>
+          <a:bodyPr xmlns:a="http://schemas.openxmlformats.org/drawingml/2006/main"/>
+          <a:lstStyle xmlns:a="http://schemas.openxmlformats.org/drawingml/2006/main"/>
+          <a:p xmlns:a="http://schemas.openxmlformats.org/drawingml/2006/main">
+            <a:pPr>
+              <a:defRPr sz="1350" b="1">
+                <a:solidFill>
+                  <a:srgbClr val="102A63"/>
+                </a:solidFill>
+              </a:defRPr>
+            </a:pPr>
+            <a:r>
+              <a:rPr sz="1350" b="1">
+                <a:solidFill>
+                  <a:srgbClr val="102A63"/>
+                </a:solidFill>
+              </a:rPr>
+              <a:t>{{REC_2_TITLE}}</a:t>
+            </a:r>
+          </a:p>
+        </p:txBody>
+      </p:sp>
+      <p:sp>
+        <p:nvSpPr>
+          <p:cNvPr id="20" name="">
+            <a:extLst xmlns:a="http://schemas.openxmlformats.org/drawingml/2006/main">
+              <a:ext uri="{FF2B5EF4-FFF2-40B4-BE49-F238E27FC236}">
+                <a16:creationId xmlns:a16="http://schemas.microsoft.com/office/drawing/2014/main" id="{61F40CB5-3AEC-4ADF-B645-C7B71CC212FF}"/>
+              </a:ext>
+            </a:extLst>
+          </p:cNvPr>
+          <p:cNvSpPr>
+            <a:spLocks xmlns:a="http://schemas.openxmlformats.org/drawingml/2006/main" noGrp="1"/>
+          </p:cNvSpPr>
+          <p:nvPr/>
+        </p:nvSpPr>
+        <p:spPr>
+          <a:xfrm xmlns:a="http://schemas.openxmlformats.org/drawingml/2006/main">
+            <a:off x="6286500" y="2047875"/>
+            <a:ext cx="4743450" cy="552450"/>
           </a:xfrm>
           <a:prstGeom xmlns:a="http://schemas.openxmlformats.org/drawingml/2006/main" prst="rect">
             <a:avLst/>
@@ -6090,107 +6909,7 @@
                   <a:srgbClr val="596780"/>
                 </a:solidFill>
               </a:rPr>
-              <a:t>{{IT_2_ACTION}}</a:t>
-            </a:r>
-          </a:p>
-        </p:txBody>
-      </p:sp>
-      <p:sp>
-        <p:nvSpPr>
-          <p:cNvPr id="19" name="">
-            <a:extLst xmlns:a="http://schemas.openxmlformats.org/drawingml/2006/main">
-              <a:ext uri="{FF2B5EF4-FFF2-40B4-BE49-F238E27FC236}">
-                <a16:creationId xmlns:a16="http://schemas.microsoft.com/office/drawing/2014/main" id="{2E187365-00DF-43FE-AC5B-C019129D57A9}"/>
-              </a:ext>
-            </a:extLst>
-          </p:cNvPr>
-          <p:cNvSpPr>
-            <a:spLocks xmlns:a="http://schemas.openxmlformats.org/drawingml/2006/main" noGrp="1"/>
-          </p:cNvSpPr>
-          <p:nvPr/>
-        </p:nvSpPr>
-        <p:spPr>
-          <a:xfrm xmlns:a="http://schemas.openxmlformats.org/drawingml/2006/main">
-            <a:off x="1200150" y="3429000"/>
-            <a:ext cx="742950" cy="190500"/>
-          </a:xfrm>
-          <a:prstGeom xmlns:a="http://schemas.openxmlformats.org/drawingml/2006/main" prst="rect">
-            <a:avLst/>
-          </a:prstGeom>
-          <a:noFill xmlns:a="http://schemas.openxmlformats.org/drawingml/2006/main"/>
-          <a:ln xmlns:a="http://schemas.openxmlformats.org/drawingml/2006/main" w="0">
-            <a:noFill/>
-            <a:prstDash val="solid"/>
-          </a:ln>
-        </p:spPr>
-        <p:txBody>
-          <a:bodyPr xmlns:a="http://schemas.openxmlformats.org/drawingml/2006/main"/>
-          <a:lstStyle xmlns:a="http://schemas.openxmlformats.org/drawingml/2006/main"/>
-          <a:p xmlns:a="http://schemas.openxmlformats.org/drawingml/2006/main">
-            <a:pPr>
-              <a:defRPr sz="975" b="1">
-                <a:solidFill>
-                  <a:srgbClr val="2048A8"/>
-                </a:solidFill>
-              </a:defRPr>
-            </a:pPr>
-            <a:r>
-              <a:rPr sz="975" b="1">
-                <a:solidFill>
-                  <a:srgbClr val="2048A8"/>
-                </a:solidFill>
-              </a:rPr>
-              <a:t>Решение</a:t>
-            </a:r>
-          </a:p>
-        </p:txBody>
-      </p:sp>
-      <p:sp>
-        <p:nvSpPr>
-          <p:cNvPr id="20" name="">
-            <a:extLst xmlns:a="http://schemas.openxmlformats.org/drawingml/2006/main">
-              <a:ext uri="{FF2B5EF4-FFF2-40B4-BE49-F238E27FC236}">
-                <a16:creationId xmlns:a16="http://schemas.microsoft.com/office/drawing/2014/main" id="{BA506CE6-6139-46F4-949A-1AB79E3C1634}"/>
-              </a:ext>
-            </a:extLst>
-          </p:cNvPr>
-          <p:cNvSpPr>
-            <a:spLocks xmlns:a="http://schemas.openxmlformats.org/drawingml/2006/main" noGrp="1"/>
-          </p:cNvSpPr>
-          <p:nvPr/>
-        </p:nvSpPr>
-        <p:spPr>
-          <a:xfrm xmlns:a="http://schemas.openxmlformats.org/drawingml/2006/main">
-            <a:off x="1962150" y="3409950"/>
-            <a:ext cx="3810000" cy="323850"/>
-          </a:xfrm>
-          <a:prstGeom xmlns:a="http://schemas.openxmlformats.org/drawingml/2006/main" prst="rect">
-            <a:avLst/>
-          </a:prstGeom>
-          <a:noFill xmlns:a="http://schemas.openxmlformats.org/drawingml/2006/main"/>
-          <a:ln xmlns:a="http://schemas.openxmlformats.org/drawingml/2006/main" w="0">
-            <a:noFill/>
-            <a:prstDash val="solid"/>
-          </a:ln>
-        </p:spPr>
-        <p:txBody>
-          <a:bodyPr xmlns:a="http://schemas.openxmlformats.org/drawingml/2006/main"/>
-          <a:lstStyle xmlns:a="http://schemas.openxmlformats.org/drawingml/2006/main"/>
-          <a:p xmlns:a="http://schemas.openxmlformats.org/drawingml/2006/main">
-            <a:pPr>
-              <a:defRPr sz="1050" b="1">
-                <a:solidFill>
-                  <a:srgbClr val="102A63"/>
-                </a:solidFill>
-              </a:defRPr>
-            </a:pPr>
-            <a:r>
-              <a:rPr sz="1050" b="1">
-                <a:solidFill>
-                  <a:srgbClr val="102A63"/>
-                </a:solidFill>
-              </a:rPr>
-              <a:t>{{IT_2_SOLUTION}}</a:t>
+              <a:t>{{REC_2_ACTION}}</a:t>
             </a:r>
           </a:p>
         </p:txBody>
@@ -6200,119 +6919,19 @@
           <p:cNvPr id="21" name="">
             <a:extLst xmlns:a="http://schemas.openxmlformats.org/drawingml/2006/main">
               <a:ext uri="{FF2B5EF4-FFF2-40B4-BE49-F238E27FC236}">
-                <a16:creationId xmlns:a16="http://schemas.microsoft.com/office/drawing/2014/main" id="{05E06517-937C-4AD3-B217-8EA5DD7BE668}"/>
-              </a:ext>
-            </a:extLst>
-          </p:cNvPr>
-          <p:cNvSpPr>
-            <a:spLocks xmlns:a="http://schemas.openxmlformats.org/drawingml/2006/main" noGrp="1"/>
-          </p:cNvSpPr>
-          <p:nvPr/>
-        </p:nvSpPr>
-        <p:spPr>
-          <a:xfrm xmlns:a="http://schemas.openxmlformats.org/drawingml/2006/main">
-            <a:off x="6019800" y="3429000"/>
-            <a:ext cx="1104900" cy="190500"/>
-          </a:xfrm>
-          <a:prstGeom xmlns:a="http://schemas.openxmlformats.org/drawingml/2006/main" prst="rect">
-            <a:avLst/>
-          </a:prstGeom>
-          <a:noFill xmlns:a="http://schemas.openxmlformats.org/drawingml/2006/main"/>
-          <a:ln xmlns:a="http://schemas.openxmlformats.org/drawingml/2006/main" w="0">
-            <a:noFill/>
-            <a:prstDash val="solid"/>
-          </a:ln>
-        </p:spPr>
-        <p:txBody>
-          <a:bodyPr xmlns:a="http://schemas.openxmlformats.org/drawingml/2006/main"/>
-          <a:lstStyle xmlns:a="http://schemas.openxmlformats.org/drawingml/2006/main"/>
-          <a:p xmlns:a="http://schemas.openxmlformats.org/drawingml/2006/main">
-            <a:pPr>
-              <a:defRPr sz="975" b="1">
-                <a:solidFill>
-                  <a:srgbClr val="2048A8"/>
-                </a:solidFill>
-              </a:defRPr>
-            </a:pPr>
-            <a:r>
-              <a:rPr sz="975" b="1">
-                <a:solidFill>
-                  <a:srgbClr val="2048A8"/>
-                </a:solidFill>
-              </a:rPr>
-              <a:t>Производители</a:t>
-            </a:r>
-          </a:p>
-        </p:txBody>
-      </p:sp>
-      <p:sp>
-        <p:nvSpPr>
-          <p:cNvPr id="22" name="">
-            <a:extLst xmlns:a="http://schemas.openxmlformats.org/drawingml/2006/main">
-              <a:ext uri="{FF2B5EF4-FFF2-40B4-BE49-F238E27FC236}">
-                <a16:creationId xmlns:a16="http://schemas.microsoft.com/office/drawing/2014/main" id="{49D563F1-F507-435A-BD31-5EF7395B66D8}"/>
-              </a:ext>
-            </a:extLst>
-          </p:cNvPr>
-          <p:cNvSpPr>
-            <a:spLocks xmlns:a="http://schemas.openxmlformats.org/drawingml/2006/main" noGrp="1"/>
-          </p:cNvSpPr>
-          <p:nvPr/>
-        </p:nvSpPr>
-        <p:spPr>
-          <a:xfrm xmlns:a="http://schemas.openxmlformats.org/drawingml/2006/main">
-            <a:off x="7181850" y="3409950"/>
-            <a:ext cx="4000500" cy="323850"/>
-          </a:xfrm>
-          <a:prstGeom xmlns:a="http://schemas.openxmlformats.org/drawingml/2006/main" prst="rect">
-            <a:avLst/>
-          </a:prstGeom>
-          <a:noFill xmlns:a="http://schemas.openxmlformats.org/drawingml/2006/main"/>
-          <a:ln xmlns:a="http://schemas.openxmlformats.org/drawingml/2006/main" w="0">
-            <a:noFill/>
-            <a:prstDash val="solid"/>
-          </a:ln>
-        </p:spPr>
-        <p:txBody>
-          <a:bodyPr xmlns:a="http://schemas.openxmlformats.org/drawingml/2006/main"/>
-          <a:lstStyle xmlns:a="http://schemas.openxmlformats.org/drawingml/2006/main"/>
-          <a:p xmlns:a="http://schemas.openxmlformats.org/drawingml/2006/main">
-            <a:pPr>
-              <a:defRPr sz="1050" b="1">
-                <a:solidFill>
-                  <a:srgbClr val="102A63"/>
-                </a:solidFill>
-              </a:defRPr>
-            </a:pPr>
-            <a:r>
-              <a:rPr sz="1050" b="1">
-                <a:solidFill>
-                  <a:srgbClr val="102A63"/>
-                </a:solidFill>
-              </a:rPr>
-              <a:t>{{IT_2_VENDORS}}</a:t>
-            </a:r>
-          </a:p>
-        </p:txBody>
-      </p:sp>
-      <p:sp>
-        <p:nvSpPr>
-          <p:cNvPr id="23" name="">
-            <a:extLst xmlns:a="http://schemas.openxmlformats.org/drawingml/2006/main">
-              <a:ext uri="{FF2B5EF4-FFF2-40B4-BE49-F238E27FC236}">
-                <a16:creationId xmlns:a16="http://schemas.microsoft.com/office/drawing/2014/main" id="{FE8A17A2-3929-438F-A489-69C87CBCDF02}"/>
-              </a:ext>
-            </a:extLst>
-          </p:cNvPr>
-          <p:cNvSpPr>
-            <a:spLocks xmlns:a="http://schemas.openxmlformats.org/drawingml/2006/main" noGrp="1"/>
-          </p:cNvSpPr>
-          <p:nvPr/>
-        </p:nvSpPr>
-        <p:spPr>
-          <a:xfrm xmlns:a="http://schemas.openxmlformats.org/drawingml/2006/main">
-            <a:off x="1200150" y="3810000"/>
-            <a:ext cx="9982200" cy="9525"/>
+                <a16:creationId xmlns:a16="http://schemas.microsoft.com/office/drawing/2014/main" id="{49A1A40F-D697-44EC-95F0-71C6DBD22AF2}"/>
+              </a:ext>
+            </a:extLst>
+          </p:cNvPr>
+          <p:cNvSpPr>
+            <a:spLocks xmlns:a="http://schemas.openxmlformats.org/drawingml/2006/main" noGrp="1"/>
+          </p:cNvSpPr>
+          <p:nvPr/>
+        </p:nvSpPr>
+        <p:spPr>
+          <a:xfrm xmlns:a="http://schemas.openxmlformats.org/drawingml/2006/main">
+            <a:off x="6286500" y="2686050"/>
+            <a:ext cx="4743450" cy="9525"/>
           </a:xfrm>
           <a:prstGeom xmlns:a="http://schemas.openxmlformats.org/drawingml/2006/main" prst="rect">
             <a:avLst/>
@@ -6328,22 +6947,257 @@
       </p:sp>
       <p:sp>
         <p:nvSpPr>
+          <p:cNvPr id="22" name="">
+            <a:extLst xmlns:a="http://schemas.openxmlformats.org/drawingml/2006/main">
+              <a:ext uri="{FF2B5EF4-FFF2-40B4-BE49-F238E27FC236}">
+                <a16:creationId xmlns:a16="http://schemas.microsoft.com/office/drawing/2014/main" id="{CAE7AE8F-3EAD-4AF0-9837-CF7526E1A9B1}"/>
+              </a:ext>
+            </a:extLst>
+          </p:cNvPr>
+          <p:cNvSpPr>
+            <a:spLocks xmlns:a="http://schemas.openxmlformats.org/drawingml/2006/main" noGrp="1"/>
+          </p:cNvSpPr>
+          <p:nvPr/>
+        </p:nvSpPr>
+        <p:spPr>
+          <a:xfrm xmlns:a="http://schemas.openxmlformats.org/drawingml/2006/main">
+            <a:off x="6286500" y="2819400"/>
+            <a:ext cx="2171700" cy="171450"/>
+          </a:xfrm>
+          <a:prstGeom xmlns:a="http://schemas.openxmlformats.org/drawingml/2006/main" prst="rect">
+            <a:avLst/>
+          </a:prstGeom>
+          <a:noFill xmlns:a="http://schemas.openxmlformats.org/drawingml/2006/main"/>
+          <a:ln xmlns:a="http://schemas.openxmlformats.org/drawingml/2006/main" w="0">
+            <a:noFill/>
+            <a:prstDash val="solid"/>
+          </a:ln>
+        </p:spPr>
+        <p:txBody>
+          <a:bodyPr xmlns:a="http://schemas.openxmlformats.org/drawingml/2006/main"/>
+          <a:lstStyle xmlns:a="http://schemas.openxmlformats.org/drawingml/2006/main"/>
+          <a:p xmlns:a="http://schemas.openxmlformats.org/drawingml/2006/main">
+            <a:pPr>
+              <a:defRPr sz="900" b="1">
+                <a:solidFill>
+                  <a:srgbClr val="2048A8"/>
+                </a:solidFill>
+              </a:defRPr>
+            </a:pPr>
+            <a:r>
+              <a:rPr sz="900" b="1">
+                <a:solidFill>
+                  <a:srgbClr val="2048A8"/>
+                </a:solidFill>
+              </a:rPr>
+              <a:t>Решение</a:t>
+            </a:r>
+          </a:p>
+        </p:txBody>
+      </p:sp>
+      <p:sp>
+        <p:nvSpPr>
+          <p:cNvPr id="23" name="">
+            <a:extLst xmlns:a="http://schemas.openxmlformats.org/drawingml/2006/main">
+              <a:ext uri="{FF2B5EF4-FFF2-40B4-BE49-F238E27FC236}">
+                <a16:creationId xmlns:a16="http://schemas.microsoft.com/office/drawing/2014/main" id="{03540D87-88C2-4C26-937D-2371B03583BB}"/>
+              </a:ext>
+            </a:extLst>
+          </p:cNvPr>
+          <p:cNvSpPr>
+            <a:spLocks xmlns:a="http://schemas.openxmlformats.org/drawingml/2006/main" noGrp="1"/>
+          </p:cNvSpPr>
+          <p:nvPr/>
+        </p:nvSpPr>
+        <p:spPr>
+          <a:xfrm xmlns:a="http://schemas.openxmlformats.org/drawingml/2006/main">
+            <a:off x="6286500" y="3009900"/>
+            <a:ext cx="2266950" cy="409575"/>
+          </a:xfrm>
+          <a:prstGeom xmlns:a="http://schemas.openxmlformats.org/drawingml/2006/main" prst="rect">
+            <a:avLst/>
+          </a:prstGeom>
+          <a:noFill xmlns:a="http://schemas.openxmlformats.org/drawingml/2006/main"/>
+          <a:ln xmlns:a="http://schemas.openxmlformats.org/drawingml/2006/main" w="0">
+            <a:noFill/>
+            <a:prstDash val="solid"/>
+          </a:ln>
+        </p:spPr>
+        <p:txBody>
+          <a:bodyPr xmlns:a="http://schemas.openxmlformats.org/drawingml/2006/main"/>
+          <a:lstStyle xmlns:a="http://schemas.openxmlformats.org/drawingml/2006/main"/>
+          <a:p xmlns:a="http://schemas.openxmlformats.org/drawingml/2006/main">
+            <a:pPr>
+              <a:defRPr sz="1050" b="1">
+                <a:solidFill>
+                  <a:srgbClr val="102A63"/>
+                </a:solidFill>
+              </a:defRPr>
+            </a:pPr>
+            <a:r>
+              <a:rPr sz="1050" b="1">
+                <a:solidFill>
+                  <a:srgbClr val="102A63"/>
+                </a:solidFill>
+              </a:rPr>
+              <a:t>{{REC_2_SOLUTION}}</a:t>
+            </a:r>
+          </a:p>
+        </p:txBody>
+      </p:sp>
+      <p:sp>
+        <p:nvSpPr>
           <p:cNvPr id="24" name="">
             <a:extLst xmlns:a="http://schemas.openxmlformats.org/drawingml/2006/main">
               <a:ext uri="{FF2B5EF4-FFF2-40B4-BE49-F238E27FC236}">
-                <a16:creationId xmlns:a16="http://schemas.microsoft.com/office/drawing/2014/main" id="{C67F24B3-1ABB-46AF-BB91-9C6261879DB3}"/>
-              </a:ext>
-            </a:extLst>
-          </p:cNvPr>
-          <p:cNvSpPr>
-            <a:spLocks xmlns:a="http://schemas.openxmlformats.org/drawingml/2006/main" noGrp="1"/>
-          </p:cNvSpPr>
-          <p:nvPr/>
-        </p:nvSpPr>
-        <p:spPr>
-          <a:xfrm xmlns:a="http://schemas.openxmlformats.org/drawingml/2006/main">
-            <a:off x="609600" y="3981450"/>
-            <a:ext cx="457200" cy="266700"/>
+                <a16:creationId xmlns:a16="http://schemas.microsoft.com/office/drawing/2014/main" id="{024D13A9-C271-42E4-8877-1E7A144DC70E}"/>
+              </a:ext>
+            </a:extLst>
+          </p:cNvPr>
+          <p:cNvSpPr>
+            <a:spLocks xmlns:a="http://schemas.openxmlformats.org/drawingml/2006/main" noGrp="1"/>
+          </p:cNvSpPr>
+          <p:nvPr/>
+        </p:nvSpPr>
+        <p:spPr>
+          <a:xfrm xmlns:a="http://schemas.openxmlformats.org/drawingml/2006/main">
+            <a:off x="8743950" y="2819400"/>
+            <a:ext cx="2266950" cy="171450"/>
+          </a:xfrm>
+          <a:prstGeom xmlns:a="http://schemas.openxmlformats.org/drawingml/2006/main" prst="rect">
+            <a:avLst/>
+          </a:prstGeom>
+          <a:noFill xmlns:a="http://schemas.openxmlformats.org/drawingml/2006/main"/>
+          <a:ln xmlns:a="http://schemas.openxmlformats.org/drawingml/2006/main" w="0">
+            <a:noFill/>
+            <a:prstDash val="solid"/>
+          </a:ln>
+        </p:spPr>
+        <p:txBody>
+          <a:bodyPr xmlns:a="http://schemas.openxmlformats.org/drawingml/2006/main"/>
+          <a:lstStyle xmlns:a="http://schemas.openxmlformats.org/drawingml/2006/main"/>
+          <a:p xmlns:a="http://schemas.openxmlformats.org/drawingml/2006/main">
+            <a:pPr>
+              <a:defRPr sz="900" b="1">
+                <a:solidFill>
+                  <a:srgbClr val="2048A8"/>
+                </a:solidFill>
+              </a:defRPr>
+            </a:pPr>
+            <a:r>
+              <a:rPr sz="900" b="1">
+                <a:solidFill>
+                  <a:srgbClr val="2048A8"/>
+                </a:solidFill>
+              </a:rPr>
+              <a:t>Производители</a:t>
+            </a:r>
+          </a:p>
+        </p:txBody>
+      </p:sp>
+      <p:sp>
+        <p:nvSpPr>
+          <p:cNvPr id="25" name="">
+            <a:extLst xmlns:a="http://schemas.openxmlformats.org/drawingml/2006/main">
+              <a:ext uri="{FF2B5EF4-FFF2-40B4-BE49-F238E27FC236}">
+                <a16:creationId xmlns:a16="http://schemas.microsoft.com/office/drawing/2014/main" id="{69D6E07E-1134-4893-89F7-A8F6B055C9E2}"/>
+              </a:ext>
+            </a:extLst>
+          </p:cNvPr>
+          <p:cNvSpPr>
+            <a:spLocks xmlns:a="http://schemas.openxmlformats.org/drawingml/2006/main" noGrp="1"/>
+          </p:cNvSpPr>
+          <p:nvPr/>
+        </p:nvSpPr>
+        <p:spPr>
+          <a:xfrm xmlns:a="http://schemas.openxmlformats.org/drawingml/2006/main">
+            <a:off x="8743950" y="3009900"/>
+            <a:ext cx="2266950" cy="409575"/>
+          </a:xfrm>
+          <a:prstGeom xmlns:a="http://schemas.openxmlformats.org/drawingml/2006/main" prst="rect">
+            <a:avLst/>
+          </a:prstGeom>
+          <a:noFill xmlns:a="http://schemas.openxmlformats.org/drawingml/2006/main"/>
+          <a:ln xmlns:a="http://schemas.openxmlformats.org/drawingml/2006/main" w="0">
+            <a:noFill/>
+            <a:prstDash val="solid"/>
+          </a:ln>
+        </p:spPr>
+        <p:txBody>
+          <a:bodyPr xmlns:a="http://schemas.openxmlformats.org/drawingml/2006/main"/>
+          <a:lstStyle xmlns:a="http://schemas.openxmlformats.org/drawingml/2006/main"/>
+          <a:p xmlns:a="http://schemas.openxmlformats.org/drawingml/2006/main">
+            <a:pPr>
+              <a:defRPr sz="1050" b="1">
+                <a:solidFill>
+                  <a:srgbClr val="102A63"/>
+                </a:solidFill>
+              </a:defRPr>
+            </a:pPr>
+            <a:r>
+              <a:rPr sz="1050" b="1">
+                <a:solidFill>
+                  <a:srgbClr val="102A63"/>
+                </a:solidFill>
+              </a:rPr>
+              <a:t>{{REC_2_VENDORS}}</a:t>
+            </a:r>
+          </a:p>
+        </p:txBody>
+      </p:sp>
+      <p:sp>
+        <p:nvSpPr>
+          <p:cNvPr id="26" name="">
+            <a:extLst xmlns:a="http://schemas.openxmlformats.org/drawingml/2006/main">
+              <a:ext uri="{FF2B5EF4-FFF2-40B4-BE49-F238E27FC236}">
+                <a16:creationId xmlns:a16="http://schemas.microsoft.com/office/drawing/2014/main" id="{BB940D28-82AF-4E3B-B15D-462388A1851D}"/>
+              </a:ext>
+            </a:extLst>
+          </p:cNvPr>
+          <p:cNvSpPr>
+            <a:spLocks xmlns:a="http://schemas.openxmlformats.org/drawingml/2006/main" noGrp="1"/>
+          </p:cNvSpPr>
+          <p:nvPr/>
+        </p:nvSpPr>
+        <p:spPr>
+          <a:xfrm xmlns:a="http://schemas.openxmlformats.org/drawingml/2006/main">
+            <a:off x="552450" y="3857625"/>
+            <a:ext cx="5162550" cy="2143125"/>
+          </a:xfrm>
+          <a:prstGeom xmlns:a="http://schemas.openxmlformats.org/drawingml/2006/main" prst="roundRect">
+            <a:avLst>
+              <a:gd name="adj" fmla="val 3556"/>
+            </a:avLst>
+          </a:prstGeom>
+          <a:solidFill xmlns:a="http://schemas.openxmlformats.org/drawingml/2006/main">
+            <a:srgbClr val="FFFFFF"/>
+          </a:solidFill>
+          <a:ln xmlns:a="http://schemas.openxmlformats.org/drawingml/2006/main" w="9525">
+            <a:solidFill>
+              <a:srgbClr val="D7E0F2"/>
+            </a:solidFill>
+            <a:prstDash val="solid"/>
+          </a:ln>
+        </p:spPr>
+      </p:sp>
+      <p:sp>
+        <p:nvSpPr>
+          <p:cNvPr id="27" name="">
+            <a:extLst xmlns:a="http://schemas.openxmlformats.org/drawingml/2006/main">
+              <a:ext uri="{FF2B5EF4-FFF2-40B4-BE49-F238E27FC236}">
+                <a16:creationId xmlns:a16="http://schemas.microsoft.com/office/drawing/2014/main" id="{E91A0956-5FA2-4FE6-9DAD-91DDF50E3416}"/>
+              </a:ext>
+            </a:extLst>
+          </p:cNvPr>
+          <p:cNvSpPr>
+            <a:spLocks xmlns:a="http://schemas.openxmlformats.org/drawingml/2006/main" noGrp="1"/>
+          </p:cNvSpPr>
+          <p:nvPr/>
+        </p:nvSpPr>
+        <p:spPr>
+          <a:xfrm xmlns:a="http://schemas.openxmlformats.org/drawingml/2006/main">
+            <a:off x="742950" y="4029075"/>
+            <a:ext cx="361950" cy="247650"/>
           </a:xfrm>
           <a:prstGeom xmlns:a="http://schemas.openxmlformats.org/drawingml/2006/main" prst="rect">
             <a:avLst/>
@@ -6378,72 +7232,72 @@
       </p:sp>
       <p:sp>
         <p:nvSpPr>
-          <p:cNvPr id="25" name="">
-            <a:extLst xmlns:a="http://schemas.openxmlformats.org/drawingml/2006/main">
-              <a:ext uri="{FF2B5EF4-FFF2-40B4-BE49-F238E27FC236}">
-                <a16:creationId xmlns:a16="http://schemas.microsoft.com/office/drawing/2014/main" id="{EBD481EB-365F-46BB-83AF-FC2655078A16}"/>
-              </a:ext>
-            </a:extLst>
-          </p:cNvPr>
-          <p:cNvSpPr>
-            <a:spLocks xmlns:a="http://schemas.openxmlformats.org/drawingml/2006/main" noGrp="1"/>
-          </p:cNvSpPr>
-          <p:nvPr/>
-        </p:nvSpPr>
-        <p:spPr>
-          <a:xfrm xmlns:a="http://schemas.openxmlformats.org/drawingml/2006/main">
-            <a:off x="1200150" y="3924300"/>
-            <a:ext cx="9982200" cy="266700"/>
-          </a:xfrm>
-          <a:prstGeom xmlns:a="http://schemas.openxmlformats.org/drawingml/2006/main" prst="rect">
-            <a:avLst/>
-          </a:prstGeom>
-          <a:noFill xmlns:a="http://schemas.openxmlformats.org/drawingml/2006/main"/>
-          <a:ln xmlns:a="http://schemas.openxmlformats.org/drawingml/2006/main" w="0">
-            <a:noFill/>
-            <a:prstDash val="solid"/>
-          </a:ln>
-        </p:spPr>
-        <p:txBody>
-          <a:bodyPr xmlns:a="http://schemas.openxmlformats.org/drawingml/2006/main"/>
-          <a:lstStyle xmlns:a="http://schemas.openxmlformats.org/drawingml/2006/main"/>
-          <a:p xmlns:a="http://schemas.openxmlformats.org/drawingml/2006/main">
-            <a:pPr>
-              <a:defRPr sz="1425" b="1">
-                <a:solidFill>
-                  <a:srgbClr val="102A63"/>
-                </a:solidFill>
-              </a:defRPr>
-            </a:pPr>
-            <a:r>
-              <a:rPr sz="1425" b="1">
-                <a:solidFill>
-                  <a:srgbClr val="102A63"/>
-                </a:solidFill>
-              </a:rPr>
-              <a:t>{{IT_3_TITLE}}</a:t>
-            </a:r>
-          </a:p>
-        </p:txBody>
-      </p:sp>
-      <p:sp>
-        <p:nvSpPr>
-          <p:cNvPr id="26" name="">
-            <a:extLst xmlns:a="http://schemas.openxmlformats.org/drawingml/2006/main">
-              <a:ext uri="{FF2B5EF4-FFF2-40B4-BE49-F238E27FC236}">
-                <a16:creationId xmlns:a16="http://schemas.microsoft.com/office/drawing/2014/main" id="{EA7FB809-48B6-4DE0-9F65-EB6CA5C131E4}"/>
-              </a:ext>
-            </a:extLst>
-          </p:cNvPr>
-          <p:cNvSpPr>
-            <a:spLocks xmlns:a="http://schemas.openxmlformats.org/drawingml/2006/main" noGrp="1"/>
-          </p:cNvSpPr>
-          <p:nvPr/>
-        </p:nvSpPr>
-        <p:spPr>
-          <a:xfrm xmlns:a="http://schemas.openxmlformats.org/drawingml/2006/main">
-            <a:off x="1200150" y="4219575"/>
-            <a:ext cx="9982200" cy="400050"/>
+          <p:cNvPr id="28" name="">
+            <a:extLst xmlns:a="http://schemas.openxmlformats.org/drawingml/2006/main">
+              <a:ext uri="{FF2B5EF4-FFF2-40B4-BE49-F238E27FC236}">
+                <a16:creationId xmlns:a16="http://schemas.microsoft.com/office/drawing/2014/main" id="{84CBCBCF-8392-4081-B22D-CA8CA6805702}"/>
+              </a:ext>
+            </a:extLst>
+          </p:cNvPr>
+          <p:cNvSpPr>
+            <a:spLocks xmlns:a="http://schemas.openxmlformats.org/drawingml/2006/main" noGrp="1"/>
+          </p:cNvSpPr>
+          <p:nvPr/>
+        </p:nvSpPr>
+        <p:spPr>
+          <a:xfrm xmlns:a="http://schemas.openxmlformats.org/drawingml/2006/main">
+            <a:off x="1162050" y="4000500"/>
+            <a:ext cx="4324350" cy="400050"/>
+          </a:xfrm>
+          <a:prstGeom xmlns:a="http://schemas.openxmlformats.org/drawingml/2006/main" prst="rect">
+            <a:avLst/>
+          </a:prstGeom>
+          <a:noFill xmlns:a="http://schemas.openxmlformats.org/drawingml/2006/main"/>
+          <a:ln xmlns:a="http://schemas.openxmlformats.org/drawingml/2006/main" w="0">
+            <a:noFill/>
+            <a:prstDash val="solid"/>
+          </a:ln>
+        </p:spPr>
+        <p:txBody>
+          <a:bodyPr xmlns:a="http://schemas.openxmlformats.org/drawingml/2006/main"/>
+          <a:lstStyle xmlns:a="http://schemas.openxmlformats.org/drawingml/2006/main"/>
+          <a:p xmlns:a="http://schemas.openxmlformats.org/drawingml/2006/main">
+            <a:pPr>
+              <a:defRPr sz="1350" b="1">
+                <a:solidFill>
+                  <a:srgbClr val="102A63"/>
+                </a:solidFill>
+              </a:defRPr>
+            </a:pPr>
+            <a:r>
+              <a:rPr sz="1350" b="1">
+                <a:solidFill>
+                  <a:srgbClr val="102A63"/>
+                </a:solidFill>
+              </a:rPr>
+              <a:t>{{REC_3_TITLE}}</a:t>
+            </a:r>
+          </a:p>
+        </p:txBody>
+      </p:sp>
+      <p:sp>
+        <p:nvSpPr>
+          <p:cNvPr id="29" name="">
+            <a:extLst xmlns:a="http://schemas.openxmlformats.org/drawingml/2006/main">
+              <a:ext uri="{FF2B5EF4-FFF2-40B4-BE49-F238E27FC236}">
+                <a16:creationId xmlns:a16="http://schemas.microsoft.com/office/drawing/2014/main" id="{2902C86F-D38F-4316-8119-DD1DB07DD469}"/>
+              </a:ext>
+            </a:extLst>
+          </p:cNvPr>
+          <p:cNvSpPr>
+            <a:spLocks xmlns:a="http://schemas.openxmlformats.org/drawingml/2006/main" noGrp="1"/>
+          </p:cNvSpPr>
+          <p:nvPr/>
+        </p:nvSpPr>
+        <p:spPr>
+          <a:xfrm xmlns:a="http://schemas.openxmlformats.org/drawingml/2006/main">
+            <a:off x="762000" y="4476750"/>
+            <a:ext cx="4743450" cy="552450"/>
           </a:xfrm>
           <a:prstGeom xmlns:a="http://schemas.openxmlformats.org/drawingml/2006/main" prst="rect">
             <a:avLst/>
@@ -6471,157 +7325,7 @@
                   <a:srgbClr val="596780"/>
                 </a:solidFill>
               </a:rPr>
-              <a:t>{{IT_3_ACTION}}</a:t>
-            </a:r>
-          </a:p>
-        </p:txBody>
-      </p:sp>
-      <p:sp>
-        <p:nvSpPr>
-          <p:cNvPr id="27" name="">
-            <a:extLst xmlns:a="http://schemas.openxmlformats.org/drawingml/2006/main">
-              <a:ext uri="{FF2B5EF4-FFF2-40B4-BE49-F238E27FC236}">
-                <a16:creationId xmlns:a16="http://schemas.microsoft.com/office/drawing/2014/main" id="{FA374D2C-FD11-45B0-B497-6DF2BF1A7648}"/>
-              </a:ext>
-            </a:extLst>
-          </p:cNvPr>
-          <p:cNvSpPr>
-            <a:spLocks xmlns:a="http://schemas.openxmlformats.org/drawingml/2006/main" noGrp="1"/>
-          </p:cNvSpPr>
-          <p:nvPr/>
-        </p:nvSpPr>
-        <p:spPr>
-          <a:xfrm xmlns:a="http://schemas.openxmlformats.org/drawingml/2006/main">
-            <a:off x="1200150" y="4686300"/>
-            <a:ext cx="742950" cy="190500"/>
-          </a:xfrm>
-          <a:prstGeom xmlns:a="http://schemas.openxmlformats.org/drawingml/2006/main" prst="rect">
-            <a:avLst/>
-          </a:prstGeom>
-          <a:noFill xmlns:a="http://schemas.openxmlformats.org/drawingml/2006/main"/>
-          <a:ln xmlns:a="http://schemas.openxmlformats.org/drawingml/2006/main" w="0">
-            <a:noFill/>
-            <a:prstDash val="solid"/>
-          </a:ln>
-        </p:spPr>
-        <p:txBody>
-          <a:bodyPr xmlns:a="http://schemas.openxmlformats.org/drawingml/2006/main"/>
-          <a:lstStyle xmlns:a="http://schemas.openxmlformats.org/drawingml/2006/main"/>
-          <a:p xmlns:a="http://schemas.openxmlformats.org/drawingml/2006/main">
-            <a:pPr>
-              <a:defRPr sz="975" b="1">
-                <a:solidFill>
-                  <a:srgbClr val="2048A8"/>
-                </a:solidFill>
-              </a:defRPr>
-            </a:pPr>
-            <a:r>
-              <a:rPr sz="975" b="1">
-                <a:solidFill>
-                  <a:srgbClr val="2048A8"/>
-                </a:solidFill>
-              </a:rPr>
-              <a:t>Решение</a:t>
-            </a:r>
-          </a:p>
-        </p:txBody>
-      </p:sp>
-      <p:sp>
-        <p:nvSpPr>
-          <p:cNvPr id="28" name="">
-            <a:extLst xmlns:a="http://schemas.openxmlformats.org/drawingml/2006/main">
-              <a:ext uri="{FF2B5EF4-FFF2-40B4-BE49-F238E27FC236}">
-                <a16:creationId xmlns:a16="http://schemas.microsoft.com/office/drawing/2014/main" id="{C924843B-9491-41AE-ABA8-493F34A598E2}"/>
-              </a:ext>
-            </a:extLst>
-          </p:cNvPr>
-          <p:cNvSpPr>
-            <a:spLocks xmlns:a="http://schemas.openxmlformats.org/drawingml/2006/main" noGrp="1"/>
-          </p:cNvSpPr>
-          <p:nvPr/>
-        </p:nvSpPr>
-        <p:spPr>
-          <a:xfrm xmlns:a="http://schemas.openxmlformats.org/drawingml/2006/main">
-            <a:off x="1962150" y="4667250"/>
-            <a:ext cx="3810000" cy="323850"/>
-          </a:xfrm>
-          <a:prstGeom xmlns:a="http://schemas.openxmlformats.org/drawingml/2006/main" prst="rect">
-            <a:avLst/>
-          </a:prstGeom>
-          <a:noFill xmlns:a="http://schemas.openxmlformats.org/drawingml/2006/main"/>
-          <a:ln xmlns:a="http://schemas.openxmlformats.org/drawingml/2006/main" w="0">
-            <a:noFill/>
-            <a:prstDash val="solid"/>
-          </a:ln>
-        </p:spPr>
-        <p:txBody>
-          <a:bodyPr xmlns:a="http://schemas.openxmlformats.org/drawingml/2006/main"/>
-          <a:lstStyle xmlns:a="http://schemas.openxmlformats.org/drawingml/2006/main"/>
-          <a:p xmlns:a="http://schemas.openxmlformats.org/drawingml/2006/main">
-            <a:pPr>
-              <a:defRPr sz="1050" b="1">
-                <a:solidFill>
-                  <a:srgbClr val="102A63"/>
-                </a:solidFill>
-              </a:defRPr>
-            </a:pPr>
-            <a:r>
-              <a:rPr sz="1050" b="1">
-                <a:solidFill>
-                  <a:srgbClr val="102A63"/>
-                </a:solidFill>
-              </a:rPr>
-              <a:t>{{IT_3_SOLUTION}}</a:t>
-            </a:r>
-          </a:p>
-        </p:txBody>
-      </p:sp>
-      <p:sp>
-        <p:nvSpPr>
-          <p:cNvPr id="29" name="">
-            <a:extLst xmlns:a="http://schemas.openxmlformats.org/drawingml/2006/main">
-              <a:ext uri="{FF2B5EF4-FFF2-40B4-BE49-F238E27FC236}">
-                <a16:creationId xmlns:a16="http://schemas.microsoft.com/office/drawing/2014/main" id="{364CBE8E-58E5-4A00-8ADE-716D8253E640}"/>
-              </a:ext>
-            </a:extLst>
-          </p:cNvPr>
-          <p:cNvSpPr>
-            <a:spLocks xmlns:a="http://schemas.openxmlformats.org/drawingml/2006/main" noGrp="1"/>
-          </p:cNvSpPr>
-          <p:nvPr/>
-        </p:nvSpPr>
-        <p:spPr>
-          <a:xfrm xmlns:a="http://schemas.openxmlformats.org/drawingml/2006/main">
-            <a:off x="6019800" y="4686300"/>
-            <a:ext cx="1104900" cy="190500"/>
-          </a:xfrm>
-          <a:prstGeom xmlns:a="http://schemas.openxmlformats.org/drawingml/2006/main" prst="rect">
-            <a:avLst/>
-          </a:prstGeom>
-          <a:noFill xmlns:a="http://schemas.openxmlformats.org/drawingml/2006/main"/>
-          <a:ln xmlns:a="http://schemas.openxmlformats.org/drawingml/2006/main" w="0">
-            <a:noFill/>
-            <a:prstDash val="solid"/>
-          </a:ln>
-        </p:spPr>
-        <p:txBody>
-          <a:bodyPr xmlns:a="http://schemas.openxmlformats.org/drawingml/2006/main"/>
-          <a:lstStyle xmlns:a="http://schemas.openxmlformats.org/drawingml/2006/main"/>
-          <a:p xmlns:a="http://schemas.openxmlformats.org/drawingml/2006/main">
-            <a:pPr>
-              <a:defRPr sz="975" b="1">
-                <a:solidFill>
-                  <a:srgbClr val="2048A8"/>
-                </a:solidFill>
-              </a:defRPr>
-            </a:pPr>
-            <a:r>
-              <a:rPr sz="975" b="1">
-                <a:solidFill>
-                  <a:srgbClr val="2048A8"/>
-                </a:solidFill>
-              </a:rPr>
-              <a:t>Производители</a:t>
+              <a:t>{{REC_3_ACTION}}</a:t>
             </a:r>
           </a:p>
         </p:txBody>
@@ -6631,69 +7335,19 @@
           <p:cNvPr id="30" name="">
             <a:extLst xmlns:a="http://schemas.openxmlformats.org/drawingml/2006/main">
               <a:ext uri="{FF2B5EF4-FFF2-40B4-BE49-F238E27FC236}">
-                <a16:creationId xmlns:a16="http://schemas.microsoft.com/office/drawing/2014/main" id="{D9DC8B40-3FBA-4DFD-965E-0B785F93C871}"/>
-              </a:ext>
-            </a:extLst>
-          </p:cNvPr>
-          <p:cNvSpPr>
-            <a:spLocks xmlns:a="http://schemas.openxmlformats.org/drawingml/2006/main" noGrp="1"/>
-          </p:cNvSpPr>
-          <p:nvPr/>
-        </p:nvSpPr>
-        <p:spPr>
-          <a:xfrm xmlns:a="http://schemas.openxmlformats.org/drawingml/2006/main">
-            <a:off x="7181850" y="4667250"/>
-            <a:ext cx="4000500" cy="323850"/>
-          </a:xfrm>
-          <a:prstGeom xmlns:a="http://schemas.openxmlformats.org/drawingml/2006/main" prst="rect">
-            <a:avLst/>
-          </a:prstGeom>
-          <a:noFill xmlns:a="http://schemas.openxmlformats.org/drawingml/2006/main"/>
-          <a:ln xmlns:a="http://schemas.openxmlformats.org/drawingml/2006/main" w="0">
-            <a:noFill/>
-            <a:prstDash val="solid"/>
-          </a:ln>
-        </p:spPr>
-        <p:txBody>
-          <a:bodyPr xmlns:a="http://schemas.openxmlformats.org/drawingml/2006/main"/>
-          <a:lstStyle xmlns:a="http://schemas.openxmlformats.org/drawingml/2006/main"/>
-          <a:p xmlns:a="http://schemas.openxmlformats.org/drawingml/2006/main">
-            <a:pPr>
-              <a:defRPr sz="1050" b="1">
-                <a:solidFill>
-                  <a:srgbClr val="102A63"/>
-                </a:solidFill>
-              </a:defRPr>
-            </a:pPr>
-            <a:r>
-              <a:rPr sz="1050" b="1">
-                <a:solidFill>
-                  <a:srgbClr val="102A63"/>
-                </a:solidFill>
-              </a:rPr>
-              <a:t>{{IT_3_VENDORS}}</a:t>
-            </a:r>
-          </a:p>
-        </p:txBody>
-      </p:sp>
-      <p:sp>
-        <p:nvSpPr>
-          <p:cNvPr id="31" name="">
-            <a:extLst xmlns:a="http://schemas.openxmlformats.org/drawingml/2006/main">
-              <a:ext uri="{FF2B5EF4-FFF2-40B4-BE49-F238E27FC236}">
-                <a16:creationId xmlns:a16="http://schemas.microsoft.com/office/drawing/2014/main" id="{8AA0174E-01A0-4DE8-A20E-39BACC818F15}"/>
-              </a:ext>
-            </a:extLst>
-          </p:cNvPr>
-          <p:cNvSpPr>
-            <a:spLocks xmlns:a="http://schemas.openxmlformats.org/drawingml/2006/main" noGrp="1"/>
-          </p:cNvSpPr>
-          <p:nvPr/>
-        </p:nvSpPr>
-        <p:spPr>
-          <a:xfrm xmlns:a="http://schemas.openxmlformats.org/drawingml/2006/main">
-            <a:off x="1200150" y="5067300"/>
-            <a:ext cx="9982200" cy="9525"/>
+                <a16:creationId xmlns:a16="http://schemas.microsoft.com/office/drawing/2014/main" id="{86EE18D9-314B-4C61-BECA-6A664A067149}"/>
+              </a:ext>
+            </a:extLst>
+          </p:cNvPr>
+          <p:cNvSpPr>
+            <a:spLocks xmlns:a="http://schemas.openxmlformats.org/drawingml/2006/main" noGrp="1"/>
+          </p:cNvSpPr>
+          <p:nvPr/>
+        </p:nvSpPr>
+        <p:spPr>
+          <a:xfrm xmlns:a="http://schemas.openxmlformats.org/drawingml/2006/main">
+            <a:off x="762000" y="5114925"/>
+            <a:ext cx="4743450" cy="9525"/>
           </a:xfrm>
           <a:prstGeom xmlns:a="http://schemas.openxmlformats.org/drawingml/2006/main" prst="rect">
             <a:avLst/>
@@ -6709,22 +7363,257 @@
       </p:sp>
       <p:sp>
         <p:nvSpPr>
+          <p:cNvPr id="31" name="">
+            <a:extLst xmlns:a="http://schemas.openxmlformats.org/drawingml/2006/main">
+              <a:ext uri="{FF2B5EF4-FFF2-40B4-BE49-F238E27FC236}">
+                <a16:creationId xmlns:a16="http://schemas.microsoft.com/office/drawing/2014/main" id="{55A41D9A-DFBE-4D30-9196-BDFA69FFFCDE}"/>
+              </a:ext>
+            </a:extLst>
+          </p:cNvPr>
+          <p:cNvSpPr>
+            <a:spLocks xmlns:a="http://schemas.openxmlformats.org/drawingml/2006/main" noGrp="1"/>
+          </p:cNvSpPr>
+          <p:nvPr/>
+        </p:nvSpPr>
+        <p:spPr>
+          <a:xfrm xmlns:a="http://schemas.openxmlformats.org/drawingml/2006/main">
+            <a:off x="762000" y="5248275"/>
+            <a:ext cx="2171700" cy="171450"/>
+          </a:xfrm>
+          <a:prstGeom xmlns:a="http://schemas.openxmlformats.org/drawingml/2006/main" prst="rect">
+            <a:avLst/>
+          </a:prstGeom>
+          <a:noFill xmlns:a="http://schemas.openxmlformats.org/drawingml/2006/main"/>
+          <a:ln xmlns:a="http://schemas.openxmlformats.org/drawingml/2006/main" w="0">
+            <a:noFill/>
+            <a:prstDash val="solid"/>
+          </a:ln>
+        </p:spPr>
+        <p:txBody>
+          <a:bodyPr xmlns:a="http://schemas.openxmlformats.org/drawingml/2006/main"/>
+          <a:lstStyle xmlns:a="http://schemas.openxmlformats.org/drawingml/2006/main"/>
+          <a:p xmlns:a="http://schemas.openxmlformats.org/drawingml/2006/main">
+            <a:pPr>
+              <a:defRPr sz="900" b="1">
+                <a:solidFill>
+                  <a:srgbClr val="2048A8"/>
+                </a:solidFill>
+              </a:defRPr>
+            </a:pPr>
+            <a:r>
+              <a:rPr sz="900" b="1">
+                <a:solidFill>
+                  <a:srgbClr val="2048A8"/>
+                </a:solidFill>
+              </a:rPr>
+              <a:t>Решение</a:t>
+            </a:r>
+          </a:p>
+        </p:txBody>
+      </p:sp>
+      <p:sp>
+        <p:nvSpPr>
           <p:cNvPr id="32" name="">
             <a:extLst xmlns:a="http://schemas.openxmlformats.org/drawingml/2006/main">
               <a:ext uri="{FF2B5EF4-FFF2-40B4-BE49-F238E27FC236}">
-                <a16:creationId xmlns:a16="http://schemas.microsoft.com/office/drawing/2014/main" id="{AED3055E-80C3-446A-851D-8576D1C9ECCA}"/>
-              </a:ext>
-            </a:extLst>
-          </p:cNvPr>
-          <p:cNvSpPr>
-            <a:spLocks xmlns:a="http://schemas.openxmlformats.org/drawingml/2006/main" noGrp="1"/>
-          </p:cNvSpPr>
-          <p:nvPr/>
-        </p:nvSpPr>
-        <p:spPr>
-          <a:xfrm xmlns:a="http://schemas.openxmlformats.org/drawingml/2006/main">
-            <a:off x="609600" y="5238750"/>
-            <a:ext cx="457200" cy="266700"/>
+                <a16:creationId xmlns:a16="http://schemas.microsoft.com/office/drawing/2014/main" id="{FE389480-29B9-4720-B60E-5D78E1D47DB6}"/>
+              </a:ext>
+            </a:extLst>
+          </p:cNvPr>
+          <p:cNvSpPr>
+            <a:spLocks xmlns:a="http://schemas.openxmlformats.org/drawingml/2006/main" noGrp="1"/>
+          </p:cNvSpPr>
+          <p:nvPr/>
+        </p:nvSpPr>
+        <p:spPr>
+          <a:xfrm xmlns:a="http://schemas.openxmlformats.org/drawingml/2006/main">
+            <a:off x="762000" y="5438775"/>
+            <a:ext cx="2266950" cy="409575"/>
+          </a:xfrm>
+          <a:prstGeom xmlns:a="http://schemas.openxmlformats.org/drawingml/2006/main" prst="rect">
+            <a:avLst/>
+          </a:prstGeom>
+          <a:noFill xmlns:a="http://schemas.openxmlformats.org/drawingml/2006/main"/>
+          <a:ln xmlns:a="http://schemas.openxmlformats.org/drawingml/2006/main" w="0">
+            <a:noFill/>
+            <a:prstDash val="solid"/>
+          </a:ln>
+        </p:spPr>
+        <p:txBody>
+          <a:bodyPr xmlns:a="http://schemas.openxmlformats.org/drawingml/2006/main"/>
+          <a:lstStyle xmlns:a="http://schemas.openxmlformats.org/drawingml/2006/main"/>
+          <a:p xmlns:a="http://schemas.openxmlformats.org/drawingml/2006/main">
+            <a:pPr>
+              <a:defRPr sz="1050" b="1">
+                <a:solidFill>
+                  <a:srgbClr val="102A63"/>
+                </a:solidFill>
+              </a:defRPr>
+            </a:pPr>
+            <a:r>
+              <a:rPr sz="1050" b="1">
+                <a:solidFill>
+                  <a:srgbClr val="102A63"/>
+                </a:solidFill>
+              </a:rPr>
+              <a:t>{{REC_3_SOLUTION}}</a:t>
+            </a:r>
+          </a:p>
+        </p:txBody>
+      </p:sp>
+      <p:sp>
+        <p:nvSpPr>
+          <p:cNvPr id="33" name="">
+            <a:extLst xmlns:a="http://schemas.openxmlformats.org/drawingml/2006/main">
+              <a:ext uri="{FF2B5EF4-FFF2-40B4-BE49-F238E27FC236}">
+                <a16:creationId xmlns:a16="http://schemas.microsoft.com/office/drawing/2014/main" id="{93449C4C-76C0-4DBE-BBEF-BA1164A496C3}"/>
+              </a:ext>
+            </a:extLst>
+          </p:cNvPr>
+          <p:cNvSpPr>
+            <a:spLocks xmlns:a="http://schemas.openxmlformats.org/drawingml/2006/main" noGrp="1"/>
+          </p:cNvSpPr>
+          <p:nvPr/>
+        </p:nvSpPr>
+        <p:spPr>
+          <a:xfrm xmlns:a="http://schemas.openxmlformats.org/drawingml/2006/main">
+            <a:off x="3219450" y="5248275"/>
+            <a:ext cx="2266950" cy="171450"/>
+          </a:xfrm>
+          <a:prstGeom xmlns:a="http://schemas.openxmlformats.org/drawingml/2006/main" prst="rect">
+            <a:avLst/>
+          </a:prstGeom>
+          <a:noFill xmlns:a="http://schemas.openxmlformats.org/drawingml/2006/main"/>
+          <a:ln xmlns:a="http://schemas.openxmlformats.org/drawingml/2006/main" w="0">
+            <a:noFill/>
+            <a:prstDash val="solid"/>
+          </a:ln>
+        </p:spPr>
+        <p:txBody>
+          <a:bodyPr xmlns:a="http://schemas.openxmlformats.org/drawingml/2006/main"/>
+          <a:lstStyle xmlns:a="http://schemas.openxmlformats.org/drawingml/2006/main"/>
+          <a:p xmlns:a="http://schemas.openxmlformats.org/drawingml/2006/main">
+            <a:pPr>
+              <a:defRPr sz="900" b="1">
+                <a:solidFill>
+                  <a:srgbClr val="2048A8"/>
+                </a:solidFill>
+              </a:defRPr>
+            </a:pPr>
+            <a:r>
+              <a:rPr sz="900" b="1">
+                <a:solidFill>
+                  <a:srgbClr val="2048A8"/>
+                </a:solidFill>
+              </a:rPr>
+              <a:t>Производители</a:t>
+            </a:r>
+          </a:p>
+        </p:txBody>
+      </p:sp>
+      <p:sp>
+        <p:nvSpPr>
+          <p:cNvPr id="34" name="">
+            <a:extLst xmlns:a="http://schemas.openxmlformats.org/drawingml/2006/main">
+              <a:ext uri="{FF2B5EF4-FFF2-40B4-BE49-F238E27FC236}">
+                <a16:creationId xmlns:a16="http://schemas.microsoft.com/office/drawing/2014/main" id="{977AA3CE-D7C5-45AB-AC02-3E464C616395}"/>
+              </a:ext>
+            </a:extLst>
+          </p:cNvPr>
+          <p:cNvSpPr>
+            <a:spLocks xmlns:a="http://schemas.openxmlformats.org/drawingml/2006/main" noGrp="1"/>
+          </p:cNvSpPr>
+          <p:nvPr/>
+        </p:nvSpPr>
+        <p:spPr>
+          <a:xfrm xmlns:a="http://schemas.openxmlformats.org/drawingml/2006/main">
+            <a:off x="3219450" y="5438775"/>
+            <a:ext cx="2266950" cy="409575"/>
+          </a:xfrm>
+          <a:prstGeom xmlns:a="http://schemas.openxmlformats.org/drawingml/2006/main" prst="rect">
+            <a:avLst/>
+          </a:prstGeom>
+          <a:noFill xmlns:a="http://schemas.openxmlformats.org/drawingml/2006/main"/>
+          <a:ln xmlns:a="http://schemas.openxmlformats.org/drawingml/2006/main" w="0">
+            <a:noFill/>
+            <a:prstDash val="solid"/>
+          </a:ln>
+        </p:spPr>
+        <p:txBody>
+          <a:bodyPr xmlns:a="http://schemas.openxmlformats.org/drawingml/2006/main"/>
+          <a:lstStyle xmlns:a="http://schemas.openxmlformats.org/drawingml/2006/main"/>
+          <a:p xmlns:a="http://schemas.openxmlformats.org/drawingml/2006/main">
+            <a:pPr>
+              <a:defRPr sz="1050" b="1">
+                <a:solidFill>
+                  <a:srgbClr val="102A63"/>
+                </a:solidFill>
+              </a:defRPr>
+            </a:pPr>
+            <a:r>
+              <a:rPr sz="1050" b="1">
+                <a:solidFill>
+                  <a:srgbClr val="102A63"/>
+                </a:solidFill>
+              </a:rPr>
+              <a:t>{{REC_3_VENDORS}}</a:t>
+            </a:r>
+          </a:p>
+        </p:txBody>
+      </p:sp>
+      <p:sp>
+        <p:nvSpPr>
+          <p:cNvPr id="35" name="">
+            <a:extLst xmlns:a="http://schemas.openxmlformats.org/drawingml/2006/main">
+              <a:ext uri="{FF2B5EF4-FFF2-40B4-BE49-F238E27FC236}">
+                <a16:creationId xmlns:a16="http://schemas.microsoft.com/office/drawing/2014/main" id="{B3FF0772-3D2C-437C-8AF1-EDAB2A50A7C8}"/>
+              </a:ext>
+            </a:extLst>
+          </p:cNvPr>
+          <p:cNvSpPr>
+            <a:spLocks xmlns:a="http://schemas.openxmlformats.org/drawingml/2006/main" noGrp="1"/>
+          </p:cNvSpPr>
+          <p:nvPr/>
+        </p:nvSpPr>
+        <p:spPr>
+          <a:xfrm xmlns:a="http://schemas.openxmlformats.org/drawingml/2006/main">
+            <a:off x="6076950" y="3857625"/>
+            <a:ext cx="5162550" cy="2143125"/>
+          </a:xfrm>
+          <a:prstGeom xmlns:a="http://schemas.openxmlformats.org/drawingml/2006/main" prst="roundRect">
+            <a:avLst>
+              <a:gd name="adj" fmla="val 3556"/>
+            </a:avLst>
+          </a:prstGeom>
+          <a:solidFill xmlns:a="http://schemas.openxmlformats.org/drawingml/2006/main">
+            <a:srgbClr val="FFFFFF"/>
+          </a:solidFill>
+          <a:ln xmlns:a="http://schemas.openxmlformats.org/drawingml/2006/main" w="9525">
+            <a:solidFill>
+              <a:srgbClr val="D7E0F2"/>
+            </a:solidFill>
+            <a:prstDash val="solid"/>
+          </a:ln>
+        </p:spPr>
+      </p:sp>
+      <p:sp>
+        <p:nvSpPr>
+          <p:cNvPr id="36" name="">
+            <a:extLst xmlns:a="http://schemas.openxmlformats.org/drawingml/2006/main">
+              <a:ext uri="{FF2B5EF4-FFF2-40B4-BE49-F238E27FC236}">
+                <a16:creationId xmlns:a16="http://schemas.microsoft.com/office/drawing/2014/main" id="{1EB5E6C9-8ED5-4159-BF00-8CE547007878}"/>
+              </a:ext>
+            </a:extLst>
+          </p:cNvPr>
+          <p:cNvSpPr>
+            <a:spLocks xmlns:a="http://schemas.openxmlformats.org/drawingml/2006/main" noGrp="1"/>
+          </p:cNvSpPr>
+          <p:nvPr/>
+        </p:nvSpPr>
+        <p:spPr>
+          <a:xfrm xmlns:a="http://schemas.openxmlformats.org/drawingml/2006/main">
+            <a:off x="6267450" y="4029075"/>
+            <a:ext cx="361950" cy="247650"/>
           </a:xfrm>
           <a:prstGeom xmlns:a="http://schemas.openxmlformats.org/drawingml/2006/main" prst="rect">
             <a:avLst/>
@@ -6759,72 +7648,72 @@
       </p:sp>
       <p:sp>
         <p:nvSpPr>
-          <p:cNvPr id="33" name="">
-            <a:extLst xmlns:a="http://schemas.openxmlformats.org/drawingml/2006/main">
-              <a:ext uri="{FF2B5EF4-FFF2-40B4-BE49-F238E27FC236}">
-                <a16:creationId xmlns:a16="http://schemas.microsoft.com/office/drawing/2014/main" id="{7179560C-8263-45E3-88CE-1BBCD2A7E913}"/>
-              </a:ext>
-            </a:extLst>
-          </p:cNvPr>
-          <p:cNvSpPr>
-            <a:spLocks xmlns:a="http://schemas.openxmlformats.org/drawingml/2006/main" noGrp="1"/>
-          </p:cNvSpPr>
-          <p:nvPr/>
-        </p:nvSpPr>
-        <p:spPr>
-          <a:xfrm xmlns:a="http://schemas.openxmlformats.org/drawingml/2006/main">
-            <a:off x="1200150" y="5181600"/>
-            <a:ext cx="9982200" cy="266700"/>
-          </a:xfrm>
-          <a:prstGeom xmlns:a="http://schemas.openxmlformats.org/drawingml/2006/main" prst="rect">
-            <a:avLst/>
-          </a:prstGeom>
-          <a:noFill xmlns:a="http://schemas.openxmlformats.org/drawingml/2006/main"/>
-          <a:ln xmlns:a="http://schemas.openxmlformats.org/drawingml/2006/main" w="0">
-            <a:noFill/>
-            <a:prstDash val="solid"/>
-          </a:ln>
-        </p:spPr>
-        <p:txBody>
-          <a:bodyPr xmlns:a="http://schemas.openxmlformats.org/drawingml/2006/main"/>
-          <a:lstStyle xmlns:a="http://schemas.openxmlformats.org/drawingml/2006/main"/>
-          <a:p xmlns:a="http://schemas.openxmlformats.org/drawingml/2006/main">
-            <a:pPr>
-              <a:defRPr sz="1425" b="1">
-                <a:solidFill>
-                  <a:srgbClr val="102A63"/>
-                </a:solidFill>
-              </a:defRPr>
-            </a:pPr>
-            <a:r>
-              <a:rPr sz="1425" b="1">
-                <a:solidFill>
-                  <a:srgbClr val="102A63"/>
-                </a:solidFill>
-              </a:rPr>
-              <a:t>{{IT_4_TITLE}}</a:t>
-            </a:r>
-          </a:p>
-        </p:txBody>
-      </p:sp>
-      <p:sp>
-        <p:nvSpPr>
-          <p:cNvPr id="34" name="">
-            <a:extLst xmlns:a="http://schemas.openxmlformats.org/drawingml/2006/main">
-              <a:ext uri="{FF2B5EF4-FFF2-40B4-BE49-F238E27FC236}">
-                <a16:creationId xmlns:a16="http://schemas.microsoft.com/office/drawing/2014/main" id="{892907C9-2C36-4F98-AC21-CBE9744B36FC}"/>
-              </a:ext>
-            </a:extLst>
-          </p:cNvPr>
-          <p:cNvSpPr>
-            <a:spLocks xmlns:a="http://schemas.openxmlformats.org/drawingml/2006/main" noGrp="1"/>
-          </p:cNvSpPr>
-          <p:nvPr/>
-        </p:nvSpPr>
-        <p:spPr>
-          <a:xfrm xmlns:a="http://schemas.openxmlformats.org/drawingml/2006/main">
-            <a:off x="1200150" y="5476875"/>
-            <a:ext cx="9982200" cy="400050"/>
+          <p:cNvPr id="37" name="">
+            <a:extLst xmlns:a="http://schemas.openxmlformats.org/drawingml/2006/main">
+              <a:ext uri="{FF2B5EF4-FFF2-40B4-BE49-F238E27FC236}">
+                <a16:creationId xmlns:a16="http://schemas.microsoft.com/office/drawing/2014/main" id="{D3255A8E-6778-4B5A-9FD1-35E5D7984ECC}"/>
+              </a:ext>
+            </a:extLst>
+          </p:cNvPr>
+          <p:cNvSpPr>
+            <a:spLocks xmlns:a="http://schemas.openxmlformats.org/drawingml/2006/main" noGrp="1"/>
+          </p:cNvSpPr>
+          <p:nvPr/>
+        </p:nvSpPr>
+        <p:spPr>
+          <a:xfrm xmlns:a="http://schemas.openxmlformats.org/drawingml/2006/main">
+            <a:off x="6686550" y="4000500"/>
+            <a:ext cx="4324350" cy="400050"/>
+          </a:xfrm>
+          <a:prstGeom xmlns:a="http://schemas.openxmlformats.org/drawingml/2006/main" prst="rect">
+            <a:avLst/>
+          </a:prstGeom>
+          <a:noFill xmlns:a="http://schemas.openxmlformats.org/drawingml/2006/main"/>
+          <a:ln xmlns:a="http://schemas.openxmlformats.org/drawingml/2006/main" w="0">
+            <a:noFill/>
+            <a:prstDash val="solid"/>
+          </a:ln>
+        </p:spPr>
+        <p:txBody>
+          <a:bodyPr xmlns:a="http://schemas.openxmlformats.org/drawingml/2006/main"/>
+          <a:lstStyle xmlns:a="http://schemas.openxmlformats.org/drawingml/2006/main"/>
+          <a:p xmlns:a="http://schemas.openxmlformats.org/drawingml/2006/main">
+            <a:pPr>
+              <a:defRPr sz="1350" b="1">
+                <a:solidFill>
+                  <a:srgbClr val="102A63"/>
+                </a:solidFill>
+              </a:defRPr>
+            </a:pPr>
+            <a:r>
+              <a:rPr sz="1350" b="1">
+                <a:solidFill>
+                  <a:srgbClr val="102A63"/>
+                </a:solidFill>
+              </a:rPr>
+              <a:t>{{REC_4_TITLE}}</a:t>
+            </a:r>
+          </a:p>
+        </p:txBody>
+      </p:sp>
+      <p:sp>
+        <p:nvSpPr>
+          <p:cNvPr id="38" name="">
+            <a:extLst xmlns:a="http://schemas.openxmlformats.org/drawingml/2006/main">
+              <a:ext uri="{FF2B5EF4-FFF2-40B4-BE49-F238E27FC236}">
+                <a16:creationId xmlns:a16="http://schemas.microsoft.com/office/drawing/2014/main" id="{9A567B12-840D-4ADA-A846-9EBBC5E9CCAA}"/>
+              </a:ext>
+            </a:extLst>
+          </p:cNvPr>
+          <p:cNvSpPr>
+            <a:spLocks xmlns:a="http://schemas.openxmlformats.org/drawingml/2006/main" noGrp="1"/>
+          </p:cNvSpPr>
+          <p:nvPr/>
+        </p:nvSpPr>
+        <p:spPr>
+          <a:xfrm xmlns:a="http://schemas.openxmlformats.org/drawingml/2006/main">
+            <a:off x="6286500" y="4476750"/>
+            <a:ext cx="4743450" cy="552450"/>
           </a:xfrm>
           <a:prstGeom xmlns:a="http://schemas.openxmlformats.org/drawingml/2006/main" prst="rect">
             <a:avLst/>
@@ -6852,52 +7741,83 @@
                   <a:srgbClr val="596780"/>
                 </a:solidFill>
               </a:rPr>
-              <a:t>{{IT_4_ACTION}}</a:t>
-            </a:r>
-          </a:p>
-        </p:txBody>
-      </p:sp>
-      <p:sp>
-        <p:nvSpPr>
-          <p:cNvPr id="35" name="">
-            <a:extLst xmlns:a="http://schemas.openxmlformats.org/drawingml/2006/main">
-              <a:ext uri="{FF2B5EF4-FFF2-40B4-BE49-F238E27FC236}">
-                <a16:creationId xmlns:a16="http://schemas.microsoft.com/office/drawing/2014/main" id="{A364AE7E-A967-4405-840B-05B8AF61E99E}"/>
-              </a:ext>
-            </a:extLst>
-          </p:cNvPr>
-          <p:cNvSpPr>
-            <a:spLocks xmlns:a="http://schemas.openxmlformats.org/drawingml/2006/main" noGrp="1"/>
-          </p:cNvSpPr>
-          <p:nvPr/>
-        </p:nvSpPr>
-        <p:spPr>
-          <a:xfrm xmlns:a="http://schemas.openxmlformats.org/drawingml/2006/main">
-            <a:off x="1200150" y="5943600"/>
-            <a:ext cx="742950" cy="190500"/>
-          </a:xfrm>
-          <a:prstGeom xmlns:a="http://schemas.openxmlformats.org/drawingml/2006/main" prst="rect">
-            <a:avLst/>
-          </a:prstGeom>
-          <a:noFill xmlns:a="http://schemas.openxmlformats.org/drawingml/2006/main"/>
-          <a:ln xmlns:a="http://schemas.openxmlformats.org/drawingml/2006/main" w="0">
-            <a:noFill/>
-            <a:prstDash val="solid"/>
-          </a:ln>
-        </p:spPr>
-        <p:txBody>
-          <a:bodyPr xmlns:a="http://schemas.openxmlformats.org/drawingml/2006/main"/>
-          <a:lstStyle xmlns:a="http://schemas.openxmlformats.org/drawingml/2006/main"/>
-          <a:p xmlns:a="http://schemas.openxmlformats.org/drawingml/2006/main">
-            <a:pPr>
-              <a:defRPr sz="975" b="1">
+              <a:t>{{REC_4_ACTION}}</a:t>
+            </a:r>
+          </a:p>
+        </p:txBody>
+      </p:sp>
+      <p:sp>
+        <p:nvSpPr>
+          <p:cNvPr id="39" name="">
+            <a:extLst xmlns:a="http://schemas.openxmlformats.org/drawingml/2006/main">
+              <a:ext uri="{FF2B5EF4-FFF2-40B4-BE49-F238E27FC236}">
+                <a16:creationId xmlns:a16="http://schemas.microsoft.com/office/drawing/2014/main" id="{F187A19B-9738-4726-9E8C-51BADE842D4C}"/>
+              </a:ext>
+            </a:extLst>
+          </p:cNvPr>
+          <p:cNvSpPr>
+            <a:spLocks xmlns:a="http://schemas.openxmlformats.org/drawingml/2006/main" noGrp="1"/>
+          </p:cNvSpPr>
+          <p:nvPr/>
+        </p:nvSpPr>
+        <p:spPr>
+          <a:xfrm xmlns:a="http://schemas.openxmlformats.org/drawingml/2006/main">
+            <a:off x="6286500" y="5114925"/>
+            <a:ext cx="4743450" cy="9525"/>
+          </a:xfrm>
+          <a:prstGeom xmlns:a="http://schemas.openxmlformats.org/drawingml/2006/main" prst="rect">
+            <a:avLst/>
+          </a:prstGeom>
+          <a:solidFill xmlns:a="http://schemas.openxmlformats.org/drawingml/2006/main">
+            <a:srgbClr val="D7E0F2"/>
+          </a:solidFill>
+          <a:ln xmlns:a="http://schemas.openxmlformats.org/drawingml/2006/main" w="0">
+            <a:noFill/>
+            <a:prstDash val="solid"/>
+          </a:ln>
+        </p:spPr>
+      </p:sp>
+      <p:sp>
+        <p:nvSpPr>
+          <p:cNvPr id="40" name="">
+            <a:extLst xmlns:a="http://schemas.openxmlformats.org/drawingml/2006/main">
+              <a:ext uri="{FF2B5EF4-FFF2-40B4-BE49-F238E27FC236}">
+                <a16:creationId xmlns:a16="http://schemas.microsoft.com/office/drawing/2014/main" id="{38EB0A63-9D6F-44F7-8436-3663226B5A42}"/>
+              </a:ext>
+            </a:extLst>
+          </p:cNvPr>
+          <p:cNvSpPr>
+            <a:spLocks xmlns:a="http://schemas.openxmlformats.org/drawingml/2006/main" noGrp="1"/>
+          </p:cNvSpPr>
+          <p:nvPr/>
+        </p:nvSpPr>
+        <p:spPr>
+          <a:xfrm xmlns:a="http://schemas.openxmlformats.org/drawingml/2006/main">
+            <a:off x="6286500" y="5248275"/>
+            <a:ext cx="2171700" cy="171450"/>
+          </a:xfrm>
+          <a:prstGeom xmlns:a="http://schemas.openxmlformats.org/drawingml/2006/main" prst="rect">
+            <a:avLst/>
+          </a:prstGeom>
+          <a:noFill xmlns:a="http://schemas.openxmlformats.org/drawingml/2006/main"/>
+          <a:ln xmlns:a="http://schemas.openxmlformats.org/drawingml/2006/main" w="0">
+            <a:noFill/>
+            <a:prstDash val="solid"/>
+          </a:ln>
+        </p:spPr>
+        <p:txBody>
+          <a:bodyPr xmlns:a="http://schemas.openxmlformats.org/drawingml/2006/main"/>
+          <a:lstStyle xmlns:a="http://schemas.openxmlformats.org/drawingml/2006/main"/>
+          <a:p xmlns:a="http://schemas.openxmlformats.org/drawingml/2006/main">
+            <a:pPr>
+              <a:defRPr sz="900" b="1">
                 <a:solidFill>
                   <a:srgbClr val="2048A8"/>
                 </a:solidFill>
               </a:defRPr>
             </a:pPr>
             <a:r>
-              <a:rPr sz="975" b="1">
+              <a:rPr sz="900" b="1">
                 <a:solidFill>
                   <a:srgbClr val="2048A8"/>
                 </a:solidFill>
@@ -6909,22 +7829,22 @@
       </p:sp>
       <p:sp>
         <p:nvSpPr>
-          <p:cNvPr id="36" name="">
-            <a:extLst xmlns:a="http://schemas.openxmlformats.org/drawingml/2006/main">
-              <a:ext uri="{FF2B5EF4-FFF2-40B4-BE49-F238E27FC236}">
-                <a16:creationId xmlns:a16="http://schemas.microsoft.com/office/drawing/2014/main" id="{F3DA280D-0219-42BA-A088-FCA0702218DA}"/>
-              </a:ext>
-            </a:extLst>
-          </p:cNvPr>
-          <p:cNvSpPr>
-            <a:spLocks xmlns:a="http://schemas.openxmlformats.org/drawingml/2006/main" noGrp="1"/>
-          </p:cNvSpPr>
-          <p:nvPr/>
-        </p:nvSpPr>
-        <p:spPr>
-          <a:xfrm xmlns:a="http://schemas.openxmlformats.org/drawingml/2006/main">
-            <a:off x="1962150" y="5924550"/>
-            <a:ext cx="3810000" cy="323850"/>
+          <p:cNvPr id="41" name="">
+            <a:extLst xmlns:a="http://schemas.openxmlformats.org/drawingml/2006/main">
+              <a:ext uri="{FF2B5EF4-FFF2-40B4-BE49-F238E27FC236}">
+                <a16:creationId xmlns:a16="http://schemas.microsoft.com/office/drawing/2014/main" id="{2D20939B-72EB-4F90-85F2-9735BB68C60C}"/>
+              </a:ext>
+            </a:extLst>
+          </p:cNvPr>
+          <p:cNvSpPr>
+            <a:spLocks xmlns:a="http://schemas.openxmlformats.org/drawingml/2006/main" noGrp="1"/>
+          </p:cNvSpPr>
+          <p:nvPr/>
+        </p:nvSpPr>
+        <p:spPr>
+          <a:xfrm xmlns:a="http://schemas.openxmlformats.org/drawingml/2006/main">
+            <a:off x="6286500" y="5438775"/>
+            <a:ext cx="2266950" cy="409575"/>
           </a:xfrm>
           <a:prstGeom xmlns:a="http://schemas.openxmlformats.org/drawingml/2006/main" prst="rect">
             <a:avLst/>
@@ -6952,52 +7872,52 @@
                   <a:srgbClr val="102A63"/>
                 </a:solidFill>
               </a:rPr>
-              <a:t>{{IT_4_SOLUTION}}</a:t>
-            </a:r>
-          </a:p>
-        </p:txBody>
-      </p:sp>
-      <p:sp>
-        <p:nvSpPr>
-          <p:cNvPr id="37" name="">
-            <a:extLst xmlns:a="http://schemas.openxmlformats.org/drawingml/2006/main">
-              <a:ext uri="{FF2B5EF4-FFF2-40B4-BE49-F238E27FC236}">
-                <a16:creationId xmlns:a16="http://schemas.microsoft.com/office/drawing/2014/main" id="{7B750472-18AE-4F3C-ADC9-B7F9E0F82E4E}"/>
-              </a:ext>
-            </a:extLst>
-          </p:cNvPr>
-          <p:cNvSpPr>
-            <a:spLocks xmlns:a="http://schemas.openxmlformats.org/drawingml/2006/main" noGrp="1"/>
-          </p:cNvSpPr>
-          <p:nvPr/>
-        </p:nvSpPr>
-        <p:spPr>
-          <a:xfrm xmlns:a="http://schemas.openxmlformats.org/drawingml/2006/main">
-            <a:off x="6019800" y="5943600"/>
-            <a:ext cx="1104900" cy="190500"/>
-          </a:xfrm>
-          <a:prstGeom xmlns:a="http://schemas.openxmlformats.org/drawingml/2006/main" prst="rect">
-            <a:avLst/>
-          </a:prstGeom>
-          <a:noFill xmlns:a="http://schemas.openxmlformats.org/drawingml/2006/main"/>
-          <a:ln xmlns:a="http://schemas.openxmlformats.org/drawingml/2006/main" w="0">
-            <a:noFill/>
-            <a:prstDash val="solid"/>
-          </a:ln>
-        </p:spPr>
-        <p:txBody>
-          <a:bodyPr xmlns:a="http://schemas.openxmlformats.org/drawingml/2006/main"/>
-          <a:lstStyle xmlns:a="http://schemas.openxmlformats.org/drawingml/2006/main"/>
-          <a:p xmlns:a="http://schemas.openxmlformats.org/drawingml/2006/main">
-            <a:pPr>
-              <a:defRPr sz="975" b="1">
+              <a:t>{{REC_4_SOLUTION}}</a:t>
+            </a:r>
+          </a:p>
+        </p:txBody>
+      </p:sp>
+      <p:sp>
+        <p:nvSpPr>
+          <p:cNvPr id="42" name="">
+            <a:extLst xmlns:a="http://schemas.openxmlformats.org/drawingml/2006/main">
+              <a:ext uri="{FF2B5EF4-FFF2-40B4-BE49-F238E27FC236}">
+                <a16:creationId xmlns:a16="http://schemas.microsoft.com/office/drawing/2014/main" id="{3E55A70B-9A81-47E9-9BE5-A2AD01D0B56F}"/>
+              </a:ext>
+            </a:extLst>
+          </p:cNvPr>
+          <p:cNvSpPr>
+            <a:spLocks xmlns:a="http://schemas.openxmlformats.org/drawingml/2006/main" noGrp="1"/>
+          </p:cNvSpPr>
+          <p:nvPr/>
+        </p:nvSpPr>
+        <p:spPr>
+          <a:xfrm xmlns:a="http://schemas.openxmlformats.org/drawingml/2006/main">
+            <a:off x="8743950" y="5248275"/>
+            <a:ext cx="2266950" cy="171450"/>
+          </a:xfrm>
+          <a:prstGeom xmlns:a="http://schemas.openxmlformats.org/drawingml/2006/main" prst="rect">
+            <a:avLst/>
+          </a:prstGeom>
+          <a:noFill xmlns:a="http://schemas.openxmlformats.org/drawingml/2006/main"/>
+          <a:ln xmlns:a="http://schemas.openxmlformats.org/drawingml/2006/main" w="0">
+            <a:noFill/>
+            <a:prstDash val="solid"/>
+          </a:ln>
+        </p:spPr>
+        <p:txBody>
+          <a:bodyPr xmlns:a="http://schemas.openxmlformats.org/drawingml/2006/main"/>
+          <a:lstStyle xmlns:a="http://schemas.openxmlformats.org/drawingml/2006/main"/>
+          <a:p xmlns:a="http://schemas.openxmlformats.org/drawingml/2006/main">
+            <a:pPr>
+              <a:defRPr sz="900" b="1">
                 <a:solidFill>
                   <a:srgbClr val="2048A8"/>
                 </a:solidFill>
               </a:defRPr>
             </a:pPr>
             <a:r>
-              <a:rPr sz="975" b="1">
+              <a:rPr sz="900" b="1">
                 <a:solidFill>
                   <a:srgbClr val="2048A8"/>
                 </a:solidFill>
@@ -7009,22 +7929,22 @@
       </p:sp>
       <p:sp>
         <p:nvSpPr>
-          <p:cNvPr id="38" name="">
-            <a:extLst xmlns:a="http://schemas.openxmlformats.org/drawingml/2006/main">
-              <a:ext uri="{FF2B5EF4-FFF2-40B4-BE49-F238E27FC236}">
-                <a16:creationId xmlns:a16="http://schemas.microsoft.com/office/drawing/2014/main" id="{2FA63911-AB8A-4865-BE32-286F8AD3AEBD}"/>
-              </a:ext>
-            </a:extLst>
-          </p:cNvPr>
-          <p:cNvSpPr>
-            <a:spLocks xmlns:a="http://schemas.openxmlformats.org/drawingml/2006/main" noGrp="1"/>
-          </p:cNvSpPr>
-          <p:nvPr/>
-        </p:nvSpPr>
-        <p:spPr>
-          <a:xfrm xmlns:a="http://schemas.openxmlformats.org/drawingml/2006/main">
-            <a:off x="7181850" y="5924550"/>
-            <a:ext cx="4000500" cy="323850"/>
+          <p:cNvPr id="43" name="">
+            <a:extLst xmlns:a="http://schemas.openxmlformats.org/drawingml/2006/main">
+              <a:ext uri="{FF2B5EF4-FFF2-40B4-BE49-F238E27FC236}">
+                <a16:creationId xmlns:a16="http://schemas.microsoft.com/office/drawing/2014/main" id="{6687432B-2C66-45D7-9B13-175A0C622C6F}"/>
+              </a:ext>
+            </a:extLst>
+          </p:cNvPr>
+          <p:cNvSpPr>
+            <a:spLocks xmlns:a="http://schemas.openxmlformats.org/drawingml/2006/main" noGrp="1"/>
+          </p:cNvSpPr>
+          <p:nvPr/>
+        </p:nvSpPr>
+        <p:spPr>
+          <a:xfrm xmlns:a="http://schemas.openxmlformats.org/drawingml/2006/main">
+            <a:off x="8743950" y="5438775"/>
+            <a:ext cx="2266950" cy="409575"/>
           </a:xfrm>
           <a:prstGeom xmlns:a="http://schemas.openxmlformats.org/drawingml/2006/main" prst="rect">
             <a:avLst/>
@@ -7052,7 +7972,7 @@
                   <a:srgbClr val="102A63"/>
                 </a:solidFill>
               </a:rPr>
-              <a:t>{{IT_4_VENDORS}}</a:t>
+              <a:t>{{REC_4_VENDORS}}</a:t>
             </a:r>
           </a:p>
         </p:txBody>
@@ -7060,7 +7980,7 @@
     </p:spTree>
     <p:extLst>
       <p:ext uri="{BB962C8B-B14F-4D97-AF65-F5344CB8AC3E}">
-        <p14:creationId xmlns:p14="http://schemas.microsoft.com/office/powerpoint/2010/main" val="1410818734"/>
+        <p14:creationId xmlns:p14="http://schemas.microsoft.com/office/powerpoint/2010/main" val="1224550388"/>
       </p:ext>
     </p:extLst>
   </p:cSld>
@@ -7091,7 +8011,7 @@
           <p:cNvPr id="1" name="">
             <a:extLst xmlns:a="http://schemas.openxmlformats.org/drawingml/2006/main">
               <a:ext uri="{FF2B5EF4-FFF2-40B4-BE49-F238E27FC236}">
-                <a16:creationId xmlns:a16="http://schemas.microsoft.com/office/drawing/2014/main" id="{46042D66-DD95-414C-825C-B13003D4F591}"/>
+                <a16:creationId xmlns:a16="http://schemas.microsoft.com/office/drawing/2014/main" id="{92D8A4C6-DC76-4618-B4A2-14BAE328BF0B}"/>
               </a:ext>
             </a:extLst>
           </p:cNvPr>
@@ -7119,14 +8039,14 @@
       </p:sp>
       <p:pic>
         <p:nvPicPr>
-          <p:cNvPr id="40" name=""/>
+          <p:cNvPr id="45" name=""/>
           <p:cNvPicPr>
             <a:picLocks xmlns:a="http://schemas.openxmlformats.org/drawingml/2006/main" noChangeAspect="1"/>
           </p:cNvPicPr>
           <p:nvPr/>
         </p:nvPicPr>
         <p:blipFill>
-          <a:blip xmlns:r="http://schemas.openxmlformats.org/officeDocument/2006/relationships" xmlns:a="http://schemas.openxmlformats.org/drawingml/2006/main" r:embed="R57257165ae534491"/>
+          <a:blip xmlns:r="http://schemas.openxmlformats.org/officeDocument/2006/relationships" xmlns:a="http://schemas.openxmlformats.org/drawingml/2006/main" r:embed="R35128e73e17a44ec"/>
           <a:stretch xmlns:a="http://schemas.openxmlformats.org/drawingml/2006/main"/>
         </p:blipFill>
         <p:spPr>
@@ -7144,7 +8064,7 @@
           <p:cNvPr id="3" name="">
             <a:extLst xmlns:a="http://schemas.openxmlformats.org/drawingml/2006/main">
               <a:ext uri="{FF2B5EF4-FFF2-40B4-BE49-F238E27FC236}">
-                <a16:creationId xmlns:a16="http://schemas.microsoft.com/office/drawing/2014/main" id="{18FA2A4E-A039-4E1A-B7A2-50BC33A00074}"/>
+                <a16:creationId xmlns:a16="http://schemas.microsoft.com/office/drawing/2014/main" id="{38E47094-FD46-4B65-AFB2-7D804A798154}"/>
               </a:ext>
             </a:extLst>
           </p:cNvPr>
@@ -7184,7 +8104,7 @@
                   <a:srgbClr val="102A63"/>
                 </a:solidFill>
               </a:rPr>
-              <a:t>ИБ-рекомендации снижают наиболее вероятные риски</a:t>
+              <a:t>Рекомендации: следующий этап</a:t>
             </a:r>
           </a:p>
         </p:txBody>
@@ -7194,7 +8114,7 @@
           <p:cNvPr id="4" name="">
             <a:extLst xmlns:a="http://schemas.openxmlformats.org/drawingml/2006/main">
               <a:ext uri="{FF2B5EF4-FFF2-40B4-BE49-F238E27FC236}">
-                <a16:creationId xmlns:a16="http://schemas.microsoft.com/office/drawing/2014/main" id="{EF8A6CE7-E6E3-414C-927C-3D98BAF70C24}"/>
+                <a16:creationId xmlns:a16="http://schemas.microsoft.com/office/drawing/2014/main" id="{B0AC54E2-8E28-4752-9432-8889E7A285B9}"/>
               </a:ext>
             </a:extLst>
           </p:cNvPr>
@@ -7227,7 +8147,7 @@
           <p:cNvPr id="5" name="">
             <a:extLst xmlns:a="http://schemas.openxmlformats.org/drawingml/2006/main">
               <a:ext uri="{FF2B5EF4-FFF2-40B4-BE49-F238E27FC236}">
-                <a16:creationId xmlns:a16="http://schemas.microsoft.com/office/drawing/2014/main" id="{666CEC1D-4BB5-4E81-8813-9C94723126F7}"/>
+                <a16:creationId xmlns:a16="http://schemas.microsoft.com/office/drawing/2014/main" id="{2173F07F-FBAD-4394-AE55-017992DA5227}"/>
               </a:ext>
             </a:extLst>
           </p:cNvPr>
@@ -7258,7 +8178,7 @@
           <p:cNvPr id="6" name="">
             <a:extLst xmlns:a="http://schemas.openxmlformats.org/drawingml/2006/main">
               <a:ext uri="{FF2B5EF4-FFF2-40B4-BE49-F238E27FC236}">
-                <a16:creationId xmlns:a16="http://schemas.microsoft.com/office/drawing/2014/main" id="{DFA06336-7D3C-4E63-A706-A9CEA9F51C69}"/>
+                <a16:creationId xmlns:a16="http://schemas.microsoft.com/office/drawing/2014/main" id="{D3814BCD-55BC-4AB2-A23B-C4041ADA4B3F}"/>
               </a:ext>
             </a:extLst>
           </p:cNvPr>
@@ -7308,7 +8228,7 @@
           <p:cNvPr id="7" name="">
             <a:extLst xmlns:a="http://schemas.openxmlformats.org/drawingml/2006/main">
               <a:ext uri="{FF2B5EF4-FFF2-40B4-BE49-F238E27FC236}">
-                <a16:creationId xmlns:a16="http://schemas.microsoft.com/office/drawing/2014/main" id="{5E76E690-54D7-45AA-8BBF-763AE5C08120}"/>
+                <a16:creationId xmlns:a16="http://schemas.microsoft.com/office/drawing/2014/main" id="{395CED7B-0089-4250-8F45-D4CA7A99A85E}"/>
               </a:ext>
             </a:extLst>
           </p:cNvPr>
@@ -7358,19 +8278,54 @@
           <p:cNvPr id="8" name="">
             <a:extLst xmlns:a="http://schemas.openxmlformats.org/drawingml/2006/main">
               <a:ext uri="{FF2B5EF4-FFF2-40B4-BE49-F238E27FC236}">
-                <a16:creationId xmlns:a16="http://schemas.microsoft.com/office/drawing/2014/main" id="{0D22BCCF-13EC-49CA-A2EB-EE693EB1CB5B}"/>
-              </a:ext>
-            </a:extLst>
-          </p:cNvPr>
-          <p:cNvSpPr>
-            <a:spLocks xmlns:a="http://schemas.openxmlformats.org/drawingml/2006/main" noGrp="1"/>
-          </p:cNvSpPr>
-          <p:nvPr/>
-        </p:nvSpPr>
-        <p:spPr>
-          <a:xfrm xmlns:a="http://schemas.openxmlformats.org/drawingml/2006/main">
-            <a:off x="609600" y="1466850"/>
-            <a:ext cx="457200" cy="266700"/>
+                <a16:creationId xmlns:a16="http://schemas.microsoft.com/office/drawing/2014/main" id="{1A3E7590-D034-468D-A1D1-E4AD8EF722DC}"/>
+              </a:ext>
+            </a:extLst>
+          </p:cNvPr>
+          <p:cNvSpPr>
+            <a:spLocks xmlns:a="http://schemas.openxmlformats.org/drawingml/2006/main" noGrp="1"/>
+          </p:cNvSpPr>
+          <p:nvPr/>
+        </p:nvSpPr>
+        <p:spPr>
+          <a:xfrm xmlns:a="http://schemas.openxmlformats.org/drawingml/2006/main">
+            <a:off x="552450" y="1428750"/>
+            <a:ext cx="5162550" cy="2143125"/>
+          </a:xfrm>
+          <a:prstGeom xmlns:a="http://schemas.openxmlformats.org/drawingml/2006/main" prst="roundRect">
+            <a:avLst>
+              <a:gd name="adj" fmla="val 3556"/>
+            </a:avLst>
+          </a:prstGeom>
+          <a:solidFill xmlns:a="http://schemas.openxmlformats.org/drawingml/2006/main">
+            <a:srgbClr val="FFFFFF"/>
+          </a:solidFill>
+          <a:ln xmlns:a="http://schemas.openxmlformats.org/drawingml/2006/main" w="9525">
+            <a:solidFill>
+              <a:srgbClr val="D7E0F2"/>
+            </a:solidFill>
+            <a:prstDash val="solid"/>
+          </a:ln>
+        </p:spPr>
+      </p:sp>
+      <p:sp>
+        <p:nvSpPr>
+          <p:cNvPr id="9" name="">
+            <a:extLst xmlns:a="http://schemas.openxmlformats.org/drawingml/2006/main">
+              <a:ext uri="{FF2B5EF4-FFF2-40B4-BE49-F238E27FC236}">
+                <a16:creationId xmlns:a16="http://schemas.microsoft.com/office/drawing/2014/main" id="{7FD4E9C8-0690-4F9A-9C98-C56250793B3E}"/>
+              </a:ext>
+            </a:extLst>
+          </p:cNvPr>
+          <p:cNvSpPr>
+            <a:spLocks xmlns:a="http://schemas.openxmlformats.org/drawingml/2006/main" noGrp="1"/>
+          </p:cNvSpPr>
+          <p:nvPr/>
+        </p:nvSpPr>
+        <p:spPr>
+          <a:xfrm xmlns:a="http://schemas.openxmlformats.org/drawingml/2006/main">
+            <a:off x="742950" y="1600200"/>
+            <a:ext cx="361950" cy="247650"/>
           </a:xfrm>
           <a:prstGeom xmlns:a="http://schemas.openxmlformats.org/drawingml/2006/main" prst="rect">
             <a:avLst/>
@@ -7398,57 +8353,7 @@
                   <a:srgbClr val="2048A8"/>
                 </a:solidFill>
               </a:rPr>
-              <a:t>01</a:t>
-            </a:r>
-          </a:p>
-        </p:txBody>
-      </p:sp>
-      <p:sp>
-        <p:nvSpPr>
-          <p:cNvPr id="9" name="">
-            <a:extLst xmlns:a="http://schemas.openxmlformats.org/drawingml/2006/main">
-              <a:ext uri="{FF2B5EF4-FFF2-40B4-BE49-F238E27FC236}">
-                <a16:creationId xmlns:a16="http://schemas.microsoft.com/office/drawing/2014/main" id="{F3572C6B-D38F-42AF-83F0-F0907A2A815A}"/>
-              </a:ext>
-            </a:extLst>
-          </p:cNvPr>
-          <p:cNvSpPr>
-            <a:spLocks xmlns:a="http://schemas.openxmlformats.org/drawingml/2006/main" noGrp="1"/>
-          </p:cNvSpPr>
-          <p:nvPr/>
-        </p:nvSpPr>
-        <p:spPr>
-          <a:xfrm xmlns:a="http://schemas.openxmlformats.org/drawingml/2006/main">
-            <a:off x="1200150" y="1409700"/>
-            <a:ext cx="9982200" cy="266700"/>
-          </a:xfrm>
-          <a:prstGeom xmlns:a="http://schemas.openxmlformats.org/drawingml/2006/main" prst="rect">
-            <a:avLst/>
-          </a:prstGeom>
-          <a:noFill xmlns:a="http://schemas.openxmlformats.org/drawingml/2006/main"/>
-          <a:ln xmlns:a="http://schemas.openxmlformats.org/drawingml/2006/main" w="0">
-            <a:noFill/>
-            <a:prstDash val="solid"/>
-          </a:ln>
-        </p:spPr>
-        <p:txBody>
-          <a:bodyPr xmlns:a="http://schemas.openxmlformats.org/drawingml/2006/main"/>
-          <a:lstStyle xmlns:a="http://schemas.openxmlformats.org/drawingml/2006/main"/>
-          <a:p xmlns:a="http://schemas.openxmlformats.org/drawingml/2006/main">
-            <a:pPr>
-              <a:defRPr sz="1425" b="1">
-                <a:solidFill>
-                  <a:srgbClr val="102A63"/>
-                </a:solidFill>
-              </a:defRPr>
-            </a:pPr>
-            <a:r>
-              <a:rPr sz="1425" b="1">
-                <a:solidFill>
-                  <a:srgbClr val="102A63"/>
-                </a:solidFill>
-              </a:rPr>
-              <a:t>{{SEC_1_TITLE}}</a:t>
+              <a:t>05</a:t>
             </a:r>
           </a:p>
         </p:txBody>
@@ -7458,19 +8363,69 @@
           <p:cNvPr id="10" name="">
             <a:extLst xmlns:a="http://schemas.openxmlformats.org/drawingml/2006/main">
               <a:ext uri="{FF2B5EF4-FFF2-40B4-BE49-F238E27FC236}">
-                <a16:creationId xmlns:a16="http://schemas.microsoft.com/office/drawing/2014/main" id="{1F436D7B-F24E-418F-80DA-A740A8D40B4A}"/>
-              </a:ext>
-            </a:extLst>
-          </p:cNvPr>
-          <p:cNvSpPr>
-            <a:spLocks xmlns:a="http://schemas.openxmlformats.org/drawingml/2006/main" noGrp="1"/>
-          </p:cNvSpPr>
-          <p:nvPr/>
-        </p:nvSpPr>
-        <p:spPr>
-          <a:xfrm xmlns:a="http://schemas.openxmlformats.org/drawingml/2006/main">
-            <a:off x="1200150" y="1704975"/>
-            <a:ext cx="9982200" cy="400050"/>
+                <a16:creationId xmlns:a16="http://schemas.microsoft.com/office/drawing/2014/main" id="{C8A9DE69-DC16-4DF4-A4B1-07C354F2B90A}"/>
+              </a:ext>
+            </a:extLst>
+          </p:cNvPr>
+          <p:cNvSpPr>
+            <a:spLocks xmlns:a="http://schemas.openxmlformats.org/drawingml/2006/main" noGrp="1"/>
+          </p:cNvSpPr>
+          <p:nvPr/>
+        </p:nvSpPr>
+        <p:spPr>
+          <a:xfrm xmlns:a="http://schemas.openxmlformats.org/drawingml/2006/main">
+            <a:off x="1162050" y="1571625"/>
+            <a:ext cx="4324350" cy="400050"/>
+          </a:xfrm>
+          <a:prstGeom xmlns:a="http://schemas.openxmlformats.org/drawingml/2006/main" prst="rect">
+            <a:avLst/>
+          </a:prstGeom>
+          <a:noFill xmlns:a="http://schemas.openxmlformats.org/drawingml/2006/main"/>
+          <a:ln xmlns:a="http://schemas.openxmlformats.org/drawingml/2006/main" w="0">
+            <a:noFill/>
+            <a:prstDash val="solid"/>
+          </a:ln>
+        </p:spPr>
+        <p:txBody>
+          <a:bodyPr xmlns:a="http://schemas.openxmlformats.org/drawingml/2006/main"/>
+          <a:lstStyle xmlns:a="http://schemas.openxmlformats.org/drawingml/2006/main"/>
+          <a:p xmlns:a="http://schemas.openxmlformats.org/drawingml/2006/main">
+            <a:pPr>
+              <a:defRPr sz="1350" b="1">
+                <a:solidFill>
+                  <a:srgbClr val="102A63"/>
+                </a:solidFill>
+              </a:defRPr>
+            </a:pPr>
+            <a:r>
+              <a:rPr sz="1350" b="1">
+                <a:solidFill>
+                  <a:srgbClr val="102A63"/>
+                </a:solidFill>
+              </a:rPr>
+              <a:t>{{REC_5_TITLE}}</a:t>
+            </a:r>
+          </a:p>
+        </p:txBody>
+      </p:sp>
+      <p:sp>
+        <p:nvSpPr>
+          <p:cNvPr id="11" name="">
+            <a:extLst xmlns:a="http://schemas.openxmlformats.org/drawingml/2006/main">
+              <a:ext uri="{FF2B5EF4-FFF2-40B4-BE49-F238E27FC236}">
+                <a16:creationId xmlns:a16="http://schemas.microsoft.com/office/drawing/2014/main" id="{BB1967AE-C306-4154-A0C2-E947192A57B3}"/>
+              </a:ext>
+            </a:extLst>
+          </p:cNvPr>
+          <p:cNvSpPr>
+            <a:spLocks xmlns:a="http://schemas.openxmlformats.org/drawingml/2006/main" noGrp="1"/>
+          </p:cNvSpPr>
+          <p:nvPr/>
+        </p:nvSpPr>
+        <p:spPr>
+          <a:xfrm xmlns:a="http://schemas.openxmlformats.org/drawingml/2006/main">
+            <a:off x="762000" y="2047875"/>
+            <a:ext cx="4743450" cy="552450"/>
           </a:xfrm>
           <a:prstGeom xmlns:a="http://schemas.openxmlformats.org/drawingml/2006/main" prst="rect">
             <a:avLst/>
@@ -7498,57 +8453,7 @@
                   <a:srgbClr val="596780"/>
                 </a:solidFill>
               </a:rPr>
-              <a:t>{{SEC_1_ACTION}}</a:t>
-            </a:r>
-          </a:p>
-        </p:txBody>
-      </p:sp>
-      <p:sp>
-        <p:nvSpPr>
-          <p:cNvPr id="11" name="">
-            <a:extLst xmlns:a="http://schemas.openxmlformats.org/drawingml/2006/main">
-              <a:ext uri="{FF2B5EF4-FFF2-40B4-BE49-F238E27FC236}">
-                <a16:creationId xmlns:a16="http://schemas.microsoft.com/office/drawing/2014/main" id="{57A7D474-04BE-4084-BE92-DEAEEF2EDDEA}"/>
-              </a:ext>
-            </a:extLst>
-          </p:cNvPr>
-          <p:cNvSpPr>
-            <a:spLocks xmlns:a="http://schemas.openxmlformats.org/drawingml/2006/main" noGrp="1"/>
-          </p:cNvSpPr>
-          <p:nvPr/>
-        </p:nvSpPr>
-        <p:spPr>
-          <a:xfrm xmlns:a="http://schemas.openxmlformats.org/drawingml/2006/main">
-            <a:off x="1200150" y="2171700"/>
-            <a:ext cx="742950" cy="190500"/>
-          </a:xfrm>
-          <a:prstGeom xmlns:a="http://schemas.openxmlformats.org/drawingml/2006/main" prst="rect">
-            <a:avLst/>
-          </a:prstGeom>
-          <a:noFill xmlns:a="http://schemas.openxmlformats.org/drawingml/2006/main"/>
-          <a:ln xmlns:a="http://schemas.openxmlformats.org/drawingml/2006/main" w="0">
-            <a:noFill/>
-            <a:prstDash val="solid"/>
-          </a:ln>
-        </p:spPr>
-        <p:txBody>
-          <a:bodyPr xmlns:a="http://schemas.openxmlformats.org/drawingml/2006/main"/>
-          <a:lstStyle xmlns:a="http://schemas.openxmlformats.org/drawingml/2006/main"/>
-          <a:p xmlns:a="http://schemas.openxmlformats.org/drawingml/2006/main">
-            <a:pPr>
-              <a:defRPr sz="975" b="1">
-                <a:solidFill>
-                  <a:srgbClr val="2048A8"/>
-                </a:solidFill>
-              </a:defRPr>
-            </a:pPr>
-            <a:r>
-              <a:rPr sz="975" b="1">
-                <a:solidFill>
-                  <a:srgbClr val="2048A8"/>
-                </a:solidFill>
-              </a:rPr>
-              <a:t>Решение</a:t>
+              <a:t>{{REC_5_ACTION}}</a:t>
             </a:r>
           </a:p>
         </p:txBody>
@@ -7558,169 +8463,19 @@
           <p:cNvPr id="12" name="">
             <a:extLst xmlns:a="http://schemas.openxmlformats.org/drawingml/2006/main">
               <a:ext uri="{FF2B5EF4-FFF2-40B4-BE49-F238E27FC236}">
-                <a16:creationId xmlns:a16="http://schemas.microsoft.com/office/drawing/2014/main" id="{4134A6C2-35BE-46B5-9545-25E7E742D6CB}"/>
-              </a:ext>
-            </a:extLst>
-          </p:cNvPr>
-          <p:cNvSpPr>
-            <a:spLocks xmlns:a="http://schemas.openxmlformats.org/drawingml/2006/main" noGrp="1"/>
-          </p:cNvSpPr>
-          <p:nvPr/>
-        </p:nvSpPr>
-        <p:spPr>
-          <a:xfrm xmlns:a="http://schemas.openxmlformats.org/drawingml/2006/main">
-            <a:off x="1962150" y="2152650"/>
-            <a:ext cx="3810000" cy="323850"/>
-          </a:xfrm>
-          <a:prstGeom xmlns:a="http://schemas.openxmlformats.org/drawingml/2006/main" prst="rect">
-            <a:avLst/>
-          </a:prstGeom>
-          <a:noFill xmlns:a="http://schemas.openxmlformats.org/drawingml/2006/main"/>
-          <a:ln xmlns:a="http://schemas.openxmlformats.org/drawingml/2006/main" w="0">
-            <a:noFill/>
-            <a:prstDash val="solid"/>
-          </a:ln>
-        </p:spPr>
-        <p:txBody>
-          <a:bodyPr xmlns:a="http://schemas.openxmlformats.org/drawingml/2006/main"/>
-          <a:lstStyle xmlns:a="http://schemas.openxmlformats.org/drawingml/2006/main"/>
-          <a:p xmlns:a="http://schemas.openxmlformats.org/drawingml/2006/main">
-            <a:pPr>
-              <a:defRPr sz="1050" b="1">
-                <a:solidFill>
-                  <a:srgbClr val="102A63"/>
-                </a:solidFill>
-              </a:defRPr>
-            </a:pPr>
-            <a:r>
-              <a:rPr sz="1050" b="1">
-                <a:solidFill>
-                  <a:srgbClr val="102A63"/>
-                </a:solidFill>
-              </a:rPr>
-              <a:t>{{SEC_1_SOLUTION}}</a:t>
-            </a:r>
-          </a:p>
-        </p:txBody>
-      </p:sp>
-      <p:sp>
-        <p:nvSpPr>
-          <p:cNvPr id="13" name="">
-            <a:extLst xmlns:a="http://schemas.openxmlformats.org/drawingml/2006/main">
-              <a:ext uri="{FF2B5EF4-FFF2-40B4-BE49-F238E27FC236}">
-                <a16:creationId xmlns:a16="http://schemas.microsoft.com/office/drawing/2014/main" id="{28ADFFF6-BE4D-4EAB-AF88-53FACA68B474}"/>
-              </a:ext>
-            </a:extLst>
-          </p:cNvPr>
-          <p:cNvSpPr>
-            <a:spLocks xmlns:a="http://schemas.openxmlformats.org/drawingml/2006/main" noGrp="1"/>
-          </p:cNvSpPr>
-          <p:nvPr/>
-        </p:nvSpPr>
-        <p:spPr>
-          <a:xfrm xmlns:a="http://schemas.openxmlformats.org/drawingml/2006/main">
-            <a:off x="6019800" y="2171700"/>
-            <a:ext cx="1104900" cy="190500"/>
-          </a:xfrm>
-          <a:prstGeom xmlns:a="http://schemas.openxmlformats.org/drawingml/2006/main" prst="rect">
-            <a:avLst/>
-          </a:prstGeom>
-          <a:noFill xmlns:a="http://schemas.openxmlformats.org/drawingml/2006/main"/>
-          <a:ln xmlns:a="http://schemas.openxmlformats.org/drawingml/2006/main" w="0">
-            <a:noFill/>
-            <a:prstDash val="solid"/>
-          </a:ln>
-        </p:spPr>
-        <p:txBody>
-          <a:bodyPr xmlns:a="http://schemas.openxmlformats.org/drawingml/2006/main"/>
-          <a:lstStyle xmlns:a="http://schemas.openxmlformats.org/drawingml/2006/main"/>
-          <a:p xmlns:a="http://schemas.openxmlformats.org/drawingml/2006/main">
-            <a:pPr>
-              <a:defRPr sz="975" b="1">
-                <a:solidFill>
-                  <a:srgbClr val="2048A8"/>
-                </a:solidFill>
-              </a:defRPr>
-            </a:pPr>
-            <a:r>
-              <a:rPr sz="975" b="1">
-                <a:solidFill>
-                  <a:srgbClr val="2048A8"/>
-                </a:solidFill>
-              </a:rPr>
-              <a:t>Производители</a:t>
-            </a:r>
-          </a:p>
-        </p:txBody>
-      </p:sp>
-      <p:sp>
-        <p:nvSpPr>
-          <p:cNvPr id="14" name="">
-            <a:extLst xmlns:a="http://schemas.openxmlformats.org/drawingml/2006/main">
-              <a:ext uri="{FF2B5EF4-FFF2-40B4-BE49-F238E27FC236}">
-                <a16:creationId xmlns:a16="http://schemas.microsoft.com/office/drawing/2014/main" id="{991F7450-FE8F-4605-BFBF-09BD313555E7}"/>
-              </a:ext>
-            </a:extLst>
-          </p:cNvPr>
-          <p:cNvSpPr>
-            <a:spLocks xmlns:a="http://schemas.openxmlformats.org/drawingml/2006/main" noGrp="1"/>
-          </p:cNvSpPr>
-          <p:nvPr/>
-        </p:nvSpPr>
-        <p:spPr>
-          <a:xfrm xmlns:a="http://schemas.openxmlformats.org/drawingml/2006/main">
-            <a:off x="7181850" y="2152650"/>
-            <a:ext cx="4000500" cy="323850"/>
-          </a:xfrm>
-          <a:prstGeom xmlns:a="http://schemas.openxmlformats.org/drawingml/2006/main" prst="rect">
-            <a:avLst/>
-          </a:prstGeom>
-          <a:noFill xmlns:a="http://schemas.openxmlformats.org/drawingml/2006/main"/>
-          <a:ln xmlns:a="http://schemas.openxmlformats.org/drawingml/2006/main" w="0">
-            <a:noFill/>
-            <a:prstDash val="solid"/>
-          </a:ln>
-        </p:spPr>
-        <p:txBody>
-          <a:bodyPr xmlns:a="http://schemas.openxmlformats.org/drawingml/2006/main"/>
-          <a:lstStyle xmlns:a="http://schemas.openxmlformats.org/drawingml/2006/main"/>
-          <a:p xmlns:a="http://schemas.openxmlformats.org/drawingml/2006/main">
-            <a:pPr>
-              <a:defRPr sz="1050" b="1">
-                <a:solidFill>
-                  <a:srgbClr val="102A63"/>
-                </a:solidFill>
-              </a:defRPr>
-            </a:pPr>
-            <a:r>
-              <a:rPr sz="1050" b="1">
-                <a:solidFill>
-                  <a:srgbClr val="102A63"/>
-                </a:solidFill>
-              </a:rPr>
-              <a:t>{{SEC_1_VENDORS}}</a:t>
-            </a:r>
-          </a:p>
-        </p:txBody>
-      </p:sp>
-      <p:sp>
-        <p:nvSpPr>
-          <p:cNvPr id="15" name="">
-            <a:extLst xmlns:a="http://schemas.openxmlformats.org/drawingml/2006/main">
-              <a:ext uri="{FF2B5EF4-FFF2-40B4-BE49-F238E27FC236}">
-                <a16:creationId xmlns:a16="http://schemas.microsoft.com/office/drawing/2014/main" id="{FDBB4DAC-60E5-477E-839D-E3D1DFF7E35C}"/>
-              </a:ext>
-            </a:extLst>
-          </p:cNvPr>
-          <p:cNvSpPr>
-            <a:spLocks xmlns:a="http://schemas.openxmlformats.org/drawingml/2006/main" noGrp="1"/>
-          </p:cNvSpPr>
-          <p:nvPr/>
-        </p:nvSpPr>
-        <p:spPr>
-          <a:xfrm xmlns:a="http://schemas.openxmlformats.org/drawingml/2006/main">
-            <a:off x="1200150" y="2552700"/>
-            <a:ext cx="9982200" cy="9525"/>
+                <a16:creationId xmlns:a16="http://schemas.microsoft.com/office/drawing/2014/main" id="{1AF9F65D-7822-4B55-90CB-55A804099A28}"/>
+              </a:ext>
+            </a:extLst>
+          </p:cNvPr>
+          <p:cNvSpPr>
+            <a:spLocks xmlns:a="http://schemas.openxmlformats.org/drawingml/2006/main" noGrp="1"/>
+          </p:cNvSpPr>
+          <p:nvPr/>
+        </p:nvSpPr>
+        <p:spPr>
+          <a:xfrm xmlns:a="http://schemas.openxmlformats.org/drawingml/2006/main">
+            <a:off x="762000" y="2686050"/>
+            <a:ext cx="4743450" cy="9525"/>
           </a:xfrm>
           <a:prstGeom xmlns:a="http://schemas.openxmlformats.org/drawingml/2006/main" prst="rect">
             <a:avLst/>
@@ -7736,22 +8491,257 @@
       </p:sp>
       <p:sp>
         <p:nvSpPr>
+          <p:cNvPr id="13" name="">
+            <a:extLst xmlns:a="http://schemas.openxmlformats.org/drawingml/2006/main">
+              <a:ext uri="{FF2B5EF4-FFF2-40B4-BE49-F238E27FC236}">
+                <a16:creationId xmlns:a16="http://schemas.microsoft.com/office/drawing/2014/main" id="{AF618DA1-923B-48D4-9B35-20FFFCBA7698}"/>
+              </a:ext>
+            </a:extLst>
+          </p:cNvPr>
+          <p:cNvSpPr>
+            <a:spLocks xmlns:a="http://schemas.openxmlformats.org/drawingml/2006/main" noGrp="1"/>
+          </p:cNvSpPr>
+          <p:nvPr/>
+        </p:nvSpPr>
+        <p:spPr>
+          <a:xfrm xmlns:a="http://schemas.openxmlformats.org/drawingml/2006/main">
+            <a:off x="762000" y="2819400"/>
+            <a:ext cx="2171700" cy="171450"/>
+          </a:xfrm>
+          <a:prstGeom xmlns:a="http://schemas.openxmlformats.org/drawingml/2006/main" prst="rect">
+            <a:avLst/>
+          </a:prstGeom>
+          <a:noFill xmlns:a="http://schemas.openxmlformats.org/drawingml/2006/main"/>
+          <a:ln xmlns:a="http://schemas.openxmlformats.org/drawingml/2006/main" w="0">
+            <a:noFill/>
+            <a:prstDash val="solid"/>
+          </a:ln>
+        </p:spPr>
+        <p:txBody>
+          <a:bodyPr xmlns:a="http://schemas.openxmlformats.org/drawingml/2006/main"/>
+          <a:lstStyle xmlns:a="http://schemas.openxmlformats.org/drawingml/2006/main"/>
+          <a:p xmlns:a="http://schemas.openxmlformats.org/drawingml/2006/main">
+            <a:pPr>
+              <a:defRPr sz="900" b="1">
+                <a:solidFill>
+                  <a:srgbClr val="2048A8"/>
+                </a:solidFill>
+              </a:defRPr>
+            </a:pPr>
+            <a:r>
+              <a:rPr sz="900" b="1">
+                <a:solidFill>
+                  <a:srgbClr val="2048A8"/>
+                </a:solidFill>
+              </a:rPr>
+              <a:t>Решение</a:t>
+            </a:r>
+          </a:p>
+        </p:txBody>
+      </p:sp>
+      <p:sp>
+        <p:nvSpPr>
+          <p:cNvPr id="14" name="">
+            <a:extLst xmlns:a="http://schemas.openxmlformats.org/drawingml/2006/main">
+              <a:ext uri="{FF2B5EF4-FFF2-40B4-BE49-F238E27FC236}">
+                <a16:creationId xmlns:a16="http://schemas.microsoft.com/office/drawing/2014/main" id="{F32B558D-79CA-4647-A561-AA0E060E3BB6}"/>
+              </a:ext>
+            </a:extLst>
+          </p:cNvPr>
+          <p:cNvSpPr>
+            <a:spLocks xmlns:a="http://schemas.openxmlformats.org/drawingml/2006/main" noGrp="1"/>
+          </p:cNvSpPr>
+          <p:nvPr/>
+        </p:nvSpPr>
+        <p:spPr>
+          <a:xfrm xmlns:a="http://schemas.openxmlformats.org/drawingml/2006/main">
+            <a:off x="762000" y="3009900"/>
+            <a:ext cx="2266950" cy="409575"/>
+          </a:xfrm>
+          <a:prstGeom xmlns:a="http://schemas.openxmlformats.org/drawingml/2006/main" prst="rect">
+            <a:avLst/>
+          </a:prstGeom>
+          <a:noFill xmlns:a="http://schemas.openxmlformats.org/drawingml/2006/main"/>
+          <a:ln xmlns:a="http://schemas.openxmlformats.org/drawingml/2006/main" w="0">
+            <a:noFill/>
+            <a:prstDash val="solid"/>
+          </a:ln>
+        </p:spPr>
+        <p:txBody>
+          <a:bodyPr xmlns:a="http://schemas.openxmlformats.org/drawingml/2006/main"/>
+          <a:lstStyle xmlns:a="http://schemas.openxmlformats.org/drawingml/2006/main"/>
+          <a:p xmlns:a="http://schemas.openxmlformats.org/drawingml/2006/main">
+            <a:pPr>
+              <a:defRPr sz="1050" b="1">
+                <a:solidFill>
+                  <a:srgbClr val="102A63"/>
+                </a:solidFill>
+              </a:defRPr>
+            </a:pPr>
+            <a:r>
+              <a:rPr sz="1050" b="1">
+                <a:solidFill>
+                  <a:srgbClr val="102A63"/>
+                </a:solidFill>
+              </a:rPr>
+              <a:t>{{REC_5_SOLUTION}}</a:t>
+            </a:r>
+          </a:p>
+        </p:txBody>
+      </p:sp>
+      <p:sp>
+        <p:nvSpPr>
+          <p:cNvPr id="15" name="">
+            <a:extLst xmlns:a="http://schemas.openxmlformats.org/drawingml/2006/main">
+              <a:ext uri="{FF2B5EF4-FFF2-40B4-BE49-F238E27FC236}">
+                <a16:creationId xmlns:a16="http://schemas.microsoft.com/office/drawing/2014/main" id="{A06009DF-1565-4312-BD2B-698719D6321B}"/>
+              </a:ext>
+            </a:extLst>
+          </p:cNvPr>
+          <p:cNvSpPr>
+            <a:spLocks xmlns:a="http://schemas.openxmlformats.org/drawingml/2006/main" noGrp="1"/>
+          </p:cNvSpPr>
+          <p:nvPr/>
+        </p:nvSpPr>
+        <p:spPr>
+          <a:xfrm xmlns:a="http://schemas.openxmlformats.org/drawingml/2006/main">
+            <a:off x="3219450" y="2819400"/>
+            <a:ext cx="2266950" cy="171450"/>
+          </a:xfrm>
+          <a:prstGeom xmlns:a="http://schemas.openxmlformats.org/drawingml/2006/main" prst="rect">
+            <a:avLst/>
+          </a:prstGeom>
+          <a:noFill xmlns:a="http://schemas.openxmlformats.org/drawingml/2006/main"/>
+          <a:ln xmlns:a="http://schemas.openxmlformats.org/drawingml/2006/main" w="0">
+            <a:noFill/>
+            <a:prstDash val="solid"/>
+          </a:ln>
+        </p:spPr>
+        <p:txBody>
+          <a:bodyPr xmlns:a="http://schemas.openxmlformats.org/drawingml/2006/main"/>
+          <a:lstStyle xmlns:a="http://schemas.openxmlformats.org/drawingml/2006/main"/>
+          <a:p xmlns:a="http://schemas.openxmlformats.org/drawingml/2006/main">
+            <a:pPr>
+              <a:defRPr sz="900" b="1">
+                <a:solidFill>
+                  <a:srgbClr val="2048A8"/>
+                </a:solidFill>
+              </a:defRPr>
+            </a:pPr>
+            <a:r>
+              <a:rPr sz="900" b="1">
+                <a:solidFill>
+                  <a:srgbClr val="2048A8"/>
+                </a:solidFill>
+              </a:rPr>
+              <a:t>Производители</a:t>
+            </a:r>
+          </a:p>
+        </p:txBody>
+      </p:sp>
+      <p:sp>
+        <p:nvSpPr>
           <p:cNvPr id="16" name="">
             <a:extLst xmlns:a="http://schemas.openxmlformats.org/drawingml/2006/main">
               <a:ext uri="{FF2B5EF4-FFF2-40B4-BE49-F238E27FC236}">
-                <a16:creationId xmlns:a16="http://schemas.microsoft.com/office/drawing/2014/main" id="{56ECD0E7-BE61-4D73-8544-03E81B2421BE}"/>
-              </a:ext>
-            </a:extLst>
-          </p:cNvPr>
-          <p:cNvSpPr>
-            <a:spLocks xmlns:a="http://schemas.openxmlformats.org/drawingml/2006/main" noGrp="1"/>
-          </p:cNvSpPr>
-          <p:nvPr/>
-        </p:nvSpPr>
-        <p:spPr>
-          <a:xfrm xmlns:a="http://schemas.openxmlformats.org/drawingml/2006/main">
-            <a:off x="609600" y="2724150"/>
-            <a:ext cx="457200" cy="266700"/>
+                <a16:creationId xmlns:a16="http://schemas.microsoft.com/office/drawing/2014/main" id="{865FA1C5-A5AD-4836-B75E-E6A67C81CD1A}"/>
+              </a:ext>
+            </a:extLst>
+          </p:cNvPr>
+          <p:cNvSpPr>
+            <a:spLocks xmlns:a="http://schemas.openxmlformats.org/drawingml/2006/main" noGrp="1"/>
+          </p:cNvSpPr>
+          <p:nvPr/>
+        </p:nvSpPr>
+        <p:spPr>
+          <a:xfrm xmlns:a="http://schemas.openxmlformats.org/drawingml/2006/main">
+            <a:off x="3219450" y="3009900"/>
+            <a:ext cx="2266950" cy="409575"/>
+          </a:xfrm>
+          <a:prstGeom xmlns:a="http://schemas.openxmlformats.org/drawingml/2006/main" prst="rect">
+            <a:avLst/>
+          </a:prstGeom>
+          <a:noFill xmlns:a="http://schemas.openxmlformats.org/drawingml/2006/main"/>
+          <a:ln xmlns:a="http://schemas.openxmlformats.org/drawingml/2006/main" w="0">
+            <a:noFill/>
+            <a:prstDash val="solid"/>
+          </a:ln>
+        </p:spPr>
+        <p:txBody>
+          <a:bodyPr xmlns:a="http://schemas.openxmlformats.org/drawingml/2006/main"/>
+          <a:lstStyle xmlns:a="http://schemas.openxmlformats.org/drawingml/2006/main"/>
+          <a:p xmlns:a="http://schemas.openxmlformats.org/drawingml/2006/main">
+            <a:pPr>
+              <a:defRPr sz="1050" b="1">
+                <a:solidFill>
+                  <a:srgbClr val="102A63"/>
+                </a:solidFill>
+              </a:defRPr>
+            </a:pPr>
+            <a:r>
+              <a:rPr sz="1050" b="1">
+                <a:solidFill>
+                  <a:srgbClr val="102A63"/>
+                </a:solidFill>
+              </a:rPr>
+              <a:t>{{REC_5_VENDORS}}</a:t>
+            </a:r>
+          </a:p>
+        </p:txBody>
+      </p:sp>
+      <p:sp>
+        <p:nvSpPr>
+          <p:cNvPr id="17" name="">
+            <a:extLst xmlns:a="http://schemas.openxmlformats.org/drawingml/2006/main">
+              <a:ext uri="{FF2B5EF4-FFF2-40B4-BE49-F238E27FC236}">
+                <a16:creationId xmlns:a16="http://schemas.microsoft.com/office/drawing/2014/main" id="{37DEF509-A4C6-48FF-98AD-0FEBADCF6B55}"/>
+              </a:ext>
+            </a:extLst>
+          </p:cNvPr>
+          <p:cNvSpPr>
+            <a:spLocks xmlns:a="http://schemas.openxmlformats.org/drawingml/2006/main" noGrp="1"/>
+          </p:cNvSpPr>
+          <p:nvPr/>
+        </p:nvSpPr>
+        <p:spPr>
+          <a:xfrm xmlns:a="http://schemas.openxmlformats.org/drawingml/2006/main">
+            <a:off x="6076950" y="1428750"/>
+            <a:ext cx="5162550" cy="2143125"/>
+          </a:xfrm>
+          <a:prstGeom xmlns:a="http://schemas.openxmlformats.org/drawingml/2006/main" prst="roundRect">
+            <a:avLst>
+              <a:gd name="adj" fmla="val 3556"/>
+            </a:avLst>
+          </a:prstGeom>
+          <a:solidFill xmlns:a="http://schemas.openxmlformats.org/drawingml/2006/main">
+            <a:srgbClr val="FFFFFF"/>
+          </a:solidFill>
+          <a:ln xmlns:a="http://schemas.openxmlformats.org/drawingml/2006/main" w="9525">
+            <a:solidFill>
+              <a:srgbClr val="D7E0F2"/>
+            </a:solidFill>
+            <a:prstDash val="solid"/>
+          </a:ln>
+        </p:spPr>
+      </p:sp>
+      <p:sp>
+        <p:nvSpPr>
+          <p:cNvPr id="18" name="">
+            <a:extLst xmlns:a="http://schemas.openxmlformats.org/drawingml/2006/main">
+              <a:ext uri="{FF2B5EF4-FFF2-40B4-BE49-F238E27FC236}">
+                <a16:creationId xmlns:a16="http://schemas.microsoft.com/office/drawing/2014/main" id="{B005BAE1-F62D-45D6-83A8-B89862C11904}"/>
+              </a:ext>
+            </a:extLst>
+          </p:cNvPr>
+          <p:cNvSpPr>
+            <a:spLocks xmlns:a="http://schemas.openxmlformats.org/drawingml/2006/main" noGrp="1"/>
+          </p:cNvSpPr>
+          <p:nvPr/>
+        </p:nvSpPr>
+        <p:spPr>
+          <a:xfrm xmlns:a="http://schemas.openxmlformats.org/drawingml/2006/main">
+            <a:off x="6267450" y="1600200"/>
+            <a:ext cx="361950" cy="247650"/>
           </a:xfrm>
           <a:prstGeom xmlns:a="http://schemas.openxmlformats.org/drawingml/2006/main" prst="rect">
             <a:avLst/>
@@ -7779,79 +8769,79 @@
                   <a:srgbClr val="2048A8"/>
                 </a:solidFill>
               </a:rPr>
-              <a:t>02</a:t>
-            </a:r>
-          </a:p>
-        </p:txBody>
-      </p:sp>
-      <p:sp>
-        <p:nvSpPr>
-          <p:cNvPr id="17" name="">
-            <a:extLst xmlns:a="http://schemas.openxmlformats.org/drawingml/2006/main">
-              <a:ext uri="{FF2B5EF4-FFF2-40B4-BE49-F238E27FC236}">
-                <a16:creationId xmlns:a16="http://schemas.microsoft.com/office/drawing/2014/main" id="{9647DE8C-A184-4B11-B2F7-9E6D36974EDA}"/>
-              </a:ext>
-            </a:extLst>
-          </p:cNvPr>
-          <p:cNvSpPr>
-            <a:spLocks xmlns:a="http://schemas.openxmlformats.org/drawingml/2006/main" noGrp="1"/>
-          </p:cNvSpPr>
-          <p:nvPr/>
-        </p:nvSpPr>
-        <p:spPr>
-          <a:xfrm xmlns:a="http://schemas.openxmlformats.org/drawingml/2006/main">
-            <a:off x="1200150" y="2667000"/>
-            <a:ext cx="9982200" cy="266700"/>
-          </a:xfrm>
-          <a:prstGeom xmlns:a="http://schemas.openxmlformats.org/drawingml/2006/main" prst="rect">
-            <a:avLst/>
-          </a:prstGeom>
-          <a:noFill xmlns:a="http://schemas.openxmlformats.org/drawingml/2006/main"/>
-          <a:ln xmlns:a="http://schemas.openxmlformats.org/drawingml/2006/main" w="0">
-            <a:noFill/>
-            <a:prstDash val="solid"/>
-          </a:ln>
-        </p:spPr>
-        <p:txBody>
-          <a:bodyPr xmlns:a="http://schemas.openxmlformats.org/drawingml/2006/main"/>
-          <a:lstStyle xmlns:a="http://schemas.openxmlformats.org/drawingml/2006/main"/>
-          <a:p xmlns:a="http://schemas.openxmlformats.org/drawingml/2006/main">
-            <a:pPr>
-              <a:defRPr sz="1425" b="1">
-                <a:solidFill>
-                  <a:srgbClr val="102A63"/>
-                </a:solidFill>
-              </a:defRPr>
-            </a:pPr>
-            <a:r>
-              <a:rPr sz="1425" b="1">
-                <a:solidFill>
-                  <a:srgbClr val="102A63"/>
-                </a:solidFill>
-              </a:rPr>
-              <a:t>{{SEC_2_TITLE}}</a:t>
-            </a:r>
-          </a:p>
-        </p:txBody>
-      </p:sp>
-      <p:sp>
-        <p:nvSpPr>
-          <p:cNvPr id="18" name="">
-            <a:extLst xmlns:a="http://schemas.openxmlformats.org/drawingml/2006/main">
-              <a:ext uri="{FF2B5EF4-FFF2-40B4-BE49-F238E27FC236}">
-                <a16:creationId xmlns:a16="http://schemas.microsoft.com/office/drawing/2014/main" id="{F7F8B478-7CE2-4825-96BD-F18D4DEE6A6B}"/>
-              </a:ext>
-            </a:extLst>
-          </p:cNvPr>
-          <p:cNvSpPr>
-            <a:spLocks xmlns:a="http://schemas.openxmlformats.org/drawingml/2006/main" noGrp="1"/>
-          </p:cNvSpPr>
-          <p:nvPr/>
-        </p:nvSpPr>
-        <p:spPr>
-          <a:xfrm xmlns:a="http://schemas.openxmlformats.org/drawingml/2006/main">
-            <a:off x="1200150" y="2962275"/>
-            <a:ext cx="9982200" cy="400050"/>
+              <a:t>06</a:t>
+            </a:r>
+          </a:p>
+        </p:txBody>
+      </p:sp>
+      <p:sp>
+        <p:nvSpPr>
+          <p:cNvPr id="19" name="">
+            <a:extLst xmlns:a="http://schemas.openxmlformats.org/drawingml/2006/main">
+              <a:ext uri="{FF2B5EF4-FFF2-40B4-BE49-F238E27FC236}">
+                <a16:creationId xmlns:a16="http://schemas.microsoft.com/office/drawing/2014/main" id="{BC801C3F-1715-4171-A17B-B93FA1F9BE99}"/>
+              </a:ext>
+            </a:extLst>
+          </p:cNvPr>
+          <p:cNvSpPr>
+            <a:spLocks xmlns:a="http://schemas.openxmlformats.org/drawingml/2006/main" noGrp="1"/>
+          </p:cNvSpPr>
+          <p:nvPr/>
+        </p:nvSpPr>
+        <p:spPr>
+          <a:xfrm xmlns:a="http://schemas.openxmlformats.org/drawingml/2006/main">
+            <a:off x="6686550" y="1571625"/>
+            <a:ext cx="4324350" cy="400050"/>
+          </a:xfrm>
+          <a:prstGeom xmlns:a="http://schemas.openxmlformats.org/drawingml/2006/main" prst="rect">
+            <a:avLst/>
+          </a:prstGeom>
+          <a:noFill xmlns:a="http://schemas.openxmlformats.org/drawingml/2006/main"/>
+          <a:ln xmlns:a="http://schemas.openxmlformats.org/drawingml/2006/main" w="0">
+            <a:noFill/>
+            <a:prstDash val="solid"/>
+          </a:ln>
+        </p:spPr>
+        <p:txBody>
+          <a:bodyPr xmlns:a="http://schemas.openxmlformats.org/drawingml/2006/main"/>
+          <a:lstStyle xmlns:a="http://schemas.openxmlformats.org/drawingml/2006/main"/>
+          <a:p xmlns:a="http://schemas.openxmlformats.org/drawingml/2006/main">
+            <a:pPr>
+              <a:defRPr sz="1350" b="1">
+                <a:solidFill>
+                  <a:srgbClr val="102A63"/>
+                </a:solidFill>
+              </a:defRPr>
+            </a:pPr>
+            <a:r>
+              <a:rPr sz="1350" b="1">
+                <a:solidFill>
+                  <a:srgbClr val="102A63"/>
+                </a:solidFill>
+              </a:rPr>
+              <a:t>{{REC_6_TITLE}}</a:t>
+            </a:r>
+          </a:p>
+        </p:txBody>
+      </p:sp>
+      <p:sp>
+        <p:nvSpPr>
+          <p:cNvPr id="20" name="">
+            <a:extLst xmlns:a="http://schemas.openxmlformats.org/drawingml/2006/main">
+              <a:ext uri="{FF2B5EF4-FFF2-40B4-BE49-F238E27FC236}">
+                <a16:creationId xmlns:a16="http://schemas.microsoft.com/office/drawing/2014/main" id="{63718C74-3AE9-4612-80BD-20488BABEBA9}"/>
+              </a:ext>
+            </a:extLst>
+          </p:cNvPr>
+          <p:cNvSpPr>
+            <a:spLocks xmlns:a="http://schemas.openxmlformats.org/drawingml/2006/main" noGrp="1"/>
+          </p:cNvSpPr>
+          <p:nvPr/>
+        </p:nvSpPr>
+        <p:spPr>
+          <a:xfrm xmlns:a="http://schemas.openxmlformats.org/drawingml/2006/main">
+            <a:off x="6286500" y="2047875"/>
+            <a:ext cx="4743450" cy="552450"/>
           </a:xfrm>
           <a:prstGeom xmlns:a="http://schemas.openxmlformats.org/drawingml/2006/main" prst="rect">
             <a:avLst/>
@@ -7879,107 +8869,7 @@
                   <a:srgbClr val="596780"/>
                 </a:solidFill>
               </a:rPr>
-              <a:t>{{SEC_2_ACTION}}</a:t>
-            </a:r>
-          </a:p>
-        </p:txBody>
-      </p:sp>
-      <p:sp>
-        <p:nvSpPr>
-          <p:cNvPr id="19" name="">
-            <a:extLst xmlns:a="http://schemas.openxmlformats.org/drawingml/2006/main">
-              <a:ext uri="{FF2B5EF4-FFF2-40B4-BE49-F238E27FC236}">
-                <a16:creationId xmlns:a16="http://schemas.microsoft.com/office/drawing/2014/main" id="{F242A56F-01B7-4646-A5F4-F9325201279B}"/>
-              </a:ext>
-            </a:extLst>
-          </p:cNvPr>
-          <p:cNvSpPr>
-            <a:spLocks xmlns:a="http://schemas.openxmlformats.org/drawingml/2006/main" noGrp="1"/>
-          </p:cNvSpPr>
-          <p:nvPr/>
-        </p:nvSpPr>
-        <p:spPr>
-          <a:xfrm xmlns:a="http://schemas.openxmlformats.org/drawingml/2006/main">
-            <a:off x="1200150" y="3429000"/>
-            <a:ext cx="742950" cy="190500"/>
-          </a:xfrm>
-          <a:prstGeom xmlns:a="http://schemas.openxmlformats.org/drawingml/2006/main" prst="rect">
-            <a:avLst/>
-          </a:prstGeom>
-          <a:noFill xmlns:a="http://schemas.openxmlformats.org/drawingml/2006/main"/>
-          <a:ln xmlns:a="http://schemas.openxmlformats.org/drawingml/2006/main" w="0">
-            <a:noFill/>
-            <a:prstDash val="solid"/>
-          </a:ln>
-        </p:spPr>
-        <p:txBody>
-          <a:bodyPr xmlns:a="http://schemas.openxmlformats.org/drawingml/2006/main"/>
-          <a:lstStyle xmlns:a="http://schemas.openxmlformats.org/drawingml/2006/main"/>
-          <a:p xmlns:a="http://schemas.openxmlformats.org/drawingml/2006/main">
-            <a:pPr>
-              <a:defRPr sz="975" b="1">
-                <a:solidFill>
-                  <a:srgbClr val="2048A8"/>
-                </a:solidFill>
-              </a:defRPr>
-            </a:pPr>
-            <a:r>
-              <a:rPr sz="975" b="1">
-                <a:solidFill>
-                  <a:srgbClr val="2048A8"/>
-                </a:solidFill>
-              </a:rPr>
-              <a:t>Решение</a:t>
-            </a:r>
-          </a:p>
-        </p:txBody>
-      </p:sp>
-      <p:sp>
-        <p:nvSpPr>
-          <p:cNvPr id="20" name="">
-            <a:extLst xmlns:a="http://schemas.openxmlformats.org/drawingml/2006/main">
-              <a:ext uri="{FF2B5EF4-FFF2-40B4-BE49-F238E27FC236}">
-                <a16:creationId xmlns:a16="http://schemas.microsoft.com/office/drawing/2014/main" id="{9647FAD5-F46C-4DF7-8DC0-CFB1BA686DB9}"/>
-              </a:ext>
-            </a:extLst>
-          </p:cNvPr>
-          <p:cNvSpPr>
-            <a:spLocks xmlns:a="http://schemas.openxmlformats.org/drawingml/2006/main" noGrp="1"/>
-          </p:cNvSpPr>
-          <p:nvPr/>
-        </p:nvSpPr>
-        <p:spPr>
-          <a:xfrm xmlns:a="http://schemas.openxmlformats.org/drawingml/2006/main">
-            <a:off x="1962150" y="3409950"/>
-            <a:ext cx="3810000" cy="323850"/>
-          </a:xfrm>
-          <a:prstGeom xmlns:a="http://schemas.openxmlformats.org/drawingml/2006/main" prst="rect">
-            <a:avLst/>
-          </a:prstGeom>
-          <a:noFill xmlns:a="http://schemas.openxmlformats.org/drawingml/2006/main"/>
-          <a:ln xmlns:a="http://schemas.openxmlformats.org/drawingml/2006/main" w="0">
-            <a:noFill/>
-            <a:prstDash val="solid"/>
-          </a:ln>
-        </p:spPr>
-        <p:txBody>
-          <a:bodyPr xmlns:a="http://schemas.openxmlformats.org/drawingml/2006/main"/>
-          <a:lstStyle xmlns:a="http://schemas.openxmlformats.org/drawingml/2006/main"/>
-          <a:p xmlns:a="http://schemas.openxmlformats.org/drawingml/2006/main">
-            <a:pPr>
-              <a:defRPr sz="1050" b="1">
-                <a:solidFill>
-                  <a:srgbClr val="102A63"/>
-                </a:solidFill>
-              </a:defRPr>
-            </a:pPr>
-            <a:r>
-              <a:rPr sz="1050" b="1">
-                <a:solidFill>
-                  <a:srgbClr val="102A63"/>
-                </a:solidFill>
-              </a:rPr>
-              <a:t>{{SEC_2_SOLUTION}}</a:t>
+              <a:t>{{REC_6_ACTION}}</a:t>
             </a:r>
           </a:p>
         </p:txBody>
@@ -7989,119 +8879,19 @@
           <p:cNvPr id="21" name="">
             <a:extLst xmlns:a="http://schemas.openxmlformats.org/drawingml/2006/main">
               <a:ext uri="{FF2B5EF4-FFF2-40B4-BE49-F238E27FC236}">
-                <a16:creationId xmlns:a16="http://schemas.microsoft.com/office/drawing/2014/main" id="{CFB95DF1-B9D0-4F2D-B1E8-EA18169A2DE2}"/>
-              </a:ext>
-            </a:extLst>
-          </p:cNvPr>
-          <p:cNvSpPr>
-            <a:spLocks xmlns:a="http://schemas.openxmlformats.org/drawingml/2006/main" noGrp="1"/>
-          </p:cNvSpPr>
-          <p:nvPr/>
-        </p:nvSpPr>
-        <p:spPr>
-          <a:xfrm xmlns:a="http://schemas.openxmlformats.org/drawingml/2006/main">
-            <a:off x="6019800" y="3429000"/>
-            <a:ext cx="1104900" cy="190500"/>
-          </a:xfrm>
-          <a:prstGeom xmlns:a="http://schemas.openxmlformats.org/drawingml/2006/main" prst="rect">
-            <a:avLst/>
-          </a:prstGeom>
-          <a:noFill xmlns:a="http://schemas.openxmlformats.org/drawingml/2006/main"/>
-          <a:ln xmlns:a="http://schemas.openxmlformats.org/drawingml/2006/main" w="0">
-            <a:noFill/>
-            <a:prstDash val="solid"/>
-          </a:ln>
-        </p:spPr>
-        <p:txBody>
-          <a:bodyPr xmlns:a="http://schemas.openxmlformats.org/drawingml/2006/main"/>
-          <a:lstStyle xmlns:a="http://schemas.openxmlformats.org/drawingml/2006/main"/>
-          <a:p xmlns:a="http://schemas.openxmlformats.org/drawingml/2006/main">
-            <a:pPr>
-              <a:defRPr sz="975" b="1">
-                <a:solidFill>
-                  <a:srgbClr val="2048A8"/>
-                </a:solidFill>
-              </a:defRPr>
-            </a:pPr>
-            <a:r>
-              <a:rPr sz="975" b="1">
-                <a:solidFill>
-                  <a:srgbClr val="2048A8"/>
-                </a:solidFill>
-              </a:rPr>
-              <a:t>Производители</a:t>
-            </a:r>
-          </a:p>
-        </p:txBody>
-      </p:sp>
-      <p:sp>
-        <p:nvSpPr>
-          <p:cNvPr id="22" name="">
-            <a:extLst xmlns:a="http://schemas.openxmlformats.org/drawingml/2006/main">
-              <a:ext uri="{FF2B5EF4-FFF2-40B4-BE49-F238E27FC236}">
-                <a16:creationId xmlns:a16="http://schemas.microsoft.com/office/drawing/2014/main" id="{12811F30-E2C1-40D7-9056-BA69AAAFCD2B}"/>
-              </a:ext>
-            </a:extLst>
-          </p:cNvPr>
-          <p:cNvSpPr>
-            <a:spLocks xmlns:a="http://schemas.openxmlformats.org/drawingml/2006/main" noGrp="1"/>
-          </p:cNvSpPr>
-          <p:nvPr/>
-        </p:nvSpPr>
-        <p:spPr>
-          <a:xfrm xmlns:a="http://schemas.openxmlformats.org/drawingml/2006/main">
-            <a:off x="7181850" y="3409950"/>
-            <a:ext cx="4000500" cy="323850"/>
-          </a:xfrm>
-          <a:prstGeom xmlns:a="http://schemas.openxmlformats.org/drawingml/2006/main" prst="rect">
-            <a:avLst/>
-          </a:prstGeom>
-          <a:noFill xmlns:a="http://schemas.openxmlformats.org/drawingml/2006/main"/>
-          <a:ln xmlns:a="http://schemas.openxmlformats.org/drawingml/2006/main" w="0">
-            <a:noFill/>
-            <a:prstDash val="solid"/>
-          </a:ln>
-        </p:spPr>
-        <p:txBody>
-          <a:bodyPr xmlns:a="http://schemas.openxmlformats.org/drawingml/2006/main"/>
-          <a:lstStyle xmlns:a="http://schemas.openxmlformats.org/drawingml/2006/main"/>
-          <a:p xmlns:a="http://schemas.openxmlformats.org/drawingml/2006/main">
-            <a:pPr>
-              <a:defRPr sz="1050" b="1">
-                <a:solidFill>
-                  <a:srgbClr val="102A63"/>
-                </a:solidFill>
-              </a:defRPr>
-            </a:pPr>
-            <a:r>
-              <a:rPr sz="1050" b="1">
-                <a:solidFill>
-                  <a:srgbClr val="102A63"/>
-                </a:solidFill>
-              </a:rPr>
-              <a:t>{{SEC_2_VENDORS}}</a:t>
-            </a:r>
-          </a:p>
-        </p:txBody>
-      </p:sp>
-      <p:sp>
-        <p:nvSpPr>
-          <p:cNvPr id="23" name="">
-            <a:extLst xmlns:a="http://schemas.openxmlformats.org/drawingml/2006/main">
-              <a:ext uri="{FF2B5EF4-FFF2-40B4-BE49-F238E27FC236}">
-                <a16:creationId xmlns:a16="http://schemas.microsoft.com/office/drawing/2014/main" id="{550EF1B8-0128-41E1-960A-FD9A3AEEEE7C}"/>
-              </a:ext>
-            </a:extLst>
-          </p:cNvPr>
-          <p:cNvSpPr>
-            <a:spLocks xmlns:a="http://schemas.openxmlformats.org/drawingml/2006/main" noGrp="1"/>
-          </p:cNvSpPr>
-          <p:nvPr/>
-        </p:nvSpPr>
-        <p:spPr>
-          <a:xfrm xmlns:a="http://schemas.openxmlformats.org/drawingml/2006/main">
-            <a:off x="1200150" y="3810000"/>
-            <a:ext cx="9982200" cy="9525"/>
+                <a16:creationId xmlns:a16="http://schemas.microsoft.com/office/drawing/2014/main" id="{E84C6A41-6CD3-4C06-9D82-9A74D95A1D1D}"/>
+              </a:ext>
+            </a:extLst>
+          </p:cNvPr>
+          <p:cNvSpPr>
+            <a:spLocks xmlns:a="http://schemas.openxmlformats.org/drawingml/2006/main" noGrp="1"/>
+          </p:cNvSpPr>
+          <p:nvPr/>
+        </p:nvSpPr>
+        <p:spPr>
+          <a:xfrm xmlns:a="http://schemas.openxmlformats.org/drawingml/2006/main">
+            <a:off x="6286500" y="2686050"/>
+            <a:ext cx="4743450" cy="9525"/>
           </a:xfrm>
           <a:prstGeom xmlns:a="http://schemas.openxmlformats.org/drawingml/2006/main" prst="rect">
             <a:avLst/>
@@ -8117,22 +8907,257 @@
       </p:sp>
       <p:sp>
         <p:nvSpPr>
+          <p:cNvPr id="22" name="">
+            <a:extLst xmlns:a="http://schemas.openxmlformats.org/drawingml/2006/main">
+              <a:ext uri="{FF2B5EF4-FFF2-40B4-BE49-F238E27FC236}">
+                <a16:creationId xmlns:a16="http://schemas.microsoft.com/office/drawing/2014/main" id="{26B872C0-1ED4-41CE-80E7-33E55A58CEF4}"/>
+              </a:ext>
+            </a:extLst>
+          </p:cNvPr>
+          <p:cNvSpPr>
+            <a:spLocks xmlns:a="http://schemas.openxmlformats.org/drawingml/2006/main" noGrp="1"/>
+          </p:cNvSpPr>
+          <p:nvPr/>
+        </p:nvSpPr>
+        <p:spPr>
+          <a:xfrm xmlns:a="http://schemas.openxmlformats.org/drawingml/2006/main">
+            <a:off x="6286500" y="2819400"/>
+            <a:ext cx="2171700" cy="171450"/>
+          </a:xfrm>
+          <a:prstGeom xmlns:a="http://schemas.openxmlformats.org/drawingml/2006/main" prst="rect">
+            <a:avLst/>
+          </a:prstGeom>
+          <a:noFill xmlns:a="http://schemas.openxmlformats.org/drawingml/2006/main"/>
+          <a:ln xmlns:a="http://schemas.openxmlformats.org/drawingml/2006/main" w="0">
+            <a:noFill/>
+            <a:prstDash val="solid"/>
+          </a:ln>
+        </p:spPr>
+        <p:txBody>
+          <a:bodyPr xmlns:a="http://schemas.openxmlformats.org/drawingml/2006/main"/>
+          <a:lstStyle xmlns:a="http://schemas.openxmlformats.org/drawingml/2006/main"/>
+          <a:p xmlns:a="http://schemas.openxmlformats.org/drawingml/2006/main">
+            <a:pPr>
+              <a:defRPr sz="900" b="1">
+                <a:solidFill>
+                  <a:srgbClr val="2048A8"/>
+                </a:solidFill>
+              </a:defRPr>
+            </a:pPr>
+            <a:r>
+              <a:rPr sz="900" b="1">
+                <a:solidFill>
+                  <a:srgbClr val="2048A8"/>
+                </a:solidFill>
+              </a:rPr>
+              <a:t>Решение</a:t>
+            </a:r>
+          </a:p>
+        </p:txBody>
+      </p:sp>
+      <p:sp>
+        <p:nvSpPr>
+          <p:cNvPr id="23" name="">
+            <a:extLst xmlns:a="http://schemas.openxmlformats.org/drawingml/2006/main">
+              <a:ext uri="{FF2B5EF4-FFF2-40B4-BE49-F238E27FC236}">
+                <a16:creationId xmlns:a16="http://schemas.microsoft.com/office/drawing/2014/main" id="{AB8CAA96-86FE-46F6-B887-EE215774178C}"/>
+              </a:ext>
+            </a:extLst>
+          </p:cNvPr>
+          <p:cNvSpPr>
+            <a:spLocks xmlns:a="http://schemas.openxmlformats.org/drawingml/2006/main" noGrp="1"/>
+          </p:cNvSpPr>
+          <p:nvPr/>
+        </p:nvSpPr>
+        <p:spPr>
+          <a:xfrm xmlns:a="http://schemas.openxmlformats.org/drawingml/2006/main">
+            <a:off x="6286500" y="3009900"/>
+            <a:ext cx="2266950" cy="409575"/>
+          </a:xfrm>
+          <a:prstGeom xmlns:a="http://schemas.openxmlformats.org/drawingml/2006/main" prst="rect">
+            <a:avLst/>
+          </a:prstGeom>
+          <a:noFill xmlns:a="http://schemas.openxmlformats.org/drawingml/2006/main"/>
+          <a:ln xmlns:a="http://schemas.openxmlformats.org/drawingml/2006/main" w="0">
+            <a:noFill/>
+            <a:prstDash val="solid"/>
+          </a:ln>
+        </p:spPr>
+        <p:txBody>
+          <a:bodyPr xmlns:a="http://schemas.openxmlformats.org/drawingml/2006/main"/>
+          <a:lstStyle xmlns:a="http://schemas.openxmlformats.org/drawingml/2006/main"/>
+          <a:p xmlns:a="http://schemas.openxmlformats.org/drawingml/2006/main">
+            <a:pPr>
+              <a:defRPr sz="1050" b="1">
+                <a:solidFill>
+                  <a:srgbClr val="102A63"/>
+                </a:solidFill>
+              </a:defRPr>
+            </a:pPr>
+            <a:r>
+              <a:rPr sz="1050" b="1">
+                <a:solidFill>
+                  <a:srgbClr val="102A63"/>
+                </a:solidFill>
+              </a:rPr>
+              <a:t>{{REC_6_SOLUTION}}</a:t>
+            </a:r>
+          </a:p>
+        </p:txBody>
+      </p:sp>
+      <p:sp>
+        <p:nvSpPr>
           <p:cNvPr id="24" name="">
             <a:extLst xmlns:a="http://schemas.openxmlformats.org/drawingml/2006/main">
               <a:ext uri="{FF2B5EF4-FFF2-40B4-BE49-F238E27FC236}">
-                <a16:creationId xmlns:a16="http://schemas.microsoft.com/office/drawing/2014/main" id="{E99DB173-393A-4926-8DC2-C11E5D85742F}"/>
-              </a:ext>
-            </a:extLst>
-          </p:cNvPr>
-          <p:cNvSpPr>
-            <a:spLocks xmlns:a="http://schemas.openxmlformats.org/drawingml/2006/main" noGrp="1"/>
-          </p:cNvSpPr>
-          <p:nvPr/>
-        </p:nvSpPr>
-        <p:spPr>
-          <a:xfrm xmlns:a="http://schemas.openxmlformats.org/drawingml/2006/main">
-            <a:off x="609600" y="3981450"/>
-            <a:ext cx="457200" cy="266700"/>
+                <a16:creationId xmlns:a16="http://schemas.microsoft.com/office/drawing/2014/main" id="{62DBC54F-2454-4C2E-9977-A5F454B4E3B2}"/>
+              </a:ext>
+            </a:extLst>
+          </p:cNvPr>
+          <p:cNvSpPr>
+            <a:spLocks xmlns:a="http://schemas.openxmlformats.org/drawingml/2006/main" noGrp="1"/>
+          </p:cNvSpPr>
+          <p:nvPr/>
+        </p:nvSpPr>
+        <p:spPr>
+          <a:xfrm xmlns:a="http://schemas.openxmlformats.org/drawingml/2006/main">
+            <a:off x="8743950" y="2819400"/>
+            <a:ext cx="2266950" cy="171450"/>
+          </a:xfrm>
+          <a:prstGeom xmlns:a="http://schemas.openxmlformats.org/drawingml/2006/main" prst="rect">
+            <a:avLst/>
+          </a:prstGeom>
+          <a:noFill xmlns:a="http://schemas.openxmlformats.org/drawingml/2006/main"/>
+          <a:ln xmlns:a="http://schemas.openxmlformats.org/drawingml/2006/main" w="0">
+            <a:noFill/>
+            <a:prstDash val="solid"/>
+          </a:ln>
+        </p:spPr>
+        <p:txBody>
+          <a:bodyPr xmlns:a="http://schemas.openxmlformats.org/drawingml/2006/main"/>
+          <a:lstStyle xmlns:a="http://schemas.openxmlformats.org/drawingml/2006/main"/>
+          <a:p xmlns:a="http://schemas.openxmlformats.org/drawingml/2006/main">
+            <a:pPr>
+              <a:defRPr sz="900" b="1">
+                <a:solidFill>
+                  <a:srgbClr val="2048A8"/>
+                </a:solidFill>
+              </a:defRPr>
+            </a:pPr>
+            <a:r>
+              <a:rPr sz="900" b="1">
+                <a:solidFill>
+                  <a:srgbClr val="2048A8"/>
+                </a:solidFill>
+              </a:rPr>
+              <a:t>Производители</a:t>
+            </a:r>
+          </a:p>
+        </p:txBody>
+      </p:sp>
+      <p:sp>
+        <p:nvSpPr>
+          <p:cNvPr id="25" name="">
+            <a:extLst xmlns:a="http://schemas.openxmlformats.org/drawingml/2006/main">
+              <a:ext uri="{FF2B5EF4-FFF2-40B4-BE49-F238E27FC236}">
+                <a16:creationId xmlns:a16="http://schemas.microsoft.com/office/drawing/2014/main" id="{D885D247-47D8-4EFF-952D-1094DFD36715}"/>
+              </a:ext>
+            </a:extLst>
+          </p:cNvPr>
+          <p:cNvSpPr>
+            <a:spLocks xmlns:a="http://schemas.openxmlformats.org/drawingml/2006/main" noGrp="1"/>
+          </p:cNvSpPr>
+          <p:nvPr/>
+        </p:nvSpPr>
+        <p:spPr>
+          <a:xfrm xmlns:a="http://schemas.openxmlformats.org/drawingml/2006/main">
+            <a:off x="8743950" y="3009900"/>
+            <a:ext cx="2266950" cy="409575"/>
+          </a:xfrm>
+          <a:prstGeom xmlns:a="http://schemas.openxmlformats.org/drawingml/2006/main" prst="rect">
+            <a:avLst/>
+          </a:prstGeom>
+          <a:noFill xmlns:a="http://schemas.openxmlformats.org/drawingml/2006/main"/>
+          <a:ln xmlns:a="http://schemas.openxmlformats.org/drawingml/2006/main" w="0">
+            <a:noFill/>
+            <a:prstDash val="solid"/>
+          </a:ln>
+        </p:spPr>
+        <p:txBody>
+          <a:bodyPr xmlns:a="http://schemas.openxmlformats.org/drawingml/2006/main"/>
+          <a:lstStyle xmlns:a="http://schemas.openxmlformats.org/drawingml/2006/main"/>
+          <a:p xmlns:a="http://schemas.openxmlformats.org/drawingml/2006/main">
+            <a:pPr>
+              <a:defRPr sz="1050" b="1">
+                <a:solidFill>
+                  <a:srgbClr val="102A63"/>
+                </a:solidFill>
+              </a:defRPr>
+            </a:pPr>
+            <a:r>
+              <a:rPr sz="1050" b="1">
+                <a:solidFill>
+                  <a:srgbClr val="102A63"/>
+                </a:solidFill>
+              </a:rPr>
+              <a:t>{{REC_6_VENDORS}}</a:t>
+            </a:r>
+          </a:p>
+        </p:txBody>
+      </p:sp>
+      <p:sp>
+        <p:nvSpPr>
+          <p:cNvPr id="26" name="">
+            <a:extLst xmlns:a="http://schemas.openxmlformats.org/drawingml/2006/main">
+              <a:ext uri="{FF2B5EF4-FFF2-40B4-BE49-F238E27FC236}">
+                <a16:creationId xmlns:a16="http://schemas.microsoft.com/office/drawing/2014/main" id="{80653EEE-3EE5-4585-AEDD-8B9405ED80DF}"/>
+              </a:ext>
+            </a:extLst>
+          </p:cNvPr>
+          <p:cNvSpPr>
+            <a:spLocks xmlns:a="http://schemas.openxmlformats.org/drawingml/2006/main" noGrp="1"/>
+          </p:cNvSpPr>
+          <p:nvPr/>
+        </p:nvSpPr>
+        <p:spPr>
+          <a:xfrm xmlns:a="http://schemas.openxmlformats.org/drawingml/2006/main">
+            <a:off x="552450" y="3857625"/>
+            <a:ext cx="5162550" cy="2143125"/>
+          </a:xfrm>
+          <a:prstGeom xmlns:a="http://schemas.openxmlformats.org/drawingml/2006/main" prst="roundRect">
+            <a:avLst>
+              <a:gd name="adj" fmla="val 3556"/>
+            </a:avLst>
+          </a:prstGeom>
+          <a:solidFill xmlns:a="http://schemas.openxmlformats.org/drawingml/2006/main">
+            <a:srgbClr val="FFFFFF"/>
+          </a:solidFill>
+          <a:ln xmlns:a="http://schemas.openxmlformats.org/drawingml/2006/main" w="9525">
+            <a:solidFill>
+              <a:srgbClr val="D7E0F2"/>
+            </a:solidFill>
+            <a:prstDash val="solid"/>
+          </a:ln>
+        </p:spPr>
+      </p:sp>
+      <p:sp>
+        <p:nvSpPr>
+          <p:cNvPr id="27" name="">
+            <a:extLst xmlns:a="http://schemas.openxmlformats.org/drawingml/2006/main">
+              <a:ext uri="{FF2B5EF4-FFF2-40B4-BE49-F238E27FC236}">
+                <a16:creationId xmlns:a16="http://schemas.microsoft.com/office/drawing/2014/main" id="{C6CDBF2F-9037-4EDE-807B-B5E827F5115D}"/>
+              </a:ext>
+            </a:extLst>
+          </p:cNvPr>
+          <p:cNvSpPr>
+            <a:spLocks xmlns:a="http://schemas.openxmlformats.org/drawingml/2006/main" noGrp="1"/>
+          </p:cNvSpPr>
+          <p:nvPr/>
+        </p:nvSpPr>
+        <p:spPr>
+          <a:xfrm xmlns:a="http://schemas.openxmlformats.org/drawingml/2006/main">
+            <a:off x="742950" y="4029075"/>
+            <a:ext cx="361950" cy="247650"/>
           </a:xfrm>
           <a:prstGeom xmlns:a="http://schemas.openxmlformats.org/drawingml/2006/main" prst="rect">
             <a:avLst/>
@@ -8160,79 +9185,79 @@
                   <a:srgbClr val="2048A8"/>
                 </a:solidFill>
               </a:rPr>
-              <a:t>03</a:t>
-            </a:r>
-          </a:p>
-        </p:txBody>
-      </p:sp>
-      <p:sp>
-        <p:nvSpPr>
-          <p:cNvPr id="25" name="">
-            <a:extLst xmlns:a="http://schemas.openxmlformats.org/drawingml/2006/main">
-              <a:ext uri="{FF2B5EF4-FFF2-40B4-BE49-F238E27FC236}">
-                <a16:creationId xmlns:a16="http://schemas.microsoft.com/office/drawing/2014/main" id="{4B125B24-35D3-4D4E-A124-52C266C3F5E0}"/>
-              </a:ext>
-            </a:extLst>
-          </p:cNvPr>
-          <p:cNvSpPr>
-            <a:spLocks xmlns:a="http://schemas.openxmlformats.org/drawingml/2006/main" noGrp="1"/>
-          </p:cNvSpPr>
-          <p:nvPr/>
-        </p:nvSpPr>
-        <p:spPr>
-          <a:xfrm xmlns:a="http://schemas.openxmlformats.org/drawingml/2006/main">
-            <a:off x="1200150" y="3924300"/>
-            <a:ext cx="9982200" cy="266700"/>
-          </a:xfrm>
-          <a:prstGeom xmlns:a="http://schemas.openxmlformats.org/drawingml/2006/main" prst="rect">
-            <a:avLst/>
-          </a:prstGeom>
-          <a:noFill xmlns:a="http://schemas.openxmlformats.org/drawingml/2006/main"/>
-          <a:ln xmlns:a="http://schemas.openxmlformats.org/drawingml/2006/main" w="0">
-            <a:noFill/>
-            <a:prstDash val="solid"/>
-          </a:ln>
-        </p:spPr>
-        <p:txBody>
-          <a:bodyPr xmlns:a="http://schemas.openxmlformats.org/drawingml/2006/main"/>
-          <a:lstStyle xmlns:a="http://schemas.openxmlformats.org/drawingml/2006/main"/>
-          <a:p xmlns:a="http://schemas.openxmlformats.org/drawingml/2006/main">
-            <a:pPr>
-              <a:defRPr sz="1425" b="1">
-                <a:solidFill>
-                  <a:srgbClr val="102A63"/>
-                </a:solidFill>
-              </a:defRPr>
-            </a:pPr>
-            <a:r>
-              <a:rPr sz="1425" b="1">
-                <a:solidFill>
-                  <a:srgbClr val="102A63"/>
-                </a:solidFill>
-              </a:rPr>
-              <a:t>{{SEC_3_TITLE}}</a:t>
-            </a:r>
-          </a:p>
-        </p:txBody>
-      </p:sp>
-      <p:sp>
-        <p:nvSpPr>
-          <p:cNvPr id="26" name="">
-            <a:extLst xmlns:a="http://schemas.openxmlformats.org/drawingml/2006/main">
-              <a:ext uri="{FF2B5EF4-FFF2-40B4-BE49-F238E27FC236}">
-                <a16:creationId xmlns:a16="http://schemas.microsoft.com/office/drawing/2014/main" id="{CBEF66DF-762C-44BA-8282-C483AA34CB5D}"/>
-              </a:ext>
-            </a:extLst>
-          </p:cNvPr>
-          <p:cNvSpPr>
-            <a:spLocks xmlns:a="http://schemas.openxmlformats.org/drawingml/2006/main" noGrp="1"/>
-          </p:cNvSpPr>
-          <p:nvPr/>
-        </p:nvSpPr>
-        <p:spPr>
-          <a:xfrm xmlns:a="http://schemas.openxmlformats.org/drawingml/2006/main">
-            <a:off x="1200150" y="4219575"/>
-            <a:ext cx="9982200" cy="400050"/>
+              <a:t>07</a:t>
+            </a:r>
+          </a:p>
+        </p:txBody>
+      </p:sp>
+      <p:sp>
+        <p:nvSpPr>
+          <p:cNvPr id="28" name="">
+            <a:extLst xmlns:a="http://schemas.openxmlformats.org/drawingml/2006/main">
+              <a:ext uri="{FF2B5EF4-FFF2-40B4-BE49-F238E27FC236}">
+                <a16:creationId xmlns:a16="http://schemas.microsoft.com/office/drawing/2014/main" id="{909EB7B4-0268-45F9-8278-919E1A33AA18}"/>
+              </a:ext>
+            </a:extLst>
+          </p:cNvPr>
+          <p:cNvSpPr>
+            <a:spLocks xmlns:a="http://schemas.openxmlformats.org/drawingml/2006/main" noGrp="1"/>
+          </p:cNvSpPr>
+          <p:nvPr/>
+        </p:nvSpPr>
+        <p:spPr>
+          <a:xfrm xmlns:a="http://schemas.openxmlformats.org/drawingml/2006/main">
+            <a:off x="1162050" y="4000500"/>
+            <a:ext cx="4324350" cy="400050"/>
+          </a:xfrm>
+          <a:prstGeom xmlns:a="http://schemas.openxmlformats.org/drawingml/2006/main" prst="rect">
+            <a:avLst/>
+          </a:prstGeom>
+          <a:noFill xmlns:a="http://schemas.openxmlformats.org/drawingml/2006/main"/>
+          <a:ln xmlns:a="http://schemas.openxmlformats.org/drawingml/2006/main" w="0">
+            <a:noFill/>
+            <a:prstDash val="solid"/>
+          </a:ln>
+        </p:spPr>
+        <p:txBody>
+          <a:bodyPr xmlns:a="http://schemas.openxmlformats.org/drawingml/2006/main"/>
+          <a:lstStyle xmlns:a="http://schemas.openxmlformats.org/drawingml/2006/main"/>
+          <a:p xmlns:a="http://schemas.openxmlformats.org/drawingml/2006/main">
+            <a:pPr>
+              <a:defRPr sz="1350" b="1">
+                <a:solidFill>
+                  <a:srgbClr val="102A63"/>
+                </a:solidFill>
+              </a:defRPr>
+            </a:pPr>
+            <a:r>
+              <a:rPr sz="1350" b="1">
+                <a:solidFill>
+                  <a:srgbClr val="102A63"/>
+                </a:solidFill>
+              </a:rPr>
+              <a:t>{{REC_7_TITLE}}</a:t>
+            </a:r>
+          </a:p>
+        </p:txBody>
+      </p:sp>
+      <p:sp>
+        <p:nvSpPr>
+          <p:cNvPr id="29" name="">
+            <a:extLst xmlns:a="http://schemas.openxmlformats.org/drawingml/2006/main">
+              <a:ext uri="{FF2B5EF4-FFF2-40B4-BE49-F238E27FC236}">
+                <a16:creationId xmlns:a16="http://schemas.microsoft.com/office/drawing/2014/main" id="{57820C03-5CD0-4FD1-ABDA-D43213E4EA83}"/>
+              </a:ext>
+            </a:extLst>
+          </p:cNvPr>
+          <p:cNvSpPr>
+            <a:spLocks xmlns:a="http://schemas.openxmlformats.org/drawingml/2006/main" noGrp="1"/>
+          </p:cNvSpPr>
+          <p:nvPr/>
+        </p:nvSpPr>
+        <p:spPr>
+          <a:xfrm xmlns:a="http://schemas.openxmlformats.org/drawingml/2006/main">
+            <a:off x="762000" y="4476750"/>
+            <a:ext cx="4743450" cy="552450"/>
           </a:xfrm>
           <a:prstGeom xmlns:a="http://schemas.openxmlformats.org/drawingml/2006/main" prst="rect">
             <a:avLst/>
@@ -8260,157 +9285,7 @@
                   <a:srgbClr val="596780"/>
                 </a:solidFill>
               </a:rPr>
-              <a:t>{{SEC_3_ACTION}}</a:t>
-            </a:r>
-          </a:p>
-        </p:txBody>
-      </p:sp>
-      <p:sp>
-        <p:nvSpPr>
-          <p:cNvPr id="27" name="">
-            <a:extLst xmlns:a="http://schemas.openxmlformats.org/drawingml/2006/main">
-              <a:ext uri="{FF2B5EF4-FFF2-40B4-BE49-F238E27FC236}">
-                <a16:creationId xmlns:a16="http://schemas.microsoft.com/office/drawing/2014/main" id="{8D244DFF-8699-4814-A22F-1F79DBFDA980}"/>
-              </a:ext>
-            </a:extLst>
-          </p:cNvPr>
-          <p:cNvSpPr>
-            <a:spLocks xmlns:a="http://schemas.openxmlformats.org/drawingml/2006/main" noGrp="1"/>
-          </p:cNvSpPr>
-          <p:nvPr/>
-        </p:nvSpPr>
-        <p:spPr>
-          <a:xfrm xmlns:a="http://schemas.openxmlformats.org/drawingml/2006/main">
-            <a:off x="1200150" y="4686300"/>
-            <a:ext cx="742950" cy="190500"/>
-          </a:xfrm>
-          <a:prstGeom xmlns:a="http://schemas.openxmlformats.org/drawingml/2006/main" prst="rect">
-            <a:avLst/>
-          </a:prstGeom>
-          <a:noFill xmlns:a="http://schemas.openxmlformats.org/drawingml/2006/main"/>
-          <a:ln xmlns:a="http://schemas.openxmlformats.org/drawingml/2006/main" w="0">
-            <a:noFill/>
-            <a:prstDash val="solid"/>
-          </a:ln>
-        </p:spPr>
-        <p:txBody>
-          <a:bodyPr xmlns:a="http://schemas.openxmlformats.org/drawingml/2006/main"/>
-          <a:lstStyle xmlns:a="http://schemas.openxmlformats.org/drawingml/2006/main"/>
-          <a:p xmlns:a="http://schemas.openxmlformats.org/drawingml/2006/main">
-            <a:pPr>
-              <a:defRPr sz="975" b="1">
-                <a:solidFill>
-                  <a:srgbClr val="2048A8"/>
-                </a:solidFill>
-              </a:defRPr>
-            </a:pPr>
-            <a:r>
-              <a:rPr sz="975" b="1">
-                <a:solidFill>
-                  <a:srgbClr val="2048A8"/>
-                </a:solidFill>
-              </a:rPr>
-              <a:t>Решение</a:t>
-            </a:r>
-          </a:p>
-        </p:txBody>
-      </p:sp>
-      <p:sp>
-        <p:nvSpPr>
-          <p:cNvPr id="28" name="">
-            <a:extLst xmlns:a="http://schemas.openxmlformats.org/drawingml/2006/main">
-              <a:ext uri="{FF2B5EF4-FFF2-40B4-BE49-F238E27FC236}">
-                <a16:creationId xmlns:a16="http://schemas.microsoft.com/office/drawing/2014/main" id="{E4B801EC-4BE4-414E-B200-858B4909E968}"/>
-              </a:ext>
-            </a:extLst>
-          </p:cNvPr>
-          <p:cNvSpPr>
-            <a:spLocks xmlns:a="http://schemas.openxmlformats.org/drawingml/2006/main" noGrp="1"/>
-          </p:cNvSpPr>
-          <p:nvPr/>
-        </p:nvSpPr>
-        <p:spPr>
-          <a:xfrm xmlns:a="http://schemas.openxmlformats.org/drawingml/2006/main">
-            <a:off x="1962150" y="4667250"/>
-            <a:ext cx="3810000" cy="323850"/>
-          </a:xfrm>
-          <a:prstGeom xmlns:a="http://schemas.openxmlformats.org/drawingml/2006/main" prst="rect">
-            <a:avLst/>
-          </a:prstGeom>
-          <a:noFill xmlns:a="http://schemas.openxmlformats.org/drawingml/2006/main"/>
-          <a:ln xmlns:a="http://schemas.openxmlformats.org/drawingml/2006/main" w="0">
-            <a:noFill/>
-            <a:prstDash val="solid"/>
-          </a:ln>
-        </p:spPr>
-        <p:txBody>
-          <a:bodyPr xmlns:a="http://schemas.openxmlformats.org/drawingml/2006/main"/>
-          <a:lstStyle xmlns:a="http://schemas.openxmlformats.org/drawingml/2006/main"/>
-          <a:p xmlns:a="http://schemas.openxmlformats.org/drawingml/2006/main">
-            <a:pPr>
-              <a:defRPr sz="1050" b="1">
-                <a:solidFill>
-                  <a:srgbClr val="102A63"/>
-                </a:solidFill>
-              </a:defRPr>
-            </a:pPr>
-            <a:r>
-              <a:rPr sz="1050" b="1">
-                <a:solidFill>
-                  <a:srgbClr val="102A63"/>
-                </a:solidFill>
-              </a:rPr>
-              <a:t>{{SEC_3_SOLUTION}}</a:t>
-            </a:r>
-          </a:p>
-        </p:txBody>
-      </p:sp>
-      <p:sp>
-        <p:nvSpPr>
-          <p:cNvPr id="29" name="">
-            <a:extLst xmlns:a="http://schemas.openxmlformats.org/drawingml/2006/main">
-              <a:ext uri="{FF2B5EF4-FFF2-40B4-BE49-F238E27FC236}">
-                <a16:creationId xmlns:a16="http://schemas.microsoft.com/office/drawing/2014/main" id="{C85DD380-8155-44E2-B6EC-A8772B180619}"/>
-              </a:ext>
-            </a:extLst>
-          </p:cNvPr>
-          <p:cNvSpPr>
-            <a:spLocks xmlns:a="http://schemas.openxmlformats.org/drawingml/2006/main" noGrp="1"/>
-          </p:cNvSpPr>
-          <p:nvPr/>
-        </p:nvSpPr>
-        <p:spPr>
-          <a:xfrm xmlns:a="http://schemas.openxmlformats.org/drawingml/2006/main">
-            <a:off x="6019800" y="4686300"/>
-            <a:ext cx="1104900" cy="190500"/>
-          </a:xfrm>
-          <a:prstGeom xmlns:a="http://schemas.openxmlformats.org/drawingml/2006/main" prst="rect">
-            <a:avLst/>
-          </a:prstGeom>
-          <a:noFill xmlns:a="http://schemas.openxmlformats.org/drawingml/2006/main"/>
-          <a:ln xmlns:a="http://schemas.openxmlformats.org/drawingml/2006/main" w="0">
-            <a:noFill/>
-            <a:prstDash val="solid"/>
-          </a:ln>
-        </p:spPr>
-        <p:txBody>
-          <a:bodyPr xmlns:a="http://schemas.openxmlformats.org/drawingml/2006/main"/>
-          <a:lstStyle xmlns:a="http://schemas.openxmlformats.org/drawingml/2006/main"/>
-          <a:p xmlns:a="http://schemas.openxmlformats.org/drawingml/2006/main">
-            <a:pPr>
-              <a:defRPr sz="975" b="1">
-                <a:solidFill>
-                  <a:srgbClr val="2048A8"/>
-                </a:solidFill>
-              </a:defRPr>
-            </a:pPr>
-            <a:r>
-              <a:rPr sz="975" b="1">
-                <a:solidFill>
-                  <a:srgbClr val="2048A8"/>
-                </a:solidFill>
-              </a:rPr>
-              <a:t>Производители</a:t>
+              <a:t>{{REC_7_ACTION}}</a:t>
             </a:r>
           </a:p>
         </p:txBody>
@@ -8420,69 +9295,19 @@
           <p:cNvPr id="30" name="">
             <a:extLst xmlns:a="http://schemas.openxmlformats.org/drawingml/2006/main">
               <a:ext uri="{FF2B5EF4-FFF2-40B4-BE49-F238E27FC236}">
-                <a16:creationId xmlns:a16="http://schemas.microsoft.com/office/drawing/2014/main" id="{C4089DA9-CF15-4030-9D08-817890F696F4}"/>
-              </a:ext>
-            </a:extLst>
-          </p:cNvPr>
-          <p:cNvSpPr>
-            <a:spLocks xmlns:a="http://schemas.openxmlformats.org/drawingml/2006/main" noGrp="1"/>
-          </p:cNvSpPr>
-          <p:nvPr/>
-        </p:nvSpPr>
-        <p:spPr>
-          <a:xfrm xmlns:a="http://schemas.openxmlformats.org/drawingml/2006/main">
-            <a:off x="7181850" y="4667250"/>
-            <a:ext cx="4000500" cy="323850"/>
-          </a:xfrm>
-          <a:prstGeom xmlns:a="http://schemas.openxmlformats.org/drawingml/2006/main" prst="rect">
-            <a:avLst/>
-          </a:prstGeom>
-          <a:noFill xmlns:a="http://schemas.openxmlformats.org/drawingml/2006/main"/>
-          <a:ln xmlns:a="http://schemas.openxmlformats.org/drawingml/2006/main" w="0">
-            <a:noFill/>
-            <a:prstDash val="solid"/>
-          </a:ln>
-        </p:spPr>
-        <p:txBody>
-          <a:bodyPr xmlns:a="http://schemas.openxmlformats.org/drawingml/2006/main"/>
-          <a:lstStyle xmlns:a="http://schemas.openxmlformats.org/drawingml/2006/main"/>
-          <a:p xmlns:a="http://schemas.openxmlformats.org/drawingml/2006/main">
-            <a:pPr>
-              <a:defRPr sz="1050" b="1">
-                <a:solidFill>
-                  <a:srgbClr val="102A63"/>
-                </a:solidFill>
-              </a:defRPr>
-            </a:pPr>
-            <a:r>
-              <a:rPr sz="1050" b="1">
-                <a:solidFill>
-                  <a:srgbClr val="102A63"/>
-                </a:solidFill>
-              </a:rPr>
-              <a:t>{{SEC_3_VENDORS}}</a:t>
-            </a:r>
-          </a:p>
-        </p:txBody>
-      </p:sp>
-      <p:sp>
-        <p:nvSpPr>
-          <p:cNvPr id="31" name="">
-            <a:extLst xmlns:a="http://schemas.openxmlformats.org/drawingml/2006/main">
-              <a:ext uri="{FF2B5EF4-FFF2-40B4-BE49-F238E27FC236}">
-                <a16:creationId xmlns:a16="http://schemas.microsoft.com/office/drawing/2014/main" id="{9EA93F98-9B3E-4994-84A7-4C3F5EBAD5B1}"/>
-              </a:ext>
-            </a:extLst>
-          </p:cNvPr>
-          <p:cNvSpPr>
-            <a:spLocks xmlns:a="http://schemas.openxmlformats.org/drawingml/2006/main" noGrp="1"/>
-          </p:cNvSpPr>
-          <p:nvPr/>
-        </p:nvSpPr>
-        <p:spPr>
-          <a:xfrm xmlns:a="http://schemas.openxmlformats.org/drawingml/2006/main">
-            <a:off x="1200150" y="5067300"/>
-            <a:ext cx="9982200" cy="9525"/>
+                <a16:creationId xmlns:a16="http://schemas.microsoft.com/office/drawing/2014/main" id="{C7E6F8ED-31FE-4BE0-B465-0BB3FFD0F177}"/>
+              </a:ext>
+            </a:extLst>
+          </p:cNvPr>
+          <p:cNvSpPr>
+            <a:spLocks xmlns:a="http://schemas.openxmlformats.org/drawingml/2006/main" noGrp="1"/>
+          </p:cNvSpPr>
+          <p:nvPr/>
+        </p:nvSpPr>
+        <p:spPr>
+          <a:xfrm xmlns:a="http://schemas.openxmlformats.org/drawingml/2006/main">
+            <a:off x="762000" y="5114925"/>
+            <a:ext cx="4743450" cy="9525"/>
           </a:xfrm>
           <a:prstGeom xmlns:a="http://schemas.openxmlformats.org/drawingml/2006/main" prst="rect">
             <a:avLst/>
@@ -8498,22 +9323,257 @@
       </p:sp>
       <p:sp>
         <p:nvSpPr>
+          <p:cNvPr id="31" name="">
+            <a:extLst xmlns:a="http://schemas.openxmlformats.org/drawingml/2006/main">
+              <a:ext uri="{FF2B5EF4-FFF2-40B4-BE49-F238E27FC236}">
+                <a16:creationId xmlns:a16="http://schemas.microsoft.com/office/drawing/2014/main" id="{260986C5-7E9A-4B32-8085-64D6417DF2F5}"/>
+              </a:ext>
+            </a:extLst>
+          </p:cNvPr>
+          <p:cNvSpPr>
+            <a:spLocks xmlns:a="http://schemas.openxmlformats.org/drawingml/2006/main" noGrp="1"/>
+          </p:cNvSpPr>
+          <p:nvPr/>
+        </p:nvSpPr>
+        <p:spPr>
+          <a:xfrm xmlns:a="http://schemas.openxmlformats.org/drawingml/2006/main">
+            <a:off x="762000" y="5248275"/>
+            <a:ext cx="2171700" cy="171450"/>
+          </a:xfrm>
+          <a:prstGeom xmlns:a="http://schemas.openxmlformats.org/drawingml/2006/main" prst="rect">
+            <a:avLst/>
+          </a:prstGeom>
+          <a:noFill xmlns:a="http://schemas.openxmlformats.org/drawingml/2006/main"/>
+          <a:ln xmlns:a="http://schemas.openxmlformats.org/drawingml/2006/main" w="0">
+            <a:noFill/>
+            <a:prstDash val="solid"/>
+          </a:ln>
+        </p:spPr>
+        <p:txBody>
+          <a:bodyPr xmlns:a="http://schemas.openxmlformats.org/drawingml/2006/main"/>
+          <a:lstStyle xmlns:a="http://schemas.openxmlformats.org/drawingml/2006/main"/>
+          <a:p xmlns:a="http://schemas.openxmlformats.org/drawingml/2006/main">
+            <a:pPr>
+              <a:defRPr sz="900" b="1">
+                <a:solidFill>
+                  <a:srgbClr val="2048A8"/>
+                </a:solidFill>
+              </a:defRPr>
+            </a:pPr>
+            <a:r>
+              <a:rPr sz="900" b="1">
+                <a:solidFill>
+                  <a:srgbClr val="2048A8"/>
+                </a:solidFill>
+              </a:rPr>
+              <a:t>Решение</a:t>
+            </a:r>
+          </a:p>
+        </p:txBody>
+      </p:sp>
+      <p:sp>
+        <p:nvSpPr>
           <p:cNvPr id="32" name="">
             <a:extLst xmlns:a="http://schemas.openxmlformats.org/drawingml/2006/main">
               <a:ext uri="{FF2B5EF4-FFF2-40B4-BE49-F238E27FC236}">
-                <a16:creationId xmlns:a16="http://schemas.microsoft.com/office/drawing/2014/main" id="{1AC19C4D-8A2C-4ED9-A26F-13BED182F883}"/>
-              </a:ext>
-            </a:extLst>
-          </p:cNvPr>
-          <p:cNvSpPr>
-            <a:spLocks xmlns:a="http://schemas.openxmlformats.org/drawingml/2006/main" noGrp="1"/>
-          </p:cNvSpPr>
-          <p:nvPr/>
-        </p:nvSpPr>
-        <p:spPr>
-          <a:xfrm xmlns:a="http://schemas.openxmlformats.org/drawingml/2006/main">
-            <a:off x="609600" y="5238750"/>
-            <a:ext cx="457200" cy="266700"/>
+                <a16:creationId xmlns:a16="http://schemas.microsoft.com/office/drawing/2014/main" id="{E9AFCF89-692E-4DF4-9FFA-312B585FD5D4}"/>
+              </a:ext>
+            </a:extLst>
+          </p:cNvPr>
+          <p:cNvSpPr>
+            <a:spLocks xmlns:a="http://schemas.openxmlformats.org/drawingml/2006/main" noGrp="1"/>
+          </p:cNvSpPr>
+          <p:nvPr/>
+        </p:nvSpPr>
+        <p:spPr>
+          <a:xfrm xmlns:a="http://schemas.openxmlformats.org/drawingml/2006/main">
+            <a:off x="762000" y="5438775"/>
+            <a:ext cx="2266950" cy="409575"/>
+          </a:xfrm>
+          <a:prstGeom xmlns:a="http://schemas.openxmlformats.org/drawingml/2006/main" prst="rect">
+            <a:avLst/>
+          </a:prstGeom>
+          <a:noFill xmlns:a="http://schemas.openxmlformats.org/drawingml/2006/main"/>
+          <a:ln xmlns:a="http://schemas.openxmlformats.org/drawingml/2006/main" w="0">
+            <a:noFill/>
+            <a:prstDash val="solid"/>
+          </a:ln>
+        </p:spPr>
+        <p:txBody>
+          <a:bodyPr xmlns:a="http://schemas.openxmlformats.org/drawingml/2006/main"/>
+          <a:lstStyle xmlns:a="http://schemas.openxmlformats.org/drawingml/2006/main"/>
+          <a:p xmlns:a="http://schemas.openxmlformats.org/drawingml/2006/main">
+            <a:pPr>
+              <a:defRPr sz="1050" b="1">
+                <a:solidFill>
+                  <a:srgbClr val="102A63"/>
+                </a:solidFill>
+              </a:defRPr>
+            </a:pPr>
+            <a:r>
+              <a:rPr sz="1050" b="1">
+                <a:solidFill>
+                  <a:srgbClr val="102A63"/>
+                </a:solidFill>
+              </a:rPr>
+              <a:t>{{REC_7_SOLUTION}}</a:t>
+            </a:r>
+          </a:p>
+        </p:txBody>
+      </p:sp>
+      <p:sp>
+        <p:nvSpPr>
+          <p:cNvPr id="33" name="">
+            <a:extLst xmlns:a="http://schemas.openxmlformats.org/drawingml/2006/main">
+              <a:ext uri="{FF2B5EF4-FFF2-40B4-BE49-F238E27FC236}">
+                <a16:creationId xmlns:a16="http://schemas.microsoft.com/office/drawing/2014/main" id="{764D0701-3FB3-44DD-87FF-84B551B762F8}"/>
+              </a:ext>
+            </a:extLst>
+          </p:cNvPr>
+          <p:cNvSpPr>
+            <a:spLocks xmlns:a="http://schemas.openxmlformats.org/drawingml/2006/main" noGrp="1"/>
+          </p:cNvSpPr>
+          <p:nvPr/>
+        </p:nvSpPr>
+        <p:spPr>
+          <a:xfrm xmlns:a="http://schemas.openxmlformats.org/drawingml/2006/main">
+            <a:off x="3219450" y="5248275"/>
+            <a:ext cx="2266950" cy="171450"/>
+          </a:xfrm>
+          <a:prstGeom xmlns:a="http://schemas.openxmlformats.org/drawingml/2006/main" prst="rect">
+            <a:avLst/>
+          </a:prstGeom>
+          <a:noFill xmlns:a="http://schemas.openxmlformats.org/drawingml/2006/main"/>
+          <a:ln xmlns:a="http://schemas.openxmlformats.org/drawingml/2006/main" w="0">
+            <a:noFill/>
+            <a:prstDash val="solid"/>
+          </a:ln>
+        </p:spPr>
+        <p:txBody>
+          <a:bodyPr xmlns:a="http://schemas.openxmlformats.org/drawingml/2006/main"/>
+          <a:lstStyle xmlns:a="http://schemas.openxmlformats.org/drawingml/2006/main"/>
+          <a:p xmlns:a="http://schemas.openxmlformats.org/drawingml/2006/main">
+            <a:pPr>
+              <a:defRPr sz="900" b="1">
+                <a:solidFill>
+                  <a:srgbClr val="2048A8"/>
+                </a:solidFill>
+              </a:defRPr>
+            </a:pPr>
+            <a:r>
+              <a:rPr sz="900" b="1">
+                <a:solidFill>
+                  <a:srgbClr val="2048A8"/>
+                </a:solidFill>
+              </a:rPr>
+              <a:t>Производители</a:t>
+            </a:r>
+          </a:p>
+        </p:txBody>
+      </p:sp>
+      <p:sp>
+        <p:nvSpPr>
+          <p:cNvPr id="34" name="">
+            <a:extLst xmlns:a="http://schemas.openxmlformats.org/drawingml/2006/main">
+              <a:ext uri="{FF2B5EF4-FFF2-40B4-BE49-F238E27FC236}">
+                <a16:creationId xmlns:a16="http://schemas.microsoft.com/office/drawing/2014/main" id="{8C40DD34-89AA-4BE4-81FE-DB306FD28A95}"/>
+              </a:ext>
+            </a:extLst>
+          </p:cNvPr>
+          <p:cNvSpPr>
+            <a:spLocks xmlns:a="http://schemas.openxmlformats.org/drawingml/2006/main" noGrp="1"/>
+          </p:cNvSpPr>
+          <p:nvPr/>
+        </p:nvSpPr>
+        <p:spPr>
+          <a:xfrm xmlns:a="http://schemas.openxmlformats.org/drawingml/2006/main">
+            <a:off x="3219450" y="5438775"/>
+            <a:ext cx="2266950" cy="409575"/>
+          </a:xfrm>
+          <a:prstGeom xmlns:a="http://schemas.openxmlformats.org/drawingml/2006/main" prst="rect">
+            <a:avLst/>
+          </a:prstGeom>
+          <a:noFill xmlns:a="http://schemas.openxmlformats.org/drawingml/2006/main"/>
+          <a:ln xmlns:a="http://schemas.openxmlformats.org/drawingml/2006/main" w="0">
+            <a:noFill/>
+            <a:prstDash val="solid"/>
+          </a:ln>
+        </p:spPr>
+        <p:txBody>
+          <a:bodyPr xmlns:a="http://schemas.openxmlformats.org/drawingml/2006/main"/>
+          <a:lstStyle xmlns:a="http://schemas.openxmlformats.org/drawingml/2006/main"/>
+          <a:p xmlns:a="http://schemas.openxmlformats.org/drawingml/2006/main">
+            <a:pPr>
+              <a:defRPr sz="1050" b="1">
+                <a:solidFill>
+                  <a:srgbClr val="102A63"/>
+                </a:solidFill>
+              </a:defRPr>
+            </a:pPr>
+            <a:r>
+              <a:rPr sz="1050" b="1">
+                <a:solidFill>
+                  <a:srgbClr val="102A63"/>
+                </a:solidFill>
+              </a:rPr>
+              <a:t>{{REC_7_VENDORS}}</a:t>
+            </a:r>
+          </a:p>
+        </p:txBody>
+      </p:sp>
+      <p:sp>
+        <p:nvSpPr>
+          <p:cNvPr id="35" name="">
+            <a:extLst xmlns:a="http://schemas.openxmlformats.org/drawingml/2006/main">
+              <a:ext uri="{FF2B5EF4-FFF2-40B4-BE49-F238E27FC236}">
+                <a16:creationId xmlns:a16="http://schemas.microsoft.com/office/drawing/2014/main" id="{DA951AB9-85DE-48FA-A187-4747B3532138}"/>
+              </a:ext>
+            </a:extLst>
+          </p:cNvPr>
+          <p:cNvSpPr>
+            <a:spLocks xmlns:a="http://schemas.openxmlformats.org/drawingml/2006/main" noGrp="1"/>
+          </p:cNvSpPr>
+          <p:nvPr/>
+        </p:nvSpPr>
+        <p:spPr>
+          <a:xfrm xmlns:a="http://schemas.openxmlformats.org/drawingml/2006/main">
+            <a:off x="6076950" y="3857625"/>
+            <a:ext cx="5162550" cy="2143125"/>
+          </a:xfrm>
+          <a:prstGeom xmlns:a="http://schemas.openxmlformats.org/drawingml/2006/main" prst="roundRect">
+            <a:avLst>
+              <a:gd name="adj" fmla="val 3556"/>
+            </a:avLst>
+          </a:prstGeom>
+          <a:solidFill xmlns:a="http://schemas.openxmlformats.org/drawingml/2006/main">
+            <a:srgbClr val="FFFFFF"/>
+          </a:solidFill>
+          <a:ln xmlns:a="http://schemas.openxmlformats.org/drawingml/2006/main" w="9525">
+            <a:solidFill>
+              <a:srgbClr val="D7E0F2"/>
+            </a:solidFill>
+            <a:prstDash val="solid"/>
+          </a:ln>
+        </p:spPr>
+      </p:sp>
+      <p:sp>
+        <p:nvSpPr>
+          <p:cNvPr id="36" name="">
+            <a:extLst xmlns:a="http://schemas.openxmlformats.org/drawingml/2006/main">
+              <a:ext uri="{FF2B5EF4-FFF2-40B4-BE49-F238E27FC236}">
+                <a16:creationId xmlns:a16="http://schemas.microsoft.com/office/drawing/2014/main" id="{BB67716D-D256-4D90-98E3-90E31D1C6C9A}"/>
+              </a:ext>
+            </a:extLst>
+          </p:cNvPr>
+          <p:cNvSpPr>
+            <a:spLocks xmlns:a="http://schemas.openxmlformats.org/drawingml/2006/main" noGrp="1"/>
+          </p:cNvSpPr>
+          <p:nvPr/>
+        </p:nvSpPr>
+        <p:spPr>
+          <a:xfrm xmlns:a="http://schemas.openxmlformats.org/drawingml/2006/main">
+            <a:off x="6267450" y="4029075"/>
+            <a:ext cx="361950" cy="247650"/>
           </a:xfrm>
           <a:prstGeom xmlns:a="http://schemas.openxmlformats.org/drawingml/2006/main" prst="rect">
             <a:avLst/>
@@ -8541,79 +9601,79 @@
                   <a:srgbClr val="2048A8"/>
                 </a:solidFill>
               </a:rPr>
-              <a:t>04</a:t>
-            </a:r>
-          </a:p>
-        </p:txBody>
-      </p:sp>
-      <p:sp>
-        <p:nvSpPr>
-          <p:cNvPr id="33" name="">
-            <a:extLst xmlns:a="http://schemas.openxmlformats.org/drawingml/2006/main">
-              <a:ext uri="{FF2B5EF4-FFF2-40B4-BE49-F238E27FC236}">
-                <a16:creationId xmlns:a16="http://schemas.microsoft.com/office/drawing/2014/main" id="{E02BC3D0-A0B6-4315-8A28-05FBE64DBF39}"/>
-              </a:ext>
-            </a:extLst>
-          </p:cNvPr>
-          <p:cNvSpPr>
-            <a:spLocks xmlns:a="http://schemas.openxmlformats.org/drawingml/2006/main" noGrp="1"/>
-          </p:cNvSpPr>
-          <p:nvPr/>
-        </p:nvSpPr>
-        <p:spPr>
-          <a:xfrm xmlns:a="http://schemas.openxmlformats.org/drawingml/2006/main">
-            <a:off x="1200150" y="5181600"/>
-            <a:ext cx="9982200" cy="266700"/>
-          </a:xfrm>
-          <a:prstGeom xmlns:a="http://schemas.openxmlformats.org/drawingml/2006/main" prst="rect">
-            <a:avLst/>
-          </a:prstGeom>
-          <a:noFill xmlns:a="http://schemas.openxmlformats.org/drawingml/2006/main"/>
-          <a:ln xmlns:a="http://schemas.openxmlformats.org/drawingml/2006/main" w="0">
-            <a:noFill/>
-            <a:prstDash val="solid"/>
-          </a:ln>
-        </p:spPr>
-        <p:txBody>
-          <a:bodyPr xmlns:a="http://schemas.openxmlformats.org/drawingml/2006/main"/>
-          <a:lstStyle xmlns:a="http://schemas.openxmlformats.org/drawingml/2006/main"/>
-          <a:p xmlns:a="http://schemas.openxmlformats.org/drawingml/2006/main">
-            <a:pPr>
-              <a:defRPr sz="1425" b="1">
-                <a:solidFill>
-                  <a:srgbClr val="102A63"/>
-                </a:solidFill>
-              </a:defRPr>
-            </a:pPr>
-            <a:r>
-              <a:rPr sz="1425" b="1">
-                <a:solidFill>
-                  <a:srgbClr val="102A63"/>
-                </a:solidFill>
-              </a:rPr>
-              <a:t>{{SEC_4_TITLE}}</a:t>
-            </a:r>
-          </a:p>
-        </p:txBody>
-      </p:sp>
-      <p:sp>
-        <p:nvSpPr>
-          <p:cNvPr id="34" name="">
-            <a:extLst xmlns:a="http://schemas.openxmlformats.org/drawingml/2006/main">
-              <a:ext uri="{FF2B5EF4-FFF2-40B4-BE49-F238E27FC236}">
-                <a16:creationId xmlns:a16="http://schemas.microsoft.com/office/drawing/2014/main" id="{CF94DC58-7ABF-455D-BCA1-1325E4DD69A7}"/>
-              </a:ext>
-            </a:extLst>
-          </p:cNvPr>
-          <p:cNvSpPr>
-            <a:spLocks xmlns:a="http://schemas.openxmlformats.org/drawingml/2006/main" noGrp="1"/>
-          </p:cNvSpPr>
-          <p:nvPr/>
-        </p:nvSpPr>
-        <p:spPr>
-          <a:xfrm xmlns:a="http://schemas.openxmlformats.org/drawingml/2006/main">
-            <a:off x="1200150" y="5476875"/>
-            <a:ext cx="9982200" cy="400050"/>
+              <a:t>08</a:t>
+            </a:r>
+          </a:p>
+        </p:txBody>
+      </p:sp>
+      <p:sp>
+        <p:nvSpPr>
+          <p:cNvPr id="37" name="">
+            <a:extLst xmlns:a="http://schemas.openxmlformats.org/drawingml/2006/main">
+              <a:ext uri="{FF2B5EF4-FFF2-40B4-BE49-F238E27FC236}">
+                <a16:creationId xmlns:a16="http://schemas.microsoft.com/office/drawing/2014/main" id="{1E532E65-5E26-45D8-A84E-A4C743E08A9F}"/>
+              </a:ext>
+            </a:extLst>
+          </p:cNvPr>
+          <p:cNvSpPr>
+            <a:spLocks xmlns:a="http://schemas.openxmlformats.org/drawingml/2006/main" noGrp="1"/>
+          </p:cNvSpPr>
+          <p:nvPr/>
+        </p:nvSpPr>
+        <p:spPr>
+          <a:xfrm xmlns:a="http://schemas.openxmlformats.org/drawingml/2006/main">
+            <a:off x="6686550" y="4000500"/>
+            <a:ext cx="4324350" cy="400050"/>
+          </a:xfrm>
+          <a:prstGeom xmlns:a="http://schemas.openxmlformats.org/drawingml/2006/main" prst="rect">
+            <a:avLst/>
+          </a:prstGeom>
+          <a:noFill xmlns:a="http://schemas.openxmlformats.org/drawingml/2006/main"/>
+          <a:ln xmlns:a="http://schemas.openxmlformats.org/drawingml/2006/main" w="0">
+            <a:noFill/>
+            <a:prstDash val="solid"/>
+          </a:ln>
+        </p:spPr>
+        <p:txBody>
+          <a:bodyPr xmlns:a="http://schemas.openxmlformats.org/drawingml/2006/main"/>
+          <a:lstStyle xmlns:a="http://schemas.openxmlformats.org/drawingml/2006/main"/>
+          <a:p xmlns:a="http://schemas.openxmlformats.org/drawingml/2006/main">
+            <a:pPr>
+              <a:defRPr sz="1350" b="1">
+                <a:solidFill>
+                  <a:srgbClr val="102A63"/>
+                </a:solidFill>
+              </a:defRPr>
+            </a:pPr>
+            <a:r>
+              <a:rPr sz="1350" b="1">
+                <a:solidFill>
+                  <a:srgbClr val="102A63"/>
+                </a:solidFill>
+              </a:rPr>
+              <a:t>{{REC_8_TITLE}}</a:t>
+            </a:r>
+          </a:p>
+        </p:txBody>
+      </p:sp>
+      <p:sp>
+        <p:nvSpPr>
+          <p:cNvPr id="38" name="">
+            <a:extLst xmlns:a="http://schemas.openxmlformats.org/drawingml/2006/main">
+              <a:ext uri="{FF2B5EF4-FFF2-40B4-BE49-F238E27FC236}">
+                <a16:creationId xmlns:a16="http://schemas.microsoft.com/office/drawing/2014/main" id="{11F803B3-0CA6-4052-B8B7-A9E39F6040D3}"/>
+              </a:ext>
+            </a:extLst>
+          </p:cNvPr>
+          <p:cNvSpPr>
+            <a:spLocks xmlns:a="http://schemas.openxmlformats.org/drawingml/2006/main" noGrp="1"/>
+          </p:cNvSpPr>
+          <p:nvPr/>
+        </p:nvSpPr>
+        <p:spPr>
+          <a:xfrm xmlns:a="http://schemas.openxmlformats.org/drawingml/2006/main">
+            <a:off x="6286500" y="4476750"/>
+            <a:ext cx="4743450" cy="552450"/>
           </a:xfrm>
           <a:prstGeom xmlns:a="http://schemas.openxmlformats.org/drawingml/2006/main" prst="rect">
             <a:avLst/>
@@ -8641,52 +9701,83 @@
                   <a:srgbClr val="596780"/>
                 </a:solidFill>
               </a:rPr>
-              <a:t>{{SEC_4_ACTION}}</a:t>
-            </a:r>
-          </a:p>
-        </p:txBody>
-      </p:sp>
-      <p:sp>
-        <p:nvSpPr>
-          <p:cNvPr id="35" name="">
-            <a:extLst xmlns:a="http://schemas.openxmlformats.org/drawingml/2006/main">
-              <a:ext uri="{FF2B5EF4-FFF2-40B4-BE49-F238E27FC236}">
-                <a16:creationId xmlns:a16="http://schemas.microsoft.com/office/drawing/2014/main" id="{F322D6F2-83BE-455C-A0A7-D39CAF979FFF}"/>
-              </a:ext>
-            </a:extLst>
-          </p:cNvPr>
-          <p:cNvSpPr>
-            <a:spLocks xmlns:a="http://schemas.openxmlformats.org/drawingml/2006/main" noGrp="1"/>
-          </p:cNvSpPr>
-          <p:nvPr/>
-        </p:nvSpPr>
-        <p:spPr>
-          <a:xfrm xmlns:a="http://schemas.openxmlformats.org/drawingml/2006/main">
-            <a:off x="1200150" y="5943600"/>
-            <a:ext cx="742950" cy="190500"/>
-          </a:xfrm>
-          <a:prstGeom xmlns:a="http://schemas.openxmlformats.org/drawingml/2006/main" prst="rect">
-            <a:avLst/>
-          </a:prstGeom>
-          <a:noFill xmlns:a="http://schemas.openxmlformats.org/drawingml/2006/main"/>
-          <a:ln xmlns:a="http://schemas.openxmlformats.org/drawingml/2006/main" w="0">
-            <a:noFill/>
-            <a:prstDash val="solid"/>
-          </a:ln>
-        </p:spPr>
-        <p:txBody>
-          <a:bodyPr xmlns:a="http://schemas.openxmlformats.org/drawingml/2006/main"/>
-          <a:lstStyle xmlns:a="http://schemas.openxmlformats.org/drawingml/2006/main"/>
-          <a:p xmlns:a="http://schemas.openxmlformats.org/drawingml/2006/main">
-            <a:pPr>
-              <a:defRPr sz="975" b="1">
+              <a:t>{{REC_8_ACTION}}</a:t>
+            </a:r>
+          </a:p>
+        </p:txBody>
+      </p:sp>
+      <p:sp>
+        <p:nvSpPr>
+          <p:cNvPr id="39" name="">
+            <a:extLst xmlns:a="http://schemas.openxmlformats.org/drawingml/2006/main">
+              <a:ext uri="{FF2B5EF4-FFF2-40B4-BE49-F238E27FC236}">
+                <a16:creationId xmlns:a16="http://schemas.microsoft.com/office/drawing/2014/main" id="{E8BCBE36-77FE-48D2-B0EF-AE444DB8A593}"/>
+              </a:ext>
+            </a:extLst>
+          </p:cNvPr>
+          <p:cNvSpPr>
+            <a:spLocks xmlns:a="http://schemas.openxmlformats.org/drawingml/2006/main" noGrp="1"/>
+          </p:cNvSpPr>
+          <p:nvPr/>
+        </p:nvSpPr>
+        <p:spPr>
+          <a:xfrm xmlns:a="http://schemas.openxmlformats.org/drawingml/2006/main">
+            <a:off x="6286500" y="5114925"/>
+            <a:ext cx="4743450" cy="9525"/>
+          </a:xfrm>
+          <a:prstGeom xmlns:a="http://schemas.openxmlformats.org/drawingml/2006/main" prst="rect">
+            <a:avLst/>
+          </a:prstGeom>
+          <a:solidFill xmlns:a="http://schemas.openxmlformats.org/drawingml/2006/main">
+            <a:srgbClr val="D7E0F2"/>
+          </a:solidFill>
+          <a:ln xmlns:a="http://schemas.openxmlformats.org/drawingml/2006/main" w="0">
+            <a:noFill/>
+            <a:prstDash val="solid"/>
+          </a:ln>
+        </p:spPr>
+      </p:sp>
+      <p:sp>
+        <p:nvSpPr>
+          <p:cNvPr id="40" name="">
+            <a:extLst xmlns:a="http://schemas.openxmlformats.org/drawingml/2006/main">
+              <a:ext uri="{FF2B5EF4-FFF2-40B4-BE49-F238E27FC236}">
+                <a16:creationId xmlns:a16="http://schemas.microsoft.com/office/drawing/2014/main" id="{C70B3982-ABBB-4168-8CA9-C914CCAB041E}"/>
+              </a:ext>
+            </a:extLst>
+          </p:cNvPr>
+          <p:cNvSpPr>
+            <a:spLocks xmlns:a="http://schemas.openxmlformats.org/drawingml/2006/main" noGrp="1"/>
+          </p:cNvSpPr>
+          <p:nvPr/>
+        </p:nvSpPr>
+        <p:spPr>
+          <a:xfrm xmlns:a="http://schemas.openxmlformats.org/drawingml/2006/main">
+            <a:off x="6286500" y="5248275"/>
+            <a:ext cx="2171700" cy="171450"/>
+          </a:xfrm>
+          <a:prstGeom xmlns:a="http://schemas.openxmlformats.org/drawingml/2006/main" prst="rect">
+            <a:avLst/>
+          </a:prstGeom>
+          <a:noFill xmlns:a="http://schemas.openxmlformats.org/drawingml/2006/main"/>
+          <a:ln xmlns:a="http://schemas.openxmlformats.org/drawingml/2006/main" w="0">
+            <a:noFill/>
+            <a:prstDash val="solid"/>
+          </a:ln>
+        </p:spPr>
+        <p:txBody>
+          <a:bodyPr xmlns:a="http://schemas.openxmlformats.org/drawingml/2006/main"/>
+          <a:lstStyle xmlns:a="http://schemas.openxmlformats.org/drawingml/2006/main"/>
+          <a:p xmlns:a="http://schemas.openxmlformats.org/drawingml/2006/main">
+            <a:pPr>
+              <a:defRPr sz="900" b="1">
                 <a:solidFill>
                   <a:srgbClr val="2048A8"/>
                 </a:solidFill>
               </a:defRPr>
             </a:pPr>
             <a:r>
-              <a:rPr sz="975" b="1">
+              <a:rPr sz="900" b="1">
                 <a:solidFill>
                   <a:srgbClr val="2048A8"/>
                 </a:solidFill>
@@ -8698,22 +9789,22 @@
       </p:sp>
       <p:sp>
         <p:nvSpPr>
-          <p:cNvPr id="36" name="">
-            <a:extLst xmlns:a="http://schemas.openxmlformats.org/drawingml/2006/main">
-              <a:ext uri="{FF2B5EF4-FFF2-40B4-BE49-F238E27FC236}">
-                <a16:creationId xmlns:a16="http://schemas.microsoft.com/office/drawing/2014/main" id="{0B151879-2718-4C6B-8299-15B5A55F9335}"/>
-              </a:ext>
-            </a:extLst>
-          </p:cNvPr>
-          <p:cNvSpPr>
-            <a:spLocks xmlns:a="http://schemas.openxmlformats.org/drawingml/2006/main" noGrp="1"/>
-          </p:cNvSpPr>
-          <p:nvPr/>
-        </p:nvSpPr>
-        <p:spPr>
-          <a:xfrm xmlns:a="http://schemas.openxmlformats.org/drawingml/2006/main">
-            <a:off x="1962150" y="5924550"/>
-            <a:ext cx="3810000" cy="323850"/>
+          <p:cNvPr id="41" name="">
+            <a:extLst xmlns:a="http://schemas.openxmlformats.org/drawingml/2006/main">
+              <a:ext uri="{FF2B5EF4-FFF2-40B4-BE49-F238E27FC236}">
+                <a16:creationId xmlns:a16="http://schemas.microsoft.com/office/drawing/2014/main" id="{57CF55BD-9B8A-4853-AE90-E9D4CEF76BEF}"/>
+              </a:ext>
+            </a:extLst>
+          </p:cNvPr>
+          <p:cNvSpPr>
+            <a:spLocks xmlns:a="http://schemas.openxmlformats.org/drawingml/2006/main" noGrp="1"/>
+          </p:cNvSpPr>
+          <p:nvPr/>
+        </p:nvSpPr>
+        <p:spPr>
+          <a:xfrm xmlns:a="http://schemas.openxmlformats.org/drawingml/2006/main">
+            <a:off x="6286500" y="5438775"/>
+            <a:ext cx="2266950" cy="409575"/>
           </a:xfrm>
           <a:prstGeom xmlns:a="http://schemas.openxmlformats.org/drawingml/2006/main" prst="rect">
             <a:avLst/>
@@ -8741,52 +9832,52 @@
                   <a:srgbClr val="102A63"/>
                 </a:solidFill>
               </a:rPr>
-              <a:t>{{SEC_4_SOLUTION}}</a:t>
-            </a:r>
-          </a:p>
-        </p:txBody>
-      </p:sp>
-      <p:sp>
-        <p:nvSpPr>
-          <p:cNvPr id="37" name="">
-            <a:extLst xmlns:a="http://schemas.openxmlformats.org/drawingml/2006/main">
-              <a:ext uri="{FF2B5EF4-FFF2-40B4-BE49-F238E27FC236}">
-                <a16:creationId xmlns:a16="http://schemas.microsoft.com/office/drawing/2014/main" id="{D360B97E-6FEA-488E-92CB-4CF561324B47}"/>
-              </a:ext>
-            </a:extLst>
-          </p:cNvPr>
-          <p:cNvSpPr>
-            <a:spLocks xmlns:a="http://schemas.openxmlformats.org/drawingml/2006/main" noGrp="1"/>
-          </p:cNvSpPr>
-          <p:nvPr/>
-        </p:nvSpPr>
-        <p:spPr>
-          <a:xfrm xmlns:a="http://schemas.openxmlformats.org/drawingml/2006/main">
-            <a:off x="6019800" y="5943600"/>
-            <a:ext cx="1104900" cy="190500"/>
-          </a:xfrm>
-          <a:prstGeom xmlns:a="http://schemas.openxmlformats.org/drawingml/2006/main" prst="rect">
-            <a:avLst/>
-          </a:prstGeom>
-          <a:noFill xmlns:a="http://schemas.openxmlformats.org/drawingml/2006/main"/>
-          <a:ln xmlns:a="http://schemas.openxmlformats.org/drawingml/2006/main" w="0">
-            <a:noFill/>
-            <a:prstDash val="solid"/>
-          </a:ln>
-        </p:spPr>
-        <p:txBody>
-          <a:bodyPr xmlns:a="http://schemas.openxmlformats.org/drawingml/2006/main"/>
-          <a:lstStyle xmlns:a="http://schemas.openxmlformats.org/drawingml/2006/main"/>
-          <a:p xmlns:a="http://schemas.openxmlformats.org/drawingml/2006/main">
-            <a:pPr>
-              <a:defRPr sz="975" b="1">
+              <a:t>{{REC_8_SOLUTION}}</a:t>
+            </a:r>
+          </a:p>
+        </p:txBody>
+      </p:sp>
+      <p:sp>
+        <p:nvSpPr>
+          <p:cNvPr id="42" name="">
+            <a:extLst xmlns:a="http://schemas.openxmlformats.org/drawingml/2006/main">
+              <a:ext uri="{FF2B5EF4-FFF2-40B4-BE49-F238E27FC236}">
+                <a16:creationId xmlns:a16="http://schemas.microsoft.com/office/drawing/2014/main" id="{BEF08F2C-A964-42E7-A696-9EB4E0EF707F}"/>
+              </a:ext>
+            </a:extLst>
+          </p:cNvPr>
+          <p:cNvSpPr>
+            <a:spLocks xmlns:a="http://schemas.openxmlformats.org/drawingml/2006/main" noGrp="1"/>
+          </p:cNvSpPr>
+          <p:nvPr/>
+        </p:nvSpPr>
+        <p:spPr>
+          <a:xfrm xmlns:a="http://schemas.openxmlformats.org/drawingml/2006/main">
+            <a:off x="8743950" y="5248275"/>
+            <a:ext cx="2266950" cy="171450"/>
+          </a:xfrm>
+          <a:prstGeom xmlns:a="http://schemas.openxmlformats.org/drawingml/2006/main" prst="rect">
+            <a:avLst/>
+          </a:prstGeom>
+          <a:noFill xmlns:a="http://schemas.openxmlformats.org/drawingml/2006/main"/>
+          <a:ln xmlns:a="http://schemas.openxmlformats.org/drawingml/2006/main" w="0">
+            <a:noFill/>
+            <a:prstDash val="solid"/>
+          </a:ln>
+        </p:spPr>
+        <p:txBody>
+          <a:bodyPr xmlns:a="http://schemas.openxmlformats.org/drawingml/2006/main"/>
+          <a:lstStyle xmlns:a="http://schemas.openxmlformats.org/drawingml/2006/main"/>
+          <a:p xmlns:a="http://schemas.openxmlformats.org/drawingml/2006/main">
+            <a:pPr>
+              <a:defRPr sz="900" b="1">
                 <a:solidFill>
                   <a:srgbClr val="2048A8"/>
                 </a:solidFill>
               </a:defRPr>
             </a:pPr>
             <a:r>
-              <a:rPr sz="975" b="1">
+              <a:rPr sz="900" b="1">
                 <a:solidFill>
                   <a:srgbClr val="2048A8"/>
                 </a:solidFill>
@@ -8798,22 +9889,22 @@
       </p:sp>
       <p:sp>
         <p:nvSpPr>
-          <p:cNvPr id="38" name="">
-            <a:extLst xmlns:a="http://schemas.openxmlformats.org/drawingml/2006/main">
-              <a:ext uri="{FF2B5EF4-FFF2-40B4-BE49-F238E27FC236}">
-                <a16:creationId xmlns:a16="http://schemas.microsoft.com/office/drawing/2014/main" id="{4A65C7D4-0281-4EE8-B5B1-CDF402A7B9D5}"/>
-              </a:ext>
-            </a:extLst>
-          </p:cNvPr>
-          <p:cNvSpPr>
-            <a:spLocks xmlns:a="http://schemas.openxmlformats.org/drawingml/2006/main" noGrp="1"/>
-          </p:cNvSpPr>
-          <p:nvPr/>
-        </p:nvSpPr>
-        <p:spPr>
-          <a:xfrm xmlns:a="http://schemas.openxmlformats.org/drawingml/2006/main">
-            <a:off x="7181850" y="5924550"/>
-            <a:ext cx="4000500" cy="323850"/>
+          <p:cNvPr id="43" name="">
+            <a:extLst xmlns:a="http://schemas.openxmlformats.org/drawingml/2006/main">
+              <a:ext uri="{FF2B5EF4-FFF2-40B4-BE49-F238E27FC236}">
+                <a16:creationId xmlns:a16="http://schemas.microsoft.com/office/drawing/2014/main" id="{4F6B5626-E3A1-44B1-BB37-84CAD968861B}"/>
+              </a:ext>
+            </a:extLst>
+          </p:cNvPr>
+          <p:cNvSpPr>
+            <a:spLocks xmlns:a="http://schemas.openxmlformats.org/drawingml/2006/main" noGrp="1"/>
+          </p:cNvSpPr>
+          <p:nvPr/>
+        </p:nvSpPr>
+        <p:spPr>
+          <a:xfrm xmlns:a="http://schemas.openxmlformats.org/drawingml/2006/main">
+            <a:off x="8743950" y="5438775"/>
+            <a:ext cx="2266950" cy="409575"/>
           </a:xfrm>
           <a:prstGeom xmlns:a="http://schemas.openxmlformats.org/drawingml/2006/main" prst="rect">
             <a:avLst/>
@@ -8841,7 +9932,7 @@
                   <a:srgbClr val="102A63"/>
                 </a:solidFill>
               </a:rPr>
-              <a:t>{{SEC_4_VENDORS}}</a:t>
+              <a:t>{{REC_8_VENDORS}}</a:t>
             </a:r>
           </a:p>
         </p:txBody>
@@ -8849,7 +9940,7 @@
     </p:spTree>
     <p:extLst>
       <p:ext uri="{BB962C8B-B14F-4D97-AF65-F5344CB8AC3E}">
-        <p14:creationId xmlns:p14="http://schemas.microsoft.com/office/powerpoint/2010/main" val="2111637941"/>
+        <p14:creationId xmlns:p14="http://schemas.microsoft.com/office/powerpoint/2010/main" val="1926523551"/>
       </p:ext>
     </p:extLst>
   </p:cSld>
@@ -8880,7 +9971,7 @@
           <p:cNvPr id="1" name="">
             <a:extLst xmlns:a="http://schemas.openxmlformats.org/drawingml/2006/main">
               <a:ext uri="{FF2B5EF4-FFF2-40B4-BE49-F238E27FC236}">
-                <a16:creationId xmlns:a16="http://schemas.microsoft.com/office/drawing/2014/main" id="{7EBC47E2-1CBA-418B-83FC-D5AD4723A91B}"/>
+                <a16:creationId xmlns:a16="http://schemas.microsoft.com/office/drawing/2014/main" id="{08399486-5D1D-43DE-AB19-4B50874D4893}"/>
               </a:ext>
             </a:extLst>
           </p:cNvPr>
@@ -8915,7 +10006,7 @@
           <p:nvPr/>
         </p:nvPicPr>
         <p:blipFill>
-          <a:blip xmlns:r="http://schemas.openxmlformats.org/officeDocument/2006/relationships" xmlns:a="http://schemas.openxmlformats.org/drawingml/2006/main" r:embed="R8d065405e09e4dae"/>
+          <a:blip xmlns:r="http://schemas.openxmlformats.org/officeDocument/2006/relationships" xmlns:a="http://schemas.openxmlformats.org/drawingml/2006/main" r:embed="R9bec060a073d45d3"/>
           <a:stretch xmlns:a="http://schemas.openxmlformats.org/drawingml/2006/main"/>
         </p:blipFill>
         <p:spPr>
@@ -8933,7 +10024,7 @@
           <p:cNvPr id="3" name="">
             <a:extLst xmlns:a="http://schemas.openxmlformats.org/drawingml/2006/main">
               <a:ext uri="{FF2B5EF4-FFF2-40B4-BE49-F238E27FC236}">
-                <a16:creationId xmlns:a16="http://schemas.microsoft.com/office/drawing/2014/main" id="{68A55B2B-D9E6-40C3-9F98-F88215C20EAF}"/>
+                <a16:creationId xmlns:a16="http://schemas.microsoft.com/office/drawing/2014/main" id="{9649F080-99AD-4728-AFBD-5CCD74AD2859}"/>
               </a:ext>
             </a:extLst>
           </p:cNvPr>
@@ -8983,7 +10074,7 @@
           <p:cNvPr id="4" name="">
             <a:extLst xmlns:a="http://schemas.openxmlformats.org/drawingml/2006/main">
               <a:ext uri="{FF2B5EF4-FFF2-40B4-BE49-F238E27FC236}">
-                <a16:creationId xmlns:a16="http://schemas.microsoft.com/office/drawing/2014/main" id="{D9C0B251-D6F2-4D98-AE53-239F676708AC}"/>
+                <a16:creationId xmlns:a16="http://schemas.microsoft.com/office/drawing/2014/main" id="{BE9D0E9A-1024-42A2-BC0D-DC93AA3CBC88}"/>
               </a:ext>
             </a:extLst>
           </p:cNvPr>
@@ -9016,7 +10107,7 @@
           <p:cNvPr id="5" name="">
             <a:extLst xmlns:a="http://schemas.openxmlformats.org/drawingml/2006/main">
               <a:ext uri="{FF2B5EF4-FFF2-40B4-BE49-F238E27FC236}">
-                <a16:creationId xmlns:a16="http://schemas.microsoft.com/office/drawing/2014/main" id="{07CEC858-FFDF-4566-94B7-BA2B0C3C154B}"/>
+                <a16:creationId xmlns:a16="http://schemas.microsoft.com/office/drawing/2014/main" id="{49ACB437-C156-4BD2-AE45-714E8F3C7BC9}"/>
               </a:ext>
             </a:extLst>
           </p:cNvPr>
@@ -9047,7 +10138,7 @@
           <p:cNvPr id="6" name="">
             <a:extLst xmlns:a="http://schemas.openxmlformats.org/drawingml/2006/main">
               <a:ext uri="{FF2B5EF4-FFF2-40B4-BE49-F238E27FC236}">
-                <a16:creationId xmlns:a16="http://schemas.microsoft.com/office/drawing/2014/main" id="{A3C874F5-84A1-4EF1-97E7-751FE1A728CE}"/>
+                <a16:creationId xmlns:a16="http://schemas.microsoft.com/office/drawing/2014/main" id="{D37E1403-186F-443A-8F50-88FE596A2AC5}"/>
               </a:ext>
             </a:extLst>
           </p:cNvPr>
@@ -9097,7 +10188,7 @@
           <p:cNvPr id="7" name="">
             <a:extLst xmlns:a="http://schemas.openxmlformats.org/drawingml/2006/main">
               <a:ext uri="{FF2B5EF4-FFF2-40B4-BE49-F238E27FC236}">
-                <a16:creationId xmlns:a16="http://schemas.microsoft.com/office/drawing/2014/main" id="{E26B14BE-1B12-4EF7-9AFC-2ACFCDE72235}"/>
+                <a16:creationId xmlns:a16="http://schemas.microsoft.com/office/drawing/2014/main" id="{06BF40E5-4DCB-4E1D-BE65-A91B39C7CA12}"/>
               </a:ext>
             </a:extLst>
           </p:cNvPr>
@@ -9147,7 +10238,7 @@
           <p:cNvPr id="8" name="">
             <a:extLst xmlns:a="http://schemas.openxmlformats.org/drawingml/2006/main">
               <a:ext uri="{FF2B5EF4-FFF2-40B4-BE49-F238E27FC236}">
-                <a16:creationId xmlns:a16="http://schemas.microsoft.com/office/drawing/2014/main" id="{57389591-C8DD-4BB4-8B4E-F923C9F3425F}"/>
+                <a16:creationId xmlns:a16="http://schemas.microsoft.com/office/drawing/2014/main" id="{3A89F8D0-7E48-434F-BE6A-AB603F96645C}"/>
               </a:ext>
             </a:extLst>
           </p:cNvPr>
@@ -9182,7 +10273,7 @@
           <p:cNvPr id="9" name="">
             <a:extLst xmlns:a="http://schemas.openxmlformats.org/drawingml/2006/main">
               <a:ext uri="{FF2B5EF4-FFF2-40B4-BE49-F238E27FC236}">
-                <a16:creationId xmlns:a16="http://schemas.microsoft.com/office/drawing/2014/main" id="{10AB9D1F-3CC7-4291-A636-97BC00F66F97}"/>
+                <a16:creationId xmlns:a16="http://schemas.microsoft.com/office/drawing/2014/main" id="{C20E09A3-37B6-4741-AA6A-0CBA0EB07811}"/>
               </a:ext>
             </a:extLst>
           </p:cNvPr>
@@ -9215,7 +10306,7 @@
           <p:cNvPr id="10" name="">
             <a:extLst xmlns:a="http://schemas.openxmlformats.org/drawingml/2006/main">
               <a:ext uri="{FF2B5EF4-FFF2-40B4-BE49-F238E27FC236}">
-                <a16:creationId xmlns:a16="http://schemas.microsoft.com/office/drawing/2014/main" id="{68870728-EC2D-4DCF-96D2-AFF50FFC14A9}"/>
+                <a16:creationId xmlns:a16="http://schemas.microsoft.com/office/drawing/2014/main" id="{C21B6270-8050-4A36-96F3-C284B221A339}"/>
               </a:ext>
             </a:extLst>
           </p:cNvPr>
@@ -9265,7 +10356,7 @@
           <p:cNvPr id="11" name="">
             <a:extLst xmlns:a="http://schemas.openxmlformats.org/drawingml/2006/main">
               <a:ext uri="{FF2B5EF4-FFF2-40B4-BE49-F238E27FC236}">
-                <a16:creationId xmlns:a16="http://schemas.microsoft.com/office/drawing/2014/main" id="{8AAD752B-3860-4744-AA47-4E87AFFBCB7F}"/>
+                <a16:creationId xmlns:a16="http://schemas.microsoft.com/office/drawing/2014/main" id="{CD0DBE53-E649-402D-9FAE-A03D68D69E7B}"/>
               </a:ext>
             </a:extLst>
           </p:cNvPr>
@@ -9315,7 +10406,7 @@
           <p:cNvPr id="12" name="">
             <a:extLst xmlns:a="http://schemas.openxmlformats.org/drawingml/2006/main">
               <a:ext uri="{FF2B5EF4-FFF2-40B4-BE49-F238E27FC236}">
-                <a16:creationId xmlns:a16="http://schemas.microsoft.com/office/drawing/2014/main" id="{900CD946-F289-41C6-8F7F-59696A7CB4CA}"/>
+                <a16:creationId xmlns:a16="http://schemas.microsoft.com/office/drawing/2014/main" id="{74DB8F96-96B1-47BB-99A6-E404F0BA9494}"/>
               </a:ext>
             </a:extLst>
           </p:cNvPr>
@@ -9365,7 +10456,7 @@
           <p:cNvPr id="13" name="">
             <a:extLst xmlns:a="http://schemas.openxmlformats.org/drawingml/2006/main">
               <a:ext uri="{FF2B5EF4-FFF2-40B4-BE49-F238E27FC236}">
-                <a16:creationId xmlns:a16="http://schemas.microsoft.com/office/drawing/2014/main" id="{75D02642-8FEE-4BFD-A5DB-EF311046E872}"/>
+                <a16:creationId xmlns:a16="http://schemas.microsoft.com/office/drawing/2014/main" id="{8E757861-5824-459A-9F8C-D6CF2E10D08B}"/>
               </a:ext>
             </a:extLst>
           </p:cNvPr>
@@ -9396,7 +10487,7 @@
           <p:cNvPr id="14" name="">
             <a:extLst xmlns:a="http://schemas.openxmlformats.org/drawingml/2006/main">
               <a:ext uri="{FF2B5EF4-FFF2-40B4-BE49-F238E27FC236}">
-                <a16:creationId xmlns:a16="http://schemas.microsoft.com/office/drawing/2014/main" id="{B111CEA5-B24D-47BB-AE29-1D750324526C}"/>
+                <a16:creationId xmlns:a16="http://schemas.microsoft.com/office/drawing/2014/main" id="{AE683114-C3F0-4524-969A-89BCC24EC3D4}"/>
               </a:ext>
             </a:extLst>
           </p:cNvPr>
@@ -9446,7 +10537,7 @@
           <p:cNvPr id="15" name="">
             <a:extLst xmlns:a="http://schemas.openxmlformats.org/drawingml/2006/main">
               <a:ext uri="{FF2B5EF4-FFF2-40B4-BE49-F238E27FC236}">
-                <a16:creationId xmlns:a16="http://schemas.microsoft.com/office/drawing/2014/main" id="{176F4A9E-7F30-4970-8409-9F21C84B9ED8}"/>
+                <a16:creationId xmlns:a16="http://schemas.microsoft.com/office/drawing/2014/main" id="{7B929A8C-8EB3-4751-A4BC-B5823A3A19FD}"/>
               </a:ext>
             </a:extLst>
           </p:cNvPr>
@@ -9496,7 +10587,7 @@
           <p:cNvPr id="16" name="">
             <a:extLst xmlns:a="http://schemas.openxmlformats.org/drawingml/2006/main">
               <a:ext uri="{FF2B5EF4-FFF2-40B4-BE49-F238E27FC236}">
-                <a16:creationId xmlns:a16="http://schemas.microsoft.com/office/drawing/2014/main" id="{31A54852-7400-4FA1-8E52-2C423E6510C8}"/>
+                <a16:creationId xmlns:a16="http://schemas.microsoft.com/office/drawing/2014/main" id="{61F99624-D705-41AD-AE4C-244CC070F157}"/>
               </a:ext>
             </a:extLst>
           </p:cNvPr>
@@ -9531,7 +10622,7 @@
           <p:cNvPr id="17" name="">
             <a:extLst xmlns:a="http://schemas.openxmlformats.org/drawingml/2006/main">
               <a:ext uri="{FF2B5EF4-FFF2-40B4-BE49-F238E27FC236}">
-                <a16:creationId xmlns:a16="http://schemas.microsoft.com/office/drawing/2014/main" id="{DC83241C-C1B4-4910-9FE4-A4314E6A3482}"/>
+                <a16:creationId xmlns:a16="http://schemas.microsoft.com/office/drawing/2014/main" id="{08CD9CB8-32D7-44FD-ADCA-4CA755968039}"/>
               </a:ext>
             </a:extLst>
           </p:cNvPr>
@@ -9564,7 +10655,7 @@
           <p:cNvPr id="18" name="">
             <a:extLst xmlns:a="http://schemas.openxmlformats.org/drawingml/2006/main">
               <a:ext uri="{FF2B5EF4-FFF2-40B4-BE49-F238E27FC236}">
-                <a16:creationId xmlns:a16="http://schemas.microsoft.com/office/drawing/2014/main" id="{17C4727F-2C8B-4FA7-87FF-37C29E715B9D}"/>
+                <a16:creationId xmlns:a16="http://schemas.microsoft.com/office/drawing/2014/main" id="{AC792528-2800-4722-B506-71AA23523D18}"/>
               </a:ext>
             </a:extLst>
           </p:cNvPr>
@@ -9614,7 +10705,7 @@
           <p:cNvPr id="19" name="">
             <a:extLst xmlns:a="http://schemas.openxmlformats.org/drawingml/2006/main">
               <a:ext uri="{FF2B5EF4-FFF2-40B4-BE49-F238E27FC236}">
-                <a16:creationId xmlns:a16="http://schemas.microsoft.com/office/drawing/2014/main" id="{B5699C43-EEFD-4BE9-9918-EAEDEB29DCC5}"/>
+                <a16:creationId xmlns:a16="http://schemas.microsoft.com/office/drawing/2014/main" id="{E37A3207-FB20-44EC-97D3-DD0274ADFE11}"/>
               </a:ext>
             </a:extLst>
           </p:cNvPr>
@@ -9664,7 +10755,7 @@
           <p:cNvPr id="20" name="">
             <a:extLst xmlns:a="http://schemas.openxmlformats.org/drawingml/2006/main">
               <a:ext uri="{FF2B5EF4-FFF2-40B4-BE49-F238E27FC236}">
-                <a16:creationId xmlns:a16="http://schemas.microsoft.com/office/drawing/2014/main" id="{C898DEFB-5D17-4524-B623-EFCEBFFC38B9}"/>
+                <a16:creationId xmlns:a16="http://schemas.microsoft.com/office/drawing/2014/main" id="{64FC7E70-04B3-4BE8-A054-E0F4DABC41C2}"/>
               </a:ext>
             </a:extLst>
           </p:cNvPr>
@@ -9714,7 +10805,7 @@
           <p:cNvPr id="21" name="">
             <a:extLst xmlns:a="http://schemas.openxmlformats.org/drawingml/2006/main">
               <a:ext uri="{FF2B5EF4-FFF2-40B4-BE49-F238E27FC236}">
-                <a16:creationId xmlns:a16="http://schemas.microsoft.com/office/drawing/2014/main" id="{30876C6F-5DEF-4571-BB0F-8342DC2512DC}"/>
+                <a16:creationId xmlns:a16="http://schemas.microsoft.com/office/drawing/2014/main" id="{36257EF6-54F3-46D7-9DB1-4EE62BF46E57}"/>
               </a:ext>
             </a:extLst>
           </p:cNvPr>
@@ -9745,7 +10836,7 @@
           <p:cNvPr id="22" name="">
             <a:extLst xmlns:a="http://schemas.openxmlformats.org/drawingml/2006/main">
               <a:ext uri="{FF2B5EF4-FFF2-40B4-BE49-F238E27FC236}">
-                <a16:creationId xmlns:a16="http://schemas.microsoft.com/office/drawing/2014/main" id="{3309268E-FA3D-4F65-96C7-40DE9FB882E1}"/>
+                <a16:creationId xmlns:a16="http://schemas.microsoft.com/office/drawing/2014/main" id="{0198D18C-61FF-4012-9E65-8D3819D719DA}"/>
               </a:ext>
             </a:extLst>
           </p:cNvPr>
@@ -9795,7 +10886,7 @@
           <p:cNvPr id="23" name="">
             <a:extLst xmlns:a="http://schemas.openxmlformats.org/drawingml/2006/main">
               <a:ext uri="{FF2B5EF4-FFF2-40B4-BE49-F238E27FC236}">
-                <a16:creationId xmlns:a16="http://schemas.microsoft.com/office/drawing/2014/main" id="{AB184B90-879D-4406-ACBD-53837C17CA96}"/>
+                <a16:creationId xmlns:a16="http://schemas.microsoft.com/office/drawing/2014/main" id="{8E5BB5A7-BD16-42DA-9E99-764A11BE6AD5}"/>
               </a:ext>
             </a:extLst>
           </p:cNvPr>
@@ -9845,7 +10936,7 @@
           <p:cNvPr id="24" name="">
             <a:extLst xmlns:a="http://schemas.openxmlformats.org/drawingml/2006/main">
               <a:ext uri="{FF2B5EF4-FFF2-40B4-BE49-F238E27FC236}">
-                <a16:creationId xmlns:a16="http://schemas.microsoft.com/office/drawing/2014/main" id="{7E6E716C-27C8-4CC8-8685-6A90C11CB761}"/>
+                <a16:creationId xmlns:a16="http://schemas.microsoft.com/office/drawing/2014/main" id="{ECDD9DF4-7CE0-470F-B818-CEA2C9072528}"/>
               </a:ext>
             </a:extLst>
           </p:cNvPr>
@@ -9880,7 +10971,7 @@
           <p:cNvPr id="25" name="">
             <a:extLst xmlns:a="http://schemas.openxmlformats.org/drawingml/2006/main">
               <a:ext uri="{FF2B5EF4-FFF2-40B4-BE49-F238E27FC236}">
-                <a16:creationId xmlns:a16="http://schemas.microsoft.com/office/drawing/2014/main" id="{54FCF885-9F86-4B11-80FD-7C1DB1A74379}"/>
+                <a16:creationId xmlns:a16="http://schemas.microsoft.com/office/drawing/2014/main" id="{83B85299-A772-4417-A650-2F8B64497E04}"/>
               </a:ext>
             </a:extLst>
           </p:cNvPr>
@@ -9913,7 +11004,7 @@
           <p:cNvPr id="26" name="">
             <a:extLst xmlns:a="http://schemas.openxmlformats.org/drawingml/2006/main">
               <a:ext uri="{FF2B5EF4-FFF2-40B4-BE49-F238E27FC236}">
-                <a16:creationId xmlns:a16="http://schemas.microsoft.com/office/drawing/2014/main" id="{0247232B-A9BB-4E49-BC45-18DE2449717F}"/>
+                <a16:creationId xmlns:a16="http://schemas.microsoft.com/office/drawing/2014/main" id="{19577448-9731-4C63-8A7D-046B89196703}"/>
               </a:ext>
             </a:extLst>
           </p:cNvPr>
@@ -9963,7 +11054,7 @@
           <p:cNvPr id="27" name="">
             <a:extLst xmlns:a="http://schemas.openxmlformats.org/drawingml/2006/main">
               <a:ext uri="{FF2B5EF4-FFF2-40B4-BE49-F238E27FC236}">
-                <a16:creationId xmlns:a16="http://schemas.microsoft.com/office/drawing/2014/main" id="{B2CF929E-908D-4BB8-999B-CEE6D8E080C1}"/>
+                <a16:creationId xmlns:a16="http://schemas.microsoft.com/office/drawing/2014/main" id="{710C5E44-5C38-48AF-B2D2-23503733AA13}"/>
               </a:ext>
             </a:extLst>
           </p:cNvPr>
@@ -10013,7 +11104,7 @@
           <p:cNvPr id="28" name="">
             <a:extLst xmlns:a="http://schemas.openxmlformats.org/drawingml/2006/main">
               <a:ext uri="{FF2B5EF4-FFF2-40B4-BE49-F238E27FC236}">
-                <a16:creationId xmlns:a16="http://schemas.microsoft.com/office/drawing/2014/main" id="{97A0E782-CF7A-4884-9B9A-4D60F0502756}"/>
+                <a16:creationId xmlns:a16="http://schemas.microsoft.com/office/drawing/2014/main" id="{C4861FBF-0DD0-47D6-AEE6-D968A56973BD}"/>
               </a:ext>
             </a:extLst>
           </p:cNvPr>
@@ -10063,7 +11154,7 @@
           <p:cNvPr id="29" name="">
             <a:extLst xmlns:a="http://schemas.openxmlformats.org/drawingml/2006/main">
               <a:ext uri="{FF2B5EF4-FFF2-40B4-BE49-F238E27FC236}">
-                <a16:creationId xmlns:a16="http://schemas.microsoft.com/office/drawing/2014/main" id="{1FE96296-914A-4E4C-923A-5EBA91BC27E7}"/>
+                <a16:creationId xmlns:a16="http://schemas.microsoft.com/office/drawing/2014/main" id="{7DE5D800-3719-4E86-A653-B6612A975091}"/>
               </a:ext>
             </a:extLst>
           </p:cNvPr>
@@ -10094,7 +11185,7 @@
           <p:cNvPr id="30" name="">
             <a:extLst xmlns:a="http://schemas.openxmlformats.org/drawingml/2006/main">
               <a:ext uri="{FF2B5EF4-FFF2-40B4-BE49-F238E27FC236}">
-                <a16:creationId xmlns:a16="http://schemas.microsoft.com/office/drawing/2014/main" id="{F1E88763-FB6A-42ED-BD05-7771BB618FBE}"/>
+                <a16:creationId xmlns:a16="http://schemas.microsoft.com/office/drawing/2014/main" id="{45934210-D0E9-43C8-A3FE-DAEB4D5BDD47}"/>
               </a:ext>
             </a:extLst>
           </p:cNvPr>
@@ -10144,7 +11235,7 @@
           <p:cNvPr id="31" name="">
             <a:extLst xmlns:a="http://schemas.openxmlformats.org/drawingml/2006/main">
               <a:ext uri="{FF2B5EF4-FFF2-40B4-BE49-F238E27FC236}">
-                <a16:creationId xmlns:a16="http://schemas.microsoft.com/office/drawing/2014/main" id="{438FB042-05FB-445D-ADD4-AE0A8391F38B}"/>
+                <a16:creationId xmlns:a16="http://schemas.microsoft.com/office/drawing/2014/main" id="{85B5A174-6E00-48CC-BD17-E25954ACD9E1}"/>
               </a:ext>
             </a:extLst>
           </p:cNvPr>
@@ -10192,7 +11283,7 @@
     </p:spTree>
     <p:extLst>
       <p:ext uri="{BB962C8B-B14F-4D97-AF65-F5344CB8AC3E}">
-        <p14:creationId xmlns:p14="http://schemas.microsoft.com/office/powerpoint/2010/main" val="1986962878"/>
+        <p14:creationId xmlns:p14="http://schemas.microsoft.com/office/powerpoint/2010/main" val="1511351487"/>
       </p:ext>
     </p:extLst>
   </p:cSld>
@@ -10223,7 +11314,7 @@
           <p:cNvPr id="1" name="">
             <a:extLst xmlns:a="http://schemas.openxmlformats.org/drawingml/2006/main">
               <a:ext uri="{FF2B5EF4-FFF2-40B4-BE49-F238E27FC236}">
-                <a16:creationId xmlns:a16="http://schemas.microsoft.com/office/drawing/2014/main" id="{2736C115-410D-4886-A9D9-0755D1D7AE33}"/>
+                <a16:creationId xmlns:a16="http://schemas.microsoft.com/office/drawing/2014/main" id="{B3E593E1-9C73-43FB-8A3F-416E9175FEBC}"/>
               </a:ext>
             </a:extLst>
           </p:cNvPr>
@@ -10258,7 +11349,7 @@
           <p:nvPr/>
         </p:nvPicPr>
         <p:blipFill>
-          <a:blip xmlns:r="http://schemas.openxmlformats.org/officeDocument/2006/relationships" xmlns:a="http://schemas.openxmlformats.org/drawingml/2006/main" r:embed="Rb67dc194222f4676"/>
+          <a:blip xmlns:r="http://schemas.openxmlformats.org/officeDocument/2006/relationships" xmlns:a="http://schemas.openxmlformats.org/drawingml/2006/main" r:embed="Red2ce1cdc90a4a6a"/>
           <a:stretch xmlns:a="http://schemas.openxmlformats.org/drawingml/2006/main"/>
         </p:blipFill>
         <p:spPr>
@@ -10276,7 +11367,7 @@
           <p:cNvPr id="3" name="">
             <a:extLst xmlns:a="http://schemas.openxmlformats.org/drawingml/2006/main">
               <a:ext uri="{FF2B5EF4-FFF2-40B4-BE49-F238E27FC236}">
-                <a16:creationId xmlns:a16="http://schemas.microsoft.com/office/drawing/2014/main" id="{DE157567-0F5B-449E-A6ED-7E8FB30C1276}"/>
+                <a16:creationId xmlns:a16="http://schemas.microsoft.com/office/drawing/2014/main" id="{DD40DEBB-EE5E-4B0B-8C67-8573A53FDFD6}"/>
               </a:ext>
             </a:extLst>
           </p:cNvPr>
@@ -10326,7 +11417,7 @@
           <p:cNvPr id="4" name="">
             <a:extLst xmlns:a="http://schemas.openxmlformats.org/drawingml/2006/main">
               <a:ext uri="{FF2B5EF4-FFF2-40B4-BE49-F238E27FC236}">
-                <a16:creationId xmlns:a16="http://schemas.microsoft.com/office/drawing/2014/main" id="{75BEB26F-050F-4E86-B2FD-3633137B1870}"/>
+                <a16:creationId xmlns:a16="http://schemas.microsoft.com/office/drawing/2014/main" id="{5918405A-DDF0-4C15-B5B0-A7C5CB907704}"/>
               </a:ext>
             </a:extLst>
           </p:cNvPr>
@@ -10359,7 +11450,7 @@
           <p:cNvPr id="5" name="">
             <a:extLst xmlns:a="http://schemas.openxmlformats.org/drawingml/2006/main">
               <a:ext uri="{FF2B5EF4-FFF2-40B4-BE49-F238E27FC236}">
-                <a16:creationId xmlns:a16="http://schemas.microsoft.com/office/drawing/2014/main" id="{7B4D2CEB-99DD-4380-9857-45C35C1944B8}"/>
+                <a16:creationId xmlns:a16="http://schemas.microsoft.com/office/drawing/2014/main" id="{D47D2193-4382-4556-A47A-9F1DB0AFE5A2}"/>
               </a:ext>
             </a:extLst>
           </p:cNvPr>
@@ -10390,7 +11481,7 @@
           <p:cNvPr id="6" name="">
             <a:extLst xmlns:a="http://schemas.openxmlformats.org/drawingml/2006/main">
               <a:ext uri="{FF2B5EF4-FFF2-40B4-BE49-F238E27FC236}">
-                <a16:creationId xmlns:a16="http://schemas.microsoft.com/office/drawing/2014/main" id="{96CFE90A-23E5-410E-BBC9-63D41D192BC1}"/>
+                <a16:creationId xmlns:a16="http://schemas.microsoft.com/office/drawing/2014/main" id="{979B8CD9-37F1-415F-8641-6767ACF77AE5}"/>
               </a:ext>
             </a:extLst>
           </p:cNvPr>
@@ -10440,7 +11531,7 @@
           <p:cNvPr id="7" name="">
             <a:extLst xmlns:a="http://schemas.openxmlformats.org/drawingml/2006/main">
               <a:ext uri="{FF2B5EF4-FFF2-40B4-BE49-F238E27FC236}">
-                <a16:creationId xmlns:a16="http://schemas.microsoft.com/office/drawing/2014/main" id="{54907199-FC28-43A6-8166-F8004ACEBBA4}"/>
+                <a16:creationId xmlns:a16="http://schemas.microsoft.com/office/drawing/2014/main" id="{46F61664-1419-450A-B306-380BA44C1377}"/>
               </a:ext>
             </a:extLst>
           </p:cNvPr>
@@ -10490,7 +11581,7 @@
           <p:cNvPr id="8" name="">
             <a:extLst xmlns:a="http://schemas.openxmlformats.org/drawingml/2006/main">
               <a:ext uri="{FF2B5EF4-FFF2-40B4-BE49-F238E27FC236}">
-                <a16:creationId xmlns:a16="http://schemas.microsoft.com/office/drawing/2014/main" id="{52200796-AA6F-451D-8AB6-42BE84CC9187}"/>
+                <a16:creationId xmlns:a16="http://schemas.microsoft.com/office/drawing/2014/main" id="{CBF0C7F9-F03F-436E-A188-8C5D0979BD91}"/>
               </a:ext>
             </a:extLst>
           </p:cNvPr>
@@ -10540,7 +11631,7 @@
           <p:cNvPr id="9" name="">
             <a:extLst xmlns:a="http://schemas.openxmlformats.org/drawingml/2006/main">
               <a:ext uri="{FF2B5EF4-FFF2-40B4-BE49-F238E27FC236}">
-                <a16:creationId xmlns:a16="http://schemas.microsoft.com/office/drawing/2014/main" id="{91057391-1A10-4A45-AD09-6148B5C40EE5}"/>
+                <a16:creationId xmlns:a16="http://schemas.microsoft.com/office/drawing/2014/main" id="{AAC7E72D-81E0-4728-B649-4C8D2E99545A}"/>
               </a:ext>
             </a:extLst>
           </p:cNvPr>
@@ -10590,7 +11681,7 @@
           <p:cNvPr id="10" name="">
             <a:extLst xmlns:a="http://schemas.openxmlformats.org/drawingml/2006/main">
               <a:ext uri="{FF2B5EF4-FFF2-40B4-BE49-F238E27FC236}">
-                <a16:creationId xmlns:a16="http://schemas.microsoft.com/office/drawing/2014/main" id="{3B1C1D65-21C4-44F6-8016-6857AB81F2E3}"/>
+                <a16:creationId xmlns:a16="http://schemas.microsoft.com/office/drawing/2014/main" id="{D34862F1-20AA-4F0D-91C8-5CF782A1B39E}"/>
               </a:ext>
             </a:extLst>
           </p:cNvPr>
@@ -10621,7 +11712,7 @@
           <p:cNvPr id="11" name="">
             <a:extLst xmlns:a="http://schemas.openxmlformats.org/drawingml/2006/main">
               <a:ext uri="{FF2B5EF4-FFF2-40B4-BE49-F238E27FC236}">
-                <a16:creationId xmlns:a16="http://schemas.microsoft.com/office/drawing/2014/main" id="{89190255-B4B5-4172-B02D-EE3668C87756}"/>
+                <a16:creationId xmlns:a16="http://schemas.microsoft.com/office/drawing/2014/main" id="{E1652A79-3E98-4A51-A421-749315C1FC05}"/>
               </a:ext>
             </a:extLst>
           </p:cNvPr>
@@ -10671,7 +11762,7 @@
           <p:cNvPr id="12" name="">
             <a:extLst xmlns:a="http://schemas.openxmlformats.org/drawingml/2006/main">
               <a:ext uri="{FF2B5EF4-FFF2-40B4-BE49-F238E27FC236}">
-                <a16:creationId xmlns:a16="http://schemas.microsoft.com/office/drawing/2014/main" id="{EA002E77-ABF7-4032-A87C-378D640AA0D1}"/>
+                <a16:creationId xmlns:a16="http://schemas.microsoft.com/office/drawing/2014/main" id="{BBF66135-EE4C-43C7-AF70-EE3E422395E6}"/>
               </a:ext>
             </a:extLst>
           </p:cNvPr>
@@ -10721,7 +11812,7 @@
           <p:cNvPr id="13" name="">
             <a:extLst xmlns:a="http://schemas.openxmlformats.org/drawingml/2006/main">
               <a:ext uri="{FF2B5EF4-FFF2-40B4-BE49-F238E27FC236}">
-                <a16:creationId xmlns:a16="http://schemas.microsoft.com/office/drawing/2014/main" id="{A7B28B97-44A9-463D-BED1-8350FCF362C7}"/>
+                <a16:creationId xmlns:a16="http://schemas.microsoft.com/office/drawing/2014/main" id="{9836381A-E48D-41C1-A82B-57EBA8B65448}"/>
               </a:ext>
             </a:extLst>
           </p:cNvPr>
@@ -10752,7 +11843,7 @@
           <p:cNvPr id="14" name="">
             <a:extLst xmlns:a="http://schemas.openxmlformats.org/drawingml/2006/main">
               <a:ext uri="{FF2B5EF4-FFF2-40B4-BE49-F238E27FC236}">
-                <a16:creationId xmlns:a16="http://schemas.microsoft.com/office/drawing/2014/main" id="{8E4D822E-A4B0-4255-A524-F78E98FAF365}"/>
+                <a16:creationId xmlns:a16="http://schemas.microsoft.com/office/drawing/2014/main" id="{D83E97FE-AE42-420F-9483-10360DFC23A5}"/>
               </a:ext>
             </a:extLst>
           </p:cNvPr>
@@ -10802,7 +11893,7 @@
           <p:cNvPr id="15" name="">
             <a:extLst xmlns:a="http://schemas.openxmlformats.org/drawingml/2006/main">
               <a:ext uri="{FF2B5EF4-FFF2-40B4-BE49-F238E27FC236}">
-                <a16:creationId xmlns:a16="http://schemas.microsoft.com/office/drawing/2014/main" id="{33F9800E-9CC4-4CD1-B36D-5B1C3000695B}"/>
+                <a16:creationId xmlns:a16="http://schemas.microsoft.com/office/drawing/2014/main" id="{83E3D229-1983-4499-A242-3C9D2FA02BCD}"/>
               </a:ext>
             </a:extLst>
           </p:cNvPr>
@@ -10852,7 +11943,7 @@
           <p:cNvPr id="16" name="">
             <a:extLst xmlns:a="http://schemas.openxmlformats.org/drawingml/2006/main">
               <a:ext uri="{FF2B5EF4-FFF2-40B4-BE49-F238E27FC236}">
-                <a16:creationId xmlns:a16="http://schemas.microsoft.com/office/drawing/2014/main" id="{14D73D23-341A-4001-B09B-37CCA2B18574}"/>
+                <a16:creationId xmlns:a16="http://schemas.microsoft.com/office/drawing/2014/main" id="{5D0FCE83-C2BD-44EC-84E0-8EC88E065C53}"/>
               </a:ext>
             </a:extLst>
           </p:cNvPr>
@@ -10883,7 +11974,7 @@
           <p:cNvPr id="17" name="">
             <a:extLst xmlns:a="http://schemas.openxmlformats.org/drawingml/2006/main">
               <a:ext uri="{FF2B5EF4-FFF2-40B4-BE49-F238E27FC236}">
-                <a16:creationId xmlns:a16="http://schemas.microsoft.com/office/drawing/2014/main" id="{324B53C1-09C7-4E5B-B5E2-C0C4B2B41FC8}"/>
+                <a16:creationId xmlns:a16="http://schemas.microsoft.com/office/drawing/2014/main" id="{49087891-846C-4E16-9CAC-49036FA527B9}"/>
               </a:ext>
             </a:extLst>
           </p:cNvPr>
@@ -10933,7 +12024,7 @@
           <p:cNvPr id="18" name="">
             <a:extLst xmlns:a="http://schemas.openxmlformats.org/drawingml/2006/main">
               <a:ext uri="{FF2B5EF4-FFF2-40B4-BE49-F238E27FC236}">
-                <a16:creationId xmlns:a16="http://schemas.microsoft.com/office/drawing/2014/main" id="{BA041544-1FA0-4049-AA76-FE963A44BD0A}"/>
+                <a16:creationId xmlns:a16="http://schemas.microsoft.com/office/drawing/2014/main" id="{4ACA718A-3A0A-4864-951A-CD7A55652613}"/>
               </a:ext>
             </a:extLst>
           </p:cNvPr>
@@ -10983,7 +12074,7 @@
           <p:cNvPr id="19" name="">
             <a:extLst xmlns:a="http://schemas.openxmlformats.org/drawingml/2006/main">
               <a:ext uri="{FF2B5EF4-FFF2-40B4-BE49-F238E27FC236}">
-                <a16:creationId xmlns:a16="http://schemas.microsoft.com/office/drawing/2014/main" id="{58E7904B-00B2-4F38-B1B9-D17A7285014D}"/>
+                <a16:creationId xmlns:a16="http://schemas.microsoft.com/office/drawing/2014/main" id="{76D9B2EE-03F7-4193-B18B-8234305BC601}"/>
               </a:ext>
             </a:extLst>
           </p:cNvPr>
@@ -11018,7 +12109,7 @@
           <p:cNvPr id="20" name="">
             <a:extLst xmlns:a="http://schemas.openxmlformats.org/drawingml/2006/main">
               <a:ext uri="{FF2B5EF4-FFF2-40B4-BE49-F238E27FC236}">
-                <a16:creationId xmlns:a16="http://schemas.microsoft.com/office/drawing/2014/main" id="{52EB316A-C92B-4246-96EB-ED454014D881}"/>
+                <a16:creationId xmlns:a16="http://schemas.microsoft.com/office/drawing/2014/main" id="{95627895-EB5C-445F-B30B-68FA5593A61F}"/>
               </a:ext>
             </a:extLst>
           </p:cNvPr>
@@ -11068,7 +12159,7 @@
           <p:cNvPr id="21" name="">
             <a:extLst xmlns:a="http://schemas.openxmlformats.org/drawingml/2006/main">
               <a:ext uri="{FF2B5EF4-FFF2-40B4-BE49-F238E27FC236}">
-                <a16:creationId xmlns:a16="http://schemas.microsoft.com/office/drawing/2014/main" id="{E5809F09-E85B-4049-99B3-1E2EB2039D34}"/>
+                <a16:creationId xmlns:a16="http://schemas.microsoft.com/office/drawing/2014/main" id="{B22147F0-2983-4667-9DD5-6FE8342EAE1D}"/>
               </a:ext>
             </a:extLst>
           </p:cNvPr>
@@ -11122,7 +12213,7 @@
           <p:nvPr/>
         </p:nvPicPr>
         <p:blipFill>
-          <a:blip xmlns:r="http://schemas.openxmlformats.org/officeDocument/2006/relationships" xmlns:a="http://schemas.openxmlformats.org/drawingml/2006/main" r:embed="R56473b8fbf4f457e"/>
+          <a:blip xmlns:r="http://schemas.openxmlformats.org/officeDocument/2006/relationships" xmlns:a="http://schemas.openxmlformats.org/drawingml/2006/main" r:embed="Rf343900945964f2b"/>
           <a:stretch xmlns:a="http://schemas.openxmlformats.org/drawingml/2006/main"/>
         </p:blipFill>
         <p:spPr>
@@ -11140,7 +12231,7 @@
           <p:cNvPr id="23" name="">
             <a:extLst xmlns:a="http://schemas.openxmlformats.org/drawingml/2006/main">
               <a:ext uri="{FF2B5EF4-FFF2-40B4-BE49-F238E27FC236}">
-                <a16:creationId xmlns:a16="http://schemas.microsoft.com/office/drawing/2014/main" id="{75135BAA-7C21-4041-8F97-43EE149FBED8}"/>
+                <a16:creationId xmlns:a16="http://schemas.microsoft.com/office/drawing/2014/main" id="{0D15ECC2-277F-4AE5-B892-A034B85C68C3}"/>
               </a:ext>
             </a:extLst>
           </p:cNvPr>
@@ -11190,7 +12281,7 @@
           <p:cNvPr id="24" name="">
             <a:extLst xmlns:a="http://schemas.openxmlformats.org/drawingml/2006/main">
               <a:ext uri="{FF2B5EF4-FFF2-40B4-BE49-F238E27FC236}">
-                <a16:creationId xmlns:a16="http://schemas.microsoft.com/office/drawing/2014/main" id="{1DB84DB4-A4A6-4CF3-B984-DA388D794948}"/>
+                <a16:creationId xmlns:a16="http://schemas.microsoft.com/office/drawing/2014/main" id="{619C8D82-2E8E-439F-818F-5FC60236E600}"/>
               </a:ext>
             </a:extLst>
           </p:cNvPr>
@@ -11240,7 +12331,7 @@
           <p:cNvPr id="25" name="">
             <a:extLst xmlns:a="http://schemas.openxmlformats.org/drawingml/2006/main">
               <a:ext uri="{FF2B5EF4-FFF2-40B4-BE49-F238E27FC236}">
-                <a16:creationId xmlns:a16="http://schemas.microsoft.com/office/drawing/2014/main" id="{884B5F15-AC7E-4451-A3F9-8681AF6CBDB4}"/>
+                <a16:creationId xmlns:a16="http://schemas.microsoft.com/office/drawing/2014/main" id="{07CC436E-EB6D-40F9-8F6D-C4F1756CCAA3}"/>
               </a:ext>
             </a:extLst>
           </p:cNvPr>
@@ -11288,7 +12379,7 @@
     </p:spTree>
     <p:extLst>
       <p:ext uri="{BB962C8B-B14F-4D97-AF65-F5344CB8AC3E}">
-        <p14:creationId xmlns:p14="http://schemas.microsoft.com/office/powerpoint/2010/main" val="1827306057"/>
+        <p14:creationId xmlns:p14="http://schemas.microsoft.com/office/powerpoint/2010/main" val="648480501"/>
       </p:ext>
     </p:extLst>
   </p:cSld>

--- a/static/audit_presentation_btg.pptx
+++ b/static/audit_presentation_btg.pptx
@@ -2,21 +2,21 @@
 <file path=ppt/presentation.xml><?xml version="1.0" encoding="utf-8"?>
 <p:presentation xmlns:p="http://schemas.openxmlformats.org/presentationml/2006/main">
   <p:sldMasterIdLst>
-    <p:sldMasterId xmlns:r="http://schemas.openxmlformats.org/officeDocument/2006/relationships" id="2147483648" r:id="Rbb13f0e079ec46d6"/>
+    <p:sldMasterId xmlns:r="http://schemas.openxmlformats.org/officeDocument/2006/relationships" id="2147483648" r:id="Ra677fb96f4d84eec"/>
   </p:sldMasterIdLst>
   <p:notesMasterIdLst>
-    <p:notesMasterId xmlns:r="http://schemas.openxmlformats.org/officeDocument/2006/relationships" r:id="R414c5b04370a48d0"/>
+    <p:notesMasterId xmlns:r="http://schemas.openxmlformats.org/officeDocument/2006/relationships" r:id="Rff7124723e2f4799"/>
   </p:notesMasterIdLst>
   <p:sldIdLst>
-    <p:sldId xmlns:r="http://schemas.openxmlformats.org/officeDocument/2006/relationships" id="256" r:id="R05dcc123d95b45a4"/>
-    <p:sldId xmlns:r="http://schemas.openxmlformats.org/officeDocument/2006/relationships" id="257" r:id="R3b1f9e15dafb4c7d"/>
-    <p:sldId xmlns:r="http://schemas.openxmlformats.org/officeDocument/2006/relationships" id="258" r:id="R764a525c8d884473"/>
-    <p:sldId xmlns:r="http://schemas.openxmlformats.org/officeDocument/2006/relationships" id="259" r:id="Rbe03c4a83a62435b"/>
-    <p:sldId xmlns:r="http://schemas.openxmlformats.org/officeDocument/2006/relationships" id="260" r:id="Rb9a2449e5709425d"/>
-    <p:sldId xmlns:r="http://schemas.openxmlformats.org/officeDocument/2006/relationships" id="261" r:id="R5a913a7bc4aa45bb"/>
-    <p:sldId xmlns:r="http://schemas.openxmlformats.org/officeDocument/2006/relationships" id="262" r:id="Rb61447adc3404b42"/>
-    <p:sldId xmlns:r="http://schemas.openxmlformats.org/officeDocument/2006/relationships" id="263" r:id="Rf1271a99de7b407f"/>
-    <p:sldId xmlns:r="http://schemas.openxmlformats.org/officeDocument/2006/relationships" id="264" r:id="R9ae511bcaeed408d"/>
+    <p:sldId xmlns:r="http://schemas.openxmlformats.org/officeDocument/2006/relationships" id="256" r:id="R68bd021c9c074a0a"/>
+    <p:sldId xmlns:r="http://schemas.openxmlformats.org/officeDocument/2006/relationships" id="257" r:id="R77ae97ec054c4097"/>
+    <p:sldId xmlns:r="http://schemas.openxmlformats.org/officeDocument/2006/relationships" id="258" r:id="Rd4f0fcab170f4a78"/>
+    <p:sldId xmlns:r="http://schemas.openxmlformats.org/officeDocument/2006/relationships" id="259" r:id="Rdc939f6f97174e8c"/>
+    <p:sldId xmlns:r="http://schemas.openxmlformats.org/officeDocument/2006/relationships" id="260" r:id="Rd5be1132e9144d8c"/>
+    <p:sldId xmlns:r="http://schemas.openxmlformats.org/officeDocument/2006/relationships" id="261" r:id="R821dcab061a44fb4"/>
+    <p:sldId xmlns:r="http://schemas.openxmlformats.org/officeDocument/2006/relationships" id="262" r:id="Re8df43ba1b4e4a8f"/>
+    <p:sldId xmlns:r="http://schemas.openxmlformats.org/officeDocument/2006/relationships" id="263" r:id="R91f4723ae5f548ff"/>
+    <p:sldId xmlns:r="http://schemas.openxmlformats.org/officeDocument/2006/relationships" id="264" r:id="R1ef48469a1134a7d"/>
   </p:sldIdLst>
   <p:sldSz cx="12192000" cy="6858000"/>
   <p:notesSz cx="6858000" cy="9144000"/>
@@ -1137,7 +1137,7 @@
   </p:cSld>
   <p:clrMap bg1="lt1" tx1="dk1" bg2="lt2" tx2="dk2" accent1="accent1" accent2="accent2" accent3="accent3" accent4="accent4" accent5="accent5" accent6="accent6" hlink="hlink" folHlink="folHlink"/>
   <p:sldLayoutIdLst>
-    <p:sldLayoutId xmlns:r="http://schemas.openxmlformats.org/officeDocument/2006/relationships" id="2147483649" r:id="R1cad63d4e3bf4176"/>
+    <p:sldLayoutId xmlns:r="http://schemas.openxmlformats.org/officeDocument/2006/relationships" id="2147483649" r:id="R805ff24632c94b2b"/>
   </p:sldLayoutIdLst>
   <p:txStyles>
     <p:titleStyle>
@@ -1688,7 +1688,7 @@
           <p:cNvPr id="1" name="">
             <a:extLst xmlns:a="http://schemas.openxmlformats.org/drawingml/2006/main">
               <a:ext uri="{FF2B5EF4-FFF2-40B4-BE49-F238E27FC236}">
-                <a16:creationId xmlns:a16="http://schemas.microsoft.com/office/drawing/2014/main" id="{A10F74A0-9DA7-4B99-A638-8877BE3D0D77}"/>
+                <a16:creationId xmlns:a16="http://schemas.microsoft.com/office/drawing/2014/main" id="{DD7E633E-FECD-493A-B990-79DA7BC2EA3F}"/>
               </a:ext>
             </a:extLst>
           </p:cNvPr>
@@ -1719,7 +1719,7 @@
           <p:cNvPr id="2" name="">
             <a:extLst xmlns:a="http://schemas.openxmlformats.org/drawingml/2006/main">
               <a:ext uri="{FF2B5EF4-FFF2-40B4-BE49-F238E27FC236}">
-                <a16:creationId xmlns:a16="http://schemas.microsoft.com/office/drawing/2014/main" id="{68E05753-7947-4ABE-B9B8-29E9BE270630}"/>
+                <a16:creationId xmlns:a16="http://schemas.microsoft.com/office/drawing/2014/main" id="{E82E1AD0-57C4-42F2-8AAB-C276BD01D1F0}"/>
               </a:ext>
             </a:extLst>
           </p:cNvPr>
@@ -1754,7 +1754,7 @@
           <p:nvPr/>
         </p:nvPicPr>
         <p:blipFill>
-          <a:blip xmlns:r="http://schemas.openxmlformats.org/officeDocument/2006/relationships" xmlns:a="http://schemas.openxmlformats.org/drawingml/2006/main" r:embed="R9de237d03c8242ff"/>
+          <a:blip xmlns:r="http://schemas.openxmlformats.org/officeDocument/2006/relationships" xmlns:a="http://schemas.openxmlformats.org/drawingml/2006/main" r:embed="R5cf247ef377545ca"/>
           <a:stretch xmlns:a="http://schemas.openxmlformats.org/drawingml/2006/main"/>
         </p:blipFill>
         <p:spPr>
@@ -1772,7 +1772,7 @@
           <p:cNvPr id="4" name="">
             <a:extLst xmlns:a="http://schemas.openxmlformats.org/drawingml/2006/main">
               <a:ext uri="{FF2B5EF4-FFF2-40B4-BE49-F238E27FC236}">
-                <a16:creationId xmlns:a16="http://schemas.microsoft.com/office/drawing/2014/main" id="{5B6B2E43-F886-4E96-84C1-810836B6E320}"/>
+                <a16:creationId xmlns:a16="http://schemas.microsoft.com/office/drawing/2014/main" id="{957798CA-A8E0-405E-A7C0-9A902A28409C}"/>
               </a:ext>
             </a:extLst>
           </p:cNvPr>
@@ -1822,7 +1822,7 @@
           <p:cNvPr id="5" name="">
             <a:extLst xmlns:a="http://schemas.openxmlformats.org/drawingml/2006/main">
               <a:ext uri="{FF2B5EF4-FFF2-40B4-BE49-F238E27FC236}">
-                <a16:creationId xmlns:a16="http://schemas.microsoft.com/office/drawing/2014/main" id="{8BCC874B-E787-4FEF-B79D-E2FDB53696AB}"/>
+                <a16:creationId xmlns:a16="http://schemas.microsoft.com/office/drawing/2014/main" id="{377EC194-7FEA-4969-B5AA-82CCEF5758E1}"/>
               </a:ext>
             </a:extLst>
           </p:cNvPr>
@@ -1872,7 +1872,7 @@
           <p:cNvPr id="6" name="">
             <a:extLst xmlns:a="http://schemas.openxmlformats.org/drawingml/2006/main">
               <a:ext uri="{FF2B5EF4-FFF2-40B4-BE49-F238E27FC236}">
-                <a16:creationId xmlns:a16="http://schemas.microsoft.com/office/drawing/2014/main" id="{37033E20-10EF-485F-BC04-AFAFBE93957A}"/>
+                <a16:creationId xmlns:a16="http://schemas.microsoft.com/office/drawing/2014/main" id="{3A7BDD4E-FE07-4611-A647-5D5D59342444}"/>
               </a:ext>
             </a:extLst>
           </p:cNvPr>
@@ -1922,7 +1922,7 @@
           <p:cNvPr id="7" name="">
             <a:extLst xmlns:a="http://schemas.openxmlformats.org/drawingml/2006/main">
               <a:ext uri="{FF2B5EF4-FFF2-40B4-BE49-F238E27FC236}">
-                <a16:creationId xmlns:a16="http://schemas.microsoft.com/office/drawing/2014/main" id="{35AB0862-6388-4236-953D-FBA94117BD2E}"/>
+                <a16:creationId xmlns:a16="http://schemas.microsoft.com/office/drawing/2014/main" id="{ACEFD9AB-F08A-4506-9D20-8BECB95795D7}"/>
               </a:ext>
             </a:extLst>
           </p:cNvPr>
@@ -1955,7 +1955,7 @@
           <p:cNvPr id="8" name="">
             <a:extLst xmlns:a="http://schemas.openxmlformats.org/drawingml/2006/main">
               <a:ext uri="{FF2B5EF4-FFF2-40B4-BE49-F238E27FC236}">
-                <a16:creationId xmlns:a16="http://schemas.microsoft.com/office/drawing/2014/main" id="{F5D84BFB-795F-465E-AC15-F86B5A7816AD}"/>
+                <a16:creationId xmlns:a16="http://schemas.microsoft.com/office/drawing/2014/main" id="{9E6706B3-29B0-4FF1-AADA-005FD954B802}"/>
               </a:ext>
             </a:extLst>
           </p:cNvPr>
@@ -2005,7 +2005,7 @@
           <p:cNvPr id="9" name="">
             <a:extLst xmlns:a="http://schemas.openxmlformats.org/drawingml/2006/main">
               <a:ext uri="{FF2B5EF4-FFF2-40B4-BE49-F238E27FC236}">
-                <a16:creationId xmlns:a16="http://schemas.microsoft.com/office/drawing/2014/main" id="{4B9757C3-262D-4649-A496-50BED84830BA}"/>
+                <a16:creationId xmlns:a16="http://schemas.microsoft.com/office/drawing/2014/main" id="{98B749E6-A2FB-4C38-898E-A11D418904F8}"/>
               </a:ext>
             </a:extLst>
           </p:cNvPr>
@@ -2055,7 +2055,7 @@
           <p:cNvPr id="10" name="">
             <a:extLst xmlns:a="http://schemas.openxmlformats.org/drawingml/2006/main">
               <a:ext uri="{FF2B5EF4-FFF2-40B4-BE49-F238E27FC236}">
-                <a16:creationId xmlns:a16="http://schemas.microsoft.com/office/drawing/2014/main" id="{E31F48D4-0ED5-4F13-8CC7-F1DFA64F20B0}"/>
+                <a16:creationId xmlns:a16="http://schemas.microsoft.com/office/drawing/2014/main" id="{9B4E3B77-806F-437F-8D29-DFED77D77CEE}"/>
               </a:ext>
             </a:extLst>
           </p:cNvPr>
@@ -2088,7 +2088,7 @@
           <p:cNvPr id="11" name="">
             <a:extLst xmlns:a="http://schemas.openxmlformats.org/drawingml/2006/main">
               <a:ext uri="{FF2B5EF4-FFF2-40B4-BE49-F238E27FC236}">
-                <a16:creationId xmlns:a16="http://schemas.microsoft.com/office/drawing/2014/main" id="{4D87645B-1807-4371-AEFD-C9B0DCC23005}"/>
+                <a16:creationId xmlns:a16="http://schemas.microsoft.com/office/drawing/2014/main" id="{B04D1C58-8F37-43AF-AB60-1262F13FF218}"/>
               </a:ext>
             </a:extLst>
           </p:cNvPr>
@@ -2138,7 +2138,7 @@
           <p:cNvPr id="12" name="">
             <a:extLst xmlns:a="http://schemas.openxmlformats.org/drawingml/2006/main">
               <a:ext uri="{FF2B5EF4-FFF2-40B4-BE49-F238E27FC236}">
-                <a16:creationId xmlns:a16="http://schemas.microsoft.com/office/drawing/2014/main" id="{D0C518A6-DC88-4CA9-A9FB-7FDC257828B1}"/>
+                <a16:creationId xmlns:a16="http://schemas.microsoft.com/office/drawing/2014/main" id="{20E15085-2508-41A5-ABE5-53CB18F82453}"/>
               </a:ext>
             </a:extLst>
           </p:cNvPr>
@@ -2188,7 +2188,7 @@
           <p:cNvPr id="13" name="">
             <a:extLst xmlns:a="http://schemas.openxmlformats.org/drawingml/2006/main">
               <a:ext uri="{FF2B5EF4-FFF2-40B4-BE49-F238E27FC236}">
-                <a16:creationId xmlns:a16="http://schemas.microsoft.com/office/drawing/2014/main" id="{6C06B3BA-2A23-49EF-946B-4E1F90561F01}"/>
+                <a16:creationId xmlns:a16="http://schemas.microsoft.com/office/drawing/2014/main" id="{150932CA-0997-4A34-90E8-941DB4A10FD7}"/>
               </a:ext>
             </a:extLst>
           </p:cNvPr>
@@ -2242,7 +2242,7 @@
           <p:nvPr/>
         </p:nvPicPr>
         <p:blipFill>
-          <a:blip xmlns:r="http://schemas.openxmlformats.org/officeDocument/2006/relationships" xmlns:a="http://schemas.openxmlformats.org/drawingml/2006/main" r:embed="R23e124e26dca4476"/>
+          <a:blip xmlns:r="http://schemas.openxmlformats.org/officeDocument/2006/relationships" xmlns:a="http://schemas.openxmlformats.org/drawingml/2006/main" r:embed="R302f0661e77c4e12"/>
           <a:srcRect xmlns:a="http://schemas.openxmlformats.org/drawingml/2006/main" l="0" t="132" r="0" b="132"/>
           <a:stretch xmlns:a="http://schemas.openxmlformats.org/drawingml/2006/main">
             <a:fillRect l="0" t="0" r="0" b="0"/>
@@ -2263,7 +2263,7 @@
           <p:cNvPr id="15" name="">
             <a:extLst xmlns:a="http://schemas.openxmlformats.org/drawingml/2006/main">
               <a:ext uri="{FF2B5EF4-FFF2-40B4-BE49-F238E27FC236}">
-                <a16:creationId xmlns:a16="http://schemas.microsoft.com/office/drawing/2014/main" id="{B7AA9F3D-7607-47DB-91F8-E1BE5EC5C02C}"/>
+                <a16:creationId xmlns:a16="http://schemas.microsoft.com/office/drawing/2014/main" id="{E73F608D-44B3-44BB-B535-C4D35F444C96}"/>
               </a:ext>
             </a:extLst>
           </p:cNvPr>
@@ -2294,7 +2294,7 @@
           <p:cNvPr id="16" name="">
             <a:extLst xmlns:a="http://schemas.openxmlformats.org/drawingml/2006/main">
               <a:ext uri="{FF2B5EF4-FFF2-40B4-BE49-F238E27FC236}">
-                <a16:creationId xmlns:a16="http://schemas.microsoft.com/office/drawing/2014/main" id="{DB4FB524-D12C-46B9-9282-EE3DC3C25AF2}"/>
+                <a16:creationId xmlns:a16="http://schemas.microsoft.com/office/drawing/2014/main" id="{6816E206-6981-4C96-9EE7-B9FB8612DD46}"/>
               </a:ext>
             </a:extLst>
           </p:cNvPr>
@@ -2342,7 +2342,7 @@
     </p:spTree>
     <p:extLst>
       <p:ext uri="{BB962C8B-B14F-4D97-AF65-F5344CB8AC3E}">
-        <p14:creationId xmlns:p14="http://schemas.microsoft.com/office/powerpoint/2010/main" val="2082446498"/>
+        <p14:creationId xmlns:p14="http://schemas.microsoft.com/office/powerpoint/2010/main" val="719718069"/>
       </p:ext>
     </p:extLst>
   </p:cSld>
@@ -2373,7 +2373,7 @@
           <p:cNvPr id="1" name="">
             <a:extLst xmlns:a="http://schemas.openxmlformats.org/drawingml/2006/main">
               <a:ext uri="{FF2B5EF4-FFF2-40B4-BE49-F238E27FC236}">
-                <a16:creationId xmlns:a16="http://schemas.microsoft.com/office/drawing/2014/main" id="{EE550082-C059-4AEB-A683-76BA0316619F}"/>
+                <a16:creationId xmlns:a16="http://schemas.microsoft.com/office/drawing/2014/main" id="{D8DE08D0-525C-420E-8871-CB41416C88BF}"/>
               </a:ext>
             </a:extLst>
           </p:cNvPr>
@@ -2408,7 +2408,7 @@
           <p:nvPr/>
         </p:nvPicPr>
         <p:blipFill>
-          <a:blip xmlns:r="http://schemas.openxmlformats.org/officeDocument/2006/relationships" xmlns:a="http://schemas.openxmlformats.org/drawingml/2006/main" r:embed="R7a46749a712144fc"/>
+          <a:blip xmlns:r="http://schemas.openxmlformats.org/officeDocument/2006/relationships" xmlns:a="http://schemas.openxmlformats.org/drawingml/2006/main" r:embed="R3b7f639393fc425a"/>
           <a:stretch xmlns:a="http://schemas.openxmlformats.org/drawingml/2006/main"/>
         </p:blipFill>
         <p:spPr>
@@ -2426,7 +2426,7 @@
           <p:cNvPr id="3" name="">
             <a:extLst xmlns:a="http://schemas.openxmlformats.org/drawingml/2006/main">
               <a:ext uri="{FF2B5EF4-FFF2-40B4-BE49-F238E27FC236}">
-                <a16:creationId xmlns:a16="http://schemas.microsoft.com/office/drawing/2014/main" id="{FC8E8C1F-FF19-487A-947E-C731D4E0359F}"/>
+                <a16:creationId xmlns:a16="http://schemas.microsoft.com/office/drawing/2014/main" id="{A8DA76FE-02D7-4819-960C-E6CFCBEA16C1}"/>
               </a:ext>
             </a:extLst>
           </p:cNvPr>
@@ -2476,7 +2476,7 @@
           <p:cNvPr id="4" name="">
             <a:extLst xmlns:a="http://schemas.openxmlformats.org/drawingml/2006/main">
               <a:ext uri="{FF2B5EF4-FFF2-40B4-BE49-F238E27FC236}">
-                <a16:creationId xmlns:a16="http://schemas.microsoft.com/office/drawing/2014/main" id="{06AC1A2B-9C2B-4566-B78E-CCA387FD80A2}"/>
+                <a16:creationId xmlns:a16="http://schemas.microsoft.com/office/drawing/2014/main" id="{C03682D9-3ECE-4B35-9983-822B317DF4B2}"/>
               </a:ext>
             </a:extLst>
           </p:cNvPr>
@@ -2509,7 +2509,7 @@
           <p:cNvPr id="5" name="">
             <a:extLst xmlns:a="http://schemas.openxmlformats.org/drawingml/2006/main">
               <a:ext uri="{FF2B5EF4-FFF2-40B4-BE49-F238E27FC236}">
-                <a16:creationId xmlns:a16="http://schemas.microsoft.com/office/drawing/2014/main" id="{5686DDC2-2A23-4218-B4F0-D284A471E116}"/>
+                <a16:creationId xmlns:a16="http://schemas.microsoft.com/office/drawing/2014/main" id="{FDB9F145-7D64-4458-B57D-5670F10239CA}"/>
               </a:ext>
             </a:extLst>
           </p:cNvPr>
@@ -2540,7 +2540,7 @@
           <p:cNvPr id="6" name="">
             <a:extLst xmlns:a="http://schemas.openxmlformats.org/drawingml/2006/main">
               <a:ext uri="{FF2B5EF4-FFF2-40B4-BE49-F238E27FC236}">
-                <a16:creationId xmlns:a16="http://schemas.microsoft.com/office/drawing/2014/main" id="{19F4FD0B-9081-4A58-A3A6-AA04C438CE9C}"/>
+                <a16:creationId xmlns:a16="http://schemas.microsoft.com/office/drawing/2014/main" id="{BA65396C-357D-4FC0-ADF7-6AADEEF14320}"/>
               </a:ext>
             </a:extLst>
           </p:cNvPr>
@@ -2590,7 +2590,7 @@
           <p:cNvPr id="7" name="">
             <a:extLst xmlns:a="http://schemas.openxmlformats.org/drawingml/2006/main">
               <a:ext uri="{FF2B5EF4-FFF2-40B4-BE49-F238E27FC236}">
-                <a16:creationId xmlns:a16="http://schemas.microsoft.com/office/drawing/2014/main" id="{F6F20A37-DCFD-4651-B718-CE4892BC6ECE}"/>
+                <a16:creationId xmlns:a16="http://schemas.microsoft.com/office/drawing/2014/main" id="{A87FC36A-D01D-48D9-9089-66ECBA4550F0}"/>
               </a:ext>
             </a:extLst>
           </p:cNvPr>
@@ -2640,7 +2640,7 @@
           <p:cNvPr id="8" name="">
             <a:extLst xmlns:a="http://schemas.openxmlformats.org/drawingml/2006/main">
               <a:ext uri="{FF2B5EF4-FFF2-40B4-BE49-F238E27FC236}">
-                <a16:creationId xmlns:a16="http://schemas.microsoft.com/office/drawing/2014/main" id="{9E9C87C8-ACFB-42F2-9E5B-162BCFBE0082}"/>
+                <a16:creationId xmlns:a16="http://schemas.microsoft.com/office/drawing/2014/main" id="{5EFB76D6-1808-4E29-915E-9FE35AC42AE5}"/>
               </a:ext>
             </a:extLst>
           </p:cNvPr>
@@ -2690,7 +2690,7 @@
           <p:cNvPr id="9" name="">
             <a:extLst xmlns:a="http://schemas.openxmlformats.org/drawingml/2006/main">
               <a:ext uri="{FF2B5EF4-FFF2-40B4-BE49-F238E27FC236}">
-                <a16:creationId xmlns:a16="http://schemas.microsoft.com/office/drawing/2014/main" id="{A63B2B4B-F4EB-434F-A5D6-36B388AB62A3}"/>
+                <a16:creationId xmlns:a16="http://schemas.microsoft.com/office/drawing/2014/main" id="{B16EDA58-3A30-4AC1-95DC-E5BF6459F31F}"/>
               </a:ext>
             </a:extLst>
           </p:cNvPr>
@@ -2740,7 +2740,7 @@
           <p:cNvPr id="10" name="">
             <a:extLst xmlns:a="http://schemas.openxmlformats.org/drawingml/2006/main">
               <a:ext uri="{FF2B5EF4-FFF2-40B4-BE49-F238E27FC236}">
-                <a16:creationId xmlns:a16="http://schemas.microsoft.com/office/drawing/2014/main" id="{60C91E4A-E197-418B-BEFC-69936BE5010A}"/>
+                <a16:creationId xmlns:a16="http://schemas.microsoft.com/office/drawing/2014/main" id="{F9EB31A5-6B3B-4C2B-9E84-69A44BC8D658}"/>
               </a:ext>
             </a:extLst>
           </p:cNvPr>
@@ -2790,7 +2790,7 @@
           <p:cNvPr id="11" name="">
             <a:extLst xmlns:a="http://schemas.openxmlformats.org/drawingml/2006/main">
               <a:ext uri="{FF2B5EF4-FFF2-40B4-BE49-F238E27FC236}">
-                <a16:creationId xmlns:a16="http://schemas.microsoft.com/office/drawing/2014/main" id="{500CEFBA-8AB5-4A32-8024-819EE5EB896C}"/>
+                <a16:creationId xmlns:a16="http://schemas.microsoft.com/office/drawing/2014/main" id="{679BD25A-6720-42A8-88B8-AEF18621F65A}"/>
               </a:ext>
             </a:extLst>
           </p:cNvPr>
@@ -2820,14 +2820,14 @@
             <a:pPr>
               <a:defRPr sz="2325" b="1">
                 <a:solidFill>
-                  <a:srgbClr val="2048A8"/>
+                  <a:srgbClr val="102A63"/>
                 </a:solidFill>
               </a:defRPr>
             </a:pPr>
             <a:r>
               <a:rPr sz="2325" b="1">
                 <a:solidFill>
-                  <a:srgbClr val="2048A8"/>
+                  <a:srgbClr val="102A63"/>
                 </a:solidFill>
               </a:rPr>
               <a:t>2019</a:t>
@@ -2840,7 +2840,7 @@
           <p:cNvPr id="12" name="">
             <a:extLst xmlns:a="http://schemas.openxmlformats.org/drawingml/2006/main">
               <a:ext uri="{FF2B5EF4-FFF2-40B4-BE49-F238E27FC236}">
-                <a16:creationId xmlns:a16="http://schemas.microsoft.com/office/drawing/2014/main" id="{8C124A9F-EFD5-43E3-871B-FD343345FF82}"/>
+                <a16:creationId xmlns:a16="http://schemas.microsoft.com/office/drawing/2014/main" id="{D0FA38F2-ED4D-4586-BC9C-69484CDB7C3D}"/>
               </a:ext>
             </a:extLst>
           </p:cNvPr>
@@ -2852,7 +2852,7 @@
         <p:spPr>
           <a:xfrm xmlns:a="http://schemas.openxmlformats.org/drawingml/2006/main">
             <a:off x="552450" y="4581525"/>
-            <a:ext cx="1409700" cy="457200"/>
+            <a:ext cx="1409700" cy="590550"/>
           </a:xfrm>
           <a:prstGeom xmlns:a="http://schemas.openxmlformats.org/drawingml/2006/main" prst="rect">
             <a:avLst/>
@@ -2890,7 +2890,7 @@
           <p:cNvPr id="13" name="">
             <a:extLst xmlns:a="http://schemas.openxmlformats.org/drawingml/2006/main">
               <a:ext uri="{FF2B5EF4-FFF2-40B4-BE49-F238E27FC236}">
-                <a16:creationId xmlns:a16="http://schemas.microsoft.com/office/drawing/2014/main" id="{FF463A62-1B46-42B2-AF2F-710027638D01}"/>
+                <a16:creationId xmlns:a16="http://schemas.microsoft.com/office/drawing/2014/main" id="{C289E1AE-9132-4131-AD0C-81DF3D1E161A}"/>
               </a:ext>
             </a:extLst>
           </p:cNvPr>
@@ -2918,16 +2918,16 @@
           <a:lstStyle xmlns:a="http://schemas.openxmlformats.org/drawingml/2006/main"/>
           <a:p xmlns:a="http://schemas.openxmlformats.org/drawingml/2006/main">
             <a:pPr>
-              <a:defRPr sz="2325" b="1">
-                <a:solidFill>
-                  <a:srgbClr val="102A63"/>
-                </a:solidFill>
-              </a:defRPr>
-            </a:pPr>
-            <a:r>
-              <a:rPr sz="2325" b="1">
-                <a:solidFill>
-                  <a:srgbClr val="102A63"/>
+              <a:defRPr sz="2700" b="1">
+                <a:solidFill>
+                  <a:srgbClr val="2048A8"/>
+                </a:solidFill>
+              </a:defRPr>
+            </a:pPr>
+            <a:r>
+              <a:rPr sz="2700" b="1">
+                <a:solidFill>
+                  <a:srgbClr val="2048A8"/>
                 </a:solidFill>
               </a:rPr>
               <a:t>70+</a:t>
@@ -2940,7 +2940,7 @@
           <p:cNvPr id="14" name="">
             <a:extLst xmlns:a="http://schemas.openxmlformats.org/drawingml/2006/main">
               <a:ext uri="{FF2B5EF4-FFF2-40B4-BE49-F238E27FC236}">
-                <a16:creationId xmlns:a16="http://schemas.microsoft.com/office/drawing/2014/main" id="{6977FDE8-0C5E-47DD-83C5-5758A735B7AA}"/>
+                <a16:creationId xmlns:a16="http://schemas.microsoft.com/office/drawing/2014/main" id="{AB49A8BC-23A3-48FF-B228-B780C3ECB3EF}"/>
               </a:ext>
             </a:extLst>
           </p:cNvPr>
@@ -2952,7 +2952,7 @@
         <p:spPr>
           <a:xfrm xmlns:a="http://schemas.openxmlformats.org/drawingml/2006/main">
             <a:off x="2247900" y="4581525"/>
-            <a:ext cx="1409700" cy="457200"/>
+            <a:ext cx="1409700" cy="590550"/>
           </a:xfrm>
           <a:prstGeom xmlns:a="http://schemas.openxmlformats.org/drawingml/2006/main" prst="rect">
             <a:avLst/>
@@ -2980,7 +2980,7 @@
                   <a:srgbClr val="596780"/>
                 </a:solidFill>
               </a:rPr>
-              <a:t>реализованных проектов</a:t>
+              <a:t>крупных ИТ-проектов</a:t>
             </a:r>
           </a:p>
         </p:txBody>
@@ -2990,7 +2990,7 @@
           <p:cNvPr id="15" name="">
             <a:extLst xmlns:a="http://schemas.openxmlformats.org/drawingml/2006/main">
               <a:ext uri="{FF2B5EF4-FFF2-40B4-BE49-F238E27FC236}">
-                <a16:creationId xmlns:a16="http://schemas.microsoft.com/office/drawing/2014/main" id="{6C9D2FB5-A07F-4DEE-8355-24959A88E1B5}"/>
+                <a16:creationId xmlns:a16="http://schemas.microsoft.com/office/drawing/2014/main" id="{5D6ADA22-4DCA-4798-96A3-2AE5494767CD}"/>
               </a:ext>
             </a:extLst>
           </p:cNvPr>
@@ -3040,7 +3040,7 @@
           <p:cNvPr id="16" name="">
             <a:extLst xmlns:a="http://schemas.openxmlformats.org/drawingml/2006/main">
               <a:ext uri="{FF2B5EF4-FFF2-40B4-BE49-F238E27FC236}">
-                <a16:creationId xmlns:a16="http://schemas.microsoft.com/office/drawing/2014/main" id="{56EC5F72-BB2C-4442-9CA3-C2FB735D29A1}"/>
+                <a16:creationId xmlns:a16="http://schemas.microsoft.com/office/drawing/2014/main" id="{7C2BFAE1-3138-4826-9BE2-00214F94AF1A}"/>
               </a:ext>
             </a:extLst>
           </p:cNvPr>
@@ -3052,7 +3052,7 @@
         <p:spPr>
           <a:xfrm xmlns:a="http://schemas.openxmlformats.org/drawingml/2006/main">
             <a:off x="3943350" y="4581525"/>
-            <a:ext cx="1409700" cy="457200"/>
+            <a:ext cx="1409700" cy="590550"/>
           </a:xfrm>
           <a:prstGeom xmlns:a="http://schemas.openxmlformats.org/drawingml/2006/main" prst="rect">
             <a:avLst/>
@@ -3090,7 +3090,7 @@
           <p:cNvPr id="17" name="">
             <a:extLst xmlns:a="http://schemas.openxmlformats.org/drawingml/2006/main">
               <a:ext uri="{FF2B5EF4-FFF2-40B4-BE49-F238E27FC236}">
-                <a16:creationId xmlns:a16="http://schemas.microsoft.com/office/drawing/2014/main" id="{24546426-ECD2-4029-8CF8-03583F1392AB}"/>
+                <a16:creationId xmlns:a16="http://schemas.microsoft.com/office/drawing/2014/main" id="{7DE1ED08-30D1-4C19-B353-33EA015F7F1B}"/>
               </a:ext>
             </a:extLst>
           </p:cNvPr>
@@ -3125,7 +3125,7 @@
           <p:cNvPr id="18" name="">
             <a:extLst xmlns:a="http://schemas.openxmlformats.org/drawingml/2006/main">
               <a:ext uri="{FF2B5EF4-FFF2-40B4-BE49-F238E27FC236}">
-                <a16:creationId xmlns:a16="http://schemas.microsoft.com/office/drawing/2014/main" id="{2B1BD577-D9EE-43BE-93E6-52691A5E3D03}"/>
+                <a16:creationId xmlns:a16="http://schemas.microsoft.com/office/drawing/2014/main" id="{28F68918-5884-4A7C-B5D2-69DAFCC9F56C}"/>
               </a:ext>
             </a:extLst>
           </p:cNvPr>
@@ -3175,7 +3175,7 @@
           <p:cNvPr id="19" name="">
             <a:extLst xmlns:a="http://schemas.openxmlformats.org/drawingml/2006/main">
               <a:ext uri="{FF2B5EF4-FFF2-40B4-BE49-F238E27FC236}">
-                <a16:creationId xmlns:a16="http://schemas.microsoft.com/office/drawing/2014/main" id="{F959B3D6-009A-4593-938A-E6A6EE0F369D}"/>
+                <a16:creationId xmlns:a16="http://schemas.microsoft.com/office/drawing/2014/main" id="{F3D5F5B2-B08C-443D-A148-E5EE6632B45E}"/>
               </a:ext>
             </a:extLst>
           </p:cNvPr>
@@ -3225,7 +3225,7 @@
           <p:cNvPr id="20" name="">
             <a:extLst xmlns:a="http://schemas.openxmlformats.org/drawingml/2006/main">
               <a:ext uri="{FF2B5EF4-FFF2-40B4-BE49-F238E27FC236}">
-                <a16:creationId xmlns:a16="http://schemas.microsoft.com/office/drawing/2014/main" id="{319A9822-B87E-4F1C-AB84-41DAB48C97FE}"/>
+                <a16:creationId xmlns:a16="http://schemas.microsoft.com/office/drawing/2014/main" id="{0BF2753C-3BAE-4E7A-AF2D-CEF3AFF02B0F}"/>
               </a:ext>
             </a:extLst>
           </p:cNvPr>
@@ -3275,7 +3275,7 @@
           <p:cNvPr id="21" name="">
             <a:extLst xmlns:a="http://schemas.openxmlformats.org/drawingml/2006/main">
               <a:ext uri="{FF2B5EF4-FFF2-40B4-BE49-F238E27FC236}">
-                <a16:creationId xmlns:a16="http://schemas.microsoft.com/office/drawing/2014/main" id="{A70B6DC7-C59A-44D7-B0EF-8F68E26287F2}"/>
+                <a16:creationId xmlns:a16="http://schemas.microsoft.com/office/drawing/2014/main" id="{8026175F-250F-4A94-84E9-75A3360A8BD7}"/>
               </a:ext>
             </a:extLst>
           </p:cNvPr>
@@ -3325,7 +3325,7 @@
           <p:cNvPr id="22" name="">
             <a:extLst xmlns:a="http://schemas.openxmlformats.org/drawingml/2006/main">
               <a:ext uri="{FF2B5EF4-FFF2-40B4-BE49-F238E27FC236}">
-                <a16:creationId xmlns:a16="http://schemas.microsoft.com/office/drawing/2014/main" id="{DC165ED1-0CA9-406B-8587-394ADA6253EC}"/>
+                <a16:creationId xmlns:a16="http://schemas.microsoft.com/office/drawing/2014/main" id="{6C468EAA-7034-490C-989E-22D480E32BC2}"/>
               </a:ext>
             </a:extLst>
           </p:cNvPr>
@@ -3356,7 +3356,7 @@
           <p:cNvPr id="23" name="">
             <a:extLst xmlns:a="http://schemas.openxmlformats.org/drawingml/2006/main">
               <a:ext uri="{FF2B5EF4-FFF2-40B4-BE49-F238E27FC236}">
-                <a16:creationId xmlns:a16="http://schemas.microsoft.com/office/drawing/2014/main" id="{E9257AB2-4C2C-47AF-A6E2-81EC169D9C43}"/>
+                <a16:creationId xmlns:a16="http://schemas.microsoft.com/office/drawing/2014/main" id="{233C6EF7-09CE-415E-9E93-C6C757640B8E}"/>
               </a:ext>
             </a:extLst>
           </p:cNvPr>
@@ -3406,7 +3406,7 @@
           <p:cNvPr id="24" name="">
             <a:extLst xmlns:a="http://schemas.openxmlformats.org/drawingml/2006/main">
               <a:ext uri="{FF2B5EF4-FFF2-40B4-BE49-F238E27FC236}">
-                <a16:creationId xmlns:a16="http://schemas.microsoft.com/office/drawing/2014/main" id="{94A4A9A0-0446-4191-B5ED-FA2E8FA45FB0}"/>
+                <a16:creationId xmlns:a16="http://schemas.microsoft.com/office/drawing/2014/main" id="{5EAA35B5-F9F8-4AC0-A895-ED301E8A4AF9}"/>
               </a:ext>
             </a:extLst>
           </p:cNvPr>
@@ -3456,7 +3456,7 @@
           <p:cNvPr id="25" name="">
             <a:extLst xmlns:a="http://schemas.openxmlformats.org/drawingml/2006/main">
               <a:ext uri="{FF2B5EF4-FFF2-40B4-BE49-F238E27FC236}">
-                <a16:creationId xmlns:a16="http://schemas.microsoft.com/office/drawing/2014/main" id="{0DE26834-12EF-4024-A0F7-00DAE44FD33D}"/>
+                <a16:creationId xmlns:a16="http://schemas.microsoft.com/office/drawing/2014/main" id="{73AE7810-06A9-42EA-A700-96C239A01740}"/>
               </a:ext>
             </a:extLst>
           </p:cNvPr>
@@ -3506,7 +3506,7 @@
           <p:cNvPr id="26" name="">
             <a:extLst xmlns:a="http://schemas.openxmlformats.org/drawingml/2006/main">
               <a:ext uri="{FF2B5EF4-FFF2-40B4-BE49-F238E27FC236}">
-                <a16:creationId xmlns:a16="http://schemas.microsoft.com/office/drawing/2014/main" id="{BEC024EB-4EDC-4ADD-99A9-A2BD2F79C5E2}"/>
+                <a16:creationId xmlns:a16="http://schemas.microsoft.com/office/drawing/2014/main" id="{D22B4C97-7239-448F-8983-045C9A9B1636}"/>
               </a:ext>
             </a:extLst>
           </p:cNvPr>
@@ -3537,7 +3537,7 @@
           <p:cNvPr id="27" name="">
             <a:extLst xmlns:a="http://schemas.openxmlformats.org/drawingml/2006/main">
               <a:ext uri="{FF2B5EF4-FFF2-40B4-BE49-F238E27FC236}">
-                <a16:creationId xmlns:a16="http://schemas.microsoft.com/office/drawing/2014/main" id="{26BDC3D0-69DD-42CF-9006-018FCECD82CD}"/>
+                <a16:creationId xmlns:a16="http://schemas.microsoft.com/office/drawing/2014/main" id="{911EDDD5-CFBA-4FA9-A197-67D942FCEE11}"/>
               </a:ext>
             </a:extLst>
           </p:cNvPr>
@@ -3587,7 +3587,7 @@
           <p:cNvPr id="28" name="">
             <a:extLst xmlns:a="http://schemas.openxmlformats.org/drawingml/2006/main">
               <a:ext uri="{FF2B5EF4-FFF2-40B4-BE49-F238E27FC236}">
-                <a16:creationId xmlns:a16="http://schemas.microsoft.com/office/drawing/2014/main" id="{10CD3E01-C051-4AEE-95CB-7793E2A1F881}"/>
+                <a16:creationId xmlns:a16="http://schemas.microsoft.com/office/drawing/2014/main" id="{6C697E01-B51C-45DD-8C50-502275E859A7}"/>
               </a:ext>
             </a:extLst>
           </p:cNvPr>
@@ -3637,7 +3637,7 @@
           <p:cNvPr id="29" name="">
             <a:extLst xmlns:a="http://schemas.openxmlformats.org/drawingml/2006/main">
               <a:ext uri="{FF2B5EF4-FFF2-40B4-BE49-F238E27FC236}">
-                <a16:creationId xmlns:a16="http://schemas.microsoft.com/office/drawing/2014/main" id="{F610E6FD-6258-4443-AF38-9B79A789AF53}"/>
+                <a16:creationId xmlns:a16="http://schemas.microsoft.com/office/drawing/2014/main" id="{F8B4D951-5B94-45E7-9BC5-9F8FCC12235B}"/>
               </a:ext>
             </a:extLst>
           </p:cNvPr>
@@ -3687,7 +3687,7 @@
           <p:cNvPr id="30" name="">
             <a:extLst xmlns:a="http://schemas.openxmlformats.org/drawingml/2006/main">
               <a:ext uri="{FF2B5EF4-FFF2-40B4-BE49-F238E27FC236}">
-                <a16:creationId xmlns:a16="http://schemas.microsoft.com/office/drawing/2014/main" id="{E46A2E93-2CFA-4173-AF77-C49AFDEA09D5}"/>
+                <a16:creationId xmlns:a16="http://schemas.microsoft.com/office/drawing/2014/main" id="{0A162806-3C25-4C29-A11B-62212FD6D1E0}"/>
               </a:ext>
             </a:extLst>
           </p:cNvPr>
@@ -3718,7 +3718,7 @@
           <p:cNvPr id="31" name="">
             <a:extLst xmlns:a="http://schemas.openxmlformats.org/drawingml/2006/main">
               <a:ext uri="{FF2B5EF4-FFF2-40B4-BE49-F238E27FC236}">
-                <a16:creationId xmlns:a16="http://schemas.microsoft.com/office/drawing/2014/main" id="{93990E01-68CF-4C95-8D5F-C04D7C77EEE8}"/>
+                <a16:creationId xmlns:a16="http://schemas.microsoft.com/office/drawing/2014/main" id="{2D303E68-9379-437C-89CD-624C18E43280}"/>
               </a:ext>
             </a:extLst>
           </p:cNvPr>
@@ -3768,7 +3768,7 @@
           <p:cNvPr id="32" name="">
             <a:extLst xmlns:a="http://schemas.openxmlformats.org/drawingml/2006/main">
               <a:ext uri="{FF2B5EF4-FFF2-40B4-BE49-F238E27FC236}">
-                <a16:creationId xmlns:a16="http://schemas.microsoft.com/office/drawing/2014/main" id="{237CB0BA-9EB9-4AC8-8992-AFF346118397}"/>
+                <a16:creationId xmlns:a16="http://schemas.microsoft.com/office/drawing/2014/main" id="{B35A2B8F-D73C-4F78-A73C-041B531C153F}"/>
               </a:ext>
             </a:extLst>
           </p:cNvPr>
@@ -3818,7 +3818,7 @@
           <p:cNvPr id="33" name="">
             <a:extLst xmlns:a="http://schemas.openxmlformats.org/drawingml/2006/main">
               <a:ext uri="{FF2B5EF4-FFF2-40B4-BE49-F238E27FC236}">
-                <a16:creationId xmlns:a16="http://schemas.microsoft.com/office/drawing/2014/main" id="{DB29E605-FD56-4E80-8DE9-B4136A9C45A1}"/>
+                <a16:creationId xmlns:a16="http://schemas.microsoft.com/office/drawing/2014/main" id="{3AB26118-4D14-467B-8094-645569EB54C7}"/>
               </a:ext>
             </a:extLst>
           </p:cNvPr>
@@ -3866,7 +3866,7 @@
     </p:spTree>
     <p:extLst>
       <p:ext uri="{BB962C8B-B14F-4D97-AF65-F5344CB8AC3E}">
-        <p14:creationId xmlns:p14="http://schemas.microsoft.com/office/powerpoint/2010/main" val="196811501"/>
+        <p14:creationId xmlns:p14="http://schemas.microsoft.com/office/powerpoint/2010/main" val="813448134"/>
       </p:ext>
     </p:extLst>
   </p:cSld>
@@ -3897,7 +3897,7 @@
           <p:cNvPr id="1" name="">
             <a:extLst xmlns:a="http://schemas.openxmlformats.org/drawingml/2006/main">
               <a:ext uri="{FF2B5EF4-FFF2-40B4-BE49-F238E27FC236}">
-                <a16:creationId xmlns:a16="http://schemas.microsoft.com/office/drawing/2014/main" id="{19A562A5-76AC-4246-9C99-330B4E9AE35F}"/>
+                <a16:creationId xmlns:a16="http://schemas.microsoft.com/office/drawing/2014/main" id="{7E1D6E64-608E-4AFE-A247-5F75C72A995F}"/>
               </a:ext>
             </a:extLst>
           </p:cNvPr>
@@ -3932,7 +3932,7 @@
           <p:nvPr/>
         </p:nvPicPr>
         <p:blipFill>
-          <a:blip xmlns:r="http://schemas.openxmlformats.org/officeDocument/2006/relationships" xmlns:a="http://schemas.openxmlformats.org/drawingml/2006/main" r:embed="R72fba05296b84ecf"/>
+          <a:blip xmlns:r="http://schemas.openxmlformats.org/officeDocument/2006/relationships" xmlns:a="http://schemas.openxmlformats.org/drawingml/2006/main" r:embed="Rd69feda7fd6943ec"/>
           <a:stretch xmlns:a="http://schemas.openxmlformats.org/drawingml/2006/main"/>
         </p:blipFill>
         <p:spPr>
@@ -3950,7 +3950,7 @@
           <p:cNvPr id="3" name="">
             <a:extLst xmlns:a="http://schemas.openxmlformats.org/drawingml/2006/main">
               <a:ext uri="{FF2B5EF4-FFF2-40B4-BE49-F238E27FC236}">
-                <a16:creationId xmlns:a16="http://schemas.microsoft.com/office/drawing/2014/main" id="{9B200513-1008-42CA-A253-F1AF7B6BD8CC}"/>
+                <a16:creationId xmlns:a16="http://schemas.microsoft.com/office/drawing/2014/main" id="{B147EF62-ED3D-4623-9377-625342315484}"/>
               </a:ext>
             </a:extLst>
           </p:cNvPr>
@@ -4000,7 +4000,7 @@
           <p:cNvPr id="4" name="">
             <a:extLst xmlns:a="http://schemas.openxmlformats.org/drawingml/2006/main">
               <a:ext uri="{FF2B5EF4-FFF2-40B4-BE49-F238E27FC236}">
-                <a16:creationId xmlns:a16="http://schemas.microsoft.com/office/drawing/2014/main" id="{438D1F86-C449-4EB9-B81A-9AEBFD913582}"/>
+                <a16:creationId xmlns:a16="http://schemas.microsoft.com/office/drawing/2014/main" id="{5665F893-252F-4A5F-A005-56C3A47A973D}"/>
               </a:ext>
             </a:extLst>
           </p:cNvPr>
@@ -4033,7 +4033,7 @@
           <p:cNvPr id="5" name="">
             <a:extLst xmlns:a="http://schemas.openxmlformats.org/drawingml/2006/main">
               <a:ext uri="{FF2B5EF4-FFF2-40B4-BE49-F238E27FC236}">
-                <a16:creationId xmlns:a16="http://schemas.microsoft.com/office/drawing/2014/main" id="{5BB73C3B-11BA-4B52-9FBB-3E5CC01EC7DC}"/>
+                <a16:creationId xmlns:a16="http://schemas.microsoft.com/office/drawing/2014/main" id="{3A7853B1-DDB0-493F-81A4-16B860C972AF}"/>
               </a:ext>
             </a:extLst>
           </p:cNvPr>
@@ -4064,7 +4064,7 @@
           <p:cNvPr id="6" name="">
             <a:extLst xmlns:a="http://schemas.openxmlformats.org/drawingml/2006/main">
               <a:ext uri="{FF2B5EF4-FFF2-40B4-BE49-F238E27FC236}">
-                <a16:creationId xmlns:a16="http://schemas.microsoft.com/office/drawing/2014/main" id="{FE3EA4C1-EB60-4F81-BF8D-79FDA5B1FCC7}"/>
+                <a16:creationId xmlns:a16="http://schemas.microsoft.com/office/drawing/2014/main" id="{BB9878FC-CCBE-4C2B-B2AD-D3640DD02352}"/>
               </a:ext>
             </a:extLst>
           </p:cNvPr>
@@ -4114,7 +4114,7 @@
           <p:cNvPr id="7" name="">
             <a:extLst xmlns:a="http://schemas.openxmlformats.org/drawingml/2006/main">
               <a:ext uri="{FF2B5EF4-FFF2-40B4-BE49-F238E27FC236}">
-                <a16:creationId xmlns:a16="http://schemas.microsoft.com/office/drawing/2014/main" id="{CBE148B4-286C-4288-9EDE-93AAB92F7893}"/>
+                <a16:creationId xmlns:a16="http://schemas.microsoft.com/office/drawing/2014/main" id="{B30A6BA6-E05C-4925-88BC-7734AD2F85FF}"/>
               </a:ext>
             </a:extLst>
           </p:cNvPr>
@@ -4164,7 +4164,7 @@
           <p:cNvPr id="8" name="">
             <a:extLst xmlns:a="http://schemas.openxmlformats.org/drawingml/2006/main">
               <a:ext uri="{FF2B5EF4-FFF2-40B4-BE49-F238E27FC236}">
-                <a16:creationId xmlns:a16="http://schemas.microsoft.com/office/drawing/2014/main" id="{707D2972-4C8D-47C3-9E1E-F35204D32197}"/>
+                <a16:creationId xmlns:a16="http://schemas.microsoft.com/office/drawing/2014/main" id="{6669804A-ED5F-443E-950D-63998CEF43BC}"/>
               </a:ext>
             </a:extLst>
           </p:cNvPr>
@@ -4214,7 +4214,7 @@
           <p:cNvPr id="9" name="">
             <a:extLst xmlns:a="http://schemas.openxmlformats.org/drawingml/2006/main">
               <a:ext uri="{FF2B5EF4-FFF2-40B4-BE49-F238E27FC236}">
-                <a16:creationId xmlns:a16="http://schemas.microsoft.com/office/drawing/2014/main" id="{B5301629-490E-4491-874C-DE46AAD1801F}"/>
+                <a16:creationId xmlns:a16="http://schemas.microsoft.com/office/drawing/2014/main" id="{9DC4F9E1-FAC3-453C-AF65-A3156B1A0F4A}"/>
               </a:ext>
             </a:extLst>
           </p:cNvPr>
@@ -4264,7 +4264,7 @@
           <p:cNvPr id="10" name="">
             <a:extLst xmlns:a="http://schemas.openxmlformats.org/drawingml/2006/main">
               <a:ext uri="{FF2B5EF4-FFF2-40B4-BE49-F238E27FC236}">
-                <a16:creationId xmlns:a16="http://schemas.microsoft.com/office/drawing/2014/main" id="{787E667C-20E8-4F3B-B9B7-F391493C8219}"/>
+                <a16:creationId xmlns:a16="http://schemas.microsoft.com/office/drawing/2014/main" id="{AD83A6F7-818B-469B-907D-A9A9FCD61B0D}"/>
               </a:ext>
             </a:extLst>
           </p:cNvPr>
@@ -4314,7 +4314,7 @@
           <p:cNvPr id="11" name="">
             <a:extLst xmlns:a="http://schemas.openxmlformats.org/drawingml/2006/main">
               <a:ext uri="{FF2B5EF4-FFF2-40B4-BE49-F238E27FC236}">
-                <a16:creationId xmlns:a16="http://schemas.microsoft.com/office/drawing/2014/main" id="{7DFB03C3-ACAB-4538-9A98-0019D5FC139F}"/>
+                <a16:creationId xmlns:a16="http://schemas.microsoft.com/office/drawing/2014/main" id="{10AB61FB-B52B-4F6F-9945-6679B2F2108A}"/>
               </a:ext>
             </a:extLst>
           </p:cNvPr>
@@ -4345,7 +4345,7 @@
           <p:cNvPr id="12" name="">
             <a:extLst xmlns:a="http://schemas.openxmlformats.org/drawingml/2006/main">
               <a:ext uri="{FF2B5EF4-FFF2-40B4-BE49-F238E27FC236}">
-                <a16:creationId xmlns:a16="http://schemas.microsoft.com/office/drawing/2014/main" id="{4ADE68DA-1303-4FEB-9990-5E6E9A205672}"/>
+                <a16:creationId xmlns:a16="http://schemas.microsoft.com/office/drawing/2014/main" id="{D0E48DDB-4657-4AA8-B123-1DD3E0CD4855}"/>
               </a:ext>
             </a:extLst>
           </p:cNvPr>
@@ -4395,7 +4395,7 @@
           <p:cNvPr id="13" name="">
             <a:extLst xmlns:a="http://schemas.openxmlformats.org/drawingml/2006/main">
               <a:ext uri="{FF2B5EF4-FFF2-40B4-BE49-F238E27FC236}">
-                <a16:creationId xmlns:a16="http://schemas.microsoft.com/office/drawing/2014/main" id="{A552E58C-6BC8-49DA-AEC5-D4709C606671}"/>
+                <a16:creationId xmlns:a16="http://schemas.microsoft.com/office/drawing/2014/main" id="{66139BD5-0DA7-48E4-A6AB-90D59403F6AD}"/>
               </a:ext>
             </a:extLst>
           </p:cNvPr>
@@ -4445,7 +4445,7 @@
           <p:cNvPr id="14" name="">
             <a:extLst xmlns:a="http://schemas.openxmlformats.org/drawingml/2006/main">
               <a:ext uri="{FF2B5EF4-FFF2-40B4-BE49-F238E27FC236}">
-                <a16:creationId xmlns:a16="http://schemas.microsoft.com/office/drawing/2014/main" id="{99F91F5E-DB8D-415C-B94E-27696FA2CB65}"/>
+                <a16:creationId xmlns:a16="http://schemas.microsoft.com/office/drawing/2014/main" id="{2BC63F8A-FE3A-43EF-BDC1-F97F168EB9EA}"/>
               </a:ext>
             </a:extLst>
           </p:cNvPr>
@@ -4476,7 +4476,7 @@
           <p:cNvPr id="15" name="">
             <a:extLst xmlns:a="http://schemas.openxmlformats.org/drawingml/2006/main">
               <a:ext uri="{FF2B5EF4-FFF2-40B4-BE49-F238E27FC236}">
-                <a16:creationId xmlns:a16="http://schemas.microsoft.com/office/drawing/2014/main" id="{30CE35FA-37C8-495A-8F68-0DC630698985}"/>
+                <a16:creationId xmlns:a16="http://schemas.microsoft.com/office/drawing/2014/main" id="{241A7983-BE2C-4D78-8BF6-DE80EED9DAA4}"/>
               </a:ext>
             </a:extLst>
           </p:cNvPr>
@@ -4526,7 +4526,7 @@
           <p:cNvPr id="16" name="">
             <a:extLst xmlns:a="http://schemas.openxmlformats.org/drawingml/2006/main">
               <a:ext uri="{FF2B5EF4-FFF2-40B4-BE49-F238E27FC236}">
-                <a16:creationId xmlns:a16="http://schemas.microsoft.com/office/drawing/2014/main" id="{717F2828-C54A-4C49-8674-C3BA507EB717}"/>
+                <a16:creationId xmlns:a16="http://schemas.microsoft.com/office/drawing/2014/main" id="{CC2AFF33-EF11-439E-B4B3-475D8CF841DE}"/>
               </a:ext>
             </a:extLst>
           </p:cNvPr>
@@ -4576,7 +4576,7 @@
           <p:cNvPr id="17" name="">
             <a:extLst xmlns:a="http://schemas.openxmlformats.org/drawingml/2006/main">
               <a:ext uri="{FF2B5EF4-FFF2-40B4-BE49-F238E27FC236}">
-                <a16:creationId xmlns:a16="http://schemas.microsoft.com/office/drawing/2014/main" id="{4E6CF8BF-BE19-434B-88BB-C01886D2099C}"/>
+                <a16:creationId xmlns:a16="http://schemas.microsoft.com/office/drawing/2014/main" id="{988C559B-0890-4D5C-9D2E-772B1BB88ABF}"/>
               </a:ext>
             </a:extLst>
           </p:cNvPr>
@@ -4607,7 +4607,7 @@
           <p:cNvPr id="18" name="">
             <a:extLst xmlns:a="http://schemas.openxmlformats.org/drawingml/2006/main">
               <a:ext uri="{FF2B5EF4-FFF2-40B4-BE49-F238E27FC236}">
-                <a16:creationId xmlns:a16="http://schemas.microsoft.com/office/drawing/2014/main" id="{A8F280A4-D807-40C2-B6A4-390BC5AAC94A}"/>
+                <a16:creationId xmlns:a16="http://schemas.microsoft.com/office/drawing/2014/main" id="{B29BCFE9-16D9-4DA3-89F0-BF77CB8FAF3F}"/>
               </a:ext>
             </a:extLst>
           </p:cNvPr>
@@ -4657,7 +4657,7 @@
           <p:cNvPr id="19" name="">
             <a:extLst xmlns:a="http://schemas.openxmlformats.org/drawingml/2006/main">
               <a:ext uri="{FF2B5EF4-FFF2-40B4-BE49-F238E27FC236}">
-                <a16:creationId xmlns:a16="http://schemas.microsoft.com/office/drawing/2014/main" id="{66B5B0B7-FA7B-4F59-89E3-AC2FC4135891}"/>
+                <a16:creationId xmlns:a16="http://schemas.microsoft.com/office/drawing/2014/main" id="{DDB33183-991E-48EB-BA51-DF3714D0E4F8}"/>
               </a:ext>
             </a:extLst>
           </p:cNvPr>
@@ -4705,7 +4705,7 @@
     </p:spTree>
     <p:extLst>
       <p:ext uri="{BB962C8B-B14F-4D97-AF65-F5344CB8AC3E}">
-        <p14:creationId xmlns:p14="http://schemas.microsoft.com/office/powerpoint/2010/main" val="2126475281"/>
+        <p14:creationId xmlns:p14="http://schemas.microsoft.com/office/powerpoint/2010/main" val="1619790579"/>
       </p:ext>
     </p:extLst>
   </p:cSld>
@@ -4736,7 +4736,7 @@
           <p:cNvPr id="1" name="">
             <a:extLst xmlns:a="http://schemas.openxmlformats.org/drawingml/2006/main">
               <a:ext uri="{FF2B5EF4-FFF2-40B4-BE49-F238E27FC236}">
-                <a16:creationId xmlns:a16="http://schemas.microsoft.com/office/drawing/2014/main" id="{E9335260-11A3-475C-8EC0-F1E4FC4C7CE5}"/>
+                <a16:creationId xmlns:a16="http://schemas.microsoft.com/office/drawing/2014/main" id="{B781270B-2F8B-4360-8272-8E6569538146}"/>
               </a:ext>
             </a:extLst>
           </p:cNvPr>
@@ -4771,7 +4771,7 @@
           <p:nvPr/>
         </p:nvPicPr>
         <p:blipFill>
-          <a:blip xmlns:r="http://schemas.openxmlformats.org/officeDocument/2006/relationships" xmlns:a="http://schemas.openxmlformats.org/drawingml/2006/main" r:embed="R855aab4df3404303"/>
+          <a:blip xmlns:r="http://schemas.openxmlformats.org/officeDocument/2006/relationships" xmlns:a="http://schemas.openxmlformats.org/drawingml/2006/main" r:embed="R86c6408cb75e4985"/>
           <a:stretch xmlns:a="http://schemas.openxmlformats.org/drawingml/2006/main"/>
         </p:blipFill>
         <p:spPr>
@@ -4789,7 +4789,7 @@
           <p:cNvPr id="3" name="">
             <a:extLst xmlns:a="http://schemas.openxmlformats.org/drawingml/2006/main">
               <a:ext uri="{FF2B5EF4-FFF2-40B4-BE49-F238E27FC236}">
-                <a16:creationId xmlns:a16="http://schemas.microsoft.com/office/drawing/2014/main" id="{69EF18F7-41AF-442B-A97B-18563ACA983A}"/>
+                <a16:creationId xmlns:a16="http://schemas.microsoft.com/office/drawing/2014/main" id="{99E6BB26-0D9A-43D1-AA44-D51E315D0BE5}"/>
               </a:ext>
             </a:extLst>
           </p:cNvPr>
@@ -4839,7 +4839,7 @@
           <p:cNvPr id="4" name="">
             <a:extLst xmlns:a="http://schemas.openxmlformats.org/drawingml/2006/main">
               <a:ext uri="{FF2B5EF4-FFF2-40B4-BE49-F238E27FC236}">
-                <a16:creationId xmlns:a16="http://schemas.microsoft.com/office/drawing/2014/main" id="{D1321E1E-3DB9-462D-9C43-3C192F377B0B}"/>
+                <a16:creationId xmlns:a16="http://schemas.microsoft.com/office/drawing/2014/main" id="{2C9FD7CC-A67C-4979-BE84-E41C18FB6BD9}"/>
               </a:ext>
             </a:extLst>
           </p:cNvPr>
@@ -4872,7 +4872,7 @@
           <p:cNvPr id="5" name="">
             <a:extLst xmlns:a="http://schemas.openxmlformats.org/drawingml/2006/main">
               <a:ext uri="{FF2B5EF4-FFF2-40B4-BE49-F238E27FC236}">
-                <a16:creationId xmlns:a16="http://schemas.microsoft.com/office/drawing/2014/main" id="{B8EF3F11-ADD8-4A6B-9514-BF405788268F}"/>
+                <a16:creationId xmlns:a16="http://schemas.microsoft.com/office/drawing/2014/main" id="{72E69065-8836-4BA2-B975-5147CE9184A2}"/>
               </a:ext>
             </a:extLst>
           </p:cNvPr>
@@ -4903,7 +4903,7 @@
           <p:cNvPr id="6" name="">
             <a:extLst xmlns:a="http://schemas.openxmlformats.org/drawingml/2006/main">
               <a:ext uri="{FF2B5EF4-FFF2-40B4-BE49-F238E27FC236}">
-                <a16:creationId xmlns:a16="http://schemas.microsoft.com/office/drawing/2014/main" id="{8262C9D0-92C2-454E-A20D-4643D70D87AE}"/>
+                <a16:creationId xmlns:a16="http://schemas.microsoft.com/office/drawing/2014/main" id="{AED69761-CF64-412B-9D81-1A7CC912FA4A}"/>
               </a:ext>
             </a:extLst>
           </p:cNvPr>
@@ -4953,7 +4953,7 @@
           <p:cNvPr id="7" name="">
             <a:extLst xmlns:a="http://schemas.openxmlformats.org/drawingml/2006/main">
               <a:ext uri="{FF2B5EF4-FFF2-40B4-BE49-F238E27FC236}">
-                <a16:creationId xmlns:a16="http://schemas.microsoft.com/office/drawing/2014/main" id="{D51715F2-7826-455E-950B-6842B0B7D212}"/>
+                <a16:creationId xmlns:a16="http://schemas.microsoft.com/office/drawing/2014/main" id="{87D6965A-9BA4-47B6-AD8C-D9F30D2F7AEC}"/>
               </a:ext>
             </a:extLst>
           </p:cNvPr>
@@ -5003,7 +5003,7 @@
           <p:cNvPr id="8" name="">
             <a:extLst xmlns:a="http://schemas.openxmlformats.org/drawingml/2006/main">
               <a:ext uri="{FF2B5EF4-FFF2-40B4-BE49-F238E27FC236}">
-                <a16:creationId xmlns:a16="http://schemas.microsoft.com/office/drawing/2014/main" id="{B93F575F-1905-4815-ABD4-57E47BA96A7E}"/>
+                <a16:creationId xmlns:a16="http://schemas.microsoft.com/office/drawing/2014/main" id="{4221C610-9E71-48B9-A384-67E29DCCD516}"/>
               </a:ext>
             </a:extLst>
           </p:cNvPr>
@@ -5038,7 +5038,7 @@
           <p:cNvPr id="9" name="">
             <a:extLst xmlns:a="http://schemas.openxmlformats.org/drawingml/2006/main">
               <a:ext uri="{FF2B5EF4-FFF2-40B4-BE49-F238E27FC236}">
-                <a16:creationId xmlns:a16="http://schemas.microsoft.com/office/drawing/2014/main" id="{5C561594-3777-48DA-A0EE-F8D7359A3F42}"/>
+                <a16:creationId xmlns:a16="http://schemas.microsoft.com/office/drawing/2014/main" id="{000E7E47-D393-45C9-9B1E-C5AA88BFBDA8}"/>
               </a:ext>
             </a:extLst>
           </p:cNvPr>
@@ -5088,7 +5088,7 @@
           <p:cNvPr id="10" name="">
             <a:extLst xmlns:a="http://schemas.openxmlformats.org/drawingml/2006/main">
               <a:ext uri="{FF2B5EF4-FFF2-40B4-BE49-F238E27FC236}">
-                <a16:creationId xmlns:a16="http://schemas.microsoft.com/office/drawing/2014/main" id="{1040EDE1-2932-48BB-A8F3-0B29189F5EAF}"/>
+                <a16:creationId xmlns:a16="http://schemas.microsoft.com/office/drawing/2014/main" id="{67EE0111-B702-42CE-86DF-5DE638263970}"/>
               </a:ext>
             </a:extLst>
           </p:cNvPr>
@@ -5138,7 +5138,7 @@
           <p:cNvPr id="11" name="">
             <a:extLst xmlns:a="http://schemas.openxmlformats.org/drawingml/2006/main">
               <a:ext uri="{FF2B5EF4-FFF2-40B4-BE49-F238E27FC236}">
-                <a16:creationId xmlns:a16="http://schemas.microsoft.com/office/drawing/2014/main" id="{A557A13A-BCFC-448B-B1DE-216CD2152E5E}"/>
+                <a16:creationId xmlns:a16="http://schemas.microsoft.com/office/drawing/2014/main" id="{DE59876C-46F3-4C04-A68B-45ED3550B50F}"/>
               </a:ext>
             </a:extLst>
           </p:cNvPr>
@@ -5173,7 +5173,7 @@
           <p:cNvPr id="12" name="">
             <a:extLst xmlns:a="http://schemas.openxmlformats.org/drawingml/2006/main">
               <a:ext uri="{FF2B5EF4-FFF2-40B4-BE49-F238E27FC236}">
-                <a16:creationId xmlns:a16="http://schemas.microsoft.com/office/drawing/2014/main" id="{226EABA4-B230-4903-8BFD-69E18662202A}"/>
+                <a16:creationId xmlns:a16="http://schemas.microsoft.com/office/drawing/2014/main" id="{50313A14-9D02-4C60-840F-AC0F59A76602}"/>
               </a:ext>
             </a:extLst>
           </p:cNvPr>
@@ -5223,7 +5223,7 @@
           <p:cNvPr id="13" name="">
             <a:extLst xmlns:a="http://schemas.openxmlformats.org/drawingml/2006/main">
               <a:ext uri="{FF2B5EF4-FFF2-40B4-BE49-F238E27FC236}">
-                <a16:creationId xmlns:a16="http://schemas.microsoft.com/office/drawing/2014/main" id="{06056447-84C6-4F31-9585-478AA6B20D3C}"/>
+                <a16:creationId xmlns:a16="http://schemas.microsoft.com/office/drawing/2014/main" id="{E3101F3F-C3A4-4C96-8935-D1FC025F04AF}"/>
               </a:ext>
             </a:extLst>
           </p:cNvPr>
@@ -5273,7 +5273,7 @@
           <p:cNvPr id="14" name="">
             <a:extLst xmlns:a="http://schemas.openxmlformats.org/drawingml/2006/main">
               <a:ext uri="{FF2B5EF4-FFF2-40B4-BE49-F238E27FC236}">
-                <a16:creationId xmlns:a16="http://schemas.microsoft.com/office/drawing/2014/main" id="{192B5532-3DBA-4E3F-BF6B-A447430A0998}"/>
+                <a16:creationId xmlns:a16="http://schemas.microsoft.com/office/drawing/2014/main" id="{08C199D8-E5E1-4703-9AC2-1890A87B0669}"/>
               </a:ext>
             </a:extLst>
           </p:cNvPr>
@@ -5308,7 +5308,7 @@
           <p:cNvPr id="15" name="">
             <a:extLst xmlns:a="http://schemas.openxmlformats.org/drawingml/2006/main">
               <a:ext uri="{FF2B5EF4-FFF2-40B4-BE49-F238E27FC236}">
-                <a16:creationId xmlns:a16="http://schemas.microsoft.com/office/drawing/2014/main" id="{50A50B21-4C1D-4C55-AF20-FBE282E787A7}"/>
+                <a16:creationId xmlns:a16="http://schemas.microsoft.com/office/drawing/2014/main" id="{7450AB77-F8F9-447B-AE62-0B4B89D9C1F7}"/>
               </a:ext>
             </a:extLst>
           </p:cNvPr>
@@ -5358,7 +5358,7 @@
           <p:cNvPr id="16" name="">
             <a:extLst xmlns:a="http://schemas.openxmlformats.org/drawingml/2006/main">
               <a:ext uri="{FF2B5EF4-FFF2-40B4-BE49-F238E27FC236}">
-                <a16:creationId xmlns:a16="http://schemas.microsoft.com/office/drawing/2014/main" id="{DEF8E04D-75E3-4C00-BA94-3E5C864003CF}"/>
+                <a16:creationId xmlns:a16="http://schemas.microsoft.com/office/drawing/2014/main" id="{148E5812-35FE-4DF8-A779-4F8C3FF53092}"/>
               </a:ext>
             </a:extLst>
           </p:cNvPr>
@@ -5408,7 +5408,7 @@
           <p:cNvPr id="17" name="">
             <a:extLst xmlns:a="http://schemas.openxmlformats.org/drawingml/2006/main">
               <a:ext uri="{FF2B5EF4-FFF2-40B4-BE49-F238E27FC236}">
-                <a16:creationId xmlns:a16="http://schemas.microsoft.com/office/drawing/2014/main" id="{2B2568FB-1057-449C-ADB1-D445E283DFF9}"/>
+                <a16:creationId xmlns:a16="http://schemas.microsoft.com/office/drawing/2014/main" id="{98D54E86-CBB4-41B3-A3CC-05A280288067}"/>
               </a:ext>
             </a:extLst>
           </p:cNvPr>
@@ -5443,7 +5443,7 @@
           <p:cNvPr id="18" name="">
             <a:extLst xmlns:a="http://schemas.openxmlformats.org/drawingml/2006/main">
               <a:ext uri="{FF2B5EF4-FFF2-40B4-BE49-F238E27FC236}">
-                <a16:creationId xmlns:a16="http://schemas.microsoft.com/office/drawing/2014/main" id="{8EAE35B9-6210-4747-9D1C-6F459B46796A}"/>
+                <a16:creationId xmlns:a16="http://schemas.microsoft.com/office/drawing/2014/main" id="{D28DA4D9-E368-44C2-AD43-F8895BEC4D42}"/>
               </a:ext>
             </a:extLst>
           </p:cNvPr>
@@ -5493,7 +5493,7 @@
           <p:cNvPr id="19" name="">
             <a:extLst xmlns:a="http://schemas.openxmlformats.org/drawingml/2006/main">
               <a:ext uri="{FF2B5EF4-FFF2-40B4-BE49-F238E27FC236}">
-                <a16:creationId xmlns:a16="http://schemas.microsoft.com/office/drawing/2014/main" id="{9BBE6399-4846-4930-9B17-7D2473C110DE}"/>
+                <a16:creationId xmlns:a16="http://schemas.microsoft.com/office/drawing/2014/main" id="{21CBAB27-837E-43F8-9FDF-FA04EC1FD9F6}"/>
               </a:ext>
             </a:extLst>
           </p:cNvPr>
@@ -5543,7 +5543,7 @@
           <p:cNvPr id="20" name="">
             <a:extLst xmlns:a="http://schemas.openxmlformats.org/drawingml/2006/main">
               <a:ext uri="{FF2B5EF4-FFF2-40B4-BE49-F238E27FC236}">
-                <a16:creationId xmlns:a16="http://schemas.microsoft.com/office/drawing/2014/main" id="{15D362A3-52A9-4C50-ABE9-C359F20723C8}"/>
+                <a16:creationId xmlns:a16="http://schemas.microsoft.com/office/drawing/2014/main" id="{7151DD97-AF39-4FD3-A673-427AED88EA6C}"/>
               </a:ext>
             </a:extLst>
           </p:cNvPr>
@@ -5593,7 +5593,7 @@
           <p:cNvPr id="21" name="">
             <a:extLst xmlns:a="http://schemas.openxmlformats.org/drawingml/2006/main">
               <a:ext uri="{FF2B5EF4-FFF2-40B4-BE49-F238E27FC236}">
-                <a16:creationId xmlns:a16="http://schemas.microsoft.com/office/drawing/2014/main" id="{023FB0B4-1596-4422-930E-5014B96DC695}"/>
+                <a16:creationId xmlns:a16="http://schemas.microsoft.com/office/drawing/2014/main" id="{175721AA-0AED-4F0D-A665-B7546897B9E3}"/>
               </a:ext>
             </a:extLst>
           </p:cNvPr>
@@ -5643,7 +5643,7 @@
           <p:cNvPr id="22" name="">
             <a:extLst xmlns:a="http://schemas.openxmlformats.org/drawingml/2006/main">
               <a:ext uri="{FF2B5EF4-FFF2-40B4-BE49-F238E27FC236}">
-                <a16:creationId xmlns:a16="http://schemas.microsoft.com/office/drawing/2014/main" id="{C5739F65-C103-448F-93DA-467D5DD60130}"/>
+                <a16:creationId xmlns:a16="http://schemas.microsoft.com/office/drawing/2014/main" id="{23F7E3C9-34CC-4096-92DF-EE2D8CB627F8}"/>
               </a:ext>
             </a:extLst>
           </p:cNvPr>
@@ -5693,7 +5693,7 @@
           <p:cNvPr id="23" name="">
             <a:extLst xmlns:a="http://schemas.openxmlformats.org/drawingml/2006/main">
               <a:ext uri="{FF2B5EF4-FFF2-40B4-BE49-F238E27FC236}">
-                <a16:creationId xmlns:a16="http://schemas.microsoft.com/office/drawing/2014/main" id="{CE693665-A95F-4736-AF1E-CECCA3ED230D}"/>
+                <a16:creationId xmlns:a16="http://schemas.microsoft.com/office/drawing/2014/main" id="{87AC026C-244B-4187-9B90-519CA882D2B0}"/>
               </a:ext>
             </a:extLst>
           </p:cNvPr>
@@ -5726,7 +5726,7 @@
           <p:cNvPr id="24" name="">
             <a:extLst xmlns:a="http://schemas.openxmlformats.org/drawingml/2006/main">
               <a:ext uri="{FF2B5EF4-FFF2-40B4-BE49-F238E27FC236}">
-                <a16:creationId xmlns:a16="http://schemas.microsoft.com/office/drawing/2014/main" id="{B44CD6B7-0C5F-4905-9958-F1B4B0E03382}"/>
+                <a16:creationId xmlns:a16="http://schemas.microsoft.com/office/drawing/2014/main" id="{60DA643A-DEE3-41D6-98E6-1DB69A36D059}"/>
               </a:ext>
             </a:extLst>
           </p:cNvPr>
@@ -5776,7 +5776,7 @@
           <p:cNvPr id="25" name="">
             <a:extLst xmlns:a="http://schemas.openxmlformats.org/drawingml/2006/main">
               <a:ext uri="{FF2B5EF4-FFF2-40B4-BE49-F238E27FC236}">
-                <a16:creationId xmlns:a16="http://schemas.microsoft.com/office/drawing/2014/main" id="{C378CB72-4E61-4150-A58B-F344A05CB460}"/>
+                <a16:creationId xmlns:a16="http://schemas.microsoft.com/office/drawing/2014/main" id="{5B98BAA0-B8E3-4174-9834-90B04BF67D43}"/>
               </a:ext>
             </a:extLst>
           </p:cNvPr>
@@ -5826,7 +5826,7 @@
           <p:cNvPr id="26" name="">
             <a:extLst xmlns:a="http://schemas.openxmlformats.org/drawingml/2006/main">
               <a:ext uri="{FF2B5EF4-FFF2-40B4-BE49-F238E27FC236}">
-                <a16:creationId xmlns:a16="http://schemas.microsoft.com/office/drawing/2014/main" id="{5C124D62-A724-4920-8B14-1B0939686496}"/>
+                <a16:creationId xmlns:a16="http://schemas.microsoft.com/office/drawing/2014/main" id="{5DF525C7-D957-4E87-B5E2-0CB63ED89245}"/>
               </a:ext>
             </a:extLst>
           </p:cNvPr>
@@ -5859,7 +5859,7 @@
           <p:cNvPr id="27" name="">
             <a:extLst xmlns:a="http://schemas.openxmlformats.org/drawingml/2006/main">
               <a:ext uri="{FF2B5EF4-FFF2-40B4-BE49-F238E27FC236}">
-                <a16:creationId xmlns:a16="http://schemas.microsoft.com/office/drawing/2014/main" id="{F84EBA5D-EBAC-4A62-BAE2-F10A6281A95C}"/>
+                <a16:creationId xmlns:a16="http://schemas.microsoft.com/office/drawing/2014/main" id="{F477756F-4734-4A96-B040-3961CDD6CBAD}"/>
               </a:ext>
             </a:extLst>
           </p:cNvPr>
@@ -5909,7 +5909,7 @@
           <p:cNvPr id="28" name="">
             <a:extLst xmlns:a="http://schemas.openxmlformats.org/drawingml/2006/main">
               <a:ext uri="{FF2B5EF4-FFF2-40B4-BE49-F238E27FC236}">
-                <a16:creationId xmlns:a16="http://schemas.microsoft.com/office/drawing/2014/main" id="{DDD389E6-310C-4804-94DD-5A819AB92E4C}"/>
+                <a16:creationId xmlns:a16="http://schemas.microsoft.com/office/drawing/2014/main" id="{B050CC48-FCF2-43A9-8821-449DAEE0F45A}"/>
               </a:ext>
             </a:extLst>
           </p:cNvPr>
@@ -5959,7 +5959,7 @@
           <p:cNvPr id="29" name="">
             <a:extLst xmlns:a="http://schemas.openxmlformats.org/drawingml/2006/main">
               <a:ext uri="{FF2B5EF4-FFF2-40B4-BE49-F238E27FC236}">
-                <a16:creationId xmlns:a16="http://schemas.microsoft.com/office/drawing/2014/main" id="{9F9A6414-C36E-46C7-957D-ED34E634DB86}"/>
+                <a16:creationId xmlns:a16="http://schemas.microsoft.com/office/drawing/2014/main" id="{0AAEF66A-C1F2-4A36-AD51-D59B17CB25FE}"/>
               </a:ext>
             </a:extLst>
           </p:cNvPr>
@@ -5992,7 +5992,7 @@
           <p:cNvPr id="30" name="">
             <a:extLst xmlns:a="http://schemas.openxmlformats.org/drawingml/2006/main">
               <a:ext uri="{FF2B5EF4-FFF2-40B4-BE49-F238E27FC236}">
-                <a16:creationId xmlns:a16="http://schemas.microsoft.com/office/drawing/2014/main" id="{CB8EAFAA-13D3-48DF-8B08-F2FE4B28CAA3}"/>
+                <a16:creationId xmlns:a16="http://schemas.microsoft.com/office/drawing/2014/main" id="{EAFDC7F5-F6EB-414E-98A6-81FB6C695151}"/>
               </a:ext>
             </a:extLst>
           </p:cNvPr>
@@ -6042,7 +6042,7 @@
           <p:cNvPr id="31" name="">
             <a:extLst xmlns:a="http://schemas.openxmlformats.org/drawingml/2006/main">
               <a:ext uri="{FF2B5EF4-FFF2-40B4-BE49-F238E27FC236}">
-                <a16:creationId xmlns:a16="http://schemas.microsoft.com/office/drawing/2014/main" id="{0F0F9FAF-2183-46AE-88F6-FE0BF1270960}"/>
+                <a16:creationId xmlns:a16="http://schemas.microsoft.com/office/drawing/2014/main" id="{6FF05BEE-2321-42C1-8150-749374628CC4}"/>
               </a:ext>
             </a:extLst>
           </p:cNvPr>
@@ -6090,7 +6090,7 @@
     </p:spTree>
     <p:extLst>
       <p:ext uri="{BB962C8B-B14F-4D97-AF65-F5344CB8AC3E}">
-        <p14:creationId xmlns:p14="http://schemas.microsoft.com/office/powerpoint/2010/main" val="1207453285"/>
+        <p14:creationId xmlns:p14="http://schemas.microsoft.com/office/powerpoint/2010/main" val="1532343062"/>
       </p:ext>
     </p:extLst>
   </p:cSld>
@@ -6121,7 +6121,7 @@
           <p:cNvPr id="1" name="">
             <a:extLst xmlns:a="http://schemas.openxmlformats.org/drawingml/2006/main">
               <a:ext uri="{FF2B5EF4-FFF2-40B4-BE49-F238E27FC236}">
-                <a16:creationId xmlns:a16="http://schemas.microsoft.com/office/drawing/2014/main" id="{123F362E-8608-4F8A-800A-47F947502972}"/>
+                <a16:creationId xmlns:a16="http://schemas.microsoft.com/office/drawing/2014/main" id="{BFAC9A0E-2682-426D-B560-A520DD5D2F74}"/>
               </a:ext>
             </a:extLst>
           </p:cNvPr>
@@ -6156,7 +6156,7 @@
           <p:nvPr/>
         </p:nvPicPr>
         <p:blipFill>
-          <a:blip xmlns:r="http://schemas.openxmlformats.org/officeDocument/2006/relationships" xmlns:a="http://schemas.openxmlformats.org/drawingml/2006/main" r:embed="R36fe295be6aa436c"/>
+          <a:blip xmlns:r="http://schemas.openxmlformats.org/officeDocument/2006/relationships" xmlns:a="http://schemas.openxmlformats.org/drawingml/2006/main" r:embed="R9ff71eef40114adf"/>
           <a:stretch xmlns:a="http://schemas.openxmlformats.org/drawingml/2006/main"/>
         </p:blipFill>
         <p:spPr>
@@ -6174,7 +6174,7 @@
           <p:cNvPr id="3" name="">
             <a:extLst xmlns:a="http://schemas.openxmlformats.org/drawingml/2006/main">
               <a:ext uri="{FF2B5EF4-FFF2-40B4-BE49-F238E27FC236}">
-                <a16:creationId xmlns:a16="http://schemas.microsoft.com/office/drawing/2014/main" id="{7104BBDB-D688-4850-90F6-10D5C3267420}"/>
+                <a16:creationId xmlns:a16="http://schemas.microsoft.com/office/drawing/2014/main" id="{C7FDF7EC-D8ED-4286-B4EE-5CE34F82A9A1}"/>
               </a:ext>
             </a:extLst>
           </p:cNvPr>
@@ -6224,7 +6224,7 @@
           <p:cNvPr id="4" name="">
             <a:extLst xmlns:a="http://schemas.openxmlformats.org/drawingml/2006/main">
               <a:ext uri="{FF2B5EF4-FFF2-40B4-BE49-F238E27FC236}">
-                <a16:creationId xmlns:a16="http://schemas.microsoft.com/office/drawing/2014/main" id="{D4E91C68-36D1-4881-9759-745DD17F2CC0}"/>
+                <a16:creationId xmlns:a16="http://schemas.microsoft.com/office/drawing/2014/main" id="{6105637F-83BA-4247-A7E7-D4DAE8B54F3E}"/>
               </a:ext>
             </a:extLst>
           </p:cNvPr>
@@ -6257,7 +6257,7 @@
           <p:cNvPr id="5" name="">
             <a:extLst xmlns:a="http://schemas.openxmlformats.org/drawingml/2006/main">
               <a:ext uri="{FF2B5EF4-FFF2-40B4-BE49-F238E27FC236}">
-                <a16:creationId xmlns:a16="http://schemas.microsoft.com/office/drawing/2014/main" id="{9A090A20-25B0-42D6-9CFD-22268BA92831}"/>
+                <a16:creationId xmlns:a16="http://schemas.microsoft.com/office/drawing/2014/main" id="{D34B97AF-68CB-470C-B61D-49EC1576F548}"/>
               </a:ext>
             </a:extLst>
           </p:cNvPr>
@@ -6288,7 +6288,7 @@
           <p:cNvPr id="6" name="">
             <a:extLst xmlns:a="http://schemas.openxmlformats.org/drawingml/2006/main">
               <a:ext uri="{FF2B5EF4-FFF2-40B4-BE49-F238E27FC236}">
-                <a16:creationId xmlns:a16="http://schemas.microsoft.com/office/drawing/2014/main" id="{05F975A5-608D-40DF-8548-DBE26B255006}"/>
+                <a16:creationId xmlns:a16="http://schemas.microsoft.com/office/drawing/2014/main" id="{142352EA-DC8E-4250-86E7-BED2380D69D0}"/>
               </a:ext>
             </a:extLst>
           </p:cNvPr>
@@ -6338,7 +6338,7 @@
           <p:cNvPr id="7" name="">
             <a:extLst xmlns:a="http://schemas.openxmlformats.org/drawingml/2006/main">
               <a:ext uri="{FF2B5EF4-FFF2-40B4-BE49-F238E27FC236}">
-                <a16:creationId xmlns:a16="http://schemas.microsoft.com/office/drawing/2014/main" id="{B3BDD7DD-6A81-4AAD-8870-26FD309AA944}"/>
+                <a16:creationId xmlns:a16="http://schemas.microsoft.com/office/drawing/2014/main" id="{A7B87033-C9C4-4B31-A2AD-C8D98C027F21}"/>
               </a:ext>
             </a:extLst>
           </p:cNvPr>
@@ -6388,7 +6388,7 @@
           <p:cNvPr id="8" name="">
             <a:extLst xmlns:a="http://schemas.openxmlformats.org/drawingml/2006/main">
               <a:ext uri="{FF2B5EF4-FFF2-40B4-BE49-F238E27FC236}">
-                <a16:creationId xmlns:a16="http://schemas.microsoft.com/office/drawing/2014/main" id="{0E77383A-C895-465F-985F-5771D191E224}"/>
+                <a16:creationId xmlns:a16="http://schemas.microsoft.com/office/drawing/2014/main" id="{2DD6D595-313C-4F67-8EDA-9DBB2C3E5142}"/>
               </a:ext>
             </a:extLst>
           </p:cNvPr>
@@ -6421,7 +6421,7 @@
           <p:cNvPr id="9" name="">
             <a:extLst xmlns:a="http://schemas.openxmlformats.org/drawingml/2006/main">
               <a:ext uri="{FF2B5EF4-FFF2-40B4-BE49-F238E27FC236}">
-                <a16:creationId xmlns:a16="http://schemas.microsoft.com/office/drawing/2014/main" id="{2166EA18-9145-4FCB-ABAD-A3B62C3B68BC}"/>
+                <a16:creationId xmlns:a16="http://schemas.microsoft.com/office/drawing/2014/main" id="{C0A6383E-8684-4684-BBFE-0CF86CA3878D}"/>
               </a:ext>
             </a:extLst>
           </p:cNvPr>
@@ -6471,7 +6471,7 @@
           <p:cNvPr id="10" name="">
             <a:extLst xmlns:a="http://schemas.openxmlformats.org/drawingml/2006/main">
               <a:ext uri="{FF2B5EF4-FFF2-40B4-BE49-F238E27FC236}">
-                <a16:creationId xmlns:a16="http://schemas.microsoft.com/office/drawing/2014/main" id="{6C3AEB8A-D491-433F-9755-E3956AC0F415}"/>
+                <a16:creationId xmlns:a16="http://schemas.microsoft.com/office/drawing/2014/main" id="{9003DD58-D29E-4403-A07F-6BA10CF98935}"/>
               </a:ext>
             </a:extLst>
           </p:cNvPr>
@@ -6521,7 +6521,7 @@
           <p:cNvPr id="11" name="">
             <a:extLst xmlns:a="http://schemas.openxmlformats.org/drawingml/2006/main">
               <a:ext uri="{FF2B5EF4-FFF2-40B4-BE49-F238E27FC236}">
-                <a16:creationId xmlns:a16="http://schemas.microsoft.com/office/drawing/2014/main" id="{AD445B7A-EBAC-446A-B3D2-0CE32791B2CF}"/>
+                <a16:creationId xmlns:a16="http://schemas.microsoft.com/office/drawing/2014/main" id="{300048E2-C240-4CF7-94AD-54535BF22A55}"/>
               </a:ext>
             </a:extLst>
           </p:cNvPr>
@@ -6571,7 +6571,7 @@
           <p:cNvPr id="12" name="">
             <a:extLst xmlns:a="http://schemas.openxmlformats.org/drawingml/2006/main">
               <a:ext uri="{FF2B5EF4-FFF2-40B4-BE49-F238E27FC236}">
-                <a16:creationId xmlns:a16="http://schemas.microsoft.com/office/drawing/2014/main" id="{64A52643-3B8C-40E3-A2AD-112566ECAE18}"/>
+                <a16:creationId xmlns:a16="http://schemas.microsoft.com/office/drawing/2014/main" id="{9BB8583F-E814-4E91-A0F3-03F521639520}"/>
               </a:ext>
             </a:extLst>
           </p:cNvPr>
@@ -6621,7 +6621,7 @@
           <p:cNvPr id="13" name="">
             <a:extLst xmlns:a="http://schemas.openxmlformats.org/drawingml/2006/main">
               <a:ext uri="{FF2B5EF4-FFF2-40B4-BE49-F238E27FC236}">
-                <a16:creationId xmlns:a16="http://schemas.microsoft.com/office/drawing/2014/main" id="{B1851367-B7E0-4D31-9316-54DCA92952CB}"/>
+                <a16:creationId xmlns:a16="http://schemas.microsoft.com/office/drawing/2014/main" id="{0AA13C5D-3871-43D5-8292-240F857704C5}"/>
               </a:ext>
             </a:extLst>
           </p:cNvPr>
@@ -6671,7 +6671,7 @@
           <p:cNvPr id="14" name="">
             <a:extLst xmlns:a="http://schemas.openxmlformats.org/drawingml/2006/main">
               <a:ext uri="{FF2B5EF4-FFF2-40B4-BE49-F238E27FC236}">
-                <a16:creationId xmlns:a16="http://schemas.microsoft.com/office/drawing/2014/main" id="{7FA5C182-3F57-44A5-8D48-15396DD17542}"/>
+                <a16:creationId xmlns:a16="http://schemas.microsoft.com/office/drawing/2014/main" id="{44919460-861F-4DB9-A2B2-C5C51F7923E4}"/>
               </a:ext>
             </a:extLst>
           </p:cNvPr>
@@ -6702,7 +6702,7 @@
           <p:cNvPr id="15" name="">
             <a:extLst xmlns:a="http://schemas.openxmlformats.org/drawingml/2006/main">
               <a:ext uri="{FF2B5EF4-FFF2-40B4-BE49-F238E27FC236}">
-                <a16:creationId xmlns:a16="http://schemas.microsoft.com/office/drawing/2014/main" id="{4AAC2F93-1BBC-43F1-8C12-6FF7E3793960}"/>
+                <a16:creationId xmlns:a16="http://schemas.microsoft.com/office/drawing/2014/main" id="{9F5DCB6B-E69F-48CC-9F97-D9A0292D2EC6}"/>
               </a:ext>
             </a:extLst>
           </p:cNvPr>
@@ -6735,7 +6735,7 @@
           <p:cNvPr id="16" name="">
             <a:extLst xmlns:a="http://schemas.openxmlformats.org/drawingml/2006/main">
               <a:ext uri="{FF2B5EF4-FFF2-40B4-BE49-F238E27FC236}">
-                <a16:creationId xmlns:a16="http://schemas.microsoft.com/office/drawing/2014/main" id="{D5D903BA-6493-42DC-A3E8-A55FF2D76638}"/>
+                <a16:creationId xmlns:a16="http://schemas.microsoft.com/office/drawing/2014/main" id="{81E3BFCD-518C-4DEF-ADEE-CD7A07656098}"/>
               </a:ext>
             </a:extLst>
           </p:cNvPr>
@@ -6785,7 +6785,7 @@
           <p:cNvPr id="17" name="">
             <a:extLst xmlns:a="http://schemas.openxmlformats.org/drawingml/2006/main">
               <a:ext uri="{FF2B5EF4-FFF2-40B4-BE49-F238E27FC236}">
-                <a16:creationId xmlns:a16="http://schemas.microsoft.com/office/drawing/2014/main" id="{74637499-F642-49BC-907D-51C8748AE954}"/>
+                <a16:creationId xmlns:a16="http://schemas.microsoft.com/office/drawing/2014/main" id="{F7C33FA8-7DF5-4735-8370-EA96A4E98B84}"/>
               </a:ext>
             </a:extLst>
           </p:cNvPr>
@@ -6835,7 +6835,7 @@
           <p:cNvPr id="18" name="">
             <a:extLst xmlns:a="http://schemas.openxmlformats.org/drawingml/2006/main">
               <a:ext uri="{FF2B5EF4-FFF2-40B4-BE49-F238E27FC236}">
-                <a16:creationId xmlns:a16="http://schemas.microsoft.com/office/drawing/2014/main" id="{D9BF340E-3189-45F9-A2BE-137D1FE8AA87}"/>
+                <a16:creationId xmlns:a16="http://schemas.microsoft.com/office/drawing/2014/main" id="{5BF8EF3B-EAB6-4435-BB40-BF57A64AAA17}"/>
               </a:ext>
             </a:extLst>
           </p:cNvPr>
@@ -6885,7 +6885,7 @@
           <p:cNvPr id="19" name="">
             <a:extLst xmlns:a="http://schemas.openxmlformats.org/drawingml/2006/main">
               <a:ext uri="{FF2B5EF4-FFF2-40B4-BE49-F238E27FC236}">
-                <a16:creationId xmlns:a16="http://schemas.microsoft.com/office/drawing/2014/main" id="{0395D36E-8027-435F-92FA-0404ED703FE1}"/>
+                <a16:creationId xmlns:a16="http://schemas.microsoft.com/office/drawing/2014/main" id="{F87C1598-7F03-45F7-81A9-8112976F0396}"/>
               </a:ext>
             </a:extLst>
           </p:cNvPr>
@@ -6935,7 +6935,7 @@
           <p:cNvPr id="20" name="">
             <a:extLst xmlns:a="http://schemas.openxmlformats.org/drawingml/2006/main">
               <a:ext uri="{FF2B5EF4-FFF2-40B4-BE49-F238E27FC236}">
-                <a16:creationId xmlns:a16="http://schemas.microsoft.com/office/drawing/2014/main" id="{C344BA87-1AC5-4A81-9B87-C51EBD10EE8B}"/>
+                <a16:creationId xmlns:a16="http://schemas.microsoft.com/office/drawing/2014/main" id="{F5518C4B-3741-4694-A201-AF5D7FC84852}"/>
               </a:ext>
             </a:extLst>
           </p:cNvPr>
@@ -6985,7 +6985,7 @@
           <p:cNvPr id="21" name="">
             <a:extLst xmlns:a="http://schemas.openxmlformats.org/drawingml/2006/main">
               <a:ext uri="{FF2B5EF4-FFF2-40B4-BE49-F238E27FC236}">
-                <a16:creationId xmlns:a16="http://schemas.microsoft.com/office/drawing/2014/main" id="{093E6380-3F70-4EF0-A63D-B68C08C1E70E}"/>
+                <a16:creationId xmlns:a16="http://schemas.microsoft.com/office/drawing/2014/main" id="{2C722705-AB80-49F0-A2A2-2899901E185C}"/>
               </a:ext>
             </a:extLst>
           </p:cNvPr>
@@ -7016,7 +7016,7 @@
           <p:cNvPr id="22" name="">
             <a:extLst xmlns:a="http://schemas.openxmlformats.org/drawingml/2006/main">
               <a:ext uri="{FF2B5EF4-FFF2-40B4-BE49-F238E27FC236}">
-                <a16:creationId xmlns:a16="http://schemas.microsoft.com/office/drawing/2014/main" id="{FBD1CF47-52CF-4A13-BB68-DE112E4505AA}"/>
+                <a16:creationId xmlns:a16="http://schemas.microsoft.com/office/drawing/2014/main" id="{6F14C373-7D1A-4324-8636-51402C9F7259}"/>
               </a:ext>
             </a:extLst>
           </p:cNvPr>
@@ -7049,7 +7049,7 @@
           <p:cNvPr id="23" name="">
             <a:extLst xmlns:a="http://schemas.openxmlformats.org/drawingml/2006/main">
               <a:ext uri="{FF2B5EF4-FFF2-40B4-BE49-F238E27FC236}">
-                <a16:creationId xmlns:a16="http://schemas.microsoft.com/office/drawing/2014/main" id="{97A05FBC-31FF-42E0-B2DC-3495176B99F5}"/>
+                <a16:creationId xmlns:a16="http://schemas.microsoft.com/office/drawing/2014/main" id="{2D9195EF-BBDF-45E4-A563-67321F56C64C}"/>
               </a:ext>
             </a:extLst>
           </p:cNvPr>
@@ -7099,7 +7099,7 @@
           <p:cNvPr id="24" name="">
             <a:extLst xmlns:a="http://schemas.openxmlformats.org/drawingml/2006/main">
               <a:ext uri="{FF2B5EF4-FFF2-40B4-BE49-F238E27FC236}">
-                <a16:creationId xmlns:a16="http://schemas.microsoft.com/office/drawing/2014/main" id="{AD4AFF18-9D2C-4FD0-BA26-99FF4C27E7DD}"/>
+                <a16:creationId xmlns:a16="http://schemas.microsoft.com/office/drawing/2014/main" id="{CB350DAD-D5A4-4C2C-9896-63B8773A688B}"/>
               </a:ext>
             </a:extLst>
           </p:cNvPr>
@@ -7149,7 +7149,7 @@
           <p:cNvPr id="25" name="">
             <a:extLst xmlns:a="http://schemas.openxmlformats.org/drawingml/2006/main">
               <a:ext uri="{FF2B5EF4-FFF2-40B4-BE49-F238E27FC236}">
-                <a16:creationId xmlns:a16="http://schemas.microsoft.com/office/drawing/2014/main" id="{82B4CFE1-CD21-4D63-8AC6-B298C9E9FA3A}"/>
+                <a16:creationId xmlns:a16="http://schemas.microsoft.com/office/drawing/2014/main" id="{6B008DBE-CBC9-45FE-A2D3-BDA450624006}"/>
               </a:ext>
             </a:extLst>
           </p:cNvPr>
@@ -7199,7 +7199,7 @@
           <p:cNvPr id="26" name="">
             <a:extLst xmlns:a="http://schemas.openxmlformats.org/drawingml/2006/main">
               <a:ext uri="{FF2B5EF4-FFF2-40B4-BE49-F238E27FC236}">
-                <a16:creationId xmlns:a16="http://schemas.microsoft.com/office/drawing/2014/main" id="{EAA229A0-DC44-4BAB-AFE7-42777D3D3751}"/>
+                <a16:creationId xmlns:a16="http://schemas.microsoft.com/office/drawing/2014/main" id="{ADEE6DD2-85AC-4A4C-BA91-CE00022F03E7}"/>
               </a:ext>
             </a:extLst>
           </p:cNvPr>
@@ -7249,7 +7249,7 @@
           <p:cNvPr id="27" name="">
             <a:extLst xmlns:a="http://schemas.openxmlformats.org/drawingml/2006/main">
               <a:ext uri="{FF2B5EF4-FFF2-40B4-BE49-F238E27FC236}">
-                <a16:creationId xmlns:a16="http://schemas.microsoft.com/office/drawing/2014/main" id="{9F19C6FD-65B9-4D7D-A48B-33EEF8C301E7}"/>
+                <a16:creationId xmlns:a16="http://schemas.microsoft.com/office/drawing/2014/main" id="{22D56DA4-2934-43E1-B073-E937C09B4A25}"/>
               </a:ext>
             </a:extLst>
           </p:cNvPr>
@@ -7299,7 +7299,7 @@
           <p:cNvPr id="28" name="">
             <a:extLst xmlns:a="http://schemas.openxmlformats.org/drawingml/2006/main">
               <a:ext uri="{FF2B5EF4-FFF2-40B4-BE49-F238E27FC236}">
-                <a16:creationId xmlns:a16="http://schemas.microsoft.com/office/drawing/2014/main" id="{EE9F351A-14EC-4FC9-9F9C-F295BC274B9B}"/>
+                <a16:creationId xmlns:a16="http://schemas.microsoft.com/office/drawing/2014/main" id="{66BFDBB5-85B5-4121-AB22-0FC49D929B78}"/>
               </a:ext>
             </a:extLst>
           </p:cNvPr>
@@ -7330,7 +7330,7 @@
           <p:cNvPr id="29" name="">
             <a:extLst xmlns:a="http://schemas.openxmlformats.org/drawingml/2006/main">
               <a:ext uri="{FF2B5EF4-FFF2-40B4-BE49-F238E27FC236}">
-                <a16:creationId xmlns:a16="http://schemas.microsoft.com/office/drawing/2014/main" id="{9F7623B3-2F9F-460F-8CDF-AD4A0C03EB9E}"/>
+                <a16:creationId xmlns:a16="http://schemas.microsoft.com/office/drawing/2014/main" id="{DC078230-6AFA-494D-A549-042EB9BF4DDD}"/>
               </a:ext>
             </a:extLst>
           </p:cNvPr>
@@ -7363,7 +7363,7 @@
           <p:cNvPr id="30" name="">
             <a:extLst xmlns:a="http://schemas.openxmlformats.org/drawingml/2006/main">
               <a:ext uri="{FF2B5EF4-FFF2-40B4-BE49-F238E27FC236}">
-                <a16:creationId xmlns:a16="http://schemas.microsoft.com/office/drawing/2014/main" id="{67D83E81-F13A-42A2-9AC8-8C9962B4E094}"/>
+                <a16:creationId xmlns:a16="http://schemas.microsoft.com/office/drawing/2014/main" id="{8B4AF1A3-BF64-45F5-8222-C4F49243D4AA}"/>
               </a:ext>
             </a:extLst>
           </p:cNvPr>
@@ -7413,7 +7413,7 @@
           <p:cNvPr id="31" name="">
             <a:extLst xmlns:a="http://schemas.openxmlformats.org/drawingml/2006/main">
               <a:ext uri="{FF2B5EF4-FFF2-40B4-BE49-F238E27FC236}">
-                <a16:creationId xmlns:a16="http://schemas.microsoft.com/office/drawing/2014/main" id="{921CC70F-799C-43F9-BC59-05EA4C1229A2}"/>
+                <a16:creationId xmlns:a16="http://schemas.microsoft.com/office/drawing/2014/main" id="{2BE8AF71-2981-4771-95CF-42B5FBD489CC}"/>
               </a:ext>
             </a:extLst>
           </p:cNvPr>
@@ -7463,7 +7463,7 @@
           <p:cNvPr id="32" name="">
             <a:extLst xmlns:a="http://schemas.openxmlformats.org/drawingml/2006/main">
               <a:ext uri="{FF2B5EF4-FFF2-40B4-BE49-F238E27FC236}">
-                <a16:creationId xmlns:a16="http://schemas.microsoft.com/office/drawing/2014/main" id="{97430D30-944E-4A8A-87CC-78502B4B6634}"/>
+                <a16:creationId xmlns:a16="http://schemas.microsoft.com/office/drawing/2014/main" id="{AFCCB569-C7EE-473D-A117-59712923D163}"/>
               </a:ext>
             </a:extLst>
           </p:cNvPr>
@@ -7513,7 +7513,7 @@
           <p:cNvPr id="33" name="">
             <a:extLst xmlns:a="http://schemas.openxmlformats.org/drawingml/2006/main">
               <a:ext uri="{FF2B5EF4-FFF2-40B4-BE49-F238E27FC236}">
-                <a16:creationId xmlns:a16="http://schemas.microsoft.com/office/drawing/2014/main" id="{E49D9875-1B4C-47B9-8DD8-1E6E98D88064}"/>
+                <a16:creationId xmlns:a16="http://schemas.microsoft.com/office/drawing/2014/main" id="{CFB2BEE3-50BD-4F1C-A0E0-AA06AE461A59}"/>
               </a:ext>
             </a:extLst>
           </p:cNvPr>
@@ -7563,7 +7563,7 @@
           <p:cNvPr id="34" name="">
             <a:extLst xmlns:a="http://schemas.openxmlformats.org/drawingml/2006/main">
               <a:ext uri="{FF2B5EF4-FFF2-40B4-BE49-F238E27FC236}">
-                <a16:creationId xmlns:a16="http://schemas.microsoft.com/office/drawing/2014/main" id="{6A121E7A-A5CF-4BEE-A3DD-379B1295BFA5}"/>
+                <a16:creationId xmlns:a16="http://schemas.microsoft.com/office/drawing/2014/main" id="{D1859288-F2A6-45D1-9288-B53BA4827E63}"/>
               </a:ext>
             </a:extLst>
           </p:cNvPr>
@@ -7611,7 +7611,7 @@
     </p:spTree>
     <p:extLst>
       <p:ext uri="{BB962C8B-B14F-4D97-AF65-F5344CB8AC3E}">
-        <p14:creationId xmlns:p14="http://schemas.microsoft.com/office/powerpoint/2010/main" val="1283516650"/>
+        <p14:creationId xmlns:p14="http://schemas.microsoft.com/office/powerpoint/2010/main" val="1781785763"/>
       </p:ext>
     </p:extLst>
   </p:cSld>
@@ -7642,7 +7642,7 @@
           <p:cNvPr id="1" name="">
             <a:extLst xmlns:a="http://schemas.openxmlformats.org/drawingml/2006/main">
               <a:ext uri="{FF2B5EF4-FFF2-40B4-BE49-F238E27FC236}">
-                <a16:creationId xmlns:a16="http://schemas.microsoft.com/office/drawing/2014/main" id="{53C33880-2579-4A76-BDD4-67F19783AB35}"/>
+                <a16:creationId xmlns:a16="http://schemas.microsoft.com/office/drawing/2014/main" id="{612807D8-546F-4D65-AB08-655F15213C58}"/>
               </a:ext>
             </a:extLst>
           </p:cNvPr>
@@ -7677,7 +7677,7 @@
           <p:nvPr/>
         </p:nvPicPr>
         <p:blipFill>
-          <a:blip xmlns:r="http://schemas.openxmlformats.org/officeDocument/2006/relationships" xmlns:a="http://schemas.openxmlformats.org/drawingml/2006/main" r:embed="R6e681fbc9e164bc3"/>
+          <a:blip xmlns:r="http://schemas.openxmlformats.org/officeDocument/2006/relationships" xmlns:a="http://schemas.openxmlformats.org/drawingml/2006/main" r:embed="R814df443ed7a43c0"/>
           <a:stretch xmlns:a="http://schemas.openxmlformats.org/drawingml/2006/main"/>
         </p:blipFill>
         <p:spPr>
@@ -7695,7 +7695,7 @@
           <p:cNvPr id="3" name="">
             <a:extLst xmlns:a="http://schemas.openxmlformats.org/drawingml/2006/main">
               <a:ext uri="{FF2B5EF4-FFF2-40B4-BE49-F238E27FC236}">
-                <a16:creationId xmlns:a16="http://schemas.microsoft.com/office/drawing/2014/main" id="{C523FBC0-5B78-4DEA-B60D-063CC9F06A69}"/>
+                <a16:creationId xmlns:a16="http://schemas.microsoft.com/office/drawing/2014/main" id="{C585F69D-B4BE-4265-B618-DB0DD524759C}"/>
               </a:ext>
             </a:extLst>
           </p:cNvPr>
@@ -7745,7 +7745,7 @@
           <p:cNvPr id="4" name="">
             <a:extLst xmlns:a="http://schemas.openxmlformats.org/drawingml/2006/main">
               <a:ext uri="{FF2B5EF4-FFF2-40B4-BE49-F238E27FC236}">
-                <a16:creationId xmlns:a16="http://schemas.microsoft.com/office/drawing/2014/main" id="{505259C6-AC96-4BAD-B65E-FA4F9F316B0B}"/>
+                <a16:creationId xmlns:a16="http://schemas.microsoft.com/office/drawing/2014/main" id="{3120442A-E2C6-4DD3-9FD4-D44DE706445C}"/>
               </a:ext>
             </a:extLst>
           </p:cNvPr>
@@ -7778,7 +7778,7 @@
           <p:cNvPr id="5" name="">
             <a:extLst xmlns:a="http://schemas.openxmlformats.org/drawingml/2006/main">
               <a:ext uri="{FF2B5EF4-FFF2-40B4-BE49-F238E27FC236}">
-                <a16:creationId xmlns:a16="http://schemas.microsoft.com/office/drawing/2014/main" id="{736CA475-CFAC-4D35-A199-0E74BCEBF11D}"/>
+                <a16:creationId xmlns:a16="http://schemas.microsoft.com/office/drawing/2014/main" id="{62E4C730-83A3-41B3-A84E-C17C60C210DA}"/>
               </a:ext>
             </a:extLst>
           </p:cNvPr>
@@ -7809,7 +7809,7 @@
           <p:cNvPr id="6" name="">
             <a:extLst xmlns:a="http://schemas.openxmlformats.org/drawingml/2006/main">
               <a:ext uri="{FF2B5EF4-FFF2-40B4-BE49-F238E27FC236}">
-                <a16:creationId xmlns:a16="http://schemas.microsoft.com/office/drawing/2014/main" id="{1AB0604D-F243-42B3-8A75-B1B2F48B5E7D}"/>
+                <a16:creationId xmlns:a16="http://schemas.microsoft.com/office/drawing/2014/main" id="{B9BC8E47-4832-4893-A9B5-D88A2FC024AE}"/>
               </a:ext>
             </a:extLst>
           </p:cNvPr>
@@ -7859,7 +7859,7 @@
           <p:cNvPr id="7" name="">
             <a:extLst xmlns:a="http://schemas.openxmlformats.org/drawingml/2006/main">
               <a:ext uri="{FF2B5EF4-FFF2-40B4-BE49-F238E27FC236}">
-                <a16:creationId xmlns:a16="http://schemas.microsoft.com/office/drawing/2014/main" id="{DDB3D77C-A0B5-4EA3-94D0-A788DAE2FCE4}"/>
+                <a16:creationId xmlns:a16="http://schemas.microsoft.com/office/drawing/2014/main" id="{D6FF3005-E3D0-44E1-AF9B-3E76A046F181}"/>
               </a:ext>
             </a:extLst>
           </p:cNvPr>
@@ -7909,7 +7909,7 @@
           <p:cNvPr id="8" name="">
             <a:extLst xmlns:a="http://schemas.openxmlformats.org/drawingml/2006/main">
               <a:ext uri="{FF2B5EF4-FFF2-40B4-BE49-F238E27FC236}">
-                <a16:creationId xmlns:a16="http://schemas.microsoft.com/office/drawing/2014/main" id="{9A669DC8-48CC-44A5-A762-92F0A2DE28E3}"/>
+                <a16:creationId xmlns:a16="http://schemas.microsoft.com/office/drawing/2014/main" id="{E0F50E79-0672-4110-B64A-590F78219565}"/>
               </a:ext>
             </a:extLst>
           </p:cNvPr>
@@ -7944,7 +7944,7 @@
           <p:cNvPr id="9" name="">
             <a:extLst xmlns:a="http://schemas.openxmlformats.org/drawingml/2006/main">
               <a:ext uri="{FF2B5EF4-FFF2-40B4-BE49-F238E27FC236}">
-                <a16:creationId xmlns:a16="http://schemas.microsoft.com/office/drawing/2014/main" id="{F6C007F6-EABB-45AA-AD64-BFE48A476414}"/>
+                <a16:creationId xmlns:a16="http://schemas.microsoft.com/office/drawing/2014/main" id="{6306B3B1-B374-46D5-8DF6-36432F170DDF}"/>
               </a:ext>
             </a:extLst>
           </p:cNvPr>
@@ -7994,7 +7994,7 @@
           <p:cNvPr id="10" name="">
             <a:extLst xmlns:a="http://schemas.openxmlformats.org/drawingml/2006/main">
               <a:ext uri="{FF2B5EF4-FFF2-40B4-BE49-F238E27FC236}">
-                <a16:creationId xmlns:a16="http://schemas.microsoft.com/office/drawing/2014/main" id="{866061CA-87FE-46C0-9B02-695802255901}"/>
+                <a16:creationId xmlns:a16="http://schemas.microsoft.com/office/drawing/2014/main" id="{FBA64B0F-966D-48A9-BAC6-375B38E829E7}"/>
               </a:ext>
             </a:extLst>
           </p:cNvPr>
@@ -8044,7 +8044,7 @@
           <p:cNvPr id="11" name="">
             <a:extLst xmlns:a="http://schemas.openxmlformats.org/drawingml/2006/main">
               <a:ext uri="{FF2B5EF4-FFF2-40B4-BE49-F238E27FC236}">
-                <a16:creationId xmlns:a16="http://schemas.microsoft.com/office/drawing/2014/main" id="{536BFEA5-48BD-437B-8E02-8CB9C1C80432}"/>
+                <a16:creationId xmlns:a16="http://schemas.microsoft.com/office/drawing/2014/main" id="{D5215E32-5BEC-4A1F-A8DB-13DC5E298378}"/>
               </a:ext>
             </a:extLst>
           </p:cNvPr>
@@ -8094,7 +8094,7 @@
           <p:cNvPr id="12" name="">
             <a:extLst xmlns:a="http://schemas.openxmlformats.org/drawingml/2006/main">
               <a:ext uri="{FF2B5EF4-FFF2-40B4-BE49-F238E27FC236}">
-                <a16:creationId xmlns:a16="http://schemas.microsoft.com/office/drawing/2014/main" id="{C5AEDC15-BA24-4147-A703-6EBF84509A40}"/>
+                <a16:creationId xmlns:a16="http://schemas.microsoft.com/office/drawing/2014/main" id="{24A615D5-3282-431C-B76B-30812A1DCDE7}"/>
               </a:ext>
             </a:extLst>
           </p:cNvPr>
@@ -8125,7 +8125,7 @@
           <p:cNvPr id="13" name="">
             <a:extLst xmlns:a="http://schemas.openxmlformats.org/drawingml/2006/main">
               <a:ext uri="{FF2B5EF4-FFF2-40B4-BE49-F238E27FC236}">
-                <a16:creationId xmlns:a16="http://schemas.microsoft.com/office/drawing/2014/main" id="{61DF2EC1-0AD0-4408-833E-DA704D9BE1F9}"/>
+                <a16:creationId xmlns:a16="http://schemas.microsoft.com/office/drawing/2014/main" id="{A3565492-A95D-4BA1-ADF0-EBEA45E85674}"/>
               </a:ext>
             </a:extLst>
           </p:cNvPr>
@@ -8175,7 +8175,7 @@
           <p:cNvPr id="14" name="">
             <a:extLst xmlns:a="http://schemas.openxmlformats.org/drawingml/2006/main">
               <a:ext uri="{FF2B5EF4-FFF2-40B4-BE49-F238E27FC236}">
-                <a16:creationId xmlns:a16="http://schemas.microsoft.com/office/drawing/2014/main" id="{64094330-5648-4DB5-92D9-170CF503DDC1}"/>
+                <a16:creationId xmlns:a16="http://schemas.microsoft.com/office/drawing/2014/main" id="{AD8A958C-1E2E-443F-A5C7-E650707D2ABA}"/>
               </a:ext>
             </a:extLst>
           </p:cNvPr>
@@ -8225,7 +8225,7 @@
           <p:cNvPr id="15" name="">
             <a:extLst xmlns:a="http://schemas.openxmlformats.org/drawingml/2006/main">
               <a:ext uri="{FF2B5EF4-FFF2-40B4-BE49-F238E27FC236}">
-                <a16:creationId xmlns:a16="http://schemas.microsoft.com/office/drawing/2014/main" id="{941BC8EE-D7DD-493A-B377-82C75189C816}"/>
+                <a16:creationId xmlns:a16="http://schemas.microsoft.com/office/drawing/2014/main" id="{39228D5F-B728-478C-B879-464E7F2818EC}"/>
               </a:ext>
             </a:extLst>
           </p:cNvPr>
@@ -8275,7 +8275,7 @@
           <p:cNvPr id="16" name="">
             <a:extLst xmlns:a="http://schemas.openxmlformats.org/drawingml/2006/main">
               <a:ext uri="{FF2B5EF4-FFF2-40B4-BE49-F238E27FC236}">
-                <a16:creationId xmlns:a16="http://schemas.microsoft.com/office/drawing/2014/main" id="{51BC1971-0AED-48C3-8653-6D90C2F412B9}"/>
+                <a16:creationId xmlns:a16="http://schemas.microsoft.com/office/drawing/2014/main" id="{243A1FA2-95B4-415D-9EB3-E5C6EFE8559D}"/>
               </a:ext>
             </a:extLst>
           </p:cNvPr>
@@ -8325,7 +8325,7 @@
           <p:cNvPr id="17" name="">
             <a:extLst xmlns:a="http://schemas.openxmlformats.org/drawingml/2006/main">
               <a:ext uri="{FF2B5EF4-FFF2-40B4-BE49-F238E27FC236}">
-                <a16:creationId xmlns:a16="http://schemas.microsoft.com/office/drawing/2014/main" id="{7489387E-C7D7-42CF-B7CD-76EA4C3130F4}"/>
+                <a16:creationId xmlns:a16="http://schemas.microsoft.com/office/drawing/2014/main" id="{50040F34-9BA9-4195-A844-1543FA5EA1A8}"/>
               </a:ext>
             </a:extLst>
           </p:cNvPr>
@@ -8360,7 +8360,7 @@
           <p:cNvPr id="18" name="">
             <a:extLst xmlns:a="http://schemas.openxmlformats.org/drawingml/2006/main">
               <a:ext uri="{FF2B5EF4-FFF2-40B4-BE49-F238E27FC236}">
-                <a16:creationId xmlns:a16="http://schemas.microsoft.com/office/drawing/2014/main" id="{38B8FD0F-BEC8-42F8-A62A-47FBBCB07C43}"/>
+                <a16:creationId xmlns:a16="http://schemas.microsoft.com/office/drawing/2014/main" id="{4472998A-0729-40E5-95DC-5F54688CB852}"/>
               </a:ext>
             </a:extLst>
           </p:cNvPr>
@@ -8410,7 +8410,7 @@
           <p:cNvPr id="19" name="">
             <a:extLst xmlns:a="http://schemas.openxmlformats.org/drawingml/2006/main">
               <a:ext uri="{FF2B5EF4-FFF2-40B4-BE49-F238E27FC236}">
-                <a16:creationId xmlns:a16="http://schemas.microsoft.com/office/drawing/2014/main" id="{0440E5BB-4303-456D-808E-B3C27FEE84F0}"/>
+                <a16:creationId xmlns:a16="http://schemas.microsoft.com/office/drawing/2014/main" id="{C9EAB7FF-AC5D-4236-A5C0-0CCD8BD1BC4E}"/>
               </a:ext>
             </a:extLst>
           </p:cNvPr>
@@ -8460,7 +8460,7 @@
           <p:cNvPr id="20" name="">
             <a:extLst xmlns:a="http://schemas.openxmlformats.org/drawingml/2006/main">
               <a:ext uri="{FF2B5EF4-FFF2-40B4-BE49-F238E27FC236}">
-                <a16:creationId xmlns:a16="http://schemas.microsoft.com/office/drawing/2014/main" id="{48E37FB6-1705-4835-9F4D-048FE4A86BCA}"/>
+                <a16:creationId xmlns:a16="http://schemas.microsoft.com/office/drawing/2014/main" id="{A0916907-C5DD-471D-8AFC-BE0AEB173FC8}"/>
               </a:ext>
             </a:extLst>
           </p:cNvPr>
@@ -8510,7 +8510,7 @@
           <p:cNvPr id="21" name="">
             <a:extLst xmlns:a="http://schemas.openxmlformats.org/drawingml/2006/main">
               <a:ext uri="{FF2B5EF4-FFF2-40B4-BE49-F238E27FC236}">
-                <a16:creationId xmlns:a16="http://schemas.microsoft.com/office/drawing/2014/main" id="{8D88ED43-5213-439A-AC6D-2EAAD2CE7AF7}"/>
+                <a16:creationId xmlns:a16="http://schemas.microsoft.com/office/drawing/2014/main" id="{BE55749F-AF9E-4604-9C78-A875A3B88B50}"/>
               </a:ext>
             </a:extLst>
           </p:cNvPr>
@@ -8541,7 +8541,7 @@
           <p:cNvPr id="22" name="">
             <a:extLst xmlns:a="http://schemas.openxmlformats.org/drawingml/2006/main">
               <a:ext uri="{FF2B5EF4-FFF2-40B4-BE49-F238E27FC236}">
-                <a16:creationId xmlns:a16="http://schemas.microsoft.com/office/drawing/2014/main" id="{94BF7D09-9859-4877-8E8F-06F2BFAA05E0}"/>
+                <a16:creationId xmlns:a16="http://schemas.microsoft.com/office/drawing/2014/main" id="{EDF30C8E-78A6-4CD7-8DA4-7445D0E7D066}"/>
               </a:ext>
             </a:extLst>
           </p:cNvPr>
@@ -8591,7 +8591,7 @@
           <p:cNvPr id="23" name="">
             <a:extLst xmlns:a="http://schemas.openxmlformats.org/drawingml/2006/main">
               <a:ext uri="{FF2B5EF4-FFF2-40B4-BE49-F238E27FC236}">
-                <a16:creationId xmlns:a16="http://schemas.microsoft.com/office/drawing/2014/main" id="{3C795183-5F45-4C1D-8066-DAAEE0185D64}"/>
+                <a16:creationId xmlns:a16="http://schemas.microsoft.com/office/drawing/2014/main" id="{8955096B-B4DF-4D1F-965B-6AA67312EBCF}"/>
               </a:ext>
             </a:extLst>
           </p:cNvPr>
@@ -8641,7 +8641,7 @@
           <p:cNvPr id="24" name="">
             <a:extLst xmlns:a="http://schemas.openxmlformats.org/drawingml/2006/main">
               <a:ext uri="{FF2B5EF4-FFF2-40B4-BE49-F238E27FC236}">
-                <a16:creationId xmlns:a16="http://schemas.microsoft.com/office/drawing/2014/main" id="{85A7E5BA-52EE-4222-8CDC-2551CC6502BD}"/>
+                <a16:creationId xmlns:a16="http://schemas.microsoft.com/office/drawing/2014/main" id="{2AB341EA-452C-4162-BBDE-E29F727FB680}"/>
               </a:ext>
             </a:extLst>
           </p:cNvPr>
@@ -8691,7 +8691,7 @@
           <p:cNvPr id="25" name="">
             <a:extLst xmlns:a="http://schemas.openxmlformats.org/drawingml/2006/main">
               <a:ext uri="{FF2B5EF4-FFF2-40B4-BE49-F238E27FC236}">
-                <a16:creationId xmlns:a16="http://schemas.microsoft.com/office/drawing/2014/main" id="{7B5DA666-006A-4153-8F39-A3340E472327}"/>
+                <a16:creationId xmlns:a16="http://schemas.microsoft.com/office/drawing/2014/main" id="{7A1866DF-E07D-4BF4-B028-C407FAC4DE26}"/>
               </a:ext>
             </a:extLst>
           </p:cNvPr>
@@ -8741,7 +8741,7 @@
           <p:cNvPr id="26" name="">
             <a:extLst xmlns:a="http://schemas.openxmlformats.org/drawingml/2006/main">
               <a:ext uri="{FF2B5EF4-FFF2-40B4-BE49-F238E27FC236}">
-                <a16:creationId xmlns:a16="http://schemas.microsoft.com/office/drawing/2014/main" id="{679A8028-5802-4243-9CE9-F845765DE06F}"/>
+                <a16:creationId xmlns:a16="http://schemas.microsoft.com/office/drawing/2014/main" id="{A5BC29A1-FCF5-4C1A-93B4-C2CCA7899442}"/>
               </a:ext>
             </a:extLst>
           </p:cNvPr>
@@ -8776,7 +8776,7 @@
           <p:cNvPr id="27" name="">
             <a:extLst xmlns:a="http://schemas.openxmlformats.org/drawingml/2006/main">
               <a:ext uri="{FF2B5EF4-FFF2-40B4-BE49-F238E27FC236}">
-                <a16:creationId xmlns:a16="http://schemas.microsoft.com/office/drawing/2014/main" id="{4388182D-421E-40CA-A047-DF5A44F2E423}"/>
+                <a16:creationId xmlns:a16="http://schemas.microsoft.com/office/drawing/2014/main" id="{264C2768-A7BF-48B1-ACAC-61BAE2029330}"/>
               </a:ext>
             </a:extLst>
           </p:cNvPr>
@@ -8826,7 +8826,7 @@
           <p:cNvPr id="28" name="">
             <a:extLst xmlns:a="http://schemas.openxmlformats.org/drawingml/2006/main">
               <a:ext uri="{FF2B5EF4-FFF2-40B4-BE49-F238E27FC236}">
-                <a16:creationId xmlns:a16="http://schemas.microsoft.com/office/drawing/2014/main" id="{37F387A3-B04A-43C8-9E10-95426DFCB29E}"/>
+                <a16:creationId xmlns:a16="http://schemas.microsoft.com/office/drawing/2014/main" id="{31C196B5-1CE6-45BD-99F3-0C516A480D41}"/>
               </a:ext>
             </a:extLst>
           </p:cNvPr>
@@ -8876,7 +8876,7 @@
           <p:cNvPr id="29" name="">
             <a:extLst xmlns:a="http://schemas.openxmlformats.org/drawingml/2006/main">
               <a:ext uri="{FF2B5EF4-FFF2-40B4-BE49-F238E27FC236}">
-                <a16:creationId xmlns:a16="http://schemas.microsoft.com/office/drawing/2014/main" id="{9EE2B1AE-5035-4F2B-B073-AA7BCE2DD65A}"/>
+                <a16:creationId xmlns:a16="http://schemas.microsoft.com/office/drawing/2014/main" id="{AAAEE73A-D7B8-4511-8EDD-8763D91D9BFC}"/>
               </a:ext>
             </a:extLst>
           </p:cNvPr>
@@ -8926,7 +8926,7 @@
           <p:cNvPr id="30" name="">
             <a:extLst xmlns:a="http://schemas.openxmlformats.org/drawingml/2006/main">
               <a:ext uri="{FF2B5EF4-FFF2-40B4-BE49-F238E27FC236}">
-                <a16:creationId xmlns:a16="http://schemas.microsoft.com/office/drawing/2014/main" id="{A5A299C0-A837-4C0B-BB5D-07EB205C0B47}"/>
+                <a16:creationId xmlns:a16="http://schemas.microsoft.com/office/drawing/2014/main" id="{7B98D8CF-D013-4E53-A09E-21A8DDC4DED5}"/>
               </a:ext>
             </a:extLst>
           </p:cNvPr>
@@ -8957,7 +8957,7 @@
           <p:cNvPr id="31" name="">
             <a:extLst xmlns:a="http://schemas.openxmlformats.org/drawingml/2006/main">
               <a:ext uri="{FF2B5EF4-FFF2-40B4-BE49-F238E27FC236}">
-                <a16:creationId xmlns:a16="http://schemas.microsoft.com/office/drawing/2014/main" id="{08C95287-7332-4ED6-B9E1-C08F79669AE4}"/>
+                <a16:creationId xmlns:a16="http://schemas.microsoft.com/office/drawing/2014/main" id="{1D016B18-9199-4485-98FA-D113DF84D911}"/>
               </a:ext>
             </a:extLst>
           </p:cNvPr>
@@ -9007,7 +9007,7 @@
           <p:cNvPr id="32" name="">
             <a:extLst xmlns:a="http://schemas.openxmlformats.org/drawingml/2006/main">
               <a:ext uri="{FF2B5EF4-FFF2-40B4-BE49-F238E27FC236}">
-                <a16:creationId xmlns:a16="http://schemas.microsoft.com/office/drawing/2014/main" id="{2CA822DF-885D-400F-BF30-DE5822B842C4}"/>
+                <a16:creationId xmlns:a16="http://schemas.microsoft.com/office/drawing/2014/main" id="{919E01A9-B3CB-43CB-991A-EB8B5E5ECC27}"/>
               </a:ext>
             </a:extLst>
           </p:cNvPr>
@@ -9057,7 +9057,7 @@
           <p:cNvPr id="33" name="">
             <a:extLst xmlns:a="http://schemas.openxmlformats.org/drawingml/2006/main">
               <a:ext uri="{FF2B5EF4-FFF2-40B4-BE49-F238E27FC236}">
-                <a16:creationId xmlns:a16="http://schemas.microsoft.com/office/drawing/2014/main" id="{BF66E494-738A-41B4-8246-E38491728628}"/>
+                <a16:creationId xmlns:a16="http://schemas.microsoft.com/office/drawing/2014/main" id="{35FB5425-945B-4EB2-B0CD-D8CF675DFAC3}"/>
               </a:ext>
             </a:extLst>
           </p:cNvPr>
@@ -9107,7 +9107,7 @@
           <p:cNvPr id="34" name="">
             <a:extLst xmlns:a="http://schemas.openxmlformats.org/drawingml/2006/main">
               <a:ext uri="{FF2B5EF4-FFF2-40B4-BE49-F238E27FC236}">
-                <a16:creationId xmlns:a16="http://schemas.microsoft.com/office/drawing/2014/main" id="{44A90F1C-5930-4FFD-8C21-F89A16FBAF55}"/>
+                <a16:creationId xmlns:a16="http://schemas.microsoft.com/office/drawing/2014/main" id="{5C0E4878-EA87-4185-ACE5-AEC465E6B507}"/>
               </a:ext>
             </a:extLst>
           </p:cNvPr>
@@ -9157,7 +9157,7 @@
           <p:cNvPr id="35" name="">
             <a:extLst xmlns:a="http://schemas.openxmlformats.org/drawingml/2006/main">
               <a:ext uri="{FF2B5EF4-FFF2-40B4-BE49-F238E27FC236}">
-                <a16:creationId xmlns:a16="http://schemas.microsoft.com/office/drawing/2014/main" id="{D6B6A0C6-8AFD-4E54-9674-A2A4B4C9D4A9}"/>
+                <a16:creationId xmlns:a16="http://schemas.microsoft.com/office/drawing/2014/main" id="{3458C2A6-208C-4CB8-AB20-C8A0CC59E909}"/>
               </a:ext>
             </a:extLst>
           </p:cNvPr>
@@ -9192,7 +9192,7 @@
           <p:cNvPr id="36" name="">
             <a:extLst xmlns:a="http://schemas.openxmlformats.org/drawingml/2006/main">
               <a:ext uri="{FF2B5EF4-FFF2-40B4-BE49-F238E27FC236}">
-                <a16:creationId xmlns:a16="http://schemas.microsoft.com/office/drawing/2014/main" id="{5A2A56EE-6A86-4AB9-B628-DA22758CFFC8}"/>
+                <a16:creationId xmlns:a16="http://schemas.microsoft.com/office/drawing/2014/main" id="{7A30677C-182B-4B0B-A649-16A78E81F3F3}"/>
               </a:ext>
             </a:extLst>
           </p:cNvPr>
@@ -9242,7 +9242,7 @@
           <p:cNvPr id="37" name="">
             <a:extLst xmlns:a="http://schemas.openxmlformats.org/drawingml/2006/main">
               <a:ext uri="{FF2B5EF4-FFF2-40B4-BE49-F238E27FC236}">
-                <a16:creationId xmlns:a16="http://schemas.microsoft.com/office/drawing/2014/main" id="{E9B1CDBD-7381-4087-9FAB-CF2B4C5F3E3F}"/>
+                <a16:creationId xmlns:a16="http://schemas.microsoft.com/office/drawing/2014/main" id="{AB4788C6-4E1F-4252-B853-6B3C19CC4A5A}"/>
               </a:ext>
             </a:extLst>
           </p:cNvPr>
@@ -9292,7 +9292,7 @@
           <p:cNvPr id="38" name="">
             <a:extLst xmlns:a="http://schemas.openxmlformats.org/drawingml/2006/main">
               <a:ext uri="{FF2B5EF4-FFF2-40B4-BE49-F238E27FC236}">
-                <a16:creationId xmlns:a16="http://schemas.microsoft.com/office/drawing/2014/main" id="{84047AEF-CA69-41E6-93F9-A4C7D8DD27AA}"/>
+                <a16:creationId xmlns:a16="http://schemas.microsoft.com/office/drawing/2014/main" id="{A37C7F51-F669-412E-9AAB-2081CAA56D43}"/>
               </a:ext>
             </a:extLst>
           </p:cNvPr>
@@ -9342,7 +9342,7 @@
           <p:cNvPr id="39" name="">
             <a:extLst xmlns:a="http://schemas.openxmlformats.org/drawingml/2006/main">
               <a:ext uri="{FF2B5EF4-FFF2-40B4-BE49-F238E27FC236}">
-                <a16:creationId xmlns:a16="http://schemas.microsoft.com/office/drawing/2014/main" id="{BCAA042A-4AB3-49A5-9184-9060F96A25E7}"/>
+                <a16:creationId xmlns:a16="http://schemas.microsoft.com/office/drawing/2014/main" id="{0D86CDD1-91C0-493B-B9B6-A77D7A9659DD}"/>
               </a:ext>
             </a:extLst>
           </p:cNvPr>
@@ -9373,7 +9373,7 @@
           <p:cNvPr id="40" name="">
             <a:extLst xmlns:a="http://schemas.openxmlformats.org/drawingml/2006/main">
               <a:ext uri="{FF2B5EF4-FFF2-40B4-BE49-F238E27FC236}">
-                <a16:creationId xmlns:a16="http://schemas.microsoft.com/office/drawing/2014/main" id="{6CAEEE6D-F911-4CF7-9CE3-10DEFB35FFA0}"/>
+                <a16:creationId xmlns:a16="http://schemas.microsoft.com/office/drawing/2014/main" id="{5787E616-559E-4A28-821F-BD351EC61A30}"/>
               </a:ext>
             </a:extLst>
           </p:cNvPr>
@@ -9423,7 +9423,7 @@
           <p:cNvPr id="41" name="">
             <a:extLst xmlns:a="http://schemas.openxmlformats.org/drawingml/2006/main">
               <a:ext uri="{FF2B5EF4-FFF2-40B4-BE49-F238E27FC236}">
-                <a16:creationId xmlns:a16="http://schemas.microsoft.com/office/drawing/2014/main" id="{7D2B6899-5939-4B20-A1D1-0DED13A44033}"/>
+                <a16:creationId xmlns:a16="http://schemas.microsoft.com/office/drawing/2014/main" id="{8D54588B-B23A-4AA7-A2D9-3636B79E9ED9}"/>
               </a:ext>
             </a:extLst>
           </p:cNvPr>
@@ -9473,7 +9473,7 @@
           <p:cNvPr id="42" name="">
             <a:extLst xmlns:a="http://schemas.openxmlformats.org/drawingml/2006/main">
               <a:ext uri="{FF2B5EF4-FFF2-40B4-BE49-F238E27FC236}">
-                <a16:creationId xmlns:a16="http://schemas.microsoft.com/office/drawing/2014/main" id="{A26790F3-DC3A-47FE-AC23-4D65427BA99D}"/>
+                <a16:creationId xmlns:a16="http://schemas.microsoft.com/office/drawing/2014/main" id="{A066FA4B-42B4-4FCD-A500-C6363A927F2A}"/>
               </a:ext>
             </a:extLst>
           </p:cNvPr>
@@ -9523,7 +9523,7 @@
           <p:cNvPr id="43" name="">
             <a:extLst xmlns:a="http://schemas.openxmlformats.org/drawingml/2006/main">
               <a:ext uri="{FF2B5EF4-FFF2-40B4-BE49-F238E27FC236}">
-                <a16:creationId xmlns:a16="http://schemas.microsoft.com/office/drawing/2014/main" id="{7C5531DC-E0CB-40A3-8451-9B0983FAA264}"/>
+                <a16:creationId xmlns:a16="http://schemas.microsoft.com/office/drawing/2014/main" id="{2C2965D2-1CDA-454D-A3CC-63793348F2F3}"/>
               </a:ext>
             </a:extLst>
           </p:cNvPr>
@@ -9571,7 +9571,7 @@
     </p:spTree>
     <p:extLst>
       <p:ext uri="{BB962C8B-B14F-4D97-AF65-F5344CB8AC3E}">
-        <p14:creationId xmlns:p14="http://schemas.microsoft.com/office/powerpoint/2010/main" val="564898389"/>
+        <p14:creationId xmlns:p14="http://schemas.microsoft.com/office/powerpoint/2010/main" val="752008763"/>
       </p:ext>
     </p:extLst>
   </p:cSld>
@@ -9602,7 +9602,7 @@
           <p:cNvPr id="1" name="">
             <a:extLst xmlns:a="http://schemas.openxmlformats.org/drawingml/2006/main">
               <a:ext uri="{FF2B5EF4-FFF2-40B4-BE49-F238E27FC236}">
-                <a16:creationId xmlns:a16="http://schemas.microsoft.com/office/drawing/2014/main" id="{9DD56AC2-E50B-4677-A9EA-F88D23008841}"/>
+                <a16:creationId xmlns:a16="http://schemas.microsoft.com/office/drawing/2014/main" id="{30FEB9F8-2709-43FC-B364-4400ED0D2A73}"/>
               </a:ext>
             </a:extLst>
           </p:cNvPr>
@@ -9637,7 +9637,7 @@
           <p:nvPr/>
         </p:nvPicPr>
         <p:blipFill>
-          <a:blip xmlns:r="http://schemas.openxmlformats.org/officeDocument/2006/relationships" xmlns:a="http://schemas.openxmlformats.org/drawingml/2006/main" r:embed="Rac007b21327e437b"/>
+          <a:blip xmlns:r="http://schemas.openxmlformats.org/officeDocument/2006/relationships" xmlns:a="http://schemas.openxmlformats.org/drawingml/2006/main" r:embed="Rd9db00bc8c70410a"/>
           <a:stretch xmlns:a="http://schemas.openxmlformats.org/drawingml/2006/main"/>
         </p:blipFill>
         <p:spPr>
@@ -9655,7 +9655,7 @@
           <p:cNvPr id="3" name="">
             <a:extLst xmlns:a="http://schemas.openxmlformats.org/drawingml/2006/main">
               <a:ext uri="{FF2B5EF4-FFF2-40B4-BE49-F238E27FC236}">
-                <a16:creationId xmlns:a16="http://schemas.microsoft.com/office/drawing/2014/main" id="{9BDB1B03-6A2F-4044-87EE-5AF8EEE54C13}"/>
+                <a16:creationId xmlns:a16="http://schemas.microsoft.com/office/drawing/2014/main" id="{EE2E8578-10DB-4197-A5C6-397131079227}"/>
               </a:ext>
             </a:extLst>
           </p:cNvPr>
@@ -9705,7 +9705,7 @@
           <p:cNvPr id="4" name="">
             <a:extLst xmlns:a="http://schemas.openxmlformats.org/drawingml/2006/main">
               <a:ext uri="{FF2B5EF4-FFF2-40B4-BE49-F238E27FC236}">
-                <a16:creationId xmlns:a16="http://schemas.microsoft.com/office/drawing/2014/main" id="{B3951474-B951-43DD-BF5B-E7E0C1222844}"/>
+                <a16:creationId xmlns:a16="http://schemas.microsoft.com/office/drawing/2014/main" id="{88924468-D3D5-4B67-872C-3794DBCC3161}"/>
               </a:ext>
             </a:extLst>
           </p:cNvPr>
@@ -9738,7 +9738,7 @@
           <p:cNvPr id="5" name="">
             <a:extLst xmlns:a="http://schemas.openxmlformats.org/drawingml/2006/main">
               <a:ext uri="{FF2B5EF4-FFF2-40B4-BE49-F238E27FC236}">
-                <a16:creationId xmlns:a16="http://schemas.microsoft.com/office/drawing/2014/main" id="{72BEFE9D-C698-4CBC-BDFF-A21BDB17B895}"/>
+                <a16:creationId xmlns:a16="http://schemas.microsoft.com/office/drawing/2014/main" id="{7AA0010F-D621-4D9C-8CFA-7999F50B0A94}"/>
               </a:ext>
             </a:extLst>
           </p:cNvPr>
@@ -9769,7 +9769,7 @@
           <p:cNvPr id="6" name="">
             <a:extLst xmlns:a="http://schemas.openxmlformats.org/drawingml/2006/main">
               <a:ext uri="{FF2B5EF4-FFF2-40B4-BE49-F238E27FC236}">
-                <a16:creationId xmlns:a16="http://schemas.microsoft.com/office/drawing/2014/main" id="{E15119AF-A4CF-472B-9E2F-F582E2D14FB0}"/>
+                <a16:creationId xmlns:a16="http://schemas.microsoft.com/office/drawing/2014/main" id="{AE491212-1979-4376-8D45-1305B8657334}"/>
               </a:ext>
             </a:extLst>
           </p:cNvPr>
@@ -9819,7 +9819,7 @@
           <p:cNvPr id="7" name="">
             <a:extLst xmlns:a="http://schemas.openxmlformats.org/drawingml/2006/main">
               <a:ext uri="{FF2B5EF4-FFF2-40B4-BE49-F238E27FC236}">
-                <a16:creationId xmlns:a16="http://schemas.microsoft.com/office/drawing/2014/main" id="{16CC8D89-3C6D-4BEF-8F74-D1BDACA96446}"/>
+                <a16:creationId xmlns:a16="http://schemas.microsoft.com/office/drawing/2014/main" id="{2A90FC72-F3E1-4425-893B-B048495D9F5B}"/>
               </a:ext>
             </a:extLst>
           </p:cNvPr>
@@ -9869,7 +9869,7 @@
           <p:cNvPr id="8" name="">
             <a:extLst xmlns:a="http://schemas.openxmlformats.org/drawingml/2006/main">
               <a:ext uri="{FF2B5EF4-FFF2-40B4-BE49-F238E27FC236}">
-                <a16:creationId xmlns:a16="http://schemas.microsoft.com/office/drawing/2014/main" id="{506AE632-4169-45C0-9DF8-89A0D01E8707}"/>
+                <a16:creationId xmlns:a16="http://schemas.microsoft.com/office/drawing/2014/main" id="{6173936C-CEAD-4A27-A7A0-8A7468D51255}"/>
               </a:ext>
             </a:extLst>
           </p:cNvPr>
@@ -9904,7 +9904,7 @@
           <p:cNvPr id="9" name="">
             <a:extLst xmlns:a="http://schemas.openxmlformats.org/drawingml/2006/main">
               <a:ext uri="{FF2B5EF4-FFF2-40B4-BE49-F238E27FC236}">
-                <a16:creationId xmlns:a16="http://schemas.microsoft.com/office/drawing/2014/main" id="{F1F61CAE-C1EA-4E03-BA52-3B4E035B189B}"/>
+                <a16:creationId xmlns:a16="http://schemas.microsoft.com/office/drawing/2014/main" id="{EF2BD424-FB38-4EF4-B906-24FB0EDF1AD4}"/>
               </a:ext>
             </a:extLst>
           </p:cNvPr>
@@ -9954,7 +9954,7 @@
           <p:cNvPr id="10" name="">
             <a:extLst xmlns:a="http://schemas.openxmlformats.org/drawingml/2006/main">
               <a:ext uri="{FF2B5EF4-FFF2-40B4-BE49-F238E27FC236}">
-                <a16:creationId xmlns:a16="http://schemas.microsoft.com/office/drawing/2014/main" id="{64B55EC0-6C0F-4167-B15D-8F5AF78EA8AC}"/>
+                <a16:creationId xmlns:a16="http://schemas.microsoft.com/office/drawing/2014/main" id="{2826C3F7-4BBC-49CE-B4D6-7DA5CF829F14}"/>
               </a:ext>
             </a:extLst>
           </p:cNvPr>
@@ -10004,7 +10004,7 @@
           <p:cNvPr id="11" name="">
             <a:extLst xmlns:a="http://schemas.openxmlformats.org/drawingml/2006/main">
               <a:ext uri="{FF2B5EF4-FFF2-40B4-BE49-F238E27FC236}">
-                <a16:creationId xmlns:a16="http://schemas.microsoft.com/office/drawing/2014/main" id="{0D90AF93-2056-4A56-80A4-802306EDADFE}"/>
+                <a16:creationId xmlns:a16="http://schemas.microsoft.com/office/drawing/2014/main" id="{89BBFD1B-60C8-4111-9072-B63AF3B4AF55}"/>
               </a:ext>
             </a:extLst>
           </p:cNvPr>
@@ -10054,7 +10054,7 @@
           <p:cNvPr id="12" name="">
             <a:extLst xmlns:a="http://schemas.openxmlformats.org/drawingml/2006/main">
               <a:ext uri="{FF2B5EF4-FFF2-40B4-BE49-F238E27FC236}">
-                <a16:creationId xmlns:a16="http://schemas.microsoft.com/office/drawing/2014/main" id="{F9180B7D-6C5A-4D05-9094-9626E9D9A453}"/>
+                <a16:creationId xmlns:a16="http://schemas.microsoft.com/office/drawing/2014/main" id="{C663D79A-47FB-427E-B104-2BA622959390}"/>
               </a:ext>
             </a:extLst>
           </p:cNvPr>
@@ -10085,7 +10085,7 @@
           <p:cNvPr id="13" name="">
             <a:extLst xmlns:a="http://schemas.openxmlformats.org/drawingml/2006/main">
               <a:ext uri="{FF2B5EF4-FFF2-40B4-BE49-F238E27FC236}">
-                <a16:creationId xmlns:a16="http://schemas.microsoft.com/office/drawing/2014/main" id="{DC2FC499-662A-4A96-8511-0602CBCD6E46}"/>
+                <a16:creationId xmlns:a16="http://schemas.microsoft.com/office/drawing/2014/main" id="{C44A3FEB-2D7B-4CBD-A684-6F6303959D75}"/>
               </a:ext>
             </a:extLst>
           </p:cNvPr>
@@ -10135,7 +10135,7 @@
           <p:cNvPr id="14" name="">
             <a:extLst xmlns:a="http://schemas.openxmlformats.org/drawingml/2006/main">
               <a:ext uri="{FF2B5EF4-FFF2-40B4-BE49-F238E27FC236}">
-                <a16:creationId xmlns:a16="http://schemas.microsoft.com/office/drawing/2014/main" id="{5D964AD6-00DD-4F89-9FF0-E9753B5005FF}"/>
+                <a16:creationId xmlns:a16="http://schemas.microsoft.com/office/drawing/2014/main" id="{8EC66929-9F06-4E8A-82DB-382A6EFCCE1F}"/>
               </a:ext>
             </a:extLst>
           </p:cNvPr>
@@ -10185,7 +10185,7 @@
           <p:cNvPr id="15" name="">
             <a:extLst xmlns:a="http://schemas.openxmlformats.org/drawingml/2006/main">
               <a:ext uri="{FF2B5EF4-FFF2-40B4-BE49-F238E27FC236}">
-                <a16:creationId xmlns:a16="http://schemas.microsoft.com/office/drawing/2014/main" id="{D32FF275-325E-4601-8245-D65465B95986}"/>
+                <a16:creationId xmlns:a16="http://schemas.microsoft.com/office/drawing/2014/main" id="{E916E3C5-7FCA-4024-A584-4E7EA9673806}"/>
               </a:ext>
             </a:extLst>
           </p:cNvPr>
@@ -10235,7 +10235,7 @@
           <p:cNvPr id="16" name="">
             <a:extLst xmlns:a="http://schemas.openxmlformats.org/drawingml/2006/main">
               <a:ext uri="{FF2B5EF4-FFF2-40B4-BE49-F238E27FC236}">
-                <a16:creationId xmlns:a16="http://schemas.microsoft.com/office/drawing/2014/main" id="{31CF77F0-8DD8-423D-814A-0C37D068BA32}"/>
+                <a16:creationId xmlns:a16="http://schemas.microsoft.com/office/drawing/2014/main" id="{D16D1E99-45F7-4DFB-ABB2-4B4C236FF508}"/>
               </a:ext>
             </a:extLst>
           </p:cNvPr>
@@ -10285,7 +10285,7 @@
           <p:cNvPr id="17" name="">
             <a:extLst xmlns:a="http://schemas.openxmlformats.org/drawingml/2006/main">
               <a:ext uri="{FF2B5EF4-FFF2-40B4-BE49-F238E27FC236}">
-                <a16:creationId xmlns:a16="http://schemas.microsoft.com/office/drawing/2014/main" id="{5F103E6A-93B4-4906-ABD0-4B5D4B27DE20}"/>
+                <a16:creationId xmlns:a16="http://schemas.microsoft.com/office/drawing/2014/main" id="{BE3FFAEA-5F3F-41D8-9DBA-8C586D98C36E}"/>
               </a:ext>
             </a:extLst>
           </p:cNvPr>
@@ -10320,7 +10320,7 @@
           <p:cNvPr id="18" name="">
             <a:extLst xmlns:a="http://schemas.openxmlformats.org/drawingml/2006/main">
               <a:ext uri="{FF2B5EF4-FFF2-40B4-BE49-F238E27FC236}">
-                <a16:creationId xmlns:a16="http://schemas.microsoft.com/office/drawing/2014/main" id="{36F9A32D-039C-4D00-89D2-715E5F30E4C5}"/>
+                <a16:creationId xmlns:a16="http://schemas.microsoft.com/office/drawing/2014/main" id="{7A360AAD-80EE-44AC-A854-3C0F00C1DC3E}"/>
               </a:ext>
             </a:extLst>
           </p:cNvPr>
@@ -10370,7 +10370,7 @@
           <p:cNvPr id="19" name="">
             <a:extLst xmlns:a="http://schemas.openxmlformats.org/drawingml/2006/main">
               <a:ext uri="{FF2B5EF4-FFF2-40B4-BE49-F238E27FC236}">
-                <a16:creationId xmlns:a16="http://schemas.microsoft.com/office/drawing/2014/main" id="{A17A3EDE-5F8A-49E6-83F9-1CCEE52FD575}"/>
+                <a16:creationId xmlns:a16="http://schemas.microsoft.com/office/drawing/2014/main" id="{9759FE2D-41ED-4F1D-8A2D-D799F78FF57B}"/>
               </a:ext>
             </a:extLst>
           </p:cNvPr>
@@ -10420,7 +10420,7 @@
           <p:cNvPr id="20" name="">
             <a:extLst xmlns:a="http://schemas.openxmlformats.org/drawingml/2006/main">
               <a:ext uri="{FF2B5EF4-FFF2-40B4-BE49-F238E27FC236}">
-                <a16:creationId xmlns:a16="http://schemas.microsoft.com/office/drawing/2014/main" id="{D622C38A-0C4D-40D7-85BA-3F8D3323F707}"/>
+                <a16:creationId xmlns:a16="http://schemas.microsoft.com/office/drawing/2014/main" id="{F0C93E02-840B-4C48-ACFD-D97956C88B10}"/>
               </a:ext>
             </a:extLst>
           </p:cNvPr>
@@ -10470,7 +10470,7 @@
           <p:cNvPr id="21" name="">
             <a:extLst xmlns:a="http://schemas.openxmlformats.org/drawingml/2006/main">
               <a:ext uri="{FF2B5EF4-FFF2-40B4-BE49-F238E27FC236}">
-                <a16:creationId xmlns:a16="http://schemas.microsoft.com/office/drawing/2014/main" id="{D5212DE1-C450-4E3D-BF16-B619C40FE20C}"/>
+                <a16:creationId xmlns:a16="http://schemas.microsoft.com/office/drawing/2014/main" id="{B6B553D5-E942-44AA-9785-59C265007423}"/>
               </a:ext>
             </a:extLst>
           </p:cNvPr>
@@ -10501,7 +10501,7 @@
           <p:cNvPr id="22" name="">
             <a:extLst xmlns:a="http://schemas.openxmlformats.org/drawingml/2006/main">
               <a:ext uri="{FF2B5EF4-FFF2-40B4-BE49-F238E27FC236}">
-                <a16:creationId xmlns:a16="http://schemas.microsoft.com/office/drawing/2014/main" id="{F761C9F4-CD0C-4A33-8A72-7B1D64742E67}"/>
+                <a16:creationId xmlns:a16="http://schemas.microsoft.com/office/drawing/2014/main" id="{67692EC2-3A1E-42B7-959C-4804296AA2C8}"/>
               </a:ext>
             </a:extLst>
           </p:cNvPr>
@@ -10551,7 +10551,7 @@
           <p:cNvPr id="23" name="">
             <a:extLst xmlns:a="http://schemas.openxmlformats.org/drawingml/2006/main">
               <a:ext uri="{FF2B5EF4-FFF2-40B4-BE49-F238E27FC236}">
-                <a16:creationId xmlns:a16="http://schemas.microsoft.com/office/drawing/2014/main" id="{683F3BAA-2F39-4984-8075-8047714ECBA8}"/>
+                <a16:creationId xmlns:a16="http://schemas.microsoft.com/office/drawing/2014/main" id="{36881B94-BDBA-48D1-8133-409DB88E999D}"/>
               </a:ext>
             </a:extLst>
           </p:cNvPr>
@@ -10601,7 +10601,7 @@
           <p:cNvPr id="24" name="">
             <a:extLst xmlns:a="http://schemas.openxmlformats.org/drawingml/2006/main">
               <a:ext uri="{FF2B5EF4-FFF2-40B4-BE49-F238E27FC236}">
-                <a16:creationId xmlns:a16="http://schemas.microsoft.com/office/drawing/2014/main" id="{DE4C9A92-1E59-4A58-B3D7-4D8A4D61FE92}"/>
+                <a16:creationId xmlns:a16="http://schemas.microsoft.com/office/drawing/2014/main" id="{C61F3ECE-9D9B-41A8-9973-E1028A3D1F30}"/>
               </a:ext>
             </a:extLst>
           </p:cNvPr>
@@ -10651,7 +10651,7 @@
           <p:cNvPr id="25" name="">
             <a:extLst xmlns:a="http://schemas.openxmlformats.org/drawingml/2006/main">
               <a:ext uri="{FF2B5EF4-FFF2-40B4-BE49-F238E27FC236}">
-                <a16:creationId xmlns:a16="http://schemas.microsoft.com/office/drawing/2014/main" id="{C83ACDB5-0DDE-4D41-A1D7-2718FD02BE19}"/>
+                <a16:creationId xmlns:a16="http://schemas.microsoft.com/office/drawing/2014/main" id="{B72B1122-5FAD-4781-86A5-EEDC775EF248}"/>
               </a:ext>
             </a:extLst>
           </p:cNvPr>
@@ -10701,7 +10701,7 @@
           <p:cNvPr id="26" name="">
             <a:extLst xmlns:a="http://schemas.openxmlformats.org/drawingml/2006/main">
               <a:ext uri="{FF2B5EF4-FFF2-40B4-BE49-F238E27FC236}">
-                <a16:creationId xmlns:a16="http://schemas.microsoft.com/office/drawing/2014/main" id="{5AE73C22-5C41-4603-B1A3-57C00C802CE9}"/>
+                <a16:creationId xmlns:a16="http://schemas.microsoft.com/office/drawing/2014/main" id="{1464AAF7-D452-4002-880E-A9443B7C59E0}"/>
               </a:ext>
             </a:extLst>
           </p:cNvPr>
@@ -10736,7 +10736,7 @@
           <p:cNvPr id="27" name="">
             <a:extLst xmlns:a="http://schemas.openxmlformats.org/drawingml/2006/main">
               <a:ext uri="{FF2B5EF4-FFF2-40B4-BE49-F238E27FC236}">
-                <a16:creationId xmlns:a16="http://schemas.microsoft.com/office/drawing/2014/main" id="{8D546D5C-1082-4691-9FF9-D45006A94D88}"/>
+                <a16:creationId xmlns:a16="http://schemas.microsoft.com/office/drawing/2014/main" id="{8BA30FD7-EEA1-4C54-A7AE-6D6D13DAD3C3}"/>
               </a:ext>
             </a:extLst>
           </p:cNvPr>
@@ -10786,7 +10786,7 @@
           <p:cNvPr id="28" name="">
             <a:extLst xmlns:a="http://schemas.openxmlformats.org/drawingml/2006/main">
               <a:ext uri="{FF2B5EF4-FFF2-40B4-BE49-F238E27FC236}">
-                <a16:creationId xmlns:a16="http://schemas.microsoft.com/office/drawing/2014/main" id="{EFD49137-6363-459E-BF67-BA7F2D0DC03E}"/>
+                <a16:creationId xmlns:a16="http://schemas.microsoft.com/office/drawing/2014/main" id="{875A8A9C-8FA1-4C46-BCAB-B3A9A4B94066}"/>
               </a:ext>
             </a:extLst>
           </p:cNvPr>
@@ -10836,7 +10836,7 @@
           <p:cNvPr id="29" name="">
             <a:extLst xmlns:a="http://schemas.openxmlformats.org/drawingml/2006/main">
               <a:ext uri="{FF2B5EF4-FFF2-40B4-BE49-F238E27FC236}">
-                <a16:creationId xmlns:a16="http://schemas.microsoft.com/office/drawing/2014/main" id="{CCCB4436-E3A9-44AE-A6C7-B0034161BE10}"/>
+                <a16:creationId xmlns:a16="http://schemas.microsoft.com/office/drawing/2014/main" id="{A06F7A26-9D8A-466F-A325-E92529E116B8}"/>
               </a:ext>
             </a:extLst>
           </p:cNvPr>
@@ -10886,7 +10886,7 @@
           <p:cNvPr id="30" name="">
             <a:extLst xmlns:a="http://schemas.openxmlformats.org/drawingml/2006/main">
               <a:ext uri="{FF2B5EF4-FFF2-40B4-BE49-F238E27FC236}">
-                <a16:creationId xmlns:a16="http://schemas.microsoft.com/office/drawing/2014/main" id="{B47BEC05-C8B8-4087-AF40-FE1448D1B4EA}"/>
+                <a16:creationId xmlns:a16="http://schemas.microsoft.com/office/drawing/2014/main" id="{313FF71F-8CB5-472F-99DD-B34592BEA756}"/>
               </a:ext>
             </a:extLst>
           </p:cNvPr>
@@ -10917,7 +10917,7 @@
           <p:cNvPr id="31" name="">
             <a:extLst xmlns:a="http://schemas.openxmlformats.org/drawingml/2006/main">
               <a:ext uri="{FF2B5EF4-FFF2-40B4-BE49-F238E27FC236}">
-                <a16:creationId xmlns:a16="http://schemas.microsoft.com/office/drawing/2014/main" id="{6F113BB8-FA30-4D47-840C-3217D4C2366D}"/>
+                <a16:creationId xmlns:a16="http://schemas.microsoft.com/office/drawing/2014/main" id="{2FC9F545-3E65-4027-A83B-7471456055B1}"/>
               </a:ext>
             </a:extLst>
           </p:cNvPr>
@@ -10967,7 +10967,7 @@
           <p:cNvPr id="32" name="">
             <a:extLst xmlns:a="http://schemas.openxmlformats.org/drawingml/2006/main">
               <a:ext uri="{FF2B5EF4-FFF2-40B4-BE49-F238E27FC236}">
-                <a16:creationId xmlns:a16="http://schemas.microsoft.com/office/drawing/2014/main" id="{D5F8C244-F2F8-47CD-803A-508CDA329A90}"/>
+                <a16:creationId xmlns:a16="http://schemas.microsoft.com/office/drawing/2014/main" id="{194A3644-1F91-43AF-B2F9-B7E843597700}"/>
               </a:ext>
             </a:extLst>
           </p:cNvPr>
@@ -11017,7 +11017,7 @@
           <p:cNvPr id="33" name="">
             <a:extLst xmlns:a="http://schemas.openxmlformats.org/drawingml/2006/main">
               <a:ext uri="{FF2B5EF4-FFF2-40B4-BE49-F238E27FC236}">
-                <a16:creationId xmlns:a16="http://schemas.microsoft.com/office/drawing/2014/main" id="{CC0F64D9-4EE2-4251-8D2D-51847CF0761C}"/>
+                <a16:creationId xmlns:a16="http://schemas.microsoft.com/office/drawing/2014/main" id="{37675591-00B0-407B-BF19-007D2C3513D1}"/>
               </a:ext>
             </a:extLst>
           </p:cNvPr>
@@ -11067,7 +11067,7 @@
           <p:cNvPr id="34" name="">
             <a:extLst xmlns:a="http://schemas.openxmlformats.org/drawingml/2006/main">
               <a:ext uri="{FF2B5EF4-FFF2-40B4-BE49-F238E27FC236}">
-                <a16:creationId xmlns:a16="http://schemas.microsoft.com/office/drawing/2014/main" id="{ECC593A1-FB7C-4C89-99BB-D24CEDA8B18E}"/>
+                <a16:creationId xmlns:a16="http://schemas.microsoft.com/office/drawing/2014/main" id="{90DBBAFA-CB53-4B79-AC2B-F76F4D4C5518}"/>
               </a:ext>
             </a:extLst>
           </p:cNvPr>
@@ -11117,7 +11117,7 @@
           <p:cNvPr id="35" name="">
             <a:extLst xmlns:a="http://schemas.openxmlformats.org/drawingml/2006/main">
               <a:ext uri="{FF2B5EF4-FFF2-40B4-BE49-F238E27FC236}">
-                <a16:creationId xmlns:a16="http://schemas.microsoft.com/office/drawing/2014/main" id="{5AB147B1-9AF7-4899-BF9F-AAC9B2E90A48}"/>
+                <a16:creationId xmlns:a16="http://schemas.microsoft.com/office/drawing/2014/main" id="{81D6F51F-CA01-4592-BA40-C5E02BF63215}"/>
               </a:ext>
             </a:extLst>
           </p:cNvPr>
@@ -11152,7 +11152,7 @@
           <p:cNvPr id="36" name="">
             <a:extLst xmlns:a="http://schemas.openxmlformats.org/drawingml/2006/main">
               <a:ext uri="{FF2B5EF4-FFF2-40B4-BE49-F238E27FC236}">
-                <a16:creationId xmlns:a16="http://schemas.microsoft.com/office/drawing/2014/main" id="{CA990310-F5B4-4324-9775-57D7E607D7FC}"/>
+                <a16:creationId xmlns:a16="http://schemas.microsoft.com/office/drawing/2014/main" id="{715B7208-D1FB-4AA5-AFD0-2D470DF8A517}"/>
               </a:ext>
             </a:extLst>
           </p:cNvPr>
@@ -11202,7 +11202,7 @@
           <p:cNvPr id="37" name="">
             <a:extLst xmlns:a="http://schemas.openxmlformats.org/drawingml/2006/main">
               <a:ext uri="{FF2B5EF4-FFF2-40B4-BE49-F238E27FC236}">
-                <a16:creationId xmlns:a16="http://schemas.microsoft.com/office/drawing/2014/main" id="{8A51CACD-A02E-4970-89AD-87A6B5FB9E30}"/>
+                <a16:creationId xmlns:a16="http://schemas.microsoft.com/office/drawing/2014/main" id="{5982726E-C471-43B8-980E-CF5E05633915}"/>
               </a:ext>
             </a:extLst>
           </p:cNvPr>
@@ -11252,7 +11252,7 @@
           <p:cNvPr id="38" name="">
             <a:extLst xmlns:a="http://schemas.openxmlformats.org/drawingml/2006/main">
               <a:ext uri="{FF2B5EF4-FFF2-40B4-BE49-F238E27FC236}">
-                <a16:creationId xmlns:a16="http://schemas.microsoft.com/office/drawing/2014/main" id="{767902C3-46F7-4BD3-BD23-239852D17E7A}"/>
+                <a16:creationId xmlns:a16="http://schemas.microsoft.com/office/drawing/2014/main" id="{B92580AE-3DBD-4C54-BECC-C33D183E214A}"/>
               </a:ext>
             </a:extLst>
           </p:cNvPr>
@@ -11302,7 +11302,7 @@
           <p:cNvPr id="39" name="">
             <a:extLst xmlns:a="http://schemas.openxmlformats.org/drawingml/2006/main">
               <a:ext uri="{FF2B5EF4-FFF2-40B4-BE49-F238E27FC236}">
-                <a16:creationId xmlns:a16="http://schemas.microsoft.com/office/drawing/2014/main" id="{F7A99D42-986F-483D-B421-11277E4C1A7D}"/>
+                <a16:creationId xmlns:a16="http://schemas.microsoft.com/office/drawing/2014/main" id="{94F570DD-AE60-4596-970E-71D151040922}"/>
               </a:ext>
             </a:extLst>
           </p:cNvPr>
@@ -11333,7 +11333,7 @@
           <p:cNvPr id="40" name="">
             <a:extLst xmlns:a="http://schemas.openxmlformats.org/drawingml/2006/main">
               <a:ext uri="{FF2B5EF4-FFF2-40B4-BE49-F238E27FC236}">
-                <a16:creationId xmlns:a16="http://schemas.microsoft.com/office/drawing/2014/main" id="{1AFC8F4D-C995-400F-98D4-D07A53FFB6AD}"/>
+                <a16:creationId xmlns:a16="http://schemas.microsoft.com/office/drawing/2014/main" id="{A85440C9-050B-4D01-B16A-794EA598F1C2}"/>
               </a:ext>
             </a:extLst>
           </p:cNvPr>
@@ -11383,7 +11383,7 @@
           <p:cNvPr id="41" name="">
             <a:extLst xmlns:a="http://schemas.openxmlformats.org/drawingml/2006/main">
               <a:ext uri="{FF2B5EF4-FFF2-40B4-BE49-F238E27FC236}">
-                <a16:creationId xmlns:a16="http://schemas.microsoft.com/office/drawing/2014/main" id="{CCD84E4E-F3F3-4C05-ABD6-F50FA0ACD8E7}"/>
+                <a16:creationId xmlns:a16="http://schemas.microsoft.com/office/drawing/2014/main" id="{ACA0CE90-DB3F-4A98-9862-DA9FC21D1CD5}"/>
               </a:ext>
             </a:extLst>
           </p:cNvPr>
@@ -11433,7 +11433,7 @@
           <p:cNvPr id="42" name="">
             <a:extLst xmlns:a="http://schemas.openxmlformats.org/drawingml/2006/main">
               <a:ext uri="{FF2B5EF4-FFF2-40B4-BE49-F238E27FC236}">
-                <a16:creationId xmlns:a16="http://schemas.microsoft.com/office/drawing/2014/main" id="{C984A40B-5171-487E-8F6E-B75F503478E3}"/>
+                <a16:creationId xmlns:a16="http://schemas.microsoft.com/office/drawing/2014/main" id="{1DBEC9CB-D051-4007-8853-76844DA72200}"/>
               </a:ext>
             </a:extLst>
           </p:cNvPr>
@@ -11483,7 +11483,7 @@
           <p:cNvPr id="43" name="">
             <a:extLst xmlns:a="http://schemas.openxmlformats.org/drawingml/2006/main">
               <a:ext uri="{FF2B5EF4-FFF2-40B4-BE49-F238E27FC236}">
-                <a16:creationId xmlns:a16="http://schemas.microsoft.com/office/drawing/2014/main" id="{58D2F5A5-A2EC-4AAA-8922-D14660417D3F}"/>
+                <a16:creationId xmlns:a16="http://schemas.microsoft.com/office/drawing/2014/main" id="{707BB68D-C63F-47C3-8B47-08702E391E4B}"/>
               </a:ext>
             </a:extLst>
           </p:cNvPr>
@@ -11531,7 +11531,7 @@
     </p:spTree>
     <p:extLst>
       <p:ext uri="{BB962C8B-B14F-4D97-AF65-F5344CB8AC3E}">
-        <p14:creationId xmlns:p14="http://schemas.microsoft.com/office/powerpoint/2010/main" val="1283177081"/>
+        <p14:creationId xmlns:p14="http://schemas.microsoft.com/office/powerpoint/2010/main" val="215212517"/>
       </p:ext>
     </p:extLst>
   </p:cSld>
@@ -11562,7 +11562,7 @@
           <p:cNvPr id="1" name="">
             <a:extLst xmlns:a="http://schemas.openxmlformats.org/drawingml/2006/main">
               <a:ext uri="{FF2B5EF4-FFF2-40B4-BE49-F238E27FC236}">
-                <a16:creationId xmlns:a16="http://schemas.microsoft.com/office/drawing/2014/main" id="{6F29D181-410F-4C49-86CB-598DFE9FDC40}"/>
+                <a16:creationId xmlns:a16="http://schemas.microsoft.com/office/drawing/2014/main" id="{1DB271D4-1729-40D5-A80D-8C9FFDC52C39}"/>
               </a:ext>
             </a:extLst>
           </p:cNvPr>
@@ -11597,7 +11597,7 @@
           <p:nvPr/>
         </p:nvPicPr>
         <p:blipFill>
-          <a:blip xmlns:r="http://schemas.openxmlformats.org/officeDocument/2006/relationships" xmlns:a="http://schemas.openxmlformats.org/drawingml/2006/main" r:embed="R9ec4e21eb6f24f22"/>
+          <a:blip xmlns:r="http://schemas.openxmlformats.org/officeDocument/2006/relationships" xmlns:a="http://schemas.openxmlformats.org/drawingml/2006/main" r:embed="R0fe7a1d7e63f4ddf"/>
           <a:stretch xmlns:a="http://schemas.openxmlformats.org/drawingml/2006/main"/>
         </p:blipFill>
         <p:spPr>
@@ -11615,7 +11615,7 @@
           <p:cNvPr id="3" name="">
             <a:extLst xmlns:a="http://schemas.openxmlformats.org/drawingml/2006/main">
               <a:ext uri="{FF2B5EF4-FFF2-40B4-BE49-F238E27FC236}">
-                <a16:creationId xmlns:a16="http://schemas.microsoft.com/office/drawing/2014/main" id="{35CC056C-992B-4854-8964-02F6F22122CC}"/>
+                <a16:creationId xmlns:a16="http://schemas.microsoft.com/office/drawing/2014/main" id="{0334C720-D970-48F6-A99F-7FBC71C547C0}"/>
               </a:ext>
             </a:extLst>
           </p:cNvPr>
@@ -11665,7 +11665,7 @@
           <p:cNvPr id="4" name="">
             <a:extLst xmlns:a="http://schemas.openxmlformats.org/drawingml/2006/main">
               <a:ext uri="{FF2B5EF4-FFF2-40B4-BE49-F238E27FC236}">
-                <a16:creationId xmlns:a16="http://schemas.microsoft.com/office/drawing/2014/main" id="{26618C21-5E36-4525-819A-840314D07EF4}"/>
+                <a16:creationId xmlns:a16="http://schemas.microsoft.com/office/drawing/2014/main" id="{0E5C77CB-ADD8-41DF-9A3D-F782FA7965C3}"/>
               </a:ext>
             </a:extLst>
           </p:cNvPr>
@@ -11698,7 +11698,7 @@
           <p:cNvPr id="5" name="">
             <a:extLst xmlns:a="http://schemas.openxmlformats.org/drawingml/2006/main">
               <a:ext uri="{FF2B5EF4-FFF2-40B4-BE49-F238E27FC236}">
-                <a16:creationId xmlns:a16="http://schemas.microsoft.com/office/drawing/2014/main" id="{5F4547AA-5368-4B38-83C1-51624B069FE0}"/>
+                <a16:creationId xmlns:a16="http://schemas.microsoft.com/office/drawing/2014/main" id="{186F75CD-151E-4722-B915-CE7B5F7AA6A4}"/>
               </a:ext>
             </a:extLst>
           </p:cNvPr>
@@ -11729,7 +11729,7 @@
           <p:cNvPr id="6" name="">
             <a:extLst xmlns:a="http://schemas.openxmlformats.org/drawingml/2006/main">
               <a:ext uri="{FF2B5EF4-FFF2-40B4-BE49-F238E27FC236}">
-                <a16:creationId xmlns:a16="http://schemas.microsoft.com/office/drawing/2014/main" id="{B181FA76-5976-45DA-9469-D7BC483211B3}"/>
+                <a16:creationId xmlns:a16="http://schemas.microsoft.com/office/drawing/2014/main" id="{BA576667-CB9D-4D68-8822-64098E93E354}"/>
               </a:ext>
             </a:extLst>
           </p:cNvPr>
@@ -11779,7 +11779,7 @@
           <p:cNvPr id="7" name="">
             <a:extLst xmlns:a="http://schemas.openxmlformats.org/drawingml/2006/main">
               <a:ext uri="{FF2B5EF4-FFF2-40B4-BE49-F238E27FC236}">
-                <a16:creationId xmlns:a16="http://schemas.microsoft.com/office/drawing/2014/main" id="{7B5FD903-14ED-4743-A398-5AE0551CEA4C}"/>
+                <a16:creationId xmlns:a16="http://schemas.microsoft.com/office/drawing/2014/main" id="{C84E1A19-5517-4999-B908-F60FE07562D0}"/>
               </a:ext>
             </a:extLst>
           </p:cNvPr>
@@ -11829,7 +11829,7 @@
           <p:cNvPr id="8" name="">
             <a:extLst xmlns:a="http://schemas.openxmlformats.org/drawingml/2006/main">
               <a:ext uri="{FF2B5EF4-FFF2-40B4-BE49-F238E27FC236}">
-                <a16:creationId xmlns:a16="http://schemas.microsoft.com/office/drawing/2014/main" id="{ED445247-76DC-4538-9E61-ADC650CA9905}"/>
+                <a16:creationId xmlns:a16="http://schemas.microsoft.com/office/drawing/2014/main" id="{5AC895D3-8E50-4ADB-A39C-6B586305568B}"/>
               </a:ext>
             </a:extLst>
           </p:cNvPr>
@@ -11864,7 +11864,7 @@
           <p:cNvPr id="9" name="">
             <a:extLst xmlns:a="http://schemas.openxmlformats.org/drawingml/2006/main">
               <a:ext uri="{FF2B5EF4-FFF2-40B4-BE49-F238E27FC236}">
-                <a16:creationId xmlns:a16="http://schemas.microsoft.com/office/drawing/2014/main" id="{E76C0BCD-1AE1-4BDE-A129-4B5B5E90F4A3}"/>
+                <a16:creationId xmlns:a16="http://schemas.microsoft.com/office/drawing/2014/main" id="{47B874ED-318A-4D11-AFA4-57F071F4CEFF}"/>
               </a:ext>
             </a:extLst>
           </p:cNvPr>
@@ -11897,7 +11897,7 @@
           <p:cNvPr id="10" name="">
             <a:extLst xmlns:a="http://schemas.openxmlformats.org/drawingml/2006/main">
               <a:ext uri="{FF2B5EF4-FFF2-40B4-BE49-F238E27FC236}">
-                <a16:creationId xmlns:a16="http://schemas.microsoft.com/office/drawing/2014/main" id="{D494F722-7AA0-4DAF-8A93-C722D21A888F}"/>
+                <a16:creationId xmlns:a16="http://schemas.microsoft.com/office/drawing/2014/main" id="{9E782511-C766-4818-A7F0-1A40B7D45455}"/>
               </a:ext>
             </a:extLst>
           </p:cNvPr>
@@ -11947,7 +11947,7 @@
           <p:cNvPr id="11" name="">
             <a:extLst xmlns:a="http://schemas.openxmlformats.org/drawingml/2006/main">
               <a:ext uri="{FF2B5EF4-FFF2-40B4-BE49-F238E27FC236}">
-                <a16:creationId xmlns:a16="http://schemas.microsoft.com/office/drawing/2014/main" id="{91058DF8-B05D-45EB-941C-F81C2D15F2B7}"/>
+                <a16:creationId xmlns:a16="http://schemas.microsoft.com/office/drawing/2014/main" id="{FCAC7E2E-9191-4DCA-B5A7-D4AC669CA641}"/>
               </a:ext>
             </a:extLst>
           </p:cNvPr>
@@ -11997,7 +11997,7 @@
           <p:cNvPr id="12" name="">
             <a:extLst xmlns:a="http://schemas.openxmlformats.org/drawingml/2006/main">
               <a:ext uri="{FF2B5EF4-FFF2-40B4-BE49-F238E27FC236}">
-                <a16:creationId xmlns:a16="http://schemas.microsoft.com/office/drawing/2014/main" id="{F66CB4A5-C0BB-42E2-BA7C-BBF7BAD62FD1}"/>
+                <a16:creationId xmlns:a16="http://schemas.microsoft.com/office/drawing/2014/main" id="{E3EE9506-2961-4750-96DA-0EA2BE245740}"/>
               </a:ext>
             </a:extLst>
           </p:cNvPr>
@@ -12047,7 +12047,7 @@
           <p:cNvPr id="13" name="">
             <a:extLst xmlns:a="http://schemas.openxmlformats.org/drawingml/2006/main">
               <a:ext uri="{FF2B5EF4-FFF2-40B4-BE49-F238E27FC236}">
-                <a16:creationId xmlns:a16="http://schemas.microsoft.com/office/drawing/2014/main" id="{8F6D78B1-7C02-4DBD-9E43-BEA1904DE0AB}"/>
+                <a16:creationId xmlns:a16="http://schemas.microsoft.com/office/drawing/2014/main" id="{28B67CE9-5722-4725-906E-3BF6B9FE5BC2}"/>
               </a:ext>
             </a:extLst>
           </p:cNvPr>
@@ -12078,7 +12078,7 @@
           <p:cNvPr id="14" name="">
             <a:extLst xmlns:a="http://schemas.openxmlformats.org/drawingml/2006/main">
               <a:ext uri="{FF2B5EF4-FFF2-40B4-BE49-F238E27FC236}">
-                <a16:creationId xmlns:a16="http://schemas.microsoft.com/office/drawing/2014/main" id="{9889CB13-67BE-4102-B393-11726E5DF5B2}"/>
+                <a16:creationId xmlns:a16="http://schemas.microsoft.com/office/drawing/2014/main" id="{0778846C-F28B-4A52-A3CA-0C5DACDEEAD0}"/>
               </a:ext>
             </a:extLst>
           </p:cNvPr>
@@ -12128,7 +12128,7 @@
           <p:cNvPr id="15" name="">
             <a:extLst xmlns:a="http://schemas.openxmlformats.org/drawingml/2006/main">
               <a:ext uri="{FF2B5EF4-FFF2-40B4-BE49-F238E27FC236}">
-                <a16:creationId xmlns:a16="http://schemas.microsoft.com/office/drawing/2014/main" id="{805906E8-DA78-427A-8C2B-983666520205}"/>
+                <a16:creationId xmlns:a16="http://schemas.microsoft.com/office/drawing/2014/main" id="{2DAD3BAC-D1BA-49CA-9705-1111CDB851E4}"/>
               </a:ext>
             </a:extLst>
           </p:cNvPr>
@@ -12178,7 +12178,7 @@
           <p:cNvPr id="16" name="">
             <a:extLst xmlns:a="http://schemas.openxmlformats.org/drawingml/2006/main">
               <a:ext uri="{FF2B5EF4-FFF2-40B4-BE49-F238E27FC236}">
-                <a16:creationId xmlns:a16="http://schemas.microsoft.com/office/drawing/2014/main" id="{88A750A9-5260-441C-9143-DBC972BC39EB}"/>
+                <a16:creationId xmlns:a16="http://schemas.microsoft.com/office/drawing/2014/main" id="{971F412D-5C31-4EDB-BDEF-8A0B31838915}"/>
               </a:ext>
             </a:extLst>
           </p:cNvPr>
@@ -12213,7 +12213,7 @@
           <p:cNvPr id="17" name="">
             <a:extLst xmlns:a="http://schemas.openxmlformats.org/drawingml/2006/main">
               <a:ext uri="{FF2B5EF4-FFF2-40B4-BE49-F238E27FC236}">
-                <a16:creationId xmlns:a16="http://schemas.microsoft.com/office/drawing/2014/main" id="{C865B8FE-3FE4-4999-B3CE-DEC727C65FA8}"/>
+                <a16:creationId xmlns:a16="http://schemas.microsoft.com/office/drawing/2014/main" id="{E21C61CA-7ECE-4613-897F-925DAF01C635}"/>
               </a:ext>
             </a:extLst>
           </p:cNvPr>
@@ -12246,7 +12246,7 @@
           <p:cNvPr id="18" name="">
             <a:extLst xmlns:a="http://schemas.openxmlformats.org/drawingml/2006/main">
               <a:ext uri="{FF2B5EF4-FFF2-40B4-BE49-F238E27FC236}">
-                <a16:creationId xmlns:a16="http://schemas.microsoft.com/office/drawing/2014/main" id="{2AA945EF-5437-4686-AFAF-D63C950DCC99}"/>
+                <a16:creationId xmlns:a16="http://schemas.microsoft.com/office/drawing/2014/main" id="{2B690959-D942-4362-B657-68715C484BC6}"/>
               </a:ext>
             </a:extLst>
           </p:cNvPr>
@@ -12296,7 +12296,7 @@
           <p:cNvPr id="19" name="">
             <a:extLst xmlns:a="http://schemas.openxmlformats.org/drawingml/2006/main">
               <a:ext uri="{FF2B5EF4-FFF2-40B4-BE49-F238E27FC236}">
-                <a16:creationId xmlns:a16="http://schemas.microsoft.com/office/drawing/2014/main" id="{DC2CE46E-1D27-4915-9B10-3346C96B0A9D}"/>
+                <a16:creationId xmlns:a16="http://schemas.microsoft.com/office/drawing/2014/main" id="{7E894545-9BAC-4A3C-866E-700656D51781}"/>
               </a:ext>
             </a:extLst>
           </p:cNvPr>
@@ -12346,7 +12346,7 @@
           <p:cNvPr id="20" name="">
             <a:extLst xmlns:a="http://schemas.openxmlformats.org/drawingml/2006/main">
               <a:ext uri="{FF2B5EF4-FFF2-40B4-BE49-F238E27FC236}">
-                <a16:creationId xmlns:a16="http://schemas.microsoft.com/office/drawing/2014/main" id="{28AA5D2E-11EC-440C-A8C2-3F75AD4BFC36}"/>
+                <a16:creationId xmlns:a16="http://schemas.microsoft.com/office/drawing/2014/main" id="{95B82EDD-F09B-463B-A430-31247F7924AD}"/>
               </a:ext>
             </a:extLst>
           </p:cNvPr>
@@ -12396,7 +12396,7 @@
           <p:cNvPr id="21" name="">
             <a:extLst xmlns:a="http://schemas.openxmlformats.org/drawingml/2006/main">
               <a:ext uri="{FF2B5EF4-FFF2-40B4-BE49-F238E27FC236}">
-                <a16:creationId xmlns:a16="http://schemas.microsoft.com/office/drawing/2014/main" id="{CA3044D0-D1A0-40EE-9D81-EF9018DF532C}"/>
+                <a16:creationId xmlns:a16="http://schemas.microsoft.com/office/drawing/2014/main" id="{C890132F-3FB1-4D55-9063-77539D7A1713}"/>
               </a:ext>
             </a:extLst>
           </p:cNvPr>
@@ -12427,7 +12427,7 @@
           <p:cNvPr id="22" name="">
             <a:extLst xmlns:a="http://schemas.openxmlformats.org/drawingml/2006/main">
               <a:ext uri="{FF2B5EF4-FFF2-40B4-BE49-F238E27FC236}">
-                <a16:creationId xmlns:a16="http://schemas.microsoft.com/office/drawing/2014/main" id="{8984BB65-C1CE-46B6-9A58-1B4FC9092D92}"/>
+                <a16:creationId xmlns:a16="http://schemas.microsoft.com/office/drawing/2014/main" id="{59B295D9-3DA6-470F-B42B-10162FB8237A}"/>
               </a:ext>
             </a:extLst>
           </p:cNvPr>
@@ -12477,7 +12477,7 @@
           <p:cNvPr id="23" name="">
             <a:extLst xmlns:a="http://schemas.openxmlformats.org/drawingml/2006/main">
               <a:ext uri="{FF2B5EF4-FFF2-40B4-BE49-F238E27FC236}">
-                <a16:creationId xmlns:a16="http://schemas.microsoft.com/office/drawing/2014/main" id="{F59AC32F-B2F6-40FD-B794-BA37E5ADF12F}"/>
+                <a16:creationId xmlns:a16="http://schemas.microsoft.com/office/drawing/2014/main" id="{025C6F47-DBA2-4654-860E-0AFC321612D6}"/>
               </a:ext>
             </a:extLst>
           </p:cNvPr>
@@ -12527,7 +12527,7 @@
           <p:cNvPr id="24" name="">
             <a:extLst xmlns:a="http://schemas.openxmlformats.org/drawingml/2006/main">
               <a:ext uri="{FF2B5EF4-FFF2-40B4-BE49-F238E27FC236}">
-                <a16:creationId xmlns:a16="http://schemas.microsoft.com/office/drawing/2014/main" id="{969EDB4A-619F-4CA4-836E-9061D670B401}"/>
+                <a16:creationId xmlns:a16="http://schemas.microsoft.com/office/drawing/2014/main" id="{CA839084-6D23-42D8-A0F8-82A929A2CBCE}"/>
               </a:ext>
             </a:extLst>
           </p:cNvPr>
@@ -12562,7 +12562,7 @@
           <p:cNvPr id="25" name="">
             <a:extLst xmlns:a="http://schemas.openxmlformats.org/drawingml/2006/main">
               <a:ext uri="{FF2B5EF4-FFF2-40B4-BE49-F238E27FC236}">
-                <a16:creationId xmlns:a16="http://schemas.microsoft.com/office/drawing/2014/main" id="{878735E6-211A-4502-A1AA-B681CB7BE917}"/>
+                <a16:creationId xmlns:a16="http://schemas.microsoft.com/office/drawing/2014/main" id="{26E39461-BA67-415F-A93E-DE65609C5CB3}"/>
               </a:ext>
             </a:extLst>
           </p:cNvPr>
@@ -12595,7 +12595,7 @@
           <p:cNvPr id="26" name="">
             <a:extLst xmlns:a="http://schemas.openxmlformats.org/drawingml/2006/main">
               <a:ext uri="{FF2B5EF4-FFF2-40B4-BE49-F238E27FC236}">
-                <a16:creationId xmlns:a16="http://schemas.microsoft.com/office/drawing/2014/main" id="{ED21BA86-3936-4FD5-B586-8503F53904C4}"/>
+                <a16:creationId xmlns:a16="http://schemas.microsoft.com/office/drawing/2014/main" id="{F678DBA5-CA8A-439B-BE10-6152A491C110}"/>
               </a:ext>
             </a:extLst>
           </p:cNvPr>
@@ -12645,7 +12645,7 @@
           <p:cNvPr id="27" name="">
             <a:extLst xmlns:a="http://schemas.openxmlformats.org/drawingml/2006/main">
               <a:ext uri="{FF2B5EF4-FFF2-40B4-BE49-F238E27FC236}">
-                <a16:creationId xmlns:a16="http://schemas.microsoft.com/office/drawing/2014/main" id="{3339839F-39AF-4FDD-906A-3E94D0979896}"/>
+                <a16:creationId xmlns:a16="http://schemas.microsoft.com/office/drawing/2014/main" id="{81841292-21E6-4154-B12F-31663869D5CB}"/>
               </a:ext>
             </a:extLst>
           </p:cNvPr>
@@ -12695,7 +12695,7 @@
           <p:cNvPr id="28" name="">
             <a:extLst xmlns:a="http://schemas.openxmlformats.org/drawingml/2006/main">
               <a:ext uri="{FF2B5EF4-FFF2-40B4-BE49-F238E27FC236}">
-                <a16:creationId xmlns:a16="http://schemas.microsoft.com/office/drawing/2014/main" id="{A8CCD744-B0EF-4A0A-8AC3-1B5B505536A3}"/>
+                <a16:creationId xmlns:a16="http://schemas.microsoft.com/office/drawing/2014/main" id="{51C69449-DD81-4326-AC87-7FB9524BFA66}"/>
               </a:ext>
             </a:extLst>
           </p:cNvPr>
@@ -12745,7 +12745,7 @@
           <p:cNvPr id="29" name="">
             <a:extLst xmlns:a="http://schemas.openxmlformats.org/drawingml/2006/main">
               <a:ext uri="{FF2B5EF4-FFF2-40B4-BE49-F238E27FC236}">
-                <a16:creationId xmlns:a16="http://schemas.microsoft.com/office/drawing/2014/main" id="{256AA7CF-5EA6-450F-ABF8-D61B3E51FD09}"/>
+                <a16:creationId xmlns:a16="http://schemas.microsoft.com/office/drawing/2014/main" id="{BB88A1AE-C161-43FC-9265-7023819E6138}"/>
               </a:ext>
             </a:extLst>
           </p:cNvPr>
@@ -12776,7 +12776,7 @@
           <p:cNvPr id="30" name="">
             <a:extLst xmlns:a="http://schemas.openxmlformats.org/drawingml/2006/main">
               <a:ext uri="{FF2B5EF4-FFF2-40B4-BE49-F238E27FC236}">
-                <a16:creationId xmlns:a16="http://schemas.microsoft.com/office/drawing/2014/main" id="{026A746F-5F82-4A05-8EFE-E2D546B75A23}"/>
+                <a16:creationId xmlns:a16="http://schemas.microsoft.com/office/drawing/2014/main" id="{69E6DCEC-9C52-429F-8290-3E086962AF73}"/>
               </a:ext>
             </a:extLst>
           </p:cNvPr>
@@ -12826,7 +12826,7 @@
           <p:cNvPr id="31" name="">
             <a:extLst xmlns:a="http://schemas.openxmlformats.org/drawingml/2006/main">
               <a:ext uri="{FF2B5EF4-FFF2-40B4-BE49-F238E27FC236}">
-                <a16:creationId xmlns:a16="http://schemas.microsoft.com/office/drawing/2014/main" id="{BB6B21F5-2A6E-4B68-B6AA-C94E0C2D80D7}"/>
+                <a16:creationId xmlns:a16="http://schemas.microsoft.com/office/drawing/2014/main" id="{A1647EB2-426A-440B-971C-A86384E036D6}"/>
               </a:ext>
             </a:extLst>
           </p:cNvPr>
@@ -12874,7 +12874,7 @@
     </p:spTree>
     <p:extLst>
       <p:ext uri="{BB962C8B-B14F-4D97-AF65-F5344CB8AC3E}">
-        <p14:creationId xmlns:p14="http://schemas.microsoft.com/office/powerpoint/2010/main" val="1790309836"/>
+        <p14:creationId xmlns:p14="http://schemas.microsoft.com/office/powerpoint/2010/main" val="42072275"/>
       </p:ext>
     </p:extLst>
   </p:cSld>
@@ -12905,7 +12905,7 @@
           <p:cNvPr id="1" name="">
             <a:extLst xmlns:a="http://schemas.openxmlformats.org/drawingml/2006/main">
               <a:ext uri="{FF2B5EF4-FFF2-40B4-BE49-F238E27FC236}">
-                <a16:creationId xmlns:a16="http://schemas.microsoft.com/office/drawing/2014/main" id="{51ACF314-ADE9-4E80-916D-71F9EA4D8019}"/>
+                <a16:creationId xmlns:a16="http://schemas.microsoft.com/office/drawing/2014/main" id="{59C872B4-CAB7-4F37-B3C5-2678129F269F}"/>
               </a:ext>
             </a:extLst>
           </p:cNvPr>
@@ -12940,7 +12940,7 @@
           <p:nvPr/>
         </p:nvPicPr>
         <p:blipFill>
-          <a:blip xmlns:r="http://schemas.openxmlformats.org/officeDocument/2006/relationships" xmlns:a="http://schemas.openxmlformats.org/drawingml/2006/main" r:embed="Rf6c08abcc27d40a3"/>
+          <a:blip xmlns:r="http://schemas.openxmlformats.org/officeDocument/2006/relationships" xmlns:a="http://schemas.openxmlformats.org/drawingml/2006/main" r:embed="Ra4dfd96a6168471f"/>
           <a:stretch xmlns:a="http://schemas.openxmlformats.org/drawingml/2006/main"/>
         </p:blipFill>
         <p:spPr>
@@ -12958,7 +12958,7 @@
           <p:cNvPr id="3" name="">
             <a:extLst xmlns:a="http://schemas.openxmlformats.org/drawingml/2006/main">
               <a:ext uri="{FF2B5EF4-FFF2-40B4-BE49-F238E27FC236}">
-                <a16:creationId xmlns:a16="http://schemas.microsoft.com/office/drawing/2014/main" id="{9889C068-BDCC-4F78-92BB-38342EA6346C}"/>
+                <a16:creationId xmlns:a16="http://schemas.microsoft.com/office/drawing/2014/main" id="{5472EC24-D477-48E3-A2FA-DAAD905450BB}"/>
               </a:ext>
             </a:extLst>
           </p:cNvPr>
@@ -13008,7 +13008,7 @@
           <p:cNvPr id="4" name="">
             <a:extLst xmlns:a="http://schemas.openxmlformats.org/drawingml/2006/main">
               <a:ext uri="{FF2B5EF4-FFF2-40B4-BE49-F238E27FC236}">
-                <a16:creationId xmlns:a16="http://schemas.microsoft.com/office/drawing/2014/main" id="{FA730738-9EFA-460A-AA00-9A35272AB2E2}"/>
+                <a16:creationId xmlns:a16="http://schemas.microsoft.com/office/drawing/2014/main" id="{C8BDA06A-3021-4D33-A09C-4C5B4DB9F660}"/>
               </a:ext>
             </a:extLst>
           </p:cNvPr>
@@ -13041,7 +13041,7 @@
           <p:cNvPr id="5" name="">
             <a:extLst xmlns:a="http://schemas.openxmlformats.org/drawingml/2006/main">
               <a:ext uri="{FF2B5EF4-FFF2-40B4-BE49-F238E27FC236}">
-                <a16:creationId xmlns:a16="http://schemas.microsoft.com/office/drawing/2014/main" id="{7FA124B6-E1B1-4704-A31F-D932EC103BC5}"/>
+                <a16:creationId xmlns:a16="http://schemas.microsoft.com/office/drawing/2014/main" id="{C7935968-40B9-43C7-B3C4-4808C65E65FC}"/>
               </a:ext>
             </a:extLst>
           </p:cNvPr>
@@ -13072,7 +13072,7 @@
           <p:cNvPr id="6" name="">
             <a:extLst xmlns:a="http://schemas.openxmlformats.org/drawingml/2006/main">
               <a:ext uri="{FF2B5EF4-FFF2-40B4-BE49-F238E27FC236}">
-                <a16:creationId xmlns:a16="http://schemas.microsoft.com/office/drawing/2014/main" id="{2E76271F-0D59-475C-A7BA-A62DC40DDDBB}"/>
+                <a16:creationId xmlns:a16="http://schemas.microsoft.com/office/drawing/2014/main" id="{9DEC99F3-08D7-4811-B87A-320BC8C55C0E}"/>
               </a:ext>
             </a:extLst>
           </p:cNvPr>
@@ -13122,7 +13122,7 @@
           <p:cNvPr id="7" name="">
             <a:extLst xmlns:a="http://schemas.openxmlformats.org/drawingml/2006/main">
               <a:ext uri="{FF2B5EF4-FFF2-40B4-BE49-F238E27FC236}">
-                <a16:creationId xmlns:a16="http://schemas.microsoft.com/office/drawing/2014/main" id="{C22D4C01-3787-4E10-96AA-30F4CCDC8319}"/>
+                <a16:creationId xmlns:a16="http://schemas.microsoft.com/office/drawing/2014/main" id="{39C66BD2-0AC0-4F58-BC42-F5BC4B1CA734}"/>
               </a:ext>
             </a:extLst>
           </p:cNvPr>
@@ -13172,7 +13172,7 @@
           <p:cNvPr id="8" name="">
             <a:extLst xmlns:a="http://schemas.openxmlformats.org/drawingml/2006/main">
               <a:ext uri="{FF2B5EF4-FFF2-40B4-BE49-F238E27FC236}">
-                <a16:creationId xmlns:a16="http://schemas.microsoft.com/office/drawing/2014/main" id="{9CA3C657-A9B4-4512-BB66-81A5DFD15CCC}"/>
+                <a16:creationId xmlns:a16="http://schemas.microsoft.com/office/drawing/2014/main" id="{38EA9841-DA5F-4C4C-945C-DB785825BB2C}"/>
               </a:ext>
             </a:extLst>
           </p:cNvPr>
@@ -13222,7 +13222,7 @@
           <p:cNvPr id="9" name="">
             <a:extLst xmlns:a="http://schemas.openxmlformats.org/drawingml/2006/main">
               <a:ext uri="{FF2B5EF4-FFF2-40B4-BE49-F238E27FC236}">
-                <a16:creationId xmlns:a16="http://schemas.microsoft.com/office/drawing/2014/main" id="{23EF79E6-DD14-47DA-A710-01810B541550}"/>
+                <a16:creationId xmlns:a16="http://schemas.microsoft.com/office/drawing/2014/main" id="{F06E58A0-91D7-404A-9C1A-E48DAB4FBF7D}"/>
               </a:ext>
             </a:extLst>
           </p:cNvPr>
@@ -13272,7 +13272,7 @@
           <p:cNvPr id="10" name="">
             <a:extLst xmlns:a="http://schemas.openxmlformats.org/drawingml/2006/main">
               <a:ext uri="{FF2B5EF4-FFF2-40B4-BE49-F238E27FC236}">
-                <a16:creationId xmlns:a16="http://schemas.microsoft.com/office/drawing/2014/main" id="{1B9F3BFA-FAF8-4090-89EB-B0AD60191889}"/>
+                <a16:creationId xmlns:a16="http://schemas.microsoft.com/office/drawing/2014/main" id="{A0948433-841D-4C8F-9154-A8813CB5E7A5}"/>
               </a:ext>
             </a:extLst>
           </p:cNvPr>
@@ -13303,7 +13303,7 @@
           <p:cNvPr id="11" name="">
             <a:extLst xmlns:a="http://schemas.openxmlformats.org/drawingml/2006/main">
               <a:ext uri="{FF2B5EF4-FFF2-40B4-BE49-F238E27FC236}">
-                <a16:creationId xmlns:a16="http://schemas.microsoft.com/office/drawing/2014/main" id="{919ED3AA-E120-4904-BA65-FD8A6033A537}"/>
+                <a16:creationId xmlns:a16="http://schemas.microsoft.com/office/drawing/2014/main" id="{C8B38F68-2F86-438E-9DD2-0AE4820E50E2}"/>
               </a:ext>
             </a:extLst>
           </p:cNvPr>
@@ -13353,7 +13353,7 @@
           <p:cNvPr id="12" name="">
             <a:extLst xmlns:a="http://schemas.openxmlformats.org/drawingml/2006/main">
               <a:ext uri="{FF2B5EF4-FFF2-40B4-BE49-F238E27FC236}">
-                <a16:creationId xmlns:a16="http://schemas.microsoft.com/office/drawing/2014/main" id="{9AFAAEFE-FEB5-4306-8F5A-7E0D23578089}"/>
+                <a16:creationId xmlns:a16="http://schemas.microsoft.com/office/drawing/2014/main" id="{7D5044ED-A60B-496F-AAC1-63C298D643B8}"/>
               </a:ext>
             </a:extLst>
           </p:cNvPr>
@@ -13403,7 +13403,7 @@
           <p:cNvPr id="13" name="">
             <a:extLst xmlns:a="http://schemas.openxmlformats.org/drawingml/2006/main">
               <a:ext uri="{FF2B5EF4-FFF2-40B4-BE49-F238E27FC236}">
-                <a16:creationId xmlns:a16="http://schemas.microsoft.com/office/drawing/2014/main" id="{3C5D8048-F807-4615-B9CA-B34A0741C2D2}"/>
+                <a16:creationId xmlns:a16="http://schemas.microsoft.com/office/drawing/2014/main" id="{ACB0DB61-D438-4256-A88F-1459136C8892}"/>
               </a:ext>
             </a:extLst>
           </p:cNvPr>
@@ -13434,7 +13434,7 @@
           <p:cNvPr id="14" name="">
             <a:extLst xmlns:a="http://schemas.openxmlformats.org/drawingml/2006/main">
               <a:ext uri="{FF2B5EF4-FFF2-40B4-BE49-F238E27FC236}">
-                <a16:creationId xmlns:a16="http://schemas.microsoft.com/office/drawing/2014/main" id="{3F838637-EBEA-4EF4-B89C-2E2EC1068E2B}"/>
+                <a16:creationId xmlns:a16="http://schemas.microsoft.com/office/drawing/2014/main" id="{5076D387-0C2E-4224-8754-0E92D59BB6B5}"/>
               </a:ext>
             </a:extLst>
           </p:cNvPr>
@@ -13484,7 +13484,7 @@
           <p:cNvPr id="15" name="">
             <a:extLst xmlns:a="http://schemas.openxmlformats.org/drawingml/2006/main">
               <a:ext uri="{FF2B5EF4-FFF2-40B4-BE49-F238E27FC236}">
-                <a16:creationId xmlns:a16="http://schemas.microsoft.com/office/drawing/2014/main" id="{14C68896-5BB7-4F0B-803A-AA180CB71D9B}"/>
+                <a16:creationId xmlns:a16="http://schemas.microsoft.com/office/drawing/2014/main" id="{D1B33371-89D7-41AB-A8B0-0AA1EF57EAD0}"/>
               </a:ext>
             </a:extLst>
           </p:cNvPr>
@@ -13534,7 +13534,7 @@
           <p:cNvPr id="16" name="">
             <a:extLst xmlns:a="http://schemas.openxmlformats.org/drawingml/2006/main">
               <a:ext uri="{FF2B5EF4-FFF2-40B4-BE49-F238E27FC236}">
-                <a16:creationId xmlns:a16="http://schemas.microsoft.com/office/drawing/2014/main" id="{2F5C7575-181E-4CD6-88DC-C7C967D6C316}"/>
+                <a16:creationId xmlns:a16="http://schemas.microsoft.com/office/drawing/2014/main" id="{D6ECA677-4CEB-4913-A92C-0DE5A2EAD762}"/>
               </a:ext>
             </a:extLst>
           </p:cNvPr>
@@ -13565,7 +13565,7 @@
           <p:cNvPr id="17" name="">
             <a:extLst xmlns:a="http://schemas.openxmlformats.org/drawingml/2006/main">
               <a:ext uri="{FF2B5EF4-FFF2-40B4-BE49-F238E27FC236}">
-                <a16:creationId xmlns:a16="http://schemas.microsoft.com/office/drawing/2014/main" id="{89D0B3AC-EAFA-4586-839F-2D2E23C81CD1}"/>
+                <a16:creationId xmlns:a16="http://schemas.microsoft.com/office/drawing/2014/main" id="{7FA9DD7F-1C9A-4AF4-B16E-345852635AB5}"/>
               </a:ext>
             </a:extLst>
           </p:cNvPr>
@@ -13615,7 +13615,7 @@
           <p:cNvPr id="18" name="">
             <a:extLst xmlns:a="http://schemas.openxmlformats.org/drawingml/2006/main">
               <a:ext uri="{FF2B5EF4-FFF2-40B4-BE49-F238E27FC236}">
-                <a16:creationId xmlns:a16="http://schemas.microsoft.com/office/drawing/2014/main" id="{4ED9FDA2-D608-4AA1-80FE-F46022D66218}"/>
+                <a16:creationId xmlns:a16="http://schemas.microsoft.com/office/drawing/2014/main" id="{27A1B5E5-B49E-4D13-9B85-9DD23349EC9B}"/>
               </a:ext>
             </a:extLst>
           </p:cNvPr>
@@ -13665,7 +13665,7 @@
           <p:cNvPr id="19" name="">
             <a:extLst xmlns:a="http://schemas.openxmlformats.org/drawingml/2006/main">
               <a:ext uri="{FF2B5EF4-FFF2-40B4-BE49-F238E27FC236}">
-                <a16:creationId xmlns:a16="http://schemas.microsoft.com/office/drawing/2014/main" id="{716F9AED-6CC4-4065-AEC9-5AFB6A99D44A}"/>
+                <a16:creationId xmlns:a16="http://schemas.microsoft.com/office/drawing/2014/main" id="{57E8DBBF-B82B-47D5-807A-D179CD74B7EF}"/>
               </a:ext>
             </a:extLst>
           </p:cNvPr>
@@ -13700,7 +13700,7 @@
           <p:cNvPr id="20" name="">
             <a:extLst xmlns:a="http://schemas.openxmlformats.org/drawingml/2006/main">
               <a:ext uri="{FF2B5EF4-FFF2-40B4-BE49-F238E27FC236}">
-                <a16:creationId xmlns:a16="http://schemas.microsoft.com/office/drawing/2014/main" id="{BB14E259-A4F0-4DCE-A3F4-DED755DA3495}"/>
+                <a16:creationId xmlns:a16="http://schemas.microsoft.com/office/drawing/2014/main" id="{06F68FDD-7B0F-457F-9C8F-67E7788E8F02}"/>
               </a:ext>
             </a:extLst>
           </p:cNvPr>
@@ -13750,7 +13750,7 @@
           <p:cNvPr id="21" name="">
             <a:extLst xmlns:a="http://schemas.openxmlformats.org/drawingml/2006/main">
               <a:ext uri="{FF2B5EF4-FFF2-40B4-BE49-F238E27FC236}">
-                <a16:creationId xmlns:a16="http://schemas.microsoft.com/office/drawing/2014/main" id="{1B862ADE-7627-4631-9861-155038927D86}"/>
+                <a16:creationId xmlns:a16="http://schemas.microsoft.com/office/drawing/2014/main" id="{9FEB5591-C6DA-4510-8227-2DF8D3CB8591}"/>
               </a:ext>
             </a:extLst>
           </p:cNvPr>
@@ -13804,7 +13804,7 @@
           <p:nvPr/>
         </p:nvPicPr>
         <p:blipFill>
-          <a:blip xmlns:r="http://schemas.openxmlformats.org/officeDocument/2006/relationships" xmlns:a="http://schemas.openxmlformats.org/drawingml/2006/main" r:embed="Re74426cf8a644d25"/>
+          <a:blip xmlns:r="http://schemas.openxmlformats.org/officeDocument/2006/relationships" xmlns:a="http://schemas.openxmlformats.org/drawingml/2006/main" r:embed="R19e367d88efe4dd0"/>
           <a:stretch xmlns:a="http://schemas.openxmlformats.org/drawingml/2006/main"/>
         </p:blipFill>
         <p:spPr>
@@ -13822,7 +13822,7 @@
           <p:cNvPr id="23" name="">
             <a:extLst xmlns:a="http://schemas.openxmlformats.org/drawingml/2006/main">
               <a:ext uri="{FF2B5EF4-FFF2-40B4-BE49-F238E27FC236}">
-                <a16:creationId xmlns:a16="http://schemas.microsoft.com/office/drawing/2014/main" id="{803B88B2-68DD-41C3-ADFF-FCED5EDDEEB2}"/>
+                <a16:creationId xmlns:a16="http://schemas.microsoft.com/office/drawing/2014/main" id="{F65A8162-EFF8-4BB7-8BF3-CDE3407AE2E5}"/>
               </a:ext>
             </a:extLst>
           </p:cNvPr>
@@ -13872,7 +13872,7 @@
           <p:cNvPr id="24" name="">
             <a:extLst xmlns:a="http://schemas.openxmlformats.org/drawingml/2006/main">
               <a:ext uri="{FF2B5EF4-FFF2-40B4-BE49-F238E27FC236}">
-                <a16:creationId xmlns:a16="http://schemas.microsoft.com/office/drawing/2014/main" id="{A58F131F-5DEC-443C-869B-2FE4DDDF555F}"/>
+                <a16:creationId xmlns:a16="http://schemas.microsoft.com/office/drawing/2014/main" id="{ED82FCA9-206C-4209-8EF5-208B4AF0A2F3}"/>
               </a:ext>
             </a:extLst>
           </p:cNvPr>
@@ -13922,7 +13922,7 @@
           <p:cNvPr id="25" name="">
             <a:extLst xmlns:a="http://schemas.openxmlformats.org/drawingml/2006/main">
               <a:ext uri="{FF2B5EF4-FFF2-40B4-BE49-F238E27FC236}">
-                <a16:creationId xmlns:a16="http://schemas.microsoft.com/office/drawing/2014/main" id="{F37CF286-3BCC-4A03-B849-37E2F2EA734F}"/>
+                <a16:creationId xmlns:a16="http://schemas.microsoft.com/office/drawing/2014/main" id="{ADC9B736-7948-4D5C-9AE6-2423C978809A}"/>
               </a:ext>
             </a:extLst>
           </p:cNvPr>
@@ -13970,7 +13970,7 @@
     </p:spTree>
     <p:extLst>
       <p:ext uri="{BB962C8B-B14F-4D97-AF65-F5344CB8AC3E}">
-        <p14:creationId xmlns:p14="http://schemas.microsoft.com/office/powerpoint/2010/main" val="508651633"/>
+        <p14:creationId xmlns:p14="http://schemas.microsoft.com/office/powerpoint/2010/main" val="579672665"/>
       </p:ext>
     </p:extLst>
   </p:cSld>

--- a/static/audit_presentation_btg.pptx
+++ b/static/audit_presentation_btg.pptx
@@ -2,21 +2,21 @@
 <file path=ppt/presentation.xml><?xml version="1.0" encoding="utf-8"?>
 <p:presentation xmlns:p="http://schemas.openxmlformats.org/presentationml/2006/main">
   <p:sldMasterIdLst>
-    <p:sldMasterId xmlns:r="http://schemas.openxmlformats.org/officeDocument/2006/relationships" id="2147483648" r:id="Ra677fb96f4d84eec"/>
+    <p:sldMasterId xmlns:r="http://schemas.openxmlformats.org/officeDocument/2006/relationships" id="2147483648" r:id="Re9e1dcdeb9f24025"/>
   </p:sldMasterIdLst>
   <p:notesMasterIdLst>
-    <p:notesMasterId xmlns:r="http://schemas.openxmlformats.org/officeDocument/2006/relationships" r:id="Rff7124723e2f4799"/>
+    <p:notesMasterId xmlns:r="http://schemas.openxmlformats.org/officeDocument/2006/relationships" r:id="R5a8a457a88944c92"/>
   </p:notesMasterIdLst>
   <p:sldIdLst>
-    <p:sldId xmlns:r="http://schemas.openxmlformats.org/officeDocument/2006/relationships" id="256" r:id="R68bd021c9c074a0a"/>
-    <p:sldId xmlns:r="http://schemas.openxmlformats.org/officeDocument/2006/relationships" id="257" r:id="R77ae97ec054c4097"/>
-    <p:sldId xmlns:r="http://schemas.openxmlformats.org/officeDocument/2006/relationships" id="258" r:id="Rd4f0fcab170f4a78"/>
-    <p:sldId xmlns:r="http://schemas.openxmlformats.org/officeDocument/2006/relationships" id="259" r:id="Rdc939f6f97174e8c"/>
-    <p:sldId xmlns:r="http://schemas.openxmlformats.org/officeDocument/2006/relationships" id="260" r:id="Rd5be1132e9144d8c"/>
-    <p:sldId xmlns:r="http://schemas.openxmlformats.org/officeDocument/2006/relationships" id="261" r:id="R821dcab061a44fb4"/>
-    <p:sldId xmlns:r="http://schemas.openxmlformats.org/officeDocument/2006/relationships" id="262" r:id="Re8df43ba1b4e4a8f"/>
-    <p:sldId xmlns:r="http://schemas.openxmlformats.org/officeDocument/2006/relationships" id="263" r:id="R91f4723ae5f548ff"/>
-    <p:sldId xmlns:r="http://schemas.openxmlformats.org/officeDocument/2006/relationships" id="264" r:id="R1ef48469a1134a7d"/>
+    <p:sldId xmlns:r="http://schemas.openxmlformats.org/officeDocument/2006/relationships" id="256" r:id="R3f0d107eaaed466f"/>
+    <p:sldId xmlns:r="http://schemas.openxmlformats.org/officeDocument/2006/relationships" id="257" r:id="R9710d22508af418b"/>
+    <p:sldId xmlns:r="http://schemas.openxmlformats.org/officeDocument/2006/relationships" id="258" r:id="R03811bc316224031"/>
+    <p:sldId xmlns:r="http://schemas.openxmlformats.org/officeDocument/2006/relationships" id="259" r:id="R88756a043fae4de0"/>
+    <p:sldId xmlns:r="http://schemas.openxmlformats.org/officeDocument/2006/relationships" id="260" r:id="R9b310c7ca2cb40fa"/>
+    <p:sldId xmlns:r="http://schemas.openxmlformats.org/officeDocument/2006/relationships" id="261" r:id="R674a7fd83bc449e7"/>
+    <p:sldId xmlns:r="http://schemas.openxmlformats.org/officeDocument/2006/relationships" id="262" r:id="R93747b400acd4407"/>
+    <p:sldId xmlns:r="http://schemas.openxmlformats.org/officeDocument/2006/relationships" id="263" r:id="R170fcdff6832404d"/>
+    <p:sldId xmlns:r="http://schemas.openxmlformats.org/officeDocument/2006/relationships" id="264" r:id="R9895b96869c74249"/>
   </p:sldIdLst>
   <p:sldSz cx="12192000" cy="6858000"/>
   <p:notesSz cx="6858000" cy="9144000"/>
@@ -1137,7 +1137,7 @@
   </p:cSld>
   <p:clrMap bg1="lt1" tx1="dk1" bg2="lt2" tx2="dk2" accent1="accent1" accent2="accent2" accent3="accent3" accent4="accent4" accent5="accent5" accent6="accent6" hlink="hlink" folHlink="folHlink"/>
   <p:sldLayoutIdLst>
-    <p:sldLayoutId xmlns:r="http://schemas.openxmlformats.org/officeDocument/2006/relationships" id="2147483649" r:id="R805ff24632c94b2b"/>
+    <p:sldLayoutId xmlns:r="http://schemas.openxmlformats.org/officeDocument/2006/relationships" id="2147483649" r:id="R51efdc50e13f4ca6"/>
   </p:sldLayoutIdLst>
   <p:txStyles>
     <p:titleStyle>
@@ -1688,7 +1688,7 @@
           <p:cNvPr id="1" name="">
             <a:extLst xmlns:a="http://schemas.openxmlformats.org/drawingml/2006/main">
               <a:ext uri="{FF2B5EF4-FFF2-40B4-BE49-F238E27FC236}">
-                <a16:creationId xmlns:a16="http://schemas.microsoft.com/office/drawing/2014/main" id="{DD7E633E-FECD-493A-B990-79DA7BC2EA3F}"/>
+                <a16:creationId xmlns:a16="http://schemas.microsoft.com/office/drawing/2014/main" id="{51E0ACD9-7817-4E59-ABE5-AE1AB81B1A83}"/>
               </a:ext>
             </a:extLst>
           </p:cNvPr>
@@ -1719,7 +1719,7 @@
           <p:cNvPr id="2" name="">
             <a:extLst xmlns:a="http://schemas.openxmlformats.org/drawingml/2006/main">
               <a:ext uri="{FF2B5EF4-FFF2-40B4-BE49-F238E27FC236}">
-                <a16:creationId xmlns:a16="http://schemas.microsoft.com/office/drawing/2014/main" id="{E82E1AD0-57C4-42F2-8AAB-C276BD01D1F0}"/>
+                <a16:creationId xmlns:a16="http://schemas.microsoft.com/office/drawing/2014/main" id="{6D3A391B-D541-4B97-9F08-637A0774B1A6}"/>
               </a:ext>
             </a:extLst>
           </p:cNvPr>
@@ -1754,7 +1754,7 @@
           <p:nvPr/>
         </p:nvPicPr>
         <p:blipFill>
-          <a:blip xmlns:r="http://schemas.openxmlformats.org/officeDocument/2006/relationships" xmlns:a="http://schemas.openxmlformats.org/drawingml/2006/main" r:embed="R5cf247ef377545ca"/>
+          <a:blip xmlns:r="http://schemas.openxmlformats.org/officeDocument/2006/relationships" xmlns:a="http://schemas.openxmlformats.org/drawingml/2006/main" r:embed="Rc08d76d5f2d645ec"/>
           <a:stretch xmlns:a="http://schemas.openxmlformats.org/drawingml/2006/main"/>
         </p:blipFill>
         <p:spPr>
@@ -1772,7 +1772,7 @@
           <p:cNvPr id="4" name="">
             <a:extLst xmlns:a="http://schemas.openxmlformats.org/drawingml/2006/main">
               <a:ext uri="{FF2B5EF4-FFF2-40B4-BE49-F238E27FC236}">
-                <a16:creationId xmlns:a16="http://schemas.microsoft.com/office/drawing/2014/main" id="{957798CA-A8E0-405E-A7C0-9A902A28409C}"/>
+                <a16:creationId xmlns:a16="http://schemas.microsoft.com/office/drawing/2014/main" id="{DC928623-384A-4A9F-BC5E-66F6373DEA74}"/>
               </a:ext>
             </a:extLst>
           </p:cNvPr>
@@ -1822,7 +1822,7 @@
           <p:cNvPr id="5" name="">
             <a:extLst xmlns:a="http://schemas.openxmlformats.org/drawingml/2006/main">
               <a:ext uri="{FF2B5EF4-FFF2-40B4-BE49-F238E27FC236}">
-                <a16:creationId xmlns:a16="http://schemas.microsoft.com/office/drawing/2014/main" id="{377EC194-7FEA-4969-B5AA-82CCEF5758E1}"/>
+                <a16:creationId xmlns:a16="http://schemas.microsoft.com/office/drawing/2014/main" id="{02424EBF-55F5-46FC-84CB-0D48A6C3282F}"/>
               </a:ext>
             </a:extLst>
           </p:cNvPr>
@@ -1872,7 +1872,7 @@
           <p:cNvPr id="6" name="">
             <a:extLst xmlns:a="http://schemas.openxmlformats.org/drawingml/2006/main">
               <a:ext uri="{FF2B5EF4-FFF2-40B4-BE49-F238E27FC236}">
-                <a16:creationId xmlns:a16="http://schemas.microsoft.com/office/drawing/2014/main" id="{3A7BDD4E-FE07-4611-A647-5D5D59342444}"/>
+                <a16:creationId xmlns:a16="http://schemas.microsoft.com/office/drawing/2014/main" id="{A33F675F-40FD-4362-B94E-9AC6E95A5B70}"/>
               </a:ext>
             </a:extLst>
           </p:cNvPr>
@@ -1922,7 +1922,7 @@
           <p:cNvPr id="7" name="">
             <a:extLst xmlns:a="http://schemas.openxmlformats.org/drawingml/2006/main">
               <a:ext uri="{FF2B5EF4-FFF2-40B4-BE49-F238E27FC236}">
-                <a16:creationId xmlns:a16="http://schemas.microsoft.com/office/drawing/2014/main" id="{ACEFD9AB-F08A-4506-9D20-8BECB95795D7}"/>
+                <a16:creationId xmlns:a16="http://schemas.microsoft.com/office/drawing/2014/main" id="{93AACEA4-1855-48BA-B3CB-54A0227FF090}"/>
               </a:ext>
             </a:extLst>
           </p:cNvPr>
@@ -1955,7 +1955,7 @@
           <p:cNvPr id="8" name="">
             <a:extLst xmlns:a="http://schemas.openxmlformats.org/drawingml/2006/main">
               <a:ext uri="{FF2B5EF4-FFF2-40B4-BE49-F238E27FC236}">
-                <a16:creationId xmlns:a16="http://schemas.microsoft.com/office/drawing/2014/main" id="{9E6706B3-29B0-4FF1-AADA-005FD954B802}"/>
+                <a16:creationId xmlns:a16="http://schemas.microsoft.com/office/drawing/2014/main" id="{3F03A26B-09BC-4C07-B15D-2881A5A9849B}"/>
               </a:ext>
             </a:extLst>
           </p:cNvPr>
@@ -2005,7 +2005,7 @@
           <p:cNvPr id="9" name="">
             <a:extLst xmlns:a="http://schemas.openxmlformats.org/drawingml/2006/main">
               <a:ext uri="{FF2B5EF4-FFF2-40B4-BE49-F238E27FC236}">
-                <a16:creationId xmlns:a16="http://schemas.microsoft.com/office/drawing/2014/main" id="{98B749E6-A2FB-4C38-898E-A11D418904F8}"/>
+                <a16:creationId xmlns:a16="http://schemas.microsoft.com/office/drawing/2014/main" id="{AF963A66-374A-4AA3-BC7F-B79481D6680A}"/>
               </a:ext>
             </a:extLst>
           </p:cNvPr>
@@ -2055,7 +2055,7 @@
           <p:cNvPr id="10" name="">
             <a:extLst xmlns:a="http://schemas.openxmlformats.org/drawingml/2006/main">
               <a:ext uri="{FF2B5EF4-FFF2-40B4-BE49-F238E27FC236}">
-                <a16:creationId xmlns:a16="http://schemas.microsoft.com/office/drawing/2014/main" id="{9B4E3B77-806F-437F-8D29-DFED77D77CEE}"/>
+                <a16:creationId xmlns:a16="http://schemas.microsoft.com/office/drawing/2014/main" id="{A501DF4C-3560-487B-9C35-F107C458334B}"/>
               </a:ext>
             </a:extLst>
           </p:cNvPr>
@@ -2088,7 +2088,7 @@
           <p:cNvPr id="11" name="">
             <a:extLst xmlns:a="http://schemas.openxmlformats.org/drawingml/2006/main">
               <a:ext uri="{FF2B5EF4-FFF2-40B4-BE49-F238E27FC236}">
-                <a16:creationId xmlns:a16="http://schemas.microsoft.com/office/drawing/2014/main" id="{B04D1C58-8F37-43AF-AB60-1262F13FF218}"/>
+                <a16:creationId xmlns:a16="http://schemas.microsoft.com/office/drawing/2014/main" id="{C0787550-E20A-4CCE-8E16-0C89AAFEB1FE}"/>
               </a:ext>
             </a:extLst>
           </p:cNvPr>
@@ -2138,7 +2138,7 @@
           <p:cNvPr id="12" name="">
             <a:extLst xmlns:a="http://schemas.openxmlformats.org/drawingml/2006/main">
               <a:ext uri="{FF2B5EF4-FFF2-40B4-BE49-F238E27FC236}">
-                <a16:creationId xmlns:a16="http://schemas.microsoft.com/office/drawing/2014/main" id="{20E15085-2508-41A5-ABE5-53CB18F82453}"/>
+                <a16:creationId xmlns:a16="http://schemas.microsoft.com/office/drawing/2014/main" id="{DA50AB52-FF91-4706-A8A8-7E7CD9C98AD2}"/>
               </a:ext>
             </a:extLst>
           </p:cNvPr>
@@ -2188,7 +2188,7 @@
           <p:cNvPr id="13" name="">
             <a:extLst xmlns:a="http://schemas.openxmlformats.org/drawingml/2006/main">
               <a:ext uri="{FF2B5EF4-FFF2-40B4-BE49-F238E27FC236}">
-                <a16:creationId xmlns:a16="http://schemas.microsoft.com/office/drawing/2014/main" id="{150932CA-0997-4A34-90E8-941DB4A10FD7}"/>
+                <a16:creationId xmlns:a16="http://schemas.microsoft.com/office/drawing/2014/main" id="{FB7F45E6-12F2-4B22-8C75-CC6387DAC6EC}"/>
               </a:ext>
             </a:extLst>
           </p:cNvPr>
@@ -2242,7 +2242,7 @@
           <p:nvPr/>
         </p:nvPicPr>
         <p:blipFill>
-          <a:blip xmlns:r="http://schemas.openxmlformats.org/officeDocument/2006/relationships" xmlns:a="http://schemas.openxmlformats.org/drawingml/2006/main" r:embed="R302f0661e77c4e12"/>
+          <a:blip xmlns:r="http://schemas.openxmlformats.org/officeDocument/2006/relationships" xmlns:a="http://schemas.openxmlformats.org/drawingml/2006/main" r:embed="Rc7ce305609ba4486"/>
           <a:srcRect xmlns:a="http://schemas.openxmlformats.org/drawingml/2006/main" l="0" t="132" r="0" b="132"/>
           <a:stretch xmlns:a="http://schemas.openxmlformats.org/drawingml/2006/main">
             <a:fillRect l="0" t="0" r="0" b="0"/>
@@ -2263,7 +2263,7 @@
           <p:cNvPr id="15" name="">
             <a:extLst xmlns:a="http://schemas.openxmlformats.org/drawingml/2006/main">
               <a:ext uri="{FF2B5EF4-FFF2-40B4-BE49-F238E27FC236}">
-                <a16:creationId xmlns:a16="http://schemas.microsoft.com/office/drawing/2014/main" id="{E73F608D-44B3-44BB-B535-C4D35F444C96}"/>
+                <a16:creationId xmlns:a16="http://schemas.microsoft.com/office/drawing/2014/main" id="{F71DAB60-BF66-4C65-BCC2-FF3B0B824A54}"/>
               </a:ext>
             </a:extLst>
           </p:cNvPr>
@@ -2294,7 +2294,7 @@
           <p:cNvPr id="16" name="">
             <a:extLst xmlns:a="http://schemas.openxmlformats.org/drawingml/2006/main">
               <a:ext uri="{FF2B5EF4-FFF2-40B4-BE49-F238E27FC236}">
-                <a16:creationId xmlns:a16="http://schemas.microsoft.com/office/drawing/2014/main" id="{6816E206-6981-4C96-9EE7-B9FB8612DD46}"/>
+                <a16:creationId xmlns:a16="http://schemas.microsoft.com/office/drawing/2014/main" id="{BD1EB1B3-C0C2-4D45-92D5-A0A595350B3A}"/>
               </a:ext>
             </a:extLst>
           </p:cNvPr>
@@ -2342,7 +2342,7 @@
     </p:spTree>
     <p:extLst>
       <p:ext uri="{BB962C8B-B14F-4D97-AF65-F5344CB8AC3E}">
-        <p14:creationId xmlns:p14="http://schemas.microsoft.com/office/powerpoint/2010/main" val="719718069"/>
+        <p14:creationId xmlns:p14="http://schemas.microsoft.com/office/powerpoint/2010/main" val="884083528"/>
       </p:ext>
     </p:extLst>
   </p:cSld>
@@ -2373,7 +2373,7 @@
           <p:cNvPr id="1" name="">
             <a:extLst xmlns:a="http://schemas.openxmlformats.org/drawingml/2006/main">
               <a:ext uri="{FF2B5EF4-FFF2-40B4-BE49-F238E27FC236}">
-                <a16:creationId xmlns:a16="http://schemas.microsoft.com/office/drawing/2014/main" id="{D8DE08D0-525C-420E-8871-CB41416C88BF}"/>
+                <a16:creationId xmlns:a16="http://schemas.microsoft.com/office/drawing/2014/main" id="{A81B997D-973D-4B61-8455-12B9D8B2476A}"/>
               </a:ext>
             </a:extLst>
           </p:cNvPr>
@@ -2408,7 +2408,7 @@
           <p:nvPr/>
         </p:nvPicPr>
         <p:blipFill>
-          <a:blip xmlns:r="http://schemas.openxmlformats.org/officeDocument/2006/relationships" xmlns:a="http://schemas.openxmlformats.org/drawingml/2006/main" r:embed="R3b7f639393fc425a"/>
+          <a:blip xmlns:r="http://schemas.openxmlformats.org/officeDocument/2006/relationships" xmlns:a="http://schemas.openxmlformats.org/drawingml/2006/main" r:embed="R75a16de7a8354149"/>
           <a:stretch xmlns:a="http://schemas.openxmlformats.org/drawingml/2006/main"/>
         </p:blipFill>
         <p:spPr>
@@ -2426,7 +2426,7 @@
           <p:cNvPr id="3" name="">
             <a:extLst xmlns:a="http://schemas.openxmlformats.org/drawingml/2006/main">
               <a:ext uri="{FF2B5EF4-FFF2-40B4-BE49-F238E27FC236}">
-                <a16:creationId xmlns:a16="http://schemas.microsoft.com/office/drawing/2014/main" id="{A8DA76FE-02D7-4819-960C-E6CFCBEA16C1}"/>
+                <a16:creationId xmlns:a16="http://schemas.microsoft.com/office/drawing/2014/main" id="{AD8C1BC1-EBD5-4164-A62F-E39C8A2A4DD3}"/>
               </a:ext>
             </a:extLst>
           </p:cNvPr>
@@ -2476,7 +2476,7 @@
           <p:cNvPr id="4" name="">
             <a:extLst xmlns:a="http://schemas.openxmlformats.org/drawingml/2006/main">
               <a:ext uri="{FF2B5EF4-FFF2-40B4-BE49-F238E27FC236}">
-                <a16:creationId xmlns:a16="http://schemas.microsoft.com/office/drawing/2014/main" id="{C03682D9-3ECE-4B35-9983-822B317DF4B2}"/>
+                <a16:creationId xmlns:a16="http://schemas.microsoft.com/office/drawing/2014/main" id="{8E5D95EC-41B6-48EC-A11E-BBFB8A806783}"/>
               </a:ext>
             </a:extLst>
           </p:cNvPr>
@@ -2509,7 +2509,7 @@
           <p:cNvPr id="5" name="">
             <a:extLst xmlns:a="http://schemas.openxmlformats.org/drawingml/2006/main">
               <a:ext uri="{FF2B5EF4-FFF2-40B4-BE49-F238E27FC236}">
-                <a16:creationId xmlns:a16="http://schemas.microsoft.com/office/drawing/2014/main" id="{FDB9F145-7D64-4458-B57D-5670F10239CA}"/>
+                <a16:creationId xmlns:a16="http://schemas.microsoft.com/office/drawing/2014/main" id="{68B5624A-D172-4DDF-B74C-6EEDF1BDADFF}"/>
               </a:ext>
             </a:extLst>
           </p:cNvPr>
@@ -2540,7 +2540,7 @@
           <p:cNvPr id="6" name="">
             <a:extLst xmlns:a="http://schemas.openxmlformats.org/drawingml/2006/main">
               <a:ext uri="{FF2B5EF4-FFF2-40B4-BE49-F238E27FC236}">
-                <a16:creationId xmlns:a16="http://schemas.microsoft.com/office/drawing/2014/main" id="{BA65396C-357D-4FC0-ADF7-6AADEEF14320}"/>
+                <a16:creationId xmlns:a16="http://schemas.microsoft.com/office/drawing/2014/main" id="{DB19A93C-6403-4FD8-8B12-AA8F6C466906}"/>
               </a:ext>
             </a:extLst>
           </p:cNvPr>
@@ -2590,7 +2590,7 @@
           <p:cNvPr id="7" name="">
             <a:extLst xmlns:a="http://schemas.openxmlformats.org/drawingml/2006/main">
               <a:ext uri="{FF2B5EF4-FFF2-40B4-BE49-F238E27FC236}">
-                <a16:creationId xmlns:a16="http://schemas.microsoft.com/office/drawing/2014/main" id="{A87FC36A-D01D-48D9-9089-66ECBA4550F0}"/>
+                <a16:creationId xmlns:a16="http://schemas.microsoft.com/office/drawing/2014/main" id="{564B4EE7-B455-4458-A5A9-9D55BD672865}"/>
               </a:ext>
             </a:extLst>
           </p:cNvPr>
@@ -2640,7 +2640,7 @@
           <p:cNvPr id="8" name="">
             <a:extLst xmlns:a="http://schemas.openxmlformats.org/drawingml/2006/main">
               <a:ext uri="{FF2B5EF4-FFF2-40B4-BE49-F238E27FC236}">
-                <a16:creationId xmlns:a16="http://schemas.microsoft.com/office/drawing/2014/main" id="{5EFB76D6-1808-4E29-915E-9FE35AC42AE5}"/>
+                <a16:creationId xmlns:a16="http://schemas.microsoft.com/office/drawing/2014/main" id="{A3EFFD8A-951D-40C6-93D2-50574703E1F3}"/>
               </a:ext>
             </a:extLst>
           </p:cNvPr>
@@ -2690,7 +2690,7 @@
           <p:cNvPr id="9" name="">
             <a:extLst xmlns:a="http://schemas.openxmlformats.org/drawingml/2006/main">
               <a:ext uri="{FF2B5EF4-FFF2-40B4-BE49-F238E27FC236}">
-                <a16:creationId xmlns:a16="http://schemas.microsoft.com/office/drawing/2014/main" id="{B16EDA58-3A30-4AC1-95DC-E5BF6459F31F}"/>
+                <a16:creationId xmlns:a16="http://schemas.microsoft.com/office/drawing/2014/main" id="{DE60698D-C470-455D-A720-FAECF0AA6CFB}"/>
               </a:ext>
             </a:extLst>
           </p:cNvPr>
@@ -2740,7 +2740,7 @@
           <p:cNvPr id="10" name="">
             <a:extLst xmlns:a="http://schemas.openxmlformats.org/drawingml/2006/main">
               <a:ext uri="{FF2B5EF4-FFF2-40B4-BE49-F238E27FC236}">
-                <a16:creationId xmlns:a16="http://schemas.microsoft.com/office/drawing/2014/main" id="{F9EB31A5-6B3B-4C2B-9E84-69A44BC8D658}"/>
+                <a16:creationId xmlns:a16="http://schemas.microsoft.com/office/drawing/2014/main" id="{99BE864B-ECF1-4D9E-A195-57DA32B8ED76}"/>
               </a:ext>
             </a:extLst>
           </p:cNvPr>
@@ -2790,7 +2790,7 @@
           <p:cNvPr id="11" name="">
             <a:extLst xmlns:a="http://schemas.openxmlformats.org/drawingml/2006/main">
               <a:ext uri="{FF2B5EF4-FFF2-40B4-BE49-F238E27FC236}">
-                <a16:creationId xmlns:a16="http://schemas.microsoft.com/office/drawing/2014/main" id="{679BD25A-6720-42A8-88B8-AEF18621F65A}"/>
+                <a16:creationId xmlns:a16="http://schemas.microsoft.com/office/drawing/2014/main" id="{498DCE81-5CA1-4DAC-BA6D-8F08CDDB8E50}"/>
               </a:ext>
             </a:extLst>
           </p:cNvPr>
@@ -2840,7 +2840,7 @@
           <p:cNvPr id="12" name="">
             <a:extLst xmlns:a="http://schemas.openxmlformats.org/drawingml/2006/main">
               <a:ext uri="{FF2B5EF4-FFF2-40B4-BE49-F238E27FC236}">
-                <a16:creationId xmlns:a16="http://schemas.microsoft.com/office/drawing/2014/main" id="{D0FA38F2-ED4D-4586-BC9C-69484CDB7C3D}"/>
+                <a16:creationId xmlns:a16="http://schemas.microsoft.com/office/drawing/2014/main" id="{C16731F3-0E88-4AB1-A1FC-17A504E1D7B2}"/>
               </a:ext>
             </a:extLst>
           </p:cNvPr>
@@ -2890,7 +2890,7 @@
           <p:cNvPr id="13" name="">
             <a:extLst xmlns:a="http://schemas.openxmlformats.org/drawingml/2006/main">
               <a:ext uri="{FF2B5EF4-FFF2-40B4-BE49-F238E27FC236}">
-                <a16:creationId xmlns:a16="http://schemas.microsoft.com/office/drawing/2014/main" id="{C289E1AE-9132-4131-AD0C-81DF3D1E161A}"/>
+                <a16:creationId xmlns:a16="http://schemas.microsoft.com/office/drawing/2014/main" id="{13881CD8-D798-4D41-BB67-83CAA2024163}"/>
               </a:ext>
             </a:extLst>
           </p:cNvPr>
@@ -2940,7 +2940,7 @@
           <p:cNvPr id="14" name="">
             <a:extLst xmlns:a="http://schemas.openxmlformats.org/drawingml/2006/main">
               <a:ext uri="{FF2B5EF4-FFF2-40B4-BE49-F238E27FC236}">
-                <a16:creationId xmlns:a16="http://schemas.microsoft.com/office/drawing/2014/main" id="{AB49A8BC-23A3-48FF-B228-B780C3ECB3EF}"/>
+                <a16:creationId xmlns:a16="http://schemas.microsoft.com/office/drawing/2014/main" id="{1A94A451-A296-41B6-A784-526F477F3BAA}"/>
               </a:ext>
             </a:extLst>
           </p:cNvPr>
@@ -2980,7 +2980,7 @@
                   <a:srgbClr val="596780"/>
                 </a:solidFill>
               </a:rPr>
-              <a:t>крупных ИТ-проектов</a:t>
+              <a:t>крупных проектов</a:t>
             </a:r>
           </a:p>
         </p:txBody>
@@ -2990,7 +2990,7 @@
           <p:cNvPr id="15" name="">
             <a:extLst xmlns:a="http://schemas.openxmlformats.org/drawingml/2006/main">
               <a:ext uri="{FF2B5EF4-FFF2-40B4-BE49-F238E27FC236}">
-                <a16:creationId xmlns:a16="http://schemas.microsoft.com/office/drawing/2014/main" id="{5D6ADA22-4DCA-4798-96A3-2AE5494767CD}"/>
+                <a16:creationId xmlns:a16="http://schemas.microsoft.com/office/drawing/2014/main" id="{0505034F-730B-4E34-9E60-C8365C92F995}"/>
               </a:ext>
             </a:extLst>
           </p:cNvPr>
@@ -3040,7 +3040,7 @@
           <p:cNvPr id="16" name="">
             <a:extLst xmlns:a="http://schemas.openxmlformats.org/drawingml/2006/main">
               <a:ext uri="{FF2B5EF4-FFF2-40B4-BE49-F238E27FC236}">
-                <a16:creationId xmlns:a16="http://schemas.microsoft.com/office/drawing/2014/main" id="{7C2BFAE1-3138-4826-9BE2-00214F94AF1A}"/>
+                <a16:creationId xmlns:a16="http://schemas.microsoft.com/office/drawing/2014/main" id="{F9AAA2F8-7DB4-44FA-949A-EF5E260F779E}"/>
               </a:ext>
             </a:extLst>
           </p:cNvPr>
@@ -3090,7 +3090,7 @@
           <p:cNvPr id="17" name="">
             <a:extLst xmlns:a="http://schemas.openxmlformats.org/drawingml/2006/main">
               <a:ext uri="{FF2B5EF4-FFF2-40B4-BE49-F238E27FC236}">
-                <a16:creationId xmlns:a16="http://schemas.microsoft.com/office/drawing/2014/main" id="{7DE1ED08-30D1-4C19-B353-33EA015F7F1B}"/>
+                <a16:creationId xmlns:a16="http://schemas.microsoft.com/office/drawing/2014/main" id="{EFE3E949-B1F7-4179-A649-FC8CD0755D3C}"/>
               </a:ext>
             </a:extLst>
           </p:cNvPr>
@@ -3125,7 +3125,7 @@
           <p:cNvPr id="18" name="">
             <a:extLst xmlns:a="http://schemas.openxmlformats.org/drawingml/2006/main">
               <a:ext uri="{FF2B5EF4-FFF2-40B4-BE49-F238E27FC236}">
-                <a16:creationId xmlns:a16="http://schemas.microsoft.com/office/drawing/2014/main" id="{28F68918-5884-4A7C-B5D2-69DAFCC9F56C}"/>
+                <a16:creationId xmlns:a16="http://schemas.microsoft.com/office/drawing/2014/main" id="{651CABD9-0D20-42D7-8543-EE76EADB9CB2}"/>
               </a:ext>
             </a:extLst>
           </p:cNvPr>
@@ -3175,7 +3175,7 @@
           <p:cNvPr id="19" name="">
             <a:extLst xmlns:a="http://schemas.openxmlformats.org/drawingml/2006/main">
               <a:ext uri="{FF2B5EF4-FFF2-40B4-BE49-F238E27FC236}">
-                <a16:creationId xmlns:a16="http://schemas.microsoft.com/office/drawing/2014/main" id="{F3D5F5B2-B08C-443D-A148-E5EE6632B45E}"/>
+                <a16:creationId xmlns:a16="http://schemas.microsoft.com/office/drawing/2014/main" id="{677FC1E5-5AB4-40B1-9C17-CABF22C4C2B2}"/>
               </a:ext>
             </a:extLst>
           </p:cNvPr>
@@ -3225,7 +3225,7 @@
           <p:cNvPr id="20" name="">
             <a:extLst xmlns:a="http://schemas.openxmlformats.org/drawingml/2006/main">
               <a:ext uri="{FF2B5EF4-FFF2-40B4-BE49-F238E27FC236}">
-                <a16:creationId xmlns:a16="http://schemas.microsoft.com/office/drawing/2014/main" id="{0BF2753C-3BAE-4E7A-AF2D-CEF3AFF02B0F}"/>
+                <a16:creationId xmlns:a16="http://schemas.microsoft.com/office/drawing/2014/main" id="{F9A7D36B-CC4A-414C-850B-9865B8C4BA67}"/>
               </a:ext>
             </a:extLst>
           </p:cNvPr>
@@ -3275,7 +3275,7 @@
           <p:cNvPr id="21" name="">
             <a:extLst xmlns:a="http://schemas.openxmlformats.org/drawingml/2006/main">
               <a:ext uri="{FF2B5EF4-FFF2-40B4-BE49-F238E27FC236}">
-                <a16:creationId xmlns:a16="http://schemas.microsoft.com/office/drawing/2014/main" id="{8026175F-250F-4A94-84E9-75A3360A8BD7}"/>
+                <a16:creationId xmlns:a16="http://schemas.microsoft.com/office/drawing/2014/main" id="{7E9E80F4-B43A-4452-9E39-826D0E2F4388}"/>
               </a:ext>
             </a:extLst>
           </p:cNvPr>
@@ -3325,7 +3325,7 @@
           <p:cNvPr id="22" name="">
             <a:extLst xmlns:a="http://schemas.openxmlformats.org/drawingml/2006/main">
               <a:ext uri="{FF2B5EF4-FFF2-40B4-BE49-F238E27FC236}">
-                <a16:creationId xmlns:a16="http://schemas.microsoft.com/office/drawing/2014/main" id="{6C468EAA-7034-490C-989E-22D480E32BC2}"/>
+                <a16:creationId xmlns:a16="http://schemas.microsoft.com/office/drawing/2014/main" id="{5ACBD3DE-81E6-4AB3-AA30-29A05B25BF94}"/>
               </a:ext>
             </a:extLst>
           </p:cNvPr>
@@ -3356,7 +3356,7 @@
           <p:cNvPr id="23" name="">
             <a:extLst xmlns:a="http://schemas.openxmlformats.org/drawingml/2006/main">
               <a:ext uri="{FF2B5EF4-FFF2-40B4-BE49-F238E27FC236}">
-                <a16:creationId xmlns:a16="http://schemas.microsoft.com/office/drawing/2014/main" id="{233C6EF7-09CE-415E-9E93-C6C757640B8E}"/>
+                <a16:creationId xmlns:a16="http://schemas.microsoft.com/office/drawing/2014/main" id="{5BFBA0C8-577E-48BB-8E13-54E698EA7DF6}"/>
               </a:ext>
             </a:extLst>
           </p:cNvPr>
@@ -3406,7 +3406,7 @@
           <p:cNvPr id="24" name="">
             <a:extLst xmlns:a="http://schemas.openxmlformats.org/drawingml/2006/main">
               <a:ext uri="{FF2B5EF4-FFF2-40B4-BE49-F238E27FC236}">
-                <a16:creationId xmlns:a16="http://schemas.microsoft.com/office/drawing/2014/main" id="{5EAA35B5-F9F8-4AC0-A895-ED301E8A4AF9}"/>
+                <a16:creationId xmlns:a16="http://schemas.microsoft.com/office/drawing/2014/main" id="{3D6B414B-CA2A-46A3-BB5A-D823AD9B38AE}"/>
               </a:ext>
             </a:extLst>
           </p:cNvPr>
@@ -3456,7 +3456,7 @@
           <p:cNvPr id="25" name="">
             <a:extLst xmlns:a="http://schemas.openxmlformats.org/drawingml/2006/main">
               <a:ext uri="{FF2B5EF4-FFF2-40B4-BE49-F238E27FC236}">
-                <a16:creationId xmlns:a16="http://schemas.microsoft.com/office/drawing/2014/main" id="{73AE7810-06A9-42EA-A700-96C239A01740}"/>
+                <a16:creationId xmlns:a16="http://schemas.microsoft.com/office/drawing/2014/main" id="{582232E5-243A-4A9E-8558-24D2B166FEE8}"/>
               </a:ext>
             </a:extLst>
           </p:cNvPr>
@@ -3506,7 +3506,7 @@
           <p:cNvPr id="26" name="">
             <a:extLst xmlns:a="http://schemas.openxmlformats.org/drawingml/2006/main">
               <a:ext uri="{FF2B5EF4-FFF2-40B4-BE49-F238E27FC236}">
-                <a16:creationId xmlns:a16="http://schemas.microsoft.com/office/drawing/2014/main" id="{D22B4C97-7239-448F-8983-045C9A9B1636}"/>
+                <a16:creationId xmlns:a16="http://schemas.microsoft.com/office/drawing/2014/main" id="{50D21C90-4E44-4948-AD16-E6CAFD018F17}"/>
               </a:ext>
             </a:extLst>
           </p:cNvPr>
@@ -3537,7 +3537,7 @@
           <p:cNvPr id="27" name="">
             <a:extLst xmlns:a="http://schemas.openxmlformats.org/drawingml/2006/main">
               <a:ext uri="{FF2B5EF4-FFF2-40B4-BE49-F238E27FC236}">
-                <a16:creationId xmlns:a16="http://schemas.microsoft.com/office/drawing/2014/main" id="{911EDDD5-CFBA-4FA9-A197-67D942FCEE11}"/>
+                <a16:creationId xmlns:a16="http://schemas.microsoft.com/office/drawing/2014/main" id="{EB632313-C087-41C3-AF87-ED1BB863D7E0}"/>
               </a:ext>
             </a:extLst>
           </p:cNvPr>
@@ -3587,7 +3587,7 @@
           <p:cNvPr id="28" name="">
             <a:extLst xmlns:a="http://schemas.openxmlformats.org/drawingml/2006/main">
               <a:ext uri="{FF2B5EF4-FFF2-40B4-BE49-F238E27FC236}">
-                <a16:creationId xmlns:a16="http://schemas.microsoft.com/office/drawing/2014/main" id="{6C697E01-B51C-45DD-8C50-502275E859A7}"/>
+                <a16:creationId xmlns:a16="http://schemas.microsoft.com/office/drawing/2014/main" id="{E71DFC39-9D58-4746-8ADD-7846D2AA5A64}"/>
               </a:ext>
             </a:extLst>
           </p:cNvPr>
@@ -3637,7 +3637,7 @@
           <p:cNvPr id="29" name="">
             <a:extLst xmlns:a="http://schemas.openxmlformats.org/drawingml/2006/main">
               <a:ext uri="{FF2B5EF4-FFF2-40B4-BE49-F238E27FC236}">
-                <a16:creationId xmlns:a16="http://schemas.microsoft.com/office/drawing/2014/main" id="{F8B4D951-5B94-45E7-9BC5-9F8FCC12235B}"/>
+                <a16:creationId xmlns:a16="http://schemas.microsoft.com/office/drawing/2014/main" id="{354F0B55-0B54-41A8-9551-780B089F50E8}"/>
               </a:ext>
             </a:extLst>
           </p:cNvPr>
@@ -3687,7 +3687,7 @@
           <p:cNvPr id="30" name="">
             <a:extLst xmlns:a="http://schemas.openxmlformats.org/drawingml/2006/main">
               <a:ext uri="{FF2B5EF4-FFF2-40B4-BE49-F238E27FC236}">
-                <a16:creationId xmlns:a16="http://schemas.microsoft.com/office/drawing/2014/main" id="{0A162806-3C25-4C29-A11B-62212FD6D1E0}"/>
+                <a16:creationId xmlns:a16="http://schemas.microsoft.com/office/drawing/2014/main" id="{EC70828A-7FAA-464B-9D2D-43180111DF68}"/>
               </a:ext>
             </a:extLst>
           </p:cNvPr>
@@ -3718,7 +3718,7 @@
           <p:cNvPr id="31" name="">
             <a:extLst xmlns:a="http://schemas.openxmlformats.org/drawingml/2006/main">
               <a:ext uri="{FF2B5EF4-FFF2-40B4-BE49-F238E27FC236}">
-                <a16:creationId xmlns:a16="http://schemas.microsoft.com/office/drawing/2014/main" id="{2D303E68-9379-437C-89CD-624C18E43280}"/>
+                <a16:creationId xmlns:a16="http://schemas.microsoft.com/office/drawing/2014/main" id="{4C0B97D6-9B23-4009-96C7-AD89A3C663F7}"/>
               </a:ext>
             </a:extLst>
           </p:cNvPr>
@@ -3768,7 +3768,7 @@
           <p:cNvPr id="32" name="">
             <a:extLst xmlns:a="http://schemas.openxmlformats.org/drawingml/2006/main">
               <a:ext uri="{FF2B5EF4-FFF2-40B4-BE49-F238E27FC236}">
-                <a16:creationId xmlns:a16="http://schemas.microsoft.com/office/drawing/2014/main" id="{B35A2B8F-D73C-4F78-A73C-041B531C153F}"/>
+                <a16:creationId xmlns:a16="http://schemas.microsoft.com/office/drawing/2014/main" id="{FF5A427E-24DA-4E40-BB03-549C1FAEBC98}"/>
               </a:ext>
             </a:extLst>
           </p:cNvPr>
@@ -3818,7 +3818,7 @@
           <p:cNvPr id="33" name="">
             <a:extLst xmlns:a="http://schemas.openxmlformats.org/drawingml/2006/main">
               <a:ext uri="{FF2B5EF4-FFF2-40B4-BE49-F238E27FC236}">
-                <a16:creationId xmlns:a16="http://schemas.microsoft.com/office/drawing/2014/main" id="{3AB26118-4D14-467B-8094-645569EB54C7}"/>
+                <a16:creationId xmlns:a16="http://schemas.microsoft.com/office/drawing/2014/main" id="{AFEE87E2-9BB5-40C6-8B5B-A3F375D48E9A}"/>
               </a:ext>
             </a:extLst>
           </p:cNvPr>
@@ -3866,7 +3866,7 @@
     </p:spTree>
     <p:extLst>
       <p:ext uri="{BB962C8B-B14F-4D97-AF65-F5344CB8AC3E}">
-        <p14:creationId xmlns:p14="http://schemas.microsoft.com/office/powerpoint/2010/main" val="813448134"/>
+        <p14:creationId xmlns:p14="http://schemas.microsoft.com/office/powerpoint/2010/main" val="1170439292"/>
       </p:ext>
     </p:extLst>
   </p:cSld>
@@ -3897,7 +3897,7 @@
           <p:cNvPr id="1" name="">
             <a:extLst xmlns:a="http://schemas.openxmlformats.org/drawingml/2006/main">
               <a:ext uri="{FF2B5EF4-FFF2-40B4-BE49-F238E27FC236}">
-                <a16:creationId xmlns:a16="http://schemas.microsoft.com/office/drawing/2014/main" id="{7E1D6E64-608E-4AFE-A247-5F75C72A995F}"/>
+                <a16:creationId xmlns:a16="http://schemas.microsoft.com/office/drawing/2014/main" id="{D575781F-A9C2-4787-B10B-0D252854799D}"/>
               </a:ext>
             </a:extLst>
           </p:cNvPr>
@@ -3932,7 +3932,7 @@
           <p:nvPr/>
         </p:nvPicPr>
         <p:blipFill>
-          <a:blip xmlns:r="http://schemas.openxmlformats.org/officeDocument/2006/relationships" xmlns:a="http://schemas.openxmlformats.org/drawingml/2006/main" r:embed="Rd69feda7fd6943ec"/>
+          <a:blip xmlns:r="http://schemas.openxmlformats.org/officeDocument/2006/relationships" xmlns:a="http://schemas.openxmlformats.org/drawingml/2006/main" r:embed="R8fdfd7f799904102"/>
           <a:stretch xmlns:a="http://schemas.openxmlformats.org/drawingml/2006/main"/>
         </p:blipFill>
         <p:spPr>
@@ -3950,7 +3950,7 @@
           <p:cNvPr id="3" name="">
             <a:extLst xmlns:a="http://schemas.openxmlformats.org/drawingml/2006/main">
               <a:ext uri="{FF2B5EF4-FFF2-40B4-BE49-F238E27FC236}">
-                <a16:creationId xmlns:a16="http://schemas.microsoft.com/office/drawing/2014/main" id="{B147EF62-ED3D-4623-9377-625342315484}"/>
+                <a16:creationId xmlns:a16="http://schemas.microsoft.com/office/drawing/2014/main" id="{E02F054B-C460-40FF-A6B3-2C88E04EE742}"/>
               </a:ext>
             </a:extLst>
           </p:cNvPr>
@@ -4000,7 +4000,7 @@
           <p:cNvPr id="4" name="">
             <a:extLst xmlns:a="http://schemas.openxmlformats.org/drawingml/2006/main">
               <a:ext uri="{FF2B5EF4-FFF2-40B4-BE49-F238E27FC236}">
-                <a16:creationId xmlns:a16="http://schemas.microsoft.com/office/drawing/2014/main" id="{5665F893-252F-4A5F-A005-56C3A47A973D}"/>
+                <a16:creationId xmlns:a16="http://schemas.microsoft.com/office/drawing/2014/main" id="{371E3211-E972-4FA4-A67A-37DEA072F9A9}"/>
               </a:ext>
             </a:extLst>
           </p:cNvPr>
@@ -4033,7 +4033,7 @@
           <p:cNvPr id="5" name="">
             <a:extLst xmlns:a="http://schemas.openxmlformats.org/drawingml/2006/main">
               <a:ext uri="{FF2B5EF4-FFF2-40B4-BE49-F238E27FC236}">
-                <a16:creationId xmlns:a16="http://schemas.microsoft.com/office/drawing/2014/main" id="{3A7853B1-DDB0-493F-81A4-16B860C972AF}"/>
+                <a16:creationId xmlns:a16="http://schemas.microsoft.com/office/drawing/2014/main" id="{5017C176-0B6D-4458-B958-886558EA5FAC}"/>
               </a:ext>
             </a:extLst>
           </p:cNvPr>
@@ -4064,7 +4064,7 @@
           <p:cNvPr id="6" name="">
             <a:extLst xmlns:a="http://schemas.openxmlformats.org/drawingml/2006/main">
               <a:ext uri="{FF2B5EF4-FFF2-40B4-BE49-F238E27FC236}">
-                <a16:creationId xmlns:a16="http://schemas.microsoft.com/office/drawing/2014/main" id="{BB9878FC-CCBE-4C2B-B2AD-D3640DD02352}"/>
+                <a16:creationId xmlns:a16="http://schemas.microsoft.com/office/drawing/2014/main" id="{F8C30A59-30B4-46C4-99CF-7B80C8B41E10}"/>
               </a:ext>
             </a:extLst>
           </p:cNvPr>
@@ -4114,7 +4114,7 @@
           <p:cNvPr id="7" name="">
             <a:extLst xmlns:a="http://schemas.openxmlformats.org/drawingml/2006/main">
               <a:ext uri="{FF2B5EF4-FFF2-40B4-BE49-F238E27FC236}">
-                <a16:creationId xmlns:a16="http://schemas.microsoft.com/office/drawing/2014/main" id="{B30A6BA6-E05C-4925-88BC-7734AD2F85FF}"/>
+                <a16:creationId xmlns:a16="http://schemas.microsoft.com/office/drawing/2014/main" id="{CF7CD4E5-33BC-42F7-AB7E-BDFC9B6F1F7F}"/>
               </a:ext>
             </a:extLst>
           </p:cNvPr>
@@ -4164,7 +4164,7 @@
           <p:cNvPr id="8" name="">
             <a:extLst xmlns:a="http://schemas.openxmlformats.org/drawingml/2006/main">
               <a:ext uri="{FF2B5EF4-FFF2-40B4-BE49-F238E27FC236}">
-                <a16:creationId xmlns:a16="http://schemas.microsoft.com/office/drawing/2014/main" id="{6669804A-ED5F-443E-950D-63998CEF43BC}"/>
+                <a16:creationId xmlns:a16="http://schemas.microsoft.com/office/drawing/2014/main" id="{BEDA2FD6-16AB-44E3-9EFD-9BEB6A225290}"/>
               </a:ext>
             </a:extLst>
           </p:cNvPr>
@@ -4214,7 +4214,7 @@
           <p:cNvPr id="9" name="">
             <a:extLst xmlns:a="http://schemas.openxmlformats.org/drawingml/2006/main">
               <a:ext uri="{FF2B5EF4-FFF2-40B4-BE49-F238E27FC236}">
-                <a16:creationId xmlns:a16="http://schemas.microsoft.com/office/drawing/2014/main" id="{9DC4F9E1-FAC3-453C-AF65-A3156B1A0F4A}"/>
+                <a16:creationId xmlns:a16="http://schemas.microsoft.com/office/drawing/2014/main" id="{5E17409D-ED99-48D1-A41E-0D290B016712}"/>
               </a:ext>
             </a:extLst>
           </p:cNvPr>
@@ -4264,7 +4264,7 @@
           <p:cNvPr id="10" name="">
             <a:extLst xmlns:a="http://schemas.openxmlformats.org/drawingml/2006/main">
               <a:ext uri="{FF2B5EF4-FFF2-40B4-BE49-F238E27FC236}">
-                <a16:creationId xmlns:a16="http://schemas.microsoft.com/office/drawing/2014/main" id="{AD83A6F7-818B-469B-907D-A9A9FCD61B0D}"/>
+                <a16:creationId xmlns:a16="http://schemas.microsoft.com/office/drawing/2014/main" id="{0E9C4987-C791-4D97-BA12-25BE18DA06A4}"/>
               </a:ext>
             </a:extLst>
           </p:cNvPr>
@@ -4314,7 +4314,7 @@
           <p:cNvPr id="11" name="">
             <a:extLst xmlns:a="http://schemas.openxmlformats.org/drawingml/2006/main">
               <a:ext uri="{FF2B5EF4-FFF2-40B4-BE49-F238E27FC236}">
-                <a16:creationId xmlns:a16="http://schemas.microsoft.com/office/drawing/2014/main" id="{10AB61FB-B52B-4F6F-9945-6679B2F2108A}"/>
+                <a16:creationId xmlns:a16="http://schemas.microsoft.com/office/drawing/2014/main" id="{2B62F2E4-CC1D-481C-BE0F-064892830549}"/>
               </a:ext>
             </a:extLst>
           </p:cNvPr>
@@ -4345,7 +4345,7 @@
           <p:cNvPr id="12" name="">
             <a:extLst xmlns:a="http://schemas.openxmlformats.org/drawingml/2006/main">
               <a:ext uri="{FF2B5EF4-FFF2-40B4-BE49-F238E27FC236}">
-                <a16:creationId xmlns:a16="http://schemas.microsoft.com/office/drawing/2014/main" id="{D0E48DDB-4657-4AA8-B123-1DD3E0CD4855}"/>
+                <a16:creationId xmlns:a16="http://schemas.microsoft.com/office/drawing/2014/main" id="{037B752D-0BB8-4259-903B-21528CD64B71}"/>
               </a:ext>
             </a:extLst>
           </p:cNvPr>
@@ -4395,7 +4395,7 @@
           <p:cNvPr id="13" name="">
             <a:extLst xmlns:a="http://schemas.openxmlformats.org/drawingml/2006/main">
               <a:ext uri="{FF2B5EF4-FFF2-40B4-BE49-F238E27FC236}">
-                <a16:creationId xmlns:a16="http://schemas.microsoft.com/office/drawing/2014/main" id="{66139BD5-0DA7-48E4-A6AB-90D59403F6AD}"/>
+                <a16:creationId xmlns:a16="http://schemas.microsoft.com/office/drawing/2014/main" id="{F059E6BE-F3B8-4C12-9A83-729125265E74}"/>
               </a:ext>
             </a:extLst>
           </p:cNvPr>
@@ -4445,7 +4445,7 @@
           <p:cNvPr id="14" name="">
             <a:extLst xmlns:a="http://schemas.openxmlformats.org/drawingml/2006/main">
               <a:ext uri="{FF2B5EF4-FFF2-40B4-BE49-F238E27FC236}">
-                <a16:creationId xmlns:a16="http://schemas.microsoft.com/office/drawing/2014/main" id="{2BC63F8A-FE3A-43EF-BDC1-F97F168EB9EA}"/>
+                <a16:creationId xmlns:a16="http://schemas.microsoft.com/office/drawing/2014/main" id="{B26B58E3-1943-408D-9321-07B03B024E42}"/>
               </a:ext>
             </a:extLst>
           </p:cNvPr>
@@ -4476,7 +4476,7 @@
           <p:cNvPr id="15" name="">
             <a:extLst xmlns:a="http://schemas.openxmlformats.org/drawingml/2006/main">
               <a:ext uri="{FF2B5EF4-FFF2-40B4-BE49-F238E27FC236}">
-                <a16:creationId xmlns:a16="http://schemas.microsoft.com/office/drawing/2014/main" id="{241A7983-BE2C-4D78-8BF6-DE80EED9DAA4}"/>
+                <a16:creationId xmlns:a16="http://schemas.microsoft.com/office/drawing/2014/main" id="{7684AB50-A3E0-4947-A621-5E0EA7EEB3C7}"/>
               </a:ext>
             </a:extLst>
           </p:cNvPr>
@@ -4526,7 +4526,7 @@
           <p:cNvPr id="16" name="">
             <a:extLst xmlns:a="http://schemas.openxmlformats.org/drawingml/2006/main">
               <a:ext uri="{FF2B5EF4-FFF2-40B4-BE49-F238E27FC236}">
-                <a16:creationId xmlns:a16="http://schemas.microsoft.com/office/drawing/2014/main" id="{CC2AFF33-EF11-439E-B4B3-475D8CF841DE}"/>
+                <a16:creationId xmlns:a16="http://schemas.microsoft.com/office/drawing/2014/main" id="{78B0287E-E1AD-4A8D-985C-92370459DBE8}"/>
               </a:ext>
             </a:extLst>
           </p:cNvPr>
@@ -4576,7 +4576,7 @@
           <p:cNvPr id="17" name="">
             <a:extLst xmlns:a="http://schemas.openxmlformats.org/drawingml/2006/main">
               <a:ext uri="{FF2B5EF4-FFF2-40B4-BE49-F238E27FC236}">
-                <a16:creationId xmlns:a16="http://schemas.microsoft.com/office/drawing/2014/main" id="{988C559B-0890-4D5C-9D2E-772B1BB88ABF}"/>
+                <a16:creationId xmlns:a16="http://schemas.microsoft.com/office/drawing/2014/main" id="{9AF6752F-6E8B-436B-9B74-12C323F24BD6}"/>
               </a:ext>
             </a:extLst>
           </p:cNvPr>
@@ -4607,7 +4607,7 @@
           <p:cNvPr id="18" name="">
             <a:extLst xmlns:a="http://schemas.openxmlformats.org/drawingml/2006/main">
               <a:ext uri="{FF2B5EF4-FFF2-40B4-BE49-F238E27FC236}">
-                <a16:creationId xmlns:a16="http://schemas.microsoft.com/office/drawing/2014/main" id="{B29BCFE9-16D9-4DA3-89F0-BF77CB8FAF3F}"/>
+                <a16:creationId xmlns:a16="http://schemas.microsoft.com/office/drawing/2014/main" id="{19572A67-CF4B-4FA3-BC1B-3B7FEF36484A}"/>
               </a:ext>
             </a:extLst>
           </p:cNvPr>
@@ -4657,7 +4657,7 @@
           <p:cNvPr id="19" name="">
             <a:extLst xmlns:a="http://schemas.openxmlformats.org/drawingml/2006/main">
               <a:ext uri="{FF2B5EF4-FFF2-40B4-BE49-F238E27FC236}">
-                <a16:creationId xmlns:a16="http://schemas.microsoft.com/office/drawing/2014/main" id="{DDB33183-991E-48EB-BA51-DF3714D0E4F8}"/>
+                <a16:creationId xmlns:a16="http://schemas.microsoft.com/office/drawing/2014/main" id="{05DAAD97-E76E-4D42-B5AE-2C44BD72A3BC}"/>
               </a:ext>
             </a:extLst>
           </p:cNvPr>
@@ -4705,7 +4705,7 @@
     </p:spTree>
     <p:extLst>
       <p:ext uri="{BB962C8B-B14F-4D97-AF65-F5344CB8AC3E}">
-        <p14:creationId xmlns:p14="http://schemas.microsoft.com/office/powerpoint/2010/main" val="1619790579"/>
+        <p14:creationId xmlns:p14="http://schemas.microsoft.com/office/powerpoint/2010/main" val="79102955"/>
       </p:ext>
     </p:extLst>
   </p:cSld>
@@ -4736,7 +4736,7 @@
           <p:cNvPr id="1" name="">
             <a:extLst xmlns:a="http://schemas.openxmlformats.org/drawingml/2006/main">
               <a:ext uri="{FF2B5EF4-FFF2-40B4-BE49-F238E27FC236}">
-                <a16:creationId xmlns:a16="http://schemas.microsoft.com/office/drawing/2014/main" id="{B781270B-2F8B-4360-8272-8E6569538146}"/>
+                <a16:creationId xmlns:a16="http://schemas.microsoft.com/office/drawing/2014/main" id="{DBBF6472-24CA-4963-BC5B-C54863DBC97F}"/>
               </a:ext>
             </a:extLst>
           </p:cNvPr>
@@ -4771,7 +4771,7 @@
           <p:nvPr/>
         </p:nvPicPr>
         <p:blipFill>
-          <a:blip xmlns:r="http://schemas.openxmlformats.org/officeDocument/2006/relationships" xmlns:a="http://schemas.openxmlformats.org/drawingml/2006/main" r:embed="R86c6408cb75e4985"/>
+          <a:blip xmlns:r="http://schemas.openxmlformats.org/officeDocument/2006/relationships" xmlns:a="http://schemas.openxmlformats.org/drawingml/2006/main" r:embed="R9c3b4b4292c6492e"/>
           <a:stretch xmlns:a="http://schemas.openxmlformats.org/drawingml/2006/main"/>
         </p:blipFill>
         <p:spPr>
@@ -4789,7 +4789,7 @@
           <p:cNvPr id="3" name="">
             <a:extLst xmlns:a="http://schemas.openxmlformats.org/drawingml/2006/main">
               <a:ext uri="{FF2B5EF4-FFF2-40B4-BE49-F238E27FC236}">
-                <a16:creationId xmlns:a16="http://schemas.microsoft.com/office/drawing/2014/main" id="{99E6BB26-0D9A-43D1-AA44-D51E315D0BE5}"/>
+                <a16:creationId xmlns:a16="http://schemas.microsoft.com/office/drawing/2014/main" id="{38F8FE3A-DC15-4715-9D09-2D481A2C29DF}"/>
               </a:ext>
             </a:extLst>
           </p:cNvPr>
@@ -4839,7 +4839,7 @@
           <p:cNvPr id="4" name="">
             <a:extLst xmlns:a="http://schemas.openxmlformats.org/drawingml/2006/main">
               <a:ext uri="{FF2B5EF4-FFF2-40B4-BE49-F238E27FC236}">
-                <a16:creationId xmlns:a16="http://schemas.microsoft.com/office/drawing/2014/main" id="{2C9FD7CC-A67C-4979-BE84-E41C18FB6BD9}"/>
+                <a16:creationId xmlns:a16="http://schemas.microsoft.com/office/drawing/2014/main" id="{9C3A7BE5-3F98-49D0-A913-924A4C7CF5DE}"/>
               </a:ext>
             </a:extLst>
           </p:cNvPr>
@@ -4872,7 +4872,7 @@
           <p:cNvPr id="5" name="">
             <a:extLst xmlns:a="http://schemas.openxmlformats.org/drawingml/2006/main">
               <a:ext uri="{FF2B5EF4-FFF2-40B4-BE49-F238E27FC236}">
-                <a16:creationId xmlns:a16="http://schemas.microsoft.com/office/drawing/2014/main" id="{72E69065-8836-4BA2-B975-5147CE9184A2}"/>
+                <a16:creationId xmlns:a16="http://schemas.microsoft.com/office/drawing/2014/main" id="{F99F953B-8E4E-4095-8871-07C44BF67417}"/>
               </a:ext>
             </a:extLst>
           </p:cNvPr>
@@ -4903,7 +4903,7 @@
           <p:cNvPr id="6" name="">
             <a:extLst xmlns:a="http://schemas.openxmlformats.org/drawingml/2006/main">
               <a:ext uri="{FF2B5EF4-FFF2-40B4-BE49-F238E27FC236}">
-                <a16:creationId xmlns:a16="http://schemas.microsoft.com/office/drawing/2014/main" id="{AED69761-CF64-412B-9D81-1A7CC912FA4A}"/>
+                <a16:creationId xmlns:a16="http://schemas.microsoft.com/office/drawing/2014/main" id="{E181245E-94EF-45EB-B1FB-876513B579D2}"/>
               </a:ext>
             </a:extLst>
           </p:cNvPr>
@@ -4953,7 +4953,7 @@
           <p:cNvPr id="7" name="">
             <a:extLst xmlns:a="http://schemas.openxmlformats.org/drawingml/2006/main">
               <a:ext uri="{FF2B5EF4-FFF2-40B4-BE49-F238E27FC236}">
-                <a16:creationId xmlns:a16="http://schemas.microsoft.com/office/drawing/2014/main" id="{87D6965A-9BA4-47B6-AD8C-D9F30D2F7AEC}"/>
+                <a16:creationId xmlns:a16="http://schemas.microsoft.com/office/drawing/2014/main" id="{948BC06C-8C20-4502-BF0B-2B05CCD8F53E}"/>
               </a:ext>
             </a:extLst>
           </p:cNvPr>
@@ -5003,7 +5003,7 @@
           <p:cNvPr id="8" name="">
             <a:extLst xmlns:a="http://schemas.openxmlformats.org/drawingml/2006/main">
               <a:ext uri="{FF2B5EF4-FFF2-40B4-BE49-F238E27FC236}">
-                <a16:creationId xmlns:a16="http://schemas.microsoft.com/office/drawing/2014/main" id="{4221C610-9E71-48B9-A384-67E29DCCD516}"/>
+                <a16:creationId xmlns:a16="http://schemas.microsoft.com/office/drawing/2014/main" id="{A9885844-143A-4991-9B7D-3AE87DDCE6ED}"/>
               </a:ext>
             </a:extLst>
           </p:cNvPr>
@@ -5038,7 +5038,7 @@
           <p:cNvPr id="9" name="">
             <a:extLst xmlns:a="http://schemas.openxmlformats.org/drawingml/2006/main">
               <a:ext uri="{FF2B5EF4-FFF2-40B4-BE49-F238E27FC236}">
-                <a16:creationId xmlns:a16="http://schemas.microsoft.com/office/drawing/2014/main" id="{000E7E47-D393-45C9-9B1E-C5AA88BFBDA8}"/>
+                <a16:creationId xmlns:a16="http://schemas.microsoft.com/office/drawing/2014/main" id="{653F32CA-40DA-4521-AA8A-F755E41318AA}"/>
               </a:ext>
             </a:extLst>
           </p:cNvPr>
@@ -5088,7 +5088,7 @@
           <p:cNvPr id="10" name="">
             <a:extLst xmlns:a="http://schemas.openxmlformats.org/drawingml/2006/main">
               <a:ext uri="{FF2B5EF4-FFF2-40B4-BE49-F238E27FC236}">
-                <a16:creationId xmlns:a16="http://schemas.microsoft.com/office/drawing/2014/main" id="{67EE0111-B702-42CE-86DF-5DE638263970}"/>
+                <a16:creationId xmlns:a16="http://schemas.microsoft.com/office/drawing/2014/main" id="{22DE48D5-C0A5-4000-B6D8-94438FAF349A}"/>
               </a:ext>
             </a:extLst>
           </p:cNvPr>
@@ -5138,7 +5138,7 @@
           <p:cNvPr id="11" name="">
             <a:extLst xmlns:a="http://schemas.openxmlformats.org/drawingml/2006/main">
               <a:ext uri="{FF2B5EF4-FFF2-40B4-BE49-F238E27FC236}">
-                <a16:creationId xmlns:a16="http://schemas.microsoft.com/office/drawing/2014/main" id="{DE59876C-46F3-4C04-A68B-45ED3550B50F}"/>
+                <a16:creationId xmlns:a16="http://schemas.microsoft.com/office/drawing/2014/main" id="{E2B0BC1D-438C-492D-ADBE-2C047C53632B}"/>
               </a:ext>
             </a:extLst>
           </p:cNvPr>
@@ -5173,7 +5173,7 @@
           <p:cNvPr id="12" name="">
             <a:extLst xmlns:a="http://schemas.openxmlformats.org/drawingml/2006/main">
               <a:ext uri="{FF2B5EF4-FFF2-40B4-BE49-F238E27FC236}">
-                <a16:creationId xmlns:a16="http://schemas.microsoft.com/office/drawing/2014/main" id="{50313A14-9D02-4C60-840F-AC0F59A76602}"/>
+                <a16:creationId xmlns:a16="http://schemas.microsoft.com/office/drawing/2014/main" id="{A86C096F-4E78-43FB-BACF-DCBB47085CE2}"/>
               </a:ext>
             </a:extLst>
           </p:cNvPr>
@@ -5223,7 +5223,7 @@
           <p:cNvPr id="13" name="">
             <a:extLst xmlns:a="http://schemas.openxmlformats.org/drawingml/2006/main">
               <a:ext uri="{FF2B5EF4-FFF2-40B4-BE49-F238E27FC236}">
-                <a16:creationId xmlns:a16="http://schemas.microsoft.com/office/drawing/2014/main" id="{E3101F3F-C3A4-4C96-8935-D1FC025F04AF}"/>
+                <a16:creationId xmlns:a16="http://schemas.microsoft.com/office/drawing/2014/main" id="{3CAFFC82-E80E-4BD2-9256-8A7DE5EDBC4F}"/>
               </a:ext>
             </a:extLst>
           </p:cNvPr>
@@ -5273,7 +5273,7 @@
           <p:cNvPr id="14" name="">
             <a:extLst xmlns:a="http://schemas.openxmlformats.org/drawingml/2006/main">
               <a:ext uri="{FF2B5EF4-FFF2-40B4-BE49-F238E27FC236}">
-                <a16:creationId xmlns:a16="http://schemas.microsoft.com/office/drawing/2014/main" id="{08C199D8-E5E1-4703-9AC2-1890A87B0669}"/>
+                <a16:creationId xmlns:a16="http://schemas.microsoft.com/office/drawing/2014/main" id="{B2A84E13-8231-44C7-B999-3F3F483C2E3B}"/>
               </a:ext>
             </a:extLst>
           </p:cNvPr>
@@ -5308,7 +5308,7 @@
           <p:cNvPr id="15" name="">
             <a:extLst xmlns:a="http://schemas.openxmlformats.org/drawingml/2006/main">
               <a:ext uri="{FF2B5EF4-FFF2-40B4-BE49-F238E27FC236}">
-                <a16:creationId xmlns:a16="http://schemas.microsoft.com/office/drawing/2014/main" id="{7450AB77-F8F9-447B-AE62-0B4B89D9C1F7}"/>
+                <a16:creationId xmlns:a16="http://schemas.microsoft.com/office/drawing/2014/main" id="{B1A2C628-8267-4C59-9186-8727C3F9E169}"/>
               </a:ext>
             </a:extLst>
           </p:cNvPr>
@@ -5358,7 +5358,7 @@
           <p:cNvPr id="16" name="">
             <a:extLst xmlns:a="http://schemas.openxmlformats.org/drawingml/2006/main">
               <a:ext uri="{FF2B5EF4-FFF2-40B4-BE49-F238E27FC236}">
-                <a16:creationId xmlns:a16="http://schemas.microsoft.com/office/drawing/2014/main" id="{148E5812-35FE-4DF8-A779-4F8C3FF53092}"/>
+                <a16:creationId xmlns:a16="http://schemas.microsoft.com/office/drawing/2014/main" id="{4C6927E8-9B2D-4E50-A365-BBEFFF468C83}"/>
               </a:ext>
             </a:extLst>
           </p:cNvPr>
@@ -5408,7 +5408,7 @@
           <p:cNvPr id="17" name="">
             <a:extLst xmlns:a="http://schemas.openxmlformats.org/drawingml/2006/main">
               <a:ext uri="{FF2B5EF4-FFF2-40B4-BE49-F238E27FC236}">
-                <a16:creationId xmlns:a16="http://schemas.microsoft.com/office/drawing/2014/main" id="{98D54E86-CBB4-41B3-A3CC-05A280288067}"/>
+                <a16:creationId xmlns:a16="http://schemas.microsoft.com/office/drawing/2014/main" id="{BDDFC20A-C3F6-4035-AB1C-EFC117BD4560}"/>
               </a:ext>
             </a:extLst>
           </p:cNvPr>
@@ -5443,7 +5443,7 @@
           <p:cNvPr id="18" name="">
             <a:extLst xmlns:a="http://schemas.openxmlformats.org/drawingml/2006/main">
               <a:ext uri="{FF2B5EF4-FFF2-40B4-BE49-F238E27FC236}">
-                <a16:creationId xmlns:a16="http://schemas.microsoft.com/office/drawing/2014/main" id="{D28DA4D9-E368-44C2-AD43-F8895BEC4D42}"/>
+                <a16:creationId xmlns:a16="http://schemas.microsoft.com/office/drawing/2014/main" id="{E7C9149D-5072-4E02-9CF2-99DE3D6C316A}"/>
               </a:ext>
             </a:extLst>
           </p:cNvPr>
@@ -5493,7 +5493,7 @@
           <p:cNvPr id="19" name="">
             <a:extLst xmlns:a="http://schemas.openxmlformats.org/drawingml/2006/main">
               <a:ext uri="{FF2B5EF4-FFF2-40B4-BE49-F238E27FC236}">
-                <a16:creationId xmlns:a16="http://schemas.microsoft.com/office/drawing/2014/main" id="{21CBAB27-837E-43F8-9FDF-FA04EC1FD9F6}"/>
+                <a16:creationId xmlns:a16="http://schemas.microsoft.com/office/drawing/2014/main" id="{DE0C11E1-A581-4F72-9074-483FEEC9F630}"/>
               </a:ext>
             </a:extLst>
           </p:cNvPr>
@@ -5543,7 +5543,7 @@
           <p:cNvPr id="20" name="">
             <a:extLst xmlns:a="http://schemas.openxmlformats.org/drawingml/2006/main">
               <a:ext uri="{FF2B5EF4-FFF2-40B4-BE49-F238E27FC236}">
-                <a16:creationId xmlns:a16="http://schemas.microsoft.com/office/drawing/2014/main" id="{7151DD97-AF39-4FD3-A673-427AED88EA6C}"/>
+                <a16:creationId xmlns:a16="http://schemas.microsoft.com/office/drawing/2014/main" id="{67BCE147-A207-4C14-BED8-200056119BF1}"/>
               </a:ext>
             </a:extLst>
           </p:cNvPr>
@@ -5593,7 +5593,7 @@
           <p:cNvPr id="21" name="">
             <a:extLst xmlns:a="http://schemas.openxmlformats.org/drawingml/2006/main">
               <a:ext uri="{FF2B5EF4-FFF2-40B4-BE49-F238E27FC236}">
-                <a16:creationId xmlns:a16="http://schemas.microsoft.com/office/drawing/2014/main" id="{175721AA-0AED-4F0D-A665-B7546897B9E3}"/>
+                <a16:creationId xmlns:a16="http://schemas.microsoft.com/office/drawing/2014/main" id="{BC9A73BB-C64E-4B46-8380-4B7709B6B364}"/>
               </a:ext>
             </a:extLst>
           </p:cNvPr>
@@ -5643,7 +5643,7 @@
           <p:cNvPr id="22" name="">
             <a:extLst xmlns:a="http://schemas.openxmlformats.org/drawingml/2006/main">
               <a:ext uri="{FF2B5EF4-FFF2-40B4-BE49-F238E27FC236}">
-                <a16:creationId xmlns:a16="http://schemas.microsoft.com/office/drawing/2014/main" id="{23F7E3C9-34CC-4096-92DF-EE2D8CB627F8}"/>
+                <a16:creationId xmlns:a16="http://schemas.microsoft.com/office/drawing/2014/main" id="{489C8707-95A1-4C70-BE4B-470D4AC084CD}"/>
               </a:ext>
             </a:extLst>
           </p:cNvPr>
@@ -5693,7 +5693,7 @@
           <p:cNvPr id="23" name="">
             <a:extLst xmlns:a="http://schemas.openxmlformats.org/drawingml/2006/main">
               <a:ext uri="{FF2B5EF4-FFF2-40B4-BE49-F238E27FC236}">
-                <a16:creationId xmlns:a16="http://schemas.microsoft.com/office/drawing/2014/main" id="{87AC026C-244B-4187-9B90-519CA882D2B0}"/>
+                <a16:creationId xmlns:a16="http://schemas.microsoft.com/office/drawing/2014/main" id="{CEC3D707-F914-4133-AE23-896C6F011E25}"/>
               </a:ext>
             </a:extLst>
           </p:cNvPr>
@@ -5726,7 +5726,7 @@
           <p:cNvPr id="24" name="">
             <a:extLst xmlns:a="http://schemas.openxmlformats.org/drawingml/2006/main">
               <a:ext uri="{FF2B5EF4-FFF2-40B4-BE49-F238E27FC236}">
-                <a16:creationId xmlns:a16="http://schemas.microsoft.com/office/drawing/2014/main" id="{60DA643A-DEE3-41D6-98E6-1DB69A36D059}"/>
+                <a16:creationId xmlns:a16="http://schemas.microsoft.com/office/drawing/2014/main" id="{D6DBD709-0EE5-43FB-AB64-5E828BADF5D9}"/>
               </a:ext>
             </a:extLst>
           </p:cNvPr>
@@ -5776,7 +5776,7 @@
           <p:cNvPr id="25" name="">
             <a:extLst xmlns:a="http://schemas.openxmlformats.org/drawingml/2006/main">
               <a:ext uri="{FF2B5EF4-FFF2-40B4-BE49-F238E27FC236}">
-                <a16:creationId xmlns:a16="http://schemas.microsoft.com/office/drawing/2014/main" id="{5B98BAA0-B8E3-4174-9834-90B04BF67D43}"/>
+                <a16:creationId xmlns:a16="http://schemas.microsoft.com/office/drawing/2014/main" id="{B732594D-D3EF-4BB1-9297-2F188294E415}"/>
               </a:ext>
             </a:extLst>
           </p:cNvPr>
@@ -5826,7 +5826,7 @@
           <p:cNvPr id="26" name="">
             <a:extLst xmlns:a="http://schemas.openxmlformats.org/drawingml/2006/main">
               <a:ext uri="{FF2B5EF4-FFF2-40B4-BE49-F238E27FC236}">
-                <a16:creationId xmlns:a16="http://schemas.microsoft.com/office/drawing/2014/main" id="{5DF525C7-D957-4E87-B5E2-0CB63ED89245}"/>
+                <a16:creationId xmlns:a16="http://schemas.microsoft.com/office/drawing/2014/main" id="{9083A6B4-3470-4ED4-B032-C065ED707AB9}"/>
               </a:ext>
             </a:extLst>
           </p:cNvPr>
@@ -5859,7 +5859,7 @@
           <p:cNvPr id="27" name="">
             <a:extLst xmlns:a="http://schemas.openxmlformats.org/drawingml/2006/main">
               <a:ext uri="{FF2B5EF4-FFF2-40B4-BE49-F238E27FC236}">
-                <a16:creationId xmlns:a16="http://schemas.microsoft.com/office/drawing/2014/main" id="{F477756F-4734-4A96-B040-3961CDD6CBAD}"/>
+                <a16:creationId xmlns:a16="http://schemas.microsoft.com/office/drawing/2014/main" id="{68456291-BF68-434F-9EC0-6D5F3F196123}"/>
               </a:ext>
             </a:extLst>
           </p:cNvPr>
@@ -5909,7 +5909,7 @@
           <p:cNvPr id="28" name="">
             <a:extLst xmlns:a="http://schemas.openxmlformats.org/drawingml/2006/main">
               <a:ext uri="{FF2B5EF4-FFF2-40B4-BE49-F238E27FC236}">
-                <a16:creationId xmlns:a16="http://schemas.microsoft.com/office/drawing/2014/main" id="{B050CC48-FCF2-43A9-8821-449DAEE0F45A}"/>
+                <a16:creationId xmlns:a16="http://schemas.microsoft.com/office/drawing/2014/main" id="{98F65A14-6900-43F2-B12D-19125318709E}"/>
               </a:ext>
             </a:extLst>
           </p:cNvPr>
@@ -5959,7 +5959,7 @@
           <p:cNvPr id="29" name="">
             <a:extLst xmlns:a="http://schemas.openxmlformats.org/drawingml/2006/main">
               <a:ext uri="{FF2B5EF4-FFF2-40B4-BE49-F238E27FC236}">
-                <a16:creationId xmlns:a16="http://schemas.microsoft.com/office/drawing/2014/main" id="{0AAEF66A-C1F2-4A36-AD51-D59B17CB25FE}"/>
+                <a16:creationId xmlns:a16="http://schemas.microsoft.com/office/drawing/2014/main" id="{C4B8DEDE-09C9-44F8-8F5D-ABF4B62B87B7}"/>
               </a:ext>
             </a:extLst>
           </p:cNvPr>
@@ -5992,7 +5992,7 @@
           <p:cNvPr id="30" name="">
             <a:extLst xmlns:a="http://schemas.openxmlformats.org/drawingml/2006/main">
               <a:ext uri="{FF2B5EF4-FFF2-40B4-BE49-F238E27FC236}">
-                <a16:creationId xmlns:a16="http://schemas.microsoft.com/office/drawing/2014/main" id="{EAFDC7F5-F6EB-414E-98A6-81FB6C695151}"/>
+                <a16:creationId xmlns:a16="http://schemas.microsoft.com/office/drawing/2014/main" id="{0B7F9A80-E2E3-4538-8F3A-2452DADA7745}"/>
               </a:ext>
             </a:extLst>
           </p:cNvPr>
@@ -6042,7 +6042,7 @@
           <p:cNvPr id="31" name="">
             <a:extLst xmlns:a="http://schemas.openxmlformats.org/drawingml/2006/main">
               <a:ext uri="{FF2B5EF4-FFF2-40B4-BE49-F238E27FC236}">
-                <a16:creationId xmlns:a16="http://schemas.microsoft.com/office/drawing/2014/main" id="{6FF05BEE-2321-42C1-8150-749374628CC4}"/>
+                <a16:creationId xmlns:a16="http://schemas.microsoft.com/office/drawing/2014/main" id="{DC03A88E-8420-4761-9716-582126D71318}"/>
               </a:ext>
             </a:extLst>
           </p:cNvPr>
@@ -6090,7 +6090,7 @@
     </p:spTree>
     <p:extLst>
       <p:ext uri="{BB962C8B-B14F-4D97-AF65-F5344CB8AC3E}">
-        <p14:creationId xmlns:p14="http://schemas.microsoft.com/office/powerpoint/2010/main" val="1532343062"/>
+        <p14:creationId xmlns:p14="http://schemas.microsoft.com/office/powerpoint/2010/main" val="1248014869"/>
       </p:ext>
     </p:extLst>
   </p:cSld>
@@ -6121,7 +6121,7 @@
           <p:cNvPr id="1" name="">
             <a:extLst xmlns:a="http://schemas.openxmlformats.org/drawingml/2006/main">
               <a:ext uri="{FF2B5EF4-FFF2-40B4-BE49-F238E27FC236}">
-                <a16:creationId xmlns:a16="http://schemas.microsoft.com/office/drawing/2014/main" id="{BFAC9A0E-2682-426D-B560-A520DD5D2F74}"/>
+                <a16:creationId xmlns:a16="http://schemas.microsoft.com/office/drawing/2014/main" id="{C162980B-EBAF-4653-B9D7-D10CB90EB629}"/>
               </a:ext>
             </a:extLst>
           </p:cNvPr>
@@ -6156,7 +6156,7 @@
           <p:nvPr/>
         </p:nvPicPr>
         <p:blipFill>
-          <a:blip xmlns:r="http://schemas.openxmlformats.org/officeDocument/2006/relationships" xmlns:a="http://schemas.openxmlformats.org/drawingml/2006/main" r:embed="R9ff71eef40114adf"/>
+          <a:blip xmlns:r="http://schemas.openxmlformats.org/officeDocument/2006/relationships" xmlns:a="http://schemas.openxmlformats.org/drawingml/2006/main" r:embed="R8e94366b9a0242ca"/>
           <a:stretch xmlns:a="http://schemas.openxmlformats.org/drawingml/2006/main"/>
         </p:blipFill>
         <p:spPr>
@@ -6174,7 +6174,7 @@
           <p:cNvPr id="3" name="">
             <a:extLst xmlns:a="http://schemas.openxmlformats.org/drawingml/2006/main">
               <a:ext uri="{FF2B5EF4-FFF2-40B4-BE49-F238E27FC236}">
-                <a16:creationId xmlns:a16="http://schemas.microsoft.com/office/drawing/2014/main" id="{C7FDF7EC-D8ED-4286-B4EE-5CE34F82A9A1}"/>
+                <a16:creationId xmlns:a16="http://schemas.microsoft.com/office/drawing/2014/main" id="{1C18BBFF-7FC0-4BF1-8CCC-87E03ED85068}"/>
               </a:ext>
             </a:extLst>
           </p:cNvPr>
@@ -6224,7 +6224,7 @@
           <p:cNvPr id="4" name="">
             <a:extLst xmlns:a="http://schemas.openxmlformats.org/drawingml/2006/main">
               <a:ext uri="{FF2B5EF4-FFF2-40B4-BE49-F238E27FC236}">
-                <a16:creationId xmlns:a16="http://schemas.microsoft.com/office/drawing/2014/main" id="{6105637F-83BA-4247-A7E7-D4DAE8B54F3E}"/>
+                <a16:creationId xmlns:a16="http://schemas.microsoft.com/office/drawing/2014/main" id="{E5EB4426-9622-4F84-B14A-09CCD5647ED5}"/>
               </a:ext>
             </a:extLst>
           </p:cNvPr>
@@ -6257,7 +6257,7 @@
           <p:cNvPr id="5" name="">
             <a:extLst xmlns:a="http://schemas.openxmlformats.org/drawingml/2006/main">
               <a:ext uri="{FF2B5EF4-FFF2-40B4-BE49-F238E27FC236}">
-                <a16:creationId xmlns:a16="http://schemas.microsoft.com/office/drawing/2014/main" id="{D34B97AF-68CB-470C-B61D-49EC1576F548}"/>
+                <a16:creationId xmlns:a16="http://schemas.microsoft.com/office/drawing/2014/main" id="{6D84C630-D0EA-4AB8-97FC-C41E495CC446}"/>
               </a:ext>
             </a:extLst>
           </p:cNvPr>
@@ -6288,7 +6288,7 @@
           <p:cNvPr id="6" name="">
             <a:extLst xmlns:a="http://schemas.openxmlformats.org/drawingml/2006/main">
               <a:ext uri="{FF2B5EF4-FFF2-40B4-BE49-F238E27FC236}">
-                <a16:creationId xmlns:a16="http://schemas.microsoft.com/office/drawing/2014/main" id="{142352EA-DC8E-4250-86E7-BED2380D69D0}"/>
+                <a16:creationId xmlns:a16="http://schemas.microsoft.com/office/drawing/2014/main" id="{95FE119D-08D5-44C6-A618-E89BB74D9B1D}"/>
               </a:ext>
             </a:extLst>
           </p:cNvPr>
@@ -6338,7 +6338,7 @@
           <p:cNvPr id="7" name="">
             <a:extLst xmlns:a="http://schemas.openxmlformats.org/drawingml/2006/main">
               <a:ext uri="{FF2B5EF4-FFF2-40B4-BE49-F238E27FC236}">
-                <a16:creationId xmlns:a16="http://schemas.microsoft.com/office/drawing/2014/main" id="{A7B87033-C9C4-4B31-A2AD-C8D98C027F21}"/>
+                <a16:creationId xmlns:a16="http://schemas.microsoft.com/office/drawing/2014/main" id="{DD726EC6-E25A-47BD-9187-58976966EF0C}"/>
               </a:ext>
             </a:extLst>
           </p:cNvPr>
@@ -6388,7 +6388,7 @@
           <p:cNvPr id="8" name="">
             <a:extLst xmlns:a="http://schemas.openxmlformats.org/drawingml/2006/main">
               <a:ext uri="{FF2B5EF4-FFF2-40B4-BE49-F238E27FC236}">
-                <a16:creationId xmlns:a16="http://schemas.microsoft.com/office/drawing/2014/main" id="{2DD6D595-313C-4F67-8EDA-9DBB2C3E5142}"/>
+                <a16:creationId xmlns:a16="http://schemas.microsoft.com/office/drawing/2014/main" id="{E6E20E81-AD23-46CD-8411-62FEA7F5BF16}"/>
               </a:ext>
             </a:extLst>
           </p:cNvPr>
@@ -6421,7 +6421,7 @@
           <p:cNvPr id="9" name="">
             <a:extLst xmlns:a="http://schemas.openxmlformats.org/drawingml/2006/main">
               <a:ext uri="{FF2B5EF4-FFF2-40B4-BE49-F238E27FC236}">
-                <a16:creationId xmlns:a16="http://schemas.microsoft.com/office/drawing/2014/main" id="{C0A6383E-8684-4684-BBFE-0CF86CA3878D}"/>
+                <a16:creationId xmlns:a16="http://schemas.microsoft.com/office/drawing/2014/main" id="{A54A2BBC-088A-40CD-9052-1D30C8797EB3}"/>
               </a:ext>
             </a:extLst>
           </p:cNvPr>
@@ -6471,7 +6471,7 @@
           <p:cNvPr id="10" name="">
             <a:extLst xmlns:a="http://schemas.openxmlformats.org/drawingml/2006/main">
               <a:ext uri="{FF2B5EF4-FFF2-40B4-BE49-F238E27FC236}">
-                <a16:creationId xmlns:a16="http://schemas.microsoft.com/office/drawing/2014/main" id="{9003DD58-D29E-4403-A07F-6BA10CF98935}"/>
+                <a16:creationId xmlns:a16="http://schemas.microsoft.com/office/drawing/2014/main" id="{8F0EA229-1F86-4162-8C7F-7F7F49969155}"/>
               </a:ext>
             </a:extLst>
           </p:cNvPr>
@@ -6521,7 +6521,7 @@
           <p:cNvPr id="11" name="">
             <a:extLst xmlns:a="http://schemas.openxmlformats.org/drawingml/2006/main">
               <a:ext uri="{FF2B5EF4-FFF2-40B4-BE49-F238E27FC236}">
-                <a16:creationId xmlns:a16="http://schemas.microsoft.com/office/drawing/2014/main" id="{300048E2-C240-4CF7-94AD-54535BF22A55}"/>
+                <a16:creationId xmlns:a16="http://schemas.microsoft.com/office/drawing/2014/main" id="{BAB421CE-D08B-4192-964F-D5CC1C9E7C7D}"/>
               </a:ext>
             </a:extLst>
           </p:cNvPr>
@@ -6571,7 +6571,7 @@
           <p:cNvPr id="12" name="">
             <a:extLst xmlns:a="http://schemas.openxmlformats.org/drawingml/2006/main">
               <a:ext uri="{FF2B5EF4-FFF2-40B4-BE49-F238E27FC236}">
-                <a16:creationId xmlns:a16="http://schemas.microsoft.com/office/drawing/2014/main" id="{9BB8583F-E814-4E91-A0F3-03F521639520}"/>
+                <a16:creationId xmlns:a16="http://schemas.microsoft.com/office/drawing/2014/main" id="{EC457D01-8D59-4A6A-B4B8-9885D4032CD2}"/>
               </a:ext>
             </a:extLst>
           </p:cNvPr>
@@ -6621,7 +6621,7 @@
           <p:cNvPr id="13" name="">
             <a:extLst xmlns:a="http://schemas.openxmlformats.org/drawingml/2006/main">
               <a:ext uri="{FF2B5EF4-FFF2-40B4-BE49-F238E27FC236}">
-                <a16:creationId xmlns:a16="http://schemas.microsoft.com/office/drawing/2014/main" id="{0AA13C5D-3871-43D5-8292-240F857704C5}"/>
+                <a16:creationId xmlns:a16="http://schemas.microsoft.com/office/drawing/2014/main" id="{F4CE8147-421B-46EB-8990-555475A9F132}"/>
               </a:ext>
             </a:extLst>
           </p:cNvPr>
@@ -6671,7 +6671,7 @@
           <p:cNvPr id="14" name="">
             <a:extLst xmlns:a="http://schemas.openxmlformats.org/drawingml/2006/main">
               <a:ext uri="{FF2B5EF4-FFF2-40B4-BE49-F238E27FC236}">
-                <a16:creationId xmlns:a16="http://schemas.microsoft.com/office/drawing/2014/main" id="{44919460-861F-4DB9-A2B2-C5C51F7923E4}"/>
+                <a16:creationId xmlns:a16="http://schemas.microsoft.com/office/drawing/2014/main" id="{157109FF-9B98-40DE-BC32-BC6CC73D9930}"/>
               </a:ext>
             </a:extLst>
           </p:cNvPr>
@@ -6702,7 +6702,7 @@
           <p:cNvPr id="15" name="">
             <a:extLst xmlns:a="http://schemas.openxmlformats.org/drawingml/2006/main">
               <a:ext uri="{FF2B5EF4-FFF2-40B4-BE49-F238E27FC236}">
-                <a16:creationId xmlns:a16="http://schemas.microsoft.com/office/drawing/2014/main" id="{9F5DCB6B-E69F-48CC-9F97-D9A0292D2EC6}"/>
+                <a16:creationId xmlns:a16="http://schemas.microsoft.com/office/drawing/2014/main" id="{3454C0A0-D63F-4278-9C45-FC6FC1038F4B}"/>
               </a:ext>
             </a:extLst>
           </p:cNvPr>
@@ -6735,7 +6735,7 @@
           <p:cNvPr id="16" name="">
             <a:extLst xmlns:a="http://schemas.openxmlformats.org/drawingml/2006/main">
               <a:ext uri="{FF2B5EF4-FFF2-40B4-BE49-F238E27FC236}">
-                <a16:creationId xmlns:a16="http://schemas.microsoft.com/office/drawing/2014/main" id="{81E3BFCD-518C-4DEF-ADEE-CD7A07656098}"/>
+                <a16:creationId xmlns:a16="http://schemas.microsoft.com/office/drawing/2014/main" id="{D90167AC-A9D1-45F6-B369-4ABCB7FB4FF1}"/>
               </a:ext>
             </a:extLst>
           </p:cNvPr>
@@ -6785,7 +6785,7 @@
           <p:cNvPr id="17" name="">
             <a:extLst xmlns:a="http://schemas.openxmlformats.org/drawingml/2006/main">
               <a:ext uri="{FF2B5EF4-FFF2-40B4-BE49-F238E27FC236}">
-                <a16:creationId xmlns:a16="http://schemas.microsoft.com/office/drawing/2014/main" id="{F7C33FA8-7DF5-4735-8370-EA96A4E98B84}"/>
+                <a16:creationId xmlns:a16="http://schemas.microsoft.com/office/drawing/2014/main" id="{C24EE988-8240-427F-BBCF-FDFBFB463D6F}"/>
               </a:ext>
             </a:extLst>
           </p:cNvPr>
@@ -6835,7 +6835,7 @@
           <p:cNvPr id="18" name="">
             <a:extLst xmlns:a="http://schemas.openxmlformats.org/drawingml/2006/main">
               <a:ext uri="{FF2B5EF4-FFF2-40B4-BE49-F238E27FC236}">
-                <a16:creationId xmlns:a16="http://schemas.microsoft.com/office/drawing/2014/main" id="{5BF8EF3B-EAB6-4435-BB40-BF57A64AAA17}"/>
+                <a16:creationId xmlns:a16="http://schemas.microsoft.com/office/drawing/2014/main" id="{C73B0386-415F-49CA-AD33-9326177D89D4}"/>
               </a:ext>
             </a:extLst>
           </p:cNvPr>
@@ -6885,7 +6885,7 @@
           <p:cNvPr id="19" name="">
             <a:extLst xmlns:a="http://schemas.openxmlformats.org/drawingml/2006/main">
               <a:ext uri="{FF2B5EF4-FFF2-40B4-BE49-F238E27FC236}">
-                <a16:creationId xmlns:a16="http://schemas.microsoft.com/office/drawing/2014/main" id="{F87C1598-7F03-45F7-81A9-8112976F0396}"/>
+                <a16:creationId xmlns:a16="http://schemas.microsoft.com/office/drawing/2014/main" id="{DBDEBE1B-3359-425F-AC3A-F5E51E8EC27E}"/>
               </a:ext>
             </a:extLst>
           </p:cNvPr>
@@ -6935,7 +6935,7 @@
           <p:cNvPr id="20" name="">
             <a:extLst xmlns:a="http://schemas.openxmlformats.org/drawingml/2006/main">
               <a:ext uri="{FF2B5EF4-FFF2-40B4-BE49-F238E27FC236}">
-                <a16:creationId xmlns:a16="http://schemas.microsoft.com/office/drawing/2014/main" id="{F5518C4B-3741-4694-A201-AF5D7FC84852}"/>
+                <a16:creationId xmlns:a16="http://schemas.microsoft.com/office/drawing/2014/main" id="{A4CE21BD-E29E-4E9C-B006-750E332BF66F}"/>
               </a:ext>
             </a:extLst>
           </p:cNvPr>
@@ -6985,7 +6985,7 @@
           <p:cNvPr id="21" name="">
             <a:extLst xmlns:a="http://schemas.openxmlformats.org/drawingml/2006/main">
               <a:ext uri="{FF2B5EF4-FFF2-40B4-BE49-F238E27FC236}">
-                <a16:creationId xmlns:a16="http://schemas.microsoft.com/office/drawing/2014/main" id="{2C722705-AB80-49F0-A2A2-2899901E185C}"/>
+                <a16:creationId xmlns:a16="http://schemas.microsoft.com/office/drawing/2014/main" id="{20BFD0C5-1469-496A-B6B7-5F0184BEA2A8}"/>
               </a:ext>
             </a:extLst>
           </p:cNvPr>
@@ -7016,7 +7016,7 @@
           <p:cNvPr id="22" name="">
             <a:extLst xmlns:a="http://schemas.openxmlformats.org/drawingml/2006/main">
               <a:ext uri="{FF2B5EF4-FFF2-40B4-BE49-F238E27FC236}">
-                <a16:creationId xmlns:a16="http://schemas.microsoft.com/office/drawing/2014/main" id="{6F14C373-7D1A-4324-8636-51402C9F7259}"/>
+                <a16:creationId xmlns:a16="http://schemas.microsoft.com/office/drawing/2014/main" id="{8CE0B9BB-CB0E-44C7-A5BA-F34179445499}"/>
               </a:ext>
             </a:extLst>
           </p:cNvPr>
@@ -7049,7 +7049,7 @@
           <p:cNvPr id="23" name="">
             <a:extLst xmlns:a="http://schemas.openxmlformats.org/drawingml/2006/main">
               <a:ext uri="{FF2B5EF4-FFF2-40B4-BE49-F238E27FC236}">
-                <a16:creationId xmlns:a16="http://schemas.microsoft.com/office/drawing/2014/main" id="{2D9195EF-BBDF-45E4-A563-67321F56C64C}"/>
+                <a16:creationId xmlns:a16="http://schemas.microsoft.com/office/drawing/2014/main" id="{161E7F11-3A6B-4C7F-929D-19E6FB453739}"/>
               </a:ext>
             </a:extLst>
           </p:cNvPr>
@@ -7099,7 +7099,7 @@
           <p:cNvPr id="24" name="">
             <a:extLst xmlns:a="http://schemas.openxmlformats.org/drawingml/2006/main">
               <a:ext uri="{FF2B5EF4-FFF2-40B4-BE49-F238E27FC236}">
-                <a16:creationId xmlns:a16="http://schemas.microsoft.com/office/drawing/2014/main" id="{CB350DAD-D5A4-4C2C-9896-63B8773A688B}"/>
+                <a16:creationId xmlns:a16="http://schemas.microsoft.com/office/drawing/2014/main" id="{F78DEA02-F3AD-4768-8C03-665247B2052B}"/>
               </a:ext>
             </a:extLst>
           </p:cNvPr>
@@ -7149,7 +7149,7 @@
           <p:cNvPr id="25" name="">
             <a:extLst xmlns:a="http://schemas.openxmlformats.org/drawingml/2006/main">
               <a:ext uri="{FF2B5EF4-FFF2-40B4-BE49-F238E27FC236}">
-                <a16:creationId xmlns:a16="http://schemas.microsoft.com/office/drawing/2014/main" id="{6B008DBE-CBC9-45FE-A2D3-BDA450624006}"/>
+                <a16:creationId xmlns:a16="http://schemas.microsoft.com/office/drawing/2014/main" id="{00A85718-726C-413A-B0C5-311C591DE0D2}"/>
               </a:ext>
             </a:extLst>
           </p:cNvPr>
@@ -7199,7 +7199,7 @@
           <p:cNvPr id="26" name="">
             <a:extLst xmlns:a="http://schemas.openxmlformats.org/drawingml/2006/main">
               <a:ext uri="{FF2B5EF4-FFF2-40B4-BE49-F238E27FC236}">
-                <a16:creationId xmlns:a16="http://schemas.microsoft.com/office/drawing/2014/main" id="{ADEE6DD2-85AC-4A4C-BA91-CE00022F03E7}"/>
+                <a16:creationId xmlns:a16="http://schemas.microsoft.com/office/drawing/2014/main" id="{6BB3A2F2-796B-42CB-9B56-2B9B72F62A92}"/>
               </a:ext>
             </a:extLst>
           </p:cNvPr>
@@ -7249,7 +7249,7 @@
           <p:cNvPr id="27" name="">
             <a:extLst xmlns:a="http://schemas.openxmlformats.org/drawingml/2006/main">
               <a:ext uri="{FF2B5EF4-FFF2-40B4-BE49-F238E27FC236}">
-                <a16:creationId xmlns:a16="http://schemas.microsoft.com/office/drawing/2014/main" id="{22D56DA4-2934-43E1-B073-E937C09B4A25}"/>
+                <a16:creationId xmlns:a16="http://schemas.microsoft.com/office/drawing/2014/main" id="{D705CB99-70E0-4EFC-ADF0-94A2ADE8CC09}"/>
               </a:ext>
             </a:extLst>
           </p:cNvPr>
@@ -7299,7 +7299,7 @@
           <p:cNvPr id="28" name="">
             <a:extLst xmlns:a="http://schemas.openxmlformats.org/drawingml/2006/main">
               <a:ext uri="{FF2B5EF4-FFF2-40B4-BE49-F238E27FC236}">
-                <a16:creationId xmlns:a16="http://schemas.microsoft.com/office/drawing/2014/main" id="{66BFDBB5-85B5-4121-AB22-0FC49D929B78}"/>
+                <a16:creationId xmlns:a16="http://schemas.microsoft.com/office/drawing/2014/main" id="{ED281430-0C99-4637-A2A8-BBB3A42A7DDC}"/>
               </a:ext>
             </a:extLst>
           </p:cNvPr>
@@ -7330,7 +7330,7 @@
           <p:cNvPr id="29" name="">
             <a:extLst xmlns:a="http://schemas.openxmlformats.org/drawingml/2006/main">
               <a:ext uri="{FF2B5EF4-FFF2-40B4-BE49-F238E27FC236}">
-                <a16:creationId xmlns:a16="http://schemas.microsoft.com/office/drawing/2014/main" id="{DC078230-6AFA-494D-A549-042EB9BF4DDD}"/>
+                <a16:creationId xmlns:a16="http://schemas.microsoft.com/office/drawing/2014/main" id="{57E5DD79-9BA1-42C0-8C49-288F62803988}"/>
               </a:ext>
             </a:extLst>
           </p:cNvPr>
@@ -7363,7 +7363,7 @@
           <p:cNvPr id="30" name="">
             <a:extLst xmlns:a="http://schemas.openxmlformats.org/drawingml/2006/main">
               <a:ext uri="{FF2B5EF4-FFF2-40B4-BE49-F238E27FC236}">
-                <a16:creationId xmlns:a16="http://schemas.microsoft.com/office/drawing/2014/main" id="{8B4AF1A3-BF64-45F5-8222-C4F49243D4AA}"/>
+                <a16:creationId xmlns:a16="http://schemas.microsoft.com/office/drawing/2014/main" id="{D59C70DA-A6A3-4926-87B7-3675496D7048}"/>
               </a:ext>
             </a:extLst>
           </p:cNvPr>
@@ -7413,7 +7413,7 @@
           <p:cNvPr id="31" name="">
             <a:extLst xmlns:a="http://schemas.openxmlformats.org/drawingml/2006/main">
               <a:ext uri="{FF2B5EF4-FFF2-40B4-BE49-F238E27FC236}">
-                <a16:creationId xmlns:a16="http://schemas.microsoft.com/office/drawing/2014/main" id="{2BE8AF71-2981-4771-95CF-42B5FBD489CC}"/>
+                <a16:creationId xmlns:a16="http://schemas.microsoft.com/office/drawing/2014/main" id="{6447E14E-C317-4600-9762-DB809A08F9F1}"/>
               </a:ext>
             </a:extLst>
           </p:cNvPr>
@@ -7463,7 +7463,7 @@
           <p:cNvPr id="32" name="">
             <a:extLst xmlns:a="http://schemas.openxmlformats.org/drawingml/2006/main">
               <a:ext uri="{FF2B5EF4-FFF2-40B4-BE49-F238E27FC236}">
-                <a16:creationId xmlns:a16="http://schemas.microsoft.com/office/drawing/2014/main" id="{AFCCB569-C7EE-473D-A117-59712923D163}"/>
+                <a16:creationId xmlns:a16="http://schemas.microsoft.com/office/drawing/2014/main" id="{5DD63B95-EBB7-482A-8E02-D92B674EC88D}"/>
               </a:ext>
             </a:extLst>
           </p:cNvPr>
@@ -7513,7 +7513,7 @@
           <p:cNvPr id="33" name="">
             <a:extLst xmlns:a="http://schemas.openxmlformats.org/drawingml/2006/main">
               <a:ext uri="{FF2B5EF4-FFF2-40B4-BE49-F238E27FC236}">
-                <a16:creationId xmlns:a16="http://schemas.microsoft.com/office/drawing/2014/main" id="{CFB2BEE3-50BD-4F1C-A0E0-AA06AE461A59}"/>
+                <a16:creationId xmlns:a16="http://schemas.microsoft.com/office/drawing/2014/main" id="{A71BA078-B292-4428-853B-DA54E8FD1E6E}"/>
               </a:ext>
             </a:extLst>
           </p:cNvPr>
@@ -7563,7 +7563,7 @@
           <p:cNvPr id="34" name="">
             <a:extLst xmlns:a="http://schemas.openxmlformats.org/drawingml/2006/main">
               <a:ext uri="{FF2B5EF4-FFF2-40B4-BE49-F238E27FC236}">
-                <a16:creationId xmlns:a16="http://schemas.microsoft.com/office/drawing/2014/main" id="{D1859288-F2A6-45D1-9288-B53BA4827E63}"/>
+                <a16:creationId xmlns:a16="http://schemas.microsoft.com/office/drawing/2014/main" id="{FE76687A-0A0E-4C82-B1A5-1BBBF1BBAFC9}"/>
               </a:ext>
             </a:extLst>
           </p:cNvPr>
@@ -7611,7 +7611,7 @@
     </p:spTree>
     <p:extLst>
       <p:ext uri="{BB962C8B-B14F-4D97-AF65-F5344CB8AC3E}">
-        <p14:creationId xmlns:p14="http://schemas.microsoft.com/office/powerpoint/2010/main" val="1781785763"/>
+        <p14:creationId xmlns:p14="http://schemas.microsoft.com/office/powerpoint/2010/main" val="760516806"/>
       </p:ext>
     </p:extLst>
   </p:cSld>
@@ -7642,7 +7642,7 @@
           <p:cNvPr id="1" name="">
             <a:extLst xmlns:a="http://schemas.openxmlformats.org/drawingml/2006/main">
               <a:ext uri="{FF2B5EF4-FFF2-40B4-BE49-F238E27FC236}">
-                <a16:creationId xmlns:a16="http://schemas.microsoft.com/office/drawing/2014/main" id="{612807D8-546F-4D65-AB08-655F15213C58}"/>
+                <a16:creationId xmlns:a16="http://schemas.microsoft.com/office/drawing/2014/main" id="{EACD4B50-0031-4029-9103-520F5DDA4EBA}"/>
               </a:ext>
             </a:extLst>
           </p:cNvPr>
@@ -7677,7 +7677,7 @@
           <p:nvPr/>
         </p:nvPicPr>
         <p:blipFill>
-          <a:blip xmlns:r="http://schemas.openxmlformats.org/officeDocument/2006/relationships" xmlns:a="http://schemas.openxmlformats.org/drawingml/2006/main" r:embed="R814df443ed7a43c0"/>
+          <a:blip xmlns:r="http://schemas.openxmlformats.org/officeDocument/2006/relationships" xmlns:a="http://schemas.openxmlformats.org/drawingml/2006/main" r:embed="Rf91210db05ee4f02"/>
           <a:stretch xmlns:a="http://schemas.openxmlformats.org/drawingml/2006/main"/>
         </p:blipFill>
         <p:spPr>
@@ -7695,7 +7695,7 @@
           <p:cNvPr id="3" name="">
             <a:extLst xmlns:a="http://schemas.openxmlformats.org/drawingml/2006/main">
               <a:ext uri="{FF2B5EF4-FFF2-40B4-BE49-F238E27FC236}">
-                <a16:creationId xmlns:a16="http://schemas.microsoft.com/office/drawing/2014/main" id="{C585F69D-B4BE-4265-B618-DB0DD524759C}"/>
+                <a16:creationId xmlns:a16="http://schemas.microsoft.com/office/drawing/2014/main" id="{074FBBF3-0D73-4A4C-9B81-6120EC8E7FAB}"/>
               </a:ext>
             </a:extLst>
           </p:cNvPr>
@@ -7745,7 +7745,7 @@
           <p:cNvPr id="4" name="">
             <a:extLst xmlns:a="http://schemas.openxmlformats.org/drawingml/2006/main">
               <a:ext uri="{FF2B5EF4-FFF2-40B4-BE49-F238E27FC236}">
-                <a16:creationId xmlns:a16="http://schemas.microsoft.com/office/drawing/2014/main" id="{3120442A-E2C6-4DD3-9FD4-D44DE706445C}"/>
+                <a16:creationId xmlns:a16="http://schemas.microsoft.com/office/drawing/2014/main" id="{2564B4FC-2319-448B-9879-007C265B83E5}"/>
               </a:ext>
             </a:extLst>
           </p:cNvPr>
@@ -7778,7 +7778,7 @@
           <p:cNvPr id="5" name="">
             <a:extLst xmlns:a="http://schemas.openxmlformats.org/drawingml/2006/main">
               <a:ext uri="{FF2B5EF4-FFF2-40B4-BE49-F238E27FC236}">
-                <a16:creationId xmlns:a16="http://schemas.microsoft.com/office/drawing/2014/main" id="{62E4C730-83A3-41B3-A84E-C17C60C210DA}"/>
+                <a16:creationId xmlns:a16="http://schemas.microsoft.com/office/drawing/2014/main" id="{6970F37E-46E1-408B-99F0-D8462B224008}"/>
               </a:ext>
             </a:extLst>
           </p:cNvPr>
@@ -7809,7 +7809,7 @@
           <p:cNvPr id="6" name="">
             <a:extLst xmlns:a="http://schemas.openxmlformats.org/drawingml/2006/main">
               <a:ext uri="{FF2B5EF4-FFF2-40B4-BE49-F238E27FC236}">
-                <a16:creationId xmlns:a16="http://schemas.microsoft.com/office/drawing/2014/main" id="{B9BC8E47-4832-4893-A9B5-D88A2FC024AE}"/>
+                <a16:creationId xmlns:a16="http://schemas.microsoft.com/office/drawing/2014/main" id="{6AC3FCF6-550D-4EB8-B586-4E77B85F17E1}"/>
               </a:ext>
             </a:extLst>
           </p:cNvPr>
@@ -7859,7 +7859,7 @@
           <p:cNvPr id="7" name="">
             <a:extLst xmlns:a="http://schemas.openxmlformats.org/drawingml/2006/main">
               <a:ext uri="{FF2B5EF4-FFF2-40B4-BE49-F238E27FC236}">
-                <a16:creationId xmlns:a16="http://schemas.microsoft.com/office/drawing/2014/main" id="{D6FF3005-E3D0-44E1-AF9B-3E76A046F181}"/>
+                <a16:creationId xmlns:a16="http://schemas.microsoft.com/office/drawing/2014/main" id="{3BFAB9F2-5EAC-4117-BA30-8A50FE3269DB}"/>
               </a:ext>
             </a:extLst>
           </p:cNvPr>
@@ -7909,7 +7909,7 @@
           <p:cNvPr id="8" name="">
             <a:extLst xmlns:a="http://schemas.openxmlformats.org/drawingml/2006/main">
               <a:ext uri="{FF2B5EF4-FFF2-40B4-BE49-F238E27FC236}">
-                <a16:creationId xmlns:a16="http://schemas.microsoft.com/office/drawing/2014/main" id="{E0F50E79-0672-4110-B64A-590F78219565}"/>
+                <a16:creationId xmlns:a16="http://schemas.microsoft.com/office/drawing/2014/main" id="{949E4DE0-44A1-4083-A9B6-B34F69162BEA}"/>
               </a:ext>
             </a:extLst>
           </p:cNvPr>
@@ -7944,7 +7944,7 @@
           <p:cNvPr id="9" name="">
             <a:extLst xmlns:a="http://schemas.openxmlformats.org/drawingml/2006/main">
               <a:ext uri="{FF2B5EF4-FFF2-40B4-BE49-F238E27FC236}">
-                <a16:creationId xmlns:a16="http://schemas.microsoft.com/office/drawing/2014/main" id="{6306B3B1-B374-46D5-8DF6-36432F170DDF}"/>
+                <a16:creationId xmlns:a16="http://schemas.microsoft.com/office/drawing/2014/main" id="{0CBF31BA-3AA1-4E5E-A423-69CF556352A8}"/>
               </a:ext>
             </a:extLst>
           </p:cNvPr>
@@ -7994,7 +7994,7 @@
           <p:cNvPr id="10" name="">
             <a:extLst xmlns:a="http://schemas.openxmlformats.org/drawingml/2006/main">
               <a:ext uri="{FF2B5EF4-FFF2-40B4-BE49-F238E27FC236}">
-                <a16:creationId xmlns:a16="http://schemas.microsoft.com/office/drawing/2014/main" id="{FBA64B0F-966D-48A9-BAC6-375B38E829E7}"/>
+                <a16:creationId xmlns:a16="http://schemas.microsoft.com/office/drawing/2014/main" id="{09378161-F34D-4E49-B306-7AA46645C00B}"/>
               </a:ext>
             </a:extLst>
           </p:cNvPr>
@@ -8044,7 +8044,7 @@
           <p:cNvPr id="11" name="">
             <a:extLst xmlns:a="http://schemas.openxmlformats.org/drawingml/2006/main">
               <a:ext uri="{FF2B5EF4-FFF2-40B4-BE49-F238E27FC236}">
-                <a16:creationId xmlns:a16="http://schemas.microsoft.com/office/drawing/2014/main" id="{D5215E32-5BEC-4A1F-A8DB-13DC5E298378}"/>
+                <a16:creationId xmlns:a16="http://schemas.microsoft.com/office/drawing/2014/main" id="{CFF97530-357E-42B4-845E-C3B5287BA8F9}"/>
               </a:ext>
             </a:extLst>
           </p:cNvPr>
@@ -8094,7 +8094,7 @@
           <p:cNvPr id="12" name="">
             <a:extLst xmlns:a="http://schemas.openxmlformats.org/drawingml/2006/main">
               <a:ext uri="{FF2B5EF4-FFF2-40B4-BE49-F238E27FC236}">
-                <a16:creationId xmlns:a16="http://schemas.microsoft.com/office/drawing/2014/main" id="{24A615D5-3282-431C-B76B-30812A1DCDE7}"/>
+                <a16:creationId xmlns:a16="http://schemas.microsoft.com/office/drawing/2014/main" id="{4840DF49-AD89-43C8-9938-DDF243D27E35}"/>
               </a:ext>
             </a:extLst>
           </p:cNvPr>
@@ -8125,7 +8125,7 @@
           <p:cNvPr id="13" name="">
             <a:extLst xmlns:a="http://schemas.openxmlformats.org/drawingml/2006/main">
               <a:ext uri="{FF2B5EF4-FFF2-40B4-BE49-F238E27FC236}">
-                <a16:creationId xmlns:a16="http://schemas.microsoft.com/office/drawing/2014/main" id="{A3565492-A95D-4BA1-ADF0-EBEA45E85674}"/>
+                <a16:creationId xmlns:a16="http://schemas.microsoft.com/office/drawing/2014/main" id="{F012933B-E821-4D7B-81E8-018620347C2B}"/>
               </a:ext>
             </a:extLst>
           </p:cNvPr>
@@ -8175,7 +8175,7 @@
           <p:cNvPr id="14" name="">
             <a:extLst xmlns:a="http://schemas.openxmlformats.org/drawingml/2006/main">
               <a:ext uri="{FF2B5EF4-FFF2-40B4-BE49-F238E27FC236}">
-                <a16:creationId xmlns:a16="http://schemas.microsoft.com/office/drawing/2014/main" id="{AD8A958C-1E2E-443F-A5C7-E650707D2ABA}"/>
+                <a16:creationId xmlns:a16="http://schemas.microsoft.com/office/drawing/2014/main" id="{42AAF263-7518-47A7-B0F9-DEDFD584A38B}"/>
               </a:ext>
             </a:extLst>
           </p:cNvPr>
@@ -8225,7 +8225,7 @@
           <p:cNvPr id="15" name="">
             <a:extLst xmlns:a="http://schemas.openxmlformats.org/drawingml/2006/main">
               <a:ext uri="{FF2B5EF4-FFF2-40B4-BE49-F238E27FC236}">
-                <a16:creationId xmlns:a16="http://schemas.microsoft.com/office/drawing/2014/main" id="{39228D5F-B728-478C-B879-464E7F2818EC}"/>
+                <a16:creationId xmlns:a16="http://schemas.microsoft.com/office/drawing/2014/main" id="{06B8833E-9A52-4B99-B554-C35D21B442DA}"/>
               </a:ext>
             </a:extLst>
           </p:cNvPr>
@@ -8275,7 +8275,7 @@
           <p:cNvPr id="16" name="">
             <a:extLst xmlns:a="http://schemas.openxmlformats.org/drawingml/2006/main">
               <a:ext uri="{FF2B5EF4-FFF2-40B4-BE49-F238E27FC236}">
-                <a16:creationId xmlns:a16="http://schemas.microsoft.com/office/drawing/2014/main" id="{243A1FA2-95B4-415D-9EB3-E5C6EFE8559D}"/>
+                <a16:creationId xmlns:a16="http://schemas.microsoft.com/office/drawing/2014/main" id="{7707536A-012C-4BB5-8BF4-722985FA8F12}"/>
               </a:ext>
             </a:extLst>
           </p:cNvPr>
@@ -8325,7 +8325,7 @@
           <p:cNvPr id="17" name="">
             <a:extLst xmlns:a="http://schemas.openxmlformats.org/drawingml/2006/main">
               <a:ext uri="{FF2B5EF4-FFF2-40B4-BE49-F238E27FC236}">
-                <a16:creationId xmlns:a16="http://schemas.microsoft.com/office/drawing/2014/main" id="{50040F34-9BA9-4195-A844-1543FA5EA1A8}"/>
+                <a16:creationId xmlns:a16="http://schemas.microsoft.com/office/drawing/2014/main" id="{B4FFA2CC-9D59-4A28-A7AF-AF6D40EBC6C5}"/>
               </a:ext>
             </a:extLst>
           </p:cNvPr>
@@ -8360,7 +8360,7 @@
           <p:cNvPr id="18" name="">
             <a:extLst xmlns:a="http://schemas.openxmlformats.org/drawingml/2006/main">
               <a:ext uri="{FF2B5EF4-FFF2-40B4-BE49-F238E27FC236}">
-                <a16:creationId xmlns:a16="http://schemas.microsoft.com/office/drawing/2014/main" id="{4472998A-0729-40E5-95DC-5F54688CB852}"/>
+                <a16:creationId xmlns:a16="http://schemas.microsoft.com/office/drawing/2014/main" id="{27A66984-0401-4DA1-8033-D0A386F2D720}"/>
               </a:ext>
             </a:extLst>
           </p:cNvPr>
@@ -8410,7 +8410,7 @@
           <p:cNvPr id="19" name="">
             <a:extLst xmlns:a="http://schemas.openxmlformats.org/drawingml/2006/main">
               <a:ext uri="{FF2B5EF4-FFF2-40B4-BE49-F238E27FC236}">
-                <a16:creationId xmlns:a16="http://schemas.microsoft.com/office/drawing/2014/main" id="{C9EAB7FF-AC5D-4236-A5C0-0CCD8BD1BC4E}"/>
+                <a16:creationId xmlns:a16="http://schemas.microsoft.com/office/drawing/2014/main" id="{AD1E1489-E24B-47E4-AA26-257AC7591F85}"/>
               </a:ext>
             </a:extLst>
           </p:cNvPr>
@@ -8460,7 +8460,7 @@
           <p:cNvPr id="20" name="">
             <a:extLst xmlns:a="http://schemas.openxmlformats.org/drawingml/2006/main">
               <a:ext uri="{FF2B5EF4-FFF2-40B4-BE49-F238E27FC236}">
-                <a16:creationId xmlns:a16="http://schemas.microsoft.com/office/drawing/2014/main" id="{A0916907-C5DD-471D-8AFC-BE0AEB173FC8}"/>
+                <a16:creationId xmlns:a16="http://schemas.microsoft.com/office/drawing/2014/main" id="{80F0013C-C7B7-4353-AA3B-3724BF426C3E}"/>
               </a:ext>
             </a:extLst>
           </p:cNvPr>
@@ -8510,7 +8510,7 @@
           <p:cNvPr id="21" name="">
             <a:extLst xmlns:a="http://schemas.openxmlformats.org/drawingml/2006/main">
               <a:ext uri="{FF2B5EF4-FFF2-40B4-BE49-F238E27FC236}">
-                <a16:creationId xmlns:a16="http://schemas.microsoft.com/office/drawing/2014/main" id="{BE55749F-AF9E-4604-9C78-A875A3B88B50}"/>
+                <a16:creationId xmlns:a16="http://schemas.microsoft.com/office/drawing/2014/main" id="{06BB671B-5BCC-4FC9-8B39-45D95464A4FC}"/>
               </a:ext>
             </a:extLst>
           </p:cNvPr>
@@ -8541,7 +8541,7 @@
           <p:cNvPr id="22" name="">
             <a:extLst xmlns:a="http://schemas.openxmlformats.org/drawingml/2006/main">
               <a:ext uri="{FF2B5EF4-FFF2-40B4-BE49-F238E27FC236}">
-                <a16:creationId xmlns:a16="http://schemas.microsoft.com/office/drawing/2014/main" id="{EDF30C8E-78A6-4CD7-8DA4-7445D0E7D066}"/>
+                <a16:creationId xmlns:a16="http://schemas.microsoft.com/office/drawing/2014/main" id="{61CABCB2-DB86-47EF-AD14-28DA22D1BD73}"/>
               </a:ext>
             </a:extLst>
           </p:cNvPr>
@@ -8591,7 +8591,7 @@
           <p:cNvPr id="23" name="">
             <a:extLst xmlns:a="http://schemas.openxmlformats.org/drawingml/2006/main">
               <a:ext uri="{FF2B5EF4-FFF2-40B4-BE49-F238E27FC236}">
-                <a16:creationId xmlns:a16="http://schemas.microsoft.com/office/drawing/2014/main" id="{8955096B-B4DF-4D1F-965B-6AA67312EBCF}"/>
+                <a16:creationId xmlns:a16="http://schemas.microsoft.com/office/drawing/2014/main" id="{A8B6288F-90FC-42BD-9988-F33092C8105D}"/>
               </a:ext>
             </a:extLst>
           </p:cNvPr>
@@ -8641,7 +8641,7 @@
           <p:cNvPr id="24" name="">
             <a:extLst xmlns:a="http://schemas.openxmlformats.org/drawingml/2006/main">
               <a:ext uri="{FF2B5EF4-FFF2-40B4-BE49-F238E27FC236}">
-                <a16:creationId xmlns:a16="http://schemas.microsoft.com/office/drawing/2014/main" id="{2AB341EA-452C-4162-BBDE-E29F727FB680}"/>
+                <a16:creationId xmlns:a16="http://schemas.microsoft.com/office/drawing/2014/main" id="{14FA4F1D-E11A-475C-9697-73EC049800B6}"/>
               </a:ext>
             </a:extLst>
           </p:cNvPr>
@@ -8691,7 +8691,7 @@
           <p:cNvPr id="25" name="">
             <a:extLst xmlns:a="http://schemas.openxmlformats.org/drawingml/2006/main">
               <a:ext uri="{FF2B5EF4-FFF2-40B4-BE49-F238E27FC236}">
-                <a16:creationId xmlns:a16="http://schemas.microsoft.com/office/drawing/2014/main" id="{7A1866DF-E07D-4BF4-B028-C407FAC4DE26}"/>
+                <a16:creationId xmlns:a16="http://schemas.microsoft.com/office/drawing/2014/main" id="{47968AC9-93DD-4E25-8623-A239EF2C731E}"/>
               </a:ext>
             </a:extLst>
           </p:cNvPr>
@@ -8741,7 +8741,7 @@
           <p:cNvPr id="26" name="">
             <a:extLst xmlns:a="http://schemas.openxmlformats.org/drawingml/2006/main">
               <a:ext uri="{FF2B5EF4-FFF2-40B4-BE49-F238E27FC236}">
-                <a16:creationId xmlns:a16="http://schemas.microsoft.com/office/drawing/2014/main" id="{A5BC29A1-FCF5-4C1A-93B4-C2CCA7899442}"/>
+                <a16:creationId xmlns:a16="http://schemas.microsoft.com/office/drawing/2014/main" id="{7B13CBAB-36F2-434A-A99B-70F583FBA7DC}"/>
               </a:ext>
             </a:extLst>
           </p:cNvPr>
@@ -8776,7 +8776,7 @@
           <p:cNvPr id="27" name="">
             <a:extLst xmlns:a="http://schemas.openxmlformats.org/drawingml/2006/main">
               <a:ext uri="{FF2B5EF4-FFF2-40B4-BE49-F238E27FC236}">
-                <a16:creationId xmlns:a16="http://schemas.microsoft.com/office/drawing/2014/main" id="{264C2768-A7BF-48B1-ACAC-61BAE2029330}"/>
+                <a16:creationId xmlns:a16="http://schemas.microsoft.com/office/drawing/2014/main" id="{C9D101E8-19E2-48A5-8EF8-73B11735EE7B}"/>
               </a:ext>
             </a:extLst>
           </p:cNvPr>
@@ -8826,7 +8826,7 @@
           <p:cNvPr id="28" name="">
             <a:extLst xmlns:a="http://schemas.openxmlformats.org/drawingml/2006/main">
               <a:ext uri="{FF2B5EF4-FFF2-40B4-BE49-F238E27FC236}">
-                <a16:creationId xmlns:a16="http://schemas.microsoft.com/office/drawing/2014/main" id="{31C196B5-1CE6-45BD-99F3-0C516A480D41}"/>
+                <a16:creationId xmlns:a16="http://schemas.microsoft.com/office/drawing/2014/main" id="{BB46E4CB-6707-4654-9344-939BE81C8880}"/>
               </a:ext>
             </a:extLst>
           </p:cNvPr>
@@ -8876,7 +8876,7 @@
           <p:cNvPr id="29" name="">
             <a:extLst xmlns:a="http://schemas.openxmlformats.org/drawingml/2006/main">
               <a:ext uri="{FF2B5EF4-FFF2-40B4-BE49-F238E27FC236}">
-                <a16:creationId xmlns:a16="http://schemas.microsoft.com/office/drawing/2014/main" id="{AAAEE73A-D7B8-4511-8EDD-8763D91D9BFC}"/>
+                <a16:creationId xmlns:a16="http://schemas.microsoft.com/office/drawing/2014/main" id="{4428D944-5E03-4DA4-AA68-A23A530B6BC8}"/>
               </a:ext>
             </a:extLst>
           </p:cNvPr>
@@ -8926,7 +8926,7 @@
           <p:cNvPr id="30" name="">
             <a:extLst xmlns:a="http://schemas.openxmlformats.org/drawingml/2006/main">
               <a:ext uri="{FF2B5EF4-FFF2-40B4-BE49-F238E27FC236}">
-                <a16:creationId xmlns:a16="http://schemas.microsoft.com/office/drawing/2014/main" id="{7B98D8CF-D013-4E53-A09E-21A8DDC4DED5}"/>
+                <a16:creationId xmlns:a16="http://schemas.microsoft.com/office/drawing/2014/main" id="{8E8AD9F8-A088-46E0-93BB-A82D8E8E7EDA}"/>
               </a:ext>
             </a:extLst>
           </p:cNvPr>
@@ -8957,7 +8957,7 @@
           <p:cNvPr id="31" name="">
             <a:extLst xmlns:a="http://schemas.openxmlformats.org/drawingml/2006/main">
               <a:ext uri="{FF2B5EF4-FFF2-40B4-BE49-F238E27FC236}">
-                <a16:creationId xmlns:a16="http://schemas.microsoft.com/office/drawing/2014/main" id="{1D016B18-9199-4485-98FA-D113DF84D911}"/>
+                <a16:creationId xmlns:a16="http://schemas.microsoft.com/office/drawing/2014/main" id="{7BDFE9C5-55DA-42BC-BE3C-54D5EE0FA81D}"/>
               </a:ext>
             </a:extLst>
           </p:cNvPr>
@@ -9007,7 +9007,7 @@
           <p:cNvPr id="32" name="">
             <a:extLst xmlns:a="http://schemas.openxmlformats.org/drawingml/2006/main">
               <a:ext uri="{FF2B5EF4-FFF2-40B4-BE49-F238E27FC236}">
-                <a16:creationId xmlns:a16="http://schemas.microsoft.com/office/drawing/2014/main" id="{919E01A9-B3CB-43CB-991A-EB8B5E5ECC27}"/>
+                <a16:creationId xmlns:a16="http://schemas.microsoft.com/office/drawing/2014/main" id="{3481E88B-FD2F-4CCC-B281-7BC22BF16313}"/>
               </a:ext>
             </a:extLst>
           </p:cNvPr>
@@ -9057,7 +9057,7 @@
           <p:cNvPr id="33" name="">
             <a:extLst xmlns:a="http://schemas.openxmlformats.org/drawingml/2006/main">
               <a:ext uri="{FF2B5EF4-FFF2-40B4-BE49-F238E27FC236}">
-                <a16:creationId xmlns:a16="http://schemas.microsoft.com/office/drawing/2014/main" id="{35FB5425-945B-4EB2-B0CD-D8CF675DFAC3}"/>
+                <a16:creationId xmlns:a16="http://schemas.microsoft.com/office/drawing/2014/main" id="{41E22C46-30F8-40D8-B9DA-02204B394F4C}"/>
               </a:ext>
             </a:extLst>
           </p:cNvPr>
@@ -9107,7 +9107,7 @@
           <p:cNvPr id="34" name="">
             <a:extLst xmlns:a="http://schemas.openxmlformats.org/drawingml/2006/main">
               <a:ext uri="{FF2B5EF4-FFF2-40B4-BE49-F238E27FC236}">
-                <a16:creationId xmlns:a16="http://schemas.microsoft.com/office/drawing/2014/main" id="{5C0E4878-EA87-4185-ACE5-AEC465E6B507}"/>
+                <a16:creationId xmlns:a16="http://schemas.microsoft.com/office/drawing/2014/main" id="{B1C43CF9-A53B-4B41-819C-190DA1964710}"/>
               </a:ext>
             </a:extLst>
           </p:cNvPr>
@@ -9157,7 +9157,7 @@
           <p:cNvPr id="35" name="">
             <a:extLst xmlns:a="http://schemas.openxmlformats.org/drawingml/2006/main">
               <a:ext uri="{FF2B5EF4-FFF2-40B4-BE49-F238E27FC236}">
-                <a16:creationId xmlns:a16="http://schemas.microsoft.com/office/drawing/2014/main" id="{3458C2A6-208C-4CB8-AB20-C8A0CC59E909}"/>
+                <a16:creationId xmlns:a16="http://schemas.microsoft.com/office/drawing/2014/main" id="{A8805F73-7FB1-439A-9BAB-3D68FCF9A722}"/>
               </a:ext>
             </a:extLst>
           </p:cNvPr>
@@ -9192,7 +9192,7 @@
           <p:cNvPr id="36" name="">
             <a:extLst xmlns:a="http://schemas.openxmlformats.org/drawingml/2006/main">
               <a:ext uri="{FF2B5EF4-FFF2-40B4-BE49-F238E27FC236}">
-                <a16:creationId xmlns:a16="http://schemas.microsoft.com/office/drawing/2014/main" id="{7A30677C-182B-4B0B-A649-16A78E81F3F3}"/>
+                <a16:creationId xmlns:a16="http://schemas.microsoft.com/office/drawing/2014/main" id="{94E865F2-CC26-4A1E-AD14-F16753C8B1CC}"/>
               </a:ext>
             </a:extLst>
           </p:cNvPr>
@@ -9242,7 +9242,7 @@
           <p:cNvPr id="37" name="">
             <a:extLst xmlns:a="http://schemas.openxmlformats.org/drawingml/2006/main">
               <a:ext uri="{FF2B5EF4-FFF2-40B4-BE49-F238E27FC236}">
-                <a16:creationId xmlns:a16="http://schemas.microsoft.com/office/drawing/2014/main" id="{AB4788C6-4E1F-4252-B853-6B3C19CC4A5A}"/>
+                <a16:creationId xmlns:a16="http://schemas.microsoft.com/office/drawing/2014/main" id="{C216B952-7601-406E-8A6C-F35C051B3A21}"/>
               </a:ext>
             </a:extLst>
           </p:cNvPr>
@@ -9292,7 +9292,7 @@
           <p:cNvPr id="38" name="">
             <a:extLst xmlns:a="http://schemas.openxmlformats.org/drawingml/2006/main">
               <a:ext uri="{FF2B5EF4-FFF2-40B4-BE49-F238E27FC236}">
-                <a16:creationId xmlns:a16="http://schemas.microsoft.com/office/drawing/2014/main" id="{A37C7F51-F669-412E-9AAB-2081CAA56D43}"/>
+                <a16:creationId xmlns:a16="http://schemas.microsoft.com/office/drawing/2014/main" id="{E37DEE80-4B3C-4029-9962-772E0A9E66D5}"/>
               </a:ext>
             </a:extLst>
           </p:cNvPr>
@@ -9342,7 +9342,7 @@
           <p:cNvPr id="39" name="">
             <a:extLst xmlns:a="http://schemas.openxmlformats.org/drawingml/2006/main">
               <a:ext uri="{FF2B5EF4-FFF2-40B4-BE49-F238E27FC236}">
-                <a16:creationId xmlns:a16="http://schemas.microsoft.com/office/drawing/2014/main" id="{0D86CDD1-91C0-493B-B9B6-A77D7A9659DD}"/>
+                <a16:creationId xmlns:a16="http://schemas.microsoft.com/office/drawing/2014/main" id="{D63FFCB4-F20A-4E69-A818-892BAE1F5775}"/>
               </a:ext>
             </a:extLst>
           </p:cNvPr>
@@ -9373,7 +9373,7 @@
           <p:cNvPr id="40" name="">
             <a:extLst xmlns:a="http://schemas.openxmlformats.org/drawingml/2006/main">
               <a:ext uri="{FF2B5EF4-FFF2-40B4-BE49-F238E27FC236}">
-                <a16:creationId xmlns:a16="http://schemas.microsoft.com/office/drawing/2014/main" id="{5787E616-559E-4A28-821F-BD351EC61A30}"/>
+                <a16:creationId xmlns:a16="http://schemas.microsoft.com/office/drawing/2014/main" id="{1FD6F8DD-DEE6-4C80-AAC1-30E63C513C3A}"/>
               </a:ext>
             </a:extLst>
           </p:cNvPr>
@@ -9423,7 +9423,7 @@
           <p:cNvPr id="41" name="">
             <a:extLst xmlns:a="http://schemas.openxmlformats.org/drawingml/2006/main">
               <a:ext uri="{FF2B5EF4-FFF2-40B4-BE49-F238E27FC236}">
-                <a16:creationId xmlns:a16="http://schemas.microsoft.com/office/drawing/2014/main" id="{8D54588B-B23A-4AA7-A2D9-3636B79E9ED9}"/>
+                <a16:creationId xmlns:a16="http://schemas.microsoft.com/office/drawing/2014/main" id="{042EB54D-8DF6-4419-A7EF-4765B9C306CA}"/>
               </a:ext>
             </a:extLst>
           </p:cNvPr>
@@ -9473,7 +9473,7 @@
           <p:cNvPr id="42" name="">
             <a:extLst xmlns:a="http://schemas.openxmlformats.org/drawingml/2006/main">
               <a:ext uri="{FF2B5EF4-FFF2-40B4-BE49-F238E27FC236}">
-                <a16:creationId xmlns:a16="http://schemas.microsoft.com/office/drawing/2014/main" id="{A066FA4B-42B4-4FCD-A500-C6363A927F2A}"/>
+                <a16:creationId xmlns:a16="http://schemas.microsoft.com/office/drawing/2014/main" id="{95EC3BA2-2D68-4E63-AA6D-5FC02217E13F}"/>
               </a:ext>
             </a:extLst>
           </p:cNvPr>
@@ -9523,7 +9523,7 @@
           <p:cNvPr id="43" name="">
             <a:extLst xmlns:a="http://schemas.openxmlformats.org/drawingml/2006/main">
               <a:ext uri="{FF2B5EF4-FFF2-40B4-BE49-F238E27FC236}">
-                <a16:creationId xmlns:a16="http://schemas.microsoft.com/office/drawing/2014/main" id="{2C2965D2-1CDA-454D-A3CC-63793348F2F3}"/>
+                <a16:creationId xmlns:a16="http://schemas.microsoft.com/office/drawing/2014/main" id="{AD6FC530-8CD3-4082-B914-FB679858BC4E}"/>
               </a:ext>
             </a:extLst>
           </p:cNvPr>
@@ -9571,7 +9571,7 @@
     </p:spTree>
     <p:extLst>
       <p:ext uri="{BB962C8B-B14F-4D97-AF65-F5344CB8AC3E}">
-        <p14:creationId xmlns:p14="http://schemas.microsoft.com/office/powerpoint/2010/main" val="752008763"/>
+        <p14:creationId xmlns:p14="http://schemas.microsoft.com/office/powerpoint/2010/main" val="1092589643"/>
       </p:ext>
     </p:extLst>
   </p:cSld>
@@ -9602,7 +9602,7 @@
           <p:cNvPr id="1" name="">
             <a:extLst xmlns:a="http://schemas.openxmlformats.org/drawingml/2006/main">
               <a:ext uri="{FF2B5EF4-FFF2-40B4-BE49-F238E27FC236}">
-                <a16:creationId xmlns:a16="http://schemas.microsoft.com/office/drawing/2014/main" id="{30FEB9F8-2709-43FC-B364-4400ED0D2A73}"/>
+                <a16:creationId xmlns:a16="http://schemas.microsoft.com/office/drawing/2014/main" id="{A3173D83-03F8-4E10-8010-8654851F2A14}"/>
               </a:ext>
             </a:extLst>
           </p:cNvPr>
@@ -9637,7 +9637,7 @@
           <p:nvPr/>
         </p:nvPicPr>
         <p:blipFill>
-          <a:blip xmlns:r="http://schemas.openxmlformats.org/officeDocument/2006/relationships" xmlns:a="http://schemas.openxmlformats.org/drawingml/2006/main" r:embed="Rd9db00bc8c70410a"/>
+          <a:blip xmlns:r="http://schemas.openxmlformats.org/officeDocument/2006/relationships" xmlns:a="http://schemas.openxmlformats.org/drawingml/2006/main" r:embed="R9d08e60b60c542c3"/>
           <a:stretch xmlns:a="http://schemas.openxmlformats.org/drawingml/2006/main"/>
         </p:blipFill>
         <p:spPr>
@@ -9655,7 +9655,7 @@
           <p:cNvPr id="3" name="">
             <a:extLst xmlns:a="http://schemas.openxmlformats.org/drawingml/2006/main">
               <a:ext uri="{FF2B5EF4-FFF2-40B4-BE49-F238E27FC236}">
-                <a16:creationId xmlns:a16="http://schemas.microsoft.com/office/drawing/2014/main" id="{EE2E8578-10DB-4197-A5C6-397131079227}"/>
+                <a16:creationId xmlns:a16="http://schemas.microsoft.com/office/drawing/2014/main" id="{AE3F0AA2-7969-49C7-BC9C-1624770B4191}"/>
               </a:ext>
             </a:extLst>
           </p:cNvPr>
@@ -9705,7 +9705,7 @@
           <p:cNvPr id="4" name="">
             <a:extLst xmlns:a="http://schemas.openxmlformats.org/drawingml/2006/main">
               <a:ext uri="{FF2B5EF4-FFF2-40B4-BE49-F238E27FC236}">
-                <a16:creationId xmlns:a16="http://schemas.microsoft.com/office/drawing/2014/main" id="{88924468-D3D5-4B67-872C-3794DBCC3161}"/>
+                <a16:creationId xmlns:a16="http://schemas.microsoft.com/office/drawing/2014/main" id="{9AFE5A83-08E2-4075-80C7-D0DE0651AAEC}"/>
               </a:ext>
             </a:extLst>
           </p:cNvPr>
@@ -9738,7 +9738,7 @@
           <p:cNvPr id="5" name="">
             <a:extLst xmlns:a="http://schemas.openxmlformats.org/drawingml/2006/main">
               <a:ext uri="{FF2B5EF4-FFF2-40B4-BE49-F238E27FC236}">
-                <a16:creationId xmlns:a16="http://schemas.microsoft.com/office/drawing/2014/main" id="{7AA0010F-D621-4D9C-8CFA-7999F50B0A94}"/>
+                <a16:creationId xmlns:a16="http://schemas.microsoft.com/office/drawing/2014/main" id="{B02DF000-5D33-429D-B768-559112CA8180}"/>
               </a:ext>
             </a:extLst>
           </p:cNvPr>
@@ -9769,7 +9769,7 @@
           <p:cNvPr id="6" name="">
             <a:extLst xmlns:a="http://schemas.openxmlformats.org/drawingml/2006/main">
               <a:ext uri="{FF2B5EF4-FFF2-40B4-BE49-F238E27FC236}">
-                <a16:creationId xmlns:a16="http://schemas.microsoft.com/office/drawing/2014/main" id="{AE491212-1979-4376-8D45-1305B8657334}"/>
+                <a16:creationId xmlns:a16="http://schemas.microsoft.com/office/drawing/2014/main" id="{69FC5D91-7743-40C3-8EA2-4D7B32400E94}"/>
               </a:ext>
             </a:extLst>
           </p:cNvPr>
@@ -9819,7 +9819,7 @@
           <p:cNvPr id="7" name="">
             <a:extLst xmlns:a="http://schemas.openxmlformats.org/drawingml/2006/main">
               <a:ext uri="{FF2B5EF4-FFF2-40B4-BE49-F238E27FC236}">
-                <a16:creationId xmlns:a16="http://schemas.microsoft.com/office/drawing/2014/main" id="{2A90FC72-F3E1-4425-893B-B048495D9F5B}"/>
+                <a16:creationId xmlns:a16="http://schemas.microsoft.com/office/drawing/2014/main" id="{C1193BDE-7FA8-4BE1-A366-3990B7E701B0}"/>
               </a:ext>
             </a:extLst>
           </p:cNvPr>
@@ -9869,7 +9869,7 @@
           <p:cNvPr id="8" name="">
             <a:extLst xmlns:a="http://schemas.openxmlformats.org/drawingml/2006/main">
               <a:ext uri="{FF2B5EF4-FFF2-40B4-BE49-F238E27FC236}">
-                <a16:creationId xmlns:a16="http://schemas.microsoft.com/office/drawing/2014/main" id="{6173936C-CEAD-4A27-A7A0-8A7468D51255}"/>
+                <a16:creationId xmlns:a16="http://schemas.microsoft.com/office/drawing/2014/main" id="{305BC97B-C697-409D-BBED-D479642B7654}"/>
               </a:ext>
             </a:extLst>
           </p:cNvPr>
@@ -9904,7 +9904,7 @@
           <p:cNvPr id="9" name="">
             <a:extLst xmlns:a="http://schemas.openxmlformats.org/drawingml/2006/main">
               <a:ext uri="{FF2B5EF4-FFF2-40B4-BE49-F238E27FC236}">
-                <a16:creationId xmlns:a16="http://schemas.microsoft.com/office/drawing/2014/main" id="{EF2BD424-FB38-4EF4-B906-24FB0EDF1AD4}"/>
+                <a16:creationId xmlns:a16="http://schemas.microsoft.com/office/drawing/2014/main" id="{11F9D21D-2C00-4631-B86E-7EB06495EDB9}"/>
               </a:ext>
             </a:extLst>
           </p:cNvPr>
@@ -9954,7 +9954,7 @@
           <p:cNvPr id="10" name="">
             <a:extLst xmlns:a="http://schemas.openxmlformats.org/drawingml/2006/main">
               <a:ext uri="{FF2B5EF4-FFF2-40B4-BE49-F238E27FC236}">
-                <a16:creationId xmlns:a16="http://schemas.microsoft.com/office/drawing/2014/main" id="{2826C3F7-4BBC-49CE-B4D6-7DA5CF829F14}"/>
+                <a16:creationId xmlns:a16="http://schemas.microsoft.com/office/drawing/2014/main" id="{6DA57478-1D77-4B43-BF97-080C2E2346A9}"/>
               </a:ext>
             </a:extLst>
           </p:cNvPr>
@@ -10004,7 +10004,7 @@
           <p:cNvPr id="11" name="">
             <a:extLst xmlns:a="http://schemas.openxmlformats.org/drawingml/2006/main">
               <a:ext uri="{FF2B5EF4-FFF2-40B4-BE49-F238E27FC236}">
-                <a16:creationId xmlns:a16="http://schemas.microsoft.com/office/drawing/2014/main" id="{89BBFD1B-60C8-4111-9072-B63AF3B4AF55}"/>
+                <a16:creationId xmlns:a16="http://schemas.microsoft.com/office/drawing/2014/main" id="{54A89920-5305-43E1-93E4-E262E83E5C73}"/>
               </a:ext>
             </a:extLst>
           </p:cNvPr>
@@ -10054,7 +10054,7 @@
           <p:cNvPr id="12" name="">
             <a:extLst xmlns:a="http://schemas.openxmlformats.org/drawingml/2006/main">
               <a:ext uri="{FF2B5EF4-FFF2-40B4-BE49-F238E27FC236}">
-                <a16:creationId xmlns:a16="http://schemas.microsoft.com/office/drawing/2014/main" id="{C663D79A-47FB-427E-B104-2BA622959390}"/>
+                <a16:creationId xmlns:a16="http://schemas.microsoft.com/office/drawing/2014/main" id="{3D92AD69-ACAC-47F3-81EF-4A791CE7C880}"/>
               </a:ext>
             </a:extLst>
           </p:cNvPr>
@@ -10085,7 +10085,7 @@
           <p:cNvPr id="13" name="">
             <a:extLst xmlns:a="http://schemas.openxmlformats.org/drawingml/2006/main">
               <a:ext uri="{FF2B5EF4-FFF2-40B4-BE49-F238E27FC236}">
-                <a16:creationId xmlns:a16="http://schemas.microsoft.com/office/drawing/2014/main" id="{C44A3FEB-2D7B-4CBD-A684-6F6303959D75}"/>
+                <a16:creationId xmlns:a16="http://schemas.microsoft.com/office/drawing/2014/main" id="{5D23A4EE-8854-4EC0-A4A8-E5D2D751883A}"/>
               </a:ext>
             </a:extLst>
           </p:cNvPr>
@@ -10135,7 +10135,7 @@
           <p:cNvPr id="14" name="">
             <a:extLst xmlns:a="http://schemas.openxmlformats.org/drawingml/2006/main">
               <a:ext uri="{FF2B5EF4-FFF2-40B4-BE49-F238E27FC236}">
-                <a16:creationId xmlns:a16="http://schemas.microsoft.com/office/drawing/2014/main" id="{8EC66929-9F06-4E8A-82DB-382A6EFCCE1F}"/>
+                <a16:creationId xmlns:a16="http://schemas.microsoft.com/office/drawing/2014/main" id="{156C5E8F-A7B1-4D4B-8537-2D8599FD8384}"/>
               </a:ext>
             </a:extLst>
           </p:cNvPr>
@@ -10185,7 +10185,7 @@
           <p:cNvPr id="15" name="">
             <a:extLst xmlns:a="http://schemas.openxmlformats.org/drawingml/2006/main">
               <a:ext uri="{FF2B5EF4-FFF2-40B4-BE49-F238E27FC236}">
-                <a16:creationId xmlns:a16="http://schemas.microsoft.com/office/drawing/2014/main" id="{E916E3C5-7FCA-4024-A584-4E7EA9673806}"/>
+                <a16:creationId xmlns:a16="http://schemas.microsoft.com/office/drawing/2014/main" id="{CE4572B3-859C-4B89-BB8A-FD76D7F58925}"/>
               </a:ext>
             </a:extLst>
           </p:cNvPr>
@@ -10235,7 +10235,7 @@
           <p:cNvPr id="16" name="">
             <a:extLst xmlns:a="http://schemas.openxmlformats.org/drawingml/2006/main">
               <a:ext uri="{FF2B5EF4-FFF2-40B4-BE49-F238E27FC236}">
-                <a16:creationId xmlns:a16="http://schemas.microsoft.com/office/drawing/2014/main" id="{D16D1E99-45F7-4DFB-ABB2-4B4C236FF508}"/>
+                <a16:creationId xmlns:a16="http://schemas.microsoft.com/office/drawing/2014/main" id="{F8C48050-86FB-4CD1-9114-BE616CCBE427}"/>
               </a:ext>
             </a:extLst>
           </p:cNvPr>
@@ -10285,7 +10285,7 @@
           <p:cNvPr id="17" name="">
             <a:extLst xmlns:a="http://schemas.openxmlformats.org/drawingml/2006/main">
               <a:ext uri="{FF2B5EF4-FFF2-40B4-BE49-F238E27FC236}">
-                <a16:creationId xmlns:a16="http://schemas.microsoft.com/office/drawing/2014/main" id="{BE3FFAEA-5F3F-41D8-9DBA-8C586D98C36E}"/>
+                <a16:creationId xmlns:a16="http://schemas.microsoft.com/office/drawing/2014/main" id="{BEE5C7ED-BB59-4FB4-A314-5827695F3F18}"/>
               </a:ext>
             </a:extLst>
           </p:cNvPr>
@@ -10320,7 +10320,7 @@
           <p:cNvPr id="18" name="">
             <a:extLst xmlns:a="http://schemas.openxmlformats.org/drawingml/2006/main">
               <a:ext uri="{FF2B5EF4-FFF2-40B4-BE49-F238E27FC236}">
-                <a16:creationId xmlns:a16="http://schemas.microsoft.com/office/drawing/2014/main" id="{7A360AAD-80EE-44AC-A854-3C0F00C1DC3E}"/>
+                <a16:creationId xmlns:a16="http://schemas.microsoft.com/office/drawing/2014/main" id="{F88F9388-71D0-47ED-87CD-EE50B95524B1}"/>
               </a:ext>
             </a:extLst>
           </p:cNvPr>
@@ -10370,7 +10370,7 @@
           <p:cNvPr id="19" name="">
             <a:extLst xmlns:a="http://schemas.openxmlformats.org/drawingml/2006/main">
               <a:ext uri="{FF2B5EF4-FFF2-40B4-BE49-F238E27FC236}">
-                <a16:creationId xmlns:a16="http://schemas.microsoft.com/office/drawing/2014/main" id="{9759FE2D-41ED-4F1D-8A2D-D799F78FF57B}"/>
+                <a16:creationId xmlns:a16="http://schemas.microsoft.com/office/drawing/2014/main" id="{3302BBAD-26F2-4D06-A3E1-5144C90A882E}"/>
               </a:ext>
             </a:extLst>
           </p:cNvPr>
@@ -10420,7 +10420,7 @@
           <p:cNvPr id="20" name="">
             <a:extLst xmlns:a="http://schemas.openxmlformats.org/drawingml/2006/main">
               <a:ext uri="{FF2B5EF4-FFF2-40B4-BE49-F238E27FC236}">
-                <a16:creationId xmlns:a16="http://schemas.microsoft.com/office/drawing/2014/main" id="{F0C93E02-840B-4C48-ACFD-D97956C88B10}"/>
+                <a16:creationId xmlns:a16="http://schemas.microsoft.com/office/drawing/2014/main" id="{3D0CB97B-CBB3-455E-9172-0961C363B9D4}"/>
               </a:ext>
             </a:extLst>
           </p:cNvPr>
@@ -10470,7 +10470,7 @@
           <p:cNvPr id="21" name="">
             <a:extLst xmlns:a="http://schemas.openxmlformats.org/drawingml/2006/main">
               <a:ext uri="{FF2B5EF4-FFF2-40B4-BE49-F238E27FC236}">
-                <a16:creationId xmlns:a16="http://schemas.microsoft.com/office/drawing/2014/main" id="{B6B553D5-E942-44AA-9785-59C265007423}"/>
+                <a16:creationId xmlns:a16="http://schemas.microsoft.com/office/drawing/2014/main" id="{109470DA-BD4E-4C33-858F-E4CE567F357C}"/>
               </a:ext>
             </a:extLst>
           </p:cNvPr>
@@ -10501,7 +10501,7 @@
           <p:cNvPr id="22" name="">
             <a:extLst xmlns:a="http://schemas.openxmlformats.org/drawingml/2006/main">
               <a:ext uri="{FF2B5EF4-FFF2-40B4-BE49-F238E27FC236}">
-                <a16:creationId xmlns:a16="http://schemas.microsoft.com/office/drawing/2014/main" id="{67692EC2-3A1E-42B7-959C-4804296AA2C8}"/>
+                <a16:creationId xmlns:a16="http://schemas.microsoft.com/office/drawing/2014/main" id="{1D492A12-6E9F-4491-B8C2-02BDF06A142C}"/>
               </a:ext>
             </a:extLst>
           </p:cNvPr>
@@ -10551,7 +10551,7 @@
           <p:cNvPr id="23" name="">
             <a:extLst xmlns:a="http://schemas.openxmlformats.org/drawingml/2006/main">
               <a:ext uri="{FF2B5EF4-FFF2-40B4-BE49-F238E27FC236}">
-                <a16:creationId xmlns:a16="http://schemas.microsoft.com/office/drawing/2014/main" id="{36881B94-BDBA-48D1-8133-409DB88E999D}"/>
+                <a16:creationId xmlns:a16="http://schemas.microsoft.com/office/drawing/2014/main" id="{14429D8D-2AC1-4D07-802F-5645EA866653}"/>
               </a:ext>
             </a:extLst>
           </p:cNvPr>
@@ -10601,7 +10601,7 @@
           <p:cNvPr id="24" name="">
             <a:extLst xmlns:a="http://schemas.openxmlformats.org/drawingml/2006/main">
               <a:ext uri="{FF2B5EF4-FFF2-40B4-BE49-F238E27FC236}">
-                <a16:creationId xmlns:a16="http://schemas.microsoft.com/office/drawing/2014/main" id="{C61F3ECE-9D9B-41A8-9973-E1028A3D1F30}"/>
+                <a16:creationId xmlns:a16="http://schemas.microsoft.com/office/drawing/2014/main" id="{721C3C21-681B-4062-BA0E-8B2FFD83362C}"/>
               </a:ext>
             </a:extLst>
           </p:cNvPr>
@@ -10651,7 +10651,7 @@
           <p:cNvPr id="25" name="">
             <a:extLst xmlns:a="http://schemas.openxmlformats.org/drawingml/2006/main">
               <a:ext uri="{FF2B5EF4-FFF2-40B4-BE49-F238E27FC236}">
-                <a16:creationId xmlns:a16="http://schemas.microsoft.com/office/drawing/2014/main" id="{B72B1122-5FAD-4781-86A5-EEDC775EF248}"/>
+                <a16:creationId xmlns:a16="http://schemas.microsoft.com/office/drawing/2014/main" id="{50089A15-96F3-4CEF-92F3-9CB4E4DB70C9}"/>
               </a:ext>
             </a:extLst>
           </p:cNvPr>
@@ -10701,7 +10701,7 @@
           <p:cNvPr id="26" name="">
             <a:extLst xmlns:a="http://schemas.openxmlformats.org/drawingml/2006/main">
               <a:ext uri="{FF2B5EF4-FFF2-40B4-BE49-F238E27FC236}">
-                <a16:creationId xmlns:a16="http://schemas.microsoft.com/office/drawing/2014/main" id="{1464AAF7-D452-4002-880E-A9443B7C59E0}"/>
+                <a16:creationId xmlns:a16="http://schemas.microsoft.com/office/drawing/2014/main" id="{392ACD9C-1B72-4DDF-99AB-ED92E62DC38E}"/>
               </a:ext>
             </a:extLst>
           </p:cNvPr>
@@ -10736,7 +10736,7 @@
           <p:cNvPr id="27" name="">
             <a:extLst xmlns:a="http://schemas.openxmlformats.org/drawingml/2006/main">
               <a:ext uri="{FF2B5EF4-FFF2-40B4-BE49-F238E27FC236}">
-                <a16:creationId xmlns:a16="http://schemas.microsoft.com/office/drawing/2014/main" id="{8BA30FD7-EEA1-4C54-A7AE-6D6D13DAD3C3}"/>
+                <a16:creationId xmlns:a16="http://schemas.microsoft.com/office/drawing/2014/main" id="{E4BA7DF6-A44E-4D6B-9F03-65B72E9A7BB9}"/>
               </a:ext>
             </a:extLst>
           </p:cNvPr>
@@ -10786,7 +10786,7 @@
           <p:cNvPr id="28" name="">
             <a:extLst xmlns:a="http://schemas.openxmlformats.org/drawingml/2006/main">
               <a:ext uri="{FF2B5EF4-FFF2-40B4-BE49-F238E27FC236}">
-                <a16:creationId xmlns:a16="http://schemas.microsoft.com/office/drawing/2014/main" id="{875A8A9C-8FA1-4C46-BCAB-B3A9A4B94066}"/>
+                <a16:creationId xmlns:a16="http://schemas.microsoft.com/office/drawing/2014/main" id="{FD93AF1E-D694-41AA-92E8-E90B1E284A7B}"/>
               </a:ext>
             </a:extLst>
           </p:cNvPr>
@@ -10836,7 +10836,7 @@
           <p:cNvPr id="29" name="">
             <a:extLst xmlns:a="http://schemas.openxmlformats.org/drawingml/2006/main">
               <a:ext uri="{FF2B5EF4-FFF2-40B4-BE49-F238E27FC236}">
-                <a16:creationId xmlns:a16="http://schemas.microsoft.com/office/drawing/2014/main" id="{A06F7A26-9D8A-466F-A325-E92529E116B8}"/>
+                <a16:creationId xmlns:a16="http://schemas.microsoft.com/office/drawing/2014/main" id="{59400B16-96C6-46E5-989A-BBEACE387088}"/>
               </a:ext>
             </a:extLst>
           </p:cNvPr>
@@ -10886,7 +10886,7 @@
           <p:cNvPr id="30" name="">
             <a:extLst xmlns:a="http://schemas.openxmlformats.org/drawingml/2006/main">
               <a:ext uri="{FF2B5EF4-FFF2-40B4-BE49-F238E27FC236}">
-                <a16:creationId xmlns:a16="http://schemas.microsoft.com/office/drawing/2014/main" id="{313FF71F-8CB5-472F-99DD-B34592BEA756}"/>
+                <a16:creationId xmlns:a16="http://schemas.microsoft.com/office/drawing/2014/main" id="{6102E351-F33A-4857-A1BF-9CC218E6F567}"/>
               </a:ext>
             </a:extLst>
           </p:cNvPr>
@@ -10917,7 +10917,7 @@
           <p:cNvPr id="31" name="">
             <a:extLst xmlns:a="http://schemas.openxmlformats.org/drawingml/2006/main">
               <a:ext uri="{FF2B5EF4-FFF2-40B4-BE49-F238E27FC236}">
-                <a16:creationId xmlns:a16="http://schemas.microsoft.com/office/drawing/2014/main" id="{2FC9F545-3E65-4027-A83B-7471456055B1}"/>
+                <a16:creationId xmlns:a16="http://schemas.microsoft.com/office/drawing/2014/main" id="{8998CF72-8395-4726-B2FE-D9FAAA260554}"/>
               </a:ext>
             </a:extLst>
           </p:cNvPr>
@@ -10967,7 +10967,7 @@
           <p:cNvPr id="32" name="">
             <a:extLst xmlns:a="http://schemas.openxmlformats.org/drawingml/2006/main">
               <a:ext uri="{FF2B5EF4-FFF2-40B4-BE49-F238E27FC236}">
-                <a16:creationId xmlns:a16="http://schemas.microsoft.com/office/drawing/2014/main" id="{194A3644-1F91-43AF-B2F9-B7E843597700}"/>
+                <a16:creationId xmlns:a16="http://schemas.microsoft.com/office/drawing/2014/main" id="{21D5E29E-D798-4044-A1C3-1CA1B844781B}"/>
               </a:ext>
             </a:extLst>
           </p:cNvPr>
@@ -11017,7 +11017,7 @@
           <p:cNvPr id="33" name="">
             <a:extLst xmlns:a="http://schemas.openxmlformats.org/drawingml/2006/main">
               <a:ext uri="{FF2B5EF4-FFF2-40B4-BE49-F238E27FC236}">
-                <a16:creationId xmlns:a16="http://schemas.microsoft.com/office/drawing/2014/main" id="{37675591-00B0-407B-BF19-007D2C3513D1}"/>
+                <a16:creationId xmlns:a16="http://schemas.microsoft.com/office/drawing/2014/main" id="{C75BA0A3-C31F-4C96-8F8C-3F015F807029}"/>
               </a:ext>
             </a:extLst>
           </p:cNvPr>
@@ -11067,7 +11067,7 @@
           <p:cNvPr id="34" name="">
             <a:extLst xmlns:a="http://schemas.openxmlformats.org/drawingml/2006/main">
               <a:ext uri="{FF2B5EF4-FFF2-40B4-BE49-F238E27FC236}">
-                <a16:creationId xmlns:a16="http://schemas.microsoft.com/office/drawing/2014/main" id="{90DBBAFA-CB53-4B79-AC2B-F76F4D4C5518}"/>
+                <a16:creationId xmlns:a16="http://schemas.microsoft.com/office/drawing/2014/main" id="{6CB2515E-6C98-4AF3-9D97-C7C935337E02}"/>
               </a:ext>
             </a:extLst>
           </p:cNvPr>
@@ -11117,7 +11117,7 @@
           <p:cNvPr id="35" name="">
             <a:extLst xmlns:a="http://schemas.openxmlformats.org/drawingml/2006/main">
               <a:ext uri="{FF2B5EF4-FFF2-40B4-BE49-F238E27FC236}">
-                <a16:creationId xmlns:a16="http://schemas.microsoft.com/office/drawing/2014/main" id="{81D6F51F-CA01-4592-BA40-C5E02BF63215}"/>
+                <a16:creationId xmlns:a16="http://schemas.microsoft.com/office/drawing/2014/main" id="{D921A9D7-61B8-43C6-87DA-1A8F32D56E16}"/>
               </a:ext>
             </a:extLst>
           </p:cNvPr>
@@ -11152,7 +11152,7 @@
           <p:cNvPr id="36" name="">
             <a:extLst xmlns:a="http://schemas.openxmlformats.org/drawingml/2006/main">
               <a:ext uri="{FF2B5EF4-FFF2-40B4-BE49-F238E27FC236}">
-                <a16:creationId xmlns:a16="http://schemas.microsoft.com/office/drawing/2014/main" id="{715B7208-D1FB-4AA5-AFD0-2D470DF8A517}"/>
+                <a16:creationId xmlns:a16="http://schemas.microsoft.com/office/drawing/2014/main" id="{2E0D4418-A90B-4C02-8803-C1CA0A5F592E}"/>
               </a:ext>
             </a:extLst>
           </p:cNvPr>
@@ -11202,7 +11202,7 @@
           <p:cNvPr id="37" name="">
             <a:extLst xmlns:a="http://schemas.openxmlformats.org/drawingml/2006/main">
               <a:ext uri="{FF2B5EF4-FFF2-40B4-BE49-F238E27FC236}">
-                <a16:creationId xmlns:a16="http://schemas.microsoft.com/office/drawing/2014/main" id="{5982726E-C471-43B8-980E-CF5E05633915}"/>
+                <a16:creationId xmlns:a16="http://schemas.microsoft.com/office/drawing/2014/main" id="{C93C24F0-FEAD-461F-A721-3548B0343DDB}"/>
               </a:ext>
             </a:extLst>
           </p:cNvPr>
@@ -11252,7 +11252,7 @@
           <p:cNvPr id="38" name="">
             <a:extLst xmlns:a="http://schemas.openxmlformats.org/drawingml/2006/main">
               <a:ext uri="{FF2B5EF4-FFF2-40B4-BE49-F238E27FC236}">
-                <a16:creationId xmlns:a16="http://schemas.microsoft.com/office/drawing/2014/main" id="{B92580AE-3DBD-4C54-BECC-C33D183E214A}"/>
+                <a16:creationId xmlns:a16="http://schemas.microsoft.com/office/drawing/2014/main" id="{ABA831C2-E2F4-413E-985D-59C42B12152F}"/>
               </a:ext>
             </a:extLst>
           </p:cNvPr>
@@ -11302,7 +11302,7 @@
           <p:cNvPr id="39" name="">
             <a:extLst xmlns:a="http://schemas.openxmlformats.org/drawingml/2006/main">
               <a:ext uri="{FF2B5EF4-FFF2-40B4-BE49-F238E27FC236}">
-                <a16:creationId xmlns:a16="http://schemas.microsoft.com/office/drawing/2014/main" id="{94F570DD-AE60-4596-970E-71D151040922}"/>
+                <a16:creationId xmlns:a16="http://schemas.microsoft.com/office/drawing/2014/main" id="{042FD63B-86E6-4749-9C02-48C9AB583D25}"/>
               </a:ext>
             </a:extLst>
           </p:cNvPr>
@@ -11333,7 +11333,7 @@
           <p:cNvPr id="40" name="">
             <a:extLst xmlns:a="http://schemas.openxmlformats.org/drawingml/2006/main">
               <a:ext uri="{FF2B5EF4-FFF2-40B4-BE49-F238E27FC236}">
-                <a16:creationId xmlns:a16="http://schemas.microsoft.com/office/drawing/2014/main" id="{A85440C9-050B-4D01-B16A-794EA598F1C2}"/>
+                <a16:creationId xmlns:a16="http://schemas.microsoft.com/office/drawing/2014/main" id="{1B91843E-89EF-4705-9579-FCC9762C8595}"/>
               </a:ext>
             </a:extLst>
           </p:cNvPr>
@@ -11383,7 +11383,7 @@
           <p:cNvPr id="41" name="">
             <a:extLst xmlns:a="http://schemas.openxmlformats.org/drawingml/2006/main">
               <a:ext uri="{FF2B5EF4-FFF2-40B4-BE49-F238E27FC236}">
-                <a16:creationId xmlns:a16="http://schemas.microsoft.com/office/drawing/2014/main" id="{ACA0CE90-DB3F-4A98-9862-DA9FC21D1CD5}"/>
+                <a16:creationId xmlns:a16="http://schemas.microsoft.com/office/drawing/2014/main" id="{71087939-8213-4151-9F57-862B49AA1F71}"/>
               </a:ext>
             </a:extLst>
           </p:cNvPr>
@@ -11433,7 +11433,7 @@
           <p:cNvPr id="42" name="">
             <a:extLst xmlns:a="http://schemas.openxmlformats.org/drawingml/2006/main">
               <a:ext uri="{FF2B5EF4-FFF2-40B4-BE49-F238E27FC236}">
-                <a16:creationId xmlns:a16="http://schemas.microsoft.com/office/drawing/2014/main" id="{1DBEC9CB-D051-4007-8853-76844DA72200}"/>
+                <a16:creationId xmlns:a16="http://schemas.microsoft.com/office/drawing/2014/main" id="{01754668-1AA1-4F71-B0B1-DD5CBBBB5DD4}"/>
               </a:ext>
             </a:extLst>
           </p:cNvPr>
@@ -11483,7 +11483,7 @@
           <p:cNvPr id="43" name="">
             <a:extLst xmlns:a="http://schemas.openxmlformats.org/drawingml/2006/main">
               <a:ext uri="{FF2B5EF4-FFF2-40B4-BE49-F238E27FC236}">
-                <a16:creationId xmlns:a16="http://schemas.microsoft.com/office/drawing/2014/main" id="{707BB68D-C63F-47C3-8B47-08702E391E4B}"/>
+                <a16:creationId xmlns:a16="http://schemas.microsoft.com/office/drawing/2014/main" id="{674861B6-2C3A-47D4-8B19-70262D5B0C50}"/>
               </a:ext>
             </a:extLst>
           </p:cNvPr>
@@ -11531,7 +11531,7 @@
     </p:spTree>
     <p:extLst>
       <p:ext uri="{BB962C8B-B14F-4D97-AF65-F5344CB8AC3E}">
-        <p14:creationId xmlns:p14="http://schemas.microsoft.com/office/powerpoint/2010/main" val="215212517"/>
+        <p14:creationId xmlns:p14="http://schemas.microsoft.com/office/powerpoint/2010/main" val="1849648486"/>
       </p:ext>
     </p:extLst>
   </p:cSld>
@@ -11562,7 +11562,7 @@
           <p:cNvPr id="1" name="">
             <a:extLst xmlns:a="http://schemas.openxmlformats.org/drawingml/2006/main">
               <a:ext uri="{FF2B5EF4-FFF2-40B4-BE49-F238E27FC236}">
-                <a16:creationId xmlns:a16="http://schemas.microsoft.com/office/drawing/2014/main" id="{1DB271D4-1729-40D5-A80D-8C9FFDC52C39}"/>
+                <a16:creationId xmlns:a16="http://schemas.microsoft.com/office/drawing/2014/main" id="{B30E5952-5003-48BC-B214-87C68C0FF4E6}"/>
               </a:ext>
             </a:extLst>
           </p:cNvPr>
@@ -11597,7 +11597,7 @@
           <p:nvPr/>
         </p:nvPicPr>
         <p:blipFill>
-          <a:blip xmlns:r="http://schemas.openxmlformats.org/officeDocument/2006/relationships" xmlns:a="http://schemas.openxmlformats.org/drawingml/2006/main" r:embed="R0fe7a1d7e63f4ddf"/>
+          <a:blip xmlns:r="http://schemas.openxmlformats.org/officeDocument/2006/relationships" xmlns:a="http://schemas.openxmlformats.org/drawingml/2006/main" r:embed="R174d3b86651e4bd5"/>
           <a:stretch xmlns:a="http://schemas.openxmlformats.org/drawingml/2006/main"/>
         </p:blipFill>
         <p:spPr>
@@ -11615,7 +11615,7 @@
           <p:cNvPr id="3" name="">
             <a:extLst xmlns:a="http://schemas.openxmlformats.org/drawingml/2006/main">
               <a:ext uri="{FF2B5EF4-FFF2-40B4-BE49-F238E27FC236}">
-                <a16:creationId xmlns:a16="http://schemas.microsoft.com/office/drawing/2014/main" id="{0334C720-D970-48F6-A99F-7FBC71C547C0}"/>
+                <a16:creationId xmlns:a16="http://schemas.microsoft.com/office/drawing/2014/main" id="{8A3284F9-382E-4067-9E47-D7D3E2102B79}"/>
               </a:ext>
             </a:extLst>
           </p:cNvPr>
@@ -11665,7 +11665,7 @@
           <p:cNvPr id="4" name="">
             <a:extLst xmlns:a="http://schemas.openxmlformats.org/drawingml/2006/main">
               <a:ext uri="{FF2B5EF4-FFF2-40B4-BE49-F238E27FC236}">
-                <a16:creationId xmlns:a16="http://schemas.microsoft.com/office/drawing/2014/main" id="{0E5C77CB-ADD8-41DF-9A3D-F782FA7965C3}"/>
+                <a16:creationId xmlns:a16="http://schemas.microsoft.com/office/drawing/2014/main" id="{EB784C58-6C14-4F99-89A5-D6595521D19A}"/>
               </a:ext>
             </a:extLst>
           </p:cNvPr>
@@ -11698,7 +11698,7 @@
           <p:cNvPr id="5" name="">
             <a:extLst xmlns:a="http://schemas.openxmlformats.org/drawingml/2006/main">
               <a:ext uri="{FF2B5EF4-FFF2-40B4-BE49-F238E27FC236}">
-                <a16:creationId xmlns:a16="http://schemas.microsoft.com/office/drawing/2014/main" id="{186F75CD-151E-4722-B915-CE7B5F7AA6A4}"/>
+                <a16:creationId xmlns:a16="http://schemas.microsoft.com/office/drawing/2014/main" id="{6453DDD5-8599-43AB-B857-B416F0649B7A}"/>
               </a:ext>
             </a:extLst>
           </p:cNvPr>
@@ -11729,7 +11729,7 @@
           <p:cNvPr id="6" name="">
             <a:extLst xmlns:a="http://schemas.openxmlformats.org/drawingml/2006/main">
               <a:ext uri="{FF2B5EF4-FFF2-40B4-BE49-F238E27FC236}">
-                <a16:creationId xmlns:a16="http://schemas.microsoft.com/office/drawing/2014/main" id="{BA576667-CB9D-4D68-8822-64098E93E354}"/>
+                <a16:creationId xmlns:a16="http://schemas.microsoft.com/office/drawing/2014/main" id="{29002768-E40E-46E9-A306-4683FBBA08BB}"/>
               </a:ext>
             </a:extLst>
           </p:cNvPr>
@@ -11779,7 +11779,7 @@
           <p:cNvPr id="7" name="">
             <a:extLst xmlns:a="http://schemas.openxmlformats.org/drawingml/2006/main">
               <a:ext uri="{FF2B5EF4-FFF2-40B4-BE49-F238E27FC236}">
-                <a16:creationId xmlns:a16="http://schemas.microsoft.com/office/drawing/2014/main" id="{C84E1A19-5517-4999-B908-F60FE07562D0}"/>
+                <a16:creationId xmlns:a16="http://schemas.microsoft.com/office/drawing/2014/main" id="{9D4B1E84-DD5B-4764-BD16-A26085F00E39}"/>
               </a:ext>
             </a:extLst>
           </p:cNvPr>
@@ -11829,7 +11829,7 @@
           <p:cNvPr id="8" name="">
             <a:extLst xmlns:a="http://schemas.openxmlformats.org/drawingml/2006/main">
               <a:ext uri="{FF2B5EF4-FFF2-40B4-BE49-F238E27FC236}">
-                <a16:creationId xmlns:a16="http://schemas.microsoft.com/office/drawing/2014/main" id="{5AC895D3-8E50-4ADB-A39C-6B586305568B}"/>
+                <a16:creationId xmlns:a16="http://schemas.microsoft.com/office/drawing/2014/main" id="{91A4B69C-07E3-439F-BA21-F0386EB6A82D}"/>
               </a:ext>
             </a:extLst>
           </p:cNvPr>
@@ -11864,7 +11864,7 @@
           <p:cNvPr id="9" name="">
             <a:extLst xmlns:a="http://schemas.openxmlformats.org/drawingml/2006/main">
               <a:ext uri="{FF2B5EF4-FFF2-40B4-BE49-F238E27FC236}">
-                <a16:creationId xmlns:a16="http://schemas.microsoft.com/office/drawing/2014/main" id="{47B874ED-318A-4D11-AFA4-57F071F4CEFF}"/>
+                <a16:creationId xmlns:a16="http://schemas.microsoft.com/office/drawing/2014/main" id="{61A35BF6-938E-4181-9E80-760BEE89C21B}"/>
               </a:ext>
             </a:extLst>
           </p:cNvPr>
@@ -11897,7 +11897,7 @@
           <p:cNvPr id="10" name="">
             <a:extLst xmlns:a="http://schemas.openxmlformats.org/drawingml/2006/main">
               <a:ext uri="{FF2B5EF4-FFF2-40B4-BE49-F238E27FC236}">
-                <a16:creationId xmlns:a16="http://schemas.microsoft.com/office/drawing/2014/main" id="{9E782511-C766-4818-A7F0-1A40B7D45455}"/>
+                <a16:creationId xmlns:a16="http://schemas.microsoft.com/office/drawing/2014/main" id="{A2774FE4-9EAF-4BC6-8E52-B4D8E8B26632}"/>
               </a:ext>
             </a:extLst>
           </p:cNvPr>
@@ -11947,7 +11947,7 @@
           <p:cNvPr id="11" name="">
             <a:extLst xmlns:a="http://schemas.openxmlformats.org/drawingml/2006/main">
               <a:ext uri="{FF2B5EF4-FFF2-40B4-BE49-F238E27FC236}">
-                <a16:creationId xmlns:a16="http://schemas.microsoft.com/office/drawing/2014/main" id="{FCAC7E2E-9191-4DCA-B5A7-D4AC669CA641}"/>
+                <a16:creationId xmlns:a16="http://schemas.microsoft.com/office/drawing/2014/main" id="{7E585CCC-984D-4CF4-82C5-237E8FD9F464}"/>
               </a:ext>
             </a:extLst>
           </p:cNvPr>
@@ -11997,7 +11997,7 @@
           <p:cNvPr id="12" name="">
             <a:extLst xmlns:a="http://schemas.openxmlformats.org/drawingml/2006/main">
               <a:ext uri="{FF2B5EF4-FFF2-40B4-BE49-F238E27FC236}">
-                <a16:creationId xmlns:a16="http://schemas.microsoft.com/office/drawing/2014/main" id="{E3EE9506-2961-4750-96DA-0EA2BE245740}"/>
+                <a16:creationId xmlns:a16="http://schemas.microsoft.com/office/drawing/2014/main" id="{08C7CE2A-9D45-4A96-AC7B-0C96EABA5739}"/>
               </a:ext>
             </a:extLst>
           </p:cNvPr>
@@ -12047,7 +12047,7 @@
           <p:cNvPr id="13" name="">
             <a:extLst xmlns:a="http://schemas.openxmlformats.org/drawingml/2006/main">
               <a:ext uri="{FF2B5EF4-FFF2-40B4-BE49-F238E27FC236}">
-                <a16:creationId xmlns:a16="http://schemas.microsoft.com/office/drawing/2014/main" id="{28B67CE9-5722-4725-906E-3BF6B9FE5BC2}"/>
+                <a16:creationId xmlns:a16="http://schemas.microsoft.com/office/drawing/2014/main" id="{AAFC4DAA-2895-44FA-861C-0FAA780CA65A}"/>
               </a:ext>
             </a:extLst>
           </p:cNvPr>
@@ -12078,7 +12078,7 @@
           <p:cNvPr id="14" name="">
             <a:extLst xmlns:a="http://schemas.openxmlformats.org/drawingml/2006/main">
               <a:ext uri="{FF2B5EF4-FFF2-40B4-BE49-F238E27FC236}">
-                <a16:creationId xmlns:a16="http://schemas.microsoft.com/office/drawing/2014/main" id="{0778846C-F28B-4A52-A3CA-0C5DACDEEAD0}"/>
+                <a16:creationId xmlns:a16="http://schemas.microsoft.com/office/drawing/2014/main" id="{9D162B27-AF9E-4257-A7FF-94401DD4A49E}"/>
               </a:ext>
             </a:extLst>
           </p:cNvPr>
@@ -12128,7 +12128,7 @@
           <p:cNvPr id="15" name="">
             <a:extLst xmlns:a="http://schemas.openxmlformats.org/drawingml/2006/main">
               <a:ext uri="{FF2B5EF4-FFF2-40B4-BE49-F238E27FC236}">
-                <a16:creationId xmlns:a16="http://schemas.microsoft.com/office/drawing/2014/main" id="{2DAD3BAC-D1BA-49CA-9705-1111CDB851E4}"/>
+                <a16:creationId xmlns:a16="http://schemas.microsoft.com/office/drawing/2014/main" id="{FAEF1566-4D64-4259-8631-B1EDA1D247B9}"/>
               </a:ext>
             </a:extLst>
           </p:cNvPr>
@@ -12178,7 +12178,7 @@
           <p:cNvPr id="16" name="">
             <a:extLst xmlns:a="http://schemas.openxmlformats.org/drawingml/2006/main">
               <a:ext uri="{FF2B5EF4-FFF2-40B4-BE49-F238E27FC236}">
-                <a16:creationId xmlns:a16="http://schemas.microsoft.com/office/drawing/2014/main" id="{971F412D-5C31-4EDB-BDEF-8A0B31838915}"/>
+                <a16:creationId xmlns:a16="http://schemas.microsoft.com/office/drawing/2014/main" id="{5BA11A85-4D30-4BE2-9359-7873CFC5CDAE}"/>
               </a:ext>
             </a:extLst>
           </p:cNvPr>
@@ -12213,7 +12213,7 @@
           <p:cNvPr id="17" name="">
             <a:extLst xmlns:a="http://schemas.openxmlformats.org/drawingml/2006/main">
               <a:ext uri="{FF2B5EF4-FFF2-40B4-BE49-F238E27FC236}">
-                <a16:creationId xmlns:a16="http://schemas.microsoft.com/office/drawing/2014/main" id="{E21C61CA-7ECE-4613-897F-925DAF01C635}"/>
+                <a16:creationId xmlns:a16="http://schemas.microsoft.com/office/drawing/2014/main" id="{48FDC769-5FDC-4A3B-BF82-87C601CF29EF}"/>
               </a:ext>
             </a:extLst>
           </p:cNvPr>
@@ -12246,7 +12246,7 @@
           <p:cNvPr id="18" name="">
             <a:extLst xmlns:a="http://schemas.openxmlformats.org/drawingml/2006/main">
               <a:ext uri="{FF2B5EF4-FFF2-40B4-BE49-F238E27FC236}">
-                <a16:creationId xmlns:a16="http://schemas.microsoft.com/office/drawing/2014/main" id="{2B690959-D942-4362-B657-68715C484BC6}"/>
+                <a16:creationId xmlns:a16="http://schemas.microsoft.com/office/drawing/2014/main" id="{844240EB-F642-4CD0-A86E-21B3A0810A5E}"/>
               </a:ext>
             </a:extLst>
           </p:cNvPr>
@@ -12296,7 +12296,7 @@
           <p:cNvPr id="19" name="">
             <a:extLst xmlns:a="http://schemas.openxmlformats.org/drawingml/2006/main">
               <a:ext uri="{FF2B5EF4-FFF2-40B4-BE49-F238E27FC236}">
-                <a16:creationId xmlns:a16="http://schemas.microsoft.com/office/drawing/2014/main" id="{7E894545-9BAC-4A3C-866E-700656D51781}"/>
+                <a16:creationId xmlns:a16="http://schemas.microsoft.com/office/drawing/2014/main" id="{A605DBBF-A6FB-4EF1-90B1-12BE859187D8}"/>
               </a:ext>
             </a:extLst>
           </p:cNvPr>
@@ -12346,7 +12346,7 @@
           <p:cNvPr id="20" name="">
             <a:extLst xmlns:a="http://schemas.openxmlformats.org/drawingml/2006/main">
               <a:ext uri="{FF2B5EF4-FFF2-40B4-BE49-F238E27FC236}">
-                <a16:creationId xmlns:a16="http://schemas.microsoft.com/office/drawing/2014/main" id="{95B82EDD-F09B-463B-A430-31247F7924AD}"/>
+                <a16:creationId xmlns:a16="http://schemas.microsoft.com/office/drawing/2014/main" id="{3FBF1492-08BB-4A29-8C9B-CCC987990AEA}"/>
               </a:ext>
             </a:extLst>
           </p:cNvPr>
@@ -12396,7 +12396,7 @@
           <p:cNvPr id="21" name="">
             <a:extLst xmlns:a="http://schemas.openxmlformats.org/drawingml/2006/main">
               <a:ext uri="{FF2B5EF4-FFF2-40B4-BE49-F238E27FC236}">
-                <a16:creationId xmlns:a16="http://schemas.microsoft.com/office/drawing/2014/main" id="{C890132F-3FB1-4D55-9063-77539D7A1713}"/>
+                <a16:creationId xmlns:a16="http://schemas.microsoft.com/office/drawing/2014/main" id="{899E959A-AD55-4D9A-AB0B-F792522864A5}"/>
               </a:ext>
             </a:extLst>
           </p:cNvPr>
@@ -12427,7 +12427,7 @@
           <p:cNvPr id="22" name="">
             <a:extLst xmlns:a="http://schemas.openxmlformats.org/drawingml/2006/main">
               <a:ext uri="{FF2B5EF4-FFF2-40B4-BE49-F238E27FC236}">
-                <a16:creationId xmlns:a16="http://schemas.microsoft.com/office/drawing/2014/main" id="{59B295D9-3DA6-470F-B42B-10162FB8237A}"/>
+                <a16:creationId xmlns:a16="http://schemas.microsoft.com/office/drawing/2014/main" id="{CE659E4C-5619-4B60-8AE9-21EAC8785AC2}"/>
               </a:ext>
             </a:extLst>
           </p:cNvPr>
@@ -12477,7 +12477,7 @@
           <p:cNvPr id="23" name="">
             <a:extLst xmlns:a="http://schemas.openxmlformats.org/drawingml/2006/main">
               <a:ext uri="{FF2B5EF4-FFF2-40B4-BE49-F238E27FC236}">
-                <a16:creationId xmlns:a16="http://schemas.microsoft.com/office/drawing/2014/main" id="{025C6F47-DBA2-4654-860E-0AFC321612D6}"/>
+                <a16:creationId xmlns:a16="http://schemas.microsoft.com/office/drawing/2014/main" id="{93C73CBA-A40C-4A17-9414-7C238535A853}"/>
               </a:ext>
             </a:extLst>
           </p:cNvPr>
@@ -12527,7 +12527,7 @@
           <p:cNvPr id="24" name="">
             <a:extLst xmlns:a="http://schemas.openxmlformats.org/drawingml/2006/main">
               <a:ext uri="{FF2B5EF4-FFF2-40B4-BE49-F238E27FC236}">
-                <a16:creationId xmlns:a16="http://schemas.microsoft.com/office/drawing/2014/main" id="{CA839084-6D23-42D8-A0F8-82A929A2CBCE}"/>
+                <a16:creationId xmlns:a16="http://schemas.microsoft.com/office/drawing/2014/main" id="{DD57E13E-0FAC-4779-B10D-93934DC597FB}"/>
               </a:ext>
             </a:extLst>
           </p:cNvPr>
@@ -12562,7 +12562,7 @@
           <p:cNvPr id="25" name="">
             <a:extLst xmlns:a="http://schemas.openxmlformats.org/drawingml/2006/main">
               <a:ext uri="{FF2B5EF4-FFF2-40B4-BE49-F238E27FC236}">
-                <a16:creationId xmlns:a16="http://schemas.microsoft.com/office/drawing/2014/main" id="{26E39461-BA67-415F-A93E-DE65609C5CB3}"/>
+                <a16:creationId xmlns:a16="http://schemas.microsoft.com/office/drawing/2014/main" id="{3EF939B9-7C84-474C-B0A4-D955E91AF8BD}"/>
               </a:ext>
             </a:extLst>
           </p:cNvPr>
@@ -12595,7 +12595,7 @@
           <p:cNvPr id="26" name="">
             <a:extLst xmlns:a="http://schemas.openxmlformats.org/drawingml/2006/main">
               <a:ext uri="{FF2B5EF4-FFF2-40B4-BE49-F238E27FC236}">
-                <a16:creationId xmlns:a16="http://schemas.microsoft.com/office/drawing/2014/main" id="{F678DBA5-CA8A-439B-BE10-6152A491C110}"/>
+                <a16:creationId xmlns:a16="http://schemas.microsoft.com/office/drawing/2014/main" id="{990B2CE9-0B64-495A-B4EE-78360EAB5E39}"/>
               </a:ext>
             </a:extLst>
           </p:cNvPr>
@@ -12645,7 +12645,7 @@
           <p:cNvPr id="27" name="">
             <a:extLst xmlns:a="http://schemas.openxmlformats.org/drawingml/2006/main">
               <a:ext uri="{FF2B5EF4-FFF2-40B4-BE49-F238E27FC236}">
-                <a16:creationId xmlns:a16="http://schemas.microsoft.com/office/drawing/2014/main" id="{81841292-21E6-4154-B12F-31663869D5CB}"/>
+                <a16:creationId xmlns:a16="http://schemas.microsoft.com/office/drawing/2014/main" id="{0F884ABE-0288-4CCD-9F48-D743C956A22E}"/>
               </a:ext>
             </a:extLst>
           </p:cNvPr>
@@ -12695,7 +12695,7 @@
           <p:cNvPr id="28" name="">
             <a:extLst xmlns:a="http://schemas.openxmlformats.org/drawingml/2006/main">
               <a:ext uri="{FF2B5EF4-FFF2-40B4-BE49-F238E27FC236}">
-                <a16:creationId xmlns:a16="http://schemas.microsoft.com/office/drawing/2014/main" id="{51C69449-DD81-4326-AC87-7FB9524BFA66}"/>
+                <a16:creationId xmlns:a16="http://schemas.microsoft.com/office/drawing/2014/main" id="{CBB68942-413D-4517-8484-081686B0F88A}"/>
               </a:ext>
             </a:extLst>
           </p:cNvPr>
@@ -12745,7 +12745,7 @@
           <p:cNvPr id="29" name="">
             <a:extLst xmlns:a="http://schemas.openxmlformats.org/drawingml/2006/main">
               <a:ext uri="{FF2B5EF4-FFF2-40B4-BE49-F238E27FC236}">
-                <a16:creationId xmlns:a16="http://schemas.microsoft.com/office/drawing/2014/main" id="{BB88A1AE-C161-43FC-9265-7023819E6138}"/>
+                <a16:creationId xmlns:a16="http://schemas.microsoft.com/office/drawing/2014/main" id="{AB1082BD-3C95-4BC4-BCD2-EBDBB64CBD62}"/>
               </a:ext>
             </a:extLst>
           </p:cNvPr>
@@ -12776,7 +12776,7 @@
           <p:cNvPr id="30" name="">
             <a:extLst xmlns:a="http://schemas.openxmlformats.org/drawingml/2006/main">
               <a:ext uri="{FF2B5EF4-FFF2-40B4-BE49-F238E27FC236}">
-                <a16:creationId xmlns:a16="http://schemas.microsoft.com/office/drawing/2014/main" id="{69E6DCEC-9C52-429F-8290-3E086962AF73}"/>
+                <a16:creationId xmlns:a16="http://schemas.microsoft.com/office/drawing/2014/main" id="{46548D08-469C-4E74-BD9B-15E5D2CB4E6B}"/>
               </a:ext>
             </a:extLst>
           </p:cNvPr>
@@ -12826,7 +12826,7 @@
           <p:cNvPr id="31" name="">
             <a:extLst xmlns:a="http://schemas.openxmlformats.org/drawingml/2006/main">
               <a:ext uri="{FF2B5EF4-FFF2-40B4-BE49-F238E27FC236}">
-                <a16:creationId xmlns:a16="http://schemas.microsoft.com/office/drawing/2014/main" id="{A1647EB2-426A-440B-971C-A86384E036D6}"/>
+                <a16:creationId xmlns:a16="http://schemas.microsoft.com/office/drawing/2014/main" id="{D9C237A6-7D78-4551-B173-EC406077ED96}"/>
               </a:ext>
             </a:extLst>
           </p:cNvPr>
@@ -12874,7 +12874,7 @@
     </p:spTree>
     <p:extLst>
       <p:ext uri="{BB962C8B-B14F-4D97-AF65-F5344CB8AC3E}">
-        <p14:creationId xmlns:p14="http://schemas.microsoft.com/office/powerpoint/2010/main" val="42072275"/>
+        <p14:creationId xmlns:p14="http://schemas.microsoft.com/office/powerpoint/2010/main" val="1295805741"/>
       </p:ext>
     </p:extLst>
   </p:cSld>
@@ -12905,7 +12905,7 @@
           <p:cNvPr id="1" name="">
             <a:extLst xmlns:a="http://schemas.openxmlformats.org/drawingml/2006/main">
               <a:ext uri="{FF2B5EF4-FFF2-40B4-BE49-F238E27FC236}">
-                <a16:creationId xmlns:a16="http://schemas.microsoft.com/office/drawing/2014/main" id="{59C872B4-CAB7-4F37-B3C5-2678129F269F}"/>
+                <a16:creationId xmlns:a16="http://schemas.microsoft.com/office/drawing/2014/main" id="{FB311ED7-91E4-44AF-B414-194F76B51FE3}"/>
               </a:ext>
             </a:extLst>
           </p:cNvPr>
@@ -12940,7 +12940,7 @@
           <p:nvPr/>
         </p:nvPicPr>
         <p:blipFill>
-          <a:blip xmlns:r="http://schemas.openxmlformats.org/officeDocument/2006/relationships" xmlns:a="http://schemas.openxmlformats.org/drawingml/2006/main" r:embed="Ra4dfd96a6168471f"/>
+          <a:blip xmlns:r="http://schemas.openxmlformats.org/officeDocument/2006/relationships" xmlns:a="http://schemas.openxmlformats.org/drawingml/2006/main" r:embed="R6b615db394d54316"/>
           <a:stretch xmlns:a="http://schemas.openxmlformats.org/drawingml/2006/main"/>
         </p:blipFill>
         <p:spPr>
@@ -12958,7 +12958,7 @@
           <p:cNvPr id="3" name="">
             <a:extLst xmlns:a="http://schemas.openxmlformats.org/drawingml/2006/main">
               <a:ext uri="{FF2B5EF4-FFF2-40B4-BE49-F238E27FC236}">
-                <a16:creationId xmlns:a16="http://schemas.microsoft.com/office/drawing/2014/main" id="{5472EC24-D477-48E3-A2FA-DAAD905450BB}"/>
+                <a16:creationId xmlns:a16="http://schemas.microsoft.com/office/drawing/2014/main" id="{99D9B229-6FC3-49BD-92B2-72BFFEECD31A}"/>
               </a:ext>
             </a:extLst>
           </p:cNvPr>
@@ -13008,7 +13008,7 @@
           <p:cNvPr id="4" name="">
             <a:extLst xmlns:a="http://schemas.openxmlformats.org/drawingml/2006/main">
               <a:ext uri="{FF2B5EF4-FFF2-40B4-BE49-F238E27FC236}">
-                <a16:creationId xmlns:a16="http://schemas.microsoft.com/office/drawing/2014/main" id="{C8BDA06A-3021-4D33-A09C-4C5B4DB9F660}"/>
+                <a16:creationId xmlns:a16="http://schemas.microsoft.com/office/drawing/2014/main" id="{C21DEE1C-7B7C-49D2-9850-EB8F7AE0F09D}"/>
               </a:ext>
             </a:extLst>
           </p:cNvPr>
@@ -13041,7 +13041,7 @@
           <p:cNvPr id="5" name="">
             <a:extLst xmlns:a="http://schemas.openxmlformats.org/drawingml/2006/main">
               <a:ext uri="{FF2B5EF4-FFF2-40B4-BE49-F238E27FC236}">
-                <a16:creationId xmlns:a16="http://schemas.microsoft.com/office/drawing/2014/main" id="{C7935968-40B9-43C7-B3C4-4808C65E65FC}"/>
+                <a16:creationId xmlns:a16="http://schemas.microsoft.com/office/drawing/2014/main" id="{5CD76CE4-410E-4FE1-BE19-2863FAB40B63}"/>
               </a:ext>
             </a:extLst>
           </p:cNvPr>
@@ -13072,7 +13072,7 @@
           <p:cNvPr id="6" name="">
             <a:extLst xmlns:a="http://schemas.openxmlformats.org/drawingml/2006/main">
               <a:ext uri="{FF2B5EF4-FFF2-40B4-BE49-F238E27FC236}">
-                <a16:creationId xmlns:a16="http://schemas.microsoft.com/office/drawing/2014/main" id="{9DEC99F3-08D7-4811-B87A-320BC8C55C0E}"/>
+                <a16:creationId xmlns:a16="http://schemas.microsoft.com/office/drawing/2014/main" id="{1D5AB591-ED3E-455C-82D3-23CE1AEACD23}"/>
               </a:ext>
             </a:extLst>
           </p:cNvPr>
@@ -13122,7 +13122,7 @@
           <p:cNvPr id="7" name="">
             <a:extLst xmlns:a="http://schemas.openxmlformats.org/drawingml/2006/main">
               <a:ext uri="{FF2B5EF4-FFF2-40B4-BE49-F238E27FC236}">
-                <a16:creationId xmlns:a16="http://schemas.microsoft.com/office/drawing/2014/main" id="{39C66BD2-0AC0-4F58-BC42-F5BC4B1CA734}"/>
+                <a16:creationId xmlns:a16="http://schemas.microsoft.com/office/drawing/2014/main" id="{F9751A3C-E0E6-4FF0-8673-57372B227FD9}"/>
               </a:ext>
             </a:extLst>
           </p:cNvPr>
@@ -13172,7 +13172,7 @@
           <p:cNvPr id="8" name="">
             <a:extLst xmlns:a="http://schemas.openxmlformats.org/drawingml/2006/main">
               <a:ext uri="{FF2B5EF4-FFF2-40B4-BE49-F238E27FC236}">
-                <a16:creationId xmlns:a16="http://schemas.microsoft.com/office/drawing/2014/main" id="{38EA9841-DA5F-4C4C-945C-DB785825BB2C}"/>
+                <a16:creationId xmlns:a16="http://schemas.microsoft.com/office/drawing/2014/main" id="{6A5C9749-A68E-433E-A54C-9CF55FC934DF}"/>
               </a:ext>
             </a:extLst>
           </p:cNvPr>
@@ -13222,7 +13222,7 @@
           <p:cNvPr id="9" name="">
             <a:extLst xmlns:a="http://schemas.openxmlformats.org/drawingml/2006/main">
               <a:ext uri="{FF2B5EF4-FFF2-40B4-BE49-F238E27FC236}">
-                <a16:creationId xmlns:a16="http://schemas.microsoft.com/office/drawing/2014/main" id="{F06E58A0-91D7-404A-9C1A-E48DAB4FBF7D}"/>
+                <a16:creationId xmlns:a16="http://schemas.microsoft.com/office/drawing/2014/main" id="{A67F892B-68C6-494E-9349-A1D248EF0AC8}"/>
               </a:ext>
             </a:extLst>
           </p:cNvPr>
@@ -13272,7 +13272,7 @@
           <p:cNvPr id="10" name="">
             <a:extLst xmlns:a="http://schemas.openxmlformats.org/drawingml/2006/main">
               <a:ext uri="{FF2B5EF4-FFF2-40B4-BE49-F238E27FC236}">
-                <a16:creationId xmlns:a16="http://schemas.microsoft.com/office/drawing/2014/main" id="{A0948433-841D-4C8F-9154-A8813CB5E7A5}"/>
+                <a16:creationId xmlns:a16="http://schemas.microsoft.com/office/drawing/2014/main" id="{ED92ABE1-C6A3-4FC8-8CC8-734C532CC6C4}"/>
               </a:ext>
             </a:extLst>
           </p:cNvPr>
@@ -13303,7 +13303,7 @@
           <p:cNvPr id="11" name="">
             <a:extLst xmlns:a="http://schemas.openxmlformats.org/drawingml/2006/main">
               <a:ext uri="{FF2B5EF4-FFF2-40B4-BE49-F238E27FC236}">
-                <a16:creationId xmlns:a16="http://schemas.microsoft.com/office/drawing/2014/main" id="{C8B38F68-2F86-438E-9DD2-0AE4820E50E2}"/>
+                <a16:creationId xmlns:a16="http://schemas.microsoft.com/office/drawing/2014/main" id="{B06D550B-3466-455A-9362-58A4A6C86F9B}"/>
               </a:ext>
             </a:extLst>
           </p:cNvPr>
@@ -13353,7 +13353,7 @@
           <p:cNvPr id="12" name="">
             <a:extLst xmlns:a="http://schemas.openxmlformats.org/drawingml/2006/main">
               <a:ext uri="{FF2B5EF4-FFF2-40B4-BE49-F238E27FC236}">
-                <a16:creationId xmlns:a16="http://schemas.microsoft.com/office/drawing/2014/main" id="{7D5044ED-A60B-496F-AAC1-63C298D643B8}"/>
+                <a16:creationId xmlns:a16="http://schemas.microsoft.com/office/drawing/2014/main" id="{E21E3E6D-6612-41B3-AD7A-234D6FA864AE}"/>
               </a:ext>
             </a:extLst>
           </p:cNvPr>
@@ -13403,7 +13403,7 @@
           <p:cNvPr id="13" name="">
             <a:extLst xmlns:a="http://schemas.openxmlformats.org/drawingml/2006/main">
               <a:ext uri="{FF2B5EF4-FFF2-40B4-BE49-F238E27FC236}">
-                <a16:creationId xmlns:a16="http://schemas.microsoft.com/office/drawing/2014/main" id="{ACB0DB61-D438-4256-A88F-1459136C8892}"/>
+                <a16:creationId xmlns:a16="http://schemas.microsoft.com/office/drawing/2014/main" id="{71EB3EDA-CEEC-40F8-9CE0-6B4E867F64B5}"/>
               </a:ext>
             </a:extLst>
           </p:cNvPr>
@@ -13434,7 +13434,7 @@
           <p:cNvPr id="14" name="">
             <a:extLst xmlns:a="http://schemas.openxmlformats.org/drawingml/2006/main">
               <a:ext uri="{FF2B5EF4-FFF2-40B4-BE49-F238E27FC236}">
-                <a16:creationId xmlns:a16="http://schemas.microsoft.com/office/drawing/2014/main" id="{5076D387-0C2E-4224-8754-0E92D59BB6B5}"/>
+                <a16:creationId xmlns:a16="http://schemas.microsoft.com/office/drawing/2014/main" id="{96AB4149-2D21-4CDE-AF01-50A264583CDB}"/>
               </a:ext>
             </a:extLst>
           </p:cNvPr>
@@ -13484,7 +13484,7 @@
           <p:cNvPr id="15" name="">
             <a:extLst xmlns:a="http://schemas.openxmlformats.org/drawingml/2006/main">
               <a:ext uri="{FF2B5EF4-FFF2-40B4-BE49-F238E27FC236}">
-                <a16:creationId xmlns:a16="http://schemas.microsoft.com/office/drawing/2014/main" id="{D1B33371-89D7-41AB-A8B0-0AA1EF57EAD0}"/>
+                <a16:creationId xmlns:a16="http://schemas.microsoft.com/office/drawing/2014/main" id="{0233F9E0-876D-4EAD-9385-04A8909BE8C2}"/>
               </a:ext>
             </a:extLst>
           </p:cNvPr>
@@ -13534,7 +13534,7 @@
           <p:cNvPr id="16" name="">
             <a:extLst xmlns:a="http://schemas.openxmlformats.org/drawingml/2006/main">
               <a:ext uri="{FF2B5EF4-FFF2-40B4-BE49-F238E27FC236}">
-                <a16:creationId xmlns:a16="http://schemas.microsoft.com/office/drawing/2014/main" id="{D6ECA677-4CEB-4913-A92C-0DE5A2EAD762}"/>
+                <a16:creationId xmlns:a16="http://schemas.microsoft.com/office/drawing/2014/main" id="{2994D882-C6A2-475B-A8B5-14D8ED587EDD}"/>
               </a:ext>
             </a:extLst>
           </p:cNvPr>
@@ -13565,7 +13565,7 @@
           <p:cNvPr id="17" name="">
             <a:extLst xmlns:a="http://schemas.openxmlformats.org/drawingml/2006/main">
               <a:ext uri="{FF2B5EF4-FFF2-40B4-BE49-F238E27FC236}">
-                <a16:creationId xmlns:a16="http://schemas.microsoft.com/office/drawing/2014/main" id="{7FA9DD7F-1C9A-4AF4-B16E-345852635AB5}"/>
+                <a16:creationId xmlns:a16="http://schemas.microsoft.com/office/drawing/2014/main" id="{54E6219C-6F6C-41AE-8B91-E153CAA75BC5}"/>
               </a:ext>
             </a:extLst>
           </p:cNvPr>
@@ -13615,7 +13615,7 @@
           <p:cNvPr id="18" name="">
             <a:extLst xmlns:a="http://schemas.openxmlformats.org/drawingml/2006/main">
               <a:ext uri="{FF2B5EF4-FFF2-40B4-BE49-F238E27FC236}">
-                <a16:creationId xmlns:a16="http://schemas.microsoft.com/office/drawing/2014/main" id="{27A1B5E5-B49E-4D13-9B85-9DD23349EC9B}"/>
+                <a16:creationId xmlns:a16="http://schemas.microsoft.com/office/drawing/2014/main" id="{5DFF6413-AC80-4D9F-9EFA-589ABB869816}"/>
               </a:ext>
             </a:extLst>
           </p:cNvPr>
@@ -13665,7 +13665,7 @@
           <p:cNvPr id="19" name="">
             <a:extLst xmlns:a="http://schemas.openxmlformats.org/drawingml/2006/main">
               <a:ext uri="{FF2B5EF4-FFF2-40B4-BE49-F238E27FC236}">
-                <a16:creationId xmlns:a16="http://schemas.microsoft.com/office/drawing/2014/main" id="{57E8DBBF-B82B-47D5-807A-D179CD74B7EF}"/>
+                <a16:creationId xmlns:a16="http://schemas.microsoft.com/office/drawing/2014/main" id="{BF33F9F5-36AA-4F59-9926-69B11E806392}"/>
               </a:ext>
             </a:extLst>
           </p:cNvPr>
@@ -13700,7 +13700,7 @@
           <p:cNvPr id="20" name="">
             <a:extLst xmlns:a="http://schemas.openxmlformats.org/drawingml/2006/main">
               <a:ext uri="{FF2B5EF4-FFF2-40B4-BE49-F238E27FC236}">
-                <a16:creationId xmlns:a16="http://schemas.microsoft.com/office/drawing/2014/main" id="{06F68FDD-7B0F-457F-9C8F-67E7788E8F02}"/>
+                <a16:creationId xmlns:a16="http://schemas.microsoft.com/office/drawing/2014/main" id="{8826B28E-9F46-4581-8FAE-1293C3A52AAC}"/>
               </a:ext>
             </a:extLst>
           </p:cNvPr>
@@ -13750,7 +13750,7 @@
           <p:cNvPr id="21" name="">
             <a:extLst xmlns:a="http://schemas.openxmlformats.org/drawingml/2006/main">
               <a:ext uri="{FF2B5EF4-FFF2-40B4-BE49-F238E27FC236}">
-                <a16:creationId xmlns:a16="http://schemas.microsoft.com/office/drawing/2014/main" id="{9FEB5591-C6DA-4510-8227-2DF8D3CB8591}"/>
+                <a16:creationId xmlns:a16="http://schemas.microsoft.com/office/drawing/2014/main" id="{0399DA6A-C3DE-4384-A8F7-07B49F975BD8}"/>
               </a:ext>
             </a:extLst>
           </p:cNvPr>
@@ -13804,7 +13804,7 @@
           <p:nvPr/>
         </p:nvPicPr>
         <p:blipFill>
-          <a:blip xmlns:r="http://schemas.openxmlformats.org/officeDocument/2006/relationships" xmlns:a="http://schemas.openxmlformats.org/drawingml/2006/main" r:embed="R19e367d88efe4dd0"/>
+          <a:blip xmlns:r="http://schemas.openxmlformats.org/officeDocument/2006/relationships" xmlns:a="http://schemas.openxmlformats.org/drawingml/2006/main" r:embed="R3f9c73364f024654"/>
           <a:stretch xmlns:a="http://schemas.openxmlformats.org/drawingml/2006/main"/>
         </p:blipFill>
         <p:spPr>
@@ -13822,7 +13822,7 @@
           <p:cNvPr id="23" name="">
             <a:extLst xmlns:a="http://schemas.openxmlformats.org/drawingml/2006/main">
               <a:ext uri="{FF2B5EF4-FFF2-40B4-BE49-F238E27FC236}">
-                <a16:creationId xmlns:a16="http://schemas.microsoft.com/office/drawing/2014/main" id="{F65A8162-EFF8-4BB7-8BF3-CDE3407AE2E5}"/>
+                <a16:creationId xmlns:a16="http://schemas.microsoft.com/office/drawing/2014/main" id="{D0698D56-F58D-41A1-9F79-0DEECB951B8B}"/>
               </a:ext>
             </a:extLst>
           </p:cNvPr>
@@ -13872,7 +13872,7 @@
           <p:cNvPr id="24" name="">
             <a:extLst xmlns:a="http://schemas.openxmlformats.org/drawingml/2006/main">
               <a:ext uri="{FF2B5EF4-FFF2-40B4-BE49-F238E27FC236}">
-                <a16:creationId xmlns:a16="http://schemas.microsoft.com/office/drawing/2014/main" id="{ED82FCA9-206C-4209-8EF5-208B4AF0A2F3}"/>
+                <a16:creationId xmlns:a16="http://schemas.microsoft.com/office/drawing/2014/main" id="{2F339F28-F9B7-4898-9330-8D1C493F3BCA}"/>
               </a:ext>
             </a:extLst>
           </p:cNvPr>
@@ -13922,7 +13922,7 @@
           <p:cNvPr id="25" name="">
             <a:extLst xmlns:a="http://schemas.openxmlformats.org/drawingml/2006/main">
               <a:ext uri="{FF2B5EF4-FFF2-40B4-BE49-F238E27FC236}">
-                <a16:creationId xmlns:a16="http://schemas.microsoft.com/office/drawing/2014/main" id="{ADC9B736-7948-4D5C-9AE6-2423C978809A}"/>
+                <a16:creationId xmlns:a16="http://schemas.microsoft.com/office/drawing/2014/main" id="{42C9DD09-00D5-4719-9413-E079E8A840CB}"/>
               </a:ext>
             </a:extLst>
           </p:cNvPr>
@@ -13970,7 +13970,7 @@
     </p:spTree>
     <p:extLst>
       <p:ext uri="{BB962C8B-B14F-4D97-AF65-F5344CB8AC3E}">
-        <p14:creationId xmlns:p14="http://schemas.microsoft.com/office/powerpoint/2010/main" val="579672665"/>
+        <p14:creationId xmlns:p14="http://schemas.microsoft.com/office/powerpoint/2010/main" val="1724789130"/>
       </p:ext>
     </p:extLst>
   </p:cSld>

--- a/static/audit_presentation_btg.pptx
+++ b/static/audit_presentation_btg.pptx
@@ -2,21 +2,21 @@
 <file path=ppt/presentation.xml><?xml version="1.0" encoding="utf-8"?>
 <p:presentation xmlns:p="http://schemas.openxmlformats.org/presentationml/2006/main">
   <p:sldMasterIdLst>
-    <p:sldMasterId xmlns:r="http://schemas.openxmlformats.org/officeDocument/2006/relationships" id="2147483648" r:id="Re9e1dcdeb9f24025"/>
+    <p:sldMasterId xmlns:r="http://schemas.openxmlformats.org/officeDocument/2006/relationships" id="2147483648" r:id="Rc9400c7a960b4190"/>
   </p:sldMasterIdLst>
   <p:notesMasterIdLst>
-    <p:notesMasterId xmlns:r="http://schemas.openxmlformats.org/officeDocument/2006/relationships" r:id="R5a8a457a88944c92"/>
+    <p:notesMasterId xmlns:r="http://schemas.openxmlformats.org/officeDocument/2006/relationships" r:id="Ra70e922d7ed84361"/>
   </p:notesMasterIdLst>
   <p:sldIdLst>
-    <p:sldId xmlns:r="http://schemas.openxmlformats.org/officeDocument/2006/relationships" id="256" r:id="R3f0d107eaaed466f"/>
-    <p:sldId xmlns:r="http://schemas.openxmlformats.org/officeDocument/2006/relationships" id="257" r:id="R9710d22508af418b"/>
-    <p:sldId xmlns:r="http://schemas.openxmlformats.org/officeDocument/2006/relationships" id="258" r:id="R03811bc316224031"/>
-    <p:sldId xmlns:r="http://schemas.openxmlformats.org/officeDocument/2006/relationships" id="259" r:id="R88756a043fae4de0"/>
-    <p:sldId xmlns:r="http://schemas.openxmlformats.org/officeDocument/2006/relationships" id="260" r:id="R9b310c7ca2cb40fa"/>
-    <p:sldId xmlns:r="http://schemas.openxmlformats.org/officeDocument/2006/relationships" id="261" r:id="R674a7fd83bc449e7"/>
-    <p:sldId xmlns:r="http://schemas.openxmlformats.org/officeDocument/2006/relationships" id="262" r:id="R93747b400acd4407"/>
-    <p:sldId xmlns:r="http://schemas.openxmlformats.org/officeDocument/2006/relationships" id="263" r:id="R170fcdff6832404d"/>
-    <p:sldId xmlns:r="http://schemas.openxmlformats.org/officeDocument/2006/relationships" id="264" r:id="R9895b96869c74249"/>
+    <p:sldId xmlns:r="http://schemas.openxmlformats.org/officeDocument/2006/relationships" id="256" r:id="Rd898fa7079f44fdb"/>
+    <p:sldId xmlns:r="http://schemas.openxmlformats.org/officeDocument/2006/relationships" id="257" r:id="R8290faea1b5f4cdf"/>
+    <p:sldId xmlns:r="http://schemas.openxmlformats.org/officeDocument/2006/relationships" id="258" r:id="Re1498fff4cb940ad"/>
+    <p:sldId xmlns:r="http://schemas.openxmlformats.org/officeDocument/2006/relationships" id="259" r:id="Rff9c10596361490b"/>
+    <p:sldId xmlns:r="http://schemas.openxmlformats.org/officeDocument/2006/relationships" id="260" r:id="Rae7fb8a0053a49b3"/>
+    <p:sldId xmlns:r="http://schemas.openxmlformats.org/officeDocument/2006/relationships" id="261" r:id="Ra242e5986b2f42d6"/>
+    <p:sldId xmlns:r="http://schemas.openxmlformats.org/officeDocument/2006/relationships" id="262" r:id="Ra1771e1241a546ff"/>
+    <p:sldId xmlns:r="http://schemas.openxmlformats.org/officeDocument/2006/relationships" id="263" r:id="R7622386e685f4881"/>
+    <p:sldId xmlns:r="http://schemas.openxmlformats.org/officeDocument/2006/relationships" id="264" r:id="R7610a889db7f4623"/>
   </p:sldIdLst>
   <p:sldSz cx="12192000" cy="6858000"/>
   <p:notesSz cx="6858000" cy="9144000"/>
@@ -1137,7 +1137,7 @@
   </p:cSld>
   <p:clrMap bg1="lt1" tx1="dk1" bg2="lt2" tx2="dk2" accent1="accent1" accent2="accent2" accent3="accent3" accent4="accent4" accent5="accent5" accent6="accent6" hlink="hlink" folHlink="folHlink"/>
   <p:sldLayoutIdLst>
-    <p:sldLayoutId xmlns:r="http://schemas.openxmlformats.org/officeDocument/2006/relationships" id="2147483649" r:id="R51efdc50e13f4ca6"/>
+    <p:sldLayoutId xmlns:r="http://schemas.openxmlformats.org/officeDocument/2006/relationships" id="2147483649" r:id="R73e68cdb59b744e9"/>
   </p:sldLayoutIdLst>
   <p:txStyles>
     <p:titleStyle>
@@ -1688,7 +1688,7 @@
           <p:cNvPr id="1" name="">
             <a:extLst xmlns:a="http://schemas.openxmlformats.org/drawingml/2006/main">
               <a:ext uri="{FF2B5EF4-FFF2-40B4-BE49-F238E27FC236}">
-                <a16:creationId xmlns:a16="http://schemas.microsoft.com/office/drawing/2014/main" id="{51E0ACD9-7817-4E59-ABE5-AE1AB81B1A83}"/>
+                <a16:creationId xmlns:a16="http://schemas.microsoft.com/office/drawing/2014/main" id="{3E06586B-5118-42E2-8AF9-A318E6865301}"/>
               </a:ext>
             </a:extLst>
           </p:cNvPr>
@@ -1719,7 +1719,7 @@
           <p:cNvPr id="2" name="">
             <a:extLst xmlns:a="http://schemas.openxmlformats.org/drawingml/2006/main">
               <a:ext uri="{FF2B5EF4-FFF2-40B4-BE49-F238E27FC236}">
-                <a16:creationId xmlns:a16="http://schemas.microsoft.com/office/drawing/2014/main" id="{6D3A391B-D541-4B97-9F08-637A0774B1A6}"/>
+                <a16:creationId xmlns:a16="http://schemas.microsoft.com/office/drawing/2014/main" id="{1C337145-7CD5-43D9-9D82-6AA51E68FDFB}"/>
               </a:ext>
             </a:extLst>
           </p:cNvPr>
@@ -1754,7 +1754,7 @@
           <p:nvPr/>
         </p:nvPicPr>
         <p:blipFill>
-          <a:blip xmlns:r="http://schemas.openxmlformats.org/officeDocument/2006/relationships" xmlns:a="http://schemas.openxmlformats.org/drawingml/2006/main" r:embed="Rc08d76d5f2d645ec"/>
+          <a:blip xmlns:r="http://schemas.openxmlformats.org/officeDocument/2006/relationships" xmlns:a="http://schemas.openxmlformats.org/drawingml/2006/main" r:embed="R18e03ce4cd2e4f7f"/>
           <a:stretch xmlns:a="http://schemas.openxmlformats.org/drawingml/2006/main"/>
         </p:blipFill>
         <p:spPr>
@@ -1772,7 +1772,7 @@
           <p:cNvPr id="4" name="">
             <a:extLst xmlns:a="http://schemas.openxmlformats.org/drawingml/2006/main">
               <a:ext uri="{FF2B5EF4-FFF2-40B4-BE49-F238E27FC236}">
-                <a16:creationId xmlns:a16="http://schemas.microsoft.com/office/drawing/2014/main" id="{DC928623-384A-4A9F-BC5E-66F6373DEA74}"/>
+                <a16:creationId xmlns:a16="http://schemas.microsoft.com/office/drawing/2014/main" id="{F76E4626-F8C1-4EDB-87DD-F6297664258C}"/>
               </a:ext>
             </a:extLst>
           </p:cNvPr>
@@ -1822,7 +1822,7 @@
           <p:cNvPr id="5" name="">
             <a:extLst xmlns:a="http://schemas.openxmlformats.org/drawingml/2006/main">
               <a:ext uri="{FF2B5EF4-FFF2-40B4-BE49-F238E27FC236}">
-                <a16:creationId xmlns:a16="http://schemas.microsoft.com/office/drawing/2014/main" id="{02424EBF-55F5-46FC-84CB-0D48A6C3282F}"/>
+                <a16:creationId xmlns:a16="http://schemas.microsoft.com/office/drawing/2014/main" id="{53010BB7-96AA-488E-BD4B-007323B2CCE8}"/>
               </a:ext>
             </a:extLst>
           </p:cNvPr>
@@ -1872,7 +1872,7 @@
           <p:cNvPr id="6" name="">
             <a:extLst xmlns:a="http://schemas.openxmlformats.org/drawingml/2006/main">
               <a:ext uri="{FF2B5EF4-FFF2-40B4-BE49-F238E27FC236}">
-                <a16:creationId xmlns:a16="http://schemas.microsoft.com/office/drawing/2014/main" id="{A33F675F-40FD-4362-B94E-9AC6E95A5B70}"/>
+                <a16:creationId xmlns:a16="http://schemas.microsoft.com/office/drawing/2014/main" id="{D480869B-DBAA-4B82-ACEB-146049337F62}"/>
               </a:ext>
             </a:extLst>
           </p:cNvPr>
@@ -1922,7 +1922,7 @@
           <p:cNvPr id="7" name="">
             <a:extLst xmlns:a="http://schemas.openxmlformats.org/drawingml/2006/main">
               <a:ext uri="{FF2B5EF4-FFF2-40B4-BE49-F238E27FC236}">
-                <a16:creationId xmlns:a16="http://schemas.microsoft.com/office/drawing/2014/main" id="{93AACEA4-1855-48BA-B3CB-54A0227FF090}"/>
+                <a16:creationId xmlns:a16="http://schemas.microsoft.com/office/drawing/2014/main" id="{818CE886-CCEA-46B0-80FD-F1D59B50A513}"/>
               </a:ext>
             </a:extLst>
           </p:cNvPr>
@@ -1955,7 +1955,7 @@
           <p:cNvPr id="8" name="">
             <a:extLst xmlns:a="http://schemas.openxmlformats.org/drawingml/2006/main">
               <a:ext uri="{FF2B5EF4-FFF2-40B4-BE49-F238E27FC236}">
-                <a16:creationId xmlns:a16="http://schemas.microsoft.com/office/drawing/2014/main" id="{3F03A26B-09BC-4C07-B15D-2881A5A9849B}"/>
+                <a16:creationId xmlns:a16="http://schemas.microsoft.com/office/drawing/2014/main" id="{459DA684-DD6B-4F70-97D3-5622F3FD0E26}"/>
               </a:ext>
             </a:extLst>
           </p:cNvPr>
@@ -2005,7 +2005,7 @@
           <p:cNvPr id="9" name="">
             <a:extLst xmlns:a="http://schemas.openxmlformats.org/drawingml/2006/main">
               <a:ext uri="{FF2B5EF4-FFF2-40B4-BE49-F238E27FC236}">
-                <a16:creationId xmlns:a16="http://schemas.microsoft.com/office/drawing/2014/main" id="{AF963A66-374A-4AA3-BC7F-B79481D6680A}"/>
+                <a16:creationId xmlns:a16="http://schemas.microsoft.com/office/drawing/2014/main" id="{ECDE484E-0520-4ACD-9464-FD72DDB8EA31}"/>
               </a:ext>
             </a:extLst>
           </p:cNvPr>
@@ -2055,7 +2055,7 @@
           <p:cNvPr id="10" name="">
             <a:extLst xmlns:a="http://schemas.openxmlformats.org/drawingml/2006/main">
               <a:ext uri="{FF2B5EF4-FFF2-40B4-BE49-F238E27FC236}">
-                <a16:creationId xmlns:a16="http://schemas.microsoft.com/office/drawing/2014/main" id="{A501DF4C-3560-487B-9C35-F107C458334B}"/>
+                <a16:creationId xmlns:a16="http://schemas.microsoft.com/office/drawing/2014/main" id="{1FC386D5-53D5-4AD2-B169-BFB6AC53ECCA}"/>
               </a:ext>
             </a:extLst>
           </p:cNvPr>
@@ -2088,7 +2088,7 @@
           <p:cNvPr id="11" name="">
             <a:extLst xmlns:a="http://schemas.openxmlformats.org/drawingml/2006/main">
               <a:ext uri="{FF2B5EF4-FFF2-40B4-BE49-F238E27FC236}">
-                <a16:creationId xmlns:a16="http://schemas.microsoft.com/office/drawing/2014/main" id="{C0787550-E20A-4CCE-8E16-0C89AAFEB1FE}"/>
+                <a16:creationId xmlns:a16="http://schemas.microsoft.com/office/drawing/2014/main" id="{AC96E099-C63E-4E8C-9096-2E03686932B1}"/>
               </a:ext>
             </a:extLst>
           </p:cNvPr>
@@ -2138,7 +2138,7 @@
           <p:cNvPr id="12" name="">
             <a:extLst xmlns:a="http://schemas.openxmlformats.org/drawingml/2006/main">
               <a:ext uri="{FF2B5EF4-FFF2-40B4-BE49-F238E27FC236}">
-                <a16:creationId xmlns:a16="http://schemas.microsoft.com/office/drawing/2014/main" id="{DA50AB52-FF91-4706-A8A8-7E7CD9C98AD2}"/>
+                <a16:creationId xmlns:a16="http://schemas.microsoft.com/office/drawing/2014/main" id="{832FF761-581F-400F-A600-01F597FC3F2A}"/>
               </a:ext>
             </a:extLst>
           </p:cNvPr>
@@ -2188,7 +2188,7 @@
           <p:cNvPr id="13" name="">
             <a:extLst xmlns:a="http://schemas.openxmlformats.org/drawingml/2006/main">
               <a:ext uri="{FF2B5EF4-FFF2-40B4-BE49-F238E27FC236}">
-                <a16:creationId xmlns:a16="http://schemas.microsoft.com/office/drawing/2014/main" id="{FB7F45E6-12F2-4B22-8C75-CC6387DAC6EC}"/>
+                <a16:creationId xmlns:a16="http://schemas.microsoft.com/office/drawing/2014/main" id="{87E55568-E151-493F-BDA0-DDFEEAAB94B4}"/>
               </a:ext>
             </a:extLst>
           </p:cNvPr>
@@ -2242,7 +2242,7 @@
           <p:nvPr/>
         </p:nvPicPr>
         <p:blipFill>
-          <a:blip xmlns:r="http://schemas.openxmlformats.org/officeDocument/2006/relationships" xmlns:a="http://schemas.openxmlformats.org/drawingml/2006/main" r:embed="Rc7ce305609ba4486"/>
+          <a:blip xmlns:r="http://schemas.openxmlformats.org/officeDocument/2006/relationships" xmlns:a="http://schemas.openxmlformats.org/drawingml/2006/main" r:embed="R581d80b518b64cbf"/>
           <a:srcRect xmlns:a="http://schemas.openxmlformats.org/drawingml/2006/main" l="0" t="132" r="0" b="132"/>
           <a:stretch xmlns:a="http://schemas.openxmlformats.org/drawingml/2006/main">
             <a:fillRect l="0" t="0" r="0" b="0"/>
@@ -2263,7 +2263,7 @@
           <p:cNvPr id="15" name="">
             <a:extLst xmlns:a="http://schemas.openxmlformats.org/drawingml/2006/main">
               <a:ext uri="{FF2B5EF4-FFF2-40B4-BE49-F238E27FC236}">
-                <a16:creationId xmlns:a16="http://schemas.microsoft.com/office/drawing/2014/main" id="{F71DAB60-BF66-4C65-BCC2-FF3B0B824A54}"/>
+                <a16:creationId xmlns:a16="http://schemas.microsoft.com/office/drawing/2014/main" id="{2CE22B84-9A92-4EA9-B3C7-B15F337B97C6}"/>
               </a:ext>
             </a:extLst>
           </p:cNvPr>
@@ -2294,7 +2294,7 @@
           <p:cNvPr id="16" name="">
             <a:extLst xmlns:a="http://schemas.openxmlformats.org/drawingml/2006/main">
               <a:ext uri="{FF2B5EF4-FFF2-40B4-BE49-F238E27FC236}">
-                <a16:creationId xmlns:a16="http://schemas.microsoft.com/office/drawing/2014/main" id="{BD1EB1B3-C0C2-4D45-92D5-A0A595350B3A}"/>
+                <a16:creationId xmlns:a16="http://schemas.microsoft.com/office/drawing/2014/main" id="{1992E69C-5238-49CD-A5D3-6E6FC8B91293}"/>
               </a:ext>
             </a:extLst>
           </p:cNvPr>
@@ -2342,7 +2342,7 @@
     </p:spTree>
     <p:extLst>
       <p:ext uri="{BB962C8B-B14F-4D97-AF65-F5344CB8AC3E}">
-        <p14:creationId xmlns:p14="http://schemas.microsoft.com/office/powerpoint/2010/main" val="884083528"/>
+        <p14:creationId xmlns:p14="http://schemas.microsoft.com/office/powerpoint/2010/main" val="760663254"/>
       </p:ext>
     </p:extLst>
   </p:cSld>
@@ -2373,7 +2373,7 @@
           <p:cNvPr id="1" name="">
             <a:extLst xmlns:a="http://schemas.openxmlformats.org/drawingml/2006/main">
               <a:ext uri="{FF2B5EF4-FFF2-40B4-BE49-F238E27FC236}">
-                <a16:creationId xmlns:a16="http://schemas.microsoft.com/office/drawing/2014/main" id="{A81B997D-973D-4B61-8455-12B9D8B2476A}"/>
+                <a16:creationId xmlns:a16="http://schemas.microsoft.com/office/drawing/2014/main" id="{7132A5D8-1639-4A9F-B8D1-C379A536D62F}"/>
               </a:ext>
             </a:extLst>
           </p:cNvPr>
@@ -2408,7 +2408,7 @@
           <p:nvPr/>
         </p:nvPicPr>
         <p:blipFill>
-          <a:blip xmlns:r="http://schemas.openxmlformats.org/officeDocument/2006/relationships" xmlns:a="http://schemas.openxmlformats.org/drawingml/2006/main" r:embed="R75a16de7a8354149"/>
+          <a:blip xmlns:r="http://schemas.openxmlformats.org/officeDocument/2006/relationships" xmlns:a="http://schemas.openxmlformats.org/drawingml/2006/main" r:embed="Ra762a970bdb94f5d"/>
           <a:stretch xmlns:a="http://schemas.openxmlformats.org/drawingml/2006/main"/>
         </p:blipFill>
         <p:spPr>
@@ -2426,7 +2426,7 @@
           <p:cNvPr id="3" name="">
             <a:extLst xmlns:a="http://schemas.openxmlformats.org/drawingml/2006/main">
               <a:ext uri="{FF2B5EF4-FFF2-40B4-BE49-F238E27FC236}">
-                <a16:creationId xmlns:a16="http://schemas.microsoft.com/office/drawing/2014/main" id="{AD8C1BC1-EBD5-4164-A62F-E39C8A2A4DD3}"/>
+                <a16:creationId xmlns:a16="http://schemas.microsoft.com/office/drawing/2014/main" id="{E878BBC5-9632-4896-BE51-7A244E110081}"/>
               </a:ext>
             </a:extLst>
           </p:cNvPr>
@@ -2476,7 +2476,7 @@
           <p:cNvPr id="4" name="">
             <a:extLst xmlns:a="http://schemas.openxmlformats.org/drawingml/2006/main">
               <a:ext uri="{FF2B5EF4-FFF2-40B4-BE49-F238E27FC236}">
-                <a16:creationId xmlns:a16="http://schemas.microsoft.com/office/drawing/2014/main" id="{8E5D95EC-41B6-48EC-A11E-BBFB8A806783}"/>
+                <a16:creationId xmlns:a16="http://schemas.microsoft.com/office/drawing/2014/main" id="{FC43CBD7-35CE-4211-85A3-37D4A09D7BA1}"/>
               </a:ext>
             </a:extLst>
           </p:cNvPr>
@@ -2509,7 +2509,7 @@
           <p:cNvPr id="5" name="">
             <a:extLst xmlns:a="http://schemas.openxmlformats.org/drawingml/2006/main">
               <a:ext uri="{FF2B5EF4-FFF2-40B4-BE49-F238E27FC236}">
-                <a16:creationId xmlns:a16="http://schemas.microsoft.com/office/drawing/2014/main" id="{68B5624A-D172-4DDF-B74C-6EEDF1BDADFF}"/>
+                <a16:creationId xmlns:a16="http://schemas.microsoft.com/office/drawing/2014/main" id="{1971E512-A5B2-475C-8EBB-406FDA158360}"/>
               </a:ext>
             </a:extLst>
           </p:cNvPr>
@@ -2540,7 +2540,7 @@
           <p:cNvPr id="6" name="">
             <a:extLst xmlns:a="http://schemas.openxmlformats.org/drawingml/2006/main">
               <a:ext uri="{FF2B5EF4-FFF2-40B4-BE49-F238E27FC236}">
-                <a16:creationId xmlns:a16="http://schemas.microsoft.com/office/drawing/2014/main" id="{DB19A93C-6403-4FD8-8B12-AA8F6C466906}"/>
+                <a16:creationId xmlns:a16="http://schemas.microsoft.com/office/drawing/2014/main" id="{7B61AF03-6948-456F-9454-7D3BF67E2054}"/>
               </a:ext>
             </a:extLst>
           </p:cNvPr>
@@ -2590,7 +2590,7 @@
           <p:cNvPr id="7" name="">
             <a:extLst xmlns:a="http://schemas.openxmlformats.org/drawingml/2006/main">
               <a:ext uri="{FF2B5EF4-FFF2-40B4-BE49-F238E27FC236}">
-                <a16:creationId xmlns:a16="http://schemas.microsoft.com/office/drawing/2014/main" id="{564B4EE7-B455-4458-A5A9-9D55BD672865}"/>
+                <a16:creationId xmlns:a16="http://schemas.microsoft.com/office/drawing/2014/main" id="{94176BD9-D22F-41FA-ADE5-B2EBF01D5551}"/>
               </a:ext>
             </a:extLst>
           </p:cNvPr>
@@ -2640,7 +2640,7 @@
           <p:cNvPr id="8" name="">
             <a:extLst xmlns:a="http://schemas.openxmlformats.org/drawingml/2006/main">
               <a:ext uri="{FF2B5EF4-FFF2-40B4-BE49-F238E27FC236}">
-                <a16:creationId xmlns:a16="http://schemas.microsoft.com/office/drawing/2014/main" id="{A3EFFD8A-951D-40C6-93D2-50574703E1F3}"/>
+                <a16:creationId xmlns:a16="http://schemas.microsoft.com/office/drawing/2014/main" id="{1975A663-38A7-48F0-8DD8-CF23B21C7AFE}"/>
               </a:ext>
             </a:extLst>
           </p:cNvPr>
@@ -2690,7 +2690,7 @@
           <p:cNvPr id="9" name="">
             <a:extLst xmlns:a="http://schemas.openxmlformats.org/drawingml/2006/main">
               <a:ext uri="{FF2B5EF4-FFF2-40B4-BE49-F238E27FC236}">
-                <a16:creationId xmlns:a16="http://schemas.microsoft.com/office/drawing/2014/main" id="{DE60698D-C470-455D-A720-FAECF0AA6CFB}"/>
+                <a16:creationId xmlns:a16="http://schemas.microsoft.com/office/drawing/2014/main" id="{9FA83597-4DB8-4ECB-B15A-74BFBE88BD83}"/>
               </a:ext>
             </a:extLst>
           </p:cNvPr>
@@ -2740,7 +2740,7 @@
           <p:cNvPr id="10" name="">
             <a:extLst xmlns:a="http://schemas.openxmlformats.org/drawingml/2006/main">
               <a:ext uri="{FF2B5EF4-FFF2-40B4-BE49-F238E27FC236}">
-                <a16:creationId xmlns:a16="http://schemas.microsoft.com/office/drawing/2014/main" id="{99BE864B-ECF1-4D9E-A195-57DA32B8ED76}"/>
+                <a16:creationId xmlns:a16="http://schemas.microsoft.com/office/drawing/2014/main" id="{E4B9C82F-B13D-4202-A66D-0B13F5776D70}"/>
               </a:ext>
             </a:extLst>
           </p:cNvPr>
@@ -2790,7 +2790,7 @@
           <p:cNvPr id="11" name="">
             <a:extLst xmlns:a="http://schemas.openxmlformats.org/drawingml/2006/main">
               <a:ext uri="{FF2B5EF4-FFF2-40B4-BE49-F238E27FC236}">
-                <a16:creationId xmlns:a16="http://schemas.microsoft.com/office/drawing/2014/main" id="{498DCE81-5CA1-4DAC-BA6D-8F08CDDB8E50}"/>
+                <a16:creationId xmlns:a16="http://schemas.microsoft.com/office/drawing/2014/main" id="{E9DD4773-B924-451D-A8C7-33649DD2E911}"/>
               </a:ext>
             </a:extLst>
           </p:cNvPr>
@@ -2840,7 +2840,7 @@
           <p:cNvPr id="12" name="">
             <a:extLst xmlns:a="http://schemas.openxmlformats.org/drawingml/2006/main">
               <a:ext uri="{FF2B5EF4-FFF2-40B4-BE49-F238E27FC236}">
-                <a16:creationId xmlns:a16="http://schemas.microsoft.com/office/drawing/2014/main" id="{C16731F3-0E88-4AB1-A1FC-17A504E1D7B2}"/>
+                <a16:creationId xmlns:a16="http://schemas.microsoft.com/office/drawing/2014/main" id="{4081D715-4FA5-4D3A-BDC0-0B23BCF631BA}"/>
               </a:ext>
             </a:extLst>
           </p:cNvPr>
@@ -2890,7 +2890,7 @@
           <p:cNvPr id="13" name="">
             <a:extLst xmlns:a="http://schemas.openxmlformats.org/drawingml/2006/main">
               <a:ext uri="{FF2B5EF4-FFF2-40B4-BE49-F238E27FC236}">
-                <a16:creationId xmlns:a16="http://schemas.microsoft.com/office/drawing/2014/main" id="{13881CD8-D798-4D41-BB67-83CAA2024163}"/>
+                <a16:creationId xmlns:a16="http://schemas.microsoft.com/office/drawing/2014/main" id="{69A00E4A-DA43-43B2-9FD8-25B23CB9C967}"/>
               </a:ext>
             </a:extLst>
           </p:cNvPr>
@@ -2920,14 +2920,14 @@
             <a:pPr>
               <a:defRPr sz="2700" b="1">
                 <a:solidFill>
-                  <a:srgbClr val="2048A8"/>
+                  <a:srgbClr val="102A63"/>
                 </a:solidFill>
               </a:defRPr>
             </a:pPr>
             <a:r>
               <a:rPr sz="2700" b="1">
                 <a:solidFill>
-                  <a:srgbClr val="2048A8"/>
+                  <a:srgbClr val="102A63"/>
                 </a:solidFill>
               </a:rPr>
               <a:t>70+</a:t>
@@ -2940,7 +2940,7 @@
           <p:cNvPr id="14" name="">
             <a:extLst xmlns:a="http://schemas.openxmlformats.org/drawingml/2006/main">
               <a:ext uri="{FF2B5EF4-FFF2-40B4-BE49-F238E27FC236}">
-                <a16:creationId xmlns:a16="http://schemas.microsoft.com/office/drawing/2014/main" id="{1A94A451-A296-41B6-A784-526F477F3BAA}"/>
+                <a16:creationId xmlns:a16="http://schemas.microsoft.com/office/drawing/2014/main" id="{3321E914-2F95-42E1-9306-B4F136ED9B67}"/>
               </a:ext>
             </a:extLst>
           </p:cNvPr>
@@ -2990,7 +2990,7 @@
           <p:cNvPr id="15" name="">
             <a:extLst xmlns:a="http://schemas.openxmlformats.org/drawingml/2006/main">
               <a:ext uri="{FF2B5EF4-FFF2-40B4-BE49-F238E27FC236}">
-                <a16:creationId xmlns:a16="http://schemas.microsoft.com/office/drawing/2014/main" id="{0505034F-730B-4E34-9E60-C8365C92F995}"/>
+                <a16:creationId xmlns:a16="http://schemas.microsoft.com/office/drawing/2014/main" id="{B39AC5A6-C76B-4DCE-BBE7-EB7FB48C1374}"/>
               </a:ext>
             </a:extLst>
           </p:cNvPr>
@@ -3040,7 +3040,7 @@
           <p:cNvPr id="16" name="">
             <a:extLst xmlns:a="http://schemas.openxmlformats.org/drawingml/2006/main">
               <a:ext uri="{FF2B5EF4-FFF2-40B4-BE49-F238E27FC236}">
-                <a16:creationId xmlns:a16="http://schemas.microsoft.com/office/drawing/2014/main" id="{F9AAA2F8-7DB4-44FA-949A-EF5E260F779E}"/>
+                <a16:creationId xmlns:a16="http://schemas.microsoft.com/office/drawing/2014/main" id="{25CF57BB-E599-424D-B7C6-F7BBDE2B2C9A}"/>
               </a:ext>
             </a:extLst>
           </p:cNvPr>
@@ -3090,7 +3090,7 @@
           <p:cNvPr id="17" name="">
             <a:extLst xmlns:a="http://schemas.openxmlformats.org/drawingml/2006/main">
               <a:ext uri="{FF2B5EF4-FFF2-40B4-BE49-F238E27FC236}">
-                <a16:creationId xmlns:a16="http://schemas.microsoft.com/office/drawing/2014/main" id="{EFE3E949-B1F7-4179-A649-FC8CD0755D3C}"/>
+                <a16:creationId xmlns:a16="http://schemas.microsoft.com/office/drawing/2014/main" id="{78FF7609-3207-476F-8F06-803757DF3F74}"/>
               </a:ext>
             </a:extLst>
           </p:cNvPr>
@@ -3125,7 +3125,7 @@
           <p:cNvPr id="18" name="">
             <a:extLst xmlns:a="http://schemas.openxmlformats.org/drawingml/2006/main">
               <a:ext uri="{FF2B5EF4-FFF2-40B4-BE49-F238E27FC236}">
-                <a16:creationId xmlns:a16="http://schemas.microsoft.com/office/drawing/2014/main" id="{651CABD9-0D20-42D7-8543-EE76EADB9CB2}"/>
+                <a16:creationId xmlns:a16="http://schemas.microsoft.com/office/drawing/2014/main" id="{D196303E-0488-4560-9CB3-8902A358EA13}"/>
               </a:ext>
             </a:extLst>
           </p:cNvPr>
@@ -3175,7 +3175,7 @@
           <p:cNvPr id="19" name="">
             <a:extLst xmlns:a="http://schemas.openxmlformats.org/drawingml/2006/main">
               <a:ext uri="{FF2B5EF4-FFF2-40B4-BE49-F238E27FC236}">
-                <a16:creationId xmlns:a16="http://schemas.microsoft.com/office/drawing/2014/main" id="{677FC1E5-5AB4-40B1-9C17-CABF22C4C2B2}"/>
+                <a16:creationId xmlns:a16="http://schemas.microsoft.com/office/drawing/2014/main" id="{4D324711-3EC8-4104-B31F-4A34C667FC19}"/>
               </a:ext>
             </a:extLst>
           </p:cNvPr>
@@ -3225,7 +3225,7 @@
           <p:cNvPr id="20" name="">
             <a:extLst xmlns:a="http://schemas.openxmlformats.org/drawingml/2006/main">
               <a:ext uri="{FF2B5EF4-FFF2-40B4-BE49-F238E27FC236}">
-                <a16:creationId xmlns:a16="http://schemas.microsoft.com/office/drawing/2014/main" id="{F9A7D36B-CC4A-414C-850B-9865B8C4BA67}"/>
+                <a16:creationId xmlns:a16="http://schemas.microsoft.com/office/drawing/2014/main" id="{4389F435-A60A-4960-8708-62F0E482F723}"/>
               </a:ext>
             </a:extLst>
           </p:cNvPr>
@@ -3275,7 +3275,7 @@
           <p:cNvPr id="21" name="">
             <a:extLst xmlns:a="http://schemas.openxmlformats.org/drawingml/2006/main">
               <a:ext uri="{FF2B5EF4-FFF2-40B4-BE49-F238E27FC236}">
-                <a16:creationId xmlns:a16="http://schemas.microsoft.com/office/drawing/2014/main" id="{7E9E80F4-B43A-4452-9E39-826D0E2F4388}"/>
+                <a16:creationId xmlns:a16="http://schemas.microsoft.com/office/drawing/2014/main" id="{6ACB0A61-789B-4BF3-A3BE-3FB254784EDC}"/>
               </a:ext>
             </a:extLst>
           </p:cNvPr>
@@ -3325,7 +3325,7 @@
           <p:cNvPr id="22" name="">
             <a:extLst xmlns:a="http://schemas.openxmlformats.org/drawingml/2006/main">
               <a:ext uri="{FF2B5EF4-FFF2-40B4-BE49-F238E27FC236}">
-                <a16:creationId xmlns:a16="http://schemas.microsoft.com/office/drawing/2014/main" id="{5ACBD3DE-81E6-4AB3-AA30-29A05B25BF94}"/>
+                <a16:creationId xmlns:a16="http://schemas.microsoft.com/office/drawing/2014/main" id="{20A9925C-432C-4A3E-B951-BEC212363809}"/>
               </a:ext>
             </a:extLst>
           </p:cNvPr>
@@ -3356,7 +3356,7 @@
           <p:cNvPr id="23" name="">
             <a:extLst xmlns:a="http://schemas.openxmlformats.org/drawingml/2006/main">
               <a:ext uri="{FF2B5EF4-FFF2-40B4-BE49-F238E27FC236}">
-                <a16:creationId xmlns:a16="http://schemas.microsoft.com/office/drawing/2014/main" id="{5BFBA0C8-577E-48BB-8E13-54E698EA7DF6}"/>
+                <a16:creationId xmlns:a16="http://schemas.microsoft.com/office/drawing/2014/main" id="{5E3A2E69-082F-45B9-94F4-E4518DC9B48D}"/>
               </a:ext>
             </a:extLst>
           </p:cNvPr>
@@ -3406,7 +3406,7 @@
           <p:cNvPr id="24" name="">
             <a:extLst xmlns:a="http://schemas.openxmlformats.org/drawingml/2006/main">
               <a:ext uri="{FF2B5EF4-FFF2-40B4-BE49-F238E27FC236}">
-                <a16:creationId xmlns:a16="http://schemas.microsoft.com/office/drawing/2014/main" id="{3D6B414B-CA2A-46A3-BB5A-D823AD9B38AE}"/>
+                <a16:creationId xmlns:a16="http://schemas.microsoft.com/office/drawing/2014/main" id="{501B934C-0F54-4A30-BBA6-FDD73DF01459}"/>
               </a:ext>
             </a:extLst>
           </p:cNvPr>
@@ -3456,7 +3456,7 @@
           <p:cNvPr id="25" name="">
             <a:extLst xmlns:a="http://schemas.openxmlformats.org/drawingml/2006/main">
               <a:ext uri="{FF2B5EF4-FFF2-40B4-BE49-F238E27FC236}">
-                <a16:creationId xmlns:a16="http://schemas.microsoft.com/office/drawing/2014/main" id="{582232E5-243A-4A9E-8558-24D2B166FEE8}"/>
+                <a16:creationId xmlns:a16="http://schemas.microsoft.com/office/drawing/2014/main" id="{34CED2FA-CE6B-4FA9-8F10-A85BFB908340}"/>
               </a:ext>
             </a:extLst>
           </p:cNvPr>
@@ -3506,7 +3506,7 @@
           <p:cNvPr id="26" name="">
             <a:extLst xmlns:a="http://schemas.openxmlformats.org/drawingml/2006/main">
               <a:ext uri="{FF2B5EF4-FFF2-40B4-BE49-F238E27FC236}">
-                <a16:creationId xmlns:a16="http://schemas.microsoft.com/office/drawing/2014/main" id="{50D21C90-4E44-4948-AD16-E6CAFD018F17}"/>
+                <a16:creationId xmlns:a16="http://schemas.microsoft.com/office/drawing/2014/main" id="{A7CCA6A3-A0E7-41EA-A45E-E841F1138B3D}"/>
               </a:ext>
             </a:extLst>
           </p:cNvPr>
@@ -3537,7 +3537,7 @@
           <p:cNvPr id="27" name="">
             <a:extLst xmlns:a="http://schemas.openxmlformats.org/drawingml/2006/main">
               <a:ext uri="{FF2B5EF4-FFF2-40B4-BE49-F238E27FC236}">
-                <a16:creationId xmlns:a16="http://schemas.microsoft.com/office/drawing/2014/main" id="{EB632313-C087-41C3-AF87-ED1BB863D7E0}"/>
+                <a16:creationId xmlns:a16="http://schemas.microsoft.com/office/drawing/2014/main" id="{B8604886-8970-4E34-B10D-C526A5B6B272}"/>
               </a:ext>
             </a:extLst>
           </p:cNvPr>
@@ -3587,7 +3587,7 @@
           <p:cNvPr id="28" name="">
             <a:extLst xmlns:a="http://schemas.openxmlformats.org/drawingml/2006/main">
               <a:ext uri="{FF2B5EF4-FFF2-40B4-BE49-F238E27FC236}">
-                <a16:creationId xmlns:a16="http://schemas.microsoft.com/office/drawing/2014/main" id="{E71DFC39-9D58-4746-8ADD-7846D2AA5A64}"/>
+                <a16:creationId xmlns:a16="http://schemas.microsoft.com/office/drawing/2014/main" id="{31CC16B3-F550-4B94-B7D4-B14C8C053C13}"/>
               </a:ext>
             </a:extLst>
           </p:cNvPr>
@@ -3637,7 +3637,7 @@
           <p:cNvPr id="29" name="">
             <a:extLst xmlns:a="http://schemas.openxmlformats.org/drawingml/2006/main">
               <a:ext uri="{FF2B5EF4-FFF2-40B4-BE49-F238E27FC236}">
-                <a16:creationId xmlns:a16="http://schemas.microsoft.com/office/drawing/2014/main" id="{354F0B55-0B54-41A8-9551-780B089F50E8}"/>
+                <a16:creationId xmlns:a16="http://schemas.microsoft.com/office/drawing/2014/main" id="{BD74CF22-4E94-4877-B486-80ECEDD05B5D}"/>
               </a:ext>
             </a:extLst>
           </p:cNvPr>
@@ -3687,7 +3687,7 @@
           <p:cNvPr id="30" name="">
             <a:extLst xmlns:a="http://schemas.openxmlformats.org/drawingml/2006/main">
               <a:ext uri="{FF2B5EF4-FFF2-40B4-BE49-F238E27FC236}">
-                <a16:creationId xmlns:a16="http://schemas.microsoft.com/office/drawing/2014/main" id="{EC70828A-7FAA-464B-9D2D-43180111DF68}"/>
+                <a16:creationId xmlns:a16="http://schemas.microsoft.com/office/drawing/2014/main" id="{D6A9DA99-7A5A-415A-8DB9-F09296199104}"/>
               </a:ext>
             </a:extLst>
           </p:cNvPr>
@@ -3718,7 +3718,7 @@
           <p:cNvPr id="31" name="">
             <a:extLst xmlns:a="http://schemas.openxmlformats.org/drawingml/2006/main">
               <a:ext uri="{FF2B5EF4-FFF2-40B4-BE49-F238E27FC236}">
-                <a16:creationId xmlns:a16="http://schemas.microsoft.com/office/drawing/2014/main" id="{4C0B97D6-9B23-4009-96C7-AD89A3C663F7}"/>
+                <a16:creationId xmlns:a16="http://schemas.microsoft.com/office/drawing/2014/main" id="{5FA9CB11-78E4-46A1-B724-E7B4785E49E7}"/>
               </a:ext>
             </a:extLst>
           </p:cNvPr>
@@ -3768,7 +3768,7 @@
           <p:cNvPr id="32" name="">
             <a:extLst xmlns:a="http://schemas.openxmlformats.org/drawingml/2006/main">
               <a:ext uri="{FF2B5EF4-FFF2-40B4-BE49-F238E27FC236}">
-                <a16:creationId xmlns:a16="http://schemas.microsoft.com/office/drawing/2014/main" id="{FF5A427E-24DA-4E40-BB03-549C1FAEBC98}"/>
+                <a16:creationId xmlns:a16="http://schemas.microsoft.com/office/drawing/2014/main" id="{D3E57390-BA4A-4D9E-AA91-D54A1D8B1CE6}"/>
               </a:ext>
             </a:extLst>
           </p:cNvPr>
@@ -3818,7 +3818,7 @@
           <p:cNvPr id="33" name="">
             <a:extLst xmlns:a="http://schemas.openxmlformats.org/drawingml/2006/main">
               <a:ext uri="{FF2B5EF4-FFF2-40B4-BE49-F238E27FC236}">
-                <a16:creationId xmlns:a16="http://schemas.microsoft.com/office/drawing/2014/main" id="{AFEE87E2-9BB5-40C6-8B5B-A3F375D48E9A}"/>
+                <a16:creationId xmlns:a16="http://schemas.microsoft.com/office/drawing/2014/main" id="{FA0946E1-38E6-4B21-85B6-C8C1AE7D656D}"/>
               </a:ext>
             </a:extLst>
           </p:cNvPr>
@@ -3866,7 +3866,7 @@
     </p:spTree>
     <p:extLst>
       <p:ext uri="{BB962C8B-B14F-4D97-AF65-F5344CB8AC3E}">
-        <p14:creationId xmlns:p14="http://schemas.microsoft.com/office/powerpoint/2010/main" val="1170439292"/>
+        <p14:creationId xmlns:p14="http://schemas.microsoft.com/office/powerpoint/2010/main" val="667052829"/>
       </p:ext>
     </p:extLst>
   </p:cSld>
@@ -3897,7 +3897,7 @@
           <p:cNvPr id="1" name="">
             <a:extLst xmlns:a="http://schemas.openxmlformats.org/drawingml/2006/main">
               <a:ext uri="{FF2B5EF4-FFF2-40B4-BE49-F238E27FC236}">
-                <a16:creationId xmlns:a16="http://schemas.microsoft.com/office/drawing/2014/main" id="{D575781F-A9C2-4787-B10B-0D252854799D}"/>
+                <a16:creationId xmlns:a16="http://schemas.microsoft.com/office/drawing/2014/main" id="{DD2F793D-83AA-48A6-BC73-AF6EA87F6DA1}"/>
               </a:ext>
             </a:extLst>
           </p:cNvPr>
@@ -3932,7 +3932,7 @@
           <p:nvPr/>
         </p:nvPicPr>
         <p:blipFill>
-          <a:blip xmlns:r="http://schemas.openxmlformats.org/officeDocument/2006/relationships" xmlns:a="http://schemas.openxmlformats.org/drawingml/2006/main" r:embed="R8fdfd7f799904102"/>
+          <a:blip xmlns:r="http://schemas.openxmlformats.org/officeDocument/2006/relationships" xmlns:a="http://schemas.openxmlformats.org/drawingml/2006/main" r:embed="Rc10e6052686541a0"/>
           <a:stretch xmlns:a="http://schemas.openxmlformats.org/drawingml/2006/main"/>
         </p:blipFill>
         <p:spPr>
@@ -3950,7 +3950,7 @@
           <p:cNvPr id="3" name="">
             <a:extLst xmlns:a="http://schemas.openxmlformats.org/drawingml/2006/main">
               <a:ext uri="{FF2B5EF4-FFF2-40B4-BE49-F238E27FC236}">
-                <a16:creationId xmlns:a16="http://schemas.microsoft.com/office/drawing/2014/main" id="{E02F054B-C460-40FF-A6B3-2C88E04EE742}"/>
+                <a16:creationId xmlns:a16="http://schemas.microsoft.com/office/drawing/2014/main" id="{42C9EBE1-791C-4E90-BB4E-A93C759F1E2A}"/>
               </a:ext>
             </a:extLst>
           </p:cNvPr>
@@ -4000,7 +4000,7 @@
           <p:cNvPr id="4" name="">
             <a:extLst xmlns:a="http://schemas.openxmlformats.org/drawingml/2006/main">
               <a:ext uri="{FF2B5EF4-FFF2-40B4-BE49-F238E27FC236}">
-                <a16:creationId xmlns:a16="http://schemas.microsoft.com/office/drawing/2014/main" id="{371E3211-E972-4FA4-A67A-37DEA072F9A9}"/>
+                <a16:creationId xmlns:a16="http://schemas.microsoft.com/office/drawing/2014/main" id="{C42F4299-4179-482F-A19B-2CEB83106F1E}"/>
               </a:ext>
             </a:extLst>
           </p:cNvPr>
@@ -4033,7 +4033,7 @@
           <p:cNvPr id="5" name="">
             <a:extLst xmlns:a="http://schemas.openxmlformats.org/drawingml/2006/main">
               <a:ext uri="{FF2B5EF4-FFF2-40B4-BE49-F238E27FC236}">
-                <a16:creationId xmlns:a16="http://schemas.microsoft.com/office/drawing/2014/main" id="{5017C176-0B6D-4458-B958-886558EA5FAC}"/>
+                <a16:creationId xmlns:a16="http://schemas.microsoft.com/office/drawing/2014/main" id="{D4E421B8-1E4D-4699-83DD-B2DA7E2B335E}"/>
               </a:ext>
             </a:extLst>
           </p:cNvPr>
@@ -4064,7 +4064,7 @@
           <p:cNvPr id="6" name="">
             <a:extLst xmlns:a="http://schemas.openxmlformats.org/drawingml/2006/main">
               <a:ext uri="{FF2B5EF4-FFF2-40B4-BE49-F238E27FC236}">
-                <a16:creationId xmlns:a16="http://schemas.microsoft.com/office/drawing/2014/main" id="{F8C30A59-30B4-46C4-99CF-7B80C8B41E10}"/>
+                <a16:creationId xmlns:a16="http://schemas.microsoft.com/office/drawing/2014/main" id="{A82EF018-4EAC-40C8-B7A7-D94B2ADA9E1D}"/>
               </a:ext>
             </a:extLst>
           </p:cNvPr>
@@ -4114,7 +4114,7 @@
           <p:cNvPr id="7" name="">
             <a:extLst xmlns:a="http://schemas.openxmlformats.org/drawingml/2006/main">
               <a:ext uri="{FF2B5EF4-FFF2-40B4-BE49-F238E27FC236}">
-                <a16:creationId xmlns:a16="http://schemas.microsoft.com/office/drawing/2014/main" id="{CF7CD4E5-33BC-42F7-AB7E-BDFC9B6F1F7F}"/>
+                <a16:creationId xmlns:a16="http://schemas.microsoft.com/office/drawing/2014/main" id="{5B5B65E5-A4C3-4115-975D-02FD4801557E}"/>
               </a:ext>
             </a:extLst>
           </p:cNvPr>
@@ -4164,7 +4164,7 @@
           <p:cNvPr id="8" name="">
             <a:extLst xmlns:a="http://schemas.openxmlformats.org/drawingml/2006/main">
               <a:ext uri="{FF2B5EF4-FFF2-40B4-BE49-F238E27FC236}">
-                <a16:creationId xmlns:a16="http://schemas.microsoft.com/office/drawing/2014/main" id="{BEDA2FD6-16AB-44E3-9EFD-9BEB6A225290}"/>
+                <a16:creationId xmlns:a16="http://schemas.microsoft.com/office/drawing/2014/main" id="{A4C9AFE7-0384-48D6-9C4A-032DC2D3C152}"/>
               </a:ext>
             </a:extLst>
           </p:cNvPr>
@@ -4214,7 +4214,7 @@
           <p:cNvPr id="9" name="">
             <a:extLst xmlns:a="http://schemas.openxmlformats.org/drawingml/2006/main">
               <a:ext uri="{FF2B5EF4-FFF2-40B4-BE49-F238E27FC236}">
-                <a16:creationId xmlns:a16="http://schemas.microsoft.com/office/drawing/2014/main" id="{5E17409D-ED99-48D1-A41E-0D290B016712}"/>
+                <a16:creationId xmlns:a16="http://schemas.microsoft.com/office/drawing/2014/main" id="{67420C6C-D66E-403C-864D-B2C8BAFA1C4B}"/>
               </a:ext>
             </a:extLst>
           </p:cNvPr>
@@ -4264,7 +4264,7 @@
           <p:cNvPr id="10" name="">
             <a:extLst xmlns:a="http://schemas.openxmlformats.org/drawingml/2006/main">
               <a:ext uri="{FF2B5EF4-FFF2-40B4-BE49-F238E27FC236}">
-                <a16:creationId xmlns:a16="http://schemas.microsoft.com/office/drawing/2014/main" id="{0E9C4987-C791-4D97-BA12-25BE18DA06A4}"/>
+                <a16:creationId xmlns:a16="http://schemas.microsoft.com/office/drawing/2014/main" id="{C9BDB7C1-5EED-4554-A1AD-A562072B822A}"/>
               </a:ext>
             </a:extLst>
           </p:cNvPr>
@@ -4314,7 +4314,7 @@
           <p:cNvPr id="11" name="">
             <a:extLst xmlns:a="http://schemas.openxmlformats.org/drawingml/2006/main">
               <a:ext uri="{FF2B5EF4-FFF2-40B4-BE49-F238E27FC236}">
-                <a16:creationId xmlns:a16="http://schemas.microsoft.com/office/drawing/2014/main" id="{2B62F2E4-CC1D-481C-BE0F-064892830549}"/>
+                <a16:creationId xmlns:a16="http://schemas.microsoft.com/office/drawing/2014/main" id="{92306D55-AA52-45DE-9351-397BF4A16942}"/>
               </a:ext>
             </a:extLst>
           </p:cNvPr>
@@ -4345,7 +4345,7 @@
           <p:cNvPr id="12" name="">
             <a:extLst xmlns:a="http://schemas.openxmlformats.org/drawingml/2006/main">
               <a:ext uri="{FF2B5EF4-FFF2-40B4-BE49-F238E27FC236}">
-                <a16:creationId xmlns:a16="http://schemas.microsoft.com/office/drawing/2014/main" id="{037B752D-0BB8-4259-903B-21528CD64B71}"/>
+                <a16:creationId xmlns:a16="http://schemas.microsoft.com/office/drawing/2014/main" id="{698595BC-9B88-4E38-B553-BBEF3D16CE33}"/>
               </a:ext>
             </a:extLst>
           </p:cNvPr>
@@ -4395,7 +4395,7 @@
           <p:cNvPr id="13" name="">
             <a:extLst xmlns:a="http://schemas.openxmlformats.org/drawingml/2006/main">
               <a:ext uri="{FF2B5EF4-FFF2-40B4-BE49-F238E27FC236}">
-                <a16:creationId xmlns:a16="http://schemas.microsoft.com/office/drawing/2014/main" id="{F059E6BE-F3B8-4C12-9A83-729125265E74}"/>
+                <a16:creationId xmlns:a16="http://schemas.microsoft.com/office/drawing/2014/main" id="{DAAF0D99-5EE0-480F-A8FE-F0B9C95E4E7C}"/>
               </a:ext>
             </a:extLst>
           </p:cNvPr>
@@ -4445,7 +4445,7 @@
           <p:cNvPr id="14" name="">
             <a:extLst xmlns:a="http://schemas.openxmlformats.org/drawingml/2006/main">
               <a:ext uri="{FF2B5EF4-FFF2-40B4-BE49-F238E27FC236}">
-                <a16:creationId xmlns:a16="http://schemas.microsoft.com/office/drawing/2014/main" id="{B26B58E3-1943-408D-9321-07B03B024E42}"/>
+                <a16:creationId xmlns:a16="http://schemas.microsoft.com/office/drawing/2014/main" id="{CACF825A-CD60-4817-8058-A0AC36B07CA8}"/>
               </a:ext>
             </a:extLst>
           </p:cNvPr>
@@ -4476,7 +4476,7 @@
           <p:cNvPr id="15" name="">
             <a:extLst xmlns:a="http://schemas.openxmlformats.org/drawingml/2006/main">
               <a:ext uri="{FF2B5EF4-FFF2-40B4-BE49-F238E27FC236}">
-                <a16:creationId xmlns:a16="http://schemas.microsoft.com/office/drawing/2014/main" id="{7684AB50-A3E0-4947-A621-5E0EA7EEB3C7}"/>
+                <a16:creationId xmlns:a16="http://schemas.microsoft.com/office/drawing/2014/main" id="{B364D5D4-20D1-4EA5-B6CD-9D5C88A8DF10}"/>
               </a:ext>
             </a:extLst>
           </p:cNvPr>
@@ -4526,7 +4526,7 @@
           <p:cNvPr id="16" name="">
             <a:extLst xmlns:a="http://schemas.openxmlformats.org/drawingml/2006/main">
               <a:ext uri="{FF2B5EF4-FFF2-40B4-BE49-F238E27FC236}">
-                <a16:creationId xmlns:a16="http://schemas.microsoft.com/office/drawing/2014/main" id="{78B0287E-E1AD-4A8D-985C-92370459DBE8}"/>
+                <a16:creationId xmlns:a16="http://schemas.microsoft.com/office/drawing/2014/main" id="{93E83DD5-D940-4E06-9A3D-0FABE9AB2AE8}"/>
               </a:ext>
             </a:extLst>
           </p:cNvPr>
@@ -4576,7 +4576,7 @@
           <p:cNvPr id="17" name="">
             <a:extLst xmlns:a="http://schemas.openxmlformats.org/drawingml/2006/main">
               <a:ext uri="{FF2B5EF4-FFF2-40B4-BE49-F238E27FC236}">
-                <a16:creationId xmlns:a16="http://schemas.microsoft.com/office/drawing/2014/main" id="{9AF6752F-6E8B-436B-9B74-12C323F24BD6}"/>
+                <a16:creationId xmlns:a16="http://schemas.microsoft.com/office/drawing/2014/main" id="{7AF2395B-1130-4BB1-ABE3-78B0643D5322}"/>
               </a:ext>
             </a:extLst>
           </p:cNvPr>
@@ -4607,7 +4607,7 @@
           <p:cNvPr id="18" name="">
             <a:extLst xmlns:a="http://schemas.openxmlformats.org/drawingml/2006/main">
               <a:ext uri="{FF2B5EF4-FFF2-40B4-BE49-F238E27FC236}">
-                <a16:creationId xmlns:a16="http://schemas.microsoft.com/office/drawing/2014/main" id="{19572A67-CF4B-4FA3-BC1B-3B7FEF36484A}"/>
+                <a16:creationId xmlns:a16="http://schemas.microsoft.com/office/drawing/2014/main" id="{F2A31BC7-D54E-4BD4-AD65-92A89CCDEDAB}"/>
               </a:ext>
             </a:extLst>
           </p:cNvPr>
@@ -4657,7 +4657,7 @@
           <p:cNvPr id="19" name="">
             <a:extLst xmlns:a="http://schemas.openxmlformats.org/drawingml/2006/main">
               <a:ext uri="{FF2B5EF4-FFF2-40B4-BE49-F238E27FC236}">
-                <a16:creationId xmlns:a16="http://schemas.microsoft.com/office/drawing/2014/main" id="{05DAAD97-E76E-4D42-B5AE-2C44BD72A3BC}"/>
+                <a16:creationId xmlns:a16="http://schemas.microsoft.com/office/drawing/2014/main" id="{2D67EC57-C545-4604-830D-AE6FD4C3BF3E}"/>
               </a:ext>
             </a:extLst>
           </p:cNvPr>
@@ -4705,7 +4705,7 @@
     </p:spTree>
     <p:extLst>
       <p:ext uri="{BB962C8B-B14F-4D97-AF65-F5344CB8AC3E}">
-        <p14:creationId xmlns:p14="http://schemas.microsoft.com/office/powerpoint/2010/main" val="79102955"/>
+        <p14:creationId xmlns:p14="http://schemas.microsoft.com/office/powerpoint/2010/main" val="601282642"/>
       </p:ext>
     </p:extLst>
   </p:cSld>
@@ -4736,7 +4736,7 @@
           <p:cNvPr id="1" name="">
             <a:extLst xmlns:a="http://schemas.openxmlformats.org/drawingml/2006/main">
               <a:ext uri="{FF2B5EF4-FFF2-40B4-BE49-F238E27FC236}">
-                <a16:creationId xmlns:a16="http://schemas.microsoft.com/office/drawing/2014/main" id="{DBBF6472-24CA-4963-BC5B-C54863DBC97F}"/>
+                <a16:creationId xmlns:a16="http://schemas.microsoft.com/office/drawing/2014/main" id="{90F9EB2A-BA0C-4515-9E01-D20F24ECE6FC}"/>
               </a:ext>
             </a:extLst>
           </p:cNvPr>
@@ -4771,7 +4771,7 @@
           <p:nvPr/>
         </p:nvPicPr>
         <p:blipFill>
-          <a:blip xmlns:r="http://schemas.openxmlformats.org/officeDocument/2006/relationships" xmlns:a="http://schemas.openxmlformats.org/drawingml/2006/main" r:embed="R9c3b4b4292c6492e"/>
+          <a:blip xmlns:r="http://schemas.openxmlformats.org/officeDocument/2006/relationships" xmlns:a="http://schemas.openxmlformats.org/drawingml/2006/main" r:embed="R3b608b44967442ff"/>
           <a:stretch xmlns:a="http://schemas.openxmlformats.org/drawingml/2006/main"/>
         </p:blipFill>
         <p:spPr>
@@ -4789,7 +4789,7 @@
           <p:cNvPr id="3" name="">
             <a:extLst xmlns:a="http://schemas.openxmlformats.org/drawingml/2006/main">
               <a:ext uri="{FF2B5EF4-FFF2-40B4-BE49-F238E27FC236}">
-                <a16:creationId xmlns:a16="http://schemas.microsoft.com/office/drawing/2014/main" id="{38F8FE3A-DC15-4715-9D09-2D481A2C29DF}"/>
+                <a16:creationId xmlns:a16="http://schemas.microsoft.com/office/drawing/2014/main" id="{310A4EAC-E58B-4B31-BA5B-E0D585048CC1}"/>
               </a:ext>
             </a:extLst>
           </p:cNvPr>
@@ -4839,7 +4839,7 @@
           <p:cNvPr id="4" name="">
             <a:extLst xmlns:a="http://schemas.openxmlformats.org/drawingml/2006/main">
               <a:ext uri="{FF2B5EF4-FFF2-40B4-BE49-F238E27FC236}">
-                <a16:creationId xmlns:a16="http://schemas.microsoft.com/office/drawing/2014/main" id="{9C3A7BE5-3F98-49D0-A913-924A4C7CF5DE}"/>
+                <a16:creationId xmlns:a16="http://schemas.microsoft.com/office/drawing/2014/main" id="{93895A08-C17C-4633-9A6B-097698C03E1B}"/>
               </a:ext>
             </a:extLst>
           </p:cNvPr>
@@ -4872,7 +4872,7 @@
           <p:cNvPr id="5" name="">
             <a:extLst xmlns:a="http://schemas.openxmlformats.org/drawingml/2006/main">
               <a:ext uri="{FF2B5EF4-FFF2-40B4-BE49-F238E27FC236}">
-                <a16:creationId xmlns:a16="http://schemas.microsoft.com/office/drawing/2014/main" id="{F99F953B-8E4E-4095-8871-07C44BF67417}"/>
+                <a16:creationId xmlns:a16="http://schemas.microsoft.com/office/drawing/2014/main" id="{86176C95-37D2-4C41-BBD2-111BE3A0C1B2}"/>
               </a:ext>
             </a:extLst>
           </p:cNvPr>
@@ -4903,7 +4903,7 @@
           <p:cNvPr id="6" name="">
             <a:extLst xmlns:a="http://schemas.openxmlformats.org/drawingml/2006/main">
               <a:ext uri="{FF2B5EF4-FFF2-40B4-BE49-F238E27FC236}">
-                <a16:creationId xmlns:a16="http://schemas.microsoft.com/office/drawing/2014/main" id="{E181245E-94EF-45EB-B1FB-876513B579D2}"/>
+                <a16:creationId xmlns:a16="http://schemas.microsoft.com/office/drawing/2014/main" id="{4BC64D7E-0AEE-481F-BA26-3BA8FCCD9B21}"/>
               </a:ext>
             </a:extLst>
           </p:cNvPr>
@@ -4953,7 +4953,7 @@
           <p:cNvPr id="7" name="">
             <a:extLst xmlns:a="http://schemas.openxmlformats.org/drawingml/2006/main">
               <a:ext uri="{FF2B5EF4-FFF2-40B4-BE49-F238E27FC236}">
-                <a16:creationId xmlns:a16="http://schemas.microsoft.com/office/drawing/2014/main" id="{948BC06C-8C20-4502-BF0B-2B05CCD8F53E}"/>
+                <a16:creationId xmlns:a16="http://schemas.microsoft.com/office/drawing/2014/main" id="{E1101E7F-81E6-4F4C-A6DB-1A8D113DD4E7}"/>
               </a:ext>
             </a:extLst>
           </p:cNvPr>
@@ -5003,7 +5003,7 @@
           <p:cNvPr id="8" name="">
             <a:extLst xmlns:a="http://schemas.openxmlformats.org/drawingml/2006/main">
               <a:ext uri="{FF2B5EF4-FFF2-40B4-BE49-F238E27FC236}">
-                <a16:creationId xmlns:a16="http://schemas.microsoft.com/office/drawing/2014/main" id="{A9885844-143A-4991-9B7D-3AE87DDCE6ED}"/>
+                <a16:creationId xmlns:a16="http://schemas.microsoft.com/office/drawing/2014/main" id="{A915637A-9CB7-4C49-A320-3B450EB64DCC}"/>
               </a:ext>
             </a:extLst>
           </p:cNvPr>
@@ -5038,7 +5038,7 @@
           <p:cNvPr id="9" name="">
             <a:extLst xmlns:a="http://schemas.openxmlformats.org/drawingml/2006/main">
               <a:ext uri="{FF2B5EF4-FFF2-40B4-BE49-F238E27FC236}">
-                <a16:creationId xmlns:a16="http://schemas.microsoft.com/office/drawing/2014/main" id="{653F32CA-40DA-4521-AA8A-F755E41318AA}"/>
+                <a16:creationId xmlns:a16="http://schemas.microsoft.com/office/drawing/2014/main" id="{6B176273-0B6F-41EB-8C95-46491BBF29A8}"/>
               </a:ext>
             </a:extLst>
           </p:cNvPr>
@@ -5088,7 +5088,7 @@
           <p:cNvPr id="10" name="">
             <a:extLst xmlns:a="http://schemas.openxmlformats.org/drawingml/2006/main">
               <a:ext uri="{FF2B5EF4-FFF2-40B4-BE49-F238E27FC236}">
-                <a16:creationId xmlns:a16="http://schemas.microsoft.com/office/drawing/2014/main" id="{22DE48D5-C0A5-4000-B6D8-94438FAF349A}"/>
+                <a16:creationId xmlns:a16="http://schemas.microsoft.com/office/drawing/2014/main" id="{395FA9E4-F3FF-4E4B-9461-C13B978A3533}"/>
               </a:ext>
             </a:extLst>
           </p:cNvPr>
@@ -5138,7 +5138,7 @@
           <p:cNvPr id="11" name="">
             <a:extLst xmlns:a="http://schemas.openxmlformats.org/drawingml/2006/main">
               <a:ext uri="{FF2B5EF4-FFF2-40B4-BE49-F238E27FC236}">
-                <a16:creationId xmlns:a16="http://schemas.microsoft.com/office/drawing/2014/main" id="{E2B0BC1D-438C-492D-ADBE-2C047C53632B}"/>
+                <a16:creationId xmlns:a16="http://schemas.microsoft.com/office/drawing/2014/main" id="{C6432D86-B693-42AD-8C85-397965202E3E}"/>
               </a:ext>
             </a:extLst>
           </p:cNvPr>
@@ -5173,7 +5173,7 @@
           <p:cNvPr id="12" name="">
             <a:extLst xmlns:a="http://schemas.openxmlformats.org/drawingml/2006/main">
               <a:ext uri="{FF2B5EF4-FFF2-40B4-BE49-F238E27FC236}">
-                <a16:creationId xmlns:a16="http://schemas.microsoft.com/office/drawing/2014/main" id="{A86C096F-4E78-43FB-BACF-DCBB47085CE2}"/>
+                <a16:creationId xmlns:a16="http://schemas.microsoft.com/office/drawing/2014/main" id="{17BCDBCA-4BC6-44E4-8901-EE2E3C22023F}"/>
               </a:ext>
             </a:extLst>
           </p:cNvPr>
@@ -5223,7 +5223,7 @@
           <p:cNvPr id="13" name="">
             <a:extLst xmlns:a="http://schemas.openxmlformats.org/drawingml/2006/main">
               <a:ext uri="{FF2B5EF4-FFF2-40B4-BE49-F238E27FC236}">
-                <a16:creationId xmlns:a16="http://schemas.microsoft.com/office/drawing/2014/main" id="{3CAFFC82-E80E-4BD2-9256-8A7DE5EDBC4F}"/>
+                <a16:creationId xmlns:a16="http://schemas.microsoft.com/office/drawing/2014/main" id="{115AFCDF-2BA5-4605-BD8B-23741D5966E0}"/>
               </a:ext>
             </a:extLst>
           </p:cNvPr>
@@ -5273,7 +5273,7 @@
           <p:cNvPr id="14" name="">
             <a:extLst xmlns:a="http://schemas.openxmlformats.org/drawingml/2006/main">
               <a:ext uri="{FF2B5EF4-FFF2-40B4-BE49-F238E27FC236}">
-                <a16:creationId xmlns:a16="http://schemas.microsoft.com/office/drawing/2014/main" id="{B2A84E13-8231-44C7-B999-3F3F483C2E3B}"/>
+                <a16:creationId xmlns:a16="http://schemas.microsoft.com/office/drawing/2014/main" id="{047E5471-61FF-42E0-9476-BD92EA4E95C8}"/>
               </a:ext>
             </a:extLst>
           </p:cNvPr>
@@ -5308,7 +5308,7 @@
           <p:cNvPr id="15" name="">
             <a:extLst xmlns:a="http://schemas.openxmlformats.org/drawingml/2006/main">
               <a:ext uri="{FF2B5EF4-FFF2-40B4-BE49-F238E27FC236}">
-                <a16:creationId xmlns:a16="http://schemas.microsoft.com/office/drawing/2014/main" id="{B1A2C628-8267-4C59-9186-8727C3F9E169}"/>
+                <a16:creationId xmlns:a16="http://schemas.microsoft.com/office/drawing/2014/main" id="{9F9F3B31-2C55-4BB2-ADEE-3BF6DA1A1084}"/>
               </a:ext>
             </a:extLst>
           </p:cNvPr>
@@ -5358,7 +5358,7 @@
           <p:cNvPr id="16" name="">
             <a:extLst xmlns:a="http://schemas.openxmlformats.org/drawingml/2006/main">
               <a:ext uri="{FF2B5EF4-FFF2-40B4-BE49-F238E27FC236}">
-                <a16:creationId xmlns:a16="http://schemas.microsoft.com/office/drawing/2014/main" id="{4C6927E8-9B2D-4E50-A365-BBEFFF468C83}"/>
+                <a16:creationId xmlns:a16="http://schemas.microsoft.com/office/drawing/2014/main" id="{6AC01FF7-B02A-4329-BE19-48245DCCD50A}"/>
               </a:ext>
             </a:extLst>
           </p:cNvPr>
@@ -5408,7 +5408,7 @@
           <p:cNvPr id="17" name="">
             <a:extLst xmlns:a="http://schemas.openxmlformats.org/drawingml/2006/main">
               <a:ext uri="{FF2B5EF4-FFF2-40B4-BE49-F238E27FC236}">
-                <a16:creationId xmlns:a16="http://schemas.microsoft.com/office/drawing/2014/main" id="{BDDFC20A-C3F6-4035-AB1C-EFC117BD4560}"/>
+                <a16:creationId xmlns:a16="http://schemas.microsoft.com/office/drawing/2014/main" id="{6AAF8E00-11E8-4BE4-B14E-C65D3C0AD5AB}"/>
               </a:ext>
             </a:extLst>
           </p:cNvPr>
@@ -5443,7 +5443,7 @@
           <p:cNvPr id="18" name="">
             <a:extLst xmlns:a="http://schemas.openxmlformats.org/drawingml/2006/main">
               <a:ext uri="{FF2B5EF4-FFF2-40B4-BE49-F238E27FC236}">
-                <a16:creationId xmlns:a16="http://schemas.microsoft.com/office/drawing/2014/main" id="{E7C9149D-5072-4E02-9CF2-99DE3D6C316A}"/>
+                <a16:creationId xmlns:a16="http://schemas.microsoft.com/office/drawing/2014/main" id="{43E41C8C-910D-4E7E-AEA4-C84C05A3CB84}"/>
               </a:ext>
             </a:extLst>
           </p:cNvPr>
@@ -5493,7 +5493,7 @@
           <p:cNvPr id="19" name="">
             <a:extLst xmlns:a="http://schemas.openxmlformats.org/drawingml/2006/main">
               <a:ext uri="{FF2B5EF4-FFF2-40B4-BE49-F238E27FC236}">
-                <a16:creationId xmlns:a16="http://schemas.microsoft.com/office/drawing/2014/main" id="{DE0C11E1-A581-4F72-9074-483FEEC9F630}"/>
+                <a16:creationId xmlns:a16="http://schemas.microsoft.com/office/drawing/2014/main" id="{19C47B47-BE62-4819-8A23-A73064AAABED}"/>
               </a:ext>
             </a:extLst>
           </p:cNvPr>
@@ -5543,7 +5543,7 @@
           <p:cNvPr id="20" name="">
             <a:extLst xmlns:a="http://schemas.openxmlformats.org/drawingml/2006/main">
               <a:ext uri="{FF2B5EF4-FFF2-40B4-BE49-F238E27FC236}">
-                <a16:creationId xmlns:a16="http://schemas.microsoft.com/office/drawing/2014/main" id="{67BCE147-A207-4C14-BED8-200056119BF1}"/>
+                <a16:creationId xmlns:a16="http://schemas.microsoft.com/office/drawing/2014/main" id="{AE9B836D-726C-4B3C-9B01-E2F593F30B50}"/>
               </a:ext>
             </a:extLst>
           </p:cNvPr>
@@ -5593,7 +5593,7 @@
           <p:cNvPr id="21" name="">
             <a:extLst xmlns:a="http://schemas.openxmlformats.org/drawingml/2006/main">
               <a:ext uri="{FF2B5EF4-FFF2-40B4-BE49-F238E27FC236}">
-                <a16:creationId xmlns:a16="http://schemas.microsoft.com/office/drawing/2014/main" id="{BC9A73BB-C64E-4B46-8380-4B7709B6B364}"/>
+                <a16:creationId xmlns:a16="http://schemas.microsoft.com/office/drawing/2014/main" id="{B474D450-F705-4546-AE49-CC427F5F30D7}"/>
               </a:ext>
             </a:extLst>
           </p:cNvPr>
@@ -5643,7 +5643,7 @@
           <p:cNvPr id="22" name="">
             <a:extLst xmlns:a="http://schemas.openxmlformats.org/drawingml/2006/main">
               <a:ext uri="{FF2B5EF4-FFF2-40B4-BE49-F238E27FC236}">
-                <a16:creationId xmlns:a16="http://schemas.microsoft.com/office/drawing/2014/main" id="{489C8707-95A1-4C70-BE4B-470D4AC084CD}"/>
+                <a16:creationId xmlns:a16="http://schemas.microsoft.com/office/drawing/2014/main" id="{FADB3A2F-7559-4C7F-B202-73738C0A1376}"/>
               </a:ext>
             </a:extLst>
           </p:cNvPr>
@@ -5693,7 +5693,7 @@
           <p:cNvPr id="23" name="">
             <a:extLst xmlns:a="http://schemas.openxmlformats.org/drawingml/2006/main">
               <a:ext uri="{FF2B5EF4-FFF2-40B4-BE49-F238E27FC236}">
-                <a16:creationId xmlns:a16="http://schemas.microsoft.com/office/drawing/2014/main" id="{CEC3D707-F914-4133-AE23-896C6F011E25}"/>
+                <a16:creationId xmlns:a16="http://schemas.microsoft.com/office/drawing/2014/main" id="{BAB6F36D-FABE-4458-B796-A8F94DC78DCB}"/>
               </a:ext>
             </a:extLst>
           </p:cNvPr>
@@ -5726,7 +5726,7 @@
           <p:cNvPr id="24" name="">
             <a:extLst xmlns:a="http://schemas.openxmlformats.org/drawingml/2006/main">
               <a:ext uri="{FF2B5EF4-FFF2-40B4-BE49-F238E27FC236}">
-                <a16:creationId xmlns:a16="http://schemas.microsoft.com/office/drawing/2014/main" id="{D6DBD709-0EE5-43FB-AB64-5E828BADF5D9}"/>
+                <a16:creationId xmlns:a16="http://schemas.microsoft.com/office/drawing/2014/main" id="{58ECF1CC-4DA8-43F5-9377-4F31BCEACF83}"/>
               </a:ext>
             </a:extLst>
           </p:cNvPr>
@@ -5776,7 +5776,7 @@
           <p:cNvPr id="25" name="">
             <a:extLst xmlns:a="http://schemas.openxmlformats.org/drawingml/2006/main">
               <a:ext uri="{FF2B5EF4-FFF2-40B4-BE49-F238E27FC236}">
-                <a16:creationId xmlns:a16="http://schemas.microsoft.com/office/drawing/2014/main" id="{B732594D-D3EF-4BB1-9297-2F188294E415}"/>
+                <a16:creationId xmlns:a16="http://schemas.microsoft.com/office/drawing/2014/main" id="{1C6757FD-65A5-4550-B3ED-C1364B6103C8}"/>
               </a:ext>
             </a:extLst>
           </p:cNvPr>
@@ -5826,7 +5826,7 @@
           <p:cNvPr id="26" name="">
             <a:extLst xmlns:a="http://schemas.openxmlformats.org/drawingml/2006/main">
               <a:ext uri="{FF2B5EF4-FFF2-40B4-BE49-F238E27FC236}">
-                <a16:creationId xmlns:a16="http://schemas.microsoft.com/office/drawing/2014/main" id="{9083A6B4-3470-4ED4-B032-C065ED707AB9}"/>
+                <a16:creationId xmlns:a16="http://schemas.microsoft.com/office/drawing/2014/main" id="{C4094728-F0C8-43A6-AB46-E0A43A1C93A7}"/>
               </a:ext>
             </a:extLst>
           </p:cNvPr>
@@ -5859,7 +5859,7 @@
           <p:cNvPr id="27" name="">
             <a:extLst xmlns:a="http://schemas.openxmlformats.org/drawingml/2006/main">
               <a:ext uri="{FF2B5EF4-FFF2-40B4-BE49-F238E27FC236}">
-                <a16:creationId xmlns:a16="http://schemas.microsoft.com/office/drawing/2014/main" id="{68456291-BF68-434F-9EC0-6D5F3F196123}"/>
+                <a16:creationId xmlns:a16="http://schemas.microsoft.com/office/drawing/2014/main" id="{A205BE41-C947-490E-A56B-C2DB31D0B60B}"/>
               </a:ext>
             </a:extLst>
           </p:cNvPr>
@@ -5909,7 +5909,7 @@
           <p:cNvPr id="28" name="">
             <a:extLst xmlns:a="http://schemas.openxmlformats.org/drawingml/2006/main">
               <a:ext uri="{FF2B5EF4-FFF2-40B4-BE49-F238E27FC236}">
-                <a16:creationId xmlns:a16="http://schemas.microsoft.com/office/drawing/2014/main" id="{98F65A14-6900-43F2-B12D-19125318709E}"/>
+                <a16:creationId xmlns:a16="http://schemas.microsoft.com/office/drawing/2014/main" id="{67326B29-0379-4BAB-A81C-A7D6BB3772D8}"/>
               </a:ext>
             </a:extLst>
           </p:cNvPr>
@@ -5959,7 +5959,7 @@
           <p:cNvPr id="29" name="">
             <a:extLst xmlns:a="http://schemas.openxmlformats.org/drawingml/2006/main">
               <a:ext uri="{FF2B5EF4-FFF2-40B4-BE49-F238E27FC236}">
-                <a16:creationId xmlns:a16="http://schemas.microsoft.com/office/drawing/2014/main" id="{C4B8DEDE-09C9-44F8-8F5D-ABF4B62B87B7}"/>
+                <a16:creationId xmlns:a16="http://schemas.microsoft.com/office/drawing/2014/main" id="{2BE931C2-5ED1-4C14-9C0B-1A811317D8B5}"/>
               </a:ext>
             </a:extLst>
           </p:cNvPr>
@@ -5992,7 +5992,7 @@
           <p:cNvPr id="30" name="">
             <a:extLst xmlns:a="http://schemas.openxmlformats.org/drawingml/2006/main">
               <a:ext uri="{FF2B5EF4-FFF2-40B4-BE49-F238E27FC236}">
-                <a16:creationId xmlns:a16="http://schemas.microsoft.com/office/drawing/2014/main" id="{0B7F9A80-E2E3-4538-8F3A-2452DADA7745}"/>
+                <a16:creationId xmlns:a16="http://schemas.microsoft.com/office/drawing/2014/main" id="{2AA2FB37-E581-4919-950D-06FDF6826E68}"/>
               </a:ext>
             </a:extLst>
           </p:cNvPr>
@@ -6042,7 +6042,7 @@
           <p:cNvPr id="31" name="">
             <a:extLst xmlns:a="http://schemas.openxmlformats.org/drawingml/2006/main">
               <a:ext uri="{FF2B5EF4-FFF2-40B4-BE49-F238E27FC236}">
-                <a16:creationId xmlns:a16="http://schemas.microsoft.com/office/drawing/2014/main" id="{DC03A88E-8420-4761-9716-582126D71318}"/>
+                <a16:creationId xmlns:a16="http://schemas.microsoft.com/office/drawing/2014/main" id="{9F4923DD-5FDE-4678-BF86-80E0EFD4FE3C}"/>
               </a:ext>
             </a:extLst>
           </p:cNvPr>
@@ -6090,7 +6090,7 @@
     </p:spTree>
     <p:extLst>
       <p:ext uri="{BB962C8B-B14F-4D97-AF65-F5344CB8AC3E}">
-        <p14:creationId xmlns:p14="http://schemas.microsoft.com/office/powerpoint/2010/main" val="1248014869"/>
+        <p14:creationId xmlns:p14="http://schemas.microsoft.com/office/powerpoint/2010/main" val="1176172675"/>
       </p:ext>
     </p:extLst>
   </p:cSld>
@@ -6121,7 +6121,7 @@
           <p:cNvPr id="1" name="">
             <a:extLst xmlns:a="http://schemas.openxmlformats.org/drawingml/2006/main">
               <a:ext uri="{FF2B5EF4-FFF2-40B4-BE49-F238E27FC236}">
-                <a16:creationId xmlns:a16="http://schemas.microsoft.com/office/drawing/2014/main" id="{C162980B-EBAF-4653-B9D7-D10CB90EB629}"/>
+                <a16:creationId xmlns:a16="http://schemas.microsoft.com/office/drawing/2014/main" id="{48833123-3AE7-4FC9-ADFB-0ADBCD51F221}"/>
               </a:ext>
             </a:extLst>
           </p:cNvPr>
@@ -6156,7 +6156,7 @@
           <p:nvPr/>
         </p:nvPicPr>
         <p:blipFill>
-          <a:blip xmlns:r="http://schemas.openxmlformats.org/officeDocument/2006/relationships" xmlns:a="http://schemas.openxmlformats.org/drawingml/2006/main" r:embed="R8e94366b9a0242ca"/>
+          <a:blip xmlns:r="http://schemas.openxmlformats.org/officeDocument/2006/relationships" xmlns:a="http://schemas.openxmlformats.org/drawingml/2006/main" r:embed="Rba08c0dd1feb466d"/>
           <a:stretch xmlns:a="http://schemas.openxmlformats.org/drawingml/2006/main"/>
         </p:blipFill>
         <p:spPr>
@@ -6174,7 +6174,7 @@
           <p:cNvPr id="3" name="">
             <a:extLst xmlns:a="http://schemas.openxmlformats.org/drawingml/2006/main">
               <a:ext uri="{FF2B5EF4-FFF2-40B4-BE49-F238E27FC236}">
-                <a16:creationId xmlns:a16="http://schemas.microsoft.com/office/drawing/2014/main" id="{1C18BBFF-7FC0-4BF1-8CCC-87E03ED85068}"/>
+                <a16:creationId xmlns:a16="http://schemas.microsoft.com/office/drawing/2014/main" id="{E8A9FE63-84A1-4A98-AA79-6E3B4BC3BDA7}"/>
               </a:ext>
             </a:extLst>
           </p:cNvPr>
@@ -6224,7 +6224,7 @@
           <p:cNvPr id="4" name="">
             <a:extLst xmlns:a="http://schemas.openxmlformats.org/drawingml/2006/main">
               <a:ext uri="{FF2B5EF4-FFF2-40B4-BE49-F238E27FC236}">
-                <a16:creationId xmlns:a16="http://schemas.microsoft.com/office/drawing/2014/main" id="{E5EB4426-9622-4F84-B14A-09CCD5647ED5}"/>
+                <a16:creationId xmlns:a16="http://schemas.microsoft.com/office/drawing/2014/main" id="{AA058598-A3D1-4C23-A2DC-444B5E3C2186}"/>
               </a:ext>
             </a:extLst>
           </p:cNvPr>
@@ -6257,7 +6257,7 @@
           <p:cNvPr id="5" name="">
             <a:extLst xmlns:a="http://schemas.openxmlformats.org/drawingml/2006/main">
               <a:ext uri="{FF2B5EF4-FFF2-40B4-BE49-F238E27FC236}">
-                <a16:creationId xmlns:a16="http://schemas.microsoft.com/office/drawing/2014/main" id="{6D84C630-D0EA-4AB8-97FC-C41E495CC446}"/>
+                <a16:creationId xmlns:a16="http://schemas.microsoft.com/office/drawing/2014/main" id="{3853FF94-74D5-4059-A77A-92C9F39A085A}"/>
               </a:ext>
             </a:extLst>
           </p:cNvPr>
@@ -6288,7 +6288,7 @@
           <p:cNvPr id="6" name="">
             <a:extLst xmlns:a="http://schemas.openxmlformats.org/drawingml/2006/main">
               <a:ext uri="{FF2B5EF4-FFF2-40B4-BE49-F238E27FC236}">
-                <a16:creationId xmlns:a16="http://schemas.microsoft.com/office/drawing/2014/main" id="{95FE119D-08D5-44C6-A618-E89BB74D9B1D}"/>
+                <a16:creationId xmlns:a16="http://schemas.microsoft.com/office/drawing/2014/main" id="{1828387F-2D11-4E6B-BEFB-9EB40CD7D5EC}"/>
               </a:ext>
             </a:extLst>
           </p:cNvPr>
@@ -6338,7 +6338,7 @@
           <p:cNvPr id="7" name="">
             <a:extLst xmlns:a="http://schemas.openxmlformats.org/drawingml/2006/main">
               <a:ext uri="{FF2B5EF4-FFF2-40B4-BE49-F238E27FC236}">
-                <a16:creationId xmlns:a16="http://schemas.microsoft.com/office/drawing/2014/main" id="{DD726EC6-E25A-47BD-9187-58976966EF0C}"/>
+                <a16:creationId xmlns:a16="http://schemas.microsoft.com/office/drawing/2014/main" id="{DC6338BC-BDFA-4CF1-8B20-9DEAAF9FC5F3}"/>
               </a:ext>
             </a:extLst>
           </p:cNvPr>
@@ -6388,7 +6388,7 @@
           <p:cNvPr id="8" name="">
             <a:extLst xmlns:a="http://schemas.openxmlformats.org/drawingml/2006/main">
               <a:ext uri="{FF2B5EF4-FFF2-40B4-BE49-F238E27FC236}">
-                <a16:creationId xmlns:a16="http://schemas.microsoft.com/office/drawing/2014/main" id="{E6E20E81-AD23-46CD-8411-62FEA7F5BF16}"/>
+                <a16:creationId xmlns:a16="http://schemas.microsoft.com/office/drawing/2014/main" id="{A5FED42C-CB6F-480E-A70A-D1F9BF2A65CF}"/>
               </a:ext>
             </a:extLst>
           </p:cNvPr>
@@ -6421,7 +6421,7 @@
           <p:cNvPr id="9" name="">
             <a:extLst xmlns:a="http://schemas.openxmlformats.org/drawingml/2006/main">
               <a:ext uri="{FF2B5EF4-FFF2-40B4-BE49-F238E27FC236}">
-                <a16:creationId xmlns:a16="http://schemas.microsoft.com/office/drawing/2014/main" id="{A54A2BBC-088A-40CD-9052-1D30C8797EB3}"/>
+                <a16:creationId xmlns:a16="http://schemas.microsoft.com/office/drawing/2014/main" id="{E4E63278-0A6E-4F92-BF3B-86EEDFCDAA8E}"/>
               </a:ext>
             </a:extLst>
           </p:cNvPr>
@@ -6471,7 +6471,7 @@
           <p:cNvPr id="10" name="">
             <a:extLst xmlns:a="http://schemas.openxmlformats.org/drawingml/2006/main">
               <a:ext uri="{FF2B5EF4-FFF2-40B4-BE49-F238E27FC236}">
-                <a16:creationId xmlns:a16="http://schemas.microsoft.com/office/drawing/2014/main" id="{8F0EA229-1F86-4162-8C7F-7F7F49969155}"/>
+                <a16:creationId xmlns:a16="http://schemas.microsoft.com/office/drawing/2014/main" id="{AE0580B6-CC7C-43C9-BE5F-367ABD5D6CFF}"/>
               </a:ext>
             </a:extLst>
           </p:cNvPr>
@@ -6521,7 +6521,7 @@
           <p:cNvPr id="11" name="">
             <a:extLst xmlns:a="http://schemas.openxmlformats.org/drawingml/2006/main">
               <a:ext uri="{FF2B5EF4-FFF2-40B4-BE49-F238E27FC236}">
-                <a16:creationId xmlns:a16="http://schemas.microsoft.com/office/drawing/2014/main" id="{BAB421CE-D08B-4192-964F-D5CC1C9E7C7D}"/>
+                <a16:creationId xmlns:a16="http://schemas.microsoft.com/office/drawing/2014/main" id="{0DFE710B-5797-4520-B7DA-CE9F180B87BD}"/>
               </a:ext>
             </a:extLst>
           </p:cNvPr>
@@ -6571,7 +6571,7 @@
           <p:cNvPr id="12" name="">
             <a:extLst xmlns:a="http://schemas.openxmlformats.org/drawingml/2006/main">
               <a:ext uri="{FF2B5EF4-FFF2-40B4-BE49-F238E27FC236}">
-                <a16:creationId xmlns:a16="http://schemas.microsoft.com/office/drawing/2014/main" id="{EC457D01-8D59-4A6A-B4B8-9885D4032CD2}"/>
+                <a16:creationId xmlns:a16="http://schemas.microsoft.com/office/drawing/2014/main" id="{8592FB1D-46B9-4BCF-8EDE-4C7548867295}"/>
               </a:ext>
             </a:extLst>
           </p:cNvPr>
@@ -6621,7 +6621,7 @@
           <p:cNvPr id="13" name="">
             <a:extLst xmlns:a="http://schemas.openxmlformats.org/drawingml/2006/main">
               <a:ext uri="{FF2B5EF4-FFF2-40B4-BE49-F238E27FC236}">
-                <a16:creationId xmlns:a16="http://schemas.microsoft.com/office/drawing/2014/main" id="{F4CE8147-421B-46EB-8990-555475A9F132}"/>
+                <a16:creationId xmlns:a16="http://schemas.microsoft.com/office/drawing/2014/main" id="{C4380464-D27C-484E-9D31-6F814A931544}"/>
               </a:ext>
             </a:extLst>
           </p:cNvPr>
@@ -6671,7 +6671,7 @@
           <p:cNvPr id="14" name="">
             <a:extLst xmlns:a="http://schemas.openxmlformats.org/drawingml/2006/main">
               <a:ext uri="{FF2B5EF4-FFF2-40B4-BE49-F238E27FC236}">
-                <a16:creationId xmlns:a16="http://schemas.microsoft.com/office/drawing/2014/main" id="{157109FF-9B98-40DE-BC32-BC6CC73D9930}"/>
+                <a16:creationId xmlns:a16="http://schemas.microsoft.com/office/drawing/2014/main" id="{D9D07B57-CA13-4CC8-A750-E1C954FB5704}"/>
               </a:ext>
             </a:extLst>
           </p:cNvPr>
@@ -6702,7 +6702,7 @@
           <p:cNvPr id="15" name="">
             <a:extLst xmlns:a="http://schemas.openxmlformats.org/drawingml/2006/main">
               <a:ext uri="{FF2B5EF4-FFF2-40B4-BE49-F238E27FC236}">
-                <a16:creationId xmlns:a16="http://schemas.microsoft.com/office/drawing/2014/main" id="{3454C0A0-D63F-4278-9C45-FC6FC1038F4B}"/>
+                <a16:creationId xmlns:a16="http://schemas.microsoft.com/office/drawing/2014/main" id="{098C0F75-92C1-483B-BB24-A348D129CC04}"/>
               </a:ext>
             </a:extLst>
           </p:cNvPr>
@@ -6735,7 +6735,7 @@
           <p:cNvPr id="16" name="">
             <a:extLst xmlns:a="http://schemas.openxmlformats.org/drawingml/2006/main">
               <a:ext uri="{FF2B5EF4-FFF2-40B4-BE49-F238E27FC236}">
-                <a16:creationId xmlns:a16="http://schemas.microsoft.com/office/drawing/2014/main" id="{D90167AC-A9D1-45F6-B369-4ABCB7FB4FF1}"/>
+                <a16:creationId xmlns:a16="http://schemas.microsoft.com/office/drawing/2014/main" id="{05B04572-FA7A-4C9B-B05F-F4485F1592AA}"/>
               </a:ext>
             </a:extLst>
           </p:cNvPr>
@@ -6785,7 +6785,7 @@
           <p:cNvPr id="17" name="">
             <a:extLst xmlns:a="http://schemas.openxmlformats.org/drawingml/2006/main">
               <a:ext uri="{FF2B5EF4-FFF2-40B4-BE49-F238E27FC236}">
-                <a16:creationId xmlns:a16="http://schemas.microsoft.com/office/drawing/2014/main" id="{C24EE988-8240-427F-BBCF-FDFBFB463D6F}"/>
+                <a16:creationId xmlns:a16="http://schemas.microsoft.com/office/drawing/2014/main" id="{9E274D47-B7FE-4E99-B8D3-D428278F1C2E}"/>
               </a:ext>
             </a:extLst>
           </p:cNvPr>
@@ -6835,7 +6835,7 @@
           <p:cNvPr id="18" name="">
             <a:extLst xmlns:a="http://schemas.openxmlformats.org/drawingml/2006/main">
               <a:ext uri="{FF2B5EF4-FFF2-40B4-BE49-F238E27FC236}">
-                <a16:creationId xmlns:a16="http://schemas.microsoft.com/office/drawing/2014/main" id="{C73B0386-415F-49CA-AD33-9326177D89D4}"/>
+                <a16:creationId xmlns:a16="http://schemas.microsoft.com/office/drawing/2014/main" id="{8E34A355-4E6A-4914-89FE-E227BF8E5B73}"/>
               </a:ext>
             </a:extLst>
           </p:cNvPr>
@@ -6885,7 +6885,7 @@
           <p:cNvPr id="19" name="">
             <a:extLst xmlns:a="http://schemas.openxmlformats.org/drawingml/2006/main">
               <a:ext uri="{FF2B5EF4-FFF2-40B4-BE49-F238E27FC236}">
-                <a16:creationId xmlns:a16="http://schemas.microsoft.com/office/drawing/2014/main" id="{DBDEBE1B-3359-425F-AC3A-F5E51E8EC27E}"/>
+                <a16:creationId xmlns:a16="http://schemas.microsoft.com/office/drawing/2014/main" id="{4980C211-5DBB-464D-9074-6CB4722C31D9}"/>
               </a:ext>
             </a:extLst>
           </p:cNvPr>
@@ -6935,7 +6935,7 @@
           <p:cNvPr id="20" name="">
             <a:extLst xmlns:a="http://schemas.openxmlformats.org/drawingml/2006/main">
               <a:ext uri="{FF2B5EF4-FFF2-40B4-BE49-F238E27FC236}">
-                <a16:creationId xmlns:a16="http://schemas.microsoft.com/office/drawing/2014/main" id="{A4CE21BD-E29E-4E9C-B006-750E332BF66F}"/>
+                <a16:creationId xmlns:a16="http://schemas.microsoft.com/office/drawing/2014/main" id="{054E158A-1950-4C9D-84D4-06C514CB6E96}"/>
               </a:ext>
             </a:extLst>
           </p:cNvPr>
@@ -6985,7 +6985,7 @@
           <p:cNvPr id="21" name="">
             <a:extLst xmlns:a="http://schemas.openxmlformats.org/drawingml/2006/main">
               <a:ext uri="{FF2B5EF4-FFF2-40B4-BE49-F238E27FC236}">
-                <a16:creationId xmlns:a16="http://schemas.microsoft.com/office/drawing/2014/main" id="{20BFD0C5-1469-496A-B6B7-5F0184BEA2A8}"/>
+                <a16:creationId xmlns:a16="http://schemas.microsoft.com/office/drawing/2014/main" id="{03C8674D-EC03-496E-976B-F93CD5B26C7B}"/>
               </a:ext>
             </a:extLst>
           </p:cNvPr>
@@ -7016,7 +7016,7 @@
           <p:cNvPr id="22" name="">
             <a:extLst xmlns:a="http://schemas.openxmlformats.org/drawingml/2006/main">
               <a:ext uri="{FF2B5EF4-FFF2-40B4-BE49-F238E27FC236}">
-                <a16:creationId xmlns:a16="http://schemas.microsoft.com/office/drawing/2014/main" id="{8CE0B9BB-CB0E-44C7-A5BA-F34179445499}"/>
+                <a16:creationId xmlns:a16="http://schemas.microsoft.com/office/drawing/2014/main" id="{4F8D9284-9902-4F4F-9786-176EFDC71E0C}"/>
               </a:ext>
             </a:extLst>
           </p:cNvPr>
@@ -7049,7 +7049,7 @@
           <p:cNvPr id="23" name="">
             <a:extLst xmlns:a="http://schemas.openxmlformats.org/drawingml/2006/main">
               <a:ext uri="{FF2B5EF4-FFF2-40B4-BE49-F238E27FC236}">
-                <a16:creationId xmlns:a16="http://schemas.microsoft.com/office/drawing/2014/main" id="{161E7F11-3A6B-4C7F-929D-19E6FB453739}"/>
+                <a16:creationId xmlns:a16="http://schemas.microsoft.com/office/drawing/2014/main" id="{F13A99AF-FC0D-434E-A5C4-366168F00045}"/>
               </a:ext>
             </a:extLst>
           </p:cNvPr>
@@ -7099,7 +7099,7 @@
           <p:cNvPr id="24" name="">
             <a:extLst xmlns:a="http://schemas.openxmlformats.org/drawingml/2006/main">
               <a:ext uri="{FF2B5EF4-FFF2-40B4-BE49-F238E27FC236}">
-                <a16:creationId xmlns:a16="http://schemas.microsoft.com/office/drawing/2014/main" id="{F78DEA02-F3AD-4768-8C03-665247B2052B}"/>
+                <a16:creationId xmlns:a16="http://schemas.microsoft.com/office/drawing/2014/main" id="{E6DC3C27-FFFE-472D-9B72-51460A25E0FA}"/>
               </a:ext>
             </a:extLst>
           </p:cNvPr>
@@ -7149,7 +7149,7 @@
           <p:cNvPr id="25" name="">
             <a:extLst xmlns:a="http://schemas.openxmlformats.org/drawingml/2006/main">
               <a:ext uri="{FF2B5EF4-FFF2-40B4-BE49-F238E27FC236}">
-                <a16:creationId xmlns:a16="http://schemas.microsoft.com/office/drawing/2014/main" id="{00A85718-726C-413A-B0C5-311C591DE0D2}"/>
+                <a16:creationId xmlns:a16="http://schemas.microsoft.com/office/drawing/2014/main" id="{0E69DE02-80F6-44CD-A3FA-F11DB06CAA3E}"/>
               </a:ext>
             </a:extLst>
           </p:cNvPr>
@@ -7199,7 +7199,7 @@
           <p:cNvPr id="26" name="">
             <a:extLst xmlns:a="http://schemas.openxmlformats.org/drawingml/2006/main">
               <a:ext uri="{FF2B5EF4-FFF2-40B4-BE49-F238E27FC236}">
-                <a16:creationId xmlns:a16="http://schemas.microsoft.com/office/drawing/2014/main" id="{6BB3A2F2-796B-42CB-9B56-2B9B72F62A92}"/>
+                <a16:creationId xmlns:a16="http://schemas.microsoft.com/office/drawing/2014/main" id="{E295D70A-20A6-43D8-B0CC-C9C6B52794F0}"/>
               </a:ext>
             </a:extLst>
           </p:cNvPr>
@@ -7249,7 +7249,7 @@
           <p:cNvPr id="27" name="">
             <a:extLst xmlns:a="http://schemas.openxmlformats.org/drawingml/2006/main">
               <a:ext uri="{FF2B5EF4-FFF2-40B4-BE49-F238E27FC236}">
-                <a16:creationId xmlns:a16="http://schemas.microsoft.com/office/drawing/2014/main" id="{D705CB99-70E0-4EFC-ADF0-94A2ADE8CC09}"/>
+                <a16:creationId xmlns:a16="http://schemas.microsoft.com/office/drawing/2014/main" id="{A5D04B8B-04DC-4C48-8659-57EB1941B765}"/>
               </a:ext>
             </a:extLst>
           </p:cNvPr>
@@ -7299,7 +7299,7 @@
           <p:cNvPr id="28" name="">
             <a:extLst xmlns:a="http://schemas.openxmlformats.org/drawingml/2006/main">
               <a:ext uri="{FF2B5EF4-FFF2-40B4-BE49-F238E27FC236}">
-                <a16:creationId xmlns:a16="http://schemas.microsoft.com/office/drawing/2014/main" id="{ED281430-0C99-4637-A2A8-BBB3A42A7DDC}"/>
+                <a16:creationId xmlns:a16="http://schemas.microsoft.com/office/drawing/2014/main" id="{9BDB66AE-089F-4FD5-B31E-47F07DEFCDAC}"/>
               </a:ext>
             </a:extLst>
           </p:cNvPr>
@@ -7330,7 +7330,7 @@
           <p:cNvPr id="29" name="">
             <a:extLst xmlns:a="http://schemas.openxmlformats.org/drawingml/2006/main">
               <a:ext uri="{FF2B5EF4-FFF2-40B4-BE49-F238E27FC236}">
-                <a16:creationId xmlns:a16="http://schemas.microsoft.com/office/drawing/2014/main" id="{57E5DD79-9BA1-42C0-8C49-288F62803988}"/>
+                <a16:creationId xmlns:a16="http://schemas.microsoft.com/office/drawing/2014/main" id="{5F3F2163-19A5-4C57-813F-D30BC8C2B548}"/>
               </a:ext>
             </a:extLst>
           </p:cNvPr>
@@ -7363,7 +7363,7 @@
           <p:cNvPr id="30" name="">
             <a:extLst xmlns:a="http://schemas.openxmlformats.org/drawingml/2006/main">
               <a:ext uri="{FF2B5EF4-FFF2-40B4-BE49-F238E27FC236}">
-                <a16:creationId xmlns:a16="http://schemas.microsoft.com/office/drawing/2014/main" id="{D59C70DA-A6A3-4926-87B7-3675496D7048}"/>
+                <a16:creationId xmlns:a16="http://schemas.microsoft.com/office/drawing/2014/main" id="{7B42FA55-A643-43A6-BB1E-A040381214E5}"/>
               </a:ext>
             </a:extLst>
           </p:cNvPr>
@@ -7413,7 +7413,7 @@
           <p:cNvPr id="31" name="">
             <a:extLst xmlns:a="http://schemas.openxmlformats.org/drawingml/2006/main">
               <a:ext uri="{FF2B5EF4-FFF2-40B4-BE49-F238E27FC236}">
-                <a16:creationId xmlns:a16="http://schemas.microsoft.com/office/drawing/2014/main" id="{6447E14E-C317-4600-9762-DB809A08F9F1}"/>
+                <a16:creationId xmlns:a16="http://schemas.microsoft.com/office/drawing/2014/main" id="{CCE9DE54-C924-417B-AA31-194FFCE0E426}"/>
               </a:ext>
             </a:extLst>
           </p:cNvPr>
@@ -7463,7 +7463,7 @@
           <p:cNvPr id="32" name="">
             <a:extLst xmlns:a="http://schemas.openxmlformats.org/drawingml/2006/main">
               <a:ext uri="{FF2B5EF4-FFF2-40B4-BE49-F238E27FC236}">
-                <a16:creationId xmlns:a16="http://schemas.microsoft.com/office/drawing/2014/main" id="{5DD63B95-EBB7-482A-8E02-D92B674EC88D}"/>
+                <a16:creationId xmlns:a16="http://schemas.microsoft.com/office/drawing/2014/main" id="{3CD6C1FA-09C4-4300-8BBA-C78AC9BF68CA}"/>
               </a:ext>
             </a:extLst>
           </p:cNvPr>
@@ -7513,7 +7513,7 @@
           <p:cNvPr id="33" name="">
             <a:extLst xmlns:a="http://schemas.openxmlformats.org/drawingml/2006/main">
               <a:ext uri="{FF2B5EF4-FFF2-40B4-BE49-F238E27FC236}">
-                <a16:creationId xmlns:a16="http://schemas.microsoft.com/office/drawing/2014/main" id="{A71BA078-B292-4428-853B-DA54E8FD1E6E}"/>
+                <a16:creationId xmlns:a16="http://schemas.microsoft.com/office/drawing/2014/main" id="{7F7E1E85-5E58-4072-A66D-DCB2D67C0906}"/>
               </a:ext>
             </a:extLst>
           </p:cNvPr>
@@ -7563,7 +7563,7 @@
           <p:cNvPr id="34" name="">
             <a:extLst xmlns:a="http://schemas.openxmlformats.org/drawingml/2006/main">
               <a:ext uri="{FF2B5EF4-FFF2-40B4-BE49-F238E27FC236}">
-                <a16:creationId xmlns:a16="http://schemas.microsoft.com/office/drawing/2014/main" id="{FE76687A-0A0E-4C82-B1A5-1BBBF1BBAFC9}"/>
+                <a16:creationId xmlns:a16="http://schemas.microsoft.com/office/drawing/2014/main" id="{F8BD62FC-4456-43BB-9D67-7DCC4CA31599}"/>
               </a:ext>
             </a:extLst>
           </p:cNvPr>
@@ -7611,7 +7611,7 @@
     </p:spTree>
     <p:extLst>
       <p:ext uri="{BB962C8B-B14F-4D97-AF65-F5344CB8AC3E}">
-        <p14:creationId xmlns:p14="http://schemas.microsoft.com/office/powerpoint/2010/main" val="760516806"/>
+        <p14:creationId xmlns:p14="http://schemas.microsoft.com/office/powerpoint/2010/main" val="1447540326"/>
       </p:ext>
     </p:extLst>
   </p:cSld>
@@ -7642,7 +7642,7 @@
           <p:cNvPr id="1" name="">
             <a:extLst xmlns:a="http://schemas.openxmlformats.org/drawingml/2006/main">
               <a:ext uri="{FF2B5EF4-FFF2-40B4-BE49-F238E27FC236}">
-                <a16:creationId xmlns:a16="http://schemas.microsoft.com/office/drawing/2014/main" id="{EACD4B50-0031-4029-9103-520F5DDA4EBA}"/>
+                <a16:creationId xmlns:a16="http://schemas.microsoft.com/office/drawing/2014/main" id="{FD1D36F2-9C74-40F7-A589-636EBAD3F7B6}"/>
               </a:ext>
             </a:extLst>
           </p:cNvPr>
@@ -7677,7 +7677,7 @@
           <p:nvPr/>
         </p:nvPicPr>
         <p:blipFill>
-          <a:blip xmlns:r="http://schemas.openxmlformats.org/officeDocument/2006/relationships" xmlns:a="http://schemas.openxmlformats.org/drawingml/2006/main" r:embed="Rf91210db05ee4f02"/>
+          <a:blip xmlns:r="http://schemas.openxmlformats.org/officeDocument/2006/relationships" xmlns:a="http://schemas.openxmlformats.org/drawingml/2006/main" r:embed="R8794afc07a1e462b"/>
           <a:stretch xmlns:a="http://schemas.openxmlformats.org/drawingml/2006/main"/>
         </p:blipFill>
         <p:spPr>
@@ -7695,7 +7695,7 @@
           <p:cNvPr id="3" name="">
             <a:extLst xmlns:a="http://schemas.openxmlformats.org/drawingml/2006/main">
               <a:ext uri="{FF2B5EF4-FFF2-40B4-BE49-F238E27FC236}">
-                <a16:creationId xmlns:a16="http://schemas.microsoft.com/office/drawing/2014/main" id="{074FBBF3-0D73-4A4C-9B81-6120EC8E7FAB}"/>
+                <a16:creationId xmlns:a16="http://schemas.microsoft.com/office/drawing/2014/main" id="{4EDD620F-B792-42A8-9458-57BFB9A1ED17}"/>
               </a:ext>
             </a:extLst>
           </p:cNvPr>
@@ -7745,7 +7745,7 @@
           <p:cNvPr id="4" name="">
             <a:extLst xmlns:a="http://schemas.openxmlformats.org/drawingml/2006/main">
               <a:ext uri="{FF2B5EF4-FFF2-40B4-BE49-F238E27FC236}">
-                <a16:creationId xmlns:a16="http://schemas.microsoft.com/office/drawing/2014/main" id="{2564B4FC-2319-448B-9879-007C265B83E5}"/>
+                <a16:creationId xmlns:a16="http://schemas.microsoft.com/office/drawing/2014/main" id="{3F0012EE-23B6-4756-961F-B77E6074B8F2}"/>
               </a:ext>
             </a:extLst>
           </p:cNvPr>
@@ -7778,7 +7778,7 @@
           <p:cNvPr id="5" name="">
             <a:extLst xmlns:a="http://schemas.openxmlformats.org/drawingml/2006/main">
               <a:ext uri="{FF2B5EF4-FFF2-40B4-BE49-F238E27FC236}">
-                <a16:creationId xmlns:a16="http://schemas.microsoft.com/office/drawing/2014/main" id="{6970F37E-46E1-408B-99F0-D8462B224008}"/>
+                <a16:creationId xmlns:a16="http://schemas.microsoft.com/office/drawing/2014/main" id="{1A73F8A7-E5B7-4592-8DF4-4E128C8F6834}"/>
               </a:ext>
             </a:extLst>
           </p:cNvPr>
@@ -7809,7 +7809,7 @@
           <p:cNvPr id="6" name="">
             <a:extLst xmlns:a="http://schemas.openxmlformats.org/drawingml/2006/main">
               <a:ext uri="{FF2B5EF4-FFF2-40B4-BE49-F238E27FC236}">
-                <a16:creationId xmlns:a16="http://schemas.microsoft.com/office/drawing/2014/main" id="{6AC3FCF6-550D-4EB8-B586-4E77B85F17E1}"/>
+                <a16:creationId xmlns:a16="http://schemas.microsoft.com/office/drawing/2014/main" id="{355E3EFF-3A37-4ABA-90AB-C05EB2B783FD}"/>
               </a:ext>
             </a:extLst>
           </p:cNvPr>
@@ -7859,7 +7859,7 @@
           <p:cNvPr id="7" name="">
             <a:extLst xmlns:a="http://schemas.openxmlformats.org/drawingml/2006/main">
               <a:ext uri="{FF2B5EF4-FFF2-40B4-BE49-F238E27FC236}">
-                <a16:creationId xmlns:a16="http://schemas.microsoft.com/office/drawing/2014/main" id="{3BFAB9F2-5EAC-4117-BA30-8A50FE3269DB}"/>
+                <a16:creationId xmlns:a16="http://schemas.microsoft.com/office/drawing/2014/main" id="{AA96BC2D-5FB5-4A93-AF6D-3711CD1BDBCA}"/>
               </a:ext>
             </a:extLst>
           </p:cNvPr>
@@ -7909,7 +7909,7 @@
           <p:cNvPr id="8" name="">
             <a:extLst xmlns:a="http://schemas.openxmlformats.org/drawingml/2006/main">
               <a:ext uri="{FF2B5EF4-FFF2-40B4-BE49-F238E27FC236}">
-                <a16:creationId xmlns:a16="http://schemas.microsoft.com/office/drawing/2014/main" id="{949E4DE0-44A1-4083-A9B6-B34F69162BEA}"/>
+                <a16:creationId xmlns:a16="http://schemas.microsoft.com/office/drawing/2014/main" id="{5C612B60-EAD7-4551-8842-E432C1088AB2}"/>
               </a:ext>
             </a:extLst>
           </p:cNvPr>
@@ -7944,7 +7944,7 @@
           <p:cNvPr id="9" name="">
             <a:extLst xmlns:a="http://schemas.openxmlformats.org/drawingml/2006/main">
               <a:ext uri="{FF2B5EF4-FFF2-40B4-BE49-F238E27FC236}">
-                <a16:creationId xmlns:a16="http://schemas.microsoft.com/office/drawing/2014/main" id="{0CBF31BA-3AA1-4E5E-A423-69CF556352A8}"/>
+                <a16:creationId xmlns:a16="http://schemas.microsoft.com/office/drawing/2014/main" id="{25C1739B-AAB3-4F46-B0F6-47DE6CFD7B89}"/>
               </a:ext>
             </a:extLst>
           </p:cNvPr>
@@ -7994,7 +7994,7 @@
           <p:cNvPr id="10" name="">
             <a:extLst xmlns:a="http://schemas.openxmlformats.org/drawingml/2006/main">
               <a:ext uri="{FF2B5EF4-FFF2-40B4-BE49-F238E27FC236}">
-                <a16:creationId xmlns:a16="http://schemas.microsoft.com/office/drawing/2014/main" id="{09378161-F34D-4E49-B306-7AA46645C00B}"/>
+                <a16:creationId xmlns:a16="http://schemas.microsoft.com/office/drawing/2014/main" id="{8A8A48DA-98D5-46B6-A85B-BD3BF8ABC220}"/>
               </a:ext>
             </a:extLst>
           </p:cNvPr>
@@ -8044,7 +8044,7 @@
           <p:cNvPr id="11" name="">
             <a:extLst xmlns:a="http://schemas.openxmlformats.org/drawingml/2006/main">
               <a:ext uri="{FF2B5EF4-FFF2-40B4-BE49-F238E27FC236}">
-                <a16:creationId xmlns:a16="http://schemas.microsoft.com/office/drawing/2014/main" id="{CFF97530-357E-42B4-845E-C3B5287BA8F9}"/>
+                <a16:creationId xmlns:a16="http://schemas.microsoft.com/office/drawing/2014/main" id="{A76C5239-6E79-469D-B7AF-019E79F7F397}"/>
               </a:ext>
             </a:extLst>
           </p:cNvPr>
@@ -8094,7 +8094,7 @@
           <p:cNvPr id="12" name="">
             <a:extLst xmlns:a="http://schemas.openxmlformats.org/drawingml/2006/main">
               <a:ext uri="{FF2B5EF4-FFF2-40B4-BE49-F238E27FC236}">
-                <a16:creationId xmlns:a16="http://schemas.microsoft.com/office/drawing/2014/main" id="{4840DF49-AD89-43C8-9938-DDF243D27E35}"/>
+                <a16:creationId xmlns:a16="http://schemas.microsoft.com/office/drawing/2014/main" id="{A1024642-4E4D-416F-A149-7276ABDCB3A9}"/>
               </a:ext>
             </a:extLst>
           </p:cNvPr>
@@ -8125,7 +8125,7 @@
           <p:cNvPr id="13" name="">
             <a:extLst xmlns:a="http://schemas.openxmlformats.org/drawingml/2006/main">
               <a:ext uri="{FF2B5EF4-FFF2-40B4-BE49-F238E27FC236}">
-                <a16:creationId xmlns:a16="http://schemas.microsoft.com/office/drawing/2014/main" id="{F012933B-E821-4D7B-81E8-018620347C2B}"/>
+                <a16:creationId xmlns:a16="http://schemas.microsoft.com/office/drawing/2014/main" id="{51476031-D341-4CE7-A79F-CC66EC362A2D}"/>
               </a:ext>
             </a:extLst>
           </p:cNvPr>
@@ -8175,7 +8175,7 @@
           <p:cNvPr id="14" name="">
             <a:extLst xmlns:a="http://schemas.openxmlformats.org/drawingml/2006/main">
               <a:ext uri="{FF2B5EF4-FFF2-40B4-BE49-F238E27FC236}">
-                <a16:creationId xmlns:a16="http://schemas.microsoft.com/office/drawing/2014/main" id="{42AAF263-7518-47A7-B0F9-DEDFD584A38B}"/>
+                <a16:creationId xmlns:a16="http://schemas.microsoft.com/office/drawing/2014/main" id="{5F6B94C9-8758-4483-82B2-F6566C9AE3B5}"/>
               </a:ext>
             </a:extLst>
           </p:cNvPr>
@@ -8225,7 +8225,7 @@
           <p:cNvPr id="15" name="">
             <a:extLst xmlns:a="http://schemas.openxmlformats.org/drawingml/2006/main">
               <a:ext uri="{FF2B5EF4-FFF2-40B4-BE49-F238E27FC236}">
-                <a16:creationId xmlns:a16="http://schemas.microsoft.com/office/drawing/2014/main" id="{06B8833E-9A52-4B99-B554-C35D21B442DA}"/>
+                <a16:creationId xmlns:a16="http://schemas.microsoft.com/office/drawing/2014/main" id="{5CDEF054-0844-4F51-81FF-AA07A53F2021}"/>
               </a:ext>
             </a:extLst>
           </p:cNvPr>
@@ -8275,7 +8275,7 @@
           <p:cNvPr id="16" name="">
             <a:extLst xmlns:a="http://schemas.openxmlformats.org/drawingml/2006/main">
               <a:ext uri="{FF2B5EF4-FFF2-40B4-BE49-F238E27FC236}">
-                <a16:creationId xmlns:a16="http://schemas.microsoft.com/office/drawing/2014/main" id="{7707536A-012C-4BB5-8BF4-722985FA8F12}"/>
+                <a16:creationId xmlns:a16="http://schemas.microsoft.com/office/drawing/2014/main" id="{20ADEB70-F931-4BFE-A4A3-04FC00658058}"/>
               </a:ext>
             </a:extLst>
           </p:cNvPr>
@@ -8325,7 +8325,7 @@
           <p:cNvPr id="17" name="">
             <a:extLst xmlns:a="http://schemas.openxmlformats.org/drawingml/2006/main">
               <a:ext uri="{FF2B5EF4-FFF2-40B4-BE49-F238E27FC236}">
-                <a16:creationId xmlns:a16="http://schemas.microsoft.com/office/drawing/2014/main" id="{B4FFA2CC-9D59-4A28-A7AF-AF6D40EBC6C5}"/>
+                <a16:creationId xmlns:a16="http://schemas.microsoft.com/office/drawing/2014/main" id="{4B08092C-19AC-4B38-B7AA-A6DE6CB9609D}"/>
               </a:ext>
             </a:extLst>
           </p:cNvPr>
@@ -8360,7 +8360,7 @@
           <p:cNvPr id="18" name="">
             <a:extLst xmlns:a="http://schemas.openxmlformats.org/drawingml/2006/main">
               <a:ext uri="{FF2B5EF4-FFF2-40B4-BE49-F238E27FC236}">
-                <a16:creationId xmlns:a16="http://schemas.microsoft.com/office/drawing/2014/main" id="{27A66984-0401-4DA1-8033-D0A386F2D720}"/>
+                <a16:creationId xmlns:a16="http://schemas.microsoft.com/office/drawing/2014/main" id="{4C736049-50F5-41D3-AEA9-A7D4FF327394}"/>
               </a:ext>
             </a:extLst>
           </p:cNvPr>
@@ -8410,7 +8410,7 @@
           <p:cNvPr id="19" name="">
             <a:extLst xmlns:a="http://schemas.openxmlformats.org/drawingml/2006/main">
               <a:ext uri="{FF2B5EF4-FFF2-40B4-BE49-F238E27FC236}">
-                <a16:creationId xmlns:a16="http://schemas.microsoft.com/office/drawing/2014/main" id="{AD1E1489-E24B-47E4-AA26-257AC7591F85}"/>
+                <a16:creationId xmlns:a16="http://schemas.microsoft.com/office/drawing/2014/main" id="{506A5F10-5C32-4D39-BAAD-1569780FAB50}"/>
               </a:ext>
             </a:extLst>
           </p:cNvPr>
@@ -8460,7 +8460,7 @@
           <p:cNvPr id="20" name="">
             <a:extLst xmlns:a="http://schemas.openxmlformats.org/drawingml/2006/main">
               <a:ext uri="{FF2B5EF4-FFF2-40B4-BE49-F238E27FC236}">
-                <a16:creationId xmlns:a16="http://schemas.microsoft.com/office/drawing/2014/main" id="{80F0013C-C7B7-4353-AA3B-3724BF426C3E}"/>
+                <a16:creationId xmlns:a16="http://schemas.microsoft.com/office/drawing/2014/main" id="{7BFCC068-BAD1-4CE3-9285-159E7E8F58F6}"/>
               </a:ext>
             </a:extLst>
           </p:cNvPr>
@@ -8510,7 +8510,7 @@
           <p:cNvPr id="21" name="">
             <a:extLst xmlns:a="http://schemas.openxmlformats.org/drawingml/2006/main">
               <a:ext uri="{FF2B5EF4-FFF2-40B4-BE49-F238E27FC236}">
-                <a16:creationId xmlns:a16="http://schemas.microsoft.com/office/drawing/2014/main" id="{06BB671B-5BCC-4FC9-8B39-45D95464A4FC}"/>
+                <a16:creationId xmlns:a16="http://schemas.microsoft.com/office/drawing/2014/main" id="{4D07F9D0-BD28-4010-A727-30CCD47DB6C1}"/>
               </a:ext>
             </a:extLst>
           </p:cNvPr>
@@ -8541,7 +8541,7 @@
           <p:cNvPr id="22" name="">
             <a:extLst xmlns:a="http://schemas.openxmlformats.org/drawingml/2006/main">
               <a:ext uri="{FF2B5EF4-FFF2-40B4-BE49-F238E27FC236}">
-                <a16:creationId xmlns:a16="http://schemas.microsoft.com/office/drawing/2014/main" id="{61CABCB2-DB86-47EF-AD14-28DA22D1BD73}"/>
+                <a16:creationId xmlns:a16="http://schemas.microsoft.com/office/drawing/2014/main" id="{4FEA612D-FC22-4437-B512-6737027E6185}"/>
               </a:ext>
             </a:extLst>
           </p:cNvPr>
@@ -8591,7 +8591,7 @@
           <p:cNvPr id="23" name="">
             <a:extLst xmlns:a="http://schemas.openxmlformats.org/drawingml/2006/main">
               <a:ext uri="{FF2B5EF4-FFF2-40B4-BE49-F238E27FC236}">
-                <a16:creationId xmlns:a16="http://schemas.microsoft.com/office/drawing/2014/main" id="{A8B6288F-90FC-42BD-9988-F33092C8105D}"/>
+                <a16:creationId xmlns:a16="http://schemas.microsoft.com/office/drawing/2014/main" id="{49502C39-DAAD-4ADD-9CE9-882FEE11A6DB}"/>
               </a:ext>
             </a:extLst>
           </p:cNvPr>
@@ -8641,7 +8641,7 @@
           <p:cNvPr id="24" name="">
             <a:extLst xmlns:a="http://schemas.openxmlformats.org/drawingml/2006/main">
               <a:ext uri="{FF2B5EF4-FFF2-40B4-BE49-F238E27FC236}">
-                <a16:creationId xmlns:a16="http://schemas.microsoft.com/office/drawing/2014/main" id="{14FA4F1D-E11A-475C-9697-73EC049800B6}"/>
+                <a16:creationId xmlns:a16="http://schemas.microsoft.com/office/drawing/2014/main" id="{97540792-BE0A-459F-906E-937F18FE222E}"/>
               </a:ext>
             </a:extLst>
           </p:cNvPr>
@@ -8691,7 +8691,7 @@
           <p:cNvPr id="25" name="">
             <a:extLst xmlns:a="http://schemas.openxmlformats.org/drawingml/2006/main">
               <a:ext uri="{FF2B5EF4-FFF2-40B4-BE49-F238E27FC236}">
-                <a16:creationId xmlns:a16="http://schemas.microsoft.com/office/drawing/2014/main" id="{47968AC9-93DD-4E25-8623-A239EF2C731E}"/>
+                <a16:creationId xmlns:a16="http://schemas.microsoft.com/office/drawing/2014/main" id="{7C65F979-A9AD-43D8-A8F4-368A2D423CC7}"/>
               </a:ext>
             </a:extLst>
           </p:cNvPr>
@@ -8741,7 +8741,7 @@
           <p:cNvPr id="26" name="">
             <a:extLst xmlns:a="http://schemas.openxmlformats.org/drawingml/2006/main">
               <a:ext uri="{FF2B5EF4-FFF2-40B4-BE49-F238E27FC236}">
-                <a16:creationId xmlns:a16="http://schemas.microsoft.com/office/drawing/2014/main" id="{7B13CBAB-36F2-434A-A99B-70F583FBA7DC}"/>
+                <a16:creationId xmlns:a16="http://schemas.microsoft.com/office/drawing/2014/main" id="{66964192-894C-4BC9-8EE8-6FE91AE92AC7}"/>
               </a:ext>
             </a:extLst>
           </p:cNvPr>
@@ -8776,7 +8776,7 @@
           <p:cNvPr id="27" name="">
             <a:extLst xmlns:a="http://schemas.openxmlformats.org/drawingml/2006/main">
               <a:ext uri="{FF2B5EF4-FFF2-40B4-BE49-F238E27FC236}">
-                <a16:creationId xmlns:a16="http://schemas.microsoft.com/office/drawing/2014/main" id="{C9D101E8-19E2-48A5-8EF8-73B11735EE7B}"/>
+                <a16:creationId xmlns:a16="http://schemas.microsoft.com/office/drawing/2014/main" id="{80D34DE6-6779-4AE2-8081-84A2110FF94E}"/>
               </a:ext>
             </a:extLst>
           </p:cNvPr>
@@ -8826,7 +8826,7 @@
           <p:cNvPr id="28" name="">
             <a:extLst xmlns:a="http://schemas.openxmlformats.org/drawingml/2006/main">
               <a:ext uri="{FF2B5EF4-FFF2-40B4-BE49-F238E27FC236}">
-                <a16:creationId xmlns:a16="http://schemas.microsoft.com/office/drawing/2014/main" id="{BB46E4CB-6707-4654-9344-939BE81C8880}"/>
+                <a16:creationId xmlns:a16="http://schemas.microsoft.com/office/drawing/2014/main" id="{FD8DDA33-9254-4B0F-8563-4C109954A6A5}"/>
               </a:ext>
             </a:extLst>
           </p:cNvPr>
@@ -8876,7 +8876,7 @@
           <p:cNvPr id="29" name="">
             <a:extLst xmlns:a="http://schemas.openxmlformats.org/drawingml/2006/main">
               <a:ext uri="{FF2B5EF4-FFF2-40B4-BE49-F238E27FC236}">
-                <a16:creationId xmlns:a16="http://schemas.microsoft.com/office/drawing/2014/main" id="{4428D944-5E03-4DA4-AA68-A23A530B6BC8}"/>
+                <a16:creationId xmlns:a16="http://schemas.microsoft.com/office/drawing/2014/main" id="{24CA8A33-941C-4D68-8282-4CA7C86A4A1D}"/>
               </a:ext>
             </a:extLst>
           </p:cNvPr>
@@ -8926,7 +8926,7 @@
           <p:cNvPr id="30" name="">
             <a:extLst xmlns:a="http://schemas.openxmlformats.org/drawingml/2006/main">
               <a:ext uri="{FF2B5EF4-FFF2-40B4-BE49-F238E27FC236}">
-                <a16:creationId xmlns:a16="http://schemas.microsoft.com/office/drawing/2014/main" id="{8E8AD9F8-A088-46E0-93BB-A82D8E8E7EDA}"/>
+                <a16:creationId xmlns:a16="http://schemas.microsoft.com/office/drawing/2014/main" id="{7DB16E5C-99C6-4135-84E4-76CE70A86849}"/>
               </a:ext>
             </a:extLst>
           </p:cNvPr>
@@ -8957,7 +8957,7 @@
           <p:cNvPr id="31" name="">
             <a:extLst xmlns:a="http://schemas.openxmlformats.org/drawingml/2006/main">
               <a:ext uri="{FF2B5EF4-FFF2-40B4-BE49-F238E27FC236}">
-                <a16:creationId xmlns:a16="http://schemas.microsoft.com/office/drawing/2014/main" id="{7BDFE9C5-55DA-42BC-BE3C-54D5EE0FA81D}"/>
+                <a16:creationId xmlns:a16="http://schemas.microsoft.com/office/drawing/2014/main" id="{68864FC0-2E32-4B9A-A37F-42798EAD37F8}"/>
               </a:ext>
             </a:extLst>
           </p:cNvPr>
@@ -9007,7 +9007,7 @@
           <p:cNvPr id="32" name="">
             <a:extLst xmlns:a="http://schemas.openxmlformats.org/drawingml/2006/main">
               <a:ext uri="{FF2B5EF4-FFF2-40B4-BE49-F238E27FC236}">
-                <a16:creationId xmlns:a16="http://schemas.microsoft.com/office/drawing/2014/main" id="{3481E88B-FD2F-4CCC-B281-7BC22BF16313}"/>
+                <a16:creationId xmlns:a16="http://schemas.microsoft.com/office/drawing/2014/main" id="{0B6E3E39-B9AD-4A03-881B-F5056AB0A01E}"/>
               </a:ext>
             </a:extLst>
           </p:cNvPr>
@@ -9057,7 +9057,7 @@
           <p:cNvPr id="33" name="">
             <a:extLst xmlns:a="http://schemas.openxmlformats.org/drawingml/2006/main">
               <a:ext uri="{FF2B5EF4-FFF2-40B4-BE49-F238E27FC236}">
-                <a16:creationId xmlns:a16="http://schemas.microsoft.com/office/drawing/2014/main" id="{41E22C46-30F8-40D8-B9DA-02204B394F4C}"/>
+                <a16:creationId xmlns:a16="http://schemas.microsoft.com/office/drawing/2014/main" id="{9562559F-CBC6-4E46-8530-6BD28170BFB8}"/>
               </a:ext>
             </a:extLst>
           </p:cNvPr>
@@ -9107,7 +9107,7 @@
           <p:cNvPr id="34" name="">
             <a:extLst xmlns:a="http://schemas.openxmlformats.org/drawingml/2006/main">
               <a:ext uri="{FF2B5EF4-FFF2-40B4-BE49-F238E27FC236}">
-                <a16:creationId xmlns:a16="http://schemas.microsoft.com/office/drawing/2014/main" id="{B1C43CF9-A53B-4B41-819C-190DA1964710}"/>
+                <a16:creationId xmlns:a16="http://schemas.microsoft.com/office/drawing/2014/main" id="{3EBB28A7-69D4-4181-8A49-A0AE287B704D}"/>
               </a:ext>
             </a:extLst>
           </p:cNvPr>
@@ -9157,7 +9157,7 @@
           <p:cNvPr id="35" name="">
             <a:extLst xmlns:a="http://schemas.openxmlformats.org/drawingml/2006/main">
               <a:ext uri="{FF2B5EF4-FFF2-40B4-BE49-F238E27FC236}">
-                <a16:creationId xmlns:a16="http://schemas.microsoft.com/office/drawing/2014/main" id="{A8805F73-7FB1-439A-9BAB-3D68FCF9A722}"/>
+                <a16:creationId xmlns:a16="http://schemas.microsoft.com/office/drawing/2014/main" id="{8F726D41-F50E-4109-AF03-398DB403AB54}"/>
               </a:ext>
             </a:extLst>
           </p:cNvPr>
@@ -9192,7 +9192,7 @@
           <p:cNvPr id="36" name="">
             <a:extLst xmlns:a="http://schemas.openxmlformats.org/drawingml/2006/main">
               <a:ext uri="{FF2B5EF4-FFF2-40B4-BE49-F238E27FC236}">
-                <a16:creationId xmlns:a16="http://schemas.microsoft.com/office/drawing/2014/main" id="{94E865F2-CC26-4A1E-AD14-F16753C8B1CC}"/>
+                <a16:creationId xmlns:a16="http://schemas.microsoft.com/office/drawing/2014/main" id="{FD236E02-33E6-4E4E-B476-3EF5AC0AE27A}"/>
               </a:ext>
             </a:extLst>
           </p:cNvPr>
@@ -9242,7 +9242,7 @@
           <p:cNvPr id="37" name="">
             <a:extLst xmlns:a="http://schemas.openxmlformats.org/drawingml/2006/main">
               <a:ext uri="{FF2B5EF4-FFF2-40B4-BE49-F238E27FC236}">
-                <a16:creationId xmlns:a16="http://schemas.microsoft.com/office/drawing/2014/main" id="{C216B952-7601-406E-8A6C-F35C051B3A21}"/>
+                <a16:creationId xmlns:a16="http://schemas.microsoft.com/office/drawing/2014/main" id="{2C369955-6464-4922-8345-9B0B31F890AC}"/>
               </a:ext>
             </a:extLst>
           </p:cNvPr>
@@ -9292,7 +9292,7 @@
           <p:cNvPr id="38" name="">
             <a:extLst xmlns:a="http://schemas.openxmlformats.org/drawingml/2006/main">
               <a:ext uri="{FF2B5EF4-FFF2-40B4-BE49-F238E27FC236}">
-                <a16:creationId xmlns:a16="http://schemas.microsoft.com/office/drawing/2014/main" id="{E37DEE80-4B3C-4029-9962-772E0A9E66D5}"/>
+                <a16:creationId xmlns:a16="http://schemas.microsoft.com/office/drawing/2014/main" id="{82D091D5-293B-4BAB-BE92-502E1B83D29F}"/>
               </a:ext>
             </a:extLst>
           </p:cNvPr>
@@ -9342,7 +9342,7 @@
           <p:cNvPr id="39" name="">
             <a:extLst xmlns:a="http://schemas.openxmlformats.org/drawingml/2006/main">
               <a:ext uri="{FF2B5EF4-FFF2-40B4-BE49-F238E27FC236}">
-                <a16:creationId xmlns:a16="http://schemas.microsoft.com/office/drawing/2014/main" id="{D63FFCB4-F20A-4E69-A818-892BAE1F5775}"/>
+                <a16:creationId xmlns:a16="http://schemas.microsoft.com/office/drawing/2014/main" id="{9ACF2FD7-8623-49F7-8B9C-A6B41A5ED7DC}"/>
               </a:ext>
             </a:extLst>
           </p:cNvPr>
@@ -9373,7 +9373,7 @@
           <p:cNvPr id="40" name="">
             <a:extLst xmlns:a="http://schemas.openxmlformats.org/drawingml/2006/main">
               <a:ext uri="{FF2B5EF4-FFF2-40B4-BE49-F238E27FC236}">
-                <a16:creationId xmlns:a16="http://schemas.microsoft.com/office/drawing/2014/main" id="{1FD6F8DD-DEE6-4C80-AAC1-30E63C513C3A}"/>
+                <a16:creationId xmlns:a16="http://schemas.microsoft.com/office/drawing/2014/main" id="{10C78134-AB79-4E06-823E-A1DC8DF41801}"/>
               </a:ext>
             </a:extLst>
           </p:cNvPr>
@@ -9423,7 +9423,7 @@
           <p:cNvPr id="41" name="">
             <a:extLst xmlns:a="http://schemas.openxmlformats.org/drawingml/2006/main">
               <a:ext uri="{FF2B5EF4-FFF2-40B4-BE49-F238E27FC236}">
-                <a16:creationId xmlns:a16="http://schemas.microsoft.com/office/drawing/2014/main" id="{042EB54D-8DF6-4419-A7EF-4765B9C306CA}"/>
+                <a16:creationId xmlns:a16="http://schemas.microsoft.com/office/drawing/2014/main" id="{DCB4B97A-B6DD-4409-BBFF-FA3FDADE8D5C}"/>
               </a:ext>
             </a:extLst>
           </p:cNvPr>
@@ -9473,7 +9473,7 @@
           <p:cNvPr id="42" name="">
             <a:extLst xmlns:a="http://schemas.openxmlformats.org/drawingml/2006/main">
               <a:ext uri="{FF2B5EF4-FFF2-40B4-BE49-F238E27FC236}">
-                <a16:creationId xmlns:a16="http://schemas.microsoft.com/office/drawing/2014/main" id="{95EC3BA2-2D68-4E63-AA6D-5FC02217E13F}"/>
+                <a16:creationId xmlns:a16="http://schemas.microsoft.com/office/drawing/2014/main" id="{C4E06CF8-EA5F-4E2C-B249-277AE276CFB0}"/>
               </a:ext>
             </a:extLst>
           </p:cNvPr>
@@ -9523,7 +9523,7 @@
           <p:cNvPr id="43" name="">
             <a:extLst xmlns:a="http://schemas.openxmlformats.org/drawingml/2006/main">
               <a:ext uri="{FF2B5EF4-FFF2-40B4-BE49-F238E27FC236}">
-                <a16:creationId xmlns:a16="http://schemas.microsoft.com/office/drawing/2014/main" id="{AD6FC530-8CD3-4082-B914-FB679858BC4E}"/>
+                <a16:creationId xmlns:a16="http://schemas.microsoft.com/office/drawing/2014/main" id="{7CD94D30-C2C9-417F-8B0F-9C203A6A2505}"/>
               </a:ext>
             </a:extLst>
           </p:cNvPr>
@@ -9571,7 +9571,7 @@
     </p:spTree>
     <p:extLst>
       <p:ext uri="{BB962C8B-B14F-4D97-AF65-F5344CB8AC3E}">
-        <p14:creationId xmlns:p14="http://schemas.microsoft.com/office/powerpoint/2010/main" val="1092589643"/>
+        <p14:creationId xmlns:p14="http://schemas.microsoft.com/office/powerpoint/2010/main" val="1527712661"/>
       </p:ext>
     </p:extLst>
   </p:cSld>
@@ -9602,7 +9602,7 @@
           <p:cNvPr id="1" name="">
             <a:extLst xmlns:a="http://schemas.openxmlformats.org/drawingml/2006/main">
               <a:ext uri="{FF2B5EF4-FFF2-40B4-BE49-F238E27FC236}">
-                <a16:creationId xmlns:a16="http://schemas.microsoft.com/office/drawing/2014/main" id="{A3173D83-03F8-4E10-8010-8654851F2A14}"/>
+                <a16:creationId xmlns:a16="http://schemas.microsoft.com/office/drawing/2014/main" id="{F158EDEE-33DF-4960-8A9A-AF262CE8C473}"/>
               </a:ext>
             </a:extLst>
           </p:cNvPr>
@@ -9637,7 +9637,7 @@
           <p:nvPr/>
         </p:nvPicPr>
         <p:blipFill>
-          <a:blip xmlns:r="http://schemas.openxmlformats.org/officeDocument/2006/relationships" xmlns:a="http://schemas.openxmlformats.org/drawingml/2006/main" r:embed="R9d08e60b60c542c3"/>
+          <a:blip xmlns:r="http://schemas.openxmlformats.org/officeDocument/2006/relationships" xmlns:a="http://schemas.openxmlformats.org/drawingml/2006/main" r:embed="R1fb063dffe544efe"/>
           <a:stretch xmlns:a="http://schemas.openxmlformats.org/drawingml/2006/main"/>
         </p:blipFill>
         <p:spPr>
@@ -9655,7 +9655,7 @@
           <p:cNvPr id="3" name="">
             <a:extLst xmlns:a="http://schemas.openxmlformats.org/drawingml/2006/main">
               <a:ext uri="{FF2B5EF4-FFF2-40B4-BE49-F238E27FC236}">
-                <a16:creationId xmlns:a16="http://schemas.microsoft.com/office/drawing/2014/main" id="{AE3F0AA2-7969-49C7-BC9C-1624770B4191}"/>
+                <a16:creationId xmlns:a16="http://schemas.microsoft.com/office/drawing/2014/main" id="{A531894E-D097-4677-ABB7-AB1CC9D5AF00}"/>
               </a:ext>
             </a:extLst>
           </p:cNvPr>
@@ -9705,7 +9705,7 @@
           <p:cNvPr id="4" name="">
             <a:extLst xmlns:a="http://schemas.openxmlformats.org/drawingml/2006/main">
               <a:ext uri="{FF2B5EF4-FFF2-40B4-BE49-F238E27FC236}">
-                <a16:creationId xmlns:a16="http://schemas.microsoft.com/office/drawing/2014/main" id="{9AFE5A83-08E2-4075-80C7-D0DE0651AAEC}"/>
+                <a16:creationId xmlns:a16="http://schemas.microsoft.com/office/drawing/2014/main" id="{8445769A-0F1E-4CAF-9B97-EA4A83175661}"/>
               </a:ext>
             </a:extLst>
           </p:cNvPr>
@@ -9738,7 +9738,7 @@
           <p:cNvPr id="5" name="">
             <a:extLst xmlns:a="http://schemas.openxmlformats.org/drawingml/2006/main">
               <a:ext uri="{FF2B5EF4-FFF2-40B4-BE49-F238E27FC236}">
-                <a16:creationId xmlns:a16="http://schemas.microsoft.com/office/drawing/2014/main" id="{B02DF000-5D33-429D-B768-559112CA8180}"/>
+                <a16:creationId xmlns:a16="http://schemas.microsoft.com/office/drawing/2014/main" id="{624159C6-4578-4FAF-811E-E7A9AD1A27D4}"/>
               </a:ext>
             </a:extLst>
           </p:cNvPr>
@@ -9769,7 +9769,7 @@
           <p:cNvPr id="6" name="">
             <a:extLst xmlns:a="http://schemas.openxmlformats.org/drawingml/2006/main">
               <a:ext uri="{FF2B5EF4-FFF2-40B4-BE49-F238E27FC236}">
-                <a16:creationId xmlns:a16="http://schemas.microsoft.com/office/drawing/2014/main" id="{69FC5D91-7743-40C3-8EA2-4D7B32400E94}"/>
+                <a16:creationId xmlns:a16="http://schemas.microsoft.com/office/drawing/2014/main" id="{E4386275-CCD5-4340-B376-8A218655E939}"/>
               </a:ext>
             </a:extLst>
           </p:cNvPr>
@@ -9819,7 +9819,7 @@
           <p:cNvPr id="7" name="">
             <a:extLst xmlns:a="http://schemas.openxmlformats.org/drawingml/2006/main">
               <a:ext uri="{FF2B5EF4-FFF2-40B4-BE49-F238E27FC236}">
-                <a16:creationId xmlns:a16="http://schemas.microsoft.com/office/drawing/2014/main" id="{C1193BDE-7FA8-4BE1-A366-3990B7E701B0}"/>
+                <a16:creationId xmlns:a16="http://schemas.microsoft.com/office/drawing/2014/main" id="{61727547-6C30-44A0-A812-1F27B184F5C3}"/>
               </a:ext>
             </a:extLst>
           </p:cNvPr>
@@ -9869,7 +9869,7 @@
           <p:cNvPr id="8" name="">
             <a:extLst xmlns:a="http://schemas.openxmlformats.org/drawingml/2006/main">
               <a:ext uri="{FF2B5EF4-FFF2-40B4-BE49-F238E27FC236}">
-                <a16:creationId xmlns:a16="http://schemas.microsoft.com/office/drawing/2014/main" id="{305BC97B-C697-409D-BBED-D479642B7654}"/>
+                <a16:creationId xmlns:a16="http://schemas.microsoft.com/office/drawing/2014/main" id="{007E52AC-FDA3-4409-835B-D9D000C9EC48}"/>
               </a:ext>
             </a:extLst>
           </p:cNvPr>
@@ -9904,7 +9904,7 @@
           <p:cNvPr id="9" name="">
             <a:extLst xmlns:a="http://schemas.openxmlformats.org/drawingml/2006/main">
               <a:ext uri="{FF2B5EF4-FFF2-40B4-BE49-F238E27FC236}">
-                <a16:creationId xmlns:a16="http://schemas.microsoft.com/office/drawing/2014/main" id="{11F9D21D-2C00-4631-B86E-7EB06495EDB9}"/>
+                <a16:creationId xmlns:a16="http://schemas.microsoft.com/office/drawing/2014/main" id="{5BBB95B9-A680-4BFC-B31D-AFBC79DAFB2F}"/>
               </a:ext>
             </a:extLst>
           </p:cNvPr>
@@ -9954,7 +9954,7 @@
           <p:cNvPr id="10" name="">
             <a:extLst xmlns:a="http://schemas.openxmlformats.org/drawingml/2006/main">
               <a:ext uri="{FF2B5EF4-FFF2-40B4-BE49-F238E27FC236}">
-                <a16:creationId xmlns:a16="http://schemas.microsoft.com/office/drawing/2014/main" id="{6DA57478-1D77-4B43-BF97-080C2E2346A9}"/>
+                <a16:creationId xmlns:a16="http://schemas.microsoft.com/office/drawing/2014/main" id="{B3913A86-A040-4EB7-9D21-A213531DD568}"/>
               </a:ext>
             </a:extLst>
           </p:cNvPr>
@@ -10004,7 +10004,7 @@
           <p:cNvPr id="11" name="">
             <a:extLst xmlns:a="http://schemas.openxmlformats.org/drawingml/2006/main">
               <a:ext uri="{FF2B5EF4-FFF2-40B4-BE49-F238E27FC236}">
-                <a16:creationId xmlns:a16="http://schemas.microsoft.com/office/drawing/2014/main" id="{54A89920-5305-43E1-93E4-E262E83E5C73}"/>
+                <a16:creationId xmlns:a16="http://schemas.microsoft.com/office/drawing/2014/main" id="{6A064AC9-F8A2-45E6-BE48-B65DBEFAEF33}"/>
               </a:ext>
             </a:extLst>
           </p:cNvPr>
@@ -10054,7 +10054,7 @@
           <p:cNvPr id="12" name="">
             <a:extLst xmlns:a="http://schemas.openxmlformats.org/drawingml/2006/main">
               <a:ext uri="{FF2B5EF4-FFF2-40B4-BE49-F238E27FC236}">
-                <a16:creationId xmlns:a16="http://schemas.microsoft.com/office/drawing/2014/main" id="{3D92AD69-ACAC-47F3-81EF-4A791CE7C880}"/>
+                <a16:creationId xmlns:a16="http://schemas.microsoft.com/office/drawing/2014/main" id="{F8CD5D2B-5A85-464D-B3B5-3823C75D25B4}"/>
               </a:ext>
             </a:extLst>
           </p:cNvPr>
@@ -10085,7 +10085,7 @@
           <p:cNvPr id="13" name="">
             <a:extLst xmlns:a="http://schemas.openxmlformats.org/drawingml/2006/main">
               <a:ext uri="{FF2B5EF4-FFF2-40B4-BE49-F238E27FC236}">
-                <a16:creationId xmlns:a16="http://schemas.microsoft.com/office/drawing/2014/main" id="{5D23A4EE-8854-4EC0-A4A8-E5D2D751883A}"/>
+                <a16:creationId xmlns:a16="http://schemas.microsoft.com/office/drawing/2014/main" id="{FD13FD07-5D7D-47D1-9657-73205DC0C6D4}"/>
               </a:ext>
             </a:extLst>
           </p:cNvPr>
@@ -10135,7 +10135,7 @@
           <p:cNvPr id="14" name="">
             <a:extLst xmlns:a="http://schemas.openxmlformats.org/drawingml/2006/main">
               <a:ext uri="{FF2B5EF4-FFF2-40B4-BE49-F238E27FC236}">
-                <a16:creationId xmlns:a16="http://schemas.microsoft.com/office/drawing/2014/main" id="{156C5E8F-A7B1-4D4B-8537-2D8599FD8384}"/>
+                <a16:creationId xmlns:a16="http://schemas.microsoft.com/office/drawing/2014/main" id="{9983882B-15D5-45CD-932B-5B3E312EDF58}"/>
               </a:ext>
             </a:extLst>
           </p:cNvPr>
@@ -10185,7 +10185,7 @@
           <p:cNvPr id="15" name="">
             <a:extLst xmlns:a="http://schemas.openxmlformats.org/drawingml/2006/main">
               <a:ext uri="{FF2B5EF4-FFF2-40B4-BE49-F238E27FC236}">
-                <a16:creationId xmlns:a16="http://schemas.microsoft.com/office/drawing/2014/main" id="{CE4572B3-859C-4B89-BB8A-FD76D7F58925}"/>
+                <a16:creationId xmlns:a16="http://schemas.microsoft.com/office/drawing/2014/main" id="{71D3A65A-07DF-433D-82FC-78BD7399C4E8}"/>
               </a:ext>
             </a:extLst>
           </p:cNvPr>
@@ -10235,7 +10235,7 @@
           <p:cNvPr id="16" name="">
             <a:extLst xmlns:a="http://schemas.openxmlformats.org/drawingml/2006/main">
               <a:ext uri="{FF2B5EF4-FFF2-40B4-BE49-F238E27FC236}">
-                <a16:creationId xmlns:a16="http://schemas.microsoft.com/office/drawing/2014/main" id="{F8C48050-86FB-4CD1-9114-BE616CCBE427}"/>
+                <a16:creationId xmlns:a16="http://schemas.microsoft.com/office/drawing/2014/main" id="{BA25BBE2-477B-42C3-989A-142CFD0CC397}"/>
               </a:ext>
             </a:extLst>
           </p:cNvPr>
@@ -10285,7 +10285,7 @@
           <p:cNvPr id="17" name="">
             <a:extLst xmlns:a="http://schemas.openxmlformats.org/drawingml/2006/main">
               <a:ext uri="{FF2B5EF4-FFF2-40B4-BE49-F238E27FC236}">
-                <a16:creationId xmlns:a16="http://schemas.microsoft.com/office/drawing/2014/main" id="{BEE5C7ED-BB59-4FB4-A314-5827695F3F18}"/>
+                <a16:creationId xmlns:a16="http://schemas.microsoft.com/office/drawing/2014/main" id="{D68A0209-6953-4505-95E5-8711166102CB}"/>
               </a:ext>
             </a:extLst>
           </p:cNvPr>
@@ -10320,7 +10320,7 @@
           <p:cNvPr id="18" name="">
             <a:extLst xmlns:a="http://schemas.openxmlformats.org/drawingml/2006/main">
               <a:ext uri="{FF2B5EF4-FFF2-40B4-BE49-F238E27FC236}">
-                <a16:creationId xmlns:a16="http://schemas.microsoft.com/office/drawing/2014/main" id="{F88F9388-71D0-47ED-87CD-EE50B95524B1}"/>
+                <a16:creationId xmlns:a16="http://schemas.microsoft.com/office/drawing/2014/main" id="{B9931A07-DBC0-48BA-85C5-4DF21204C044}"/>
               </a:ext>
             </a:extLst>
           </p:cNvPr>
@@ -10370,7 +10370,7 @@
           <p:cNvPr id="19" name="">
             <a:extLst xmlns:a="http://schemas.openxmlformats.org/drawingml/2006/main">
               <a:ext uri="{FF2B5EF4-FFF2-40B4-BE49-F238E27FC236}">
-                <a16:creationId xmlns:a16="http://schemas.microsoft.com/office/drawing/2014/main" id="{3302BBAD-26F2-4D06-A3E1-5144C90A882E}"/>
+                <a16:creationId xmlns:a16="http://schemas.microsoft.com/office/drawing/2014/main" id="{DC8D9F78-BAA2-47D8-96D8-A6687CA60047}"/>
               </a:ext>
             </a:extLst>
           </p:cNvPr>
@@ -10420,7 +10420,7 @@
           <p:cNvPr id="20" name="">
             <a:extLst xmlns:a="http://schemas.openxmlformats.org/drawingml/2006/main">
               <a:ext uri="{FF2B5EF4-FFF2-40B4-BE49-F238E27FC236}">
-                <a16:creationId xmlns:a16="http://schemas.microsoft.com/office/drawing/2014/main" id="{3D0CB97B-CBB3-455E-9172-0961C363B9D4}"/>
+                <a16:creationId xmlns:a16="http://schemas.microsoft.com/office/drawing/2014/main" id="{E9C0040E-3442-44E3-98B5-659C4655CC92}"/>
               </a:ext>
             </a:extLst>
           </p:cNvPr>
@@ -10470,7 +10470,7 @@
           <p:cNvPr id="21" name="">
             <a:extLst xmlns:a="http://schemas.openxmlformats.org/drawingml/2006/main">
               <a:ext uri="{FF2B5EF4-FFF2-40B4-BE49-F238E27FC236}">
-                <a16:creationId xmlns:a16="http://schemas.microsoft.com/office/drawing/2014/main" id="{109470DA-BD4E-4C33-858F-E4CE567F357C}"/>
+                <a16:creationId xmlns:a16="http://schemas.microsoft.com/office/drawing/2014/main" id="{621CF59C-E8FF-44F2-95E6-C0BC0190B988}"/>
               </a:ext>
             </a:extLst>
           </p:cNvPr>
@@ -10501,7 +10501,7 @@
           <p:cNvPr id="22" name="">
             <a:extLst xmlns:a="http://schemas.openxmlformats.org/drawingml/2006/main">
               <a:ext uri="{FF2B5EF4-FFF2-40B4-BE49-F238E27FC236}">
-                <a16:creationId xmlns:a16="http://schemas.microsoft.com/office/drawing/2014/main" id="{1D492A12-6E9F-4491-B8C2-02BDF06A142C}"/>
+                <a16:creationId xmlns:a16="http://schemas.microsoft.com/office/drawing/2014/main" id="{8108150A-4BB3-406D-BF77-00AF2A8974E9}"/>
               </a:ext>
             </a:extLst>
           </p:cNvPr>
@@ -10551,7 +10551,7 @@
           <p:cNvPr id="23" name="">
             <a:extLst xmlns:a="http://schemas.openxmlformats.org/drawingml/2006/main">
               <a:ext uri="{FF2B5EF4-FFF2-40B4-BE49-F238E27FC236}">
-                <a16:creationId xmlns:a16="http://schemas.microsoft.com/office/drawing/2014/main" id="{14429D8D-2AC1-4D07-802F-5645EA866653}"/>
+                <a16:creationId xmlns:a16="http://schemas.microsoft.com/office/drawing/2014/main" id="{9605B397-971C-4480-BACC-CA86A9BE1D53}"/>
               </a:ext>
             </a:extLst>
           </p:cNvPr>
@@ -10601,7 +10601,7 @@
           <p:cNvPr id="24" name="">
             <a:extLst xmlns:a="http://schemas.openxmlformats.org/drawingml/2006/main">
               <a:ext uri="{FF2B5EF4-FFF2-40B4-BE49-F238E27FC236}">
-                <a16:creationId xmlns:a16="http://schemas.microsoft.com/office/drawing/2014/main" id="{721C3C21-681B-4062-BA0E-8B2FFD83362C}"/>
+                <a16:creationId xmlns:a16="http://schemas.microsoft.com/office/drawing/2014/main" id="{0ED227A8-094C-491F-841D-4011568AD5DD}"/>
               </a:ext>
             </a:extLst>
           </p:cNvPr>
@@ -10651,7 +10651,7 @@
           <p:cNvPr id="25" name="">
             <a:extLst xmlns:a="http://schemas.openxmlformats.org/drawingml/2006/main">
               <a:ext uri="{FF2B5EF4-FFF2-40B4-BE49-F238E27FC236}">
-                <a16:creationId xmlns:a16="http://schemas.microsoft.com/office/drawing/2014/main" id="{50089A15-96F3-4CEF-92F3-9CB4E4DB70C9}"/>
+                <a16:creationId xmlns:a16="http://schemas.microsoft.com/office/drawing/2014/main" id="{62A23119-67C1-435F-AAEB-FF84FE0697B0}"/>
               </a:ext>
             </a:extLst>
           </p:cNvPr>
@@ -10701,7 +10701,7 @@
           <p:cNvPr id="26" name="">
             <a:extLst xmlns:a="http://schemas.openxmlformats.org/drawingml/2006/main">
               <a:ext uri="{FF2B5EF4-FFF2-40B4-BE49-F238E27FC236}">
-                <a16:creationId xmlns:a16="http://schemas.microsoft.com/office/drawing/2014/main" id="{392ACD9C-1B72-4DDF-99AB-ED92E62DC38E}"/>
+                <a16:creationId xmlns:a16="http://schemas.microsoft.com/office/drawing/2014/main" id="{EB9D1B36-CB28-4405-8B64-5247C48385C8}"/>
               </a:ext>
             </a:extLst>
           </p:cNvPr>
@@ -10736,7 +10736,7 @@
           <p:cNvPr id="27" name="">
             <a:extLst xmlns:a="http://schemas.openxmlformats.org/drawingml/2006/main">
               <a:ext uri="{FF2B5EF4-FFF2-40B4-BE49-F238E27FC236}">
-                <a16:creationId xmlns:a16="http://schemas.microsoft.com/office/drawing/2014/main" id="{E4BA7DF6-A44E-4D6B-9F03-65B72E9A7BB9}"/>
+                <a16:creationId xmlns:a16="http://schemas.microsoft.com/office/drawing/2014/main" id="{E1A975D4-403F-4186-A24C-0F841BD0538E}"/>
               </a:ext>
             </a:extLst>
           </p:cNvPr>
@@ -10786,7 +10786,7 @@
           <p:cNvPr id="28" name="">
             <a:extLst xmlns:a="http://schemas.openxmlformats.org/drawingml/2006/main">
               <a:ext uri="{FF2B5EF4-FFF2-40B4-BE49-F238E27FC236}">
-                <a16:creationId xmlns:a16="http://schemas.microsoft.com/office/drawing/2014/main" id="{FD93AF1E-D694-41AA-92E8-E90B1E284A7B}"/>
+                <a16:creationId xmlns:a16="http://schemas.microsoft.com/office/drawing/2014/main" id="{7994EE17-227E-4B8A-90C7-EE4543CAFA40}"/>
               </a:ext>
             </a:extLst>
           </p:cNvPr>
@@ -10836,7 +10836,7 @@
           <p:cNvPr id="29" name="">
             <a:extLst xmlns:a="http://schemas.openxmlformats.org/drawingml/2006/main">
               <a:ext uri="{FF2B5EF4-FFF2-40B4-BE49-F238E27FC236}">
-                <a16:creationId xmlns:a16="http://schemas.microsoft.com/office/drawing/2014/main" id="{59400B16-96C6-46E5-989A-BBEACE387088}"/>
+                <a16:creationId xmlns:a16="http://schemas.microsoft.com/office/drawing/2014/main" id="{10761C19-8A3D-40CF-A7E7-249F6C1277F1}"/>
               </a:ext>
             </a:extLst>
           </p:cNvPr>
@@ -10886,7 +10886,7 @@
           <p:cNvPr id="30" name="">
             <a:extLst xmlns:a="http://schemas.openxmlformats.org/drawingml/2006/main">
               <a:ext uri="{FF2B5EF4-FFF2-40B4-BE49-F238E27FC236}">
-                <a16:creationId xmlns:a16="http://schemas.microsoft.com/office/drawing/2014/main" id="{6102E351-F33A-4857-A1BF-9CC218E6F567}"/>
+                <a16:creationId xmlns:a16="http://schemas.microsoft.com/office/drawing/2014/main" id="{71463D86-08E7-4584-A229-2071F60B71D0}"/>
               </a:ext>
             </a:extLst>
           </p:cNvPr>
@@ -10917,7 +10917,7 @@
           <p:cNvPr id="31" name="">
             <a:extLst xmlns:a="http://schemas.openxmlformats.org/drawingml/2006/main">
               <a:ext uri="{FF2B5EF4-FFF2-40B4-BE49-F238E27FC236}">
-                <a16:creationId xmlns:a16="http://schemas.microsoft.com/office/drawing/2014/main" id="{8998CF72-8395-4726-B2FE-D9FAAA260554}"/>
+                <a16:creationId xmlns:a16="http://schemas.microsoft.com/office/drawing/2014/main" id="{84E7A3BF-10EC-418B-9E5F-C7279066D406}"/>
               </a:ext>
             </a:extLst>
           </p:cNvPr>
@@ -10967,7 +10967,7 @@
           <p:cNvPr id="32" name="">
             <a:extLst xmlns:a="http://schemas.openxmlformats.org/drawingml/2006/main">
               <a:ext uri="{FF2B5EF4-FFF2-40B4-BE49-F238E27FC236}">
-                <a16:creationId xmlns:a16="http://schemas.microsoft.com/office/drawing/2014/main" id="{21D5E29E-D798-4044-A1C3-1CA1B844781B}"/>
+                <a16:creationId xmlns:a16="http://schemas.microsoft.com/office/drawing/2014/main" id="{76402263-ACA3-4172-B10E-4D336EF054DE}"/>
               </a:ext>
             </a:extLst>
           </p:cNvPr>
@@ -11017,7 +11017,7 @@
           <p:cNvPr id="33" name="">
             <a:extLst xmlns:a="http://schemas.openxmlformats.org/drawingml/2006/main">
               <a:ext uri="{FF2B5EF4-FFF2-40B4-BE49-F238E27FC236}">
-                <a16:creationId xmlns:a16="http://schemas.microsoft.com/office/drawing/2014/main" id="{C75BA0A3-C31F-4C96-8F8C-3F015F807029}"/>
+                <a16:creationId xmlns:a16="http://schemas.microsoft.com/office/drawing/2014/main" id="{3268F91B-1D5C-4242-ACBD-3381C25D2039}"/>
               </a:ext>
             </a:extLst>
           </p:cNvPr>
@@ -11067,7 +11067,7 @@
           <p:cNvPr id="34" name="">
             <a:extLst xmlns:a="http://schemas.openxmlformats.org/drawingml/2006/main">
               <a:ext uri="{FF2B5EF4-FFF2-40B4-BE49-F238E27FC236}">
-                <a16:creationId xmlns:a16="http://schemas.microsoft.com/office/drawing/2014/main" id="{6CB2515E-6C98-4AF3-9D97-C7C935337E02}"/>
+                <a16:creationId xmlns:a16="http://schemas.microsoft.com/office/drawing/2014/main" id="{D8C2793B-92EE-4F3C-9DCC-E85751996B75}"/>
               </a:ext>
             </a:extLst>
           </p:cNvPr>
@@ -11117,7 +11117,7 @@
           <p:cNvPr id="35" name="">
             <a:extLst xmlns:a="http://schemas.openxmlformats.org/drawingml/2006/main">
               <a:ext uri="{FF2B5EF4-FFF2-40B4-BE49-F238E27FC236}">
-                <a16:creationId xmlns:a16="http://schemas.microsoft.com/office/drawing/2014/main" id="{D921A9D7-61B8-43C6-87DA-1A8F32D56E16}"/>
+                <a16:creationId xmlns:a16="http://schemas.microsoft.com/office/drawing/2014/main" id="{D1F7B264-A392-4EFE-997C-305097094052}"/>
               </a:ext>
             </a:extLst>
           </p:cNvPr>
@@ -11152,7 +11152,7 @@
           <p:cNvPr id="36" name="">
             <a:extLst xmlns:a="http://schemas.openxmlformats.org/drawingml/2006/main">
               <a:ext uri="{FF2B5EF4-FFF2-40B4-BE49-F238E27FC236}">
-                <a16:creationId xmlns:a16="http://schemas.microsoft.com/office/drawing/2014/main" id="{2E0D4418-A90B-4C02-8803-C1CA0A5F592E}"/>
+                <a16:creationId xmlns:a16="http://schemas.microsoft.com/office/drawing/2014/main" id="{2460D3FF-0352-4A39-B4C6-9F09C886AB82}"/>
               </a:ext>
             </a:extLst>
           </p:cNvPr>
@@ -11202,7 +11202,7 @@
           <p:cNvPr id="37" name="">
             <a:extLst xmlns:a="http://schemas.openxmlformats.org/drawingml/2006/main">
               <a:ext uri="{FF2B5EF4-FFF2-40B4-BE49-F238E27FC236}">
-                <a16:creationId xmlns:a16="http://schemas.microsoft.com/office/drawing/2014/main" id="{C93C24F0-FEAD-461F-A721-3548B0343DDB}"/>
+                <a16:creationId xmlns:a16="http://schemas.microsoft.com/office/drawing/2014/main" id="{6D196C40-BA6C-4BBB-8871-F45F1311D36F}"/>
               </a:ext>
             </a:extLst>
           </p:cNvPr>
@@ -11252,7 +11252,7 @@
           <p:cNvPr id="38" name="">
             <a:extLst xmlns:a="http://schemas.openxmlformats.org/drawingml/2006/main">
               <a:ext uri="{FF2B5EF4-FFF2-40B4-BE49-F238E27FC236}">
-                <a16:creationId xmlns:a16="http://schemas.microsoft.com/office/drawing/2014/main" id="{ABA831C2-E2F4-413E-985D-59C42B12152F}"/>
+                <a16:creationId xmlns:a16="http://schemas.microsoft.com/office/drawing/2014/main" id="{B943227D-718A-430E-BE49-BE565E13DB64}"/>
               </a:ext>
             </a:extLst>
           </p:cNvPr>
@@ -11302,7 +11302,7 @@
           <p:cNvPr id="39" name="">
             <a:extLst xmlns:a="http://schemas.openxmlformats.org/drawingml/2006/main">
               <a:ext uri="{FF2B5EF4-FFF2-40B4-BE49-F238E27FC236}">
-                <a16:creationId xmlns:a16="http://schemas.microsoft.com/office/drawing/2014/main" id="{042FD63B-86E6-4749-9C02-48C9AB583D25}"/>
+                <a16:creationId xmlns:a16="http://schemas.microsoft.com/office/drawing/2014/main" id="{8638745A-7BAD-468B-B8FC-9A6D969C8C0A}"/>
               </a:ext>
             </a:extLst>
           </p:cNvPr>
@@ -11333,7 +11333,7 @@
           <p:cNvPr id="40" name="">
             <a:extLst xmlns:a="http://schemas.openxmlformats.org/drawingml/2006/main">
               <a:ext uri="{FF2B5EF4-FFF2-40B4-BE49-F238E27FC236}">
-                <a16:creationId xmlns:a16="http://schemas.microsoft.com/office/drawing/2014/main" id="{1B91843E-89EF-4705-9579-FCC9762C8595}"/>
+                <a16:creationId xmlns:a16="http://schemas.microsoft.com/office/drawing/2014/main" id="{027E5316-50DA-4F90-A028-7F3052D45FEF}"/>
               </a:ext>
             </a:extLst>
           </p:cNvPr>
@@ -11383,7 +11383,7 @@
           <p:cNvPr id="41" name="">
             <a:extLst xmlns:a="http://schemas.openxmlformats.org/drawingml/2006/main">
               <a:ext uri="{FF2B5EF4-FFF2-40B4-BE49-F238E27FC236}">
-                <a16:creationId xmlns:a16="http://schemas.microsoft.com/office/drawing/2014/main" id="{71087939-8213-4151-9F57-862B49AA1F71}"/>
+                <a16:creationId xmlns:a16="http://schemas.microsoft.com/office/drawing/2014/main" id="{B8D2CA89-AB37-42D1-B7FC-6CBAC59F1163}"/>
               </a:ext>
             </a:extLst>
           </p:cNvPr>
@@ -11433,7 +11433,7 @@
           <p:cNvPr id="42" name="">
             <a:extLst xmlns:a="http://schemas.openxmlformats.org/drawingml/2006/main">
               <a:ext uri="{FF2B5EF4-FFF2-40B4-BE49-F238E27FC236}">
-                <a16:creationId xmlns:a16="http://schemas.microsoft.com/office/drawing/2014/main" id="{01754668-1AA1-4F71-B0B1-DD5CBBBB5DD4}"/>
+                <a16:creationId xmlns:a16="http://schemas.microsoft.com/office/drawing/2014/main" id="{CB0D2BB0-F9DE-49B9-BF66-0B9819CA85F0}"/>
               </a:ext>
             </a:extLst>
           </p:cNvPr>
@@ -11483,7 +11483,7 @@
           <p:cNvPr id="43" name="">
             <a:extLst xmlns:a="http://schemas.openxmlformats.org/drawingml/2006/main">
               <a:ext uri="{FF2B5EF4-FFF2-40B4-BE49-F238E27FC236}">
-                <a16:creationId xmlns:a16="http://schemas.microsoft.com/office/drawing/2014/main" id="{674861B6-2C3A-47D4-8B19-70262D5B0C50}"/>
+                <a16:creationId xmlns:a16="http://schemas.microsoft.com/office/drawing/2014/main" id="{E1D963AC-B7CF-49E7-B2D6-E841006F1133}"/>
               </a:ext>
             </a:extLst>
           </p:cNvPr>
@@ -11531,7 +11531,7 @@
     </p:spTree>
     <p:extLst>
       <p:ext uri="{BB962C8B-B14F-4D97-AF65-F5344CB8AC3E}">
-        <p14:creationId xmlns:p14="http://schemas.microsoft.com/office/powerpoint/2010/main" val="1849648486"/>
+        <p14:creationId xmlns:p14="http://schemas.microsoft.com/office/powerpoint/2010/main" val="618958453"/>
       </p:ext>
     </p:extLst>
   </p:cSld>
@@ -11562,7 +11562,7 @@
           <p:cNvPr id="1" name="">
             <a:extLst xmlns:a="http://schemas.openxmlformats.org/drawingml/2006/main">
               <a:ext uri="{FF2B5EF4-FFF2-40B4-BE49-F238E27FC236}">
-                <a16:creationId xmlns:a16="http://schemas.microsoft.com/office/drawing/2014/main" id="{B30E5952-5003-48BC-B214-87C68C0FF4E6}"/>
+                <a16:creationId xmlns:a16="http://schemas.microsoft.com/office/drawing/2014/main" id="{ADFE0A59-620A-498C-8AC5-829F5B914D69}"/>
               </a:ext>
             </a:extLst>
           </p:cNvPr>
@@ -11597,7 +11597,7 @@
           <p:nvPr/>
         </p:nvPicPr>
         <p:blipFill>
-          <a:blip xmlns:r="http://schemas.openxmlformats.org/officeDocument/2006/relationships" xmlns:a="http://schemas.openxmlformats.org/drawingml/2006/main" r:embed="R174d3b86651e4bd5"/>
+          <a:blip xmlns:r="http://schemas.openxmlformats.org/officeDocument/2006/relationships" xmlns:a="http://schemas.openxmlformats.org/drawingml/2006/main" r:embed="Rec915db3c6304ae8"/>
           <a:stretch xmlns:a="http://schemas.openxmlformats.org/drawingml/2006/main"/>
         </p:blipFill>
         <p:spPr>
@@ -11615,7 +11615,7 @@
           <p:cNvPr id="3" name="">
             <a:extLst xmlns:a="http://schemas.openxmlformats.org/drawingml/2006/main">
               <a:ext uri="{FF2B5EF4-FFF2-40B4-BE49-F238E27FC236}">
-                <a16:creationId xmlns:a16="http://schemas.microsoft.com/office/drawing/2014/main" id="{8A3284F9-382E-4067-9E47-D7D3E2102B79}"/>
+                <a16:creationId xmlns:a16="http://schemas.microsoft.com/office/drawing/2014/main" id="{A86FA2AA-05EC-4504-B278-F0FFC91DBCF1}"/>
               </a:ext>
             </a:extLst>
           </p:cNvPr>
@@ -11665,7 +11665,7 @@
           <p:cNvPr id="4" name="">
             <a:extLst xmlns:a="http://schemas.openxmlformats.org/drawingml/2006/main">
               <a:ext uri="{FF2B5EF4-FFF2-40B4-BE49-F238E27FC236}">
-                <a16:creationId xmlns:a16="http://schemas.microsoft.com/office/drawing/2014/main" id="{EB784C58-6C14-4F99-89A5-D6595521D19A}"/>
+                <a16:creationId xmlns:a16="http://schemas.microsoft.com/office/drawing/2014/main" id="{500A54B5-A420-482B-8D73-47342441270B}"/>
               </a:ext>
             </a:extLst>
           </p:cNvPr>
@@ -11698,7 +11698,7 @@
           <p:cNvPr id="5" name="">
             <a:extLst xmlns:a="http://schemas.openxmlformats.org/drawingml/2006/main">
               <a:ext uri="{FF2B5EF4-FFF2-40B4-BE49-F238E27FC236}">
-                <a16:creationId xmlns:a16="http://schemas.microsoft.com/office/drawing/2014/main" id="{6453DDD5-8599-43AB-B857-B416F0649B7A}"/>
+                <a16:creationId xmlns:a16="http://schemas.microsoft.com/office/drawing/2014/main" id="{AF22537D-5993-46CF-B7A6-5FD741B2CB69}"/>
               </a:ext>
             </a:extLst>
           </p:cNvPr>
@@ -11729,7 +11729,7 @@
           <p:cNvPr id="6" name="">
             <a:extLst xmlns:a="http://schemas.openxmlformats.org/drawingml/2006/main">
               <a:ext uri="{FF2B5EF4-FFF2-40B4-BE49-F238E27FC236}">
-                <a16:creationId xmlns:a16="http://schemas.microsoft.com/office/drawing/2014/main" id="{29002768-E40E-46E9-A306-4683FBBA08BB}"/>
+                <a16:creationId xmlns:a16="http://schemas.microsoft.com/office/drawing/2014/main" id="{1B0A17D0-C8AD-40E2-B225-7970B46C3D1F}"/>
               </a:ext>
             </a:extLst>
           </p:cNvPr>
@@ -11779,7 +11779,7 @@
           <p:cNvPr id="7" name="">
             <a:extLst xmlns:a="http://schemas.openxmlformats.org/drawingml/2006/main">
               <a:ext uri="{FF2B5EF4-FFF2-40B4-BE49-F238E27FC236}">
-                <a16:creationId xmlns:a16="http://schemas.microsoft.com/office/drawing/2014/main" id="{9D4B1E84-DD5B-4764-BD16-A26085F00E39}"/>
+                <a16:creationId xmlns:a16="http://schemas.microsoft.com/office/drawing/2014/main" id="{B70C0A49-A9E6-4208-A03B-49EC6D5AB3DA}"/>
               </a:ext>
             </a:extLst>
           </p:cNvPr>
@@ -11829,7 +11829,7 @@
           <p:cNvPr id="8" name="">
             <a:extLst xmlns:a="http://schemas.openxmlformats.org/drawingml/2006/main">
               <a:ext uri="{FF2B5EF4-FFF2-40B4-BE49-F238E27FC236}">
-                <a16:creationId xmlns:a16="http://schemas.microsoft.com/office/drawing/2014/main" id="{91A4B69C-07E3-439F-BA21-F0386EB6A82D}"/>
+                <a16:creationId xmlns:a16="http://schemas.microsoft.com/office/drawing/2014/main" id="{F8E45944-B7D0-42D1-A41A-5A808D7DA584}"/>
               </a:ext>
             </a:extLst>
           </p:cNvPr>
@@ -11864,7 +11864,7 @@
           <p:cNvPr id="9" name="">
             <a:extLst xmlns:a="http://schemas.openxmlformats.org/drawingml/2006/main">
               <a:ext uri="{FF2B5EF4-FFF2-40B4-BE49-F238E27FC236}">
-                <a16:creationId xmlns:a16="http://schemas.microsoft.com/office/drawing/2014/main" id="{61A35BF6-938E-4181-9E80-760BEE89C21B}"/>
+                <a16:creationId xmlns:a16="http://schemas.microsoft.com/office/drawing/2014/main" id="{369F3FDC-AC9E-4F83-AF76-EC57CDFDA1D6}"/>
               </a:ext>
             </a:extLst>
           </p:cNvPr>
@@ -11897,7 +11897,7 @@
           <p:cNvPr id="10" name="">
             <a:extLst xmlns:a="http://schemas.openxmlformats.org/drawingml/2006/main">
               <a:ext uri="{FF2B5EF4-FFF2-40B4-BE49-F238E27FC236}">
-                <a16:creationId xmlns:a16="http://schemas.microsoft.com/office/drawing/2014/main" id="{A2774FE4-9EAF-4BC6-8E52-B4D8E8B26632}"/>
+                <a16:creationId xmlns:a16="http://schemas.microsoft.com/office/drawing/2014/main" id="{0760422B-D344-4E74-91A9-6AED2A4D52FF}"/>
               </a:ext>
             </a:extLst>
           </p:cNvPr>
@@ -11947,7 +11947,7 @@
           <p:cNvPr id="11" name="">
             <a:extLst xmlns:a="http://schemas.openxmlformats.org/drawingml/2006/main">
               <a:ext uri="{FF2B5EF4-FFF2-40B4-BE49-F238E27FC236}">
-                <a16:creationId xmlns:a16="http://schemas.microsoft.com/office/drawing/2014/main" id="{7E585CCC-984D-4CF4-82C5-237E8FD9F464}"/>
+                <a16:creationId xmlns:a16="http://schemas.microsoft.com/office/drawing/2014/main" id="{B8D5447B-A461-455D-93DB-0760D34E0756}"/>
               </a:ext>
             </a:extLst>
           </p:cNvPr>
@@ -11997,7 +11997,7 @@
           <p:cNvPr id="12" name="">
             <a:extLst xmlns:a="http://schemas.openxmlformats.org/drawingml/2006/main">
               <a:ext uri="{FF2B5EF4-FFF2-40B4-BE49-F238E27FC236}">
-                <a16:creationId xmlns:a16="http://schemas.microsoft.com/office/drawing/2014/main" id="{08C7CE2A-9D45-4A96-AC7B-0C96EABA5739}"/>
+                <a16:creationId xmlns:a16="http://schemas.microsoft.com/office/drawing/2014/main" id="{CEDECA97-5DCB-4E5F-BC36-DD322F39AC17}"/>
               </a:ext>
             </a:extLst>
           </p:cNvPr>
@@ -12047,7 +12047,7 @@
           <p:cNvPr id="13" name="">
             <a:extLst xmlns:a="http://schemas.openxmlformats.org/drawingml/2006/main">
               <a:ext uri="{FF2B5EF4-FFF2-40B4-BE49-F238E27FC236}">
-                <a16:creationId xmlns:a16="http://schemas.microsoft.com/office/drawing/2014/main" id="{AAFC4DAA-2895-44FA-861C-0FAA780CA65A}"/>
+                <a16:creationId xmlns:a16="http://schemas.microsoft.com/office/drawing/2014/main" id="{ACCF3451-41CF-460E-978D-DE735F806CC9}"/>
               </a:ext>
             </a:extLst>
           </p:cNvPr>
@@ -12078,7 +12078,7 @@
           <p:cNvPr id="14" name="">
             <a:extLst xmlns:a="http://schemas.openxmlformats.org/drawingml/2006/main">
               <a:ext uri="{FF2B5EF4-FFF2-40B4-BE49-F238E27FC236}">
-                <a16:creationId xmlns:a16="http://schemas.microsoft.com/office/drawing/2014/main" id="{9D162B27-AF9E-4257-A7FF-94401DD4A49E}"/>
+                <a16:creationId xmlns:a16="http://schemas.microsoft.com/office/drawing/2014/main" id="{0C0A4FA4-1CC8-4699-BBA1-CC3E2130538B}"/>
               </a:ext>
             </a:extLst>
           </p:cNvPr>
@@ -12128,7 +12128,7 @@
           <p:cNvPr id="15" name="">
             <a:extLst xmlns:a="http://schemas.openxmlformats.org/drawingml/2006/main">
               <a:ext uri="{FF2B5EF4-FFF2-40B4-BE49-F238E27FC236}">
-                <a16:creationId xmlns:a16="http://schemas.microsoft.com/office/drawing/2014/main" id="{FAEF1566-4D64-4259-8631-B1EDA1D247B9}"/>
+                <a16:creationId xmlns:a16="http://schemas.microsoft.com/office/drawing/2014/main" id="{F9F9A308-719D-4239-BC65-31F6206F5CDD}"/>
               </a:ext>
             </a:extLst>
           </p:cNvPr>
@@ -12178,7 +12178,7 @@
           <p:cNvPr id="16" name="">
             <a:extLst xmlns:a="http://schemas.openxmlformats.org/drawingml/2006/main">
               <a:ext uri="{FF2B5EF4-FFF2-40B4-BE49-F238E27FC236}">
-                <a16:creationId xmlns:a16="http://schemas.microsoft.com/office/drawing/2014/main" id="{5BA11A85-4D30-4BE2-9359-7873CFC5CDAE}"/>
+                <a16:creationId xmlns:a16="http://schemas.microsoft.com/office/drawing/2014/main" id="{A67AC6C7-9295-40CC-8D06-524883441074}"/>
               </a:ext>
             </a:extLst>
           </p:cNvPr>
@@ -12213,7 +12213,7 @@
           <p:cNvPr id="17" name="">
             <a:extLst xmlns:a="http://schemas.openxmlformats.org/drawingml/2006/main">
               <a:ext uri="{FF2B5EF4-FFF2-40B4-BE49-F238E27FC236}">
-                <a16:creationId xmlns:a16="http://schemas.microsoft.com/office/drawing/2014/main" id="{48FDC769-5FDC-4A3B-BF82-87C601CF29EF}"/>
+                <a16:creationId xmlns:a16="http://schemas.microsoft.com/office/drawing/2014/main" id="{F06F27E9-6A6D-4E78-B3FB-6437FC2ABDD4}"/>
               </a:ext>
             </a:extLst>
           </p:cNvPr>
@@ -12246,7 +12246,7 @@
           <p:cNvPr id="18" name="">
             <a:extLst xmlns:a="http://schemas.openxmlformats.org/drawingml/2006/main">
               <a:ext uri="{FF2B5EF4-FFF2-40B4-BE49-F238E27FC236}">
-                <a16:creationId xmlns:a16="http://schemas.microsoft.com/office/drawing/2014/main" id="{844240EB-F642-4CD0-A86E-21B3A0810A5E}"/>
+                <a16:creationId xmlns:a16="http://schemas.microsoft.com/office/drawing/2014/main" id="{1C1D8BA4-0375-43E0-9F03-B62E8DCD4D36}"/>
               </a:ext>
             </a:extLst>
           </p:cNvPr>
@@ -12296,7 +12296,7 @@
           <p:cNvPr id="19" name="">
             <a:extLst xmlns:a="http://schemas.openxmlformats.org/drawingml/2006/main">
               <a:ext uri="{FF2B5EF4-FFF2-40B4-BE49-F238E27FC236}">
-                <a16:creationId xmlns:a16="http://schemas.microsoft.com/office/drawing/2014/main" id="{A605DBBF-A6FB-4EF1-90B1-12BE859187D8}"/>
+                <a16:creationId xmlns:a16="http://schemas.microsoft.com/office/drawing/2014/main" id="{F41FC2F7-01D3-40D1-91F0-3F5906118D31}"/>
               </a:ext>
             </a:extLst>
           </p:cNvPr>
@@ -12346,7 +12346,7 @@
           <p:cNvPr id="20" name="">
             <a:extLst xmlns:a="http://schemas.openxmlformats.org/drawingml/2006/main">
               <a:ext uri="{FF2B5EF4-FFF2-40B4-BE49-F238E27FC236}">
-                <a16:creationId xmlns:a16="http://schemas.microsoft.com/office/drawing/2014/main" id="{3FBF1492-08BB-4A29-8C9B-CCC987990AEA}"/>
+                <a16:creationId xmlns:a16="http://schemas.microsoft.com/office/drawing/2014/main" id="{51384C9D-ABB4-4972-BB57-53C47F607B53}"/>
               </a:ext>
             </a:extLst>
           </p:cNvPr>
@@ -12396,7 +12396,7 @@
           <p:cNvPr id="21" name="">
             <a:extLst xmlns:a="http://schemas.openxmlformats.org/drawingml/2006/main">
               <a:ext uri="{FF2B5EF4-FFF2-40B4-BE49-F238E27FC236}">
-                <a16:creationId xmlns:a16="http://schemas.microsoft.com/office/drawing/2014/main" id="{899E959A-AD55-4D9A-AB0B-F792522864A5}"/>
+                <a16:creationId xmlns:a16="http://schemas.microsoft.com/office/drawing/2014/main" id="{D3617115-0DB6-40E2-9CDD-0ED77B176599}"/>
               </a:ext>
             </a:extLst>
           </p:cNvPr>
@@ -12427,7 +12427,7 @@
           <p:cNvPr id="22" name="">
             <a:extLst xmlns:a="http://schemas.openxmlformats.org/drawingml/2006/main">
               <a:ext uri="{FF2B5EF4-FFF2-40B4-BE49-F238E27FC236}">
-                <a16:creationId xmlns:a16="http://schemas.microsoft.com/office/drawing/2014/main" id="{CE659E4C-5619-4B60-8AE9-21EAC8785AC2}"/>
+                <a16:creationId xmlns:a16="http://schemas.microsoft.com/office/drawing/2014/main" id="{7B4C34D7-F8CE-4C8E-9BFB-0DF0E1B25386}"/>
               </a:ext>
             </a:extLst>
           </p:cNvPr>
@@ -12477,7 +12477,7 @@
           <p:cNvPr id="23" name="">
             <a:extLst xmlns:a="http://schemas.openxmlformats.org/drawingml/2006/main">
               <a:ext uri="{FF2B5EF4-FFF2-40B4-BE49-F238E27FC236}">
-                <a16:creationId xmlns:a16="http://schemas.microsoft.com/office/drawing/2014/main" id="{93C73CBA-A40C-4A17-9414-7C238535A853}"/>
+                <a16:creationId xmlns:a16="http://schemas.microsoft.com/office/drawing/2014/main" id="{8A0D51E5-BD97-4F50-8CD3-81E2BBFA858A}"/>
               </a:ext>
             </a:extLst>
           </p:cNvPr>
@@ -12527,7 +12527,7 @@
           <p:cNvPr id="24" name="">
             <a:extLst xmlns:a="http://schemas.openxmlformats.org/drawingml/2006/main">
               <a:ext uri="{FF2B5EF4-FFF2-40B4-BE49-F238E27FC236}">
-                <a16:creationId xmlns:a16="http://schemas.microsoft.com/office/drawing/2014/main" id="{DD57E13E-0FAC-4779-B10D-93934DC597FB}"/>
+                <a16:creationId xmlns:a16="http://schemas.microsoft.com/office/drawing/2014/main" id="{921F100A-C647-4303-B596-88CC86CF077E}"/>
               </a:ext>
             </a:extLst>
           </p:cNvPr>
@@ -12562,7 +12562,7 @@
           <p:cNvPr id="25" name="">
             <a:extLst xmlns:a="http://schemas.openxmlformats.org/drawingml/2006/main">
               <a:ext uri="{FF2B5EF4-FFF2-40B4-BE49-F238E27FC236}">
-                <a16:creationId xmlns:a16="http://schemas.microsoft.com/office/drawing/2014/main" id="{3EF939B9-7C84-474C-B0A4-D955E91AF8BD}"/>
+                <a16:creationId xmlns:a16="http://schemas.microsoft.com/office/drawing/2014/main" id="{7C5E13E9-8D43-4824-ADFC-AEFC82C488B5}"/>
               </a:ext>
             </a:extLst>
           </p:cNvPr>
@@ -12595,7 +12595,7 @@
           <p:cNvPr id="26" name="">
             <a:extLst xmlns:a="http://schemas.openxmlformats.org/drawingml/2006/main">
               <a:ext uri="{FF2B5EF4-FFF2-40B4-BE49-F238E27FC236}">
-                <a16:creationId xmlns:a16="http://schemas.microsoft.com/office/drawing/2014/main" id="{990B2CE9-0B64-495A-B4EE-78360EAB5E39}"/>
+                <a16:creationId xmlns:a16="http://schemas.microsoft.com/office/drawing/2014/main" id="{DB6CED5E-BC2E-4400-8162-77903A2BF71E}"/>
               </a:ext>
             </a:extLst>
           </p:cNvPr>
@@ -12645,7 +12645,7 @@
           <p:cNvPr id="27" name="">
             <a:extLst xmlns:a="http://schemas.openxmlformats.org/drawingml/2006/main">
               <a:ext uri="{FF2B5EF4-FFF2-40B4-BE49-F238E27FC236}">
-                <a16:creationId xmlns:a16="http://schemas.microsoft.com/office/drawing/2014/main" id="{0F884ABE-0288-4CCD-9F48-D743C956A22E}"/>
+                <a16:creationId xmlns:a16="http://schemas.microsoft.com/office/drawing/2014/main" id="{B5AD892F-1F2D-4D93-B3AC-4F7864920220}"/>
               </a:ext>
             </a:extLst>
           </p:cNvPr>
@@ -12695,7 +12695,7 @@
           <p:cNvPr id="28" name="">
             <a:extLst xmlns:a="http://schemas.openxmlformats.org/drawingml/2006/main">
               <a:ext uri="{FF2B5EF4-FFF2-40B4-BE49-F238E27FC236}">
-                <a16:creationId xmlns:a16="http://schemas.microsoft.com/office/drawing/2014/main" id="{CBB68942-413D-4517-8484-081686B0F88A}"/>
+                <a16:creationId xmlns:a16="http://schemas.microsoft.com/office/drawing/2014/main" id="{5A23F543-A21D-4428-B00A-A1B68CF185EC}"/>
               </a:ext>
             </a:extLst>
           </p:cNvPr>
@@ -12745,7 +12745,7 @@
           <p:cNvPr id="29" name="">
             <a:extLst xmlns:a="http://schemas.openxmlformats.org/drawingml/2006/main">
               <a:ext uri="{FF2B5EF4-FFF2-40B4-BE49-F238E27FC236}">
-                <a16:creationId xmlns:a16="http://schemas.microsoft.com/office/drawing/2014/main" id="{AB1082BD-3C95-4BC4-BCD2-EBDBB64CBD62}"/>
+                <a16:creationId xmlns:a16="http://schemas.microsoft.com/office/drawing/2014/main" id="{C7D950FC-2296-47BD-8DD6-356B797D5C6E}"/>
               </a:ext>
             </a:extLst>
           </p:cNvPr>
@@ -12776,7 +12776,7 @@
           <p:cNvPr id="30" name="">
             <a:extLst xmlns:a="http://schemas.openxmlformats.org/drawingml/2006/main">
               <a:ext uri="{FF2B5EF4-FFF2-40B4-BE49-F238E27FC236}">
-                <a16:creationId xmlns:a16="http://schemas.microsoft.com/office/drawing/2014/main" id="{46548D08-469C-4E74-BD9B-15E5D2CB4E6B}"/>
+                <a16:creationId xmlns:a16="http://schemas.microsoft.com/office/drawing/2014/main" id="{44D2C740-311E-4DFA-9108-E0D75EFF7B6F}"/>
               </a:ext>
             </a:extLst>
           </p:cNvPr>
@@ -12826,7 +12826,7 @@
           <p:cNvPr id="31" name="">
             <a:extLst xmlns:a="http://schemas.openxmlformats.org/drawingml/2006/main">
               <a:ext uri="{FF2B5EF4-FFF2-40B4-BE49-F238E27FC236}">
-                <a16:creationId xmlns:a16="http://schemas.microsoft.com/office/drawing/2014/main" id="{D9C237A6-7D78-4551-B173-EC406077ED96}"/>
+                <a16:creationId xmlns:a16="http://schemas.microsoft.com/office/drawing/2014/main" id="{F45E53B2-87D0-46C4-AA77-9CF5F88F053D}"/>
               </a:ext>
             </a:extLst>
           </p:cNvPr>
@@ -12874,7 +12874,7 @@
     </p:spTree>
     <p:extLst>
       <p:ext uri="{BB962C8B-B14F-4D97-AF65-F5344CB8AC3E}">
-        <p14:creationId xmlns:p14="http://schemas.microsoft.com/office/powerpoint/2010/main" val="1295805741"/>
+        <p14:creationId xmlns:p14="http://schemas.microsoft.com/office/powerpoint/2010/main" val="1117913236"/>
       </p:ext>
     </p:extLst>
   </p:cSld>
@@ -12905,7 +12905,7 @@
           <p:cNvPr id="1" name="">
             <a:extLst xmlns:a="http://schemas.openxmlformats.org/drawingml/2006/main">
               <a:ext uri="{FF2B5EF4-FFF2-40B4-BE49-F238E27FC236}">
-                <a16:creationId xmlns:a16="http://schemas.microsoft.com/office/drawing/2014/main" id="{FB311ED7-91E4-44AF-B414-194F76B51FE3}"/>
+                <a16:creationId xmlns:a16="http://schemas.microsoft.com/office/drawing/2014/main" id="{D5DDF52D-9447-4D79-AAC7-8C0AB655A771}"/>
               </a:ext>
             </a:extLst>
           </p:cNvPr>
@@ -12940,7 +12940,7 @@
           <p:nvPr/>
         </p:nvPicPr>
         <p:blipFill>
-          <a:blip xmlns:r="http://schemas.openxmlformats.org/officeDocument/2006/relationships" xmlns:a="http://schemas.openxmlformats.org/drawingml/2006/main" r:embed="R6b615db394d54316"/>
+          <a:blip xmlns:r="http://schemas.openxmlformats.org/officeDocument/2006/relationships" xmlns:a="http://schemas.openxmlformats.org/drawingml/2006/main" r:embed="Rafc1a8d0721a4d6f"/>
           <a:stretch xmlns:a="http://schemas.openxmlformats.org/drawingml/2006/main"/>
         </p:blipFill>
         <p:spPr>
@@ -12958,7 +12958,7 @@
           <p:cNvPr id="3" name="">
             <a:extLst xmlns:a="http://schemas.openxmlformats.org/drawingml/2006/main">
               <a:ext uri="{FF2B5EF4-FFF2-40B4-BE49-F238E27FC236}">
-                <a16:creationId xmlns:a16="http://schemas.microsoft.com/office/drawing/2014/main" id="{99D9B229-6FC3-49BD-92B2-72BFFEECD31A}"/>
+                <a16:creationId xmlns:a16="http://schemas.microsoft.com/office/drawing/2014/main" id="{FA0E0110-7DA8-4A0A-9ABE-26D147786A30}"/>
               </a:ext>
             </a:extLst>
           </p:cNvPr>
@@ -13008,7 +13008,7 @@
           <p:cNvPr id="4" name="">
             <a:extLst xmlns:a="http://schemas.openxmlformats.org/drawingml/2006/main">
               <a:ext uri="{FF2B5EF4-FFF2-40B4-BE49-F238E27FC236}">
-                <a16:creationId xmlns:a16="http://schemas.microsoft.com/office/drawing/2014/main" id="{C21DEE1C-7B7C-49D2-9850-EB8F7AE0F09D}"/>
+                <a16:creationId xmlns:a16="http://schemas.microsoft.com/office/drawing/2014/main" id="{BE01E9E7-2257-4456-9985-1D7EA88473C8}"/>
               </a:ext>
             </a:extLst>
           </p:cNvPr>
@@ -13041,7 +13041,7 @@
           <p:cNvPr id="5" name="">
             <a:extLst xmlns:a="http://schemas.openxmlformats.org/drawingml/2006/main">
               <a:ext uri="{FF2B5EF4-FFF2-40B4-BE49-F238E27FC236}">
-                <a16:creationId xmlns:a16="http://schemas.microsoft.com/office/drawing/2014/main" id="{5CD76CE4-410E-4FE1-BE19-2863FAB40B63}"/>
+                <a16:creationId xmlns:a16="http://schemas.microsoft.com/office/drawing/2014/main" id="{D80AB725-BDE3-4C7D-BD18-C75480F25F52}"/>
               </a:ext>
             </a:extLst>
           </p:cNvPr>
@@ -13072,7 +13072,7 @@
           <p:cNvPr id="6" name="">
             <a:extLst xmlns:a="http://schemas.openxmlformats.org/drawingml/2006/main">
               <a:ext uri="{FF2B5EF4-FFF2-40B4-BE49-F238E27FC236}">
-                <a16:creationId xmlns:a16="http://schemas.microsoft.com/office/drawing/2014/main" id="{1D5AB591-ED3E-455C-82D3-23CE1AEACD23}"/>
+                <a16:creationId xmlns:a16="http://schemas.microsoft.com/office/drawing/2014/main" id="{4D94C1A7-09DD-48A7-ABF1-FACA06BDF702}"/>
               </a:ext>
             </a:extLst>
           </p:cNvPr>
@@ -13122,7 +13122,7 @@
           <p:cNvPr id="7" name="">
             <a:extLst xmlns:a="http://schemas.openxmlformats.org/drawingml/2006/main">
               <a:ext uri="{FF2B5EF4-FFF2-40B4-BE49-F238E27FC236}">
-                <a16:creationId xmlns:a16="http://schemas.microsoft.com/office/drawing/2014/main" id="{F9751A3C-E0E6-4FF0-8673-57372B227FD9}"/>
+                <a16:creationId xmlns:a16="http://schemas.microsoft.com/office/drawing/2014/main" id="{9ADAA942-344B-458A-9A8B-DA1A7B95BCA9}"/>
               </a:ext>
             </a:extLst>
           </p:cNvPr>
@@ -13172,7 +13172,7 @@
           <p:cNvPr id="8" name="">
             <a:extLst xmlns:a="http://schemas.openxmlformats.org/drawingml/2006/main">
               <a:ext uri="{FF2B5EF4-FFF2-40B4-BE49-F238E27FC236}">
-                <a16:creationId xmlns:a16="http://schemas.microsoft.com/office/drawing/2014/main" id="{6A5C9749-A68E-433E-A54C-9CF55FC934DF}"/>
+                <a16:creationId xmlns:a16="http://schemas.microsoft.com/office/drawing/2014/main" id="{F461FA73-AA53-49EF-BD1A-2270FC2AC8BC}"/>
               </a:ext>
             </a:extLst>
           </p:cNvPr>
@@ -13222,7 +13222,7 @@
           <p:cNvPr id="9" name="">
             <a:extLst xmlns:a="http://schemas.openxmlformats.org/drawingml/2006/main">
               <a:ext uri="{FF2B5EF4-FFF2-40B4-BE49-F238E27FC236}">
-                <a16:creationId xmlns:a16="http://schemas.microsoft.com/office/drawing/2014/main" id="{A67F892B-68C6-494E-9349-A1D248EF0AC8}"/>
+                <a16:creationId xmlns:a16="http://schemas.microsoft.com/office/drawing/2014/main" id="{2FA0F3C2-9707-4572-B7D5-7669EACECAE2}"/>
               </a:ext>
             </a:extLst>
           </p:cNvPr>
@@ -13272,7 +13272,7 @@
           <p:cNvPr id="10" name="">
             <a:extLst xmlns:a="http://schemas.openxmlformats.org/drawingml/2006/main">
               <a:ext uri="{FF2B5EF4-FFF2-40B4-BE49-F238E27FC236}">
-                <a16:creationId xmlns:a16="http://schemas.microsoft.com/office/drawing/2014/main" id="{ED92ABE1-C6A3-4FC8-8CC8-734C532CC6C4}"/>
+                <a16:creationId xmlns:a16="http://schemas.microsoft.com/office/drawing/2014/main" id="{3A2A8DF4-845F-4CB7-AD1D-88070BBDE5D6}"/>
               </a:ext>
             </a:extLst>
           </p:cNvPr>
@@ -13303,7 +13303,7 @@
           <p:cNvPr id="11" name="">
             <a:extLst xmlns:a="http://schemas.openxmlformats.org/drawingml/2006/main">
               <a:ext uri="{FF2B5EF4-FFF2-40B4-BE49-F238E27FC236}">
-                <a16:creationId xmlns:a16="http://schemas.microsoft.com/office/drawing/2014/main" id="{B06D550B-3466-455A-9362-58A4A6C86F9B}"/>
+                <a16:creationId xmlns:a16="http://schemas.microsoft.com/office/drawing/2014/main" id="{44FFBD31-AA91-4EB0-8674-A6F141288675}"/>
               </a:ext>
             </a:extLst>
           </p:cNvPr>
@@ -13353,7 +13353,7 @@
           <p:cNvPr id="12" name="">
             <a:extLst xmlns:a="http://schemas.openxmlformats.org/drawingml/2006/main">
               <a:ext uri="{FF2B5EF4-FFF2-40B4-BE49-F238E27FC236}">
-                <a16:creationId xmlns:a16="http://schemas.microsoft.com/office/drawing/2014/main" id="{E21E3E6D-6612-41B3-AD7A-234D6FA864AE}"/>
+                <a16:creationId xmlns:a16="http://schemas.microsoft.com/office/drawing/2014/main" id="{14904983-06FA-43C1-BC5F-8CD31DD26868}"/>
               </a:ext>
             </a:extLst>
           </p:cNvPr>
@@ -13403,7 +13403,7 @@
           <p:cNvPr id="13" name="">
             <a:extLst xmlns:a="http://schemas.openxmlformats.org/drawingml/2006/main">
               <a:ext uri="{FF2B5EF4-FFF2-40B4-BE49-F238E27FC236}">
-                <a16:creationId xmlns:a16="http://schemas.microsoft.com/office/drawing/2014/main" id="{71EB3EDA-CEEC-40F8-9CE0-6B4E867F64B5}"/>
+                <a16:creationId xmlns:a16="http://schemas.microsoft.com/office/drawing/2014/main" id="{0CB777F1-F1E4-47A3-A123-646FDF5604E8}"/>
               </a:ext>
             </a:extLst>
           </p:cNvPr>
@@ -13434,7 +13434,7 @@
           <p:cNvPr id="14" name="">
             <a:extLst xmlns:a="http://schemas.openxmlformats.org/drawingml/2006/main">
               <a:ext uri="{FF2B5EF4-FFF2-40B4-BE49-F238E27FC236}">
-                <a16:creationId xmlns:a16="http://schemas.microsoft.com/office/drawing/2014/main" id="{96AB4149-2D21-4CDE-AF01-50A264583CDB}"/>
+                <a16:creationId xmlns:a16="http://schemas.microsoft.com/office/drawing/2014/main" id="{96977DFA-8ECC-4B48-BFA1-10FC72B8A363}"/>
               </a:ext>
             </a:extLst>
           </p:cNvPr>
@@ -13484,7 +13484,7 @@
           <p:cNvPr id="15" name="">
             <a:extLst xmlns:a="http://schemas.openxmlformats.org/drawingml/2006/main">
               <a:ext uri="{FF2B5EF4-FFF2-40B4-BE49-F238E27FC236}">
-                <a16:creationId xmlns:a16="http://schemas.microsoft.com/office/drawing/2014/main" id="{0233F9E0-876D-4EAD-9385-04A8909BE8C2}"/>
+                <a16:creationId xmlns:a16="http://schemas.microsoft.com/office/drawing/2014/main" id="{CEC6E1BE-E16A-4A43-8BCA-802757E2B167}"/>
               </a:ext>
             </a:extLst>
           </p:cNvPr>
@@ -13534,7 +13534,7 @@
           <p:cNvPr id="16" name="">
             <a:extLst xmlns:a="http://schemas.openxmlformats.org/drawingml/2006/main">
               <a:ext uri="{FF2B5EF4-FFF2-40B4-BE49-F238E27FC236}">
-                <a16:creationId xmlns:a16="http://schemas.microsoft.com/office/drawing/2014/main" id="{2994D882-C6A2-475B-A8B5-14D8ED587EDD}"/>
+                <a16:creationId xmlns:a16="http://schemas.microsoft.com/office/drawing/2014/main" id="{88A74F98-95B3-4B1B-AE20-2907C2F26040}"/>
               </a:ext>
             </a:extLst>
           </p:cNvPr>
@@ -13565,7 +13565,7 @@
           <p:cNvPr id="17" name="">
             <a:extLst xmlns:a="http://schemas.openxmlformats.org/drawingml/2006/main">
               <a:ext uri="{FF2B5EF4-FFF2-40B4-BE49-F238E27FC236}">
-                <a16:creationId xmlns:a16="http://schemas.microsoft.com/office/drawing/2014/main" id="{54E6219C-6F6C-41AE-8B91-E153CAA75BC5}"/>
+                <a16:creationId xmlns:a16="http://schemas.microsoft.com/office/drawing/2014/main" id="{874BC017-4A46-426D-92C6-9A9081A8738E}"/>
               </a:ext>
             </a:extLst>
           </p:cNvPr>
@@ -13615,7 +13615,7 @@
           <p:cNvPr id="18" name="">
             <a:extLst xmlns:a="http://schemas.openxmlformats.org/drawingml/2006/main">
               <a:ext uri="{FF2B5EF4-FFF2-40B4-BE49-F238E27FC236}">
-                <a16:creationId xmlns:a16="http://schemas.microsoft.com/office/drawing/2014/main" id="{5DFF6413-AC80-4D9F-9EFA-589ABB869816}"/>
+                <a16:creationId xmlns:a16="http://schemas.microsoft.com/office/drawing/2014/main" id="{487D6D43-3A1F-4294-9339-3B7C8A359A33}"/>
               </a:ext>
             </a:extLst>
           </p:cNvPr>
@@ -13665,7 +13665,7 @@
           <p:cNvPr id="19" name="">
             <a:extLst xmlns:a="http://schemas.openxmlformats.org/drawingml/2006/main">
               <a:ext uri="{FF2B5EF4-FFF2-40B4-BE49-F238E27FC236}">
-                <a16:creationId xmlns:a16="http://schemas.microsoft.com/office/drawing/2014/main" id="{BF33F9F5-36AA-4F59-9926-69B11E806392}"/>
+                <a16:creationId xmlns:a16="http://schemas.microsoft.com/office/drawing/2014/main" id="{2BD83C5D-DCE1-4B0D-A21F-2794C060D6F9}"/>
               </a:ext>
             </a:extLst>
           </p:cNvPr>
@@ -13700,7 +13700,7 @@
           <p:cNvPr id="20" name="">
             <a:extLst xmlns:a="http://schemas.openxmlformats.org/drawingml/2006/main">
               <a:ext uri="{FF2B5EF4-FFF2-40B4-BE49-F238E27FC236}">
-                <a16:creationId xmlns:a16="http://schemas.microsoft.com/office/drawing/2014/main" id="{8826B28E-9F46-4581-8FAE-1293C3A52AAC}"/>
+                <a16:creationId xmlns:a16="http://schemas.microsoft.com/office/drawing/2014/main" id="{427D3ED1-BFCF-4CC9-A8CC-847BDEEE377E}"/>
               </a:ext>
             </a:extLst>
           </p:cNvPr>
@@ -13750,7 +13750,7 @@
           <p:cNvPr id="21" name="">
             <a:extLst xmlns:a="http://schemas.openxmlformats.org/drawingml/2006/main">
               <a:ext uri="{FF2B5EF4-FFF2-40B4-BE49-F238E27FC236}">
-                <a16:creationId xmlns:a16="http://schemas.microsoft.com/office/drawing/2014/main" id="{0399DA6A-C3DE-4384-A8F7-07B49F975BD8}"/>
+                <a16:creationId xmlns:a16="http://schemas.microsoft.com/office/drawing/2014/main" id="{D54307F2-92EA-49E3-B80D-B9C06EDDB5A3}"/>
               </a:ext>
             </a:extLst>
           </p:cNvPr>
@@ -13804,7 +13804,7 @@
           <p:nvPr/>
         </p:nvPicPr>
         <p:blipFill>
-          <a:blip xmlns:r="http://schemas.openxmlformats.org/officeDocument/2006/relationships" xmlns:a="http://schemas.openxmlformats.org/drawingml/2006/main" r:embed="R3f9c73364f024654"/>
+          <a:blip xmlns:r="http://schemas.openxmlformats.org/officeDocument/2006/relationships" xmlns:a="http://schemas.openxmlformats.org/drawingml/2006/main" r:embed="Rb5a4d14eed2e41f4"/>
           <a:stretch xmlns:a="http://schemas.openxmlformats.org/drawingml/2006/main"/>
         </p:blipFill>
         <p:spPr>
@@ -13822,7 +13822,7 @@
           <p:cNvPr id="23" name="">
             <a:extLst xmlns:a="http://schemas.openxmlformats.org/drawingml/2006/main">
               <a:ext uri="{FF2B5EF4-FFF2-40B4-BE49-F238E27FC236}">
-                <a16:creationId xmlns:a16="http://schemas.microsoft.com/office/drawing/2014/main" id="{D0698D56-F58D-41A1-9F79-0DEECB951B8B}"/>
+                <a16:creationId xmlns:a16="http://schemas.microsoft.com/office/drawing/2014/main" id="{52EC2445-D874-4204-AAB6-4FD287C67FF9}"/>
               </a:ext>
             </a:extLst>
           </p:cNvPr>
@@ -13872,7 +13872,7 @@
           <p:cNvPr id="24" name="">
             <a:extLst xmlns:a="http://schemas.openxmlformats.org/drawingml/2006/main">
               <a:ext uri="{FF2B5EF4-FFF2-40B4-BE49-F238E27FC236}">
-                <a16:creationId xmlns:a16="http://schemas.microsoft.com/office/drawing/2014/main" id="{2F339F28-F9B7-4898-9330-8D1C493F3BCA}"/>
+                <a16:creationId xmlns:a16="http://schemas.microsoft.com/office/drawing/2014/main" id="{8075D739-21B4-47A8-8D3B-8D4637D5FDB8}"/>
               </a:ext>
             </a:extLst>
           </p:cNvPr>
@@ -13922,7 +13922,7 @@
           <p:cNvPr id="25" name="">
             <a:extLst xmlns:a="http://schemas.openxmlformats.org/drawingml/2006/main">
               <a:ext uri="{FF2B5EF4-FFF2-40B4-BE49-F238E27FC236}">
-                <a16:creationId xmlns:a16="http://schemas.microsoft.com/office/drawing/2014/main" id="{42C9DD09-00D5-4719-9413-E079E8A840CB}"/>
+                <a16:creationId xmlns:a16="http://schemas.microsoft.com/office/drawing/2014/main" id="{39627B9A-B1FB-4BB8-A82F-5F0017284892}"/>
               </a:ext>
             </a:extLst>
           </p:cNvPr>
@@ -13970,7 +13970,7 @@
     </p:spTree>
     <p:extLst>
       <p:ext uri="{BB962C8B-B14F-4D97-AF65-F5344CB8AC3E}">
-        <p14:creationId xmlns:p14="http://schemas.microsoft.com/office/powerpoint/2010/main" val="1724789130"/>
+        <p14:creationId xmlns:p14="http://schemas.microsoft.com/office/powerpoint/2010/main" val="1581370479"/>
       </p:ext>
     </p:extLst>
   </p:cSld>

--- a/static/audit_presentation_btg.pptx
+++ b/static/audit_presentation_btg.pptx
@@ -2,25 +2,25 @@
 <file path=ppt/presentation.xml><?xml version="1.0" encoding="utf-8"?>
 <p:presentation xmlns:p="http://schemas.openxmlformats.org/presentationml/2006/main">
   <p:sldMasterIdLst>
-    <p:sldMasterId xmlns:r="http://schemas.openxmlformats.org/officeDocument/2006/relationships" id="2147483648" r:id="R4e3ae12163474e4d"/>
+    <p:sldMasterId xmlns:r="http://schemas.openxmlformats.org/officeDocument/2006/relationships" id="2147483648" r:id="R7116e19b34284bf2"/>
   </p:sldMasterIdLst>
   <p:notesMasterIdLst>
-    <p:notesMasterId xmlns:r="http://schemas.openxmlformats.org/officeDocument/2006/relationships" r:id="R31f831c321e749cb"/>
+    <p:notesMasterId xmlns:r="http://schemas.openxmlformats.org/officeDocument/2006/relationships" r:id="R84002e4caeeb4ea5"/>
   </p:notesMasterIdLst>
   <p:sldIdLst>
-    <p:sldId xmlns:r="http://schemas.openxmlformats.org/officeDocument/2006/relationships" id="256" r:id="R430a630675a04467"/>
-    <p:sldId xmlns:r="http://schemas.openxmlformats.org/officeDocument/2006/relationships" id="257" r:id="Rbef5b6f0c50547b7"/>
-    <p:sldId xmlns:r="http://schemas.openxmlformats.org/officeDocument/2006/relationships" id="258" r:id="R65015bcbba6344a1"/>
-    <p:sldId xmlns:r="http://schemas.openxmlformats.org/officeDocument/2006/relationships" id="259" r:id="Ra2c1b52a74944f18"/>
-    <p:sldId xmlns:r="http://schemas.openxmlformats.org/officeDocument/2006/relationships" id="260" r:id="R79e1a67b4775494d"/>
-    <p:sldId xmlns:r="http://schemas.openxmlformats.org/officeDocument/2006/relationships" id="261" r:id="R5af336cdb1b045de"/>
-    <p:sldId xmlns:r="http://schemas.openxmlformats.org/officeDocument/2006/relationships" id="262" r:id="Rf81543f101904856"/>
-    <p:sldId xmlns:r="http://schemas.openxmlformats.org/officeDocument/2006/relationships" id="263" r:id="Re461244ed5994d67"/>
-    <p:sldId xmlns:r="http://schemas.openxmlformats.org/officeDocument/2006/relationships" id="264" r:id="Rc37fbec47d514608"/>
-    <p:sldId xmlns:r="http://schemas.openxmlformats.org/officeDocument/2006/relationships" id="265" r:id="Reee92b6cef724ca7"/>
-    <p:sldId xmlns:r="http://schemas.openxmlformats.org/officeDocument/2006/relationships" id="266" r:id="R2084266a83674a12"/>
-    <p:sldId xmlns:r="http://schemas.openxmlformats.org/officeDocument/2006/relationships" id="267" r:id="R8af82a9903e14d3d"/>
-    <p:sldId xmlns:r="http://schemas.openxmlformats.org/officeDocument/2006/relationships" id="268" r:id="R7cdf43c138634406"/>
+    <p:sldId xmlns:r="http://schemas.openxmlformats.org/officeDocument/2006/relationships" id="256" r:id="R568ebedcddf742ff"/>
+    <p:sldId xmlns:r="http://schemas.openxmlformats.org/officeDocument/2006/relationships" id="257" r:id="R42fb5afdb79c4028"/>
+    <p:sldId xmlns:r="http://schemas.openxmlformats.org/officeDocument/2006/relationships" id="258" r:id="Rc7a7a0b7299b4c17"/>
+    <p:sldId xmlns:r="http://schemas.openxmlformats.org/officeDocument/2006/relationships" id="259" r:id="R8e096944493640ec"/>
+    <p:sldId xmlns:r="http://schemas.openxmlformats.org/officeDocument/2006/relationships" id="260" r:id="R512d34dbb6cd4e26"/>
+    <p:sldId xmlns:r="http://schemas.openxmlformats.org/officeDocument/2006/relationships" id="261" r:id="Rce8a1c7606cf4cfe"/>
+    <p:sldId xmlns:r="http://schemas.openxmlformats.org/officeDocument/2006/relationships" id="262" r:id="R08c07692ff974e7b"/>
+    <p:sldId xmlns:r="http://schemas.openxmlformats.org/officeDocument/2006/relationships" id="263" r:id="R1c861b5c9c7b4482"/>
+    <p:sldId xmlns:r="http://schemas.openxmlformats.org/officeDocument/2006/relationships" id="264" r:id="Rbb8e02ea06a043aa"/>
+    <p:sldId xmlns:r="http://schemas.openxmlformats.org/officeDocument/2006/relationships" id="265" r:id="R87102672edd14962"/>
+    <p:sldId xmlns:r="http://schemas.openxmlformats.org/officeDocument/2006/relationships" id="266" r:id="R454d2b4da4f14e8c"/>
+    <p:sldId xmlns:r="http://schemas.openxmlformats.org/officeDocument/2006/relationships" id="267" r:id="R2910281836c546de"/>
+    <p:sldId xmlns:r="http://schemas.openxmlformats.org/officeDocument/2006/relationships" id="268" r:id="Rdcb4d926f06d4a09"/>
   </p:sldIdLst>
   <p:sldSz cx="12192000" cy="6858000"/>
   <p:notesSz cx="6858000" cy="9144000"/>
@@ -1405,7 +1405,7 @@
   </p:cSld>
   <p:clrMap bg1="lt1" tx1="dk1" bg2="lt2" tx2="dk2" accent1="accent1" accent2="accent2" accent3="accent3" accent4="accent4" accent5="accent5" accent6="accent6" hlink="hlink" folHlink="folHlink"/>
   <p:sldLayoutIdLst>
-    <p:sldLayoutId xmlns:r="http://schemas.openxmlformats.org/officeDocument/2006/relationships" id="2147483649" r:id="R11d8cda569d2476f"/>
+    <p:sldLayoutId xmlns:r="http://schemas.openxmlformats.org/officeDocument/2006/relationships" id="2147483649" r:id="R920c299df4f0404d"/>
   </p:sldLayoutIdLst>
   <p:txStyles>
     <p:titleStyle>
@@ -1956,7 +1956,7 @@
           <p:cNvPr id="1" name="">
             <a:extLst xmlns:a="http://schemas.openxmlformats.org/drawingml/2006/main">
               <a:ext uri="{FF2B5EF4-FFF2-40B4-BE49-F238E27FC236}">
-                <a16:creationId xmlns:a16="http://schemas.microsoft.com/office/drawing/2014/main" id="{75F7C33B-FE67-410E-ABB2-2167181A6ED6}"/>
+                <a16:creationId xmlns:a16="http://schemas.microsoft.com/office/drawing/2014/main" id="{4FB47518-41AA-4B90-A7CE-3CF8C18443E3}"/>
               </a:ext>
             </a:extLst>
           </p:cNvPr>
@@ -1987,7 +1987,7 @@
           <p:cNvPr id="2" name="">
             <a:extLst xmlns:a="http://schemas.openxmlformats.org/drawingml/2006/main">
               <a:ext uri="{FF2B5EF4-FFF2-40B4-BE49-F238E27FC236}">
-                <a16:creationId xmlns:a16="http://schemas.microsoft.com/office/drawing/2014/main" id="{6F00E257-82A2-4264-A421-4FD0E2A314AD}"/>
+                <a16:creationId xmlns:a16="http://schemas.microsoft.com/office/drawing/2014/main" id="{3A6A9011-D9B9-4973-917A-8C6AAE9505A8}"/>
               </a:ext>
             </a:extLst>
           </p:cNvPr>
@@ -2022,7 +2022,7 @@
           <p:nvPr/>
         </p:nvPicPr>
         <p:blipFill>
-          <a:blip xmlns:r="http://schemas.openxmlformats.org/officeDocument/2006/relationships" xmlns:a="http://schemas.openxmlformats.org/drawingml/2006/main" r:embed="R6300837bf4c84d04"/>
+          <a:blip xmlns:r="http://schemas.openxmlformats.org/officeDocument/2006/relationships" xmlns:a="http://schemas.openxmlformats.org/drawingml/2006/main" r:embed="Reabdf44747554d60"/>
           <a:srcRect xmlns:a="http://schemas.openxmlformats.org/drawingml/2006/main" l="0" t="11037" r="0" b="11037"/>
           <a:stretch xmlns:a="http://schemas.openxmlformats.org/drawingml/2006/main">
             <a:fillRect l="0" t="0" r="0" b="0"/>
@@ -2043,7 +2043,7 @@
           <p:cNvPr id="4" name="">
             <a:extLst xmlns:a="http://schemas.openxmlformats.org/drawingml/2006/main">
               <a:ext uri="{FF2B5EF4-FFF2-40B4-BE49-F238E27FC236}">
-                <a16:creationId xmlns:a16="http://schemas.microsoft.com/office/drawing/2014/main" id="{72FD9262-1B5A-4128-BA28-69BA6BDD9729}"/>
+                <a16:creationId xmlns:a16="http://schemas.microsoft.com/office/drawing/2014/main" id="{92616962-0C75-4391-AB13-BA381031BF42}"/>
               </a:ext>
             </a:extLst>
           </p:cNvPr>
@@ -2078,7 +2078,7 @@
           <p:nvPr/>
         </p:nvPicPr>
         <p:blipFill>
-          <a:blip xmlns:r="http://schemas.openxmlformats.org/officeDocument/2006/relationships" xmlns:a="http://schemas.openxmlformats.org/drawingml/2006/main" r:embed="R8109ceccf3754a2f"/>
+          <a:blip xmlns:r="http://schemas.openxmlformats.org/officeDocument/2006/relationships" xmlns:a="http://schemas.openxmlformats.org/drawingml/2006/main" r:embed="Rc7782ab649d74f71"/>
           <a:stretch xmlns:a="http://schemas.openxmlformats.org/drawingml/2006/main"/>
         </p:blipFill>
         <p:spPr>
@@ -2096,7 +2096,7 @@
           <p:cNvPr id="6" name="">
             <a:extLst xmlns:a="http://schemas.openxmlformats.org/drawingml/2006/main">
               <a:ext uri="{FF2B5EF4-FFF2-40B4-BE49-F238E27FC236}">
-                <a16:creationId xmlns:a16="http://schemas.microsoft.com/office/drawing/2014/main" id="{D5A46375-4C40-4453-93A7-C2A5D0ABC3CA}"/>
+                <a16:creationId xmlns:a16="http://schemas.microsoft.com/office/drawing/2014/main" id="{5B5CA857-44E5-4C7D-913E-D463AC0864C0}"/>
               </a:ext>
             </a:extLst>
           </p:cNvPr>
@@ -2146,7 +2146,7 @@
           <p:cNvPr id="7" name="">
             <a:extLst xmlns:a="http://schemas.openxmlformats.org/drawingml/2006/main">
               <a:ext uri="{FF2B5EF4-FFF2-40B4-BE49-F238E27FC236}">
-                <a16:creationId xmlns:a16="http://schemas.microsoft.com/office/drawing/2014/main" id="{BD3FA4E9-D709-440C-A616-ED57B32688DD}"/>
+                <a16:creationId xmlns:a16="http://schemas.microsoft.com/office/drawing/2014/main" id="{F3E4A969-3528-4DEC-B8E1-CFDE8E76971D}"/>
               </a:ext>
             </a:extLst>
           </p:cNvPr>
@@ -2196,7 +2196,7 @@
           <p:cNvPr id="8" name="">
             <a:extLst xmlns:a="http://schemas.openxmlformats.org/drawingml/2006/main">
               <a:ext uri="{FF2B5EF4-FFF2-40B4-BE49-F238E27FC236}">
-                <a16:creationId xmlns:a16="http://schemas.microsoft.com/office/drawing/2014/main" id="{0CD7DFD3-BDA8-4E09-A987-4EB7E15BDD38}"/>
+                <a16:creationId xmlns:a16="http://schemas.microsoft.com/office/drawing/2014/main" id="{434F2AEE-C967-46C6-A926-FD17656486BA}"/>
               </a:ext>
             </a:extLst>
           </p:cNvPr>
@@ -2246,7 +2246,7 @@
           <p:cNvPr id="9" name="">
             <a:extLst xmlns:a="http://schemas.openxmlformats.org/drawingml/2006/main">
               <a:ext uri="{FF2B5EF4-FFF2-40B4-BE49-F238E27FC236}">
-                <a16:creationId xmlns:a16="http://schemas.microsoft.com/office/drawing/2014/main" id="{0A136532-D9DA-4F17-9FA4-E30C6485C141}"/>
+                <a16:creationId xmlns:a16="http://schemas.microsoft.com/office/drawing/2014/main" id="{C717A8BC-E416-4D8F-85A9-240CB0505652}"/>
               </a:ext>
             </a:extLst>
           </p:cNvPr>
@@ -2281,7 +2281,7 @@
           <p:cNvPr id="10" name="">
             <a:extLst xmlns:a="http://schemas.openxmlformats.org/drawingml/2006/main">
               <a:ext uri="{FF2B5EF4-FFF2-40B4-BE49-F238E27FC236}">
-                <a16:creationId xmlns:a16="http://schemas.microsoft.com/office/drawing/2014/main" id="{32790C0D-6206-48D0-968C-CDD37E1B6813}"/>
+                <a16:creationId xmlns:a16="http://schemas.microsoft.com/office/drawing/2014/main" id="{143DF025-8FE8-4FC2-9375-C1A22DF7D7BF}"/>
               </a:ext>
             </a:extLst>
           </p:cNvPr>
@@ -2331,7 +2331,7 @@
           <p:cNvPr id="11" name="">
             <a:extLst xmlns:a="http://schemas.openxmlformats.org/drawingml/2006/main">
               <a:ext uri="{FF2B5EF4-FFF2-40B4-BE49-F238E27FC236}">
-                <a16:creationId xmlns:a16="http://schemas.microsoft.com/office/drawing/2014/main" id="{E838680A-2F2E-40C8-9481-1F7ACE82BD4D}"/>
+                <a16:creationId xmlns:a16="http://schemas.microsoft.com/office/drawing/2014/main" id="{A28471E3-A009-4D45-B7DA-C406EE3AD335}"/>
               </a:ext>
             </a:extLst>
           </p:cNvPr>
@@ -2381,7 +2381,7 @@
           <p:cNvPr id="12" name="">
             <a:extLst xmlns:a="http://schemas.openxmlformats.org/drawingml/2006/main">
               <a:ext uri="{FF2B5EF4-FFF2-40B4-BE49-F238E27FC236}">
-                <a16:creationId xmlns:a16="http://schemas.microsoft.com/office/drawing/2014/main" id="{FC1790D3-3BE5-4B14-BDB5-730D2244AE49}"/>
+                <a16:creationId xmlns:a16="http://schemas.microsoft.com/office/drawing/2014/main" id="{44842FB7-33E7-48D0-9436-F03A63C64819}"/>
               </a:ext>
             </a:extLst>
           </p:cNvPr>
@@ -2416,7 +2416,7 @@
           <p:cNvPr id="13" name="">
             <a:extLst xmlns:a="http://schemas.openxmlformats.org/drawingml/2006/main">
               <a:ext uri="{FF2B5EF4-FFF2-40B4-BE49-F238E27FC236}">
-                <a16:creationId xmlns:a16="http://schemas.microsoft.com/office/drawing/2014/main" id="{7DD2FB34-A9D3-4082-B39F-FAE04296EE0B}"/>
+                <a16:creationId xmlns:a16="http://schemas.microsoft.com/office/drawing/2014/main" id="{499C1205-FB02-46D6-8AF4-F46286DD8984}"/>
               </a:ext>
             </a:extLst>
           </p:cNvPr>
@@ -2466,7 +2466,7 @@
           <p:cNvPr id="14" name="">
             <a:extLst xmlns:a="http://schemas.openxmlformats.org/drawingml/2006/main">
               <a:ext uri="{FF2B5EF4-FFF2-40B4-BE49-F238E27FC236}">
-                <a16:creationId xmlns:a16="http://schemas.microsoft.com/office/drawing/2014/main" id="{9166144D-B6C2-4601-8F53-36196BE897B3}"/>
+                <a16:creationId xmlns:a16="http://schemas.microsoft.com/office/drawing/2014/main" id="{70CE8FA6-2446-43F8-907F-83324F6E5C58}"/>
               </a:ext>
             </a:extLst>
           </p:cNvPr>
@@ -2516,7 +2516,7 @@
           <p:cNvPr id="15" name="">
             <a:extLst xmlns:a="http://schemas.openxmlformats.org/drawingml/2006/main">
               <a:ext uri="{FF2B5EF4-FFF2-40B4-BE49-F238E27FC236}">
-                <a16:creationId xmlns:a16="http://schemas.microsoft.com/office/drawing/2014/main" id="{D83B712D-5800-4D8E-B597-EECCC620E5BB}"/>
+                <a16:creationId xmlns:a16="http://schemas.microsoft.com/office/drawing/2014/main" id="{38862981-EA44-4D4B-B7C2-7D10B2F6C8DC}"/>
               </a:ext>
             </a:extLst>
           </p:cNvPr>
@@ -2566,7 +2566,7 @@
           <p:cNvPr id="16" name="">
             <a:extLst xmlns:a="http://schemas.openxmlformats.org/drawingml/2006/main">
               <a:ext uri="{FF2B5EF4-FFF2-40B4-BE49-F238E27FC236}">
-                <a16:creationId xmlns:a16="http://schemas.microsoft.com/office/drawing/2014/main" id="{3BABB18E-EDDF-47C1-BB3A-FF743F8AD976}"/>
+                <a16:creationId xmlns:a16="http://schemas.microsoft.com/office/drawing/2014/main" id="{D8440ADF-CC84-4F8E-9EE2-4286AB9991CA}"/>
               </a:ext>
             </a:extLst>
           </p:cNvPr>
@@ -2614,7 +2614,7 @@
     </p:spTree>
     <p:extLst>
       <p:ext uri="{BB962C8B-B14F-4D97-AF65-F5344CB8AC3E}">
-        <p14:creationId xmlns:p14="http://schemas.microsoft.com/office/powerpoint/2010/main" val="1878418042"/>
+        <p14:creationId xmlns:p14="http://schemas.microsoft.com/office/powerpoint/2010/main" val="524818410"/>
       </p:ext>
     </p:extLst>
   </p:cSld>
@@ -2645,7 +2645,7 @@
           <p:cNvPr id="1" name="">
             <a:extLst xmlns:a="http://schemas.openxmlformats.org/drawingml/2006/main">
               <a:ext uri="{FF2B5EF4-FFF2-40B4-BE49-F238E27FC236}">
-                <a16:creationId xmlns:a16="http://schemas.microsoft.com/office/drawing/2014/main" id="{B090AA48-EFC5-407A-B7DF-3F97D763A765}"/>
+                <a16:creationId xmlns:a16="http://schemas.microsoft.com/office/drawing/2014/main" id="{E34F7613-3B22-4AB8-A0C9-705905867FCF}"/>
               </a:ext>
             </a:extLst>
           </p:cNvPr>
@@ -2680,7 +2680,7 @@
           <p:nvPr/>
         </p:nvPicPr>
         <p:blipFill>
-          <a:blip xmlns:r="http://schemas.openxmlformats.org/officeDocument/2006/relationships" xmlns:a="http://schemas.openxmlformats.org/drawingml/2006/main" r:embed="R4778e069d6cb45d2"/>
+          <a:blip xmlns:r="http://schemas.openxmlformats.org/officeDocument/2006/relationships" xmlns:a="http://schemas.openxmlformats.org/drawingml/2006/main" r:embed="Rcc830b5a1ffc4745"/>
           <a:stretch xmlns:a="http://schemas.openxmlformats.org/drawingml/2006/main"/>
         </p:blipFill>
         <p:spPr>
@@ -2698,7 +2698,7 @@
           <p:cNvPr id="3" name="">
             <a:extLst xmlns:a="http://schemas.openxmlformats.org/drawingml/2006/main">
               <a:ext uri="{FF2B5EF4-FFF2-40B4-BE49-F238E27FC236}">
-                <a16:creationId xmlns:a16="http://schemas.microsoft.com/office/drawing/2014/main" id="{57A2153B-1BF6-43F1-AFE1-1C11B3487653}"/>
+                <a16:creationId xmlns:a16="http://schemas.microsoft.com/office/drawing/2014/main" id="{AF04C09C-6338-4D43-BC66-C5E968883E46}"/>
               </a:ext>
             </a:extLst>
           </p:cNvPr>
@@ -2748,7 +2748,7 @@
           <p:cNvPr id="4" name="">
             <a:extLst xmlns:a="http://schemas.openxmlformats.org/drawingml/2006/main">
               <a:ext uri="{FF2B5EF4-FFF2-40B4-BE49-F238E27FC236}">
-                <a16:creationId xmlns:a16="http://schemas.microsoft.com/office/drawing/2014/main" id="{66A39732-4AD1-479B-9EDF-DC70BCB17A10}"/>
+                <a16:creationId xmlns:a16="http://schemas.microsoft.com/office/drawing/2014/main" id="{29D878AF-41A6-4836-83CF-10C093713237}"/>
               </a:ext>
             </a:extLst>
           </p:cNvPr>
@@ -2781,7 +2781,7 @@
           <p:cNvPr id="5" name="">
             <a:extLst xmlns:a="http://schemas.openxmlformats.org/drawingml/2006/main">
               <a:ext uri="{FF2B5EF4-FFF2-40B4-BE49-F238E27FC236}">
-                <a16:creationId xmlns:a16="http://schemas.microsoft.com/office/drawing/2014/main" id="{07DDC6B6-004E-47D5-AAB3-4B90D08FC54A}"/>
+                <a16:creationId xmlns:a16="http://schemas.microsoft.com/office/drawing/2014/main" id="{86D9E732-148B-4A03-80E1-AFE14917BC88}"/>
               </a:ext>
             </a:extLst>
           </p:cNvPr>
@@ -2812,7 +2812,7 @@
           <p:cNvPr id="6" name="">
             <a:extLst xmlns:a="http://schemas.openxmlformats.org/drawingml/2006/main">
               <a:ext uri="{FF2B5EF4-FFF2-40B4-BE49-F238E27FC236}">
-                <a16:creationId xmlns:a16="http://schemas.microsoft.com/office/drawing/2014/main" id="{D5E74291-E523-4C4B-B674-192279A5D0CA}"/>
+                <a16:creationId xmlns:a16="http://schemas.microsoft.com/office/drawing/2014/main" id="{CB6C116B-D8CD-47B3-9E15-4BA3CA79719A}"/>
               </a:ext>
             </a:extLst>
           </p:cNvPr>
@@ -2862,7 +2862,7 @@
           <p:cNvPr id="7" name="">
             <a:extLst xmlns:a="http://schemas.openxmlformats.org/drawingml/2006/main">
               <a:ext uri="{FF2B5EF4-FFF2-40B4-BE49-F238E27FC236}">
-                <a16:creationId xmlns:a16="http://schemas.microsoft.com/office/drawing/2014/main" id="{77FCC403-DE94-40C3-8FE1-7007C9AAABD3}"/>
+                <a16:creationId xmlns:a16="http://schemas.microsoft.com/office/drawing/2014/main" id="{1FB84F05-81BE-485E-85DD-71785F2161EF}"/>
               </a:ext>
             </a:extLst>
           </p:cNvPr>
@@ -2912,7 +2912,7 @@
           <p:cNvPr id="8" name="">
             <a:extLst xmlns:a="http://schemas.openxmlformats.org/drawingml/2006/main">
               <a:ext uri="{FF2B5EF4-FFF2-40B4-BE49-F238E27FC236}">
-                <a16:creationId xmlns:a16="http://schemas.microsoft.com/office/drawing/2014/main" id="{11AFD2B8-C03C-40EA-B1A8-66E5344E7E5D}"/>
+                <a16:creationId xmlns:a16="http://schemas.microsoft.com/office/drawing/2014/main" id="{C56227E1-EBF1-4BA5-93D3-7FA5E24E97A4}"/>
               </a:ext>
             </a:extLst>
           </p:cNvPr>
@@ -2947,7 +2947,7 @@
           <p:cNvPr id="9" name="">
             <a:extLst xmlns:a="http://schemas.openxmlformats.org/drawingml/2006/main">
               <a:ext uri="{FF2B5EF4-FFF2-40B4-BE49-F238E27FC236}">
-                <a16:creationId xmlns:a16="http://schemas.microsoft.com/office/drawing/2014/main" id="{72AE97A8-1051-4956-9640-785F930293D6}"/>
+                <a16:creationId xmlns:a16="http://schemas.microsoft.com/office/drawing/2014/main" id="{0D2C072E-60B6-4BEA-AA29-18CB3172ED2F}"/>
               </a:ext>
             </a:extLst>
           </p:cNvPr>
@@ -2980,7 +2980,7 @@
           <p:cNvPr id="10" name="">
             <a:extLst xmlns:a="http://schemas.openxmlformats.org/drawingml/2006/main">
               <a:ext uri="{FF2B5EF4-FFF2-40B4-BE49-F238E27FC236}">
-                <a16:creationId xmlns:a16="http://schemas.microsoft.com/office/drawing/2014/main" id="{E0E8AF44-E2AE-4A6B-B36A-33AA004A0BF7}"/>
+                <a16:creationId xmlns:a16="http://schemas.microsoft.com/office/drawing/2014/main" id="{D6042921-A273-496D-BF16-1D148089B20B}"/>
               </a:ext>
             </a:extLst>
           </p:cNvPr>
@@ -3030,7 +3030,7 @@
           <p:cNvPr id="11" name="">
             <a:extLst xmlns:a="http://schemas.openxmlformats.org/drawingml/2006/main">
               <a:ext uri="{FF2B5EF4-FFF2-40B4-BE49-F238E27FC236}">
-                <a16:creationId xmlns:a16="http://schemas.microsoft.com/office/drawing/2014/main" id="{179A6C9C-4B4F-4E9E-A2AC-DD1039706BCF}"/>
+                <a16:creationId xmlns:a16="http://schemas.microsoft.com/office/drawing/2014/main" id="{CC0474C5-95D1-4A20-B6E4-21434BC1A35F}"/>
               </a:ext>
             </a:extLst>
           </p:cNvPr>
@@ -3080,7 +3080,7 @@
           <p:cNvPr id="12" name="">
             <a:extLst xmlns:a="http://schemas.openxmlformats.org/drawingml/2006/main">
               <a:ext uri="{FF2B5EF4-FFF2-40B4-BE49-F238E27FC236}">
-                <a16:creationId xmlns:a16="http://schemas.microsoft.com/office/drawing/2014/main" id="{5EF0C703-4885-4AA3-9BB4-6F66DF425469}"/>
+                <a16:creationId xmlns:a16="http://schemas.microsoft.com/office/drawing/2014/main" id="{01AD5BB9-A107-479A-B515-4391B3E578D1}"/>
               </a:ext>
             </a:extLst>
           </p:cNvPr>
@@ -3130,7 +3130,7 @@
           <p:cNvPr id="13" name="">
             <a:extLst xmlns:a="http://schemas.openxmlformats.org/drawingml/2006/main">
               <a:ext uri="{FF2B5EF4-FFF2-40B4-BE49-F238E27FC236}">
-                <a16:creationId xmlns:a16="http://schemas.microsoft.com/office/drawing/2014/main" id="{C03ED40A-AB62-41F6-B421-F2B35B660CD7}"/>
+                <a16:creationId xmlns:a16="http://schemas.microsoft.com/office/drawing/2014/main" id="{EF5D88BF-F2BB-4BEA-8B2E-005D7EBEBA4A}"/>
               </a:ext>
             </a:extLst>
           </p:cNvPr>
@@ -3180,7 +3180,7 @@
           <p:cNvPr id="14" name="">
             <a:extLst xmlns:a="http://schemas.openxmlformats.org/drawingml/2006/main">
               <a:ext uri="{FF2B5EF4-FFF2-40B4-BE49-F238E27FC236}">
-                <a16:creationId xmlns:a16="http://schemas.microsoft.com/office/drawing/2014/main" id="{06D69070-B229-4756-AE66-454F00EEA2AF}"/>
+                <a16:creationId xmlns:a16="http://schemas.microsoft.com/office/drawing/2014/main" id="{038D1C43-B04F-49A8-B314-0BF9CA5F43AA}"/>
               </a:ext>
             </a:extLst>
           </p:cNvPr>
@@ -3230,7 +3230,7 @@
           <p:cNvPr id="15" name="">
             <a:extLst xmlns:a="http://schemas.openxmlformats.org/drawingml/2006/main">
               <a:ext uri="{FF2B5EF4-FFF2-40B4-BE49-F238E27FC236}">
-                <a16:creationId xmlns:a16="http://schemas.microsoft.com/office/drawing/2014/main" id="{CA67A384-498A-4F72-AF21-64F9263ADE0F}"/>
+                <a16:creationId xmlns:a16="http://schemas.microsoft.com/office/drawing/2014/main" id="{CE81976B-5B31-4877-A547-F1C19116212D}"/>
               </a:ext>
             </a:extLst>
           </p:cNvPr>
@@ -3280,7 +3280,7 @@
           <p:cNvPr id="16" name="">
             <a:extLst xmlns:a="http://schemas.openxmlformats.org/drawingml/2006/main">
               <a:ext uri="{FF2B5EF4-FFF2-40B4-BE49-F238E27FC236}">
-                <a16:creationId xmlns:a16="http://schemas.microsoft.com/office/drawing/2014/main" id="{E100399F-7ED4-438A-941F-863329211F73}"/>
+                <a16:creationId xmlns:a16="http://schemas.microsoft.com/office/drawing/2014/main" id="{A8227C9F-171B-4BFF-B2DC-025B67712360}"/>
               </a:ext>
             </a:extLst>
           </p:cNvPr>
@@ -3330,7 +3330,7 @@
           <p:cNvPr id="17" name="">
             <a:extLst xmlns:a="http://schemas.openxmlformats.org/drawingml/2006/main">
               <a:ext uri="{FF2B5EF4-FFF2-40B4-BE49-F238E27FC236}">
-                <a16:creationId xmlns:a16="http://schemas.microsoft.com/office/drawing/2014/main" id="{D3975AF2-9B74-45A5-B657-D6E2C1571E00}"/>
+                <a16:creationId xmlns:a16="http://schemas.microsoft.com/office/drawing/2014/main" id="{95D1684A-EAF0-4BAF-AFE8-870A06C343B0}"/>
               </a:ext>
             </a:extLst>
           </p:cNvPr>
@@ -3361,7 +3361,7 @@
           <p:cNvPr id="18" name="">
             <a:extLst xmlns:a="http://schemas.openxmlformats.org/drawingml/2006/main">
               <a:ext uri="{FF2B5EF4-FFF2-40B4-BE49-F238E27FC236}">
-                <a16:creationId xmlns:a16="http://schemas.microsoft.com/office/drawing/2014/main" id="{39534312-0297-40EF-9DAF-3BB3831E9F63}"/>
+                <a16:creationId xmlns:a16="http://schemas.microsoft.com/office/drawing/2014/main" id="{82619C9E-E940-41E7-B4B8-A5B1FA7ADEB1}"/>
               </a:ext>
             </a:extLst>
           </p:cNvPr>
@@ -3411,7 +3411,7 @@
           <p:cNvPr id="19" name="">
             <a:extLst xmlns:a="http://schemas.openxmlformats.org/drawingml/2006/main">
               <a:ext uri="{FF2B5EF4-FFF2-40B4-BE49-F238E27FC236}">
-                <a16:creationId xmlns:a16="http://schemas.microsoft.com/office/drawing/2014/main" id="{01FB54C5-3D23-4CD2-A86C-142D69F4658A}"/>
+                <a16:creationId xmlns:a16="http://schemas.microsoft.com/office/drawing/2014/main" id="{00DE57B8-0C50-48B0-8FD9-AC1E63E29427}"/>
               </a:ext>
             </a:extLst>
           </p:cNvPr>
@@ -3461,7 +3461,7 @@
           <p:cNvPr id="20" name="">
             <a:extLst xmlns:a="http://schemas.openxmlformats.org/drawingml/2006/main">
               <a:ext uri="{FF2B5EF4-FFF2-40B4-BE49-F238E27FC236}">
-                <a16:creationId xmlns:a16="http://schemas.microsoft.com/office/drawing/2014/main" id="{423E4D53-E61E-4ED8-A0EA-CD34AB28E542}"/>
+                <a16:creationId xmlns:a16="http://schemas.microsoft.com/office/drawing/2014/main" id="{9885C50E-0EC0-4F56-93E4-46002808922D}"/>
               </a:ext>
             </a:extLst>
           </p:cNvPr>
@@ -3511,7 +3511,7 @@
           <p:cNvPr id="21" name="">
             <a:extLst xmlns:a="http://schemas.openxmlformats.org/drawingml/2006/main">
               <a:ext uri="{FF2B5EF4-FFF2-40B4-BE49-F238E27FC236}">
-                <a16:creationId xmlns:a16="http://schemas.microsoft.com/office/drawing/2014/main" id="{5F2AE897-7179-4C10-A27D-4A6A0F7EC57A}"/>
+                <a16:creationId xmlns:a16="http://schemas.microsoft.com/office/drawing/2014/main" id="{9481351A-C182-4BD3-AE40-58043EE7B764}"/>
               </a:ext>
             </a:extLst>
           </p:cNvPr>
@@ -3561,7 +3561,7 @@
           <p:cNvPr id="22" name="">
             <a:extLst xmlns:a="http://schemas.openxmlformats.org/drawingml/2006/main">
               <a:ext uri="{FF2B5EF4-FFF2-40B4-BE49-F238E27FC236}">
-                <a16:creationId xmlns:a16="http://schemas.microsoft.com/office/drawing/2014/main" id="{8BAFC877-5958-4CA7-B464-D0A2661AA0D8}"/>
+                <a16:creationId xmlns:a16="http://schemas.microsoft.com/office/drawing/2014/main" id="{82753D78-F357-470D-A857-9C10D070BD60}"/>
               </a:ext>
             </a:extLst>
           </p:cNvPr>
@@ -3611,7 +3611,7 @@
           <p:cNvPr id="23" name="">
             <a:extLst xmlns:a="http://schemas.openxmlformats.org/drawingml/2006/main">
               <a:ext uri="{FF2B5EF4-FFF2-40B4-BE49-F238E27FC236}">
-                <a16:creationId xmlns:a16="http://schemas.microsoft.com/office/drawing/2014/main" id="{9ADAC203-9627-408D-9923-A05EDA1D9392}"/>
+                <a16:creationId xmlns:a16="http://schemas.microsoft.com/office/drawing/2014/main" id="{088809A8-8D4B-4188-8649-F115436A3460}"/>
               </a:ext>
             </a:extLst>
           </p:cNvPr>
@@ -3661,7 +3661,7 @@
           <p:cNvPr id="24" name="">
             <a:extLst xmlns:a="http://schemas.openxmlformats.org/drawingml/2006/main">
               <a:ext uri="{FF2B5EF4-FFF2-40B4-BE49-F238E27FC236}">
-                <a16:creationId xmlns:a16="http://schemas.microsoft.com/office/drawing/2014/main" id="{12F24A0E-35D6-463B-963A-23D43CAC1783}"/>
+                <a16:creationId xmlns:a16="http://schemas.microsoft.com/office/drawing/2014/main" id="{D8223067-426A-41FE-94E8-EDDC7CA6A4EC}"/>
               </a:ext>
             </a:extLst>
           </p:cNvPr>
@@ -3696,7 +3696,7 @@
           <p:cNvPr id="25" name="">
             <a:extLst xmlns:a="http://schemas.openxmlformats.org/drawingml/2006/main">
               <a:ext uri="{FF2B5EF4-FFF2-40B4-BE49-F238E27FC236}">
-                <a16:creationId xmlns:a16="http://schemas.microsoft.com/office/drawing/2014/main" id="{16546424-5510-43E6-862F-C2B8D1DD78A7}"/>
+                <a16:creationId xmlns:a16="http://schemas.microsoft.com/office/drawing/2014/main" id="{7E7717FD-609D-42BA-9EB8-A48AFCB2FE9C}"/>
               </a:ext>
             </a:extLst>
           </p:cNvPr>
@@ -3729,7 +3729,7 @@
           <p:cNvPr id="26" name="">
             <a:extLst xmlns:a="http://schemas.openxmlformats.org/drawingml/2006/main">
               <a:ext uri="{FF2B5EF4-FFF2-40B4-BE49-F238E27FC236}">
-                <a16:creationId xmlns:a16="http://schemas.microsoft.com/office/drawing/2014/main" id="{DD760810-4B49-4757-88CE-802F41389C48}"/>
+                <a16:creationId xmlns:a16="http://schemas.microsoft.com/office/drawing/2014/main" id="{E24B92EA-6E67-468C-9DED-31038E61F397}"/>
               </a:ext>
             </a:extLst>
           </p:cNvPr>
@@ -3779,7 +3779,7 @@
           <p:cNvPr id="27" name="">
             <a:extLst xmlns:a="http://schemas.openxmlformats.org/drawingml/2006/main">
               <a:ext uri="{FF2B5EF4-FFF2-40B4-BE49-F238E27FC236}">
-                <a16:creationId xmlns:a16="http://schemas.microsoft.com/office/drawing/2014/main" id="{8FD4DD6E-05C0-4722-8710-586E92B3D134}"/>
+                <a16:creationId xmlns:a16="http://schemas.microsoft.com/office/drawing/2014/main" id="{6F19068E-4A31-4527-B615-CAB85B3BC5E5}"/>
               </a:ext>
             </a:extLst>
           </p:cNvPr>
@@ -3829,7 +3829,7 @@
           <p:cNvPr id="28" name="">
             <a:extLst xmlns:a="http://schemas.openxmlformats.org/drawingml/2006/main">
               <a:ext uri="{FF2B5EF4-FFF2-40B4-BE49-F238E27FC236}">
-                <a16:creationId xmlns:a16="http://schemas.microsoft.com/office/drawing/2014/main" id="{EF9F4B24-8C3A-4685-BF82-929E74BFC2CA}"/>
+                <a16:creationId xmlns:a16="http://schemas.microsoft.com/office/drawing/2014/main" id="{FF089F4C-69B0-4CD6-A627-879F91D92808}"/>
               </a:ext>
             </a:extLst>
           </p:cNvPr>
@@ -3879,7 +3879,7 @@
           <p:cNvPr id="29" name="">
             <a:extLst xmlns:a="http://schemas.openxmlformats.org/drawingml/2006/main">
               <a:ext uri="{FF2B5EF4-FFF2-40B4-BE49-F238E27FC236}">
-                <a16:creationId xmlns:a16="http://schemas.microsoft.com/office/drawing/2014/main" id="{BFDBC71D-A210-42DA-8EA3-8226755B0174}"/>
+                <a16:creationId xmlns:a16="http://schemas.microsoft.com/office/drawing/2014/main" id="{0956F443-5240-4AA3-A257-343CD54E5289}"/>
               </a:ext>
             </a:extLst>
           </p:cNvPr>
@@ -3929,7 +3929,7 @@
           <p:cNvPr id="30" name="">
             <a:extLst xmlns:a="http://schemas.openxmlformats.org/drawingml/2006/main">
               <a:ext uri="{FF2B5EF4-FFF2-40B4-BE49-F238E27FC236}">
-                <a16:creationId xmlns:a16="http://schemas.microsoft.com/office/drawing/2014/main" id="{DCB55997-1F54-4328-9834-E6BCB25FA263}"/>
+                <a16:creationId xmlns:a16="http://schemas.microsoft.com/office/drawing/2014/main" id="{4FF52119-2FF6-49F2-9343-EF5D24A22138}"/>
               </a:ext>
             </a:extLst>
           </p:cNvPr>
@@ -3979,7 +3979,7 @@
           <p:cNvPr id="31" name="">
             <a:extLst xmlns:a="http://schemas.openxmlformats.org/drawingml/2006/main">
               <a:ext uri="{FF2B5EF4-FFF2-40B4-BE49-F238E27FC236}">
-                <a16:creationId xmlns:a16="http://schemas.microsoft.com/office/drawing/2014/main" id="{70A251DC-58F0-4D70-9263-16E6E6657A97}"/>
+                <a16:creationId xmlns:a16="http://schemas.microsoft.com/office/drawing/2014/main" id="{009AD464-F315-4372-A18C-D7456ECAF3F6}"/>
               </a:ext>
             </a:extLst>
           </p:cNvPr>
@@ -4029,7 +4029,7 @@
           <p:cNvPr id="32" name="">
             <a:extLst xmlns:a="http://schemas.openxmlformats.org/drawingml/2006/main">
               <a:ext uri="{FF2B5EF4-FFF2-40B4-BE49-F238E27FC236}">
-                <a16:creationId xmlns:a16="http://schemas.microsoft.com/office/drawing/2014/main" id="{595114BC-EC7D-4864-B585-148308E919C3}"/>
+                <a16:creationId xmlns:a16="http://schemas.microsoft.com/office/drawing/2014/main" id="{F7D87380-A442-433E-8ACF-47A54E46ACBF}"/>
               </a:ext>
             </a:extLst>
           </p:cNvPr>
@@ -4079,7 +4079,7 @@
           <p:cNvPr id="33" name="">
             <a:extLst xmlns:a="http://schemas.openxmlformats.org/drawingml/2006/main">
               <a:ext uri="{FF2B5EF4-FFF2-40B4-BE49-F238E27FC236}">
-                <a16:creationId xmlns:a16="http://schemas.microsoft.com/office/drawing/2014/main" id="{E0F2504E-1F15-402D-90BC-72E9CA2E68A0}"/>
+                <a16:creationId xmlns:a16="http://schemas.microsoft.com/office/drawing/2014/main" id="{E83DF660-0B49-4502-AA20-2F3AA6CEC79C}"/>
               </a:ext>
             </a:extLst>
           </p:cNvPr>
@@ -4110,7 +4110,7 @@
           <p:cNvPr id="34" name="">
             <a:extLst xmlns:a="http://schemas.openxmlformats.org/drawingml/2006/main">
               <a:ext uri="{FF2B5EF4-FFF2-40B4-BE49-F238E27FC236}">
-                <a16:creationId xmlns:a16="http://schemas.microsoft.com/office/drawing/2014/main" id="{8CEABEE4-3540-4234-A30F-09581605E8A1}"/>
+                <a16:creationId xmlns:a16="http://schemas.microsoft.com/office/drawing/2014/main" id="{F78BE687-5F7C-42B6-8C93-18756569AE87}"/>
               </a:ext>
             </a:extLst>
           </p:cNvPr>
@@ -4160,7 +4160,7 @@
           <p:cNvPr id="35" name="">
             <a:extLst xmlns:a="http://schemas.openxmlformats.org/drawingml/2006/main">
               <a:ext uri="{FF2B5EF4-FFF2-40B4-BE49-F238E27FC236}">
-                <a16:creationId xmlns:a16="http://schemas.microsoft.com/office/drawing/2014/main" id="{B492AFBD-DF5B-4458-9874-D448DC0C07FD}"/>
+                <a16:creationId xmlns:a16="http://schemas.microsoft.com/office/drawing/2014/main" id="{169E4264-93E0-453A-B1BD-326C03CD3098}"/>
               </a:ext>
             </a:extLst>
           </p:cNvPr>
@@ -4210,7 +4210,7 @@
           <p:cNvPr id="36" name="">
             <a:extLst xmlns:a="http://schemas.openxmlformats.org/drawingml/2006/main">
               <a:ext uri="{FF2B5EF4-FFF2-40B4-BE49-F238E27FC236}">
-                <a16:creationId xmlns:a16="http://schemas.microsoft.com/office/drawing/2014/main" id="{44C64BD1-01B0-4B03-BD41-30163A77125A}"/>
+                <a16:creationId xmlns:a16="http://schemas.microsoft.com/office/drawing/2014/main" id="{1306D32F-DA79-4D2D-96C6-70959FA15198}"/>
               </a:ext>
             </a:extLst>
           </p:cNvPr>
@@ -4260,7 +4260,7 @@
           <p:cNvPr id="37" name="">
             <a:extLst xmlns:a="http://schemas.openxmlformats.org/drawingml/2006/main">
               <a:ext uri="{FF2B5EF4-FFF2-40B4-BE49-F238E27FC236}">
-                <a16:creationId xmlns:a16="http://schemas.microsoft.com/office/drawing/2014/main" id="{833A8AC0-734E-41FD-A201-49F3E7E48209}"/>
+                <a16:creationId xmlns:a16="http://schemas.microsoft.com/office/drawing/2014/main" id="{66E8A2BE-D11B-4433-B50F-63802192FA5B}"/>
               </a:ext>
             </a:extLst>
           </p:cNvPr>
@@ -4310,7 +4310,7 @@
           <p:cNvPr id="38" name="">
             <a:extLst xmlns:a="http://schemas.openxmlformats.org/drawingml/2006/main">
               <a:ext uri="{FF2B5EF4-FFF2-40B4-BE49-F238E27FC236}">
-                <a16:creationId xmlns:a16="http://schemas.microsoft.com/office/drawing/2014/main" id="{5066BBB8-3A1B-4789-8806-4BE243EE2D78}"/>
+                <a16:creationId xmlns:a16="http://schemas.microsoft.com/office/drawing/2014/main" id="{9F86C570-69C8-4523-BA77-33E447993F09}"/>
               </a:ext>
             </a:extLst>
           </p:cNvPr>
@@ -4360,7 +4360,7 @@
           <p:cNvPr id="39" name="">
             <a:extLst xmlns:a="http://schemas.openxmlformats.org/drawingml/2006/main">
               <a:ext uri="{FF2B5EF4-FFF2-40B4-BE49-F238E27FC236}">
-                <a16:creationId xmlns:a16="http://schemas.microsoft.com/office/drawing/2014/main" id="{F45774AC-E98E-4FE0-8190-9921F9E7C190}"/>
+                <a16:creationId xmlns:a16="http://schemas.microsoft.com/office/drawing/2014/main" id="{A3DF7E55-9FB8-4926-AFFA-B8A9E23D054D}"/>
               </a:ext>
             </a:extLst>
           </p:cNvPr>
@@ -4408,7 +4408,7 @@
     </p:spTree>
     <p:extLst>
       <p:ext uri="{BB962C8B-B14F-4D97-AF65-F5344CB8AC3E}">
-        <p14:creationId xmlns:p14="http://schemas.microsoft.com/office/powerpoint/2010/main" val="2046807932"/>
+        <p14:creationId xmlns:p14="http://schemas.microsoft.com/office/powerpoint/2010/main" val="1594678875"/>
       </p:ext>
     </p:extLst>
   </p:cSld>
@@ -4439,7 +4439,7 @@
           <p:cNvPr id="1" name="">
             <a:extLst xmlns:a="http://schemas.openxmlformats.org/drawingml/2006/main">
               <a:ext uri="{FF2B5EF4-FFF2-40B4-BE49-F238E27FC236}">
-                <a16:creationId xmlns:a16="http://schemas.microsoft.com/office/drawing/2014/main" id="{A6611DF0-4BF3-47C0-9901-A08E613DE38F}"/>
+                <a16:creationId xmlns:a16="http://schemas.microsoft.com/office/drawing/2014/main" id="{F5970F85-53DE-4C96-BC60-A0D01D5858F4}"/>
               </a:ext>
             </a:extLst>
           </p:cNvPr>
@@ -4467,14 +4467,14 @@
       </p:sp>
       <p:pic>
         <p:nvPicPr>
-          <p:cNvPr id="46" name=""/>
+          <p:cNvPr id="47" name=""/>
           <p:cNvPicPr>
             <a:picLocks xmlns:a="http://schemas.openxmlformats.org/drawingml/2006/main" noChangeAspect="1"/>
           </p:cNvPicPr>
           <p:nvPr/>
         </p:nvPicPr>
         <p:blipFill>
-          <a:blip xmlns:r="http://schemas.openxmlformats.org/officeDocument/2006/relationships" xmlns:a="http://schemas.openxmlformats.org/drawingml/2006/main" r:embed="Rb7136bc5711f4e0d"/>
+          <a:blip xmlns:r="http://schemas.openxmlformats.org/officeDocument/2006/relationships" xmlns:a="http://schemas.openxmlformats.org/drawingml/2006/main" r:embed="R12304099af464ba8"/>
           <a:stretch xmlns:a="http://schemas.openxmlformats.org/drawingml/2006/main"/>
         </p:blipFill>
         <p:spPr>
@@ -4492,7 +4492,7 @@
           <p:cNvPr id="3" name="">
             <a:extLst xmlns:a="http://schemas.openxmlformats.org/drawingml/2006/main">
               <a:ext uri="{FF2B5EF4-FFF2-40B4-BE49-F238E27FC236}">
-                <a16:creationId xmlns:a16="http://schemas.microsoft.com/office/drawing/2014/main" id="{8BA4CEAF-A834-41CA-AD32-A046D2563722}"/>
+                <a16:creationId xmlns:a16="http://schemas.microsoft.com/office/drawing/2014/main" id="{4F81B5D3-D226-44D6-B0AB-DCAE741C5AB4}"/>
               </a:ext>
             </a:extLst>
           </p:cNvPr>
@@ -4542,7 +4542,7 @@
           <p:cNvPr id="4" name="">
             <a:extLst xmlns:a="http://schemas.openxmlformats.org/drawingml/2006/main">
               <a:ext uri="{FF2B5EF4-FFF2-40B4-BE49-F238E27FC236}">
-                <a16:creationId xmlns:a16="http://schemas.microsoft.com/office/drawing/2014/main" id="{97C8AB02-7C7B-46A3-801E-BD15DD591953}"/>
+                <a16:creationId xmlns:a16="http://schemas.microsoft.com/office/drawing/2014/main" id="{DA2DB862-39E9-4A9B-9529-3BC98AB5798D}"/>
               </a:ext>
             </a:extLst>
           </p:cNvPr>
@@ -4575,7 +4575,7 @@
           <p:cNvPr id="5" name="">
             <a:extLst xmlns:a="http://schemas.openxmlformats.org/drawingml/2006/main">
               <a:ext uri="{FF2B5EF4-FFF2-40B4-BE49-F238E27FC236}">
-                <a16:creationId xmlns:a16="http://schemas.microsoft.com/office/drawing/2014/main" id="{4457D59D-A068-4C7E-8F01-6A4A74F9ED4E}"/>
+                <a16:creationId xmlns:a16="http://schemas.microsoft.com/office/drawing/2014/main" id="{8AD46AA9-4357-4A0A-99DC-F6A44B6A455D}"/>
               </a:ext>
             </a:extLst>
           </p:cNvPr>
@@ -4606,7 +4606,7 @@
           <p:cNvPr id="6" name="">
             <a:extLst xmlns:a="http://schemas.openxmlformats.org/drawingml/2006/main">
               <a:ext uri="{FF2B5EF4-FFF2-40B4-BE49-F238E27FC236}">
-                <a16:creationId xmlns:a16="http://schemas.microsoft.com/office/drawing/2014/main" id="{8E144D8A-7C62-4446-A1D5-617C960079CB}"/>
+                <a16:creationId xmlns:a16="http://schemas.microsoft.com/office/drawing/2014/main" id="{8643DE32-6531-48AB-8F83-C854E3F805F4}"/>
               </a:ext>
             </a:extLst>
           </p:cNvPr>
@@ -4656,7 +4656,7 @@
           <p:cNvPr id="7" name="">
             <a:extLst xmlns:a="http://schemas.openxmlformats.org/drawingml/2006/main">
               <a:ext uri="{FF2B5EF4-FFF2-40B4-BE49-F238E27FC236}">
-                <a16:creationId xmlns:a16="http://schemas.microsoft.com/office/drawing/2014/main" id="{A937A51D-F210-43BF-832B-B072CC116CC0}"/>
+                <a16:creationId xmlns:a16="http://schemas.microsoft.com/office/drawing/2014/main" id="{EC61E7B0-106C-4FAB-9BDF-E2F1F1F3326D}"/>
               </a:ext>
             </a:extLst>
           </p:cNvPr>
@@ -4706,19 +4706,19 @@
           <p:cNvPr id="8" name="">
             <a:extLst xmlns:a="http://schemas.openxmlformats.org/drawingml/2006/main">
               <a:ext uri="{FF2B5EF4-FFF2-40B4-BE49-F238E27FC236}">
-                <a16:creationId xmlns:a16="http://schemas.microsoft.com/office/drawing/2014/main" id="{A921A445-FB89-4CDF-AABF-01721B06A1F6}"/>
-              </a:ext>
-            </a:extLst>
-          </p:cNvPr>
-          <p:cNvSpPr>
-            <a:spLocks xmlns:a="http://schemas.openxmlformats.org/drawingml/2006/main" noGrp="1"/>
-          </p:cNvSpPr>
-          <p:nvPr/>
-        </p:nvSpPr>
-        <p:spPr>
-          <a:xfrm xmlns:a="http://schemas.openxmlformats.org/drawingml/2006/main">
-            <a:off x="552450" y="1352550"/>
-            <a:ext cx="10648950" cy="323850"/>
+                <a16:creationId xmlns:a16="http://schemas.microsoft.com/office/drawing/2014/main" id="{B2D5F255-A56A-4BC9-B345-230C33394C32}"/>
+              </a:ext>
+            </a:extLst>
+          </p:cNvPr>
+          <p:cNvSpPr>
+            <a:spLocks xmlns:a="http://schemas.openxmlformats.org/drawingml/2006/main" noGrp="1"/>
+          </p:cNvSpPr>
+          <p:nvPr/>
+        </p:nvSpPr>
+        <p:spPr>
+          <a:xfrm xmlns:a="http://schemas.openxmlformats.org/drawingml/2006/main">
+            <a:off x="552450" y="1333500"/>
+            <a:ext cx="10648950" cy="285750"/>
           </a:xfrm>
           <a:prstGeom xmlns:a="http://schemas.openxmlformats.org/drawingml/2006/main" prst="rect">
             <a:avLst/>
@@ -4734,14 +4734,14 @@
           <a:lstStyle xmlns:a="http://schemas.openxmlformats.org/drawingml/2006/main"/>
           <a:p xmlns:a="http://schemas.openxmlformats.org/drawingml/2006/main">
             <a:pPr>
-              <a:defRPr sz="1350">
+              <a:defRPr sz="1275">
                 <a:solidFill>
                   <a:srgbClr val="596780"/>
                 </a:solidFill>
               </a:defRPr>
             </a:pPr>
             <a:r>
-              <a:rPr sz="1350">
+              <a:rPr sz="1275">
                 <a:solidFill>
                   <a:srgbClr val="596780"/>
                 </a:solidFill>
@@ -4756,19 +4756,19 @@
           <p:cNvPr id="9" name="">
             <a:extLst xmlns:a="http://schemas.openxmlformats.org/drawingml/2006/main">
               <a:ext uri="{FF2B5EF4-FFF2-40B4-BE49-F238E27FC236}">
-                <a16:creationId xmlns:a16="http://schemas.microsoft.com/office/drawing/2014/main" id="{F3BBAF14-309F-43D0-A118-5D205C29729F}"/>
-              </a:ext>
-            </a:extLst>
-          </p:cNvPr>
-          <p:cNvSpPr>
-            <a:spLocks xmlns:a="http://schemas.openxmlformats.org/drawingml/2006/main" noGrp="1"/>
-          </p:cNvSpPr>
-          <p:nvPr/>
-        </p:nvSpPr>
-        <p:spPr>
-          <a:xfrm xmlns:a="http://schemas.openxmlformats.org/drawingml/2006/main">
-            <a:off x="1428750" y="2152650"/>
-            <a:ext cx="8763000" cy="47625"/>
+                <a16:creationId xmlns:a16="http://schemas.microsoft.com/office/drawing/2014/main" id="{DA71AF62-4463-4E18-A56D-2CB58BD2C06F}"/>
+              </a:ext>
+            </a:extLst>
+          </p:cNvPr>
+          <p:cNvSpPr>
+            <a:spLocks xmlns:a="http://schemas.openxmlformats.org/drawingml/2006/main" noGrp="1"/>
+          </p:cNvSpPr>
+          <p:nvPr/>
+        </p:nvSpPr>
+        <p:spPr>
+          <a:xfrm xmlns:a="http://schemas.openxmlformats.org/drawingml/2006/main">
+            <a:off x="847725" y="1943100"/>
+            <a:ext cx="38100" cy="3790950"/>
           </a:xfrm>
           <a:prstGeom xmlns:a="http://schemas.openxmlformats.org/drawingml/2006/main" prst="rect">
             <a:avLst/>
@@ -4787,69 +4787,19 @@
           <p:cNvPr id="10" name="">
             <a:extLst xmlns:a="http://schemas.openxmlformats.org/drawingml/2006/main">
               <a:ext uri="{FF2B5EF4-FFF2-40B4-BE49-F238E27FC236}">
-                <a16:creationId xmlns:a16="http://schemas.microsoft.com/office/drawing/2014/main" id="{2E0AF68B-AEAC-4BF5-8880-EA1BB9D2771A}"/>
-              </a:ext>
-            </a:extLst>
-          </p:cNvPr>
-          <p:cNvSpPr>
-            <a:spLocks xmlns:a="http://schemas.openxmlformats.org/drawingml/2006/main" noGrp="1"/>
-          </p:cNvSpPr>
-          <p:nvPr/>
-        </p:nvSpPr>
-        <p:spPr>
-          <a:xfrm xmlns:a="http://schemas.openxmlformats.org/drawingml/2006/main">
-            <a:off x="552450" y="1752600"/>
-            <a:ext cx="3371850" cy="266700"/>
-          </a:xfrm>
-          <a:prstGeom xmlns:a="http://schemas.openxmlformats.org/drawingml/2006/main" prst="rect">
-            <a:avLst/>
-          </a:prstGeom>
-          <a:noFill xmlns:a="http://schemas.openxmlformats.org/drawingml/2006/main"/>
-          <a:ln xmlns:a="http://schemas.openxmlformats.org/drawingml/2006/main" w="0">
-            <a:noFill/>
-            <a:prstDash val="solid"/>
-          </a:ln>
-        </p:spPr>
-        <p:txBody>
-          <a:bodyPr xmlns:a="http://schemas.openxmlformats.org/drawingml/2006/main"/>
-          <a:lstStyle xmlns:a="http://schemas.openxmlformats.org/drawingml/2006/main"/>
-          <a:p xmlns:a="http://schemas.openxmlformats.org/drawingml/2006/main">
-            <a:pPr algn="ctr">
-              <a:defRPr sz="1275" b="1">
-                <a:solidFill>
-                  <a:srgbClr val="2048A8"/>
-                </a:solidFill>
-              </a:defRPr>
-            </a:pPr>
-            <a:r>
-              <a:rPr sz="1275" b="1">
-                <a:solidFill>
-                  <a:srgbClr val="2048A8"/>
-                </a:solidFill>
-              </a:rPr>
-              <a:t>0–30 дней</a:t>
-            </a:r>
-          </a:p>
-        </p:txBody>
-      </p:sp>
-      <p:sp>
-        <p:nvSpPr>
-          <p:cNvPr id="11" name="">
-            <a:extLst xmlns:a="http://schemas.openxmlformats.org/drawingml/2006/main">
-              <a:ext uri="{FF2B5EF4-FFF2-40B4-BE49-F238E27FC236}">
-                <a16:creationId xmlns:a16="http://schemas.microsoft.com/office/drawing/2014/main" id="{61967C2A-389F-45E1-A422-A2445646E298}"/>
-              </a:ext>
-            </a:extLst>
-          </p:cNvPr>
-          <p:cNvSpPr>
-            <a:spLocks xmlns:a="http://schemas.openxmlformats.org/drawingml/2006/main" noGrp="1"/>
-          </p:cNvSpPr>
-          <p:nvPr/>
-        </p:nvSpPr>
-        <p:spPr>
-          <a:xfrm xmlns:a="http://schemas.openxmlformats.org/drawingml/2006/main">
-            <a:off x="1990725" y="1924050"/>
-            <a:ext cx="495300" cy="495300"/>
+                <a16:creationId xmlns:a16="http://schemas.microsoft.com/office/drawing/2014/main" id="{249A8E12-7F9C-45EB-A3C6-45AEAD9293B4}"/>
+              </a:ext>
+            </a:extLst>
+          </p:cNvPr>
+          <p:cNvSpPr>
+            <a:spLocks xmlns:a="http://schemas.openxmlformats.org/drawingml/2006/main" noGrp="1"/>
+          </p:cNvSpPr>
+          <p:nvPr/>
+        </p:nvSpPr>
+        <p:spPr>
+          <a:xfrm xmlns:a="http://schemas.openxmlformats.org/drawingml/2006/main">
+            <a:off x="609600" y="2114550"/>
+            <a:ext cx="514350" cy="514350"/>
           </a:xfrm>
           <a:prstGeom xmlns:a="http://schemas.openxmlformats.org/drawingml/2006/main" prst="ellipse">
             <a:avLst/>
@@ -4865,22 +4815,22 @@
       </p:sp>
       <p:sp>
         <p:nvSpPr>
-          <p:cNvPr id="12" name="">
-            <a:extLst xmlns:a="http://schemas.openxmlformats.org/drawingml/2006/main">
-              <a:ext uri="{FF2B5EF4-FFF2-40B4-BE49-F238E27FC236}">
-                <a16:creationId xmlns:a16="http://schemas.microsoft.com/office/drawing/2014/main" id="{BC15419B-C4DE-4470-84FA-ADE3C6B72078}"/>
-              </a:ext>
-            </a:extLst>
-          </p:cNvPr>
-          <p:cNvSpPr>
-            <a:spLocks xmlns:a="http://schemas.openxmlformats.org/drawingml/2006/main" noGrp="1"/>
-          </p:cNvSpPr>
-          <p:nvPr/>
-        </p:nvSpPr>
-        <p:spPr>
-          <a:xfrm xmlns:a="http://schemas.openxmlformats.org/drawingml/2006/main">
-            <a:off x="2076450" y="2028825"/>
-            <a:ext cx="323850" cy="247650"/>
+          <p:cNvPr id="11" name="">
+            <a:extLst xmlns:a="http://schemas.openxmlformats.org/drawingml/2006/main">
+              <a:ext uri="{FF2B5EF4-FFF2-40B4-BE49-F238E27FC236}">
+                <a16:creationId xmlns:a16="http://schemas.microsoft.com/office/drawing/2014/main" id="{4EC3A29C-9BD8-4C77-9FAE-75650B0FBFBD}"/>
+              </a:ext>
+            </a:extLst>
+          </p:cNvPr>
+          <p:cNvSpPr>
+            <a:spLocks xmlns:a="http://schemas.openxmlformats.org/drawingml/2006/main" noGrp="1"/>
+          </p:cNvSpPr>
+          <p:nvPr/>
+        </p:nvSpPr>
+        <p:spPr>
+          <a:xfrm xmlns:a="http://schemas.openxmlformats.org/drawingml/2006/main">
+            <a:off x="704850" y="2238375"/>
+            <a:ext cx="323850" cy="228600"/>
           </a:xfrm>
           <a:prstGeom xmlns:a="http://schemas.openxmlformats.org/drawingml/2006/main" prst="rect">
             <a:avLst/>
@@ -4915,276 +4865,26 @@
       </p:sp>
       <p:sp>
         <p:nvSpPr>
-          <p:cNvPr id="13" name="">
-            <a:extLst xmlns:a="http://schemas.openxmlformats.org/drawingml/2006/main">
-              <a:ext uri="{FF2B5EF4-FFF2-40B4-BE49-F238E27FC236}">
-                <a16:creationId xmlns:a16="http://schemas.microsoft.com/office/drawing/2014/main" id="{6AD3CDB4-C576-439B-A048-91AAB4B23DF5}"/>
-              </a:ext>
-            </a:extLst>
-          </p:cNvPr>
-          <p:cNvSpPr>
-            <a:spLocks xmlns:a="http://schemas.openxmlformats.org/drawingml/2006/main" noGrp="1"/>
-          </p:cNvSpPr>
-          <p:nvPr/>
-        </p:nvSpPr>
-        <p:spPr>
-          <a:xfrm xmlns:a="http://schemas.openxmlformats.org/drawingml/2006/main">
-            <a:off x="647700" y="2628900"/>
-            <a:ext cx="3181350" cy="438150"/>
-          </a:xfrm>
-          <a:prstGeom xmlns:a="http://schemas.openxmlformats.org/drawingml/2006/main" prst="rect">
-            <a:avLst/>
-          </a:prstGeom>
-          <a:noFill xmlns:a="http://schemas.openxmlformats.org/drawingml/2006/main"/>
-          <a:ln xmlns:a="http://schemas.openxmlformats.org/drawingml/2006/main" w="0">
-            <a:noFill/>
-            <a:prstDash val="solid"/>
-          </a:ln>
-        </p:spPr>
-        <p:txBody>
-          <a:bodyPr xmlns:a="http://schemas.openxmlformats.org/drawingml/2006/main"/>
-          <a:lstStyle xmlns:a="http://schemas.openxmlformats.org/drawingml/2006/main"/>
-          <a:p xmlns:a="http://schemas.openxmlformats.org/drawingml/2006/main">
-            <a:pPr algn="ctr">
-              <a:defRPr sz="975" b="1">
-                <a:solidFill>
-                  <a:srgbClr val="2048A8"/>
-                </a:solidFill>
-              </a:defRPr>
-            </a:pPr>
-            <a:r>
-              <a:rPr sz="975" b="1">
-                <a:solidFill>
-                  <a:srgbClr val="2048A8"/>
-                </a:solidFill>
-              </a:rPr>
-              <a:t>ПРИОРИТЕТЫ И БЫСТРЫЕ МЕРЫ</a:t>
-            </a:r>
-          </a:p>
-        </p:txBody>
-      </p:sp>
-      <p:sp>
-        <p:nvSpPr>
-          <p:cNvPr id="14" name="">
-            <a:extLst xmlns:a="http://schemas.openxmlformats.org/drawingml/2006/main">
-              <a:ext uri="{FF2B5EF4-FFF2-40B4-BE49-F238E27FC236}">
-                <a16:creationId xmlns:a16="http://schemas.microsoft.com/office/drawing/2014/main" id="{67834E6A-8705-4940-AAF3-0D119DF8EFC8}"/>
-              </a:ext>
-            </a:extLst>
-          </p:cNvPr>
-          <p:cNvSpPr>
-            <a:spLocks xmlns:a="http://schemas.openxmlformats.org/drawingml/2006/main" noGrp="1"/>
-          </p:cNvSpPr>
-          <p:nvPr/>
-        </p:nvSpPr>
-        <p:spPr>
-          <a:xfrm xmlns:a="http://schemas.openxmlformats.org/drawingml/2006/main">
-            <a:off x="647700" y="3257550"/>
-            <a:ext cx="323850" cy="228600"/>
-          </a:xfrm>
-          <a:prstGeom xmlns:a="http://schemas.openxmlformats.org/drawingml/2006/main" prst="rect">
-            <a:avLst/>
-          </a:prstGeom>
-          <a:noFill xmlns:a="http://schemas.openxmlformats.org/drawingml/2006/main"/>
-          <a:ln xmlns:a="http://schemas.openxmlformats.org/drawingml/2006/main" w="0">
-            <a:noFill/>
-            <a:prstDash val="solid"/>
-          </a:ln>
-        </p:spPr>
-        <p:txBody>
-          <a:bodyPr xmlns:a="http://schemas.openxmlformats.org/drawingml/2006/main"/>
-          <a:lstStyle xmlns:a="http://schemas.openxmlformats.org/drawingml/2006/main"/>
-          <a:p xmlns:a="http://schemas.openxmlformats.org/drawingml/2006/main">
-            <a:pPr>
-              <a:defRPr sz="975" b="1">
-                <a:solidFill>
-                  <a:srgbClr val="2048A8"/>
-                </a:solidFill>
-              </a:defRPr>
-            </a:pPr>
-            <a:r>
-              <a:rPr sz="975" b="1">
-                <a:solidFill>
-                  <a:srgbClr val="2048A8"/>
-                </a:solidFill>
-              </a:rPr>
-              <a:t>01</a:t>
-            </a:r>
-          </a:p>
-        </p:txBody>
-      </p:sp>
-      <p:sp>
-        <p:nvSpPr>
-          <p:cNvPr id="15" name="">
-            <a:extLst xmlns:a="http://schemas.openxmlformats.org/drawingml/2006/main">
-              <a:ext uri="{FF2B5EF4-FFF2-40B4-BE49-F238E27FC236}">
-                <a16:creationId xmlns:a16="http://schemas.microsoft.com/office/drawing/2014/main" id="{083D10BC-0612-434A-B32E-B947FCBCCD6B}"/>
-              </a:ext>
-            </a:extLst>
-          </p:cNvPr>
-          <p:cNvSpPr>
-            <a:spLocks xmlns:a="http://schemas.openxmlformats.org/drawingml/2006/main" noGrp="1"/>
-          </p:cNvSpPr>
-          <p:nvPr/>
-        </p:nvSpPr>
-        <p:spPr>
-          <a:xfrm xmlns:a="http://schemas.openxmlformats.org/drawingml/2006/main">
-            <a:off x="1047750" y="3200400"/>
-            <a:ext cx="2781300" cy="819150"/>
-          </a:xfrm>
-          <a:prstGeom xmlns:a="http://schemas.openxmlformats.org/drawingml/2006/main" prst="rect">
-            <a:avLst/>
-          </a:prstGeom>
-          <a:noFill xmlns:a="http://schemas.openxmlformats.org/drawingml/2006/main"/>
-          <a:ln xmlns:a="http://schemas.openxmlformats.org/drawingml/2006/main" w="0">
-            <a:noFill/>
-            <a:prstDash val="solid"/>
-          </a:ln>
-        </p:spPr>
-        <p:txBody>
-          <a:bodyPr xmlns:a="http://schemas.openxmlformats.org/drawingml/2006/main"/>
-          <a:lstStyle xmlns:a="http://schemas.openxmlformats.org/drawingml/2006/main"/>
-          <a:p xmlns:a="http://schemas.openxmlformats.org/drawingml/2006/main">
-            <a:pPr>
-              <a:defRPr sz="1125">
-                <a:solidFill>
-                  <a:srgbClr val="102A63"/>
-                </a:solidFill>
-              </a:defRPr>
-            </a:pPr>
-            <a:r>
-              <a:rPr sz="1125">
-                <a:solidFill>
-                  <a:srgbClr val="102A63"/>
-                </a:solidFill>
-              </a:rPr>
-              <a:t>{{ROADMAP_1_1}}</a:t>
-            </a:r>
-          </a:p>
-        </p:txBody>
-      </p:sp>
-      <p:sp>
-        <p:nvSpPr>
-          <p:cNvPr id="16" name="">
-            <a:extLst xmlns:a="http://schemas.openxmlformats.org/drawingml/2006/main">
-              <a:ext uri="{FF2B5EF4-FFF2-40B4-BE49-F238E27FC236}">
-                <a16:creationId xmlns:a16="http://schemas.microsoft.com/office/drawing/2014/main" id="{02ABF158-1694-4DA2-85CD-93A59482D424}"/>
-              </a:ext>
-            </a:extLst>
-          </p:cNvPr>
-          <p:cNvSpPr>
-            <a:spLocks xmlns:a="http://schemas.openxmlformats.org/drawingml/2006/main" noGrp="1"/>
-          </p:cNvSpPr>
-          <p:nvPr/>
-        </p:nvSpPr>
-        <p:spPr>
-          <a:xfrm xmlns:a="http://schemas.openxmlformats.org/drawingml/2006/main">
-            <a:off x="647700" y="4171950"/>
-            <a:ext cx="323850" cy="228600"/>
-          </a:xfrm>
-          <a:prstGeom xmlns:a="http://schemas.openxmlformats.org/drawingml/2006/main" prst="rect">
-            <a:avLst/>
-          </a:prstGeom>
-          <a:noFill xmlns:a="http://schemas.openxmlformats.org/drawingml/2006/main"/>
-          <a:ln xmlns:a="http://schemas.openxmlformats.org/drawingml/2006/main" w="0">
-            <a:noFill/>
-            <a:prstDash val="solid"/>
-          </a:ln>
-        </p:spPr>
-        <p:txBody>
-          <a:bodyPr xmlns:a="http://schemas.openxmlformats.org/drawingml/2006/main"/>
-          <a:lstStyle xmlns:a="http://schemas.openxmlformats.org/drawingml/2006/main"/>
-          <a:p xmlns:a="http://schemas.openxmlformats.org/drawingml/2006/main">
-            <a:pPr>
-              <a:defRPr sz="975" b="1">
-                <a:solidFill>
-                  <a:srgbClr val="2048A8"/>
-                </a:solidFill>
-              </a:defRPr>
-            </a:pPr>
-            <a:r>
-              <a:rPr sz="975" b="1">
-                <a:solidFill>
-                  <a:srgbClr val="2048A8"/>
-                </a:solidFill>
-              </a:rPr>
-              <a:t>02</a:t>
-            </a:r>
-          </a:p>
-        </p:txBody>
-      </p:sp>
-      <p:sp>
-        <p:nvSpPr>
-          <p:cNvPr id="17" name="">
-            <a:extLst xmlns:a="http://schemas.openxmlformats.org/drawingml/2006/main">
-              <a:ext uri="{FF2B5EF4-FFF2-40B4-BE49-F238E27FC236}">
-                <a16:creationId xmlns:a16="http://schemas.microsoft.com/office/drawing/2014/main" id="{23C4EFBB-50A7-46BE-90EF-1A11DDB8A863}"/>
-              </a:ext>
-            </a:extLst>
-          </p:cNvPr>
-          <p:cNvSpPr>
-            <a:spLocks xmlns:a="http://schemas.openxmlformats.org/drawingml/2006/main" noGrp="1"/>
-          </p:cNvSpPr>
-          <p:nvPr/>
-        </p:nvSpPr>
-        <p:spPr>
-          <a:xfrm xmlns:a="http://schemas.openxmlformats.org/drawingml/2006/main">
-            <a:off x="1047750" y="4114800"/>
-            <a:ext cx="2781300" cy="819150"/>
-          </a:xfrm>
-          <a:prstGeom xmlns:a="http://schemas.openxmlformats.org/drawingml/2006/main" prst="rect">
-            <a:avLst/>
-          </a:prstGeom>
-          <a:noFill xmlns:a="http://schemas.openxmlformats.org/drawingml/2006/main"/>
-          <a:ln xmlns:a="http://schemas.openxmlformats.org/drawingml/2006/main" w="0">
-            <a:noFill/>
-            <a:prstDash val="solid"/>
-          </a:ln>
-        </p:spPr>
-        <p:txBody>
-          <a:bodyPr xmlns:a="http://schemas.openxmlformats.org/drawingml/2006/main"/>
-          <a:lstStyle xmlns:a="http://schemas.openxmlformats.org/drawingml/2006/main"/>
-          <a:p xmlns:a="http://schemas.openxmlformats.org/drawingml/2006/main">
-            <a:pPr>
-              <a:defRPr sz="1125">
-                <a:solidFill>
-                  <a:srgbClr val="102A63"/>
-                </a:solidFill>
-              </a:defRPr>
-            </a:pPr>
-            <a:r>
-              <a:rPr sz="1125">
-                <a:solidFill>
-                  <a:srgbClr val="102A63"/>
-                </a:solidFill>
-              </a:rPr>
-              <a:t>{{ROADMAP_1_2}}</a:t>
-            </a:r>
-          </a:p>
-        </p:txBody>
-      </p:sp>
-      <p:sp>
-        <p:nvSpPr>
-          <p:cNvPr id="18" name="">
-            <a:extLst xmlns:a="http://schemas.openxmlformats.org/drawingml/2006/main">
-              <a:ext uri="{FF2B5EF4-FFF2-40B4-BE49-F238E27FC236}">
-                <a16:creationId xmlns:a16="http://schemas.microsoft.com/office/drawing/2014/main" id="{00B02435-7CFD-439D-80E4-343E3AAF0AEB}"/>
-              </a:ext>
-            </a:extLst>
-          </p:cNvPr>
-          <p:cNvSpPr>
-            <a:spLocks xmlns:a="http://schemas.openxmlformats.org/drawingml/2006/main" noGrp="1"/>
-          </p:cNvSpPr>
-          <p:nvPr/>
-        </p:nvSpPr>
-        <p:spPr>
-          <a:xfrm xmlns:a="http://schemas.openxmlformats.org/drawingml/2006/main">
-            <a:off x="647700" y="5162550"/>
-            <a:ext cx="3181350" cy="762000"/>
+          <p:cNvPr id="12" name="">
+            <a:extLst xmlns:a="http://schemas.openxmlformats.org/drawingml/2006/main">
+              <a:ext uri="{FF2B5EF4-FFF2-40B4-BE49-F238E27FC236}">
+                <a16:creationId xmlns:a16="http://schemas.microsoft.com/office/drawing/2014/main" id="{129EE624-C5F1-43EB-8881-AEEA5418D3F4}"/>
+              </a:ext>
+            </a:extLst>
+          </p:cNvPr>
+          <p:cNvSpPr>
+            <a:spLocks xmlns:a="http://schemas.openxmlformats.org/drawingml/2006/main" noGrp="1"/>
+          </p:cNvSpPr>
+          <p:nvPr/>
+        </p:nvSpPr>
+        <p:spPr>
+          <a:xfrm xmlns:a="http://schemas.openxmlformats.org/drawingml/2006/main">
+            <a:off x="1390650" y="1752600"/>
+            <a:ext cx="9810750" cy="1257300"/>
           </a:xfrm>
           <a:prstGeom xmlns:a="http://schemas.openxmlformats.org/drawingml/2006/main" prst="roundRect">
             <a:avLst>
-              <a:gd name="adj" fmla="val 10000"/>
+              <a:gd name="adj" fmla="val 6061"/>
             </a:avLst>
           </a:prstGeom>
           <a:solidFill xmlns:a="http://schemas.openxmlformats.org/drawingml/2006/main">
@@ -5200,542 +4900,330 @@
       </p:sp>
       <p:sp>
         <p:nvSpPr>
+          <p:cNvPr id="13" name="">
+            <a:extLst xmlns:a="http://schemas.openxmlformats.org/drawingml/2006/main">
+              <a:ext uri="{FF2B5EF4-FFF2-40B4-BE49-F238E27FC236}">
+                <a16:creationId xmlns:a16="http://schemas.microsoft.com/office/drawing/2014/main" id="{0C84908F-A758-4BC1-8E3B-3F336A8065DB}"/>
+              </a:ext>
+            </a:extLst>
+          </p:cNvPr>
+          <p:cNvSpPr>
+            <a:spLocks xmlns:a="http://schemas.openxmlformats.org/drawingml/2006/main" noGrp="1"/>
+          </p:cNvSpPr>
+          <p:nvPr/>
+        </p:nvSpPr>
+        <p:spPr>
+          <a:xfrm xmlns:a="http://schemas.openxmlformats.org/drawingml/2006/main">
+            <a:off x="1619250" y="1905000"/>
+            <a:ext cx="1409700" cy="228600"/>
+          </a:xfrm>
+          <a:prstGeom xmlns:a="http://schemas.openxmlformats.org/drawingml/2006/main" prst="rect">
+            <a:avLst/>
+          </a:prstGeom>
+          <a:noFill xmlns:a="http://schemas.openxmlformats.org/drawingml/2006/main"/>
+          <a:ln xmlns:a="http://schemas.openxmlformats.org/drawingml/2006/main" w="0">
+            <a:noFill/>
+            <a:prstDash val="solid"/>
+          </a:ln>
+        </p:spPr>
+        <p:txBody>
+          <a:bodyPr xmlns:a="http://schemas.openxmlformats.org/drawingml/2006/main"/>
+          <a:lstStyle xmlns:a="http://schemas.openxmlformats.org/drawingml/2006/main"/>
+          <a:p xmlns:a="http://schemas.openxmlformats.org/drawingml/2006/main">
+            <a:pPr>
+              <a:defRPr sz="1125" b="1">
+                <a:solidFill>
+                  <a:srgbClr val="2048A8"/>
+                </a:solidFill>
+              </a:defRPr>
+            </a:pPr>
+            <a:r>
+              <a:rPr sz="1125" b="1">
+                <a:solidFill>
+                  <a:srgbClr val="2048A8"/>
+                </a:solidFill>
+              </a:rPr>
+              <a:t>0–30 дней</a:t>
+            </a:r>
+          </a:p>
+        </p:txBody>
+      </p:sp>
+      <p:sp>
+        <p:nvSpPr>
+          <p:cNvPr id="14" name="">
+            <a:extLst xmlns:a="http://schemas.openxmlformats.org/drawingml/2006/main">
+              <a:ext uri="{FF2B5EF4-FFF2-40B4-BE49-F238E27FC236}">
+                <a16:creationId xmlns:a16="http://schemas.microsoft.com/office/drawing/2014/main" id="{AB607180-41AA-4DB2-9BD6-FCFE65AEB9CC}"/>
+              </a:ext>
+            </a:extLst>
+          </p:cNvPr>
+          <p:cNvSpPr>
+            <a:spLocks xmlns:a="http://schemas.openxmlformats.org/drawingml/2006/main" noGrp="1"/>
+          </p:cNvSpPr>
+          <p:nvPr/>
+        </p:nvSpPr>
+        <p:spPr>
+          <a:xfrm xmlns:a="http://schemas.openxmlformats.org/drawingml/2006/main">
+            <a:off x="1619250" y="2190750"/>
+            <a:ext cx="2381250" cy="495300"/>
+          </a:xfrm>
+          <a:prstGeom xmlns:a="http://schemas.openxmlformats.org/drawingml/2006/main" prst="rect">
+            <a:avLst/>
+          </a:prstGeom>
+          <a:noFill xmlns:a="http://schemas.openxmlformats.org/drawingml/2006/main"/>
+          <a:ln xmlns:a="http://schemas.openxmlformats.org/drawingml/2006/main" w="0">
+            <a:noFill/>
+            <a:prstDash val="solid"/>
+          </a:ln>
+        </p:spPr>
+        <p:txBody>
+          <a:bodyPr xmlns:a="http://schemas.openxmlformats.org/drawingml/2006/main"/>
+          <a:lstStyle xmlns:a="http://schemas.openxmlformats.org/drawingml/2006/main"/>
+          <a:p xmlns:a="http://schemas.openxmlformats.org/drawingml/2006/main">
+            <a:pPr>
+              <a:defRPr sz="1125" b="1">
+                <a:solidFill>
+                  <a:srgbClr val="102A63"/>
+                </a:solidFill>
+              </a:defRPr>
+            </a:pPr>
+            <a:r>
+              <a:rPr sz="1125" b="1">
+                <a:solidFill>
+                  <a:srgbClr val="102A63"/>
+                </a:solidFill>
+              </a:rPr>
+              <a:t>ПРИОРИТЕТЫ И БЫСТРЫЕ МЕРЫ</a:t>
+            </a:r>
+          </a:p>
+        </p:txBody>
+      </p:sp>
+      <p:sp>
+        <p:nvSpPr>
+          <p:cNvPr id="15" name="">
+            <a:extLst xmlns:a="http://schemas.openxmlformats.org/drawingml/2006/main">
+              <a:ext uri="{FF2B5EF4-FFF2-40B4-BE49-F238E27FC236}">
+                <a16:creationId xmlns:a16="http://schemas.microsoft.com/office/drawing/2014/main" id="{0EC1A09F-AF0D-43DC-B295-76440FBA4B74}"/>
+              </a:ext>
+            </a:extLst>
+          </p:cNvPr>
+          <p:cNvSpPr>
+            <a:spLocks xmlns:a="http://schemas.openxmlformats.org/drawingml/2006/main" noGrp="1"/>
+          </p:cNvSpPr>
+          <p:nvPr/>
+        </p:nvSpPr>
+        <p:spPr>
+          <a:xfrm xmlns:a="http://schemas.openxmlformats.org/drawingml/2006/main">
+            <a:off x="4210050" y="1952625"/>
+            <a:ext cx="304800" cy="190500"/>
+          </a:xfrm>
+          <a:prstGeom xmlns:a="http://schemas.openxmlformats.org/drawingml/2006/main" prst="rect">
+            <a:avLst/>
+          </a:prstGeom>
+          <a:noFill xmlns:a="http://schemas.openxmlformats.org/drawingml/2006/main"/>
+          <a:ln xmlns:a="http://schemas.openxmlformats.org/drawingml/2006/main" w="0">
+            <a:noFill/>
+            <a:prstDash val="solid"/>
+          </a:ln>
+        </p:spPr>
+        <p:txBody>
+          <a:bodyPr xmlns:a="http://schemas.openxmlformats.org/drawingml/2006/main"/>
+          <a:lstStyle xmlns:a="http://schemas.openxmlformats.org/drawingml/2006/main"/>
+          <a:p xmlns:a="http://schemas.openxmlformats.org/drawingml/2006/main">
+            <a:pPr>
+              <a:defRPr sz="825" b="1">
+                <a:solidFill>
+                  <a:srgbClr val="2048A8"/>
+                </a:solidFill>
+              </a:defRPr>
+            </a:pPr>
+            <a:r>
+              <a:rPr sz="825" b="1">
+                <a:solidFill>
+                  <a:srgbClr val="2048A8"/>
+                </a:solidFill>
+              </a:rPr>
+              <a:t>01</a:t>
+            </a:r>
+          </a:p>
+        </p:txBody>
+      </p:sp>
+      <p:sp>
+        <p:nvSpPr>
+          <p:cNvPr id="16" name="">
+            <a:extLst xmlns:a="http://schemas.openxmlformats.org/drawingml/2006/main">
+              <a:ext uri="{FF2B5EF4-FFF2-40B4-BE49-F238E27FC236}">
+                <a16:creationId xmlns:a16="http://schemas.microsoft.com/office/drawing/2014/main" id="{CE21B2FA-D090-44D2-A9CB-41E84F5C2C4D}"/>
+              </a:ext>
+            </a:extLst>
+          </p:cNvPr>
+          <p:cNvSpPr>
+            <a:spLocks xmlns:a="http://schemas.openxmlformats.org/drawingml/2006/main" noGrp="1"/>
+          </p:cNvSpPr>
+          <p:nvPr/>
+        </p:nvSpPr>
+        <p:spPr>
+          <a:xfrm xmlns:a="http://schemas.openxmlformats.org/drawingml/2006/main">
+            <a:off x="4572000" y="1895475"/>
+            <a:ext cx="2362200" cy="895350"/>
+          </a:xfrm>
+          <a:prstGeom xmlns:a="http://schemas.openxmlformats.org/drawingml/2006/main" prst="rect">
+            <a:avLst/>
+          </a:prstGeom>
+          <a:noFill xmlns:a="http://schemas.openxmlformats.org/drawingml/2006/main"/>
+          <a:ln xmlns:a="http://schemas.openxmlformats.org/drawingml/2006/main" w="0">
+            <a:noFill/>
+            <a:prstDash val="solid"/>
+          </a:ln>
+        </p:spPr>
+        <p:txBody>
+          <a:bodyPr xmlns:a="http://schemas.openxmlformats.org/drawingml/2006/main"/>
+          <a:lstStyle xmlns:a="http://schemas.openxmlformats.org/drawingml/2006/main"/>
+          <a:p xmlns:a="http://schemas.openxmlformats.org/drawingml/2006/main">
+            <a:pPr>
+              <a:defRPr sz="975">
+                <a:solidFill>
+                  <a:srgbClr val="102A63"/>
+                </a:solidFill>
+              </a:defRPr>
+            </a:pPr>
+            <a:r>
+              <a:rPr sz="975">
+                <a:solidFill>
+                  <a:srgbClr val="102A63"/>
+                </a:solidFill>
+              </a:rPr>
+              <a:t>{{ROADMAP_1_1}}</a:t>
+            </a:r>
+          </a:p>
+        </p:txBody>
+      </p:sp>
+      <p:sp>
+        <p:nvSpPr>
+          <p:cNvPr id="17" name="">
+            <a:extLst xmlns:a="http://schemas.openxmlformats.org/drawingml/2006/main">
+              <a:ext uri="{FF2B5EF4-FFF2-40B4-BE49-F238E27FC236}">
+                <a16:creationId xmlns:a16="http://schemas.microsoft.com/office/drawing/2014/main" id="{FDB722F1-87D2-4EB6-8839-64CB8DF8C93F}"/>
+              </a:ext>
+            </a:extLst>
+          </p:cNvPr>
+          <p:cNvSpPr>
+            <a:spLocks xmlns:a="http://schemas.openxmlformats.org/drawingml/2006/main" noGrp="1"/>
+          </p:cNvSpPr>
+          <p:nvPr/>
+        </p:nvSpPr>
+        <p:spPr>
+          <a:xfrm xmlns:a="http://schemas.openxmlformats.org/drawingml/2006/main">
+            <a:off x="7124700" y="1952625"/>
+            <a:ext cx="304800" cy="190500"/>
+          </a:xfrm>
+          <a:prstGeom xmlns:a="http://schemas.openxmlformats.org/drawingml/2006/main" prst="rect">
+            <a:avLst/>
+          </a:prstGeom>
+          <a:noFill xmlns:a="http://schemas.openxmlformats.org/drawingml/2006/main"/>
+          <a:ln xmlns:a="http://schemas.openxmlformats.org/drawingml/2006/main" w="0">
+            <a:noFill/>
+            <a:prstDash val="solid"/>
+          </a:ln>
+        </p:spPr>
+        <p:txBody>
+          <a:bodyPr xmlns:a="http://schemas.openxmlformats.org/drawingml/2006/main"/>
+          <a:lstStyle xmlns:a="http://schemas.openxmlformats.org/drawingml/2006/main"/>
+          <a:p xmlns:a="http://schemas.openxmlformats.org/drawingml/2006/main">
+            <a:pPr>
+              <a:defRPr sz="825" b="1">
+                <a:solidFill>
+                  <a:srgbClr val="2048A8"/>
+                </a:solidFill>
+              </a:defRPr>
+            </a:pPr>
+            <a:r>
+              <a:rPr sz="825" b="1">
+                <a:solidFill>
+                  <a:srgbClr val="2048A8"/>
+                </a:solidFill>
+              </a:rPr>
+              <a:t>02</a:t>
+            </a:r>
+          </a:p>
+        </p:txBody>
+      </p:sp>
+      <p:sp>
+        <p:nvSpPr>
+          <p:cNvPr id="18" name="">
+            <a:extLst xmlns:a="http://schemas.openxmlformats.org/drawingml/2006/main">
+              <a:ext uri="{FF2B5EF4-FFF2-40B4-BE49-F238E27FC236}">
+                <a16:creationId xmlns:a16="http://schemas.microsoft.com/office/drawing/2014/main" id="{EDB5E581-AE1C-49FD-AF1E-ADCA1D167848}"/>
+              </a:ext>
+            </a:extLst>
+          </p:cNvPr>
+          <p:cNvSpPr>
+            <a:spLocks xmlns:a="http://schemas.openxmlformats.org/drawingml/2006/main" noGrp="1"/>
+          </p:cNvSpPr>
+          <p:nvPr/>
+        </p:nvSpPr>
+        <p:spPr>
+          <a:xfrm xmlns:a="http://schemas.openxmlformats.org/drawingml/2006/main">
+            <a:off x="7486650" y="1895475"/>
+            <a:ext cx="1847850" cy="895350"/>
+          </a:xfrm>
+          <a:prstGeom xmlns:a="http://schemas.openxmlformats.org/drawingml/2006/main" prst="rect">
+            <a:avLst/>
+          </a:prstGeom>
+          <a:noFill xmlns:a="http://schemas.openxmlformats.org/drawingml/2006/main"/>
+          <a:ln xmlns:a="http://schemas.openxmlformats.org/drawingml/2006/main" w="0">
+            <a:noFill/>
+            <a:prstDash val="solid"/>
+          </a:ln>
+        </p:spPr>
+        <p:txBody>
+          <a:bodyPr xmlns:a="http://schemas.openxmlformats.org/drawingml/2006/main"/>
+          <a:lstStyle xmlns:a="http://schemas.openxmlformats.org/drawingml/2006/main"/>
+          <a:p xmlns:a="http://schemas.openxmlformats.org/drawingml/2006/main">
+            <a:pPr>
+              <a:defRPr sz="975">
+                <a:solidFill>
+                  <a:srgbClr val="102A63"/>
+                </a:solidFill>
+              </a:defRPr>
+            </a:pPr>
+            <a:r>
+              <a:rPr sz="975">
+                <a:solidFill>
+                  <a:srgbClr val="102A63"/>
+                </a:solidFill>
+              </a:rPr>
+              <a:t>{{ROADMAP_1_2}}</a:t>
+            </a:r>
+          </a:p>
+        </p:txBody>
+      </p:sp>
+      <p:sp>
+        <p:nvSpPr>
           <p:cNvPr id="19" name="">
             <a:extLst xmlns:a="http://schemas.openxmlformats.org/drawingml/2006/main">
               <a:ext uri="{FF2B5EF4-FFF2-40B4-BE49-F238E27FC236}">
-                <a16:creationId xmlns:a16="http://schemas.microsoft.com/office/drawing/2014/main" id="{EFCE3A2D-826F-445A-9413-87CC45DC7FEF}"/>
-              </a:ext>
-            </a:extLst>
-          </p:cNvPr>
-          <p:cNvSpPr>
-            <a:spLocks xmlns:a="http://schemas.openxmlformats.org/drawingml/2006/main" noGrp="1"/>
-          </p:cNvSpPr>
-          <p:nvPr/>
-        </p:nvSpPr>
-        <p:spPr>
-          <a:xfrm xmlns:a="http://schemas.openxmlformats.org/drawingml/2006/main">
-            <a:off x="800100" y="5286375"/>
-            <a:ext cx="2876550" cy="171450"/>
-          </a:xfrm>
-          <a:prstGeom xmlns:a="http://schemas.openxmlformats.org/drawingml/2006/main" prst="rect">
-            <a:avLst/>
-          </a:prstGeom>
-          <a:noFill xmlns:a="http://schemas.openxmlformats.org/drawingml/2006/main"/>
-          <a:ln xmlns:a="http://schemas.openxmlformats.org/drawingml/2006/main" w="0">
-            <a:noFill/>
-            <a:prstDash val="solid"/>
-          </a:ln>
-        </p:spPr>
-        <p:txBody>
-          <a:bodyPr xmlns:a="http://schemas.openxmlformats.org/drawingml/2006/main"/>
-          <a:lstStyle xmlns:a="http://schemas.openxmlformats.org/drawingml/2006/main"/>
-          <a:p xmlns:a="http://schemas.openxmlformats.org/drawingml/2006/main">
-            <a:pPr>
-              <a:defRPr sz="750" b="1">
-                <a:solidFill>
-                  <a:srgbClr val="2048A8"/>
-                </a:solidFill>
-              </a:defRPr>
-            </a:pPr>
-            <a:r>
-              <a:rPr sz="750" b="1">
-                <a:solidFill>
-                  <a:srgbClr val="2048A8"/>
-                </a:solidFill>
-              </a:rPr>
-              <a:t>ЧТО ДАСТ ЭТАП</a:t>
-            </a:r>
-          </a:p>
-        </p:txBody>
-      </p:sp>
-      <p:sp>
-        <p:nvSpPr>
-          <p:cNvPr id="20" name="">
-            <a:extLst xmlns:a="http://schemas.openxmlformats.org/drawingml/2006/main">
-              <a:ext uri="{FF2B5EF4-FFF2-40B4-BE49-F238E27FC236}">
-                <a16:creationId xmlns:a16="http://schemas.microsoft.com/office/drawing/2014/main" id="{A304CC32-6866-421A-8587-622E96D2DABA}"/>
-              </a:ext>
-            </a:extLst>
-          </p:cNvPr>
-          <p:cNvSpPr>
-            <a:spLocks xmlns:a="http://schemas.openxmlformats.org/drawingml/2006/main" noGrp="1"/>
-          </p:cNvSpPr>
-          <p:nvPr/>
-        </p:nvSpPr>
-        <p:spPr>
-          <a:xfrm xmlns:a="http://schemas.openxmlformats.org/drawingml/2006/main">
-            <a:off x="800100" y="5514975"/>
-            <a:ext cx="2876550" cy="323850"/>
-          </a:xfrm>
-          <a:prstGeom xmlns:a="http://schemas.openxmlformats.org/drawingml/2006/main" prst="rect">
-            <a:avLst/>
-          </a:prstGeom>
-          <a:noFill xmlns:a="http://schemas.openxmlformats.org/drawingml/2006/main"/>
-          <a:ln xmlns:a="http://schemas.openxmlformats.org/drawingml/2006/main" w="0">
-            <a:noFill/>
-            <a:prstDash val="solid"/>
-          </a:ln>
-        </p:spPr>
-        <p:txBody>
-          <a:bodyPr xmlns:a="http://schemas.openxmlformats.org/drawingml/2006/main"/>
-          <a:lstStyle xmlns:a="http://schemas.openxmlformats.org/drawingml/2006/main"/>
-          <a:p xmlns:a="http://schemas.openxmlformats.org/drawingml/2006/main">
-            <a:pPr>
-              <a:defRPr sz="975" b="1">
-                <a:solidFill>
-                  <a:srgbClr val="102A63"/>
-                </a:solidFill>
-              </a:defRPr>
-            </a:pPr>
-            <a:r>
-              <a:rPr sz="975" b="1">
-                <a:solidFill>
-                  <a:srgbClr val="102A63"/>
-                </a:solidFill>
-              </a:rPr>
-              <a:t>{{ROADMAP_1_RESULT}}</a:t>
-            </a:r>
-          </a:p>
-        </p:txBody>
-      </p:sp>
-      <p:sp>
-        <p:nvSpPr>
-          <p:cNvPr id="21" name="">
-            <a:extLst xmlns:a="http://schemas.openxmlformats.org/drawingml/2006/main">
-              <a:ext uri="{FF2B5EF4-FFF2-40B4-BE49-F238E27FC236}">
-                <a16:creationId xmlns:a16="http://schemas.microsoft.com/office/drawing/2014/main" id="{AF9EB4D6-9113-44A6-83A1-B8A458809A36}"/>
-              </a:ext>
-            </a:extLst>
-          </p:cNvPr>
-          <p:cNvSpPr>
-            <a:spLocks xmlns:a="http://schemas.openxmlformats.org/drawingml/2006/main" noGrp="1"/>
-          </p:cNvSpPr>
-          <p:nvPr/>
-        </p:nvSpPr>
-        <p:spPr>
-          <a:xfrm xmlns:a="http://schemas.openxmlformats.org/drawingml/2006/main">
-            <a:off x="4067175" y="2628900"/>
-            <a:ext cx="9525" cy="3295650"/>
-          </a:xfrm>
-          <a:prstGeom xmlns:a="http://schemas.openxmlformats.org/drawingml/2006/main" prst="rect">
-            <a:avLst/>
-          </a:prstGeom>
-          <a:solidFill xmlns:a="http://schemas.openxmlformats.org/drawingml/2006/main">
-            <a:srgbClr val="D7E0F2"/>
-          </a:solidFill>
-          <a:ln xmlns:a="http://schemas.openxmlformats.org/drawingml/2006/main" w="0">
-            <a:noFill/>
-            <a:prstDash val="solid"/>
-          </a:ln>
-        </p:spPr>
-      </p:sp>
-      <p:sp>
-        <p:nvSpPr>
-          <p:cNvPr id="22" name="">
-            <a:extLst xmlns:a="http://schemas.openxmlformats.org/drawingml/2006/main">
-              <a:ext uri="{FF2B5EF4-FFF2-40B4-BE49-F238E27FC236}">
-                <a16:creationId xmlns:a16="http://schemas.microsoft.com/office/drawing/2014/main" id="{4AB35477-5280-4CE4-A354-C3BF2363FB61}"/>
-              </a:ext>
-            </a:extLst>
-          </p:cNvPr>
-          <p:cNvSpPr>
-            <a:spLocks xmlns:a="http://schemas.openxmlformats.org/drawingml/2006/main" noGrp="1"/>
-          </p:cNvSpPr>
-          <p:nvPr/>
-        </p:nvSpPr>
-        <p:spPr>
-          <a:xfrm xmlns:a="http://schemas.openxmlformats.org/drawingml/2006/main">
-            <a:off x="4191000" y="1752600"/>
-            <a:ext cx="3371850" cy="266700"/>
-          </a:xfrm>
-          <a:prstGeom xmlns:a="http://schemas.openxmlformats.org/drawingml/2006/main" prst="rect">
-            <a:avLst/>
-          </a:prstGeom>
-          <a:noFill xmlns:a="http://schemas.openxmlformats.org/drawingml/2006/main"/>
-          <a:ln xmlns:a="http://schemas.openxmlformats.org/drawingml/2006/main" w="0">
-            <a:noFill/>
-            <a:prstDash val="solid"/>
-          </a:ln>
-        </p:spPr>
-        <p:txBody>
-          <a:bodyPr xmlns:a="http://schemas.openxmlformats.org/drawingml/2006/main"/>
-          <a:lstStyle xmlns:a="http://schemas.openxmlformats.org/drawingml/2006/main"/>
-          <a:p xmlns:a="http://schemas.openxmlformats.org/drawingml/2006/main">
-            <a:pPr algn="ctr">
-              <a:defRPr sz="1275" b="1">
-                <a:solidFill>
-                  <a:srgbClr val="102A63"/>
-                </a:solidFill>
-              </a:defRPr>
-            </a:pPr>
-            <a:r>
-              <a:rPr sz="1275" b="1">
-                <a:solidFill>
-                  <a:srgbClr val="102A63"/>
-                </a:solidFill>
-              </a:rPr>
-              <a:t>31–60 дней</a:t>
-            </a:r>
-          </a:p>
-        </p:txBody>
-      </p:sp>
-      <p:sp>
-        <p:nvSpPr>
-          <p:cNvPr id="23" name="">
-            <a:extLst xmlns:a="http://schemas.openxmlformats.org/drawingml/2006/main">
-              <a:ext uri="{FF2B5EF4-FFF2-40B4-BE49-F238E27FC236}">
-                <a16:creationId xmlns:a16="http://schemas.microsoft.com/office/drawing/2014/main" id="{EBD952D9-4FCA-40BF-87ED-7BC55D6EF68E}"/>
-              </a:ext>
-            </a:extLst>
-          </p:cNvPr>
-          <p:cNvSpPr>
-            <a:spLocks xmlns:a="http://schemas.openxmlformats.org/drawingml/2006/main" noGrp="1"/>
-          </p:cNvSpPr>
-          <p:nvPr/>
-        </p:nvSpPr>
-        <p:spPr>
-          <a:xfrm xmlns:a="http://schemas.openxmlformats.org/drawingml/2006/main">
-            <a:off x="5629275" y="1924050"/>
-            <a:ext cx="495300" cy="495300"/>
-          </a:xfrm>
-          <a:prstGeom xmlns:a="http://schemas.openxmlformats.org/drawingml/2006/main" prst="ellipse">
-            <a:avLst/>
-          </a:prstGeom>
-          <a:solidFill xmlns:a="http://schemas.openxmlformats.org/drawingml/2006/main">
-            <a:srgbClr val="102A63"/>
-          </a:solidFill>
-          <a:ln xmlns:a="http://schemas.openxmlformats.org/drawingml/2006/main" w="0">
-            <a:noFill/>
-            <a:prstDash val="solid"/>
-          </a:ln>
-        </p:spPr>
-      </p:sp>
-      <p:sp>
-        <p:nvSpPr>
-          <p:cNvPr id="24" name="">
-            <a:extLst xmlns:a="http://schemas.openxmlformats.org/drawingml/2006/main">
-              <a:ext uri="{FF2B5EF4-FFF2-40B4-BE49-F238E27FC236}">
-                <a16:creationId xmlns:a16="http://schemas.microsoft.com/office/drawing/2014/main" id="{1FBCC15C-1FE8-484B-A22C-6E0FB140C37E}"/>
-              </a:ext>
-            </a:extLst>
-          </p:cNvPr>
-          <p:cNvSpPr>
-            <a:spLocks xmlns:a="http://schemas.openxmlformats.org/drawingml/2006/main" noGrp="1"/>
-          </p:cNvSpPr>
-          <p:nvPr/>
-        </p:nvSpPr>
-        <p:spPr>
-          <a:xfrm xmlns:a="http://schemas.openxmlformats.org/drawingml/2006/main">
-            <a:off x="5715000" y="2028825"/>
-            <a:ext cx="323850" cy="247650"/>
-          </a:xfrm>
-          <a:prstGeom xmlns:a="http://schemas.openxmlformats.org/drawingml/2006/main" prst="rect">
-            <a:avLst/>
-          </a:prstGeom>
-          <a:noFill xmlns:a="http://schemas.openxmlformats.org/drawingml/2006/main"/>
-          <a:ln xmlns:a="http://schemas.openxmlformats.org/drawingml/2006/main" w="0">
-            <a:noFill/>
-            <a:prstDash val="solid"/>
-          </a:ln>
-        </p:spPr>
-        <p:txBody>
-          <a:bodyPr xmlns:a="http://schemas.openxmlformats.org/drawingml/2006/main"/>
-          <a:lstStyle xmlns:a="http://schemas.openxmlformats.org/drawingml/2006/main"/>
-          <a:p xmlns:a="http://schemas.openxmlformats.org/drawingml/2006/main">
-            <a:pPr algn="ctr">
-              <a:defRPr sz="1200" b="1">
-                <a:solidFill>
-                  <a:srgbClr val="FFFFFF"/>
-                </a:solidFill>
-              </a:defRPr>
-            </a:pPr>
-            <a:r>
-              <a:rPr sz="1200" b="1">
-                <a:solidFill>
-                  <a:srgbClr val="FFFFFF"/>
-                </a:solidFill>
-              </a:rPr>
-              <a:t>2</a:t>
-            </a:r>
-          </a:p>
-        </p:txBody>
-      </p:sp>
-      <p:sp>
-        <p:nvSpPr>
-          <p:cNvPr id="25" name="">
-            <a:extLst xmlns:a="http://schemas.openxmlformats.org/drawingml/2006/main">
-              <a:ext uri="{FF2B5EF4-FFF2-40B4-BE49-F238E27FC236}">
-                <a16:creationId xmlns:a16="http://schemas.microsoft.com/office/drawing/2014/main" id="{365484CB-501C-4F54-9DBC-10FB0E6B7838}"/>
-              </a:ext>
-            </a:extLst>
-          </p:cNvPr>
-          <p:cNvSpPr>
-            <a:spLocks xmlns:a="http://schemas.openxmlformats.org/drawingml/2006/main" noGrp="1"/>
-          </p:cNvSpPr>
-          <p:nvPr/>
-        </p:nvSpPr>
-        <p:spPr>
-          <a:xfrm xmlns:a="http://schemas.openxmlformats.org/drawingml/2006/main">
-            <a:off x="4286250" y="2628900"/>
-            <a:ext cx="3181350" cy="438150"/>
-          </a:xfrm>
-          <a:prstGeom xmlns:a="http://schemas.openxmlformats.org/drawingml/2006/main" prst="rect">
-            <a:avLst/>
-          </a:prstGeom>
-          <a:noFill xmlns:a="http://schemas.openxmlformats.org/drawingml/2006/main"/>
-          <a:ln xmlns:a="http://schemas.openxmlformats.org/drawingml/2006/main" w="0">
-            <a:noFill/>
-            <a:prstDash val="solid"/>
-          </a:ln>
-        </p:spPr>
-        <p:txBody>
-          <a:bodyPr xmlns:a="http://schemas.openxmlformats.org/drawingml/2006/main"/>
-          <a:lstStyle xmlns:a="http://schemas.openxmlformats.org/drawingml/2006/main"/>
-          <a:p xmlns:a="http://schemas.openxmlformats.org/drawingml/2006/main">
-            <a:pPr algn="ctr">
-              <a:defRPr sz="975" b="1">
-                <a:solidFill>
-                  <a:srgbClr val="2048A8"/>
-                </a:solidFill>
-              </a:defRPr>
-            </a:pPr>
-            <a:r>
-              <a:rPr sz="975" b="1">
-                <a:solidFill>
-                  <a:srgbClr val="2048A8"/>
-                </a:solidFill>
-              </a:rPr>
-              <a:t>ПИЛОТЫ И РЕГЛАМЕНТЫ</a:t>
-            </a:r>
-          </a:p>
-        </p:txBody>
-      </p:sp>
-      <p:sp>
-        <p:nvSpPr>
-          <p:cNvPr id="26" name="">
-            <a:extLst xmlns:a="http://schemas.openxmlformats.org/drawingml/2006/main">
-              <a:ext uri="{FF2B5EF4-FFF2-40B4-BE49-F238E27FC236}">
-                <a16:creationId xmlns:a16="http://schemas.microsoft.com/office/drawing/2014/main" id="{CD0E4F22-C28F-4212-9D59-362B2DE0619D}"/>
-              </a:ext>
-            </a:extLst>
-          </p:cNvPr>
-          <p:cNvSpPr>
-            <a:spLocks xmlns:a="http://schemas.openxmlformats.org/drawingml/2006/main" noGrp="1"/>
-          </p:cNvSpPr>
-          <p:nvPr/>
-        </p:nvSpPr>
-        <p:spPr>
-          <a:xfrm xmlns:a="http://schemas.openxmlformats.org/drawingml/2006/main">
-            <a:off x="4286250" y="3257550"/>
-            <a:ext cx="323850" cy="228600"/>
-          </a:xfrm>
-          <a:prstGeom xmlns:a="http://schemas.openxmlformats.org/drawingml/2006/main" prst="rect">
-            <a:avLst/>
-          </a:prstGeom>
-          <a:noFill xmlns:a="http://schemas.openxmlformats.org/drawingml/2006/main"/>
-          <a:ln xmlns:a="http://schemas.openxmlformats.org/drawingml/2006/main" w="0">
-            <a:noFill/>
-            <a:prstDash val="solid"/>
-          </a:ln>
-        </p:spPr>
-        <p:txBody>
-          <a:bodyPr xmlns:a="http://schemas.openxmlformats.org/drawingml/2006/main"/>
-          <a:lstStyle xmlns:a="http://schemas.openxmlformats.org/drawingml/2006/main"/>
-          <a:p xmlns:a="http://schemas.openxmlformats.org/drawingml/2006/main">
-            <a:pPr>
-              <a:defRPr sz="975" b="1">
-                <a:solidFill>
-                  <a:srgbClr val="2048A8"/>
-                </a:solidFill>
-              </a:defRPr>
-            </a:pPr>
-            <a:r>
-              <a:rPr sz="975" b="1">
-                <a:solidFill>
-                  <a:srgbClr val="2048A8"/>
-                </a:solidFill>
-              </a:rPr>
-              <a:t>01</a:t>
-            </a:r>
-          </a:p>
-        </p:txBody>
-      </p:sp>
-      <p:sp>
-        <p:nvSpPr>
-          <p:cNvPr id="27" name="">
-            <a:extLst xmlns:a="http://schemas.openxmlformats.org/drawingml/2006/main">
-              <a:ext uri="{FF2B5EF4-FFF2-40B4-BE49-F238E27FC236}">
-                <a16:creationId xmlns:a16="http://schemas.microsoft.com/office/drawing/2014/main" id="{27CDFED3-79E8-4E95-A3AF-0EDE6D827E37}"/>
-              </a:ext>
-            </a:extLst>
-          </p:cNvPr>
-          <p:cNvSpPr>
-            <a:spLocks xmlns:a="http://schemas.openxmlformats.org/drawingml/2006/main" noGrp="1"/>
-          </p:cNvSpPr>
-          <p:nvPr/>
-        </p:nvSpPr>
-        <p:spPr>
-          <a:xfrm xmlns:a="http://schemas.openxmlformats.org/drawingml/2006/main">
-            <a:off x="4686300" y="3200400"/>
-            <a:ext cx="2781300" cy="819150"/>
-          </a:xfrm>
-          <a:prstGeom xmlns:a="http://schemas.openxmlformats.org/drawingml/2006/main" prst="rect">
-            <a:avLst/>
-          </a:prstGeom>
-          <a:noFill xmlns:a="http://schemas.openxmlformats.org/drawingml/2006/main"/>
-          <a:ln xmlns:a="http://schemas.openxmlformats.org/drawingml/2006/main" w="0">
-            <a:noFill/>
-            <a:prstDash val="solid"/>
-          </a:ln>
-        </p:spPr>
-        <p:txBody>
-          <a:bodyPr xmlns:a="http://schemas.openxmlformats.org/drawingml/2006/main"/>
-          <a:lstStyle xmlns:a="http://schemas.openxmlformats.org/drawingml/2006/main"/>
-          <a:p xmlns:a="http://schemas.openxmlformats.org/drawingml/2006/main">
-            <a:pPr>
-              <a:defRPr sz="1125">
-                <a:solidFill>
-                  <a:srgbClr val="102A63"/>
-                </a:solidFill>
-              </a:defRPr>
-            </a:pPr>
-            <a:r>
-              <a:rPr sz="1125">
-                <a:solidFill>
-                  <a:srgbClr val="102A63"/>
-                </a:solidFill>
-              </a:rPr>
-              <a:t>{{ROADMAP_2_1}}</a:t>
-            </a:r>
-          </a:p>
-        </p:txBody>
-      </p:sp>
-      <p:sp>
-        <p:nvSpPr>
-          <p:cNvPr id="28" name="">
-            <a:extLst xmlns:a="http://schemas.openxmlformats.org/drawingml/2006/main">
-              <a:ext uri="{FF2B5EF4-FFF2-40B4-BE49-F238E27FC236}">
-                <a16:creationId xmlns:a16="http://schemas.microsoft.com/office/drawing/2014/main" id="{A056AFC3-342C-4BEA-A108-624C5DECA63E}"/>
-              </a:ext>
-            </a:extLst>
-          </p:cNvPr>
-          <p:cNvSpPr>
-            <a:spLocks xmlns:a="http://schemas.openxmlformats.org/drawingml/2006/main" noGrp="1"/>
-          </p:cNvSpPr>
-          <p:nvPr/>
-        </p:nvSpPr>
-        <p:spPr>
-          <a:xfrm xmlns:a="http://schemas.openxmlformats.org/drawingml/2006/main">
-            <a:off x="4286250" y="4171950"/>
-            <a:ext cx="323850" cy="228600"/>
-          </a:xfrm>
-          <a:prstGeom xmlns:a="http://schemas.openxmlformats.org/drawingml/2006/main" prst="rect">
-            <a:avLst/>
-          </a:prstGeom>
-          <a:noFill xmlns:a="http://schemas.openxmlformats.org/drawingml/2006/main"/>
-          <a:ln xmlns:a="http://schemas.openxmlformats.org/drawingml/2006/main" w="0">
-            <a:noFill/>
-            <a:prstDash val="solid"/>
-          </a:ln>
-        </p:spPr>
-        <p:txBody>
-          <a:bodyPr xmlns:a="http://schemas.openxmlformats.org/drawingml/2006/main"/>
-          <a:lstStyle xmlns:a="http://schemas.openxmlformats.org/drawingml/2006/main"/>
-          <a:p xmlns:a="http://schemas.openxmlformats.org/drawingml/2006/main">
-            <a:pPr>
-              <a:defRPr sz="975" b="1">
-                <a:solidFill>
-                  <a:srgbClr val="2048A8"/>
-                </a:solidFill>
-              </a:defRPr>
-            </a:pPr>
-            <a:r>
-              <a:rPr sz="975" b="1">
-                <a:solidFill>
-                  <a:srgbClr val="2048A8"/>
-                </a:solidFill>
-              </a:rPr>
-              <a:t>02</a:t>
-            </a:r>
-          </a:p>
-        </p:txBody>
-      </p:sp>
-      <p:sp>
-        <p:nvSpPr>
-          <p:cNvPr id="29" name="">
-            <a:extLst xmlns:a="http://schemas.openxmlformats.org/drawingml/2006/main">
-              <a:ext uri="{FF2B5EF4-FFF2-40B4-BE49-F238E27FC236}">
-                <a16:creationId xmlns:a16="http://schemas.microsoft.com/office/drawing/2014/main" id="{7144F6E7-3234-4D8F-A15E-FE34D12EB44D}"/>
-              </a:ext>
-            </a:extLst>
-          </p:cNvPr>
-          <p:cNvSpPr>
-            <a:spLocks xmlns:a="http://schemas.openxmlformats.org/drawingml/2006/main" noGrp="1"/>
-          </p:cNvSpPr>
-          <p:nvPr/>
-        </p:nvSpPr>
-        <p:spPr>
-          <a:xfrm xmlns:a="http://schemas.openxmlformats.org/drawingml/2006/main">
-            <a:off x="4686300" y="4114800"/>
-            <a:ext cx="2781300" cy="819150"/>
-          </a:xfrm>
-          <a:prstGeom xmlns:a="http://schemas.openxmlformats.org/drawingml/2006/main" prst="rect">
-            <a:avLst/>
-          </a:prstGeom>
-          <a:noFill xmlns:a="http://schemas.openxmlformats.org/drawingml/2006/main"/>
-          <a:ln xmlns:a="http://schemas.openxmlformats.org/drawingml/2006/main" w="0">
-            <a:noFill/>
-            <a:prstDash val="solid"/>
-          </a:ln>
-        </p:spPr>
-        <p:txBody>
-          <a:bodyPr xmlns:a="http://schemas.openxmlformats.org/drawingml/2006/main"/>
-          <a:lstStyle xmlns:a="http://schemas.openxmlformats.org/drawingml/2006/main"/>
-          <a:p xmlns:a="http://schemas.openxmlformats.org/drawingml/2006/main">
-            <a:pPr>
-              <a:defRPr sz="1125">
-                <a:solidFill>
-                  <a:srgbClr val="102A63"/>
-                </a:solidFill>
-              </a:defRPr>
-            </a:pPr>
-            <a:r>
-              <a:rPr sz="1125">
-                <a:solidFill>
-                  <a:srgbClr val="102A63"/>
-                </a:solidFill>
-              </a:rPr>
-              <a:t>{{ROADMAP_2_2}}</a:t>
-            </a:r>
-          </a:p>
-        </p:txBody>
-      </p:sp>
-      <p:sp>
-        <p:nvSpPr>
-          <p:cNvPr id="30" name="">
-            <a:extLst xmlns:a="http://schemas.openxmlformats.org/drawingml/2006/main">
-              <a:ext uri="{FF2B5EF4-FFF2-40B4-BE49-F238E27FC236}">
-                <a16:creationId xmlns:a16="http://schemas.microsoft.com/office/drawing/2014/main" id="{4E7ABE7A-FE0A-487D-A555-C72FB151393E}"/>
-              </a:ext>
-            </a:extLst>
-          </p:cNvPr>
-          <p:cNvSpPr>
-            <a:spLocks xmlns:a="http://schemas.openxmlformats.org/drawingml/2006/main" noGrp="1"/>
-          </p:cNvSpPr>
-          <p:nvPr/>
-        </p:nvSpPr>
-        <p:spPr>
-          <a:xfrm xmlns:a="http://schemas.openxmlformats.org/drawingml/2006/main">
-            <a:off x="4286250" y="5162550"/>
-            <a:ext cx="3181350" cy="762000"/>
+                <a16:creationId xmlns:a16="http://schemas.microsoft.com/office/drawing/2014/main" id="{50CC5BE9-2623-49DB-9C29-076FC8EB5F7D}"/>
+              </a:ext>
+            </a:extLst>
+          </p:cNvPr>
+          <p:cNvSpPr>
+            <a:spLocks xmlns:a="http://schemas.openxmlformats.org/drawingml/2006/main" noGrp="1"/>
+          </p:cNvSpPr>
+          <p:nvPr/>
+        </p:nvSpPr>
+        <p:spPr>
+          <a:xfrm xmlns:a="http://schemas.openxmlformats.org/drawingml/2006/main">
+            <a:off x="9505950" y="1885950"/>
+            <a:ext cx="1524000" cy="990600"/>
           </a:xfrm>
           <a:prstGeom xmlns:a="http://schemas.openxmlformats.org/drawingml/2006/main" prst="roundRect">
             <a:avLst>
-              <a:gd name="adj" fmla="val 10000"/>
+              <a:gd name="adj" fmla="val 7692"/>
             </a:avLst>
           </a:prstGeom>
           <a:solidFill xmlns:a="http://schemas.openxmlformats.org/drawingml/2006/main">
-            <a:srgbClr val="EEF3FF"/>
+            <a:srgbClr val="FFFFFF"/>
           </a:solidFill>
           <a:ln xmlns:a="http://schemas.openxmlformats.org/drawingml/2006/main" w="9525">
             <a:solidFill>
@@ -5747,203 +5235,122 @@
       </p:sp>
       <p:sp>
         <p:nvSpPr>
-          <p:cNvPr id="31" name="">
-            <a:extLst xmlns:a="http://schemas.openxmlformats.org/drawingml/2006/main">
-              <a:ext uri="{FF2B5EF4-FFF2-40B4-BE49-F238E27FC236}">
-                <a16:creationId xmlns:a16="http://schemas.microsoft.com/office/drawing/2014/main" id="{D232EDF3-6F9F-46B0-B8C1-FFA7A0A6189E}"/>
-              </a:ext>
-            </a:extLst>
-          </p:cNvPr>
-          <p:cNvSpPr>
-            <a:spLocks xmlns:a="http://schemas.openxmlformats.org/drawingml/2006/main" noGrp="1"/>
-          </p:cNvSpPr>
-          <p:nvPr/>
-        </p:nvSpPr>
-        <p:spPr>
-          <a:xfrm xmlns:a="http://schemas.openxmlformats.org/drawingml/2006/main">
-            <a:off x="4438650" y="5286375"/>
-            <a:ext cx="2876550" cy="171450"/>
-          </a:xfrm>
-          <a:prstGeom xmlns:a="http://schemas.openxmlformats.org/drawingml/2006/main" prst="rect">
-            <a:avLst/>
-          </a:prstGeom>
-          <a:noFill xmlns:a="http://schemas.openxmlformats.org/drawingml/2006/main"/>
-          <a:ln xmlns:a="http://schemas.openxmlformats.org/drawingml/2006/main" w="0">
-            <a:noFill/>
-            <a:prstDash val="solid"/>
-          </a:ln>
-        </p:spPr>
-        <p:txBody>
-          <a:bodyPr xmlns:a="http://schemas.openxmlformats.org/drawingml/2006/main"/>
-          <a:lstStyle xmlns:a="http://schemas.openxmlformats.org/drawingml/2006/main"/>
-          <a:p xmlns:a="http://schemas.openxmlformats.org/drawingml/2006/main">
-            <a:pPr>
+          <p:cNvPr id="20" name="">
+            <a:extLst xmlns:a="http://schemas.openxmlformats.org/drawingml/2006/main">
+              <a:ext uri="{FF2B5EF4-FFF2-40B4-BE49-F238E27FC236}">
+                <a16:creationId xmlns:a16="http://schemas.microsoft.com/office/drawing/2014/main" id="{B98FF158-7221-4864-9B7D-9C51D3337803}"/>
+              </a:ext>
+            </a:extLst>
+          </p:cNvPr>
+          <p:cNvSpPr>
+            <a:spLocks xmlns:a="http://schemas.openxmlformats.org/drawingml/2006/main" noGrp="1"/>
+          </p:cNvSpPr>
+          <p:nvPr/>
+        </p:nvSpPr>
+        <p:spPr>
+          <a:xfrm xmlns:a="http://schemas.openxmlformats.org/drawingml/2006/main">
+            <a:off x="9620250" y="1981200"/>
+            <a:ext cx="1295400" cy="171450"/>
+          </a:xfrm>
+          <a:prstGeom xmlns:a="http://schemas.openxmlformats.org/drawingml/2006/main" prst="rect">
+            <a:avLst/>
+          </a:prstGeom>
+          <a:noFill xmlns:a="http://schemas.openxmlformats.org/drawingml/2006/main"/>
+          <a:ln xmlns:a="http://schemas.openxmlformats.org/drawingml/2006/main" w="0">
+            <a:noFill/>
+            <a:prstDash val="solid"/>
+          </a:ln>
+        </p:spPr>
+        <p:txBody>
+          <a:bodyPr xmlns:a="http://schemas.openxmlformats.org/drawingml/2006/main"/>
+          <a:lstStyle xmlns:a="http://schemas.openxmlformats.org/drawingml/2006/main"/>
+          <a:p xmlns:a="http://schemas.openxmlformats.org/drawingml/2006/main">
+            <a:pPr algn="ctr">
+              <a:defRPr sz="675" b="1">
+                <a:solidFill>
+                  <a:srgbClr val="2048A8"/>
+                </a:solidFill>
+              </a:defRPr>
+            </a:pPr>
+            <a:r>
+              <a:rPr sz="675" b="1">
+                <a:solidFill>
+                  <a:srgbClr val="2048A8"/>
+                </a:solidFill>
+              </a:rPr>
+              <a:t>РЕЗУЛЬТАТ</a:t>
+            </a:r>
+          </a:p>
+        </p:txBody>
+      </p:sp>
+      <p:sp>
+        <p:nvSpPr>
+          <p:cNvPr id="21" name="">
+            <a:extLst xmlns:a="http://schemas.openxmlformats.org/drawingml/2006/main">
+              <a:ext uri="{FF2B5EF4-FFF2-40B4-BE49-F238E27FC236}">
+                <a16:creationId xmlns:a16="http://schemas.microsoft.com/office/drawing/2014/main" id="{22946D49-0151-4977-A166-B9CEB538D3E5}"/>
+              </a:ext>
+            </a:extLst>
+          </p:cNvPr>
+          <p:cNvSpPr>
+            <a:spLocks xmlns:a="http://schemas.openxmlformats.org/drawingml/2006/main" noGrp="1"/>
+          </p:cNvSpPr>
+          <p:nvPr/>
+        </p:nvSpPr>
+        <p:spPr>
+          <a:xfrm xmlns:a="http://schemas.openxmlformats.org/drawingml/2006/main">
+            <a:off x="9620250" y="2190750"/>
+            <a:ext cx="1295400" cy="609600"/>
+          </a:xfrm>
+          <a:prstGeom xmlns:a="http://schemas.openxmlformats.org/drawingml/2006/main" prst="rect">
+            <a:avLst/>
+          </a:prstGeom>
+          <a:noFill xmlns:a="http://schemas.openxmlformats.org/drawingml/2006/main"/>
+          <a:ln xmlns:a="http://schemas.openxmlformats.org/drawingml/2006/main" w="0">
+            <a:noFill/>
+            <a:prstDash val="solid"/>
+          </a:ln>
+        </p:spPr>
+        <p:txBody>
+          <a:bodyPr xmlns:a="http://schemas.openxmlformats.org/drawingml/2006/main"/>
+          <a:lstStyle xmlns:a="http://schemas.openxmlformats.org/drawingml/2006/main"/>
+          <a:p xmlns:a="http://schemas.openxmlformats.org/drawingml/2006/main">
+            <a:pPr algn="ctr">
               <a:defRPr sz="750" b="1">
                 <a:solidFill>
-                  <a:srgbClr val="2048A8"/>
+                  <a:srgbClr val="102A63"/>
                 </a:solidFill>
               </a:defRPr>
             </a:pPr>
             <a:r>
               <a:rPr sz="750" b="1">
                 <a:solidFill>
-                  <a:srgbClr val="2048A8"/>
-                </a:solidFill>
-              </a:rPr>
-              <a:t>ЧТО ДАСТ ЭТАП</a:t>
-            </a:r>
-          </a:p>
-        </p:txBody>
-      </p:sp>
-      <p:sp>
-        <p:nvSpPr>
-          <p:cNvPr id="32" name="">
-            <a:extLst xmlns:a="http://schemas.openxmlformats.org/drawingml/2006/main">
-              <a:ext uri="{FF2B5EF4-FFF2-40B4-BE49-F238E27FC236}">
-                <a16:creationId xmlns:a16="http://schemas.microsoft.com/office/drawing/2014/main" id="{3EFC5D15-6F9D-489C-AACC-9BACE33E02F0}"/>
-              </a:ext>
-            </a:extLst>
-          </p:cNvPr>
-          <p:cNvSpPr>
-            <a:spLocks xmlns:a="http://schemas.openxmlformats.org/drawingml/2006/main" noGrp="1"/>
-          </p:cNvSpPr>
-          <p:nvPr/>
-        </p:nvSpPr>
-        <p:spPr>
-          <a:xfrm xmlns:a="http://schemas.openxmlformats.org/drawingml/2006/main">
-            <a:off x="4438650" y="5514975"/>
-            <a:ext cx="2876550" cy="323850"/>
-          </a:xfrm>
-          <a:prstGeom xmlns:a="http://schemas.openxmlformats.org/drawingml/2006/main" prst="rect">
-            <a:avLst/>
-          </a:prstGeom>
-          <a:noFill xmlns:a="http://schemas.openxmlformats.org/drawingml/2006/main"/>
-          <a:ln xmlns:a="http://schemas.openxmlformats.org/drawingml/2006/main" w="0">
-            <a:noFill/>
-            <a:prstDash val="solid"/>
-          </a:ln>
-        </p:spPr>
-        <p:txBody>
-          <a:bodyPr xmlns:a="http://schemas.openxmlformats.org/drawingml/2006/main"/>
-          <a:lstStyle xmlns:a="http://schemas.openxmlformats.org/drawingml/2006/main"/>
-          <a:p xmlns:a="http://schemas.openxmlformats.org/drawingml/2006/main">
-            <a:pPr>
-              <a:defRPr sz="975" b="1">
-                <a:solidFill>
-                  <a:srgbClr val="102A63"/>
-                </a:solidFill>
-              </a:defRPr>
-            </a:pPr>
-            <a:r>
-              <a:rPr sz="975" b="1">
-                <a:solidFill>
-                  <a:srgbClr val="102A63"/>
-                </a:solidFill>
-              </a:rPr>
-              <a:t>{{ROADMAP_2_RESULT}}</a:t>
-            </a:r>
-          </a:p>
-        </p:txBody>
-      </p:sp>
-      <p:sp>
-        <p:nvSpPr>
-          <p:cNvPr id="33" name="">
-            <a:extLst xmlns:a="http://schemas.openxmlformats.org/drawingml/2006/main">
-              <a:ext uri="{FF2B5EF4-FFF2-40B4-BE49-F238E27FC236}">
-                <a16:creationId xmlns:a16="http://schemas.microsoft.com/office/drawing/2014/main" id="{504BF13B-81F7-40CF-9679-EED290B7712D}"/>
-              </a:ext>
-            </a:extLst>
-          </p:cNvPr>
-          <p:cNvSpPr>
-            <a:spLocks xmlns:a="http://schemas.openxmlformats.org/drawingml/2006/main" noGrp="1"/>
-          </p:cNvSpPr>
-          <p:nvPr/>
-        </p:nvSpPr>
-        <p:spPr>
-          <a:xfrm xmlns:a="http://schemas.openxmlformats.org/drawingml/2006/main">
-            <a:off x="7705725" y="2628900"/>
-            <a:ext cx="9525" cy="3295650"/>
-          </a:xfrm>
-          <a:prstGeom xmlns:a="http://schemas.openxmlformats.org/drawingml/2006/main" prst="rect">
-            <a:avLst/>
-          </a:prstGeom>
-          <a:solidFill xmlns:a="http://schemas.openxmlformats.org/drawingml/2006/main">
-            <a:srgbClr val="D7E0F2"/>
-          </a:solidFill>
-          <a:ln xmlns:a="http://schemas.openxmlformats.org/drawingml/2006/main" w="0">
-            <a:noFill/>
-            <a:prstDash val="solid"/>
-          </a:ln>
-        </p:spPr>
-      </p:sp>
-      <p:sp>
-        <p:nvSpPr>
-          <p:cNvPr id="34" name="">
-            <a:extLst xmlns:a="http://schemas.openxmlformats.org/drawingml/2006/main">
-              <a:ext uri="{FF2B5EF4-FFF2-40B4-BE49-F238E27FC236}">
-                <a16:creationId xmlns:a16="http://schemas.microsoft.com/office/drawing/2014/main" id="{12D616CF-019B-48EC-B351-CB969B206595}"/>
-              </a:ext>
-            </a:extLst>
-          </p:cNvPr>
-          <p:cNvSpPr>
-            <a:spLocks xmlns:a="http://schemas.openxmlformats.org/drawingml/2006/main" noGrp="1"/>
-          </p:cNvSpPr>
-          <p:nvPr/>
-        </p:nvSpPr>
-        <p:spPr>
-          <a:xfrm xmlns:a="http://schemas.openxmlformats.org/drawingml/2006/main">
-            <a:off x="7829550" y="1752600"/>
-            <a:ext cx="3371850" cy="266700"/>
-          </a:xfrm>
-          <a:prstGeom xmlns:a="http://schemas.openxmlformats.org/drawingml/2006/main" prst="rect">
-            <a:avLst/>
-          </a:prstGeom>
-          <a:noFill xmlns:a="http://schemas.openxmlformats.org/drawingml/2006/main"/>
-          <a:ln xmlns:a="http://schemas.openxmlformats.org/drawingml/2006/main" w="0">
-            <a:noFill/>
-            <a:prstDash val="solid"/>
-          </a:ln>
-        </p:spPr>
-        <p:txBody>
-          <a:bodyPr xmlns:a="http://schemas.openxmlformats.org/drawingml/2006/main"/>
-          <a:lstStyle xmlns:a="http://schemas.openxmlformats.org/drawingml/2006/main"/>
-          <a:p xmlns:a="http://schemas.openxmlformats.org/drawingml/2006/main">
-            <a:pPr algn="ctr">
-              <a:defRPr sz="1275" b="1">
-                <a:solidFill>
-                  <a:srgbClr val="102A63"/>
-                </a:solidFill>
-              </a:defRPr>
-            </a:pPr>
-            <a:r>
-              <a:rPr sz="1275" b="1">
-                <a:solidFill>
-                  <a:srgbClr val="102A63"/>
-                </a:solidFill>
-              </a:rPr>
-              <a:t>61–90 дней</a:t>
-            </a:r>
-          </a:p>
-        </p:txBody>
-      </p:sp>
-      <p:sp>
-        <p:nvSpPr>
-          <p:cNvPr id="35" name="">
-            <a:extLst xmlns:a="http://schemas.openxmlformats.org/drawingml/2006/main">
-              <a:ext uri="{FF2B5EF4-FFF2-40B4-BE49-F238E27FC236}">
-                <a16:creationId xmlns:a16="http://schemas.microsoft.com/office/drawing/2014/main" id="{E1A7F4D3-E0BF-4202-AA93-5FD654B63090}"/>
-              </a:ext>
-            </a:extLst>
-          </p:cNvPr>
-          <p:cNvSpPr>
-            <a:spLocks xmlns:a="http://schemas.openxmlformats.org/drawingml/2006/main" noGrp="1"/>
-          </p:cNvSpPr>
-          <p:nvPr/>
-        </p:nvSpPr>
-        <p:spPr>
-          <a:xfrm xmlns:a="http://schemas.openxmlformats.org/drawingml/2006/main">
-            <a:off x="9267825" y="1924050"/>
-            <a:ext cx="495300" cy="495300"/>
+                  <a:srgbClr val="102A63"/>
+                </a:solidFill>
+              </a:rPr>
+              <a:t>{{ROADMAP_1_RESULT}}</a:t>
+            </a:r>
+          </a:p>
+        </p:txBody>
+      </p:sp>
+      <p:sp>
+        <p:nvSpPr>
+          <p:cNvPr id="22" name="">
+            <a:extLst xmlns:a="http://schemas.openxmlformats.org/drawingml/2006/main">
+              <a:ext uri="{FF2B5EF4-FFF2-40B4-BE49-F238E27FC236}">
+                <a16:creationId xmlns:a16="http://schemas.microsoft.com/office/drawing/2014/main" id="{22AED064-315C-4DB3-87A1-7956529CDA8F}"/>
+              </a:ext>
+            </a:extLst>
+          </p:cNvPr>
+          <p:cNvSpPr>
+            <a:spLocks xmlns:a="http://schemas.openxmlformats.org/drawingml/2006/main" noGrp="1"/>
+          </p:cNvSpPr>
+          <p:nvPr/>
+        </p:nvSpPr>
+        <p:spPr>
+          <a:xfrm xmlns:a="http://schemas.openxmlformats.org/drawingml/2006/main">
+            <a:off x="609600" y="3581400"/>
+            <a:ext cx="514350" cy="514350"/>
           </a:xfrm>
           <a:prstGeom xmlns:a="http://schemas.openxmlformats.org/drawingml/2006/main" prst="ellipse">
             <a:avLst/>
@@ -5959,22 +5366,22 @@
       </p:sp>
       <p:sp>
         <p:nvSpPr>
-          <p:cNvPr id="36" name="">
-            <a:extLst xmlns:a="http://schemas.openxmlformats.org/drawingml/2006/main">
-              <a:ext uri="{FF2B5EF4-FFF2-40B4-BE49-F238E27FC236}">
-                <a16:creationId xmlns:a16="http://schemas.microsoft.com/office/drawing/2014/main" id="{567623E7-C177-41B7-88C4-34589200349C}"/>
-              </a:ext>
-            </a:extLst>
-          </p:cNvPr>
-          <p:cNvSpPr>
-            <a:spLocks xmlns:a="http://schemas.openxmlformats.org/drawingml/2006/main" noGrp="1"/>
-          </p:cNvSpPr>
-          <p:nvPr/>
-        </p:nvSpPr>
-        <p:spPr>
-          <a:xfrm xmlns:a="http://schemas.openxmlformats.org/drawingml/2006/main">
-            <a:off x="9353550" y="2028825"/>
-            <a:ext cx="323850" cy="247650"/>
+          <p:cNvPr id="23" name="">
+            <a:extLst xmlns:a="http://schemas.openxmlformats.org/drawingml/2006/main">
+              <a:ext uri="{FF2B5EF4-FFF2-40B4-BE49-F238E27FC236}">
+                <a16:creationId xmlns:a16="http://schemas.microsoft.com/office/drawing/2014/main" id="{599B698E-96AF-4372-BA8E-F680B4A8FF54}"/>
+              </a:ext>
+            </a:extLst>
+          </p:cNvPr>
+          <p:cNvSpPr>
+            <a:spLocks xmlns:a="http://schemas.openxmlformats.org/drawingml/2006/main" noGrp="1"/>
+          </p:cNvSpPr>
+          <p:nvPr/>
+        </p:nvSpPr>
+        <p:spPr>
+          <a:xfrm xmlns:a="http://schemas.openxmlformats.org/drawingml/2006/main">
+            <a:off x="704850" y="3705225"/>
+            <a:ext cx="323850" cy="228600"/>
           </a:xfrm>
           <a:prstGeom xmlns:a="http://schemas.openxmlformats.org/drawingml/2006/main" prst="rect">
             <a:avLst/>
@@ -6002,287 +5409,37 @@
                   <a:srgbClr val="FFFFFF"/>
                 </a:solidFill>
               </a:rPr>
-              <a:t>3</a:t>
-            </a:r>
-          </a:p>
-        </p:txBody>
-      </p:sp>
-      <p:sp>
-        <p:nvSpPr>
-          <p:cNvPr id="37" name="">
-            <a:extLst xmlns:a="http://schemas.openxmlformats.org/drawingml/2006/main">
-              <a:ext uri="{FF2B5EF4-FFF2-40B4-BE49-F238E27FC236}">
-                <a16:creationId xmlns:a16="http://schemas.microsoft.com/office/drawing/2014/main" id="{D99C1B22-88E8-418D-98DE-F07E95EC91A7}"/>
-              </a:ext>
-            </a:extLst>
-          </p:cNvPr>
-          <p:cNvSpPr>
-            <a:spLocks xmlns:a="http://schemas.openxmlformats.org/drawingml/2006/main" noGrp="1"/>
-          </p:cNvSpPr>
-          <p:nvPr/>
-        </p:nvSpPr>
-        <p:spPr>
-          <a:xfrm xmlns:a="http://schemas.openxmlformats.org/drawingml/2006/main">
-            <a:off x="7924800" y="2628900"/>
-            <a:ext cx="3181350" cy="438150"/>
-          </a:xfrm>
-          <a:prstGeom xmlns:a="http://schemas.openxmlformats.org/drawingml/2006/main" prst="rect">
-            <a:avLst/>
-          </a:prstGeom>
-          <a:noFill xmlns:a="http://schemas.openxmlformats.org/drawingml/2006/main"/>
-          <a:ln xmlns:a="http://schemas.openxmlformats.org/drawingml/2006/main" w="0">
-            <a:noFill/>
-            <a:prstDash val="solid"/>
-          </a:ln>
-        </p:spPr>
-        <p:txBody>
-          <a:bodyPr xmlns:a="http://schemas.openxmlformats.org/drawingml/2006/main"/>
-          <a:lstStyle xmlns:a="http://schemas.openxmlformats.org/drawingml/2006/main"/>
-          <a:p xmlns:a="http://schemas.openxmlformats.org/drawingml/2006/main">
-            <a:pPr algn="ctr">
-              <a:defRPr sz="975" b="1">
-                <a:solidFill>
-                  <a:srgbClr val="2048A8"/>
-                </a:solidFill>
-              </a:defRPr>
-            </a:pPr>
-            <a:r>
-              <a:rPr sz="975" b="1">
-                <a:solidFill>
-                  <a:srgbClr val="2048A8"/>
-                </a:solidFill>
-              </a:rPr>
-              <a:t>МАСШТАБИРОВАНИЕ И КОНТРОЛЬ</a:t>
-            </a:r>
-          </a:p>
-        </p:txBody>
-      </p:sp>
-      <p:sp>
-        <p:nvSpPr>
-          <p:cNvPr id="38" name="">
-            <a:extLst xmlns:a="http://schemas.openxmlformats.org/drawingml/2006/main">
-              <a:ext uri="{FF2B5EF4-FFF2-40B4-BE49-F238E27FC236}">
-                <a16:creationId xmlns:a16="http://schemas.microsoft.com/office/drawing/2014/main" id="{9E7415B1-98D0-4804-9C49-9E6318CC5F35}"/>
-              </a:ext>
-            </a:extLst>
-          </p:cNvPr>
-          <p:cNvSpPr>
-            <a:spLocks xmlns:a="http://schemas.openxmlformats.org/drawingml/2006/main" noGrp="1"/>
-          </p:cNvSpPr>
-          <p:nvPr/>
-        </p:nvSpPr>
-        <p:spPr>
-          <a:xfrm xmlns:a="http://schemas.openxmlformats.org/drawingml/2006/main">
-            <a:off x="7924800" y="3257550"/>
-            <a:ext cx="323850" cy="228600"/>
-          </a:xfrm>
-          <a:prstGeom xmlns:a="http://schemas.openxmlformats.org/drawingml/2006/main" prst="rect">
-            <a:avLst/>
-          </a:prstGeom>
-          <a:noFill xmlns:a="http://schemas.openxmlformats.org/drawingml/2006/main"/>
-          <a:ln xmlns:a="http://schemas.openxmlformats.org/drawingml/2006/main" w="0">
-            <a:noFill/>
-            <a:prstDash val="solid"/>
-          </a:ln>
-        </p:spPr>
-        <p:txBody>
-          <a:bodyPr xmlns:a="http://schemas.openxmlformats.org/drawingml/2006/main"/>
-          <a:lstStyle xmlns:a="http://schemas.openxmlformats.org/drawingml/2006/main"/>
-          <a:p xmlns:a="http://schemas.openxmlformats.org/drawingml/2006/main">
-            <a:pPr>
-              <a:defRPr sz="975" b="1">
-                <a:solidFill>
-                  <a:srgbClr val="2048A8"/>
-                </a:solidFill>
-              </a:defRPr>
-            </a:pPr>
-            <a:r>
-              <a:rPr sz="975" b="1">
-                <a:solidFill>
-                  <a:srgbClr val="2048A8"/>
-                </a:solidFill>
-              </a:rPr>
-              <a:t>01</a:t>
-            </a:r>
-          </a:p>
-        </p:txBody>
-      </p:sp>
-      <p:sp>
-        <p:nvSpPr>
-          <p:cNvPr id="39" name="">
-            <a:extLst xmlns:a="http://schemas.openxmlformats.org/drawingml/2006/main">
-              <a:ext uri="{FF2B5EF4-FFF2-40B4-BE49-F238E27FC236}">
-                <a16:creationId xmlns:a16="http://schemas.microsoft.com/office/drawing/2014/main" id="{A3691976-A3F8-47FD-AB1D-353230BDD302}"/>
-              </a:ext>
-            </a:extLst>
-          </p:cNvPr>
-          <p:cNvSpPr>
-            <a:spLocks xmlns:a="http://schemas.openxmlformats.org/drawingml/2006/main" noGrp="1"/>
-          </p:cNvSpPr>
-          <p:nvPr/>
-        </p:nvSpPr>
-        <p:spPr>
-          <a:xfrm xmlns:a="http://schemas.openxmlformats.org/drawingml/2006/main">
-            <a:off x="8324850" y="3200400"/>
-            <a:ext cx="2781300" cy="819150"/>
-          </a:xfrm>
-          <a:prstGeom xmlns:a="http://schemas.openxmlformats.org/drawingml/2006/main" prst="rect">
-            <a:avLst/>
-          </a:prstGeom>
-          <a:noFill xmlns:a="http://schemas.openxmlformats.org/drawingml/2006/main"/>
-          <a:ln xmlns:a="http://schemas.openxmlformats.org/drawingml/2006/main" w="0">
-            <a:noFill/>
-            <a:prstDash val="solid"/>
-          </a:ln>
-        </p:spPr>
-        <p:txBody>
-          <a:bodyPr xmlns:a="http://schemas.openxmlformats.org/drawingml/2006/main"/>
-          <a:lstStyle xmlns:a="http://schemas.openxmlformats.org/drawingml/2006/main"/>
-          <a:p xmlns:a="http://schemas.openxmlformats.org/drawingml/2006/main">
-            <a:pPr>
-              <a:defRPr sz="1125">
-                <a:solidFill>
-                  <a:srgbClr val="102A63"/>
-                </a:solidFill>
-              </a:defRPr>
-            </a:pPr>
-            <a:r>
-              <a:rPr sz="1125">
-                <a:solidFill>
-                  <a:srgbClr val="102A63"/>
-                </a:solidFill>
-              </a:rPr>
-              <a:t>{{ROADMAP_3_1}}</a:t>
-            </a:r>
-          </a:p>
-        </p:txBody>
-      </p:sp>
-      <p:sp>
-        <p:nvSpPr>
-          <p:cNvPr id="40" name="">
-            <a:extLst xmlns:a="http://schemas.openxmlformats.org/drawingml/2006/main">
-              <a:ext uri="{FF2B5EF4-FFF2-40B4-BE49-F238E27FC236}">
-                <a16:creationId xmlns:a16="http://schemas.microsoft.com/office/drawing/2014/main" id="{7A1120A4-BCCD-4963-A3BC-BCA5B7AAA551}"/>
-              </a:ext>
-            </a:extLst>
-          </p:cNvPr>
-          <p:cNvSpPr>
-            <a:spLocks xmlns:a="http://schemas.openxmlformats.org/drawingml/2006/main" noGrp="1"/>
-          </p:cNvSpPr>
-          <p:nvPr/>
-        </p:nvSpPr>
-        <p:spPr>
-          <a:xfrm xmlns:a="http://schemas.openxmlformats.org/drawingml/2006/main">
-            <a:off x="7924800" y="4171950"/>
-            <a:ext cx="323850" cy="228600"/>
-          </a:xfrm>
-          <a:prstGeom xmlns:a="http://schemas.openxmlformats.org/drawingml/2006/main" prst="rect">
-            <a:avLst/>
-          </a:prstGeom>
-          <a:noFill xmlns:a="http://schemas.openxmlformats.org/drawingml/2006/main"/>
-          <a:ln xmlns:a="http://schemas.openxmlformats.org/drawingml/2006/main" w="0">
-            <a:noFill/>
-            <a:prstDash val="solid"/>
-          </a:ln>
-        </p:spPr>
-        <p:txBody>
-          <a:bodyPr xmlns:a="http://schemas.openxmlformats.org/drawingml/2006/main"/>
-          <a:lstStyle xmlns:a="http://schemas.openxmlformats.org/drawingml/2006/main"/>
-          <a:p xmlns:a="http://schemas.openxmlformats.org/drawingml/2006/main">
-            <a:pPr>
-              <a:defRPr sz="975" b="1">
-                <a:solidFill>
-                  <a:srgbClr val="2048A8"/>
-                </a:solidFill>
-              </a:defRPr>
-            </a:pPr>
-            <a:r>
-              <a:rPr sz="975" b="1">
-                <a:solidFill>
-                  <a:srgbClr val="2048A8"/>
-                </a:solidFill>
-              </a:rPr>
-              <a:t>02</a:t>
-            </a:r>
-          </a:p>
-        </p:txBody>
-      </p:sp>
-      <p:sp>
-        <p:nvSpPr>
-          <p:cNvPr id="41" name="">
-            <a:extLst xmlns:a="http://schemas.openxmlformats.org/drawingml/2006/main">
-              <a:ext uri="{FF2B5EF4-FFF2-40B4-BE49-F238E27FC236}">
-                <a16:creationId xmlns:a16="http://schemas.microsoft.com/office/drawing/2014/main" id="{41BFA2EC-3765-4E65-B1D9-50E5A34E7755}"/>
-              </a:ext>
-            </a:extLst>
-          </p:cNvPr>
-          <p:cNvSpPr>
-            <a:spLocks xmlns:a="http://schemas.openxmlformats.org/drawingml/2006/main" noGrp="1"/>
-          </p:cNvSpPr>
-          <p:nvPr/>
-        </p:nvSpPr>
-        <p:spPr>
-          <a:xfrm xmlns:a="http://schemas.openxmlformats.org/drawingml/2006/main">
-            <a:off x="8324850" y="4114800"/>
-            <a:ext cx="2781300" cy="819150"/>
-          </a:xfrm>
-          <a:prstGeom xmlns:a="http://schemas.openxmlformats.org/drawingml/2006/main" prst="rect">
-            <a:avLst/>
-          </a:prstGeom>
-          <a:noFill xmlns:a="http://schemas.openxmlformats.org/drawingml/2006/main"/>
-          <a:ln xmlns:a="http://schemas.openxmlformats.org/drawingml/2006/main" w="0">
-            <a:noFill/>
-            <a:prstDash val="solid"/>
-          </a:ln>
-        </p:spPr>
-        <p:txBody>
-          <a:bodyPr xmlns:a="http://schemas.openxmlformats.org/drawingml/2006/main"/>
-          <a:lstStyle xmlns:a="http://schemas.openxmlformats.org/drawingml/2006/main"/>
-          <a:p xmlns:a="http://schemas.openxmlformats.org/drawingml/2006/main">
-            <a:pPr>
-              <a:defRPr sz="1125">
-                <a:solidFill>
-                  <a:srgbClr val="102A63"/>
-                </a:solidFill>
-              </a:defRPr>
-            </a:pPr>
-            <a:r>
-              <a:rPr sz="1125">
-                <a:solidFill>
-                  <a:srgbClr val="102A63"/>
-                </a:solidFill>
-              </a:rPr>
-              <a:t>{{ROADMAP_3_2}}</a:t>
-            </a:r>
-          </a:p>
-        </p:txBody>
-      </p:sp>
-      <p:sp>
-        <p:nvSpPr>
-          <p:cNvPr id="42" name="">
-            <a:extLst xmlns:a="http://schemas.openxmlformats.org/drawingml/2006/main">
-              <a:ext uri="{FF2B5EF4-FFF2-40B4-BE49-F238E27FC236}">
-                <a16:creationId xmlns:a16="http://schemas.microsoft.com/office/drawing/2014/main" id="{CA451643-AFFB-4BE9-8225-785007FCAAA8}"/>
-              </a:ext>
-            </a:extLst>
-          </p:cNvPr>
-          <p:cNvSpPr>
-            <a:spLocks xmlns:a="http://schemas.openxmlformats.org/drawingml/2006/main" noGrp="1"/>
-          </p:cNvSpPr>
-          <p:nvPr/>
-        </p:nvSpPr>
-        <p:spPr>
-          <a:xfrm xmlns:a="http://schemas.openxmlformats.org/drawingml/2006/main">
-            <a:off x="7924800" y="5162550"/>
-            <a:ext cx="3181350" cy="762000"/>
+              <a:t>2</a:t>
+            </a:r>
+          </a:p>
+        </p:txBody>
+      </p:sp>
+      <p:sp>
+        <p:nvSpPr>
+          <p:cNvPr id="24" name="">
+            <a:extLst xmlns:a="http://schemas.openxmlformats.org/drawingml/2006/main">
+              <a:ext uri="{FF2B5EF4-FFF2-40B4-BE49-F238E27FC236}">
+                <a16:creationId xmlns:a16="http://schemas.microsoft.com/office/drawing/2014/main" id="{A74700DF-5469-4392-8216-DB49F999D2A0}"/>
+              </a:ext>
+            </a:extLst>
+          </p:cNvPr>
+          <p:cNvSpPr>
+            <a:spLocks xmlns:a="http://schemas.openxmlformats.org/drawingml/2006/main" noGrp="1"/>
+          </p:cNvSpPr>
+          <p:nvPr/>
+        </p:nvSpPr>
+        <p:spPr>
+          <a:xfrm xmlns:a="http://schemas.openxmlformats.org/drawingml/2006/main">
+            <a:off x="1390650" y="3219450"/>
+            <a:ext cx="9810750" cy="1257300"/>
           </a:xfrm>
           <a:prstGeom xmlns:a="http://schemas.openxmlformats.org/drawingml/2006/main" prst="roundRect">
             <a:avLst>
-              <a:gd name="adj" fmla="val 10000"/>
+              <a:gd name="adj" fmla="val 6061"/>
             </a:avLst>
           </a:prstGeom>
           <a:solidFill xmlns:a="http://schemas.openxmlformats.org/drawingml/2006/main">
-            <a:srgbClr val="EEF3FF"/>
+            <a:srgbClr val="FFFFFF"/>
           </a:solidFill>
           <a:ln xmlns:a="http://schemas.openxmlformats.org/drawingml/2006/main" w="9525">
             <a:solidFill>
@@ -6294,95 +5451,981 @@
       </p:sp>
       <p:sp>
         <p:nvSpPr>
+          <p:cNvPr id="25" name="">
+            <a:extLst xmlns:a="http://schemas.openxmlformats.org/drawingml/2006/main">
+              <a:ext uri="{FF2B5EF4-FFF2-40B4-BE49-F238E27FC236}">
+                <a16:creationId xmlns:a16="http://schemas.microsoft.com/office/drawing/2014/main" id="{C1C6BCF3-DCB9-49A4-8491-A0A9CE90E074}"/>
+              </a:ext>
+            </a:extLst>
+          </p:cNvPr>
+          <p:cNvSpPr>
+            <a:spLocks xmlns:a="http://schemas.openxmlformats.org/drawingml/2006/main" noGrp="1"/>
+          </p:cNvSpPr>
+          <p:nvPr/>
+        </p:nvSpPr>
+        <p:spPr>
+          <a:xfrm xmlns:a="http://schemas.openxmlformats.org/drawingml/2006/main">
+            <a:off x="1619250" y="3371850"/>
+            <a:ext cx="1409700" cy="228600"/>
+          </a:xfrm>
+          <a:prstGeom xmlns:a="http://schemas.openxmlformats.org/drawingml/2006/main" prst="rect">
+            <a:avLst/>
+          </a:prstGeom>
+          <a:noFill xmlns:a="http://schemas.openxmlformats.org/drawingml/2006/main"/>
+          <a:ln xmlns:a="http://schemas.openxmlformats.org/drawingml/2006/main" w="0">
+            <a:noFill/>
+            <a:prstDash val="solid"/>
+          </a:ln>
+        </p:spPr>
+        <p:txBody>
+          <a:bodyPr xmlns:a="http://schemas.openxmlformats.org/drawingml/2006/main"/>
+          <a:lstStyle xmlns:a="http://schemas.openxmlformats.org/drawingml/2006/main"/>
+          <a:p xmlns:a="http://schemas.openxmlformats.org/drawingml/2006/main">
+            <a:pPr>
+              <a:defRPr sz="1125" b="1">
+                <a:solidFill>
+                  <a:srgbClr val="2048A8"/>
+                </a:solidFill>
+              </a:defRPr>
+            </a:pPr>
+            <a:r>
+              <a:rPr sz="1125" b="1">
+                <a:solidFill>
+                  <a:srgbClr val="2048A8"/>
+                </a:solidFill>
+              </a:rPr>
+              <a:t>31–60 дней</a:t>
+            </a:r>
+          </a:p>
+        </p:txBody>
+      </p:sp>
+      <p:sp>
+        <p:nvSpPr>
+          <p:cNvPr id="26" name="">
+            <a:extLst xmlns:a="http://schemas.openxmlformats.org/drawingml/2006/main">
+              <a:ext uri="{FF2B5EF4-FFF2-40B4-BE49-F238E27FC236}">
+                <a16:creationId xmlns:a16="http://schemas.microsoft.com/office/drawing/2014/main" id="{02D680B4-08A1-4179-8F0D-375CEA3A17A0}"/>
+              </a:ext>
+            </a:extLst>
+          </p:cNvPr>
+          <p:cNvSpPr>
+            <a:spLocks xmlns:a="http://schemas.openxmlformats.org/drawingml/2006/main" noGrp="1"/>
+          </p:cNvSpPr>
+          <p:nvPr/>
+        </p:nvSpPr>
+        <p:spPr>
+          <a:xfrm xmlns:a="http://schemas.openxmlformats.org/drawingml/2006/main">
+            <a:off x="1619250" y="3657600"/>
+            <a:ext cx="2381250" cy="495300"/>
+          </a:xfrm>
+          <a:prstGeom xmlns:a="http://schemas.openxmlformats.org/drawingml/2006/main" prst="rect">
+            <a:avLst/>
+          </a:prstGeom>
+          <a:noFill xmlns:a="http://schemas.openxmlformats.org/drawingml/2006/main"/>
+          <a:ln xmlns:a="http://schemas.openxmlformats.org/drawingml/2006/main" w="0">
+            <a:noFill/>
+            <a:prstDash val="solid"/>
+          </a:ln>
+        </p:spPr>
+        <p:txBody>
+          <a:bodyPr xmlns:a="http://schemas.openxmlformats.org/drawingml/2006/main"/>
+          <a:lstStyle xmlns:a="http://schemas.openxmlformats.org/drawingml/2006/main"/>
+          <a:p xmlns:a="http://schemas.openxmlformats.org/drawingml/2006/main">
+            <a:pPr>
+              <a:defRPr sz="1125" b="1">
+                <a:solidFill>
+                  <a:srgbClr val="102A63"/>
+                </a:solidFill>
+              </a:defRPr>
+            </a:pPr>
+            <a:r>
+              <a:rPr sz="1125" b="1">
+                <a:solidFill>
+                  <a:srgbClr val="102A63"/>
+                </a:solidFill>
+              </a:rPr>
+              <a:t>ПИЛОТЫ И РЕГЛАМЕНТЫ</a:t>
+            </a:r>
+          </a:p>
+        </p:txBody>
+      </p:sp>
+      <p:sp>
+        <p:nvSpPr>
+          <p:cNvPr id="27" name="">
+            <a:extLst xmlns:a="http://schemas.openxmlformats.org/drawingml/2006/main">
+              <a:ext uri="{FF2B5EF4-FFF2-40B4-BE49-F238E27FC236}">
+                <a16:creationId xmlns:a16="http://schemas.microsoft.com/office/drawing/2014/main" id="{FA8EDC71-1CF0-4D5B-8D38-0D88C23B8AD1}"/>
+              </a:ext>
+            </a:extLst>
+          </p:cNvPr>
+          <p:cNvSpPr>
+            <a:spLocks xmlns:a="http://schemas.openxmlformats.org/drawingml/2006/main" noGrp="1"/>
+          </p:cNvSpPr>
+          <p:nvPr/>
+        </p:nvSpPr>
+        <p:spPr>
+          <a:xfrm xmlns:a="http://schemas.openxmlformats.org/drawingml/2006/main">
+            <a:off x="4210050" y="3419475"/>
+            <a:ext cx="304800" cy="190500"/>
+          </a:xfrm>
+          <a:prstGeom xmlns:a="http://schemas.openxmlformats.org/drawingml/2006/main" prst="rect">
+            <a:avLst/>
+          </a:prstGeom>
+          <a:noFill xmlns:a="http://schemas.openxmlformats.org/drawingml/2006/main"/>
+          <a:ln xmlns:a="http://schemas.openxmlformats.org/drawingml/2006/main" w="0">
+            <a:noFill/>
+            <a:prstDash val="solid"/>
+          </a:ln>
+        </p:spPr>
+        <p:txBody>
+          <a:bodyPr xmlns:a="http://schemas.openxmlformats.org/drawingml/2006/main"/>
+          <a:lstStyle xmlns:a="http://schemas.openxmlformats.org/drawingml/2006/main"/>
+          <a:p xmlns:a="http://schemas.openxmlformats.org/drawingml/2006/main">
+            <a:pPr>
+              <a:defRPr sz="825" b="1">
+                <a:solidFill>
+                  <a:srgbClr val="2048A8"/>
+                </a:solidFill>
+              </a:defRPr>
+            </a:pPr>
+            <a:r>
+              <a:rPr sz="825" b="1">
+                <a:solidFill>
+                  <a:srgbClr val="2048A8"/>
+                </a:solidFill>
+              </a:rPr>
+              <a:t>01</a:t>
+            </a:r>
+          </a:p>
+        </p:txBody>
+      </p:sp>
+      <p:sp>
+        <p:nvSpPr>
+          <p:cNvPr id="28" name="">
+            <a:extLst xmlns:a="http://schemas.openxmlformats.org/drawingml/2006/main">
+              <a:ext uri="{FF2B5EF4-FFF2-40B4-BE49-F238E27FC236}">
+                <a16:creationId xmlns:a16="http://schemas.microsoft.com/office/drawing/2014/main" id="{728A9B48-1A06-411E-A6D2-1958DE903993}"/>
+              </a:ext>
+            </a:extLst>
+          </p:cNvPr>
+          <p:cNvSpPr>
+            <a:spLocks xmlns:a="http://schemas.openxmlformats.org/drawingml/2006/main" noGrp="1"/>
+          </p:cNvSpPr>
+          <p:nvPr/>
+        </p:nvSpPr>
+        <p:spPr>
+          <a:xfrm xmlns:a="http://schemas.openxmlformats.org/drawingml/2006/main">
+            <a:off x="4572000" y="3362325"/>
+            <a:ext cx="2362200" cy="895350"/>
+          </a:xfrm>
+          <a:prstGeom xmlns:a="http://schemas.openxmlformats.org/drawingml/2006/main" prst="rect">
+            <a:avLst/>
+          </a:prstGeom>
+          <a:noFill xmlns:a="http://schemas.openxmlformats.org/drawingml/2006/main"/>
+          <a:ln xmlns:a="http://schemas.openxmlformats.org/drawingml/2006/main" w="0">
+            <a:noFill/>
+            <a:prstDash val="solid"/>
+          </a:ln>
+        </p:spPr>
+        <p:txBody>
+          <a:bodyPr xmlns:a="http://schemas.openxmlformats.org/drawingml/2006/main"/>
+          <a:lstStyle xmlns:a="http://schemas.openxmlformats.org/drawingml/2006/main"/>
+          <a:p xmlns:a="http://schemas.openxmlformats.org/drawingml/2006/main">
+            <a:pPr>
+              <a:defRPr sz="975">
+                <a:solidFill>
+                  <a:srgbClr val="102A63"/>
+                </a:solidFill>
+              </a:defRPr>
+            </a:pPr>
+            <a:r>
+              <a:rPr sz="975">
+                <a:solidFill>
+                  <a:srgbClr val="102A63"/>
+                </a:solidFill>
+              </a:rPr>
+              <a:t>{{ROADMAP_2_1}}</a:t>
+            </a:r>
+          </a:p>
+        </p:txBody>
+      </p:sp>
+      <p:sp>
+        <p:nvSpPr>
+          <p:cNvPr id="29" name="">
+            <a:extLst xmlns:a="http://schemas.openxmlformats.org/drawingml/2006/main">
+              <a:ext uri="{FF2B5EF4-FFF2-40B4-BE49-F238E27FC236}">
+                <a16:creationId xmlns:a16="http://schemas.microsoft.com/office/drawing/2014/main" id="{19C8DDD3-5AFC-4CF9-B1EC-1F682F53BF97}"/>
+              </a:ext>
+            </a:extLst>
+          </p:cNvPr>
+          <p:cNvSpPr>
+            <a:spLocks xmlns:a="http://schemas.openxmlformats.org/drawingml/2006/main" noGrp="1"/>
+          </p:cNvSpPr>
+          <p:nvPr/>
+        </p:nvSpPr>
+        <p:spPr>
+          <a:xfrm xmlns:a="http://schemas.openxmlformats.org/drawingml/2006/main">
+            <a:off x="7124700" y="3419475"/>
+            <a:ext cx="304800" cy="190500"/>
+          </a:xfrm>
+          <a:prstGeom xmlns:a="http://schemas.openxmlformats.org/drawingml/2006/main" prst="rect">
+            <a:avLst/>
+          </a:prstGeom>
+          <a:noFill xmlns:a="http://schemas.openxmlformats.org/drawingml/2006/main"/>
+          <a:ln xmlns:a="http://schemas.openxmlformats.org/drawingml/2006/main" w="0">
+            <a:noFill/>
+            <a:prstDash val="solid"/>
+          </a:ln>
+        </p:spPr>
+        <p:txBody>
+          <a:bodyPr xmlns:a="http://schemas.openxmlformats.org/drawingml/2006/main"/>
+          <a:lstStyle xmlns:a="http://schemas.openxmlformats.org/drawingml/2006/main"/>
+          <a:p xmlns:a="http://schemas.openxmlformats.org/drawingml/2006/main">
+            <a:pPr>
+              <a:defRPr sz="825" b="1">
+                <a:solidFill>
+                  <a:srgbClr val="2048A8"/>
+                </a:solidFill>
+              </a:defRPr>
+            </a:pPr>
+            <a:r>
+              <a:rPr sz="825" b="1">
+                <a:solidFill>
+                  <a:srgbClr val="2048A8"/>
+                </a:solidFill>
+              </a:rPr>
+              <a:t>02</a:t>
+            </a:r>
+          </a:p>
+        </p:txBody>
+      </p:sp>
+      <p:sp>
+        <p:nvSpPr>
+          <p:cNvPr id="30" name="">
+            <a:extLst xmlns:a="http://schemas.openxmlformats.org/drawingml/2006/main">
+              <a:ext uri="{FF2B5EF4-FFF2-40B4-BE49-F238E27FC236}">
+                <a16:creationId xmlns:a16="http://schemas.microsoft.com/office/drawing/2014/main" id="{65895390-34A2-48D1-AE03-62F360DF91FE}"/>
+              </a:ext>
+            </a:extLst>
+          </p:cNvPr>
+          <p:cNvSpPr>
+            <a:spLocks xmlns:a="http://schemas.openxmlformats.org/drawingml/2006/main" noGrp="1"/>
+          </p:cNvSpPr>
+          <p:nvPr/>
+        </p:nvSpPr>
+        <p:spPr>
+          <a:xfrm xmlns:a="http://schemas.openxmlformats.org/drawingml/2006/main">
+            <a:off x="7486650" y="3362325"/>
+            <a:ext cx="1847850" cy="895350"/>
+          </a:xfrm>
+          <a:prstGeom xmlns:a="http://schemas.openxmlformats.org/drawingml/2006/main" prst="rect">
+            <a:avLst/>
+          </a:prstGeom>
+          <a:noFill xmlns:a="http://schemas.openxmlformats.org/drawingml/2006/main"/>
+          <a:ln xmlns:a="http://schemas.openxmlformats.org/drawingml/2006/main" w="0">
+            <a:noFill/>
+            <a:prstDash val="solid"/>
+          </a:ln>
+        </p:spPr>
+        <p:txBody>
+          <a:bodyPr xmlns:a="http://schemas.openxmlformats.org/drawingml/2006/main"/>
+          <a:lstStyle xmlns:a="http://schemas.openxmlformats.org/drawingml/2006/main"/>
+          <a:p xmlns:a="http://schemas.openxmlformats.org/drawingml/2006/main">
+            <a:pPr>
+              <a:defRPr sz="975">
+                <a:solidFill>
+                  <a:srgbClr val="102A63"/>
+                </a:solidFill>
+              </a:defRPr>
+            </a:pPr>
+            <a:r>
+              <a:rPr sz="975">
+                <a:solidFill>
+                  <a:srgbClr val="102A63"/>
+                </a:solidFill>
+              </a:rPr>
+              <a:t>{{ROADMAP_2_2}}</a:t>
+            </a:r>
+          </a:p>
+        </p:txBody>
+      </p:sp>
+      <p:sp>
+        <p:nvSpPr>
+          <p:cNvPr id="31" name="">
+            <a:extLst xmlns:a="http://schemas.openxmlformats.org/drawingml/2006/main">
+              <a:ext uri="{FF2B5EF4-FFF2-40B4-BE49-F238E27FC236}">
+                <a16:creationId xmlns:a16="http://schemas.microsoft.com/office/drawing/2014/main" id="{4E0F78E0-3655-4E8D-BB48-C5277BD86365}"/>
+              </a:ext>
+            </a:extLst>
+          </p:cNvPr>
+          <p:cNvSpPr>
+            <a:spLocks xmlns:a="http://schemas.openxmlformats.org/drawingml/2006/main" noGrp="1"/>
+          </p:cNvSpPr>
+          <p:nvPr/>
+        </p:nvSpPr>
+        <p:spPr>
+          <a:xfrm xmlns:a="http://schemas.openxmlformats.org/drawingml/2006/main">
+            <a:off x="9505950" y="3352800"/>
+            <a:ext cx="1524000" cy="990600"/>
+          </a:xfrm>
+          <a:prstGeom xmlns:a="http://schemas.openxmlformats.org/drawingml/2006/main" prst="roundRect">
+            <a:avLst>
+              <a:gd name="adj" fmla="val 7692"/>
+            </a:avLst>
+          </a:prstGeom>
+          <a:solidFill xmlns:a="http://schemas.openxmlformats.org/drawingml/2006/main">
+            <a:srgbClr val="FFFFFF"/>
+          </a:solidFill>
+          <a:ln xmlns:a="http://schemas.openxmlformats.org/drawingml/2006/main" w="9525">
+            <a:solidFill>
+              <a:srgbClr val="D7E0F2"/>
+            </a:solidFill>
+            <a:prstDash val="solid"/>
+          </a:ln>
+        </p:spPr>
+      </p:sp>
+      <p:sp>
+        <p:nvSpPr>
+          <p:cNvPr id="32" name="">
+            <a:extLst xmlns:a="http://schemas.openxmlformats.org/drawingml/2006/main">
+              <a:ext uri="{FF2B5EF4-FFF2-40B4-BE49-F238E27FC236}">
+                <a16:creationId xmlns:a16="http://schemas.microsoft.com/office/drawing/2014/main" id="{AEE0D45C-DD45-4DA5-BB0E-D92079B8409D}"/>
+              </a:ext>
+            </a:extLst>
+          </p:cNvPr>
+          <p:cNvSpPr>
+            <a:spLocks xmlns:a="http://schemas.openxmlformats.org/drawingml/2006/main" noGrp="1"/>
+          </p:cNvSpPr>
+          <p:nvPr/>
+        </p:nvSpPr>
+        <p:spPr>
+          <a:xfrm xmlns:a="http://schemas.openxmlformats.org/drawingml/2006/main">
+            <a:off x="9620250" y="3448050"/>
+            <a:ext cx="1295400" cy="171450"/>
+          </a:xfrm>
+          <a:prstGeom xmlns:a="http://schemas.openxmlformats.org/drawingml/2006/main" prst="rect">
+            <a:avLst/>
+          </a:prstGeom>
+          <a:noFill xmlns:a="http://schemas.openxmlformats.org/drawingml/2006/main"/>
+          <a:ln xmlns:a="http://schemas.openxmlformats.org/drawingml/2006/main" w="0">
+            <a:noFill/>
+            <a:prstDash val="solid"/>
+          </a:ln>
+        </p:spPr>
+        <p:txBody>
+          <a:bodyPr xmlns:a="http://schemas.openxmlformats.org/drawingml/2006/main"/>
+          <a:lstStyle xmlns:a="http://schemas.openxmlformats.org/drawingml/2006/main"/>
+          <a:p xmlns:a="http://schemas.openxmlformats.org/drawingml/2006/main">
+            <a:pPr algn="ctr">
+              <a:defRPr sz="675" b="1">
+                <a:solidFill>
+                  <a:srgbClr val="2048A8"/>
+                </a:solidFill>
+              </a:defRPr>
+            </a:pPr>
+            <a:r>
+              <a:rPr sz="675" b="1">
+                <a:solidFill>
+                  <a:srgbClr val="2048A8"/>
+                </a:solidFill>
+              </a:rPr>
+              <a:t>РЕЗУЛЬТАТ</a:t>
+            </a:r>
+          </a:p>
+        </p:txBody>
+      </p:sp>
+      <p:sp>
+        <p:nvSpPr>
+          <p:cNvPr id="33" name="">
+            <a:extLst xmlns:a="http://schemas.openxmlformats.org/drawingml/2006/main">
+              <a:ext uri="{FF2B5EF4-FFF2-40B4-BE49-F238E27FC236}">
+                <a16:creationId xmlns:a16="http://schemas.microsoft.com/office/drawing/2014/main" id="{9519398E-E1B7-4E4B-B422-F3BEDCD26A42}"/>
+              </a:ext>
+            </a:extLst>
+          </p:cNvPr>
+          <p:cNvSpPr>
+            <a:spLocks xmlns:a="http://schemas.openxmlformats.org/drawingml/2006/main" noGrp="1"/>
+          </p:cNvSpPr>
+          <p:nvPr/>
+        </p:nvSpPr>
+        <p:spPr>
+          <a:xfrm xmlns:a="http://schemas.openxmlformats.org/drawingml/2006/main">
+            <a:off x="9620250" y="3657600"/>
+            <a:ext cx="1295400" cy="609600"/>
+          </a:xfrm>
+          <a:prstGeom xmlns:a="http://schemas.openxmlformats.org/drawingml/2006/main" prst="rect">
+            <a:avLst/>
+          </a:prstGeom>
+          <a:noFill xmlns:a="http://schemas.openxmlformats.org/drawingml/2006/main"/>
+          <a:ln xmlns:a="http://schemas.openxmlformats.org/drawingml/2006/main" w="0">
+            <a:noFill/>
+            <a:prstDash val="solid"/>
+          </a:ln>
+        </p:spPr>
+        <p:txBody>
+          <a:bodyPr xmlns:a="http://schemas.openxmlformats.org/drawingml/2006/main"/>
+          <a:lstStyle xmlns:a="http://schemas.openxmlformats.org/drawingml/2006/main"/>
+          <a:p xmlns:a="http://schemas.openxmlformats.org/drawingml/2006/main">
+            <a:pPr algn="ctr">
+              <a:defRPr sz="750" b="1">
+                <a:solidFill>
+                  <a:srgbClr val="102A63"/>
+                </a:solidFill>
+              </a:defRPr>
+            </a:pPr>
+            <a:r>
+              <a:rPr sz="750" b="1">
+                <a:solidFill>
+                  <a:srgbClr val="102A63"/>
+                </a:solidFill>
+              </a:rPr>
+              <a:t>{{ROADMAP_2_RESULT}}</a:t>
+            </a:r>
+          </a:p>
+        </p:txBody>
+      </p:sp>
+      <p:sp>
+        <p:nvSpPr>
+          <p:cNvPr id="34" name="">
+            <a:extLst xmlns:a="http://schemas.openxmlformats.org/drawingml/2006/main">
+              <a:ext uri="{FF2B5EF4-FFF2-40B4-BE49-F238E27FC236}">
+                <a16:creationId xmlns:a16="http://schemas.microsoft.com/office/drawing/2014/main" id="{D6634557-2324-4584-ACDF-242E1C389931}"/>
+              </a:ext>
+            </a:extLst>
+          </p:cNvPr>
+          <p:cNvSpPr>
+            <a:spLocks xmlns:a="http://schemas.openxmlformats.org/drawingml/2006/main" noGrp="1"/>
+          </p:cNvSpPr>
+          <p:nvPr/>
+        </p:nvSpPr>
+        <p:spPr>
+          <a:xfrm xmlns:a="http://schemas.openxmlformats.org/drawingml/2006/main">
+            <a:off x="609600" y="5048250"/>
+            <a:ext cx="514350" cy="514350"/>
+          </a:xfrm>
+          <a:prstGeom xmlns:a="http://schemas.openxmlformats.org/drawingml/2006/main" prst="ellipse">
+            <a:avLst/>
+          </a:prstGeom>
+          <a:solidFill xmlns:a="http://schemas.openxmlformats.org/drawingml/2006/main">
+            <a:srgbClr val="102A63"/>
+          </a:solidFill>
+          <a:ln xmlns:a="http://schemas.openxmlformats.org/drawingml/2006/main" w="0">
+            <a:noFill/>
+            <a:prstDash val="solid"/>
+          </a:ln>
+        </p:spPr>
+      </p:sp>
+      <p:sp>
+        <p:nvSpPr>
+          <p:cNvPr id="35" name="">
+            <a:extLst xmlns:a="http://schemas.openxmlformats.org/drawingml/2006/main">
+              <a:ext uri="{FF2B5EF4-FFF2-40B4-BE49-F238E27FC236}">
+                <a16:creationId xmlns:a16="http://schemas.microsoft.com/office/drawing/2014/main" id="{6D6E3AAD-C004-4276-8839-DB93A209643E}"/>
+              </a:ext>
+            </a:extLst>
+          </p:cNvPr>
+          <p:cNvSpPr>
+            <a:spLocks xmlns:a="http://schemas.openxmlformats.org/drawingml/2006/main" noGrp="1"/>
+          </p:cNvSpPr>
+          <p:nvPr/>
+        </p:nvSpPr>
+        <p:spPr>
+          <a:xfrm xmlns:a="http://schemas.openxmlformats.org/drawingml/2006/main">
+            <a:off x="704850" y="5172075"/>
+            <a:ext cx="323850" cy="228600"/>
+          </a:xfrm>
+          <a:prstGeom xmlns:a="http://schemas.openxmlformats.org/drawingml/2006/main" prst="rect">
+            <a:avLst/>
+          </a:prstGeom>
+          <a:noFill xmlns:a="http://schemas.openxmlformats.org/drawingml/2006/main"/>
+          <a:ln xmlns:a="http://schemas.openxmlformats.org/drawingml/2006/main" w="0">
+            <a:noFill/>
+            <a:prstDash val="solid"/>
+          </a:ln>
+        </p:spPr>
+        <p:txBody>
+          <a:bodyPr xmlns:a="http://schemas.openxmlformats.org/drawingml/2006/main"/>
+          <a:lstStyle xmlns:a="http://schemas.openxmlformats.org/drawingml/2006/main"/>
+          <a:p xmlns:a="http://schemas.openxmlformats.org/drawingml/2006/main">
+            <a:pPr algn="ctr">
+              <a:defRPr sz="1200" b="1">
+                <a:solidFill>
+                  <a:srgbClr val="FFFFFF"/>
+                </a:solidFill>
+              </a:defRPr>
+            </a:pPr>
+            <a:r>
+              <a:rPr sz="1200" b="1">
+                <a:solidFill>
+                  <a:srgbClr val="FFFFFF"/>
+                </a:solidFill>
+              </a:rPr>
+              <a:t>3</a:t>
+            </a:r>
+          </a:p>
+        </p:txBody>
+      </p:sp>
+      <p:sp>
+        <p:nvSpPr>
+          <p:cNvPr id="36" name="">
+            <a:extLst xmlns:a="http://schemas.openxmlformats.org/drawingml/2006/main">
+              <a:ext uri="{FF2B5EF4-FFF2-40B4-BE49-F238E27FC236}">
+                <a16:creationId xmlns:a16="http://schemas.microsoft.com/office/drawing/2014/main" id="{21A39BFF-65B5-4112-8EB7-83F90E03998C}"/>
+              </a:ext>
+            </a:extLst>
+          </p:cNvPr>
+          <p:cNvSpPr>
+            <a:spLocks xmlns:a="http://schemas.openxmlformats.org/drawingml/2006/main" noGrp="1"/>
+          </p:cNvSpPr>
+          <p:nvPr/>
+        </p:nvSpPr>
+        <p:spPr>
+          <a:xfrm xmlns:a="http://schemas.openxmlformats.org/drawingml/2006/main">
+            <a:off x="1390650" y="4686300"/>
+            <a:ext cx="9810750" cy="1257300"/>
+          </a:xfrm>
+          <a:prstGeom xmlns:a="http://schemas.openxmlformats.org/drawingml/2006/main" prst="roundRect">
+            <a:avLst>
+              <a:gd name="adj" fmla="val 6061"/>
+            </a:avLst>
+          </a:prstGeom>
+          <a:solidFill xmlns:a="http://schemas.openxmlformats.org/drawingml/2006/main">
+            <a:srgbClr val="FFFFFF"/>
+          </a:solidFill>
+          <a:ln xmlns:a="http://schemas.openxmlformats.org/drawingml/2006/main" w="9525">
+            <a:solidFill>
+              <a:srgbClr val="D7E0F2"/>
+            </a:solidFill>
+            <a:prstDash val="solid"/>
+          </a:ln>
+        </p:spPr>
+      </p:sp>
+      <p:sp>
+        <p:nvSpPr>
+          <p:cNvPr id="37" name="">
+            <a:extLst xmlns:a="http://schemas.openxmlformats.org/drawingml/2006/main">
+              <a:ext uri="{FF2B5EF4-FFF2-40B4-BE49-F238E27FC236}">
+                <a16:creationId xmlns:a16="http://schemas.microsoft.com/office/drawing/2014/main" id="{844C30D9-8E7B-411D-8FBE-9A96D88840AE}"/>
+              </a:ext>
+            </a:extLst>
+          </p:cNvPr>
+          <p:cNvSpPr>
+            <a:spLocks xmlns:a="http://schemas.openxmlformats.org/drawingml/2006/main" noGrp="1"/>
+          </p:cNvSpPr>
+          <p:nvPr/>
+        </p:nvSpPr>
+        <p:spPr>
+          <a:xfrm xmlns:a="http://schemas.openxmlformats.org/drawingml/2006/main">
+            <a:off x="1619250" y="4838700"/>
+            <a:ext cx="1409700" cy="228600"/>
+          </a:xfrm>
+          <a:prstGeom xmlns:a="http://schemas.openxmlformats.org/drawingml/2006/main" prst="rect">
+            <a:avLst/>
+          </a:prstGeom>
+          <a:noFill xmlns:a="http://schemas.openxmlformats.org/drawingml/2006/main"/>
+          <a:ln xmlns:a="http://schemas.openxmlformats.org/drawingml/2006/main" w="0">
+            <a:noFill/>
+            <a:prstDash val="solid"/>
+          </a:ln>
+        </p:spPr>
+        <p:txBody>
+          <a:bodyPr xmlns:a="http://schemas.openxmlformats.org/drawingml/2006/main"/>
+          <a:lstStyle xmlns:a="http://schemas.openxmlformats.org/drawingml/2006/main"/>
+          <a:p xmlns:a="http://schemas.openxmlformats.org/drawingml/2006/main">
+            <a:pPr>
+              <a:defRPr sz="1125" b="1">
+                <a:solidFill>
+                  <a:srgbClr val="2048A8"/>
+                </a:solidFill>
+              </a:defRPr>
+            </a:pPr>
+            <a:r>
+              <a:rPr sz="1125" b="1">
+                <a:solidFill>
+                  <a:srgbClr val="2048A8"/>
+                </a:solidFill>
+              </a:rPr>
+              <a:t>61–90 дней</a:t>
+            </a:r>
+          </a:p>
+        </p:txBody>
+      </p:sp>
+      <p:sp>
+        <p:nvSpPr>
+          <p:cNvPr id="38" name="">
+            <a:extLst xmlns:a="http://schemas.openxmlformats.org/drawingml/2006/main">
+              <a:ext uri="{FF2B5EF4-FFF2-40B4-BE49-F238E27FC236}">
+                <a16:creationId xmlns:a16="http://schemas.microsoft.com/office/drawing/2014/main" id="{9FCA5812-86D8-4387-9E9B-DA21D20D8C09}"/>
+              </a:ext>
+            </a:extLst>
+          </p:cNvPr>
+          <p:cNvSpPr>
+            <a:spLocks xmlns:a="http://schemas.openxmlformats.org/drawingml/2006/main" noGrp="1"/>
+          </p:cNvSpPr>
+          <p:nvPr/>
+        </p:nvSpPr>
+        <p:spPr>
+          <a:xfrm xmlns:a="http://schemas.openxmlformats.org/drawingml/2006/main">
+            <a:off x="1619250" y="5124450"/>
+            <a:ext cx="2381250" cy="495300"/>
+          </a:xfrm>
+          <a:prstGeom xmlns:a="http://schemas.openxmlformats.org/drawingml/2006/main" prst="rect">
+            <a:avLst/>
+          </a:prstGeom>
+          <a:noFill xmlns:a="http://schemas.openxmlformats.org/drawingml/2006/main"/>
+          <a:ln xmlns:a="http://schemas.openxmlformats.org/drawingml/2006/main" w="0">
+            <a:noFill/>
+            <a:prstDash val="solid"/>
+          </a:ln>
+        </p:spPr>
+        <p:txBody>
+          <a:bodyPr xmlns:a="http://schemas.openxmlformats.org/drawingml/2006/main"/>
+          <a:lstStyle xmlns:a="http://schemas.openxmlformats.org/drawingml/2006/main"/>
+          <a:p xmlns:a="http://schemas.openxmlformats.org/drawingml/2006/main">
+            <a:pPr>
+              <a:defRPr sz="1125" b="1">
+                <a:solidFill>
+                  <a:srgbClr val="102A63"/>
+                </a:solidFill>
+              </a:defRPr>
+            </a:pPr>
+            <a:r>
+              <a:rPr sz="1125" b="1">
+                <a:solidFill>
+                  <a:srgbClr val="102A63"/>
+                </a:solidFill>
+              </a:rPr>
+              <a:t>МАСШТАБИРОВАНИЕ И КОНТРОЛЬ</a:t>
+            </a:r>
+          </a:p>
+        </p:txBody>
+      </p:sp>
+      <p:sp>
+        <p:nvSpPr>
+          <p:cNvPr id="39" name="">
+            <a:extLst xmlns:a="http://schemas.openxmlformats.org/drawingml/2006/main">
+              <a:ext uri="{FF2B5EF4-FFF2-40B4-BE49-F238E27FC236}">
+                <a16:creationId xmlns:a16="http://schemas.microsoft.com/office/drawing/2014/main" id="{4351EA98-14D2-446C-9A75-ACE92B835A3D}"/>
+              </a:ext>
+            </a:extLst>
+          </p:cNvPr>
+          <p:cNvSpPr>
+            <a:spLocks xmlns:a="http://schemas.openxmlformats.org/drawingml/2006/main" noGrp="1"/>
+          </p:cNvSpPr>
+          <p:nvPr/>
+        </p:nvSpPr>
+        <p:spPr>
+          <a:xfrm xmlns:a="http://schemas.openxmlformats.org/drawingml/2006/main">
+            <a:off x="4210050" y="4886325"/>
+            <a:ext cx="304800" cy="190500"/>
+          </a:xfrm>
+          <a:prstGeom xmlns:a="http://schemas.openxmlformats.org/drawingml/2006/main" prst="rect">
+            <a:avLst/>
+          </a:prstGeom>
+          <a:noFill xmlns:a="http://schemas.openxmlformats.org/drawingml/2006/main"/>
+          <a:ln xmlns:a="http://schemas.openxmlformats.org/drawingml/2006/main" w="0">
+            <a:noFill/>
+            <a:prstDash val="solid"/>
+          </a:ln>
+        </p:spPr>
+        <p:txBody>
+          <a:bodyPr xmlns:a="http://schemas.openxmlformats.org/drawingml/2006/main"/>
+          <a:lstStyle xmlns:a="http://schemas.openxmlformats.org/drawingml/2006/main"/>
+          <a:p xmlns:a="http://schemas.openxmlformats.org/drawingml/2006/main">
+            <a:pPr>
+              <a:defRPr sz="825" b="1">
+                <a:solidFill>
+                  <a:srgbClr val="2048A8"/>
+                </a:solidFill>
+              </a:defRPr>
+            </a:pPr>
+            <a:r>
+              <a:rPr sz="825" b="1">
+                <a:solidFill>
+                  <a:srgbClr val="2048A8"/>
+                </a:solidFill>
+              </a:rPr>
+              <a:t>01</a:t>
+            </a:r>
+          </a:p>
+        </p:txBody>
+      </p:sp>
+      <p:sp>
+        <p:nvSpPr>
+          <p:cNvPr id="40" name="">
+            <a:extLst xmlns:a="http://schemas.openxmlformats.org/drawingml/2006/main">
+              <a:ext uri="{FF2B5EF4-FFF2-40B4-BE49-F238E27FC236}">
+                <a16:creationId xmlns:a16="http://schemas.microsoft.com/office/drawing/2014/main" id="{2E5BE31B-C012-487C-9AE3-5AE4C3180A70}"/>
+              </a:ext>
+            </a:extLst>
+          </p:cNvPr>
+          <p:cNvSpPr>
+            <a:spLocks xmlns:a="http://schemas.openxmlformats.org/drawingml/2006/main" noGrp="1"/>
+          </p:cNvSpPr>
+          <p:nvPr/>
+        </p:nvSpPr>
+        <p:spPr>
+          <a:xfrm xmlns:a="http://schemas.openxmlformats.org/drawingml/2006/main">
+            <a:off x="4572000" y="4829175"/>
+            <a:ext cx="2362200" cy="895350"/>
+          </a:xfrm>
+          <a:prstGeom xmlns:a="http://schemas.openxmlformats.org/drawingml/2006/main" prst="rect">
+            <a:avLst/>
+          </a:prstGeom>
+          <a:noFill xmlns:a="http://schemas.openxmlformats.org/drawingml/2006/main"/>
+          <a:ln xmlns:a="http://schemas.openxmlformats.org/drawingml/2006/main" w="0">
+            <a:noFill/>
+            <a:prstDash val="solid"/>
+          </a:ln>
+        </p:spPr>
+        <p:txBody>
+          <a:bodyPr xmlns:a="http://schemas.openxmlformats.org/drawingml/2006/main"/>
+          <a:lstStyle xmlns:a="http://schemas.openxmlformats.org/drawingml/2006/main"/>
+          <a:p xmlns:a="http://schemas.openxmlformats.org/drawingml/2006/main">
+            <a:pPr>
+              <a:defRPr sz="975">
+                <a:solidFill>
+                  <a:srgbClr val="102A63"/>
+                </a:solidFill>
+              </a:defRPr>
+            </a:pPr>
+            <a:r>
+              <a:rPr sz="975">
+                <a:solidFill>
+                  <a:srgbClr val="102A63"/>
+                </a:solidFill>
+              </a:rPr>
+              <a:t>{{ROADMAP_3_1}}</a:t>
+            </a:r>
+          </a:p>
+        </p:txBody>
+      </p:sp>
+      <p:sp>
+        <p:nvSpPr>
+          <p:cNvPr id="41" name="">
+            <a:extLst xmlns:a="http://schemas.openxmlformats.org/drawingml/2006/main">
+              <a:ext uri="{FF2B5EF4-FFF2-40B4-BE49-F238E27FC236}">
+                <a16:creationId xmlns:a16="http://schemas.microsoft.com/office/drawing/2014/main" id="{6C4535EE-5729-400D-97F7-B230F6DD2A7C}"/>
+              </a:ext>
+            </a:extLst>
+          </p:cNvPr>
+          <p:cNvSpPr>
+            <a:spLocks xmlns:a="http://schemas.openxmlformats.org/drawingml/2006/main" noGrp="1"/>
+          </p:cNvSpPr>
+          <p:nvPr/>
+        </p:nvSpPr>
+        <p:spPr>
+          <a:xfrm xmlns:a="http://schemas.openxmlformats.org/drawingml/2006/main">
+            <a:off x="7124700" y="4886325"/>
+            <a:ext cx="304800" cy="190500"/>
+          </a:xfrm>
+          <a:prstGeom xmlns:a="http://schemas.openxmlformats.org/drawingml/2006/main" prst="rect">
+            <a:avLst/>
+          </a:prstGeom>
+          <a:noFill xmlns:a="http://schemas.openxmlformats.org/drawingml/2006/main"/>
+          <a:ln xmlns:a="http://schemas.openxmlformats.org/drawingml/2006/main" w="0">
+            <a:noFill/>
+            <a:prstDash val="solid"/>
+          </a:ln>
+        </p:spPr>
+        <p:txBody>
+          <a:bodyPr xmlns:a="http://schemas.openxmlformats.org/drawingml/2006/main"/>
+          <a:lstStyle xmlns:a="http://schemas.openxmlformats.org/drawingml/2006/main"/>
+          <a:p xmlns:a="http://schemas.openxmlformats.org/drawingml/2006/main">
+            <a:pPr>
+              <a:defRPr sz="825" b="1">
+                <a:solidFill>
+                  <a:srgbClr val="2048A8"/>
+                </a:solidFill>
+              </a:defRPr>
+            </a:pPr>
+            <a:r>
+              <a:rPr sz="825" b="1">
+                <a:solidFill>
+                  <a:srgbClr val="2048A8"/>
+                </a:solidFill>
+              </a:rPr>
+              <a:t>02</a:t>
+            </a:r>
+          </a:p>
+        </p:txBody>
+      </p:sp>
+      <p:sp>
+        <p:nvSpPr>
+          <p:cNvPr id="42" name="">
+            <a:extLst xmlns:a="http://schemas.openxmlformats.org/drawingml/2006/main">
+              <a:ext uri="{FF2B5EF4-FFF2-40B4-BE49-F238E27FC236}">
+                <a16:creationId xmlns:a16="http://schemas.microsoft.com/office/drawing/2014/main" id="{75C16C78-2098-492A-8395-8C02976FB3BA}"/>
+              </a:ext>
+            </a:extLst>
+          </p:cNvPr>
+          <p:cNvSpPr>
+            <a:spLocks xmlns:a="http://schemas.openxmlformats.org/drawingml/2006/main" noGrp="1"/>
+          </p:cNvSpPr>
+          <p:nvPr/>
+        </p:nvSpPr>
+        <p:spPr>
+          <a:xfrm xmlns:a="http://schemas.openxmlformats.org/drawingml/2006/main">
+            <a:off x="7486650" y="4829175"/>
+            <a:ext cx="1847850" cy="895350"/>
+          </a:xfrm>
+          <a:prstGeom xmlns:a="http://schemas.openxmlformats.org/drawingml/2006/main" prst="rect">
+            <a:avLst/>
+          </a:prstGeom>
+          <a:noFill xmlns:a="http://schemas.openxmlformats.org/drawingml/2006/main"/>
+          <a:ln xmlns:a="http://schemas.openxmlformats.org/drawingml/2006/main" w="0">
+            <a:noFill/>
+            <a:prstDash val="solid"/>
+          </a:ln>
+        </p:spPr>
+        <p:txBody>
+          <a:bodyPr xmlns:a="http://schemas.openxmlformats.org/drawingml/2006/main"/>
+          <a:lstStyle xmlns:a="http://schemas.openxmlformats.org/drawingml/2006/main"/>
+          <a:p xmlns:a="http://schemas.openxmlformats.org/drawingml/2006/main">
+            <a:pPr>
+              <a:defRPr sz="975">
+                <a:solidFill>
+                  <a:srgbClr val="102A63"/>
+                </a:solidFill>
+              </a:defRPr>
+            </a:pPr>
+            <a:r>
+              <a:rPr sz="975">
+                <a:solidFill>
+                  <a:srgbClr val="102A63"/>
+                </a:solidFill>
+              </a:rPr>
+              <a:t>{{ROADMAP_3_2}}</a:t>
+            </a:r>
+          </a:p>
+        </p:txBody>
+      </p:sp>
+      <p:sp>
+        <p:nvSpPr>
           <p:cNvPr id="43" name="">
             <a:extLst xmlns:a="http://schemas.openxmlformats.org/drawingml/2006/main">
               <a:ext uri="{FF2B5EF4-FFF2-40B4-BE49-F238E27FC236}">
-                <a16:creationId xmlns:a16="http://schemas.microsoft.com/office/drawing/2014/main" id="{172E3E69-3621-438A-8DA9-56A33801C47C}"/>
-              </a:ext>
-            </a:extLst>
-          </p:cNvPr>
-          <p:cNvSpPr>
-            <a:spLocks xmlns:a="http://schemas.openxmlformats.org/drawingml/2006/main" noGrp="1"/>
-          </p:cNvSpPr>
-          <p:nvPr/>
-        </p:nvSpPr>
-        <p:spPr>
-          <a:xfrm xmlns:a="http://schemas.openxmlformats.org/drawingml/2006/main">
-            <a:off x="8077200" y="5286375"/>
-            <a:ext cx="2876550" cy="171450"/>
-          </a:xfrm>
-          <a:prstGeom xmlns:a="http://schemas.openxmlformats.org/drawingml/2006/main" prst="rect">
-            <a:avLst/>
-          </a:prstGeom>
-          <a:noFill xmlns:a="http://schemas.openxmlformats.org/drawingml/2006/main"/>
-          <a:ln xmlns:a="http://schemas.openxmlformats.org/drawingml/2006/main" w="0">
-            <a:noFill/>
-            <a:prstDash val="solid"/>
-          </a:ln>
-        </p:spPr>
-        <p:txBody>
-          <a:bodyPr xmlns:a="http://schemas.openxmlformats.org/drawingml/2006/main"/>
-          <a:lstStyle xmlns:a="http://schemas.openxmlformats.org/drawingml/2006/main"/>
-          <a:p xmlns:a="http://schemas.openxmlformats.org/drawingml/2006/main">
-            <a:pPr>
+                <a16:creationId xmlns:a16="http://schemas.microsoft.com/office/drawing/2014/main" id="{25D3E8F4-122F-467C-B742-115E0C1E4C20}"/>
+              </a:ext>
+            </a:extLst>
+          </p:cNvPr>
+          <p:cNvSpPr>
+            <a:spLocks xmlns:a="http://schemas.openxmlformats.org/drawingml/2006/main" noGrp="1"/>
+          </p:cNvSpPr>
+          <p:nvPr/>
+        </p:nvSpPr>
+        <p:spPr>
+          <a:xfrm xmlns:a="http://schemas.openxmlformats.org/drawingml/2006/main">
+            <a:off x="9505950" y="4819650"/>
+            <a:ext cx="1524000" cy="990600"/>
+          </a:xfrm>
+          <a:prstGeom xmlns:a="http://schemas.openxmlformats.org/drawingml/2006/main" prst="roundRect">
+            <a:avLst>
+              <a:gd name="adj" fmla="val 7692"/>
+            </a:avLst>
+          </a:prstGeom>
+          <a:solidFill xmlns:a="http://schemas.openxmlformats.org/drawingml/2006/main">
+            <a:srgbClr val="FFFFFF"/>
+          </a:solidFill>
+          <a:ln xmlns:a="http://schemas.openxmlformats.org/drawingml/2006/main" w="9525">
+            <a:solidFill>
+              <a:srgbClr val="D7E0F2"/>
+            </a:solidFill>
+            <a:prstDash val="solid"/>
+          </a:ln>
+        </p:spPr>
+      </p:sp>
+      <p:sp>
+        <p:nvSpPr>
+          <p:cNvPr id="44" name="">
+            <a:extLst xmlns:a="http://schemas.openxmlformats.org/drawingml/2006/main">
+              <a:ext uri="{FF2B5EF4-FFF2-40B4-BE49-F238E27FC236}">
+                <a16:creationId xmlns:a16="http://schemas.microsoft.com/office/drawing/2014/main" id="{C0AAA01F-42E9-4A76-95DD-B58FCB05E385}"/>
+              </a:ext>
+            </a:extLst>
+          </p:cNvPr>
+          <p:cNvSpPr>
+            <a:spLocks xmlns:a="http://schemas.openxmlformats.org/drawingml/2006/main" noGrp="1"/>
+          </p:cNvSpPr>
+          <p:nvPr/>
+        </p:nvSpPr>
+        <p:spPr>
+          <a:xfrm xmlns:a="http://schemas.openxmlformats.org/drawingml/2006/main">
+            <a:off x="9620250" y="4914900"/>
+            <a:ext cx="1295400" cy="171450"/>
+          </a:xfrm>
+          <a:prstGeom xmlns:a="http://schemas.openxmlformats.org/drawingml/2006/main" prst="rect">
+            <a:avLst/>
+          </a:prstGeom>
+          <a:noFill xmlns:a="http://schemas.openxmlformats.org/drawingml/2006/main"/>
+          <a:ln xmlns:a="http://schemas.openxmlformats.org/drawingml/2006/main" w="0">
+            <a:noFill/>
+            <a:prstDash val="solid"/>
+          </a:ln>
+        </p:spPr>
+        <p:txBody>
+          <a:bodyPr xmlns:a="http://schemas.openxmlformats.org/drawingml/2006/main"/>
+          <a:lstStyle xmlns:a="http://schemas.openxmlformats.org/drawingml/2006/main"/>
+          <a:p xmlns:a="http://schemas.openxmlformats.org/drawingml/2006/main">
+            <a:pPr algn="ctr">
+              <a:defRPr sz="675" b="1">
+                <a:solidFill>
+                  <a:srgbClr val="2048A8"/>
+                </a:solidFill>
+              </a:defRPr>
+            </a:pPr>
+            <a:r>
+              <a:rPr sz="675" b="1">
+                <a:solidFill>
+                  <a:srgbClr val="2048A8"/>
+                </a:solidFill>
+              </a:rPr>
+              <a:t>РЕЗУЛЬТАТ</a:t>
+            </a:r>
+          </a:p>
+        </p:txBody>
+      </p:sp>
+      <p:sp>
+        <p:nvSpPr>
+          <p:cNvPr id="45" name="">
+            <a:extLst xmlns:a="http://schemas.openxmlformats.org/drawingml/2006/main">
+              <a:ext uri="{FF2B5EF4-FFF2-40B4-BE49-F238E27FC236}">
+                <a16:creationId xmlns:a16="http://schemas.microsoft.com/office/drawing/2014/main" id="{B4E06BD9-D654-4736-934F-FAD710CBC1C5}"/>
+              </a:ext>
+            </a:extLst>
+          </p:cNvPr>
+          <p:cNvSpPr>
+            <a:spLocks xmlns:a="http://schemas.openxmlformats.org/drawingml/2006/main" noGrp="1"/>
+          </p:cNvSpPr>
+          <p:nvPr/>
+        </p:nvSpPr>
+        <p:spPr>
+          <a:xfrm xmlns:a="http://schemas.openxmlformats.org/drawingml/2006/main">
+            <a:off x="9620250" y="5124450"/>
+            <a:ext cx="1295400" cy="609600"/>
+          </a:xfrm>
+          <a:prstGeom xmlns:a="http://schemas.openxmlformats.org/drawingml/2006/main" prst="rect">
+            <a:avLst/>
+          </a:prstGeom>
+          <a:noFill xmlns:a="http://schemas.openxmlformats.org/drawingml/2006/main"/>
+          <a:ln xmlns:a="http://schemas.openxmlformats.org/drawingml/2006/main" w="0">
+            <a:noFill/>
+            <a:prstDash val="solid"/>
+          </a:ln>
+        </p:spPr>
+        <p:txBody>
+          <a:bodyPr xmlns:a="http://schemas.openxmlformats.org/drawingml/2006/main"/>
+          <a:lstStyle xmlns:a="http://schemas.openxmlformats.org/drawingml/2006/main"/>
+          <a:p xmlns:a="http://schemas.openxmlformats.org/drawingml/2006/main">
+            <a:pPr algn="ctr">
               <a:defRPr sz="750" b="1">
                 <a:solidFill>
-                  <a:srgbClr val="2048A8"/>
+                  <a:srgbClr val="102A63"/>
                 </a:solidFill>
               </a:defRPr>
             </a:pPr>
             <a:r>
               <a:rPr sz="750" b="1">
-                <a:solidFill>
-                  <a:srgbClr val="2048A8"/>
-                </a:solidFill>
-              </a:rPr>
-              <a:t>ЧТО ДАСТ ЭТАП</a:t>
-            </a:r>
-          </a:p>
-        </p:txBody>
-      </p:sp>
-      <p:sp>
-        <p:nvSpPr>
-          <p:cNvPr id="44" name="">
-            <a:extLst xmlns:a="http://schemas.openxmlformats.org/drawingml/2006/main">
-              <a:ext uri="{FF2B5EF4-FFF2-40B4-BE49-F238E27FC236}">
-                <a16:creationId xmlns:a16="http://schemas.microsoft.com/office/drawing/2014/main" id="{110818D7-F5EE-4444-902E-D4FECA1C031B}"/>
-              </a:ext>
-            </a:extLst>
-          </p:cNvPr>
-          <p:cNvSpPr>
-            <a:spLocks xmlns:a="http://schemas.openxmlformats.org/drawingml/2006/main" noGrp="1"/>
-          </p:cNvSpPr>
-          <p:nvPr/>
-        </p:nvSpPr>
-        <p:spPr>
-          <a:xfrm xmlns:a="http://schemas.openxmlformats.org/drawingml/2006/main">
-            <a:off x="8077200" y="5514975"/>
-            <a:ext cx="2876550" cy="323850"/>
-          </a:xfrm>
-          <a:prstGeom xmlns:a="http://schemas.openxmlformats.org/drawingml/2006/main" prst="rect">
-            <a:avLst/>
-          </a:prstGeom>
-          <a:noFill xmlns:a="http://schemas.openxmlformats.org/drawingml/2006/main"/>
-          <a:ln xmlns:a="http://schemas.openxmlformats.org/drawingml/2006/main" w="0">
-            <a:noFill/>
-            <a:prstDash val="solid"/>
-          </a:ln>
-        </p:spPr>
-        <p:txBody>
-          <a:bodyPr xmlns:a="http://schemas.openxmlformats.org/drawingml/2006/main"/>
-          <a:lstStyle xmlns:a="http://schemas.openxmlformats.org/drawingml/2006/main"/>
-          <a:p xmlns:a="http://schemas.openxmlformats.org/drawingml/2006/main">
-            <a:pPr>
-              <a:defRPr sz="975" b="1">
-                <a:solidFill>
-                  <a:srgbClr val="102A63"/>
-                </a:solidFill>
-              </a:defRPr>
-            </a:pPr>
-            <a:r>
-              <a:rPr sz="975" b="1">
                 <a:solidFill>
                   <a:srgbClr val="102A63"/>
                 </a:solidFill>
@@ -6395,7 +6438,7 @@
     </p:spTree>
     <p:extLst>
       <p:ext uri="{BB962C8B-B14F-4D97-AF65-F5344CB8AC3E}">
-        <p14:creationId xmlns:p14="http://schemas.microsoft.com/office/powerpoint/2010/main" val="807036277"/>
+        <p14:creationId xmlns:p14="http://schemas.microsoft.com/office/powerpoint/2010/main" val="9846948"/>
       </p:ext>
     </p:extLst>
   </p:cSld>
@@ -6426,7 +6469,7 @@
           <p:cNvPr id="1" name="">
             <a:extLst xmlns:a="http://schemas.openxmlformats.org/drawingml/2006/main">
               <a:ext uri="{FF2B5EF4-FFF2-40B4-BE49-F238E27FC236}">
-                <a16:creationId xmlns:a16="http://schemas.microsoft.com/office/drawing/2014/main" id="{CFB18783-AF8E-4262-AAFE-69A82773E8EB}"/>
+                <a16:creationId xmlns:a16="http://schemas.microsoft.com/office/drawing/2014/main" id="{FCE62781-B4E9-4E76-BCD6-639FC8B000F5}"/>
               </a:ext>
             </a:extLst>
           </p:cNvPr>
@@ -6461,7 +6504,7 @@
           <p:nvPr/>
         </p:nvPicPr>
         <p:blipFill>
-          <a:blip xmlns:r="http://schemas.openxmlformats.org/officeDocument/2006/relationships" xmlns:a="http://schemas.openxmlformats.org/drawingml/2006/main" r:embed="Rd4f236852f184b4c"/>
+          <a:blip xmlns:r="http://schemas.openxmlformats.org/officeDocument/2006/relationships" xmlns:a="http://schemas.openxmlformats.org/drawingml/2006/main" r:embed="R26e0a4b5c87b409d"/>
           <a:stretch xmlns:a="http://schemas.openxmlformats.org/drawingml/2006/main"/>
         </p:blipFill>
         <p:spPr>
@@ -6479,7 +6522,7 @@
           <p:cNvPr id="3" name="">
             <a:extLst xmlns:a="http://schemas.openxmlformats.org/drawingml/2006/main">
               <a:ext uri="{FF2B5EF4-FFF2-40B4-BE49-F238E27FC236}">
-                <a16:creationId xmlns:a16="http://schemas.microsoft.com/office/drawing/2014/main" id="{53C0A187-B22D-4A91-8570-D97F8E819730}"/>
+                <a16:creationId xmlns:a16="http://schemas.microsoft.com/office/drawing/2014/main" id="{02C335D6-632B-430B-94CF-EBAEAF10648A}"/>
               </a:ext>
             </a:extLst>
           </p:cNvPr>
@@ -6529,7 +6572,7 @@
           <p:cNvPr id="4" name="">
             <a:extLst xmlns:a="http://schemas.openxmlformats.org/drawingml/2006/main">
               <a:ext uri="{FF2B5EF4-FFF2-40B4-BE49-F238E27FC236}">
-                <a16:creationId xmlns:a16="http://schemas.microsoft.com/office/drawing/2014/main" id="{2074D72B-5E5E-4E89-89DE-F7A0F0BF6FB1}"/>
+                <a16:creationId xmlns:a16="http://schemas.microsoft.com/office/drawing/2014/main" id="{CA7ADAF5-1D75-4FDF-AE46-A323D097F974}"/>
               </a:ext>
             </a:extLst>
           </p:cNvPr>
@@ -6562,7 +6605,7 @@
           <p:cNvPr id="5" name="">
             <a:extLst xmlns:a="http://schemas.openxmlformats.org/drawingml/2006/main">
               <a:ext uri="{FF2B5EF4-FFF2-40B4-BE49-F238E27FC236}">
-                <a16:creationId xmlns:a16="http://schemas.microsoft.com/office/drawing/2014/main" id="{4B1978E9-113A-4F97-B3A3-FC67272F80E1}"/>
+                <a16:creationId xmlns:a16="http://schemas.microsoft.com/office/drawing/2014/main" id="{5B5A2082-5C9A-4EFF-B191-78036B2EDEC5}"/>
               </a:ext>
             </a:extLst>
           </p:cNvPr>
@@ -6593,7 +6636,7 @@
           <p:cNvPr id="6" name="">
             <a:extLst xmlns:a="http://schemas.openxmlformats.org/drawingml/2006/main">
               <a:ext uri="{FF2B5EF4-FFF2-40B4-BE49-F238E27FC236}">
-                <a16:creationId xmlns:a16="http://schemas.microsoft.com/office/drawing/2014/main" id="{9A25B300-71FC-48FD-8C88-373A5169A65C}"/>
+                <a16:creationId xmlns:a16="http://schemas.microsoft.com/office/drawing/2014/main" id="{9ED521F6-64B5-46F2-BBC0-CB5CCFE4594F}"/>
               </a:ext>
             </a:extLst>
           </p:cNvPr>
@@ -6643,7 +6686,7 @@
           <p:cNvPr id="7" name="">
             <a:extLst xmlns:a="http://schemas.openxmlformats.org/drawingml/2006/main">
               <a:ext uri="{FF2B5EF4-FFF2-40B4-BE49-F238E27FC236}">
-                <a16:creationId xmlns:a16="http://schemas.microsoft.com/office/drawing/2014/main" id="{02842606-0C89-4710-9C3A-431F86CB9AEA}"/>
+                <a16:creationId xmlns:a16="http://schemas.microsoft.com/office/drawing/2014/main" id="{A1653448-AB51-4B0D-B9F9-8E162BCDCDE3}"/>
               </a:ext>
             </a:extLst>
           </p:cNvPr>
@@ -6693,7 +6736,7 @@
           <p:cNvPr id="8" name="">
             <a:extLst xmlns:a="http://schemas.openxmlformats.org/drawingml/2006/main">
               <a:ext uri="{FF2B5EF4-FFF2-40B4-BE49-F238E27FC236}">
-                <a16:creationId xmlns:a16="http://schemas.microsoft.com/office/drawing/2014/main" id="{F98865FD-0D4D-4517-94BE-C51132B1D526}"/>
+                <a16:creationId xmlns:a16="http://schemas.microsoft.com/office/drawing/2014/main" id="{A02317D6-BA25-4243-93E3-CE19EFC13F0E}"/>
               </a:ext>
             </a:extLst>
           </p:cNvPr>
@@ -6743,7 +6786,7 @@
           <p:cNvPr id="9" name="">
             <a:extLst xmlns:a="http://schemas.openxmlformats.org/drawingml/2006/main">
               <a:ext uri="{FF2B5EF4-FFF2-40B4-BE49-F238E27FC236}">
-                <a16:creationId xmlns:a16="http://schemas.microsoft.com/office/drawing/2014/main" id="{2DD117FF-7EDA-42E6-A6A3-043F6785A935}"/>
+                <a16:creationId xmlns:a16="http://schemas.microsoft.com/office/drawing/2014/main" id="{EA6E09BE-D0EC-40BB-A216-27433282965F}"/>
               </a:ext>
             </a:extLst>
           </p:cNvPr>
@@ -6793,7 +6836,7 @@
           <p:cNvPr id="10" name="">
             <a:extLst xmlns:a="http://schemas.openxmlformats.org/drawingml/2006/main">
               <a:ext uri="{FF2B5EF4-FFF2-40B4-BE49-F238E27FC236}">
-                <a16:creationId xmlns:a16="http://schemas.microsoft.com/office/drawing/2014/main" id="{3EAC7682-DE0F-4D14-B3FD-CC760B455D98}"/>
+                <a16:creationId xmlns:a16="http://schemas.microsoft.com/office/drawing/2014/main" id="{CF7CAA8F-5A0C-4E9A-B01C-05E0DE6B4C52}"/>
               </a:ext>
             </a:extLst>
           </p:cNvPr>
@@ -6843,7 +6886,7 @@
           <p:cNvPr id="11" name="">
             <a:extLst xmlns:a="http://schemas.openxmlformats.org/drawingml/2006/main">
               <a:ext uri="{FF2B5EF4-FFF2-40B4-BE49-F238E27FC236}">
-                <a16:creationId xmlns:a16="http://schemas.microsoft.com/office/drawing/2014/main" id="{FFE45710-394E-4FD3-9319-78534A1FEB9B}"/>
+                <a16:creationId xmlns:a16="http://schemas.microsoft.com/office/drawing/2014/main" id="{99A8DFEB-C9C3-453B-A35F-5CC85CE74DE6}"/>
               </a:ext>
             </a:extLst>
           </p:cNvPr>
@@ -6893,7 +6936,7 @@
           <p:cNvPr id="12" name="">
             <a:extLst xmlns:a="http://schemas.openxmlformats.org/drawingml/2006/main">
               <a:ext uri="{FF2B5EF4-FFF2-40B4-BE49-F238E27FC236}">
-                <a16:creationId xmlns:a16="http://schemas.microsoft.com/office/drawing/2014/main" id="{77A19953-A96B-4AFC-AC74-055BFC476AF7}"/>
+                <a16:creationId xmlns:a16="http://schemas.microsoft.com/office/drawing/2014/main" id="{BA2A766E-644C-448E-9681-877A562DB899}"/>
               </a:ext>
             </a:extLst>
           </p:cNvPr>
@@ -6943,7 +6986,7 @@
           <p:cNvPr id="13" name="">
             <a:extLst xmlns:a="http://schemas.openxmlformats.org/drawingml/2006/main">
               <a:ext uri="{FF2B5EF4-FFF2-40B4-BE49-F238E27FC236}">
-                <a16:creationId xmlns:a16="http://schemas.microsoft.com/office/drawing/2014/main" id="{E0A41A7B-1D99-414C-8B42-12E2D6FDB00F}"/>
+                <a16:creationId xmlns:a16="http://schemas.microsoft.com/office/drawing/2014/main" id="{54EF26A6-D901-447C-9662-68B3FB558769}"/>
               </a:ext>
             </a:extLst>
           </p:cNvPr>
@@ -6993,7 +7036,7 @@
           <p:cNvPr id="14" name="">
             <a:extLst xmlns:a="http://schemas.openxmlformats.org/drawingml/2006/main">
               <a:ext uri="{FF2B5EF4-FFF2-40B4-BE49-F238E27FC236}">
-                <a16:creationId xmlns:a16="http://schemas.microsoft.com/office/drawing/2014/main" id="{1C0EBF81-F1EB-43D8-A988-952C0D0A7C25}"/>
+                <a16:creationId xmlns:a16="http://schemas.microsoft.com/office/drawing/2014/main" id="{74927031-6AC3-408F-B29D-A0613B0EC1C2}"/>
               </a:ext>
             </a:extLst>
           </p:cNvPr>
@@ -7043,7 +7086,7 @@
           <p:cNvPr id="15" name="">
             <a:extLst xmlns:a="http://schemas.openxmlformats.org/drawingml/2006/main">
               <a:ext uri="{FF2B5EF4-FFF2-40B4-BE49-F238E27FC236}">
-                <a16:creationId xmlns:a16="http://schemas.microsoft.com/office/drawing/2014/main" id="{67EBC457-F841-4096-B389-D5E6DBB76E3E}"/>
+                <a16:creationId xmlns:a16="http://schemas.microsoft.com/office/drawing/2014/main" id="{B3D71FCB-1FCA-46D6-9B1F-6D5C3401CD0C}"/>
               </a:ext>
             </a:extLst>
           </p:cNvPr>
@@ -7093,7 +7136,7 @@
           <p:cNvPr id="16" name="">
             <a:extLst xmlns:a="http://schemas.openxmlformats.org/drawingml/2006/main">
               <a:ext uri="{FF2B5EF4-FFF2-40B4-BE49-F238E27FC236}">
-                <a16:creationId xmlns:a16="http://schemas.microsoft.com/office/drawing/2014/main" id="{20943199-463C-458E-A7F5-9F60240101F3}"/>
+                <a16:creationId xmlns:a16="http://schemas.microsoft.com/office/drawing/2014/main" id="{C510BE32-E8BF-4447-B26A-12FE5281B7D4}"/>
               </a:ext>
             </a:extLst>
           </p:cNvPr>
@@ -7143,7 +7186,7 @@
           <p:cNvPr id="17" name="">
             <a:extLst xmlns:a="http://schemas.openxmlformats.org/drawingml/2006/main">
               <a:ext uri="{FF2B5EF4-FFF2-40B4-BE49-F238E27FC236}">
-                <a16:creationId xmlns:a16="http://schemas.microsoft.com/office/drawing/2014/main" id="{5514E535-CB82-4E7E-B691-2819E7A87B5A}"/>
+                <a16:creationId xmlns:a16="http://schemas.microsoft.com/office/drawing/2014/main" id="{83274F27-09EE-4634-A329-0F53ABE9E4D2}"/>
               </a:ext>
             </a:extLst>
           </p:cNvPr>
@@ -7176,7 +7219,7 @@
           <p:cNvPr id="18" name="">
             <a:extLst xmlns:a="http://schemas.openxmlformats.org/drawingml/2006/main">
               <a:ext uri="{FF2B5EF4-FFF2-40B4-BE49-F238E27FC236}">
-                <a16:creationId xmlns:a16="http://schemas.microsoft.com/office/drawing/2014/main" id="{43FD33B0-90CF-4783-9234-39B798D0F5AC}"/>
+                <a16:creationId xmlns:a16="http://schemas.microsoft.com/office/drawing/2014/main" id="{17A3DC1E-AD8D-45C6-950D-0ABE27989205}"/>
               </a:ext>
             </a:extLst>
           </p:cNvPr>
@@ -7226,7 +7269,7 @@
           <p:cNvPr id="19" name="">
             <a:extLst xmlns:a="http://schemas.openxmlformats.org/drawingml/2006/main">
               <a:ext uri="{FF2B5EF4-FFF2-40B4-BE49-F238E27FC236}">
-                <a16:creationId xmlns:a16="http://schemas.microsoft.com/office/drawing/2014/main" id="{EA9CC15E-BADD-450C-9C61-21585E52AB38}"/>
+                <a16:creationId xmlns:a16="http://schemas.microsoft.com/office/drawing/2014/main" id="{7DE33237-8C44-4434-974B-C01313F76253}"/>
               </a:ext>
             </a:extLst>
           </p:cNvPr>
@@ -7276,7 +7319,7 @@
           <p:cNvPr id="20" name="">
             <a:extLst xmlns:a="http://schemas.openxmlformats.org/drawingml/2006/main">
               <a:ext uri="{FF2B5EF4-FFF2-40B4-BE49-F238E27FC236}">
-                <a16:creationId xmlns:a16="http://schemas.microsoft.com/office/drawing/2014/main" id="{52612196-CE7E-4C9F-897D-313B2DE9B4F2}"/>
+                <a16:creationId xmlns:a16="http://schemas.microsoft.com/office/drawing/2014/main" id="{13EB85BF-9C2F-4188-92AB-A7FACFB90D38}"/>
               </a:ext>
             </a:extLst>
           </p:cNvPr>
@@ -7326,7 +7369,7 @@
           <p:cNvPr id="21" name="">
             <a:extLst xmlns:a="http://schemas.openxmlformats.org/drawingml/2006/main">
               <a:ext uri="{FF2B5EF4-FFF2-40B4-BE49-F238E27FC236}">
-                <a16:creationId xmlns:a16="http://schemas.microsoft.com/office/drawing/2014/main" id="{3AF2F9E6-92D2-4A90-AA9D-D7E1513B00D4}"/>
+                <a16:creationId xmlns:a16="http://schemas.microsoft.com/office/drawing/2014/main" id="{FBC7990F-C6E2-44AB-8C6D-3F058490E3E6}"/>
               </a:ext>
             </a:extLst>
           </p:cNvPr>
@@ -7376,7 +7419,7 @@
           <p:cNvPr id="22" name="">
             <a:extLst xmlns:a="http://schemas.openxmlformats.org/drawingml/2006/main">
               <a:ext uri="{FF2B5EF4-FFF2-40B4-BE49-F238E27FC236}">
-                <a16:creationId xmlns:a16="http://schemas.microsoft.com/office/drawing/2014/main" id="{F6FFE200-67E0-4961-B792-A1E8A9B12BC8}"/>
+                <a16:creationId xmlns:a16="http://schemas.microsoft.com/office/drawing/2014/main" id="{EA8713EE-D21B-4565-BAF5-5C5EC5C97870}"/>
               </a:ext>
             </a:extLst>
           </p:cNvPr>
@@ -7426,7 +7469,7 @@
           <p:cNvPr id="23" name="">
             <a:extLst xmlns:a="http://schemas.openxmlformats.org/drawingml/2006/main">
               <a:ext uri="{FF2B5EF4-FFF2-40B4-BE49-F238E27FC236}">
-                <a16:creationId xmlns:a16="http://schemas.microsoft.com/office/drawing/2014/main" id="{95F18B24-6D9D-4813-A29A-C315C4F569A1}"/>
+                <a16:creationId xmlns:a16="http://schemas.microsoft.com/office/drawing/2014/main" id="{8076C710-2249-4138-8A27-05BBD5462B8C}"/>
               </a:ext>
             </a:extLst>
           </p:cNvPr>
@@ -7476,7 +7519,7 @@
           <p:cNvPr id="24" name="">
             <a:extLst xmlns:a="http://schemas.openxmlformats.org/drawingml/2006/main">
               <a:ext uri="{FF2B5EF4-FFF2-40B4-BE49-F238E27FC236}">
-                <a16:creationId xmlns:a16="http://schemas.microsoft.com/office/drawing/2014/main" id="{DDB345EB-1EE0-4980-B6D8-1845C30E46A2}"/>
+                <a16:creationId xmlns:a16="http://schemas.microsoft.com/office/drawing/2014/main" id="{83CC4FC0-9FC2-4EE2-BD60-B45BA56B6087}"/>
               </a:ext>
             </a:extLst>
           </p:cNvPr>
@@ -7526,7 +7569,7 @@
           <p:cNvPr id="25" name="">
             <a:extLst xmlns:a="http://schemas.openxmlformats.org/drawingml/2006/main">
               <a:ext uri="{FF2B5EF4-FFF2-40B4-BE49-F238E27FC236}">
-                <a16:creationId xmlns:a16="http://schemas.microsoft.com/office/drawing/2014/main" id="{B18291FB-16C3-4BEE-9E15-1409895A0295}"/>
+                <a16:creationId xmlns:a16="http://schemas.microsoft.com/office/drawing/2014/main" id="{0C74D3B6-1E22-4C92-98FB-4344062A041E}"/>
               </a:ext>
             </a:extLst>
           </p:cNvPr>
@@ -7576,7 +7619,7 @@
           <p:cNvPr id="26" name="">
             <a:extLst xmlns:a="http://schemas.openxmlformats.org/drawingml/2006/main">
               <a:ext uri="{FF2B5EF4-FFF2-40B4-BE49-F238E27FC236}">
-                <a16:creationId xmlns:a16="http://schemas.microsoft.com/office/drawing/2014/main" id="{EC7BBDB6-2857-449A-9AA9-25A1B68D99CF}"/>
+                <a16:creationId xmlns:a16="http://schemas.microsoft.com/office/drawing/2014/main" id="{CBD34246-1E33-4B82-915B-A8A659ADB433}"/>
               </a:ext>
             </a:extLst>
           </p:cNvPr>
@@ -7624,7 +7667,7 @@
     </p:spTree>
     <p:extLst>
       <p:ext uri="{BB962C8B-B14F-4D97-AF65-F5344CB8AC3E}">
-        <p14:creationId xmlns:p14="http://schemas.microsoft.com/office/powerpoint/2010/main" val="1536444708"/>
+        <p14:creationId xmlns:p14="http://schemas.microsoft.com/office/powerpoint/2010/main" val="234194596"/>
       </p:ext>
     </p:extLst>
   </p:cSld>
@@ -7655,7 +7698,7 @@
           <p:cNvPr id="1" name="">
             <a:extLst xmlns:a="http://schemas.openxmlformats.org/drawingml/2006/main">
               <a:ext uri="{FF2B5EF4-FFF2-40B4-BE49-F238E27FC236}">
-                <a16:creationId xmlns:a16="http://schemas.microsoft.com/office/drawing/2014/main" id="{9B586B29-F35A-4627-A9EE-AE7FDE7D8BB7}"/>
+                <a16:creationId xmlns:a16="http://schemas.microsoft.com/office/drawing/2014/main" id="{D176CED3-220F-49DE-AB9A-016BB0BC89CF}"/>
               </a:ext>
             </a:extLst>
           </p:cNvPr>
@@ -7690,7 +7733,7 @@
           <p:nvPr/>
         </p:nvPicPr>
         <p:blipFill>
-          <a:blip xmlns:r="http://schemas.openxmlformats.org/officeDocument/2006/relationships" xmlns:a="http://schemas.openxmlformats.org/drawingml/2006/main" r:embed="R83fe51b89683493b"/>
+          <a:blip xmlns:r="http://schemas.openxmlformats.org/officeDocument/2006/relationships" xmlns:a="http://schemas.openxmlformats.org/drawingml/2006/main" r:embed="Rae578144336442fc"/>
           <a:stretch xmlns:a="http://schemas.openxmlformats.org/drawingml/2006/main"/>
         </p:blipFill>
         <p:spPr>
@@ -7708,7 +7751,7 @@
           <p:cNvPr id="3" name="">
             <a:extLst xmlns:a="http://schemas.openxmlformats.org/drawingml/2006/main">
               <a:ext uri="{FF2B5EF4-FFF2-40B4-BE49-F238E27FC236}">
-                <a16:creationId xmlns:a16="http://schemas.microsoft.com/office/drawing/2014/main" id="{4EFE92B7-C0D0-4CF8-8CC7-5E7B4332DDB2}"/>
+                <a16:creationId xmlns:a16="http://schemas.microsoft.com/office/drawing/2014/main" id="{03F6523D-79D9-4D27-9CC3-3252A17C3142}"/>
               </a:ext>
             </a:extLst>
           </p:cNvPr>
@@ -7758,7 +7801,7 @@
           <p:cNvPr id="4" name="">
             <a:extLst xmlns:a="http://schemas.openxmlformats.org/drawingml/2006/main">
               <a:ext uri="{FF2B5EF4-FFF2-40B4-BE49-F238E27FC236}">
-                <a16:creationId xmlns:a16="http://schemas.microsoft.com/office/drawing/2014/main" id="{6E82E90C-6C2D-430C-AC61-B7CB38F67E77}"/>
+                <a16:creationId xmlns:a16="http://schemas.microsoft.com/office/drawing/2014/main" id="{5B82B024-B200-4FFC-AFEE-F10A5933A9B6}"/>
               </a:ext>
             </a:extLst>
           </p:cNvPr>
@@ -7791,7 +7834,7 @@
           <p:cNvPr id="5" name="">
             <a:extLst xmlns:a="http://schemas.openxmlformats.org/drawingml/2006/main">
               <a:ext uri="{FF2B5EF4-FFF2-40B4-BE49-F238E27FC236}">
-                <a16:creationId xmlns:a16="http://schemas.microsoft.com/office/drawing/2014/main" id="{A9A5D872-B6EA-46F0-ABF2-C1A6273A1B24}"/>
+                <a16:creationId xmlns:a16="http://schemas.microsoft.com/office/drawing/2014/main" id="{7A2D95D0-22DE-475D-BB3C-D7BD902E831F}"/>
               </a:ext>
             </a:extLst>
           </p:cNvPr>
@@ -7822,7 +7865,7 @@
           <p:cNvPr id="6" name="">
             <a:extLst xmlns:a="http://schemas.openxmlformats.org/drawingml/2006/main">
               <a:ext uri="{FF2B5EF4-FFF2-40B4-BE49-F238E27FC236}">
-                <a16:creationId xmlns:a16="http://schemas.microsoft.com/office/drawing/2014/main" id="{E120920E-4EC6-4DCF-AA3A-0CC3D4467FE3}"/>
+                <a16:creationId xmlns:a16="http://schemas.microsoft.com/office/drawing/2014/main" id="{A157BA9B-9AA1-40E0-AF6A-AAE596DF395E}"/>
               </a:ext>
             </a:extLst>
           </p:cNvPr>
@@ -7872,7 +7915,7 @@
           <p:cNvPr id="7" name="">
             <a:extLst xmlns:a="http://schemas.openxmlformats.org/drawingml/2006/main">
               <a:ext uri="{FF2B5EF4-FFF2-40B4-BE49-F238E27FC236}">
-                <a16:creationId xmlns:a16="http://schemas.microsoft.com/office/drawing/2014/main" id="{B07DC03F-B6D3-4065-99A1-3AE2F34F992B}"/>
+                <a16:creationId xmlns:a16="http://schemas.microsoft.com/office/drawing/2014/main" id="{3DEDA67B-6F64-4D78-B192-B53D80B05023}"/>
               </a:ext>
             </a:extLst>
           </p:cNvPr>
@@ -7922,7 +7965,7 @@
           <p:cNvPr id="8" name="">
             <a:extLst xmlns:a="http://schemas.openxmlformats.org/drawingml/2006/main">
               <a:ext uri="{FF2B5EF4-FFF2-40B4-BE49-F238E27FC236}">
-                <a16:creationId xmlns:a16="http://schemas.microsoft.com/office/drawing/2014/main" id="{0435CFFE-0867-4640-82B3-7C2144A5F1FA}"/>
+                <a16:creationId xmlns:a16="http://schemas.microsoft.com/office/drawing/2014/main" id="{B964FBEB-3663-4338-9C89-A0513A859A0B}"/>
               </a:ext>
             </a:extLst>
           </p:cNvPr>
@@ -7972,7 +8015,7 @@
           <p:cNvPr id="9" name="">
             <a:extLst xmlns:a="http://schemas.openxmlformats.org/drawingml/2006/main">
               <a:ext uri="{FF2B5EF4-FFF2-40B4-BE49-F238E27FC236}">
-                <a16:creationId xmlns:a16="http://schemas.microsoft.com/office/drawing/2014/main" id="{2CFB1A1B-C416-47E0-878C-8556C3DA929B}"/>
+                <a16:creationId xmlns:a16="http://schemas.microsoft.com/office/drawing/2014/main" id="{FE0AEAEC-3A6F-490B-A8A8-2AED53140DD8}"/>
               </a:ext>
             </a:extLst>
           </p:cNvPr>
@@ -8022,7 +8065,7 @@
           <p:cNvPr id="10" name="">
             <a:extLst xmlns:a="http://schemas.openxmlformats.org/drawingml/2006/main">
               <a:ext uri="{FF2B5EF4-FFF2-40B4-BE49-F238E27FC236}">
-                <a16:creationId xmlns:a16="http://schemas.microsoft.com/office/drawing/2014/main" id="{791E1915-10C4-4DC8-A330-9EFD0CDB934F}"/>
+                <a16:creationId xmlns:a16="http://schemas.microsoft.com/office/drawing/2014/main" id="{12DD4889-44C5-455B-903C-C59B98DF110C}"/>
               </a:ext>
             </a:extLst>
           </p:cNvPr>
@@ -8053,7 +8096,7 @@
           <p:cNvPr id="11" name="">
             <a:extLst xmlns:a="http://schemas.openxmlformats.org/drawingml/2006/main">
               <a:ext uri="{FF2B5EF4-FFF2-40B4-BE49-F238E27FC236}">
-                <a16:creationId xmlns:a16="http://schemas.microsoft.com/office/drawing/2014/main" id="{236E2450-F043-48DD-8E23-AEBA209D4BD3}"/>
+                <a16:creationId xmlns:a16="http://schemas.microsoft.com/office/drawing/2014/main" id="{C0353CBE-0B57-4A78-8C83-04307348BDCE}"/>
               </a:ext>
             </a:extLst>
           </p:cNvPr>
@@ -8103,7 +8146,7 @@
           <p:cNvPr id="12" name="">
             <a:extLst xmlns:a="http://schemas.openxmlformats.org/drawingml/2006/main">
               <a:ext uri="{FF2B5EF4-FFF2-40B4-BE49-F238E27FC236}">
-                <a16:creationId xmlns:a16="http://schemas.microsoft.com/office/drawing/2014/main" id="{CE83894C-97AA-4C46-B5AD-C89A956739A3}"/>
+                <a16:creationId xmlns:a16="http://schemas.microsoft.com/office/drawing/2014/main" id="{8F21D8D2-D008-432C-BF55-E05C1D8CFB30}"/>
               </a:ext>
             </a:extLst>
           </p:cNvPr>
@@ -8153,7 +8196,7 @@
           <p:cNvPr id="13" name="">
             <a:extLst xmlns:a="http://schemas.openxmlformats.org/drawingml/2006/main">
               <a:ext uri="{FF2B5EF4-FFF2-40B4-BE49-F238E27FC236}">
-                <a16:creationId xmlns:a16="http://schemas.microsoft.com/office/drawing/2014/main" id="{793FF582-BF45-4467-BDFB-9D115ED0F5E0}"/>
+                <a16:creationId xmlns:a16="http://schemas.microsoft.com/office/drawing/2014/main" id="{0FD6B4CE-26EF-4CE1-B936-D43F23656154}"/>
               </a:ext>
             </a:extLst>
           </p:cNvPr>
@@ -8184,7 +8227,7 @@
           <p:cNvPr id="14" name="">
             <a:extLst xmlns:a="http://schemas.openxmlformats.org/drawingml/2006/main">
               <a:ext uri="{FF2B5EF4-FFF2-40B4-BE49-F238E27FC236}">
-                <a16:creationId xmlns:a16="http://schemas.microsoft.com/office/drawing/2014/main" id="{65671210-F536-4378-BFEE-4AE61CDC763D}"/>
+                <a16:creationId xmlns:a16="http://schemas.microsoft.com/office/drawing/2014/main" id="{1B10B347-556A-48CA-ACAE-0C08E6CF8A7F}"/>
               </a:ext>
             </a:extLst>
           </p:cNvPr>
@@ -8234,7 +8277,7 @@
           <p:cNvPr id="15" name="">
             <a:extLst xmlns:a="http://schemas.openxmlformats.org/drawingml/2006/main">
               <a:ext uri="{FF2B5EF4-FFF2-40B4-BE49-F238E27FC236}">
-                <a16:creationId xmlns:a16="http://schemas.microsoft.com/office/drawing/2014/main" id="{A4AC20EE-4A49-4E16-8BB9-F286D64B395D}"/>
+                <a16:creationId xmlns:a16="http://schemas.microsoft.com/office/drawing/2014/main" id="{2DD5406E-E4E4-4CEC-ABFC-0B1B0307A2D7}"/>
               </a:ext>
             </a:extLst>
           </p:cNvPr>
@@ -8284,7 +8327,7 @@
           <p:cNvPr id="16" name="">
             <a:extLst xmlns:a="http://schemas.openxmlformats.org/drawingml/2006/main">
               <a:ext uri="{FF2B5EF4-FFF2-40B4-BE49-F238E27FC236}">
-                <a16:creationId xmlns:a16="http://schemas.microsoft.com/office/drawing/2014/main" id="{53000B54-5587-4F20-96E5-F22355F32116}"/>
+                <a16:creationId xmlns:a16="http://schemas.microsoft.com/office/drawing/2014/main" id="{D6BCA772-FA42-4563-A5C5-DEDA8F5D9D48}"/>
               </a:ext>
             </a:extLst>
           </p:cNvPr>
@@ -8315,7 +8358,7 @@
           <p:cNvPr id="17" name="">
             <a:extLst xmlns:a="http://schemas.openxmlformats.org/drawingml/2006/main">
               <a:ext uri="{FF2B5EF4-FFF2-40B4-BE49-F238E27FC236}">
-                <a16:creationId xmlns:a16="http://schemas.microsoft.com/office/drawing/2014/main" id="{283393D8-F02D-44B6-A583-16449076C8CF}"/>
+                <a16:creationId xmlns:a16="http://schemas.microsoft.com/office/drawing/2014/main" id="{753A1CA1-79E4-4628-8821-EEFE88106F49}"/>
               </a:ext>
             </a:extLst>
           </p:cNvPr>
@@ -8365,7 +8408,7 @@
           <p:cNvPr id="18" name="">
             <a:extLst xmlns:a="http://schemas.openxmlformats.org/drawingml/2006/main">
               <a:ext uri="{FF2B5EF4-FFF2-40B4-BE49-F238E27FC236}">
-                <a16:creationId xmlns:a16="http://schemas.microsoft.com/office/drawing/2014/main" id="{FAE1E165-10C2-4D06-A6C3-4436FA5F53C9}"/>
+                <a16:creationId xmlns:a16="http://schemas.microsoft.com/office/drawing/2014/main" id="{D3EC57E6-EAF4-41CD-BC41-91B8BD32D8CE}"/>
               </a:ext>
             </a:extLst>
           </p:cNvPr>
@@ -8415,7 +8458,7 @@
           <p:cNvPr id="19" name="">
             <a:extLst xmlns:a="http://schemas.openxmlformats.org/drawingml/2006/main">
               <a:ext uri="{FF2B5EF4-FFF2-40B4-BE49-F238E27FC236}">
-                <a16:creationId xmlns:a16="http://schemas.microsoft.com/office/drawing/2014/main" id="{9DC7784B-AD2D-4B92-93E5-4C0C9D4AD420}"/>
+                <a16:creationId xmlns:a16="http://schemas.microsoft.com/office/drawing/2014/main" id="{F08228E2-92A5-4C8A-886A-E477000F1B60}"/>
               </a:ext>
             </a:extLst>
           </p:cNvPr>
@@ -8450,7 +8493,7 @@
           <p:cNvPr id="20" name="">
             <a:extLst xmlns:a="http://schemas.openxmlformats.org/drawingml/2006/main">
               <a:ext uri="{FF2B5EF4-FFF2-40B4-BE49-F238E27FC236}">
-                <a16:creationId xmlns:a16="http://schemas.microsoft.com/office/drawing/2014/main" id="{85E905F1-9C57-45F1-8442-E19513BF1D82}"/>
+                <a16:creationId xmlns:a16="http://schemas.microsoft.com/office/drawing/2014/main" id="{55FDD566-3BF2-4FAC-9434-AAB7E9B3D028}"/>
               </a:ext>
             </a:extLst>
           </p:cNvPr>
@@ -8500,7 +8543,7 @@
           <p:cNvPr id="21" name="">
             <a:extLst xmlns:a="http://schemas.openxmlformats.org/drawingml/2006/main">
               <a:ext uri="{FF2B5EF4-FFF2-40B4-BE49-F238E27FC236}">
-                <a16:creationId xmlns:a16="http://schemas.microsoft.com/office/drawing/2014/main" id="{39C93D15-D1AA-4115-8D3D-E7F8B2DFF124}"/>
+                <a16:creationId xmlns:a16="http://schemas.microsoft.com/office/drawing/2014/main" id="{013CBCB2-61FF-47E5-B602-8FFC1D79274C}"/>
               </a:ext>
             </a:extLst>
           </p:cNvPr>
@@ -8554,7 +8597,7 @@
           <p:nvPr/>
         </p:nvPicPr>
         <p:blipFill>
-          <a:blip xmlns:r="http://schemas.openxmlformats.org/officeDocument/2006/relationships" xmlns:a="http://schemas.openxmlformats.org/drawingml/2006/main" r:embed="R0402173db4af49f1"/>
+          <a:blip xmlns:r="http://schemas.openxmlformats.org/officeDocument/2006/relationships" xmlns:a="http://schemas.openxmlformats.org/drawingml/2006/main" r:embed="R78dc93ba2d7a4a60"/>
           <a:stretch xmlns:a="http://schemas.openxmlformats.org/drawingml/2006/main"/>
         </p:blipFill>
         <p:spPr>
@@ -8572,7 +8615,7 @@
           <p:cNvPr id="23" name="">
             <a:extLst xmlns:a="http://schemas.openxmlformats.org/drawingml/2006/main">
               <a:ext uri="{FF2B5EF4-FFF2-40B4-BE49-F238E27FC236}">
-                <a16:creationId xmlns:a16="http://schemas.microsoft.com/office/drawing/2014/main" id="{1393F615-762F-4C44-BF24-86BA5560CB63}"/>
+                <a16:creationId xmlns:a16="http://schemas.microsoft.com/office/drawing/2014/main" id="{A5BF6A24-7AAD-4BF6-83A7-C315F674C8D7}"/>
               </a:ext>
             </a:extLst>
           </p:cNvPr>
@@ -8622,7 +8665,7 @@
           <p:cNvPr id="24" name="">
             <a:extLst xmlns:a="http://schemas.openxmlformats.org/drawingml/2006/main">
               <a:ext uri="{FF2B5EF4-FFF2-40B4-BE49-F238E27FC236}">
-                <a16:creationId xmlns:a16="http://schemas.microsoft.com/office/drawing/2014/main" id="{427B3B2D-C052-40AF-9EDF-57F5D3923AFA}"/>
+                <a16:creationId xmlns:a16="http://schemas.microsoft.com/office/drawing/2014/main" id="{C08631F7-19D2-4621-8DB7-3D1EA5CD504B}"/>
               </a:ext>
             </a:extLst>
           </p:cNvPr>
@@ -8672,7 +8715,7 @@
           <p:cNvPr id="25" name="">
             <a:extLst xmlns:a="http://schemas.openxmlformats.org/drawingml/2006/main">
               <a:ext uri="{FF2B5EF4-FFF2-40B4-BE49-F238E27FC236}">
-                <a16:creationId xmlns:a16="http://schemas.microsoft.com/office/drawing/2014/main" id="{3846E877-F510-48B0-8B3F-D6CBEB057C9E}"/>
+                <a16:creationId xmlns:a16="http://schemas.microsoft.com/office/drawing/2014/main" id="{3BDF0F10-FF97-4C34-9292-93901B163514}"/>
               </a:ext>
             </a:extLst>
           </p:cNvPr>
@@ -8720,7 +8763,7 @@
     </p:spTree>
     <p:extLst>
       <p:ext uri="{BB962C8B-B14F-4D97-AF65-F5344CB8AC3E}">
-        <p14:creationId xmlns:p14="http://schemas.microsoft.com/office/powerpoint/2010/main" val="1397050992"/>
+        <p14:creationId xmlns:p14="http://schemas.microsoft.com/office/powerpoint/2010/main" val="753411906"/>
       </p:ext>
     </p:extLst>
   </p:cSld>
@@ -8751,7 +8794,7 @@
           <p:cNvPr id="1" name="">
             <a:extLst xmlns:a="http://schemas.openxmlformats.org/drawingml/2006/main">
               <a:ext uri="{FF2B5EF4-FFF2-40B4-BE49-F238E27FC236}">
-                <a16:creationId xmlns:a16="http://schemas.microsoft.com/office/drawing/2014/main" id="{603CA5F3-E155-480D-B33D-3F68F102A3CB}"/>
+                <a16:creationId xmlns:a16="http://schemas.microsoft.com/office/drawing/2014/main" id="{0A61B38B-2AA0-48B4-B5DE-8BCA252AC28F}"/>
               </a:ext>
             </a:extLst>
           </p:cNvPr>
@@ -8786,7 +8829,7 @@
           <p:nvPr/>
         </p:nvPicPr>
         <p:blipFill>
-          <a:blip xmlns:r="http://schemas.openxmlformats.org/officeDocument/2006/relationships" xmlns:a="http://schemas.openxmlformats.org/drawingml/2006/main" r:embed="R666a3e12b671494c"/>
+          <a:blip xmlns:r="http://schemas.openxmlformats.org/officeDocument/2006/relationships" xmlns:a="http://schemas.openxmlformats.org/drawingml/2006/main" r:embed="R4117684f2b9b4b4b"/>
           <a:stretch xmlns:a="http://schemas.openxmlformats.org/drawingml/2006/main"/>
         </p:blipFill>
         <p:spPr>
@@ -8804,7 +8847,7 @@
           <p:cNvPr id="3" name="">
             <a:extLst xmlns:a="http://schemas.openxmlformats.org/drawingml/2006/main">
               <a:ext uri="{FF2B5EF4-FFF2-40B4-BE49-F238E27FC236}">
-                <a16:creationId xmlns:a16="http://schemas.microsoft.com/office/drawing/2014/main" id="{923605AA-4D2B-432C-BAA5-A54F489ECFDF}"/>
+                <a16:creationId xmlns:a16="http://schemas.microsoft.com/office/drawing/2014/main" id="{D3BD488D-74BB-4966-93C3-5C409DA3486C}"/>
               </a:ext>
             </a:extLst>
           </p:cNvPr>
@@ -8854,7 +8897,7 @@
           <p:cNvPr id="4" name="">
             <a:extLst xmlns:a="http://schemas.openxmlformats.org/drawingml/2006/main">
               <a:ext uri="{FF2B5EF4-FFF2-40B4-BE49-F238E27FC236}">
-                <a16:creationId xmlns:a16="http://schemas.microsoft.com/office/drawing/2014/main" id="{CD480314-8BB9-4E03-A402-38C6DC55AED9}"/>
+                <a16:creationId xmlns:a16="http://schemas.microsoft.com/office/drawing/2014/main" id="{51041D9E-2FDE-4FEE-8306-199E238E386F}"/>
               </a:ext>
             </a:extLst>
           </p:cNvPr>
@@ -8887,7 +8930,7 @@
           <p:cNvPr id="5" name="">
             <a:extLst xmlns:a="http://schemas.openxmlformats.org/drawingml/2006/main">
               <a:ext uri="{FF2B5EF4-FFF2-40B4-BE49-F238E27FC236}">
-                <a16:creationId xmlns:a16="http://schemas.microsoft.com/office/drawing/2014/main" id="{5F16EAFC-9C89-42D4-AE59-375F18098BB0}"/>
+                <a16:creationId xmlns:a16="http://schemas.microsoft.com/office/drawing/2014/main" id="{C4C77713-BF95-492E-B5CD-22095C298148}"/>
               </a:ext>
             </a:extLst>
           </p:cNvPr>
@@ -8918,7 +8961,7 @@
           <p:cNvPr id="6" name="">
             <a:extLst xmlns:a="http://schemas.openxmlformats.org/drawingml/2006/main">
               <a:ext uri="{FF2B5EF4-FFF2-40B4-BE49-F238E27FC236}">
-                <a16:creationId xmlns:a16="http://schemas.microsoft.com/office/drawing/2014/main" id="{261F103B-BBD5-49E5-AA88-4727BDF6B215}"/>
+                <a16:creationId xmlns:a16="http://schemas.microsoft.com/office/drawing/2014/main" id="{3FEB64B1-FB4B-4198-BC3D-B0A47B874D9F}"/>
               </a:ext>
             </a:extLst>
           </p:cNvPr>
@@ -8968,7 +9011,7 @@
           <p:cNvPr id="7" name="">
             <a:extLst xmlns:a="http://schemas.openxmlformats.org/drawingml/2006/main">
               <a:ext uri="{FF2B5EF4-FFF2-40B4-BE49-F238E27FC236}">
-                <a16:creationId xmlns:a16="http://schemas.microsoft.com/office/drawing/2014/main" id="{E456A501-5EB3-46E9-BD1C-34170EDA3848}"/>
+                <a16:creationId xmlns:a16="http://schemas.microsoft.com/office/drawing/2014/main" id="{D913E5C0-9548-4588-B1F4-161E9A499789}"/>
               </a:ext>
             </a:extLst>
           </p:cNvPr>
@@ -9018,7 +9061,7 @@
           <p:cNvPr id="8" name="">
             <a:extLst xmlns:a="http://schemas.openxmlformats.org/drawingml/2006/main">
               <a:ext uri="{FF2B5EF4-FFF2-40B4-BE49-F238E27FC236}">
-                <a16:creationId xmlns:a16="http://schemas.microsoft.com/office/drawing/2014/main" id="{8B18209D-9860-444E-86B1-8080CFC2F5E2}"/>
+                <a16:creationId xmlns:a16="http://schemas.microsoft.com/office/drawing/2014/main" id="{9B887891-61F1-4498-8EC3-83C9AF72369A}"/>
               </a:ext>
             </a:extLst>
           </p:cNvPr>
@@ -9068,7 +9111,7 @@
           <p:cNvPr id="9" name="">
             <a:extLst xmlns:a="http://schemas.openxmlformats.org/drawingml/2006/main">
               <a:ext uri="{FF2B5EF4-FFF2-40B4-BE49-F238E27FC236}">
-                <a16:creationId xmlns:a16="http://schemas.microsoft.com/office/drawing/2014/main" id="{7C5D7E1F-A003-4AAE-ACB0-DD3DA6BDD441}"/>
+                <a16:creationId xmlns:a16="http://schemas.microsoft.com/office/drawing/2014/main" id="{862E043D-D5A2-4284-A1F0-EC6D63021D86}"/>
               </a:ext>
             </a:extLst>
           </p:cNvPr>
@@ -9118,7 +9161,7 @@
           <p:cNvPr id="10" name="">
             <a:extLst xmlns:a="http://schemas.openxmlformats.org/drawingml/2006/main">
               <a:ext uri="{FF2B5EF4-FFF2-40B4-BE49-F238E27FC236}">
-                <a16:creationId xmlns:a16="http://schemas.microsoft.com/office/drawing/2014/main" id="{8A23599F-4633-4AD8-B51F-8A54A4D341C8}"/>
+                <a16:creationId xmlns:a16="http://schemas.microsoft.com/office/drawing/2014/main" id="{48E8DAAB-7D49-4707-B2D3-F44DF5617719}"/>
               </a:ext>
             </a:extLst>
           </p:cNvPr>
@@ -9168,7 +9211,7 @@
           <p:cNvPr id="11" name="">
             <a:extLst xmlns:a="http://schemas.openxmlformats.org/drawingml/2006/main">
               <a:ext uri="{FF2B5EF4-FFF2-40B4-BE49-F238E27FC236}">
-                <a16:creationId xmlns:a16="http://schemas.microsoft.com/office/drawing/2014/main" id="{5EDA7993-C7B0-4A00-A288-5A3E0909ABCE}"/>
+                <a16:creationId xmlns:a16="http://schemas.microsoft.com/office/drawing/2014/main" id="{064D45FA-8D66-4AE7-BA7B-5ED554DEE5D3}"/>
               </a:ext>
             </a:extLst>
           </p:cNvPr>
@@ -9218,7 +9261,7 @@
           <p:cNvPr id="12" name="">
             <a:extLst xmlns:a="http://schemas.openxmlformats.org/drawingml/2006/main">
               <a:ext uri="{FF2B5EF4-FFF2-40B4-BE49-F238E27FC236}">
-                <a16:creationId xmlns:a16="http://schemas.microsoft.com/office/drawing/2014/main" id="{CE94AE66-7149-4FBD-9CDE-F12C72D863F2}"/>
+                <a16:creationId xmlns:a16="http://schemas.microsoft.com/office/drawing/2014/main" id="{6ED473D5-D0DC-4628-8CDA-4EB51A10D2CB}"/>
               </a:ext>
             </a:extLst>
           </p:cNvPr>
@@ -9268,7 +9311,7 @@
           <p:cNvPr id="13" name="">
             <a:extLst xmlns:a="http://schemas.openxmlformats.org/drawingml/2006/main">
               <a:ext uri="{FF2B5EF4-FFF2-40B4-BE49-F238E27FC236}">
-                <a16:creationId xmlns:a16="http://schemas.microsoft.com/office/drawing/2014/main" id="{FA9BB9DF-EFFC-496D-AC25-45D64AB60DBD}"/>
+                <a16:creationId xmlns:a16="http://schemas.microsoft.com/office/drawing/2014/main" id="{993EEB60-2DA7-4FCE-932F-31FC988A862B}"/>
               </a:ext>
             </a:extLst>
           </p:cNvPr>
@@ -9318,7 +9361,7 @@
           <p:cNvPr id="14" name="">
             <a:extLst xmlns:a="http://schemas.openxmlformats.org/drawingml/2006/main">
               <a:ext uri="{FF2B5EF4-FFF2-40B4-BE49-F238E27FC236}">
-                <a16:creationId xmlns:a16="http://schemas.microsoft.com/office/drawing/2014/main" id="{A3A64D66-6876-4207-8819-9E91756ECE01}"/>
+                <a16:creationId xmlns:a16="http://schemas.microsoft.com/office/drawing/2014/main" id="{3ABB3104-111D-4C90-9741-10AE0787D45F}"/>
               </a:ext>
             </a:extLst>
           </p:cNvPr>
@@ -9368,7 +9411,7 @@
           <p:cNvPr id="15" name="">
             <a:extLst xmlns:a="http://schemas.openxmlformats.org/drawingml/2006/main">
               <a:ext uri="{FF2B5EF4-FFF2-40B4-BE49-F238E27FC236}">
-                <a16:creationId xmlns:a16="http://schemas.microsoft.com/office/drawing/2014/main" id="{C006A0E3-1EEC-4983-A05A-1DD294D11C53}"/>
+                <a16:creationId xmlns:a16="http://schemas.microsoft.com/office/drawing/2014/main" id="{E54F11A5-1ED6-4137-8684-D3807B044C3E}"/>
               </a:ext>
             </a:extLst>
           </p:cNvPr>
@@ -9418,7 +9461,7 @@
           <p:cNvPr id="16" name="">
             <a:extLst xmlns:a="http://schemas.openxmlformats.org/drawingml/2006/main">
               <a:ext uri="{FF2B5EF4-FFF2-40B4-BE49-F238E27FC236}">
-                <a16:creationId xmlns:a16="http://schemas.microsoft.com/office/drawing/2014/main" id="{D1160CCA-FFAE-42D2-AD4B-FCFD434B9915}"/>
+                <a16:creationId xmlns:a16="http://schemas.microsoft.com/office/drawing/2014/main" id="{C5CA7FC3-2203-4C21-B385-AAD170A2A507}"/>
               </a:ext>
             </a:extLst>
           </p:cNvPr>
@@ -9468,7 +9511,7 @@
           <p:cNvPr id="17" name="">
             <a:extLst xmlns:a="http://schemas.openxmlformats.org/drawingml/2006/main">
               <a:ext uri="{FF2B5EF4-FFF2-40B4-BE49-F238E27FC236}">
-                <a16:creationId xmlns:a16="http://schemas.microsoft.com/office/drawing/2014/main" id="{07EE51D2-5891-4495-B738-46B1B717BC2D}"/>
+                <a16:creationId xmlns:a16="http://schemas.microsoft.com/office/drawing/2014/main" id="{6D33AB6E-402E-4FB4-A180-6A37A5C20126}"/>
               </a:ext>
             </a:extLst>
           </p:cNvPr>
@@ -9503,7 +9546,7 @@
           <p:cNvPr id="18" name="">
             <a:extLst xmlns:a="http://schemas.openxmlformats.org/drawingml/2006/main">
               <a:ext uri="{FF2B5EF4-FFF2-40B4-BE49-F238E27FC236}">
-                <a16:creationId xmlns:a16="http://schemas.microsoft.com/office/drawing/2014/main" id="{5FEA5275-3F7A-4BB2-9BD2-48335D8A5507}"/>
+                <a16:creationId xmlns:a16="http://schemas.microsoft.com/office/drawing/2014/main" id="{2EB128BF-A16E-4503-991A-2D48F8FFFE65}"/>
               </a:ext>
             </a:extLst>
           </p:cNvPr>
@@ -9553,7 +9596,7 @@
           <p:cNvPr id="19" name="">
             <a:extLst xmlns:a="http://schemas.openxmlformats.org/drawingml/2006/main">
               <a:ext uri="{FF2B5EF4-FFF2-40B4-BE49-F238E27FC236}">
-                <a16:creationId xmlns:a16="http://schemas.microsoft.com/office/drawing/2014/main" id="{6B32725D-0437-4A19-BE88-1CA6869E42B9}"/>
+                <a16:creationId xmlns:a16="http://schemas.microsoft.com/office/drawing/2014/main" id="{BD92AB4E-6F1A-45D6-A825-4B75BC3A3658}"/>
               </a:ext>
             </a:extLst>
           </p:cNvPr>
@@ -9603,7 +9646,7 @@
           <p:cNvPr id="20" name="">
             <a:extLst xmlns:a="http://schemas.openxmlformats.org/drawingml/2006/main">
               <a:ext uri="{FF2B5EF4-FFF2-40B4-BE49-F238E27FC236}">
-                <a16:creationId xmlns:a16="http://schemas.microsoft.com/office/drawing/2014/main" id="{71CDB076-C84E-4CBA-89C7-CB90D9432D31}"/>
+                <a16:creationId xmlns:a16="http://schemas.microsoft.com/office/drawing/2014/main" id="{9C26AF77-D491-495D-A891-90059E4319FE}"/>
               </a:ext>
             </a:extLst>
           </p:cNvPr>
@@ -9653,7 +9696,7 @@
           <p:cNvPr id="21" name="">
             <a:extLst xmlns:a="http://schemas.openxmlformats.org/drawingml/2006/main">
               <a:ext uri="{FF2B5EF4-FFF2-40B4-BE49-F238E27FC236}">
-                <a16:creationId xmlns:a16="http://schemas.microsoft.com/office/drawing/2014/main" id="{A04854FC-CF7E-4D74-B50E-0CEA80BFC42C}"/>
+                <a16:creationId xmlns:a16="http://schemas.microsoft.com/office/drawing/2014/main" id="{8FA07DCB-A1B3-4C08-AC2A-25567262C0F0}"/>
               </a:ext>
             </a:extLst>
           </p:cNvPr>
@@ -9703,7 +9746,7 @@
           <p:cNvPr id="22" name="">
             <a:extLst xmlns:a="http://schemas.openxmlformats.org/drawingml/2006/main">
               <a:ext uri="{FF2B5EF4-FFF2-40B4-BE49-F238E27FC236}">
-                <a16:creationId xmlns:a16="http://schemas.microsoft.com/office/drawing/2014/main" id="{8957B1B4-2AD3-44AB-A596-2D832D31ACFC}"/>
+                <a16:creationId xmlns:a16="http://schemas.microsoft.com/office/drawing/2014/main" id="{2E0C1877-1250-4758-8A89-75B5B23054C9}"/>
               </a:ext>
             </a:extLst>
           </p:cNvPr>
@@ -9734,7 +9777,7 @@
           <p:cNvPr id="23" name="">
             <a:extLst xmlns:a="http://schemas.openxmlformats.org/drawingml/2006/main">
               <a:ext uri="{FF2B5EF4-FFF2-40B4-BE49-F238E27FC236}">
-                <a16:creationId xmlns:a16="http://schemas.microsoft.com/office/drawing/2014/main" id="{ADD59198-099D-4AF7-910C-CD753B3B943A}"/>
+                <a16:creationId xmlns:a16="http://schemas.microsoft.com/office/drawing/2014/main" id="{D2F3CAFB-DDD0-499F-BA25-519F40892682}"/>
               </a:ext>
             </a:extLst>
           </p:cNvPr>
@@ -9784,7 +9827,7 @@
           <p:cNvPr id="24" name="">
             <a:extLst xmlns:a="http://schemas.openxmlformats.org/drawingml/2006/main">
               <a:ext uri="{FF2B5EF4-FFF2-40B4-BE49-F238E27FC236}">
-                <a16:creationId xmlns:a16="http://schemas.microsoft.com/office/drawing/2014/main" id="{BB1C43D4-CB9E-4FD7-A9DC-D49A94B89FEB}"/>
+                <a16:creationId xmlns:a16="http://schemas.microsoft.com/office/drawing/2014/main" id="{1424124A-A8B7-4AAB-9253-27B31D784062}"/>
               </a:ext>
             </a:extLst>
           </p:cNvPr>
@@ -9834,7 +9877,7 @@
           <p:cNvPr id="25" name="">
             <a:extLst xmlns:a="http://schemas.openxmlformats.org/drawingml/2006/main">
               <a:ext uri="{FF2B5EF4-FFF2-40B4-BE49-F238E27FC236}">
-                <a16:creationId xmlns:a16="http://schemas.microsoft.com/office/drawing/2014/main" id="{EFCB6332-7A0D-461D-8805-D791F30704E2}"/>
+                <a16:creationId xmlns:a16="http://schemas.microsoft.com/office/drawing/2014/main" id="{B9DFEBAF-F475-4E02-9766-0FFA893C12B9}"/>
               </a:ext>
             </a:extLst>
           </p:cNvPr>
@@ -9884,7 +9927,7 @@
           <p:cNvPr id="26" name="">
             <a:extLst xmlns:a="http://schemas.openxmlformats.org/drawingml/2006/main">
               <a:ext uri="{FF2B5EF4-FFF2-40B4-BE49-F238E27FC236}">
-                <a16:creationId xmlns:a16="http://schemas.microsoft.com/office/drawing/2014/main" id="{38222D63-3550-44E5-BE04-EB777CEE3D6D}"/>
+                <a16:creationId xmlns:a16="http://schemas.microsoft.com/office/drawing/2014/main" id="{D95E2790-B22E-42B3-8F89-7FC28049BEA8}"/>
               </a:ext>
             </a:extLst>
           </p:cNvPr>
@@ -9915,7 +9958,7 @@
           <p:cNvPr id="27" name="">
             <a:extLst xmlns:a="http://schemas.openxmlformats.org/drawingml/2006/main">
               <a:ext uri="{FF2B5EF4-FFF2-40B4-BE49-F238E27FC236}">
-                <a16:creationId xmlns:a16="http://schemas.microsoft.com/office/drawing/2014/main" id="{99AA0188-FE11-4CC6-ADC3-9738D63EE49D}"/>
+                <a16:creationId xmlns:a16="http://schemas.microsoft.com/office/drawing/2014/main" id="{C55E5353-58C6-4DD4-9BE0-694BB794696A}"/>
               </a:ext>
             </a:extLst>
           </p:cNvPr>
@@ -9965,7 +10008,7 @@
           <p:cNvPr id="28" name="">
             <a:extLst xmlns:a="http://schemas.openxmlformats.org/drawingml/2006/main">
               <a:ext uri="{FF2B5EF4-FFF2-40B4-BE49-F238E27FC236}">
-                <a16:creationId xmlns:a16="http://schemas.microsoft.com/office/drawing/2014/main" id="{D1554835-06DA-48B0-A04B-C4FE4D05CEA8}"/>
+                <a16:creationId xmlns:a16="http://schemas.microsoft.com/office/drawing/2014/main" id="{143315A8-5933-4E24-8761-14243DF4287E}"/>
               </a:ext>
             </a:extLst>
           </p:cNvPr>
@@ -10015,7 +10058,7 @@
           <p:cNvPr id="29" name="">
             <a:extLst xmlns:a="http://schemas.openxmlformats.org/drawingml/2006/main">
               <a:ext uri="{FF2B5EF4-FFF2-40B4-BE49-F238E27FC236}">
-                <a16:creationId xmlns:a16="http://schemas.microsoft.com/office/drawing/2014/main" id="{4E20C438-815E-44F2-9E5B-DD3DCA042D68}"/>
+                <a16:creationId xmlns:a16="http://schemas.microsoft.com/office/drawing/2014/main" id="{E667A42D-81C8-476C-AAC0-E75991163E81}"/>
               </a:ext>
             </a:extLst>
           </p:cNvPr>
@@ -10065,7 +10108,7 @@
           <p:cNvPr id="30" name="">
             <a:extLst xmlns:a="http://schemas.openxmlformats.org/drawingml/2006/main">
               <a:ext uri="{FF2B5EF4-FFF2-40B4-BE49-F238E27FC236}">
-                <a16:creationId xmlns:a16="http://schemas.microsoft.com/office/drawing/2014/main" id="{CD47AFA7-BE95-4156-AC0B-CE3E2EF0BC3D}"/>
+                <a16:creationId xmlns:a16="http://schemas.microsoft.com/office/drawing/2014/main" id="{0E44008C-7A1F-444B-8BC4-EB144467F663}"/>
               </a:ext>
             </a:extLst>
           </p:cNvPr>
@@ -10096,7 +10139,7 @@
           <p:cNvPr id="31" name="">
             <a:extLst xmlns:a="http://schemas.openxmlformats.org/drawingml/2006/main">
               <a:ext uri="{FF2B5EF4-FFF2-40B4-BE49-F238E27FC236}">
-                <a16:creationId xmlns:a16="http://schemas.microsoft.com/office/drawing/2014/main" id="{40E72EEF-FBD9-491C-B5BA-589B24C342FA}"/>
+                <a16:creationId xmlns:a16="http://schemas.microsoft.com/office/drawing/2014/main" id="{80BFAC1C-5A82-4A16-9D9A-44C8FFC78321}"/>
               </a:ext>
             </a:extLst>
           </p:cNvPr>
@@ -10146,7 +10189,7 @@
           <p:cNvPr id="32" name="">
             <a:extLst xmlns:a="http://schemas.openxmlformats.org/drawingml/2006/main">
               <a:ext uri="{FF2B5EF4-FFF2-40B4-BE49-F238E27FC236}">
-                <a16:creationId xmlns:a16="http://schemas.microsoft.com/office/drawing/2014/main" id="{0C805DFD-9BD0-478E-8A97-FF76F17C5C87}"/>
+                <a16:creationId xmlns:a16="http://schemas.microsoft.com/office/drawing/2014/main" id="{7DD8DAE8-381A-4375-AE74-347EFF354E62}"/>
               </a:ext>
             </a:extLst>
           </p:cNvPr>
@@ -10196,7 +10239,7 @@
           <p:cNvPr id="33" name="">
             <a:extLst xmlns:a="http://schemas.openxmlformats.org/drawingml/2006/main">
               <a:ext uri="{FF2B5EF4-FFF2-40B4-BE49-F238E27FC236}">
-                <a16:creationId xmlns:a16="http://schemas.microsoft.com/office/drawing/2014/main" id="{F8E46A71-5656-4452-8518-EB26EECC56E9}"/>
+                <a16:creationId xmlns:a16="http://schemas.microsoft.com/office/drawing/2014/main" id="{7906C7EF-6CB5-4AE7-A0F3-583FFCACA33D}"/>
               </a:ext>
             </a:extLst>
           </p:cNvPr>
@@ -10246,7 +10289,7 @@
           <p:cNvPr id="34" name="">
             <a:extLst xmlns:a="http://schemas.openxmlformats.org/drawingml/2006/main">
               <a:ext uri="{FF2B5EF4-FFF2-40B4-BE49-F238E27FC236}">
-                <a16:creationId xmlns:a16="http://schemas.microsoft.com/office/drawing/2014/main" id="{23F3B5F5-5CC1-4B64-897C-5113A6D584F0}"/>
+                <a16:creationId xmlns:a16="http://schemas.microsoft.com/office/drawing/2014/main" id="{C7BDB785-3FA1-4F50-A641-AE2844FF84B5}"/>
               </a:ext>
             </a:extLst>
           </p:cNvPr>
@@ -10277,7 +10320,7 @@
           <p:cNvPr id="35" name="">
             <a:extLst xmlns:a="http://schemas.openxmlformats.org/drawingml/2006/main">
               <a:ext uri="{FF2B5EF4-FFF2-40B4-BE49-F238E27FC236}">
-                <a16:creationId xmlns:a16="http://schemas.microsoft.com/office/drawing/2014/main" id="{B4BE67F8-5392-468D-BDDB-9B8BDEF64D13}"/>
+                <a16:creationId xmlns:a16="http://schemas.microsoft.com/office/drawing/2014/main" id="{5B083251-A9F0-46E3-B4B9-234FC79DBC36}"/>
               </a:ext>
             </a:extLst>
           </p:cNvPr>
@@ -10312,7 +10355,7 @@
           <p:nvPr/>
         </p:nvPicPr>
         <p:blipFill>
-          <a:blip xmlns:r="http://schemas.openxmlformats.org/officeDocument/2006/relationships" xmlns:a="http://schemas.openxmlformats.org/drawingml/2006/main" r:embed="R695a6a63a0644bc6"/>
+          <a:blip xmlns:r="http://schemas.openxmlformats.org/officeDocument/2006/relationships" xmlns:a="http://schemas.openxmlformats.org/drawingml/2006/main" r:embed="Rdc8c9d95bd4b4fa2"/>
           <a:stretch xmlns:a="http://schemas.openxmlformats.org/drawingml/2006/main"/>
         </p:blipFill>
         <p:spPr>
@@ -10330,7 +10373,7 @@
           <p:cNvPr id="37" name="">
             <a:extLst xmlns:a="http://schemas.openxmlformats.org/drawingml/2006/main">
               <a:ext uri="{FF2B5EF4-FFF2-40B4-BE49-F238E27FC236}">
-                <a16:creationId xmlns:a16="http://schemas.microsoft.com/office/drawing/2014/main" id="{969B8B66-4BCE-414F-8646-E3DF2BE17177}"/>
+                <a16:creationId xmlns:a16="http://schemas.microsoft.com/office/drawing/2014/main" id="{24DF6937-0783-43BD-BF08-F531484F5724}"/>
               </a:ext>
             </a:extLst>
           </p:cNvPr>
@@ -10380,7 +10423,7 @@
           <p:cNvPr id="38" name="">
             <a:extLst xmlns:a="http://schemas.openxmlformats.org/drawingml/2006/main">
               <a:ext uri="{FF2B5EF4-FFF2-40B4-BE49-F238E27FC236}">
-                <a16:creationId xmlns:a16="http://schemas.microsoft.com/office/drawing/2014/main" id="{BA1E774E-F2EA-4F68-ABAF-537F5D3A7D87}"/>
+                <a16:creationId xmlns:a16="http://schemas.microsoft.com/office/drawing/2014/main" id="{E39E9218-9BA0-435E-9FFC-7AE47C0CB028}"/>
               </a:ext>
             </a:extLst>
           </p:cNvPr>
@@ -10413,7 +10456,7 @@
           <p:cNvPr id="39" name="">
             <a:extLst xmlns:a="http://schemas.openxmlformats.org/drawingml/2006/main">
               <a:ext uri="{FF2B5EF4-FFF2-40B4-BE49-F238E27FC236}">
-                <a16:creationId xmlns:a16="http://schemas.microsoft.com/office/drawing/2014/main" id="{106A698C-62A5-4EE2-AF90-A7C82BB599E0}"/>
+                <a16:creationId xmlns:a16="http://schemas.microsoft.com/office/drawing/2014/main" id="{F8BEF712-47E2-48A2-A62C-85FB02A2E61C}"/>
               </a:ext>
             </a:extLst>
           </p:cNvPr>
@@ -10444,7 +10487,7 @@
           <p:cNvPr id="40" name="">
             <a:extLst xmlns:a="http://schemas.openxmlformats.org/drawingml/2006/main">
               <a:ext uri="{FF2B5EF4-FFF2-40B4-BE49-F238E27FC236}">
-                <a16:creationId xmlns:a16="http://schemas.microsoft.com/office/drawing/2014/main" id="{0F66067A-B0B5-41D3-8EE7-0F04C249D2A9}"/>
+                <a16:creationId xmlns:a16="http://schemas.microsoft.com/office/drawing/2014/main" id="{2E165EA1-95DC-4476-B67C-0B15C0F4EFA0}"/>
               </a:ext>
             </a:extLst>
           </p:cNvPr>
@@ -10494,7 +10537,7 @@
           <p:cNvPr id="41" name="">
             <a:extLst xmlns:a="http://schemas.openxmlformats.org/drawingml/2006/main">
               <a:ext uri="{FF2B5EF4-FFF2-40B4-BE49-F238E27FC236}">
-                <a16:creationId xmlns:a16="http://schemas.microsoft.com/office/drawing/2014/main" id="{008B4BD4-2C48-4669-B2EB-4005F228746F}"/>
+                <a16:creationId xmlns:a16="http://schemas.microsoft.com/office/drawing/2014/main" id="{1F9EE9E4-847B-49AD-8170-BD85368D9521}"/>
               </a:ext>
             </a:extLst>
           </p:cNvPr>
@@ -10544,7 +10587,7 @@
           <p:cNvPr id="42" name="">
             <a:extLst xmlns:a="http://schemas.openxmlformats.org/drawingml/2006/main">
               <a:ext uri="{FF2B5EF4-FFF2-40B4-BE49-F238E27FC236}">
-                <a16:creationId xmlns:a16="http://schemas.microsoft.com/office/drawing/2014/main" id="{E7192D22-0E51-40A5-A3EB-EFE3B9FC8A2D}"/>
+                <a16:creationId xmlns:a16="http://schemas.microsoft.com/office/drawing/2014/main" id="{A24C5E65-34B5-454D-A0A3-B9D1D456D925}"/>
               </a:ext>
             </a:extLst>
           </p:cNvPr>
@@ -10594,7 +10637,7 @@
           <p:cNvPr id="43" name="">
             <a:extLst xmlns:a="http://schemas.openxmlformats.org/drawingml/2006/main">
               <a:ext uri="{FF2B5EF4-FFF2-40B4-BE49-F238E27FC236}">
-                <a16:creationId xmlns:a16="http://schemas.microsoft.com/office/drawing/2014/main" id="{5DF44767-2DD1-4E13-A92F-810BA33D9112}"/>
+                <a16:creationId xmlns:a16="http://schemas.microsoft.com/office/drawing/2014/main" id="{2F49E65E-FEBB-42FD-91D4-6C907F73D56E}"/>
               </a:ext>
             </a:extLst>
           </p:cNvPr>
@@ -10627,7 +10670,7 @@
           <p:cNvPr id="44" name="">
             <a:extLst xmlns:a="http://schemas.openxmlformats.org/drawingml/2006/main">
               <a:ext uri="{FF2B5EF4-FFF2-40B4-BE49-F238E27FC236}">
-                <a16:creationId xmlns:a16="http://schemas.microsoft.com/office/drawing/2014/main" id="{AB55EBB8-333E-4784-B9C8-E5F0B536B82D}"/>
+                <a16:creationId xmlns:a16="http://schemas.microsoft.com/office/drawing/2014/main" id="{4A60EEFA-EF46-4499-BC88-08FE7F16344E}"/>
               </a:ext>
             </a:extLst>
           </p:cNvPr>
@@ -10677,7 +10720,7 @@
           <p:cNvPr id="45" name="">
             <a:extLst xmlns:a="http://schemas.openxmlformats.org/drawingml/2006/main">
               <a:ext uri="{FF2B5EF4-FFF2-40B4-BE49-F238E27FC236}">
-                <a16:creationId xmlns:a16="http://schemas.microsoft.com/office/drawing/2014/main" id="{F1AD0319-91CD-42EF-80C9-3224FD666D3B}"/>
+                <a16:creationId xmlns:a16="http://schemas.microsoft.com/office/drawing/2014/main" id="{21D7E4B7-1625-4E4F-8F60-2AF60C66C909}"/>
               </a:ext>
             </a:extLst>
           </p:cNvPr>
@@ -10727,7 +10770,7 @@
           <p:cNvPr id="46" name="">
             <a:extLst xmlns:a="http://schemas.openxmlformats.org/drawingml/2006/main">
               <a:ext uri="{FF2B5EF4-FFF2-40B4-BE49-F238E27FC236}">
-                <a16:creationId xmlns:a16="http://schemas.microsoft.com/office/drawing/2014/main" id="{583474B3-B18E-4AAC-8AA8-7FDC612D09F5}"/>
+                <a16:creationId xmlns:a16="http://schemas.microsoft.com/office/drawing/2014/main" id="{0C535156-704D-48F9-8511-7D9CAD9F99A6}"/>
               </a:ext>
             </a:extLst>
           </p:cNvPr>
@@ -10760,7 +10803,7 @@
           <p:cNvPr id="47" name="">
             <a:extLst xmlns:a="http://schemas.openxmlformats.org/drawingml/2006/main">
               <a:ext uri="{FF2B5EF4-FFF2-40B4-BE49-F238E27FC236}">
-                <a16:creationId xmlns:a16="http://schemas.microsoft.com/office/drawing/2014/main" id="{3F2614BD-5CA2-4CB4-B443-268C22831B87}"/>
+                <a16:creationId xmlns:a16="http://schemas.microsoft.com/office/drawing/2014/main" id="{09D0176E-E2B8-4E5A-8D96-FB5873777BD9}"/>
               </a:ext>
             </a:extLst>
           </p:cNvPr>
@@ -10810,7 +10853,7 @@
           <p:cNvPr id="48" name="">
             <a:extLst xmlns:a="http://schemas.openxmlformats.org/drawingml/2006/main">
               <a:ext uri="{FF2B5EF4-FFF2-40B4-BE49-F238E27FC236}">
-                <a16:creationId xmlns:a16="http://schemas.microsoft.com/office/drawing/2014/main" id="{D3A8CA7C-FDD1-492E-98E4-88A64134B338}"/>
+                <a16:creationId xmlns:a16="http://schemas.microsoft.com/office/drawing/2014/main" id="{BF4003F0-9BAC-4F4A-A7BB-8B402AE69DC2}"/>
               </a:ext>
             </a:extLst>
           </p:cNvPr>
@@ -10860,7 +10903,7 @@
           <p:cNvPr id="49" name="">
             <a:extLst xmlns:a="http://schemas.openxmlformats.org/drawingml/2006/main">
               <a:ext uri="{FF2B5EF4-FFF2-40B4-BE49-F238E27FC236}">
-                <a16:creationId xmlns:a16="http://schemas.microsoft.com/office/drawing/2014/main" id="{FFE50914-09B7-4CD6-8BF2-4157AC8BF206}"/>
+                <a16:creationId xmlns:a16="http://schemas.microsoft.com/office/drawing/2014/main" id="{7E0B2732-159D-4A05-A395-B3A32DC3BCF5}"/>
               </a:ext>
             </a:extLst>
           </p:cNvPr>
@@ -10910,7 +10953,7 @@
           <p:cNvPr id="50" name="">
             <a:extLst xmlns:a="http://schemas.openxmlformats.org/drawingml/2006/main">
               <a:ext uri="{FF2B5EF4-FFF2-40B4-BE49-F238E27FC236}">
-                <a16:creationId xmlns:a16="http://schemas.microsoft.com/office/drawing/2014/main" id="{65DD26E8-FBF1-487E-B974-C7B09942103A}"/>
+                <a16:creationId xmlns:a16="http://schemas.microsoft.com/office/drawing/2014/main" id="{6673AEF1-E82C-46E7-A8A2-86A65A250CC1}"/>
               </a:ext>
             </a:extLst>
           </p:cNvPr>
@@ -10960,7 +11003,7 @@
           <p:cNvPr id="51" name="">
             <a:extLst xmlns:a="http://schemas.openxmlformats.org/drawingml/2006/main">
               <a:ext uri="{FF2B5EF4-FFF2-40B4-BE49-F238E27FC236}">
-                <a16:creationId xmlns:a16="http://schemas.microsoft.com/office/drawing/2014/main" id="{C10DE513-B22C-448B-ADC2-98C8840A7090}"/>
+                <a16:creationId xmlns:a16="http://schemas.microsoft.com/office/drawing/2014/main" id="{0F1E6D5E-59E6-4644-850D-88C53946164F}"/>
               </a:ext>
             </a:extLst>
           </p:cNvPr>
@@ -11010,7 +11053,7 @@
           <p:cNvPr id="52" name="">
             <a:extLst xmlns:a="http://schemas.openxmlformats.org/drawingml/2006/main">
               <a:ext uri="{FF2B5EF4-FFF2-40B4-BE49-F238E27FC236}">
-                <a16:creationId xmlns:a16="http://schemas.microsoft.com/office/drawing/2014/main" id="{4E700A7D-D80B-493C-9865-310CAA39E80F}"/>
+                <a16:creationId xmlns:a16="http://schemas.microsoft.com/office/drawing/2014/main" id="{8FD20327-09D4-4ABC-B7BC-EB630D591CF7}"/>
               </a:ext>
             </a:extLst>
           </p:cNvPr>
@@ -11041,7 +11084,7 @@
           <p:cNvPr id="53" name="">
             <a:extLst xmlns:a="http://schemas.openxmlformats.org/drawingml/2006/main">
               <a:ext uri="{FF2B5EF4-FFF2-40B4-BE49-F238E27FC236}">
-                <a16:creationId xmlns:a16="http://schemas.microsoft.com/office/drawing/2014/main" id="{2E0B2316-7AB8-48D5-B0AE-6B7BF064D60B}"/>
+                <a16:creationId xmlns:a16="http://schemas.microsoft.com/office/drawing/2014/main" id="{5CF41F26-36EF-4649-A1EF-CFA9C9D02257}"/>
               </a:ext>
             </a:extLst>
           </p:cNvPr>
@@ -11091,7 +11134,7 @@
           <p:cNvPr id="54" name="">
             <a:extLst xmlns:a="http://schemas.openxmlformats.org/drawingml/2006/main">
               <a:ext uri="{FF2B5EF4-FFF2-40B4-BE49-F238E27FC236}">
-                <a16:creationId xmlns:a16="http://schemas.microsoft.com/office/drawing/2014/main" id="{6AAE0168-D48D-4B47-8B83-D02D58399F3A}"/>
+                <a16:creationId xmlns:a16="http://schemas.microsoft.com/office/drawing/2014/main" id="{C38B89A4-9CAB-4B01-9B08-55301CD45ACB}"/>
               </a:ext>
             </a:extLst>
           </p:cNvPr>
@@ -11141,7 +11184,7 @@
           <p:cNvPr id="55" name="">
             <a:extLst xmlns:a="http://schemas.openxmlformats.org/drawingml/2006/main">
               <a:ext uri="{FF2B5EF4-FFF2-40B4-BE49-F238E27FC236}">
-                <a16:creationId xmlns:a16="http://schemas.microsoft.com/office/drawing/2014/main" id="{DAD4B6FD-621E-49CF-B538-76BF5166B444}"/>
+                <a16:creationId xmlns:a16="http://schemas.microsoft.com/office/drawing/2014/main" id="{6DBD0FB6-4008-4C83-8C2F-7D4210F2114F}"/>
               </a:ext>
             </a:extLst>
           </p:cNvPr>
@@ -11172,7 +11215,7 @@
           <p:cNvPr id="56" name="">
             <a:extLst xmlns:a="http://schemas.openxmlformats.org/drawingml/2006/main">
               <a:ext uri="{FF2B5EF4-FFF2-40B4-BE49-F238E27FC236}">
-                <a16:creationId xmlns:a16="http://schemas.microsoft.com/office/drawing/2014/main" id="{4481ED83-6ED8-4852-ACAE-6A7046C7A861}"/>
+                <a16:creationId xmlns:a16="http://schemas.microsoft.com/office/drawing/2014/main" id="{3EF985E6-EDD3-456E-95D3-2FB50BAD595E}"/>
               </a:ext>
             </a:extLst>
           </p:cNvPr>
@@ -11222,7 +11265,7 @@
           <p:cNvPr id="57" name="">
             <a:extLst xmlns:a="http://schemas.openxmlformats.org/drawingml/2006/main">
               <a:ext uri="{FF2B5EF4-FFF2-40B4-BE49-F238E27FC236}">
-                <a16:creationId xmlns:a16="http://schemas.microsoft.com/office/drawing/2014/main" id="{6FF9AA7A-38D5-41D0-BC3E-0C5FB12436D7}"/>
+                <a16:creationId xmlns:a16="http://schemas.microsoft.com/office/drawing/2014/main" id="{081292A4-2618-4837-AC58-A52BEEF137B8}"/>
               </a:ext>
             </a:extLst>
           </p:cNvPr>
@@ -11270,7 +11313,7 @@
     </p:spTree>
     <p:extLst>
       <p:ext uri="{BB962C8B-B14F-4D97-AF65-F5344CB8AC3E}">
-        <p14:creationId xmlns:p14="http://schemas.microsoft.com/office/powerpoint/2010/main" val="619709147"/>
+        <p14:creationId xmlns:p14="http://schemas.microsoft.com/office/powerpoint/2010/main" val="190922472"/>
       </p:ext>
     </p:extLst>
   </p:cSld>
@@ -11301,7 +11344,7 @@
           <p:cNvPr id="1" name="">
             <a:extLst xmlns:a="http://schemas.openxmlformats.org/drawingml/2006/main">
               <a:ext uri="{FF2B5EF4-FFF2-40B4-BE49-F238E27FC236}">
-                <a16:creationId xmlns:a16="http://schemas.microsoft.com/office/drawing/2014/main" id="{0EC6D943-F140-48CE-B20D-80738B8ED530}"/>
+                <a16:creationId xmlns:a16="http://schemas.microsoft.com/office/drawing/2014/main" id="{541EC0C0-AA21-4BC7-BBDE-82B9DBDC568E}"/>
               </a:ext>
             </a:extLst>
           </p:cNvPr>
@@ -11329,14 +11372,14 @@
       </p:sp>
       <p:pic>
         <p:nvPicPr>
-          <p:cNvPr id="36" name=""/>
+          <p:cNvPr id="41" name=""/>
           <p:cNvPicPr>
             <a:picLocks xmlns:a="http://schemas.openxmlformats.org/drawingml/2006/main" noChangeAspect="1"/>
           </p:cNvPicPr>
           <p:nvPr/>
         </p:nvPicPr>
         <p:blipFill>
-          <a:blip xmlns:r="http://schemas.openxmlformats.org/officeDocument/2006/relationships" xmlns:a="http://schemas.openxmlformats.org/drawingml/2006/main" r:embed="R087ef7ae03404b3c"/>
+          <a:blip xmlns:r="http://schemas.openxmlformats.org/officeDocument/2006/relationships" xmlns:a="http://schemas.openxmlformats.org/drawingml/2006/main" r:embed="Rb7aa5ee150fe4010"/>
           <a:stretch xmlns:a="http://schemas.openxmlformats.org/drawingml/2006/main"/>
         </p:blipFill>
         <p:spPr>
@@ -11354,7 +11397,7 @@
           <p:cNvPr id="3" name="">
             <a:extLst xmlns:a="http://schemas.openxmlformats.org/drawingml/2006/main">
               <a:ext uri="{FF2B5EF4-FFF2-40B4-BE49-F238E27FC236}">
-                <a16:creationId xmlns:a16="http://schemas.microsoft.com/office/drawing/2014/main" id="{C9506AFA-6A18-485D-B9D3-976CB94B7281}"/>
+                <a16:creationId xmlns:a16="http://schemas.microsoft.com/office/drawing/2014/main" id="{74319602-90CD-4AAD-A0FB-422BCFD2B843}"/>
               </a:ext>
             </a:extLst>
           </p:cNvPr>
@@ -11394,7 +11437,7 @@
                   <a:srgbClr val="102A63"/>
                 </a:solidFill>
               </a:rPr>
-              <a:t>Что должно измениться за первые 90 дней</a:t>
+              <a:t>Профиль угроз и разрывов контроля</a:t>
             </a:r>
           </a:p>
         </p:txBody>
@@ -11404,7 +11447,7 @@
           <p:cNvPr id="4" name="">
             <a:extLst xmlns:a="http://schemas.openxmlformats.org/drawingml/2006/main">
               <a:ext uri="{FF2B5EF4-FFF2-40B4-BE49-F238E27FC236}">
-                <a16:creationId xmlns:a16="http://schemas.microsoft.com/office/drawing/2014/main" id="{07B58343-08A2-48E8-8D89-683274059995}"/>
+                <a16:creationId xmlns:a16="http://schemas.microsoft.com/office/drawing/2014/main" id="{7E89F1EE-B96A-4D39-92F2-5C6663E71D30}"/>
               </a:ext>
             </a:extLst>
           </p:cNvPr>
@@ -11437,7 +11480,7 @@
           <p:cNvPr id="5" name="">
             <a:extLst xmlns:a="http://schemas.openxmlformats.org/drawingml/2006/main">
               <a:ext uri="{FF2B5EF4-FFF2-40B4-BE49-F238E27FC236}">
-                <a16:creationId xmlns:a16="http://schemas.microsoft.com/office/drawing/2014/main" id="{7CD7BA1E-3AF1-4E66-8C3D-27F19BF7DF0C}"/>
+                <a16:creationId xmlns:a16="http://schemas.microsoft.com/office/drawing/2014/main" id="{EDB84B7F-C969-4D77-A86F-4110A2355A78}"/>
               </a:ext>
             </a:extLst>
           </p:cNvPr>
@@ -11468,7 +11511,7 @@
           <p:cNvPr id="6" name="">
             <a:extLst xmlns:a="http://schemas.openxmlformats.org/drawingml/2006/main">
               <a:ext uri="{FF2B5EF4-FFF2-40B4-BE49-F238E27FC236}">
-                <a16:creationId xmlns:a16="http://schemas.microsoft.com/office/drawing/2014/main" id="{FFFEB0D2-C901-454E-A1B7-38A4749D057A}"/>
+                <a16:creationId xmlns:a16="http://schemas.microsoft.com/office/drawing/2014/main" id="{49C15AE3-CF05-4CF9-B06C-295CDA9E2213}"/>
               </a:ext>
             </a:extLst>
           </p:cNvPr>
@@ -11518,7 +11561,7 @@
           <p:cNvPr id="7" name="">
             <a:extLst xmlns:a="http://schemas.openxmlformats.org/drawingml/2006/main">
               <a:ext uri="{FF2B5EF4-FFF2-40B4-BE49-F238E27FC236}">
-                <a16:creationId xmlns:a16="http://schemas.microsoft.com/office/drawing/2014/main" id="{AA8D5CF1-61DE-4555-84AF-F25F62847834}"/>
+                <a16:creationId xmlns:a16="http://schemas.microsoft.com/office/drawing/2014/main" id="{A8245A1D-4008-4FF6-92C8-572034C3A905}"/>
               </a:ext>
             </a:extLst>
           </p:cNvPr>
@@ -11568,7 +11611,7 @@
           <p:cNvPr id="8" name="">
             <a:extLst xmlns:a="http://schemas.openxmlformats.org/drawingml/2006/main">
               <a:ext uri="{FF2B5EF4-FFF2-40B4-BE49-F238E27FC236}">
-                <a16:creationId xmlns:a16="http://schemas.microsoft.com/office/drawing/2014/main" id="{A3C25A12-0D94-4824-8FEC-377CB0283B95}"/>
+                <a16:creationId xmlns:a16="http://schemas.microsoft.com/office/drawing/2014/main" id="{B8026038-8D35-4C63-86CD-348D4DBCEF1A}"/>
               </a:ext>
             </a:extLst>
           </p:cNvPr>
@@ -11580,7 +11623,7 @@
         <p:spPr>
           <a:xfrm xmlns:a="http://schemas.openxmlformats.org/drawingml/2006/main">
             <a:off x="552450" y="1333500"/>
-            <a:ext cx="10648950" cy="400050"/>
+            <a:ext cx="10648950" cy="323850"/>
           </a:xfrm>
           <a:prstGeom xmlns:a="http://schemas.openxmlformats.org/drawingml/2006/main" prst="rect">
             <a:avLst/>
@@ -11596,19 +11639,19 @@
           <a:lstStyle xmlns:a="http://schemas.openxmlformats.org/drawingml/2006/main"/>
           <a:p xmlns:a="http://schemas.openxmlformats.org/drawingml/2006/main">
             <a:pPr>
-              <a:defRPr sz="1500" b="1">
+              <a:defRPr sz="1425" b="1">
                 <a:solidFill>
                   <a:srgbClr val="2048A8"/>
                 </a:solidFill>
               </a:defRPr>
             </a:pPr>
             <a:r>
-              <a:rPr sz="1500" b="1">
+              <a:rPr sz="1425" b="1">
                 <a:solidFill>
                   <a:srgbClr val="2048A8"/>
                 </a:solidFill>
               </a:rPr>
-              <a:t>Четыре приоритета связывают факты анкеты с измеримым результатом</a:t>
+              <a:t>Доля незакрытых контрольных зон по данным анкеты</a:t>
             </a:r>
           </a:p>
         </p:txBody>
@@ -11618,269 +11661,19 @@
           <p:cNvPr id="9" name="">
             <a:extLst xmlns:a="http://schemas.openxmlformats.org/drawingml/2006/main">
               <a:ext uri="{FF2B5EF4-FFF2-40B4-BE49-F238E27FC236}">
-                <a16:creationId xmlns:a16="http://schemas.microsoft.com/office/drawing/2014/main" id="{EF217D6D-1FB4-4990-8FD1-73D9767E4567}"/>
-              </a:ext>
-            </a:extLst>
-          </p:cNvPr>
-          <p:cNvSpPr>
-            <a:spLocks xmlns:a="http://schemas.openxmlformats.org/drawingml/2006/main" noGrp="1"/>
-          </p:cNvSpPr>
-          <p:nvPr/>
-        </p:nvSpPr>
-        <p:spPr>
-          <a:xfrm xmlns:a="http://schemas.openxmlformats.org/drawingml/2006/main">
-            <a:off x="552450" y="1809750"/>
-            <a:ext cx="2571750" cy="209550"/>
-          </a:xfrm>
-          <a:prstGeom xmlns:a="http://schemas.openxmlformats.org/drawingml/2006/main" prst="rect">
-            <a:avLst/>
-          </a:prstGeom>
-          <a:noFill xmlns:a="http://schemas.openxmlformats.org/drawingml/2006/main"/>
-          <a:ln xmlns:a="http://schemas.openxmlformats.org/drawingml/2006/main" w="0">
-            <a:noFill/>
-            <a:prstDash val="solid"/>
-          </a:ln>
-        </p:spPr>
-        <p:txBody>
-          <a:bodyPr xmlns:a="http://schemas.openxmlformats.org/drawingml/2006/main"/>
-          <a:lstStyle xmlns:a="http://schemas.openxmlformats.org/drawingml/2006/main"/>
-          <a:p xmlns:a="http://schemas.openxmlformats.org/drawingml/2006/main">
-            <a:pPr>
-              <a:defRPr sz="825" b="1">
-                <a:solidFill>
-                  <a:srgbClr val="596780"/>
-                </a:solidFill>
-              </a:defRPr>
-            </a:pPr>
-            <a:r>
-              <a:rPr sz="825" b="1">
-                <a:solidFill>
-                  <a:srgbClr val="596780"/>
-                </a:solidFill>
-              </a:rPr>
-              <a:t>ПРИОРИТЕТ</a:t>
-            </a:r>
-          </a:p>
-        </p:txBody>
-      </p:sp>
-      <p:sp>
-        <p:nvSpPr>
-          <p:cNvPr id="10" name="">
-            <a:extLst xmlns:a="http://schemas.openxmlformats.org/drawingml/2006/main">
-              <a:ext uri="{FF2B5EF4-FFF2-40B4-BE49-F238E27FC236}">
-                <a16:creationId xmlns:a16="http://schemas.microsoft.com/office/drawing/2014/main" id="{DA20EC19-C466-432D-A6C7-21DD0BAF9917}"/>
-              </a:ext>
-            </a:extLst>
-          </p:cNvPr>
-          <p:cNvSpPr>
-            <a:spLocks xmlns:a="http://schemas.openxmlformats.org/drawingml/2006/main" noGrp="1"/>
-          </p:cNvSpPr>
-          <p:nvPr/>
-        </p:nvSpPr>
-        <p:spPr>
-          <a:xfrm xmlns:a="http://schemas.openxmlformats.org/drawingml/2006/main">
-            <a:off x="3333750" y="1809750"/>
-            <a:ext cx="3143250" cy="209550"/>
-          </a:xfrm>
-          <a:prstGeom xmlns:a="http://schemas.openxmlformats.org/drawingml/2006/main" prst="rect">
-            <a:avLst/>
-          </a:prstGeom>
-          <a:noFill xmlns:a="http://schemas.openxmlformats.org/drawingml/2006/main"/>
-          <a:ln xmlns:a="http://schemas.openxmlformats.org/drawingml/2006/main" w="0">
-            <a:noFill/>
-            <a:prstDash val="solid"/>
-          </a:ln>
-        </p:spPr>
-        <p:txBody>
-          <a:bodyPr xmlns:a="http://schemas.openxmlformats.org/drawingml/2006/main"/>
-          <a:lstStyle xmlns:a="http://schemas.openxmlformats.org/drawingml/2006/main"/>
-          <a:p xmlns:a="http://schemas.openxmlformats.org/drawingml/2006/main">
-            <a:pPr>
-              <a:defRPr sz="825" b="1">
-                <a:solidFill>
-                  <a:srgbClr val="596780"/>
-                </a:solidFill>
-              </a:defRPr>
-            </a:pPr>
-            <a:r>
-              <a:rPr sz="825" b="1">
-                <a:solidFill>
-                  <a:srgbClr val="596780"/>
-                </a:solidFill>
-              </a:rPr>
-              <a:t>СЕЙЧАС</a:t>
-            </a:r>
-          </a:p>
-        </p:txBody>
-      </p:sp>
-      <p:sp>
-        <p:nvSpPr>
-          <p:cNvPr id="11" name="">
-            <a:extLst xmlns:a="http://schemas.openxmlformats.org/drawingml/2006/main">
-              <a:ext uri="{FF2B5EF4-FFF2-40B4-BE49-F238E27FC236}">
-                <a16:creationId xmlns:a16="http://schemas.microsoft.com/office/drawing/2014/main" id="{6F82D1C5-FFB8-4B11-B9A6-CBCE571D2796}"/>
-              </a:ext>
-            </a:extLst>
-          </p:cNvPr>
-          <p:cNvSpPr>
-            <a:spLocks xmlns:a="http://schemas.openxmlformats.org/drawingml/2006/main" noGrp="1"/>
-          </p:cNvSpPr>
-          <p:nvPr/>
-        </p:nvSpPr>
-        <p:spPr>
-          <a:xfrm xmlns:a="http://schemas.openxmlformats.org/drawingml/2006/main">
-            <a:off x="7239000" y="1809750"/>
-            <a:ext cx="3962400" cy="209550"/>
-          </a:xfrm>
-          <a:prstGeom xmlns:a="http://schemas.openxmlformats.org/drawingml/2006/main" prst="rect">
-            <a:avLst/>
-          </a:prstGeom>
-          <a:noFill xmlns:a="http://schemas.openxmlformats.org/drawingml/2006/main"/>
-          <a:ln xmlns:a="http://schemas.openxmlformats.org/drawingml/2006/main" w="0">
-            <a:noFill/>
-            <a:prstDash val="solid"/>
-          </a:ln>
-        </p:spPr>
-        <p:txBody>
-          <a:bodyPr xmlns:a="http://schemas.openxmlformats.org/drawingml/2006/main"/>
-          <a:lstStyle xmlns:a="http://schemas.openxmlformats.org/drawingml/2006/main"/>
-          <a:p xmlns:a="http://schemas.openxmlformats.org/drawingml/2006/main">
-            <a:pPr>
-              <a:defRPr sz="825" b="1">
-                <a:solidFill>
-                  <a:srgbClr val="596780"/>
-                </a:solidFill>
-              </a:defRPr>
-            </a:pPr>
-            <a:r>
-              <a:rPr sz="825" b="1">
-                <a:solidFill>
-                  <a:srgbClr val="596780"/>
-                </a:solidFill>
-              </a:rPr>
-              <a:t>ЦЕЛЬ 90 ДНЕЙ</a:t>
-            </a:r>
-          </a:p>
-        </p:txBody>
-      </p:sp>
-      <p:sp>
-        <p:nvSpPr>
-          <p:cNvPr id="12" name="">
-            <a:extLst xmlns:a="http://schemas.openxmlformats.org/drawingml/2006/main">
-              <a:ext uri="{FF2B5EF4-FFF2-40B4-BE49-F238E27FC236}">
-                <a16:creationId xmlns:a16="http://schemas.microsoft.com/office/drawing/2014/main" id="{2DC0D798-B16A-4237-A208-8CC41900E3A1}"/>
-              </a:ext>
-            </a:extLst>
-          </p:cNvPr>
-          <p:cNvSpPr>
-            <a:spLocks xmlns:a="http://schemas.openxmlformats.org/drawingml/2006/main" noGrp="1"/>
-          </p:cNvSpPr>
-          <p:nvPr/>
-        </p:nvSpPr>
-        <p:spPr>
-          <a:xfrm xmlns:a="http://schemas.openxmlformats.org/drawingml/2006/main">
-            <a:off x="552450" y="2190750"/>
-            <a:ext cx="419100" cy="266700"/>
-          </a:xfrm>
-          <a:prstGeom xmlns:a="http://schemas.openxmlformats.org/drawingml/2006/main" prst="rect">
-            <a:avLst/>
-          </a:prstGeom>
-          <a:noFill xmlns:a="http://schemas.openxmlformats.org/drawingml/2006/main"/>
-          <a:ln xmlns:a="http://schemas.openxmlformats.org/drawingml/2006/main" w="0">
-            <a:noFill/>
-            <a:prstDash val="solid"/>
-          </a:ln>
-        </p:spPr>
-        <p:txBody>
-          <a:bodyPr xmlns:a="http://schemas.openxmlformats.org/drawingml/2006/main"/>
-          <a:lstStyle xmlns:a="http://schemas.openxmlformats.org/drawingml/2006/main"/>
-          <a:p xmlns:a="http://schemas.openxmlformats.org/drawingml/2006/main">
-            <a:pPr>
-              <a:defRPr sz="1125" b="1">
-                <a:solidFill>
-                  <a:srgbClr val="2048A8"/>
-                </a:solidFill>
-              </a:defRPr>
-            </a:pPr>
-            <a:r>
-              <a:rPr sz="1125" b="1">
-                <a:solidFill>
-                  <a:srgbClr val="2048A8"/>
-                </a:solidFill>
-              </a:rPr>
-              <a:t>01</a:t>
-            </a:r>
-          </a:p>
-        </p:txBody>
-      </p:sp>
-      <p:sp>
-        <p:nvSpPr>
-          <p:cNvPr id="13" name="">
-            <a:extLst xmlns:a="http://schemas.openxmlformats.org/drawingml/2006/main">
-              <a:ext uri="{FF2B5EF4-FFF2-40B4-BE49-F238E27FC236}">
-                <a16:creationId xmlns:a16="http://schemas.microsoft.com/office/drawing/2014/main" id="{86BA16FE-4124-422E-A18A-0F46C89E991D}"/>
-              </a:ext>
-            </a:extLst>
-          </p:cNvPr>
-          <p:cNvSpPr>
-            <a:spLocks xmlns:a="http://schemas.openxmlformats.org/drawingml/2006/main" noGrp="1"/>
-          </p:cNvSpPr>
-          <p:nvPr/>
-        </p:nvSpPr>
-        <p:spPr>
-          <a:xfrm xmlns:a="http://schemas.openxmlformats.org/drawingml/2006/main">
-            <a:off x="1047750" y="2152650"/>
-            <a:ext cx="2076450" cy="647700"/>
-          </a:xfrm>
-          <a:prstGeom xmlns:a="http://schemas.openxmlformats.org/drawingml/2006/main" prst="rect">
-            <a:avLst/>
-          </a:prstGeom>
-          <a:noFill xmlns:a="http://schemas.openxmlformats.org/drawingml/2006/main"/>
-          <a:ln xmlns:a="http://schemas.openxmlformats.org/drawingml/2006/main" w="0">
-            <a:noFill/>
-            <a:prstDash val="solid"/>
-          </a:ln>
-        </p:spPr>
-        <p:txBody>
-          <a:bodyPr xmlns:a="http://schemas.openxmlformats.org/drawingml/2006/main"/>
-          <a:lstStyle xmlns:a="http://schemas.openxmlformats.org/drawingml/2006/main"/>
-          <a:p xmlns:a="http://schemas.openxmlformats.org/drawingml/2006/main">
-            <a:pPr>
-              <a:defRPr sz="1275" b="1">
-                <a:solidFill>
-                  <a:srgbClr val="102A63"/>
-                </a:solidFill>
-              </a:defRPr>
-            </a:pPr>
-            <a:r>
-              <a:rPr sz="1275" b="1">
-                <a:solidFill>
-                  <a:srgbClr val="102A63"/>
-                </a:solidFill>
-              </a:rPr>
-              <a:t>{{OUTCOME_1_TITLE}}</a:t>
-            </a:r>
-          </a:p>
-        </p:txBody>
-      </p:sp>
-      <p:sp>
-        <p:nvSpPr>
-          <p:cNvPr id="14" name="">
-            <a:extLst xmlns:a="http://schemas.openxmlformats.org/drawingml/2006/main">
-              <a:ext uri="{FF2B5EF4-FFF2-40B4-BE49-F238E27FC236}">
-                <a16:creationId xmlns:a16="http://schemas.microsoft.com/office/drawing/2014/main" id="{E4D32BCD-DBA2-43C1-94A2-76C8111091B0}"/>
-              </a:ext>
-            </a:extLst>
-          </p:cNvPr>
-          <p:cNvSpPr>
-            <a:spLocks xmlns:a="http://schemas.openxmlformats.org/drawingml/2006/main" noGrp="1"/>
-          </p:cNvSpPr>
-          <p:nvPr/>
-        </p:nvSpPr>
-        <p:spPr>
-          <a:xfrm xmlns:a="http://schemas.openxmlformats.org/drawingml/2006/main">
-            <a:off x="3333750" y="2152650"/>
-            <a:ext cx="3143250" cy="685800"/>
+                <a16:creationId xmlns:a16="http://schemas.microsoft.com/office/drawing/2014/main" id="{AB91BC53-EF2B-4283-B5E8-E0F097830401}"/>
+              </a:ext>
+            </a:extLst>
+          </p:cNvPr>
+          <p:cNvSpPr>
+            <a:spLocks xmlns:a="http://schemas.openxmlformats.org/drawingml/2006/main" noGrp="1"/>
+          </p:cNvSpPr>
+          <p:nvPr/>
+        </p:nvSpPr>
+        <p:spPr>
+          <a:xfrm xmlns:a="http://schemas.openxmlformats.org/drawingml/2006/main">
+            <a:off x="552450" y="1695450"/>
+            <a:ext cx="10648950" cy="266700"/>
           </a:xfrm>
           <a:prstGeom xmlns:a="http://schemas.openxmlformats.org/drawingml/2006/main" prst="rect">
             <a:avLst/>
@@ -11908,7 +11701,219 @@
                   <a:srgbClr val="596780"/>
                 </a:solidFill>
               </a:rPr>
-              <a:t>{{OUTCOME_1_FROM}}</a:t>
+              <a:t>Красный требует первоочередного решения, желтый — управляемого плана, зеленый — контроля эффективности.</a:t>
+            </a:r>
+          </a:p>
+        </p:txBody>
+      </p:sp>
+      <p:sp>
+        <p:nvSpPr>
+          <p:cNvPr id="10" name="">
+            <a:extLst xmlns:a="http://schemas.openxmlformats.org/drawingml/2006/main">
+              <a:ext uri="{FF2B5EF4-FFF2-40B4-BE49-F238E27FC236}">
+                <a16:creationId xmlns:a16="http://schemas.microsoft.com/office/drawing/2014/main" id="{0A0A2EE7-71B2-49A9-A6F4-E465DDD63C31}"/>
+              </a:ext>
+            </a:extLst>
+          </p:cNvPr>
+          <p:cNvSpPr>
+            <a:spLocks xmlns:a="http://schemas.openxmlformats.org/drawingml/2006/main" noGrp="1"/>
+          </p:cNvSpPr>
+          <p:nvPr/>
+        </p:nvSpPr>
+        <p:spPr>
+          <a:xfrm xmlns:a="http://schemas.openxmlformats.org/drawingml/2006/main">
+            <a:off x="1085850" y="2247900"/>
+            <a:ext cx="1257300" cy="1257300"/>
+          </a:xfrm>
+          <a:prstGeom xmlns:a="http://schemas.openxmlformats.org/drawingml/2006/main" prst="ellipse">
+            <a:avLst/>
+          </a:prstGeom>
+          <a:solidFill xmlns:a="http://schemas.openxmlformats.org/drawingml/2006/main">
+            <a:srgbClr val="B30001"/>
+          </a:solidFill>
+          <a:ln xmlns:a="http://schemas.openxmlformats.org/drawingml/2006/main" w="0">
+            <a:noFill/>
+            <a:prstDash val="solid"/>
+          </a:ln>
+        </p:spPr>
+      </p:sp>
+      <p:sp>
+        <p:nvSpPr>
+          <p:cNvPr id="11" name="">
+            <a:extLst xmlns:a="http://schemas.openxmlformats.org/drawingml/2006/main">
+              <a:ext uri="{FF2B5EF4-FFF2-40B4-BE49-F238E27FC236}">
+                <a16:creationId xmlns:a16="http://schemas.microsoft.com/office/drawing/2014/main" id="{CF5B16B8-12FD-46C7-B949-BBADBD5C11F4}"/>
+              </a:ext>
+            </a:extLst>
+          </p:cNvPr>
+          <p:cNvSpPr>
+            <a:spLocks xmlns:a="http://schemas.openxmlformats.org/drawingml/2006/main" noGrp="1"/>
+          </p:cNvSpPr>
+          <p:nvPr/>
+        </p:nvSpPr>
+        <p:spPr>
+          <a:xfrm xmlns:a="http://schemas.openxmlformats.org/drawingml/2006/main">
+            <a:off x="1257300" y="2419350"/>
+            <a:ext cx="914400" cy="914400"/>
+          </a:xfrm>
+          <a:prstGeom xmlns:a="http://schemas.openxmlformats.org/drawingml/2006/main" prst="ellipse">
+            <a:avLst/>
+          </a:prstGeom>
+          <a:solidFill xmlns:a="http://schemas.openxmlformats.org/drawingml/2006/main">
+            <a:srgbClr val="FFFFFF"/>
+          </a:solidFill>
+          <a:ln xmlns:a="http://schemas.openxmlformats.org/drawingml/2006/main" w="0">
+            <a:noFill/>
+            <a:prstDash val="solid"/>
+          </a:ln>
+        </p:spPr>
+      </p:sp>
+      <p:sp>
+        <p:nvSpPr>
+          <p:cNvPr id="12" name="">
+            <a:extLst xmlns:a="http://schemas.openxmlformats.org/drawingml/2006/main">
+              <a:ext uri="{FF2B5EF4-FFF2-40B4-BE49-F238E27FC236}">
+                <a16:creationId xmlns:a16="http://schemas.microsoft.com/office/drawing/2014/main" id="{E3DEF19B-BE9E-4A14-AA3D-52170338079A}"/>
+              </a:ext>
+            </a:extLst>
+          </p:cNvPr>
+          <p:cNvSpPr>
+            <a:spLocks xmlns:a="http://schemas.openxmlformats.org/drawingml/2006/main" noGrp="1"/>
+          </p:cNvSpPr>
+          <p:nvPr/>
+        </p:nvSpPr>
+        <p:spPr>
+          <a:xfrm xmlns:a="http://schemas.openxmlformats.org/drawingml/2006/main">
+            <a:off x="1295400" y="2695575"/>
+            <a:ext cx="838200" cy="361950"/>
+          </a:xfrm>
+          <a:prstGeom xmlns:a="http://schemas.openxmlformats.org/drawingml/2006/main" prst="rect">
+            <a:avLst/>
+          </a:prstGeom>
+          <a:noFill xmlns:a="http://schemas.openxmlformats.org/drawingml/2006/main"/>
+          <a:ln xmlns:a="http://schemas.openxmlformats.org/drawingml/2006/main" w="0">
+            <a:noFill/>
+            <a:prstDash val="solid"/>
+          </a:ln>
+        </p:spPr>
+        <p:txBody>
+          <a:bodyPr xmlns:a="http://schemas.openxmlformats.org/drawingml/2006/main"/>
+          <a:lstStyle xmlns:a="http://schemas.openxmlformats.org/drawingml/2006/main"/>
+          <a:p xmlns:a="http://schemas.openxmlformats.org/drawingml/2006/main">
+            <a:pPr algn="ctr">
+              <a:defRPr sz="1800" b="1">
+                <a:solidFill>
+                  <a:srgbClr val="102A63"/>
+                </a:solidFill>
+              </a:defRPr>
+            </a:pPr>
+            <a:r>
+              <a:rPr sz="1800" b="1">
+                <a:solidFill>
+                  <a:srgbClr val="102A63"/>
+                </a:solidFill>
+              </a:rPr>
+              <a:t>{{THREAT_1_VALUE}}%</a:t>
+            </a:r>
+          </a:p>
+        </p:txBody>
+      </p:sp>
+      <p:sp>
+        <p:nvSpPr>
+          <p:cNvPr id="13" name="">
+            <a:extLst xmlns:a="http://schemas.openxmlformats.org/drawingml/2006/main">
+              <a:ext uri="{FF2B5EF4-FFF2-40B4-BE49-F238E27FC236}">
+                <a16:creationId xmlns:a16="http://schemas.microsoft.com/office/drawing/2014/main" id="{2A65D7AF-D442-4108-BA6B-862AFF88899F}"/>
+              </a:ext>
+            </a:extLst>
+          </p:cNvPr>
+          <p:cNvSpPr>
+            <a:spLocks xmlns:a="http://schemas.openxmlformats.org/drawingml/2006/main" noGrp="1"/>
+          </p:cNvSpPr>
+          <p:nvPr/>
+        </p:nvSpPr>
+        <p:spPr>
+          <a:xfrm xmlns:a="http://schemas.openxmlformats.org/drawingml/2006/main">
+            <a:off x="590550" y="3638550"/>
+            <a:ext cx="2247900" cy="323850"/>
+          </a:xfrm>
+          <a:prstGeom xmlns:a="http://schemas.openxmlformats.org/drawingml/2006/main" prst="rect">
+            <a:avLst/>
+          </a:prstGeom>
+          <a:noFill xmlns:a="http://schemas.openxmlformats.org/drawingml/2006/main"/>
+          <a:ln xmlns:a="http://schemas.openxmlformats.org/drawingml/2006/main" w="0">
+            <a:noFill/>
+            <a:prstDash val="solid"/>
+          </a:ln>
+        </p:spPr>
+        <p:txBody>
+          <a:bodyPr xmlns:a="http://schemas.openxmlformats.org/drawingml/2006/main"/>
+          <a:lstStyle xmlns:a="http://schemas.openxmlformats.org/drawingml/2006/main"/>
+          <a:p xmlns:a="http://schemas.openxmlformats.org/drawingml/2006/main">
+            <a:pPr algn="ctr">
+              <a:defRPr sz="1200" b="1">
+                <a:solidFill>
+                  <a:srgbClr val="102A63"/>
+                </a:solidFill>
+              </a:defRPr>
+            </a:pPr>
+            <a:r>
+              <a:rPr sz="1200" b="1">
+                <a:solidFill>
+                  <a:srgbClr val="102A63"/>
+                </a:solidFill>
+              </a:rPr>
+              <a:t>{{THREAT_1_LABEL}}</a:t>
+            </a:r>
+          </a:p>
+        </p:txBody>
+      </p:sp>
+      <p:sp>
+        <p:nvSpPr>
+          <p:cNvPr id="14" name="">
+            <a:extLst xmlns:a="http://schemas.openxmlformats.org/drawingml/2006/main">
+              <a:ext uri="{FF2B5EF4-FFF2-40B4-BE49-F238E27FC236}">
+                <a16:creationId xmlns:a16="http://schemas.microsoft.com/office/drawing/2014/main" id="{C60C2F6B-5EBF-4317-AA93-CD156E6E13F4}"/>
+              </a:ext>
+            </a:extLst>
+          </p:cNvPr>
+          <p:cNvSpPr>
+            <a:spLocks xmlns:a="http://schemas.openxmlformats.org/drawingml/2006/main" noGrp="1"/>
+          </p:cNvSpPr>
+          <p:nvPr/>
+        </p:nvSpPr>
+        <p:spPr>
+          <a:xfrm xmlns:a="http://schemas.openxmlformats.org/drawingml/2006/main">
+            <a:off x="590550" y="3933825"/>
+            <a:ext cx="2247900" cy="209550"/>
+          </a:xfrm>
+          <a:prstGeom xmlns:a="http://schemas.openxmlformats.org/drawingml/2006/main" prst="rect">
+            <a:avLst/>
+          </a:prstGeom>
+          <a:noFill xmlns:a="http://schemas.openxmlformats.org/drawingml/2006/main"/>
+          <a:ln xmlns:a="http://schemas.openxmlformats.org/drawingml/2006/main" w="0">
+            <a:noFill/>
+            <a:prstDash val="solid"/>
+          </a:ln>
+        </p:spPr>
+        <p:txBody>
+          <a:bodyPr xmlns:a="http://schemas.openxmlformats.org/drawingml/2006/main"/>
+          <a:lstStyle xmlns:a="http://schemas.openxmlformats.org/drawingml/2006/main"/>
+          <a:p xmlns:a="http://schemas.openxmlformats.org/drawingml/2006/main">
+            <a:pPr algn="ctr">
+              <a:defRPr sz="900">
+                <a:solidFill>
+                  <a:srgbClr val="596780"/>
+                </a:solidFill>
+              </a:defRPr>
+            </a:pPr>
+            <a:r>
+              <a:rPr sz="900">
+                <a:solidFill>
+                  <a:srgbClr val="596780"/>
+                </a:solidFill>
+              </a:rPr>
+              <a:t>разрыв контроля</a:t>
             </a:r>
           </a:p>
         </p:txBody>
@@ -11918,19 +11923,81 @@
           <p:cNvPr id="15" name="">
             <a:extLst xmlns:a="http://schemas.openxmlformats.org/drawingml/2006/main">
               <a:ext uri="{FF2B5EF4-FFF2-40B4-BE49-F238E27FC236}">
-                <a16:creationId xmlns:a16="http://schemas.microsoft.com/office/drawing/2014/main" id="{5BA6CB32-2EA1-4B92-8F41-F0F963690E27}"/>
-              </a:ext>
-            </a:extLst>
-          </p:cNvPr>
-          <p:cNvSpPr>
-            <a:spLocks xmlns:a="http://schemas.openxmlformats.org/drawingml/2006/main" noGrp="1"/>
-          </p:cNvSpPr>
-          <p:nvPr/>
-        </p:nvSpPr>
-        <p:spPr>
-          <a:xfrm xmlns:a="http://schemas.openxmlformats.org/drawingml/2006/main">
-            <a:off x="6667500" y="2266950"/>
-            <a:ext cx="381000" cy="342900"/>
+                <a16:creationId xmlns:a16="http://schemas.microsoft.com/office/drawing/2014/main" id="{48B9498A-C3E4-4208-AD01-BD303572EA57}"/>
+              </a:ext>
+            </a:extLst>
+          </p:cNvPr>
+          <p:cNvSpPr>
+            <a:spLocks xmlns:a="http://schemas.openxmlformats.org/drawingml/2006/main" noGrp="1"/>
+          </p:cNvSpPr>
+          <p:nvPr/>
+        </p:nvSpPr>
+        <p:spPr>
+          <a:xfrm xmlns:a="http://schemas.openxmlformats.org/drawingml/2006/main">
+            <a:off x="4724400" y="2247900"/>
+            <a:ext cx="1257300" cy="1257300"/>
+          </a:xfrm>
+          <a:prstGeom xmlns:a="http://schemas.openxmlformats.org/drawingml/2006/main" prst="ellipse">
+            <a:avLst/>
+          </a:prstGeom>
+          <a:solidFill xmlns:a="http://schemas.openxmlformats.org/drawingml/2006/main">
+            <a:srgbClr val="B30002"/>
+          </a:solidFill>
+          <a:ln xmlns:a="http://schemas.openxmlformats.org/drawingml/2006/main" w="0">
+            <a:noFill/>
+            <a:prstDash val="solid"/>
+          </a:ln>
+        </p:spPr>
+      </p:sp>
+      <p:sp>
+        <p:nvSpPr>
+          <p:cNvPr id="16" name="">
+            <a:extLst xmlns:a="http://schemas.openxmlformats.org/drawingml/2006/main">
+              <a:ext uri="{FF2B5EF4-FFF2-40B4-BE49-F238E27FC236}">
+                <a16:creationId xmlns:a16="http://schemas.microsoft.com/office/drawing/2014/main" id="{8F503777-301F-47F7-B636-CA5FF81B5CAE}"/>
+              </a:ext>
+            </a:extLst>
+          </p:cNvPr>
+          <p:cNvSpPr>
+            <a:spLocks xmlns:a="http://schemas.openxmlformats.org/drawingml/2006/main" noGrp="1"/>
+          </p:cNvSpPr>
+          <p:nvPr/>
+        </p:nvSpPr>
+        <p:spPr>
+          <a:xfrm xmlns:a="http://schemas.openxmlformats.org/drawingml/2006/main">
+            <a:off x="4895850" y="2419350"/>
+            <a:ext cx="914400" cy="914400"/>
+          </a:xfrm>
+          <a:prstGeom xmlns:a="http://schemas.openxmlformats.org/drawingml/2006/main" prst="ellipse">
+            <a:avLst/>
+          </a:prstGeom>
+          <a:solidFill xmlns:a="http://schemas.openxmlformats.org/drawingml/2006/main">
+            <a:srgbClr val="FFFFFF"/>
+          </a:solidFill>
+          <a:ln xmlns:a="http://schemas.openxmlformats.org/drawingml/2006/main" w="0">
+            <a:noFill/>
+            <a:prstDash val="solid"/>
+          </a:ln>
+        </p:spPr>
+      </p:sp>
+      <p:sp>
+        <p:nvSpPr>
+          <p:cNvPr id="17" name="">
+            <a:extLst xmlns:a="http://schemas.openxmlformats.org/drawingml/2006/main">
+              <a:ext uri="{FF2B5EF4-FFF2-40B4-BE49-F238E27FC236}">
+                <a16:creationId xmlns:a16="http://schemas.microsoft.com/office/drawing/2014/main" id="{6A14865D-5903-4859-9498-75A7AF3FFAA1}"/>
+              </a:ext>
+            </a:extLst>
+          </p:cNvPr>
+          <p:cNvSpPr>
+            <a:spLocks xmlns:a="http://schemas.openxmlformats.org/drawingml/2006/main" noGrp="1"/>
+          </p:cNvSpPr>
+          <p:nvPr/>
+        </p:nvSpPr>
+        <p:spPr>
+          <a:xfrm xmlns:a="http://schemas.openxmlformats.org/drawingml/2006/main">
+            <a:off x="4933950" y="2695575"/>
+            <a:ext cx="838200" cy="361950"/>
           </a:xfrm>
           <a:prstGeom xmlns:a="http://schemas.openxmlformats.org/drawingml/2006/main" prst="rect">
             <a:avLst/>
@@ -11946,97 +12013,147 @@
           <a:lstStyle xmlns:a="http://schemas.openxmlformats.org/drawingml/2006/main"/>
           <a:p xmlns:a="http://schemas.openxmlformats.org/drawingml/2006/main">
             <a:pPr algn="ctr">
-              <a:defRPr sz="1950" b="1">
-                <a:solidFill>
-                  <a:srgbClr val="2048A8"/>
-                </a:solidFill>
-              </a:defRPr>
-            </a:pPr>
-            <a:r>
-              <a:rPr sz="1950" b="1">
-                <a:solidFill>
-                  <a:srgbClr val="2048A8"/>
-                </a:solidFill>
-              </a:rPr>
-              <a:t>→</a:t>
-            </a:r>
-          </a:p>
-        </p:txBody>
-      </p:sp>
-      <p:sp>
-        <p:nvSpPr>
-          <p:cNvPr id="16" name="">
-            <a:extLst xmlns:a="http://schemas.openxmlformats.org/drawingml/2006/main">
-              <a:ext uri="{FF2B5EF4-FFF2-40B4-BE49-F238E27FC236}">
-                <a16:creationId xmlns:a16="http://schemas.microsoft.com/office/drawing/2014/main" id="{69D3ACFD-A97C-4886-A2FB-C03204F5F008}"/>
-              </a:ext>
-            </a:extLst>
-          </p:cNvPr>
-          <p:cNvSpPr>
-            <a:spLocks xmlns:a="http://schemas.openxmlformats.org/drawingml/2006/main" noGrp="1"/>
-          </p:cNvSpPr>
-          <p:nvPr/>
-        </p:nvSpPr>
-        <p:spPr>
-          <a:xfrm xmlns:a="http://schemas.openxmlformats.org/drawingml/2006/main">
-            <a:off x="7239000" y="2152650"/>
-            <a:ext cx="3962400" cy="685800"/>
-          </a:xfrm>
-          <a:prstGeom xmlns:a="http://schemas.openxmlformats.org/drawingml/2006/main" prst="rect">
-            <a:avLst/>
-          </a:prstGeom>
-          <a:noFill xmlns:a="http://schemas.openxmlformats.org/drawingml/2006/main"/>
-          <a:ln xmlns:a="http://schemas.openxmlformats.org/drawingml/2006/main" w="0">
-            <a:noFill/>
-            <a:prstDash val="solid"/>
-          </a:ln>
-        </p:spPr>
-        <p:txBody>
-          <a:bodyPr xmlns:a="http://schemas.openxmlformats.org/drawingml/2006/main"/>
-          <a:lstStyle xmlns:a="http://schemas.openxmlformats.org/drawingml/2006/main"/>
-          <a:p xmlns:a="http://schemas.openxmlformats.org/drawingml/2006/main">
-            <a:pPr>
-              <a:defRPr sz="1125" b="1">
-                <a:solidFill>
-                  <a:srgbClr val="102A63"/>
-                </a:solidFill>
-              </a:defRPr>
-            </a:pPr>
-            <a:r>
-              <a:rPr sz="1125" b="1">
-                <a:solidFill>
-                  <a:srgbClr val="102A63"/>
-                </a:solidFill>
-              </a:rPr>
-              <a:t>{{OUTCOME_1_TO}}</a:t>
-            </a:r>
-          </a:p>
-        </p:txBody>
-      </p:sp>
-      <p:sp>
-        <p:nvSpPr>
-          <p:cNvPr id="17" name="">
-            <a:extLst xmlns:a="http://schemas.openxmlformats.org/drawingml/2006/main">
-              <a:ext uri="{FF2B5EF4-FFF2-40B4-BE49-F238E27FC236}">
-                <a16:creationId xmlns:a16="http://schemas.microsoft.com/office/drawing/2014/main" id="{A82DAA41-2B15-43EF-850C-65711B36935C}"/>
-              </a:ext>
-            </a:extLst>
-          </p:cNvPr>
-          <p:cNvSpPr>
-            <a:spLocks xmlns:a="http://schemas.openxmlformats.org/drawingml/2006/main" noGrp="1"/>
-          </p:cNvSpPr>
-          <p:nvPr/>
-        </p:nvSpPr>
-        <p:spPr>
-          <a:xfrm xmlns:a="http://schemas.openxmlformats.org/drawingml/2006/main">
-            <a:off x="552450" y="2990850"/>
-            <a:ext cx="10648950" cy="9525"/>
-          </a:xfrm>
-          <a:prstGeom xmlns:a="http://schemas.openxmlformats.org/drawingml/2006/main" prst="rect">
+              <a:defRPr sz="1800" b="1">
+                <a:solidFill>
+                  <a:srgbClr val="102A63"/>
+                </a:solidFill>
+              </a:defRPr>
+            </a:pPr>
+            <a:r>
+              <a:rPr sz="1800" b="1">
+                <a:solidFill>
+                  <a:srgbClr val="102A63"/>
+                </a:solidFill>
+              </a:rPr>
+              <a:t>{{THREAT_2_VALUE}}%</a:t>
+            </a:r>
+          </a:p>
+        </p:txBody>
+      </p:sp>
+      <p:sp>
+        <p:nvSpPr>
+          <p:cNvPr id="18" name="">
+            <a:extLst xmlns:a="http://schemas.openxmlformats.org/drawingml/2006/main">
+              <a:ext uri="{FF2B5EF4-FFF2-40B4-BE49-F238E27FC236}">
+                <a16:creationId xmlns:a16="http://schemas.microsoft.com/office/drawing/2014/main" id="{B7A41FFA-1550-4B70-9AB7-9A7079724161}"/>
+              </a:ext>
+            </a:extLst>
+          </p:cNvPr>
+          <p:cNvSpPr>
+            <a:spLocks xmlns:a="http://schemas.openxmlformats.org/drawingml/2006/main" noGrp="1"/>
+          </p:cNvSpPr>
+          <p:nvPr/>
+        </p:nvSpPr>
+        <p:spPr>
+          <a:xfrm xmlns:a="http://schemas.openxmlformats.org/drawingml/2006/main">
+            <a:off x="4229100" y="3638550"/>
+            <a:ext cx="2247900" cy="323850"/>
+          </a:xfrm>
+          <a:prstGeom xmlns:a="http://schemas.openxmlformats.org/drawingml/2006/main" prst="rect">
+            <a:avLst/>
+          </a:prstGeom>
+          <a:noFill xmlns:a="http://schemas.openxmlformats.org/drawingml/2006/main"/>
+          <a:ln xmlns:a="http://schemas.openxmlformats.org/drawingml/2006/main" w="0">
+            <a:noFill/>
+            <a:prstDash val="solid"/>
+          </a:ln>
+        </p:spPr>
+        <p:txBody>
+          <a:bodyPr xmlns:a="http://schemas.openxmlformats.org/drawingml/2006/main"/>
+          <a:lstStyle xmlns:a="http://schemas.openxmlformats.org/drawingml/2006/main"/>
+          <a:p xmlns:a="http://schemas.openxmlformats.org/drawingml/2006/main">
+            <a:pPr algn="ctr">
+              <a:defRPr sz="1200" b="1">
+                <a:solidFill>
+                  <a:srgbClr val="102A63"/>
+                </a:solidFill>
+              </a:defRPr>
+            </a:pPr>
+            <a:r>
+              <a:rPr sz="1200" b="1">
+                <a:solidFill>
+                  <a:srgbClr val="102A63"/>
+                </a:solidFill>
+              </a:rPr>
+              <a:t>{{THREAT_2_LABEL}}</a:t>
+            </a:r>
+          </a:p>
+        </p:txBody>
+      </p:sp>
+      <p:sp>
+        <p:nvSpPr>
+          <p:cNvPr id="19" name="">
+            <a:extLst xmlns:a="http://schemas.openxmlformats.org/drawingml/2006/main">
+              <a:ext uri="{FF2B5EF4-FFF2-40B4-BE49-F238E27FC236}">
+                <a16:creationId xmlns:a16="http://schemas.microsoft.com/office/drawing/2014/main" id="{D52223B0-30E4-4345-BF90-870873E2414A}"/>
+              </a:ext>
+            </a:extLst>
+          </p:cNvPr>
+          <p:cNvSpPr>
+            <a:spLocks xmlns:a="http://schemas.openxmlformats.org/drawingml/2006/main" noGrp="1"/>
+          </p:cNvSpPr>
+          <p:nvPr/>
+        </p:nvSpPr>
+        <p:spPr>
+          <a:xfrm xmlns:a="http://schemas.openxmlformats.org/drawingml/2006/main">
+            <a:off x="4229100" y="3933825"/>
+            <a:ext cx="2247900" cy="209550"/>
+          </a:xfrm>
+          <a:prstGeom xmlns:a="http://schemas.openxmlformats.org/drawingml/2006/main" prst="rect">
+            <a:avLst/>
+          </a:prstGeom>
+          <a:noFill xmlns:a="http://schemas.openxmlformats.org/drawingml/2006/main"/>
+          <a:ln xmlns:a="http://schemas.openxmlformats.org/drawingml/2006/main" w="0">
+            <a:noFill/>
+            <a:prstDash val="solid"/>
+          </a:ln>
+        </p:spPr>
+        <p:txBody>
+          <a:bodyPr xmlns:a="http://schemas.openxmlformats.org/drawingml/2006/main"/>
+          <a:lstStyle xmlns:a="http://schemas.openxmlformats.org/drawingml/2006/main"/>
+          <a:p xmlns:a="http://schemas.openxmlformats.org/drawingml/2006/main">
+            <a:pPr algn="ctr">
+              <a:defRPr sz="900">
+                <a:solidFill>
+                  <a:srgbClr val="596780"/>
+                </a:solidFill>
+              </a:defRPr>
+            </a:pPr>
+            <a:r>
+              <a:rPr sz="900">
+                <a:solidFill>
+                  <a:srgbClr val="596780"/>
+                </a:solidFill>
+              </a:rPr>
+              <a:t>разрыв контроля</a:t>
+            </a:r>
+          </a:p>
+        </p:txBody>
+      </p:sp>
+      <p:sp>
+        <p:nvSpPr>
+          <p:cNvPr id="20" name="">
+            <a:extLst xmlns:a="http://schemas.openxmlformats.org/drawingml/2006/main">
+              <a:ext uri="{FF2B5EF4-FFF2-40B4-BE49-F238E27FC236}">
+                <a16:creationId xmlns:a16="http://schemas.microsoft.com/office/drawing/2014/main" id="{0E90FA1A-86E3-470E-967B-297C3EFF8B6E}"/>
+              </a:ext>
+            </a:extLst>
+          </p:cNvPr>
+          <p:cNvSpPr>
+            <a:spLocks xmlns:a="http://schemas.openxmlformats.org/drawingml/2006/main" noGrp="1"/>
+          </p:cNvSpPr>
+          <p:nvPr/>
+        </p:nvSpPr>
+        <p:spPr>
+          <a:xfrm xmlns:a="http://schemas.openxmlformats.org/drawingml/2006/main">
+            <a:off x="8362950" y="2247900"/>
+            <a:ext cx="1257300" cy="1257300"/>
+          </a:xfrm>
+          <a:prstGeom xmlns:a="http://schemas.openxmlformats.org/drawingml/2006/main" prst="ellipse">
             <a:avLst/>
           </a:prstGeom>
           <a:solidFill xmlns:a="http://schemas.openxmlformats.org/drawingml/2006/main">
-            <a:srgbClr val="D7E0F2"/>
+            <a:srgbClr val="B30003"/>
           </a:solidFill>
           <a:ln xmlns:a="http://schemas.openxmlformats.org/drawingml/2006/main" w="0">
             <a:noFill/>
@@ -12046,172 +12163,265 @@
       </p:sp>
       <p:sp>
         <p:nvSpPr>
-          <p:cNvPr id="18" name="">
-            <a:extLst xmlns:a="http://schemas.openxmlformats.org/drawingml/2006/main">
-              <a:ext uri="{FF2B5EF4-FFF2-40B4-BE49-F238E27FC236}">
-                <a16:creationId xmlns:a16="http://schemas.microsoft.com/office/drawing/2014/main" id="{4C27024C-F4FF-4F17-9673-D6A4F6673766}"/>
-              </a:ext>
-            </a:extLst>
-          </p:cNvPr>
-          <p:cNvSpPr>
-            <a:spLocks xmlns:a="http://schemas.openxmlformats.org/drawingml/2006/main" noGrp="1"/>
-          </p:cNvSpPr>
-          <p:nvPr/>
-        </p:nvSpPr>
-        <p:spPr>
-          <a:xfrm xmlns:a="http://schemas.openxmlformats.org/drawingml/2006/main">
-            <a:off x="552450" y="3219450"/>
-            <a:ext cx="419100" cy="266700"/>
-          </a:xfrm>
-          <a:prstGeom xmlns:a="http://schemas.openxmlformats.org/drawingml/2006/main" prst="rect">
-            <a:avLst/>
-          </a:prstGeom>
-          <a:noFill xmlns:a="http://schemas.openxmlformats.org/drawingml/2006/main"/>
-          <a:ln xmlns:a="http://schemas.openxmlformats.org/drawingml/2006/main" w="0">
-            <a:noFill/>
-            <a:prstDash val="solid"/>
-          </a:ln>
-        </p:spPr>
-        <p:txBody>
-          <a:bodyPr xmlns:a="http://schemas.openxmlformats.org/drawingml/2006/main"/>
-          <a:lstStyle xmlns:a="http://schemas.openxmlformats.org/drawingml/2006/main"/>
-          <a:p xmlns:a="http://schemas.openxmlformats.org/drawingml/2006/main">
-            <a:pPr>
-              <a:defRPr sz="1125" b="1">
-                <a:solidFill>
-                  <a:srgbClr val="2048A8"/>
-                </a:solidFill>
-              </a:defRPr>
-            </a:pPr>
-            <a:r>
-              <a:rPr sz="1125" b="1">
-                <a:solidFill>
-                  <a:srgbClr val="2048A8"/>
-                </a:solidFill>
-              </a:rPr>
-              <a:t>02</a:t>
-            </a:r>
-          </a:p>
-        </p:txBody>
-      </p:sp>
-      <p:sp>
-        <p:nvSpPr>
-          <p:cNvPr id="19" name="">
-            <a:extLst xmlns:a="http://schemas.openxmlformats.org/drawingml/2006/main">
-              <a:ext uri="{FF2B5EF4-FFF2-40B4-BE49-F238E27FC236}">
-                <a16:creationId xmlns:a16="http://schemas.microsoft.com/office/drawing/2014/main" id="{291DB472-6E30-4DC4-875C-22E179BB3074}"/>
-              </a:ext>
-            </a:extLst>
-          </p:cNvPr>
-          <p:cNvSpPr>
-            <a:spLocks xmlns:a="http://schemas.openxmlformats.org/drawingml/2006/main" noGrp="1"/>
-          </p:cNvSpPr>
-          <p:nvPr/>
-        </p:nvSpPr>
-        <p:spPr>
-          <a:xfrm xmlns:a="http://schemas.openxmlformats.org/drawingml/2006/main">
-            <a:off x="1047750" y="3181350"/>
-            <a:ext cx="2076450" cy="647700"/>
-          </a:xfrm>
-          <a:prstGeom xmlns:a="http://schemas.openxmlformats.org/drawingml/2006/main" prst="rect">
-            <a:avLst/>
-          </a:prstGeom>
-          <a:noFill xmlns:a="http://schemas.openxmlformats.org/drawingml/2006/main"/>
-          <a:ln xmlns:a="http://schemas.openxmlformats.org/drawingml/2006/main" w="0">
-            <a:noFill/>
-            <a:prstDash val="solid"/>
-          </a:ln>
-        </p:spPr>
-        <p:txBody>
-          <a:bodyPr xmlns:a="http://schemas.openxmlformats.org/drawingml/2006/main"/>
-          <a:lstStyle xmlns:a="http://schemas.openxmlformats.org/drawingml/2006/main"/>
-          <a:p xmlns:a="http://schemas.openxmlformats.org/drawingml/2006/main">
-            <a:pPr>
-              <a:defRPr sz="1275" b="1">
-                <a:solidFill>
-                  <a:srgbClr val="102A63"/>
-                </a:solidFill>
-              </a:defRPr>
-            </a:pPr>
-            <a:r>
-              <a:rPr sz="1275" b="1">
-                <a:solidFill>
-                  <a:srgbClr val="102A63"/>
-                </a:solidFill>
-              </a:rPr>
-              <a:t>{{OUTCOME_2_TITLE}}</a:t>
-            </a:r>
-          </a:p>
-        </p:txBody>
-      </p:sp>
-      <p:sp>
-        <p:nvSpPr>
-          <p:cNvPr id="20" name="">
-            <a:extLst xmlns:a="http://schemas.openxmlformats.org/drawingml/2006/main">
-              <a:ext uri="{FF2B5EF4-FFF2-40B4-BE49-F238E27FC236}">
-                <a16:creationId xmlns:a16="http://schemas.microsoft.com/office/drawing/2014/main" id="{E2586501-30A1-4877-9030-B3721ABCE98A}"/>
-              </a:ext>
-            </a:extLst>
-          </p:cNvPr>
-          <p:cNvSpPr>
-            <a:spLocks xmlns:a="http://schemas.openxmlformats.org/drawingml/2006/main" noGrp="1"/>
-          </p:cNvSpPr>
-          <p:nvPr/>
-        </p:nvSpPr>
-        <p:spPr>
-          <a:xfrm xmlns:a="http://schemas.openxmlformats.org/drawingml/2006/main">
-            <a:off x="3333750" y="3181350"/>
-            <a:ext cx="3143250" cy="685800"/>
-          </a:xfrm>
-          <a:prstGeom xmlns:a="http://schemas.openxmlformats.org/drawingml/2006/main" prst="rect">
-            <a:avLst/>
-          </a:prstGeom>
-          <a:noFill xmlns:a="http://schemas.openxmlformats.org/drawingml/2006/main"/>
-          <a:ln xmlns:a="http://schemas.openxmlformats.org/drawingml/2006/main" w="0">
-            <a:noFill/>
-            <a:prstDash val="solid"/>
-          </a:ln>
-        </p:spPr>
-        <p:txBody>
-          <a:bodyPr xmlns:a="http://schemas.openxmlformats.org/drawingml/2006/main"/>
-          <a:lstStyle xmlns:a="http://schemas.openxmlformats.org/drawingml/2006/main"/>
-          <a:p xmlns:a="http://schemas.openxmlformats.org/drawingml/2006/main">
-            <a:pPr>
-              <a:defRPr sz="1050">
+          <p:cNvPr id="21" name="">
+            <a:extLst xmlns:a="http://schemas.openxmlformats.org/drawingml/2006/main">
+              <a:ext uri="{FF2B5EF4-FFF2-40B4-BE49-F238E27FC236}">
+                <a16:creationId xmlns:a16="http://schemas.microsoft.com/office/drawing/2014/main" id="{6B02597D-C116-4803-92E5-6DA26D7B2F02}"/>
+              </a:ext>
+            </a:extLst>
+          </p:cNvPr>
+          <p:cNvSpPr>
+            <a:spLocks xmlns:a="http://schemas.openxmlformats.org/drawingml/2006/main" noGrp="1"/>
+          </p:cNvSpPr>
+          <p:nvPr/>
+        </p:nvSpPr>
+        <p:spPr>
+          <a:xfrm xmlns:a="http://schemas.openxmlformats.org/drawingml/2006/main">
+            <a:off x="8534400" y="2419350"/>
+            <a:ext cx="914400" cy="914400"/>
+          </a:xfrm>
+          <a:prstGeom xmlns:a="http://schemas.openxmlformats.org/drawingml/2006/main" prst="ellipse">
+            <a:avLst/>
+          </a:prstGeom>
+          <a:solidFill xmlns:a="http://schemas.openxmlformats.org/drawingml/2006/main">
+            <a:srgbClr val="FFFFFF"/>
+          </a:solidFill>
+          <a:ln xmlns:a="http://schemas.openxmlformats.org/drawingml/2006/main" w="0">
+            <a:noFill/>
+            <a:prstDash val="solid"/>
+          </a:ln>
+        </p:spPr>
+      </p:sp>
+      <p:sp>
+        <p:nvSpPr>
+          <p:cNvPr id="22" name="">
+            <a:extLst xmlns:a="http://schemas.openxmlformats.org/drawingml/2006/main">
+              <a:ext uri="{FF2B5EF4-FFF2-40B4-BE49-F238E27FC236}">
+                <a16:creationId xmlns:a16="http://schemas.microsoft.com/office/drawing/2014/main" id="{BFD8AEB1-C99A-4055-ACD2-5B19BFC132B3}"/>
+              </a:ext>
+            </a:extLst>
+          </p:cNvPr>
+          <p:cNvSpPr>
+            <a:spLocks xmlns:a="http://schemas.openxmlformats.org/drawingml/2006/main" noGrp="1"/>
+          </p:cNvSpPr>
+          <p:nvPr/>
+        </p:nvSpPr>
+        <p:spPr>
+          <a:xfrm xmlns:a="http://schemas.openxmlformats.org/drawingml/2006/main">
+            <a:off x="8572500" y="2695575"/>
+            <a:ext cx="838200" cy="361950"/>
+          </a:xfrm>
+          <a:prstGeom xmlns:a="http://schemas.openxmlformats.org/drawingml/2006/main" prst="rect">
+            <a:avLst/>
+          </a:prstGeom>
+          <a:noFill xmlns:a="http://schemas.openxmlformats.org/drawingml/2006/main"/>
+          <a:ln xmlns:a="http://schemas.openxmlformats.org/drawingml/2006/main" w="0">
+            <a:noFill/>
+            <a:prstDash val="solid"/>
+          </a:ln>
+        </p:spPr>
+        <p:txBody>
+          <a:bodyPr xmlns:a="http://schemas.openxmlformats.org/drawingml/2006/main"/>
+          <a:lstStyle xmlns:a="http://schemas.openxmlformats.org/drawingml/2006/main"/>
+          <a:p xmlns:a="http://schemas.openxmlformats.org/drawingml/2006/main">
+            <a:pPr algn="ctr">
+              <a:defRPr sz="1800" b="1">
+                <a:solidFill>
+                  <a:srgbClr val="102A63"/>
+                </a:solidFill>
+              </a:defRPr>
+            </a:pPr>
+            <a:r>
+              <a:rPr sz="1800" b="1">
+                <a:solidFill>
+                  <a:srgbClr val="102A63"/>
+                </a:solidFill>
+              </a:rPr>
+              <a:t>{{THREAT_3_VALUE}}%</a:t>
+            </a:r>
+          </a:p>
+        </p:txBody>
+      </p:sp>
+      <p:sp>
+        <p:nvSpPr>
+          <p:cNvPr id="23" name="">
+            <a:extLst xmlns:a="http://schemas.openxmlformats.org/drawingml/2006/main">
+              <a:ext uri="{FF2B5EF4-FFF2-40B4-BE49-F238E27FC236}">
+                <a16:creationId xmlns:a16="http://schemas.microsoft.com/office/drawing/2014/main" id="{8D33A0A3-4161-4E03-8D99-93BEB6DCBD33}"/>
+              </a:ext>
+            </a:extLst>
+          </p:cNvPr>
+          <p:cNvSpPr>
+            <a:spLocks xmlns:a="http://schemas.openxmlformats.org/drawingml/2006/main" noGrp="1"/>
+          </p:cNvSpPr>
+          <p:nvPr/>
+        </p:nvSpPr>
+        <p:spPr>
+          <a:xfrm xmlns:a="http://schemas.openxmlformats.org/drawingml/2006/main">
+            <a:off x="7867650" y="3638550"/>
+            <a:ext cx="2247900" cy="323850"/>
+          </a:xfrm>
+          <a:prstGeom xmlns:a="http://schemas.openxmlformats.org/drawingml/2006/main" prst="rect">
+            <a:avLst/>
+          </a:prstGeom>
+          <a:noFill xmlns:a="http://schemas.openxmlformats.org/drawingml/2006/main"/>
+          <a:ln xmlns:a="http://schemas.openxmlformats.org/drawingml/2006/main" w="0">
+            <a:noFill/>
+            <a:prstDash val="solid"/>
+          </a:ln>
+        </p:spPr>
+        <p:txBody>
+          <a:bodyPr xmlns:a="http://schemas.openxmlformats.org/drawingml/2006/main"/>
+          <a:lstStyle xmlns:a="http://schemas.openxmlformats.org/drawingml/2006/main"/>
+          <a:p xmlns:a="http://schemas.openxmlformats.org/drawingml/2006/main">
+            <a:pPr algn="ctr">
+              <a:defRPr sz="1200" b="1">
+                <a:solidFill>
+                  <a:srgbClr val="102A63"/>
+                </a:solidFill>
+              </a:defRPr>
+            </a:pPr>
+            <a:r>
+              <a:rPr sz="1200" b="1">
+                <a:solidFill>
+                  <a:srgbClr val="102A63"/>
+                </a:solidFill>
+              </a:rPr>
+              <a:t>{{THREAT_3_LABEL}}</a:t>
+            </a:r>
+          </a:p>
+        </p:txBody>
+      </p:sp>
+      <p:sp>
+        <p:nvSpPr>
+          <p:cNvPr id="24" name="">
+            <a:extLst xmlns:a="http://schemas.openxmlformats.org/drawingml/2006/main">
+              <a:ext uri="{FF2B5EF4-FFF2-40B4-BE49-F238E27FC236}">
+                <a16:creationId xmlns:a16="http://schemas.microsoft.com/office/drawing/2014/main" id="{A6829768-41F2-45E3-9DFD-A6942ECBD3F1}"/>
+              </a:ext>
+            </a:extLst>
+          </p:cNvPr>
+          <p:cNvSpPr>
+            <a:spLocks xmlns:a="http://schemas.openxmlformats.org/drawingml/2006/main" noGrp="1"/>
+          </p:cNvSpPr>
+          <p:nvPr/>
+        </p:nvSpPr>
+        <p:spPr>
+          <a:xfrm xmlns:a="http://schemas.openxmlformats.org/drawingml/2006/main">
+            <a:off x="7867650" y="3933825"/>
+            <a:ext cx="2247900" cy="209550"/>
+          </a:xfrm>
+          <a:prstGeom xmlns:a="http://schemas.openxmlformats.org/drawingml/2006/main" prst="rect">
+            <a:avLst/>
+          </a:prstGeom>
+          <a:noFill xmlns:a="http://schemas.openxmlformats.org/drawingml/2006/main"/>
+          <a:ln xmlns:a="http://schemas.openxmlformats.org/drawingml/2006/main" w="0">
+            <a:noFill/>
+            <a:prstDash val="solid"/>
+          </a:ln>
+        </p:spPr>
+        <p:txBody>
+          <a:bodyPr xmlns:a="http://schemas.openxmlformats.org/drawingml/2006/main"/>
+          <a:lstStyle xmlns:a="http://schemas.openxmlformats.org/drawingml/2006/main"/>
+          <a:p xmlns:a="http://schemas.openxmlformats.org/drawingml/2006/main">
+            <a:pPr algn="ctr">
+              <a:defRPr sz="900">
                 <a:solidFill>
                   <a:srgbClr val="596780"/>
                 </a:solidFill>
               </a:defRPr>
             </a:pPr>
             <a:r>
-              <a:rPr sz="1050">
+              <a:rPr sz="900">
                 <a:solidFill>
                   <a:srgbClr val="596780"/>
                 </a:solidFill>
               </a:rPr>
-              <a:t>{{OUTCOME_2_FROM}}</a:t>
-            </a:r>
-          </a:p>
-        </p:txBody>
-      </p:sp>
-      <p:sp>
-        <p:nvSpPr>
-          <p:cNvPr id="21" name="">
-            <a:extLst xmlns:a="http://schemas.openxmlformats.org/drawingml/2006/main">
-              <a:ext uri="{FF2B5EF4-FFF2-40B4-BE49-F238E27FC236}">
-                <a16:creationId xmlns:a16="http://schemas.microsoft.com/office/drawing/2014/main" id="{3EFFEE24-A6CE-47F4-9675-651B09C8DDD6}"/>
-              </a:ext>
-            </a:extLst>
-          </p:cNvPr>
-          <p:cNvSpPr>
-            <a:spLocks xmlns:a="http://schemas.openxmlformats.org/drawingml/2006/main" noGrp="1"/>
-          </p:cNvSpPr>
-          <p:nvPr/>
-        </p:nvSpPr>
-        <p:spPr>
-          <a:xfrm xmlns:a="http://schemas.openxmlformats.org/drawingml/2006/main">
-            <a:off x="6667500" y="3295650"/>
-            <a:ext cx="381000" cy="342900"/>
+              <a:t>разрыв контроля</a:t>
+            </a:r>
+          </a:p>
+        </p:txBody>
+      </p:sp>
+      <p:sp>
+        <p:nvSpPr>
+          <p:cNvPr id="25" name="">
+            <a:extLst xmlns:a="http://schemas.openxmlformats.org/drawingml/2006/main">
+              <a:ext uri="{FF2B5EF4-FFF2-40B4-BE49-F238E27FC236}">
+                <a16:creationId xmlns:a16="http://schemas.microsoft.com/office/drawing/2014/main" id="{5EA8FEE3-D993-44F6-BFF1-0BFB49AB62B4}"/>
+              </a:ext>
+            </a:extLst>
+          </p:cNvPr>
+          <p:cNvSpPr>
+            <a:spLocks xmlns:a="http://schemas.openxmlformats.org/drawingml/2006/main" noGrp="1"/>
+          </p:cNvSpPr>
+          <p:nvPr/>
+        </p:nvSpPr>
+        <p:spPr>
+          <a:xfrm xmlns:a="http://schemas.openxmlformats.org/drawingml/2006/main">
+            <a:off x="1085850" y="4248150"/>
+            <a:ext cx="1257300" cy="1257300"/>
+          </a:xfrm>
+          <a:prstGeom xmlns:a="http://schemas.openxmlformats.org/drawingml/2006/main" prst="ellipse">
+            <a:avLst/>
+          </a:prstGeom>
+          <a:solidFill xmlns:a="http://schemas.openxmlformats.org/drawingml/2006/main">
+            <a:srgbClr val="B30004"/>
+          </a:solidFill>
+          <a:ln xmlns:a="http://schemas.openxmlformats.org/drawingml/2006/main" w="0">
+            <a:noFill/>
+            <a:prstDash val="solid"/>
+          </a:ln>
+        </p:spPr>
+      </p:sp>
+      <p:sp>
+        <p:nvSpPr>
+          <p:cNvPr id="26" name="">
+            <a:extLst xmlns:a="http://schemas.openxmlformats.org/drawingml/2006/main">
+              <a:ext uri="{FF2B5EF4-FFF2-40B4-BE49-F238E27FC236}">
+                <a16:creationId xmlns:a16="http://schemas.microsoft.com/office/drawing/2014/main" id="{F31E3A33-03C2-4B54-8ACE-BD069BBFB647}"/>
+              </a:ext>
+            </a:extLst>
+          </p:cNvPr>
+          <p:cNvSpPr>
+            <a:spLocks xmlns:a="http://schemas.openxmlformats.org/drawingml/2006/main" noGrp="1"/>
+          </p:cNvSpPr>
+          <p:nvPr/>
+        </p:nvSpPr>
+        <p:spPr>
+          <a:xfrm xmlns:a="http://schemas.openxmlformats.org/drawingml/2006/main">
+            <a:off x="1257300" y="4419600"/>
+            <a:ext cx="914400" cy="914400"/>
+          </a:xfrm>
+          <a:prstGeom xmlns:a="http://schemas.openxmlformats.org/drawingml/2006/main" prst="ellipse">
+            <a:avLst/>
+          </a:prstGeom>
+          <a:solidFill xmlns:a="http://schemas.openxmlformats.org/drawingml/2006/main">
+            <a:srgbClr val="FFFFFF"/>
+          </a:solidFill>
+          <a:ln xmlns:a="http://schemas.openxmlformats.org/drawingml/2006/main" w="0">
+            <a:noFill/>
+            <a:prstDash val="solid"/>
+          </a:ln>
+        </p:spPr>
+      </p:sp>
+      <p:sp>
+        <p:nvSpPr>
+          <p:cNvPr id="27" name="">
+            <a:extLst xmlns:a="http://schemas.openxmlformats.org/drawingml/2006/main">
+              <a:ext uri="{FF2B5EF4-FFF2-40B4-BE49-F238E27FC236}">
+                <a16:creationId xmlns:a16="http://schemas.microsoft.com/office/drawing/2014/main" id="{DA1FCEAE-18C9-4B76-A134-ED26B3457609}"/>
+              </a:ext>
+            </a:extLst>
+          </p:cNvPr>
+          <p:cNvSpPr>
+            <a:spLocks xmlns:a="http://schemas.openxmlformats.org/drawingml/2006/main" noGrp="1"/>
+          </p:cNvSpPr>
+          <p:nvPr/>
+        </p:nvSpPr>
+        <p:spPr>
+          <a:xfrm xmlns:a="http://schemas.openxmlformats.org/drawingml/2006/main">
+            <a:off x="1295400" y="4695825"/>
+            <a:ext cx="838200" cy="361950"/>
           </a:xfrm>
           <a:prstGeom xmlns:a="http://schemas.openxmlformats.org/drawingml/2006/main" prst="rect">
             <a:avLst/>
@@ -12227,97 +12437,147 @@
           <a:lstStyle xmlns:a="http://schemas.openxmlformats.org/drawingml/2006/main"/>
           <a:p xmlns:a="http://schemas.openxmlformats.org/drawingml/2006/main">
             <a:pPr algn="ctr">
-              <a:defRPr sz="1950" b="1">
-                <a:solidFill>
-                  <a:srgbClr val="2048A8"/>
-                </a:solidFill>
-              </a:defRPr>
-            </a:pPr>
-            <a:r>
-              <a:rPr sz="1950" b="1">
-                <a:solidFill>
-                  <a:srgbClr val="2048A8"/>
-                </a:solidFill>
-              </a:rPr>
-              <a:t>→</a:t>
-            </a:r>
-          </a:p>
-        </p:txBody>
-      </p:sp>
-      <p:sp>
-        <p:nvSpPr>
-          <p:cNvPr id="22" name="">
-            <a:extLst xmlns:a="http://schemas.openxmlformats.org/drawingml/2006/main">
-              <a:ext uri="{FF2B5EF4-FFF2-40B4-BE49-F238E27FC236}">
-                <a16:creationId xmlns:a16="http://schemas.microsoft.com/office/drawing/2014/main" id="{19A49694-6F89-40B3-84B5-406B2F7CFE63}"/>
-              </a:ext>
-            </a:extLst>
-          </p:cNvPr>
-          <p:cNvSpPr>
-            <a:spLocks xmlns:a="http://schemas.openxmlformats.org/drawingml/2006/main" noGrp="1"/>
-          </p:cNvSpPr>
-          <p:nvPr/>
-        </p:nvSpPr>
-        <p:spPr>
-          <a:xfrm xmlns:a="http://schemas.openxmlformats.org/drawingml/2006/main">
-            <a:off x="7239000" y="3181350"/>
-            <a:ext cx="3962400" cy="685800"/>
-          </a:xfrm>
-          <a:prstGeom xmlns:a="http://schemas.openxmlformats.org/drawingml/2006/main" prst="rect">
-            <a:avLst/>
-          </a:prstGeom>
-          <a:noFill xmlns:a="http://schemas.openxmlformats.org/drawingml/2006/main"/>
-          <a:ln xmlns:a="http://schemas.openxmlformats.org/drawingml/2006/main" w="0">
-            <a:noFill/>
-            <a:prstDash val="solid"/>
-          </a:ln>
-        </p:spPr>
-        <p:txBody>
-          <a:bodyPr xmlns:a="http://schemas.openxmlformats.org/drawingml/2006/main"/>
-          <a:lstStyle xmlns:a="http://schemas.openxmlformats.org/drawingml/2006/main"/>
-          <a:p xmlns:a="http://schemas.openxmlformats.org/drawingml/2006/main">
-            <a:pPr>
-              <a:defRPr sz="1125" b="1">
-                <a:solidFill>
-                  <a:srgbClr val="102A63"/>
-                </a:solidFill>
-              </a:defRPr>
-            </a:pPr>
-            <a:r>
-              <a:rPr sz="1125" b="1">
-                <a:solidFill>
-                  <a:srgbClr val="102A63"/>
-                </a:solidFill>
-              </a:rPr>
-              <a:t>{{OUTCOME_2_TO}}</a:t>
-            </a:r>
-          </a:p>
-        </p:txBody>
-      </p:sp>
-      <p:sp>
-        <p:nvSpPr>
-          <p:cNvPr id="23" name="">
-            <a:extLst xmlns:a="http://schemas.openxmlformats.org/drawingml/2006/main">
-              <a:ext uri="{FF2B5EF4-FFF2-40B4-BE49-F238E27FC236}">
-                <a16:creationId xmlns:a16="http://schemas.microsoft.com/office/drawing/2014/main" id="{41A1FD24-4889-4645-9D62-3234E175DFEF}"/>
-              </a:ext>
-            </a:extLst>
-          </p:cNvPr>
-          <p:cNvSpPr>
-            <a:spLocks xmlns:a="http://schemas.openxmlformats.org/drawingml/2006/main" noGrp="1"/>
-          </p:cNvSpPr>
-          <p:nvPr/>
-        </p:nvSpPr>
-        <p:spPr>
-          <a:xfrm xmlns:a="http://schemas.openxmlformats.org/drawingml/2006/main">
-            <a:off x="552450" y="4019550"/>
-            <a:ext cx="10648950" cy="9525"/>
-          </a:xfrm>
-          <a:prstGeom xmlns:a="http://schemas.openxmlformats.org/drawingml/2006/main" prst="rect">
+              <a:defRPr sz="1800" b="1">
+                <a:solidFill>
+                  <a:srgbClr val="102A63"/>
+                </a:solidFill>
+              </a:defRPr>
+            </a:pPr>
+            <a:r>
+              <a:rPr sz="1800" b="1">
+                <a:solidFill>
+                  <a:srgbClr val="102A63"/>
+                </a:solidFill>
+              </a:rPr>
+              <a:t>{{THREAT_4_VALUE}}%</a:t>
+            </a:r>
+          </a:p>
+        </p:txBody>
+      </p:sp>
+      <p:sp>
+        <p:nvSpPr>
+          <p:cNvPr id="28" name="">
+            <a:extLst xmlns:a="http://schemas.openxmlformats.org/drawingml/2006/main">
+              <a:ext uri="{FF2B5EF4-FFF2-40B4-BE49-F238E27FC236}">
+                <a16:creationId xmlns:a16="http://schemas.microsoft.com/office/drawing/2014/main" id="{43B526A8-3B90-4E29-9715-1744EBDE42C4}"/>
+              </a:ext>
+            </a:extLst>
+          </p:cNvPr>
+          <p:cNvSpPr>
+            <a:spLocks xmlns:a="http://schemas.openxmlformats.org/drawingml/2006/main" noGrp="1"/>
+          </p:cNvSpPr>
+          <p:nvPr/>
+        </p:nvSpPr>
+        <p:spPr>
+          <a:xfrm xmlns:a="http://schemas.openxmlformats.org/drawingml/2006/main">
+            <a:off x="590550" y="5638800"/>
+            <a:ext cx="2247900" cy="323850"/>
+          </a:xfrm>
+          <a:prstGeom xmlns:a="http://schemas.openxmlformats.org/drawingml/2006/main" prst="rect">
+            <a:avLst/>
+          </a:prstGeom>
+          <a:noFill xmlns:a="http://schemas.openxmlformats.org/drawingml/2006/main"/>
+          <a:ln xmlns:a="http://schemas.openxmlformats.org/drawingml/2006/main" w="0">
+            <a:noFill/>
+            <a:prstDash val="solid"/>
+          </a:ln>
+        </p:spPr>
+        <p:txBody>
+          <a:bodyPr xmlns:a="http://schemas.openxmlformats.org/drawingml/2006/main"/>
+          <a:lstStyle xmlns:a="http://schemas.openxmlformats.org/drawingml/2006/main"/>
+          <a:p xmlns:a="http://schemas.openxmlformats.org/drawingml/2006/main">
+            <a:pPr algn="ctr">
+              <a:defRPr sz="1200" b="1">
+                <a:solidFill>
+                  <a:srgbClr val="102A63"/>
+                </a:solidFill>
+              </a:defRPr>
+            </a:pPr>
+            <a:r>
+              <a:rPr sz="1200" b="1">
+                <a:solidFill>
+                  <a:srgbClr val="102A63"/>
+                </a:solidFill>
+              </a:rPr>
+              <a:t>{{THREAT_4_LABEL}}</a:t>
+            </a:r>
+          </a:p>
+        </p:txBody>
+      </p:sp>
+      <p:sp>
+        <p:nvSpPr>
+          <p:cNvPr id="29" name="">
+            <a:extLst xmlns:a="http://schemas.openxmlformats.org/drawingml/2006/main">
+              <a:ext uri="{FF2B5EF4-FFF2-40B4-BE49-F238E27FC236}">
+                <a16:creationId xmlns:a16="http://schemas.microsoft.com/office/drawing/2014/main" id="{A7A1860E-59DE-40A3-A137-CCF5CDD0BA9B}"/>
+              </a:ext>
+            </a:extLst>
+          </p:cNvPr>
+          <p:cNvSpPr>
+            <a:spLocks xmlns:a="http://schemas.openxmlformats.org/drawingml/2006/main" noGrp="1"/>
+          </p:cNvSpPr>
+          <p:nvPr/>
+        </p:nvSpPr>
+        <p:spPr>
+          <a:xfrm xmlns:a="http://schemas.openxmlformats.org/drawingml/2006/main">
+            <a:off x="590550" y="5934075"/>
+            <a:ext cx="2247900" cy="209550"/>
+          </a:xfrm>
+          <a:prstGeom xmlns:a="http://schemas.openxmlformats.org/drawingml/2006/main" prst="rect">
+            <a:avLst/>
+          </a:prstGeom>
+          <a:noFill xmlns:a="http://schemas.openxmlformats.org/drawingml/2006/main"/>
+          <a:ln xmlns:a="http://schemas.openxmlformats.org/drawingml/2006/main" w="0">
+            <a:noFill/>
+            <a:prstDash val="solid"/>
+          </a:ln>
+        </p:spPr>
+        <p:txBody>
+          <a:bodyPr xmlns:a="http://schemas.openxmlformats.org/drawingml/2006/main"/>
+          <a:lstStyle xmlns:a="http://schemas.openxmlformats.org/drawingml/2006/main"/>
+          <a:p xmlns:a="http://schemas.openxmlformats.org/drawingml/2006/main">
+            <a:pPr algn="ctr">
+              <a:defRPr sz="900">
+                <a:solidFill>
+                  <a:srgbClr val="596780"/>
+                </a:solidFill>
+              </a:defRPr>
+            </a:pPr>
+            <a:r>
+              <a:rPr sz="900">
+                <a:solidFill>
+                  <a:srgbClr val="596780"/>
+                </a:solidFill>
+              </a:rPr>
+              <a:t>разрыв контроля</a:t>
+            </a:r>
+          </a:p>
+        </p:txBody>
+      </p:sp>
+      <p:sp>
+        <p:nvSpPr>
+          <p:cNvPr id="30" name="">
+            <a:extLst xmlns:a="http://schemas.openxmlformats.org/drawingml/2006/main">
+              <a:ext uri="{FF2B5EF4-FFF2-40B4-BE49-F238E27FC236}">
+                <a16:creationId xmlns:a16="http://schemas.microsoft.com/office/drawing/2014/main" id="{49941764-6AA8-4C9B-9093-31B4564DDCCE}"/>
+              </a:ext>
+            </a:extLst>
+          </p:cNvPr>
+          <p:cNvSpPr>
+            <a:spLocks xmlns:a="http://schemas.openxmlformats.org/drawingml/2006/main" noGrp="1"/>
+          </p:cNvSpPr>
+          <p:nvPr/>
+        </p:nvSpPr>
+        <p:spPr>
+          <a:xfrm xmlns:a="http://schemas.openxmlformats.org/drawingml/2006/main">
+            <a:off x="4724400" y="4248150"/>
+            <a:ext cx="1257300" cy="1257300"/>
+          </a:xfrm>
+          <a:prstGeom xmlns:a="http://schemas.openxmlformats.org/drawingml/2006/main" prst="ellipse">
             <a:avLst/>
           </a:prstGeom>
           <a:solidFill xmlns:a="http://schemas.openxmlformats.org/drawingml/2006/main">
-            <a:srgbClr val="D7E0F2"/>
+            <a:srgbClr val="B30005"/>
           </a:solidFill>
           <a:ln xmlns:a="http://schemas.openxmlformats.org/drawingml/2006/main" w="0">
             <a:noFill/>
@@ -12327,172 +12587,265 @@
       </p:sp>
       <p:sp>
         <p:nvSpPr>
-          <p:cNvPr id="24" name="">
-            <a:extLst xmlns:a="http://schemas.openxmlformats.org/drawingml/2006/main">
-              <a:ext uri="{FF2B5EF4-FFF2-40B4-BE49-F238E27FC236}">
-                <a16:creationId xmlns:a16="http://schemas.microsoft.com/office/drawing/2014/main" id="{A121EE08-6D3F-4B34-A0E2-AA059CCA5D30}"/>
-              </a:ext>
-            </a:extLst>
-          </p:cNvPr>
-          <p:cNvSpPr>
-            <a:spLocks xmlns:a="http://schemas.openxmlformats.org/drawingml/2006/main" noGrp="1"/>
-          </p:cNvSpPr>
-          <p:nvPr/>
-        </p:nvSpPr>
-        <p:spPr>
-          <a:xfrm xmlns:a="http://schemas.openxmlformats.org/drawingml/2006/main">
-            <a:off x="552450" y="4248150"/>
-            <a:ext cx="419100" cy="266700"/>
-          </a:xfrm>
-          <a:prstGeom xmlns:a="http://schemas.openxmlformats.org/drawingml/2006/main" prst="rect">
-            <a:avLst/>
-          </a:prstGeom>
-          <a:noFill xmlns:a="http://schemas.openxmlformats.org/drawingml/2006/main"/>
-          <a:ln xmlns:a="http://schemas.openxmlformats.org/drawingml/2006/main" w="0">
-            <a:noFill/>
-            <a:prstDash val="solid"/>
-          </a:ln>
-        </p:spPr>
-        <p:txBody>
-          <a:bodyPr xmlns:a="http://schemas.openxmlformats.org/drawingml/2006/main"/>
-          <a:lstStyle xmlns:a="http://schemas.openxmlformats.org/drawingml/2006/main"/>
-          <a:p xmlns:a="http://schemas.openxmlformats.org/drawingml/2006/main">
-            <a:pPr>
-              <a:defRPr sz="1125" b="1">
-                <a:solidFill>
-                  <a:srgbClr val="2048A8"/>
-                </a:solidFill>
-              </a:defRPr>
-            </a:pPr>
-            <a:r>
-              <a:rPr sz="1125" b="1">
-                <a:solidFill>
-                  <a:srgbClr val="2048A8"/>
-                </a:solidFill>
-              </a:rPr>
-              <a:t>03</a:t>
-            </a:r>
-          </a:p>
-        </p:txBody>
-      </p:sp>
-      <p:sp>
-        <p:nvSpPr>
-          <p:cNvPr id="25" name="">
-            <a:extLst xmlns:a="http://schemas.openxmlformats.org/drawingml/2006/main">
-              <a:ext uri="{FF2B5EF4-FFF2-40B4-BE49-F238E27FC236}">
-                <a16:creationId xmlns:a16="http://schemas.microsoft.com/office/drawing/2014/main" id="{89D87F42-11D0-4FA9-8123-A9741FFBDAE0}"/>
-              </a:ext>
-            </a:extLst>
-          </p:cNvPr>
-          <p:cNvSpPr>
-            <a:spLocks xmlns:a="http://schemas.openxmlformats.org/drawingml/2006/main" noGrp="1"/>
-          </p:cNvSpPr>
-          <p:nvPr/>
-        </p:nvSpPr>
-        <p:spPr>
-          <a:xfrm xmlns:a="http://schemas.openxmlformats.org/drawingml/2006/main">
-            <a:off x="1047750" y="4210050"/>
-            <a:ext cx="2076450" cy="647700"/>
-          </a:xfrm>
-          <a:prstGeom xmlns:a="http://schemas.openxmlformats.org/drawingml/2006/main" prst="rect">
-            <a:avLst/>
-          </a:prstGeom>
-          <a:noFill xmlns:a="http://schemas.openxmlformats.org/drawingml/2006/main"/>
-          <a:ln xmlns:a="http://schemas.openxmlformats.org/drawingml/2006/main" w="0">
-            <a:noFill/>
-            <a:prstDash val="solid"/>
-          </a:ln>
-        </p:spPr>
-        <p:txBody>
-          <a:bodyPr xmlns:a="http://schemas.openxmlformats.org/drawingml/2006/main"/>
-          <a:lstStyle xmlns:a="http://schemas.openxmlformats.org/drawingml/2006/main"/>
-          <a:p xmlns:a="http://schemas.openxmlformats.org/drawingml/2006/main">
-            <a:pPr>
-              <a:defRPr sz="1275" b="1">
-                <a:solidFill>
-                  <a:srgbClr val="102A63"/>
-                </a:solidFill>
-              </a:defRPr>
-            </a:pPr>
-            <a:r>
-              <a:rPr sz="1275" b="1">
-                <a:solidFill>
-                  <a:srgbClr val="102A63"/>
-                </a:solidFill>
-              </a:rPr>
-              <a:t>{{OUTCOME_3_TITLE}}</a:t>
-            </a:r>
-          </a:p>
-        </p:txBody>
-      </p:sp>
-      <p:sp>
-        <p:nvSpPr>
-          <p:cNvPr id="26" name="">
-            <a:extLst xmlns:a="http://schemas.openxmlformats.org/drawingml/2006/main">
-              <a:ext uri="{FF2B5EF4-FFF2-40B4-BE49-F238E27FC236}">
-                <a16:creationId xmlns:a16="http://schemas.microsoft.com/office/drawing/2014/main" id="{B79FAE05-9B5D-42DA-AA8C-6B693404192E}"/>
-              </a:ext>
-            </a:extLst>
-          </p:cNvPr>
-          <p:cNvSpPr>
-            <a:spLocks xmlns:a="http://schemas.openxmlformats.org/drawingml/2006/main" noGrp="1"/>
-          </p:cNvSpPr>
-          <p:nvPr/>
-        </p:nvSpPr>
-        <p:spPr>
-          <a:xfrm xmlns:a="http://schemas.openxmlformats.org/drawingml/2006/main">
-            <a:off x="3333750" y="4210050"/>
-            <a:ext cx="3143250" cy="685800"/>
-          </a:xfrm>
-          <a:prstGeom xmlns:a="http://schemas.openxmlformats.org/drawingml/2006/main" prst="rect">
-            <a:avLst/>
-          </a:prstGeom>
-          <a:noFill xmlns:a="http://schemas.openxmlformats.org/drawingml/2006/main"/>
-          <a:ln xmlns:a="http://schemas.openxmlformats.org/drawingml/2006/main" w="0">
-            <a:noFill/>
-            <a:prstDash val="solid"/>
-          </a:ln>
-        </p:spPr>
-        <p:txBody>
-          <a:bodyPr xmlns:a="http://schemas.openxmlformats.org/drawingml/2006/main"/>
-          <a:lstStyle xmlns:a="http://schemas.openxmlformats.org/drawingml/2006/main"/>
-          <a:p xmlns:a="http://schemas.openxmlformats.org/drawingml/2006/main">
-            <a:pPr>
-              <a:defRPr sz="1050">
+          <p:cNvPr id="31" name="">
+            <a:extLst xmlns:a="http://schemas.openxmlformats.org/drawingml/2006/main">
+              <a:ext uri="{FF2B5EF4-FFF2-40B4-BE49-F238E27FC236}">
+                <a16:creationId xmlns:a16="http://schemas.microsoft.com/office/drawing/2014/main" id="{7183D1DE-D197-42C7-A61F-02806D211660}"/>
+              </a:ext>
+            </a:extLst>
+          </p:cNvPr>
+          <p:cNvSpPr>
+            <a:spLocks xmlns:a="http://schemas.openxmlformats.org/drawingml/2006/main" noGrp="1"/>
+          </p:cNvSpPr>
+          <p:nvPr/>
+        </p:nvSpPr>
+        <p:spPr>
+          <a:xfrm xmlns:a="http://schemas.openxmlformats.org/drawingml/2006/main">
+            <a:off x="4895850" y="4419600"/>
+            <a:ext cx="914400" cy="914400"/>
+          </a:xfrm>
+          <a:prstGeom xmlns:a="http://schemas.openxmlformats.org/drawingml/2006/main" prst="ellipse">
+            <a:avLst/>
+          </a:prstGeom>
+          <a:solidFill xmlns:a="http://schemas.openxmlformats.org/drawingml/2006/main">
+            <a:srgbClr val="FFFFFF"/>
+          </a:solidFill>
+          <a:ln xmlns:a="http://schemas.openxmlformats.org/drawingml/2006/main" w="0">
+            <a:noFill/>
+            <a:prstDash val="solid"/>
+          </a:ln>
+        </p:spPr>
+      </p:sp>
+      <p:sp>
+        <p:nvSpPr>
+          <p:cNvPr id="32" name="">
+            <a:extLst xmlns:a="http://schemas.openxmlformats.org/drawingml/2006/main">
+              <a:ext uri="{FF2B5EF4-FFF2-40B4-BE49-F238E27FC236}">
+                <a16:creationId xmlns:a16="http://schemas.microsoft.com/office/drawing/2014/main" id="{1F26F752-FC84-427B-B93B-CC5733C15A17}"/>
+              </a:ext>
+            </a:extLst>
+          </p:cNvPr>
+          <p:cNvSpPr>
+            <a:spLocks xmlns:a="http://schemas.openxmlformats.org/drawingml/2006/main" noGrp="1"/>
+          </p:cNvSpPr>
+          <p:nvPr/>
+        </p:nvSpPr>
+        <p:spPr>
+          <a:xfrm xmlns:a="http://schemas.openxmlformats.org/drawingml/2006/main">
+            <a:off x="4933950" y="4695825"/>
+            <a:ext cx="838200" cy="361950"/>
+          </a:xfrm>
+          <a:prstGeom xmlns:a="http://schemas.openxmlformats.org/drawingml/2006/main" prst="rect">
+            <a:avLst/>
+          </a:prstGeom>
+          <a:noFill xmlns:a="http://schemas.openxmlformats.org/drawingml/2006/main"/>
+          <a:ln xmlns:a="http://schemas.openxmlformats.org/drawingml/2006/main" w="0">
+            <a:noFill/>
+            <a:prstDash val="solid"/>
+          </a:ln>
+        </p:spPr>
+        <p:txBody>
+          <a:bodyPr xmlns:a="http://schemas.openxmlformats.org/drawingml/2006/main"/>
+          <a:lstStyle xmlns:a="http://schemas.openxmlformats.org/drawingml/2006/main"/>
+          <a:p xmlns:a="http://schemas.openxmlformats.org/drawingml/2006/main">
+            <a:pPr algn="ctr">
+              <a:defRPr sz="1800" b="1">
+                <a:solidFill>
+                  <a:srgbClr val="102A63"/>
+                </a:solidFill>
+              </a:defRPr>
+            </a:pPr>
+            <a:r>
+              <a:rPr sz="1800" b="1">
+                <a:solidFill>
+                  <a:srgbClr val="102A63"/>
+                </a:solidFill>
+              </a:rPr>
+              <a:t>{{THREAT_5_VALUE}}%</a:t>
+            </a:r>
+          </a:p>
+        </p:txBody>
+      </p:sp>
+      <p:sp>
+        <p:nvSpPr>
+          <p:cNvPr id="33" name="">
+            <a:extLst xmlns:a="http://schemas.openxmlformats.org/drawingml/2006/main">
+              <a:ext uri="{FF2B5EF4-FFF2-40B4-BE49-F238E27FC236}">
+                <a16:creationId xmlns:a16="http://schemas.microsoft.com/office/drawing/2014/main" id="{95A1B35A-D2C6-41B2-B692-4C18DBCC53B0}"/>
+              </a:ext>
+            </a:extLst>
+          </p:cNvPr>
+          <p:cNvSpPr>
+            <a:spLocks xmlns:a="http://schemas.openxmlformats.org/drawingml/2006/main" noGrp="1"/>
+          </p:cNvSpPr>
+          <p:nvPr/>
+        </p:nvSpPr>
+        <p:spPr>
+          <a:xfrm xmlns:a="http://schemas.openxmlformats.org/drawingml/2006/main">
+            <a:off x="4229100" y="5638800"/>
+            <a:ext cx="2247900" cy="323850"/>
+          </a:xfrm>
+          <a:prstGeom xmlns:a="http://schemas.openxmlformats.org/drawingml/2006/main" prst="rect">
+            <a:avLst/>
+          </a:prstGeom>
+          <a:noFill xmlns:a="http://schemas.openxmlformats.org/drawingml/2006/main"/>
+          <a:ln xmlns:a="http://schemas.openxmlformats.org/drawingml/2006/main" w="0">
+            <a:noFill/>
+            <a:prstDash val="solid"/>
+          </a:ln>
+        </p:spPr>
+        <p:txBody>
+          <a:bodyPr xmlns:a="http://schemas.openxmlformats.org/drawingml/2006/main"/>
+          <a:lstStyle xmlns:a="http://schemas.openxmlformats.org/drawingml/2006/main"/>
+          <a:p xmlns:a="http://schemas.openxmlformats.org/drawingml/2006/main">
+            <a:pPr algn="ctr">
+              <a:defRPr sz="1200" b="1">
+                <a:solidFill>
+                  <a:srgbClr val="102A63"/>
+                </a:solidFill>
+              </a:defRPr>
+            </a:pPr>
+            <a:r>
+              <a:rPr sz="1200" b="1">
+                <a:solidFill>
+                  <a:srgbClr val="102A63"/>
+                </a:solidFill>
+              </a:rPr>
+              <a:t>{{THREAT_5_LABEL}}</a:t>
+            </a:r>
+          </a:p>
+        </p:txBody>
+      </p:sp>
+      <p:sp>
+        <p:nvSpPr>
+          <p:cNvPr id="34" name="">
+            <a:extLst xmlns:a="http://schemas.openxmlformats.org/drawingml/2006/main">
+              <a:ext uri="{FF2B5EF4-FFF2-40B4-BE49-F238E27FC236}">
+                <a16:creationId xmlns:a16="http://schemas.microsoft.com/office/drawing/2014/main" id="{FA16F754-6458-4DF2-B30C-AACEB501C83E}"/>
+              </a:ext>
+            </a:extLst>
+          </p:cNvPr>
+          <p:cNvSpPr>
+            <a:spLocks xmlns:a="http://schemas.openxmlformats.org/drawingml/2006/main" noGrp="1"/>
+          </p:cNvSpPr>
+          <p:nvPr/>
+        </p:nvSpPr>
+        <p:spPr>
+          <a:xfrm xmlns:a="http://schemas.openxmlformats.org/drawingml/2006/main">
+            <a:off x="4229100" y="5934075"/>
+            <a:ext cx="2247900" cy="209550"/>
+          </a:xfrm>
+          <a:prstGeom xmlns:a="http://schemas.openxmlformats.org/drawingml/2006/main" prst="rect">
+            <a:avLst/>
+          </a:prstGeom>
+          <a:noFill xmlns:a="http://schemas.openxmlformats.org/drawingml/2006/main"/>
+          <a:ln xmlns:a="http://schemas.openxmlformats.org/drawingml/2006/main" w="0">
+            <a:noFill/>
+            <a:prstDash val="solid"/>
+          </a:ln>
+        </p:spPr>
+        <p:txBody>
+          <a:bodyPr xmlns:a="http://schemas.openxmlformats.org/drawingml/2006/main"/>
+          <a:lstStyle xmlns:a="http://schemas.openxmlformats.org/drawingml/2006/main"/>
+          <a:p xmlns:a="http://schemas.openxmlformats.org/drawingml/2006/main">
+            <a:pPr algn="ctr">
+              <a:defRPr sz="900">
                 <a:solidFill>
                   <a:srgbClr val="596780"/>
                 </a:solidFill>
               </a:defRPr>
             </a:pPr>
             <a:r>
-              <a:rPr sz="1050">
+              <a:rPr sz="900">
                 <a:solidFill>
                   <a:srgbClr val="596780"/>
                 </a:solidFill>
               </a:rPr>
-              <a:t>{{OUTCOME_3_FROM}}</a:t>
-            </a:r>
-          </a:p>
-        </p:txBody>
-      </p:sp>
-      <p:sp>
-        <p:nvSpPr>
-          <p:cNvPr id="27" name="">
-            <a:extLst xmlns:a="http://schemas.openxmlformats.org/drawingml/2006/main">
-              <a:ext uri="{FF2B5EF4-FFF2-40B4-BE49-F238E27FC236}">
-                <a16:creationId xmlns:a16="http://schemas.microsoft.com/office/drawing/2014/main" id="{50693378-9ED0-4CFC-8CA4-A9F1218C73A5}"/>
-              </a:ext>
-            </a:extLst>
-          </p:cNvPr>
-          <p:cNvSpPr>
-            <a:spLocks xmlns:a="http://schemas.openxmlformats.org/drawingml/2006/main" noGrp="1"/>
-          </p:cNvSpPr>
-          <p:nvPr/>
-        </p:nvSpPr>
-        <p:spPr>
-          <a:xfrm xmlns:a="http://schemas.openxmlformats.org/drawingml/2006/main">
-            <a:off x="6667500" y="4324350"/>
-            <a:ext cx="381000" cy="342900"/>
+              <a:t>разрыв контроля</a:t>
+            </a:r>
+          </a:p>
+        </p:txBody>
+      </p:sp>
+      <p:sp>
+        <p:nvSpPr>
+          <p:cNvPr id="35" name="">
+            <a:extLst xmlns:a="http://schemas.openxmlformats.org/drawingml/2006/main">
+              <a:ext uri="{FF2B5EF4-FFF2-40B4-BE49-F238E27FC236}">
+                <a16:creationId xmlns:a16="http://schemas.microsoft.com/office/drawing/2014/main" id="{28B652EC-4E0C-4792-AB3A-74CF99BE34DB}"/>
+              </a:ext>
+            </a:extLst>
+          </p:cNvPr>
+          <p:cNvSpPr>
+            <a:spLocks xmlns:a="http://schemas.openxmlformats.org/drawingml/2006/main" noGrp="1"/>
+          </p:cNvSpPr>
+          <p:nvPr/>
+        </p:nvSpPr>
+        <p:spPr>
+          <a:xfrm xmlns:a="http://schemas.openxmlformats.org/drawingml/2006/main">
+            <a:off x="8362950" y="4248150"/>
+            <a:ext cx="1257300" cy="1257300"/>
+          </a:xfrm>
+          <a:prstGeom xmlns:a="http://schemas.openxmlformats.org/drawingml/2006/main" prst="ellipse">
+            <a:avLst/>
+          </a:prstGeom>
+          <a:solidFill xmlns:a="http://schemas.openxmlformats.org/drawingml/2006/main">
+            <a:srgbClr val="B30006"/>
+          </a:solidFill>
+          <a:ln xmlns:a="http://schemas.openxmlformats.org/drawingml/2006/main" w="0">
+            <a:noFill/>
+            <a:prstDash val="solid"/>
+          </a:ln>
+        </p:spPr>
+      </p:sp>
+      <p:sp>
+        <p:nvSpPr>
+          <p:cNvPr id="36" name="">
+            <a:extLst xmlns:a="http://schemas.openxmlformats.org/drawingml/2006/main">
+              <a:ext uri="{FF2B5EF4-FFF2-40B4-BE49-F238E27FC236}">
+                <a16:creationId xmlns:a16="http://schemas.microsoft.com/office/drawing/2014/main" id="{F4D7A48B-8515-4962-BC24-A1565B4993F0}"/>
+              </a:ext>
+            </a:extLst>
+          </p:cNvPr>
+          <p:cNvSpPr>
+            <a:spLocks xmlns:a="http://schemas.openxmlformats.org/drawingml/2006/main" noGrp="1"/>
+          </p:cNvSpPr>
+          <p:nvPr/>
+        </p:nvSpPr>
+        <p:spPr>
+          <a:xfrm xmlns:a="http://schemas.openxmlformats.org/drawingml/2006/main">
+            <a:off x="8534400" y="4419600"/>
+            <a:ext cx="914400" cy="914400"/>
+          </a:xfrm>
+          <a:prstGeom xmlns:a="http://schemas.openxmlformats.org/drawingml/2006/main" prst="ellipse">
+            <a:avLst/>
+          </a:prstGeom>
+          <a:solidFill xmlns:a="http://schemas.openxmlformats.org/drawingml/2006/main">
+            <a:srgbClr val="FFFFFF"/>
+          </a:solidFill>
+          <a:ln xmlns:a="http://schemas.openxmlformats.org/drawingml/2006/main" w="0">
+            <a:noFill/>
+            <a:prstDash val="solid"/>
+          </a:ln>
+        </p:spPr>
+      </p:sp>
+      <p:sp>
+        <p:nvSpPr>
+          <p:cNvPr id="37" name="">
+            <a:extLst xmlns:a="http://schemas.openxmlformats.org/drawingml/2006/main">
+              <a:ext uri="{FF2B5EF4-FFF2-40B4-BE49-F238E27FC236}">
+                <a16:creationId xmlns:a16="http://schemas.microsoft.com/office/drawing/2014/main" id="{78DE89A5-CFA8-4D01-95C8-F4A53E9DA0CA}"/>
+              </a:ext>
+            </a:extLst>
+          </p:cNvPr>
+          <p:cNvSpPr>
+            <a:spLocks xmlns:a="http://schemas.openxmlformats.org/drawingml/2006/main" noGrp="1"/>
+          </p:cNvSpPr>
+          <p:nvPr/>
+        </p:nvSpPr>
+        <p:spPr>
+          <a:xfrm xmlns:a="http://schemas.openxmlformats.org/drawingml/2006/main">
+            <a:off x="8572500" y="4695825"/>
+            <a:ext cx="838200" cy="361950"/>
           </a:xfrm>
           <a:prstGeom xmlns:a="http://schemas.openxmlformats.org/drawingml/2006/main" prst="rect">
             <a:avLst/>
@@ -12508,350 +12861,119 @@
           <a:lstStyle xmlns:a="http://schemas.openxmlformats.org/drawingml/2006/main"/>
           <a:p xmlns:a="http://schemas.openxmlformats.org/drawingml/2006/main">
             <a:pPr algn="ctr">
-              <a:defRPr sz="1950" b="1">
-                <a:solidFill>
-                  <a:srgbClr val="2048A8"/>
-                </a:solidFill>
-              </a:defRPr>
-            </a:pPr>
-            <a:r>
-              <a:rPr sz="1950" b="1">
-                <a:solidFill>
-                  <a:srgbClr val="2048A8"/>
-                </a:solidFill>
-              </a:rPr>
-              <a:t>→</a:t>
-            </a:r>
-          </a:p>
-        </p:txBody>
-      </p:sp>
-      <p:sp>
-        <p:nvSpPr>
-          <p:cNvPr id="28" name="">
-            <a:extLst xmlns:a="http://schemas.openxmlformats.org/drawingml/2006/main">
-              <a:ext uri="{FF2B5EF4-FFF2-40B4-BE49-F238E27FC236}">
-                <a16:creationId xmlns:a16="http://schemas.microsoft.com/office/drawing/2014/main" id="{7450E112-CEE0-4489-AC61-E1D15B78F3EF}"/>
-              </a:ext>
-            </a:extLst>
-          </p:cNvPr>
-          <p:cNvSpPr>
-            <a:spLocks xmlns:a="http://schemas.openxmlformats.org/drawingml/2006/main" noGrp="1"/>
-          </p:cNvSpPr>
-          <p:nvPr/>
-        </p:nvSpPr>
-        <p:spPr>
-          <a:xfrm xmlns:a="http://schemas.openxmlformats.org/drawingml/2006/main">
-            <a:off x="7239000" y="4210050"/>
-            <a:ext cx="3962400" cy="685800"/>
-          </a:xfrm>
-          <a:prstGeom xmlns:a="http://schemas.openxmlformats.org/drawingml/2006/main" prst="rect">
-            <a:avLst/>
-          </a:prstGeom>
-          <a:noFill xmlns:a="http://schemas.openxmlformats.org/drawingml/2006/main"/>
-          <a:ln xmlns:a="http://schemas.openxmlformats.org/drawingml/2006/main" w="0">
-            <a:noFill/>
-            <a:prstDash val="solid"/>
-          </a:ln>
-        </p:spPr>
-        <p:txBody>
-          <a:bodyPr xmlns:a="http://schemas.openxmlformats.org/drawingml/2006/main"/>
-          <a:lstStyle xmlns:a="http://schemas.openxmlformats.org/drawingml/2006/main"/>
-          <a:p xmlns:a="http://schemas.openxmlformats.org/drawingml/2006/main">
-            <a:pPr>
-              <a:defRPr sz="1125" b="1">
-                <a:solidFill>
-                  <a:srgbClr val="102A63"/>
-                </a:solidFill>
-              </a:defRPr>
-            </a:pPr>
-            <a:r>
-              <a:rPr sz="1125" b="1">
-                <a:solidFill>
-                  <a:srgbClr val="102A63"/>
-                </a:solidFill>
-              </a:rPr>
-              <a:t>{{OUTCOME_3_TO}}</a:t>
-            </a:r>
-          </a:p>
-        </p:txBody>
-      </p:sp>
-      <p:sp>
-        <p:nvSpPr>
-          <p:cNvPr id="29" name="">
-            <a:extLst xmlns:a="http://schemas.openxmlformats.org/drawingml/2006/main">
-              <a:ext uri="{FF2B5EF4-FFF2-40B4-BE49-F238E27FC236}">
-                <a16:creationId xmlns:a16="http://schemas.microsoft.com/office/drawing/2014/main" id="{6AD78D58-B80A-4751-9718-38C075C529AA}"/>
-              </a:ext>
-            </a:extLst>
-          </p:cNvPr>
-          <p:cNvSpPr>
-            <a:spLocks xmlns:a="http://schemas.openxmlformats.org/drawingml/2006/main" noGrp="1"/>
-          </p:cNvSpPr>
-          <p:nvPr/>
-        </p:nvSpPr>
-        <p:spPr>
-          <a:xfrm xmlns:a="http://schemas.openxmlformats.org/drawingml/2006/main">
-            <a:off x="552450" y="5048250"/>
-            <a:ext cx="10648950" cy="9525"/>
-          </a:xfrm>
-          <a:prstGeom xmlns:a="http://schemas.openxmlformats.org/drawingml/2006/main" prst="rect">
-            <a:avLst/>
-          </a:prstGeom>
-          <a:solidFill xmlns:a="http://schemas.openxmlformats.org/drawingml/2006/main">
-            <a:srgbClr val="D7E0F2"/>
-          </a:solidFill>
-          <a:ln xmlns:a="http://schemas.openxmlformats.org/drawingml/2006/main" w="0">
-            <a:noFill/>
-            <a:prstDash val="solid"/>
-          </a:ln>
-        </p:spPr>
-      </p:sp>
-      <p:sp>
-        <p:nvSpPr>
-          <p:cNvPr id="30" name="">
-            <a:extLst xmlns:a="http://schemas.openxmlformats.org/drawingml/2006/main">
-              <a:ext uri="{FF2B5EF4-FFF2-40B4-BE49-F238E27FC236}">
-                <a16:creationId xmlns:a16="http://schemas.microsoft.com/office/drawing/2014/main" id="{9840298D-AB48-4B4A-AF85-9AD58697C728}"/>
-              </a:ext>
-            </a:extLst>
-          </p:cNvPr>
-          <p:cNvSpPr>
-            <a:spLocks xmlns:a="http://schemas.openxmlformats.org/drawingml/2006/main" noGrp="1"/>
-          </p:cNvSpPr>
-          <p:nvPr/>
-        </p:nvSpPr>
-        <p:spPr>
-          <a:xfrm xmlns:a="http://schemas.openxmlformats.org/drawingml/2006/main">
-            <a:off x="552450" y="5276850"/>
-            <a:ext cx="419100" cy="266700"/>
-          </a:xfrm>
-          <a:prstGeom xmlns:a="http://schemas.openxmlformats.org/drawingml/2006/main" prst="rect">
-            <a:avLst/>
-          </a:prstGeom>
-          <a:noFill xmlns:a="http://schemas.openxmlformats.org/drawingml/2006/main"/>
-          <a:ln xmlns:a="http://schemas.openxmlformats.org/drawingml/2006/main" w="0">
-            <a:noFill/>
-            <a:prstDash val="solid"/>
-          </a:ln>
-        </p:spPr>
-        <p:txBody>
-          <a:bodyPr xmlns:a="http://schemas.openxmlformats.org/drawingml/2006/main"/>
-          <a:lstStyle xmlns:a="http://schemas.openxmlformats.org/drawingml/2006/main"/>
-          <a:p xmlns:a="http://schemas.openxmlformats.org/drawingml/2006/main">
-            <a:pPr>
-              <a:defRPr sz="1125" b="1">
-                <a:solidFill>
-                  <a:srgbClr val="2048A8"/>
-                </a:solidFill>
-              </a:defRPr>
-            </a:pPr>
-            <a:r>
-              <a:rPr sz="1125" b="1">
-                <a:solidFill>
-                  <a:srgbClr val="2048A8"/>
-                </a:solidFill>
-              </a:rPr>
-              <a:t>04</a:t>
-            </a:r>
-          </a:p>
-        </p:txBody>
-      </p:sp>
-      <p:sp>
-        <p:nvSpPr>
-          <p:cNvPr id="31" name="">
-            <a:extLst xmlns:a="http://schemas.openxmlformats.org/drawingml/2006/main">
-              <a:ext uri="{FF2B5EF4-FFF2-40B4-BE49-F238E27FC236}">
-                <a16:creationId xmlns:a16="http://schemas.microsoft.com/office/drawing/2014/main" id="{647E2AB1-E143-4A9F-973F-2E33C7FAA75F}"/>
-              </a:ext>
-            </a:extLst>
-          </p:cNvPr>
-          <p:cNvSpPr>
-            <a:spLocks xmlns:a="http://schemas.openxmlformats.org/drawingml/2006/main" noGrp="1"/>
-          </p:cNvSpPr>
-          <p:nvPr/>
-        </p:nvSpPr>
-        <p:spPr>
-          <a:xfrm xmlns:a="http://schemas.openxmlformats.org/drawingml/2006/main">
-            <a:off x="1047750" y="5238750"/>
-            <a:ext cx="2076450" cy="647700"/>
-          </a:xfrm>
-          <a:prstGeom xmlns:a="http://schemas.openxmlformats.org/drawingml/2006/main" prst="rect">
-            <a:avLst/>
-          </a:prstGeom>
-          <a:noFill xmlns:a="http://schemas.openxmlformats.org/drawingml/2006/main"/>
-          <a:ln xmlns:a="http://schemas.openxmlformats.org/drawingml/2006/main" w="0">
-            <a:noFill/>
-            <a:prstDash val="solid"/>
-          </a:ln>
-        </p:spPr>
-        <p:txBody>
-          <a:bodyPr xmlns:a="http://schemas.openxmlformats.org/drawingml/2006/main"/>
-          <a:lstStyle xmlns:a="http://schemas.openxmlformats.org/drawingml/2006/main"/>
-          <a:p xmlns:a="http://schemas.openxmlformats.org/drawingml/2006/main">
-            <a:pPr>
-              <a:defRPr sz="1275" b="1">
-                <a:solidFill>
-                  <a:srgbClr val="102A63"/>
-                </a:solidFill>
-              </a:defRPr>
-            </a:pPr>
-            <a:r>
-              <a:rPr sz="1275" b="1">
-                <a:solidFill>
-                  <a:srgbClr val="102A63"/>
-                </a:solidFill>
-              </a:rPr>
-              <a:t>{{OUTCOME_4_TITLE}}</a:t>
-            </a:r>
-          </a:p>
-        </p:txBody>
-      </p:sp>
-      <p:sp>
-        <p:nvSpPr>
-          <p:cNvPr id="32" name="">
-            <a:extLst xmlns:a="http://schemas.openxmlformats.org/drawingml/2006/main">
-              <a:ext uri="{FF2B5EF4-FFF2-40B4-BE49-F238E27FC236}">
-                <a16:creationId xmlns:a16="http://schemas.microsoft.com/office/drawing/2014/main" id="{7C0CFCEE-17A2-42B9-8BAD-22B9B227B7A2}"/>
-              </a:ext>
-            </a:extLst>
-          </p:cNvPr>
-          <p:cNvSpPr>
-            <a:spLocks xmlns:a="http://schemas.openxmlformats.org/drawingml/2006/main" noGrp="1"/>
-          </p:cNvSpPr>
-          <p:nvPr/>
-        </p:nvSpPr>
-        <p:spPr>
-          <a:xfrm xmlns:a="http://schemas.openxmlformats.org/drawingml/2006/main">
-            <a:off x="3333750" y="5238750"/>
-            <a:ext cx="3143250" cy="685800"/>
-          </a:xfrm>
-          <a:prstGeom xmlns:a="http://schemas.openxmlformats.org/drawingml/2006/main" prst="rect">
-            <a:avLst/>
-          </a:prstGeom>
-          <a:noFill xmlns:a="http://schemas.openxmlformats.org/drawingml/2006/main"/>
-          <a:ln xmlns:a="http://schemas.openxmlformats.org/drawingml/2006/main" w="0">
-            <a:noFill/>
-            <a:prstDash val="solid"/>
-          </a:ln>
-        </p:spPr>
-        <p:txBody>
-          <a:bodyPr xmlns:a="http://schemas.openxmlformats.org/drawingml/2006/main"/>
-          <a:lstStyle xmlns:a="http://schemas.openxmlformats.org/drawingml/2006/main"/>
-          <a:p xmlns:a="http://schemas.openxmlformats.org/drawingml/2006/main">
-            <a:pPr>
-              <a:defRPr sz="1050">
+              <a:defRPr sz="1800" b="1">
+                <a:solidFill>
+                  <a:srgbClr val="102A63"/>
+                </a:solidFill>
+              </a:defRPr>
+            </a:pPr>
+            <a:r>
+              <a:rPr sz="1800" b="1">
+                <a:solidFill>
+                  <a:srgbClr val="102A63"/>
+                </a:solidFill>
+              </a:rPr>
+              <a:t>{{THREAT_6_VALUE}}%</a:t>
+            </a:r>
+          </a:p>
+        </p:txBody>
+      </p:sp>
+      <p:sp>
+        <p:nvSpPr>
+          <p:cNvPr id="38" name="">
+            <a:extLst xmlns:a="http://schemas.openxmlformats.org/drawingml/2006/main">
+              <a:ext uri="{FF2B5EF4-FFF2-40B4-BE49-F238E27FC236}">
+                <a16:creationId xmlns:a16="http://schemas.microsoft.com/office/drawing/2014/main" id="{1ECB95BE-1780-4318-AD29-8943789BEF3B}"/>
+              </a:ext>
+            </a:extLst>
+          </p:cNvPr>
+          <p:cNvSpPr>
+            <a:spLocks xmlns:a="http://schemas.openxmlformats.org/drawingml/2006/main" noGrp="1"/>
+          </p:cNvSpPr>
+          <p:nvPr/>
+        </p:nvSpPr>
+        <p:spPr>
+          <a:xfrm xmlns:a="http://schemas.openxmlformats.org/drawingml/2006/main">
+            <a:off x="7867650" y="5638800"/>
+            <a:ext cx="2247900" cy="323850"/>
+          </a:xfrm>
+          <a:prstGeom xmlns:a="http://schemas.openxmlformats.org/drawingml/2006/main" prst="rect">
+            <a:avLst/>
+          </a:prstGeom>
+          <a:noFill xmlns:a="http://schemas.openxmlformats.org/drawingml/2006/main"/>
+          <a:ln xmlns:a="http://schemas.openxmlformats.org/drawingml/2006/main" w="0">
+            <a:noFill/>
+            <a:prstDash val="solid"/>
+          </a:ln>
+        </p:spPr>
+        <p:txBody>
+          <a:bodyPr xmlns:a="http://schemas.openxmlformats.org/drawingml/2006/main"/>
+          <a:lstStyle xmlns:a="http://schemas.openxmlformats.org/drawingml/2006/main"/>
+          <a:p xmlns:a="http://schemas.openxmlformats.org/drawingml/2006/main">
+            <a:pPr algn="ctr">
+              <a:defRPr sz="1200" b="1">
+                <a:solidFill>
+                  <a:srgbClr val="102A63"/>
+                </a:solidFill>
+              </a:defRPr>
+            </a:pPr>
+            <a:r>
+              <a:rPr sz="1200" b="1">
+                <a:solidFill>
+                  <a:srgbClr val="102A63"/>
+                </a:solidFill>
+              </a:rPr>
+              <a:t>{{THREAT_6_LABEL}}</a:t>
+            </a:r>
+          </a:p>
+        </p:txBody>
+      </p:sp>
+      <p:sp>
+        <p:nvSpPr>
+          <p:cNvPr id="39" name="">
+            <a:extLst xmlns:a="http://schemas.openxmlformats.org/drawingml/2006/main">
+              <a:ext uri="{FF2B5EF4-FFF2-40B4-BE49-F238E27FC236}">
+                <a16:creationId xmlns:a16="http://schemas.microsoft.com/office/drawing/2014/main" id="{A915546B-856A-41E6-956C-C96F3AC614D1}"/>
+              </a:ext>
+            </a:extLst>
+          </p:cNvPr>
+          <p:cNvSpPr>
+            <a:spLocks xmlns:a="http://schemas.openxmlformats.org/drawingml/2006/main" noGrp="1"/>
+          </p:cNvSpPr>
+          <p:nvPr/>
+        </p:nvSpPr>
+        <p:spPr>
+          <a:xfrm xmlns:a="http://schemas.openxmlformats.org/drawingml/2006/main">
+            <a:off x="7867650" y="5934075"/>
+            <a:ext cx="2247900" cy="209550"/>
+          </a:xfrm>
+          <a:prstGeom xmlns:a="http://schemas.openxmlformats.org/drawingml/2006/main" prst="rect">
+            <a:avLst/>
+          </a:prstGeom>
+          <a:noFill xmlns:a="http://schemas.openxmlformats.org/drawingml/2006/main"/>
+          <a:ln xmlns:a="http://schemas.openxmlformats.org/drawingml/2006/main" w="0">
+            <a:noFill/>
+            <a:prstDash val="solid"/>
+          </a:ln>
+        </p:spPr>
+        <p:txBody>
+          <a:bodyPr xmlns:a="http://schemas.openxmlformats.org/drawingml/2006/main"/>
+          <a:lstStyle xmlns:a="http://schemas.openxmlformats.org/drawingml/2006/main"/>
+          <a:p xmlns:a="http://schemas.openxmlformats.org/drawingml/2006/main">
+            <a:pPr algn="ctr">
+              <a:defRPr sz="900">
                 <a:solidFill>
                   <a:srgbClr val="596780"/>
                 </a:solidFill>
               </a:defRPr>
             </a:pPr>
             <a:r>
-              <a:rPr sz="1050">
+              <a:rPr sz="900">
                 <a:solidFill>
                   <a:srgbClr val="596780"/>
                 </a:solidFill>
               </a:rPr>
-              <a:t>{{OUTCOME_4_FROM}}</a:t>
-            </a:r>
-          </a:p>
-        </p:txBody>
-      </p:sp>
-      <p:sp>
-        <p:nvSpPr>
-          <p:cNvPr id="33" name="">
-            <a:extLst xmlns:a="http://schemas.openxmlformats.org/drawingml/2006/main">
-              <a:ext uri="{FF2B5EF4-FFF2-40B4-BE49-F238E27FC236}">
-                <a16:creationId xmlns:a16="http://schemas.microsoft.com/office/drawing/2014/main" id="{FFFB8B0D-1814-4633-8DE1-6F69F86FB695}"/>
-              </a:ext>
-            </a:extLst>
-          </p:cNvPr>
-          <p:cNvSpPr>
-            <a:spLocks xmlns:a="http://schemas.openxmlformats.org/drawingml/2006/main" noGrp="1"/>
-          </p:cNvSpPr>
-          <p:nvPr/>
-        </p:nvSpPr>
-        <p:spPr>
-          <a:xfrm xmlns:a="http://schemas.openxmlformats.org/drawingml/2006/main">
-            <a:off x="6667500" y="5353050"/>
-            <a:ext cx="381000" cy="342900"/>
-          </a:xfrm>
-          <a:prstGeom xmlns:a="http://schemas.openxmlformats.org/drawingml/2006/main" prst="rect">
-            <a:avLst/>
-          </a:prstGeom>
-          <a:noFill xmlns:a="http://schemas.openxmlformats.org/drawingml/2006/main"/>
-          <a:ln xmlns:a="http://schemas.openxmlformats.org/drawingml/2006/main" w="0">
-            <a:noFill/>
-            <a:prstDash val="solid"/>
-          </a:ln>
-        </p:spPr>
-        <p:txBody>
-          <a:bodyPr xmlns:a="http://schemas.openxmlformats.org/drawingml/2006/main"/>
-          <a:lstStyle xmlns:a="http://schemas.openxmlformats.org/drawingml/2006/main"/>
-          <a:p xmlns:a="http://schemas.openxmlformats.org/drawingml/2006/main">
-            <a:pPr algn="ctr">
-              <a:defRPr sz="1950" b="1">
-                <a:solidFill>
-                  <a:srgbClr val="2048A8"/>
-                </a:solidFill>
-              </a:defRPr>
-            </a:pPr>
-            <a:r>
-              <a:rPr sz="1950" b="1">
-                <a:solidFill>
-                  <a:srgbClr val="2048A8"/>
-                </a:solidFill>
-              </a:rPr>
-              <a:t>→</a:t>
-            </a:r>
-          </a:p>
-        </p:txBody>
-      </p:sp>
-      <p:sp>
-        <p:nvSpPr>
-          <p:cNvPr id="34" name="">
-            <a:extLst xmlns:a="http://schemas.openxmlformats.org/drawingml/2006/main">
-              <a:ext uri="{FF2B5EF4-FFF2-40B4-BE49-F238E27FC236}">
-                <a16:creationId xmlns:a16="http://schemas.microsoft.com/office/drawing/2014/main" id="{2456E07E-474D-4F59-BABB-1CD5B655768B}"/>
-              </a:ext>
-            </a:extLst>
-          </p:cNvPr>
-          <p:cNvSpPr>
-            <a:spLocks xmlns:a="http://schemas.openxmlformats.org/drawingml/2006/main" noGrp="1"/>
-          </p:cNvSpPr>
-          <p:nvPr/>
-        </p:nvSpPr>
-        <p:spPr>
-          <a:xfrm xmlns:a="http://schemas.openxmlformats.org/drawingml/2006/main">
-            <a:off x="7239000" y="5238750"/>
-            <a:ext cx="3962400" cy="685800"/>
-          </a:xfrm>
-          <a:prstGeom xmlns:a="http://schemas.openxmlformats.org/drawingml/2006/main" prst="rect">
-            <a:avLst/>
-          </a:prstGeom>
-          <a:noFill xmlns:a="http://schemas.openxmlformats.org/drawingml/2006/main"/>
-          <a:ln xmlns:a="http://schemas.openxmlformats.org/drawingml/2006/main" w="0">
-            <a:noFill/>
-            <a:prstDash val="solid"/>
-          </a:ln>
-        </p:spPr>
-        <p:txBody>
-          <a:bodyPr xmlns:a="http://schemas.openxmlformats.org/drawingml/2006/main"/>
-          <a:lstStyle xmlns:a="http://schemas.openxmlformats.org/drawingml/2006/main"/>
-          <a:p xmlns:a="http://schemas.openxmlformats.org/drawingml/2006/main">
-            <a:pPr>
-              <a:defRPr sz="1125" b="1">
-                <a:solidFill>
-                  <a:srgbClr val="102A63"/>
-                </a:solidFill>
-              </a:defRPr>
-            </a:pPr>
-            <a:r>
-              <a:rPr sz="1125" b="1">
-                <a:solidFill>
-                  <a:srgbClr val="102A63"/>
-                </a:solidFill>
-              </a:rPr>
-              <a:t>{{OUTCOME_4_TO}}</a:t>
+              <a:t>разрыв контроля</a:t>
             </a:r>
           </a:p>
         </p:txBody>
@@ -12859,7 +12981,7 @@
     </p:spTree>
     <p:extLst>
       <p:ext uri="{BB962C8B-B14F-4D97-AF65-F5344CB8AC3E}">
-        <p14:creationId xmlns:p14="http://schemas.microsoft.com/office/powerpoint/2010/main" val="1526351528"/>
+        <p14:creationId xmlns:p14="http://schemas.microsoft.com/office/powerpoint/2010/main" val="1581318880"/>
       </p:ext>
     </p:extLst>
   </p:cSld>
@@ -12890,7 +13012,7 @@
           <p:cNvPr id="1" name="">
             <a:extLst xmlns:a="http://schemas.openxmlformats.org/drawingml/2006/main">
               <a:ext uri="{FF2B5EF4-FFF2-40B4-BE49-F238E27FC236}">
-                <a16:creationId xmlns:a16="http://schemas.microsoft.com/office/drawing/2014/main" id="{4ECAFEE7-E720-4224-9242-A7254E85A452}"/>
+                <a16:creationId xmlns:a16="http://schemas.microsoft.com/office/drawing/2014/main" id="{AF677883-B4C3-45BB-A7C5-2B5164D0D0A4}"/>
               </a:ext>
             </a:extLst>
           </p:cNvPr>
@@ -12925,7 +13047,7 @@
           <p:nvPr/>
         </p:nvPicPr>
         <p:blipFill>
-          <a:blip xmlns:r="http://schemas.openxmlformats.org/officeDocument/2006/relationships" xmlns:a="http://schemas.openxmlformats.org/drawingml/2006/main" r:embed="Rd19fc41d39054c5c"/>
+          <a:blip xmlns:r="http://schemas.openxmlformats.org/officeDocument/2006/relationships" xmlns:a="http://schemas.openxmlformats.org/drawingml/2006/main" r:embed="Rd16d2d8d373242f6"/>
           <a:stretch xmlns:a="http://schemas.openxmlformats.org/drawingml/2006/main"/>
         </p:blipFill>
         <p:spPr>
@@ -12943,7 +13065,7 @@
           <p:cNvPr id="3" name="">
             <a:extLst xmlns:a="http://schemas.openxmlformats.org/drawingml/2006/main">
               <a:ext uri="{FF2B5EF4-FFF2-40B4-BE49-F238E27FC236}">
-                <a16:creationId xmlns:a16="http://schemas.microsoft.com/office/drawing/2014/main" id="{7B7DAD00-82C2-4178-85E8-70C03070013B}"/>
+                <a16:creationId xmlns:a16="http://schemas.microsoft.com/office/drawing/2014/main" id="{1CB2546A-8609-4015-A5E3-56A97241693A}"/>
               </a:ext>
             </a:extLst>
           </p:cNvPr>
@@ -12993,7 +13115,7 @@
           <p:cNvPr id="4" name="">
             <a:extLst xmlns:a="http://schemas.openxmlformats.org/drawingml/2006/main">
               <a:ext uri="{FF2B5EF4-FFF2-40B4-BE49-F238E27FC236}">
-                <a16:creationId xmlns:a16="http://schemas.microsoft.com/office/drawing/2014/main" id="{38E3E648-1F12-4B19-813E-2B1A03F75C6F}"/>
+                <a16:creationId xmlns:a16="http://schemas.microsoft.com/office/drawing/2014/main" id="{BD2688A1-AC6E-44E3-B74B-95DD8A46A511}"/>
               </a:ext>
             </a:extLst>
           </p:cNvPr>
@@ -13026,7 +13148,7 @@
           <p:cNvPr id="5" name="">
             <a:extLst xmlns:a="http://schemas.openxmlformats.org/drawingml/2006/main">
               <a:ext uri="{FF2B5EF4-FFF2-40B4-BE49-F238E27FC236}">
-                <a16:creationId xmlns:a16="http://schemas.microsoft.com/office/drawing/2014/main" id="{4D25F0B7-AA8E-4CB0-8B06-E54E04066B26}"/>
+                <a16:creationId xmlns:a16="http://schemas.microsoft.com/office/drawing/2014/main" id="{2857357D-D532-4909-9FAF-3590E5E0A663}"/>
               </a:ext>
             </a:extLst>
           </p:cNvPr>
@@ -13057,7 +13179,7 @@
           <p:cNvPr id="6" name="">
             <a:extLst xmlns:a="http://schemas.openxmlformats.org/drawingml/2006/main">
               <a:ext uri="{FF2B5EF4-FFF2-40B4-BE49-F238E27FC236}">
-                <a16:creationId xmlns:a16="http://schemas.microsoft.com/office/drawing/2014/main" id="{7A289DCD-884D-4B70-9B7A-4C5611712B07}"/>
+                <a16:creationId xmlns:a16="http://schemas.microsoft.com/office/drawing/2014/main" id="{E283803D-5A5E-4C36-961C-0FED62912757}"/>
               </a:ext>
             </a:extLst>
           </p:cNvPr>
@@ -13107,7 +13229,7 @@
           <p:cNvPr id="7" name="">
             <a:extLst xmlns:a="http://schemas.openxmlformats.org/drawingml/2006/main">
               <a:ext uri="{FF2B5EF4-FFF2-40B4-BE49-F238E27FC236}">
-                <a16:creationId xmlns:a16="http://schemas.microsoft.com/office/drawing/2014/main" id="{61BECBA1-3D8B-41D8-B590-A571E9CA0DB2}"/>
+                <a16:creationId xmlns:a16="http://schemas.microsoft.com/office/drawing/2014/main" id="{6D892A9A-79F7-4F65-88FB-BF4915DA7CC6}"/>
               </a:ext>
             </a:extLst>
           </p:cNvPr>
@@ -13157,7 +13279,7 @@
           <p:cNvPr id="8" name="">
             <a:extLst xmlns:a="http://schemas.openxmlformats.org/drawingml/2006/main">
               <a:ext uri="{FF2B5EF4-FFF2-40B4-BE49-F238E27FC236}">
-                <a16:creationId xmlns:a16="http://schemas.microsoft.com/office/drawing/2014/main" id="{C66DD307-BE29-4811-BF92-E2F44A591415}"/>
+                <a16:creationId xmlns:a16="http://schemas.microsoft.com/office/drawing/2014/main" id="{4BE49788-9621-4537-95F1-C64F6A3EC15B}"/>
               </a:ext>
             </a:extLst>
           </p:cNvPr>
@@ -13192,7 +13314,7 @@
           <p:cNvPr id="9" name="">
             <a:extLst xmlns:a="http://schemas.openxmlformats.org/drawingml/2006/main">
               <a:ext uri="{FF2B5EF4-FFF2-40B4-BE49-F238E27FC236}">
-                <a16:creationId xmlns:a16="http://schemas.microsoft.com/office/drawing/2014/main" id="{28141FA8-705C-42ED-900A-69B52F63B98A}"/>
+                <a16:creationId xmlns:a16="http://schemas.microsoft.com/office/drawing/2014/main" id="{4C475D45-F964-41F3-861B-919D088CA820}"/>
               </a:ext>
             </a:extLst>
           </p:cNvPr>
@@ -13242,7 +13364,7 @@
           <p:cNvPr id="10" name="">
             <a:extLst xmlns:a="http://schemas.openxmlformats.org/drawingml/2006/main">
               <a:ext uri="{FF2B5EF4-FFF2-40B4-BE49-F238E27FC236}">
-                <a16:creationId xmlns:a16="http://schemas.microsoft.com/office/drawing/2014/main" id="{537D5F4C-6041-4CC8-9E06-0B768D13346B}"/>
+                <a16:creationId xmlns:a16="http://schemas.microsoft.com/office/drawing/2014/main" id="{0C146A01-0DFB-4B15-A417-3692ECC4DA4A}"/>
               </a:ext>
             </a:extLst>
           </p:cNvPr>
@@ -13292,7 +13414,7 @@
           <p:cNvPr id="11" name="">
             <a:extLst xmlns:a="http://schemas.openxmlformats.org/drawingml/2006/main">
               <a:ext uri="{FF2B5EF4-FFF2-40B4-BE49-F238E27FC236}">
-                <a16:creationId xmlns:a16="http://schemas.microsoft.com/office/drawing/2014/main" id="{CCD15412-5F17-410F-94AB-85AC8FAE0BCB}"/>
+                <a16:creationId xmlns:a16="http://schemas.microsoft.com/office/drawing/2014/main" id="{1DB8D2C6-798B-4281-B4CE-AAC01049A82A}"/>
               </a:ext>
             </a:extLst>
           </p:cNvPr>
@@ -13327,7 +13449,7 @@
           <p:cNvPr id="12" name="">
             <a:extLst xmlns:a="http://schemas.openxmlformats.org/drawingml/2006/main">
               <a:ext uri="{FF2B5EF4-FFF2-40B4-BE49-F238E27FC236}">
-                <a16:creationId xmlns:a16="http://schemas.microsoft.com/office/drawing/2014/main" id="{6CAF9A1E-EC4A-4CD5-B482-A0D97AF56CE8}"/>
+                <a16:creationId xmlns:a16="http://schemas.microsoft.com/office/drawing/2014/main" id="{6443CEDB-2BCA-4AB2-BB57-9C4A044A68DC}"/>
               </a:ext>
             </a:extLst>
           </p:cNvPr>
@@ -13377,7 +13499,7 @@
           <p:cNvPr id="13" name="">
             <a:extLst xmlns:a="http://schemas.openxmlformats.org/drawingml/2006/main">
               <a:ext uri="{FF2B5EF4-FFF2-40B4-BE49-F238E27FC236}">
-                <a16:creationId xmlns:a16="http://schemas.microsoft.com/office/drawing/2014/main" id="{99046D0B-FCAB-49E4-B041-E5534A045C9D}"/>
+                <a16:creationId xmlns:a16="http://schemas.microsoft.com/office/drawing/2014/main" id="{6B8FF1D6-839B-4CCC-A76B-66BB4D15CB16}"/>
               </a:ext>
             </a:extLst>
           </p:cNvPr>
@@ -13427,7 +13549,7 @@
           <p:cNvPr id="14" name="">
             <a:extLst xmlns:a="http://schemas.openxmlformats.org/drawingml/2006/main">
               <a:ext uri="{FF2B5EF4-FFF2-40B4-BE49-F238E27FC236}">
-                <a16:creationId xmlns:a16="http://schemas.microsoft.com/office/drawing/2014/main" id="{8B5ED92E-5AD6-4CF5-9B0D-44CDA41CA5E5}"/>
+                <a16:creationId xmlns:a16="http://schemas.microsoft.com/office/drawing/2014/main" id="{5605523F-ED09-4626-A4E3-B803575EB87B}"/>
               </a:ext>
             </a:extLst>
           </p:cNvPr>
@@ -13462,7 +13584,7 @@
           <p:cNvPr id="15" name="">
             <a:extLst xmlns:a="http://schemas.openxmlformats.org/drawingml/2006/main">
               <a:ext uri="{FF2B5EF4-FFF2-40B4-BE49-F238E27FC236}">
-                <a16:creationId xmlns:a16="http://schemas.microsoft.com/office/drawing/2014/main" id="{3FEE40F0-8C8B-4083-8D14-358BEE92BB4D}"/>
+                <a16:creationId xmlns:a16="http://schemas.microsoft.com/office/drawing/2014/main" id="{4232E24F-22E8-4616-B8F1-43ACE57DAAA4}"/>
               </a:ext>
             </a:extLst>
           </p:cNvPr>
@@ -13512,7 +13634,7 @@
           <p:cNvPr id="16" name="">
             <a:extLst xmlns:a="http://schemas.openxmlformats.org/drawingml/2006/main">
               <a:ext uri="{FF2B5EF4-FFF2-40B4-BE49-F238E27FC236}">
-                <a16:creationId xmlns:a16="http://schemas.microsoft.com/office/drawing/2014/main" id="{1FA037FA-CF03-4C30-89AE-37C22E8F9983}"/>
+                <a16:creationId xmlns:a16="http://schemas.microsoft.com/office/drawing/2014/main" id="{C6D3C3A8-AA21-438F-9328-469A6C43B1AA}"/>
               </a:ext>
             </a:extLst>
           </p:cNvPr>
@@ -13562,7 +13684,7 @@
           <p:cNvPr id="17" name="">
             <a:extLst xmlns:a="http://schemas.openxmlformats.org/drawingml/2006/main">
               <a:ext uri="{FF2B5EF4-FFF2-40B4-BE49-F238E27FC236}">
-                <a16:creationId xmlns:a16="http://schemas.microsoft.com/office/drawing/2014/main" id="{8C51DBEF-7475-4154-8647-CB432395AC37}"/>
+                <a16:creationId xmlns:a16="http://schemas.microsoft.com/office/drawing/2014/main" id="{0ED74D3D-E8DC-4FE2-A140-2D0D1A91EFD9}"/>
               </a:ext>
             </a:extLst>
           </p:cNvPr>
@@ -13597,7 +13719,7 @@
           <p:cNvPr id="18" name="">
             <a:extLst xmlns:a="http://schemas.openxmlformats.org/drawingml/2006/main">
               <a:ext uri="{FF2B5EF4-FFF2-40B4-BE49-F238E27FC236}">
-                <a16:creationId xmlns:a16="http://schemas.microsoft.com/office/drawing/2014/main" id="{1536BB73-E643-46B3-8F3F-3A7835DF26D3}"/>
+                <a16:creationId xmlns:a16="http://schemas.microsoft.com/office/drawing/2014/main" id="{6F677CF7-165F-4468-88C3-FD0A9D5EBCF8}"/>
               </a:ext>
             </a:extLst>
           </p:cNvPr>
@@ -13647,7 +13769,7 @@
           <p:cNvPr id="19" name="">
             <a:extLst xmlns:a="http://schemas.openxmlformats.org/drawingml/2006/main">
               <a:ext uri="{FF2B5EF4-FFF2-40B4-BE49-F238E27FC236}">
-                <a16:creationId xmlns:a16="http://schemas.microsoft.com/office/drawing/2014/main" id="{3413A5F5-7990-4623-8132-588EC8CE3F69}"/>
+                <a16:creationId xmlns:a16="http://schemas.microsoft.com/office/drawing/2014/main" id="{D2C82006-5EBB-4726-941F-7506C9DA9657}"/>
               </a:ext>
             </a:extLst>
           </p:cNvPr>
@@ -13697,7 +13819,7 @@
           <p:cNvPr id="20" name="">
             <a:extLst xmlns:a="http://schemas.openxmlformats.org/drawingml/2006/main">
               <a:ext uri="{FF2B5EF4-FFF2-40B4-BE49-F238E27FC236}">
-                <a16:creationId xmlns:a16="http://schemas.microsoft.com/office/drawing/2014/main" id="{42825856-B926-403A-98F6-85F07EF037BC}"/>
+                <a16:creationId xmlns:a16="http://schemas.microsoft.com/office/drawing/2014/main" id="{9B1E76EC-FE13-49DE-9AA3-52E063E76802}"/>
               </a:ext>
             </a:extLst>
           </p:cNvPr>
@@ -13747,7 +13869,7 @@
           <p:cNvPr id="21" name="">
             <a:extLst xmlns:a="http://schemas.openxmlformats.org/drawingml/2006/main">
               <a:ext uri="{FF2B5EF4-FFF2-40B4-BE49-F238E27FC236}">
-                <a16:creationId xmlns:a16="http://schemas.microsoft.com/office/drawing/2014/main" id="{3F0EFB83-2481-4EF1-9E46-AF43E1F2ACC4}"/>
+                <a16:creationId xmlns:a16="http://schemas.microsoft.com/office/drawing/2014/main" id="{86F1B93D-3C9B-43C2-BF6E-9F1AB3306F1C}"/>
               </a:ext>
             </a:extLst>
           </p:cNvPr>
@@ -13797,7 +13919,7 @@
           <p:cNvPr id="22" name="">
             <a:extLst xmlns:a="http://schemas.openxmlformats.org/drawingml/2006/main">
               <a:ext uri="{FF2B5EF4-FFF2-40B4-BE49-F238E27FC236}">
-                <a16:creationId xmlns:a16="http://schemas.microsoft.com/office/drawing/2014/main" id="{F820F937-C4E5-4B79-B3CD-F4550735AAFF}"/>
+                <a16:creationId xmlns:a16="http://schemas.microsoft.com/office/drawing/2014/main" id="{EEA72E07-36CB-43B0-8398-9D21D7ED510E}"/>
               </a:ext>
             </a:extLst>
           </p:cNvPr>
@@ -13847,7 +13969,7 @@
           <p:cNvPr id="23" name="">
             <a:extLst xmlns:a="http://schemas.openxmlformats.org/drawingml/2006/main">
               <a:ext uri="{FF2B5EF4-FFF2-40B4-BE49-F238E27FC236}">
-                <a16:creationId xmlns:a16="http://schemas.microsoft.com/office/drawing/2014/main" id="{7E0C54A9-1E2F-460D-8621-FF8E53F16125}"/>
+                <a16:creationId xmlns:a16="http://schemas.microsoft.com/office/drawing/2014/main" id="{34940E92-8F1B-4384-B01F-8E87788DA168}"/>
               </a:ext>
             </a:extLst>
           </p:cNvPr>
@@ -13880,7 +14002,7 @@
           <p:cNvPr id="24" name="">
             <a:extLst xmlns:a="http://schemas.openxmlformats.org/drawingml/2006/main">
               <a:ext uri="{FF2B5EF4-FFF2-40B4-BE49-F238E27FC236}">
-                <a16:creationId xmlns:a16="http://schemas.microsoft.com/office/drawing/2014/main" id="{806578CE-C19D-44D6-BCD9-1C85A42AC06F}"/>
+                <a16:creationId xmlns:a16="http://schemas.microsoft.com/office/drawing/2014/main" id="{B1B036FC-6253-4E0B-A755-66F6FBCB10BA}"/>
               </a:ext>
             </a:extLst>
           </p:cNvPr>
@@ -13930,7 +14052,7 @@
           <p:cNvPr id="25" name="">
             <a:extLst xmlns:a="http://schemas.openxmlformats.org/drawingml/2006/main">
               <a:ext uri="{FF2B5EF4-FFF2-40B4-BE49-F238E27FC236}">
-                <a16:creationId xmlns:a16="http://schemas.microsoft.com/office/drawing/2014/main" id="{EF169720-4BC0-4906-8998-FD266C90A98C}"/>
+                <a16:creationId xmlns:a16="http://schemas.microsoft.com/office/drawing/2014/main" id="{10AD779B-D359-4611-BAAA-A53275C557CF}"/>
               </a:ext>
             </a:extLst>
           </p:cNvPr>
@@ -13963,7 +14085,7 @@
           <p:cNvPr id="26" name="">
             <a:extLst xmlns:a="http://schemas.openxmlformats.org/drawingml/2006/main">
               <a:ext uri="{FF2B5EF4-FFF2-40B4-BE49-F238E27FC236}">
-                <a16:creationId xmlns:a16="http://schemas.microsoft.com/office/drawing/2014/main" id="{A7F2AA91-5602-4D4F-8F15-580228937CEE}"/>
+                <a16:creationId xmlns:a16="http://schemas.microsoft.com/office/drawing/2014/main" id="{35D91061-B74D-4080-BAA8-6E4A0EE9C90D}"/>
               </a:ext>
             </a:extLst>
           </p:cNvPr>
@@ -14013,7 +14135,7 @@
           <p:cNvPr id="27" name="">
             <a:extLst xmlns:a="http://schemas.openxmlformats.org/drawingml/2006/main">
               <a:ext uri="{FF2B5EF4-FFF2-40B4-BE49-F238E27FC236}">
-                <a16:creationId xmlns:a16="http://schemas.microsoft.com/office/drawing/2014/main" id="{A8F9B972-FAD9-486A-8B32-C24D69CAAB3C}"/>
+                <a16:creationId xmlns:a16="http://schemas.microsoft.com/office/drawing/2014/main" id="{2314B483-201B-4C14-B3FD-94A1A25A878F}"/>
               </a:ext>
             </a:extLst>
           </p:cNvPr>
@@ -14046,7 +14168,7 @@
           <p:cNvPr id="28" name="">
             <a:extLst xmlns:a="http://schemas.openxmlformats.org/drawingml/2006/main">
               <a:ext uri="{FF2B5EF4-FFF2-40B4-BE49-F238E27FC236}">
-                <a16:creationId xmlns:a16="http://schemas.microsoft.com/office/drawing/2014/main" id="{C7ABA8B6-FC04-48E6-9029-F56ED20F6CC7}"/>
+                <a16:creationId xmlns:a16="http://schemas.microsoft.com/office/drawing/2014/main" id="{CB94A37B-F302-49FA-B17A-D896F9FCE3B6}"/>
               </a:ext>
             </a:extLst>
           </p:cNvPr>
@@ -14094,7 +14216,7 @@
     </p:spTree>
     <p:extLst>
       <p:ext uri="{BB962C8B-B14F-4D97-AF65-F5344CB8AC3E}">
-        <p14:creationId xmlns:p14="http://schemas.microsoft.com/office/powerpoint/2010/main" val="156316655"/>
+        <p14:creationId xmlns:p14="http://schemas.microsoft.com/office/powerpoint/2010/main" val="114026569"/>
       </p:ext>
     </p:extLst>
   </p:cSld>
@@ -14125,7 +14247,7 @@
           <p:cNvPr id="1" name="">
             <a:extLst xmlns:a="http://schemas.openxmlformats.org/drawingml/2006/main">
               <a:ext uri="{FF2B5EF4-FFF2-40B4-BE49-F238E27FC236}">
-                <a16:creationId xmlns:a16="http://schemas.microsoft.com/office/drawing/2014/main" id="{6D113970-BA14-45E3-808A-359325063DBD}"/>
+                <a16:creationId xmlns:a16="http://schemas.microsoft.com/office/drawing/2014/main" id="{25C7A9E4-1C84-46BB-8960-B20A453534C2}"/>
               </a:ext>
             </a:extLst>
           </p:cNvPr>
@@ -14160,7 +14282,7 @@
           <p:nvPr/>
         </p:nvPicPr>
         <p:blipFill>
-          <a:blip xmlns:r="http://schemas.openxmlformats.org/officeDocument/2006/relationships" xmlns:a="http://schemas.openxmlformats.org/drawingml/2006/main" r:embed="R4c6fb6d31b2f48e1"/>
+          <a:blip xmlns:r="http://schemas.openxmlformats.org/officeDocument/2006/relationships" xmlns:a="http://schemas.openxmlformats.org/drawingml/2006/main" r:embed="Re1b235d5874346a7"/>
           <a:stretch xmlns:a="http://schemas.openxmlformats.org/drawingml/2006/main"/>
         </p:blipFill>
         <p:spPr>
@@ -14178,7 +14300,7 @@
           <p:cNvPr id="3" name="">
             <a:extLst xmlns:a="http://schemas.openxmlformats.org/drawingml/2006/main">
               <a:ext uri="{FF2B5EF4-FFF2-40B4-BE49-F238E27FC236}">
-                <a16:creationId xmlns:a16="http://schemas.microsoft.com/office/drawing/2014/main" id="{0FAF8BC0-F1E8-4B05-A4C8-6AF65EF10C0F}"/>
+                <a16:creationId xmlns:a16="http://schemas.microsoft.com/office/drawing/2014/main" id="{AC56DB6A-2CC0-4CCF-A4F1-CA222CF61685}"/>
               </a:ext>
             </a:extLst>
           </p:cNvPr>
@@ -14228,7 +14350,7 @@
           <p:cNvPr id="4" name="">
             <a:extLst xmlns:a="http://schemas.openxmlformats.org/drawingml/2006/main">
               <a:ext uri="{FF2B5EF4-FFF2-40B4-BE49-F238E27FC236}">
-                <a16:creationId xmlns:a16="http://schemas.microsoft.com/office/drawing/2014/main" id="{400CECE9-85C6-4745-9C30-AA33B4792208}"/>
+                <a16:creationId xmlns:a16="http://schemas.microsoft.com/office/drawing/2014/main" id="{0F09B4AC-934A-4F56-8291-0B295A91F59A}"/>
               </a:ext>
             </a:extLst>
           </p:cNvPr>
@@ -14261,7 +14383,7 @@
           <p:cNvPr id="5" name="">
             <a:extLst xmlns:a="http://schemas.openxmlformats.org/drawingml/2006/main">
               <a:ext uri="{FF2B5EF4-FFF2-40B4-BE49-F238E27FC236}">
-                <a16:creationId xmlns:a16="http://schemas.microsoft.com/office/drawing/2014/main" id="{AC74075E-66D7-461A-A80C-BC9971E49AE9}"/>
+                <a16:creationId xmlns:a16="http://schemas.microsoft.com/office/drawing/2014/main" id="{7B05D4BC-CAC3-46EC-9993-DDB9CF3A677D}"/>
               </a:ext>
             </a:extLst>
           </p:cNvPr>
@@ -14292,7 +14414,7 @@
           <p:cNvPr id="6" name="">
             <a:extLst xmlns:a="http://schemas.openxmlformats.org/drawingml/2006/main">
               <a:ext uri="{FF2B5EF4-FFF2-40B4-BE49-F238E27FC236}">
-                <a16:creationId xmlns:a16="http://schemas.microsoft.com/office/drawing/2014/main" id="{32A6A65D-BBA3-4405-A6CE-8A9584B7E170}"/>
+                <a16:creationId xmlns:a16="http://schemas.microsoft.com/office/drawing/2014/main" id="{08FED817-9430-4B5F-A3D9-62978DE3D468}"/>
               </a:ext>
             </a:extLst>
           </p:cNvPr>
@@ -14342,7 +14464,7 @@
           <p:cNvPr id="7" name="">
             <a:extLst xmlns:a="http://schemas.openxmlformats.org/drawingml/2006/main">
               <a:ext uri="{FF2B5EF4-FFF2-40B4-BE49-F238E27FC236}">
-                <a16:creationId xmlns:a16="http://schemas.microsoft.com/office/drawing/2014/main" id="{3C9BC32F-06D2-4AB0-900D-AA258B0D3D95}"/>
+                <a16:creationId xmlns:a16="http://schemas.microsoft.com/office/drawing/2014/main" id="{2B4D167F-F268-427F-BC9C-F8046E6A12CC}"/>
               </a:ext>
             </a:extLst>
           </p:cNvPr>
@@ -14392,7 +14514,7 @@
           <p:cNvPr id="8" name="">
             <a:extLst xmlns:a="http://schemas.openxmlformats.org/drawingml/2006/main">
               <a:ext uri="{FF2B5EF4-FFF2-40B4-BE49-F238E27FC236}">
-                <a16:creationId xmlns:a16="http://schemas.microsoft.com/office/drawing/2014/main" id="{4ED4AC28-BB5B-42C4-BED9-A4C4D9264920}"/>
+                <a16:creationId xmlns:a16="http://schemas.microsoft.com/office/drawing/2014/main" id="{B5F03E99-7333-4528-83C4-5DAD790530FD}"/>
               </a:ext>
             </a:extLst>
           </p:cNvPr>
@@ -14427,7 +14549,7 @@
           <p:cNvPr id="9" name="">
             <a:extLst xmlns:a="http://schemas.openxmlformats.org/drawingml/2006/main">
               <a:ext uri="{FF2B5EF4-FFF2-40B4-BE49-F238E27FC236}">
-                <a16:creationId xmlns:a16="http://schemas.microsoft.com/office/drawing/2014/main" id="{8A1C8EAF-DB9B-46DC-9F4A-A58BC5371056}"/>
+                <a16:creationId xmlns:a16="http://schemas.microsoft.com/office/drawing/2014/main" id="{91C1F42F-9633-46C2-AD09-8416994FB9CA}"/>
               </a:ext>
             </a:extLst>
           </p:cNvPr>
@@ -14460,7 +14582,7 @@
           <p:cNvPr id="10" name="">
             <a:extLst xmlns:a="http://schemas.openxmlformats.org/drawingml/2006/main">
               <a:ext uri="{FF2B5EF4-FFF2-40B4-BE49-F238E27FC236}">
-                <a16:creationId xmlns:a16="http://schemas.microsoft.com/office/drawing/2014/main" id="{3FA5F818-0A3B-44D6-A831-5CE75AE5CE1C}"/>
+                <a16:creationId xmlns:a16="http://schemas.microsoft.com/office/drawing/2014/main" id="{FC2FF645-F1E0-408E-91B0-86AD51A0AF2E}"/>
               </a:ext>
             </a:extLst>
           </p:cNvPr>
@@ -14510,7 +14632,7 @@
           <p:cNvPr id="11" name="">
             <a:extLst xmlns:a="http://schemas.openxmlformats.org/drawingml/2006/main">
               <a:ext uri="{FF2B5EF4-FFF2-40B4-BE49-F238E27FC236}">
-                <a16:creationId xmlns:a16="http://schemas.microsoft.com/office/drawing/2014/main" id="{D3C8D5A1-D9D8-404F-97E0-19D14103B3CA}"/>
+                <a16:creationId xmlns:a16="http://schemas.microsoft.com/office/drawing/2014/main" id="{441B59CC-BEF3-41FF-9C45-D59764026664}"/>
               </a:ext>
             </a:extLst>
           </p:cNvPr>
@@ -14560,7 +14682,7 @@
           <p:cNvPr id="12" name="">
             <a:extLst xmlns:a="http://schemas.openxmlformats.org/drawingml/2006/main">
               <a:ext uri="{FF2B5EF4-FFF2-40B4-BE49-F238E27FC236}">
-                <a16:creationId xmlns:a16="http://schemas.microsoft.com/office/drawing/2014/main" id="{A855E295-CA0D-4FFD-844E-20B98A821724}"/>
+                <a16:creationId xmlns:a16="http://schemas.microsoft.com/office/drawing/2014/main" id="{6A41F454-9501-4DDA-AB41-8AB9223B6FE0}"/>
               </a:ext>
             </a:extLst>
           </p:cNvPr>
@@ -14610,7 +14732,7 @@
           <p:cNvPr id="13" name="">
             <a:extLst xmlns:a="http://schemas.openxmlformats.org/drawingml/2006/main">
               <a:ext uri="{FF2B5EF4-FFF2-40B4-BE49-F238E27FC236}">
-                <a16:creationId xmlns:a16="http://schemas.microsoft.com/office/drawing/2014/main" id="{2037683B-3A46-421D-8451-33799753E74D}"/>
+                <a16:creationId xmlns:a16="http://schemas.microsoft.com/office/drawing/2014/main" id="{A91B2C36-382B-4B87-B68D-9AAA12CBD833}"/>
               </a:ext>
             </a:extLst>
           </p:cNvPr>
@@ -14645,7 +14767,7 @@
           <p:cNvPr id="14" name="">
             <a:extLst xmlns:a="http://schemas.openxmlformats.org/drawingml/2006/main">
               <a:ext uri="{FF2B5EF4-FFF2-40B4-BE49-F238E27FC236}">
-                <a16:creationId xmlns:a16="http://schemas.microsoft.com/office/drawing/2014/main" id="{EDDC2408-E87A-4B88-9925-ED90A238DF65}"/>
+                <a16:creationId xmlns:a16="http://schemas.microsoft.com/office/drawing/2014/main" id="{C6D87C5D-5553-44DB-86F1-FA632C575C6D}"/>
               </a:ext>
             </a:extLst>
           </p:cNvPr>
@@ -14678,7 +14800,7 @@
           <p:cNvPr id="15" name="">
             <a:extLst xmlns:a="http://schemas.openxmlformats.org/drawingml/2006/main">
               <a:ext uri="{FF2B5EF4-FFF2-40B4-BE49-F238E27FC236}">
-                <a16:creationId xmlns:a16="http://schemas.microsoft.com/office/drawing/2014/main" id="{880144A5-0E8D-4CC0-87E0-DD52077241FD}"/>
+                <a16:creationId xmlns:a16="http://schemas.microsoft.com/office/drawing/2014/main" id="{9AF2448D-050F-49C7-91AF-9A1770383106}"/>
               </a:ext>
             </a:extLst>
           </p:cNvPr>
@@ -14728,7 +14850,7 @@
           <p:cNvPr id="16" name="">
             <a:extLst xmlns:a="http://schemas.openxmlformats.org/drawingml/2006/main">
               <a:ext uri="{FF2B5EF4-FFF2-40B4-BE49-F238E27FC236}">
-                <a16:creationId xmlns:a16="http://schemas.microsoft.com/office/drawing/2014/main" id="{E3A278D3-C7D5-4136-A895-9DA860DFAD47}"/>
+                <a16:creationId xmlns:a16="http://schemas.microsoft.com/office/drawing/2014/main" id="{8C583E8E-9EFF-460C-94CD-D3B764B93A36}"/>
               </a:ext>
             </a:extLst>
           </p:cNvPr>
@@ -14778,7 +14900,7 @@
           <p:cNvPr id="17" name="">
             <a:extLst xmlns:a="http://schemas.openxmlformats.org/drawingml/2006/main">
               <a:ext uri="{FF2B5EF4-FFF2-40B4-BE49-F238E27FC236}">
-                <a16:creationId xmlns:a16="http://schemas.microsoft.com/office/drawing/2014/main" id="{41DDF32A-716D-4804-8C5E-DA95FD13CB64}"/>
+                <a16:creationId xmlns:a16="http://schemas.microsoft.com/office/drawing/2014/main" id="{8125D80B-E04A-42BB-9C4F-8015EB2464CE}"/>
               </a:ext>
             </a:extLst>
           </p:cNvPr>
@@ -14828,7 +14950,7 @@
           <p:cNvPr id="18" name="">
             <a:extLst xmlns:a="http://schemas.openxmlformats.org/drawingml/2006/main">
               <a:ext uri="{FF2B5EF4-FFF2-40B4-BE49-F238E27FC236}">
-                <a16:creationId xmlns:a16="http://schemas.microsoft.com/office/drawing/2014/main" id="{46AC4654-6B70-44FC-A384-2A720CF2EBCD}"/>
+                <a16:creationId xmlns:a16="http://schemas.microsoft.com/office/drawing/2014/main" id="{4AA52312-0B1E-4AB5-9562-FA1592AC09A7}"/>
               </a:ext>
             </a:extLst>
           </p:cNvPr>
@@ -14863,7 +14985,7 @@
           <p:cNvPr id="19" name="">
             <a:extLst xmlns:a="http://schemas.openxmlformats.org/drawingml/2006/main">
               <a:ext uri="{FF2B5EF4-FFF2-40B4-BE49-F238E27FC236}">
-                <a16:creationId xmlns:a16="http://schemas.microsoft.com/office/drawing/2014/main" id="{CD19182D-5868-4D3A-8874-434B3398149F}"/>
+                <a16:creationId xmlns:a16="http://schemas.microsoft.com/office/drawing/2014/main" id="{2722BCD0-1B14-46B2-9688-0FF8DD44F393}"/>
               </a:ext>
             </a:extLst>
           </p:cNvPr>
@@ -14896,7 +15018,7 @@
           <p:cNvPr id="20" name="">
             <a:extLst xmlns:a="http://schemas.openxmlformats.org/drawingml/2006/main">
               <a:ext uri="{FF2B5EF4-FFF2-40B4-BE49-F238E27FC236}">
-                <a16:creationId xmlns:a16="http://schemas.microsoft.com/office/drawing/2014/main" id="{0EDA3D7D-2163-4468-BCED-E8D5E42F1B20}"/>
+                <a16:creationId xmlns:a16="http://schemas.microsoft.com/office/drawing/2014/main" id="{BDF389B3-8278-4876-AAEA-F44195EC48C8}"/>
               </a:ext>
             </a:extLst>
           </p:cNvPr>
@@ -14946,7 +15068,7 @@
           <p:cNvPr id="21" name="">
             <a:extLst xmlns:a="http://schemas.openxmlformats.org/drawingml/2006/main">
               <a:ext uri="{FF2B5EF4-FFF2-40B4-BE49-F238E27FC236}">
-                <a16:creationId xmlns:a16="http://schemas.microsoft.com/office/drawing/2014/main" id="{23B62050-B94A-460D-AE94-1E42C11CCB49}"/>
+                <a16:creationId xmlns:a16="http://schemas.microsoft.com/office/drawing/2014/main" id="{7DDD8E8E-0DF5-4F92-B902-7331F2F3D15D}"/>
               </a:ext>
             </a:extLst>
           </p:cNvPr>
@@ -14996,7 +15118,7 @@
           <p:cNvPr id="22" name="">
             <a:extLst xmlns:a="http://schemas.openxmlformats.org/drawingml/2006/main">
               <a:ext uri="{FF2B5EF4-FFF2-40B4-BE49-F238E27FC236}">
-                <a16:creationId xmlns:a16="http://schemas.microsoft.com/office/drawing/2014/main" id="{25A06EC4-63F8-484A-80D2-5B57C45F064C}"/>
+                <a16:creationId xmlns:a16="http://schemas.microsoft.com/office/drawing/2014/main" id="{894B97DE-C7F4-4AE8-A61D-12417718B475}"/>
               </a:ext>
             </a:extLst>
           </p:cNvPr>
@@ -15046,7 +15168,7 @@
           <p:cNvPr id="23" name="">
             <a:extLst xmlns:a="http://schemas.openxmlformats.org/drawingml/2006/main">
               <a:ext uri="{FF2B5EF4-FFF2-40B4-BE49-F238E27FC236}">
-                <a16:creationId xmlns:a16="http://schemas.microsoft.com/office/drawing/2014/main" id="{4419C45A-B18B-48CE-BACD-8D9502A6E052}"/>
+                <a16:creationId xmlns:a16="http://schemas.microsoft.com/office/drawing/2014/main" id="{03D543B2-E825-4CC2-8DE9-3D9DD7FC37A1}"/>
               </a:ext>
             </a:extLst>
           </p:cNvPr>
@@ -15081,7 +15203,7 @@
           <p:cNvPr id="24" name="">
             <a:extLst xmlns:a="http://schemas.openxmlformats.org/drawingml/2006/main">
               <a:ext uri="{FF2B5EF4-FFF2-40B4-BE49-F238E27FC236}">
-                <a16:creationId xmlns:a16="http://schemas.microsoft.com/office/drawing/2014/main" id="{5A368C65-2882-48F6-8532-5006CAE49D09}"/>
+                <a16:creationId xmlns:a16="http://schemas.microsoft.com/office/drawing/2014/main" id="{28994704-1E68-48F0-B969-06941A392BC6}"/>
               </a:ext>
             </a:extLst>
           </p:cNvPr>
@@ -15114,7 +15236,7 @@
           <p:cNvPr id="25" name="">
             <a:extLst xmlns:a="http://schemas.openxmlformats.org/drawingml/2006/main">
               <a:ext uri="{FF2B5EF4-FFF2-40B4-BE49-F238E27FC236}">
-                <a16:creationId xmlns:a16="http://schemas.microsoft.com/office/drawing/2014/main" id="{46A730CC-0C06-4571-AB4F-40D531D51109}"/>
+                <a16:creationId xmlns:a16="http://schemas.microsoft.com/office/drawing/2014/main" id="{6ACA10C3-96B5-4BFF-BAA1-0CD8CD91BB91}"/>
               </a:ext>
             </a:extLst>
           </p:cNvPr>
@@ -15164,7 +15286,7 @@
           <p:cNvPr id="26" name="">
             <a:extLst xmlns:a="http://schemas.openxmlformats.org/drawingml/2006/main">
               <a:ext uri="{FF2B5EF4-FFF2-40B4-BE49-F238E27FC236}">
-                <a16:creationId xmlns:a16="http://schemas.microsoft.com/office/drawing/2014/main" id="{07E2FA1E-67FF-403C-BBFF-851B61C61423}"/>
+                <a16:creationId xmlns:a16="http://schemas.microsoft.com/office/drawing/2014/main" id="{E0780050-DC0F-44A0-A252-3018297ED749}"/>
               </a:ext>
             </a:extLst>
           </p:cNvPr>
@@ -15214,7 +15336,7 @@
           <p:cNvPr id="27" name="">
             <a:extLst xmlns:a="http://schemas.openxmlformats.org/drawingml/2006/main">
               <a:ext uri="{FF2B5EF4-FFF2-40B4-BE49-F238E27FC236}">
-                <a16:creationId xmlns:a16="http://schemas.microsoft.com/office/drawing/2014/main" id="{16CDAE5C-0733-4643-9284-958AED933CA8}"/>
+                <a16:creationId xmlns:a16="http://schemas.microsoft.com/office/drawing/2014/main" id="{BAEB7532-3667-41C1-8893-03A7DA67C6F2}"/>
               </a:ext>
             </a:extLst>
           </p:cNvPr>
@@ -15264,7 +15386,7 @@
           <p:cNvPr id="28" name="">
             <a:extLst xmlns:a="http://schemas.openxmlformats.org/drawingml/2006/main">
               <a:ext uri="{FF2B5EF4-FFF2-40B4-BE49-F238E27FC236}">
-                <a16:creationId xmlns:a16="http://schemas.microsoft.com/office/drawing/2014/main" id="{3C0437EB-0761-4E58-A5AE-88C676C6F3BC}"/>
+                <a16:creationId xmlns:a16="http://schemas.microsoft.com/office/drawing/2014/main" id="{D931B978-A93E-4559-9E31-E38395E4CA42}"/>
               </a:ext>
             </a:extLst>
           </p:cNvPr>
@@ -15299,7 +15421,7 @@
           <p:cNvPr id="29" name="">
             <a:extLst xmlns:a="http://schemas.openxmlformats.org/drawingml/2006/main">
               <a:ext uri="{FF2B5EF4-FFF2-40B4-BE49-F238E27FC236}">
-                <a16:creationId xmlns:a16="http://schemas.microsoft.com/office/drawing/2014/main" id="{1F072E4C-2002-40DF-BA00-FB9616F50ED0}"/>
+                <a16:creationId xmlns:a16="http://schemas.microsoft.com/office/drawing/2014/main" id="{B11F7794-EC47-4CEB-B205-7A769E5BADCA}"/>
               </a:ext>
             </a:extLst>
           </p:cNvPr>
@@ -15332,7 +15454,7 @@
           <p:cNvPr id="30" name="">
             <a:extLst xmlns:a="http://schemas.openxmlformats.org/drawingml/2006/main">
               <a:ext uri="{FF2B5EF4-FFF2-40B4-BE49-F238E27FC236}">
-                <a16:creationId xmlns:a16="http://schemas.microsoft.com/office/drawing/2014/main" id="{867A44EB-7820-4F48-829F-8F2A0A6FAB2A}"/>
+                <a16:creationId xmlns:a16="http://schemas.microsoft.com/office/drawing/2014/main" id="{D1306212-4910-4293-BDB1-9F5EA7E4683B}"/>
               </a:ext>
             </a:extLst>
           </p:cNvPr>
@@ -15382,7 +15504,7 @@
           <p:cNvPr id="31" name="">
             <a:extLst xmlns:a="http://schemas.openxmlformats.org/drawingml/2006/main">
               <a:ext uri="{FF2B5EF4-FFF2-40B4-BE49-F238E27FC236}">
-                <a16:creationId xmlns:a16="http://schemas.microsoft.com/office/drawing/2014/main" id="{1800C46F-F4C3-4D6E-8411-BC3582C1332B}"/>
+                <a16:creationId xmlns:a16="http://schemas.microsoft.com/office/drawing/2014/main" id="{E0CC8E65-7C92-430F-B7AF-953C46843747}"/>
               </a:ext>
             </a:extLst>
           </p:cNvPr>
@@ -15432,7 +15554,7 @@
           <p:cNvPr id="32" name="">
             <a:extLst xmlns:a="http://schemas.openxmlformats.org/drawingml/2006/main">
               <a:ext uri="{FF2B5EF4-FFF2-40B4-BE49-F238E27FC236}">
-                <a16:creationId xmlns:a16="http://schemas.microsoft.com/office/drawing/2014/main" id="{5906C4BA-86B4-4F2E-830E-901D78FA0165}"/>
+                <a16:creationId xmlns:a16="http://schemas.microsoft.com/office/drawing/2014/main" id="{9F4A4F9C-4286-4733-A761-0F9C2E4EC4AA}"/>
               </a:ext>
             </a:extLst>
           </p:cNvPr>
@@ -15482,7 +15604,7 @@
           <p:cNvPr id="33" name="">
             <a:extLst xmlns:a="http://schemas.openxmlformats.org/drawingml/2006/main">
               <a:ext uri="{FF2B5EF4-FFF2-40B4-BE49-F238E27FC236}">
-                <a16:creationId xmlns:a16="http://schemas.microsoft.com/office/drawing/2014/main" id="{E591BDFD-75FF-46C4-91F9-A69D95807D3F}"/>
+                <a16:creationId xmlns:a16="http://schemas.microsoft.com/office/drawing/2014/main" id="{3A0D2E56-4AA0-46F5-8ADD-BB42C78F9A4C}"/>
               </a:ext>
             </a:extLst>
           </p:cNvPr>
@@ -15517,7 +15639,7 @@
           <p:cNvPr id="34" name="">
             <a:extLst xmlns:a="http://schemas.openxmlformats.org/drawingml/2006/main">
               <a:ext uri="{FF2B5EF4-FFF2-40B4-BE49-F238E27FC236}">
-                <a16:creationId xmlns:a16="http://schemas.microsoft.com/office/drawing/2014/main" id="{4D851B1E-227D-480C-A318-696B30995C61}"/>
+                <a16:creationId xmlns:a16="http://schemas.microsoft.com/office/drawing/2014/main" id="{A218B42C-35F8-4474-AB9C-397546E4EECC}"/>
               </a:ext>
             </a:extLst>
           </p:cNvPr>
@@ -15550,7 +15672,7 @@
           <p:cNvPr id="35" name="">
             <a:extLst xmlns:a="http://schemas.openxmlformats.org/drawingml/2006/main">
               <a:ext uri="{FF2B5EF4-FFF2-40B4-BE49-F238E27FC236}">
-                <a16:creationId xmlns:a16="http://schemas.microsoft.com/office/drawing/2014/main" id="{EB679B9F-B33A-4AB3-AB08-BD5036E7755F}"/>
+                <a16:creationId xmlns:a16="http://schemas.microsoft.com/office/drawing/2014/main" id="{C6746419-B5FD-41DE-A915-0704C069EEE4}"/>
               </a:ext>
             </a:extLst>
           </p:cNvPr>
@@ -15600,7 +15722,7 @@
           <p:cNvPr id="36" name="">
             <a:extLst xmlns:a="http://schemas.openxmlformats.org/drawingml/2006/main">
               <a:ext uri="{FF2B5EF4-FFF2-40B4-BE49-F238E27FC236}">
-                <a16:creationId xmlns:a16="http://schemas.microsoft.com/office/drawing/2014/main" id="{65B2E88D-8D2C-472B-82F5-1E016373A4CF}"/>
+                <a16:creationId xmlns:a16="http://schemas.microsoft.com/office/drawing/2014/main" id="{34A56C43-7508-4AD5-ACB1-E3EDB6049B34}"/>
               </a:ext>
             </a:extLst>
           </p:cNvPr>
@@ -15650,7 +15772,7 @@
           <p:cNvPr id="37" name="">
             <a:extLst xmlns:a="http://schemas.openxmlformats.org/drawingml/2006/main">
               <a:ext uri="{FF2B5EF4-FFF2-40B4-BE49-F238E27FC236}">
-                <a16:creationId xmlns:a16="http://schemas.microsoft.com/office/drawing/2014/main" id="{B099192D-1D0E-4A20-90E7-CA10149B69A7}"/>
+                <a16:creationId xmlns:a16="http://schemas.microsoft.com/office/drawing/2014/main" id="{80E3509E-7E5C-4A3D-90DA-F2FEDA3FEAB8}"/>
               </a:ext>
             </a:extLst>
           </p:cNvPr>
@@ -15698,7 +15820,7 @@
     </p:spTree>
     <p:extLst>
       <p:ext uri="{BB962C8B-B14F-4D97-AF65-F5344CB8AC3E}">
-        <p14:creationId xmlns:p14="http://schemas.microsoft.com/office/powerpoint/2010/main" val="2070358352"/>
+        <p14:creationId xmlns:p14="http://schemas.microsoft.com/office/powerpoint/2010/main" val="833016529"/>
       </p:ext>
     </p:extLst>
   </p:cSld>
@@ -15729,7 +15851,7 @@
           <p:cNvPr id="1" name="">
             <a:extLst xmlns:a="http://schemas.openxmlformats.org/drawingml/2006/main">
               <a:ext uri="{FF2B5EF4-FFF2-40B4-BE49-F238E27FC236}">
-                <a16:creationId xmlns:a16="http://schemas.microsoft.com/office/drawing/2014/main" id="{2BE52B14-9246-4378-BB56-3D79A46DAD1F}"/>
+                <a16:creationId xmlns:a16="http://schemas.microsoft.com/office/drawing/2014/main" id="{5D5B274E-31D5-42BE-B289-64363FACAFEF}"/>
               </a:ext>
             </a:extLst>
           </p:cNvPr>
@@ -15764,7 +15886,7 @@
           <p:nvPr/>
         </p:nvPicPr>
         <p:blipFill>
-          <a:blip xmlns:r="http://schemas.openxmlformats.org/officeDocument/2006/relationships" xmlns:a="http://schemas.openxmlformats.org/drawingml/2006/main" r:embed="R49661265c77a4327"/>
+          <a:blip xmlns:r="http://schemas.openxmlformats.org/officeDocument/2006/relationships" xmlns:a="http://schemas.openxmlformats.org/drawingml/2006/main" r:embed="R45f2185d4fc84d8d"/>
           <a:stretch xmlns:a="http://schemas.openxmlformats.org/drawingml/2006/main"/>
         </p:blipFill>
         <p:spPr>
@@ -15782,7 +15904,7 @@
           <p:cNvPr id="3" name="">
             <a:extLst xmlns:a="http://schemas.openxmlformats.org/drawingml/2006/main">
               <a:ext uri="{FF2B5EF4-FFF2-40B4-BE49-F238E27FC236}">
-                <a16:creationId xmlns:a16="http://schemas.microsoft.com/office/drawing/2014/main" id="{3CA96CD3-4AAA-4F6F-AC4A-F566BC3C218A}"/>
+                <a16:creationId xmlns:a16="http://schemas.microsoft.com/office/drawing/2014/main" id="{2623FBD2-A279-4148-941D-C56093723D43}"/>
               </a:ext>
             </a:extLst>
           </p:cNvPr>
@@ -15832,7 +15954,7 @@
           <p:cNvPr id="4" name="">
             <a:extLst xmlns:a="http://schemas.openxmlformats.org/drawingml/2006/main">
               <a:ext uri="{FF2B5EF4-FFF2-40B4-BE49-F238E27FC236}">
-                <a16:creationId xmlns:a16="http://schemas.microsoft.com/office/drawing/2014/main" id="{9F98FEC5-F122-4F6D-8530-85EF645F8CBB}"/>
+                <a16:creationId xmlns:a16="http://schemas.microsoft.com/office/drawing/2014/main" id="{833E9654-A479-4562-9989-2BBFC5C4B22A}"/>
               </a:ext>
             </a:extLst>
           </p:cNvPr>
@@ -15865,7 +15987,7 @@
           <p:cNvPr id="5" name="">
             <a:extLst xmlns:a="http://schemas.openxmlformats.org/drawingml/2006/main">
               <a:ext uri="{FF2B5EF4-FFF2-40B4-BE49-F238E27FC236}">
-                <a16:creationId xmlns:a16="http://schemas.microsoft.com/office/drawing/2014/main" id="{CB91CBCB-48DE-48EB-A6E0-9E94712D6A69}"/>
+                <a16:creationId xmlns:a16="http://schemas.microsoft.com/office/drawing/2014/main" id="{08108EE0-4C86-4DC9-88F3-E16FB0D17581}"/>
               </a:ext>
             </a:extLst>
           </p:cNvPr>
@@ -15896,7 +16018,7 @@
           <p:cNvPr id="6" name="">
             <a:extLst xmlns:a="http://schemas.openxmlformats.org/drawingml/2006/main">
               <a:ext uri="{FF2B5EF4-FFF2-40B4-BE49-F238E27FC236}">
-                <a16:creationId xmlns:a16="http://schemas.microsoft.com/office/drawing/2014/main" id="{2E2DF76C-FE2F-4EF8-8919-896EDF609E54}"/>
+                <a16:creationId xmlns:a16="http://schemas.microsoft.com/office/drawing/2014/main" id="{4F6484BB-6FCE-439A-9681-6A385DFD59E9}"/>
               </a:ext>
             </a:extLst>
           </p:cNvPr>
@@ -15946,7 +16068,7 @@
           <p:cNvPr id="7" name="">
             <a:extLst xmlns:a="http://schemas.openxmlformats.org/drawingml/2006/main">
               <a:ext uri="{FF2B5EF4-FFF2-40B4-BE49-F238E27FC236}">
-                <a16:creationId xmlns:a16="http://schemas.microsoft.com/office/drawing/2014/main" id="{997FFB4A-8A37-4D59-9696-D96E2B58ABA7}"/>
+                <a16:creationId xmlns:a16="http://schemas.microsoft.com/office/drawing/2014/main" id="{1D7CF22F-0FAA-488D-B509-86FBBFDBE758}"/>
               </a:ext>
             </a:extLst>
           </p:cNvPr>
@@ -15996,7 +16118,7 @@
           <p:cNvPr id="8" name="">
             <a:extLst xmlns:a="http://schemas.openxmlformats.org/drawingml/2006/main">
               <a:ext uri="{FF2B5EF4-FFF2-40B4-BE49-F238E27FC236}">
-                <a16:creationId xmlns:a16="http://schemas.microsoft.com/office/drawing/2014/main" id="{0429F007-3971-4E67-9BDE-7898A918FEE5}"/>
+                <a16:creationId xmlns:a16="http://schemas.microsoft.com/office/drawing/2014/main" id="{B897DF55-A94C-4932-8F8F-0258ABBB9BA0}"/>
               </a:ext>
             </a:extLst>
           </p:cNvPr>
@@ -16046,7 +16168,7 @@
           <p:cNvPr id="9" name="">
             <a:extLst xmlns:a="http://schemas.openxmlformats.org/drawingml/2006/main">
               <a:ext uri="{FF2B5EF4-FFF2-40B4-BE49-F238E27FC236}">
-                <a16:creationId xmlns:a16="http://schemas.microsoft.com/office/drawing/2014/main" id="{2872774F-FFA7-4819-B533-50903122294D}"/>
+                <a16:creationId xmlns:a16="http://schemas.microsoft.com/office/drawing/2014/main" id="{555B5982-A4F7-4F88-B1EF-F44B02754449}"/>
               </a:ext>
             </a:extLst>
           </p:cNvPr>
@@ -16096,7 +16218,7 @@
           <p:cNvPr id="10" name="">
             <a:extLst xmlns:a="http://schemas.openxmlformats.org/drawingml/2006/main">
               <a:ext uri="{FF2B5EF4-FFF2-40B4-BE49-F238E27FC236}">
-                <a16:creationId xmlns:a16="http://schemas.microsoft.com/office/drawing/2014/main" id="{48E92842-0A1F-4412-AA8C-C5FA8848203A}"/>
+                <a16:creationId xmlns:a16="http://schemas.microsoft.com/office/drawing/2014/main" id="{A184F36F-5A9D-46CC-98CA-3FE7FEFA018F}"/>
               </a:ext>
             </a:extLst>
           </p:cNvPr>
@@ -16146,7 +16268,7 @@
           <p:cNvPr id="11" name="">
             <a:extLst xmlns:a="http://schemas.openxmlformats.org/drawingml/2006/main">
               <a:ext uri="{FF2B5EF4-FFF2-40B4-BE49-F238E27FC236}">
-                <a16:creationId xmlns:a16="http://schemas.microsoft.com/office/drawing/2014/main" id="{7B096B22-CEE7-4D49-B16C-363BF12BF1C3}"/>
+                <a16:creationId xmlns:a16="http://schemas.microsoft.com/office/drawing/2014/main" id="{ED86B536-62F3-4603-B054-C80252EDA9FA}"/>
               </a:ext>
             </a:extLst>
           </p:cNvPr>
@@ -16196,7 +16318,7 @@
           <p:cNvPr id="12" name="">
             <a:extLst xmlns:a="http://schemas.openxmlformats.org/drawingml/2006/main">
               <a:ext uri="{FF2B5EF4-FFF2-40B4-BE49-F238E27FC236}">
-                <a16:creationId xmlns:a16="http://schemas.microsoft.com/office/drawing/2014/main" id="{AC72F427-E273-49BE-8CD8-9149A3D1393F}"/>
+                <a16:creationId xmlns:a16="http://schemas.microsoft.com/office/drawing/2014/main" id="{F2A0C657-87B9-457D-BF60-11D7101F422A}"/>
               </a:ext>
             </a:extLst>
           </p:cNvPr>
@@ -16227,7 +16349,7 @@
           <p:cNvPr id="13" name="">
             <a:extLst xmlns:a="http://schemas.openxmlformats.org/drawingml/2006/main">
               <a:ext uri="{FF2B5EF4-FFF2-40B4-BE49-F238E27FC236}">
-                <a16:creationId xmlns:a16="http://schemas.microsoft.com/office/drawing/2014/main" id="{0D864DAD-78B4-49E6-A4C2-39540203776E}"/>
+                <a16:creationId xmlns:a16="http://schemas.microsoft.com/office/drawing/2014/main" id="{EC4ECFCC-C569-40B8-AA86-C5593E303983}"/>
               </a:ext>
             </a:extLst>
           </p:cNvPr>
@@ -16277,7 +16399,7 @@
           <p:cNvPr id="14" name="">
             <a:extLst xmlns:a="http://schemas.openxmlformats.org/drawingml/2006/main">
               <a:ext uri="{FF2B5EF4-FFF2-40B4-BE49-F238E27FC236}">
-                <a16:creationId xmlns:a16="http://schemas.microsoft.com/office/drawing/2014/main" id="{793ED365-2EB5-44B4-8557-C51144EFBE88}"/>
+                <a16:creationId xmlns:a16="http://schemas.microsoft.com/office/drawing/2014/main" id="{8C1DA8E1-CEEA-4EF3-B469-2D742CE66821}"/>
               </a:ext>
             </a:extLst>
           </p:cNvPr>
@@ -16327,7 +16449,7 @@
           <p:cNvPr id="15" name="">
             <a:extLst xmlns:a="http://schemas.openxmlformats.org/drawingml/2006/main">
               <a:ext uri="{FF2B5EF4-FFF2-40B4-BE49-F238E27FC236}">
-                <a16:creationId xmlns:a16="http://schemas.microsoft.com/office/drawing/2014/main" id="{7A10EA4C-F207-4ECC-8A0D-78BAB701BEB9}"/>
+                <a16:creationId xmlns:a16="http://schemas.microsoft.com/office/drawing/2014/main" id="{9C6575D5-B12A-4BD4-99F3-3B3691E07341}"/>
               </a:ext>
             </a:extLst>
           </p:cNvPr>
@@ -16377,7 +16499,7 @@
           <p:cNvPr id="16" name="">
             <a:extLst xmlns:a="http://schemas.openxmlformats.org/drawingml/2006/main">
               <a:ext uri="{FF2B5EF4-FFF2-40B4-BE49-F238E27FC236}">
-                <a16:creationId xmlns:a16="http://schemas.microsoft.com/office/drawing/2014/main" id="{79146565-7433-4DD2-B2DB-96C2F66336A4}"/>
+                <a16:creationId xmlns:a16="http://schemas.microsoft.com/office/drawing/2014/main" id="{2F2E7609-26E9-476F-B847-9A53FFE2BC89}"/>
               </a:ext>
             </a:extLst>
           </p:cNvPr>
@@ -16408,7 +16530,7 @@
           <p:cNvPr id="17" name="">
             <a:extLst xmlns:a="http://schemas.openxmlformats.org/drawingml/2006/main">
               <a:ext uri="{FF2B5EF4-FFF2-40B4-BE49-F238E27FC236}">
-                <a16:creationId xmlns:a16="http://schemas.microsoft.com/office/drawing/2014/main" id="{246FF82C-1577-40CE-B31E-B95FF4A59ECC}"/>
+                <a16:creationId xmlns:a16="http://schemas.microsoft.com/office/drawing/2014/main" id="{083F81A1-1BB1-4408-8554-447EB5069FB7}"/>
               </a:ext>
             </a:extLst>
           </p:cNvPr>
@@ -16458,7 +16580,7 @@
           <p:cNvPr id="18" name="">
             <a:extLst xmlns:a="http://schemas.openxmlformats.org/drawingml/2006/main">
               <a:ext uri="{FF2B5EF4-FFF2-40B4-BE49-F238E27FC236}">
-                <a16:creationId xmlns:a16="http://schemas.microsoft.com/office/drawing/2014/main" id="{9ED3AE45-BDF1-4B5C-BC61-8CDF7F90841B}"/>
+                <a16:creationId xmlns:a16="http://schemas.microsoft.com/office/drawing/2014/main" id="{70193980-0D21-4B28-AADE-FC9E51BBB65A}"/>
               </a:ext>
             </a:extLst>
           </p:cNvPr>
@@ -16508,7 +16630,7 @@
           <p:cNvPr id="19" name="">
             <a:extLst xmlns:a="http://schemas.openxmlformats.org/drawingml/2006/main">
               <a:ext uri="{FF2B5EF4-FFF2-40B4-BE49-F238E27FC236}">
-                <a16:creationId xmlns:a16="http://schemas.microsoft.com/office/drawing/2014/main" id="{57DC1575-3A96-49A5-A42B-E79A42CC3701}"/>
+                <a16:creationId xmlns:a16="http://schemas.microsoft.com/office/drawing/2014/main" id="{C2724278-CB4E-4CDC-99C3-BE72A52CCED0}"/>
               </a:ext>
             </a:extLst>
           </p:cNvPr>
@@ -16558,7 +16680,7 @@
           <p:cNvPr id="20" name="">
             <a:extLst xmlns:a="http://schemas.openxmlformats.org/drawingml/2006/main">
               <a:ext uri="{FF2B5EF4-FFF2-40B4-BE49-F238E27FC236}">
-                <a16:creationId xmlns:a16="http://schemas.microsoft.com/office/drawing/2014/main" id="{C2BC5C77-F5D5-4723-A407-13AD37AA782D}"/>
+                <a16:creationId xmlns:a16="http://schemas.microsoft.com/office/drawing/2014/main" id="{ED582859-0453-4107-BCB6-CAFBF018E29F}"/>
               </a:ext>
             </a:extLst>
           </p:cNvPr>
@@ -16593,7 +16715,7 @@
           <p:cNvPr id="21" name="">
             <a:extLst xmlns:a="http://schemas.openxmlformats.org/drawingml/2006/main">
               <a:ext uri="{FF2B5EF4-FFF2-40B4-BE49-F238E27FC236}">
-                <a16:creationId xmlns:a16="http://schemas.microsoft.com/office/drawing/2014/main" id="{59EB55F1-7A2F-416A-BFEB-88EA2EBBD923}"/>
+                <a16:creationId xmlns:a16="http://schemas.microsoft.com/office/drawing/2014/main" id="{6960B903-C193-423D-A939-A8C0F85388E9}"/>
               </a:ext>
             </a:extLst>
           </p:cNvPr>
@@ -16643,7 +16765,7 @@
           <p:cNvPr id="22" name="">
             <a:extLst xmlns:a="http://schemas.openxmlformats.org/drawingml/2006/main">
               <a:ext uri="{FF2B5EF4-FFF2-40B4-BE49-F238E27FC236}">
-                <a16:creationId xmlns:a16="http://schemas.microsoft.com/office/drawing/2014/main" id="{42FDB2E6-144E-4498-97B6-8F09DBBB8E54}"/>
+                <a16:creationId xmlns:a16="http://schemas.microsoft.com/office/drawing/2014/main" id="{31281ED0-A472-42C4-8C61-974077BA6E79}"/>
               </a:ext>
             </a:extLst>
           </p:cNvPr>
@@ -16693,7 +16815,7 @@
           <p:cNvPr id="23" name="">
             <a:extLst xmlns:a="http://schemas.openxmlformats.org/drawingml/2006/main">
               <a:ext uri="{FF2B5EF4-FFF2-40B4-BE49-F238E27FC236}">
-                <a16:creationId xmlns:a16="http://schemas.microsoft.com/office/drawing/2014/main" id="{1E20AF77-B21B-4D9C-A960-BA0F2591E3BF}"/>
+                <a16:creationId xmlns:a16="http://schemas.microsoft.com/office/drawing/2014/main" id="{85FC3458-522E-4E27-A48F-41CD00063FAC}"/>
               </a:ext>
             </a:extLst>
           </p:cNvPr>
@@ -16728,7 +16850,7 @@
           <p:cNvPr id="24" name="">
             <a:extLst xmlns:a="http://schemas.openxmlformats.org/drawingml/2006/main">
               <a:ext uri="{FF2B5EF4-FFF2-40B4-BE49-F238E27FC236}">
-                <a16:creationId xmlns:a16="http://schemas.microsoft.com/office/drawing/2014/main" id="{9DDCC88D-9E1C-4789-8E51-88288177D07B}"/>
+                <a16:creationId xmlns:a16="http://schemas.microsoft.com/office/drawing/2014/main" id="{45EA645A-B73F-4A7A-9E06-23E7DCA1E456}"/>
               </a:ext>
             </a:extLst>
           </p:cNvPr>
@@ -16778,7 +16900,7 @@
           <p:cNvPr id="25" name="">
             <a:extLst xmlns:a="http://schemas.openxmlformats.org/drawingml/2006/main">
               <a:ext uri="{FF2B5EF4-FFF2-40B4-BE49-F238E27FC236}">
-                <a16:creationId xmlns:a16="http://schemas.microsoft.com/office/drawing/2014/main" id="{9FCEA834-95F8-46AF-A4BA-F476166E53FB}"/>
+                <a16:creationId xmlns:a16="http://schemas.microsoft.com/office/drawing/2014/main" id="{4D512AD3-CB86-432C-AD9B-7F4C9E31BE82}"/>
               </a:ext>
             </a:extLst>
           </p:cNvPr>
@@ -16828,7 +16950,7 @@
           <p:cNvPr id="26" name="">
             <a:extLst xmlns:a="http://schemas.openxmlformats.org/drawingml/2006/main">
               <a:ext uri="{FF2B5EF4-FFF2-40B4-BE49-F238E27FC236}">
-                <a16:creationId xmlns:a16="http://schemas.microsoft.com/office/drawing/2014/main" id="{259E47EE-A60B-42EC-A493-4DB4B5D738FF}"/>
+                <a16:creationId xmlns:a16="http://schemas.microsoft.com/office/drawing/2014/main" id="{7B970744-9BCA-45EA-B3E6-94E97E692A69}"/>
               </a:ext>
             </a:extLst>
           </p:cNvPr>
@@ -16876,7 +16998,7 @@
     </p:spTree>
     <p:extLst>
       <p:ext uri="{BB962C8B-B14F-4D97-AF65-F5344CB8AC3E}">
-        <p14:creationId xmlns:p14="http://schemas.microsoft.com/office/powerpoint/2010/main" val="2024539668"/>
+        <p14:creationId xmlns:p14="http://schemas.microsoft.com/office/powerpoint/2010/main" val="496924245"/>
       </p:ext>
     </p:extLst>
   </p:cSld>
@@ -16907,7 +17029,7 @@
           <p:cNvPr id="1" name="">
             <a:extLst xmlns:a="http://schemas.openxmlformats.org/drawingml/2006/main">
               <a:ext uri="{FF2B5EF4-FFF2-40B4-BE49-F238E27FC236}">
-                <a16:creationId xmlns:a16="http://schemas.microsoft.com/office/drawing/2014/main" id="{3801D5AC-FB4B-42D0-B7F8-37D91CAD986B}"/>
+                <a16:creationId xmlns:a16="http://schemas.microsoft.com/office/drawing/2014/main" id="{5959F3D1-B975-44AF-8B64-F3F63A5898BA}"/>
               </a:ext>
             </a:extLst>
           </p:cNvPr>
@@ -16942,7 +17064,7 @@
           <p:nvPr/>
         </p:nvPicPr>
         <p:blipFill>
-          <a:blip xmlns:r="http://schemas.openxmlformats.org/officeDocument/2006/relationships" xmlns:a="http://schemas.openxmlformats.org/drawingml/2006/main" r:embed="Rb0802322d22a40f5"/>
+          <a:blip xmlns:r="http://schemas.openxmlformats.org/officeDocument/2006/relationships" xmlns:a="http://schemas.openxmlformats.org/drawingml/2006/main" r:embed="Rc912e9221ced4870"/>
           <a:stretch xmlns:a="http://schemas.openxmlformats.org/drawingml/2006/main"/>
         </p:blipFill>
         <p:spPr>
@@ -16960,7 +17082,7 @@
           <p:cNvPr id="3" name="">
             <a:extLst xmlns:a="http://schemas.openxmlformats.org/drawingml/2006/main">
               <a:ext uri="{FF2B5EF4-FFF2-40B4-BE49-F238E27FC236}">
-                <a16:creationId xmlns:a16="http://schemas.microsoft.com/office/drawing/2014/main" id="{C60807FB-E423-4054-B5B2-A4CEF3638E49}"/>
+                <a16:creationId xmlns:a16="http://schemas.microsoft.com/office/drawing/2014/main" id="{2836A3CD-16B4-4FF9-B7F3-ED8A2A8818E6}"/>
               </a:ext>
             </a:extLst>
           </p:cNvPr>
@@ -17010,7 +17132,7 @@
           <p:cNvPr id="4" name="">
             <a:extLst xmlns:a="http://schemas.openxmlformats.org/drawingml/2006/main">
               <a:ext uri="{FF2B5EF4-FFF2-40B4-BE49-F238E27FC236}">
-                <a16:creationId xmlns:a16="http://schemas.microsoft.com/office/drawing/2014/main" id="{51C68684-6254-47CD-B426-A2E530B7CB76}"/>
+                <a16:creationId xmlns:a16="http://schemas.microsoft.com/office/drawing/2014/main" id="{9B5ABC53-2F35-4B7E-A1F5-98D3D83D81F6}"/>
               </a:ext>
             </a:extLst>
           </p:cNvPr>
@@ -17043,7 +17165,7 @@
           <p:cNvPr id="5" name="">
             <a:extLst xmlns:a="http://schemas.openxmlformats.org/drawingml/2006/main">
               <a:ext uri="{FF2B5EF4-FFF2-40B4-BE49-F238E27FC236}">
-                <a16:creationId xmlns:a16="http://schemas.microsoft.com/office/drawing/2014/main" id="{6277E3C9-B13D-45DC-B52A-4F48660B7E41}"/>
+                <a16:creationId xmlns:a16="http://schemas.microsoft.com/office/drawing/2014/main" id="{3422E1B0-7E65-4B80-AEAA-9993E5A8F744}"/>
               </a:ext>
             </a:extLst>
           </p:cNvPr>
@@ -17074,7 +17196,7 @@
           <p:cNvPr id="6" name="">
             <a:extLst xmlns:a="http://schemas.openxmlformats.org/drawingml/2006/main">
               <a:ext uri="{FF2B5EF4-FFF2-40B4-BE49-F238E27FC236}">
-                <a16:creationId xmlns:a16="http://schemas.microsoft.com/office/drawing/2014/main" id="{C1CA51C8-D3DA-4C38-B18E-46DB9E95E14E}"/>
+                <a16:creationId xmlns:a16="http://schemas.microsoft.com/office/drawing/2014/main" id="{C619CD78-4E0B-44C0-BB1D-767BA8F24A90}"/>
               </a:ext>
             </a:extLst>
           </p:cNvPr>
@@ -17124,7 +17246,7 @@
           <p:cNvPr id="7" name="">
             <a:extLst xmlns:a="http://schemas.openxmlformats.org/drawingml/2006/main">
               <a:ext uri="{FF2B5EF4-FFF2-40B4-BE49-F238E27FC236}">
-                <a16:creationId xmlns:a16="http://schemas.microsoft.com/office/drawing/2014/main" id="{D11CC9B5-E841-4B2C-852E-34A648015C72}"/>
+                <a16:creationId xmlns:a16="http://schemas.microsoft.com/office/drawing/2014/main" id="{DAABB034-AA97-43A5-AD60-1D63E9E01244}"/>
               </a:ext>
             </a:extLst>
           </p:cNvPr>
@@ -17174,7 +17296,7 @@
           <p:cNvPr id="8" name="">
             <a:extLst xmlns:a="http://schemas.openxmlformats.org/drawingml/2006/main">
               <a:ext uri="{FF2B5EF4-FFF2-40B4-BE49-F238E27FC236}">
-                <a16:creationId xmlns:a16="http://schemas.microsoft.com/office/drawing/2014/main" id="{97CD1D92-F3F5-43A0-B0FA-456423203EEA}"/>
+                <a16:creationId xmlns:a16="http://schemas.microsoft.com/office/drawing/2014/main" id="{1C55D118-8E2D-4D4A-8A13-90573B9AA49C}"/>
               </a:ext>
             </a:extLst>
           </p:cNvPr>
@@ -17209,7 +17331,7 @@
           <p:cNvPr id="9" name="">
             <a:extLst xmlns:a="http://schemas.openxmlformats.org/drawingml/2006/main">
               <a:ext uri="{FF2B5EF4-FFF2-40B4-BE49-F238E27FC236}">
-                <a16:creationId xmlns:a16="http://schemas.microsoft.com/office/drawing/2014/main" id="{9697DDA2-2738-435B-8F90-D4592B94EAD4}"/>
+                <a16:creationId xmlns:a16="http://schemas.microsoft.com/office/drawing/2014/main" id="{05FCC5B5-2CA4-4D6A-AF79-E896887063AC}"/>
               </a:ext>
             </a:extLst>
           </p:cNvPr>
@@ -17242,7 +17364,7 @@
           <p:cNvPr id="10" name="">
             <a:extLst xmlns:a="http://schemas.openxmlformats.org/drawingml/2006/main">
               <a:ext uri="{FF2B5EF4-FFF2-40B4-BE49-F238E27FC236}">
-                <a16:creationId xmlns:a16="http://schemas.microsoft.com/office/drawing/2014/main" id="{98E0F81C-D14D-4B88-9E85-AD64A87AB240}"/>
+                <a16:creationId xmlns:a16="http://schemas.microsoft.com/office/drawing/2014/main" id="{213280BD-EE57-44FC-A14E-5AE9CB0DDF83}"/>
               </a:ext>
             </a:extLst>
           </p:cNvPr>
@@ -17292,7 +17414,7 @@
           <p:cNvPr id="11" name="">
             <a:extLst xmlns:a="http://schemas.openxmlformats.org/drawingml/2006/main">
               <a:ext uri="{FF2B5EF4-FFF2-40B4-BE49-F238E27FC236}">
-                <a16:creationId xmlns:a16="http://schemas.microsoft.com/office/drawing/2014/main" id="{459DDED0-6B8B-448F-BDDA-9376C3D7C533}"/>
+                <a16:creationId xmlns:a16="http://schemas.microsoft.com/office/drawing/2014/main" id="{51FE60C9-C1B1-4EDC-8978-60F5323A1D4B}"/>
               </a:ext>
             </a:extLst>
           </p:cNvPr>
@@ -17342,7 +17464,7 @@
           <p:cNvPr id="12" name="">
             <a:extLst xmlns:a="http://schemas.openxmlformats.org/drawingml/2006/main">
               <a:ext uri="{FF2B5EF4-FFF2-40B4-BE49-F238E27FC236}">
-                <a16:creationId xmlns:a16="http://schemas.microsoft.com/office/drawing/2014/main" id="{23084AB8-639E-4E2D-9826-3C8A808E58FE}"/>
+                <a16:creationId xmlns:a16="http://schemas.microsoft.com/office/drawing/2014/main" id="{507EC065-C7C4-4BC8-BCC2-A3D620931F1E}"/>
               </a:ext>
             </a:extLst>
           </p:cNvPr>
@@ -17392,7 +17514,7 @@
           <p:cNvPr id="13" name="">
             <a:extLst xmlns:a="http://schemas.openxmlformats.org/drawingml/2006/main">
               <a:ext uri="{FF2B5EF4-FFF2-40B4-BE49-F238E27FC236}">
-                <a16:creationId xmlns:a16="http://schemas.microsoft.com/office/drawing/2014/main" id="{213A0A83-740B-47CF-9887-740AF22CD3B7}"/>
+                <a16:creationId xmlns:a16="http://schemas.microsoft.com/office/drawing/2014/main" id="{B1E8AF26-65AB-4C7B-B882-B5584CA380F8}"/>
               </a:ext>
             </a:extLst>
           </p:cNvPr>
@@ -17442,7 +17564,7 @@
           <p:cNvPr id="14" name="">
             <a:extLst xmlns:a="http://schemas.openxmlformats.org/drawingml/2006/main">
               <a:ext uri="{FF2B5EF4-FFF2-40B4-BE49-F238E27FC236}">
-                <a16:creationId xmlns:a16="http://schemas.microsoft.com/office/drawing/2014/main" id="{9B4E6D2E-94B0-478E-ACAA-8E73769CBBAF}"/>
+                <a16:creationId xmlns:a16="http://schemas.microsoft.com/office/drawing/2014/main" id="{C7FE28F0-54D7-4D5E-B4C9-85C3637544C7}"/>
               </a:ext>
             </a:extLst>
           </p:cNvPr>
@@ -17492,7 +17614,7 @@
           <p:cNvPr id="15" name="">
             <a:extLst xmlns:a="http://schemas.openxmlformats.org/drawingml/2006/main">
               <a:ext uri="{FF2B5EF4-FFF2-40B4-BE49-F238E27FC236}">
-                <a16:creationId xmlns:a16="http://schemas.microsoft.com/office/drawing/2014/main" id="{1611A974-84DB-4405-99BF-E4579ABD4B97}"/>
+                <a16:creationId xmlns:a16="http://schemas.microsoft.com/office/drawing/2014/main" id="{3C18BB20-63D4-430F-B2C9-D3355E7C5E1F}"/>
               </a:ext>
             </a:extLst>
           </p:cNvPr>
@@ -17542,7 +17664,7 @@
           <p:cNvPr id="16" name="">
             <a:extLst xmlns:a="http://schemas.openxmlformats.org/drawingml/2006/main">
               <a:ext uri="{FF2B5EF4-FFF2-40B4-BE49-F238E27FC236}">
-                <a16:creationId xmlns:a16="http://schemas.microsoft.com/office/drawing/2014/main" id="{61628125-A080-44EE-A9A3-0AE3894B1E42}"/>
+                <a16:creationId xmlns:a16="http://schemas.microsoft.com/office/drawing/2014/main" id="{89416246-1B40-4DC0-8F02-FA4216A1F098}"/>
               </a:ext>
             </a:extLst>
           </p:cNvPr>
@@ -17592,7 +17714,7 @@
           <p:cNvPr id="17" name="">
             <a:extLst xmlns:a="http://schemas.openxmlformats.org/drawingml/2006/main">
               <a:ext uri="{FF2B5EF4-FFF2-40B4-BE49-F238E27FC236}">
-                <a16:creationId xmlns:a16="http://schemas.microsoft.com/office/drawing/2014/main" id="{A92D1B9B-004D-441E-B182-359B06D8AFF7}"/>
+                <a16:creationId xmlns:a16="http://schemas.microsoft.com/office/drawing/2014/main" id="{3CB64AF0-BB41-4D13-856C-D66FEDF4EB03}"/>
               </a:ext>
             </a:extLst>
           </p:cNvPr>
@@ -17623,7 +17745,7 @@
           <p:cNvPr id="18" name="">
             <a:extLst xmlns:a="http://schemas.openxmlformats.org/drawingml/2006/main">
               <a:ext uri="{FF2B5EF4-FFF2-40B4-BE49-F238E27FC236}">
-                <a16:creationId xmlns:a16="http://schemas.microsoft.com/office/drawing/2014/main" id="{BD03B75F-16B9-4D13-8791-D73818C59E9E}"/>
+                <a16:creationId xmlns:a16="http://schemas.microsoft.com/office/drawing/2014/main" id="{B22A7EAB-3A7F-4531-B1C7-317B1F625D99}"/>
               </a:ext>
             </a:extLst>
           </p:cNvPr>
@@ -17673,7 +17795,7 @@
           <p:cNvPr id="19" name="">
             <a:extLst xmlns:a="http://schemas.openxmlformats.org/drawingml/2006/main">
               <a:ext uri="{FF2B5EF4-FFF2-40B4-BE49-F238E27FC236}">
-                <a16:creationId xmlns:a16="http://schemas.microsoft.com/office/drawing/2014/main" id="{705A824F-42A6-467C-B8C2-972EA6E17026}"/>
+                <a16:creationId xmlns:a16="http://schemas.microsoft.com/office/drawing/2014/main" id="{EFE46166-729C-409E-88DA-AC7DB87C35E0}"/>
               </a:ext>
             </a:extLst>
           </p:cNvPr>
@@ -17723,7 +17845,7 @@
           <p:cNvPr id="20" name="">
             <a:extLst xmlns:a="http://schemas.openxmlformats.org/drawingml/2006/main">
               <a:ext uri="{FF2B5EF4-FFF2-40B4-BE49-F238E27FC236}">
-                <a16:creationId xmlns:a16="http://schemas.microsoft.com/office/drawing/2014/main" id="{4F8B387B-FECB-4C71-B97D-32BED95FC9E8}"/>
+                <a16:creationId xmlns:a16="http://schemas.microsoft.com/office/drawing/2014/main" id="{FF9C49F2-028D-4768-9B76-22B7C2BAC88A}"/>
               </a:ext>
             </a:extLst>
           </p:cNvPr>
@@ -17773,7 +17895,7 @@
           <p:cNvPr id="21" name="">
             <a:extLst xmlns:a="http://schemas.openxmlformats.org/drawingml/2006/main">
               <a:ext uri="{FF2B5EF4-FFF2-40B4-BE49-F238E27FC236}">
-                <a16:creationId xmlns:a16="http://schemas.microsoft.com/office/drawing/2014/main" id="{7DCF9655-96F9-4F2E-BB00-296CA6FCC0B1}"/>
+                <a16:creationId xmlns:a16="http://schemas.microsoft.com/office/drawing/2014/main" id="{8C0525FF-D2F9-486A-9819-84D94CE4FD5B}"/>
               </a:ext>
             </a:extLst>
           </p:cNvPr>
@@ -17823,7 +17945,7 @@
           <p:cNvPr id="22" name="">
             <a:extLst xmlns:a="http://schemas.openxmlformats.org/drawingml/2006/main">
               <a:ext uri="{FF2B5EF4-FFF2-40B4-BE49-F238E27FC236}">
-                <a16:creationId xmlns:a16="http://schemas.microsoft.com/office/drawing/2014/main" id="{00A1C018-9C24-42DE-854E-D1FA65459F32}"/>
+                <a16:creationId xmlns:a16="http://schemas.microsoft.com/office/drawing/2014/main" id="{6E279A57-7709-4C33-8CC9-A398EEC3489F}"/>
               </a:ext>
             </a:extLst>
           </p:cNvPr>
@@ -17873,7 +17995,7 @@
           <p:cNvPr id="23" name="">
             <a:extLst xmlns:a="http://schemas.openxmlformats.org/drawingml/2006/main">
               <a:ext uri="{FF2B5EF4-FFF2-40B4-BE49-F238E27FC236}">
-                <a16:creationId xmlns:a16="http://schemas.microsoft.com/office/drawing/2014/main" id="{3B7FF3A4-8052-4A0A-A405-F3EE596AEBEC}"/>
+                <a16:creationId xmlns:a16="http://schemas.microsoft.com/office/drawing/2014/main" id="{8E1EEC32-0DAA-4936-AFE4-31CDD7B4A1A8}"/>
               </a:ext>
             </a:extLst>
           </p:cNvPr>
@@ -17923,7 +18045,7 @@
           <p:cNvPr id="24" name="">
             <a:extLst xmlns:a="http://schemas.openxmlformats.org/drawingml/2006/main">
               <a:ext uri="{FF2B5EF4-FFF2-40B4-BE49-F238E27FC236}">
-                <a16:creationId xmlns:a16="http://schemas.microsoft.com/office/drawing/2014/main" id="{DEDDAE83-1F0E-4FBD-B499-E171068588E4}"/>
+                <a16:creationId xmlns:a16="http://schemas.microsoft.com/office/drawing/2014/main" id="{104E3CB8-9DCA-4646-8A9C-F21BCBD23C53}"/>
               </a:ext>
             </a:extLst>
           </p:cNvPr>
@@ -17958,7 +18080,7 @@
           <p:cNvPr id="25" name="">
             <a:extLst xmlns:a="http://schemas.openxmlformats.org/drawingml/2006/main">
               <a:ext uri="{FF2B5EF4-FFF2-40B4-BE49-F238E27FC236}">
-                <a16:creationId xmlns:a16="http://schemas.microsoft.com/office/drawing/2014/main" id="{84FD44A2-FB71-4225-8EA4-2357D9298FF0}"/>
+                <a16:creationId xmlns:a16="http://schemas.microsoft.com/office/drawing/2014/main" id="{BB6E2CD7-A37B-4801-AF8E-1D318CD9F5C1}"/>
               </a:ext>
             </a:extLst>
           </p:cNvPr>
@@ -17991,7 +18113,7 @@
           <p:cNvPr id="26" name="">
             <a:extLst xmlns:a="http://schemas.openxmlformats.org/drawingml/2006/main">
               <a:ext uri="{FF2B5EF4-FFF2-40B4-BE49-F238E27FC236}">
-                <a16:creationId xmlns:a16="http://schemas.microsoft.com/office/drawing/2014/main" id="{B631F4B3-CC01-4262-A51E-3A6385382CB5}"/>
+                <a16:creationId xmlns:a16="http://schemas.microsoft.com/office/drawing/2014/main" id="{0730FB4B-F433-480A-9D5E-F6EC3D3B9A77}"/>
               </a:ext>
             </a:extLst>
           </p:cNvPr>
@@ -18041,7 +18163,7 @@
           <p:cNvPr id="27" name="">
             <a:extLst xmlns:a="http://schemas.openxmlformats.org/drawingml/2006/main">
               <a:ext uri="{FF2B5EF4-FFF2-40B4-BE49-F238E27FC236}">
-                <a16:creationId xmlns:a16="http://schemas.microsoft.com/office/drawing/2014/main" id="{D6BDA1E5-1E34-4EC5-BD22-D1E6D756B96A}"/>
+                <a16:creationId xmlns:a16="http://schemas.microsoft.com/office/drawing/2014/main" id="{D0B61702-61A3-476B-AF46-9D8A35C29F6A}"/>
               </a:ext>
             </a:extLst>
           </p:cNvPr>
@@ -18091,7 +18213,7 @@
           <p:cNvPr id="28" name="">
             <a:extLst xmlns:a="http://schemas.openxmlformats.org/drawingml/2006/main">
               <a:ext uri="{FF2B5EF4-FFF2-40B4-BE49-F238E27FC236}">
-                <a16:creationId xmlns:a16="http://schemas.microsoft.com/office/drawing/2014/main" id="{3A6E678B-29D2-4C7C-9F40-C28103F240BC}"/>
+                <a16:creationId xmlns:a16="http://schemas.microsoft.com/office/drawing/2014/main" id="{69A3B098-DCF1-448E-A26A-14A7D434645C}"/>
               </a:ext>
             </a:extLst>
           </p:cNvPr>
@@ -18141,7 +18263,7 @@
           <p:cNvPr id="29" name="">
             <a:extLst xmlns:a="http://schemas.openxmlformats.org/drawingml/2006/main">
               <a:ext uri="{FF2B5EF4-FFF2-40B4-BE49-F238E27FC236}">
-                <a16:creationId xmlns:a16="http://schemas.microsoft.com/office/drawing/2014/main" id="{D6E90FBE-27AA-41E7-9934-620F0D094281}"/>
+                <a16:creationId xmlns:a16="http://schemas.microsoft.com/office/drawing/2014/main" id="{024363DF-598D-4002-B411-FE67AD94F475}"/>
               </a:ext>
             </a:extLst>
           </p:cNvPr>
@@ -18191,7 +18313,7 @@
           <p:cNvPr id="30" name="">
             <a:extLst xmlns:a="http://schemas.openxmlformats.org/drawingml/2006/main">
               <a:ext uri="{FF2B5EF4-FFF2-40B4-BE49-F238E27FC236}">
-                <a16:creationId xmlns:a16="http://schemas.microsoft.com/office/drawing/2014/main" id="{02857481-6D20-401F-A377-A9FB4D9F5F9A}"/>
+                <a16:creationId xmlns:a16="http://schemas.microsoft.com/office/drawing/2014/main" id="{DD7757A0-A6D3-47C5-9159-A1E2BE30AE5C}"/>
               </a:ext>
             </a:extLst>
           </p:cNvPr>
@@ -18241,7 +18363,7 @@
           <p:cNvPr id="31" name="">
             <a:extLst xmlns:a="http://schemas.openxmlformats.org/drawingml/2006/main">
               <a:ext uri="{FF2B5EF4-FFF2-40B4-BE49-F238E27FC236}">
-                <a16:creationId xmlns:a16="http://schemas.microsoft.com/office/drawing/2014/main" id="{0F79D16C-E74F-47A4-A73F-A9B3192A3645}"/>
+                <a16:creationId xmlns:a16="http://schemas.microsoft.com/office/drawing/2014/main" id="{313BB1EC-88AA-4D51-B0B9-3D88AC47DDEE}"/>
               </a:ext>
             </a:extLst>
           </p:cNvPr>
@@ -18291,7 +18413,7 @@
           <p:cNvPr id="32" name="">
             <a:extLst xmlns:a="http://schemas.openxmlformats.org/drawingml/2006/main">
               <a:ext uri="{FF2B5EF4-FFF2-40B4-BE49-F238E27FC236}">
-                <a16:creationId xmlns:a16="http://schemas.microsoft.com/office/drawing/2014/main" id="{A86FFB04-20D4-4099-9922-6B582913B884}"/>
+                <a16:creationId xmlns:a16="http://schemas.microsoft.com/office/drawing/2014/main" id="{BFC3C7F2-73A5-4473-B7A0-E9FD8AE78744}"/>
               </a:ext>
             </a:extLst>
           </p:cNvPr>
@@ -18341,7 +18463,7 @@
           <p:cNvPr id="33" name="">
             <a:extLst xmlns:a="http://schemas.openxmlformats.org/drawingml/2006/main">
               <a:ext uri="{FF2B5EF4-FFF2-40B4-BE49-F238E27FC236}">
-                <a16:creationId xmlns:a16="http://schemas.microsoft.com/office/drawing/2014/main" id="{C61CEB11-D645-4D92-8A57-5E6EE2A05CC1}"/>
+                <a16:creationId xmlns:a16="http://schemas.microsoft.com/office/drawing/2014/main" id="{86B51AF8-8391-4FAA-8613-524A863BCCF4}"/>
               </a:ext>
             </a:extLst>
           </p:cNvPr>
@@ -18372,7 +18494,7 @@
           <p:cNvPr id="34" name="">
             <a:extLst xmlns:a="http://schemas.openxmlformats.org/drawingml/2006/main">
               <a:ext uri="{FF2B5EF4-FFF2-40B4-BE49-F238E27FC236}">
-                <a16:creationId xmlns:a16="http://schemas.microsoft.com/office/drawing/2014/main" id="{C0BF2AA0-1107-4D7F-A1C3-B171FF0E6BB0}"/>
+                <a16:creationId xmlns:a16="http://schemas.microsoft.com/office/drawing/2014/main" id="{E5D740B3-CBC4-4A49-B263-C320547C32B5}"/>
               </a:ext>
             </a:extLst>
           </p:cNvPr>
@@ -18422,7 +18544,7 @@
           <p:cNvPr id="35" name="">
             <a:extLst xmlns:a="http://schemas.openxmlformats.org/drawingml/2006/main">
               <a:ext uri="{FF2B5EF4-FFF2-40B4-BE49-F238E27FC236}">
-                <a16:creationId xmlns:a16="http://schemas.microsoft.com/office/drawing/2014/main" id="{6A27CC2E-4ED6-4CF3-A3B1-4AD2D0C6E2C7}"/>
+                <a16:creationId xmlns:a16="http://schemas.microsoft.com/office/drawing/2014/main" id="{7808A841-9A06-4447-BD57-CB9470DC0CFC}"/>
               </a:ext>
             </a:extLst>
           </p:cNvPr>
@@ -18472,7 +18594,7 @@
           <p:cNvPr id="36" name="">
             <a:extLst xmlns:a="http://schemas.openxmlformats.org/drawingml/2006/main">
               <a:ext uri="{FF2B5EF4-FFF2-40B4-BE49-F238E27FC236}">
-                <a16:creationId xmlns:a16="http://schemas.microsoft.com/office/drawing/2014/main" id="{E4F06A1F-2BFF-4D1B-94D9-10B4FA1310F9}"/>
+                <a16:creationId xmlns:a16="http://schemas.microsoft.com/office/drawing/2014/main" id="{D7BA4F09-E5A3-4B8E-8E6C-C948793F1354}"/>
               </a:ext>
             </a:extLst>
           </p:cNvPr>
@@ -18522,7 +18644,7 @@
           <p:cNvPr id="37" name="">
             <a:extLst xmlns:a="http://schemas.openxmlformats.org/drawingml/2006/main">
               <a:ext uri="{FF2B5EF4-FFF2-40B4-BE49-F238E27FC236}">
-                <a16:creationId xmlns:a16="http://schemas.microsoft.com/office/drawing/2014/main" id="{CAB9DA31-33F2-40A0-B823-104556D3FC83}"/>
+                <a16:creationId xmlns:a16="http://schemas.microsoft.com/office/drawing/2014/main" id="{1E54458C-5952-4FAD-8420-2BC93A0775DB}"/>
               </a:ext>
             </a:extLst>
           </p:cNvPr>
@@ -18572,7 +18694,7 @@
           <p:cNvPr id="38" name="">
             <a:extLst xmlns:a="http://schemas.openxmlformats.org/drawingml/2006/main">
               <a:ext uri="{FF2B5EF4-FFF2-40B4-BE49-F238E27FC236}">
-                <a16:creationId xmlns:a16="http://schemas.microsoft.com/office/drawing/2014/main" id="{0FD0642A-0C4F-412C-94C0-723101E8BAF4}"/>
+                <a16:creationId xmlns:a16="http://schemas.microsoft.com/office/drawing/2014/main" id="{638D6E2C-70A1-48E9-A432-EA6BED5EF719}"/>
               </a:ext>
             </a:extLst>
           </p:cNvPr>
@@ -18622,7 +18744,7 @@
           <p:cNvPr id="39" name="">
             <a:extLst xmlns:a="http://schemas.openxmlformats.org/drawingml/2006/main">
               <a:ext uri="{FF2B5EF4-FFF2-40B4-BE49-F238E27FC236}">
-                <a16:creationId xmlns:a16="http://schemas.microsoft.com/office/drawing/2014/main" id="{15F2B467-3598-406C-BFCB-F0C0C7FC3188}"/>
+                <a16:creationId xmlns:a16="http://schemas.microsoft.com/office/drawing/2014/main" id="{1048A680-876B-49B0-92F3-D787AD87CECD}"/>
               </a:ext>
             </a:extLst>
           </p:cNvPr>
@@ -18670,7 +18792,7 @@
     </p:spTree>
     <p:extLst>
       <p:ext uri="{BB962C8B-B14F-4D97-AF65-F5344CB8AC3E}">
-        <p14:creationId xmlns:p14="http://schemas.microsoft.com/office/powerpoint/2010/main" val="1745654230"/>
+        <p14:creationId xmlns:p14="http://schemas.microsoft.com/office/powerpoint/2010/main" val="850581564"/>
       </p:ext>
     </p:extLst>
   </p:cSld>
@@ -18701,7 +18823,7 @@
           <p:cNvPr id="1" name="">
             <a:extLst xmlns:a="http://schemas.openxmlformats.org/drawingml/2006/main">
               <a:ext uri="{FF2B5EF4-FFF2-40B4-BE49-F238E27FC236}">
-                <a16:creationId xmlns:a16="http://schemas.microsoft.com/office/drawing/2014/main" id="{2BAB1A7F-3059-4F2B-90D8-1232A738C2A7}"/>
+                <a16:creationId xmlns:a16="http://schemas.microsoft.com/office/drawing/2014/main" id="{37E82F2D-1DF7-4664-8FC6-92FA380AD341}"/>
               </a:ext>
             </a:extLst>
           </p:cNvPr>
@@ -18736,7 +18858,7 @@
           <p:nvPr/>
         </p:nvPicPr>
         <p:blipFill>
-          <a:blip xmlns:r="http://schemas.openxmlformats.org/officeDocument/2006/relationships" xmlns:a="http://schemas.openxmlformats.org/drawingml/2006/main" r:embed="R9508cdef541e4fda"/>
+          <a:blip xmlns:r="http://schemas.openxmlformats.org/officeDocument/2006/relationships" xmlns:a="http://schemas.openxmlformats.org/drawingml/2006/main" r:embed="R42172859c6c14736"/>
           <a:stretch xmlns:a="http://schemas.openxmlformats.org/drawingml/2006/main"/>
         </p:blipFill>
         <p:spPr>
@@ -18754,7 +18876,7 @@
           <p:cNvPr id="3" name="">
             <a:extLst xmlns:a="http://schemas.openxmlformats.org/drawingml/2006/main">
               <a:ext uri="{FF2B5EF4-FFF2-40B4-BE49-F238E27FC236}">
-                <a16:creationId xmlns:a16="http://schemas.microsoft.com/office/drawing/2014/main" id="{B5A4EAEF-3954-495E-8E57-13CA331184D4}"/>
+                <a16:creationId xmlns:a16="http://schemas.microsoft.com/office/drawing/2014/main" id="{A60A587D-18F2-4300-BDE2-7939E68828E5}"/>
               </a:ext>
             </a:extLst>
           </p:cNvPr>
@@ -18804,7 +18926,7 @@
           <p:cNvPr id="4" name="">
             <a:extLst xmlns:a="http://schemas.openxmlformats.org/drawingml/2006/main">
               <a:ext uri="{FF2B5EF4-FFF2-40B4-BE49-F238E27FC236}">
-                <a16:creationId xmlns:a16="http://schemas.microsoft.com/office/drawing/2014/main" id="{DCEBC336-7D5D-420A-BA11-A97CBAE93A43}"/>
+                <a16:creationId xmlns:a16="http://schemas.microsoft.com/office/drawing/2014/main" id="{5AB61FB4-33B4-433D-B97F-FF35070616EA}"/>
               </a:ext>
             </a:extLst>
           </p:cNvPr>
@@ -18837,7 +18959,7 @@
           <p:cNvPr id="5" name="">
             <a:extLst xmlns:a="http://schemas.openxmlformats.org/drawingml/2006/main">
               <a:ext uri="{FF2B5EF4-FFF2-40B4-BE49-F238E27FC236}">
-                <a16:creationId xmlns:a16="http://schemas.microsoft.com/office/drawing/2014/main" id="{E9B55500-B06D-4FE7-858A-55895536A5FD}"/>
+                <a16:creationId xmlns:a16="http://schemas.microsoft.com/office/drawing/2014/main" id="{373632B7-BBE6-4CF1-9BDE-7BB28D819E0D}"/>
               </a:ext>
             </a:extLst>
           </p:cNvPr>
@@ -18868,7 +18990,7 @@
           <p:cNvPr id="6" name="">
             <a:extLst xmlns:a="http://schemas.openxmlformats.org/drawingml/2006/main">
               <a:ext uri="{FF2B5EF4-FFF2-40B4-BE49-F238E27FC236}">
-                <a16:creationId xmlns:a16="http://schemas.microsoft.com/office/drawing/2014/main" id="{38D3D55D-E6A4-4F14-8286-AB3A755FE921}"/>
+                <a16:creationId xmlns:a16="http://schemas.microsoft.com/office/drawing/2014/main" id="{85B24382-60FE-4C5D-BFC9-68F279E92B28}"/>
               </a:ext>
             </a:extLst>
           </p:cNvPr>
@@ -18918,7 +19040,7 @@
           <p:cNvPr id="7" name="">
             <a:extLst xmlns:a="http://schemas.openxmlformats.org/drawingml/2006/main">
               <a:ext uri="{FF2B5EF4-FFF2-40B4-BE49-F238E27FC236}">
-                <a16:creationId xmlns:a16="http://schemas.microsoft.com/office/drawing/2014/main" id="{E9F679D4-3FCD-4E91-B95B-3D9B995DB788}"/>
+                <a16:creationId xmlns:a16="http://schemas.microsoft.com/office/drawing/2014/main" id="{AB9AD570-3554-4E4E-81F6-D6CAD634258F}"/>
               </a:ext>
             </a:extLst>
           </p:cNvPr>
@@ -18968,7 +19090,7 @@
           <p:cNvPr id="8" name="">
             <a:extLst xmlns:a="http://schemas.openxmlformats.org/drawingml/2006/main">
               <a:ext uri="{FF2B5EF4-FFF2-40B4-BE49-F238E27FC236}">
-                <a16:creationId xmlns:a16="http://schemas.microsoft.com/office/drawing/2014/main" id="{3ADE0B20-8F32-492D-B050-CCBBDD4C1A74}"/>
+                <a16:creationId xmlns:a16="http://schemas.microsoft.com/office/drawing/2014/main" id="{C5AAA22F-64B8-4604-A4B5-7477D2E174E0}"/>
               </a:ext>
             </a:extLst>
           </p:cNvPr>
@@ -19003,7 +19125,7 @@
           <p:cNvPr id="9" name="">
             <a:extLst xmlns:a="http://schemas.openxmlformats.org/drawingml/2006/main">
               <a:ext uri="{FF2B5EF4-FFF2-40B4-BE49-F238E27FC236}">
-                <a16:creationId xmlns:a16="http://schemas.microsoft.com/office/drawing/2014/main" id="{ABD0A69D-A698-4DBC-9071-A25C0D408A49}"/>
+                <a16:creationId xmlns:a16="http://schemas.microsoft.com/office/drawing/2014/main" id="{8F6D6DE5-6341-4072-87CA-871A13D63864}"/>
               </a:ext>
             </a:extLst>
           </p:cNvPr>
@@ -19036,7 +19158,7 @@
           <p:cNvPr id="10" name="">
             <a:extLst xmlns:a="http://schemas.openxmlformats.org/drawingml/2006/main">
               <a:ext uri="{FF2B5EF4-FFF2-40B4-BE49-F238E27FC236}">
-                <a16:creationId xmlns:a16="http://schemas.microsoft.com/office/drawing/2014/main" id="{66239F6E-FDC9-4866-A9AD-F0D165828EC5}"/>
+                <a16:creationId xmlns:a16="http://schemas.microsoft.com/office/drawing/2014/main" id="{F681C1BF-097B-4893-8BF7-D71E830E4D9E}"/>
               </a:ext>
             </a:extLst>
           </p:cNvPr>
@@ -19086,7 +19208,7 @@
           <p:cNvPr id="11" name="">
             <a:extLst xmlns:a="http://schemas.openxmlformats.org/drawingml/2006/main">
               <a:ext uri="{FF2B5EF4-FFF2-40B4-BE49-F238E27FC236}">
-                <a16:creationId xmlns:a16="http://schemas.microsoft.com/office/drawing/2014/main" id="{3D7B89DA-BD69-4D23-993A-8CF76B16D1BA}"/>
+                <a16:creationId xmlns:a16="http://schemas.microsoft.com/office/drawing/2014/main" id="{8EA6B68C-261B-4567-9176-6D02B00F847F}"/>
               </a:ext>
             </a:extLst>
           </p:cNvPr>
@@ -19136,7 +19258,7 @@
           <p:cNvPr id="12" name="">
             <a:extLst xmlns:a="http://schemas.openxmlformats.org/drawingml/2006/main">
               <a:ext uri="{FF2B5EF4-FFF2-40B4-BE49-F238E27FC236}">
-                <a16:creationId xmlns:a16="http://schemas.microsoft.com/office/drawing/2014/main" id="{3190976F-185C-4EA8-8A73-D0D7B909196C}"/>
+                <a16:creationId xmlns:a16="http://schemas.microsoft.com/office/drawing/2014/main" id="{6B67CD07-A916-4B51-8F6D-ADF0079DFC17}"/>
               </a:ext>
             </a:extLst>
           </p:cNvPr>
@@ -19186,7 +19308,7 @@
           <p:cNvPr id="13" name="">
             <a:extLst xmlns:a="http://schemas.openxmlformats.org/drawingml/2006/main">
               <a:ext uri="{FF2B5EF4-FFF2-40B4-BE49-F238E27FC236}">
-                <a16:creationId xmlns:a16="http://schemas.microsoft.com/office/drawing/2014/main" id="{5918FB71-F7A7-4D6D-A2C5-0BDF16345802}"/>
+                <a16:creationId xmlns:a16="http://schemas.microsoft.com/office/drawing/2014/main" id="{BF0A103E-A127-4847-A72D-8998D63B831D}"/>
               </a:ext>
             </a:extLst>
           </p:cNvPr>
@@ -19236,7 +19358,7 @@
           <p:cNvPr id="14" name="">
             <a:extLst xmlns:a="http://schemas.openxmlformats.org/drawingml/2006/main">
               <a:ext uri="{FF2B5EF4-FFF2-40B4-BE49-F238E27FC236}">
-                <a16:creationId xmlns:a16="http://schemas.microsoft.com/office/drawing/2014/main" id="{74CA7427-4420-475F-8B68-D4C79F0DD967}"/>
+                <a16:creationId xmlns:a16="http://schemas.microsoft.com/office/drawing/2014/main" id="{918E1F62-E7B5-470E-8ABD-BFB7B7E22397}"/>
               </a:ext>
             </a:extLst>
           </p:cNvPr>
@@ -19286,7 +19408,7 @@
           <p:cNvPr id="15" name="">
             <a:extLst xmlns:a="http://schemas.openxmlformats.org/drawingml/2006/main">
               <a:ext uri="{FF2B5EF4-FFF2-40B4-BE49-F238E27FC236}">
-                <a16:creationId xmlns:a16="http://schemas.microsoft.com/office/drawing/2014/main" id="{6066A426-A459-45F8-BB92-4D4D283C65EC}"/>
+                <a16:creationId xmlns:a16="http://schemas.microsoft.com/office/drawing/2014/main" id="{0DD9F549-3B0E-4369-A3B4-34C9EAB8EBE5}"/>
               </a:ext>
             </a:extLst>
           </p:cNvPr>
@@ -19336,7 +19458,7 @@
           <p:cNvPr id="16" name="">
             <a:extLst xmlns:a="http://schemas.openxmlformats.org/drawingml/2006/main">
               <a:ext uri="{FF2B5EF4-FFF2-40B4-BE49-F238E27FC236}">
-                <a16:creationId xmlns:a16="http://schemas.microsoft.com/office/drawing/2014/main" id="{319D94DB-2A26-4B1B-B0D7-842264DE36F3}"/>
+                <a16:creationId xmlns:a16="http://schemas.microsoft.com/office/drawing/2014/main" id="{0AFCD113-9E1B-45B7-8441-EBDB89B34A8C}"/>
               </a:ext>
             </a:extLst>
           </p:cNvPr>
@@ -19386,7 +19508,7 @@
           <p:cNvPr id="17" name="">
             <a:extLst xmlns:a="http://schemas.openxmlformats.org/drawingml/2006/main">
               <a:ext uri="{FF2B5EF4-FFF2-40B4-BE49-F238E27FC236}">
-                <a16:creationId xmlns:a16="http://schemas.microsoft.com/office/drawing/2014/main" id="{93A006A2-F461-42BB-A154-8DB85D0D191F}"/>
+                <a16:creationId xmlns:a16="http://schemas.microsoft.com/office/drawing/2014/main" id="{6D061F23-21A1-412A-A2B7-00C91102E557}"/>
               </a:ext>
             </a:extLst>
           </p:cNvPr>
@@ -19417,7 +19539,7 @@
           <p:cNvPr id="18" name="">
             <a:extLst xmlns:a="http://schemas.openxmlformats.org/drawingml/2006/main">
               <a:ext uri="{FF2B5EF4-FFF2-40B4-BE49-F238E27FC236}">
-                <a16:creationId xmlns:a16="http://schemas.microsoft.com/office/drawing/2014/main" id="{966F7181-10C0-4CC7-BA06-244A9E3D640A}"/>
+                <a16:creationId xmlns:a16="http://schemas.microsoft.com/office/drawing/2014/main" id="{389F848A-BBF9-4E8F-A92C-F8F1815579EA}"/>
               </a:ext>
             </a:extLst>
           </p:cNvPr>
@@ -19467,7 +19589,7 @@
           <p:cNvPr id="19" name="">
             <a:extLst xmlns:a="http://schemas.openxmlformats.org/drawingml/2006/main">
               <a:ext uri="{FF2B5EF4-FFF2-40B4-BE49-F238E27FC236}">
-                <a16:creationId xmlns:a16="http://schemas.microsoft.com/office/drawing/2014/main" id="{21EEF9FE-8E18-4E70-915C-EDDC8158BCFD}"/>
+                <a16:creationId xmlns:a16="http://schemas.microsoft.com/office/drawing/2014/main" id="{43600515-A520-479C-89F0-7D391CA4EA04}"/>
               </a:ext>
             </a:extLst>
           </p:cNvPr>
@@ -19517,7 +19639,7 @@
           <p:cNvPr id="20" name="">
             <a:extLst xmlns:a="http://schemas.openxmlformats.org/drawingml/2006/main">
               <a:ext uri="{FF2B5EF4-FFF2-40B4-BE49-F238E27FC236}">
-                <a16:creationId xmlns:a16="http://schemas.microsoft.com/office/drawing/2014/main" id="{FECE0A43-FAEF-4D5E-AF03-0213BA119BAB}"/>
+                <a16:creationId xmlns:a16="http://schemas.microsoft.com/office/drawing/2014/main" id="{9D59C959-4F37-4848-BECC-6716324B6A34}"/>
               </a:ext>
             </a:extLst>
           </p:cNvPr>
@@ -19567,7 +19689,7 @@
           <p:cNvPr id="21" name="">
             <a:extLst xmlns:a="http://schemas.openxmlformats.org/drawingml/2006/main">
               <a:ext uri="{FF2B5EF4-FFF2-40B4-BE49-F238E27FC236}">
-                <a16:creationId xmlns:a16="http://schemas.microsoft.com/office/drawing/2014/main" id="{27D70E00-A8D9-49A8-99CD-757AA8FCF335}"/>
+                <a16:creationId xmlns:a16="http://schemas.microsoft.com/office/drawing/2014/main" id="{926F9CF9-8E4C-490E-AA12-56C004776FDC}"/>
               </a:ext>
             </a:extLst>
           </p:cNvPr>
@@ -19617,7 +19739,7 @@
           <p:cNvPr id="22" name="">
             <a:extLst xmlns:a="http://schemas.openxmlformats.org/drawingml/2006/main">
               <a:ext uri="{FF2B5EF4-FFF2-40B4-BE49-F238E27FC236}">
-                <a16:creationId xmlns:a16="http://schemas.microsoft.com/office/drawing/2014/main" id="{5456AEAF-39B9-4440-9619-E94031A23150}"/>
+                <a16:creationId xmlns:a16="http://schemas.microsoft.com/office/drawing/2014/main" id="{633E739C-9FAA-49BD-9B75-513858E774F2}"/>
               </a:ext>
             </a:extLst>
           </p:cNvPr>
@@ -19667,7 +19789,7 @@
           <p:cNvPr id="23" name="">
             <a:extLst xmlns:a="http://schemas.openxmlformats.org/drawingml/2006/main">
               <a:ext uri="{FF2B5EF4-FFF2-40B4-BE49-F238E27FC236}">
-                <a16:creationId xmlns:a16="http://schemas.microsoft.com/office/drawing/2014/main" id="{EDFB6804-002F-40E9-86A4-AED5E9E2F857}"/>
+                <a16:creationId xmlns:a16="http://schemas.microsoft.com/office/drawing/2014/main" id="{F494B33F-2E85-4F82-A705-1A9BDE0D17A1}"/>
               </a:ext>
             </a:extLst>
           </p:cNvPr>
@@ -19717,7 +19839,7 @@
           <p:cNvPr id="24" name="">
             <a:extLst xmlns:a="http://schemas.openxmlformats.org/drawingml/2006/main">
               <a:ext uri="{FF2B5EF4-FFF2-40B4-BE49-F238E27FC236}">
-                <a16:creationId xmlns:a16="http://schemas.microsoft.com/office/drawing/2014/main" id="{E48EAB31-93F2-4FD8-B93F-D9BDAC86004F}"/>
+                <a16:creationId xmlns:a16="http://schemas.microsoft.com/office/drawing/2014/main" id="{0712A86C-783F-4EE0-9CDB-457F8D61E67B}"/>
               </a:ext>
             </a:extLst>
           </p:cNvPr>
@@ -19752,7 +19874,7 @@
           <p:cNvPr id="25" name="">
             <a:extLst xmlns:a="http://schemas.openxmlformats.org/drawingml/2006/main">
               <a:ext uri="{FF2B5EF4-FFF2-40B4-BE49-F238E27FC236}">
-                <a16:creationId xmlns:a16="http://schemas.microsoft.com/office/drawing/2014/main" id="{4AF36BC7-FCC4-45BA-82DD-738D19B82E96}"/>
+                <a16:creationId xmlns:a16="http://schemas.microsoft.com/office/drawing/2014/main" id="{AFED0ADE-AA54-48AA-BAF1-B16DF92E73D2}"/>
               </a:ext>
             </a:extLst>
           </p:cNvPr>
@@ -19785,7 +19907,7 @@
           <p:cNvPr id="26" name="">
             <a:extLst xmlns:a="http://schemas.openxmlformats.org/drawingml/2006/main">
               <a:ext uri="{FF2B5EF4-FFF2-40B4-BE49-F238E27FC236}">
-                <a16:creationId xmlns:a16="http://schemas.microsoft.com/office/drawing/2014/main" id="{D9B0141F-00E0-404C-862C-11B69265E19B}"/>
+                <a16:creationId xmlns:a16="http://schemas.microsoft.com/office/drawing/2014/main" id="{7EA92D7A-2BB5-4ADE-9A1A-F81F4B668BA6}"/>
               </a:ext>
             </a:extLst>
           </p:cNvPr>
@@ -19835,7 +19957,7 @@
           <p:cNvPr id="27" name="">
             <a:extLst xmlns:a="http://schemas.openxmlformats.org/drawingml/2006/main">
               <a:ext uri="{FF2B5EF4-FFF2-40B4-BE49-F238E27FC236}">
-                <a16:creationId xmlns:a16="http://schemas.microsoft.com/office/drawing/2014/main" id="{ED70ABB5-EDA7-4E28-9813-6134C2E12C92}"/>
+                <a16:creationId xmlns:a16="http://schemas.microsoft.com/office/drawing/2014/main" id="{2F7A00E8-79A4-4E61-84F2-C2C99C5EBF4F}"/>
               </a:ext>
             </a:extLst>
           </p:cNvPr>
@@ -19885,7 +20007,7 @@
           <p:cNvPr id="28" name="">
             <a:extLst xmlns:a="http://schemas.openxmlformats.org/drawingml/2006/main">
               <a:ext uri="{FF2B5EF4-FFF2-40B4-BE49-F238E27FC236}">
-                <a16:creationId xmlns:a16="http://schemas.microsoft.com/office/drawing/2014/main" id="{8908BAE4-1EBC-44C1-A570-38C6E45357F1}"/>
+                <a16:creationId xmlns:a16="http://schemas.microsoft.com/office/drawing/2014/main" id="{0505B300-937D-4230-9220-8C0965AD14EA}"/>
               </a:ext>
             </a:extLst>
           </p:cNvPr>
@@ -19935,7 +20057,7 @@
           <p:cNvPr id="29" name="">
             <a:extLst xmlns:a="http://schemas.openxmlformats.org/drawingml/2006/main">
               <a:ext uri="{FF2B5EF4-FFF2-40B4-BE49-F238E27FC236}">
-                <a16:creationId xmlns:a16="http://schemas.microsoft.com/office/drawing/2014/main" id="{DBFA186D-A794-4F01-9ADF-BB9AE727969F}"/>
+                <a16:creationId xmlns:a16="http://schemas.microsoft.com/office/drawing/2014/main" id="{369C0F14-F6B9-495F-9524-2E9538BA805C}"/>
               </a:ext>
             </a:extLst>
           </p:cNvPr>
@@ -19985,7 +20107,7 @@
           <p:cNvPr id="30" name="">
             <a:extLst xmlns:a="http://schemas.openxmlformats.org/drawingml/2006/main">
               <a:ext uri="{FF2B5EF4-FFF2-40B4-BE49-F238E27FC236}">
-                <a16:creationId xmlns:a16="http://schemas.microsoft.com/office/drawing/2014/main" id="{8A4410DA-68FF-4AD5-96A7-26DBA450B3B5}"/>
+                <a16:creationId xmlns:a16="http://schemas.microsoft.com/office/drawing/2014/main" id="{E93FFBAF-3FF9-4E1C-A021-64D3D41B4F98}"/>
               </a:ext>
             </a:extLst>
           </p:cNvPr>
@@ -20035,7 +20157,7 @@
           <p:cNvPr id="31" name="">
             <a:extLst xmlns:a="http://schemas.openxmlformats.org/drawingml/2006/main">
               <a:ext uri="{FF2B5EF4-FFF2-40B4-BE49-F238E27FC236}">
-                <a16:creationId xmlns:a16="http://schemas.microsoft.com/office/drawing/2014/main" id="{F956C18C-E0AF-4AD1-83A9-B3D088EFC29A}"/>
+                <a16:creationId xmlns:a16="http://schemas.microsoft.com/office/drawing/2014/main" id="{5EA450A6-CBBC-4DD5-9E26-D0E511F13DC2}"/>
               </a:ext>
             </a:extLst>
           </p:cNvPr>
@@ -20085,7 +20207,7 @@
           <p:cNvPr id="32" name="">
             <a:extLst xmlns:a="http://schemas.openxmlformats.org/drawingml/2006/main">
               <a:ext uri="{FF2B5EF4-FFF2-40B4-BE49-F238E27FC236}">
-                <a16:creationId xmlns:a16="http://schemas.microsoft.com/office/drawing/2014/main" id="{DBE893C7-E1D0-4603-A9CB-C4E1EB63DDBD}"/>
+                <a16:creationId xmlns:a16="http://schemas.microsoft.com/office/drawing/2014/main" id="{73822125-D844-4420-B7DA-A52FC3CDD94E}"/>
               </a:ext>
             </a:extLst>
           </p:cNvPr>
@@ -20135,7 +20257,7 @@
           <p:cNvPr id="33" name="">
             <a:extLst xmlns:a="http://schemas.openxmlformats.org/drawingml/2006/main">
               <a:ext uri="{FF2B5EF4-FFF2-40B4-BE49-F238E27FC236}">
-                <a16:creationId xmlns:a16="http://schemas.microsoft.com/office/drawing/2014/main" id="{DA3DCDF5-696C-49A2-8BAF-7B290404DC49}"/>
+                <a16:creationId xmlns:a16="http://schemas.microsoft.com/office/drawing/2014/main" id="{DD27400B-D9C2-4CD2-AB70-D41C054A5DD0}"/>
               </a:ext>
             </a:extLst>
           </p:cNvPr>
@@ -20166,7 +20288,7 @@
           <p:cNvPr id="34" name="">
             <a:extLst xmlns:a="http://schemas.openxmlformats.org/drawingml/2006/main">
               <a:ext uri="{FF2B5EF4-FFF2-40B4-BE49-F238E27FC236}">
-                <a16:creationId xmlns:a16="http://schemas.microsoft.com/office/drawing/2014/main" id="{749A7D35-74A6-4741-A975-A36BCF0B8902}"/>
+                <a16:creationId xmlns:a16="http://schemas.microsoft.com/office/drawing/2014/main" id="{5D7AA774-7D6C-425F-A90A-E968A33A27EA}"/>
               </a:ext>
             </a:extLst>
           </p:cNvPr>
@@ -20216,7 +20338,7 @@
           <p:cNvPr id="35" name="">
             <a:extLst xmlns:a="http://schemas.openxmlformats.org/drawingml/2006/main">
               <a:ext uri="{FF2B5EF4-FFF2-40B4-BE49-F238E27FC236}">
-                <a16:creationId xmlns:a16="http://schemas.microsoft.com/office/drawing/2014/main" id="{11FD6238-98F2-4CDF-BC47-16DFE5B81AA6}"/>
+                <a16:creationId xmlns:a16="http://schemas.microsoft.com/office/drawing/2014/main" id="{FA7EA91B-3AAB-407D-9BDF-69A621346BEF}"/>
               </a:ext>
             </a:extLst>
           </p:cNvPr>
@@ -20266,7 +20388,7 @@
           <p:cNvPr id="36" name="">
             <a:extLst xmlns:a="http://schemas.openxmlformats.org/drawingml/2006/main">
               <a:ext uri="{FF2B5EF4-FFF2-40B4-BE49-F238E27FC236}">
-                <a16:creationId xmlns:a16="http://schemas.microsoft.com/office/drawing/2014/main" id="{A8E91F52-2AFB-4084-9EE8-2040EFA01EB3}"/>
+                <a16:creationId xmlns:a16="http://schemas.microsoft.com/office/drawing/2014/main" id="{C12BE348-E143-4427-A999-B75E1111E8D6}"/>
               </a:ext>
             </a:extLst>
           </p:cNvPr>
@@ -20316,7 +20438,7 @@
           <p:cNvPr id="37" name="">
             <a:extLst xmlns:a="http://schemas.openxmlformats.org/drawingml/2006/main">
               <a:ext uri="{FF2B5EF4-FFF2-40B4-BE49-F238E27FC236}">
-                <a16:creationId xmlns:a16="http://schemas.microsoft.com/office/drawing/2014/main" id="{C1C312B2-0112-46E9-B82B-868F8036DDF4}"/>
+                <a16:creationId xmlns:a16="http://schemas.microsoft.com/office/drawing/2014/main" id="{AF54B61D-04EA-48D6-8F99-2CA165E51F22}"/>
               </a:ext>
             </a:extLst>
           </p:cNvPr>
@@ -20366,7 +20488,7 @@
           <p:cNvPr id="38" name="">
             <a:extLst xmlns:a="http://schemas.openxmlformats.org/drawingml/2006/main">
               <a:ext uri="{FF2B5EF4-FFF2-40B4-BE49-F238E27FC236}">
-                <a16:creationId xmlns:a16="http://schemas.microsoft.com/office/drawing/2014/main" id="{8B5255AD-908C-4E46-A4D5-DCCA2F86D09F}"/>
+                <a16:creationId xmlns:a16="http://schemas.microsoft.com/office/drawing/2014/main" id="{1421FC39-B42D-474A-9E7E-ED9FE49C420F}"/>
               </a:ext>
             </a:extLst>
           </p:cNvPr>
@@ -20416,7 +20538,7 @@
           <p:cNvPr id="39" name="">
             <a:extLst xmlns:a="http://schemas.openxmlformats.org/drawingml/2006/main">
               <a:ext uri="{FF2B5EF4-FFF2-40B4-BE49-F238E27FC236}">
-                <a16:creationId xmlns:a16="http://schemas.microsoft.com/office/drawing/2014/main" id="{D5A93E70-BCB4-41ED-8B65-9D5F419F801D}"/>
+                <a16:creationId xmlns:a16="http://schemas.microsoft.com/office/drawing/2014/main" id="{C0B98F26-D7FB-419B-BCFA-89750821AB91}"/>
               </a:ext>
             </a:extLst>
           </p:cNvPr>
@@ -20464,7 +20586,7 @@
     </p:spTree>
     <p:extLst>
       <p:ext uri="{BB962C8B-B14F-4D97-AF65-F5344CB8AC3E}">
-        <p14:creationId xmlns:p14="http://schemas.microsoft.com/office/powerpoint/2010/main" val="873821513"/>
+        <p14:creationId xmlns:p14="http://schemas.microsoft.com/office/powerpoint/2010/main" val="2131035039"/>
       </p:ext>
     </p:extLst>
   </p:cSld>
@@ -20495,7 +20617,7 @@
           <p:cNvPr id="1" name="">
             <a:extLst xmlns:a="http://schemas.openxmlformats.org/drawingml/2006/main">
               <a:ext uri="{FF2B5EF4-FFF2-40B4-BE49-F238E27FC236}">
-                <a16:creationId xmlns:a16="http://schemas.microsoft.com/office/drawing/2014/main" id="{B77E07C6-2088-486E-AC4C-682A318B5D7C}"/>
+                <a16:creationId xmlns:a16="http://schemas.microsoft.com/office/drawing/2014/main" id="{F7D66F87-4D4E-4DF3-880D-D4A6E488BF13}"/>
               </a:ext>
             </a:extLst>
           </p:cNvPr>
@@ -20530,7 +20652,7 @@
           <p:nvPr/>
         </p:nvPicPr>
         <p:blipFill>
-          <a:blip xmlns:r="http://schemas.openxmlformats.org/officeDocument/2006/relationships" xmlns:a="http://schemas.openxmlformats.org/drawingml/2006/main" r:embed="R9feea43934964407"/>
+          <a:blip xmlns:r="http://schemas.openxmlformats.org/officeDocument/2006/relationships" xmlns:a="http://schemas.openxmlformats.org/drawingml/2006/main" r:embed="Ra7986470ea1d47e1"/>
           <a:stretch xmlns:a="http://schemas.openxmlformats.org/drawingml/2006/main"/>
         </p:blipFill>
         <p:spPr>
@@ -20548,7 +20670,7 @@
           <p:cNvPr id="3" name="">
             <a:extLst xmlns:a="http://schemas.openxmlformats.org/drawingml/2006/main">
               <a:ext uri="{FF2B5EF4-FFF2-40B4-BE49-F238E27FC236}">
-                <a16:creationId xmlns:a16="http://schemas.microsoft.com/office/drawing/2014/main" id="{27064D15-C071-4ED5-AA9D-51C018C379F7}"/>
+                <a16:creationId xmlns:a16="http://schemas.microsoft.com/office/drawing/2014/main" id="{22C9E784-630C-471C-A8E1-11FF53F07AFE}"/>
               </a:ext>
             </a:extLst>
           </p:cNvPr>
@@ -20598,7 +20720,7 @@
           <p:cNvPr id="4" name="">
             <a:extLst xmlns:a="http://schemas.openxmlformats.org/drawingml/2006/main">
               <a:ext uri="{FF2B5EF4-FFF2-40B4-BE49-F238E27FC236}">
-                <a16:creationId xmlns:a16="http://schemas.microsoft.com/office/drawing/2014/main" id="{7912E67D-636D-4743-AFEA-1DE157936D01}"/>
+                <a16:creationId xmlns:a16="http://schemas.microsoft.com/office/drawing/2014/main" id="{E169ED30-7FFC-46F0-B75A-0A3DBEF875A6}"/>
               </a:ext>
             </a:extLst>
           </p:cNvPr>
@@ -20631,7 +20753,7 @@
           <p:cNvPr id="5" name="">
             <a:extLst xmlns:a="http://schemas.openxmlformats.org/drawingml/2006/main">
               <a:ext uri="{FF2B5EF4-FFF2-40B4-BE49-F238E27FC236}">
-                <a16:creationId xmlns:a16="http://schemas.microsoft.com/office/drawing/2014/main" id="{1001F80A-1DCC-4384-A3B3-81E790AA342E}"/>
+                <a16:creationId xmlns:a16="http://schemas.microsoft.com/office/drawing/2014/main" id="{5444C8FB-7017-4B08-A87B-B9CE2C035DC6}"/>
               </a:ext>
             </a:extLst>
           </p:cNvPr>
@@ -20662,7 +20784,7 @@
           <p:cNvPr id="6" name="">
             <a:extLst xmlns:a="http://schemas.openxmlformats.org/drawingml/2006/main">
               <a:ext uri="{FF2B5EF4-FFF2-40B4-BE49-F238E27FC236}">
-                <a16:creationId xmlns:a16="http://schemas.microsoft.com/office/drawing/2014/main" id="{3ABFB692-40F4-40B9-B484-999986FA70FF}"/>
+                <a16:creationId xmlns:a16="http://schemas.microsoft.com/office/drawing/2014/main" id="{55536F55-5F8A-4108-AF69-9D6839EC99FC}"/>
               </a:ext>
             </a:extLst>
           </p:cNvPr>
@@ -20712,7 +20834,7 @@
           <p:cNvPr id="7" name="">
             <a:extLst xmlns:a="http://schemas.openxmlformats.org/drawingml/2006/main">
               <a:ext uri="{FF2B5EF4-FFF2-40B4-BE49-F238E27FC236}">
-                <a16:creationId xmlns:a16="http://schemas.microsoft.com/office/drawing/2014/main" id="{D8009004-9F2D-4873-9488-58522D5448BD}"/>
+                <a16:creationId xmlns:a16="http://schemas.microsoft.com/office/drawing/2014/main" id="{D002D234-3033-4262-9683-6B102D84F8F0}"/>
               </a:ext>
             </a:extLst>
           </p:cNvPr>
@@ -20762,7 +20884,7 @@
           <p:cNvPr id="8" name="">
             <a:extLst xmlns:a="http://schemas.openxmlformats.org/drawingml/2006/main">
               <a:ext uri="{FF2B5EF4-FFF2-40B4-BE49-F238E27FC236}">
-                <a16:creationId xmlns:a16="http://schemas.microsoft.com/office/drawing/2014/main" id="{49F284D7-70B4-4BA1-A56D-846BCFA3A594}"/>
+                <a16:creationId xmlns:a16="http://schemas.microsoft.com/office/drawing/2014/main" id="{66E00E2D-FD4A-437B-B243-5932F665A999}"/>
               </a:ext>
             </a:extLst>
           </p:cNvPr>
@@ -20797,7 +20919,7 @@
           <p:cNvPr id="9" name="">
             <a:extLst xmlns:a="http://schemas.openxmlformats.org/drawingml/2006/main">
               <a:ext uri="{FF2B5EF4-FFF2-40B4-BE49-F238E27FC236}">
-                <a16:creationId xmlns:a16="http://schemas.microsoft.com/office/drawing/2014/main" id="{A52745F9-2A73-4EE6-9E2F-BEED129659E8}"/>
+                <a16:creationId xmlns:a16="http://schemas.microsoft.com/office/drawing/2014/main" id="{D974FC75-22AF-40AD-84C8-B66A09E23F2D}"/>
               </a:ext>
             </a:extLst>
           </p:cNvPr>
@@ -20830,7 +20952,7 @@
           <p:cNvPr id="10" name="">
             <a:extLst xmlns:a="http://schemas.openxmlformats.org/drawingml/2006/main">
               <a:ext uri="{FF2B5EF4-FFF2-40B4-BE49-F238E27FC236}">
-                <a16:creationId xmlns:a16="http://schemas.microsoft.com/office/drawing/2014/main" id="{BC3BB67E-6134-4578-8B48-759B8B886BA8}"/>
+                <a16:creationId xmlns:a16="http://schemas.microsoft.com/office/drawing/2014/main" id="{0992B223-979A-4D45-B91B-2CC53319E64C}"/>
               </a:ext>
             </a:extLst>
           </p:cNvPr>
@@ -20880,7 +21002,7 @@
           <p:cNvPr id="11" name="">
             <a:extLst xmlns:a="http://schemas.openxmlformats.org/drawingml/2006/main">
               <a:ext uri="{FF2B5EF4-FFF2-40B4-BE49-F238E27FC236}">
-                <a16:creationId xmlns:a16="http://schemas.microsoft.com/office/drawing/2014/main" id="{52B166F8-5E67-4C89-852B-1576DCD36AFC}"/>
+                <a16:creationId xmlns:a16="http://schemas.microsoft.com/office/drawing/2014/main" id="{58B2AE8F-16B4-4E50-827F-AF9056B5FD4A}"/>
               </a:ext>
             </a:extLst>
           </p:cNvPr>
@@ -20930,7 +21052,7 @@
           <p:cNvPr id="12" name="">
             <a:extLst xmlns:a="http://schemas.openxmlformats.org/drawingml/2006/main">
               <a:ext uri="{FF2B5EF4-FFF2-40B4-BE49-F238E27FC236}">
-                <a16:creationId xmlns:a16="http://schemas.microsoft.com/office/drawing/2014/main" id="{05C3CB9C-82A0-4432-AE8D-3571C33C7F59}"/>
+                <a16:creationId xmlns:a16="http://schemas.microsoft.com/office/drawing/2014/main" id="{56E57852-80D9-41A7-8B84-7B51AFC333CD}"/>
               </a:ext>
             </a:extLst>
           </p:cNvPr>
@@ -20980,7 +21102,7 @@
           <p:cNvPr id="13" name="">
             <a:extLst xmlns:a="http://schemas.openxmlformats.org/drawingml/2006/main">
               <a:ext uri="{FF2B5EF4-FFF2-40B4-BE49-F238E27FC236}">
-                <a16:creationId xmlns:a16="http://schemas.microsoft.com/office/drawing/2014/main" id="{03DFA141-9AA8-44B7-97F9-181F2AA8774E}"/>
+                <a16:creationId xmlns:a16="http://schemas.microsoft.com/office/drawing/2014/main" id="{3E03F5EE-EFDC-476B-B81A-A38ECE0E1481}"/>
               </a:ext>
             </a:extLst>
           </p:cNvPr>
@@ -21030,7 +21152,7 @@
           <p:cNvPr id="14" name="">
             <a:extLst xmlns:a="http://schemas.openxmlformats.org/drawingml/2006/main">
               <a:ext uri="{FF2B5EF4-FFF2-40B4-BE49-F238E27FC236}">
-                <a16:creationId xmlns:a16="http://schemas.microsoft.com/office/drawing/2014/main" id="{11B5FFCE-CCCF-4BF8-87A2-BCAF2AB1097E}"/>
+                <a16:creationId xmlns:a16="http://schemas.microsoft.com/office/drawing/2014/main" id="{A169CF1E-2DEF-46A7-B275-B2414FB61F36}"/>
               </a:ext>
             </a:extLst>
           </p:cNvPr>
@@ -21080,7 +21202,7 @@
           <p:cNvPr id="15" name="">
             <a:extLst xmlns:a="http://schemas.openxmlformats.org/drawingml/2006/main">
               <a:ext uri="{FF2B5EF4-FFF2-40B4-BE49-F238E27FC236}">
-                <a16:creationId xmlns:a16="http://schemas.microsoft.com/office/drawing/2014/main" id="{3B8A140C-0BA9-4C7E-810A-4DF3B50607F1}"/>
+                <a16:creationId xmlns:a16="http://schemas.microsoft.com/office/drawing/2014/main" id="{1D98B9C0-B5D2-48A7-9B5A-A694A5A2EE74}"/>
               </a:ext>
             </a:extLst>
           </p:cNvPr>
@@ -21130,7 +21252,7 @@
           <p:cNvPr id="16" name="">
             <a:extLst xmlns:a="http://schemas.openxmlformats.org/drawingml/2006/main">
               <a:ext uri="{FF2B5EF4-FFF2-40B4-BE49-F238E27FC236}">
-                <a16:creationId xmlns:a16="http://schemas.microsoft.com/office/drawing/2014/main" id="{135D14C5-2712-4AED-974D-1B3734844CDA}"/>
+                <a16:creationId xmlns:a16="http://schemas.microsoft.com/office/drawing/2014/main" id="{3657B76B-ABFA-45E5-ABD2-9E81A5293449}"/>
               </a:ext>
             </a:extLst>
           </p:cNvPr>
@@ -21180,7 +21302,7 @@
           <p:cNvPr id="17" name="">
             <a:extLst xmlns:a="http://schemas.openxmlformats.org/drawingml/2006/main">
               <a:ext uri="{FF2B5EF4-FFF2-40B4-BE49-F238E27FC236}">
-                <a16:creationId xmlns:a16="http://schemas.microsoft.com/office/drawing/2014/main" id="{43114B91-AD78-4651-B5EE-C7CC65A1166B}"/>
+                <a16:creationId xmlns:a16="http://schemas.microsoft.com/office/drawing/2014/main" id="{6689F9B7-EEFC-4C87-9474-17BD1EE4F057}"/>
               </a:ext>
             </a:extLst>
           </p:cNvPr>
@@ -21211,7 +21333,7 @@
           <p:cNvPr id="18" name="">
             <a:extLst xmlns:a="http://schemas.openxmlformats.org/drawingml/2006/main">
               <a:ext uri="{FF2B5EF4-FFF2-40B4-BE49-F238E27FC236}">
-                <a16:creationId xmlns:a16="http://schemas.microsoft.com/office/drawing/2014/main" id="{10506436-D282-4A7E-A5D7-F13A050D8AED}"/>
+                <a16:creationId xmlns:a16="http://schemas.microsoft.com/office/drawing/2014/main" id="{A6A5B6CF-2BB5-4084-B025-CBAC42A5362A}"/>
               </a:ext>
             </a:extLst>
           </p:cNvPr>
@@ -21261,7 +21383,7 @@
           <p:cNvPr id="19" name="">
             <a:extLst xmlns:a="http://schemas.openxmlformats.org/drawingml/2006/main">
               <a:ext uri="{FF2B5EF4-FFF2-40B4-BE49-F238E27FC236}">
-                <a16:creationId xmlns:a16="http://schemas.microsoft.com/office/drawing/2014/main" id="{2AFB40EC-D233-4FF6-A2DE-38C2D1590B1B}"/>
+                <a16:creationId xmlns:a16="http://schemas.microsoft.com/office/drawing/2014/main" id="{89CF8530-FBC6-4A3C-BD04-8CC1BD0B30C7}"/>
               </a:ext>
             </a:extLst>
           </p:cNvPr>
@@ -21311,7 +21433,7 @@
           <p:cNvPr id="20" name="">
             <a:extLst xmlns:a="http://schemas.openxmlformats.org/drawingml/2006/main">
               <a:ext uri="{FF2B5EF4-FFF2-40B4-BE49-F238E27FC236}">
-                <a16:creationId xmlns:a16="http://schemas.microsoft.com/office/drawing/2014/main" id="{96B29666-CF80-458B-A646-5F58BD83EB66}"/>
+                <a16:creationId xmlns:a16="http://schemas.microsoft.com/office/drawing/2014/main" id="{1D1257A5-5B1B-4C95-876A-ED6A0F54E48E}"/>
               </a:ext>
             </a:extLst>
           </p:cNvPr>
@@ -21361,7 +21483,7 @@
           <p:cNvPr id="21" name="">
             <a:extLst xmlns:a="http://schemas.openxmlformats.org/drawingml/2006/main">
               <a:ext uri="{FF2B5EF4-FFF2-40B4-BE49-F238E27FC236}">
-                <a16:creationId xmlns:a16="http://schemas.microsoft.com/office/drawing/2014/main" id="{DB864375-0EA3-417B-B60F-3557A5CE5B7C}"/>
+                <a16:creationId xmlns:a16="http://schemas.microsoft.com/office/drawing/2014/main" id="{5D290C8E-5564-4DFD-8D5D-C226BC6E1104}"/>
               </a:ext>
             </a:extLst>
           </p:cNvPr>
@@ -21411,7 +21533,7 @@
           <p:cNvPr id="22" name="">
             <a:extLst xmlns:a="http://schemas.openxmlformats.org/drawingml/2006/main">
               <a:ext uri="{FF2B5EF4-FFF2-40B4-BE49-F238E27FC236}">
-                <a16:creationId xmlns:a16="http://schemas.microsoft.com/office/drawing/2014/main" id="{85DF507E-8ACE-4DF2-9713-A7F7720AAF07}"/>
+                <a16:creationId xmlns:a16="http://schemas.microsoft.com/office/drawing/2014/main" id="{96C41F85-8B43-4645-9728-7FBEAD119A05}"/>
               </a:ext>
             </a:extLst>
           </p:cNvPr>
@@ -21461,7 +21583,7 @@
           <p:cNvPr id="23" name="">
             <a:extLst xmlns:a="http://schemas.openxmlformats.org/drawingml/2006/main">
               <a:ext uri="{FF2B5EF4-FFF2-40B4-BE49-F238E27FC236}">
-                <a16:creationId xmlns:a16="http://schemas.microsoft.com/office/drawing/2014/main" id="{E925DF8F-B3DF-48E0-B172-17A17BBEB156}"/>
+                <a16:creationId xmlns:a16="http://schemas.microsoft.com/office/drawing/2014/main" id="{BA5BC4C2-6AE8-4FE0-AA93-36E4F95FD6D6}"/>
               </a:ext>
             </a:extLst>
           </p:cNvPr>
@@ -21511,7 +21633,7 @@
           <p:cNvPr id="24" name="">
             <a:extLst xmlns:a="http://schemas.openxmlformats.org/drawingml/2006/main">
               <a:ext uri="{FF2B5EF4-FFF2-40B4-BE49-F238E27FC236}">
-                <a16:creationId xmlns:a16="http://schemas.microsoft.com/office/drawing/2014/main" id="{2A88F581-8CD3-44B5-80AF-2DA544441D76}"/>
+                <a16:creationId xmlns:a16="http://schemas.microsoft.com/office/drawing/2014/main" id="{E69C6523-C98F-4C31-B255-3B6BF9EA9DDE}"/>
               </a:ext>
             </a:extLst>
           </p:cNvPr>
@@ -21546,7 +21668,7 @@
           <p:cNvPr id="25" name="">
             <a:extLst xmlns:a="http://schemas.openxmlformats.org/drawingml/2006/main">
               <a:ext uri="{FF2B5EF4-FFF2-40B4-BE49-F238E27FC236}">
-                <a16:creationId xmlns:a16="http://schemas.microsoft.com/office/drawing/2014/main" id="{04C60832-305A-41F8-BA16-12205ED79F63}"/>
+                <a16:creationId xmlns:a16="http://schemas.microsoft.com/office/drawing/2014/main" id="{1A15F5A1-B364-4B59-9FD4-4DBC164ACF7C}"/>
               </a:ext>
             </a:extLst>
           </p:cNvPr>
@@ -21579,7 +21701,7 @@
           <p:cNvPr id="26" name="">
             <a:extLst xmlns:a="http://schemas.openxmlformats.org/drawingml/2006/main">
               <a:ext uri="{FF2B5EF4-FFF2-40B4-BE49-F238E27FC236}">
-                <a16:creationId xmlns:a16="http://schemas.microsoft.com/office/drawing/2014/main" id="{4D2B6427-2170-4D92-9E47-E46B7715E9A4}"/>
+                <a16:creationId xmlns:a16="http://schemas.microsoft.com/office/drawing/2014/main" id="{8643F3C6-75CC-4CE8-8ECE-B96CF1758F51}"/>
               </a:ext>
             </a:extLst>
           </p:cNvPr>
@@ -21629,7 +21751,7 @@
           <p:cNvPr id="27" name="">
             <a:extLst xmlns:a="http://schemas.openxmlformats.org/drawingml/2006/main">
               <a:ext uri="{FF2B5EF4-FFF2-40B4-BE49-F238E27FC236}">
-                <a16:creationId xmlns:a16="http://schemas.microsoft.com/office/drawing/2014/main" id="{0B5FB970-E282-4A1A-B7E8-8D8815BB02AB}"/>
+                <a16:creationId xmlns:a16="http://schemas.microsoft.com/office/drawing/2014/main" id="{11298ECE-0423-48FD-AB19-28EA62CB7EF1}"/>
               </a:ext>
             </a:extLst>
           </p:cNvPr>
@@ -21679,7 +21801,7 @@
           <p:cNvPr id="28" name="">
             <a:extLst xmlns:a="http://schemas.openxmlformats.org/drawingml/2006/main">
               <a:ext uri="{FF2B5EF4-FFF2-40B4-BE49-F238E27FC236}">
-                <a16:creationId xmlns:a16="http://schemas.microsoft.com/office/drawing/2014/main" id="{63B174A7-2B94-4044-94D8-36B52285BAFD}"/>
+                <a16:creationId xmlns:a16="http://schemas.microsoft.com/office/drawing/2014/main" id="{5AD7F90B-7732-449A-A575-2F94A7A0023D}"/>
               </a:ext>
             </a:extLst>
           </p:cNvPr>
@@ -21729,7 +21851,7 @@
           <p:cNvPr id="29" name="">
             <a:extLst xmlns:a="http://schemas.openxmlformats.org/drawingml/2006/main">
               <a:ext uri="{FF2B5EF4-FFF2-40B4-BE49-F238E27FC236}">
-                <a16:creationId xmlns:a16="http://schemas.microsoft.com/office/drawing/2014/main" id="{3857CFB7-AFFE-4AC5-8C00-3316E16A954A}"/>
+                <a16:creationId xmlns:a16="http://schemas.microsoft.com/office/drawing/2014/main" id="{0618C7FB-9E19-4394-977F-C677FB61259E}"/>
               </a:ext>
             </a:extLst>
           </p:cNvPr>
@@ -21779,7 +21901,7 @@
           <p:cNvPr id="30" name="">
             <a:extLst xmlns:a="http://schemas.openxmlformats.org/drawingml/2006/main">
               <a:ext uri="{FF2B5EF4-FFF2-40B4-BE49-F238E27FC236}">
-                <a16:creationId xmlns:a16="http://schemas.microsoft.com/office/drawing/2014/main" id="{AAAE4956-F662-46DD-B8B2-1DA0838F0A06}"/>
+                <a16:creationId xmlns:a16="http://schemas.microsoft.com/office/drawing/2014/main" id="{8F741353-2262-4691-BCCD-AB687C29CDB1}"/>
               </a:ext>
             </a:extLst>
           </p:cNvPr>
@@ -21829,7 +21951,7 @@
           <p:cNvPr id="31" name="">
             <a:extLst xmlns:a="http://schemas.openxmlformats.org/drawingml/2006/main">
               <a:ext uri="{FF2B5EF4-FFF2-40B4-BE49-F238E27FC236}">
-                <a16:creationId xmlns:a16="http://schemas.microsoft.com/office/drawing/2014/main" id="{89A35CEC-511C-49B5-8570-94CF3059874A}"/>
+                <a16:creationId xmlns:a16="http://schemas.microsoft.com/office/drawing/2014/main" id="{709CD1B0-ECC2-4F3D-9073-1A232CD1C5C6}"/>
               </a:ext>
             </a:extLst>
           </p:cNvPr>
@@ -21879,7 +22001,7 @@
           <p:cNvPr id="32" name="">
             <a:extLst xmlns:a="http://schemas.openxmlformats.org/drawingml/2006/main">
               <a:ext uri="{FF2B5EF4-FFF2-40B4-BE49-F238E27FC236}">
-                <a16:creationId xmlns:a16="http://schemas.microsoft.com/office/drawing/2014/main" id="{2A25C003-9D14-48E0-834C-CD0B3BC40620}"/>
+                <a16:creationId xmlns:a16="http://schemas.microsoft.com/office/drawing/2014/main" id="{96943CD1-A4D4-4687-8B65-4B2497C2DEBC}"/>
               </a:ext>
             </a:extLst>
           </p:cNvPr>
@@ -21929,7 +22051,7 @@
           <p:cNvPr id="33" name="">
             <a:extLst xmlns:a="http://schemas.openxmlformats.org/drawingml/2006/main">
               <a:ext uri="{FF2B5EF4-FFF2-40B4-BE49-F238E27FC236}">
-                <a16:creationId xmlns:a16="http://schemas.microsoft.com/office/drawing/2014/main" id="{62688BD6-E410-41DD-A38A-DDD549FBCC62}"/>
+                <a16:creationId xmlns:a16="http://schemas.microsoft.com/office/drawing/2014/main" id="{549BEBEC-7E39-47F8-954C-433BD903ED9E}"/>
               </a:ext>
             </a:extLst>
           </p:cNvPr>
@@ -21960,7 +22082,7 @@
           <p:cNvPr id="34" name="">
             <a:extLst xmlns:a="http://schemas.openxmlformats.org/drawingml/2006/main">
               <a:ext uri="{FF2B5EF4-FFF2-40B4-BE49-F238E27FC236}">
-                <a16:creationId xmlns:a16="http://schemas.microsoft.com/office/drawing/2014/main" id="{18CB524F-3B32-4BBA-8D5E-76C0D3630C84}"/>
+                <a16:creationId xmlns:a16="http://schemas.microsoft.com/office/drawing/2014/main" id="{978E0F3E-83DA-4C6C-A8CE-88193213ECB0}"/>
               </a:ext>
             </a:extLst>
           </p:cNvPr>
@@ -22010,7 +22132,7 @@
           <p:cNvPr id="35" name="">
             <a:extLst xmlns:a="http://schemas.openxmlformats.org/drawingml/2006/main">
               <a:ext uri="{FF2B5EF4-FFF2-40B4-BE49-F238E27FC236}">
-                <a16:creationId xmlns:a16="http://schemas.microsoft.com/office/drawing/2014/main" id="{93C7ABE8-6E25-4F20-8EA7-FBC15A2E1E67}"/>
+                <a16:creationId xmlns:a16="http://schemas.microsoft.com/office/drawing/2014/main" id="{E2E08359-C713-4752-8E02-ABCB50AA96F6}"/>
               </a:ext>
             </a:extLst>
           </p:cNvPr>
@@ -22060,7 +22182,7 @@
           <p:cNvPr id="36" name="">
             <a:extLst xmlns:a="http://schemas.openxmlformats.org/drawingml/2006/main">
               <a:ext uri="{FF2B5EF4-FFF2-40B4-BE49-F238E27FC236}">
-                <a16:creationId xmlns:a16="http://schemas.microsoft.com/office/drawing/2014/main" id="{A95443CA-E8F9-4F17-9A28-3509C93B6B26}"/>
+                <a16:creationId xmlns:a16="http://schemas.microsoft.com/office/drawing/2014/main" id="{FEB16A66-2E14-4348-9FAC-D96F19EEE530}"/>
               </a:ext>
             </a:extLst>
           </p:cNvPr>
@@ -22110,7 +22232,7 @@
           <p:cNvPr id="37" name="">
             <a:extLst xmlns:a="http://schemas.openxmlformats.org/drawingml/2006/main">
               <a:ext uri="{FF2B5EF4-FFF2-40B4-BE49-F238E27FC236}">
-                <a16:creationId xmlns:a16="http://schemas.microsoft.com/office/drawing/2014/main" id="{CE28CB5E-C2AF-4FB3-A7DB-0E0A00F26AC2}"/>
+                <a16:creationId xmlns:a16="http://schemas.microsoft.com/office/drawing/2014/main" id="{4884D77B-EFD0-4E15-AFCC-5AAB6A1A2339}"/>
               </a:ext>
             </a:extLst>
           </p:cNvPr>
@@ -22160,7 +22282,7 @@
           <p:cNvPr id="38" name="">
             <a:extLst xmlns:a="http://schemas.openxmlformats.org/drawingml/2006/main">
               <a:ext uri="{FF2B5EF4-FFF2-40B4-BE49-F238E27FC236}">
-                <a16:creationId xmlns:a16="http://schemas.microsoft.com/office/drawing/2014/main" id="{2BF9D32B-2081-49C5-AD50-5B4CB44C5003}"/>
+                <a16:creationId xmlns:a16="http://schemas.microsoft.com/office/drawing/2014/main" id="{0725A7AE-151C-4F53-9F46-27E9C5238B00}"/>
               </a:ext>
             </a:extLst>
           </p:cNvPr>
@@ -22210,7 +22332,7 @@
           <p:cNvPr id="39" name="">
             <a:extLst xmlns:a="http://schemas.openxmlformats.org/drawingml/2006/main">
               <a:ext uri="{FF2B5EF4-FFF2-40B4-BE49-F238E27FC236}">
-                <a16:creationId xmlns:a16="http://schemas.microsoft.com/office/drawing/2014/main" id="{AFCF942A-F3D7-4C57-AC3E-6C7FA2D6025A}"/>
+                <a16:creationId xmlns:a16="http://schemas.microsoft.com/office/drawing/2014/main" id="{48D643F9-920F-4876-A630-44B1F545287C}"/>
               </a:ext>
             </a:extLst>
           </p:cNvPr>
@@ -22258,7 +22380,7 @@
     </p:spTree>
     <p:extLst>
       <p:ext uri="{BB962C8B-B14F-4D97-AF65-F5344CB8AC3E}">
-        <p14:creationId xmlns:p14="http://schemas.microsoft.com/office/powerpoint/2010/main" val="1931204189"/>
+        <p14:creationId xmlns:p14="http://schemas.microsoft.com/office/powerpoint/2010/main" val="233159552"/>
       </p:ext>
     </p:extLst>
   </p:cSld>

--- a/static/audit_presentation_btg.pptx
+++ b/static/audit_presentation_btg.pptx
@@ -2,25 +2,25 @@
 <file path=ppt/presentation.xml><?xml version="1.0" encoding="utf-8"?>
 <p:presentation xmlns:p="http://schemas.openxmlformats.org/presentationml/2006/main">
   <p:sldMasterIdLst>
-    <p:sldMasterId xmlns:r="http://schemas.openxmlformats.org/officeDocument/2006/relationships" id="2147483648" r:id="R7116e19b34284bf2"/>
+    <p:sldMasterId xmlns:r="http://schemas.openxmlformats.org/officeDocument/2006/relationships" id="2147483648" r:id="Raa21ee96f7934f54"/>
   </p:sldMasterIdLst>
   <p:notesMasterIdLst>
-    <p:notesMasterId xmlns:r="http://schemas.openxmlformats.org/officeDocument/2006/relationships" r:id="R84002e4caeeb4ea5"/>
+    <p:notesMasterId xmlns:r="http://schemas.openxmlformats.org/officeDocument/2006/relationships" r:id="R8e094d5400184e84"/>
   </p:notesMasterIdLst>
   <p:sldIdLst>
-    <p:sldId xmlns:r="http://schemas.openxmlformats.org/officeDocument/2006/relationships" id="256" r:id="R568ebedcddf742ff"/>
-    <p:sldId xmlns:r="http://schemas.openxmlformats.org/officeDocument/2006/relationships" id="257" r:id="R42fb5afdb79c4028"/>
-    <p:sldId xmlns:r="http://schemas.openxmlformats.org/officeDocument/2006/relationships" id="258" r:id="Rc7a7a0b7299b4c17"/>
-    <p:sldId xmlns:r="http://schemas.openxmlformats.org/officeDocument/2006/relationships" id="259" r:id="R8e096944493640ec"/>
-    <p:sldId xmlns:r="http://schemas.openxmlformats.org/officeDocument/2006/relationships" id="260" r:id="R512d34dbb6cd4e26"/>
-    <p:sldId xmlns:r="http://schemas.openxmlformats.org/officeDocument/2006/relationships" id="261" r:id="Rce8a1c7606cf4cfe"/>
-    <p:sldId xmlns:r="http://schemas.openxmlformats.org/officeDocument/2006/relationships" id="262" r:id="R08c07692ff974e7b"/>
-    <p:sldId xmlns:r="http://schemas.openxmlformats.org/officeDocument/2006/relationships" id="263" r:id="R1c861b5c9c7b4482"/>
-    <p:sldId xmlns:r="http://schemas.openxmlformats.org/officeDocument/2006/relationships" id="264" r:id="Rbb8e02ea06a043aa"/>
-    <p:sldId xmlns:r="http://schemas.openxmlformats.org/officeDocument/2006/relationships" id="265" r:id="R87102672edd14962"/>
-    <p:sldId xmlns:r="http://schemas.openxmlformats.org/officeDocument/2006/relationships" id="266" r:id="R454d2b4da4f14e8c"/>
-    <p:sldId xmlns:r="http://schemas.openxmlformats.org/officeDocument/2006/relationships" id="267" r:id="R2910281836c546de"/>
-    <p:sldId xmlns:r="http://schemas.openxmlformats.org/officeDocument/2006/relationships" id="268" r:id="Rdcb4d926f06d4a09"/>
+    <p:sldId xmlns:r="http://schemas.openxmlformats.org/officeDocument/2006/relationships" id="256" r:id="R9a06513a3cfd4750"/>
+    <p:sldId xmlns:r="http://schemas.openxmlformats.org/officeDocument/2006/relationships" id="257" r:id="Rc7588171560c4098"/>
+    <p:sldId xmlns:r="http://schemas.openxmlformats.org/officeDocument/2006/relationships" id="258" r:id="R2cb07ed0307a4021"/>
+    <p:sldId xmlns:r="http://schemas.openxmlformats.org/officeDocument/2006/relationships" id="259" r:id="R39bd52957246482e"/>
+    <p:sldId xmlns:r="http://schemas.openxmlformats.org/officeDocument/2006/relationships" id="260" r:id="Rf5cfe13f54f64a4f"/>
+    <p:sldId xmlns:r="http://schemas.openxmlformats.org/officeDocument/2006/relationships" id="261" r:id="R4c212deff81d4a88"/>
+    <p:sldId xmlns:r="http://schemas.openxmlformats.org/officeDocument/2006/relationships" id="262" r:id="Rfcab83bce36b4a93"/>
+    <p:sldId xmlns:r="http://schemas.openxmlformats.org/officeDocument/2006/relationships" id="263" r:id="R2a80efd113944bd9"/>
+    <p:sldId xmlns:r="http://schemas.openxmlformats.org/officeDocument/2006/relationships" id="264" r:id="Re95c3d0cd6524826"/>
+    <p:sldId xmlns:r="http://schemas.openxmlformats.org/officeDocument/2006/relationships" id="265" r:id="Rdbe307845d344204"/>
+    <p:sldId xmlns:r="http://schemas.openxmlformats.org/officeDocument/2006/relationships" id="266" r:id="R2096c5951c3c4a79"/>
+    <p:sldId xmlns:r="http://schemas.openxmlformats.org/officeDocument/2006/relationships" id="267" r:id="R02dac3d398074c02"/>
+    <p:sldId xmlns:r="http://schemas.openxmlformats.org/officeDocument/2006/relationships" id="268" r:id="R7c9baa24c1a34b3b"/>
   </p:sldIdLst>
   <p:sldSz cx="12192000" cy="6858000"/>
   <p:notesSz cx="6858000" cy="9144000"/>
@@ -1405,7 +1405,7 @@
   </p:cSld>
   <p:clrMap bg1="lt1" tx1="dk1" bg2="lt2" tx2="dk2" accent1="accent1" accent2="accent2" accent3="accent3" accent4="accent4" accent5="accent5" accent6="accent6" hlink="hlink" folHlink="folHlink"/>
   <p:sldLayoutIdLst>
-    <p:sldLayoutId xmlns:r="http://schemas.openxmlformats.org/officeDocument/2006/relationships" id="2147483649" r:id="R920c299df4f0404d"/>
+    <p:sldLayoutId xmlns:r="http://schemas.openxmlformats.org/officeDocument/2006/relationships" id="2147483649" r:id="R2f2d9c33c8cd48a4"/>
   </p:sldLayoutIdLst>
   <p:txStyles>
     <p:titleStyle>
@@ -1956,7 +1956,7 @@
           <p:cNvPr id="1" name="">
             <a:extLst xmlns:a="http://schemas.openxmlformats.org/drawingml/2006/main">
               <a:ext uri="{FF2B5EF4-FFF2-40B4-BE49-F238E27FC236}">
-                <a16:creationId xmlns:a16="http://schemas.microsoft.com/office/drawing/2014/main" id="{4FB47518-41AA-4B90-A7CE-3CF8C18443E3}"/>
+                <a16:creationId xmlns:a16="http://schemas.microsoft.com/office/drawing/2014/main" id="{057C95B7-1758-49DF-96EC-C4D608E4F1E6}"/>
               </a:ext>
             </a:extLst>
           </p:cNvPr>
@@ -1987,7 +1987,7 @@
           <p:cNvPr id="2" name="">
             <a:extLst xmlns:a="http://schemas.openxmlformats.org/drawingml/2006/main">
               <a:ext uri="{FF2B5EF4-FFF2-40B4-BE49-F238E27FC236}">
-                <a16:creationId xmlns:a16="http://schemas.microsoft.com/office/drawing/2014/main" id="{3A6A9011-D9B9-4973-917A-8C6AAE9505A8}"/>
+                <a16:creationId xmlns:a16="http://schemas.microsoft.com/office/drawing/2014/main" id="{09C5D383-58C3-492C-97CD-9AD03C56CC3B}"/>
               </a:ext>
             </a:extLst>
           </p:cNvPr>
@@ -2022,7 +2022,7 @@
           <p:nvPr/>
         </p:nvPicPr>
         <p:blipFill>
-          <a:blip xmlns:r="http://schemas.openxmlformats.org/officeDocument/2006/relationships" xmlns:a="http://schemas.openxmlformats.org/drawingml/2006/main" r:embed="Reabdf44747554d60"/>
+          <a:blip xmlns:r="http://schemas.openxmlformats.org/officeDocument/2006/relationships" xmlns:a="http://schemas.openxmlformats.org/drawingml/2006/main" r:embed="R07d6caf2f18c4fef"/>
           <a:srcRect xmlns:a="http://schemas.openxmlformats.org/drawingml/2006/main" l="0" t="11037" r="0" b="11037"/>
           <a:stretch xmlns:a="http://schemas.openxmlformats.org/drawingml/2006/main">
             <a:fillRect l="0" t="0" r="0" b="0"/>
@@ -2043,7 +2043,7 @@
           <p:cNvPr id="4" name="">
             <a:extLst xmlns:a="http://schemas.openxmlformats.org/drawingml/2006/main">
               <a:ext uri="{FF2B5EF4-FFF2-40B4-BE49-F238E27FC236}">
-                <a16:creationId xmlns:a16="http://schemas.microsoft.com/office/drawing/2014/main" id="{92616962-0C75-4391-AB13-BA381031BF42}"/>
+                <a16:creationId xmlns:a16="http://schemas.microsoft.com/office/drawing/2014/main" id="{2ACBF6EB-85D5-4FBB-87F1-80F2E3EAAEC8}"/>
               </a:ext>
             </a:extLst>
           </p:cNvPr>
@@ -2078,7 +2078,7 @@
           <p:nvPr/>
         </p:nvPicPr>
         <p:blipFill>
-          <a:blip xmlns:r="http://schemas.openxmlformats.org/officeDocument/2006/relationships" xmlns:a="http://schemas.openxmlformats.org/drawingml/2006/main" r:embed="Rc7782ab649d74f71"/>
+          <a:blip xmlns:r="http://schemas.openxmlformats.org/officeDocument/2006/relationships" xmlns:a="http://schemas.openxmlformats.org/drawingml/2006/main" r:embed="R8c1f2e9d564c41ee"/>
           <a:stretch xmlns:a="http://schemas.openxmlformats.org/drawingml/2006/main"/>
         </p:blipFill>
         <p:spPr>
@@ -2096,7 +2096,7 @@
           <p:cNvPr id="6" name="">
             <a:extLst xmlns:a="http://schemas.openxmlformats.org/drawingml/2006/main">
               <a:ext uri="{FF2B5EF4-FFF2-40B4-BE49-F238E27FC236}">
-                <a16:creationId xmlns:a16="http://schemas.microsoft.com/office/drawing/2014/main" id="{5B5CA857-44E5-4C7D-913E-D463AC0864C0}"/>
+                <a16:creationId xmlns:a16="http://schemas.microsoft.com/office/drawing/2014/main" id="{ED10FDF6-92E5-4449-A20C-A108960A5161}"/>
               </a:ext>
             </a:extLst>
           </p:cNvPr>
@@ -2146,7 +2146,7 @@
           <p:cNvPr id="7" name="">
             <a:extLst xmlns:a="http://schemas.openxmlformats.org/drawingml/2006/main">
               <a:ext uri="{FF2B5EF4-FFF2-40B4-BE49-F238E27FC236}">
-                <a16:creationId xmlns:a16="http://schemas.microsoft.com/office/drawing/2014/main" id="{F3E4A969-3528-4DEC-B8E1-CFDE8E76971D}"/>
+                <a16:creationId xmlns:a16="http://schemas.microsoft.com/office/drawing/2014/main" id="{7CE60018-7E65-4458-A4D0-CD7DA1F76A82}"/>
               </a:ext>
             </a:extLst>
           </p:cNvPr>
@@ -2196,7 +2196,7 @@
           <p:cNvPr id="8" name="">
             <a:extLst xmlns:a="http://schemas.openxmlformats.org/drawingml/2006/main">
               <a:ext uri="{FF2B5EF4-FFF2-40B4-BE49-F238E27FC236}">
-                <a16:creationId xmlns:a16="http://schemas.microsoft.com/office/drawing/2014/main" id="{434F2AEE-C967-46C6-A926-FD17656486BA}"/>
+                <a16:creationId xmlns:a16="http://schemas.microsoft.com/office/drawing/2014/main" id="{4FA485FA-6B66-4547-A027-52692F9A524C}"/>
               </a:ext>
             </a:extLst>
           </p:cNvPr>
@@ -2246,7 +2246,7 @@
           <p:cNvPr id="9" name="">
             <a:extLst xmlns:a="http://schemas.openxmlformats.org/drawingml/2006/main">
               <a:ext uri="{FF2B5EF4-FFF2-40B4-BE49-F238E27FC236}">
-                <a16:creationId xmlns:a16="http://schemas.microsoft.com/office/drawing/2014/main" id="{C717A8BC-E416-4D8F-85A9-240CB0505652}"/>
+                <a16:creationId xmlns:a16="http://schemas.microsoft.com/office/drawing/2014/main" id="{573E918D-4BF0-478E-A4F3-0727660178CE}"/>
               </a:ext>
             </a:extLst>
           </p:cNvPr>
@@ -2281,7 +2281,7 @@
           <p:cNvPr id="10" name="">
             <a:extLst xmlns:a="http://schemas.openxmlformats.org/drawingml/2006/main">
               <a:ext uri="{FF2B5EF4-FFF2-40B4-BE49-F238E27FC236}">
-                <a16:creationId xmlns:a16="http://schemas.microsoft.com/office/drawing/2014/main" id="{143DF025-8FE8-4FC2-9375-C1A22DF7D7BF}"/>
+                <a16:creationId xmlns:a16="http://schemas.microsoft.com/office/drawing/2014/main" id="{59E80A06-F08D-4E05-8D9F-EEB6EBEF065A}"/>
               </a:ext>
             </a:extLst>
           </p:cNvPr>
@@ -2331,7 +2331,7 @@
           <p:cNvPr id="11" name="">
             <a:extLst xmlns:a="http://schemas.openxmlformats.org/drawingml/2006/main">
               <a:ext uri="{FF2B5EF4-FFF2-40B4-BE49-F238E27FC236}">
-                <a16:creationId xmlns:a16="http://schemas.microsoft.com/office/drawing/2014/main" id="{A28471E3-A009-4D45-B7DA-C406EE3AD335}"/>
+                <a16:creationId xmlns:a16="http://schemas.microsoft.com/office/drawing/2014/main" id="{851616D1-4EE0-4D10-876A-490CB5FE0BA5}"/>
               </a:ext>
             </a:extLst>
           </p:cNvPr>
@@ -2381,7 +2381,7 @@
           <p:cNvPr id="12" name="">
             <a:extLst xmlns:a="http://schemas.openxmlformats.org/drawingml/2006/main">
               <a:ext uri="{FF2B5EF4-FFF2-40B4-BE49-F238E27FC236}">
-                <a16:creationId xmlns:a16="http://schemas.microsoft.com/office/drawing/2014/main" id="{44842FB7-33E7-48D0-9436-F03A63C64819}"/>
+                <a16:creationId xmlns:a16="http://schemas.microsoft.com/office/drawing/2014/main" id="{A685015D-07AC-4757-B30F-4550CFAF1F8A}"/>
               </a:ext>
             </a:extLst>
           </p:cNvPr>
@@ -2416,7 +2416,7 @@
           <p:cNvPr id="13" name="">
             <a:extLst xmlns:a="http://schemas.openxmlformats.org/drawingml/2006/main">
               <a:ext uri="{FF2B5EF4-FFF2-40B4-BE49-F238E27FC236}">
-                <a16:creationId xmlns:a16="http://schemas.microsoft.com/office/drawing/2014/main" id="{499C1205-FB02-46D6-8AF4-F46286DD8984}"/>
+                <a16:creationId xmlns:a16="http://schemas.microsoft.com/office/drawing/2014/main" id="{8A54B998-1460-4EF5-B8DD-DEDE61B2D21A}"/>
               </a:ext>
             </a:extLst>
           </p:cNvPr>
@@ -2466,7 +2466,7 @@
           <p:cNvPr id="14" name="">
             <a:extLst xmlns:a="http://schemas.openxmlformats.org/drawingml/2006/main">
               <a:ext uri="{FF2B5EF4-FFF2-40B4-BE49-F238E27FC236}">
-                <a16:creationId xmlns:a16="http://schemas.microsoft.com/office/drawing/2014/main" id="{70CE8FA6-2446-43F8-907F-83324F6E5C58}"/>
+                <a16:creationId xmlns:a16="http://schemas.microsoft.com/office/drawing/2014/main" id="{183D833D-3801-4984-A841-F71303CCE161}"/>
               </a:ext>
             </a:extLst>
           </p:cNvPr>
@@ -2516,7 +2516,7 @@
           <p:cNvPr id="15" name="">
             <a:extLst xmlns:a="http://schemas.openxmlformats.org/drawingml/2006/main">
               <a:ext uri="{FF2B5EF4-FFF2-40B4-BE49-F238E27FC236}">
-                <a16:creationId xmlns:a16="http://schemas.microsoft.com/office/drawing/2014/main" id="{38862981-EA44-4D4B-B7C2-7D10B2F6C8DC}"/>
+                <a16:creationId xmlns:a16="http://schemas.microsoft.com/office/drawing/2014/main" id="{65CCC509-21C1-40BC-9A22-E8FECED0CF21}"/>
               </a:ext>
             </a:extLst>
           </p:cNvPr>
@@ -2566,7 +2566,7 @@
           <p:cNvPr id="16" name="">
             <a:extLst xmlns:a="http://schemas.openxmlformats.org/drawingml/2006/main">
               <a:ext uri="{FF2B5EF4-FFF2-40B4-BE49-F238E27FC236}">
-                <a16:creationId xmlns:a16="http://schemas.microsoft.com/office/drawing/2014/main" id="{D8440ADF-CC84-4F8E-9EE2-4286AB9991CA}"/>
+                <a16:creationId xmlns:a16="http://schemas.microsoft.com/office/drawing/2014/main" id="{DE2A3B92-747D-4520-A310-45F098C13CE7}"/>
               </a:ext>
             </a:extLst>
           </p:cNvPr>
@@ -2614,7 +2614,7 @@
     </p:spTree>
     <p:extLst>
       <p:ext uri="{BB962C8B-B14F-4D97-AF65-F5344CB8AC3E}">
-        <p14:creationId xmlns:p14="http://schemas.microsoft.com/office/powerpoint/2010/main" val="524818410"/>
+        <p14:creationId xmlns:p14="http://schemas.microsoft.com/office/powerpoint/2010/main" val="1004929529"/>
       </p:ext>
     </p:extLst>
   </p:cSld>
@@ -2645,7 +2645,7 @@
           <p:cNvPr id="1" name="">
             <a:extLst xmlns:a="http://schemas.openxmlformats.org/drawingml/2006/main">
               <a:ext uri="{FF2B5EF4-FFF2-40B4-BE49-F238E27FC236}">
-                <a16:creationId xmlns:a16="http://schemas.microsoft.com/office/drawing/2014/main" id="{E34F7613-3B22-4AB8-A0C9-705905867FCF}"/>
+                <a16:creationId xmlns:a16="http://schemas.microsoft.com/office/drawing/2014/main" id="{5555999E-4945-4E85-A086-A4F5F40556C4}"/>
               </a:ext>
             </a:extLst>
           </p:cNvPr>
@@ -2680,7 +2680,7 @@
           <p:nvPr/>
         </p:nvPicPr>
         <p:blipFill>
-          <a:blip xmlns:r="http://schemas.openxmlformats.org/officeDocument/2006/relationships" xmlns:a="http://schemas.openxmlformats.org/drawingml/2006/main" r:embed="Rcc830b5a1ffc4745"/>
+          <a:blip xmlns:r="http://schemas.openxmlformats.org/officeDocument/2006/relationships" xmlns:a="http://schemas.openxmlformats.org/drawingml/2006/main" r:embed="R5053c05f93dc4797"/>
           <a:stretch xmlns:a="http://schemas.openxmlformats.org/drawingml/2006/main"/>
         </p:blipFill>
         <p:spPr>
@@ -2698,7 +2698,7 @@
           <p:cNvPr id="3" name="">
             <a:extLst xmlns:a="http://schemas.openxmlformats.org/drawingml/2006/main">
               <a:ext uri="{FF2B5EF4-FFF2-40B4-BE49-F238E27FC236}">
-                <a16:creationId xmlns:a16="http://schemas.microsoft.com/office/drawing/2014/main" id="{AF04C09C-6338-4D43-BC66-C5E968883E46}"/>
+                <a16:creationId xmlns:a16="http://schemas.microsoft.com/office/drawing/2014/main" id="{BDCDEC67-8779-48FC-BEF6-060C41E4E569}"/>
               </a:ext>
             </a:extLst>
           </p:cNvPr>
@@ -2748,7 +2748,7 @@
           <p:cNvPr id="4" name="">
             <a:extLst xmlns:a="http://schemas.openxmlformats.org/drawingml/2006/main">
               <a:ext uri="{FF2B5EF4-FFF2-40B4-BE49-F238E27FC236}">
-                <a16:creationId xmlns:a16="http://schemas.microsoft.com/office/drawing/2014/main" id="{29D878AF-41A6-4836-83CF-10C093713237}"/>
+                <a16:creationId xmlns:a16="http://schemas.microsoft.com/office/drawing/2014/main" id="{7E1DC3D6-53C8-4165-9B2A-2C8638EE7024}"/>
               </a:ext>
             </a:extLst>
           </p:cNvPr>
@@ -2781,7 +2781,7 @@
           <p:cNvPr id="5" name="">
             <a:extLst xmlns:a="http://schemas.openxmlformats.org/drawingml/2006/main">
               <a:ext uri="{FF2B5EF4-FFF2-40B4-BE49-F238E27FC236}">
-                <a16:creationId xmlns:a16="http://schemas.microsoft.com/office/drawing/2014/main" id="{86D9E732-148B-4A03-80E1-AFE14917BC88}"/>
+                <a16:creationId xmlns:a16="http://schemas.microsoft.com/office/drawing/2014/main" id="{E437BCB4-52FA-4F94-81BC-B17AD63B56E9}"/>
               </a:ext>
             </a:extLst>
           </p:cNvPr>
@@ -2812,7 +2812,7 @@
           <p:cNvPr id="6" name="">
             <a:extLst xmlns:a="http://schemas.openxmlformats.org/drawingml/2006/main">
               <a:ext uri="{FF2B5EF4-FFF2-40B4-BE49-F238E27FC236}">
-                <a16:creationId xmlns:a16="http://schemas.microsoft.com/office/drawing/2014/main" id="{CB6C116B-D8CD-47B3-9E15-4BA3CA79719A}"/>
+                <a16:creationId xmlns:a16="http://schemas.microsoft.com/office/drawing/2014/main" id="{22C6A4F0-2041-48E8-BAA8-F6AF7C92D8B1}"/>
               </a:ext>
             </a:extLst>
           </p:cNvPr>
@@ -2862,7 +2862,7 @@
           <p:cNvPr id="7" name="">
             <a:extLst xmlns:a="http://schemas.openxmlformats.org/drawingml/2006/main">
               <a:ext uri="{FF2B5EF4-FFF2-40B4-BE49-F238E27FC236}">
-                <a16:creationId xmlns:a16="http://schemas.microsoft.com/office/drawing/2014/main" id="{1FB84F05-81BE-485E-85DD-71785F2161EF}"/>
+                <a16:creationId xmlns:a16="http://schemas.microsoft.com/office/drawing/2014/main" id="{EF0DE739-1AB2-44C6-B2CC-294ED6D2C0EE}"/>
               </a:ext>
             </a:extLst>
           </p:cNvPr>
@@ -2912,7 +2912,7 @@
           <p:cNvPr id="8" name="">
             <a:extLst xmlns:a="http://schemas.openxmlformats.org/drawingml/2006/main">
               <a:ext uri="{FF2B5EF4-FFF2-40B4-BE49-F238E27FC236}">
-                <a16:creationId xmlns:a16="http://schemas.microsoft.com/office/drawing/2014/main" id="{C56227E1-EBF1-4BA5-93D3-7FA5E24E97A4}"/>
+                <a16:creationId xmlns:a16="http://schemas.microsoft.com/office/drawing/2014/main" id="{74F67005-4B40-4FF1-8CEB-E1D7B15D98C7}"/>
               </a:ext>
             </a:extLst>
           </p:cNvPr>
@@ -2947,7 +2947,7 @@
           <p:cNvPr id="9" name="">
             <a:extLst xmlns:a="http://schemas.openxmlformats.org/drawingml/2006/main">
               <a:ext uri="{FF2B5EF4-FFF2-40B4-BE49-F238E27FC236}">
-                <a16:creationId xmlns:a16="http://schemas.microsoft.com/office/drawing/2014/main" id="{0D2C072E-60B6-4BEA-AA29-18CB3172ED2F}"/>
+                <a16:creationId xmlns:a16="http://schemas.microsoft.com/office/drawing/2014/main" id="{CE7AB94E-867A-4295-AB4B-45DD4A1DEE74}"/>
               </a:ext>
             </a:extLst>
           </p:cNvPr>
@@ -2980,7 +2980,7 @@
           <p:cNvPr id="10" name="">
             <a:extLst xmlns:a="http://schemas.openxmlformats.org/drawingml/2006/main">
               <a:ext uri="{FF2B5EF4-FFF2-40B4-BE49-F238E27FC236}">
-                <a16:creationId xmlns:a16="http://schemas.microsoft.com/office/drawing/2014/main" id="{D6042921-A273-496D-BF16-1D148089B20B}"/>
+                <a16:creationId xmlns:a16="http://schemas.microsoft.com/office/drawing/2014/main" id="{91B3746C-3555-40A3-AD35-BACB53CD5CD6}"/>
               </a:ext>
             </a:extLst>
           </p:cNvPr>
@@ -3030,7 +3030,7 @@
           <p:cNvPr id="11" name="">
             <a:extLst xmlns:a="http://schemas.openxmlformats.org/drawingml/2006/main">
               <a:ext uri="{FF2B5EF4-FFF2-40B4-BE49-F238E27FC236}">
-                <a16:creationId xmlns:a16="http://schemas.microsoft.com/office/drawing/2014/main" id="{CC0474C5-95D1-4A20-B6E4-21434BC1A35F}"/>
+                <a16:creationId xmlns:a16="http://schemas.microsoft.com/office/drawing/2014/main" id="{2D8ABE4E-0BFE-49B3-BC66-DAB850BC6122}"/>
               </a:ext>
             </a:extLst>
           </p:cNvPr>
@@ -3080,7 +3080,7 @@
           <p:cNvPr id="12" name="">
             <a:extLst xmlns:a="http://schemas.openxmlformats.org/drawingml/2006/main">
               <a:ext uri="{FF2B5EF4-FFF2-40B4-BE49-F238E27FC236}">
-                <a16:creationId xmlns:a16="http://schemas.microsoft.com/office/drawing/2014/main" id="{01AD5BB9-A107-479A-B515-4391B3E578D1}"/>
+                <a16:creationId xmlns:a16="http://schemas.microsoft.com/office/drawing/2014/main" id="{78192A28-E918-4B1E-A123-5A9687FE4A93}"/>
               </a:ext>
             </a:extLst>
           </p:cNvPr>
@@ -3130,7 +3130,7 @@
           <p:cNvPr id="13" name="">
             <a:extLst xmlns:a="http://schemas.openxmlformats.org/drawingml/2006/main">
               <a:ext uri="{FF2B5EF4-FFF2-40B4-BE49-F238E27FC236}">
-                <a16:creationId xmlns:a16="http://schemas.microsoft.com/office/drawing/2014/main" id="{EF5D88BF-F2BB-4BEA-8B2E-005D7EBEBA4A}"/>
+                <a16:creationId xmlns:a16="http://schemas.microsoft.com/office/drawing/2014/main" id="{8274F76A-6A4E-44D6-9BEC-CFBB77EEEF48}"/>
               </a:ext>
             </a:extLst>
           </p:cNvPr>
@@ -3180,7 +3180,7 @@
           <p:cNvPr id="14" name="">
             <a:extLst xmlns:a="http://schemas.openxmlformats.org/drawingml/2006/main">
               <a:ext uri="{FF2B5EF4-FFF2-40B4-BE49-F238E27FC236}">
-                <a16:creationId xmlns:a16="http://schemas.microsoft.com/office/drawing/2014/main" id="{038D1C43-B04F-49A8-B314-0BF9CA5F43AA}"/>
+                <a16:creationId xmlns:a16="http://schemas.microsoft.com/office/drawing/2014/main" id="{F98BBB1C-D96C-4893-A95D-68FF103A4656}"/>
               </a:ext>
             </a:extLst>
           </p:cNvPr>
@@ -3230,7 +3230,7 @@
           <p:cNvPr id="15" name="">
             <a:extLst xmlns:a="http://schemas.openxmlformats.org/drawingml/2006/main">
               <a:ext uri="{FF2B5EF4-FFF2-40B4-BE49-F238E27FC236}">
-                <a16:creationId xmlns:a16="http://schemas.microsoft.com/office/drawing/2014/main" id="{CE81976B-5B31-4877-A547-F1C19116212D}"/>
+                <a16:creationId xmlns:a16="http://schemas.microsoft.com/office/drawing/2014/main" id="{B3DD81AF-25E0-471A-AFC1-52671DCFFE37}"/>
               </a:ext>
             </a:extLst>
           </p:cNvPr>
@@ -3280,7 +3280,7 @@
           <p:cNvPr id="16" name="">
             <a:extLst xmlns:a="http://schemas.openxmlformats.org/drawingml/2006/main">
               <a:ext uri="{FF2B5EF4-FFF2-40B4-BE49-F238E27FC236}">
-                <a16:creationId xmlns:a16="http://schemas.microsoft.com/office/drawing/2014/main" id="{A8227C9F-171B-4BFF-B2DC-025B67712360}"/>
+                <a16:creationId xmlns:a16="http://schemas.microsoft.com/office/drawing/2014/main" id="{8036FE23-CC86-4FC9-A722-6C9EA9BA4967}"/>
               </a:ext>
             </a:extLst>
           </p:cNvPr>
@@ -3330,7 +3330,7 @@
           <p:cNvPr id="17" name="">
             <a:extLst xmlns:a="http://schemas.openxmlformats.org/drawingml/2006/main">
               <a:ext uri="{FF2B5EF4-FFF2-40B4-BE49-F238E27FC236}">
-                <a16:creationId xmlns:a16="http://schemas.microsoft.com/office/drawing/2014/main" id="{95D1684A-EAF0-4BAF-AFE8-870A06C343B0}"/>
+                <a16:creationId xmlns:a16="http://schemas.microsoft.com/office/drawing/2014/main" id="{2314A961-982D-4885-8122-8FA0604C5299}"/>
               </a:ext>
             </a:extLst>
           </p:cNvPr>
@@ -3361,7 +3361,7 @@
           <p:cNvPr id="18" name="">
             <a:extLst xmlns:a="http://schemas.openxmlformats.org/drawingml/2006/main">
               <a:ext uri="{FF2B5EF4-FFF2-40B4-BE49-F238E27FC236}">
-                <a16:creationId xmlns:a16="http://schemas.microsoft.com/office/drawing/2014/main" id="{82619C9E-E940-41E7-B4B8-A5B1FA7ADEB1}"/>
+                <a16:creationId xmlns:a16="http://schemas.microsoft.com/office/drawing/2014/main" id="{080EAE5E-0BE8-4DC0-BF9D-1BF683CCFFDE}"/>
               </a:ext>
             </a:extLst>
           </p:cNvPr>
@@ -3411,7 +3411,7 @@
           <p:cNvPr id="19" name="">
             <a:extLst xmlns:a="http://schemas.openxmlformats.org/drawingml/2006/main">
               <a:ext uri="{FF2B5EF4-FFF2-40B4-BE49-F238E27FC236}">
-                <a16:creationId xmlns:a16="http://schemas.microsoft.com/office/drawing/2014/main" id="{00DE57B8-0C50-48B0-8FD9-AC1E63E29427}"/>
+                <a16:creationId xmlns:a16="http://schemas.microsoft.com/office/drawing/2014/main" id="{B2636FEE-F530-4991-A9DB-FEDA2F842BFC}"/>
               </a:ext>
             </a:extLst>
           </p:cNvPr>
@@ -3461,7 +3461,7 @@
           <p:cNvPr id="20" name="">
             <a:extLst xmlns:a="http://schemas.openxmlformats.org/drawingml/2006/main">
               <a:ext uri="{FF2B5EF4-FFF2-40B4-BE49-F238E27FC236}">
-                <a16:creationId xmlns:a16="http://schemas.microsoft.com/office/drawing/2014/main" id="{9885C50E-0EC0-4F56-93E4-46002808922D}"/>
+                <a16:creationId xmlns:a16="http://schemas.microsoft.com/office/drawing/2014/main" id="{DC48FD4F-5912-4DC6-AD98-3B91DC384143}"/>
               </a:ext>
             </a:extLst>
           </p:cNvPr>
@@ -3511,7 +3511,7 @@
           <p:cNvPr id="21" name="">
             <a:extLst xmlns:a="http://schemas.openxmlformats.org/drawingml/2006/main">
               <a:ext uri="{FF2B5EF4-FFF2-40B4-BE49-F238E27FC236}">
-                <a16:creationId xmlns:a16="http://schemas.microsoft.com/office/drawing/2014/main" id="{9481351A-C182-4BD3-AE40-58043EE7B764}"/>
+                <a16:creationId xmlns:a16="http://schemas.microsoft.com/office/drawing/2014/main" id="{647EE9F4-A2CF-4A83-BD39-C0348AA664C4}"/>
               </a:ext>
             </a:extLst>
           </p:cNvPr>
@@ -3561,7 +3561,7 @@
           <p:cNvPr id="22" name="">
             <a:extLst xmlns:a="http://schemas.openxmlformats.org/drawingml/2006/main">
               <a:ext uri="{FF2B5EF4-FFF2-40B4-BE49-F238E27FC236}">
-                <a16:creationId xmlns:a16="http://schemas.microsoft.com/office/drawing/2014/main" id="{82753D78-F357-470D-A857-9C10D070BD60}"/>
+                <a16:creationId xmlns:a16="http://schemas.microsoft.com/office/drawing/2014/main" id="{AA2C23E2-5C35-4B63-813E-EA26FED167D9}"/>
               </a:ext>
             </a:extLst>
           </p:cNvPr>
@@ -3611,7 +3611,7 @@
           <p:cNvPr id="23" name="">
             <a:extLst xmlns:a="http://schemas.openxmlformats.org/drawingml/2006/main">
               <a:ext uri="{FF2B5EF4-FFF2-40B4-BE49-F238E27FC236}">
-                <a16:creationId xmlns:a16="http://schemas.microsoft.com/office/drawing/2014/main" id="{088809A8-8D4B-4188-8649-F115436A3460}"/>
+                <a16:creationId xmlns:a16="http://schemas.microsoft.com/office/drawing/2014/main" id="{AC22D901-49A0-4B91-A104-C850769564E0}"/>
               </a:ext>
             </a:extLst>
           </p:cNvPr>
@@ -3661,7 +3661,7 @@
           <p:cNvPr id="24" name="">
             <a:extLst xmlns:a="http://schemas.openxmlformats.org/drawingml/2006/main">
               <a:ext uri="{FF2B5EF4-FFF2-40B4-BE49-F238E27FC236}">
-                <a16:creationId xmlns:a16="http://schemas.microsoft.com/office/drawing/2014/main" id="{D8223067-426A-41FE-94E8-EDDC7CA6A4EC}"/>
+                <a16:creationId xmlns:a16="http://schemas.microsoft.com/office/drawing/2014/main" id="{55DF7EB6-4989-4353-B862-082A3FA46E01}"/>
               </a:ext>
             </a:extLst>
           </p:cNvPr>
@@ -3696,7 +3696,7 @@
           <p:cNvPr id="25" name="">
             <a:extLst xmlns:a="http://schemas.openxmlformats.org/drawingml/2006/main">
               <a:ext uri="{FF2B5EF4-FFF2-40B4-BE49-F238E27FC236}">
-                <a16:creationId xmlns:a16="http://schemas.microsoft.com/office/drawing/2014/main" id="{7E7717FD-609D-42BA-9EB8-A48AFCB2FE9C}"/>
+                <a16:creationId xmlns:a16="http://schemas.microsoft.com/office/drawing/2014/main" id="{E3EADDC8-32DD-4D4D-BFFB-9E89260515F4}"/>
               </a:ext>
             </a:extLst>
           </p:cNvPr>
@@ -3729,7 +3729,7 @@
           <p:cNvPr id="26" name="">
             <a:extLst xmlns:a="http://schemas.openxmlformats.org/drawingml/2006/main">
               <a:ext uri="{FF2B5EF4-FFF2-40B4-BE49-F238E27FC236}">
-                <a16:creationId xmlns:a16="http://schemas.microsoft.com/office/drawing/2014/main" id="{E24B92EA-6E67-468C-9DED-31038E61F397}"/>
+                <a16:creationId xmlns:a16="http://schemas.microsoft.com/office/drawing/2014/main" id="{3F29E33C-8BC5-4264-AAAB-8E2A23FFCDB5}"/>
               </a:ext>
             </a:extLst>
           </p:cNvPr>
@@ -3779,7 +3779,7 @@
           <p:cNvPr id="27" name="">
             <a:extLst xmlns:a="http://schemas.openxmlformats.org/drawingml/2006/main">
               <a:ext uri="{FF2B5EF4-FFF2-40B4-BE49-F238E27FC236}">
-                <a16:creationId xmlns:a16="http://schemas.microsoft.com/office/drawing/2014/main" id="{6F19068E-4A31-4527-B615-CAB85B3BC5E5}"/>
+                <a16:creationId xmlns:a16="http://schemas.microsoft.com/office/drawing/2014/main" id="{1ECF0401-2288-4ADC-A97A-3D5423518A57}"/>
               </a:ext>
             </a:extLst>
           </p:cNvPr>
@@ -3829,7 +3829,7 @@
           <p:cNvPr id="28" name="">
             <a:extLst xmlns:a="http://schemas.openxmlformats.org/drawingml/2006/main">
               <a:ext uri="{FF2B5EF4-FFF2-40B4-BE49-F238E27FC236}">
-                <a16:creationId xmlns:a16="http://schemas.microsoft.com/office/drawing/2014/main" id="{FF089F4C-69B0-4CD6-A627-879F91D92808}"/>
+                <a16:creationId xmlns:a16="http://schemas.microsoft.com/office/drawing/2014/main" id="{710BD6E7-20CB-495A-8006-90F078AF64EB}"/>
               </a:ext>
             </a:extLst>
           </p:cNvPr>
@@ -3879,7 +3879,7 @@
           <p:cNvPr id="29" name="">
             <a:extLst xmlns:a="http://schemas.openxmlformats.org/drawingml/2006/main">
               <a:ext uri="{FF2B5EF4-FFF2-40B4-BE49-F238E27FC236}">
-                <a16:creationId xmlns:a16="http://schemas.microsoft.com/office/drawing/2014/main" id="{0956F443-5240-4AA3-A257-343CD54E5289}"/>
+                <a16:creationId xmlns:a16="http://schemas.microsoft.com/office/drawing/2014/main" id="{9E558BB1-B53B-4499-A559-97C8B36B3B3C}"/>
               </a:ext>
             </a:extLst>
           </p:cNvPr>
@@ -3929,7 +3929,7 @@
           <p:cNvPr id="30" name="">
             <a:extLst xmlns:a="http://schemas.openxmlformats.org/drawingml/2006/main">
               <a:ext uri="{FF2B5EF4-FFF2-40B4-BE49-F238E27FC236}">
-                <a16:creationId xmlns:a16="http://schemas.microsoft.com/office/drawing/2014/main" id="{4FF52119-2FF6-49F2-9343-EF5D24A22138}"/>
+                <a16:creationId xmlns:a16="http://schemas.microsoft.com/office/drawing/2014/main" id="{98A941EB-010C-4880-8EF8-0CBF1FEFCEAC}"/>
               </a:ext>
             </a:extLst>
           </p:cNvPr>
@@ -3979,7 +3979,7 @@
           <p:cNvPr id="31" name="">
             <a:extLst xmlns:a="http://schemas.openxmlformats.org/drawingml/2006/main">
               <a:ext uri="{FF2B5EF4-FFF2-40B4-BE49-F238E27FC236}">
-                <a16:creationId xmlns:a16="http://schemas.microsoft.com/office/drawing/2014/main" id="{009AD464-F315-4372-A18C-D7456ECAF3F6}"/>
+                <a16:creationId xmlns:a16="http://schemas.microsoft.com/office/drawing/2014/main" id="{A8184940-B1F6-48B1-A9BD-6D44C17BDD93}"/>
               </a:ext>
             </a:extLst>
           </p:cNvPr>
@@ -4029,7 +4029,7 @@
           <p:cNvPr id="32" name="">
             <a:extLst xmlns:a="http://schemas.openxmlformats.org/drawingml/2006/main">
               <a:ext uri="{FF2B5EF4-FFF2-40B4-BE49-F238E27FC236}">
-                <a16:creationId xmlns:a16="http://schemas.microsoft.com/office/drawing/2014/main" id="{F7D87380-A442-433E-8ACF-47A54E46ACBF}"/>
+                <a16:creationId xmlns:a16="http://schemas.microsoft.com/office/drawing/2014/main" id="{BE410A87-CDFE-4849-8F07-4CB0BDCA4A6B}"/>
               </a:ext>
             </a:extLst>
           </p:cNvPr>
@@ -4079,7 +4079,7 @@
           <p:cNvPr id="33" name="">
             <a:extLst xmlns:a="http://schemas.openxmlformats.org/drawingml/2006/main">
               <a:ext uri="{FF2B5EF4-FFF2-40B4-BE49-F238E27FC236}">
-                <a16:creationId xmlns:a16="http://schemas.microsoft.com/office/drawing/2014/main" id="{E83DF660-0B49-4502-AA20-2F3AA6CEC79C}"/>
+                <a16:creationId xmlns:a16="http://schemas.microsoft.com/office/drawing/2014/main" id="{59B1992C-3B8B-4118-A246-78DA6B5C04EF}"/>
               </a:ext>
             </a:extLst>
           </p:cNvPr>
@@ -4110,7 +4110,7 @@
           <p:cNvPr id="34" name="">
             <a:extLst xmlns:a="http://schemas.openxmlformats.org/drawingml/2006/main">
               <a:ext uri="{FF2B5EF4-FFF2-40B4-BE49-F238E27FC236}">
-                <a16:creationId xmlns:a16="http://schemas.microsoft.com/office/drawing/2014/main" id="{F78BE687-5F7C-42B6-8C93-18756569AE87}"/>
+                <a16:creationId xmlns:a16="http://schemas.microsoft.com/office/drawing/2014/main" id="{99092869-8019-4B2F-B0E5-E77176F48DAD}"/>
               </a:ext>
             </a:extLst>
           </p:cNvPr>
@@ -4160,7 +4160,7 @@
           <p:cNvPr id="35" name="">
             <a:extLst xmlns:a="http://schemas.openxmlformats.org/drawingml/2006/main">
               <a:ext uri="{FF2B5EF4-FFF2-40B4-BE49-F238E27FC236}">
-                <a16:creationId xmlns:a16="http://schemas.microsoft.com/office/drawing/2014/main" id="{169E4264-93E0-453A-B1BD-326C03CD3098}"/>
+                <a16:creationId xmlns:a16="http://schemas.microsoft.com/office/drawing/2014/main" id="{F2907A0C-F793-4E51-831A-8238D56BBC80}"/>
               </a:ext>
             </a:extLst>
           </p:cNvPr>
@@ -4210,7 +4210,7 @@
           <p:cNvPr id="36" name="">
             <a:extLst xmlns:a="http://schemas.openxmlformats.org/drawingml/2006/main">
               <a:ext uri="{FF2B5EF4-FFF2-40B4-BE49-F238E27FC236}">
-                <a16:creationId xmlns:a16="http://schemas.microsoft.com/office/drawing/2014/main" id="{1306D32F-DA79-4D2D-96C6-70959FA15198}"/>
+                <a16:creationId xmlns:a16="http://schemas.microsoft.com/office/drawing/2014/main" id="{CA55A772-0234-427C-A25B-FA31A7889537}"/>
               </a:ext>
             </a:extLst>
           </p:cNvPr>
@@ -4260,7 +4260,7 @@
           <p:cNvPr id="37" name="">
             <a:extLst xmlns:a="http://schemas.openxmlformats.org/drawingml/2006/main">
               <a:ext uri="{FF2B5EF4-FFF2-40B4-BE49-F238E27FC236}">
-                <a16:creationId xmlns:a16="http://schemas.microsoft.com/office/drawing/2014/main" id="{66E8A2BE-D11B-4433-B50F-63802192FA5B}"/>
+                <a16:creationId xmlns:a16="http://schemas.microsoft.com/office/drawing/2014/main" id="{F1ECA08E-0F90-4740-95E2-3E11827E68EB}"/>
               </a:ext>
             </a:extLst>
           </p:cNvPr>
@@ -4310,7 +4310,7 @@
           <p:cNvPr id="38" name="">
             <a:extLst xmlns:a="http://schemas.openxmlformats.org/drawingml/2006/main">
               <a:ext uri="{FF2B5EF4-FFF2-40B4-BE49-F238E27FC236}">
-                <a16:creationId xmlns:a16="http://schemas.microsoft.com/office/drawing/2014/main" id="{9F86C570-69C8-4523-BA77-33E447993F09}"/>
+                <a16:creationId xmlns:a16="http://schemas.microsoft.com/office/drawing/2014/main" id="{72D32C4E-30AA-46E2-97BB-BE2A08BDF849}"/>
               </a:ext>
             </a:extLst>
           </p:cNvPr>
@@ -4360,7 +4360,7 @@
           <p:cNvPr id="39" name="">
             <a:extLst xmlns:a="http://schemas.openxmlformats.org/drawingml/2006/main">
               <a:ext uri="{FF2B5EF4-FFF2-40B4-BE49-F238E27FC236}">
-                <a16:creationId xmlns:a16="http://schemas.microsoft.com/office/drawing/2014/main" id="{A3DF7E55-9FB8-4926-AFFA-B8A9E23D054D}"/>
+                <a16:creationId xmlns:a16="http://schemas.microsoft.com/office/drawing/2014/main" id="{32820346-1C28-4126-840B-D12816441FAF}"/>
               </a:ext>
             </a:extLst>
           </p:cNvPr>
@@ -4408,7 +4408,7 @@
     </p:spTree>
     <p:extLst>
       <p:ext uri="{BB962C8B-B14F-4D97-AF65-F5344CB8AC3E}">
-        <p14:creationId xmlns:p14="http://schemas.microsoft.com/office/powerpoint/2010/main" val="1594678875"/>
+        <p14:creationId xmlns:p14="http://schemas.microsoft.com/office/powerpoint/2010/main" val="1814351735"/>
       </p:ext>
     </p:extLst>
   </p:cSld>
@@ -4439,7 +4439,7 @@
           <p:cNvPr id="1" name="">
             <a:extLst xmlns:a="http://schemas.openxmlformats.org/drawingml/2006/main">
               <a:ext uri="{FF2B5EF4-FFF2-40B4-BE49-F238E27FC236}">
-                <a16:creationId xmlns:a16="http://schemas.microsoft.com/office/drawing/2014/main" id="{F5970F85-53DE-4C96-BC60-A0D01D5858F4}"/>
+                <a16:creationId xmlns:a16="http://schemas.microsoft.com/office/drawing/2014/main" id="{4BB7A9AB-C0C4-4500-B125-76FC068E9052}"/>
               </a:ext>
             </a:extLst>
           </p:cNvPr>
@@ -4467,14 +4467,14 @@
       </p:sp>
       <p:pic>
         <p:nvPicPr>
-          <p:cNvPr id="47" name=""/>
+          <p:cNvPr id="53" name=""/>
           <p:cNvPicPr>
             <a:picLocks xmlns:a="http://schemas.openxmlformats.org/drawingml/2006/main" noChangeAspect="1"/>
           </p:cNvPicPr>
           <p:nvPr/>
         </p:nvPicPr>
         <p:blipFill>
-          <a:blip xmlns:r="http://schemas.openxmlformats.org/officeDocument/2006/relationships" xmlns:a="http://schemas.openxmlformats.org/drawingml/2006/main" r:embed="R12304099af464ba8"/>
+          <a:blip xmlns:r="http://schemas.openxmlformats.org/officeDocument/2006/relationships" xmlns:a="http://schemas.openxmlformats.org/drawingml/2006/main" r:embed="R25835bcd83384c7b"/>
           <a:stretch xmlns:a="http://schemas.openxmlformats.org/drawingml/2006/main"/>
         </p:blipFill>
         <p:spPr>
@@ -4492,7 +4492,7 @@
           <p:cNvPr id="3" name="">
             <a:extLst xmlns:a="http://schemas.openxmlformats.org/drawingml/2006/main">
               <a:ext uri="{FF2B5EF4-FFF2-40B4-BE49-F238E27FC236}">
-                <a16:creationId xmlns:a16="http://schemas.microsoft.com/office/drawing/2014/main" id="{4F81B5D3-D226-44D6-B0AB-DCAE741C5AB4}"/>
+                <a16:creationId xmlns:a16="http://schemas.microsoft.com/office/drawing/2014/main" id="{213FB3E2-EA7E-4F90-AA06-A2EFFEC478A1}"/>
               </a:ext>
             </a:extLst>
           </p:cNvPr>
@@ -4542,7 +4542,7 @@
           <p:cNvPr id="4" name="">
             <a:extLst xmlns:a="http://schemas.openxmlformats.org/drawingml/2006/main">
               <a:ext uri="{FF2B5EF4-FFF2-40B4-BE49-F238E27FC236}">
-                <a16:creationId xmlns:a16="http://schemas.microsoft.com/office/drawing/2014/main" id="{DA2DB862-39E9-4A9B-9529-3BC98AB5798D}"/>
+                <a16:creationId xmlns:a16="http://schemas.microsoft.com/office/drawing/2014/main" id="{660EF87C-688A-4A46-B408-3D1FADFE66A3}"/>
               </a:ext>
             </a:extLst>
           </p:cNvPr>
@@ -4575,7 +4575,7 @@
           <p:cNvPr id="5" name="">
             <a:extLst xmlns:a="http://schemas.openxmlformats.org/drawingml/2006/main">
               <a:ext uri="{FF2B5EF4-FFF2-40B4-BE49-F238E27FC236}">
-                <a16:creationId xmlns:a16="http://schemas.microsoft.com/office/drawing/2014/main" id="{8AD46AA9-4357-4A0A-99DC-F6A44B6A455D}"/>
+                <a16:creationId xmlns:a16="http://schemas.microsoft.com/office/drawing/2014/main" id="{25F1F1C4-98C2-482D-88DC-3734233073EF}"/>
               </a:ext>
             </a:extLst>
           </p:cNvPr>
@@ -4606,7 +4606,7 @@
           <p:cNvPr id="6" name="">
             <a:extLst xmlns:a="http://schemas.openxmlformats.org/drawingml/2006/main">
               <a:ext uri="{FF2B5EF4-FFF2-40B4-BE49-F238E27FC236}">
-                <a16:creationId xmlns:a16="http://schemas.microsoft.com/office/drawing/2014/main" id="{8643DE32-6531-48AB-8F83-C854E3F805F4}"/>
+                <a16:creationId xmlns:a16="http://schemas.microsoft.com/office/drawing/2014/main" id="{846C33BE-5FE1-4949-9545-FC698C8F4C21}"/>
               </a:ext>
             </a:extLst>
           </p:cNvPr>
@@ -4656,7 +4656,7 @@
           <p:cNvPr id="7" name="">
             <a:extLst xmlns:a="http://schemas.openxmlformats.org/drawingml/2006/main">
               <a:ext uri="{FF2B5EF4-FFF2-40B4-BE49-F238E27FC236}">
-                <a16:creationId xmlns:a16="http://schemas.microsoft.com/office/drawing/2014/main" id="{EC61E7B0-106C-4FAB-9BDF-E2F1F1F3326D}"/>
+                <a16:creationId xmlns:a16="http://schemas.microsoft.com/office/drawing/2014/main" id="{0454B6F2-A267-4BA0-9D7D-333BA7F6C39A}"/>
               </a:ext>
             </a:extLst>
           </p:cNvPr>
@@ -4706,7 +4706,7 @@
           <p:cNvPr id="8" name="">
             <a:extLst xmlns:a="http://schemas.openxmlformats.org/drawingml/2006/main">
               <a:ext uri="{FF2B5EF4-FFF2-40B4-BE49-F238E27FC236}">
-                <a16:creationId xmlns:a16="http://schemas.microsoft.com/office/drawing/2014/main" id="{B2D5F255-A56A-4BC9-B345-230C33394C32}"/>
+                <a16:creationId xmlns:a16="http://schemas.microsoft.com/office/drawing/2014/main" id="{FFDC8AF8-8EDA-4ADC-BA0D-EB25F3FC3210}"/>
               </a:ext>
             </a:extLst>
           </p:cNvPr>
@@ -4756,7 +4756,7 @@
           <p:cNvPr id="9" name="">
             <a:extLst xmlns:a="http://schemas.openxmlformats.org/drawingml/2006/main">
               <a:ext uri="{FF2B5EF4-FFF2-40B4-BE49-F238E27FC236}">
-                <a16:creationId xmlns:a16="http://schemas.microsoft.com/office/drawing/2014/main" id="{DA71AF62-4463-4E18-A56D-2CB58BD2C06F}"/>
+                <a16:creationId xmlns:a16="http://schemas.microsoft.com/office/drawing/2014/main" id="{6DCDBCF5-FDB7-43E7-9D48-77E89E234D98}"/>
               </a:ext>
             </a:extLst>
           </p:cNvPr>
@@ -4787,7 +4787,7 @@
           <p:cNvPr id="10" name="">
             <a:extLst xmlns:a="http://schemas.openxmlformats.org/drawingml/2006/main">
               <a:ext uri="{FF2B5EF4-FFF2-40B4-BE49-F238E27FC236}">
-                <a16:creationId xmlns:a16="http://schemas.microsoft.com/office/drawing/2014/main" id="{249A8E12-7F9C-45EB-A3C6-45AEAD9293B4}"/>
+                <a16:creationId xmlns:a16="http://schemas.microsoft.com/office/drawing/2014/main" id="{75BAABFA-2886-46DB-92A7-03A2C0E25648}"/>
               </a:ext>
             </a:extLst>
           </p:cNvPr>
@@ -4818,7 +4818,7 @@
           <p:cNvPr id="11" name="">
             <a:extLst xmlns:a="http://schemas.openxmlformats.org/drawingml/2006/main">
               <a:ext uri="{FF2B5EF4-FFF2-40B4-BE49-F238E27FC236}">
-                <a16:creationId xmlns:a16="http://schemas.microsoft.com/office/drawing/2014/main" id="{4EC3A29C-9BD8-4C77-9FAE-75650B0FBFBD}"/>
+                <a16:creationId xmlns:a16="http://schemas.microsoft.com/office/drawing/2014/main" id="{20DBBC0E-E4F7-4FB8-B613-A5250501E249}"/>
               </a:ext>
             </a:extLst>
           </p:cNvPr>
@@ -4868,7 +4868,7 @@
           <p:cNvPr id="12" name="">
             <a:extLst xmlns:a="http://schemas.openxmlformats.org/drawingml/2006/main">
               <a:ext uri="{FF2B5EF4-FFF2-40B4-BE49-F238E27FC236}">
-                <a16:creationId xmlns:a16="http://schemas.microsoft.com/office/drawing/2014/main" id="{129EE624-C5F1-43EB-8881-AEEA5418D3F4}"/>
+                <a16:creationId xmlns:a16="http://schemas.microsoft.com/office/drawing/2014/main" id="{90FB60BC-FD8A-4CA7-8CBF-B7BCDF290297}"/>
               </a:ext>
             </a:extLst>
           </p:cNvPr>
@@ -4903,7 +4903,7 @@
           <p:cNvPr id="13" name="">
             <a:extLst xmlns:a="http://schemas.openxmlformats.org/drawingml/2006/main">
               <a:ext uri="{FF2B5EF4-FFF2-40B4-BE49-F238E27FC236}">
-                <a16:creationId xmlns:a16="http://schemas.microsoft.com/office/drawing/2014/main" id="{0C84908F-A758-4BC1-8E3B-3F336A8065DB}"/>
+                <a16:creationId xmlns:a16="http://schemas.microsoft.com/office/drawing/2014/main" id="{EE382561-F0FF-42D9-88E1-D20211FDE1AE}"/>
               </a:ext>
             </a:extLst>
           </p:cNvPr>
@@ -4953,7 +4953,7 @@
           <p:cNvPr id="14" name="">
             <a:extLst xmlns:a="http://schemas.openxmlformats.org/drawingml/2006/main">
               <a:ext uri="{FF2B5EF4-FFF2-40B4-BE49-F238E27FC236}">
-                <a16:creationId xmlns:a16="http://schemas.microsoft.com/office/drawing/2014/main" id="{AB607180-41AA-4DB2-9BD6-FCFE65AEB9CC}"/>
+                <a16:creationId xmlns:a16="http://schemas.microsoft.com/office/drawing/2014/main" id="{61EF72F4-6AC9-4563-8D77-B5BD615C78C2}"/>
               </a:ext>
             </a:extLst>
           </p:cNvPr>
@@ -5003,18 +5003,18 @@
           <p:cNvPr id="15" name="">
             <a:extLst xmlns:a="http://schemas.openxmlformats.org/drawingml/2006/main">
               <a:ext uri="{FF2B5EF4-FFF2-40B4-BE49-F238E27FC236}">
-                <a16:creationId xmlns:a16="http://schemas.microsoft.com/office/drawing/2014/main" id="{0EC1A09F-AF0D-43DC-B295-76440FBA4B74}"/>
-              </a:ext>
-            </a:extLst>
-          </p:cNvPr>
-          <p:cNvSpPr>
-            <a:spLocks xmlns:a="http://schemas.openxmlformats.org/drawingml/2006/main" noGrp="1"/>
-          </p:cNvSpPr>
-          <p:nvPr/>
-        </p:nvSpPr>
-        <p:spPr>
-          <a:xfrm xmlns:a="http://schemas.openxmlformats.org/drawingml/2006/main">
-            <a:off x="4210050" y="1952625"/>
+                <a16:creationId xmlns:a16="http://schemas.microsoft.com/office/drawing/2014/main" id="{9708DE75-B51D-4944-94C7-CD6682CC5E45}"/>
+              </a:ext>
+            </a:extLst>
+          </p:cNvPr>
+          <p:cNvSpPr>
+            <a:spLocks xmlns:a="http://schemas.openxmlformats.org/drawingml/2006/main" noGrp="1"/>
+          </p:cNvSpPr>
+          <p:nvPr/>
+        </p:nvSpPr>
+        <p:spPr>
+          <a:xfrm xmlns:a="http://schemas.openxmlformats.org/drawingml/2006/main">
+            <a:off x="4210050" y="1933575"/>
             <a:ext cx="304800" cy="190500"/>
           </a:xfrm>
           <a:prstGeom xmlns:a="http://schemas.openxmlformats.org/drawingml/2006/main" prst="rect">
@@ -5053,42 +5053,42 @@
           <p:cNvPr id="16" name="">
             <a:extLst xmlns:a="http://schemas.openxmlformats.org/drawingml/2006/main">
               <a:ext uri="{FF2B5EF4-FFF2-40B4-BE49-F238E27FC236}">
-                <a16:creationId xmlns:a16="http://schemas.microsoft.com/office/drawing/2014/main" id="{CE21B2FA-D090-44D2-A9CB-41E84F5C2C4D}"/>
-              </a:ext>
-            </a:extLst>
-          </p:cNvPr>
-          <p:cNvSpPr>
-            <a:spLocks xmlns:a="http://schemas.openxmlformats.org/drawingml/2006/main" noGrp="1"/>
-          </p:cNvSpPr>
-          <p:nvPr/>
-        </p:nvSpPr>
-        <p:spPr>
-          <a:xfrm xmlns:a="http://schemas.openxmlformats.org/drawingml/2006/main">
-            <a:off x="4572000" y="1895475"/>
-            <a:ext cx="2362200" cy="895350"/>
-          </a:xfrm>
-          <a:prstGeom xmlns:a="http://schemas.openxmlformats.org/drawingml/2006/main" prst="rect">
-            <a:avLst/>
-          </a:prstGeom>
-          <a:noFill xmlns:a="http://schemas.openxmlformats.org/drawingml/2006/main"/>
-          <a:ln xmlns:a="http://schemas.openxmlformats.org/drawingml/2006/main" w="0">
-            <a:noFill/>
-            <a:prstDash val="solid"/>
-          </a:ln>
-        </p:spPr>
-        <p:txBody>
-          <a:bodyPr xmlns:a="http://schemas.openxmlformats.org/drawingml/2006/main"/>
-          <a:lstStyle xmlns:a="http://schemas.openxmlformats.org/drawingml/2006/main"/>
-          <a:p xmlns:a="http://schemas.openxmlformats.org/drawingml/2006/main">
-            <a:pPr>
-              <a:defRPr sz="975">
-                <a:solidFill>
-                  <a:srgbClr val="102A63"/>
-                </a:solidFill>
-              </a:defRPr>
-            </a:pPr>
-            <a:r>
-              <a:rPr sz="975">
+                <a16:creationId xmlns:a16="http://schemas.microsoft.com/office/drawing/2014/main" id="{1EC5F3BD-22EB-44C9-BA72-1EC046A36883}"/>
+              </a:ext>
+            </a:extLst>
+          </p:cNvPr>
+          <p:cNvSpPr>
+            <a:spLocks xmlns:a="http://schemas.openxmlformats.org/drawingml/2006/main" noGrp="1"/>
+          </p:cNvSpPr>
+          <p:nvPr/>
+        </p:nvSpPr>
+        <p:spPr>
+          <a:xfrm xmlns:a="http://schemas.openxmlformats.org/drawingml/2006/main">
+            <a:off x="4572000" y="1876425"/>
+            <a:ext cx="2781300" cy="533400"/>
+          </a:xfrm>
+          <a:prstGeom xmlns:a="http://schemas.openxmlformats.org/drawingml/2006/main" prst="rect">
+            <a:avLst/>
+          </a:prstGeom>
+          <a:noFill xmlns:a="http://schemas.openxmlformats.org/drawingml/2006/main"/>
+          <a:ln xmlns:a="http://schemas.openxmlformats.org/drawingml/2006/main" w="0">
+            <a:noFill/>
+            <a:prstDash val="solid"/>
+          </a:ln>
+        </p:spPr>
+        <p:txBody>
+          <a:bodyPr xmlns:a="http://schemas.openxmlformats.org/drawingml/2006/main"/>
+          <a:lstStyle xmlns:a="http://schemas.openxmlformats.org/drawingml/2006/main"/>
+          <a:p xmlns:a="http://schemas.openxmlformats.org/drawingml/2006/main">
+            <a:pPr>
+              <a:defRPr sz="900">
+                <a:solidFill>
+                  <a:srgbClr val="102A63"/>
+                </a:solidFill>
+              </a:defRPr>
+            </a:pPr>
+            <a:r>
+              <a:rPr sz="900">
                 <a:solidFill>
                   <a:srgbClr val="102A63"/>
                 </a:solidFill>
@@ -5103,18 +5103,149 @@
           <p:cNvPr id="17" name="">
             <a:extLst xmlns:a="http://schemas.openxmlformats.org/drawingml/2006/main">
               <a:ext uri="{FF2B5EF4-FFF2-40B4-BE49-F238E27FC236}">
-                <a16:creationId xmlns:a16="http://schemas.microsoft.com/office/drawing/2014/main" id="{FDB722F1-87D2-4EB6-8839-64CB8DF8C93F}"/>
-              </a:ext>
-            </a:extLst>
-          </p:cNvPr>
-          <p:cNvSpPr>
-            <a:spLocks xmlns:a="http://schemas.openxmlformats.org/drawingml/2006/main" noGrp="1"/>
-          </p:cNvSpPr>
-          <p:nvPr/>
-        </p:nvSpPr>
-        <p:spPr>
-          <a:xfrm xmlns:a="http://schemas.openxmlformats.org/drawingml/2006/main">
-            <a:off x="7124700" y="1952625"/>
+                <a16:creationId xmlns:a16="http://schemas.microsoft.com/office/drawing/2014/main" id="{48C74EF6-6DCC-436B-BBF3-3A56C683E27B}"/>
+              </a:ext>
+            </a:extLst>
+          </p:cNvPr>
+          <p:cNvSpPr>
+            <a:spLocks xmlns:a="http://schemas.openxmlformats.org/drawingml/2006/main" noGrp="1"/>
+          </p:cNvSpPr>
+          <p:nvPr/>
+        </p:nvSpPr>
+        <p:spPr>
+          <a:xfrm xmlns:a="http://schemas.openxmlformats.org/drawingml/2006/main">
+            <a:off x="4572000" y="2476500"/>
+            <a:ext cx="723900" cy="133350"/>
+          </a:xfrm>
+          <a:prstGeom xmlns:a="http://schemas.openxmlformats.org/drawingml/2006/main" prst="rect">
+            <a:avLst/>
+          </a:prstGeom>
+          <a:noFill xmlns:a="http://schemas.openxmlformats.org/drawingml/2006/main"/>
+          <a:ln xmlns:a="http://schemas.openxmlformats.org/drawingml/2006/main" w="0">
+            <a:noFill/>
+            <a:prstDash val="solid"/>
+          </a:ln>
+        </p:spPr>
+        <p:txBody>
+          <a:bodyPr xmlns:a="http://schemas.openxmlformats.org/drawingml/2006/main"/>
+          <a:lstStyle xmlns:a="http://schemas.openxmlformats.org/drawingml/2006/main"/>
+          <a:p xmlns:a="http://schemas.openxmlformats.org/drawingml/2006/main">
+            <a:pPr>
+              <a:defRPr sz="600" b="1">
+                <a:solidFill>
+                  <a:srgbClr val="2048A8"/>
+                </a:solidFill>
+              </a:defRPr>
+            </a:pPr>
+            <a:r>
+              <a:rPr sz="600" b="1">
+                <a:solidFill>
+                  <a:srgbClr val="2048A8"/>
+                </a:solidFill>
+              </a:rPr>
+              <a:t>РЕЗУЛЬТАТ</a:t>
+            </a:r>
+          </a:p>
+        </p:txBody>
+      </p:sp>
+      <p:sp>
+        <p:nvSpPr>
+          <p:cNvPr id="18" name="">
+            <a:extLst xmlns:a="http://schemas.openxmlformats.org/drawingml/2006/main">
+              <a:ext uri="{FF2B5EF4-FFF2-40B4-BE49-F238E27FC236}">
+                <a16:creationId xmlns:a16="http://schemas.microsoft.com/office/drawing/2014/main" id="{00FE1AD9-4D7D-4E1E-8A44-DB472BF105C5}"/>
+              </a:ext>
+            </a:extLst>
+          </p:cNvPr>
+          <p:cNvSpPr>
+            <a:spLocks xmlns:a="http://schemas.openxmlformats.org/drawingml/2006/main" noGrp="1"/>
+          </p:cNvSpPr>
+          <p:nvPr/>
+        </p:nvSpPr>
+        <p:spPr>
+          <a:xfrm xmlns:a="http://schemas.openxmlformats.org/drawingml/2006/main">
+            <a:off x="4572000" y="2628900"/>
+            <a:ext cx="2781300" cy="285750"/>
+          </a:xfrm>
+          <a:prstGeom xmlns:a="http://schemas.openxmlformats.org/drawingml/2006/main" prst="rect">
+            <a:avLst/>
+          </a:prstGeom>
+          <a:noFill xmlns:a="http://schemas.openxmlformats.org/drawingml/2006/main"/>
+          <a:ln xmlns:a="http://schemas.openxmlformats.org/drawingml/2006/main" w="0">
+            <a:noFill/>
+            <a:prstDash val="solid"/>
+          </a:ln>
+        </p:spPr>
+        <p:txBody>
+          <a:bodyPr xmlns:a="http://schemas.openxmlformats.org/drawingml/2006/main"/>
+          <a:lstStyle xmlns:a="http://schemas.openxmlformats.org/drawingml/2006/main"/>
+          <a:p xmlns:a="http://schemas.openxmlformats.org/drawingml/2006/main">
+            <a:pPr>
+              <a:defRPr sz="750" b="1">
+                <a:solidFill>
+                  <a:srgbClr val="102A63"/>
+                </a:solidFill>
+              </a:defRPr>
+            </a:pPr>
+            <a:r>
+              <a:rPr sz="750" b="1">
+                <a:solidFill>
+                  <a:srgbClr val="102A63"/>
+                </a:solidFill>
+              </a:rPr>
+              <a:t>{{ROADMAP_1_1_RESULT}}</a:t>
+            </a:r>
+          </a:p>
+        </p:txBody>
+      </p:sp>
+      <p:sp>
+        <p:nvSpPr>
+          <p:cNvPr id="19" name="">
+            <a:extLst xmlns:a="http://schemas.openxmlformats.org/drawingml/2006/main">
+              <a:ext uri="{FF2B5EF4-FFF2-40B4-BE49-F238E27FC236}">
+                <a16:creationId xmlns:a16="http://schemas.microsoft.com/office/drawing/2014/main" id="{A6AC4CB4-3F7A-4EB0-B2BC-99C07E020097}"/>
+              </a:ext>
+            </a:extLst>
+          </p:cNvPr>
+          <p:cNvSpPr>
+            <a:spLocks xmlns:a="http://schemas.openxmlformats.org/drawingml/2006/main" noGrp="1"/>
+          </p:cNvSpPr>
+          <p:nvPr/>
+        </p:nvSpPr>
+        <p:spPr>
+          <a:xfrm xmlns:a="http://schemas.openxmlformats.org/drawingml/2006/main">
+            <a:off x="7543800" y="1905000"/>
+            <a:ext cx="9525" cy="952500"/>
+          </a:xfrm>
+          <a:prstGeom xmlns:a="http://schemas.openxmlformats.org/drawingml/2006/main" prst="rect">
+            <a:avLst/>
+          </a:prstGeom>
+          <a:solidFill xmlns:a="http://schemas.openxmlformats.org/drawingml/2006/main">
+            <a:srgbClr val="D7E0F2"/>
+          </a:solidFill>
+          <a:ln xmlns:a="http://schemas.openxmlformats.org/drawingml/2006/main" w="0">
+            <a:noFill/>
+            <a:prstDash val="solid"/>
+          </a:ln>
+        </p:spPr>
+      </p:sp>
+      <p:sp>
+        <p:nvSpPr>
+          <p:cNvPr id="20" name="">
+            <a:extLst xmlns:a="http://schemas.openxmlformats.org/drawingml/2006/main">
+              <a:ext uri="{FF2B5EF4-FFF2-40B4-BE49-F238E27FC236}">
+                <a16:creationId xmlns:a16="http://schemas.microsoft.com/office/drawing/2014/main" id="{EF7A9E86-D5DA-4DC3-83CB-1E8B263CA4B0}"/>
+              </a:ext>
+            </a:extLst>
+          </p:cNvPr>
+          <p:cNvSpPr>
+            <a:spLocks xmlns:a="http://schemas.openxmlformats.org/drawingml/2006/main" noGrp="1"/>
+          </p:cNvSpPr>
+          <p:nvPr/>
+        </p:nvSpPr>
+        <p:spPr>
+          <a:xfrm xmlns:a="http://schemas.openxmlformats.org/drawingml/2006/main">
+            <a:off x="7772400" y="1933575"/>
             <a:ext cx="304800" cy="190500"/>
           </a:xfrm>
           <a:prstGeom xmlns:a="http://schemas.openxmlformats.org/drawingml/2006/main" prst="rect">
@@ -5150,45 +5281,45 @@
       </p:sp>
       <p:sp>
         <p:nvSpPr>
-          <p:cNvPr id="18" name="">
-            <a:extLst xmlns:a="http://schemas.openxmlformats.org/drawingml/2006/main">
-              <a:ext uri="{FF2B5EF4-FFF2-40B4-BE49-F238E27FC236}">
-                <a16:creationId xmlns:a16="http://schemas.microsoft.com/office/drawing/2014/main" id="{EDB5E581-AE1C-49FD-AF1E-ADCA1D167848}"/>
-              </a:ext>
-            </a:extLst>
-          </p:cNvPr>
-          <p:cNvSpPr>
-            <a:spLocks xmlns:a="http://schemas.openxmlformats.org/drawingml/2006/main" noGrp="1"/>
-          </p:cNvSpPr>
-          <p:nvPr/>
-        </p:nvSpPr>
-        <p:spPr>
-          <a:xfrm xmlns:a="http://schemas.openxmlformats.org/drawingml/2006/main">
-            <a:off x="7486650" y="1895475"/>
-            <a:ext cx="1847850" cy="895350"/>
-          </a:xfrm>
-          <a:prstGeom xmlns:a="http://schemas.openxmlformats.org/drawingml/2006/main" prst="rect">
-            <a:avLst/>
-          </a:prstGeom>
-          <a:noFill xmlns:a="http://schemas.openxmlformats.org/drawingml/2006/main"/>
-          <a:ln xmlns:a="http://schemas.openxmlformats.org/drawingml/2006/main" w="0">
-            <a:noFill/>
-            <a:prstDash val="solid"/>
-          </a:ln>
-        </p:spPr>
-        <p:txBody>
-          <a:bodyPr xmlns:a="http://schemas.openxmlformats.org/drawingml/2006/main"/>
-          <a:lstStyle xmlns:a="http://schemas.openxmlformats.org/drawingml/2006/main"/>
-          <a:p xmlns:a="http://schemas.openxmlformats.org/drawingml/2006/main">
-            <a:pPr>
-              <a:defRPr sz="975">
-                <a:solidFill>
-                  <a:srgbClr val="102A63"/>
-                </a:solidFill>
-              </a:defRPr>
-            </a:pPr>
-            <a:r>
-              <a:rPr sz="975">
+          <p:cNvPr id="21" name="">
+            <a:extLst xmlns:a="http://schemas.openxmlformats.org/drawingml/2006/main">
+              <a:ext uri="{FF2B5EF4-FFF2-40B4-BE49-F238E27FC236}">
+                <a16:creationId xmlns:a16="http://schemas.microsoft.com/office/drawing/2014/main" id="{CFD26E98-69D2-4178-B141-39D507BE5DA0}"/>
+              </a:ext>
+            </a:extLst>
+          </p:cNvPr>
+          <p:cNvSpPr>
+            <a:spLocks xmlns:a="http://schemas.openxmlformats.org/drawingml/2006/main" noGrp="1"/>
+          </p:cNvSpPr>
+          <p:nvPr/>
+        </p:nvSpPr>
+        <p:spPr>
+          <a:xfrm xmlns:a="http://schemas.openxmlformats.org/drawingml/2006/main">
+            <a:off x="8134350" y="1876425"/>
+            <a:ext cx="2705100" cy="533400"/>
+          </a:xfrm>
+          <a:prstGeom xmlns:a="http://schemas.openxmlformats.org/drawingml/2006/main" prst="rect">
+            <a:avLst/>
+          </a:prstGeom>
+          <a:noFill xmlns:a="http://schemas.openxmlformats.org/drawingml/2006/main"/>
+          <a:ln xmlns:a="http://schemas.openxmlformats.org/drawingml/2006/main" w="0">
+            <a:noFill/>
+            <a:prstDash val="solid"/>
+          </a:ln>
+        </p:spPr>
+        <p:txBody>
+          <a:bodyPr xmlns:a="http://schemas.openxmlformats.org/drawingml/2006/main"/>
+          <a:lstStyle xmlns:a="http://schemas.openxmlformats.org/drawingml/2006/main"/>
+          <a:p xmlns:a="http://schemas.openxmlformats.org/drawingml/2006/main">
+            <a:pPr>
+              <a:defRPr sz="900">
+                <a:solidFill>
+                  <a:srgbClr val="102A63"/>
+                </a:solidFill>
+              </a:defRPr>
+            </a:pPr>
+            <a:r>
+              <a:rPr sz="900">
                 <a:solidFill>
                   <a:srgbClr val="102A63"/>
                 </a:solidFill>
@@ -5200,26 +5331,207 @@
       </p:sp>
       <p:sp>
         <p:nvSpPr>
-          <p:cNvPr id="19" name="">
-            <a:extLst xmlns:a="http://schemas.openxmlformats.org/drawingml/2006/main">
-              <a:ext uri="{FF2B5EF4-FFF2-40B4-BE49-F238E27FC236}">
-                <a16:creationId xmlns:a16="http://schemas.microsoft.com/office/drawing/2014/main" id="{50CC5BE9-2623-49DB-9C29-076FC8EB5F7D}"/>
-              </a:ext>
-            </a:extLst>
-          </p:cNvPr>
-          <p:cNvSpPr>
-            <a:spLocks xmlns:a="http://schemas.openxmlformats.org/drawingml/2006/main" noGrp="1"/>
-          </p:cNvSpPr>
-          <p:nvPr/>
-        </p:nvSpPr>
-        <p:spPr>
-          <a:xfrm xmlns:a="http://schemas.openxmlformats.org/drawingml/2006/main">
-            <a:off x="9505950" y="1885950"/>
-            <a:ext cx="1524000" cy="990600"/>
+          <p:cNvPr id="22" name="">
+            <a:extLst xmlns:a="http://schemas.openxmlformats.org/drawingml/2006/main">
+              <a:ext uri="{FF2B5EF4-FFF2-40B4-BE49-F238E27FC236}">
+                <a16:creationId xmlns:a16="http://schemas.microsoft.com/office/drawing/2014/main" id="{E94D2861-404B-4A33-BE80-2BA755149703}"/>
+              </a:ext>
+            </a:extLst>
+          </p:cNvPr>
+          <p:cNvSpPr>
+            <a:spLocks xmlns:a="http://schemas.openxmlformats.org/drawingml/2006/main" noGrp="1"/>
+          </p:cNvSpPr>
+          <p:nvPr/>
+        </p:nvSpPr>
+        <p:spPr>
+          <a:xfrm xmlns:a="http://schemas.openxmlformats.org/drawingml/2006/main">
+            <a:off x="8134350" y="2476500"/>
+            <a:ext cx="723900" cy="133350"/>
+          </a:xfrm>
+          <a:prstGeom xmlns:a="http://schemas.openxmlformats.org/drawingml/2006/main" prst="rect">
+            <a:avLst/>
+          </a:prstGeom>
+          <a:noFill xmlns:a="http://schemas.openxmlformats.org/drawingml/2006/main"/>
+          <a:ln xmlns:a="http://schemas.openxmlformats.org/drawingml/2006/main" w="0">
+            <a:noFill/>
+            <a:prstDash val="solid"/>
+          </a:ln>
+        </p:spPr>
+        <p:txBody>
+          <a:bodyPr xmlns:a="http://schemas.openxmlformats.org/drawingml/2006/main"/>
+          <a:lstStyle xmlns:a="http://schemas.openxmlformats.org/drawingml/2006/main"/>
+          <a:p xmlns:a="http://schemas.openxmlformats.org/drawingml/2006/main">
+            <a:pPr>
+              <a:defRPr sz="600" b="1">
+                <a:solidFill>
+                  <a:srgbClr val="2048A8"/>
+                </a:solidFill>
+              </a:defRPr>
+            </a:pPr>
+            <a:r>
+              <a:rPr sz="600" b="1">
+                <a:solidFill>
+                  <a:srgbClr val="2048A8"/>
+                </a:solidFill>
+              </a:rPr>
+              <a:t>РЕЗУЛЬТАТ</a:t>
+            </a:r>
+          </a:p>
+        </p:txBody>
+      </p:sp>
+      <p:sp>
+        <p:nvSpPr>
+          <p:cNvPr id="23" name="">
+            <a:extLst xmlns:a="http://schemas.openxmlformats.org/drawingml/2006/main">
+              <a:ext uri="{FF2B5EF4-FFF2-40B4-BE49-F238E27FC236}">
+                <a16:creationId xmlns:a16="http://schemas.microsoft.com/office/drawing/2014/main" id="{9F358240-326C-4C39-A584-82F1EB4D82C6}"/>
+              </a:ext>
+            </a:extLst>
+          </p:cNvPr>
+          <p:cNvSpPr>
+            <a:spLocks xmlns:a="http://schemas.openxmlformats.org/drawingml/2006/main" noGrp="1"/>
+          </p:cNvSpPr>
+          <p:nvPr/>
+        </p:nvSpPr>
+        <p:spPr>
+          <a:xfrm xmlns:a="http://schemas.openxmlformats.org/drawingml/2006/main">
+            <a:off x="8134350" y="2628900"/>
+            <a:ext cx="2705100" cy="285750"/>
+          </a:xfrm>
+          <a:prstGeom xmlns:a="http://schemas.openxmlformats.org/drawingml/2006/main" prst="rect">
+            <a:avLst/>
+          </a:prstGeom>
+          <a:noFill xmlns:a="http://schemas.openxmlformats.org/drawingml/2006/main"/>
+          <a:ln xmlns:a="http://schemas.openxmlformats.org/drawingml/2006/main" w="0">
+            <a:noFill/>
+            <a:prstDash val="solid"/>
+          </a:ln>
+        </p:spPr>
+        <p:txBody>
+          <a:bodyPr xmlns:a="http://schemas.openxmlformats.org/drawingml/2006/main"/>
+          <a:lstStyle xmlns:a="http://schemas.openxmlformats.org/drawingml/2006/main"/>
+          <a:p xmlns:a="http://schemas.openxmlformats.org/drawingml/2006/main">
+            <a:pPr>
+              <a:defRPr sz="750" b="1">
+                <a:solidFill>
+                  <a:srgbClr val="102A63"/>
+                </a:solidFill>
+              </a:defRPr>
+            </a:pPr>
+            <a:r>
+              <a:rPr sz="750" b="1">
+                <a:solidFill>
+                  <a:srgbClr val="102A63"/>
+                </a:solidFill>
+              </a:rPr>
+              <a:t>{{ROADMAP_1_2_RESULT}}</a:t>
+            </a:r>
+          </a:p>
+        </p:txBody>
+      </p:sp>
+      <p:sp>
+        <p:nvSpPr>
+          <p:cNvPr id="24" name="">
+            <a:extLst xmlns:a="http://schemas.openxmlformats.org/drawingml/2006/main">
+              <a:ext uri="{FF2B5EF4-FFF2-40B4-BE49-F238E27FC236}">
+                <a16:creationId xmlns:a16="http://schemas.microsoft.com/office/drawing/2014/main" id="{1A37E8B7-23AD-46DC-AD02-B20A4E86B8C1}"/>
+              </a:ext>
+            </a:extLst>
+          </p:cNvPr>
+          <p:cNvSpPr>
+            <a:spLocks xmlns:a="http://schemas.openxmlformats.org/drawingml/2006/main" noGrp="1"/>
+          </p:cNvSpPr>
+          <p:nvPr/>
+        </p:nvSpPr>
+        <p:spPr>
+          <a:xfrm xmlns:a="http://schemas.openxmlformats.org/drawingml/2006/main">
+            <a:off x="609600" y="3581400"/>
+            <a:ext cx="514350" cy="514350"/>
+          </a:xfrm>
+          <a:prstGeom xmlns:a="http://schemas.openxmlformats.org/drawingml/2006/main" prst="ellipse">
+            <a:avLst/>
+          </a:prstGeom>
+          <a:solidFill xmlns:a="http://schemas.openxmlformats.org/drawingml/2006/main">
+            <a:srgbClr val="102A63"/>
+          </a:solidFill>
+          <a:ln xmlns:a="http://schemas.openxmlformats.org/drawingml/2006/main" w="0">
+            <a:noFill/>
+            <a:prstDash val="solid"/>
+          </a:ln>
+        </p:spPr>
+      </p:sp>
+      <p:sp>
+        <p:nvSpPr>
+          <p:cNvPr id="25" name="">
+            <a:extLst xmlns:a="http://schemas.openxmlformats.org/drawingml/2006/main">
+              <a:ext uri="{FF2B5EF4-FFF2-40B4-BE49-F238E27FC236}">
+                <a16:creationId xmlns:a16="http://schemas.microsoft.com/office/drawing/2014/main" id="{C69D64AC-4447-493C-A877-EBD3587D8570}"/>
+              </a:ext>
+            </a:extLst>
+          </p:cNvPr>
+          <p:cNvSpPr>
+            <a:spLocks xmlns:a="http://schemas.openxmlformats.org/drawingml/2006/main" noGrp="1"/>
+          </p:cNvSpPr>
+          <p:nvPr/>
+        </p:nvSpPr>
+        <p:spPr>
+          <a:xfrm xmlns:a="http://schemas.openxmlformats.org/drawingml/2006/main">
+            <a:off x="704850" y="3705225"/>
+            <a:ext cx="323850" cy="228600"/>
+          </a:xfrm>
+          <a:prstGeom xmlns:a="http://schemas.openxmlformats.org/drawingml/2006/main" prst="rect">
+            <a:avLst/>
+          </a:prstGeom>
+          <a:noFill xmlns:a="http://schemas.openxmlformats.org/drawingml/2006/main"/>
+          <a:ln xmlns:a="http://schemas.openxmlformats.org/drawingml/2006/main" w="0">
+            <a:noFill/>
+            <a:prstDash val="solid"/>
+          </a:ln>
+        </p:spPr>
+        <p:txBody>
+          <a:bodyPr xmlns:a="http://schemas.openxmlformats.org/drawingml/2006/main"/>
+          <a:lstStyle xmlns:a="http://schemas.openxmlformats.org/drawingml/2006/main"/>
+          <a:p xmlns:a="http://schemas.openxmlformats.org/drawingml/2006/main">
+            <a:pPr algn="ctr">
+              <a:defRPr sz="1200" b="1">
+                <a:solidFill>
+                  <a:srgbClr val="FFFFFF"/>
+                </a:solidFill>
+              </a:defRPr>
+            </a:pPr>
+            <a:r>
+              <a:rPr sz="1200" b="1">
+                <a:solidFill>
+                  <a:srgbClr val="FFFFFF"/>
+                </a:solidFill>
+              </a:rPr>
+              <a:t>2</a:t>
+            </a:r>
+          </a:p>
+        </p:txBody>
+      </p:sp>
+      <p:sp>
+        <p:nvSpPr>
+          <p:cNvPr id="26" name="">
+            <a:extLst xmlns:a="http://schemas.openxmlformats.org/drawingml/2006/main">
+              <a:ext uri="{FF2B5EF4-FFF2-40B4-BE49-F238E27FC236}">
+                <a16:creationId xmlns:a16="http://schemas.microsoft.com/office/drawing/2014/main" id="{5CC04263-72A1-4196-990A-2D0BF4A6D5E1}"/>
+              </a:ext>
+            </a:extLst>
+          </p:cNvPr>
+          <p:cNvSpPr>
+            <a:spLocks xmlns:a="http://schemas.openxmlformats.org/drawingml/2006/main" noGrp="1"/>
+          </p:cNvSpPr>
+          <p:nvPr/>
+        </p:nvSpPr>
+        <p:spPr>
+          <a:xfrm xmlns:a="http://schemas.openxmlformats.org/drawingml/2006/main">
+            <a:off x="1390650" y="3219450"/>
+            <a:ext cx="9810750" cy="1257300"/>
           </a:xfrm>
           <a:prstGeom xmlns:a="http://schemas.openxmlformats.org/drawingml/2006/main" prst="roundRect">
             <a:avLst>
-              <a:gd name="adj" fmla="val 7692"/>
+              <a:gd name="adj" fmla="val 6061"/>
             </a:avLst>
           </a:prstGeom>
           <a:solidFill xmlns:a="http://schemas.openxmlformats.org/drawingml/2006/main">
@@ -5235,49 +5547,249 @@
       </p:sp>
       <p:sp>
         <p:nvSpPr>
-          <p:cNvPr id="20" name="">
-            <a:extLst xmlns:a="http://schemas.openxmlformats.org/drawingml/2006/main">
-              <a:ext uri="{FF2B5EF4-FFF2-40B4-BE49-F238E27FC236}">
-                <a16:creationId xmlns:a16="http://schemas.microsoft.com/office/drawing/2014/main" id="{B98FF158-7221-4864-9B7D-9C51D3337803}"/>
-              </a:ext>
-            </a:extLst>
-          </p:cNvPr>
-          <p:cNvSpPr>
-            <a:spLocks xmlns:a="http://schemas.openxmlformats.org/drawingml/2006/main" noGrp="1"/>
-          </p:cNvSpPr>
-          <p:nvPr/>
-        </p:nvSpPr>
-        <p:spPr>
-          <a:xfrm xmlns:a="http://schemas.openxmlformats.org/drawingml/2006/main">
-            <a:off x="9620250" y="1981200"/>
-            <a:ext cx="1295400" cy="171450"/>
-          </a:xfrm>
-          <a:prstGeom xmlns:a="http://schemas.openxmlformats.org/drawingml/2006/main" prst="rect">
-            <a:avLst/>
-          </a:prstGeom>
-          <a:noFill xmlns:a="http://schemas.openxmlformats.org/drawingml/2006/main"/>
-          <a:ln xmlns:a="http://schemas.openxmlformats.org/drawingml/2006/main" w="0">
-            <a:noFill/>
-            <a:prstDash val="solid"/>
-          </a:ln>
-        </p:spPr>
-        <p:txBody>
-          <a:bodyPr xmlns:a="http://schemas.openxmlformats.org/drawingml/2006/main"/>
-          <a:lstStyle xmlns:a="http://schemas.openxmlformats.org/drawingml/2006/main"/>
-          <a:p xmlns:a="http://schemas.openxmlformats.org/drawingml/2006/main">
-            <a:pPr algn="ctr">
-              <a:defRPr sz="675" b="1">
+          <p:cNvPr id="27" name="">
+            <a:extLst xmlns:a="http://schemas.openxmlformats.org/drawingml/2006/main">
+              <a:ext uri="{FF2B5EF4-FFF2-40B4-BE49-F238E27FC236}">
+                <a16:creationId xmlns:a16="http://schemas.microsoft.com/office/drawing/2014/main" id="{4650970B-C9C6-4F18-8C72-3356F98B4989}"/>
+              </a:ext>
+            </a:extLst>
+          </p:cNvPr>
+          <p:cNvSpPr>
+            <a:spLocks xmlns:a="http://schemas.openxmlformats.org/drawingml/2006/main" noGrp="1"/>
+          </p:cNvSpPr>
+          <p:nvPr/>
+        </p:nvSpPr>
+        <p:spPr>
+          <a:xfrm xmlns:a="http://schemas.openxmlformats.org/drawingml/2006/main">
+            <a:off x="1619250" y="3371850"/>
+            <a:ext cx="1409700" cy="228600"/>
+          </a:xfrm>
+          <a:prstGeom xmlns:a="http://schemas.openxmlformats.org/drawingml/2006/main" prst="rect">
+            <a:avLst/>
+          </a:prstGeom>
+          <a:noFill xmlns:a="http://schemas.openxmlformats.org/drawingml/2006/main"/>
+          <a:ln xmlns:a="http://schemas.openxmlformats.org/drawingml/2006/main" w="0">
+            <a:noFill/>
+            <a:prstDash val="solid"/>
+          </a:ln>
+        </p:spPr>
+        <p:txBody>
+          <a:bodyPr xmlns:a="http://schemas.openxmlformats.org/drawingml/2006/main"/>
+          <a:lstStyle xmlns:a="http://schemas.openxmlformats.org/drawingml/2006/main"/>
+          <a:p xmlns:a="http://schemas.openxmlformats.org/drawingml/2006/main">
+            <a:pPr>
+              <a:defRPr sz="1125" b="1">
                 <a:solidFill>
                   <a:srgbClr val="2048A8"/>
                 </a:solidFill>
               </a:defRPr>
             </a:pPr>
             <a:r>
-              <a:rPr sz="675" b="1">
+              <a:rPr sz="1125" b="1">
                 <a:solidFill>
                   <a:srgbClr val="2048A8"/>
                 </a:solidFill>
               </a:rPr>
+              <a:t>31–60 дней</a:t>
+            </a:r>
+          </a:p>
+        </p:txBody>
+      </p:sp>
+      <p:sp>
+        <p:nvSpPr>
+          <p:cNvPr id="28" name="">
+            <a:extLst xmlns:a="http://schemas.openxmlformats.org/drawingml/2006/main">
+              <a:ext uri="{FF2B5EF4-FFF2-40B4-BE49-F238E27FC236}">
+                <a16:creationId xmlns:a16="http://schemas.microsoft.com/office/drawing/2014/main" id="{E8FBBE8F-00F2-4E66-AB12-1B46D7FC8055}"/>
+              </a:ext>
+            </a:extLst>
+          </p:cNvPr>
+          <p:cNvSpPr>
+            <a:spLocks xmlns:a="http://schemas.openxmlformats.org/drawingml/2006/main" noGrp="1"/>
+          </p:cNvSpPr>
+          <p:nvPr/>
+        </p:nvSpPr>
+        <p:spPr>
+          <a:xfrm xmlns:a="http://schemas.openxmlformats.org/drawingml/2006/main">
+            <a:off x="1619250" y="3657600"/>
+            <a:ext cx="2381250" cy="495300"/>
+          </a:xfrm>
+          <a:prstGeom xmlns:a="http://schemas.openxmlformats.org/drawingml/2006/main" prst="rect">
+            <a:avLst/>
+          </a:prstGeom>
+          <a:noFill xmlns:a="http://schemas.openxmlformats.org/drawingml/2006/main"/>
+          <a:ln xmlns:a="http://schemas.openxmlformats.org/drawingml/2006/main" w="0">
+            <a:noFill/>
+            <a:prstDash val="solid"/>
+          </a:ln>
+        </p:spPr>
+        <p:txBody>
+          <a:bodyPr xmlns:a="http://schemas.openxmlformats.org/drawingml/2006/main"/>
+          <a:lstStyle xmlns:a="http://schemas.openxmlformats.org/drawingml/2006/main"/>
+          <a:p xmlns:a="http://schemas.openxmlformats.org/drawingml/2006/main">
+            <a:pPr>
+              <a:defRPr sz="1125" b="1">
+                <a:solidFill>
+                  <a:srgbClr val="102A63"/>
+                </a:solidFill>
+              </a:defRPr>
+            </a:pPr>
+            <a:r>
+              <a:rPr sz="1125" b="1">
+                <a:solidFill>
+                  <a:srgbClr val="102A63"/>
+                </a:solidFill>
+              </a:rPr>
+              <a:t>ПИЛОТЫ И РЕГЛАМЕНТЫ</a:t>
+            </a:r>
+          </a:p>
+        </p:txBody>
+      </p:sp>
+      <p:sp>
+        <p:nvSpPr>
+          <p:cNvPr id="29" name="">
+            <a:extLst xmlns:a="http://schemas.openxmlformats.org/drawingml/2006/main">
+              <a:ext uri="{FF2B5EF4-FFF2-40B4-BE49-F238E27FC236}">
+                <a16:creationId xmlns:a16="http://schemas.microsoft.com/office/drawing/2014/main" id="{1F3B078A-7EB3-4B2D-BBDB-A0823C9AD636}"/>
+              </a:ext>
+            </a:extLst>
+          </p:cNvPr>
+          <p:cNvSpPr>
+            <a:spLocks xmlns:a="http://schemas.openxmlformats.org/drawingml/2006/main" noGrp="1"/>
+          </p:cNvSpPr>
+          <p:nvPr/>
+        </p:nvSpPr>
+        <p:spPr>
+          <a:xfrm xmlns:a="http://schemas.openxmlformats.org/drawingml/2006/main">
+            <a:off x="4210050" y="3400425"/>
+            <a:ext cx="304800" cy="190500"/>
+          </a:xfrm>
+          <a:prstGeom xmlns:a="http://schemas.openxmlformats.org/drawingml/2006/main" prst="rect">
+            <a:avLst/>
+          </a:prstGeom>
+          <a:noFill xmlns:a="http://schemas.openxmlformats.org/drawingml/2006/main"/>
+          <a:ln xmlns:a="http://schemas.openxmlformats.org/drawingml/2006/main" w="0">
+            <a:noFill/>
+            <a:prstDash val="solid"/>
+          </a:ln>
+        </p:spPr>
+        <p:txBody>
+          <a:bodyPr xmlns:a="http://schemas.openxmlformats.org/drawingml/2006/main"/>
+          <a:lstStyle xmlns:a="http://schemas.openxmlformats.org/drawingml/2006/main"/>
+          <a:p xmlns:a="http://schemas.openxmlformats.org/drawingml/2006/main">
+            <a:pPr>
+              <a:defRPr sz="825" b="1">
+                <a:solidFill>
+                  <a:srgbClr val="2048A8"/>
+                </a:solidFill>
+              </a:defRPr>
+            </a:pPr>
+            <a:r>
+              <a:rPr sz="825" b="1">
+                <a:solidFill>
+                  <a:srgbClr val="2048A8"/>
+                </a:solidFill>
+              </a:rPr>
+              <a:t>01</a:t>
+            </a:r>
+          </a:p>
+        </p:txBody>
+      </p:sp>
+      <p:sp>
+        <p:nvSpPr>
+          <p:cNvPr id="30" name="">
+            <a:extLst xmlns:a="http://schemas.openxmlformats.org/drawingml/2006/main">
+              <a:ext uri="{FF2B5EF4-FFF2-40B4-BE49-F238E27FC236}">
+                <a16:creationId xmlns:a16="http://schemas.microsoft.com/office/drawing/2014/main" id="{96E49C64-6D8F-46F2-9A57-B64F822D330E}"/>
+              </a:ext>
+            </a:extLst>
+          </p:cNvPr>
+          <p:cNvSpPr>
+            <a:spLocks xmlns:a="http://schemas.openxmlformats.org/drawingml/2006/main" noGrp="1"/>
+          </p:cNvSpPr>
+          <p:nvPr/>
+        </p:nvSpPr>
+        <p:spPr>
+          <a:xfrm xmlns:a="http://schemas.openxmlformats.org/drawingml/2006/main">
+            <a:off x="4572000" y="3343275"/>
+            <a:ext cx="2781300" cy="533400"/>
+          </a:xfrm>
+          <a:prstGeom xmlns:a="http://schemas.openxmlformats.org/drawingml/2006/main" prst="rect">
+            <a:avLst/>
+          </a:prstGeom>
+          <a:noFill xmlns:a="http://schemas.openxmlformats.org/drawingml/2006/main"/>
+          <a:ln xmlns:a="http://schemas.openxmlformats.org/drawingml/2006/main" w="0">
+            <a:noFill/>
+            <a:prstDash val="solid"/>
+          </a:ln>
+        </p:spPr>
+        <p:txBody>
+          <a:bodyPr xmlns:a="http://schemas.openxmlformats.org/drawingml/2006/main"/>
+          <a:lstStyle xmlns:a="http://schemas.openxmlformats.org/drawingml/2006/main"/>
+          <a:p xmlns:a="http://schemas.openxmlformats.org/drawingml/2006/main">
+            <a:pPr>
+              <a:defRPr sz="900">
+                <a:solidFill>
+                  <a:srgbClr val="102A63"/>
+                </a:solidFill>
+              </a:defRPr>
+            </a:pPr>
+            <a:r>
+              <a:rPr sz="900">
+                <a:solidFill>
+                  <a:srgbClr val="102A63"/>
+                </a:solidFill>
+              </a:rPr>
+              <a:t>{{ROADMAP_2_1}}</a:t>
+            </a:r>
+          </a:p>
+        </p:txBody>
+      </p:sp>
+      <p:sp>
+        <p:nvSpPr>
+          <p:cNvPr id="31" name="">
+            <a:extLst xmlns:a="http://schemas.openxmlformats.org/drawingml/2006/main">
+              <a:ext uri="{FF2B5EF4-FFF2-40B4-BE49-F238E27FC236}">
+                <a16:creationId xmlns:a16="http://schemas.microsoft.com/office/drawing/2014/main" id="{209D8BA8-6BDC-4C07-8D45-F38A677B8674}"/>
+              </a:ext>
+            </a:extLst>
+          </p:cNvPr>
+          <p:cNvSpPr>
+            <a:spLocks xmlns:a="http://schemas.openxmlformats.org/drawingml/2006/main" noGrp="1"/>
+          </p:cNvSpPr>
+          <p:nvPr/>
+        </p:nvSpPr>
+        <p:spPr>
+          <a:xfrm xmlns:a="http://schemas.openxmlformats.org/drawingml/2006/main">
+            <a:off x="4572000" y="3943350"/>
+            <a:ext cx="723900" cy="133350"/>
+          </a:xfrm>
+          <a:prstGeom xmlns:a="http://schemas.openxmlformats.org/drawingml/2006/main" prst="rect">
+            <a:avLst/>
+          </a:prstGeom>
+          <a:noFill xmlns:a="http://schemas.openxmlformats.org/drawingml/2006/main"/>
+          <a:ln xmlns:a="http://schemas.openxmlformats.org/drawingml/2006/main" w="0">
+            <a:noFill/>
+            <a:prstDash val="solid"/>
+          </a:ln>
+        </p:spPr>
+        <p:txBody>
+          <a:bodyPr xmlns:a="http://schemas.openxmlformats.org/drawingml/2006/main"/>
+          <a:lstStyle xmlns:a="http://schemas.openxmlformats.org/drawingml/2006/main"/>
+          <a:p xmlns:a="http://schemas.openxmlformats.org/drawingml/2006/main">
+            <a:pPr>
+              <a:defRPr sz="600" b="1">
+                <a:solidFill>
+                  <a:srgbClr val="2048A8"/>
+                </a:solidFill>
+              </a:defRPr>
+            </a:pPr>
+            <a:r>
+              <a:rPr sz="600" b="1">
+                <a:solidFill>
+                  <a:srgbClr val="2048A8"/>
+                </a:solidFill>
+              </a:rPr>
               <a:t>РЕЗУЛЬТАТ</a:t>
             </a:r>
           </a:p>
@@ -5285,37 +5797,37 @@
       </p:sp>
       <p:sp>
         <p:nvSpPr>
-          <p:cNvPr id="21" name="">
-            <a:extLst xmlns:a="http://schemas.openxmlformats.org/drawingml/2006/main">
-              <a:ext uri="{FF2B5EF4-FFF2-40B4-BE49-F238E27FC236}">
-                <a16:creationId xmlns:a16="http://schemas.microsoft.com/office/drawing/2014/main" id="{22946D49-0151-4977-A166-B9CEB538D3E5}"/>
-              </a:ext>
-            </a:extLst>
-          </p:cNvPr>
-          <p:cNvSpPr>
-            <a:spLocks xmlns:a="http://schemas.openxmlformats.org/drawingml/2006/main" noGrp="1"/>
-          </p:cNvSpPr>
-          <p:nvPr/>
-        </p:nvSpPr>
-        <p:spPr>
-          <a:xfrm xmlns:a="http://schemas.openxmlformats.org/drawingml/2006/main">
-            <a:off x="9620250" y="2190750"/>
-            <a:ext cx="1295400" cy="609600"/>
-          </a:xfrm>
-          <a:prstGeom xmlns:a="http://schemas.openxmlformats.org/drawingml/2006/main" prst="rect">
-            <a:avLst/>
-          </a:prstGeom>
-          <a:noFill xmlns:a="http://schemas.openxmlformats.org/drawingml/2006/main"/>
-          <a:ln xmlns:a="http://schemas.openxmlformats.org/drawingml/2006/main" w="0">
-            <a:noFill/>
-            <a:prstDash val="solid"/>
-          </a:ln>
-        </p:spPr>
-        <p:txBody>
-          <a:bodyPr xmlns:a="http://schemas.openxmlformats.org/drawingml/2006/main"/>
-          <a:lstStyle xmlns:a="http://schemas.openxmlformats.org/drawingml/2006/main"/>
-          <a:p xmlns:a="http://schemas.openxmlformats.org/drawingml/2006/main">
-            <a:pPr algn="ctr">
+          <p:cNvPr id="32" name="">
+            <a:extLst xmlns:a="http://schemas.openxmlformats.org/drawingml/2006/main">
+              <a:ext uri="{FF2B5EF4-FFF2-40B4-BE49-F238E27FC236}">
+                <a16:creationId xmlns:a16="http://schemas.microsoft.com/office/drawing/2014/main" id="{83CEB6D5-FFD1-4FE5-8527-BF5A04A3908B}"/>
+              </a:ext>
+            </a:extLst>
+          </p:cNvPr>
+          <p:cNvSpPr>
+            <a:spLocks xmlns:a="http://schemas.openxmlformats.org/drawingml/2006/main" noGrp="1"/>
+          </p:cNvSpPr>
+          <p:nvPr/>
+        </p:nvSpPr>
+        <p:spPr>
+          <a:xfrm xmlns:a="http://schemas.openxmlformats.org/drawingml/2006/main">
+            <a:off x="4572000" y="4095750"/>
+            <a:ext cx="2781300" cy="285750"/>
+          </a:xfrm>
+          <a:prstGeom xmlns:a="http://schemas.openxmlformats.org/drawingml/2006/main" prst="rect">
+            <a:avLst/>
+          </a:prstGeom>
+          <a:noFill xmlns:a="http://schemas.openxmlformats.org/drawingml/2006/main"/>
+          <a:ln xmlns:a="http://schemas.openxmlformats.org/drawingml/2006/main" w="0">
+            <a:noFill/>
+            <a:prstDash val="solid"/>
+          </a:ln>
+        </p:spPr>
+        <p:txBody>
+          <a:bodyPr xmlns:a="http://schemas.openxmlformats.org/drawingml/2006/main"/>
+          <a:lstStyle xmlns:a="http://schemas.openxmlformats.org/drawingml/2006/main"/>
+          <a:p xmlns:a="http://schemas.openxmlformats.org/drawingml/2006/main">
+            <a:pPr>
               <a:defRPr sz="750" b="1">
                 <a:solidFill>
                   <a:srgbClr val="102A63"/>
@@ -5328,28 +5840,259 @@
                   <a:srgbClr val="102A63"/>
                 </a:solidFill>
               </a:rPr>
-              <a:t>{{ROADMAP_1_RESULT}}</a:t>
-            </a:r>
-          </a:p>
-        </p:txBody>
-      </p:sp>
-      <p:sp>
-        <p:nvSpPr>
-          <p:cNvPr id="22" name="">
-            <a:extLst xmlns:a="http://schemas.openxmlformats.org/drawingml/2006/main">
-              <a:ext uri="{FF2B5EF4-FFF2-40B4-BE49-F238E27FC236}">
-                <a16:creationId xmlns:a16="http://schemas.microsoft.com/office/drawing/2014/main" id="{22AED064-315C-4DB3-87A1-7956529CDA8F}"/>
-              </a:ext>
-            </a:extLst>
-          </p:cNvPr>
-          <p:cNvSpPr>
-            <a:spLocks xmlns:a="http://schemas.openxmlformats.org/drawingml/2006/main" noGrp="1"/>
-          </p:cNvSpPr>
-          <p:nvPr/>
-        </p:nvSpPr>
-        <p:spPr>
-          <a:xfrm xmlns:a="http://schemas.openxmlformats.org/drawingml/2006/main">
-            <a:off x="609600" y="3581400"/>
+              <a:t>{{ROADMAP_2_1_RESULT}}</a:t>
+            </a:r>
+          </a:p>
+        </p:txBody>
+      </p:sp>
+      <p:sp>
+        <p:nvSpPr>
+          <p:cNvPr id="33" name="">
+            <a:extLst xmlns:a="http://schemas.openxmlformats.org/drawingml/2006/main">
+              <a:ext uri="{FF2B5EF4-FFF2-40B4-BE49-F238E27FC236}">
+                <a16:creationId xmlns:a16="http://schemas.microsoft.com/office/drawing/2014/main" id="{D8F68C2B-D4D3-4685-971F-58FC1471C30A}"/>
+              </a:ext>
+            </a:extLst>
+          </p:cNvPr>
+          <p:cNvSpPr>
+            <a:spLocks xmlns:a="http://schemas.openxmlformats.org/drawingml/2006/main" noGrp="1"/>
+          </p:cNvSpPr>
+          <p:nvPr/>
+        </p:nvSpPr>
+        <p:spPr>
+          <a:xfrm xmlns:a="http://schemas.openxmlformats.org/drawingml/2006/main">
+            <a:off x="7543800" y="3371850"/>
+            <a:ext cx="9525" cy="952500"/>
+          </a:xfrm>
+          <a:prstGeom xmlns:a="http://schemas.openxmlformats.org/drawingml/2006/main" prst="rect">
+            <a:avLst/>
+          </a:prstGeom>
+          <a:solidFill xmlns:a="http://schemas.openxmlformats.org/drawingml/2006/main">
+            <a:srgbClr val="D7E0F2"/>
+          </a:solidFill>
+          <a:ln xmlns:a="http://schemas.openxmlformats.org/drawingml/2006/main" w="0">
+            <a:noFill/>
+            <a:prstDash val="solid"/>
+          </a:ln>
+        </p:spPr>
+      </p:sp>
+      <p:sp>
+        <p:nvSpPr>
+          <p:cNvPr id="34" name="">
+            <a:extLst xmlns:a="http://schemas.openxmlformats.org/drawingml/2006/main">
+              <a:ext uri="{FF2B5EF4-FFF2-40B4-BE49-F238E27FC236}">
+                <a16:creationId xmlns:a16="http://schemas.microsoft.com/office/drawing/2014/main" id="{0CDE2951-C29B-40B2-8565-6478986B4473}"/>
+              </a:ext>
+            </a:extLst>
+          </p:cNvPr>
+          <p:cNvSpPr>
+            <a:spLocks xmlns:a="http://schemas.openxmlformats.org/drawingml/2006/main" noGrp="1"/>
+          </p:cNvSpPr>
+          <p:nvPr/>
+        </p:nvSpPr>
+        <p:spPr>
+          <a:xfrm xmlns:a="http://schemas.openxmlformats.org/drawingml/2006/main">
+            <a:off x="7772400" y="3400425"/>
+            <a:ext cx="304800" cy="190500"/>
+          </a:xfrm>
+          <a:prstGeom xmlns:a="http://schemas.openxmlformats.org/drawingml/2006/main" prst="rect">
+            <a:avLst/>
+          </a:prstGeom>
+          <a:noFill xmlns:a="http://schemas.openxmlformats.org/drawingml/2006/main"/>
+          <a:ln xmlns:a="http://schemas.openxmlformats.org/drawingml/2006/main" w="0">
+            <a:noFill/>
+            <a:prstDash val="solid"/>
+          </a:ln>
+        </p:spPr>
+        <p:txBody>
+          <a:bodyPr xmlns:a="http://schemas.openxmlformats.org/drawingml/2006/main"/>
+          <a:lstStyle xmlns:a="http://schemas.openxmlformats.org/drawingml/2006/main"/>
+          <a:p xmlns:a="http://schemas.openxmlformats.org/drawingml/2006/main">
+            <a:pPr>
+              <a:defRPr sz="825" b="1">
+                <a:solidFill>
+                  <a:srgbClr val="2048A8"/>
+                </a:solidFill>
+              </a:defRPr>
+            </a:pPr>
+            <a:r>
+              <a:rPr sz="825" b="1">
+                <a:solidFill>
+                  <a:srgbClr val="2048A8"/>
+                </a:solidFill>
+              </a:rPr>
+              <a:t>02</a:t>
+            </a:r>
+          </a:p>
+        </p:txBody>
+      </p:sp>
+      <p:sp>
+        <p:nvSpPr>
+          <p:cNvPr id="35" name="">
+            <a:extLst xmlns:a="http://schemas.openxmlformats.org/drawingml/2006/main">
+              <a:ext uri="{FF2B5EF4-FFF2-40B4-BE49-F238E27FC236}">
+                <a16:creationId xmlns:a16="http://schemas.microsoft.com/office/drawing/2014/main" id="{6F733F13-35AD-47E6-97BA-AF790647E047}"/>
+              </a:ext>
+            </a:extLst>
+          </p:cNvPr>
+          <p:cNvSpPr>
+            <a:spLocks xmlns:a="http://schemas.openxmlformats.org/drawingml/2006/main" noGrp="1"/>
+          </p:cNvSpPr>
+          <p:nvPr/>
+        </p:nvSpPr>
+        <p:spPr>
+          <a:xfrm xmlns:a="http://schemas.openxmlformats.org/drawingml/2006/main">
+            <a:off x="8134350" y="3343275"/>
+            <a:ext cx="2705100" cy="533400"/>
+          </a:xfrm>
+          <a:prstGeom xmlns:a="http://schemas.openxmlformats.org/drawingml/2006/main" prst="rect">
+            <a:avLst/>
+          </a:prstGeom>
+          <a:noFill xmlns:a="http://schemas.openxmlformats.org/drawingml/2006/main"/>
+          <a:ln xmlns:a="http://schemas.openxmlformats.org/drawingml/2006/main" w="0">
+            <a:noFill/>
+            <a:prstDash val="solid"/>
+          </a:ln>
+        </p:spPr>
+        <p:txBody>
+          <a:bodyPr xmlns:a="http://schemas.openxmlformats.org/drawingml/2006/main"/>
+          <a:lstStyle xmlns:a="http://schemas.openxmlformats.org/drawingml/2006/main"/>
+          <a:p xmlns:a="http://schemas.openxmlformats.org/drawingml/2006/main">
+            <a:pPr>
+              <a:defRPr sz="900">
+                <a:solidFill>
+                  <a:srgbClr val="102A63"/>
+                </a:solidFill>
+              </a:defRPr>
+            </a:pPr>
+            <a:r>
+              <a:rPr sz="900">
+                <a:solidFill>
+                  <a:srgbClr val="102A63"/>
+                </a:solidFill>
+              </a:rPr>
+              <a:t>{{ROADMAP_2_2}}</a:t>
+            </a:r>
+          </a:p>
+        </p:txBody>
+      </p:sp>
+      <p:sp>
+        <p:nvSpPr>
+          <p:cNvPr id="36" name="">
+            <a:extLst xmlns:a="http://schemas.openxmlformats.org/drawingml/2006/main">
+              <a:ext uri="{FF2B5EF4-FFF2-40B4-BE49-F238E27FC236}">
+                <a16:creationId xmlns:a16="http://schemas.microsoft.com/office/drawing/2014/main" id="{C1057859-6FEF-42B8-98B0-2D8CE58B08EF}"/>
+              </a:ext>
+            </a:extLst>
+          </p:cNvPr>
+          <p:cNvSpPr>
+            <a:spLocks xmlns:a="http://schemas.openxmlformats.org/drawingml/2006/main" noGrp="1"/>
+          </p:cNvSpPr>
+          <p:nvPr/>
+        </p:nvSpPr>
+        <p:spPr>
+          <a:xfrm xmlns:a="http://schemas.openxmlformats.org/drawingml/2006/main">
+            <a:off x="8134350" y="3943350"/>
+            <a:ext cx="723900" cy="133350"/>
+          </a:xfrm>
+          <a:prstGeom xmlns:a="http://schemas.openxmlformats.org/drawingml/2006/main" prst="rect">
+            <a:avLst/>
+          </a:prstGeom>
+          <a:noFill xmlns:a="http://schemas.openxmlformats.org/drawingml/2006/main"/>
+          <a:ln xmlns:a="http://schemas.openxmlformats.org/drawingml/2006/main" w="0">
+            <a:noFill/>
+            <a:prstDash val="solid"/>
+          </a:ln>
+        </p:spPr>
+        <p:txBody>
+          <a:bodyPr xmlns:a="http://schemas.openxmlformats.org/drawingml/2006/main"/>
+          <a:lstStyle xmlns:a="http://schemas.openxmlformats.org/drawingml/2006/main"/>
+          <a:p xmlns:a="http://schemas.openxmlformats.org/drawingml/2006/main">
+            <a:pPr>
+              <a:defRPr sz="600" b="1">
+                <a:solidFill>
+                  <a:srgbClr val="2048A8"/>
+                </a:solidFill>
+              </a:defRPr>
+            </a:pPr>
+            <a:r>
+              <a:rPr sz="600" b="1">
+                <a:solidFill>
+                  <a:srgbClr val="2048A8"/>
+                </a:solidFill>
+              </a:rPr>
+              <a:t>РЕЗУЛЬТАТ</a:t>
+            </a:r>
+          </a:p>
+        </p:txBody>
+      </p:sp>
+      <p:sp>
+        <p:nvSpPr>
+          <p:cNvPr id="37" name="">
+            <a:extLst xmlns:a="http://schemas.openxmlformats.org/drawingml/2006/main">
+              <a:ext uri="{FF2B5EF4-FFF2-40B4-BE49-F238E27FC236}">
+                <a16:creationId xmlns:a16="http://schemas.microsoft.com/office/drawing/2014/main" id="{5B9E746A-DE69-4946-A0E6-AAD1A9B28016}"/>
+              </a:ext>
+            </a:extLst>
+          </p:cNvPr>
+          <p:cNvSpPr>
+            <a:spLocks xmlns:a="http://schemas.openxmlformats.org/drawingml/2006/main" noGrp="1"/>
+          </p:cNvSpPr>
+          <p:nvPr/>
+        </p:nvSpPr>
+        <p:spPr>
+          <a:xfrm xmlns:a="http://schemas.openxmlformats.org/drawingml/2006/main">
+            <a:off x="8134350" y="4095750"/>
+            <a:ext cx="2705100" cy="285750"/>
+          </a:xfrm>
+          <a:prstGeom xmlns:a="http://schemas.openxmlformats.org/drawingml/2006/main" prst="rect">
+            <a:avLst/>
+          </a:prstGeom>
+          <a:noFill xmlns:a="http://schemas.openxmlformats.org/drawingml/2006/main"/>
+          <a:ln xmlns:a="http://schemas.openxmlformats.org/drawingml/2006/main" w="0">
+            <a:noFill/>
+            <a:prstDash val="solid"/>
+          </a:ln>
+        </p:spPr>
+        <p:txBody>
+          <a:bodyPr xmlns:a="http://schemas.openxmlformats.org/drawingml/2006/main"/>
+          <a:lstStyle xmlns:a="http://schemas.openxmlformats.org/drawingml/2006/main"/>
+          <a:p xmlns:a="http://schemas.openxmlformats.org/drawingml/2006/main">
+            <a:pPr>
+              <a:defRPr sz="750" b="1">
+                <a:solidFill>
+                  <a:srgbClr val="102A63"/>
+                </a:solidFill>
+              </a:defRPr>
+            </a:pPr>
+            <a:r>
+              <a:rPr sz="750" b="1">
+                <a:solidFill>
+                  <a:srgbClr val="102A63"/>
+                </a:solidFill>
+              </a:rPr>
+              <a:t>{{ROADMAP_2_2_RESULT}}</a:t>
+            </a:r>
+          </a:p>
+        </p:txBody>
+      </p:sp>
+      <p:sp>
+        <p:nvSpPr>
+          <p:cNvPr id="38" name="">
+            <a:extLst xmlns:a="http://schemas.openxmlformats.org/drawingml/2006/main">
+              <a:ext uri="{FF2B5EF4-FFF2-40B4-BE49-F238E27FC236}">
+                <a16:creationId xmlns:a16="http://schemas.microsoft.com/office/drawing/2014/main" id="{38B81A36-4ECA-49DD-AE12-04AAA42014CC}"/>
+              </a:ext>
+            </a:extLst>
+          </p:cNvPr>
+          <p:cNvSpPr>
+            <a:spLocks xmlns:a="http://schemas.openxmlformats.org/drawingml/2006/main" noGrp="1"/>
+          </p:cNvSpPr>
+          <p:nvPr/>
+        </p:nvSpPr>
+        <p:spPr>
+          <a:xfrm xmlns:a="http://schemas.openxmlformats.org/drawingml/2006/main">
+            <a:off x="609600" y="5048250"/>
             <a:ext cx="514350" cy="514350"/>
           </a:xfrm>
           <a:prstGeom xmlns:a="http://schemas.openxmlformats.org/drawingml/2006/main" prst="ellipse">
@@ -5366,21 +6109,21 @@
       </p:sp>
       <p:sp>
         <p:nvSpPr>
-          <p:cNvPr id="23" name="">
-            <a:extLst xmlns:a="http://schemas.openxmlformats.org/drawingml/2006/main">
-              <a:ext uri="{FF2B5EF4-FFF2-40B4-BE49-F238E27FC236}">
-                <a16:creationId xmlns:a16="http://schemas.microsoft.com/office/drawing/2014/main" id="{599B698E-96AF-4372-BA8E-F680B4A8FF54}"/>
-              </a:ext>
-            </a:extLst>
-          </p:cNvPr>
-          <p:cNvSpPr>
-            <a:spLocks xmlns:a="http://schemas.openxmlformats.org/drawingml/2006/main" noGrp="1"/>
-          </p:cNvSpPr>
-          <p:nvPr/>
-        </p:nvSpPr>
-        <p:spPr>
-          <a:xfrm xmlns:a="http://schemas.openxmlformats.org/drawingml/2006/main">
-            <a:off x="704850" y="3705225"/>
+          <p:cNvPr id="39" name="">
+            <a:extLst xmlns:a="http://schemas.openxmlformats.org/drawingml/2006/main">
+              <a:ext uri="{FF2B5EF4-FFF2-40B4-BE49-F238E27FC236}">
+                <a16:creationId xmlns:a16="http://schemas.microsoft.com/office/drawing/2014/main" id="{AF2351F9-65C8-4962-B803-8799A3ED804D}"/>
+              </a:ext>
+            </a:extLst>
+          </p:cNvPr>
+          <p:cNvSpPr>
+            <a:spLocks xmlns:a="http://schemas.openxmlformats.org/drawingml/2006/main" noGrp="1"/>
+          </p:cNvSpPr>
+          <p:nvPr/>
+        </p:nvSpPr>
+        <p:spPr>
+          <a:xfrm xmlns:a="http://schemas.openxmlformats.org/drawingml/2006/main">
+            <a:off x="704850" y="5172075"/>
             <a:ext cx="323850" cy="228600"/>
           </a:xfrm>
           <a:prstGeom xmlns:a="http://schemas.openxmlformats.org/drawingml/2006/main" prst="rect">
@@ -5409,28 +6152,28 @@
                   <a:srgbClr val="FFFFFF"/>
                 </a:solidFill>
               </a:rPr>
-              <a:t>2</a:t>
-            </a:r>
-          </a:p>
-        </p:txBody>
-      </p:sp>
-      <p:sp>
-        <p:nvSpPr>
-          <p:cNvPr id="24" name="">
-            <a:extLst xmlns:a="http://schemas.openxmlformats.org/drawingml/2006/main">
-              <a:ext uri="{FF2B5EF4-FFF2-40B4-BE49-F238E27FC236}">
-                <a16:creationId xmlns:a16="http://schemas.microsoft.com/office/drawing/2014/main" id="{A74700DF-5469-4392-8216-DB49F999D2A0}"/>
-              </a:ext>
-            </a:extLst>
-          </p:cNvPr>
-          <p:cNvSpPr>
-            <a:spLocks xmlns:a="http://schemas.openxmlformats.org/drawingml/2006/main" noGrp="1"/>
-          </p:cNvSpPr>
-          <p:nvPr/>
-        </p:nvSpPr>
-        <p:spPr>
-          <a:xfrm xmlns:a="http://schemas.openxmlformats.org/drawingml/2006/main">
-            <a:off x="1390650" y="3219450"/>
+              <a:t>3</a:t>
+            </a:r>
+          </a:p>
+        </p:txBody>
+      </p:sp>
+      <p:sp>
+        <p:nvSpPr>
+          <p:cNvPr id="40" name="">
+            <a:extLst xmlns:a="http://schemas.openxmlformats.org/drawingml/2006/main">
+              <a:ext uri="{FF2B5EF4-FFF2-40B4-BE49-F238E27FC236}">
+                <a16:creationId xmlns:a16="http://schemas.microsoft.com/office/drawing/2014/main" id="{B951EADD-CBDD-44C8-9756-AA28F51FA56C}"/>
+              </a:ext>
+            </a:extLst>
+          </p:cNvPr>
+          <p:cNvSpPr>
+            <a:spLocks xmlns:a="http://schemas.openxmlformats.org/drawingml/2006/main" noGrp="1"/>
+          </p:cNvSpPr>
+          <p:nvPr/>
+        </p:nvSpPr>
+        <p:spPr>
+          <a:xfrm xmlns:a="http://schemas.openxmlformats.org/drawingml/2006/main">
+            <a:off x="1390650" y="4686300"/>
             <a:ext cx="9810750" cy="1257300"/>
           </a:xfrm>
           <a:prstGeom xmlns:a="http://schemas.openxmlformats.org/drawingml/2006/main" prst="roundRect">
@@ -5451,561 +6194,10 @@
       </p:sp>
       <p:sp>
         <p:nvSpPr>
-          <p:cNvPr id="25" name="">
-            <a:extLst xmlns:a="http://schemas.openxmlformats.org/drawingml/2006/main">
-              <a:ext uri="{FF2B5EF4-FFF2-40B4-BE49-F238E27FC236}">
-                <a16:creationId xmlns:a16="http://schemas.microsoft.com/office/drawing/2014/main" id="{C1C6BCF3-DCB9-49A4-8491-A0A9CE90E074}"/>
-              </a:ext>
-            </a:extLst>
-          </p:cNvPr>
-          <p:cNvSpPr>
-            <a:spLocks xmlns:a="http://schemas.openxmlformats.org/drawingml/2006/main" noGrp="1"/>
-          </p:cNvSpPr>
-          <p:nvPr/>
-        </p:nvSpPr>
-        <p:spPr>
-          <a:xfrm xmlns:a="http://schemas.openxmlformats.org/drawingml/2006/main">
-            <a:off x="1619250" y="3371850"/>
-            <a:ext cx="1409700" cy="228600"/>
-          </a:xfrm>
-          <a:prstGeom xmlns:a="http://schemas.openxmlformats.org/drawingml/2006/main" prst="rect">
-            <a:avLst/>
-          </a:prstGeom>
-          <a:noFill xmlns:a="http://schemas.openxmlformats.org/drawingml/2006/main"/>
-          <a:ln xmlns:a="http://schemas.openxmlformats.org/drawingml/2006/main" w="0">
-            <a:noFill/>
-            <a:prstDash val="solid"/>
-          </a:ln>
-        </p:spPr>
-        <p:txBody>
-          <a:bodyPr xmlns:a="http://schemas.openxmlformats.org/drawingml/2006/main"/>
-          <a:lstStyle xmlns:a="http://schemas.openxmlformats.org/drawingml/2006/main"/>
-          <a:p xmlns:a="http://schemas.openxmlformats.org/drawingml/2006/main">
-            <a:pPr>
-              <a:defRPr sz="1125" b="1">
-                <a:solidFill>
-                  <a:srgbClr val="2048A8"/>
-                </a:solidFill>
-              </a:defRPr>
-            </a:pPr>
-            <a:r>
-              <a:rPr sz="1125" b="1">
-                <a:solidFill>
-                  <a:srgbClr val="2048A8"/>
-                </a:solidFill>
-              </a:rPr>
-              <a:t>31–60 дней</a:t>
-            </a:r>
-          </a:p>
-        </p:txBody>
-      </p:sp>
-      <p:sp>
-        <p:nvSpPr>
-          <p:cNvPr id="26" name="">
-            <a:extLst xmlns:a="http://schemas.openxmlformats.org/drawingml/2006/main">
-              <a:ext uri="{FF2B5EF4-FFF2-40B4-BE49-F238E27FC236}">
-                <a16:creationId xmlns:a16="http://schemas.microsoft.com/office/drawing/2014/main" id="{02D680B4-08A1-4179-8F0D-375CEA3A17A0}"/>
-              </a:ext>
-            </a:extLst>
-          </p:cNvPr>
-          <p:cNvSpPr>
-            <a:spLocks xmlns:a="http://schemas.openxmlformats.org/drawingml/2006/main" noGrp="1"/>
-          </p:cNvSpPr>
-          <p:nvPr/>
-        </p:nvSpPr>
-        <p:spPr>
-          <a:xfrm xmlns:a="http://schemas.openxmlformats.org/drawingml/2006/main">
-            <a:off x="1619250" y="3657600"/>
-            <a:ext cx="2381250" cy="495300"/>
-          </a:xfrm>
-          <a:prstGeom xmlns:a="http://schemas.openxmlformats.org/drawingml/2006/main" prst="rect">
-            <a:avLst/>
-          </a:prstGeom>
-          <a:noFill xmlns:a="http://schemas.openxmlformats.org/drawingml/2006/main"/>
-          <a:ln xmlns:a="http://schemas.openxmlformats.org/drawingml/2006/main" w="0">
-            <a:noFill/>
-            <a:prstDash val="solid"/>
-          </a:ln>
-        </p:spPr>
-        <p:txBody>
-          <a:bodyPr xmlns:a="http://schemas.openxmlformats.org/drawingml/2006/main"/>
-          <a:lstStyle xmlns:a="http://schemas.openxmlformats.org/drawingml/2006/main"/>
-          <a:p xmlns:a="http://schemas.openxmlformats.org/drawingml/2006/main">
-            <a:pPr>
-              <a:defRPr sz="1125" b="1">
-                <a:solidFill>
-                  <a:srgbClr val="102A63"/>
-                </a:solidFill>
-              </a:defRPr>
-            </a:pPr>
-            <a:r>
-              <a:rPr sz="1125" b="1">
-                <a:solidFill>
-                  <a:srgbClr val="102A63"/>
-                </a:solidFill>
-              </a:rPr>
-              <a:t>ПИЛОТЫ И РЕГЛАМЕНТЫ</a:t>
-            </a:r>
-          </a:p>
-        </p:txBody>
-      </p:sp>
-      <p:sp>
-        <p:nvSpPr>
-          <p:cNvPr id="27" name="">
-            <a:extLst xmlns:a="http://schemas.openxmlformats.org/drawingml/2006/main">
-              <a:ext uri="{FF2B5EF4-FFF2-40B4-BE49-F238E27FC236}">
-                <a16:creationId xmlns:a16="http://schemas.microsoft.com/office/drawing/2014/main" id="{FA8EDC71-1CF0-4D5B-8D38-0D88C23B8AD1}"/>
-              </a:ext>
-            </a:extLst>
-          </p:cNvPr>
-          <p:cNvSpPr>
-            <a:spLocks xmlns:a="http://schemas.openxmlformats.org/drawingml/2006/main" noGrp="1"/>
-          </p:cNvSpPr>
-          <p:nvPr/>
-        </p:nvSpPr>
-        <p:spPr>
-          <a:xfrm xmlns:a="http://schemas.openxmlformats.org/drawingml/2006/main">
-            <a:off x="4210050" y="3419475"/>
-            <a:ext cx="304800" cy="190500"/>
-          </a:xfrm>
-          <a:prstGeom xmlns:a="http://schemas.openxmlformats.org/drawingml/2006/main" prst="rect">
-            <a:avLst/>
-          </a:prstGeom>
-          <a:noFill xmlns:a="http://schemas.openxmlformats.org/drawingml/2006/main"/>
-          <a:ln xmlns:a="http://schemas.openxmlformats.org/drawingml/2006/main" w="0">
-            <a:noFill/>
-            <a:prstDash val="solid"/>
-          </a:ln>
-        </p:spPr>
-        <p:txBody>
-          <a:bodyPr xmlns:a="http://schemas.openxmlformats.org/drawingml/2006/main"/>
-          <a:lstStyle xmlns:a="http://schemas.openxmlformats.org/drawingml/2006/main"/>
-          <a:p xmlns:a="http://schemas.openxmlformats.org/drawingml/2006/main">
-            <a:pPr>
-              <a:defRPr sz="825" b="1">
-                <a:solidFill>
-                  <a:srgbClr val="2048A8"/>
-                </a:solidFill>
-              </a:defRPr>
-            </a:pPr>
-            <a:r>
-              <a:rPr sz="825" b="1">
-                <a:solidFill>
-                  <a:srgbClr val="2048A8"/>
-                </a:solidFill>
-              </a:rPr>
-              <a:t>01</a:t>
-            </a:r>
-          </a:p>
-        </p:txBody>
-      </p:sp>
-      <p:sp>
-        <p:nvSpPr>
-          <p:cNvPr id="28" name="">
-            <a:extLst xmlns:a="http://schemas.openxmlformats.org/drawingml/2006/main">
-              <a:ext uri="{FF2B5EF4-FFF2-40B4-BE49-F238E27FC236}">
-                <a16:creationId xmlns:a16="http://schemas.microsoft.com/office/drawing/2014/main" id="{728A9B48-1A06-411E-A6D2-1958DE903993}"/>
-              </a:ext>
-            </a:extLst>
-          </p:cNvPr>
-          <p:cNvSpPr>
-            <a:spLocks xmlns:a="http://schemas.openxmlformats.org/drawingml/2006/main" noGrp="1"/>
-          </p:cNvSpPr>
-          <p:nvPr/>
-        </p:nvSpPr>
-        <p:spPr>
-          <a:xfrm xmlns:a="http://schemas.openxmlformats.org/drawingml/2006/main">
-            <a:off x="4572000" y="3362325"/>
-            <a:ext cx="2362200" cy="895350"/>
-          </a:xfrm>
-          <a:prstGeom xmlns:a="http://schemas.openxmlformats.org/drawingml/2006/main" prst="rect">
-            <a:avLst/>
-          </a:prstGeom>
-          <a:noFill xmlns:a="http://schemas.openxmlformats.org/drawingml/2006/main"/>
-          <a:ln xmlns:a="http://schemas.openxmlformats.org/drawingml/2006/main" w="0">
-            <a:noFill/>
-            <a:prstDash val="solid"/>
-          </a:ln>
-        </p:spPr>
-        <p:txBody>
-          <a:bodyPr xmlns:a="http://schemas.openxmlformats.org/drawingml/2006/main"/>
-          <a:lstStyle xmlns:a="http://schemas.openxmlformats.org/drawingml/2006/main"/>
-          <a:p xmlns:a="http://schemas.openxmlformats.org/drawingml/2006/main">
-            <a:pPr>
-              <a:defRPr sz="975">
-                <a:solidFill>
-                  <a:srgbClr val="102A63"/>
-                </a:solidFill>
-              </a:defRPr>
-            </a:pPr>
-            <a:r>
-              <a:rPr sz="975">
-                <a:solidFill>
-                  <a:srgbClr val="102A63"/>
-                </a:solidFill>
-              </a:rPr>
-              <a:t>{{ROADMAP_2_1}}</a:t>
-            </a:r>
-          </a:p>
-        </p:txBody>
-      </p:sp>
-      <p:sp>
-        <p:nvSpPr>
-          <p:cNvPr id="29" name="">
-            <a:extLst xmlns:a="http://schemas.openxmlformats.org/drawingml/2006/main">
-              <a:ext uri="{FF2B5EF4-FFF2-40B4-BE49-F238E27FC236}">
-                <a16:creationId xmlns:a16="http://schemas.microsoft.com/office/drawing/2014/main" id="{19C8DDD3-5AFC-4CF9-B1EC-1F682F53BF97}"/>
-              </a:ext>
-            </a:extLst>
-          </p:cNvPr>
-          <p:cNvSpPr>
-            <a:spLocks xmlns:a="http://schemas.openxmlformats.org/drawingml/2006/main" noGrp="1"/>
-          </p:cNvSpPr>
-          <p:nvPr/>
-        </p:nvSpPr>
-        <p:spPr>
-          <a:xfrm xmlns:a="http://schemas.openxmlformats.org/drawingml/2006/main">
-            <a:off x="7124700" y="3419475"/>
-            <a:ext cx="304800" cy="190500"/>
-          </a:xfrm>
-          <a:prstGeom xmlns:a="http://schemas.openxmlformats.org/drawingml/2006/main" prst="rect">
-            <a:avLst/>
-          </a:prstGeom>
-          <a:noFill xmlns:a="http://schemas.openxmlformats.org/drawingml/2006/main"/>
-          <a:ln xmlns:a="http://schemas.openxmlformats.org/drawingml/2006/main" w="0">
-            <a:noFill/>
-            <a:prstDash val="solid"/>
-          </a:ln>
-        </p:spPr>
-        <p:txBody>
-          <a:bodyPr xmlns:a="http://schemas.openxmlformats.org/drawingml/2006/main"/>
-          <a:lstStyle xmlns:a="http://schemas.openxmlformats.org/drawingml/2006/main"/>
-          <a:p xmlns:a="http://schemas.openxmlformats.org/drawingml/2006/main">
-            <a:pPr>
-              <a:defRPr sz="825" b="1">
-                <a:solidFill>
-                  <a:srgbClr val="2048A8"/>
-                </a:solidFill>
-              </a:defRPr>
-            </a:pPr>
-            <a:r>
-              <a:rPr sz="825" b="1">
-                <a:solidFill>
-                  <a:srgbClr val="2048A8"/>
-                </a:solidFill>
-              </a:rPr>
-              <a:t>02</a:t>
-            </a:r>
-          </a:p>
-        </p:txBody>
-      </p:sp>
-      <p:sp>
-        <p:nvSpPr>
-          <p:cNvPr id="30" name="">
-            <a:extLst xmlns:a="http://schemas.openxmlformats.org/drawingml/2006/main">
-              <a:ext uri="{FF2B5EF4-FFF2-40B4-BE49-F238E27FC236}">
-                <a16:creationId xmlns:a16="http://schemas.microsoft.com/office/drawing/2014/main" id="{65895390-34A2-48D1-AE03-62F360DF91FE}"/>
-              </a:ext>
-            </a:extLst>
-          </p:cNvPr>
-          <p:cNvSpPr>
-            <a:spLocks xmlns:a="http://schemas.openxmlformats.org/drawingml/2006/main" noGrp="1"/>
-          </p:cNvSpPr>
-          <p:nvPr/>
-        </p:nvSpPr>
-        <p:spPr>
-          <a:xfrm xmlns:a="http://schemas.openxmlformats.org/drawingml/2006/main">
-            <a:off x="7486650" y="3362325"/>
-            <a:ext cx="1847850" cy="895350"/>
-          </a:xfrm>
-          <a:prstGeom xmlns:a="http://schemas.openxmlformats.org/drawingml/2006/main" prst="rect">
-            <a:avLst/>
-          </a:prstGeom>
-          <a:noFill xmlns:a="http://schemas.openxmlformats.org/drawingml/2006/main"/>
-          <a:ln xmlns:a="http://schemas.openxmlformats.org/drawingml/2006/main" w="0">
-            <a:noFill/>
-            <a:prstDash val="solid"/>
-          </a:ln>
-        </p:spPr>
-        <p:txBody>
-          <a:bodyPr xmlns:a="http://schemas.openxmlformats.org/drawingml/2006/main"/>
-          <a:lstStyle xmlns:a="http://schemas.openxmlformats.org/drawingml/2006/main"/>
-          <a:p xmlns:a="http://schemas.openxmlformats.org/drawingml/2006/main">
-            <a:pPr>
-              <a:defRPr sz="975">
-                <a:solidFill>
-                  <a:srgbClr val="102A63"/>
-                </a:solidFill>
-              </a:defRPr>
-            </a:pPr>
-            <a:r>
-              <a:rPr sz="975">
-                <a:solidFill>
-                  <a:srgbClr val="102A63"/>
-                </a:solidFill>
-              </a:rPr>
-              <a:t>{{ROADMAP_2_2}}</a:t>
-            </a:r>
-          </a:p>
-        </p:txBody>
-      </p:sp>
-      <p:sp>
-        <p:nvSpPr>
-          <p:cNvPr id="31" name="">
-            <a:extLst xmlns:a="http://schemas.openxmlformats.org/drawingml/2006/main">
-              <a:ext uri="{FF2B5EF4-FFF2-40B4-BE49-F238E27FC236}">
-                <a16:creationId xmlns:a16="http://schemas.microsoft.com/office/drawing/2014/main" id="{4E0F78E0-3655-4E8D-BB48-C5277BD86365}"/>
-              </a:ext>
-            </a:extLst>
-          </p:cNvPr>
-          <p:cNvSpPr>
-            <a:spLocks xmlns:a="http://schemas.openxmlformats.org/drawingml/2006/main" noGrp="1"/>
-          </p:cNvSpPr>
-          <p:nvPr/>
-        </p:nvSpPr>
-        <p:spPr>
-          <a:xfrm xmlns:a="http://schemas.openxmlformats.org/drawingml/2006/main">
-            <a:off x="9505950" y="3352800"/>
-            <a:ext cx="1524000" cy="990600"/>
-          </a:xfrm>
-          <a:prstGeom xmlns:a="http://schemas.openxmlformats.org/drawingml/2006/main" prst="roundRect">
-            <a:avLst>
-              <a:gd name="adj" fmla="val 7692"/>
-            </a:avLst>
-          </a:prstGeom>
-          <a:solidFill xmlns:a="http://schemas.openxmlformats.org/drawingml/2006/main">
-            <a:srgbClr val="FFFFFF"/>
-          </a:solidFill>
-          <a:ln xmlns:a="http://schemas.openxmlformats.org/drawingml/2006/main" w="9525">
-            <a:solidFill>
-              <a:srgbClr val="D7E0F2"/>
-            </a:solidFill>
-            <a:prstDash val="solid"/>
-          </a:ln>
-        </p:spPr>
-      </p:sp>
-      <p:sp>
-        <p:nvSpPr>
-          <p:cNvPr id="32" name="">
-            <a:extLst xmlns:a="http://schemas.openxmlformats.org/drawingml/2006/main">
-              <a:ext uri="{FF2B5EF4-FFF2-40B4-BE49-F238E27FC236}">
-                <a16:creationId xmlns:a16="http://schemas.microsoft.com/office/drawing/2014/main" id="{AEE0D45C-DD45-4DA5-BB0E-D92079B8409D}"/>
-              </a:ext>
-            </a:extLst>
-          </p:cNvPr>
-          <p:cNvSpPr>
-            <a:spLocks xmlns:a="http://schemas.openxmlformats.org/drawingml/2006/main" noGrp="1"/>
-          </p:cNvSpPr>
-          <p:nvPr/>
-        </p:nvSpPr>
-        <p:spPr>
-          <a:xfrm xmlns:a="http://schemas.openxmlformats.org/drawingml/2006/main">
-            <a:off x="9620250" y="3448050"/>
-            <a:ext cx="1295400" cy="171450"/>
-          </a:xfrm>
-          <a:prstGeom xmlns:a="http://schemas.openxmlformats.org/drawingml/2006/main" prst="rect">
-            <a:avLst/>
-          </a:prstGeom>
-          <a:noFill xmlns:a="http://schemas.openxmlformats.org/drawingml/2006/main"/>
-          <a:ln xmlns:a="http://schemas.openxmlformats.org/drawingml/2006/main" w="0">
-            <a:noFill/>
-            <a:prstDash val="solid"/>
-          </a:ln>
-        </p:spPr>
-        <p:txBody>
-          <a:bodyPr xmlns:a="http://schemas.openxmlformats.org/drawingml/2006/main"/>
-          <a:lstStyle xmlns:a="http://schemas.openxmlformats.org/drawingml/2006/main"/>
-          <a:p xmlns:a="http://schemas.openxmlformats.org/drawingml/2006/main">
-            <a:pPr algn="ctr">
-              <a:defRPr sz="675" b="1">
-                <a:solidFill>
-                  <a:srgbClr val="2048A8"/>
-                </a:solidFill>
-              </a:defRPr>
-            </a:pPr>
-            <a:r>
-              <a:rPr sz="675" b="1">
-                <a:solidFill>
-                  <a:srgbClr val="2048A8"/>
-                </a:solidFill>
-              </a:rPr>
-              <a:t>РЕЗУЛЬТАТ</a:t>
-            </a:r>
-          </a:p>
-        </p:txBody>
-      </p:sp>
-      <p:sp>
-        <p:nvSpPr>
-          <p:cNvPr id="33" name="">
-            <a:extLst xmlns:a="http://schemas.openxmlformats.org/drawingml/2006/main">
-              <a:ext uri="{FF2B5EF4-FFF2-40B4-BE49-F238E27FC236}">
-                <a16:creationId xmlns:a16="http://schemas.microsoft.com/office/drawing/2014/main" id="{9519398E-E1B7-4E4B-B422-F3BEDCD26A42}"/>
-              </a:ext>
-            </a:extLst>
-          </p:cNvPr>
-          <p:cNvSpPr>
-            <a:spLocks xmlns:a="http://schemas.openxmlformats.org/drawingml/2006/main" noGrp="1"/>
-          </p:cNvSpPr>
-          <p:nvPr/>
-        </p:nvSpPr>
-        <p:spPr>
-          <a:xfrm xmlns:a="http://schemas.openxmlformats.org/drawingml/2006/main">
-            <a:off x="9620250" y="3657600"/>
-            <a:ext cx="1295400" cy="609600"/>
-          </a:xfrm>
-          <a:prstGeom xmlns:a="http://schemas.openxmlformats.org/drawingml/2006/main" prst="rect">
-            <a:avLst/>
-          </a:prstGeom>
-          <a:noFill xmlns:a="http://schemas.openxmlformats.org/drawingml/2006/main"/>
-          <a:ln xmlns:a="http://schemas.openxmlformats.org/drawingml/2006/main" w="0">
-            <a:noFill/>
-            <a:prstDash val="solid"/>
-          </a:ln>
-        </p:spPr>
-        <p:txBody>
-          <a:bodyPr xmlns:a="http://schemas.openxmlformats.org/drawingml/2006/main"/>
-          <a:lstStyle xmlns:a="http://schemas.openxmlformats.org/drawingml/2006/main"/>
-          <a:p xmlns:a="http://schemas.openxmlformats.org/drawingml/2006/main">
-            <a:pPr algn="ctr">
-              <a:defRPr sz="750" b="1">
-                <a:solidFill>
-                  <a:srgbClr val="102A63"/>
-                </a:solidFill>
-              </a:defRPr>
-            </a:pPr>
-            <a:r>
-              <a:rPr sz="750" b="1">
-                <a:solidFill>
-                  <a:srgbClr val="102A63"/>
-                </a:solidFill>
-              </a:rPr>
-              <a:t>{{ROADMAP_2_RESULT}}</a:t>
-            </a:r>
-          </a:p>
-        </p:txBody>
-      </p:sp>
-      <p:sp>
-        <p:nvSpPr>
-          <p:cNvPr id="34" name="">
-            <a:extLst xmlns:a="http://schemas.openxmlformats.org/drawingml/2006/main">
-              <a:ext uri="{FF2B5EF4-FFF2-40B4-BE49-F238E27FC236}">
-                <a16:creationId xmlns:a16="http://schemas.microsoft.com/office/drawing/2014/main" id="{D6634557-2324-4584-ACDF-242E1C389931}"/>
-              </a:ext>
-            </a:extLst>
-          </p:cNvPr>
-          <p:cNvSpPr>
-            <a:spLocks xmlns:a="http://schemas.openxmlformats.org/drawingml/2006/main" noGrp="1"/>
-          </p:cNvSpPr>
-          <p:nvPr/>
-        </p:nvSpPr>
-        <p:spPr>
-          <a:xfrm xmlns:a="http://schemas.openxmlformats.org/drawingml/2006/main">
-            <a:off x="609600" y="5048250"/>
-            <a:ext cx="514350" cy="514350"/>
-          </a:xfrm>
-          <a:prstGeom xmlns:a="http://schemas.openxmlformats.org/drawingml/2006/main" prst="ellipse">
-            <a:avLst/>
-          </a:prstGeom>
-          <a:solidFill xmlns:a="http://schemas.openxmlformats.org/drawingml/2006/main">
-            <a:srgbClr val="102A63"/>
-          </a:solidFill>
-          <a:ln xmlns:a="http://schemas.openxmlformats.org/drawingml/2006/main" w="0">
-            <a:noFill/>
-            <a:prstDash val="solid"/>
-          </a:ln>
-        </p:spPr>
-      </p:sp>
-      <p:sp>
-        <p:nvSpPr>
-          <p:cNvPr id="35" name="">
-            <a:extLst xmlns:a="http://schemas.openxmlformats.org/drawingml/2006/main">
-              <a:ext uri="{FF2B5EF4-FFF2-40B4-BE49-F238E27FC236}">
-                <a16:creationId xmlns:a16="http://schemas.microsoft.com/office/drawing/2014/main" id="{6D6E3AAD-C004-4276-8839-DB93A209643E}"/>
-              </a:ext>
-            </a:extLst>
-          </p:cNvPr>
-          <p:cNvSpPr>
-            <a:spLocks xmlns:a="http://schemas.openxmlformats.org/drawingml/2006/main" noGrp="1"/>
-          </p:cNvSpPr>
-          <p:nvPr/>
-        </p:nvSpPr>
-        <p:spPr>
-          <a:xfrm xmlns:a="http://schemas.openxmlformats.org/drawingml/2006/main">
-            <a:off x="704850" y="5172075"/>
-            <a:ext cx="323850" cy="228600"/>
-          </a:xfrm>
-          <a:prstGeom xmlns:a="http://schemas.openxmlformats.org/drawingml/2006/main" prst="rect">
-            <a:avLst/>
-          </a:prstGeom>
-          <a:noFill xmlns:a="http://schemas.openxmlformats.org/drawingml/2006/main"/>
-          <a:ln xmlns:a="http://schemas.openxmlformats.org/drawingml/2006/main" w="0">
-            <a:noFill/>
-            <a:prstDash val="solid"/>
-          </a:ln>
-        </p:spPr>
-        <p:txBody>
-          <a:bodyPr xmlns:a="http://schemas.openxmlformats.org/drawingml/2006/main"/>
-          <a:lstStyle xmlns:a="http://schemas.openxmlformats.org/drawingml/2006/main"/>
-          <a:p xmlns:a="http://schemas.openxmlformats.org/drawingml/2006/main">
-            <a:pPr algn="ctr">
-              <a:defRPr sz="1200" b="1">
-                <a:solidFill>
-                  <a:srgbClr val="FFFFFF"/>
-                </a:solidFill>
-              </a:defRPr>
-            </a:pPr>
-            <a:r>
-              <a:rPr sz="1200" b="1">
-                <a:solidFill>
-                  <a:srgbClr val="FFFFFF"/>
-                </a:solidFill>
-              </a:rPr>
-              <a:t>3</a:t>
-            </a:r>
-          </a:p>
-        </p:txBody>
-      </p:sp>
-      <p:sp>
-        <p:nvSpPr>
-          <p:cNvPr id="36" name="">
-            <a:extLst xmlns:a="http://schemas.openxmlformats.org/drawingml/2006/main">
-              <a:ext uri="{FF2B5EF4-FFF2-40B4-BE49-F238E27FC236}">
-                <a16:creationId xmlns:a16="http://schemas.microsoft.com/office/drawing/2014/main" id="{21A39BFF-65B5-4112-8EB7-83F90E03998C}"/>
-              </a:ext>
-            </a:extLst>
-          </p:cNvPr>
-          <p:cNvSpPr>
-            <a:spLocks xmlns:a="http://schemas.openxmlformats.org/drawingml/2006/main" noGrp="1"/>
-          </p:cNvSpPr>
-          <p:nvPr/>
-        </p:nvSpPr>
-        <p:spPr>
-          <a:xfrm xmlns:a="http://schemas.openxmlformats.org/drawingml/2006/main">
-            <a:off x="1390650" y="4686300"/>
-            <a:ext cx="9810750" cy="1257300"/>
-          </a:xfrm>
-          <a:prstGeom xmlns:a="http://schemas.openxmlformats.org/drawingml/2006/main" prst="roundRect">
-            <a:avLst>
-              <a:gd name="adj" fmla="val 6061"/>
-            </a:avLst>
-          </a:prstGeom>
-          <a:solidFill xmlns:a="http://schemas.openxmlformats.org/drawingml/2006/main">
-            <a:srgbClr val="FFFFFF"/>
-          </a:solidFill>
-          <a:ln xmlns:a="http://schemas.openxmlformats.org/drawingml/2006/main" w="9525">
-            <a:solidFill>
-              <a:srgbClr val="D7E0F2"/>
-            </a:solidFill>
-            <a:prstDash val="solid"/>
-          </a:ln>
-        </p:spPr>
-      </p:sp>
-      <p:sp>
-        <p:nvSpPr>
-          <p:cNvPr id="37" name="">
-            <a:extLst xmlns:a="http://schemas.openxmlformats.org/drawingml/2006/main">
-              <a:ext uri="{FF2B5EF4-FFF2-40B4-BE49-F238E27FC236}">
-                <a16:creationId xmlns:a16="http://schemas.microsoft.com/office/drawing/2014/main" id="{844C30D9-8E7B-411D-8FBE-9A96D88840AE}"/>
+          <p:cNvPr id="41" name="">
+            <a:extLst xmlns:a="http://schemas.openxmlformats.org/drawingml/2006/main">
+              <a:ext uri="{FF2B5EF4-FFF2-40B4-BE49-F238E27FC236}">
+                <a16:creationId xmlns:a16="http://schemas.microsoft.com/office/drawing/2014/main" id="{437C0B43-AC2C-4CF9-B19F-D26E6D4400FD}"/>
               </a:ext>
             </a:extLst>
           </p:cNvPr>
@@ -6052,10 +6244,10 @@
       </p:sp>
       <p:sp>
         <p:nvSpPr>
-          <p:cNvPr id="38" name="">
-            <a:extLst xmlns:a="http://schemas.openxmlformats.org/drawingml/2006/main">
-              <a:ext uri="{FF2B5EF4-FFF2-40B4-BE49-F238E27FC236}">
-                <a16:creationId xmlns:a16="http://schemas.microsoft.com/office/drawing/2014/main" id="{9FCA5812-86D8-4387-9E9B-DA21D20D8C09}"/>
+          <p:cNvPr id="42" name="">
+            <a:extLst xmlns:a="http://schemas.openxmlformats.org/drawingml/2006/main">
+              <a:ext uri="{FF2B5EF4-FFF2-40B4-BE49-F238E27FC236}">
+                <a16:creationId xmlns:a16="http://schemas.microsoft.com/office/drawing/2014/main" id="{D34E4B61-6009-4DF9-B4AD-FA27E2A5873E}"/>
               </a:ext>
             </a:extLst>
           </p:cNvPr>
@@ -6102,21 +6294,21 @@
       </p:sp>
       <p:sp>
         <p:nvSpPr>
-          <p:cNvPr id="39" name="">
-            <a:extLst xmlns:a="http://schemas.openxmlformats.org/drawingml/2006/main">
-              <a:ext uri="{FF2B5EF4-FFF2-40B4-BE49-F238E27FC236}">
-                <a16:creationId xmlns:a16="http://schemas.microsoft.com/office/drawing/2014/main" id="{4351EA98-14D2-446C-9A75-ACE92B835A3D}"/>
-              </a:ext>
-            </a:extLst>
-          </p:cNvPr>
-          <p:cNvSpPr>
-            <a:spLocks xmlns:a="http://schemas.openxmlformats.org/drawingml/2006/main" noGrp="1"/>
-          </p:cNvSpPr>
-          <p:nvPr/>
-        </p:nvSpPr>
-        <p:spPr>
-          <a:xfrm xmlns:a="http://schemas.openxmlformats.org/drawingml/2006/main">
-            <a:off x="4210050" y="4886325"/>
+          <p:cNvPr id="43" name="">
+            <a:extLst xmlns:a="http://schemas.openxmlformats.org/drawingml/2006/main">
+              <a:ext uri="{FF2B5EF4-FFF2-40B4-BE49-F238E27FC236}">
+                <a16:creationId xmlns:a16="http://schemas.microsoft.com/office/drawing/2014/main" id="{4FB97CD6-B642-4F9A-8CA7-77A7DECA7496}"/>
+              </a:ext>
+            </a:extLst>
+          </p:cNvPr>
+          <p:cNvSpPr>
+            <a:spLocks xmlns:a="http://schemas.openxmlformats.org/drawingml/2006/main" noGrp="1"/>
+          </p:cNvSpPr>
+          <p:nvPr/>
+        </p:nvSpPr>
+        <p:spPr>
+          <a:xfrm xmlns:a="http://schemas.openxmlformats.org/drawingml/2006/main">
+            <a:off x="4210050" y="4867275"/>
             <a:ext cx="304800" cy="190500"/>
           </a:xfrm>
           <a:prstGeom xmlns:a="http://schemas.openxmlformats.org/drawingml/2006/main" prst="rect">
@@ -6152,45 +6344,45 @@
       </p:sp>
       <p:sp>
         <p:nvSpPr>
-          <p:cNvPr id="40" name="">
-            <a:extLst xmlns:a="http://schemas.openxmlformats.org/drawingml/2006/main">
-              <a:ext uri="{FF2B5EF4-FFF2-40B4-BE49-F238E27FC236}">
-                <a16:creationId xmlns:a16="http://schemas.microsoft.com/office/drawing/2014/main" id="{2E5BE31B-C012-487C-9AE3-5AE4C3180A70}"/>
-              </a:ext>
-            </a:extLst>
-          </p:cNvPr>
-          <p:cNvSpPr>
-            <a:spLocks xmlns:a="http://schemas.openxmlformats.org/drawingml/2006/main" noGrp="1"/>
-          </p:cNvSpPr>
-          <p:nvPr/>
-        </p:nvSpPr>
-        <p:spPr>
-          <a:xfrm xmlns:a="http://schemas.openxmlformats.org/drawingml/2006/main">
-            <a:off x="4572000" y="4829175"/>
-            <a:ext cx="2362200" cy="895350"/>
-          </a:xfrm>
-          <a:prstGeom xmlns:a="http://schemas.openxmlformats.org/drawingml/2006/main" prst="rect">
-            <a:avLst/>
-          </a:prstGeom>
-          <a:noFill xmlns:a="http://schemas.openxmlformats.org/drawingml/2006/main"/>
-          <a:ln xmlns:a="http://schemas.openxmlformats.org/drawingml/2006/main" w="0">
-            <a:noFill/>
-            <a:prstDash val="solid"/>
-          </a:ln>
-        </p:spPr>
-        <p:txBody>
-          <a:bodyPr xmlns:a="http://schemas.openxmlformats.org/drawingml/2006/main"/>
-          <a:lstStyle xmlns:a="http://schemas.openxmlformats.org/drawingml/2006/main"/>
-          <a:p xmlns:a="http://schemas.openxmlformats.org/drawingml/2006/main">
-            <a:pPr>
-              <a:defRPr sz="975">
-                <a:solidFill>
-                  <a:srgbClr val="102A63"/>
-                </a:solidFill>
-              </a:defRPr>
-            </a:pPr>
-            <a:r>
-              <a:rPr sz="975">
+          <p:cNvPr id="44" name="">
+            <a:extLst xmlns:a="http://schemas.openxmlformats.org/drawingml/2006/main">
+              <a:ext uri="{FF2B5EF4-FFF2-40B4-BE49-F238E27FC236}">
+                <a16:creationId xmlns:a16="http://schemas.microsoft.com/office/drawing/2014/main" id="{891E268D-12FA-4309-B811-35278C0ACBA4}"/>
+              </a:ext>
+            </a:extLst>
+          </p:cNvPr>
+          <p:cNvSpPr>
+            <a:spLocks xmlns:a="http://schemas.openxmlformats.org/drawingml/2006/main" noGrp="1"/>
+          </p:cNvSpPr>
+          <p:nvPr/>
+        </p:nvSpPr>
+        <p:spPr>
+          <a:xfrm xmlns:a="http://schemas.openxmlformats.org/drawingml/2006/main">
+            <a:off x="4572000" y="4810125"/>
+            <a:ext cx="2781300" cy="533400"/>
+          </a:xfrm>
+          <a:prstGeom xmlns:a="http://schemas.openxmlformats.org/drawingml/2006/main" prst="rect">
+            <a:avLst/>
+          </a:prstGeom>
+          <a:noFill xmlns:a="http://schemas.openxmlformats.org/drawingml/2006/main"/>
+          <a:ln xmlns:a="http://schemas.openxmlformats.org/drawingml/2006/main" w="0">
+            <a:noFill/>
+            <a:prstDash val="solid"/>
+          </a:ln>
+        </p:spPr>
+        <p:txBody>
+          <a:bodyPr xmlns:a="http://schemas.openxmlformats.org/drawingml/2006/main"/>
+          <a:lstStyle xmlns:a="http://schemas.openxmlformats.org/drawingml/2006/main"/>
+          <a:p xmlns:a="http://schemas.openxmlformats.org/drawingml/2006/main">
+            <a:pPr>
+              <a:defRPr sz="900">
+                <a:solidFill>
+                  <a:srgbClr val="102A63"/>
+                </a:solidFill>
+              </a:defRPr>
+            </a:pPr>
+            <a:r>
+              <a:rPr sz="900">
                 <a:solidFill>
                   <a:srgbClr val="102A63"/>
                 </a:solidFill>
@@ -6202,21 +6394,152 @@
       </p:sp>
       <p:sp>
         <p:nvSpPr>
-          <p:cNvPr id="41" name="">
-            <a:extLst xmlns:a="http://schemas.openxmlformats.org/drawingml/2006/main">
-              <a:ext uri="{FF2B5EF4-FFF2-40B4-BE49-F238E27FC236}">
-                <a16:creationId xmlns:a16="http://schemas.microsoft.com/office/drawing/2014/main" id="{6C4535EE-5729-400D-97F7-B230F6DD2A7C}"/>
-              </a:ext>
-            </a:extLst>
-          </p:cNvPr>
-          <p:cNvSpPr>
-            <a:spLocks xmlns:a="http://schemas.openxmlformats.org/drawingml/2006/main" noGrp="1"/>
-          </p:cNvSpPr>
-          <p:nvPr/>
-        </p:nvSpPr>
-        <p:spPr>
-          <a:xfrm xmlns:a="http://schemas.openxmlformats.org/drawingml/2006/main">
-            <a:off x="7124700" y="4886325"/>
+          <p:cNvPr id="45" name="">
+            <a:extLst xmlns:a="http://schemas.openxmlformats.org/drawingml/2006/main">
+              <a:ext uri="{FF2B5EF4-FFF2-40B4-BE49-F238E27FC236}">
+                <a16:creationId xmlns:a16="http://schemas.microsoft.com/office/drawing/2014/main" id="{1FBA5673-6BAD-455B-B064-D968AFAAAE7E}"/>
+              </a:ext>
+            </a:extLst>
+          </p:cNvPr>
+          <p:cNvSpPr>
+            <a:spLocks xmlns:a="http://schemas.openxmlformats.org/drawingml/2006/main" noGrp="1"/>
+          </p:cNvSpPr>
+          <p:nvPr/>
+        </p:nvSpPr>
+        <p:spPr>
+          <a:xfrm xmlns:a="http://schemas.openxmlformats.org/drawingml/2006/main">
+            <a:off x="4572000" y="5410200"/>
+            <a:ext cx="723900" cy="133350"/>
+          </a:xfrm>
+          <a:prstGeom xmlns:a="http://schemas.openxmlformats.org/drawingml/2006/main" prst="rect">
+            <a:avLst/>
+          </a:prstGeom>
+          <a:noFill xmlns:a="http://schemas.openxmlformats.org/drawingml/2006/main"/>
+          <a:ln xmlns:a="http://schemas.openxmlformats.org/drawingml/2006/main" w="0">
+            <a:noFill/>
+            <a:prstDash val="solid"/>
+          </a:ln>
+        </p:spPr>
+        <p:txBody>
+          <a:bodyPr xmlns:a="http://schemas.openxmlformats.org/drawingml/2006/main"/>
+          <a:lstStyle xmlns:a="http://schemas.openxmlformats.org/drawingml/2006/main"/>
+          <a:p xmlns:a="http://schemas.openxmlformats.org/drawingml/2006/main">
+            <a:pPr>
+              <a:defRPr sz="600" b="1">
+                <a:solidFill>
+                  <a:srgbClr val="2048A8"/>
+                </a:solidFill>
+              </a:defRPr>
+            </a:pPr>
+            <a:r>
+              <a:rPr sz="600" b="1">
+                <a:solidFill>
+                  <a:srgbClr val="2048A8"/>
+                </a:solidFill>
+              </a:rPr>
+              <a:t>РЕЗУЛЬТАТ</a:t>
+            </a:r>
+          </a:p>
+        </p:txBody>
+      </p:sp>
+      <p:sp>
+        <p:nvSpPr>
+          <p:cNvPr id="46" name="">
+            <a:extLst xmlns:a="http://schemas.openxmlformats.org/drawingml/2006/main">
+              <a:ext uri="{FF2B5EF4-FFF2-40B4-BE49-F238E27FC236}">
+                <a16:creationId xmlns:a16="http://schemas.microsoft.com/office/drawing/2014/main" id="{A49B34D1-7188-4A8E-BF5B-6E05E0847030}"/>
+              </a:ext>
+            </a:extLst>
+          </p:cNvPr>
+          <p:cNvSpPr>
+            <a:spLocks xmlns:a="http://schemas.openxmlformats.org/drawingml/2006/main" noGrp="1"/>
+          </p:cNvSpPr>
+          <p:nvPr/>
+        </p:nvSpPr>
+        <p:spPr>
+          <a:xfrm xmlns:a="http://schemas.openxmlformats.org/drawingml/2006/main">
+            <a:off x="4572000" y="5562600"/>
+            <a:ext cx="2781300" cy="285750"/>
+          </a:xfrm>
+          <a:prstGeom xmlns:a="http://schemas.openxmlformats.org/drawingml/2006/main" prst="rect">
+            <a:avLst/>
+          </a:prstGeom>
+          <a:noFill xmlns:a="http://schemas.openxmlformats.org/drawingml/2006/main"/>
+          <a:ln xmlns:a="http://schemas.openxmlformats.org/drawingml/2006/main" w="0">
+            <a:noFill/>
+            <a:prstDash val="solid"/>
+          </a:ln>
+        </p:spPr>
+        <p:txBody>
+          <a:bodyPr xmlns:a="http://schemas.openxmlformats.org/drawingml/2006/main"/>
+          <a:lstStyle xmlns:a="http://schemas.openxmlformats.org/drawingml/2006/main"/>
+          <a:p xmlns:a="http://schemas.openxmlformats.org/drawingml/2006/main">
+            <a:pPr>
+              <a:defRPr sz="750" b="1">
+                <a:solidFill>
+                  <a:srgbClr val="102A63"/>
+                </a:solidFill>
+              </a:defRPr>
+            </a:pPr>
+            <a:r>
+              <a:rPr sz="750" b="1">
+                <a:solidFill>
+                  <a:srgbClr val="102A63"/>
+                </a:solidFill>
+              </a:rPr>
+              <a:t>{{ROADMAP_3_1_RESULT}}</a:t>
+            </a:r>
+          </a:p>
+        </p:txBody>
+      </p:sp>
+      <p:sp>
+        <p:nvSpPr>
+          <p:cNvPr id="47" name="">
+            <a:extLst xmlns:a="http://schemas.openxmlformats.org/drawingml/2006/main">
+              <a:ext uri="{FF2B5EF4-FFF2-40B4-BE49-F238E27FC236}">
+                <a16:creationId xmlns:a16="http://schemas.microsoft.com/office/drawing/2014/main" id="{876D7B27-EDE6-423C-8A8A-3002DB67B7BB}"/>
+              </a:ext>
+            </a:extLst>
+          </p:cNvPr>
+          <p:cNvSpPr>
+            <a:spLocks xmlns:a="http://schemas.openxmlformats.org/drawingml/2006/main" noGrp="1"/>
+          </p:cNvSpPr>
+          <p:nvPr/>
+        </p:nvSpPr>
+        <p:spPr>
+          <a:xfrm xmlns:a="http://schemas.openxmlformats.org/drawingml/2006/main">
+            <a:off x="7543800" y="4838700"/>
+            <a:ext cx="9525" cy="952500"/>
+          </a:xfrm>
+          <a:prstGeom xmlns:a="http://schemas.openxmlformats.org/drawingml/2006/main" prst="rect">
+            <a:avLst/>
+          </a:prstGeom>
+          <a:solidFill xmlns:a="http://schemas.openxmlformats.org/drawingml/2006/main">
+            <a:srgbClr val="D7E0F2"/>
+          </a:solidFill>
+          <a:ln xmlns:a="http://schemas.openxmlformats.org/drawingml/2006/main" w="0">
+            <a:noFill/>
+            <a:prstDash val="solid"/>
+          </a:ln>
+        </p:spPr>
+      </p:sp>
+      <p:sp>
+        <p:nvSpPr>
+          <p:cNvPr id="48" name="">
+            <a:extLst xmlns:a="http://schemas.openxmlformats.org/drawingml/2006/main">
+              <a:ext uri="{FF2B5EF4-FFF2-40B4-BE49-F238E27FC236}">
+                <a16:creationId xmlns:a16="http://schemas.microsoft.com/office/drawing/2014/main" id="{E4672DE8-94DF-4DCB-A126-E79B628804FC}"/>
+              </a:ext>
+            </a:extLst>
+          </p:cNvPr>
+          <p:cNvSpPr>
+            <a:spLocks xmlns:a="http://schemas.openxmlformats.org/drawingml/2006/main" noGrp="1"/>
+          </p:cNvSpPr>
+          <p:nvPr/>
+        </p:nvSpPr>
+        <p:spPr>
+          <a:xfrm xmlns:a="http://schemas.openxmlformats.org/drawingml/2006/main">
+            <a:off x="7772400" y="4867275"/>
             <a:ext cx="304800" cy="190500"/>
           </a:xfrm>
           <a:prstGeom xmlns:a="http://schemas.openxmlformats.org/drawingml/2006/main" prst="rect">
@@ -6252,45 +6575,45 @@
       </p:sp>
       <p:sp>
         <p:nvSpPr>
-          <p:cNvPr id="42" name="">
-            <a:extLst xmlns:a="http://schemas.openxmlformats.org/drawingml/2006/main">
-              <a:ext uri="{FF2B5EF4-FFF2-40B4-BE49-F238E27FC236}">
-                <a16:creationId xmlns:a16="http://schemas.microsoft.com/office/drawing/2014/main" id="{75C16C78-2098-492A-8395-8C02976FB3BA}"/>
-              </a:ext>
-            </a:extLst>
-          </p:cNvPr>
-          <p:cNvSpPr>
-            <a:spLocks xmlns:a="http://schemas.openxmlformats.org/drawingml/2006/main" noGrp="1"/>
-          </p:cNvSpPr>
-          <p:nvPr/>
-        </p:nvSpPr>
-        <p:spPr>
-          <a:xfrm xmlns:a="http://schemas.openxmlformats.org/drawingml/2006/main">
-            <a:off x="7486650" y="4829175"/>
-            <a:ext cx="1847850" cy="895350"/>
-          </a:xfrm>
-          <a:prstGeom xmlns:a="http://schemas.openxmlformats.org/drawingml/2006/main" prst="rect">
-            <a:avLst/>
-          </a:prstGeom>
-          <a:noFill xmlns:a="http://schemas.openxmlformats.org/drawingml/2006/main"/>
-          <a:ln xmlns:a="http://schemas.openxmlformats.org/drawingml/2006/main" w="0">
-            <a:noFill/>
-            <a:prstDash val="solid"/>
-          </a:ln>
-        </p:spPr>
-        <p:txBody>
-          <a:bodyPr xmlns:a="http://schemas.openxmlformats.org/drawingml/2006/main"/>
-          <a:lstStyle xmlns:a="http://schemas.openxmlformats.org/drawingml/2006/main"/>
-          <a:p xmlns:a="http://schemas.openxmlformats.org/drawingml/2006/main">
-            <a:pPr>
-              <a:defRPr sz="975">
-                <a:solidFill>
-                  <a:srgbClr val="102A63"/>
-                </a:solidFill>
-              </a:defRPr>
-            </a:pPr>
-            <a:r>
-              <a:rPr sz="975">
+          <p:cNvPr id="49" name="">
+            <a:extLst xmlns:a="http://schemas.openxmlformats.org/drawingml/2006/main">
+              <a:ext uri="{FF2B5EF4-FFF2-40B4-BE49-F238E27FC236}">
+                <a16:creationId xmlns:a16="http://schemas.microsoft.com/office/drawing/2014/main" id="{8CA43316-0F87-4611-8EF9-56DD932A108C}"/>
+              </a:ext>
+            </a:extLst>
+          </p:cNvPr>
+          <p:cNvSpPr>
+            <a:spLocks xmlns:a="http://schemas.openxmlformats.org/drawingml/2006/main" noGrp="1"/>
+          </p:cNvSpPr>
+          <p:nvPr/>
+        </p:nvSpPr>
+        <p:spPr>
+          <a:xfrm xmlns:a="http://schemas.openxmlformats.org/drawingml/2006/main">
+            <a:off x="8134350" y="4810125"/>
+            <a:ext cx="2705100" cy="533400"/>
+          </a:xfrm>
+          <a:prstGeom xmlns:a="http://schemas.openxmlformats.org/drawingml/2006/main" prst="rect">
+            <a:avLst/>
+          </a:prstGeom>
+          <a:noFill xmlns:a="http://schemas.openxmlformats.org/drawingml/2006/main"/>
+          <a:ln xmlns:a="http://schemas.openxmlformats.org/drawingml/2006/main" w="0">
+            <a:noFill/>
+            <a:prstDash val="solid"/>
+          </a:ln>
+        </p:spPr>
+        <p:txBody>
+          <a:bodyPr xmlns:a="http://schemas.openxmlformats.org/drawingml/2006/main"/>
+          <a:lstStyle xmlns:a="http://schemas.openxmlformats.org/drawingml/2006/main"/>
+          <a:p xmlns:a="http://schemas.openxmlformats.org/drawingml/2006/main">
+            <a:pPr>
+              <a:defRPr sz="900">
+                <a:solidFill>
+                  <a:srgbClr val="102A63"/>
+                </a:solidFill>
+              </a:defRPr>
+            </a:pPr>
+            <a:r>
+              <a:rPr sz="900">
                 <a:solidFill>
                   <a:srgbClr val="102A63"/>
                 </a:solidFill>
@@ -6302,80 +6625,45 @@
       </p:sp>
       <p:sp>
         <p:nvSpPr>
-          <p:cNvPr id="43" name="">
-            <a:extLst xmlns:a="http://schemas.openxmlformats.org/drawingml/2006/main">
-              <a:ext uri="{FF2B5EF4-FFF2-40B4-BE49-F238E27FC236}">
-                <a16:creationId xmlns:a16="http://schemas.microsoft.com/office/drawing/2014/main" id="{25D3E8F4-122F-467C-B742-115E0C1E4C20}"/>
-              </a:ext>
-            </a:extLst>
-          </p:cNvPr>
-          <p:cNvSpPr>
-            <a:spLocks xmlns:a="http://schemas.openxmlformats.org/drawingml/2006/main" noGrp="1"/>
-          </p:cNvSpPr>
-          <p:nvPr/>
-        </p:nvSpPr>
-        <p:spPr>
-          <a:xfrm xmlns:a="http://schemas.openxmlformats.org/drawingml/2006/main">
-            <a:off x="9505950" y="4819650"/>
-            <a:ext cx="1524000" cy="990600"/>
-          </a:xfrm>
-          <a:prstGeom xmlns:a="http://schemas.openxmlformats.org/drawingml/2006/main" prst="roundRect">
-            <a:avLst>
-              <a:gd name="adj" fmla="val 7692"/>
-            </a:avLst>
-          </a:prstGeom>
-          <a:solidFill xmlns:a="http://schemas.openxmlformats.org/drawingml/2006/main">
-            <a:srgbClr val="FFFFFF"/>
-          </a:solidFill>
-          <a:ln xmlns:a="http://schemas.openxmlformats.org/drawingml/2006/main" w="9525">
-            <a:solidFill>
-              <a:srgbClr val="D7E0F2"/>
-            </a:solidFill>
-            <a:prstDash val="solid"/>
-          </a:ln>
-        </p:spPr>
-      </p:sp>
-      <p:sp>
-        <p:nvSpPr>
-          <p:cNvPr id="44" name="">
-            <a:extLst xmlns:a="http://schemas.openxmlformats.org/drawingml/2006/main">
-              <a:ext uri="{FF2B5EF4-FFF2-40B4-BE49-F238E27FC236}">
-                <a16:creationId xmlns:a16="http://schemas.microsoft.com/office/drawing/2014/main" id="{C0AAA01F-42E9-4A76-95DD-B58FCB05E385}"/>
-              </a:ext>
-            </a:extLst>
-          </p:cNvPr>
-          <p:cNvSpPr>
-            <a:spLocks xmlns:a="http://schemas.openxmlformats.org/drawingml/2006/main" noGrp="1"/>
-          </p:cNvSpPr>
-          <p:nvPr/>
-        </p:nvSpPr>
-        <p:spPr>
-          <a:xfrm xmlns:a="http://schemas.openxmlformats.org/drawingml/2006/main">
-            <a:off x="9620250" y="4914900"/>
-            <a:ext cx="1295400" cy="171450"/>
-          </a:xfrm>
-          <a:prstGeom xmlns:a="http://schemas.openxmlformats.org/drawingml/2006/main" prst="rect">
-            <a:avLst/>
-          </a:prstGeom>
-          <a:noFill xmlns:a="http://schemas.openxmlformats.org/drawingml/2006/main"/>
-          <a:ln xmlns:a="http://schemas.openxmlformats.org/drawingml/2006/main" w="0">
-            <a:noFill/>
-            <a:prstDash val="solid"/>
-          </a:ln>
-        </p:spPr>
-        <p:txBody>
-          <a:bodyPr xmlns:a="http://schemas.openxmlformats.org/drawingml/2006/main"/>
-          <a:lstStyle xmlns:a="http://schemas.openxmlformats.org/drawingml/2006/main"/>
-          <a:p xmlns:a="http://schemas.openxmlformats.org/drawingml/2006/main">
-            <a:pPr algn="ctr">
-              <a:defRPr sz="675" b="1">
+          <p:cNvPr id="50" name="">
+            <a:extLst xmlns:a="http://schemas.openxmlformats.org/drawingml/2006/main">
+              <a:ext uri="{FF2B5EF4-FFF2-40B4-BE49-F238E27FC236}">
+                <a16:creationId xmlns:a16="http://schemas.microsoft.com/office/drawing/2014/main" id="{C2B2224A-1EC6-4E0E-847F-15D3FBBDF0D9}"/>
+              </a:ext>
+            </a:extLst>
+          </p:cNvPr>
+          <p:cNvSpPr>
+            <a:spLocks xmlns:a="http://schemas.openxmlformats.org/drawingml/2006/main" noGrp="1"/>
+          </p:cNvSpPr>
+          <p:nvPr/>
+        </p:nvSpPr>
+        <p:spPr>
+          <a:xfrm xmlns:a="http://schemas.openxmlformats.org/drawingml/2006/main">
+            <a:off x="8134350" y="5410200"/>
+            <a:ext cx="723900" cy="133350"/>
+          </a:xfrm>
+          <a:prstGeom xmlns:a="http://schemas.openxmlformats.org/drawingml/2006/main" prst="rect">
+            <a:avLst/>
+          </a:prstGeom>
+          <a:noFill xmlns:a="http://schemas.openxmlformats.org/drawingml/2006/main"/>
+          <a:ln xmlns:a="http://schemas.openxmlformats.org/drawingml/2006/main" w="0">
+            <a:noFill/>
+            <a:prstDash val="solid"/>
+          </a:ln>
+        </p:spPr>
+        <p:txBody>
+          <a:bodyPr xmlns:a="http://schemas.openxmlformats.org/drawingml/2006/main"/>
+          <a:lstStyle xmlns:a="http://schemas.openxmlformats.org/drawingml/2006/main"/>
+          <a:p xmlns:a="http://schemas.openxmlformats.org/drawingml/2006/main">
+            <a:pPr>
+              <a:defRPr sz="600" b="1">
                 <a:solidFill>
                   <a:srgbClr val="2048A8"/>
                 </a:solidFill>
               </a:defRPr>
             </a:pPr>
             <a:r>
-              <a:rPr sz="675" b="1">
+              <a:rPr sz="600" b="1">
                 <a:solidFill>
                   <a:srgbClr val="2048A8"/>
                 </a:solidFill>
@@ -6387,37 +6675,37 @@
       </p:sp>
       <p:sp>
         <p:nvSpPr>
-          <p:cNvPr id="45" name="">
-            <a:extLst xmlns:a="http://schemas.openxmlformats.org/drawingml/2006/main">
-              <a:ext uri="{FF2B5EF4-FFF2-40B4-BE49-F238E27FC236}">
-                <a16:creationId xmlns:a16="http://schemas.microsoft.com/office/drawing/2014/main" id="{B4E06BD9-D654-4736-934F-FAD710CBC1C5}"/>
-              </a:ext>
-            </a:extLst>
-          </p:cNvPr>
-          <p:cNvSpPr>
-            <a:spLocks xmlns:a="http://schemas.openxmlformats.org/drawingml/2006/main" noGrp="1"/>
-          </p:cNvSpPr>
-          <p:nvPr/>
-        </p:nvSpPr>
-        <p:spPr>
-          <a:xfrm xmlns:a="http://schemas.openxmlformats.org/drawingml/2006/main">
-            <a:off x="9620250" y="5124450"/>
-            <a:ext cx="1295400" cy="609600"/>
-          </a:xfrm>
-          <a:prstGeom xmlns:a="http://schemas.openxmlformats.org/drawingml/2006/main" prst="rect">
-            <a:avLst/>
-          </a:prstGeom>
-          <a:noFill xmlns:a="http://schemas.openxmlformats.org/drawingml/2006/main"/>
-          <a:ln xmlns:a="http://schemas.openxmlformats.org/drawingml/2006/main" w="0">
-            <a:noFill/>
-            <a:prstDash val="solid"/>
-          </a:ln>
-        </p:spPr>
-        <p:txBody>
-          <a:bodyPr xmlns:a="http://schemas.openxmlformats.org/drawingml/2006/main"/>
-          <a:lstStyle xmlns:a="http://schemas.openxmlformats.org/drawingml/2006/main"/>
-          <a:p xmlns:a="http://schemas.openxmlformats.org/drawingml/2006/main">
-            <a:pPr algn="ctr">
+          <p:cNvPr id="51" name="">
+            <a:extLst xmlns:a="http://schemas.openxmlformats.org/drawingml/2006/main">
+              <a:ext uri="{FF2B5EF4-FFF2-40B4-BE49-F238E27FC236}">
+                <a16:creationId xmlns:a16="http://schemas.microsoft.com/office/drawing/2014/main" id="{F61C4C67-C44A-492C-A9A3-9C05886E82A8}"/>
+              </a:ext>
+            </a:extLst>
+          </p:cNvPr>
+          <p:cNvSpPr>
+            <a:spLocks xmlns:a="http://schemas.openxmlformats.org/drawingml/2006/main" noGrp="1"/>
+          </p:cNvSpPr>
+          <p:nvPr/>
+        </p:nvSpPr>
+        <p:spPr>
+          <a:xfrm xmlns:a="http://schemas.openxmlformats.org/drawingml/2006/main">
+            <a:off x="8134350" y="5562600"/>
+            <a:ext cx="2705100" cy="285750"/>
+          </a:xfrm>
+          <a:prstGeom xmlns:a="http://schemas.openxmlformats.org/drawingml/2006/main" prst="rect">
+            <a:avLst/>
+          </a:prstGeom>
+          <a:noFill xmlns:a="http://schemas.openxmlformats.org/drawingml/2006/main"/>
+          <a:ln xmlns:a="http://schemas.openxmlformats.org/drawingml/2006/main" w="0">
+            <a:noFill/>
+            <a:prstDash val="solid"/>
+          </a:ln>
+        </p:spPr>
+        <p:txBody>
+          <a:bodyPr xmlns:a="http://schemas.openxmlformats.org/drawingml/2006/main"/>
+          <a:lstStyle xmlns:a="http://schemas.openxmlformats.org/drawingml/2006/main"/>
+          <a:p xmlns:a="http://schemas.openxmlformats.org/drawingml/2006/main">
+            <a:pPr>
               <a:defRPr sz="750" b="1">
                 <a:solidFill>
                   <a:srgbClr val="102A63"/>
@@ -6430,7 +6718,7 @@
                   <a:srgbClr val="102A63"/>
                 </a:solidFill>
               </a:rPr>
-              <a:t>{{ROADMAP_3_RESULT}}</a:t>
+              <a:t>{{ROADMAP_3_2_RESULT}}</a:t>
             </a:r>
           </a:p>
         </p:txBody>
@@ -6438,7 +6726,7 @@
     </p:spTree>
     <p:extLst>
       <p:ext uri="{BB962C8B-B14F-4D97-AF65-F5344CB8AC3E}">
-        <p14:creationId xmlns:p14="http://schemas.microsoft.com/office/powerpoint/2010/main" val="9846948"/>
+        <p14:creationId xmlns:p14="http://schemas.microsoft.com/office/powerpoint/2010/main" val="921886422"/>
       </p:ext>
     </p:extLst>
   </p:cSld>
@@ -6469,7 +6757,7 @@
           <p:cNvPr id="1" name="">
             <a:extLst xmlns:a="http://schemas.openxmlformats.org/drawingml/2006/main">
               <a:ext uri="{FF2B5EF4-FFF2-40B4-BE49-F238E27FC236}">
-                <a16:creationId xmlns:a16="http://schemas.microsoft.com/office/drawing/2014/main" id="{FCE62781-B4E9-4E76-BCD6-639FC8B000F5}"/>
+                <a16:creationId xmlns:a16="http://schemas.microsoft.com/office/drawing/2014/main" id="{81B16CB5-9E5F-44AD-878D-8CF46AA472FA}"/>
               </a:ext>
             </a:extLst>
           </p:cNvPr>
@@ -6504,7 +6792,7 @@
           <p:nvPr/>
         </p:nvPicPr>
         <p:blipFill>
-          <a:blip xmlns:r="http://schemas.openxmlformats.org/officeDocument/2006/relationships" xmlns:a="http://schemas.openxmlformats.org/drawingml/2006/main" r:embed="R26e0a4b5c87b409d"/>
+          <a:blip xmlns:r="http://schemas.openxmlformats.org/officeDocument/2006/relationships" xmlns:a="http://schemas.openxmlformats.org/drawingml/2006/main" r:embed="R8c2aae64b92c4514"/>
           <a:stretch xmlns:a="http://schemas.openxmlformats.org/drawingml/2006/main"/>
         </p:blipFill>
         <p:spPr>
@@ -6522,7 +6810,7 @@
           <p:cNvPr id="3" name="">
             <a:extLst xmlns:a="http://schemas.openxmlformats.org/drawingml/2006/main">
               <a:ext uri="{FF2B5EF4-FFF2-40B4-BE49-F238E27FC236}">
-                <a16:creationId xmlns:a16="http://schemas.microsoft.com/office/drawing/2014/main" id="{02C335D6-632B-430B-94CF-EBAEAF10648A}"/>
+                <a16:creationId xmlns:a16="http://schemas.microsoft.com/office/drawing/2014/main" id="{AB26A3D2-60C5-4D0A-A5D3-0BD382B885C5}"/>
               </a:ext>
             </a:extLst>
           </p:cNvPr>
@@ -6572,7 +6860,7 @@
           <p:cNvPr id="4" name="">
             <a:extLst xmlns:a="http://schemas.openxmlformats.org/drawingml/2006/main">
               <a:ext uri="{FF2B5EF4-FFF2-40B4-BE49-F238E27FC236}">
-                <a16:creationId xmlns:a16="http://schemas.microsoft.com/office/drawing/2014/main" id="{CA7ADAF5-1D75-4FDF-AE46-A323D097F974}"/>
+                <a16:creationId xmlns:a16="http://schemas.microsoft.com/office/drawing/2014/main" id="{E87CAC9D-9E88-4EF9-9A82-0787099D19BA}"/>
               </a:ext>
             </a:extLst>
           </p:cNvPr>
@@ -6605,7 +6893,7 @@
           <p:cNvPr id="5" name="">
             <a:extLst xmlns:a="http://schemas.openxmlformats.org/drawingml/2006/main">
               <a:ext uri="{FF2B5EF4-FFF2-40B4-BE49-F238E27FC236}">
-                <a16:creationId xmlns:a16="http://schemas.microsoft.com/office/drawing/2014/main" id="{5B5A2082-5C9A-4EFF-B191-78036B2EDEC5}"/>
+                <a16:creationId xmlns:a16="http://schemas.microsoft.com/office/drawing/2014/main" id="{627DC0AE-EF3F-4C4C-B4F7-10C9B99120E1}"/>
               </a:ext>
             </a:extLst>
           </p:cNvPr>
@@ -6636,7 +6924,7 @@
           <p:cNvPr id="6" name="">
             <a:extLst xmlns:a="http://schemas.openxmlformats.org/drawingml/2006/main">
               <a:ext uri="{FF2B5EF4-FFF2-40B4-BE49-F238E27FC236}">
-                <a16:creationId xmlns:a16="http://schemas.microsoft.com/office/drawing/2014/main" id="{9ED521F6-64B5-46F2-BBC0-CB5CCFE4594F}"/>
+                <a16:creationId xmlns:a16="http://schemas.microsoft.com/office/drawing/2014/main" id="{0A6AED06-51D1-4E42-BACC-18F4699E02D6}"/>
               </a:ext>
             </a:extLst>
           </p:cNvPr>
@@ -6686,7 +6974,7 @@
           <p:cNvPr id="7" name="">
             <a:extLst xmlns:a="http://schemas.openxmlformats.org/drawingml/2006/main">
               <a:ext uri="{FF2B5EF4-FFF2-40B4-BE49-F238E27FC236}">
-                <a16:creationId xmlns:a16="http://schemas.microsoft.com/office/drawing/2014/main" id="{A1653448-AB51-4B0D-B9F9-8E162BCDCDE3}"/>
+                <a16:creationId xmlns:a16="http://schemas.microsoft.com/office/drawing/2014/main" id="{F9B640FA-6622-4D3B-99AC-2E652C7D623A}"/>
               </a:ext>
             </a:extLst>
           </p:cNvPr>
@@ -6736,7 +7024,7 @@
           <p:cNvPr id="8" name="">
             <a:extLst xmlns:a="http://schemas.openxmlformats.org/drawingml/2006/main">
               <a:ext uri="{FF2B5EF4-FFF2-40B4-BE49-F238E27FC236}">
-                <a16:creationId xmlns:a16="http://schemas.microsoft.com/office/drawing/2014/main" id="{A02317D6-BA25-4243-93E3-CE19EFC13F0E}"/>
+                <a16:creationId xmlns:a16="http://schemas.microsoft.com/office/drawing/2014/main" id="{5AD7FEA9-E648-4EDA-A4DA-9D317B93329D}"/>
               </a:ext>
             </a:extLst>
           </p:cNvPr>
@@ -6786,7 +7074,7 @@
           <p:cNvPr id="9" name="">
             <a:extLst xmlns:a="http://schemas.openxmlformats.org/drawingml/2006/main">
               <a:ext uri="{FF2B5EF4-FFF2-40B4-BE49-F238E27FC236}">
-                <a16:creationId xmlns:a16="http://schemas.microsoft.com/office/drawing/2014/main" id="{EA6E09BE-D0EC-40BB-A216-27433282965F}"/>
+                <a16:creationId xmlns:a16="http://schemas.microsoft.com/office/drawing/2014/main" id="{413B00E0-7880-4CD4-B1A9-F10EE5EBA78E}"/>
               </a:ext>
             </a:extLst>
           </p:cNvPr>
@@ -6836,7 +7124,7 @@
           <p:cNvPr id="10" name="">
             <a:extLst xmlns:a="http://schemas.openxmlformats.org/drawingml/2006/main">
               <a:ext uri="{FF2B5EF4-FFF2-40B4-BE49-F238E27FC236}">
-                <a16:creationId xmlns:a16="http://schemas.microsoft.com/office/drawing/2014/main" id="{CF7CAA8F-5A0C-4E9A-B01C-05E0DE6B4C52}"/>
+                <a16:creationId xmlns:a16="http://schemas.microsoft.com/office/drawing/2014/main" id="{29AF28CD-3727-4A08-924D-E40A22A57F6C}"/>
               </a:ext>
             </a:extLst>
           </p:cNvPr>
@@ -6886,7 +7174,7 @@
           <p:cNvPr id="11" name="">
             <a:extLst xmlns:a="http://schemas.openxmlformats.org/drawingml/2006/main">
               <a:ext uri="{FF2B5EF4-FFF2-40B4-BE49-F238E27FC236}">
-                <a16:creationId xmlns:a16="http://schemas.microsoft.com/office/drawing/2014/main" id="{99A8DFEB-C9C3-453B-A35F-5CC85CE74DE6}"/>
+                <a16:creationId xmlns:a16="http://schemas.microsoft.com/office/drawing/2014/main" id="{146BC8E0-96F2-4124-AACC-135E2E86EE56}"/>
               </a:ext>
             </a:extLst>
           </p:cNvPr>
@@ -6936,7 +7224,7 @@
           <p:cNvPr id="12" name="">
             <a:extLst xmlns:a="http://schemas.openxmlformats.org/drawingml/2006/main">
               <a:ext uri="{FF2B5EF4-FFF2-40B4-BE49-F238E27FC236}">
-                <a16:creationId xmlns:a16="http://schemas.microsoft.com/office/drawing/2014/main" id="{BA2A766E-644C-448E-9681-877A562DB899}"/>
+                <a16:creationId xmlns:a16="http://schemas.microsoft.com/office/drawing/2014/main" id="{A56FFFFE-92FE-40F1-9885-2AEDE519C837}"/>
               </a:ext>
             </a:extLst>
           </p:cNvPr>
@@ -6986,7 +7274,7 @@
           <p:cNvPr id="13" name="">
             <a:extLst xmlns:a="http://schemas.openxmlformats.org/drawingml/2006/main">
               <a:ext uri="{FF2B5EF4-FFF2-40B4-BE49-F238E27FC236}">
-                <a16:creationId xmlns:a16="http://schemas.microsoft.com/office/drawing/2014/main" id="{54EF26A6-D901-447C-9662-68B3FB558769}"/>
+                <a16:creationId xmlns:a16="http://schemas.microsoft.com/office/drawing/2014/main" id="{9FD6C55F-9908-4312-9979-7E32A46259B1}"/>
               </a:ext>
             </a:extLst>
           </p:cNvPr>
@@ -7036,7 +7324,7 @@
           <p:cNvPr id="14" name="">
             <a:extLst xmlns:a="http://schemas.openxmlformats.org/drawingml/2006/main">
               <a:ext uri="{FF2B5EF4-FFF2-40B4-BE49-F238E27FC236}">
-                <a16:creationId xmlns:a16="http://schemas.microsoft.com/office/drawing/2014/main" id="{74927031-6AC3-408F-B29D-A0613B0EC1C2}"/>
+                <a16:creationId xmlns:a16="http://schemas.microsoft.com/office/drawing/2014/main" id="{1DFE8F03-FE6B-41C8-8617-7B434E98F1EA}"/>
               </a:ext>
             </a:extLst>
           </p:cNvPr>
@@ -7086,7 +7374,7 @@
           <p:cNvPr id="15" name="">
             <a:extLst xmlns:a="http://schemas.openxmlformats.org/drawingml/2006/main">
               <a:ext uri="{FF2B5EF4-FFF2-40B4-BE49-F238E27FC236}">
-                <a16:creationId xmlns:a16="http://schemas.microsoft.com/office/drawing/2014/main" id="{B3D71FCB-1FCA-46D6-9B1F-6D5C3401CD0C}"/>
+                <a16:creationId xmlns:a16="http://schemas.microsoft.com/office/drawing/2014/main" id="{1BF0C458-E08F-4A01-A6FE-8E1B4191A288}"/>
               </a:ext>
             </a:extLst>
           </p:cNvPr>
@@ -7136,7 +7424,7 @@
           <p:cNvPr id="16" name="">
             <a:extLst xmlns:a="http://schemas.openxmlformats.org/drawingml/2006/main">
               <a:ext uri="{FF2B5EF4-FFF2-40B4-BE49-F238E27FC236}">
-                <a16:creationId xmlns:a16="http://schemas.microsoft.com/office/drawing/2014/main" id="{C510BE32-E8BF-4447-B26A-12FE5281B7D4}"/>
+                <a16:creationId xmlns:a16="http://schemas.microsoft.com/office/drawing/2014/main" id="{046897AF-A89E-4368-B7C9-A3CB026D9B5E}"/>
               </a:ext>
             </a:extLst>
           </p:cNvPr>
@@ -7186,7 +7474,7 @@
           <p:cNvPr id="17" name="">
             <a:extLst xmlns:a="http://schemas.openxmlformats.org/drawingml/2006/main">
               <a:ext uri="{FF2B5EF4-FFF2-40B4-BE49-F238E27FC236}">
-                <a16:creationId xmlns:a16="http://schemas.microsoft.com/office/drawing/2014/main" id="{83274F27-09EE-4634-A329-0F53ABE9E4D2}"/>
+                <a16:creationId xmlns:a16="http://schemas.microsoft.com/office/drawing/2014/main" id="{707F2737-8A0E-4578-BE27-2DB5A4EAA60A}"/>
               </a:ext>
             </a:extLst>
           </p:cNvPr>
@@ -7219,7 +7507,7 @@
           <p:cNvPr id="18" name="">
             <a:extLst xmlns:a="http://schemas.openxmlformats.org/drawingml/2006/main">
               <a:ext uri="{FF2B5EF4-FFF2-40B4-BE49-F238E27FC236}">
-                <a16:creationId xmlns:a16="http://schemas.microsoft.com/office/drawing/2014/main" id="{17A3DC1E-AD8D-45C6-950D-0ABE27989205}"/>
+                <a16:creationId xmlns:a16="http://schemas.microsoft.com/office/drawing/2014/main" id="{740E2A76-9DF1-4FF4-92B1-830F15290E1A}"/>
               </a:ext>
             </a:extLst>
           </p:cNvPr>
@@ -7269,7 +7557,7 @@
           <p:cNvPr id="19" name="">
             <a:extLst xmlns:a="http://schemas.openxmlformats.org/drawingml/2006/main">
               <a:ext uri="{FF2B5EF4-FFF2-40B4-BE49-F238E27FC236}">
-                <a16:creationId xmlns:a16="http://schemas.microsoft.com/office/drawing/2014/main" id="{7DE33237-8C44-4434-974B-C01313F76253}"/>
+                <a16:creationId xmlns:a16="http://schemas.microsoft.com/office/drawing/2014/main" id="{36068CEB-89D2-4BBE-8204-97839BF58A47}"/>
               </a:ext>
             </a:extLst>
           </p:cNvPr>
@@ -7319,7 +7607,7 @@
           <p:cNvPr id="20" name="">
             <a:extLst xmlns:a="http://schemas.openxmlformats.org/drawingml/2006/main">
               <a:ext uri="{FF2B5EF4-FFF2-40B4-BE49-F238E27FC236}">
-                <a16:creationId xmlns:a16="http://schemas.microsoft.com/office/drawing/2014/main" id="{13EB85BF-9C2F-4188-92AB-A7FACFB90D38}"/>
+                <a16:creationId xmlns:a16="http://schemas.microsoft.com/office/drawing/2014/main" id="{D847FF08-897B-400D-973F-EDF0B48C7526}"/>
               </a:ext>
             </a:extLst>
           </p:cNvPr>
@@ -7369,7 +7657,7 @@
           <p:cNvPr id="21" name="">
             <a:extLst xmlns:a="http://schemas.openxmlformats.org/drawingml/2006/main">
               <a:ext uri="{FF2B5EF4-FFF2-40B4-BE49-F238E27FC236}">
-                <a16:creationId xmlns:a16="http://schemas.microsoft.com/office/drawing/2014/main" id="{FBC7990F-C6E2-44AB-8C6D-3F058490E3E6}"/>
+                <a16:creationId xmlns:a16="http://schemas.microsoft.com/office/drawing/2014/main" id="{8FEF0BA4-866D-4EC7-9718-23BB31A3FFCD}"/>
               </a:ext>
             </a:extLst>
           </p:cNvPr>
@@ -7419,7 +7707,7 @@
           <p:cNvPr id="22" name="">
             <a:extLst xmlns:a="http://schemas.openxmlformats.org/drawingml/2006/main">
               <a:ext uri="{FF2B5EF4-FFF2-40B4-BE49-F238E27FC236}">
-                <a16:creationId xmlns:a16="http://schemas.microsoft.com/office/drawing/2014/main" id="{EA8713EE-D21B-4565-BAF5-5C5EC5C97870}"/>
+                <a16:creationId xmlns:a16="http://schemas.microsoft.com/office/drawing/2014/main" id="{D5E0BBF4-047E-4961-8447-9D9DF1DC2F80}"/>
               </a:ext>
             </a:extLst>
           </p:cNvPr>
@@ -7469,7 +7757,7 @@
           <p:cNvPr id="23" name="">
             <a:extLst xmlns:a="http://schemas.openxmlformats.org/drawingml/2006/main">
               <a:ext uri="{FF2B5EF4-FFF2-40B4-BE49-F238E27FC236}">
-                <a16:creationId xmlns:a16="http://schemas.microsoft.com/office/drawing/2014/main" id="{8076C710-2249-4138-8A27-05BBD5462B8C}"/>
+                <a16:creationId xmlns:a16="http://schemas.microsoft.com/office/drawing/2014/main" id="{54862232-775E-4DB5-838E-38E23710F4D3}"/>
               </a:ext>
             </a:extLst>
           </p:cNvPr>
@@ -7519,7 +7807,7 @@
           <p:cNvPr id="24" name="">
             <a:extLst xmlns:a="http://schemas.openxmlformats.org/drawingml/2006/main">
               <a:ext uri="{FF2B5EF4-FFF2-40B4-BE49-F238E27FC236}">
-                <a16:creationId xmlns:a16="http://schemas.microsoft.com/office/drawing/2014/main" id="{83CC4FC0-9FC2-4EE2-BD60-B45BA56B6087}"/>
+                <a16:creationId xmlns:a16="http://schemas.microsoft.com/office/drawing/2014/main" id="{3A20B640-AF45-4ED7-B912-98909E1D6526}"/>
               </a:ext>
             </a:extLst>
           </p:cNvPr>
@@ -7569,7 +7857,7 @@
           <p:cNvPr id="25" name="">
             <a:extLst xmlns:a="http://schemas.openxmlformats.org/drawingml/2006/main">
               <a:ext uri="{FF2B5EF4-FFF2-40B4-BE49-F238E27FC236}">
-                <a16:creationId xmlns:a16="http://schemas.microsoft.com/office/drawing/2014/main" id="{0C74D3B6-1E22-4C92-98FB-4344062A041E}"/>
+                <a16:creationId xmlns:a16="http://schemas.microsoft.com/office/drawing/2014/main" id="{85BA4AEC-FC24-41C4-BF81-E4043B7F96DB}"/>
               </a:ext>
             </a:extLst>
           </p:cNvPr>
@@ -7619,7 +7907,7 @@
           <p:cNvPr id="26" name="">
             <a:extLst xmlns:a="http://schemas.openxmlformats.org/drawingml/2006/main">
               <a:ext uri="{FF2B5EF4-FFF2-40B4-BE49-F238E27FC236}">
-                <a16:creationId xmlns:a16="http://schemas.microsoft.com/office/drawing/2014/main" id="{CBD34246-1E33-4B82-915B-A8A659ADB433}"/>
+                <a16:creationId xmlns:a16="http://schemas.microsoft.com/office/drawing/2014/main" id="{CC7404A8-A4C8-472D-A525-BC24202E063B}"/>
               </a:ext>
             </a:extLst>
           </p:cNvPr>
@@ -7667,7 +7955,7 @@
     </p:spTree>
     <p:extLst>
       <p:ext uri="{BB962C8B-B14F-4D97-AF65-F5344CB8AC3E}">
-        <p14:creationId xmlns:p14="http://schemas.microsoft.com/office/powerpoint/2010/main" val="234194596"/>
+        <p14:creationId xmlns:p14="http://schemas.microsoft.com/office/powerpoint/2010/main" val="233947310"/>
       </p:ext>
     </p:extLst>
   </p:cSld>
@@ -7698,7 +7986,7 @@
           <p:cNvPr id="1" name="">
             <a:extLst xmlns:a="http://schemas.openxmlformats.org/drawingml/2006/main">
               <a:ext uri="{FF2B5EF4-FFF2-40B4-BE49-F238E27FC236}">
-                <a16:creationId xmlns:a16="http://schemas.microsoft.com/office/drawing/2014/main" id="{D176CED3-220F-49DE-AB9A-016BB0BC89CF}"/>
+                <a16:creationId xmlns:a16="http://schemas.microsoft.com/office/drawing/2014/main" id="{D4251923-4D43-4568-A274-DB78F714661F}"/>
               </a:ext>
             </a:extLst>
           </p:cNvPr>
@@ -7733,7 +8021,7 @@
           <p:nvPr/>
         </p:nvPicPr>
         <p:blipFill>
-          <a:blip xmlns:r="http://schemas.openxmlformats.org/officeDocument/2006/relationships" xmlns:a="http://schemas.openxmlformats.org/drawingml/2006/main" r:embed="Rae578144336442fc"/>
+          <a:blip xmlns:r="http://schemas.openxmlformats.org/officeDocument/2006/relationships" xmlns:a="http://schemas.openxmlformats.org/drawingml/2006/main" r:embed="R7c4ec0d2fac247c4"/>
           <a:stretch xmlns:a="http://schemas.openxmlformats.org/drawingml/2006/main"/>
         </p:blipFill>
         <p:spPr>
@@ -7751,7 +8039,7 @@
           <p:cNvPr id="3" name="">
             <a:extLst xmlns:a="http://schemas.openxmlformats.org/drawingml/2006/main">
               <a:ext uri="{FF2B5EF4-FFF2-40B4-BE49-F238E27FC236}">
-                <a16:creationId xmlns:a16="http://schemas.microsoft.com/office/drawing/2014/main" id="{03F6523D-79D9-4D27-9CC3-3252A17C3142}"/>
+                <a16:creationId xmlns:a16="http://schemas.microsoft.com/office/drawing/2014/main" id="{EB493E94-1D47-4918-961F-C04D2912749F}"/>
               </a:ext>
             </a:extLst>
           </p:cNvPr>
@@ -7801,7 +8089,7 @@
           <p:cNvPr id="4" name="">
             <a:extLst xmlns:a="http://schemas.openxmlformats.org/drawingml/2006/main">
               <a:ext uri="{FF2B5EF4-FFF2-40B4-BE49-F238E27FC236}">
-                <a16:creationId xmlns:a16="http://schemas.microsoft.com/office/drawing/2014/main" id="{5B82B024-B200-4FFC-AFEE-F10A5933A9B6}"/>
+                <a16:creationId xmlns:a16="http://schemas.microsoft.com/office/drawing/2014/main" id="{4B200A18-39E3-4933-9F63-5EC4FBF684C9}"/>
               </a:ext>
             </a:extLst>
           </p:cNvPr>
@@ -7834,7 +8122,7 @@
           <p:cNvPr id="5" name="">
             <a:extLst xmlns:a="http://schemas.openxmlformats.org/drawingml/2006/main">
               <a:ext uri="{FF2B5EF4-FFF2-40B4-BE49-F238E27FC236}">
-                <a16:creationId xmlns:a16="http://schemas.microsoft.com/office/drawing/2014/main" id="{7A2D95D0-22DE-475D-BB3C-D7BD902E831F}"/>
+                <a16:creationId xmlns:a16="http://schemas.microsoft.com/office/drawing/2014/main" id="{637469A8-37BD-4FAF-A17C-AC0C167A6846}"/>
               </a:ext>
             </a:extLst>
           </p:cNvPr>
@@ -7865,7 +8153,7 @@
           <p:cNvPr id="6" name="">
             <a:extLst xmlns:a="http://schemas.openxmlformats.org/drawingml/2006/main">
               <a:ext uri="{FF2B5EF4-FFF2-40B4-BE49-F238E27FC236}">
-                <a16:creationId xmlns:a16="http://schemas.microsoft.com/office/drawing/2014/main" id="{A157BA9B-9AA1-40E0-AF6A-AAE596DF395E}"/>
+                <a16:creationId xmlns:a16="http://schemas.microsoft.com/office/drawing/2014/main" id="{FE445A52-59D0-4693-9DC0-50E89D993380}"/>
               </a:ext>
             </a:extLst>
           </p:cNvPr>
@@ -7915,7 +8203,7 @@
           <p:cNvPr id="7" name="">
             <a:extLst xmlns:a="http://schemas.openxmlformats.org/drawingml/2006/main">
               <a:ext uri="{FF2B5EF4-FFF2-40B4-BE49-F238E27FC236}">
-                <a16:creationId xmlns:a16="http://schemas.microsoft.com/office/drawing/2014/main" id="{3DEDA67B-6F64-4D78-B192-B53D80B05023}"/>
+                <a16:creationId xmlns:a16="http://schemas.microsoft.com/office/drawing/2014/main" id="{CBD2E3B0-FECB-43E6-B0D1-980C65B29A18}"/>
               </a:ext>
             </a:extLst>
           </p:cNvPr>
@@ -7965,7 +8253,7 @@
           <p:cNvPr id="8" name="">
             <a:extLst xmlns:a="http://schemas.openxmlformats.org/drawingml/2006/main">
               <a:ext uri="{FF2B5EF4-FFF2-40B4-BE49-F238E27FC236}">
-                <a16:creationId xmlns:a16="http://schemas.microsoft.com/office/drawing/2014/main" id="{B964FBEB-3663-4338-9C89-A0513A859A0B}"/>
+                <a16:creationId xmlns:a16="http://schemas.microsoft.com/office/drawing/2014/main" id="{C627D726-EA3F-4B24-8A0A-786685DCAF0B}"/>
               </a:ext>
             </a:extLst>
           </p:cNvPr>
@@ -8015,7 +8303,7 @@
           <p:cNvPr id="9" name="">
             <a:extLst xmlns:a="http://schemas.openxmlformats.org/drawingml/2006/main">
               <a:ext uri="{FF2B5EF4-FFF2-40B4-BE49-F238E27FC236}">
-                <a16:creationId xmlns:a16="http://schemas.microsoft.com/office/drawing/2014/main" id="{FE0AEAEC-3A6F-490B-A8A8-2AED53140DD8}"/>
+                <a16:creationId xmlns:a16="http://schemas.microsoft.com/office/drawing/2014/main" id="{0BB6AC7E-0E62-4768-9AF7-F272C3C9FBA4}"/>
               </a:ext>
             </a:extLst>
           </p:cNvPr>
@@ -8065,7 +8353,7 @@
           <p:cNvPr id="10" name="">
             <a:extLst xmlns:a="http://schemas.openxmlformats.org/drawingml/2006/main">
               <a:ext uri="{FF2B5EF4-FFF2-40B4-BE49-F238E27FC236}">
-                <a16:creationId xmlns:a16="http://schemas.microsoft.com/office/drawing/2014/main" id="{12DD4889-44C5-455B-903C-C59B98DF110C}"/>
+                <a16:creationId xmlns:a16="http://schemas.microsoft.com/office/drawing/2014/main" id="{ABA639E5-EF7C-428C-8CB4-3C8F630F13DF}"/>
               </a:ext>
             </a:extLst>
           </p:cNvPr>
@@ -8096,7 +8384,7 @@
           <p:cNvPr id="11" name="">
             <a:extLst xmlns:a="http://schemas.openxmlformats.org/drawingml/2006/main">
               <a:ext uri="{FF2B5EF4-FFF2-40B4-BE49-F238E27FC236}">
-                <a16:creationId xmlns:a16="http://schemas.microsoft.com/office/drawing/2014/main" id="{C0353CBE-0B57-4A78-8C83-04307348BDCE}"/>
+                <a16:creationId xmlns:a16="http://schemas.microsoft.com/office/drawing/2014/main" id="{7407A1E1-A719-4209-8CF3-67D05B88F879}"/>
               </a:ext>
             </a:extLst>
           </p:cNvPr>
@@ -8146,7 +8434,7 @@
           <p:cNvPr id="12" name="">
             <a:extLst xmlns:a="http://schemas.openxmlformats.org/drawingml/2006/main">
               <a:ext uri="{FF2B5EF4-FFF2-40B4-BE49-F238E27FC236}">
-                <a16:creationId xmlns:a16="http://schemas.microsoft.com/office/drawing/2014/main" id="{8F21D8D2-D008-432C-BF55-E05C1D8CFB30}"/>
+                <a16:creationId xmlns:a16="http://schemas.microsoft.com/office/drawing/2014/main" id="{39563E50-3075-4D4B-B342-5AD2826196CC}"/>
               </a:ext>
             </a:extLst>
           </p:cNvPr>
@@ -8196,7 +8484,7 @@
           <p:cNvPr id="13" name="">
             <a:extLst xmlns:a="http://schemas.openxmlformats.org/drawingml/2006/main">
               <a:ext uri="{FF2B5EF4-FFF2-40B4-BE49-F238E27FC236}">
-                <a16:creationId xmlns:a16="http://schemas.microsoft.com/office/drawing/2014/main" id="{0FD6B4CE-26EF-4CE1-B936-D43F23656154}"/>
+                <a16:creationId xmlns:a16="http://schemas.microsoft.com/office/drawing/2014/main" id="{7CE6F8B7-0FA5-4AAC-AFF7-26C36ECDCF5F}"/>
               </a:ext>
             </a:extLst>
           </p:cNvPr>
@@ -8227,7 +8515,7 @@
           <p:cNvPr id="14" name="">
             <a:extLst xmlns:a="http://schemas.openxmlformats.org/drawingml/2006/main">
               <a:ext uri="{FF2B5EF4-FFF2-40B4-BE49-F238E27FC236}">
-                <a16:creationId xmlns:a16="http://schemas.microsoft.com/office/drawing/2014/main" id="{1B10B347-556A-48CA-ACAE-0C08E6CF8A7F}"/>
+                <a16:creationId xmlns:a16="http://schemas.microsoft.com/office/drawing/2014/main" id="{C964CAB2-B447-40C8-91A5-B0D6D684397D}"/>
               </a:ext>
             </a:extLst>
           </p:cNvPr>
@@ -8277,7 +8565,7 @@
           <p:cNvPr id="15" name="">
             <a:extLst xmlns:a="http://schemas.openxmlformats.org/drawingml/2006/main">
               <a:ext uri="{FF2B5EF4-FFF2-40B4-BE49-F238E27FC236}">
-                <a16:creationId xmlns:a16="http://schemas.microsoft.com/office/drawing/2014/main" id="{2DD5406E-E4E4-4CEC-ABFC-0B1B0307A2D7}"/>
+                <a16:creationId xmlns:a16="http://schemas.microsoft.com/office/drawing/2014/main" id="{3EE6D654-4C3E-4FF5-B668-69BA69A3859F}"/>
               </a:ext>
             </a:extLst>
           </p:cNvPr>
@@ -8327,7 +8615,7 @@
           <p:cNvPr id="16" name="">
             <a:extLst xmlns:a="http://schemas.openxmlformats.org/drawingml/2006/main">
               <a:ext uri="{FF2B5EF4-FFF2-40B4-BE49-F238E27FC236}">
-                <a16:creationId xmlns:a16="http://schemas.microsoft.com/office/drawing/2014/main" id="{D6BCA772-FA42-4563-A5C5-DEDA8F5D9D48}"/>
+                <a16:creationId xmlns:a16="http://schemas.microsoft.com/office/drawing/2014/main" id="{18D3CC7E-8F74-48D6-8DE4-25208A67657C}"/>
               </a:ext>
             </a:extLst>
           </p:cNvPr>
@@ -8358,7 +8646,7 @@
           <p:cNvPr id="17" name="">
             <a:extLst xmlns:a="http://schemas.openxmlformats.org/drawingml/2006/main">
               <a:ext uri="{FF2B5EF4-FFF2-40B4-BE49-F238E27FC236}">
-                <a16:creationId xmlns:a16="http://schemas.microsoft.com/office/drawing/2014/main" id="{753A1CA1-79E4-4628-8821-EEFE88106F49}"/>
+                <a16:creationId xmlns:a16="http://schemas.microsoft.com/office/drawing/2014/main" id="{26807E20-10B0-42D2-AD0F-7CAEF3F53B96}"/>
               </a:ext>
             </a:extLst>
           </p:cNvPr>
@@ -8408,7 +8696,7 @@
           <p:cNvPr id="18" name="">
             <a:extLst xmlns:a="http://schemas.openxmlformats.org/drawingml/2006/main">
               <a:ext uri="{FF2B5EF4-FFF2-40B4-BE49-F238E27FC236}">
-                <a16:creationId xmlns:a16="http://schemas.microsoft.com/office/drawing/2014/main" id="{D3EC57E6-EAF4-41CD-BC41-91B8BD32D8CE}"/>
+                <a16:creationId xmlns:a16="http://schemas.microsoft.com/office/drawing/2014/main" id="{F3E5D5C1-43B8-4978-9326-F61FB7C86EA1}"/>
               </a:ext>
             </a:extLst>
           </p:cNvPr>
@@ -8458,7 +8746,7 @@
           <p:cNvPr id="19" name="">
             <a:extLst xmlns:a="http://schemas.openxmlformats.org/drawingml/2006/main">
               <a:ext uri="{FF2B5EF4-FFF2-40B4-BE49-F238E27FC236}">
-                <a16:creationId xmlns:a16="http://schemas.microsoft.com/office/drawing/2014/main" id="{F08228E2-92A5-4C8A-886A-E477000F1B60}"/>
+                <a16:creationId xmlns:a16="http://schemas.microsoft.com/office/drawing/2014/main" id="{904BC706-4111-46B9-8915-1C3990967103}"/>
               </a:ext>
             </a:extLst>
           </p:cNvPr>
@@ -8493,7 +8781,7 @@
           <p:cNvPr id="20" name="">
             <a:extLst xmlns:a="http://schemas.openxmlformats.org/drawingml/2006/main">
               <a:ext uri="{FF2B5EF4-FFF2-40B4-BE49-F238E27FC236}">
-                <a16:creationId xmlns:a16="http://schemas.microsoft.com/office/drawing/2014/main" id="{55FDD566-3BF2-4FAC-9434-AAB7E9B3D028}"/>
+                <a16:creationId xmlns:a16="http://schemas.microsoft.com/office/drawing/2014/main" id="{0AC91868-F508-4247-ABF1-E266A2543A34}"/>
               </a:ext>
             </a:extLst>
           </p:cNvPr>
@@ -8543,7 +8831,7 @@
           <p:cNvPr id="21" name="">
             <a:extLst xmlns:a="http://schemas.openxmlformats.org/drawingml/2006/main">
               <a:ext uri="{FF2B5EF4-FFF2-40B4-BE49-F238E27FC236}">
-                <a16:creationId xmlns:a16="http://schemas.microsoft.com/office/drawing/2014/main" id="{013CBCB2-61FF-47E5-B602-8FFC1D79274C}"/>
+                <a16:creationId xmlns:a16="http://schemas.microsoft.com/office/drawing/2014/main" id="{84A7E006-60F3-4FD3-9088-B8D0367A3697}"/>
               </a:ext>
             </a:extLst>
           </p:cNvPr>
@@ -8597,7 +8885,7 @@
           <p:nvPr/>
         </p:nvPicPr>
         <p:blipFill>
-          <a:blip xmlns:r="http://schemas.openxmlformats.org/officeDocument/2006/relationships" xmlns:a="http://schemas.openxmlformats.org/drawingml/2006/main" r:embed="R78dc93ba2d7a4a60"/>
+          <a:blip xmlns:r="http://schemas.openxmlformats.org/officeDocument/2006/relationships" xmlns:a="http://schemas.openxmlformats.org/drawingml/2006/main" r:embed="R03f417cc75844f0f"/>
           <a:stretch xmlns:a="http://schemas.openxmlformats.org/drawingml/2006/main"/>
         </p:blipFill>
         <p:spPr>
@@ -8615,7 +8903,7 @@
           <p:cNvPr id="23" name="">
             <a:extLst xmlns:a="http://schemas.openxmlformats.org/drawingml/2006/main">
               <a:ext uri="{FF2B5EF4-FFF2-40B4-BE49-F238E27FC236}">
-                <a16:creationId xmlns:a16="http://schemas.microsoft.com/office/drawing/2014/main" id="{A5BF6A24-7AAD-4BF6-83A7-C315F674C8D7}"/>
+                <a16:creationId xmlns:a16="http://schemas.microsoft.com/office/drawing/2014/main" id="{395FCD1A-081E-43D8-B1BA-061687E9D9A2}"/>
               </a:ext>
             </a:extLst>
           </p:cNvPr>
@@ -8665,7 +8953,7 @@
           <p:cNvPr id="24" name="">
             <a:extLst xmlns:a="http://schemas.openxmlformats.org/drawingml/2006/main">
               <a:ext uri="{FF2B5EF4-FFF2-40B4-BE49-F238E27FC236}">
-                <a16:creationId xmlns:a16="http://schemas.microsoft.com/office/drawing/2014/main" id="{C08631F7-19D2-4621-8DB7-3D1EA5CD504B}"/>
+                <a16:creationId xmlns:a16="http://schemas.microsoft.com/office/drawing/2014/main" id="{B13B020D-1434-43F5-A0CC-9DF1606ECDD5}"/>
               </a:ext>
             </a:extLst>
           </p:cNvPr>
@@ -8715,7 +9003,7 @@
           <p:cNvPr id="25" name="">
             <a:extLst xmlns:a="http://schemas.openxmlformats.org/drawingml/2006/main">
               <a:ext uri="{FF2B5EF4-FFF2-40B4-BE49-F238E27FC236}">
-                <a16:creationId xmlns:a16="http://schemas.microsoft.com/office/drawing/2014/main" id="{3BDF0F10-FF97-4C34-9292-93901B163514}"/>
+                <a16:creationId xmlns:a16="http://schemas.microsoft.com/office/drawing/2014/main" id="{A5FC47BA-A440-4A19-9A6C-12FF6001CC85}"/>
               </a:ext>
             </a:extLst>
           </p:cNvPr>
@@ -8763,7 +9051,7 @@
     </p:spTree>
     <p:extLst>
       <p:ext uri="{BB962C8B-B14F-4D97-AF65-F5344CB8AC3E}">
-        <p14:creationId xmlns:p14="http://schemas.microsoft.com/office/powerpoint/2010/main" val="753411906"/>
+        <p14:creationId xmlns:p14="http://schemas.microsoft.com/office/powerpoint/2010/main" val="99381629"/>
       </p:ext>
     </p:extLst>
   </p:cSld>
@@ -8794,7 +9082,7 @@
           <p:cNvPr id="1" name="">
             <a:extLst xmlns:a="http://schemas.openxmlformats.org/drawingml/2006/main">
               <a:ext uri="{FF2B5EF4-FFF2-40B4-BE49-F238E27FC236}">
-                <a16:creationId xmlns:a16="http://schemas.microsoft.com/office/drawing/2014/main" id="{0A61B38B-2AA0-48B4-B5DE-8BCA252AC28F}"/>
+                <a16:creationId xmlns:a16="http://schemas.microsoft.com/office/drawing/2014/main" id="{9E31D577-8326-4FFF-9A49-D18F5CAF25A1}"/>
               </a:ext>
             </a:extLst>
           </p:cNvPr>
@@ -8829,7 +9117,7 @@
           <p:nvPr/>
         </p:nvPicPr>
         <p:blipFill>
-          <a:blip xmlns:r="http://schemas.openxmlformats.org/officeDocument/2006/relationships" xmlns:a="http://schemas.openxmlformats.org/drawingml/2006/main" r:embed="R4117684f2b9b4b4b"/>
+          <a:blip xmlns:r="http://schemas.openxmlformats.org/officeDocument/2006/relationships" xmlns:a="http://schemas.openxmlformats.org/drawingml/2006/main" r:embed="R4d91da8a58394285"/>
           <a:stretch xmlns:a="http://schemas.openxmlformats.org/drawingml/2006/main"/>
         </p:blipFill>
         <p:spPr>
@@ -8847,7 +9135,7 @@
           <p:cNvPr id="3" name="">
             <a:extLst xmlns:a="http://schemas.openxmlformats.org/drawingml/2006/main">
               <a:ext uri="{FF2B5EF4-FFF2-40B4-BE49-F238E27FC236}">
-                <a16:creationId xmlns:a16="http://schemas.microsoft.com/office/drawing/2014/main" id="{D3BD488D-74BB-4966-93C3-5C409DA3486C}"/>
+                <a16:creationId xmlns:a16="http://schemas.microsoft.com/office/drawing/2014/main" id="{95E592DE-207B-4E6D-BFD3-A025C60940DF}"/>
               </a:ext>
             </a:extLst>
           </p:cNvPr>
@@ -8897,7 +9185,7 @@
           <p:cNvPr id="4" name="">
             <a:extLst xmlns:a="http://schemas.openxmlformats.org/drawingml/2006/main">
               <a:ext uri="{FF2B5EF4-FFF2-40B4-BE49-F238E27FC236}">
-                <a16:creationId xmlns:a16="http://schemas.microsoft.com/office/drawing/2014/main" id="{51041D9E-2FDE-4FEE-8306-199E238E386F}"/>
+                <a16:creationId xmlns:a16="http://schemas.microsoft.com/office/drawing/2014/main" id="{366F9E7E-8AB2-4758-B248-E623C498496F}"/>
               </a:ext>
             </a:extLst>
           </p:cNvPr>
@@ -8930,7 +9218,7 @@
           <p:cNvPr id="5" name="">
             <a:extLst xmlns:a="http://schemas.openxmlformats.org/drawingml/2006/main">
               <a:ext uri="{FF2B5EF4-FFF2-40B4-BE49-F238E27FC236}">
-                <a16:creationId xmlns:a16="http://schemas.microsoft.com/office/drawing/2014/main" id="{C4C77713-BF95-492E-B5CD-22095C298148}"/>
+                <a16:creationId xmlns:a16="http://schemas.microsoft.com/office/drawing/2014/main" id="{F86615DE-5412-44BA-B8C8-8F9218C208AE}"/>
               </a:ext>
             </a:extLst>
           </p:cNvPr>
@@ -8961,7 +9249,7 @@
           <p:cNvPr id="6" name="">
             <a:extLst xmlns:a="http://schemas.openxmlformats.org/drawingml/2006/main">
               <a:ext uri="{FF2B5EF4-FFF2-40B4-BE49-F238E27FC236}">
-                <a16:creationId xmlns:a16="http://schemas.microsoft.com/office/drawing/2014/main" id="{3FEB64B1-FB4B-4198-BC3D-B0A47B874D9F}"/>
+                <a16:creationId xmlns:a16="http://schemas.microsoft.com/office/drawing/2014/main" id="{8216CEF0-06B4-45C3-8D2C-CA08FC94BE03}"/>
               </a:ext>
             </a:extLst>
           </p:cNvPr>
@@ -9011,7 +9299,7 @@
           <p:cNvPr id="7" name="">
             <a:extLst xmlns:a="http://schemas.openxmlformats.org/drawingml/2006/main">
               <a:ext uri="{FF2B5EF4-FFF2-40B4-BE49-F238E27FC236}">
-                <a16:creationId xmlns:a16="http://schemas.microsoft.com/office/drawing/2014/main" id="{D913E5C0-9548-4588-B1F4-161E9A499789}"/>
+                <a16:creationId xmlns:a16="http://schemas.microsoft.com/office/drawing/2014/main" id="{6D88536F-6927-4EAE-B254-5491B66E747B}"/>
               </a:ext>
             </a:extLst>
           </p:cNvPr>
@@ -9061,7 +9349,7 @@
           <p:cNvPr id="8" name="">
             <a:extLst xmlns:a="http://schemas.openxmlformats.org/drawingml/2006/main">
               <a:ext uri="{FF2B5EF4-FFF2-40B4-BE49-F238E27FC236}">
-                <a16:creationId xmlns:a16="http://schemas.microsoft.com/office/drawing/2014/main" id="{9B887891-61F1-4498-8EC3-83C9AF72369A}"/>
+                <a16:creationId xmlns:a16="http://schemas.microsoft.com/office/drawing/2014/main" id="{CFBBB16C-3E64-4A17-BBF6-CA9CC87ADC1C}"/>
               </a:ext>
             </a:extLst>
           </p:cNvPr>
@@ -9111,7 +9399,7 @@
           <p:cNvPr id="9" name="">
             <a:extLst xmlns:a="http://schemas.openxmlformats.org/drawingml/2006/main">
               <a:ext uri="{FF2B5EF4-FFF2-40B4-BE49-F238E27FC236}">
-                <a16:creationId xmlns:a16="http://schemas.microsoft.com/office/drawing/2014/main" id="{862E043D-D5A2-4284-A1F0-EC6D63021D86}"/>
+                <a16:creationId xmlns:a16="http://schemas.microsoft.com/office/drawing/2014/main" id="{5C27F2D1-EE6F-4FED-BF61-B9638445B571}"/>
               </a:ext>
             </a:extLst>
           </p:cNvPr>
@@ -9161,7 +9449,7 @@
           <p:cNvPr id="10" name="">
             <a:extLst xmlns:a="http://schemas.openxmlformats.org/drawingml/2006/main">
               <a:ext uri="{FF2B5EF4-FFF2-40B4-BE49-F238E27FC236}">
-                <a16:creationId xmlns:a16="http://schemas.microsoft.com/office/drawing/2014/main" id="{48E8DAAB-7D49-4707-B2D3-F44DF5617719}"/>
+                <a16:creationId xmlns:a16="http://schemas.microsoft.com/office/drawing/2014/main" id="{BD4D072A-7217-432D-AE06-30CD4F0950AB}"/>
               </a:ext>
             </a:extLst>
           </p:cNvPr>
@@ -9211,7 +9499,7 @@
           <p:cNvPr id="11" name="">
             <a:extLst xmlns:a="http://schemas.openxmlformats.org/drawingml/2006/main">
               <a:ext uri="{FF2B5EF4-FFF2-40B4-BE49-F238E27FC236}">
-                <a16:creationId xmlns:a16="http://schemas.microsoft.com/office/drawing/2014/main" id="{064D45FA-8D66-4AE7-BA7B-5ED554DEE5D3}"/>
+                <a16:creationId xmlns:a16="http://schemas.microsoft.com/office/drawing/2014/main" id="{4ED4BF73-EB70-4C80-B902-318D9D698AAF}"/>
               </a:ext>
             </a:extLst>
           </p:cNvPr>
@@ -9261,7 +9549,7 @@
           <p:cNvPr id="12" name="">
             <a:extLst xmlns:a="http://schemas.openxmlformats.org/drawingml/2006/main">
               <a:ext uri="{FF2B5EF4-FFF2-40B4-BE49-F238E27FC236}">
-                <a16:creationId xmlns:a16="http://schemas.microsoft.com/office/drawing/2014/main" id="{6ED473D5-D0DC-4628-8CDA-4EB51A10D2CB}"/>
+                <a16:creationId xmlns:a16="http://schemas.microsoft.com/office/drawing/2014/main" id="{1D956F27-D590-4E39-AB77-0301606A6D72}"/>
               </a:ext>
             </a:extLst>
           </p:cNvPr>
@@ -9311,7 +9599,7 @@
           <p:cNvPr id="13" name="">
             <a:extLst xmlns:a="http://schemas.openxmlformats.org/drawingml/2006/main">
               <a:ext uri="{FF2B5EF4-FFF2-40B4-BE49-F238E27FC236}">
-                <a16:creationId xmlns:a16="http://schemas.microsoft.com/office/drawing/2014/main" id="{993EEB60-2DA7-4FCE-932F-31FC988A862B}"/>
+                <a16:creationId xmlns:a16="http://schemas.microsoft.com/office/drawing/2014/main" id="{9D2398AE-4B27-4A38-A14E-BAF9A5D91EF8}"/>
               </a:ext>
             </a:extLst>
           </p:cNvPr>
@@ -9361,7 +9649,7 @@
           <p:cNvPr id="14" name="">
             <a:extLst xmlns:a="http://schemas.openxmlformats.org/drawingml/2006/main">
               <a:ext uri="{FF2B5EF4-FFF2-40B4-BE49-F238E27FC236}">
-                <a16:creationId xmlns:a16="http://schemas.microsoft.com/office/drawing/2014/main" id="{3ABB3104-111D-4C90-9741-10AE0787D45F}"/>
+                <a16:creationId xmlns:a16="http://schemas.microsoft.com/office/drawing/2014/main" id="{8C5DCBE4-C25E-4AA0-AB91-4E96B303310D}"/>
               </a:ext>
             </a:extLst>
           </p:cNvPr>
@@ -9411,7 +9699,7 @@
           <p:cNvPr id="15" name="">
             <a:extLst xmlns:a="http://schemas.openxmlformats.org/drawingml/2006/main">
               <a:ext uri="{FF2B5EF4-FFF2-40B4-BE49-F238E27FC236}">
-                <a16:creationId xmlns:a16="http://schemas.microsoft.com/office/drawing/2014/main" id="{E54F11A5-1ED6-4137-8684-D3807B044C3E}"/>
+                <a16:creationId xmlns:a16="http://schemas.microsoft.com/office/drawing/2014/main" id="{3FCA1771-99E3-4D81-A672-6E27D0731C47}"/>
               </a:ext>
             </a:extLst>
           </p:cNvPr>
@@ -9461,7 +9749,7 @@
           <p:cNvPr id="16" name="">
             <a:extLst xmlns:a="http://schemas.openxmlformats.org/drawingml/2006/main">
               <a:ext uri="{FF2B5EF4-FFF2-40B4-BE49-F238E27FC236}">
-                <a16:creationId xmlns:a16="http://schemas.microsoft.com/office/drawing/2014/main" id="{C5CA7FC3-2203-4C21-B385-AAD170A2A507}"/>
+                <a16:creationId xmlns:a16="http://schemas.microsoft.com/office/drawing/2014/main" id="{D0863707-845E-45AE-BD08-1277FD1BCD76}"/>
               </a:ext>
             </a:extLst>
           </p:cNvPr>
@@ -9511,7 +9799,7 @@
           <p:cNvPr id="17" name="">
             <a:extLst xmlns:a="http://schemas.openxmlformats.org/drawingml/2006/main">
               <a:ext uri="{FF2B5EF4-FFF2-40B4-BE49-F238E27FC236}">
-                <a16:creationId xmlns:a16="http://schemas.microsoft.com/office/drawing/2014/main" id="{6D33AB6E-402E-4FB4-A180-6A37A5C20126}"/>
+                <a16:creationId xmlns:a16="http://schemas.microsoft.com/office/drawing/2014/main" id="{667AF132-5854-4DAF-9830-1D62ED7B5065}"/>
               </a:ext>
             </a:extLst>
           </p:cNvPr>
@@ -9546,7 +9834,7 @@
           <p:cNvPr id="18" name="">
             <a:extLst xmlns:a="http://schemas.openxmlformats.org/drawingml/2006/main">
               <a:ext uri="{FF2B5EF4-FFF2-40B4-BE49-F238E27FC236}">
-                <a16:creationId xmlns:a16="http://schemas.microsoft.com/office/drawing/2014/main" id="{2EB128BF-A16E-4503-991A-2D48F8FFFE65}"/>
+                <a16:creationId xmlns:a16="http://schemas.microsoft.com/office/drawing/2014/main" id="{CABBBAFF-6912-4FE7-97D7-05868D34B51E}"/>
               </a:ext>
             </a:extLst>
           </p:cNvPr>
@@ -9596,7 +9884,7 @@
           <p:cNvPr id="19" name="">
             <a:extLst xmlns:a="http://schemas.openxmlformats.org/drawingml/2006/main">
               <a:ext uri="{FF2B5EF4-FFF2-40B4-BE49-F238E27FC236}">
-                <a16:creationId xmlns:a16="http://schemas.microsoft.com/office/drawing/2014/main" id="{BD92AB4E-6F1A-45D6-A825-4B75BC3A3658}"/>
+                <a16:creationId xmlns:a16="http://schemas.microsoft.com/office/drawing/2014/main" id="{340279CC-53DF-4336-A047-58D119C06962}"/>
               </a:ext>
             </a:extLst>
           </p:cNvPr>
@@ -9646,7 +9934,7 @@
           <p:cNvPr id="20" name="">
             <a:extLst xmlns:a="http://schemas.openxmlformats.org/drawingml/2006/main">
               <a:ext uri="{FF2B5EF4-FFF2-40B4-BE49-F238E27FC236}">
-                <a16:creationId xmlns:a16="http://schemas.microsoft.com/office/drawing/2014/main" id="{9C26AF77-D491-495D-A891-90059E4319FE}"/>
+                <a16:creationId xmlns:a16="http://schemas.microsoft.com/office/drawing/2014/main" id="{E1586A15-13A3-4980-94DD-6FA1EFCEC6F1}"/>
               </a:ext>
             </a:extLst>
           </p:cNvPr>
@@ -9696,7 +9984,7 @@
           <p:cNvPr id="21" name="">
             <a:extLst xmlns:a="http://schemas.openxmlformats.org/drawingml/2006/main">
               <a:ext uri="{FF2B5EF4-FFF2-40B4-BE49-F238E27FC236}">
-                <a16:creationId xmlns:a16="http://schemas.microsoft.com/office/drawing/2014/main" id="{8FA07DCB-A1B3-4C08-AC2A-25567262C0F0}"/>
+                <a16:creationId xmlns:a16="http://schemas.microsoft.com/office/drawing/2014/main" id="{02B393C6-471A-4DE2-ABA7-F5DAB0CFEC4D}"/>
               </a:ext>
             </a:extLst>
           </p:cNvPr>
@@ -9746,7 +10034,7 @@
           <p:cNvPr id="22" name="">
             <a:extLst xmlns:a="http://schemas.openxmlformats.org/drawingml/2006/main">
               <a:ext uri="{FF2B5EF4-FFF2-40B4-BE49-F238E27FC236}">
-                <a16:creationId xmlns:a16="http://schemas.microsoft.com/office/drawing/2014/main" id="{2E0C1877-1250-4758-8A89-75B5B23054C9}"/>
+                <a16:creationId xmlns:a16="http://schemas.microsoft.com/office/drawing/2014/main" id="{7B7AAB23-22D5-4CF2-B899-2DFAE12906EE}"/>
               </a:ext>
             </a:extLst>
           </p:cNvPr>
@@ -9777,7 +10065,7 @@
           <p:cNvPr id="23" name="">
             <a:extLst xmlns:a="http://schemas.openxmlformats.org/drawingml/2006/main">
               <a:ext uri="{FF2B5EF4-FFF2-40B4-BE49-F238E27FC236}">
-                <a16:creationId xmlns:a16="http://schemas.microsoft.com/office/drawing/2014/main" id="{D2F3CAFB-DDD0-499F-BA25-519F40892682}"/>
+                <a16:creationId xmlns:a16="http://schemas.microsoft.com/office/drawing/2014/main" id="{F391A08E-14AB-4A58-ABA8-507A1E08F1AF}"/>
               </a:ext>
             </a:extLst>
           </p:cNvPr>
@@ -9827,7 +10115,7 @@
           <p:cNvPr id="24" name="">
             <a:extLst xmlns:a="http://schemas.openxmlformats.org/drawingml/2006/main">
               <a:ext uri="{FF2B5EF4-FFF2-40B4-BE49-F238E27FC236}">
-                <a16:creationId xmlns:a16="http://schemas.microsoft.com/office/drawing/2014/main" id="{1424124A-A8B7-4AAB-9253-27B31D784062}"/>
+                <a16:creationId xmlns:a16="http://schemas.microsoft.com/office/drawing/2014/main" id="{5B0E8DAD-3C9F-4F08-8D57-1E0EEC8F4B6A}"/>
               </a:ext>
             </a:extLst>
           </p:cNvPr>
@@ -9877,7 +10165,7 @@
           <p:cNvPr id="25" name="">
             <a:extLst xmlns:a="http://schemas.openxmlformats.org/drawingml/2006/main">
               <a:ext uri="{FF2B5EF4-FFF2-40B4-BE49-F238E27FC236}">
-                <a16:creationId xmlns:a16="http://schemas.microsoft.com/office/drawing/2014/main" id="{B9DFEBAF-F475-4E02-9766-0FFA893C12B9}"/>
+                <a16:creationId xmlns:a16="http://schemas.microsoft.com/office/drawing/2014/main" id="{B376C99C-9C02-4E6B-9E51-CECC141554EE}"/>
               </a:ext>
             </a:extLst>
           </p:cNvPr>
@@ -9927,7 +10215,7 @@
           <p:cNvPr id="26" name="">
             <a:extLst xmlns:a="http://schemas.openxmlformats.org/drawingml/2006/main">
               <a:ext uri="{FF2B5EF4-FFF2-40B4-BE49-F238E27FC236}">
-                <a16:creationId xmlns:a16="http://schemas.microsoft.com/office/drawing/2014/main" id="{D95E2790-B22E-42B3-8F89-7FC28049BEA8}"/>
+                <a16:creationId xmlns:a16="http://schemas.microsoft.com/office/drawing/2014/main" id="{6A8F4DC1-6520-464D-A062-5B4E4E0C5328}"/>
               </a:ext>
             </a:extLst>
           </p:cNvPr>
@@ -9958,7 +10246,7 @@
           <p:cNvPr id="27" name="">
             <a:extLst xmlns:a="http://schemas.openxmlformats.org/drawingml/2006/main">
               <a:ext uri="{FF2B5EF4-FFF2-40B4-BE49-F238E27FC236}">
-                <a16:creationId xmlns:a16="http://schemas.microsoft.com/office/drawing/2014/main" id="{C55E5353-58C6-4DD4-9BE0-694BB794696A}"/>
+                <a16:creationId xmlns:a16="http://schemas.microsoft.com/office/drawing/2014/main" id="{9228C9BC-70E9-42DC-BD1F-668ABE141170}"/>
               </a:ext>
             </a:extLst>
           </p:cNvPr>
@@ -10008,7 +10296,7 @@
           <p:cNvPr id="28" name="">
             <a:extLst xmlns:a="http://schemas.openxmlformats.org/drawingml/2006/main">
               <a:ext uri="{FF2B5EF4-FFF2-40B4-BE49-F238E27FC236}">
-                <a16:creationId xmlns:a16="http://schemas.microsoft.com/office/drawing/2014/main" id="{143315A8-5933-4E24-8761-14243DF4287E}"/>
+                <a16:creationId xmlns:a16="http://schemas.microsoft.com/office/drawing/2014/main" id="{01C146DF-8B99-49F0-9549-F68E1F5D24B8}"/>
               </a:ext>
             </a:extLst>
           </p:cNvPr>
@@ -10058,7 +10346,7 @@
           <p:cNvPr id="29" name="">
             <a:extLst xmlns:a="http://schemas.openxmlformats.org/drawingml/2006/main">
               <a:ext uri="{FF2B5EF4-FFF2-40B4-BE49-F238E27FC236}">
-                <a16:creationId xmlns:a16="http://schemas.microsoft.com/office/drawing/2014/main" id="{E667A42D-81C8-476C-AAC0-E75991163E81}"/>
+                <a16:creationId xmlns:a16="http://schemas.microsoft.com/office/drawing/2014/main" id="{38255B7E-6E2E-4A1C-89C9-1909BBD17EF8}"/>
               </a:ext>
             </a:extLst>
           </p:cNvPr>
@@ -10108,7 +10396,7 @@
           <p:cNvPr id="30" name="">
             <a:extLst xmlns:a="http://schemas.openxmlformats.org/drawingml/2006/main">
               <a:ext uri="{FF2B5EF4-FFF2-40B4-BE49-F238E27FC236}">
-                <a16:creationId xmlns:a16="http://schemas.microsoft.com/office/drawing/2014/main" id="{0E44008C-7A1F-444B-8BC4-EB144467F663}"/>
+                <a16:creationId xmlns:a16="http://schemas.microsoft.com/office/drawing/2014/main" id="{63A4681E-FC1B-49C4-ABD0-12585B5A47B2}"/>
               </a:ext>
             </a:extLst>
           </p:cNvPr>
@@ -10139,7 +10427,7 @@
           <p:cNvPr id="31" name="">
             <a:extLst xmlns:a="http://schemas.openxmlformats.org/drawingml/2006/main">
               <a:ext uri="{FF2B5EF4-FFF2-40B4-BE49-F238E27FC236}">
-                <a16:creationId xmlns:a16="http://schemas.microsoft.com/office/drawing/2014/main" id="{80BFAC1C-5A82-4A16-9D9A-44C8FFC78321}"/>
+                <a16:creationId xmlns:a16="http://schemas.microsoft.com/office/drawing/2014/main" id="{30CD3568-90C2-41B8-9E63-3974B04DE471}"/>
               </a:ext>
             </a:extLst>
           </p:cNvPr>
@@ -10189,7 +10477,7 @@
           <p:cNvPr id="32" name="">
             <a:extLst xmlns:a="http://schemas.openxmlformats.org/drawingml/2006/main">
               <a:ext uri="{FF2B5EF4-FFF2-40B4-BE49-F238E27FC236}">
-                <a16:creationId xmlns:a16="http://schemas.microsoft.com/office/drawing/2014/main" id="{7DD8DAE8-381A-4375-AE74-347EFF354E62}"/>
+                <a16:creationId xmlns:a16="http://schemas.microsoft.com/office/drawing/2014/main" id="{B06C94C4-947D-42E1-ABA4-C3FDAEB429CB}"/>
               </a:ext>
             </a:extLst>
           </p:cNvPr>
@@ -10239,7 +10527,7 @@
           <p:cNvPr id="33" name="">
             <a:extLst xmlns:a="http://schemas.openxmlformats.org/drawingml/2006/main">
               <a:ext uri="{FF2B5EF4-FFF2-40B4-BE49-F238E27FC236}">
-                <a16:creationId xmlns:a16="http://schemas.microsoft.com/office/drawing/2014/main" id="{7906C7EF-6CB5-4AE7-A0F3-583FFCACA33D}"/>
+                <a16:creationId xmlns:a16="http://schemas.microsoft.com/office/drawing/2014/main" id="{C7010A83-6580-466F-872F-B061C839DFA6}"/>
               </a:ext>
             </a:extLst>
           </p:cNvPr>
@@ -10289,7 +10577,7 @@
           <p:cNvPr id="34" name="">
             <a:extLst xmlns:a="http://schemas.openxmlformats.org/drawingml/2006/main">
               <a:ext uri="{FF2B5EF4-FFF2-40B4-BE49-F238E27FC236}">
-                <a16:creationId xmlns:a16="http://schemas.microsoft.com/office/drawing/2014/main" id="{C7BDB785-3FA1-4F50-A641-AE2844FF84B5}"/>
+                <a16:creationId xmlns:a16="http://schemas.microsoft.com/office/drawing/2014/main" id="{099F8F0F-F3BF-47E1-8534-11926CAF28B4}"/>
               </a:ext>
             </a:extLst>
           </p:cNvPr>
@@ -10320,7 +10608,7 @@
           <p:cNvPr id="35" name="">
             <a:extLst xmlns:a="http://schemas.openxmlformats.org/drawingml/2006/main">
               <a:ext uri="{FF2B5EF4-FFF2-40B4-BE49-F238E27FC236}">
-                <a16:creationId xmlns:a16="http://schemas.microsoft.com/office/drawing/2014/main" id="{5B083251-A9F0-46E3-B4B9-234FC79DBC36}"/>
+                <a16:creationId xmlns:a16="http://schemas.microsoft.com/office/drawing/2014/main" id="{005F70F8-F789-46E3-9AA4-E35045AAC14E}"/>
               </a:ext>
             </a:extLst>
           </p:cNvPr>
@@ -10355,7 +10643,7 @@
           <p:nvPr/>
         </p:nvPicPr>
         <p:blipFill>
-          <a:blip xmlns:r="http://schemas.openxmlformats.org/officeDocument/2006/relationships" xmlns:a="http://schemas.openxmlformats.org/drawingml/2006/main" r:embed="Rdc8c9d95bd4b4fa2"/>
+          <a:blip xmlns:r="http://schemas.openxmlformats.org/officeDocument/2006/relationships" xmlns:a="http://schemas.openxmlformats.org/drawingml/2006/main" r:embed="R36e4f65935b843a8"/>
           <a:stretch xmlns:a="http://schemas.openxmlformats.org/drawingml/2006/main"/>
         </p:blipFill>
         <p:spPr>
@@ -10373,7 +10661,7 @@
           <p:cNvPr id="37" name="">
             <a:extLst xmlns:a="http://schemas.openxmlformats.org/drawingml/2006/main">
               <a:ext uri="{FF2B5EF4-FFF2-40B4-BE49-F238E27FC236}">
-                <a16:creationId xmlns:a16="http://schemas.microsoft.com/office/drawing/2014/main" id="{24DF6937-0783-43BD-BF08-F531484F5724}"/>
+                <a16:creationId xmlns:a16="http://schemas.microsoft.com/office/drawing/2014/main" id="{A88A6DEB-D58A-4A7D-8994-A167417FC612}"/>
               </a:ext>
             </a:extLst>
           </p:cNvPr>
@@ -10423,7 +10711,7 @@
           <p:cNvPr id="38" name="">
             <a:extLst xmlns:a="http://schemas.openxmlformats.org/drawingml/2006/main">
               <a:ext uri="{FF2B5EF4-FFF2-40B4-BE49-F238E27FC236}">
-                <a16:creationId xmlns:a16="http://schemas.microsoft.com/office/drawing/2014/main" id="{E39E9218-9BA0-435E-9FFC-7AE47C0CB028}"/>
+                <a16:creationId xmlns:a16="http://schemas.microsoft.com/office/drawing/2014/main" id="{64CFE81F-C6EC-4705-B228-606ED4B100FB}"/>
               </a:ext>
             </a:extLst>
           </p:cNvPr>
@@ -10456,7 +10744,7 @@
           <p:cNvPr id="39" name="">
             <a:extLst xmlns:a="http://schemas.openxmlformats.org/drawingml/2006/main">
               <a:ext uri="{FF2B5EF4-FFF2-40B4-BE49-F238E27FC236}">
-                <a16:creationId xmlns:a16="http://schemas.microsoft.com/office/drawing/2014/main" id="{F8BEF712-47E2-48A2-A62C-85FB02A2E61C}"/>
+                <a16:creationId xmlns:a16="http://schemas.microsoft.com/office/drawing/2014/main" id="{AAD0AC2B-8399-409E-82DD-1C1EC5DC2D0C}"/>
               </a:ext>
             </a:extLst>
           </p:cNvPr>
@@ -10487,7 +10775,7 @@
           <p:cNvPr id="40" name="">
             <a:extLst xmlns:a="http://schemas.openxmlformats.org/drawingml/2006/main">
               <a:ext uri="{FF2B5EF4-FFF2-40B4-BE49-F238E27FC236}">
-                <a16:creationId xmlns:a16="http://schemas.microsoft.com/office/drawing/2014/main" id="{2E165EA1-95DC-4476-B67C-0B15C0F4EFA0}"/>
+                <a16:creationId xmlns:a16="http://schemas.microsoft.com/office/drawing/2014/main" id="{1D241FBB-030D-4AC5-A513-FC33B9621D45}"/>
               </a:ext>
             </a:extLst>
           </p:cNvPr>
@@ -10537,7 +10825,7 @@
           <p:cNvPr id="41" name="">
             <a:extLst xmlns:a="http://schemas.openxmlformats.org/drawingml/2006/main">
               <a:ext uri="{FF2B5EF4-FFF2-40B4-BE49-F238E27FC236}">
-                <a16:creationId xmlns:a16="http://schemas.microsoft.com/office/drawing/2014/main" id="{1F9EE9E4-847B-49AD-8170-BD85368D9521}"/>
+                <a16:creationId xmlns:a16="http://schemas.microsoft.com/office/drawing/2014/main" id="{3C87D740-1516-4F4E-9AAA-FA52F1453F4F}"/>
               </a:ext>
             </a:extLst>
           </p:cNvPr>
@@ -10587,7 +10875,7 @@
           <p:cNvPr id="42" name="">
             <a:extLst xmlns:a="http://schemas.openxmlformats.org/drawingml/2006/main">
               <a:ext uri="{FF2B5EF4-FFF2-40B4-BE49-F238E27FC236}">
-                <a16:creationId xmlns:a16="http://schemas.microsoft.com/office/drawing/2014/main" id="{A24C5E65-34B5-454D-A0A3-B9D1D456D925}"/>
+                <a16:creationId xmlns:a16="http://schemas.microsoft.com/office/drawing/2014/main" id="{79C30A30-1F26-4F56-A495-CCBB83E9B4AD}"/>
               </a:ext>
             </a:extLst>
           </p:cNvPr>
@@ -10637,7 +10925,7 @@
           <p:cNvPr id="43" name="">
             <a:extLst xmlns:a="http://schemas.openxmlformats.org/drawingml/2006/main">
               <a:ext uri="{FF2B5EF4-FFF2-40B4-BE49-F238E27FC236}">
-                <a16:creationId xmlns:a16="http://schemas.microsoft.com/office/drawing/2014/main" id="{2F49E65E-FEBB-42FD-91D4-6C907F73D56E}"/>
+                <a16:creationId xmlns:a16="http://schemas.microsoft.com/office/drawing/2014/main" id="{6D977766-9934-4D2D-BCB0-4875A82A9DE9}"/>
               </a:ext>
             </a:extLst>
           </p:cNvPr>
@@ -10670,7 +10958,7 @@
           <p:cNvPr id="44" name="">
             <a:extLst xmlns:a="http://schemas.openxmlformats.org/drawingml/2006/main">
               <a:ext uri="{FF2B5EF4-FFF2-40B4-BE49-F238E27FC236}">
-                <a16:creationId xmlns:a16="http://schemas.microsoft.com/office/drawing/2014/main" id="{4A60EEFA-EF46-4499-BC88-08FE7F16344E}"/>
+                <a16:creationId xmlns:a16="http://schemas.microsoft.com/office/drawing/2014/main" id="{95D5429C-7792-4644-9434-D87BB908A1C2}"/>
               </a:ext>
             </a:extLst>
           </p:cNvPr>
@@ -10720,7 +11008,7 @@
           <p:cNvPr id="45" name="">
             <a:extLst xmlns:a="http://schemas.openxmlformats.org/drawingml/2006/main">
               <a:ext uri="{FF2B5EF4-FFF2-40B4-BE49-F238E27FC236}">
-                <a16:creationId xmlns:a16="http://schemas.microsoft.com/office/drawing/2014/main" id="{21D7E4B7-1625-4E4F-8F60-2AF60C66C909}"/>
+                <a16:creationId xmlns:a16="http://schemas.microsoft.com/office/drawing/2014/main" id="{B60DF17C-9C1A-4AB2-A8D5-58086B5DAED8}"/>
               </a:ext>
             </a:extLst>
           </p:cNvPr>
@@ -10770,7 +11058,7 @@
           <p:cNvPr id="46" name="">
             <a:extLst xmlns:a="http://schemas.openxmlformats.org/drawingml/2006/main">
               <a:ext uri="{FF2B5EF4-FFF2-40B4-BE49-F238E27FC236}">
-                <a16:creationId xmlns:a16="http://schemas.microsoft.com/office/drawing/2014/main" id="{0C535156-704D-48F9-8511-7D9CAD9F99A6}"/>
+                <a16:creationId xmlns:a16="http://schemas.microsoft.com/office/drawing/2014/main" id="{DA1379D0-4E3C-4AD5-9112-AD1417D4D2C1}"/>
               </a:ext>
             </a:extLst>
           </p:cNvPr>
@@ -10803,7 +11091,7 @@
           <p:cNvPr id="47" name="">
             <a:extLst xmlns:a="http://schemas.openxmlformats.org/drawingml/2006/main">
               <a:ext uri="{FF2B5EF4-FFF2-40B4-BE49-F238E27FC236}">
-                <a16:creationId xmlns:a16="http://schemas.microsoft.com/office/drawing/2014/main" id="{09D0176E-E2B8-4E5A-8D96-FB5873777BD9}"/>
+                <a16:creationId xmlns:a16="http://schemas.microsoft.com/office/drawing/2014/main" id="{1846E74A-0680-487B-9B14-D2D6A6175B62}"/>
               </a:ext>
             </a:extLst>
           </p:cNvPr>
@@ -10853,7 +11141,7 @@
           <p:cNvPr id="48" name="">
             <a:extLst xmlns:a="http://schemas.openxmlformats.org/drawingml/2006/main">
               <a:ext uri="{FF2B5EF4-FFF2-40B4-BE49-F238E27FC236}">
-                <a16:creationId xmlns:a16="http://schemas.microsoft.com/office/drawing/2014/main" id="{BF4003F0-9BAC-4F4A-A7BB-8B402AE69DC2}"/>
+                <a16:creationId xmlns:a16="http://schemas.microsoft.com/office/drawing/2014/main" id="{2D491D72-D0DD-4FD3-966B-2182711248C0}"/>
               </a:ext>
             </a:extLst>
           </p:cNvPr>
@@ -10903,7 +11191,7 @@
           <p:cNvPr id="49" name="">
             <a:extLst xmlns:a="http://schemas.openxmlformats.org/drawingml/2006/main">
               <a:ext uri="{FF2B5EF4-FFF2-40B4-BE49-F238E27FC236}">
-                <a16:creationId xmlns:a16="http://schemas.microsoft.com/office/drawing/2014/main" id="{7E0B2732-159D-4A05-A395-B3A32DC3BCF5}"/>
+                <a16:creationId xmlns:a16="http://schemas.microsoft.com/office/drawing/2014/main" id="{DD36B4C0-9753-4A00-872A-54A67B9F17CC}"/>
               </a:ext>
             </a:extLst>
           </p:cNvPr>
@@ -10953,7 +11241,7 @@
           <p:cNvPr id="50" name="">
             <a:extLst xmlns:a="http://schemas.openxmlformats.org/drawingml/2006/main">
               <a:ext uri="{FF2B5EF4-FFF2-40B4-BE49-F238E27FC236}">
-                <a16:creationId xmlns:a16="http://schemas.microsoft.com/office/drawing/2014/main" id="{6673AEF1-E82C-46E7-A8A2-86A65A250CC1}"/>
+                <a16:creationId xmlns:a16="http://schemas.microsoft.com/office/drawing/2014/main" id="{FC93DAE8-5BDE-4A2E-BB68-3F4D3D17F0C2}"/>
               </a:ext>
             </a:extLst>
           </p:cNvPr>
@@ -11003,7 +11291,7 @@
           <p:cNvPr id="51" name="">
             <a:extLst xmlns:a="http://schemas.openxmlformats.org/drawingml/2006/main">
               <a:ext uri="{FF2B5EF4-FFF2-40B4-BE49-F238E27FC236}">
-                <a16:creationId xmlns:a16="http://schemas.microsoft.com/office/drawing/2014/main" id="{0F1E6D5E-59E6-4644-850D-88C53946164F}"/>
+                <a16:creationId xmlns:a16="http://schemas.microsoft.com/office/drawing/2014/main" id="{AA1763F7-97A4-4300-B872-66FCCAD2E8A7}"/>
               </a:ext>
             </a:extLst>
           </p:cNvPr>
@@ -11053,7 +11341,7 @@
           <p:cNvPr id="52" name="">
             <a:extLst xmlns:a="http://schemas.openxmlformats.org/drawingml/2006/main">
               <a:ext uri="{FF2B5EF4-FFF2-40B4-BE49-F238E27FC236}">
-                <a16:creationId xmlns:a16="http://schemas.microsoft.com/office/drawing/2014/main" id="{8FD20327-09D4-4ABC-B7BC-EB630D591CF7}"/>
+                <a16:creationId xmlns:a16="http://schemas.microsoft.com/office/drawing/2014/main" id="{46E95A55-5926-4B7C-AA44-AE61AB1C0A34}"/>
               </a:ext>
             </a:extLst>
           </p:cNvPr>
@@ -11084,7 +11372,7 @@
           <p:cNvPr id="53" name="">
             <a:extLst xmlns:a="http://schemas.openxmlformats.org/drawingml/2006/main">
               <a:ext uri="{FF2B5EF4-FFF2-40B4-BE49-F238E27FC236}">
-                <a16:creationId xmlns:a16="http://schemas.microsoft.com/office/drawing/2014/main" id="{5CF41F26-36EF-4649-A1EF-CFA9C9D02257}"/>
+                <a16:creationId xmlns:a16="http://schemas.microsoft.com/office/drawing/2014/main" id="{DEEB0A2C-4AFB-4E4A-B3AD-965E1727EDDD}"/>
               </a:ext>
             </a:extLst>
           </p:cNvPr>
@@ -11134,7 +11422,7 @@
           <p:cNvPr id="54" name="">
             <a:extLst xmlns:a="http://schemas.openxmlformats.org/drawingml/2006/main">
               <a:ext uri="{FF2B5EF4-FFF2-40B4-BE49-F238E27FC236}">
-                <a16:creationId xmlns:a16="http://schemas.microsoft.com/office/drawing/2014/main" id="{C38B89A4-9CAB-4B01-9B08-55301CD45ACB}"/>
+                <a16:creationId xmlns:a16="http://schemas.microsoft.com/office/drawing/2014/main" id="{645EC6DA-DFCC-406D-A412-D38787B7F35E}"/>
               </a:ext>
             </a:extLst>
           </p:cNvPr>
@@ -11184,7 +11472,7 @@
           <p:cNvPr id="55" name="">
             <a:extLst xmlns:a="http://schemas.openxmlformats.org/drawingml/2006/main">
               <a:ext uri="{FF2B5EF4-FFF2-40B4-BE49-F238E27FC236}">
-                <a16:creationId xmlns:a16="http://schemas.microsoft.com/office/drawing/2014/main" id="{6DBD0FB6-4008-4C83-8C2F-7D4210F2114F}"/>
+                <a16:creationId xmlns:a16="http://schemas.microsoft.com/office/drawing/2014/main" id="{B46C64F3-D81B-4F23-889D-148807B76494}"/>
               </a:ext>
             </a:extLst>
           </p:cNvPr>
@@ -11215,7 +11503,7 @@
           <p:cNvPr id="56" name="">
             <a:extLst xmlns:a="http://schemas.openxmlformats.org/drawingml/2006/main">
               <a:ext uri="{FF2B5EF4-FFF2-40B4-BE49-F238E27FC236}">
-                <a16:creationId xmlns:a16="http://schemas.microsoft.com/office/drawing/2014/main" id="{3EF985E6-EDD3-456E-95D3-2FB50BAD595E}"/>
+                <a16:creationId xmlns:a16="http://schemas.microsoft.com/office/drawing/2014/main" id="{098D4FFD-AD30-49CC-B164-D342BBD9AAB0}"/>
               </a:ext>
             </a:extLst>
           </p:cNvPr>
@@ -11265,7 +11553,7 @@
           <p:cNvPr id="57" name="">
             <a:extLst xmlns:a="http://schemas.openxmlformats.org/drawingml/2006/main">
               <a:ext uri="{FF2B5EF4-FFF2-40B4-BE49-F238E27FC236}">
-                <a16:creationId xmlns:a16="http://schemas.microsoft.com/office/drawing/2014/main" id="{081292A4-2618-4837-AC58-A52BEEF137B8}"/>
+                <a16:creationId xmlns:a16="http://schemas.microsoft.com/office/drawing/2014/main" id="{4EDCC406-2DD4-46EC-AF6D-B3B70E4D4344}"/>
               </a:ext>
             </a:extLst>
           </p:cNvPr>
@@ -11313,7 +11601,7 @@
     </p:spTree>
     <p:extLst>
       <p:ext uri="{BB962C8B-B14F-4D97-AF65-F5344CB8AC3E}">
-        <p14:creationId xmlns:p14="http://schemas.microsoft.com/office/powerpoint/2010/main" val="190922472"/>
+        <p14:creationId xmlns:p14="http://schemas.microsoft.com/office/powerpoint/2010/main" val="1807650093"/>
       </p:ext>
     </p:extLst>
   </p:cSld>
@@ -11344,7 +11632,7 @@
           <p:cNvPr id="1" name="">
             <a:extLst xmlns:a="http://schemas.openxmlformats.org/drawingml/2006/main">
               <a:ext uri="{FF2B5EF4-FFF2-40B4-BE49-F238E27FC236}">
-                <a16:creationId xmlns:a16="http://schemas.microsoft.com/office/drawing/2014/main" id="{541EC0C0-AA21-4BC7-BBDE-82B9DBDC568E}"/>
+                <a16:creationId xmlns:a16="http://schemas.microsoft.com/office/drawing/2014/main" id="{06EEDB5A-F308-42A4-BE0D-9752ABA4DAD2}"/>
               </a:ext>
             </a:extLst>
           </p:cNvPr>
@@ -11372,14 +11660,14 @@
       </p:sp>
       <p:pic>
         <p:nvPicPr>
-          <p:cNvPr id="41" name=""/>
+          <p:cNvPr id="46" name=""/>
           <p:cNvPicPr>
             <a:picLocks xmlns:a="http://schemas.openxmlformats.org/drawingml/2006/main" noChangeAspect="1"/>
           </p:cNvPicPr>
           <p:nvPr/>
         </p:nvPicPr>
         <p:blipFill>
-          <a:blip xmlns:r="http://schemas.openxmlformats.org/officeDocument/2006/relationships" xmlns:a="http://schemas.openxmlformats.org/drawingml/2006/main" r:embed="Rb7aa5ee150fe4010"/>
+          <a:blip xmlns:r="http://schemas.openxmlformats.org/officeDocument/2006/relationships" xmlns:a="http://schemas.openxmlformats.org/drawingml/2006/main" r:embed="R40bc0d2f93cf4828"/>
           <a:stretch xmlns:a="http://schemas.openxmlformats.org/drawingml/2006/main"/>
         </p:blipFill>
         <p:spPr>
@@ -11397,7 +11685,7 @@
           <p:cNvPr id="3" name="">
             <a:extLst xmlns:a="http://schemas.openxmlformats.org/drawingml/2006/main">
               <a:ext uri="{FF2B5EF4-FFF2-40B4-BE49-F238E27FC236}">
-                <a16:creationId xmlns:a16="http://schemas.microsoft.com/office/drawing/2014/main" id="{74319602-90CD-4AAD-A0FB-422BCFD2B843}"/>
+                <a16:creationId xmlns:a16="http://schemas.microsoft.com/office/drawing/2014/main" id="{7419ECD4-19AD-44FD-A8B7-BAEC9B633CF8}"/>
               </a:ext>
             </a:extLst>
           </p:cNvPr>
@@ -11437,7 +11725,7 @@
                   <a:srgbClr val="102A63"/>
                 </a:solidFill>
               </a:rPr>
-              <a:t>Профиль угроз и разрывов контроля</a:t>
+              <a:t>Профиль покрытия ключевых контролей</a:t>
             </a:r>
           </a:p>
         </p:txBody>
@@ -11447,7 +11735,7 @@
           <p:cNvPr id="4" name="">
             <a:extLst xmlns:a="http://schemas.openxmlformats.org/drawingml/2006/main">
               <a:ext uri="{FF2B5EF4-FFF2-40B4-BE49-F238E27FC236}">
-                <a16:creationId xmlns:a16="http://schemas.microsoft.com/office/drawing/2014/main" id="{7E89F1EE-B96A-4D39-92F2-5C6663E71D30}"/>
+                <a16:creationId xmlns:a16="http://schemas.microsoft.com/office/drawing/2014/main" id="{8B22A5B1-59B9-4432-B9D0-081B781C82B0}"/>
               </a:ext>
             </a:extLst>
           </p:cNvPr>
@@ -11480,7 +11768,7 @@
           <p:cNvPr id="5" name="">
             <a:extLst xmlns:a="http://schemas.openxmlformats.org/drawingml/2006/main">
               <a:ext uri="{FF2B5EF4-FFF2-40B4-BE49-F238E27FC236}">
-                <a16:creationId xmlns:a16="http://schemas.microsoft.com/office/drawing/2014/main" id="{EDB84B7F-C969-4D77-A86F-4110A2355A78}"/>
+                <a16:creationId xmlns:a16="http://schemas.microsoft.com/office/drawing/2014/main" id="{83EB1069-3913-47A7-91B5-4501A6976788}"/>
               </a:ext>
             </a:extLst>
           </p:cNvPr>
@@ -11511,7 +11799,7 @@
           <p:cNvPr id="6" name="">
             <a:extLst xmlns:a="http://schemas.openxmlformats.org/drawingml/2006/main">
               <a:ext uri="{FF2B5EF4-FFF2-40B4-BE49-F238E27FC236}">
-                <a16:creationId xmlns:a16="http://schemas.microsoft.com/office/drawing/2014/main" id="{49C15AE3-CF05-4CF9-B06C-295CDA9E2213}"/>
+                <a16:creationId xmlns:a16="http://schemas.microsoft.com/office/drawing/2014/main" id="{296A47D6-7998-43AF-B2CB-1B58BFB8E31F}"/>
               </a:ext>
             </a:extLst>
           </p:cNvPr>
@@ -11561,7 +11849,7 @@
           <p:cNvPr id="7" name="">
             <a:extLst xmlns:a="http://schemas.openxmlformats.org/drawingml/2006/main">
               <a:ext uri="{FF2B5EF4-FFF2-40B4-BE49-F238E27FC236}">
-                <a16:creationId xmlns:a16="http://schemas.microsoft.com/office/drawing/2014/main" id="{A8245A1D-4008-4FF6-92C8-572034C3A905}"/>
+                <a16:creationId xmlns:a16="http://schemas.microsoft.com/office/drawing/2014/main" id="{D92CCD23-4CB4-4892-95C8-1F16E8C38958}"/>
               </a:ext>
             </a:extLst>
           </p:cNvPr>
@@ -11611,7 +11899,7 @@
           <p:cNvPr id="8" name="">
             <a:extLst xmlns:a="http://schemas.openxmlformats.org/drawingml/2006/main">
               <a:ext uri="{FF2B5EF4-FFF2-40B4-BE49-F238E27FC236}">
-                <a16:creationId xmlns:a16="http://schemas.microsoft.com/office/drawing/2014/main" id="{B8026038-8D35-4C63-86CD-348D4DBCEF1A}"/>
+                <a16:creationId xmlns:a16="http://schemas.microsoft.com/office/drawing/2014/main" id="{F6FEA680-C157-4F74-BA7B-A30C159817ED}"/>
               </a:ext>
             </a:extLst>
           </p:cNvPr>
@@ -11623,7 +11911,7 @@
         <p:spPr>
           <a:xfrm xmlns:a="http://schemas.openxmlformats.org/drawingml/2006/main">
             <a:off x="552450" y="1333500"/>
-            <a:ext cx="10648950" cy="323850"/>
+            <a:ext cx="7239000" cy="323850"/>
           </a:xfrm>
           <a:prstGeom xmlns:a="http://schemas.openxmlformats.org/drawingml/2006/main" prst="rect">
             <a:avLst/>
@@ -11651,7 +11939,7 @@
                   <a:srgbClr val="2048A8"/>
                 </a:solidFill>
               </a:rPr>
-              <a:t>Доля незакрытых контрольных зон по данным анкеты</a:t>
+              <a:t>0% — контроль не подтвержден; 100% — целевой контур закрыт</a:t>
             </a:r>
           </a:p>
         </p:txBody>
@@ -11661,7 +11949,7 @@
           <p:cNvPr id="9" name="">
             <a:extLst xmlns:a="http://schemas.openxmlformats.org/drawingml/2006/main">
               <a:ext uri="{FF2B5EF4-FFF2-40B4-BE49-F238E27FC236}">
-                <a16:creationId xmlns:a16="http://schemas.microsoft.com/office/drawing/2014/main" id="{AB91BC53-EF2B-4283-B5E8-E0F097830401}"/>
+                <a16:creationId xmlns:a16="http://schemas.microsoft.com/office/drawing/2014/main" id="{4A8BCF5D-A490-400B-9FC5-75D7E8419552}"/>
               </a:ext>
             </a:extLst>
           </p:cNvPr>
@@ -11673,7 +11961,7 @@
         <p:spPr>
           <a:xfrm xmlns:a="http://schemas.openxmlformats.org/drawingml/2006/main">
             <a:off x="552450" y="1695450"/>
-            <a:ext cx="10648950" cy="266700"/>
+            <a:ext cx="7810500" cy="266700"/>
           </a:xfrm>
           <a:prstGeom xmlns:a="http://schemas.openxmlformats.org/drawingml/2006/main" prst="rect">
             <a:avLst/>
@@ -11711,7 +11999,142 @@
           <p:cNvPr id="10" name="">
             <a:extLst xmlns:a="http://schemas.openxmlformats.org/drawingml/2006/main">
               <a:ext uri="{FF2B5EF4-FFF2-40B4-BE49-F238E27FC236}">
-                <a16:creationId xmlns:a16="http://schemas.microsoft.com/office/drawing/2014/main" id="{0A0A2EE7-71B2-49A9-A6F4-E465DDD63C31}"/>
+                <a16:creationId xmlns:a16="http://schemas.microsoft.com/office/drawing/2014/main" id="{561A278E-1694-4B50-8BF8-A7F556521F3C}"/>
+              </a:ext>
+            </a:extLst>
+          </p:cNvPr>
+          <p:cNvSpPr>
+            <a:spLocks xmlns:a="http://schemas.openxmlformats.org/drawingml/2006/main" noGrp="1"/>
+          </p:cNvSpPr>
+          <p:nvPr/>
+        </p:nvSpPr>
+        <p:spPr>
+          <a:xfrm xmlns:a="http://schemas.openxmlformats.org/drawingml/2006/main">
+            <a:off x="8934450" y="1333500"/>
+            <a:ext cx="2266950" cy="647700"/>
+          </a:xfrm>
+          <a:prstGeom xmlns:a="http://schemas.openxmlformats.org/drawingml/2006/main" prst="roundRect">
+            <a:avLst>
+              <a:gd name="adj" fmla="val 11765"/>
+            </a:avLst>
+          </a:prstGeom>
+          <a:solidFill xmlns:a="http://schemas.openxmlformats.org/drawingml/2006/main">
+            <a:srgbClr val="EEF3FF"/>
+          </a:solidFill>
+          <a:ln xmlns:a="http://schemas.openxmlformats.org/drawingml/2006/main" w="9525">
+            <a:solidFill>
+              <a:srgbClr val="D7E0F2"/>
+            </a:solidFill>
+            <a:prstDash val="solid"/>
+          </a:ln>
+        </p:spPr>
+      </p:sp>
+      <p:sp>
+        <p:nvSpPr>
+          <p:cNvPr id="11" name="">
+            <a:extLst xmlns:a="http://schemas.openxmlformats.org/drawingml/2006/main">
+              <a:ext uri="{FF2B5EF4-FFF2-40B4-BE49-F238E27FC236}">
+                <a16:creationId xmlns:a16="http://schemas.microsoft.com/office/drawing/2014/main" id="{0C80D136-671A-4E53-901B-BCDB57B62A90}"/>
+              </a:ext>
+            </a:extLst>
+          </p:cNvPr>
+          <p:cNvSpPr>
+            <a:spLocks xmlns:a="http://schemas.openxmlformats.org/drawingml/2006/main" noGrp="1"/>
+          </p:cNvSpPr>
+          <p:nvPr/>
+        </p:nvSpPr>
+        <p:spPr>
+          <a:xfrm xmlns:a="http://schemas.openxmlformats.org/drawingml/2006/main">
+            <a:off x="9124950" y="1428750"/>
+            <a:ext cx="781050" cy="361950"/>
+          </a:xfrm>
+          <a:prstGeom xmlns:a="http://schemas.openxmlformats.org/drawingml/2006/main" prst="rect">
+            <a:avLst/>
+          </a:prstGeom>
+          <a:noFill xmlns:a="http://schemas.openxmlformats.org/drawingml/2006/main"/>
+          <a:ln xmlns:a="http://schemas.openxmlformats.org/drawingml/2006/main" w="0">
+            <a:noFill/>
+            <a:prstDash val="solid"/>
+          </a:ln>
+        </p:spPr>
+        <p:txBody>
+          <a:bodyPr xmlns:a="http://schemas.openxmlformats.org/drawingml/2006/main"/>
+          <a:lstStyle xmlns:a="http://schemas.openxmlformats.org/drawingml/2006/main"/>
+          <a:p xmlns:a="http://schemas.openxmlformats.org/drawingml/2006/main">
+            <a:pPr algn="ctr">
+              <a:defRPr sz="2025" b="1">
+                <a:solidFill>
+                  <a:srgbClr val="102A63"/>
+                </a:solidFill>
+              </a:defRPr>
+            </a:pPr>
+            <a:r>
+              <a:rPr sz="2025" b="1">
+                <a:solidFill>
+                  <a:srgbClr val="102A63"/>
+                </a:solidFill>
+              </a:rPr>
+              <a:t>{{COVERAGE_AVERAGE}}%</a:t>
+            </a:r>
+          </a:p>
+        </p:txBody>
+      </p:sp>
+      <p:sp>
+        <p:nvSpPr>
+          <p:cNvPr id="12" name="">
+            <a:extLst xmlns:a="http://schemas.openxmlformats.org/drawingml/2006/main">
+              <a:ext uri="{FF2B5EF4-FFF2-40B4-BE49-F238E27FC236}">
+                <a16:creationId xmlns:a16="http://schemas.microsoft.com/office/drawing/2014/main" id="{EC2E2561-733E-4477-955C-971B54715875}"/>
+              </a:ext>
+            </a:extLst>
+          </p:cNvPr>
+          <p:cNvSpPr>
+            <a:spLocks xmlns:a="http://schemas.openxmlformats.org/drawingml/2006/main" noGrp="1"/>
+          </p:cNvSpPr>
+          <p:nvPr/>
+        </p:nvSpPr>
+        <p:spPr>
+          <a:xfrm xmlns:a="http://schemas.openxmlformats.org/drawingml/2006/main">
+            <a:off x="9944100" y="1504950"/>
+            <a:ext cx="1066800" cy="228600"/>
+          </a:xfrm>
+          <a:prstGeom xmlns:a="http://schemas.openxmlformats.org/drawingml/2006/main" prst="rect">
+            <a:avLst/>
+          </a:prstGeom>
+          <a:noFill xmlns:a="http://schemas.openxmlformats.org/drawingml/2006/main"/>
+          <a:ln xmlns:a="http://schemas.openxmlformats.org/drawingml/2006/main" w="0">
+            <a:noFill/>
+            <a:prstDash val="solid"/>
+          </a:ln>
+        </p:spPr>
+        <p:txBody>
+          <a:bodyPr xmlns:a="http://schemas.openxmlformats.org/drawingml/2006/main"/>
+          <a:lstStyle xmlns:a="http://schemas.openxmlformats.org/drawingml/2006/main"/>
+          <a:p xmlns:a="http://schemas.openxmlformats.org/drawingml/2006/main">
+            <a:pPr algn="ctr">
+              <a:defRPr sz="900" b="1">
+                <a:solidFill>
+                  <a:srgbClr val="596780"/>
+                </a:solidFill>
+              </a:defRPr>
+            </a:pPr>
+            <a:r>
+              <a:rPr sz="900" b="1">
+                <a:solidFill>
+                  <a:srgbClr val="596780"/>
+                </a:solidFill>
+              </a:rPr>
+              <a:t>среднее покрытие</a:t>
+            </a:r>
+          </a:p>
+        </p:txBody>
+      </p:sp>
+      <p:sp>
+        <p:nvSpPr>
+          <p:cNvPr id="13" name="">
+            <a:extLst xmlns:a="http://schemas.openxmlformats.org/drawingml/2006/main">
+              <a:ext uri="{FF2B5EF4-FFF2-40B4-BE49-F238E27FC236}">
+                <a16:creationId xmlns:a16="http://schemas.microsoft.com/office/drawing/2014/main" id="{986420B6-FF1B-457C-A26A-F107656ED410}"/>
               </a:ext>
             </a:extLst>
           </p:cNvPr>
@@ -11739,10 +12162,10 @@
       </p:sp>
       <p:sp>
         <p:nvSpPr>
-          <p:cNvPr id="11" name="">
-            <a:extLst xmlns:a="http://schemas.openxmlformats.org/drawingml/2006/main">
-              <a:ext uri="{FF2B5EF4-FFF2-40B4-BE49-F238E27FC236}">
-                <a16:creationId xmlns:a16="http://schemas.microsoft.com/office/drawing/2014/main" id="{CF5B16B8-12FD-46C7-B949-BBADBD5C11F4}"/>
+          <p:cNvPr id="14" name="">
+            <a:extLst xmlns:a="http://schemas.openxmlformats.org/drawingml/2006/main">
+              <a:ext uri="{FF2B5EF4-FFF2-40B4-BE49-F238E27FC236}">
+                <a16:creationId xmlns:a16="http://schemas.microsoft.com/office/drawing/2014/main" id="{F143ACFD-FB91-48CF-BCDE-78DAA2C1241A}"/>
               </a:ext>
             </a:extLst>
           </p:cNvPr>
@@ -11770,10 +12193,10 @@
       </p:sp>
       <p:sp>
         <p:nvSpPr>
-          <p:cNvPr id="12" name="">
-            <a:extLst xmlns:a="http://schemas.openxmlformats.org/drawingml/2006/main">
-              <a:ext uri="{FF2B5EF4-FFF2-40B4-BE49-F238E27FC236}">
-                <a16:creationId xmlns:a16="http://schemas.microsoft.com/office/drawing/2014/main" id="{E3DEF19B-BE9E-4A14-AA3D-52170338079A}"/>
+          <p:cNvPr id="15" name="">
+            <a:extLst xmlns:a="http://schemas.openxmlformats.org/drawingml/2006/main">
+              <a:ext uri="{FF2B5EF4-FFF2-40B4-BE49-F238E27FC236}">
+                <a16:creationId xmlns:a16="http://schemas.microsoft.com/office/drawing/2014/main" id="{FF042D92-D879-4273-A996-9C7490928516}"/>
               </a:ext>
             </a:extLst>
           </p:cNvPr>
@@ -11820,10 +12243,10 @@
       </p:sp>
       <p:sp>
         <p:nvSpPr>
-          <p:cNvPr id="13" name="">
-            <a:extLst xmlns:a="http://schemas.openxmlformats.org/drawingml/2006/main">
-              <a:ext uri="{FF2B5EF4-FFF2-40B4-BE49-F238E27FC236}">
-                <a16:creationId xmlns:a16="http://schemas.microsoft.com/office/drawing/2014/main" id="{2A65D7AF-D442-4108-BA6B-862AFF88899F}"/>
+          <p:cNvPr id="16" name="">
+            <a:extLst xmlns:a="http://schemas.openxmlformats.org/drawingml/2006/main">
+              <a:ext uri="{FF2B5EF4-FFF2-40B4-BE49-F238E27FC236}">
+                <a16:creationId xmlns:a16="http://schemas.microsoft.com/office/drawing/2014/main" id="{DE29C220-EFA6-42F1-820F-938BC5C7B50E}"/>
               </a:ext>
             </a:extLst>
           </p:cNvPr>
@@ -11870,10 +12293,10 @@
       </p:sp>
       <p:sp>
         <p:nvSpPr>
-          <p:cNvPr id="14" name="">
-            <a:extLst xmlns:a="http://schemas.openxmlformats.org/drawingml/2006/main">
-              <a:ext uri="{FF2B5EF4-FFF2-40B4-BE49-F238E27FC236}">
-                <a16:creationId xmlns:a16="http://schemas.microsoft.com/office/drawing/2014/main" id="{C60C2F6B-5EBF-4317-AA93-CD156E6E13F4}"/>
+          <p:cNvPr id="17" name="">
+            <a:extLst xmlns:a="http://schemas.openxmlformats.org/drawingml/2006/main">
+              <a:ext uri="{FF2B5EF4-FFF2-40B4-BE49-F238E27FC236}">
+                <a16:creationId xmlns:a16="http://schemas.microsoft.com/office/drawing/2014/main" id="{6AC29238-739B-45CB-A529-076850739E93}"/>
               </a:ext>
             </a:extLst>
           </p:cNvPr>
@@ -11913,17 +12336,17 @@
                   <a:srgbClr val="596780"/>
                 </a:solidFill>
               </a:rPr>
-              <a:t>разрыв контроля</a:t>
-            </a:r>
-          </a:p>
-        </p:txBody>
-      </p:sp>
-      <p:sp>
-        <p:nvSpPr>
-          <p:cNvPr id="15" name="">
-            <a:extLst xmlns:a="http://schemas.openxmlformats.org/drawingml/2006/main">
-              <a:ext uri="{FF2B5EF4-FFF2-40B4-BE49-F238E27FC236}">
-                <a16:creationId xmlns:a16="http://schemas.microsoft.com/office/drawing/2014/main" id="{48B9498A-C3E4-4208-AD01-BD303572EA57}"/>
+              <a:t>уровень покрытия</a:t>
+            </a:r>
+          </a:p>
+        </p:txBody>
+      </p:sp>
+      <p:sp>
+        <p:nvSpPr>
+          <p:cNvPr id="18" name="">
+            <a:extLst xmlns:a="http://schemas.openxmlformats.org/drawingml/2006/main">
+              <a:ext uri="{FF2B5EF4-FFF2-40B4-BE49-F238E27FC236}">
+                <a16:creationId xmlns:a16="http://schemas.microsoft.com/office/drawing/2014/main" id="{0246C913-44FE-4894-991B-EB386F56C1EF}"/>
               </a:ext>
             </a:extLst>
           </p:cNvPr>
@@ -11951,10 +12374,10 @@
       </p:sp>
       <p:sp>
         <p:nvSpPr>
-          <p:cNvPr id="16" name="">
-            <a:extLst xmlns:a="http://schemas.openxmlformats.org/drawingml/2006/main">
-              <a:ext uri="{FF2B5EF4-FFF2-40B4-BE49-F238E27FC236}">
-                <a16:creationId xmlns:a16="http://schemas.microsoft.com/office/drawing/2014/main" id="{8F503777-301F-47F7-B636-CA5FF81B5CAE}"/>
+          <p:cNvPr id="19" name="">
+            <a:extLst xmlns:a="http://schemas.openxmlformats.org/drawingml/2006/main">
+              <a:ext uri="{FF2B5EF4-FFF2-40B4-BE49-F238E27FC236}">
+                <a16:creationId xmlns:a16="http://schemas.microsoft.com/office/drawing/2014/main" id="{A4A01931-9907-4C0A-9F90-7C03F555820B}"/>
               </a:ext>
             </a:extLst>
           </p:cNvPr>
@@ -11982,10 +12405,10 @@
       </p:sp>
       <p:sp>
         <p:nvSpPr>
-          <p:cNvPr id="17" name="">
-            <a:extLst xmlns:a="http://schemas.openxmlformats.org/drawingml/2006/main">
-              <a:ext uri="{FF2B5EF4-FFF2-40B4-BE49-F238E27FC236}">
-                <a16:creationId xmlns:a16="http://schemas.microsoft.com/office/drawing/2014/main" id="{6A14865D-5903-4859-9498-75A7AF3FFAA1}"/>
+          <p:cNvPr id="20" name="">
+            <a:extLst xmlns:a="http://schemas.openxmlformats.org/drawingml/2006/main">
+              <a:ext uri="{FF2B5EF4-FFF2-40B4-BE49-F238E27FC236}">
+                <a16:creationId xmlns:a16="http://schemas.microsoft.com/office/drawing/2014/main" id="{F553741E-AC99-4BEC-8B5F-FAA64EBD0B81}"/>
               </a:ext>
             </a:extLst>
           </p:cNvPr>
@@ -12032,10 +12455,10 @@
       </p:sp>
       <p:sp>
         <p:nvSpPr>
-          <p:cNvPr id="18" name="">
-            <a:extLst xmlns:a="http://schemas.openxmlformats.org/drawingml/2006/main">
-              <a:ext uri="{FF2B5EF4-FFF2-40B4-BE49-F238E27FC236}">
-                <a16:creationId xmlns:a16="http://schemas.microsoft.com/office/drawing/2014/main" id="{B7A41FFA-1550-4B70-9AB7-9A7079724161}"/>
+          <p:cNvPr id="21" name="">
+            <a:extLst xmlns:a="http://schemas.openxmlformats.org/drawingml/2006/main">
+              <a:ext uri="{FF2B5EF4-FFF2-40B4-BE49-F238E27FC236}">
+                <a16:creationId xmlns:a16="http://schemas.microsoft.com/office/drawing/2014/main" id="{48E56E1F-C101-4543-8650-67C0A7225587}"/>
               </a:ext>
             </a:extLst>
           </p:cNvPr>
@@ -12082,10 +12505,10 @@
       </p:sp>
       <p:sp>
         <p:nvSpPr>
-          <p:cNvPr id="19" name="">
-            <a:extLst xmlns:a="http://schemas.openxmlformats.org/drawingml/2006/main">
-              <a:ext uri="{FF2B5EF4-FFF2-40B4-BE49-F238E27FC236}">
-                <a16:creationId xmlns:a16="http://schemas.microsoft.com/office/drawing/2014/main" id="{D52223B0-30E4-4345-BF90-870873E2414A}"/>
+          <p:cNvPr id="22" name="">
+            <a:extLst xmlns:a="http://schemas.openxmlformats.org/drawingml/2006/main">
+              <a:ext uri="{FF2B5EF4-FFF2-40B4-BE49-F238E27FC236}">
+                <a16:creationId xmlns:a16="http://schemas.microsoft.com/office/drawing/2014/main" id="{DBF9F52F-5F86-455F-A838-B2181898F7F8}"/>
               </a:ext>
             </a:extLst>
           </p:cNvPr>
@@ -12125,17 +12548,17 @@
                   <a:srgbClr val="596780"/>
                 </a:solidFill>
               </a:rPr>
-              <a:t>разрыв контроля</a:t>
-            </a:r>
-          </a:p>
-        </p:txBody>
-      </p:sp>
-      <p:sp>
-        <p:nvSpPr>
-          <p:cNvPr id="20" name="">
-            <a:extLst xmlns:a="http://schemas.openxmlformats.org/drawingml/2006/main">
-              <a:ext uri="{FF2B5EF4-FFF2-40B4-BE49-F238E27FC236}">
-                <a16:creationId xmlns:a16="http://schemas.microsoft.com/office/drawing/2014/main" id="{0E90FA1A-86E3-470E-967B-297C3EFF8B6E}"/>
+              <a:t>уровень покрытия</a:t>
+            </a:r>
+          </a:p>
+        </p:txBody>
+      </p:sp>
+      <p:sp>
+        <p:nvSpPr>
+          <p:cNvPr id="23" name="">
+            <a:extLst xmlns:a="http://schemas.openxmlformats.org/drawingml/2006/main">
+              <a:ext uri="{FF2B5EF4-FFF2-40B4-BE49-F238E27FC236}">
+                <a16:creationId xmlns:a16="http://schemas.microsoft.com/office/drawing/2014/main" id="{4571B67A-8943-4280-B837-506586CB9399}"/>
               </a:ext>
             </a:extLst>
           </p:cNvPr>
@@ -12163,10 +12586,10 @@
       </p:sp>
       <p:sp>
         <p:nvSpPr>
-          <p:cNvPr id="21" name="">
-            <a:extLst xmlns:a="http://schemas.openxmlformats.org/drawingml/2006/main">
-              <a:ext uri="{FF2B5EF4-FFF2-40B4-BE49-F238E27FC236}">
-                <a16:creationId xmlns:a16="http://schemas.microsoft.com/office/drawing/2014/main" id="{6B02597D-C116-4803-92E5-6DA26D7B2F02}"/>
+          <p:cNvPr id="24" name="">
+            <a:extLst xmlns:a="http://schemas.openxmlformats.org/drawingml/2006/main">
+              <a:ext uri="{FF2B5EF4-FFF2-40B4-BE49-F238E27FC236}">
+                <a16:creationId xmlns:a16="http://schemas.microsoft.com/office/drawing/2014/main" id="{59CE8040-EE48-4E09-BDAF-8E1226513DB1}"/>
               </a:ext>
             </a:extLst>
           </p:cNvPr>
@@ -12194,10 +12617,10 @@
       </p:sp>
       <p:sp>
         <p:nvSpPr>
-          <p:cNvPr id="22" name="">
-            <a:extLst xmlns:a="http://schemas.openxmlformats.org/drawingml/2006/main">
-              <a:ext uri="{FF2B5EF4-FFF2-40B4-BE49-F238E27FC236}">
-                <a16:creationId xmlns:a16="http://schemas.microsoft.com/office/drawing/2014/main" id="{BFD8AEB1-C99A-4055-ACD2-5B19BFC132B3}"/>
+          <p:cNvPr id="25" name="">
+            <a:extLst xmlns:a="http://schemas.openxmlformats.org/drawingml/2006/main">
+              <a:ext uri="{FF2B5EF4-FFF2-40B4-BE49-F238E27FC236}">
+                <a16:creationId xmlns:a16="http://schemas.microsoft.com/office/drawing/2014/main" id="{6CA2D459-6C47-48D6-AB4F-6D1CEA48C3AA}"/>
               </a:ext>
             </a:extLst>
           </p:cNvPr>
@@ -12244,10 +12667,10 @@
       </p:sp>
       <p:sp>
         <p:nvSpPr>
-          <p:cNvPr id="23" name="">
-            <a:extLst xmlns:a="http://schemas.openxmlformats.org/drawingml/2006/main">
-              <a:ext uri="{FF2B5EF4-FFF2-40B4-BE49-F238E27FC236}">
-                <a16:creationId xmlns:a16="http://schemas.microsoft.com/office/drawing/2014/main" id="{8D33A0A3-4161-4E03-8D99-93BEB6DCBD33}"/>
+          <p:cNvPr id="26" name="">
+            <a:extLst xmlns:a="http://schemas.openxmlformats.org/drawingml/2006/main">
+              <a:ext uri="{FF2B5EF4-FFF2-40B4-BE49-F238E27FC236}">
+                <a16:creationId xmlns:a16="http://schemas.microsoft.com/office/drawing/2014/main" id="{931381E2-DE55-497C-86DC-8BA48D2DF1BF}"/>
               </a:ext>
             </a:extLst>
           </p:cNvPr>
@@ -12294,10 +12717,10 @@
       </p:sp>
       <p:sp>
         <p:nvSpPr>
-          <p:cNvPr id="24" name="">
-            <a:extLst xmlns:a="http://schemas.openxmlformats.org/drawingml/2006/main">
-              <a:ext uri="{FF2B5EF4-FFF2-40B4-BE49-F238E27FC236}">
-                <a16:creationId xmlns:a16="http://schemas.microsoft.com/office/drawing/2014/main" id="{A6829768-41F2-45E3-9DFD-A6942ECBD3F1}"/>
+          <p:cNvPr id="27" name="">
+            <a:extLst xmlns:a="http://schemas.openxmlformats.org/drawingml/2006/main">
+              <a:ext uri="{FF2B5EF4-FFF2-40B4-BE49-F238E27FC236}">
+                <a16:creationId xmlns:a16="http://schemas.microsoft.com/office/drawing/2014/main" id="{EBED3C14-C0DD-46A4-8DA4-B4AE5A3DCD69}"/>
               </a:ext>
             </a:extLst>
           </p:cNvPr>
@@ -12337,17 +12760,17 @@
                   <a:srgbClr val="596780"/>
                 </a:solidFill>
               </a:rPr>
-              <a:t>разрыв контроля</a:t>
-            </a:r>
-          </a:p>
-        </p:txBody>
-      </p:sp>
-      <p:sp>
-        <p:nvSpPr>
-          <p:cNvPr id="25" name="">
-            <a:extLst xmlns:a="http://schemas.openxmlformats.org/drawingml/2006/main">
-              <a:ext uri="{FF2B5EF4-FFF2-40B4-BE49-F238E27FC236}">
-                <a16:creationId xmlns:a16="http://schemas.microsoft.com/office/drawing/2014/main" id="{5EA8FEE3-D993-44F6-BFF1-0BFB49AB62B4}"/>
+              <a:t>уровень покрытия</a:t>
+            </a:r>
+          </a:p>
+        </p:txBody>
+      </p:sp>
+      <p:sp>
+        <p:nvSpPr>
+          <p:cNvPr id="28" name="">
+            <a:extLst xmlns:a="http://schemas.openxmlformats.org/drawingml/2006/main">
+              <a:ext uri="{FF2B5EF4-FFF2-40B4-BE49-F238E27FC236}">
+                <a16:creationId xmlns:a16="http://schemas.microsoft.com/office/drawing/2014/main" id="{7FCD163A-F8B7-43DC-BAD6-BDC260E1037D}"/>
               </a:ext>
             </a:extLst>
           </p:cNvPr>
@@ -12375,10 +12798,10 @@
       </p:sp>
       <p:sp>
         <p:nvSpPr>
-          <p:cNvPr id="26" name="">
-            <a:extLst xmlns:a="http://schemas.openxmlformats.org/drawingml/2006/main">
-              <a:ext uri="{FF2B5EF4-FFF2-40B4-BE49-F238E27FC236}">
-                <a16:creationId xmlns:a16="http://schemas.microsoft.com/office/drawing/2014/main" id="{F31E3A33-03C2-4B54-8ACE-BD069BBFB647}"/>
+          <p:cNvPr id="29" name="">
+            <a:extLst xmlns:a="http://schemas.openxmlformats.org/drawingml/2006/main">
+              <a:ext uri="{FF2B5EF4-FFF2-40B4-BE49-F238E27FC236}">
+                <a16:creationId xmlns:a16="http://schemas.microsoft.com/office/drawing/2014/main" id="{94CE66A2-F82C-4029-8769-A2458778C8F8}"/>
               </a:ext>
             </a:extLst>
           </p:cNvPr>
@@ -12406,10 +12829,10 @@
       </p:sp>
       <p:sp>
         <p:nvSpPr>
-          <p:cNvPr id="27" name="">
-            <a:extLst xmlns:a="http://schemas.openxmlformats.org/drawingml/2006/main">
-              <a:ext uri="{FF2B5EF4-FFF2-40B4-BE49-F238E27FC236}">
-                <a16:creationId xmlns:a16="http://schemas.microsoft.com/office/drawing/2014/main" id="{DA1FCEAE-18C9-4B76-A134-ED26B3457609}"/>
+          <p:cNvPr id="30" name="">
+            <a:extLst xmlns:a="http://schemas.openxmlformats.org/drawingml/2006/main">
+              <a:ext uri="{FF2B5EF4-FFF2-40B4-BE49-F238E27FC236}">
+                <a16:creationId xmlns:a16="http://schemas.microsoft.com/office/drawing/2014/main" id="{6F85EFF7-EA7D-470B-9D52-D9603DA9ECC4}"/>
               </a:ext>
             </a:extLst>
           </p:cNvPr>
@@ -12456,10 +12879,10 @@
       </p:sp>
       <p:sp>
         <p:nvSpPr>
-          <p:cNvPr id="28" name="">
-            <a:extLst xmlns:a="http://schemas.openxmlformats.org/drawingml/2006/main">
-              <a:ext uri="{FF2B5EF4-FFF2-40B4-BE49-F238E27FC236}">
-                <a16:creationId xmlns:a16="http://schemas.microsoft.com/office/drawing/2014/main" id="{43B526A8-3B90-4E29-9715-1744EBDE42C4}"/>
+          <p:cNvPr id="31" name="">
+            <a:extLst xmlns:a="http://schemas.openxmlformats.org/drawingml/2006/main">
+              <a:ext uri="{FF2B5EF4-FFF2-40B4-BE49-F238E27FC236}">
+                <a16:creationId xmlns:a16="http://schemas.microsoft.com/office/drawing/2014/main" id="{73517125-AD00-4F41-A898-F89059A5742F}"/>
               </a:ext>
             </a:extLst>
           </p:cNvPr>
@@ -12506,10 +12929,10 @@
       </p:sp>
       <p:sp>
         <p:nvSpPr>
-          <p:cNvPr id="29" name="">
-            <a:extLst xmlns:a="http://schemas.openxmlformats.org/drawingml/2006/main">
-              <a:ext uri="{FF2B5EF4-FFF2-40B4-BE49-F238E27FC236}">
-                <a16:creationId xmlns:a16="http://schemas.microsoft.com/office/drawing/2014/main" id="{A7A1860E-59DE-40A3-A137-CCF5CDD0BA9B}"/>
+          <p:cNvPr id="32" name="">
+            <a:extLst xmlns:a="http://schemas.openxmlformats.org/drawingml/2006/main">
+              <a:ext uri="{FF2B5EF4-FFF2-40B4-BE49-F238E27FC236}">
+                <a16:creationId xmlns:a16="http://schemas.microsoft.com/office/drawing/2014/main" id="{1D92FCFC-7B37-4A29-9D13-400BAF70CF49}"/>
               </a:ext>
             </a:extLst>
           </p:cNvPr>
@@ -12549,17 +12972,17 @@
                   <a:srgbClr val="596780"/>
                 </a:solidFill>
               </a:rPr>
-              <a:t>разрыв контроля</a:t>
-            </a:r>
-          </a:p>
-        </p:txBody>
-      </p:sp>
-      <p:sp>
-        <p:nvSpPr>
-          <p:cNvPr id="30" name="">
-            <a:extLst xmlns:a="http://schemas.openxmlformats.org/drawingml/2006/main">
-              <a:ext uri="{FF2B5EF4-FFF2-40B4-BE49-F238E27FC236}">
-                <a16:creationId xmlns:a16="http://schemas.microsoft.com/office/drawing/2014/main" id="{49941764-6AA8-4C9B-9093-31B4564DDCCE}"/>
+              <a:t>уровень покрытия</a:t>
+            </a:r>
+          </a:p>
+        </p:txBody>
+      </p:sp>
+      <p:sp>
+        <p:nvSpPr>
+          <p:cNvPr id="33" name="">
+            <a:extLst xmlns:a="http://schemas.openxmlformats.org/drawingml/2006/main">
+              <a:ext uri="{FF2B5EF4-FFF2-40B4-BE49-F238E27FC236}">
+                <a16:creationId xmlns:a16="http://schemas.microsoft.com/office/drawing/2014/main" id="{861A22BC-C607-4353-8DDC-E384C4D47F92}"/>
               </a:ext>
             </a:extLst>
           </p:cNvPr>
@@ -12587,10 +13010,10 @@
       </p:sp>
       <p:sp>
         <p:nvSpPr>
-          <p:cNvPr id="31" name="">
-            <a:extLst xmlns:a="http://schemas.openxmlformats.org/drawingml/2006/main">
-              <a:ext uri="{FF2B5EF4-FFF2-40B4-BE49-F238E27FC236}">
-                <a16:creationId xmlns:a16="http://schemas.microsoft.com/office/drawing/2014/main" id="{7183D1DE-D197-42C7-A61F-02806D211660}"/>
+          <p:cNvPr id="34" name="">
+            <a:extLst xmlns:a="http://schemas.openxmlformats.org/drawingml/2006/main">
+              <a:ext uri="{FF2B5EF4-FFF2-40B4-BE49-F238E27FC236}">
+                <a16:creationId xmlns:a16="http://schemas.microsoft.com/office/drawing/2014/main" id="{E4A8EBD9-2E3B-4176-845C-A5E6161555E6}"/>
               </a:ext>
             </a:extLst>
           </p:cNvPr>
@@ -12618,10 +13041,10 @@
       </p:sp>
       <p:sp>
         <p:nvSpPr>
-          <p:cNvPr id="32" name="">
-            <a:extLst xmlns:a="http://schemas.openxmlformats.org/drawingml/2006/main">
-              <a:ext uri="{FF2B5EF4-FFF2-40B4-BE49-F238E27FC236}">
-                <a16:creationId xmlns:a16="http://schemas.microsoft.com/office/drawing/2014/main" id="{1F26F752-FC84-427B-B93B-CC5733C15A17}"/>
+          <p:cNvPr id="35" name="">
+            <a:extLst xmlns:a="http://schemas.openxmlformats.org/drawingml/2006/main">
+              <a:ext uri="{FF2B5EF4-FFF2-40B4-BE49-F238E27FC236}">
+                <a16:creationId xmlns:a16="http://schemas.microsoft.com/office/drawing/2014/main" id="{A4BD3130-F9EA-4A9B-8FBF-DA2AF81D0DB5}"/>
               </a:ext>
             </a:extLst>
           </p:cNvPr>
@@ -12668,10 +13091,10 @@
       </p:sp>
       <p:sp>
         <p:nvSpPr>
-          <p:cNvPr id="33" name="">
-            <a:extLst xmlns:a="http://schemas.openxmlformats.org/drawingml/2006/main">
-              <a:ext uri="{FF2B5EF4-FFF2-40B4-BE49-F238E27FC236}">
-                <a16:creationId xmlns:a16="http://schemas.microsoft.com/office/drawing/2014/main" id="{95A1B35A-D2C6-41B2-B692-4C18DBCC53B0}"/>
+          <p:cNvPr id="36" name="">
+            <a:extLst xmlns:a="http://schemas.openxmlformats.org/drawingml/2006/main">
+              <a:ext uri="{FF2B5EF4-FFF2-40B4-BE49-F238E27FC236}">
+                <a16:creationId xmlns:a16="http://schemas.microsoft.com/office/drawing/2014/main" id="{8820BDFF-5248-4C4D-A0EA-2769F78FDF1B}"/>
               </a:ext>
             </a:extLst>
           </p:cNvPr>
@@ -12718,10 +13141,10 @@
       </p:sp>
       <p:sp>
         <p:nvSpPr>
-          <p:cNvPr id="34" name="">
-            <a:extLst xmlns:a="http://schemas.openxmlformats.org/drawingml/2006/main">
-              <a:ext uri="{FF2B5EF4-FFF2-40B4-BE49-F238E27FC236}">
-                <a16:creationId xmlns:a16="http://schemas.microsoft.com/office/drawing/2014/main" id="{FA16F754-6458-4DF2-B30C-AACEB501C83E}"/>
+          <p:cNvPr id="37" name="">
+            <a:extLst xmlns:a="http://schemas.openxmlformats.org/drawingml/2006/main">
+              <a:ext uri="{FF2B5EF4-FFF2-40B4-BE49-F238E27FC236}">
+                <a16:creationId xmlns:a16="http://schemas.microsoft.com/office/drawing/2014/main" id="{448EBE50-DB1B-43BD-BC02-F4B4623D9800}"/>
               </a:ext>
             </a:extLst>
           </p:cNvPr>
@@ -12761,17 +13184,17 @@
                   <a:srgbClr val="596780"/>
                 </a:solidFill>
               </a:rPr>
-              <a:t>разрыв контроля</a:t>
-            </a:r>
-          </a:p>
-        </p:txBody>
-      </p:sp>
-      <p:sp>
-        <p:nvSpPr>
-          <p:cNvPr id="35" name="">
-            <a:extLst xmlns:a="http://schemas.openxmlformats.org/drawingml/2006/main">
-              <a:ext uri="{FF2B5EF4-FFF2-40B4-BE49-F238E27FC236}">
-                <a16:creationId xmlns:a16="http://schemas.microsoft.com/office/drawing/2014/main" id="{28B652EC-4E0C-4792-AB3A-74CF99BE34DB}"/>
+              <a:t>уровень покрытия</a:t>
+            </a:r>
+          </a:p>
+        </p:txBody>
+      </p:sp>
+      <p:sp>
+        <p:nvSpPr>
+          <p:cNvPr id="38" name="">
+            <a:extLst xmlns:a="http://schemas.openxmlformats.org/drawingml/2006/main">
+              <a:ext uri="{FF2B5EF4-FFF2-40B4-BE49-F238E27FC236}">
+                <a16:creationId xmlns:a16="http://schemas.microsoft.com/office/drawing/2014/main" id="{ED3E7B0A-981A-4CF5-8DE7-365A35C9303B}"/>
               </a:ext>
             </a:extLst>
           </p:cNvPr>
@@ -12799,10 +13222,10 @@
       </p:sp>
       <p:sp>
         <p:nvSpPr>
-          <p:cNvPr id="36" name="">
-            <a:extLst xmlns:a="http://schemas.openxmlformats.org/drawingml/2006/main">
-              <a:ext uri="{FF2B5EF4-FFF2-40B4-BE49-F238E27FC236}">
-                <a16:creationId xmlns:a16="http://schemas.microsoft.com/office/drawing/2014/main" id="{F4D7A48B-8515-4962-BC24-A1565B4993F0}"/>
+          <p:cNvPr id="39" name="">
+            <a:extLst xmlns:a="http://schemas.openxmlformats.org/drawingml/2006/main">
+              <a:ext uri="{FF2B5EF4-FFF2-40B4-BE49-F238E27FC236}">
+                <a16:creationId xmlns:a16="http://schemas.microsoft.com/office/drawing/2014/main" id="{9D98E8A5-A25D-43E0-A013-E12D57878DE1}"/>
               </a:ext>
             </a:extLst>
           </p:cNvPr>
@@ -12830,10 +13253,10 @@
       </p:sp>
       <p:sp>
         <p:nvSpPr>
-          <p:cNvPr id="37" name="">
-            <a:extLst xmlns:a="http://schemas.openxmlformats.org/drawingml/2006/main">
-              <a:ext uri="{FF2B5EF4-FFF2-40B4-BE49-F238E27FC236}">
-                <a16:creationId xmlns:a16="http://schemas.microsoft.com/office/drawing/2014/main" id="{78DE89A5-CFA8-4D01-95C8-F4A53E9DA0CA}"/>
+          <p:cNvPr id="40" name="">
+            <a:extLst xmlns:a="http://schemas.openxmlformats.org/drawingml/2006/main">
+              <a:ext uri="{FF2B5EF4-FFF2-40B4-BE49-F238E27FC236}">
+                <a16:creationId xmlns:a16="http://schemas.microsoft.com/office/drawing/2014/main" id="{6CBEC312-EB1D-4C49-B5E3-3B6234C4A803}"/>
               </a:ext>
             </a:extLst>
           </p:cNvPr>
@@ -12880,10 +13303,10 @@
       </p:sp>
       <p:sp>
         <p:nvSpPr>
-          <p:cNvPr id="38" name="">
-            <a:extLst xmlns:a="http://schemas.openxmlformats.org/drawingml/2006/main">
-              <a:ext uri="{FF2B5EF4-FFF2-40B4-BE49-F238E27FC236}">
-                <a16:creationId xmlns:a16="http://schemas.microsoft.com/office/drawing/2014/main" id="{1ECB95BE-1780-4318-AD29-8943789BEF3B}"/>
+          <p:cNvPr id="41" name="">
+            <a:extLst xmlns:a="http://schemas.openxmlformats.org/drawingml/2006/main">
+              <a:ext uri="{FF2B5EF4-FFF2-40B4-BE49-F238E27FC236}">
+                <a16:creationId xmlns:a16="http://schemas.microsoft.com/office/drawing/2014/main" id="{6AFB7FBE-5B59-4915-9621-3D975C968F33}"/>
               </a:ext>
             </a:extLst>
           </p:cNvPr>
@@ -12930,10 +13353,10 @@
       </p:sp>
       <p:sp>
         <p:nvSpPr>
-          <p:cNvPr id="39" name="">
-            <a:extLst xmlns:a="http://schemas.openxmlformats.org/drawingml/2006/main">
-              <a:ext uri="{FF2B5EF4-FFF2-40B4-BE49-F238E27FC236}">
-                <a16:creationId xmlns:a16="http://schemas.microsoft.com/office/drawing/2014/main" id="{A915546B-856A-41E6-956C-C96F3AC614D1}"/>
+          <p:cNvPr id="42" name="">
+            <a:extLst xmlns:a="http://schemas.openxmlformats.org/drawingml/2006/main">
+              <a:ext uri="{FF2B5EF4-FFF2-40B4-BE49-F238E27FC236}">
+                <a16:creationId xmlns:a16="http://schemas.microsoft.com/office/drawing/2014/main" id="{C2BC7AFF-6CBC-44CB-8889-3F92F93E03B7}"/>
               </a:ext>
             </a:extLst>
           </p:cNvPr>
@@ -12973,7 +13396,90 @@
                   <a:srgbClr val="596780"/>
                 </a:solidFill>
               </a:rPr>
-              <a:t>разрыв контроля</a:t>
+              <a:t>уровень покрытия</a:t>
+            </a:r>
+          </a:p>
+        </p:txBody>
+      </p:sp>
+      <p:sp>
+        <p:nvSpPr>
+          <p:cNvPr id="43" name="">
+            <a:extLst xmlns:a="http://schemas.openxmlformats.org/drawingml/2006/main">
+              <a:ext uri="{FF2B5EF4-FFF2-40B4-BE49-F238E27FC236}">
+                <a16:creationId xmlns:a16="http://schemas.microsoft.com/office/drawing/2014/main" id="{CC7D1508-713D-4DB6-B31E-679EA1747232}"/>
+              </a:ext>
+            </a:extLst>
+          </p:cNvPr>
+          <p:cNvSpPr>
+            <a:spLocks xmlns:a="http://schemas.openxmlformats.org/drawingml/2006/main" noGrp="1"/>
+          </p:cNvSpPr>
+          <p:nvPr/>
+        </p:nvSpPr>
+        <p:spPr>
+          <a:xfrm xmlns:a="http://schemas.openxmlformats.org/drawingml/2006/main">
+            <a:off x="552450" y="6172200"/>
+            <a:ext cx="10648950" cy="323850"/>
+          </a:xfrm>
+          <a:prstGeom xmlns:a="http://schemas.openxmlformats.org/drawingml/2006/main" prst="roundRect">
+            <a:avLst>
+              <a:gd name="adj" fmla="val 23529"/>
+            </a:avLst>
+          </a:prstGeom>
+          <a:solidFill xmlns:a="http://schemas.openxmlformats.org/drawingml/2006/main">
+            <a:srgbClr val="EEF3FF"/>
+          </a:solidFill>
+          <a:ln xmlns:a="http://schemas.openxmlformats.org/drawingml/2006/main" w="0">
+            <a:noFill/>
+            <a:prstDash val="solid"/>
+          </a:ln>
+        </p:spPr>
+      </p:sp>
+      <p:sp>
+        <p:nvSpPr>
+          <p:cNvPr id="44" name="">
+            <a:extLst xmlns:a="http://schemas.openxmlformats.org/drawingml/2006/main">
+              <a:ext uri="{FF2B5EF4-FFF2-40B4-BE49-F238E27FC236}">
+                <a16:creationId xmlns:a16="http://schemas.microsoft.com/office/drawing/2014/main" id="{939BE2AE-4FA1-4108-B4EB-EC4E3955C526}"/>
+              </a:ext>
+            </a:extLst>
+          </p:cNvPr>
+          <p:cNvSpPr>
+            <a:spLocks xmlns:a="http://schemas.openxmlformats.org/drawingml/2006/main" noGrp="1"/>
+          </p:cNvSpPr>
+          <p:nvPr/>
+        </p:nvSpPr>
+        <p:spPr>
+          <a:xfrm xmlns:a="http://schemas.openxmlformats.org/drawingml/2006/main">
+            <a:off x="742950" y="6248400"/>
+            <a:ext cx="10267950" cy="190500"/>
+          </a:xfrm>
+          <a:prstGeom xmlns:a="http://schemas.openxmlformats.org/drawingml/2006/main" prst="rect">
+            <a:avLst/>
+          </a:prstGeom>
+          <a:noFill xmlns:a="http://schemas.openxmlformats.org/drawingml/2006/main"/>
+          <a:ln xmlns:a="http://schemas.openxmlformats.org/drawingml/2006/main" w="0">
+            <a:noFill/>
+            <a:prstDash val="solid"/>
+          </a:ln>
+        </p:spPr>
+        <p:txBody>
+          <a:bodyPr xmlns:a="http://schemas.openxmlformats.org/drawingml/2006/main"/>
+          <a:lstStyle xmlns:a="http://schemas.openxmlformats.org/drawingml/2006/main"/>
+          <a:p xmlns:a="http://schemas.openxmlformats.org/drawingml/2006/main">
+            <a:pPr algn="ctr">
+              <a:defRPr sz="900" b="1">
+                <a:solidFill>
+                  <a:srgbClr val="102A63"/>
+                </a:solidFill>
+              </a:defRPr>
+            </a:pPr>
+            <a:r>
+              <a:rPr sz="900" b="1">
+                <a:solidFill>
+                  <a:srgbClr val="102A63"/>
+                </a:solidFill>
+              </a:rPr>
+              <a:t>{{COVERAGE_INSIGHT}}</a:t>
             </a:r>
           </a:p>
         </p:txBody>
@@ -12981,7 +13487,7 @@
     </p:spTree>
     <p:extLst>
       <p:ext uri="{BB962C8B-B14F-4D97-AF65-F5344CB8AC3E}">
-        <p14:creationId xmlns:p14="http://schemas.microsoft.com/office/powerpoint/2010/main" val="1581318880"/>
+        <p14:creationId xmlns:p14="http://schemas.microsoft.com/office/powerpoint/2010/main" val="349424359"/>
       </p:ext>
     </p:extLst>
   </p:cSld>
@@ -13012,7 +13518,7 @@
           <p:cNvPr id="1" name="">
             <a:extLst xmlns:a="http://schemas.openxmlformats.org/drawingml/2006/main">
               <a:ext uri="{FF2B5EF4-FFF2-40B4-BE49-F238E27FC236}">
-                <a16:creationId xmlns:a16="http://schemas.microsoft.com/office/drawing/2014/main" id="{AF677883-B4C3-45BB-A7C5-2B5164D0D0A4}"/>
+                <a16:creationId xmlns:a16="http://schemas.microsoft.com/office/drawing/2014/main" id="{BC4C0BD5-6658-4A57-B30C-1F697ABCDF9E}"/>
               </a:ext>
             </a:extLst>
           </p:cNvPr>
@@ -13047,7 +13553,7 @@
           <p:nvPr/>
         </p:nvPicPr>
         <p:blipFill>
-          <a:blip xmlns:r="http://schemas.openxmlformats.org/officeDocument/2006/relationships" xmlns:a="http://schemas.openxmlformats.org/drawingml/2006/main" r:embed="Rd16d2d8d373242f6"/>
+          <a:blip xmlns:r="http://schemas.openxmlformats.org/officeDocument/2006/relationships" xmlns:a="http://schemas.openxmlformats.org/drawingml/2006/main" r:embed="R001da3cfb2d840f7"/>
           <a:stretch xmlns:a="http://schemas.openxmlformats.org/drawingml/2006/main"/>
         </p:blipFill>
         <p:spPr>
@@ -13065,7 +13571,7 @@
           <p:cNvPr id="3" name="">
             <a:extLst xmlns:a="http://schemas.openxmlformats.org/drawingml/2006/main">
               <a:ext uri="{FF2B5EF4-FFF2-40B4-BE49-F238E27FC236}">
-                <a16:creationId xmlns:a16="http://schemas.microsoft.com/office/drawing/2014/main" id="{1CB2546A-8609-4015-A5E3-56A97241693A}"/>
+                <a16:creationId xmlns:a16="http://schemas.microsoft.com/office/drawing/2014/main" id="{6F094A8B-3F05-44D1-9EB6-EE75C21336C9}"/>
               </a:ext>
             </a:extLst>
           </p:cNvPr>
@@ -13115,7 +13621,7 @@
           <p:cNvPr id="4" name="">
             <a:extLst xmlns:a="http://schemas.openxmlformats.org/drawingml/2006/main">
               <a:ext uri="{FF2B5EF4-FFF2-40B4-BE49-F238E27FC236}">
-                <a16:creationId xmlns:a16="http://schemas.microsoft.com/office/drawing/2014/main" id="{BD2688A1-AC6E-44E3-B74B-95DD8A46A511}"/>
+                <a16:creationId xmlns:a16="http://schemas.microsoft.com/office/drawing/2014/main" id="{2874085E-68D1-41DB-BC11-74BFBBD319C2}"/>
               </a:ext>
             </a:extLst>
           </p:cNvPr>
@@ -13148,7 +13654,7 @@
           <p:cNvPr id="5" name="">
             <a:extLst xmlns:a="http://schemas.openxmlformats.org/drawingml/2006/main">
               <a:ext uri="{FF2B5EF4-FFF2-40B4-BE49-F238E27FC236}">
-                <a16:creationId xmlns:a16="http://schemas.microsoft.com/office/drawing/2014/main" id="{2857357D-D532-4909-9FAF-3590E5E0A663}"/>
+                <a16:creationId xmlns:a16="http://schemas.microsoft.com/office/drawing/2014/main" id="{73516CED-4A97-417D-9BE0-25022B912EC6}"/>
               </a:ext>
             </a:extLst>
           </p:cNvPr>
@@ -13179,7 +13685,7 @@
           <p:cNvPr id="6" name="">
             <a:extLst xmlns:a="http://schemas.openxmlformats.org/drawingml/2006/main">
               <a:ext uri="{FF2B5EF4-FFF2-40B4-BE49-F238E27FC236}">
-                <a16:creationId xmlns:a16="http://schemas.microsoft.com/office/drawing/2014/main" id="{E283803D-5A5E-4C36-961C-0FED62912757}"/>
+                <a16:creationId xmlns:a16="http://schemas.microsoft.com/office/drawing/2014/main" id="{CA69166E-BA54-48E0-83E3-EE12103502A6}"/>
               </a:ext>
             </a:extLst>
           </p:cNvPr>
@@ -13229,7 +13735,7 @@
           <p:cNvPr id="7" name="">
             <a:extLst xmlns:a="http://schemas.openxmlformats.org/drawingml/2006/main">
               <a:ext uri="{FF2B5EF4-FFF2-40B4-BE49-F238E27FC236}">
-                <a16:creationId xmlns:a16="http://schemas.microsoft.com/office/drawing/2014/main" id="{6D892A9A-79F7-4F65-88FB-BF4915DA7CC6}"/>
+                <a16:creationId xmlns:a16="http://schemas.microsoft.com/office/drawing/2014/main" id="{8F99293F-F42A-4318-B03F-C71038B895B6}"/>
               </a:ext>
             </a:extLst>
           </p:cNvPr>
@@ -13279,7 +13785,7 @@
           <p:cNvPr id="8" name="">
             <a:extLst xmlns:a="http://schemas.openxmlformats.org/drawingml/2006/main">
               <a:ext uri="{FF2B5EF4-FFF2-40B4-BE49-F238E27FC236}">
-                <a16:creationId xmlns:a16="http://schemas.microsoft.com/office/drawing/2014/main" id="{4BE49788-9621-4537-95F1-C64F6A3EC15B}"/>
+                <a16:creationId xmlns:a16="http://schemas.microsoft.com/office/drawing/2014/main" id="{AD69CA15-2ED2-4F0A-B5BD-54901AE8A41F}"/>
               </a:ext>
             </a:extLst>
           </p:cNvPr>
@@ -13314,7 +13820,7 @@
           <p:cNvPr id="9" name="">
             <a:extLst xmlns:a="http://schemas.openxmlformats.org/drawingml/2006/main">
               <a:ext uri="{FF2B5EF4-FFF2-40B4-BE49-F238E27FC236}">
-                <a16:creationId xmlns:a16="http://schemas.microsoft.com/office/drawing/2014/main" id="{4C475D45-F964-41F3-861B-919D088CA820}"/>
+                <a16:creationId xmlns:a16="http://schemas.microsoft.com/office/drawing/2014/main" id="{DA099E5E-DB15-41B8-8E7C-5C25F18BD567}"/>
               </a:ext>
             </a:extLst>
           </p:cNvPr>
@@ -13364,7 +13870,7 @@
           <p:cNvPr id="10" name="">
             <a:extLst xmlns:a="http://schemas.openxmlformats.org/drawingml/2006/main">
               <a:ext uri="{FF2B5EF4-FFF2-40B4-BE49-F238E27FC236}">
-                <a16:creationId xmlns:a16="http://schemas.microsoft.com/office/drawing/2014/main" id="{0C146A01-0DFB-4B15-A417-3692ECC4DA4A}"/>
+                <a16:creationId xmlns:a16="http://schemas.microsoft.com/office/drawing/2014/main" id="{EE4AE2D1-C7A0-4627-BEC8-9CD14EAD4544}"/>
               </a:ext>
             </a:extLst>
           </p:cNvPr>
@@ -13414,7 +13920,7 @@
           <p:cNvPr id="11" name="">
             <a:extLst xmlns:a="http://schemas.openxmlformats.org/drawingml/2006/main">
               <a:ext uri="{FF2B5EF4-FFF2-40B4-BE49-F238E27FC236}">
-                <a16:creationId xmlns:a16="http://schemas.microsoft.com/office/drawing/2014/main" id="{1DB8D2C6-798B-4281-B4CE-AAC01049A82A}"/>
+                <a16:creationId xmlns:a16="http://schemas.microsoft.com/office/drawing/2014/main" id="{AE4132B9-3114-4344-B83A-2A1EC72945DA}"/>
               </a:ext>
             </a:extLst>
           </p:cNvPr>
@@ -13449,7 +13955,7 @@
           <p:cNvPr id="12" name="">
             <a:extLst xmlns:a="http://schemas.openxmlformats.org/drawingml/2006/main">
               <a:ext uri="{FF2B5EF4-FFF2-40B4-BE49-F238E27FC236}">
-                <a16:creationId xmlns:a16="http://schemas.microsoft.com/office/drawing/2014/main" id="{6443CEDB-2BCA-4AB2-BB57-9C4A044A68DC}"/>
+                <a16:creationId xmlns:a16="http://schemas.microsoft.com/office/drawing/2014/main" id="{F79BC7BE-ECCF-448F-BF35-1FCE7F07AB54}"/>
               </a:ext>
             </a:extLst>
           </p:cNvPr>
@@ -13499,7 +14005,7 @@
           <p:cNvPr id="13" name="">
             <a:extLst xmlns:a="http://schemas.openxmlformats.org/drawingml/2006/main">
               <a:ext uri="{FF2B5EF4-FFF2-40B4-BE49-F238E27FC236}">
-                <a16:creationId xmlns:a16="http://schemas.microsoft.com/office/drawing/2014/main" id="{6B8FF1D6-839B-4CCC-A76B-66BB4D15CB16}"/>
+                <a16:creationId xmlns:a16="http://schemas.microsoft.com/office/drawing/2014/main" id="{36AF60B1-26CC-498A-8672-81F314D16DB9}"/>
               </a:ext>
             </a:extLst>
           </p:cNvPr>
@@ -13549,7 +14055,7 @@
           <p:cNvPr id="14" name="">
             <a:extLst xmlns:a="http://schemas.openxmlformats.org/drawingml/2006/main">
               <a:ext uri="{FF2B5EF4-FFF2-40B4-BE49-F238E27FC236}">
-                <a16:creationId xmlns:a16="http://schemas.microsoft.com/office/drawing/2014/main" id="{5605523F-ED09-4626-A4E3-B803575EB87B}"/>
+                <a16:creationId xmlns:a16="http://schemas.microsoft.com/office/drawing/2014/main" id="{A7263520-F555-46AB-B0F6-AD9FD9ABDC9E}"/>
               </a:ext>
             </a:extLst>
           </p:cNvPr>
@@ -13584,7 +14090,7 @@
           <p:cNvPr id="15" name="">
             <a:extLst xmlns:a="http://schemas.openxmlformats.org/drawingml/2006/main">
               <a:ext uri="{FF2B5EF4-FFF2-40B4-BE49-F238E27FC236}">
-                <a16:creationId xmlns:a16="http://schemas.microsoft.com/office/drawing/2014/main" id="{4232E24F-22E8-4616-B8F1-43ACE57DAAA4}"/>
+                <a16:creationId xmlns:a16="http://schemas.microsoft.com/office/drawing/2014/main" id="{778904B8-30CA-417B-82FE-870B80E2AD20}"/>
               </a:ext>
             </a:extLst>
           </p:cNvPr>
@@ -13634,7 +14140,7 @@
           <p:cNvPr id="16" name="">
             <a:extLst xmlns:a="http://schemas.openxmlformats.org/drawingml/2006/main">
               <a:ext uri="{FF2B5EF4-FFF2-40B4-BE49-F238E27FC236}">
-                <a16:creationId xmlns:a16="http://schemas.microsoft.com/office/drawing/2014/main" id="{C6D3C3A8-AA21-438F-9328-469A6C43B1AA}"/>
+                <a16:creationId xmlns:a16="http://schemas.microsoft.com/office/drawing/2014/main" id="{F68F6E71-F766-4B4D-A930-7C0FE3DE4C8C}"/>
               </a:ext>
             </a:extLst>
           </p:cNvPr>
@@ -13684,7 +14190,7 @@
           <p:cNvPr id="17" name="">
             <a:extLst xmlns:a="http://schemas.openxmlformats.org/drawingml/2006/main">
               <a:ext uri="{FF2B5EF4-FFF2-40B4-BE49-F238E27FC236}">
-                <a16:creationId xmlns:a16="http://schemas.microsoft.com/office/drawing/2014/main" id="{0ED74D3D-E8DC-4FE2-A140-2D0D1A91EFD9}"/>
+                <a16:creationId xmlns:a16="http://schemas.microsoft.com/office/drawing/2014/main" id="{CBB3D27B-BDFC-4E5E-AED9-A392113DFFFF}"/>
               </a:ext>
             </a:extLst>
           </p:cNvPr>
@@ -13719,7 +14225,7 @@
           <p:cNvPr id="18" name="">
             <a:extLst xmlns:a="http://schemas.openxmlformats.org/drawingml/2006/main">
               <a:ext uri="{FF2B5EF4-FFF2-40B4-BE49-F238E27FC236}">
-                <a16:creationId xmlns:a16="http://schemas.microsoft.com/office/drawing/2014/main" id="{6F677CF7-165F-4468-88C3-FD0A9D5EBCF8}"/>
+                <a16:creationId xmlns:a16="http://schemas.microsoft.com/office/drawing/2014/main" id="{6B9E8645-76F5-4BD6-BAD6-52AA3702EB6A}"/>
               </a:ext>
             </a:extLst>
           </p:cNvPr>
@@ -13769,7 +14275,7 @@
           <p:cNvPr id="19" name="">
             <a:extLst xmlns:a="http://schemas.openxmlformats.org/drawingml/2006/main">
               <a:ext uri="{FF2B5EF4-FFF2-40B4-BE49-F238E27FC236}">
-                <a16:creationId xmlns:a16="http://schemas.microsoft.com/office/drawing/2014/main" id="{D2C82006-5EBB-4726-941F-7506C9DA9657}"/>
+                <a16:creationId xmlns:a16="http://schemas.microsoft.com/office/drawing/2014/main" id="{CF97D0D6-6F2B-403C-B459-3E94AB664867}"/>
               </a:ext>
             </a:extLst>
           </p:cNvPr>
@@ -13819,7 +14325,7 @@
           <p:cNvPr id="20" name="">
             <a:extLst xmlns:a="http://schemas.openxmlformats.org/drawingml/2006/main">
               <a:ext uri="{FF2B5EF4-FFF2-40B4-BE49-F238E27FC236}">
-                <a16:creationId xmlns:a16="http://schemas.microsoft.com/office/drawing/2014/main" id="{9B1E76EC-FE13-49DE-9AA3-52E063E76802}"/>
+                <a16:creationId xmlns:a16="http://schemas.microsoft.com/office/drawing/2014/main" id="{D89A5EC1-DB44-4CE1-84A4-33A986F9C88A}"/>
               </a:ext>
             </a:extLst>
           </p:cNvPr>
@@ -13869,7 +14375,7 @@
           <p:cNvPr id="21" name="">
             <a:extLst xmlns:a="http://schemas.openxmlformats.org/drawingml/2006/main">
               <a:ext uri="{FF2B5EF4-FFF2-40B4-BE49-F238E27FC236}">
-                <a16:creationId xmlns:a16="http://schemas.microsoft.com/office/drawing/2014/main" id="{86F1B93D-3C9B-43C2-BF6E-9F1AB3306F1C}"/>
+                <a16:creationId xmlns:a16="http://schemas.microsoft.com/office/drawing/2014/main" id="{CBCEC238-B233-476F-8BFE-1B9E717A9019}"/>
               </a:ext>
             </a:extLst>
           </p:cNvPr>
@@ -13919,7 +14425,7 @@
           <p:cNvPr id="22" name="">
             <a:extLst xmlns:a="http://schemas.openxmlformats.org/drawingml/2006/main">
               <a:ext uri="{FF2B5EF4-FFF2-40B4-BE49-F238E27FC236}">
-                <a16:creationId xmlns:a16="http://schemas.microsoft.com/office/drawing/2014/main" id="{EEA72E07-36CB-43B0-8398-9D21D7ED510E}"/>
+                <a16:creationId xmlns:a16="http://schemas.microsoft.com/office/drawing/2014/main" id="{8339AAF8-266D-42C8-96F2-C2ECBABD11CA}"/>
               </a:ext>
             </a:extLst>
           </p:cNvPr>
@@ -13969,7 +14475,7 @@
           <p:cNvPr id="23" name="">
             <a:extLst xmlns:a="http://schemas.openxmlformats.org/drawingml/2006/main">
               <a:ext uri="{FF2B5EF4-FFF2-40B4-BE49-F238E27FC236}">
-                <a16:creationId xmlns:a16="http://schemas.microsoft.com/office/drawing/2014/main" id="{34940E92-8F1B-4384-B01F-8E87788DA168}"/>
+                <a16:creationId xmlns:a16="http://schemas.microsoft.com/office/drawing/2014/main" id="{5D45FC29-E475-475D-AB3C-4F962F8CD6D0}"/>
               </a:ext>
             </a:extLst>
           </p:cNvPr>
@@ -14002,7 +14508,7 @@
           <p:cNvPr id="24" name="">
             <a:extLst xmlns:a="http://schemas.openxmlformats.org/drawingml/2006/main">
               <a:ext uri="{FF2B5EF4-FFF2-40B4-BE49-F238E27FC236}">
-                <a16:creationId xmlns:a16="http://schemas.microsoft.com/office/drawing/2014/main" id="{B1B036FC-6253-4E0B-A755-66F6FBCB10BA}"/>
+                <a16:creationId xmlns:a16="http://schemas.microsoft.com/office/drawing/2014/main" id="{E7EC4781-BC35-4E6E-A616-6F00C05BE22B}"/>
               </a:ext>
             </a:extLst>
           </p:cNvPr>
@@ -14052,7 +14558,7 @@
           <p:cNvPr id="25" name="">
             <a:extLst xmlns:a="http://schemas.openxmlformats.org/drawingml/2006/main">
               <a:ext uri="{FF2B5EF4-FFF2-40B4-BE49-F238E27FC236}">
-                <a16:creationId xmlns:a16="http://schemas.microsoft.com/office/drawing/2014/main" id="{10AD779B-D359-4611-BAAA-A53275C557CF}"/>
+                <a16:creationId xmlns:a16="http://schemas.microsoft.com/office/drawing/2014/main" id="{05ABF1BB-8B88-4117-AEBE-B570EBDBEDA6}"/>
               </a:ext>
             </a:extLst>
           </p:cNvPr>
@@ -14085,7 +14591,7 @@
           <p:cNvPr id="26" name="">
             <a:extLst xmlns:a="http://schemas.openxmlformats.org/drawingml/2006/main">
               <a:ext uri="{FF2B5EF4-FFF2-40B4-BE49-F238E27FC236}">
-                <a16:creationId xmlns:a16="http://schemas.microsoft.com/office/drawing/2014/main" id="{35D91061-B74D-4080-BAA8-6E4A0EE9C90D}"/>
+                <a16:creationId xmlns:a16="http://schemas.microsoft.com/office/drawing/2014/main" id="{ADF799C1-0B0F-4B08-8CC6-4586B3D07A36}"/>
               </a:ext>
             </a:extLst>
           </p:cNvPr>
@@ -14135,7 +14641,7 @@
           <p:cNvPr id="27" name="">
             <a:extLst xmlns:a="http://schemas.openxmlformats.org/drawingml/2006/main">
               <a:ext uri="{FF2B5EF4-FFF2-40B4-BE49-F238E27FC236}">
-                <a16:creationId xmlns:a16="http://schemas.microsoft.com/office/drawing/2014/main" id="{2314B483-201B-4C14-B3FD-94A1A25A878F}"/>
+                <a16:creationId xmlns:a16="http://schemas.microsoft.com/office/drawing/2014/main" id="{9B901829-78A7-42A8-AE29-ADB4F05B22C5}"/>
               </a:ext>
             </a:extLst>
           </p:cNvPr>
@@ -14168,7 +14674,7 @@
           <p:cNvPr id="28" name="">
             <a:extLst xmlns:a="http://schemas.openxmlformats.org/drawingml/2006/main">
               <a:ext uri="{FF2B5EF4-FFF2-40B4-BE49-F238E27FC236}">
-                <a16:creationId xmlns:a16="http://schemas.microsoft.com/office/drawing/2014/main" id="{CB94A37B-F302-49FA-B17A-D896F9FCE3B6}"/>
+                <a16:creationId xmlns:a16="http://schemas.microsoft.com/office/drawing/2014/main" id="{AD5ACD58-570C-4992-AAD4-404C7AB339DF}"/>
               </a:ext>
             </a:extLst>
           </p:cNvPr>
@@ -14216,7 +14722,7 @@
     </p:spTree>
     <p:extLst>
       <p:ext uri="{BB962C8B-B14F-4D97-AF65-F5344CB8AC3E}">
-        <p14:creationId xmlns:p14="http://schemas.microsoft.com/office/powerpoint/2010/main" val="114026569"/>
+        <p14:creationId xmlns:p14="http://schemas.microsoft.com/office/powerpoint/2010/main" val="1018883751"/>
       </p:ext>
     </p:extLst>
   </p:cSld>
@@ -14247,7 +14753,7 @@
           <p:cNvPr id="1" name="">
             <a:extLst xmlns:a="http://schemas.openxmlformats.org/drawingml/2006/main">
               <a:ext uri="{FF2B5EF4-FFF2-40B4-BE49-F238E27FC236}">
-                <a16:creationId xmlns:a16="http://schemas.microsoft.com/office/drawing/2014/main" id="{25C7A9E4-1C84-46BB-8960-B20A453534C2}"/>
+                <a16:creationId xmlns:a16="http://schemas.microsoft.com/office/drawing/2014/main" id="{F15C91B6-F354-4A84-BF16-7087F31F0DAE}"/>
               </a:ext>
             </a:extLst>
           </p:cNvPr>
@@ -14282,7 +14788,7 @@
           <p:nvPr/>
         </p:nvPicPr>
         <p:blipFill>
-          <a:blip xmlns:r="http://schemas.openxmlformats.org/officeDocument/2006/relationships" xmlns:a="http://schemas.openxmlformats.org/drawingml/2006/main" r:embed="Re1b235d5874346a7"/>
+          <a:blip xmlns:r="http://schemas.openxmlformats.org/officeDocument/2006/relationships" xmlns:a="http://schemas.openxmlformats.org/drawingml/2006/main" r:embed="R861699691eb14dfa"/>
           <a:stretch xmlns:a="http://schemas.openxmlformats.org/drawingml/2006/main"/>
         </p:blipFill>
         <p:spPr>
@@ -14300,7 +14806,7 @@
           <p:cNvPr id="3" name="">
             <a:extLst xmlns:a="http://schemas.openxmlformats.org/drawingml/2006/main">
               <a:ext uri="{FF2B5EF4-FFF2-40B4-BE49-F238E27FC236}">
-                <a16:creationId xmlns:a16="http://schemas.microsoft.com/office/drawing/2014/main" id="{AC56DB6A-2CC0-4CCF-A4F1-CA222CF61685}"/>
+                <a16:creationId xmlns:a16="http://schemas.microsoft.com/office/drawing/2014/main" id="{218B90B1-FDE7-4338-A2DD-0DAD595C596F}"/>
               </a:ext>
             </a:extLst>
           </p:cNvPr>
@@ -14350,7 +14856,7 @@
           <p:cNvPr id="4" name="">
             <a:extLst xmlns:a="http://schemas.openxmlformats.org/drawingml/2006/main">
               <a:ext uri="{FF2B5EF4-FFF2-40B4-BE49-F238E27FC236}">
-                <a16:creationId xmlns:a16="http://schemas.microsoft.com/office/drawing/2014/main" id="{0F09B4AC-934A-4F56-8291-0B295A91F59A}"/>
+                <a16:creationId xmlns:a16="http://schemas.microsoft.com/office/drawing/2014/main" id="{E1FF8229-65A2-4AE1-A083-32FB27CA9DFC}"/>
               </a:ext>
             </a:extLst>
           </p:cNvPr>
@@ -14383,7 +14889,7 @@
           <p:cNvPr id="5" name="">
             <a:extLst xmlns:a="http://schemas.openxmlformats.org/drawingml/2006/main">
               <a:ext uri="{FF2B5EF4-FFF2-40B4-BE49-F238E27FC236}">
-                <a16:creationId xmlns:a16="http://schemas.microsoft.com/office/drawing/2014/main" id="{7B05D4BC-CAC3-46EC-9993-DDB9CF3A677D}"/>
+                <a16:creationId xmlns:a16="http://schemas.microsoft.com/office/drawing/2014/main" id="{E0D76ADB-00C8-4EEE-8CE2-29DA96F020D7}"/>
               </a:ext>
             </a:extLst>
           </p:cNvPr>
@@ -14414,7 +14920,7 @@
           <p:cNvPr id="6" name="">
             <a:extLst xmlns:a="http://schemas.openxmlformats.org/drawingml/2006/main">
               <a:ext uri="{FF2B5EF4-FFF2-40B4-BE49-F238E27FC236}">
-                <a16:creationId xmlns:a16="http://schemas.microsoft.com/office/drawing/2014/main" id="{08FED817-9430-4B5F-A3D9-62978DE3D468}"/>
+                <a16:creationId xmlns:a16="http://schemas.microsoft.com/office/drawing/2014/main" id="{CAD64783-FD59-4CF8-A819-D265BFE76F75}"/>
               </a:ext>
             </a:extLst>
           </p:cNvPr>
@@ -14464,7 +14970,7 @@
           <p:cNvPr id="7" name="">
             <a:extLst xmlns:a="http://schemas.openxmlformats.org/drawingml/2006/main">
               <a:ext uri="{FF2B5EF4-FFF2-40B4-BE49-F238E27FC236}">
-                <a16:creationId xmlns:a16="http://schemas.microsoft.com/office/drawing/2014/main" id="{2B4D167F-F268-427F-BC9C-F8046E6A12CC}"/>
+                <a16:creationId xmlns:a16="http://schemas.microsoft.com/office/drawing/2014/main" id="{FA550190-E6AF-4374-942F-EB3B8D2F0D80}"/>
               </a:ext>
             </a:extLst>
           </p:cNvPr>
@@ -14514,7 +15020,7 @@
           <p:cNvPr id="8" name="">
             <a:extLst xmlns:a="http://schemas.openxmlformats.org/drawingml/2006/main">
               <a:ext uri="{FF2B5EF4-FFF2-40B4-BE49-F238E27FC236}">
-                <a16:creationId xmlns:a16="http://schemas.microsoft.com/office/drawing/2014/main" id="{B5F03E99-7333-4528-83C4-5DAD790530FD}"/>
+                <a16:creationId xmlns:a16="http://schemas.microsoft.com/office/drawing/2014/main" id="{8D58C17D-2E1C-4AD1-BEDD-60600353F54B}"/>
               </a:ext>
             </a:extLst>
           </p:cNvPr>
@@ -14549,7 +15055,7 @@
           <p:cNvPr id="9" name="">
             <a:extLst xmlns:a="http://schemas.openxmlformats.org/drawingml/2006/main">
               <a:ext uri="{FF2B5EF4-FFF2-40B4-BE49-F238E27FC236}">
-                <a16:creationId xmlns:a16="http://schemas.microsoft.com/office/drawing/2014/main" id="{91C1F42F-9633-46C2-AD09-8416994FB9CA}"/>
+                <a16:creationId xmlns:a16="http://schemas.microsoft.com/office/drawing/2014/main" id="{2AB6F96D-DCB9-4631-9152-719E48E903CB}"/>
               </a:ext>
             </a:extLst>
           </p:cNvPr>
@@ -14582,7 +15088,7 @@
           <p:cNvPr id="10" name="">
             <a:extLst xmlns:a="http://schemas.openxmlformats.org/drawingml/2006/main">
               <a:ext uri="{FF2B5EF4-FFF2-40B4-BE49-F238E27FC236}">
-                <a16:creationId xmlns:a16="http://schemas.microsoft.com/office/drawing/2014/main" id="{FC2FF645-F1E0-408E-91B0-86AD51A0AF2E}"/>
+                <a16:creationId xmlns:a16="http://schemas.microsoft.com/office/drawing/2014/main" id="{D4B018BC-C426-49DE-800E-0D0F8C763796}"/>
               </a:ext>
             </a:extLst>
           </p:cNvPr>
@@ -14632,7 +15138,7 @@
           <p:cNvPr id="11" name="">
             <a:extLst xmlns:a="http://schemas.openxmlformats.org/drawingml/2006/main">
               <a:ext uri="{FF2B5EF4-FFF2-40B4-BE49-F238E27FC236}">
-                <a16:creationId xmlns:a16="http://schemas.microsoft.com/office/drawing/2014/main" id="{441B59CC-BEF3-41FF-9C45-D59764026664}"/>
+                <a16:creationId xmlns:a16="http://schemas.microsoft.com/office/drawing/2014/main" id="{0408CD4E-7B86-426E-9AE0-F0DB437C7E98}"/>
               </a:ext>
             </a:extLst>
           </p:cNvPr>
@@ -14682,7 +15188,7 @@
           <p:cNvPr id="12" name="">
             <a:extLst xmlns:a="http://schemas.openxmlformats.org/drawingml/2006/main">
               <a:ext uri="{FF2B5EF4-FFF2-40B4-BE49-F238E27FC236}">
-                <a16:creationId xmlns:a16="http://schemas.microsoft.com/office/drawing/2014/main" id="{6A41F454-9501-4DDA-AB41-8AB9223B6FE0}"/>
+                <a16:creationId xmlns:a16="http://schemas.microsoft.com/office/drawing/2014/main" id="{E80B5470-E2CF-4F09-92A8-6CE877FA4BD8}"/>
               </a:ext>
             </a:extLst>
           </p:cNvPr>
@@ -14732,7 +15238,7 @@
           <p:cNvPr id="13" name="">
             <a:extLst xmlns:a="http://schemas.openxmlformats.org/drawingml/2006/main">
               <a:ext uri="{FF2B5EF4-FFF2-40B4-BE49-F238E27FC236}">
-                <a16:creationId xmlns:a16="http://schemas.microsoft.com/office/drawing/2014/main" id="{A91B2C36-382B-4B87-B68D-9AAA12CBD833}"/>
+                <a16:creationId xmlns:a16="http://schemas.microsoft.com/office/drawing/2014/main" id="{776D836A-434D-4AB3-8C5F-86654C0A58A4}"/>
               </a:ext>
             </a:extLst>
           </p:cNvPr>
@@ -14767,7 +15273,7 @@
           <p:cNvPr id="14" name="">
             <a:extLst xmlns:a="http://schemas.openxmlformats.org/drawingml/2006/main">
               <a:ext uri="{FF2B5EF4-FFF2-40B4-BE49-F238E27FC236}">
-                <a16:creationId xmlns:a16="http://schemas.microsoft.com/office/drawing/2014/main" id="{C6D87C5D-5553-44DB-86F1-FA632C575C6D}"/>
+                <a16:creationId xmlns:a16="http://schemas.microsoft.com/office/drawing/2014/main" id="{B2E2C9BB-2A68-4EA1-9B31-BC61D85665A6}"/>
               </a:ext>
             </a:extLst>
           </p:cNvPr>
@@ -14800,7 +15306,7 @@
           <p:cNvPr id="15" name="">
             <a:extLst xmlns:a="http://schemas.openxmlformats.org/drawingml/2006/main">
               <a:ext uri="{FF2B5EF4-FFF2-40B4-BE49-F238E27FC236}">
-                <a16:creationId xmlns:a16="http://schemas.microsoft.com/office/drawing/2014/main" id="{9AF2448D-050F-49C7-91AF-9A1770383106}"/>
+                <a16:creationId xmlns:a16="http://schemas.microsoft.com/office/drawing/2014/main" id="{5EEF1553-ED43-49FF-9EC5-EC2BC3B8934A}"/>
               </a:ext>
             </a:extLst>
           </p:cNvPr>
@@ -14850,7 +15356,7 @@
           <p:cNvPr id="16" name="">
             <a:extLst xmlns:a="http://schemas.openxmlformats.org/drawingml/2006/main">
               <a:ext uri="{FF2B5EF4-FFF2-40B4-BE49-F238E27FC236}">
-                <a16:creationId xmlns:a16="http://schemas.microsoft.com/office/drawing/2014/main" id="{8C583E8E-9EFF-460C-94CD-D3B764B93A36}"/>
+                <a16:creationId xmlns:a16="http://schemas.microsoft.com/office/drawing/2014/main" id="{BD748506-7ACE-49DE-9B30-87AA03C2AAEB}"/>
               </a:ext>
             </a:extLst>
           </p:cNvPr>
@@ -14900,7 +15406,7 @@
           <p:cNvPr id="17" name="">
             <a:extLst xmlns:a="http://schemas.openxmlformats.org/drawingml/2006/main">
               <a:ext uri="{FF2B5EF4-FFF2-40B4-BE49-F238E27FC236}">
-                <a16:creationId xmlns:a16="http://schemas.microsoft.com/office/drawing/2014/main" id="{8125D80B-E04A-42BB-9C4F-8015EB2464CE}"/>
+                <a16:creationId xmlns:a16="http://schemas.microsoft.com/office/drawing/2014/main" id="{01239C57-E82B-4B8A-B5AE-596AE87AFA33}"/>
               </a:ext>
             </a:extLst>
           </p:cNvPr>
@@ -14950,7 +15456,7 @@
           <p:cNvPr id="18" name="">
             <a:extLst xmlns:a="http://schemas.openxmlformats.org/drawingml/2006/main">
               <a:ext uri="{FF2B5EF4-FFF2-40B4-BE49-F238E27FC236}">
-                <a16:creationId xmlns:a16="http://schemas.microsoft.com/office/drawing/2014/main" id="{4AA52312-0B1E-4AB5-9562-FA1592AC09A7}"/>
+                <a16:creationId xmlns:a16="http://schemas.microsoft.com/office/drawing/2014/main" id="{FE88CBEC-8DCF-4FFA-9EAB-F6DC0EDAE005}"/>
               </a:ext>
             </a:extLst>
           </p:cNvPr>
@@ -14985,7 +15491,7 @@
           <p:cNvPr id="19" name="">
             <a:extLst xmlns:a="http://schemas.openxmlformats.org/drawingml/2006/main">
               <a:ext uri="{FF2B5EF4-FFF2-40B4-BE49-F238E27FC236}">
-                <a16:creationId xmlns:a16="http://schemas.microsoft.com/office/drawing/2014/main" id="{2722BCD0-1B14-46B2-9688-0FF8DD44F393}"/>
+                <a16:creationId xmlns:a16="http://schemas.microsoft.com/office/drawing/2014/main" id="{EAA0BDBA-33F8-4296-874F-6CCEB03FB31E}"/>
               </a:ext>
             </a:extLst>
           </p:cNvPr>
@@ -15018,7 +15524,7 @@
           <p:cNvPr id="20" name="">
             <a:extLst xmlns:a="http://schemas.openxmlformats.org/drawingml/2006/main">
               <a:ext uri="{FF2B5EF4-FFF2-40B4-BE49-F238E27FC236}">
-                <a16:creationId xmlns:a16="http://schemas.microsoft.com/office/drawing/2014/main" id="{BDF389B3-8278-4876-AAEA-F44195EC48C8}"/>
+                <a16:creationId xmlns:a16="http://schemas.microsoft.com/office/drawing/2014/main" id="{1FE06D95-34C4-4C58-902C-E3EF3C2E66B7}"/>
               </a:ext>
             </a:extLst>
           </p:cNvPr>
@@ -15068,7 +15574,7 @@
           <p:cNvPr id="21" name="">
             <a:extLst xmlns:a="http://schemas.openxmlformats.org/drawingml/2006/main">
               <a:ext uri="{FF2B5EF4-FFF2-40B4-BE49-F238E27FC236}">
-                <a16:creationId xmlns:a16="http://schemas.microsoft.com/office/drawing/2014/main" id="{7DDD8E8E-0DF5-4F92-B902-7331F2F3D15D}"/>
+                <a16:creationId xmlns:a16="http://schemas.microsoft.com/office/drawing/2014/main" id="{1E92D5BB-73FB-4E97-BE81-FE446C7D51CD}"/>
               </a:ext>
             </a:extLst>
           </p:cNvPr>
@@ -15118,7 +15624,7 @@
           <p:cNvPr id="22" name="">
             <a:extLst xmlns:a="http://schemas.openxmlformats.org/drawingml/2006/main">
               <a:ext uri="{FF2B5EF4-FFF2-40B4-BE49-F238E27FC236}">
-                <a16:creationId xmlns:a16="http://schemas.microsoft.com/office/drawing/2014/main" id="{894B97DE-C7F4-4AE8-A61D-12417718B475}"/>
+                <a16:creationId xmlns:a16="http://schemas.microsoft.com/office/drawing/2014/main" id="{471A019C-DCDC-4947-BE4F-A6CF3AC269E8}"/>
               </a:ext>
             </a:extLst>
           </p:cNvPr>
@@ -15168,7 +15674,7 @@
           <p:cNvPr id="23" name="">
             <a:extLst xmlns:a="http://schemas.openxmlformats.org/drawingml/2006/main">
               <a:ext uri="{FF2B5EF4-FFF2-40B4-BE49-F238E27FC236}">
-                <a16:creationId xmlns:a16="http://schemas.microsoft.com/office/drawing/2014/main" id="{03D543B2-E825-4CC2-8DE9-3D9DD7FC37A1}"/>
+                <a16:creationId xmlns:a16="http://schemas.microsoft.com/office/drawing/2014/main" id="{9C8E5159-C885-40B6-9B86-12E7763B2993}"/>
               </a:ext>
             </a:extLst>
           </p:cNvPr>
@@ -15203,7 +15709,7 @@
           <p:cNvPr id="24" name="">
             <a:extLst xmlns:a="http://schemas.openxmlformats.org/drawingml/2006/main">
               <a:ext uri="{FF2B5EF4-FFF2-40B4-BE49-F238E27FC236}">
-                <a16:creationId xmlns:a16="http://schemas.microsoft.com/office/drawing/2014/main" id="{28994704-1E68-48F0-B969-06941A392BC6}"/>
+                <a16:creationId xmlns:a16="http://schemas.microsoft.com/office/drawing/2014/main" id="{47F636C3-C0AC-4AB6-909D-E971AA628081}"/>
               </a:ext>
             </a:extLst>
           </p:cNvPr>
@@ -15236,7 +15742,7 @@
           <p:cNvPr id="25" name="">
             <a:extLst xmlns:a="http://schemas.openxmlformats.org/drawingml/2006/main">
               <a:ext uri="{FF2B5EF4-FFF2-40B4-BE49-F238E27FC236}">
-                <a16:creationId xmlns:a16="http://schemas.microsoft.com/office/drawing/2014/main" id="{6ACA10C3-96B5-4BFF-BAA1-0CD8CD91BB91}"/>
+                <a16:creationId xmlns:a16="http://schemas.microsoft.com/office/drawing/2014/main" id="{757FEEDA-5A8F-4A82-A762-ADEE9B1FC477}"/>
               </a:ext>
             </a:extLst>
           </p:cNvPr>
@@ -15286,7 +15792,7 @@
           <p:cNvPr id="26" name="">
             <a:extLst xmlns:a="http://schemas.openxmlformats.org/drawingml/2006/main">
               <a:ext uri="{FF2B5EF4-FFF2-40B4-BE49-F238E27FC236}">
-                <a16:creationId xmlns:a16="http://schemas.microsoft.com/office/drawing/2014/main" id="{E0780050-DC0F-44A0-A252-3018297ED749}"/>
+                <a16:creationId xmlns:a16="http://schemas.microsoft.com/office/drawing/2014/main" id="{2196DD0B-B045-40CF-9501-B2214AA72C4B}"/>
               </a:ext>
             </a:extLst>
           </p:cNvPr>
@@ -15336,7 +15842,7 @@
           <p:cNvPr id="27" name="">
             <a:extLst xmlns:a="http://schemas.openxmlformats.org/drawingml/2006/main">
               <a:ext uri="{FF2B5EF4-FFF2-40B4-BE49-F238E27FC236}">
-                <a16:creationId xmlns:a16="http://schemas.microsoft.com/office/drawing/2014/main" id="{BAEB7532-3667-41C1-8893-03A7DA67C6F2}"/>
+                <a16:creationId xmlns:a16="http://schemas.microsoft.com/office/drawing/2014/main" id="{42FA70F2-C100-4F05-A75C-687118626652}"/>
               </a:ext>
             </a:extLst>
           </p:cNvPr>
@@ -15386,7 +15892,7 @@
           <p:cNvPr id="28" name="">
             <a:extLst xmlns:a="http://schemas.openxmlformats.org/drawingml/2006/main">
               <a:ext uri="{FF2B5EF4-FFF2-40B4-BE49-F238E27FC236}">
-                <a16:creationId xmlns:a16="http://schemas.microsoft.com/office/drawing/2014/main" id="{D931B978-A93E-4559-9E31-E38395E4CA42}"/>
+                <a16:creationId xmlns:a16="http://schemas.microsoft.com/office/drawing/2014/main" id="{E59C78E9-94E4-4431-9D12-605B133566FE}"/>
               </a:ext>
             </a:extLst>
           </p:cNvPr>
@@ -15421,7 +15927,7 @@
           <p:cNvPr id="29" name="">
             <a:extLst xmlns:a="http://schemas.openxmlformats.org/drawingml/2006/main">
               <a:ext uri="{FF2B5EF4-FFF2-40B4-BE49-F238E27FC236}">
-                <a16:creationId xmlns:a16="http://schemas.microsoft.com/office/drawing/2014/main" id="{B11F7794-EC47-4CEB-B205-7A769E5BADCA}"/>
+                <a16:creationId xmlns:a16="http://schemas.microsoft.com/office/drawing/2014/main" id="{54C25685-DF83-49C7-998F-459A1AA5C782}"/>
               </a:ext>
             </a:extLst>
           </p:cNvPr>
@@ -15454,7 +15960,7 @@
           <p:cNvPr id="30" name="">
             <a:extLst xmlns:a="http://schemas.openxmlformats.org/drawingml/2006/main">
               <a:ext uri="{FF2B5EF4-FFF2-40B4-BE49-F238E27FC236}">
-                <a16:creationId xmlns:a16="http://schemas.microsoft.com/office/drawing/2014/main" id="{D1306212-4910-4293-BDB1-9F5EA7E4683B}"/>
+                <a16:creationId xmlns:a16="http://schemas.microsoft.com/office/drawing/2014/main" id="{C2AF4A35-7DC5-45B8-9F89-828799C936FA}"/>
               </a:ext>
             </a:extLst>
           </p:cNvPr>
@@ -15504,7 +16010,7 @@
           <p:cNvPr id="31" name="">
             <a:extLst xmlns:a="http://schemas.openxmlformats.org/drawingml/2006/main">
               <a:ext uri="{FF2B5EF4-FFF2-40B4-BE49-F238E27FC236}">
-                <a16:creationId xmlns:a16="http://schemas.microsoft.com/office/drawing/2014/main" id="{E0CC8E65-7C92-430F-B7AF-953C46843747}"/>
+                <a16:creationId xmlns:a16="http://schemas.microsoft.com/office/drawing/2014/main" id="{3FA98EA7-ECDE-4D47-8478-75FB80676742}"/>
               </a:ext>
             </a:extLst>
           </p:cNvPr>
@@ -15554,7 +16060,7 @@
           <p:cNvPr id="32" name="">
             <a:extLst xmlns:a="http://schemas.openxmlformats.org/drawingml/2006/main">
               <a:ext uri="{FF2B5EF4-FFF2-40B4-BE49-F238E27FC236}">
-                <a16:creationId xmlns:a16="http://schemas.microsoft.com/office/drawing/2014/main" id="{9F4A4F9C-4286-4733-A761-0F9C2E4EC4AA}"/>
+                <a16:creationId xmlns:a16="http://schemas.microsoft.com/office/drawing/2014/main" id="{2B8BDF87-90A6-4C4C-91FB-BB02450BE6B8}"/>
               </a:ext>
             </a:extLst>
           </p:cNvPr>
@@ -15604,7 +16110,7 @@
           <p:cNvPr id="33" name="">
             <a:extLst xmlns:a="http://schemas.openxmlformats.org/drawingml/2006/main">
               <a:ext uri="{FF2B5EF4-FFF2-40B4-BE49-F238E27FC236}">
-                <a16:creationId xmlns:a16="http://schemas.microsoft.com/office/drawing/2014/main" id="{3A0D2E56-4AA0-46F5-8ADD-BB42C78F9A4C}"/>
+                <a16:creationId xmlns:a16="http://schemas.microsoft.com/office/drawing/2014/main" id="{F7609F70-CCB2-425C-BE20-4D37F196786D}"/>
               </a:ext>
             </a:extLst>
           </p:cNvPr>
@@ -15639,7 +16145,7 @@
           <p:cNvPr id="34" name="">
             <a:extLst xmlns:a="http://schemas.openxmlformats.org/drawingml/2006/main">
               <a:ext uri="{FF2B5EF4-FFF2-40B4-BE49-F238E27FC236}">
-                <a16:creationId xmlns:a16="http://schemas.microsoft.com/office/drawing/2014/main" id="{A218B42C-35F8-4474-AB9C-397546E4EECC}"/>
+                <a16:creationId xmlns:a16="http://schemas.microsoft.com/office/drawing/2014/main" id="{78F50BE8-482C-4A0F-AA92-5A4BDC0298F0}"/>
               </a:ext>
             </a:extLst>
           </p:cNvPr>
@@ -15672,7 +16178,7 @@
           <p:cNvPr id="35" name="">
             <a:extLst xmlns:a="http://schemas.openxmlformats.org/drawingml/2006/main">
               <a:ext uri="{FF2B5EF4-FFF2-40B4-BE49-F238E27FC236}">
-                <a16:creationId xmlns:a16="http://schemas.microsoft.com/office/drawing/2014/main" id="{C6746419-B5FD-41DE-A915-0704C069EEE4}"/>
+                <a16:creationId xmlns:a16="http://schemas.microsoft.com/office/drawing/2014/main" id="{568EAF1B-859A-4FBE-A3EC-F82102DC2D2E}"/>
               </a:ext>
             </a:extLst>
           </p:cNvPr>
@@ -15722,7 +16228,7 @@
           <p:cNvPr id="36" name="">
             <a:extLst xmlns:a="http://schemas.openxmlformats.org/drawingml/2006/main">
               <a:ext uri="{FF2B5EF4-FFF2-40B4-BE49-F238E27FC236}">
-                <a16:creationId xmlns:a16="http://schemas.microsoft.com/office/drawing/2014/main" id="{34A56C43-7508-4AD5-ACB1-E3EDB6049B34}"/>
+                <a16:creationId xmlns:a16="http://schemas.microsoft.com/office/drawing/2014/main" id="{9C5C64E6-50BD-4A7B-B30D-54B70B1EDBFB}"/>
               </a:ext>
             </a:extLst>
           </p:cNvPr>
@@ -15772,7 +16278,7 @@
           <p:cNvPr id="37" name="">
             <a:extLst xmlns:a="http://schemas.openxmlformats.org/drawingml/2006/main">
               <a:ext uri="{FF2B5EF4-FFF2-40B4-BE49-F238E27FC236}">
-                <a16:creationId xmlns:a16="http://schemas.microsoft.com/office/drawing/2014/main" id="{80E3509E-7E5C-4A3D-90DA-F2FEDA3FEAB8}"/>
+                <a16:creationId xmlns:a16="http://schemas.microsoft.com/office/drawing/2014/main" id="{A3EBF66E-6450-4F0C-8F2B-1005A565D4BA}"/>
               </a:ext>
             </a:extLst>
           </p:cNvPr>
@@ -15820,7 +16326,7 @@
     </p:spTree>
     <p:extLst>
       <p:ext uri="{BB962C8B-B14F-4D97-AF65-F5344CB8AC3E}">
-        <p14:creationId xmlns:p14="http://schemas.microsoft.com/office/powerpoint/2010/main" val="833016529"/>
+        <p14:creationId xmlns:p14="http://schemas.microsoft.com/office/powerpoint/2010/main" val="51564630"/>
       </p:ext>
     </p:extLst>
   </p:cSld>
@@ -15851,7 +16357,7 @@
           <p:cNvPr id="1" name="">
             <a:extLst xmlns:a="http://schemas.openxmlformats.org/drawingml/2006/main">
               <a:ext uri="{FF2B5EF4-FFF2-40B4-BE49-F238E27FC236}">
-                <a16:creationId xmlns:a16="http://schemas.microsoft.com/office/drawing/2014/main" id="{5D5B274E-31D5-42BE-B289-64363FACAFEF}"/>
+                <a16:creationId xmlns:a16="http://schemas.microsoft.com/office/drawing/2014/main" id="{70090B9F-A841-4A3E-974E-8907A2ECBE32}"/>
               </a:ext>
             </a:extLst>
           </p:cNvPr>
@@ -15886,7 +16392,7 @@
           <p:nvPr/>
         </p:nvPicPr>
         <p:blipFill>
-          <a:blip xmlns:r="http://schemas.openxmlformats.org/officeDocument/2006/relationships" xmlns:a="http://schemas.openxmlformats.org/drawingml/2006/main" r:embed="R45f2185d4fc84d8d"/>
+          <a:blip xmlns:r="http://schemas.openxmlformats.org/officeDocument/2006/relationships" xmlns:a="http://schemas.openxmlformats.org/drawingml/2006/main" r:embed="Rfbf788fc9af74394"/>
           <a:stretch xmlns:a="http://schemas.openxmlformats.org/drawingml/2006/main"/>
         </p:blipFill>
         <p:spPr>
@@ -15904,7 +16410,7 @@
           <p:cNvPr id="3" name="">
             <a:extLst xmlns:a="http://schemas.openxmlformats.org/drawingml/2006/main">
               <a:ext uri="{FF2B5EF4-FFF2-40B4-BE49-F238E27FC236}">
-                <a16:creationId xmlns:a16="http://schemas.microsoft.com/office/drawing/2014/main" id="{2623FBD2-A279-4148-941D-C56093723D43}"/>
+                <a16:creationId xmlns:a16="http://schemas.microsoft.com/office/drawing/2014/main" id="{C35A83B8-2F74-40B9-B8F8-16BE38671808}"/>
               </a:ext>
             </a:extLst>
           </p:cNvPr>
@@ -15954,7 +16460,7 @@
           <p:cNvPr id="4" name="">
             <a:extLst xmlns:a="http://schemas.openxmlformats.org/drawingml/2006/main">
               <a:ext uri="{FF2B5EF4-FFF2-40B4-BE49-F238E27FC236}">
-                <a16:creationId xmlns:a16="http://schemas.microsoft.com/office/drawing/2014/main" id="{833E9654-A479-4562-9989-2BBFC5C4B22A}"/>
+                <a16:creationId xmlns:a16="http://schemas.microsoft.com/office/drawing/2014/main" id="{274EE3AF-C59E-41FA-B9F5-FDD18BC3EBFA}"/>
               </a:ext>
             </a:extLst>
           </p:cNvPr>
@@ -15987,7 +16493,7 @@
           <p:cNvPr id="5" name="">
             <a:extLst xmlns:a="http://schemas.openxmlformats.org/drawingml/2006/main">
               <a:ext uri="{FF2B5EF4-FFF2-40B4-BE49-F238E27FC236}">
-                <a16:creationId xmlns:a16="http://schemas.microsoft.com/office/drawing/2014/main" id="{08108EE0-4C86-4DC9-88F3-E16FB0D17581}"/>
+                <a16:creationId xmlns:a16="http://schemas.microsoft.com/office/drawing/2014/main" id="{A0C79727-B334-4FF7-97D8-1806CC01381F}"/>
               </a:ext>
             </a:extLst>
           </p:cNvPr>
@@ -16018,7 +16524,7 @@
           <p:cNvPr id="6" name="">
             <a:extLst xmlns:a="http://schemas.openxmlformats.org/drawingml/2006/main">
               <a:ext uri="{FF2B5EF4-FFF2-40B4-BE49-F238E27FC236}">
-                <a16:creationId xmlns:a16="http://schemas.microsoft.com/office/drawing/2014/main" id="{4F6484BB-6FCE-439A-9681-6A385DFD59E9}"/>
+                <a16:creationId xmlns:a16="http://schemas.microsoft.com/office/drawing/2014/main" id="{981170B2-0261-4E03-9554-97914028DFDA}"/>
               </a:ext>
             </a:extLst>
           </p:cNvPr>
@@ -16068,7 +16574,7 @@
           <p:cNvPr id="7" name="">
             <a:extLst xmlns:a="http://schemas.openxmlformats.org/drawingml/2006/main">
               <a:ext uri="{FF2B5EF4-FFF2-40B4-BE49-F238E27FC236}">
-                <a16:creationId xmlns:a16="http://schemas.microsoft.com/office/drawing/2014/main" id="{1D7CF22F-0FAA-488D-B509-86FBBFDBE758}"/>
+                <a16:creationId xmlns:a16="http://schemas.microsoft.com/office/drawing/2014/main" id="{46E9B089-F392-4573-A4F2-EBAE3D4EF8C7}"/>
               </a:ext>
             </a:extLst>
           </p:cNvPr>
@@ -16118,7 +16624,7 @@
           <p:cNvPr id="8" name="">
             <a:extLst xmlns:a="http://schemas.openxmlformats.org/drawingml/2006/main">
               <a:ext uri="{FF2B5EF4-FFF2-40B4-BE49-F238E27FC236}">
-                <a16:creationId xmlns:a16="http://schemas.microsoft.com/office/drawing/2014/main" id="{B897DF55-A94C-4932-8F8F-0258ABBB9BA0}"/>
+                <a16:creationId xmlns:a16="http://schemas.microsoft.com/office/drawing/2014/main" id="{ABE2639C-8DFF-454F-A9EC-6F2EBC8019C3}"/>
               </a:ext>
             </a:extLst>
           </p:cNvPr>
@@ -16168,7 +16674,7 @@
           <p:cNvPr id="9" name="">
             <a:extLst xmlns:a="http://schemas.openxmlformats.org/drawingml/2006/main">
               <a:ext uri="{FF2B5EF4-FFF2-40B4-BE49-F238E27FC236}">
-                <a16:creationId xmlns:a16="http://schemas.microsoft.com/office/drawing/2014/main" id="{555B5982-A4F7-4F88-B1EF-F44B02754449}"/>
+                <a16:creationId xmlns:a16="http://schemas.microsoft.com/office/drawing/2014/main" id="{1E717178-F25C-4FA7-A826-2682F6E92FD2}"/>
               </a:ext>
             </a:extLst>
           </p:cNvPr>
@@ -16218,7 +16724,7 @@
           <p:cNvPr id="10" name="">
             <a:extLst xmlns:a="http://schemas.openxmlformats.org/drawingml/2006/main">
               <a:ext uri="{FF2B5EF4-FFF2-40B4-BE49-F238E27FC236}">
-                <a16:creationId xmlns:a16="http://schemas.microsoft.com/office/drawing/2014/main" id="{A184F36F-5A9D-46CC-98CA-3FE7FEFA018F}"/>
+                <a16:creationId xmlns:a16="http://schemas.microsoft.com/office/drawing/2014/main" id="{C2A49C09-6B3E-4FE4-B175-8ACC4D032FAD}"/>
               </a:ext>
             </a:extLst>
           </p:cNvPr>
@@ -16268,7 +16774,7 @@
           <p:cNvPr id="11" name="">
             <a:extLst xmlns:a="http://schemas.openxmlformats.org/drawingml/2006/main">
               <a:ext uri="{FF2B5EF4-FFF2-40B4-BE49-F238E27FC236}">
-                <a16:creationId xmlns:a16="http://schemas.microsoft.com/office/drawing/2014/main" id="{ED86B536-62F3-4603-B054-C80252EDA9FA}"/>
+                <a16:creationId xmlns:a16="http://schemas.microsoft.com/office/drawing/2014/main" id="{5077F744-0998-47B8-B195-396F9AA3245F}"/>
               </a:ext>
             </a:extLst>
           </p:cNvPr>
@@ -16318,7 +16824,7 @@
           <p:cNvPr id="12" name="">
             <a:extLst xmlns:a="http://schemas.openxmlformats.org/drawingml/2006/main">
               <a:ext uri="{FF2B5EF4-FFF2-40B4-BE49-F238E27FC236}">
-                <a16:creationId xmlns:a16="http://schemas.microsoft.com/office/drawing/2014/main" id="{F2A0C657-87B9-457D-BF60-11D7101F422A}"/>
+                <a16:creationId xmlns:a16="http://schemas.microsoft.com/office/drawing/2014/main" id="{874D7A87-D6C6-4D0D-885B-4B1DEEEDFB4D}"/>
               </a:ext>
             </a:extLst>
           </p:cNvPr>
@@ -16349,7 +16855,7 @@
           <p:cNvPr id="13" name="">
             <a:extLst xmlns:a="http://schemas.openxmlformats.org/drawingml/2006/main">
               <a:ext uri="{FF2B5EF4-FFF2-40B4-BE49-F238E27FC236}">
-                <a16:creationId xmlns:a16="http://schemas.microsoft.com/office/drawing/2014/main" id="{EC4ECFCC-C569-40B8-AA86-C5593E303983}"/>
+                <a16:creationId xmlns:a16="http://schemas.microsoft.com/office/drawing/2014/main" id="{A2C56CB8-A752-4FE8-9569-A480C0B919B5}"/>
               </a:ext>
             </a:extLst>
           </p:cNvPr>
@@ -16399,7 +16905,7 @@
           <p:cNvPr id="14" name="">
             <a:extLst xmlns:a="http://schemas.openxmlformats.org/drawingml/2006/main">
               <a:ext uri="{FF2B5EF4-FFF2-40B4-BE49-F238E27FC236}">
-                <a16:creationId xmlns:a16="http://schemas.microsoft.com/office/drawing/2014/main" id="{8C1DA8E1-CEEA-4EF3-B469-2D742CE66821}"/>
+                <a16:creationId xmlns:a16="http://schemas.microsoft.com/office/drawing/2014/main" id="{1ED3332E-BF69-4BC4-87B5-2B9B8A75D854}"/>
               </a:ext>
             </a:extLst>
           </p:cNvPr>
@@ -16449,7 +16955,7 @@
           <p:cNvPr id="15" name="">
             <a:extLst xmlns:a="http://schemas.openxmlformats.org/drawingml/2006/main">
               <a:ext uri="{FF2B5EF4-FFF2-40B4-BE49-F238E27FC236}">
-                <a16:creationId xmlns:a16="http://schemas.microsoft.com/office/drawing/2014/main" id="{9C6575D5-B12A-4BD4-99F3-3B3691E07341}"/>
+                <a16:creationId xmlns:a16="http://schemas.microsoft.com/office/drawing/2014/main" id="{3FD7F37A-E3C7-479A-9F07-C20BB85212A6}"/>
               </a:ext>
             </a:extLst>
           </p:cNvPr>
@@ -16499,7 +17005,7 @@
           <p:cNvPr id="16" name="">
             <a:extLst xmlns:a="http://schemas.openxmlformats.org/drawingml/2006/main">
               <a:ext uri="{FF2B5EF4-FFF2-40B4-BE49-F238E27FC236}">
-                <a16:creationId xmlns:a16="http://schemas.microsoft.com/office/drawing/2014/main" id="{2F2E7609-26E9-476F-B847-9A53FFE2BC89}"/>
+                <a16:creationId xmlns:a16="http://schemas.microsoft.com/office/drawing/2014/main" id="{1641DD7F-CE29-4249-A305-493BA6CAB6C0}"/>
               </a:ext>
             </a:extLst>
           </p:cNvPr>
@@ -16530,7 +17036,7 @@
           <p:cNvPr id="17" name="">
             <a:extLst xmlns:a="http://schemas.openxmlformats.org/drawingml/2006/main">
               <a:ext uri="{FF2B5EF4-FFF2-40B4-BE49-F238E27FC236}">
-                <a16:creationId xmlns:a16="http://schemas.microsoft.com/office/drawing/2014/main" id="{083F81A1-1BB1-4408-8554-447EB5069FB7}"/>
+                <a16:creationId xmlns:a16="http://schemas.microsoft.com/office/drawing/2014/main" id="{D61D3C54-D30F-4921-B068-E0ABC5D4BC0F}"/>
               </a:ext>
             </a:extLst>
           </p:cNvPr>
@@ -16580,7 +17086,7 @@
           <p:cNvPr id="18" name="">
             <a:extLst xmlns:a="http://schemas.openxmlformats.org/drawingml/2006/main">
               <a:ext uri="{FF2B5EF4-FFF2-40B4-BE49-F238E27FC236}">
-                <a16:creationId xmlns:a16="http://schemas.microsoft.com/office/drawing/2014/main" id="{70193980-0D21-4B28-AADE-FC9E51BBB65A}"/>
+                <a16:creationId xmlns:a16="http://schemas.microsoft.com/office/drawing/2014/main" id="{CA69D32B-7587-42C9-883C-FB596FA57BE2}"/>
               </a:ext>
             </a:extLst>
           </p:cNvPr>
@@ -16630,7 +17136,7 @@
           <p:cNvPr id="19" name="">
             <a:extLst xmlns:a="http://schemas.openxmlformats.org/drawingml/2006/main">
               <a:ext uri="{FF2B5EF4-FFF2-40B4-BE49-F238E27FC236}">
-                <a16:creationId xmlns:a16="http://schemas.microsoft.com/office/drawing/2014/main" id="{C2724278-CB4E-4CDC-99C3-BE72A52CCED0}"/>
+                <a16:creationId xmlns:a16="http://schemas.microsoft.com/office/drawing/2014/main" id="{CE247FF9-D9C6-479A-92A1-4A8B192AF285}"/>
               </a:ext>
             </a:extLst>
           </p:cNvPr>
@@ -16680,7 +17186,7 @@
           <p:cNvPr id="20" name="">
             <a:extLst xmlns:a="http://schemas.openxmlformats.org/drawingml/2006/main">
               <a:ext uri="{FF2B5EF4-FFF2-40B4-BE49-F238E27FC236}">
-                <a16:creationId xmlns:a16="http://schemas.microsoft.com/office/drawing/2014/main" id="{ED582859-0453-4107-BCB6-CAFBF018E29F}"/>
+                <a16:creationId xmlns:a16="http://schemas.microsoft.com/office/drawing/2014/main" id="{668EF42C-ABF6-4330-8445-80E1F2E16A11}"/>
               </a:ext>
             </a:extLst>
           </p:cNvPr>
@@ -16715,7 +17221,7 @@
           <p:cNvPr id="21" name="">
             <a:extLst xmlns:a="http://schemas.openxmlformats.org/drawingml/2006/main">
               <a:ext uri="{FF2B5EF4-FFF2-40B4-BE49-F238E27FC236}">
-                <a16:creationId xmlns:a16="http://schemas.microsoft.com/office/drawing/2014/main" id="{6960B903-C193-423D-A939-A8C0F85388E9}"/>
+                <a16:creationId xmlns:a16="http://schemas.microsoft.com/office/drawing/2014/main" id="{4340477B-A4B4-4CF6-8722-2662C147F197}"/>
               </a:ext>
             </a:extLst>
           </p:cNvPr>
@@ -16765,7 +17271,7 @@
           <p:cNvPr id="22" name="">
             <a:extLst xmlns:a="http://schemas.openxmlformats.org/drawingml/2006/main">
               <a:ext uri="{FF2B5EF4-FFF2-40B4-BE49-F238E27FC236}">
-                <a16:creationId xmlns:a16="http://schemas.microsoft.com/office/drawing/2014/main" id="{31281ED0-A472-42C4-8C61-974077BA6E79}"/>
+                <a16:creationId xmlns:a16="http://schemas.microsoft.com/office/drawing/2014/main" id="{F7463443-32FC-4205-B8C9-9EDC995B9D36}"/>
               </a:ext>
             </a:extLst>
           </p:cNvPr>
@@ -16815,7 +17321,7 @@
           <p:cNvPr id="23" name="">
             <a:extLst xmlns:a="http://schemas.openxmlformats.org/drawingml/2006/main">
               <a:ext uri="{FF2B5EF4-FFF2-40B4-BE49-F238E27FC236}">
-                <a16:creationId xmlns:a16="http://schemas.microsoft.com/office/drawing/2014/main" id="{85FC3458-522E-4E27-A48F-41CD00063FAC}"/>
+                <a16:creationId xmlns:a16="http://schemas.microsoft.com/office/drawing/2014/main" id="{F7FEACF7-6002-4E2F-9DA2-46F6F16AF617}"/>
               </a:ext>
             </a:extLst>
           </p:cNvPr>
@@ -16850,7 +17356,7 @@
           <p:cNvPr id="24" name="">
             <a:extLst xmlns:a="http://schemas.openxmlformats.org/drawingml/2006/main">
               <a:ext uri="{FF2B5EF4-FFF2-40B4-BE49-F238E27FC236}">
-                <a16:creationId xmlns:a16="http://schemas.microsoft.com/office/drawing/2014/main" id="{45EA645A-B73F-4A7A-9E06-23E7DCA1E456}"/>
+                <a16:creationId xmlns:a16="http://schemas.microsoft.com/office/drawing/2014/main" id="{7990CDF2-4A39-43E5-ABFB-3F1C63EBFE18}"/>
               </a:ext>
             </a:extLst>
           </p:cNvPr>
@@ -16900,7 +17406,7 @@
           <p:cNvPr id="25" name="">
             <a:extLst xmlns:a="http://schemas.openxmlformats.org/drawingml/2006/main">
               <a:ext uri="{FF2B5EF4-FFF2-40B4-BE49-F238E27FC236}">
-                <a16:creationId xmlns:a16="http://schemas.microsoft.com/office/drawing/2014/main" id="{4D512AD3-CB86-432C-AD9B-7F4C9E31BE82}"/>
+                <a16:creationId xmlns:a16="http://schemas.microsoft.com/office/drawing/2014/main" id="{3834F1F5-900A-458C-A699-49C5786B8FFA}"/>
               </a:ext>
             </a:extLst>
           </p:cNvPr>
@@ -16950,7 +17456,7 @@
           <p:cNvPr id="26" name="">
             <a:extLst xmlns:a="http://schemas.openxmlformats.org/drawingml/2006/main">
               <a:ext uri="{FF2B5EF4-FFF2-40B4-BE49-F238E27FC236}">
-                <a16:creationId xmlns:a16="http://schemas.microsoft.com/office/drawing/2014/main" id="{7B970744-9BCA-45EA-B3E6-94E97E692A69}"/>
+                <a16:creationId xmlns:a16="http://schemas.microsoft.com/office/drawing/2014/main" id="{872609F4-9AF3-4495-8BF2-10103F94429E}"/>
               </a:ext>
             </a:extLst>
           </p:cNvPr>
@@ -16998,7 +17504,7 @@
     </p:spTree>
     <p:extLst>
       <p:ext uri="{BB962C8B-B14F-4D97-AF65-F5344CB8AC3E}">
-        <p14:creationId xmlns:p14="http://schemas.microsoft.com/office/powerpoint/2010/main" val="496924245"/>
+        <p14:creationId xmlns:p14="http://schemas.microsoft.com/office/powerpoint/2010/main" val="1661025464"/>
       </p:ext>
     </p:extLst>
   </p:cSld>
@@ -17029,7 +17535,7 @@
           <p:cNvPr id="1" name="">
             <a:extLst xmlns:a="http://schemas.openxmlformats.org/drawingml/2006/main">
               <a:ext uri="{FF2B5EF4-FFF2-40B4-BE49-F238E27FC236}">
-                <a16:creationId xmlns:a16="http://schemas.microsoft.com/office/drawing/2014/main" id="{5959F3D1-B975-44AF-8B64-F3F63A5898BA}"/>
+                <a16:creationId xmlns:a16="http://schemas.microsoft.com/office/drawing/2014/main" id="{612697B5-4B3F-4E5A-8790-82D1E6CD5041}"/>
               </a:ext>
             </a:extLst>
           </p:cNvPr>
@@ -17064,7 +17570,7 @@
           <p:nvPr/>
         </p:nvPicPr>
         <p:blipFill>
-          <a:blip xmlns:r="http://schemas.openxmlformats.org/officeDocument/2006/relationships" xmlns:a="http://schemas.openxmlformats.org/drawingml/2006/main" r:embed="Rc912e9221ced4870"/>
+          <a:blip xmlns:r="http://schemas.openxmlformats.org/officeDocument/2006/relationships" xmlns:a="http://schemas.openxmlformats.org/drawingml/2006/main" r:embed="Rb57891b469664600"/>
           <a:stretch xmlns:a="http://schemas.openxmlformats.org/drawingml/2006/main"/>
         </p:blipFill>
         <p:spPr>
@@ -17082,7 +17588,7 @@
           <p:cNvPr id="3" name="">
             <a:extLst xmlns:a="http://schemas.openxmlformats.org/drawingml/2006/main">
               <a:ext uri="{FF2B5EF4-FFF2-40B4-BE49-F238E27FC236}">
-                <a16:creationId xmlns:a16="http://schemas.microsoft.com/office/drawing/2014/main" id="{2836A3CD-16B4-4FF9-B7F3-ED8A2A8818E6}"/>
+                <a16:creationId xmlns:a16="http://schemas.microsoft.com/office/drawing/2014/main" id="{6A197218-4F05-46E0-82BD-C44706EF3B40}"/>
               </a:ext>
             </a:extLst>
           </p:cNvPr>
@@ -17132,7 +17638,7 @@
           <p:cNvPr id="4" name="">
             <a:extLst xmlns:a="http://schemas.openxmlformats.org/drawingml/2006/main">
               <a:ext uri="{FF2B5EF4-FFF2-40B4-BE49-F238E27FC236}">
-                <a16:creationId xmlns:a16="http://schemas.microsoft.com/office/drawing/2014/main" id="{9B5ABC53-2F35-4B7E-A1F5-98D3D83D81F6}"/>
+                <a16:creationId xmlns:a16="http://schemas.microsoft.com/office/drawing/2014/main" id="{5EAAFBF9-4608-476D-9D57-ABAAEEF72FF9}"/>
               </a:ext>
             </a:extLst>
           </p:cNvPr>
@@ -17165,7 +17671,7 @@
           <p:cNvPr id="5" name="">
             <a:extLst xmlns:a="http://schemas.openxmlformats.org/drawingml/2006/main">
               <a:ext uri="{FF2B5EF4-FFF2-40B4-BE49-F238E27FC236}">
-                <a16:creationId xmlns:a16="http://schemas.microsoft.com/office/drawing/2014/main" id="{3422E1B0-7E65-4B80-AEAA-9993E5A8F744}"/>
+                <a16:creationId xmlns:a16="http://schemas.microsoft.com/office/drawing/2014/main" id="{6D4DDC89-71FB-4493-88E4-4125075014B5}"/>
               </a:ext>
             </a:extLst>
           </p:cNvPr>
@@ -17196,7 +17702,7 @@
           <p:cNvPr id="6" name="">
             <a:extLst xmlns:a="http://schemas.openxmlformats.org/drawingml/2006/main">
               <a:ext uri="{FF2B5EF4-FFF2-40B4-BE49-F238E27FC236}">
-                <a16:creationId xmlns:a16="http://schemas.microsoft.com/office/drawing/2014/main" id="{C619CD78-4E0B-44C0-BB1D-767BA8F24A90}"/>
+                <a16:creationId xmlns:a16="http://schemas.microsoft.com/office/drawing/2014/main" id="{B499627D-9AB1-47C3-938D-35E930E5DFEE}"/>
               </a:ext>
             </a:extLst>
           </p:cNvPr>
@@ -17246,7 +17752,7 @@
           <p:cNvPr id="7" name="">
             <a:extLst xmlns:a="http://schemas.openxmlformats.org/drawingml/2006/main">
               <a:ext uri="{FF2B5EF4-FFF2-40B4-BE49-F238E27FC236}">
-                <a16:creationId xmlns:a16="http://schemas.microsoft.com/office/drawing/2014/main" id="{DAABB034-AA97-43A5-AD60-1D63E9E01244}"/>
+                <a16:creationId xmlns:a16="http://schemas.microsoft.com/office/drawing/2014/main" id="{8036C2F2-E686-45ED-B9B7-20CA63EC92D8}"/>
               </a:ext>
             </a:extLst>
           </p:cNvPr>
@@ -17296,7 +17802,7 @@
           <p:cNvPr id="8" name="">
             <a:extLst xmlns:a="http://schemas.openxmlformats.org/drawingml/2006/main">
               <a:ext uri="{FF2B5EF4-FFF2-40B4-BE49-F238E27FC236}">
-                <a16:creationId xmlns:a16="http://schemas.microsoft.com/office/drawing/2014/main" id="{1C55D118-8E2D-4D4A-8A13-90573B9AA49C}"/>
+                <a16:creationId xmlns:a16="http://schemas.microsoft.com/office/drawing/2014/main" id="{62BF25ED-288E-4676-A751-3E5692C903B2}"/>
               </a:ext>
             </a:extLst>
           </p:cNvPr>
@@ -17331,7 +17837,7 @@
           <p:cNvPr id="9" name="">
             <a:extLst xmlns:a="http://schemas.openxmlformats.org/drawingml/2006/main">
               <a:ext uri="{FF2B5EF4-FFF2-40B4-BE49-F238E27FC236}">
-                <a16:creationId xmlns:a16="http://schemas.microsoft.com/office/drawing/2014/main" id="{05FCC5B5-2CA4-4D6A-AF79-E896887063AC}"/>
+                <a16:creationId xmlns:a16="http://schemas.microsoft.com/office/drawing/2014/main" id="{B6ABD00F-0862-4253-9B0B-D49E92C8D34C}"/>
               </a:ext>
             </a:extLst>
           </p:cNvPr>
@@ -17364,7 +17870,7 @@
           <p:cNvPr id="10" name="">
             <a:extLst xmlns:a="http://schemas.openxmlformats.org/drawingml/2006/main">
               <a:ext uri="{FF2B5EF4-FFF2-40B4-BE49-F238E27FC236}">
-                <a16:creationId xmlns:a16="http://schemas.microsoft.com/office/drawing/2014/main" id="{213280BD-EE57-44FC-A14E-5AE9CB0DDF83}"/>
+                <a16:creationId xmlns:a16="http://schemas.microsoft.com/office/drawing/2014/main" id="{AEE40810-DA12-4899-9975-CB4C23CA5B2C}"/>
               </a:ext>
             </a:extLst>
           </p:cNvPr>
@@ -17414,7 +17920,7 @@
           <p:cNvPr id="11" name="">
             <a:extLst xmlns:a="http://schemas.openxmlformats.org/drawingml/2006/main">
               <a:ext uri="{FF2B5EF4-FFF2-40B4-BE49-F238E27FC236}">
-                <a16:creationId xmlns:a16="http://schemas.microsoft.com/office/drawing/2014/main" id="{51FE60C9-C1B1-4EDC-8978-60F5323A1D4B}"/>
+                <a16:creationId xmlns:a16="http://schemas.microsoft.com/office/drawing/2014/main" id="{6F31B602-5DC0-4AFC-8FEE-82665D581F32}"/>
               </a:ext>
             </a:extLst>
           </p:cNvPr>
@@ -17464,7 +17970,7 @@
           <p:cNvPr id="12" name="">
             <a:extLst xmlns:a="http://schemas.openxmlformats.org/drawingml/2006/main">
               <a:ext uri="{FF2B5EF4-FFF2-40B4-BE49-F238E27FC236}">
-                <a16:creationId xmlns:a16="http://schemas.microsoft.com/office/drawing/2014/main" id="{507EC065-C7C4-4BC8-BCC2-A3D620931F1E}"/>
+                <a16:creationId xmlns:a16="http://schemas.microsoft.com/office/drawing/2014/main" id="{45F0C972-AA8F-4239-9B6F-DB8584A27016}"/>
               </a:ext>
             </a:extLst>
           </p:cNvPr>
@@ -17514,7 +18020,7 @@
           <p:cNvPr id="13" name="">
             <a:extLst xmlns:a="http://schemas.openxmlformats.org/drawingml/2006/main">
               <a:ext uri="{FF2B5EF4-FFF2-40B4-BE49-F238E27FC236}">
-                <a16:creationId xmlns:a16="http://schemas.microsoft.com/office/drawing/2014/main" id="{B1E8AF26-65AB-4C7B-B882-B5584CA380F8}"/>
+                <a16:creationId xmlns:a16="http://schemas.microsoft.com/office/drawing/2014/main" id="{916A82A8-0E0A-4517-A712-0CD7C08C6650}"/>
               </a:ext>
             </a:extLst>
           </p:cNvPr>
@@ -17564,7 +18070,7 @@
           <p:cNvPr id="14" name="">
             <a:extLst xmlns:a="http://schemas.openxmlformats.org/drawingml/2006/main">
               <a:ext uri="{FF2B5EF4-FFF2-40B4-BE49-F238E27FC236}">
-                <a16:creationId xmlns:a16="http://schemas.microsoft.com/office/drawing/2014/main" id="{C7FE28F0-54D7-4D5E-B4C9-85C3637544C7}"/>
+                <a16:creationId xmlns:a16="http://schemas.microsoft.com/office/drawing/2014/main" id="{4EB98DE8-F024-4A73-8B7D-449C2FD6362D}"/>
               </a:ext>
             </a:extLst>
           </p:cNvPr>
@@ -17614,7 +18120,7 @@
           <p:cNvPr id="15" name="">
             <a:extLst xmlns:a="http://schemas.openxmlformats.org/drawingml/2006/main">
               <a:ext uri="{FF2B5EF4-FFF2-40B4-BE49-F238E27FC236}">
-                <a16:creationId xmlns:a16="http://schemas.microsoft.com/office/drawing/2014/main" id="{3C18BB20-63D4-430F-B2C9-D3355E7C5E1F}"/>
+                <a16:creationId xmlns:a16="http://schemas.microsoft.com/office/drawing/2014/main" id="{F25A316F-7696-4D02-A593-4F3BAFB12BBE}"/>
               </a:ext>
             </a:extLst>
           </p:cNvPr>
@@ -17664,7 +18170,7 @@
           <p:cNvPr id="16" name="">
             <a:extLst xmlns:a="http://schemas.openxmlformats.org/drawingml/2006/main">
               <a:ext uri="{FF2B5EF4-FFF2-40B4-BE49-F238E27FC236}">
-                <a16:creationId xmlns:a16="http://schemas.microsoft.com/office/drawing/2014/main" id="{89416246-1B40-4DC0-8F02-FA4216A1F098}"/>
+                <a16:creationId xmlns:a16="http://schemas.microsoft.com/office/drawing/2014/main" id="{F42553A7-7F88-4633-85C7-2785BA013293}"/>
               </a:ext>
             </a:extLst>
           </p:cNvPr>
@@ -17714,7 +18220,7 @@
           <p:cNvPr id="17" name="">
             <a:extLst xmlns:a="http://schemas.openxmlformats.org/drawingml/2006/main">
               <a:ext uri="{FF2B5EF4-FFF2-40B4-BE49-F238E27FC236}">
-                <a16:creationId xmlns:a16="http://schemas.microsoft.com/office/drawing/2014/main" id="{3CB64AF0-BB41-4D13-856C-D66FEDF4EB03}"/>
+                <a16:creationId xmlns:a16="http://schemas.microsoft.com/office/drawing/2014/main" id="{052196F8-0395-47DE-BCD4-8CC2328993FC}"/>
               </a:ext>
             </a:extLst>
           </p:cNvPr>
@@ -17745,7 +18251,7 @@
           <p:cNvPr id="18" name="">
             <a:extLst xmlns:a="http://schemas.openxmlformats.org/drawingml/2006/main">
               <a:ext uri="{FF2B5EF4-FFF2-40B4-BE49-F238E27FC236}">
-                <a16:creationId xmlns:a16="http://schemas.microsoft.com/office/drawing/2014/main" id="{B22A7EAB-3A7F-4531-B1C7-317B1F625D99}"/>
+                <a16:creationId xmlns:a16="http://schemas.microsoft.com/office/drawing/2014/main" id="{85B74521-7265-407C-A4BA-4AEFADB93C25}"/>
               </a:ext>
             </a:extLst>
           </p:cNvPr>
@@ -17795,7 +18301,7 @@
           <p:cNvPr id="19" name="">
             <a:extLst xmlns:a="http://schemas.openxmlformats.org/drawingml/2006/main">
               <a:ext uri="{FF2B5EF4-FFF2-40B4-BE49-F238E27FC236}">
-                <a16:creationId xmlns:a16="http://schemas.microsoft.com/office/drawing/2014/main" id="{EFE46166-729C-409E-88DA-AC7DB87C35E0}"/>
+                <a16:creationId xmlns:a16="http://schemas.microsoft.com/office/drawing/2014/main" id="{2167A2B1-E2DC-4BE6-8EA4-6EBB3E13C90A}"/>
               </a:ext>
             </a:extLst>
           </p:cNvPr>
@@ -17845,7 +18351,7 @@
           <p:cNvPr id="20" name="">
             <a:extLst xmlns:a="http://schemas.openxmlformats.org/drawingml/2006/main">
               <a:ext uri="{FF2B5EF4-FFF2-40B4-BE49-F238E27FC236}">
-                <a16:creationId xmlns:a16="http://schemas.microsoft.com/office/drawing/2014/main" id="{FF9C49F2-028D-4768-9B76-22B7C2BAC88A}"/>
+                <a16:creationId xmlns:a16="http://schemas.microsoft.com/office/drawing/2014/main" id="{C0B8442C-85EE-4EA0-A5F9-A9550A2F8B75}"/>
               </a:ext>
             </a:extLst>
           </p:cNvPr>
@@ -17895,7 +18401,7 @@
           <p:cNvPr id="21" name="">
             <a:extLst xmlns:a="http://schemas.openxmlformats.org/drawingml/2006/main">
               <a:ext uri="{FF2B5EF4-FFF2-40B4-BE49-F238E27FC236}">
-                <a16:creationId xmlns:a16="http://schemas.microsoft.com/office/drawing/2014/main" id="{8C0525FF-D2F9-486A-9819-84D94CE4FD5B}"/>
+                <a16:creationId xmlns:a16="http://schemas.microsoft.com/office/drawing/2014/main" id="{A4D572DC-8355-499E-9CE2-1B72E1673859}"/>
               </a:ext>
             </a:extLst>
           </p:cNvPr>
@@ -17945,7 +18451,7 @@
           <p:cNvPr id="22" name="">
             <a:extLst xmlns:a="http://schemas.openxmlformats.org/drawingml/2006/main">
               <a:ext uri="{FF2B5EF4-FFF2-40B4-BE49-F238E27FC236}">
-                <a16:creationId xmlns:a16="http://schemas.microsoft.com/office/drawing/2014/main" id="{6E279A57-7709-4C33-8CC9-A398EEC3489F}"/>
+                <a16:creationId xmlns:a16="http://schemas.microsoft.com/office/drawing/2014/main" id="{EFF7B11B-EC8C-4BFA-8DCF-CC9880FEC680}"/>
               </a:ext>
             </a:extLst>
           </p:cNvPr>
@@ -17995,7 +18501,7 @@
           <p:cNvPr id="23" name="">
             <a:extLst xmlns:a="http://schemas.openxmlformats.org/drawingml/2006/main">
               <a:ext uri="{FF2B5EF4-FFF2-40B4-BE49-F238E27FC236}">
-                <a16:creationId xmlns:a16="http://schemas.microsoft.com/office/drawing/2014/main" id="{8E1EEC32-0DAA-4936-AFE4-31CDD7B4A1A8}"/>
+                <a16:creationId xmlns:a16="http://schemas.microsoft.com/office/drawing/2014/main" id="{8A46EB28-4215-4072-A716-56FE790FF03E}"/>
               </a:ext>
             </a:extLst>
           </p:cNvPr>
@@ -18045,7 +18551,7 @@
           <p:cNvPr id="24" name="">
             <a:extLst xmlns:a="http://schemas.openxmlformats.org/drawingml/2006/main">
               <a:ext uri="{FF2B5EF4-FFF2-40B4-BE49-F238E27FC236}">
-                <a16:creationId xmlns:a16="http://schemas.microsoft.com/office/drawing/2014/main" id="{104E3CB8-9DCA-4646-8A9C-F21BCBD23C53}"/>
+                <a16:creationId xmlns:a16="http://schemas.microsoft.com/office/drawing/2014/main" id="{89429099-A760-48E5-8A09-2E9B7C4084AE}"/>
               </a:ext>
             </a:extLst>
           </p:cNvPr>
@@ -18080,7 +18586,7 @@
           <p:cNvPr id="25" name="">
             <a:extLst xmlns:a="http://schemas.openxmlformats.org/drawingml/2006/main">
               <a:ext uri="{FF2B5EF4-FFF2-40B4-BE49-F238E27FC236}">
-                <a16:creationId xmlns:a16="http://schemas.microsoft.com/office/drawing/2014/main" id="{BB6E2CD7-A37B-4801-AF8E-1D318CD9F5C1}"/>
+                <a16:creationId xmlns:a16="http://schemas.microsoft.com/office/drawing/2014/main" id="{FBBE48B7-6A52-4AAF-B718-BFEE3F3A5BCB}"/>
               </a:ext>
             </a:extLst>
           </p:cNvPr>
@@ -18113,7 +18619,7 @@
           <p:cNvPr id="26" name="">
             <a:extLst xmlns:a="http://schemas.openxmlformats.org/drawingml/2006/main">
               <a:ext uri="{FF2B5EF4-FFF2-40B4-BE49-F238E27FC236}">
-                <a16:creationId xmlns:a16="http://schemas.microsoft.com/office/drawing/2014/main" id="{0730FB4B-F433-480A-9D5E-F6EC3D3B9A77}"/>
+                <a16:creationId xmlns:a16="http://schemas.microsoft.com/office/drawing/2014/main" id="{B8375BBC-B88D-40E4-A709-B0D2B286115B}"/>
               </a:ext>
             </a:extLst>
           </p:cNvPr>
@@ -18163,7 +18669,7 @@
           <p:cNvPr id="27" name="">
             <a:extLst xmlns:a="http://schemas.openxmlformats.org/drawingml/2006/main">
               <a:ext uri="{FF2B5EF4-FFF2-40B4-BE49-F238E27FC236}">
-                <a16:creationId xmlns:a16="http://schemas.microsoft.com/office/drawing/2014/main" id="{D0B61702-61A3-476B-AF46-9D8A35C29F6A}"/>
+                <a16:creationId xmlns:a16="http://schemas.microsoft.com/office/drawing/2014/main" id="{DEA7F522-7D73-4E76-BE55-B897C175EF04}"/>
               </a:ext>
             </a:extLst>
           </p:cNvPr>
@@ -18213,7 +18719,7 @@
           <p:cNvPr id="28" name="">
             <a:extLst xmlns:a="http://schemas.openxmlformats.org/drawingml/2006/main">
               <a:ext uri="{FF2B5EF4-FFF2-40B4-BE49-F238E27FC236}">
-                <a16:creationId xmlns:a16="http://schemas.microsoft.com/office/drawing/2014/main" id="{69A3B098-DCF1-448E-A26A-14A7D434645C}"/>
+                <a16:creationId xmlns:a16="http://schemas.microsoft.com/office/drawing/2014/main" id="{8DCF7AEE-CCEE-4602-AFEC-89B8F74B20D0}"/>
               </a:ext>
             </a:extLst>
           </p:cNvPr>
@@ -18263,7 +18769,7 @@
           <p:cNvPr id="29" name="">
             <a:extLst xmlns:a="http://schemas.openxmlformats.org/drawingml/2006/main">
               <a:ext uri="{FF2B5EF4-FFF2-40B4-BE49-F238E27FC236}">
-                <a16:creationId xmlns:a16="http://schemas.microsoft.com/office/drawing/2014/main" id="{024363DF-598D-4002-B411-FE67AD94F475}"/>
+                <a16:creationId xmlns:a16="http://schemas.microsoft.com/office/drawing/2014/main" id="{BE610AF7-22A6-4B1D-81CE-39D1E985E7B6}"/>
               </a:ext>
             </a:extLst>
           </p:cNvPr>
@@ -18313,7 +18819,7 @@
           <p:cNvPr id="30" name="">
             <a:extLst xmlns:a="http://schemas.openxmlformats.org/drawingml/2006/main">
               <a:ext uri="{FF2B5EF4-FFF2-40B4-BE49-F238E27FC236}">
-                <a16:creationId xmlns:a16="http://schemas.microsoft.com/office/drawing/2014/main" id="{DD7757A0-A6D3-47C5-9159-A1E2BE30AE5C}"/>
+                <a16:creationId xmlns:a16="http://schemas.microsoft.com/office/drawing/2014/main" id="{C8CCC10B-41E9-4DAC-B490-67CDB842FDC5}"/>
               </a:ext>
             </a:extLst>
           </p:cNvPr>
@@ -18363,7 +18869,7 @@
           <p:cNvPr id="31" name="">
             <a:extLst xmlns:a="http://schemas.openxmlformats.org/drawingml/2006/main">
               <a:ext uri="{FF2B5EF4-FFF2-40B4-BE49-F238E27FC236}">
-                <a16:creationId xmlns:a16="http://schemas.microsoft.com/office/drawing/2014/main" id="{313BB1EC-88AA-4D51-B0B9-3D88AC47DDEE}"/>
+                <a16:creationId xmlns:a16="http://schemas.microsoft.com/office/drawing/2014/main" id="{4C1D4DDB-CE72-4751-9794-24FC2226AB13}"/>
               </a:ext>
             </a:extLst>
           </p:cNvPr>
@@ -18413,7 +18919,7 @@
           <p:cNvPr id="32" name="">
             <a:extLst xmlns:a="http://schemas.openxmlformats.org/drawingml/2006/main">
               <a:ext uri="{FF2B5EF4-FFF2-40B4-BE49-F238E27FC236}">
-                <a16:creationId xmlns:a16="http://schemas.microsoft.com/office/drawing/2014/main" id="{BFC3C7F2-73A5-4473-B7A0-E9FD8AE78744}"/>
+                <a16:creationId xmlns:a16="http://schemas.microsoft.com/office/drawing/2014/main" id="{76AB6A58-57AB-4893-A530-418724BC563F}"/>
               </a:ext>
             </a:extLst>
           </p:cNvPr>
@@ -18463,7 +18969,7 @@
           <p:cNvPr id="33" name="">
             <a:extLst xmlns:a="http://schemas.openxmlformats.org/drawingml/2006/main">
               <a:ext uri="{FF2B5EF4-FFF2-40B4-BE49-F238E27FC236}">
-                <a16:creationId xmlns:a16="http://schemas.microsoft.com/office/drawing/2014/main" id="{86B51AF8-8391-4FAA-8613-524A863BCCF4}"/>
+                <a16:creationId xmlns:a16="http://schemas.microsoft.com/office/drawing/2014/main" id="{BC44DD50-98EB-4492-9322-640E93D38CDA}"/>
               </a:ext>
             </a:extLst>
           </p:cNvPr>
@@ -18494,7 +19000,7 @@
           <p:cNvPr id="34" name="">
             <a:extLst xmlns:a="http://schemas.openxmlformats.org/drawingml/2006/main">
               <a:ext uri="{FF2B5EF4-FFF2-40B4-BE49-F238E27FC236}">
-                <a16:creationId xmlns:a16="http://schemas.microsoft.com/office/drawing/2014/main" id="{E5D740B3-CBC4-4A49-B263-C320547C32B5}"/>
+                <a16:creationId xmlns:a16="http://schemas.microsoft.com/office/drawing/2014/main" id="{EFB6B401-D1BF-493B-9CBF-CDEA0307A299}"/>
               </a:ext>
             </a:extLst>
           </p:cNvPr>
@@ -18544,7 +19050,7 @@
           <p:cNvPr id="35" name="">
             <a:extLst xmlns:a="http://schemas.openxmlformats.org/drawingml/2006/main">
               <a:ext uri="{FF2B5EF4-FFF2-40B4-BE49-F238E27FC236}">
-                <a16:creationId xmlns:a16="http://schemas.microsoft.com/office/drawing/2014/main" id="{7808A841-9A06-4447-BD57-CB9470DC0CFC}"/>
+                <a16:creationId xmlns:a16="http://schemas.microsoft.com/office/drawing/2014/main" id="{4773FDFD-6E9C-43FC-867B-3D637989BFF5}"/>
               </a:ext>
             </a:extLst>
           </p:cNvPr>
@@ -18594,7 +19100,7 @@
           <p:cNvPr id="36" name="">
             <a:extLst xmlns:a="http://schemas.openxmlformats.org/drawingml/2006/main">
               <a:ext uri="{FF2B5EF4-FFF2-40B4-BE49-F238E27FC236}">
-                <a16:creationId xmlns:a16="http://schemas.microsoft.com/office/drawing/2014/main" id="{D7BA4F09-E5A3-4B8E-8E6C-C948793F1354}"/>
+                <a16:creationId xmlns:a16="http://schemas.microsoft.com/office/drawing/2014/main" id="{F0649C8C-A8CD-4B2F-B637-EB34ACAABB79}"/>
               </a:ext>
             </a:extLst>
           </p:cNvPr>
@@ -18644,7 +19150,7 @@
           <p:cNvPr id="37" name="">
             <a:extLst xmlns:a="http://schemas.openxmlformats.org/drawingml/2006/main">
               <a:ext uri="{FF2B5EF4-FFF2-40B4-BE49-F238E27FC236}">
-                <a16:creationId xmlns:a16="http://schemas.microsoft.com/office/drawing/2014/main" id="{1E54458C-5952-4FAD-8420-2BC93A0775DB}"/>
+                <a16:creationId xmlns:a16="http://schemas.microsoft.com/office/drawing/2014/main" id="{597D2736-369E-43A6-B399-F072C2BE0A7E}"/>
               </a:ext>
             </a:extLst>
           </p:cNvPr>
@@ -18694,7 +19200,7 @@
           <p:cNvPr id="38" name="">
             <a:extLst xmlns:a="http://schemas.openxmlformats.org/drawingml/2006/main">
               <a:ext uri="{FF2B5EF4-FFF2-40B4-BE49-F238E27FC236}">
-                <a16:creationId xmlns:a16="http://schemas.microsoft.com/office/drawing/2014/main" id="{638D6E2C-70A1-48E9-A432-EA6BED5EF719}"/>
+                <a16:creationId xmlns:a16="http://schemas.microsoft.com/office/drawing/2014/main" id="{EE76F1FD-FC44-447D-A43A-EDB32C3DAB26}"/>
               </a:ext>
             </a:extLst>
           </p:cNvPr>
@@ -18744,7 +19250,7 @@
           <p:cNvPr id="39" name="">
             <a:extLst xmlns:a="http://schemas.openxmlformats.org/drawingml/2006/main">
               <a:ext uri="{FF2B5EF4-FFF2-40B4-BE49-F238E27FC236}">
-                <a16:creationId xmlns:a16="http://schemas.microsoft.com/office/drawing/2014/main" id="{1048A680-876B-49B0-92F3-D787AD87CECD}"/>
+                <a16:creationId xmlns:a16="http://schemas.microsoft.com/office/drawing/2014/main" id="{418462D8-5EF0-4B7C-9103-9178FE2A84DA}"/>
               </a:ext>
             </a:extLst>
           </p:cNvPr>
@@ -18792,7 +19298,7 @@
     </p:spTree>
     <p:extLst>
       <p:ext uri="{BB962C8B-B14F-4D97-AF65-F5344CB8AC3E}">
-        <p14:creationId xmlns:p14="http://schemas.microsoft.com/office/powerpoint/2010/main" val="850581564"/>
+        <p14:creationId xmlns:p14="http://schemas.microsoft.com/office/powerpoint/2010/main" val="1561057657"/>
       </p:ext>
     </p:extLst>
   </p:cSld>
@@ -18823,7 +19329,7 @@
           <p:cNvPr id="1" name="">
             <a:extLst xmlns:a="http://schemas.openxmlformats.org/drawingml/2006/main">
               <a:ext uri="{FF2B5EF4-FFF2-40B4-BE49-F238E27FC236}">
-                <a16:creationId xmlns:a16="http://schemas.microsoft.com/office/drawing/2014/main" id="{37E82F2D-1DF7-4664-8FC6-92FA380AD341}"/>
+                <a16:creationId xmlns:a16="http://schemas.microsoft.com/office/drawing/2014/main" id="{4AA72E8B-6780-4519-AFF0-F2D1752D936B}"/>
               </a:ext>
             </a:extLst>
           </p:cNvPr>
@@ -18858,7 +19364,7 @@
           <p:nvPr/>
         </p:nvPicPr>
         <p:blipFill>
-          <a:blip xmlns:r="http://schemas.openxmlformats.org/officeDocument/2006/relationships" xmlns:a="http://schemas.openxmlformats.org/drawingml/2006/main" r:embed="R42172859c6c14736"/>
+          <a:blip xmlns:r="http://schemas.openxmlformats.org/officeDocument/2006/relationships" xmlns:a="http://schemas.openxmlformats.org/drawingml/2006/main" r:embed="Rc032bc97b7504649"/>
           <a:stretch xmlns:a="http://schemas.openxmlformats.org/drawingml/2006/main"/>
         </p:blipFill>
         <p:spPr>
@@ -18876,7 +19382,7 @@
           <p:cNvPr id="3" name="">
             <a:extLst xmlns:a="http://schemas.openxmlformats.org/drawingml/2006/main">
               <a:ext uri="{FF2B5EF4-FFF2-40B4-BE49-F238E27FC236}">
-                <a16:creationId xmlns:a16="http://schemas.microsoft.com/office/drawing/2014/main" id="{A60A587D-18F2-4300-BDE2-7939E68828E5}"/>
+                <a16:creationId xmlns:a16="http://schemas.microsoft.com/office/drawing/2014/main" id="{E05008DA-BEA0-4B29-84E8-8A6D009B1FBF}"/>
               </a:ext>
             </a:extLst>
           </p:cNvPr>
@@ -18926,7 +19432,7 @@
           <p:cNvPr id="4" name="">
             <a:extLst xmlns:a="http://schemas.openxmlformats.org/drawingml/2006/main">
               <a:ext uri="{FF2B5EF4-FFF2-40B4-BE49-F238E27FC236}">
-                <a16:creationId xmlns:a16="http://schemas.microsoft.com/office/drawing/2014/main" id="{5AB61FB4-33B4-433D-B97F-FF35070616EA}"/>
+                <a16:creationId xmlns:a16="http://schemas.microsoft.com/office/drawing/2014/main" id="{1E28E7DA-C350-4965-8AC1-F03B23532874}"/>
               </a:ext>
             </a:extLst>
           </p:cNvPr>
@@ -18959,7 +19465,7 @@
           <p:cNvPr id="5" name="">
             <a:extLst xmlns:a="http://schemas.openxmlformats.org/drawingml/2006/main">
               <a:ext uri="{FF2B5EF4-FFF2-40B4-BE49-F238E27FC236}">
-                <a16:creationId xmlns:a16="http://schemas.microsoft.com/office/drawing/2014/main" id="{373632B7-BBE6-4CF1-9BDE-7BB28D819E0D}"/>
+                <a16:creationId xmlns:a16="http://schemas.microsoft.com/office/drawing/2014/main" id="{B25A4087-4EFF-4E3E-98DB-3B42010B3194}"/>
               </a:ext>
             </a:extLst>
           </p:cNvPr>
@@ -18990,7 +19496,7 @@
           <p:cNvPr id="6" name="">
             <a:extLst xmlns:a="http://schemas.openxmlformats.org/drawingml/2006/main">
               <a:ext uri="{FF2B5EF4-FFF2-40B4-BE49-F238E27FC236}">
-                <a16:creationId xmlns:a16="http://schemas.microsoft.com/office/drawing/2014/main" id="{85B24382-60FE-4C5D-BFC9-68F279E92B28}"/>
+                <a16:creationId xmlns:a16="http://schemas.microsoft.com/office/drawing/2014/main" id="{C7D1E190-CFF4-4AD0-A4C8-5CD3E1588EAF}"/>
               </a:ext>
             </a:extLst>
           </p:cNvPr>
@@ -19040,7 +19546,7 @@
           <p:cNvPr id="7" name="">
             <a:extLst xmlns:a="http://schemas.openxmlformats.org/drawingml/2006/main">
               <a:ext uri="{FF2B5EF4-FFF2-40B4-BE49-F238E27FC236}">
-                <a16:creationId xmlns:a16="http://schemas.microsoft.com/office/drawing/2014/main" id="{AB9AD570-3554-4E4E-81F6-D6CAD634258F}"/>
+                <a16:creationId xmlns:a16="http://schemas.microsoft.com/office/drawing/2014/main" id="{072E2B95-73AD-4FC0-B365-D2CA0957913F}"/>
               </a:ext>
             </a:extLst>
           </p:cNvPr>
@@ -19090,7 +19596,7 @@
           <p:cNvPr id="8" name="">
             <a:extLst xmlns:a="http://schemas.openxmlformats.org/drawingml/2006/main">
               <a:ext uri="{FF2B5EF4-FFF2-40B4-BE49-F238E27FC236}">
-                <a16:creationId xmlns:a16="http://schemas.microsoft.com/office/drawing/2014/main" id="{C5AAA22F-64B8-4604-A4B5-7477D2E174E0}"/>
+                <a16:creationId xmlns:a16="http://schemas.microsoft.com/office/drawing/2014/main" id="{7F29F105-77F8-44C1-8F6B-023E2A182BBC}"/>
               </a:ext>
             </a:extLst>
           </p:cNvPr>
@@ -19125,7 +19631,7 @@
           <p:cNvPr id="9" name="">
             <a:extLst xmlns:a="http://schemas.openxmlformats.org/drawingml/2006/main">
               <a:ext uri="{FF2B5EF4-FFF2-40B4-BE49-F238E27FC236}">
-                <a16:creationId xmlns:a16="http://schemas.microsoft.com/office/drawing/2014/main" id="{8F6D6DE5-6341-4072-87CA-871A13D63864}"/>
+                <a16:creationId xmlns:a16="http://schemas.microsoft.com/office/drawing/2014/main" id="{3B36FA18-F1AD-4B34-8F46-BC858C10F209}"/>
               </a:ext>
             </a:extLst>
           </p:cNvPr>
@@ -19158,7 +19664,7 @@
           <p:cNvPr id="10" name="">
             <a:extLst xmlns:a="http://schemas.openxmlformats.org/drawingml/2006/main">
               <a:ext uri="{FF2B5EF4-FFF2-40B4-BE49-F238E27FC236}">
-                <a16:creationId xmlns:a16="http://schemas.microsoft.com/office/drawing/2014/main" id="{F681C1BF-097B-4893-8BF7-D71E830E4D9E}"/>
+                <a16:creationId xmlns:a16="http://schemas.microsoft.com/office/drawing/2014/main" id="{68ED5BF0-D571-46AF-B83C-BFFB86F9C1CB}"/>
               </a:ext>
             </a:extLst>
           </p:cNvPr>
@@ -19208,7 +19714,7 @@
           <p:cNvPr id="11" name="">
             <a:extLst xmlns:a="http://schemas.openxmlformats.org/drawingml/2006/main">
               <a:ext uri="{FF2B5EF4-FFF2-40B4-BE49-F238E27FC236}">
-                <a16:creationId xmlns:a16="http://schemas.microsoft.com/office/drawing/2014/main" id="{8EA6B68C-261B-4567-9176-6D02B00F847F}"/>
+                <a16:creationId xmlns:a16="http://schemas.microsoft.com/office/drawing/2014/main" id="{AA8F9330-000D-43BE-A835-A3F4C63A841C}"/>
               </a:ext>
             </a:extLst>
           </p:cNvPr>
@@ -19258,7 +19764,7 @@
           <p:cNvPr id="12" name="">
             <a:extLst xmlns:a="http://schemas.openxmlformats.org/drawingml/2006/main">
               <a:ext uri="{FF2B5EF4-FFF2-40B4-BE49-F238E27FC236}">
-                <a16:creationId xmlns:a16="http://schemas.microsoft.com/office/drawing/2014/main" id="{6B67CD07-A916-4B51-8F6D-ADF0079DFC17}"/>
+                <a16:creationId xmlns:a16="http://schemas.microsoft.com/office/drawing/2014/main" id="{7A07D6E9-D7F7-47B2-B8F4-70AF435A4284}"/>
               </a:ext>
             </a:extLst>
           </p:cNvPr>
@@ -19308,7 +19814,7 @@
           <p:cNvPr id="13" name="">
             <a:extLst xmlns:a="http://schemas.openxmlformats.org/drawingml/2006/main">
               <a:ext uri="{FF2B5EF4-FFF2-40B4-BE49-F238E27FC236}">
-                <a16:creationId xmlns:a16="http://schemas.microsoft.com/office/drawing/2014/main" id="{BF0A103E-A127-4847-A72D-8998D63B831D}"/>
+                <a16:creationId xmlns:a16="http://schemas.microsoft.com/office/drawing/2014/main" id="{86A4079F-19C6-41C7-BFE5-ECED9BF1D63A}"/>
               </a:ext>
             </a:extLst>
           </p:cNvPr>
@@ -19358,7 +19864,7 @@
           <p:cNvPr id="14" name="">
             <a:extLst xmlns:a="http://schemas.openxmlformats.org/drawingml/2006/main">
               <a:ext uri="{FF2B5EF4-FFF2-40B4-BE49-F238E27FC236}">
-                <a16:creationId xmlns:a16="http://schemas.microsoft.com/office/drawing/2014/main" id="{918E1F62-E7B5-470E-8ABD-BFB7B7E22397}"/>
+                <a16:creationId xmlns:a16="http://schemas.microsoft.com/office/drawing/2014/main" id="{57F38D56-8EFD-4EEC-AAD7-D36ED46D802A}"/>
               </a:ext>
             </a:extLst>
           </p:cNvPr>
@@ -19408,7 +19914,7 @@
           <p:cNvPr id="15" name="">
             <a:extLst xmlns:a="http://schemas.openxmlformats.org/drawingml/2006/main">
               <a:ext uri="{FF2B5EF4-FFF2-40B4-BE49-F238E27FC236}">
-                <a16:creationId xmlns:a16="http://schemas.microsoft.com/office/drawing/2014/main" id="{0DD9F549-3B0E-4369-A3B4-34C9EAB8EBE5}"/>
+                <a16:creationId xmlns:a16="http://schemas.microsoft.com/office/drawing/2014/main" id="{3B6FCD12-B5C9-45EA-96F9-077D88E7D5EA}"/>
               </a:ext>
             </a:extLst>
           </p:cNvPr>
@@ -19458,7 +19964,7 @@
           <p:cNvPr id="16" name="">
             <a:extLst xmlns:a="http://schemas.openxmlformats.org/drawingml/2006/main">
               <a:ext uri="{FF2B5EF4-FFF2-40B4-BE49-F238E27FC236}">
-                <a16:creationId xmlns:a16="http://schemas.microsoft.com/office/drawing/2014/main" id="{0AFCD113-9E1B-45B7-8441-EBDB89B34A8C}"/>
+                <a16:creationId xmlns:a16="http://schemas.microsoft.com/office/drawing/2014/main" id="{5B5B8F04-2735-4A24-AECF-9EF2EB026E7D}"/>
               </a:ext>
             </a:extLst>
           </p:cNvPr>
@@ -19508,7 +20014,7 @@
           <p:cNvPr id="17" name="">
             <a:extLst xmlns:a="http://schemas.openxmlformats.org/drawingml/2006/main">
               <a:ext uri="{FF2B5EF4-FFF2-40B4-BE49-F238E27FC236}">
-                <a16:creationId xmlns:a16="http://schemas.microsoft.com/office/drawing/2014/main" id="{6D061F23-21A1-412A-A2B7-00C91102E557}"/>
+                <a16:creationId xmlns:a16="http://schemas.microsoft.com/office/drawing/2014/main" id="{104A0738-AFCE-4A73-A915-516C5F456000}"/>
               </a:ext>
             </a:extLst>
           </p:cNvPr>
@@ -19539,7 +20045,7 @@
           <p:cNvPr id="18" name="">
             <a:extLst xmlns:a="http://schemas.openxmlformats.org/drawingml/2006/main">
               <a:ext uri="{FF2B5EF4-FFF2-40B4-BE49-F238E27FC236}">
-                <a16:creationId xmlns:a16="http://schemas.microsoft.com/office/drawing/2014/main" id="{389F848A-BBF9-4E8F-A92C-F8F1815579EA}"/>
+                <a16:creationId xmlns:a16="http://schemas.microsoft.com/office/drawing/2014/main" id="{28696BB7-128D-494A-ABAA-94821007EB70}"/>
               </a:ext>
             </a:extLst>
           </p:cNvPr>
@@ -19589,7 +20095,7 @@
           <p:cNvPr id="19" name="">
             <a:extLst xmlns:a="http://schemas.openxmlformats.org/drawingml/2006/main">
               <a:ext uri="{FF2B5EF4-FFF2-40B4-BE49-F238E27FC236}">
-                <a16:creationId xmlns:a16="http://schemas.microsoft.com/office/drawing/2014/main" id="{43600515-A520-479C-89F0-7D391CA4EA04}"/>
+                <a16:creationId xmlns:a16="http://schemas.microsoft.com/office/drawing/2014/main" id="{26BD5224-ED7C-4434-8C8F-66D2994D7CBB}"/>
               </a:ext>
             </a:extLst>
           </p:cNvPr>
@@ -19639,7 +20145,7 @@
           <p:cNvPr id="20" name="">
             <a:extLst xmlns:a="http://schemas.openxmlformats.org/drawingml/2006/main">
               <a:ext uri="{FF2B5EF4-FFF2-40B4-BE49-F238E27FC236}">
-                <a16:creationId xmlns:a16="http://schemas.microsoft.com/office/drawing/2014/main" id="{9D59C959-4F37-4848-BECC-6716324B6A34}"/>
+                <a16:creationId xmlns:a16="http://schemas.microsoft.com/office/drawing/2014/main" id="{AD4B62D0-4876-46B5-A1F1-3B9915F50F9E}"/>
               </a:ext>
             </a:extLst>
           </p:cNvPr>
@@ -19689,7 +20195,7 @@
           <p:cNvPr id="21" name="">
             <a:extLst xmlns:a="http://schemas.openxmlformats.org/drawingml/2006/main">
               <a:ext uri="{FF2B5EF4-FFF2-40B4-BE49-F238E27FC236}">
-                <a16:creationId xmlns:a16="http://schemas.microsoft.com/office/drawing/2014/main" id="{926F9CF9-8E4C-490E-AA12-56C004776FDC}"/>
+                <a16:creationId xmlns:a16="http://schemas.microsoft.com/office/drawing/2014/main" id="{69ACD499-881E-4B66-910A-2087F9FF6284}"/>
               </a:ext>
             </a:extLst>
           </p:cNvPr>
@@ -19739,7 +20245,7 @@
           <p:cNvPr id="22" name="">
             <a:extLst xmlns:a="http://schemas.openxmlformats.org/drawingml/2006/main">
               <a:ext uri="{FF2B5EF4-FFF2-40B4-BE49-F238E27FC236}">
-                <a16:creationId xmlns:a16="http://schemas.microsoft.com/office/drawing/2014/main" id="{633E739C-9FAA-49BD-9B75-513858E774F2}"/>
+                <a16:creationId xmlns:a16="http://schemas.microsoft.com/office/drawing/2014/main" id="{BB8E60E6-D7EB-4544-A222-1815EC45B3D1}"/>
               </a:ext>
             </a:extLst>
           </p:cNvPr>
@@ -19789,7 +20295,7 @@
           <p:cNvPr id="23" name="">
             <a:extLst xmlns:a="http://schemas.openxmlformats.org/drawingml/2006/main">
               <a:ext uri="{FF2B5EF4-FFF2-40B4-BE49-F238E27FC236}">
-                <a16:creationId xmlns:a16="http://schemas.microsoft.com/office/drawing/2014/main" id="{F494B33F-2E85-4F82-A705-1A9BDE0D17A1}"/>
+                <a16:creationId xmlns:a16="http://schemas.microsoft.com/office/drawing/2014/main" id="{1BF89930-F73C-498E-B57C-2E84D411FA35}"/>
               </a:ext>
             </a:extLst>
           </p:cNvPr>
@@ -19839,7 +20345,7 @@
           <p:cNvPr id="24" name="">
             <a:extLst xmlns:a="http://schemas.openxmlformats.org/drawingml/2006/main">
               <a:ext uri="{FF2B5EF4-FFF2-40B4-BE49-F238E27FC236}">
-                <a16:creationId xmlns:a16="http://schemas.microsoft.com/office/drawing/2014/main" id="{0712A86C-783F-4EE0-9CDB-457F8D61E67B}"/>
+                <a16:creationId xmlns:a16="http://schemas.microsoft.com/office/drawing/2014/main" id="{BF1BBD98-0672-4AAB-A259-84687AD44A18}"/>
               </a:ext>
             </a:extLst>
           </p:cNvPr>
@@ -19874,7 +20380,7 @@
           <p:cNvPr id="25" name="">
             <a:extLst xmlns:a="http://schemas.openxmlformats.org/drawingml/2006/main">
               <a:ext uri="{FF2B5EF4-FFF2-40B4-BE49-F238E27FC236}">
-                <a16:creationId xmlns:a16="http://schemas.microsoft.com/office/drawing/2014/main" id="{AFED0ADE-AA54-48AA-BAF1-B16DF92E73D2}"/>
+                <a16:creationId xmlns:a16="http://schemas.microsoft.com/office/drawing/2014/main" id="{ADBC45DB-24A4-4E33-8B10-B0D4AFFADFB3}"/>
               </a:ext>
             </a:extLst>
           </p:cNvPr>
@@ -19907,7 +20413,7 @@
           <p:cNvPr id="26" name="">
             <a:extLst xmlns:a="http://schemas.openxmlformats.org/drawingml/2006/main">
               <a:ext uri="{FF2B5EF4-FFF2-40B4-BE49-F238E27FC236}">
-                <a16:creationId xmlns:a16="http://schemas.microsoft.com/office/drawing/2014/main" id="{7EA92D7A-2BB5-4ADE-9A1A-F81F4B668BA6}"/>
+                <a16:creationId xmlns:a16="http://schemas.microsoft.com/office/drawing/2014/main" id="{AE62DB4F-76DE-4CC2-ADB3-7D8FD8ACBF9D}"/>
               </a:ext>
             </a:extLst>
           </p:cNvPr>
@@ -19957,7 +20463,7 @@
           <p:cNvPr id="27" name="">
             <a:extLst xmlns:a="http://schemas.openxmlformats.org/drawingml/2006/main">
               <a:ext uri="{FF2B5EF4-FFF2-40B4-BE49-F238E27FC236}">
-                <a16:creationId xmlns:a16="http://schemas.microsoft.com/office/drawing/2014/main" id="{2F7A00E8-79A4-4E61-84F2-C2C99C5EBF4F}"/>
+                <a16:creationId xmlns:a16="http://schemas.microsoft.com/office/drawing/2014/main" id="{E70B7261-29C1-41F5-940E-C93DF98BDBDA}"/>
               </a:ext>
             </a:extLst>
           </p:cNvPr>
@@ -20007,7 +20513,7 @@
           <p:cNvPr id="28" name="">
             <a:extLst xmlns:a="http://schemas.openxmlformats.org/drawingml/2006/main">
               <a:ext uri="{FF2B5EF4-FFF2-40B4-BE49-F238E27FC236}">
-                <a16:creationId xmlns:a16="http://schemas.microsoft.com/office/drawing/2014/main" id="{0505B300-937D-4230-9220-8C0965AD14EA}"/>
+                <a16:creationId xmlns:a16="http://schemas.microsoft.com/office/drawing/2014/main" id="{EB9BBA43-DCE9-46BF-88D9-B08A96ED9404}"/>
               </a:ext>
             </a:extLst>
           </p:cNvPr>
@@ -20057,7 +20563,7 @@
           <p:cNvPr id="29" name="">
             <a:extLst xmlns:a="http://schemas.openxmlformats.org/drawingml/2006/main">
               <a:ext uri="{FF2B5EF4-FFF2-40B4-BE49-F238E27FC236}">
-                <a16:creationId xmlns:a16="http://schemas.microsoft.com/office/drawing/2014/main" id="{369C0F14-F6B9-495F-9524-2E9538BA805C}"/>
+                <a16:creationId xmlns:a16="http://schemas.microsoft.com/office/drawing/2014/main" id="{3ACFE59F-FECB-491B-A569-BAC9C4A88DE8}"/>
               </a:ext>
             </a:extLst>
           </p:cNvPr>
@@ -20107,7 +20613,7 @@
           <p:cNvPr id="30" name="">
             <a:extLst xmlns:a="http://schemas.openxmlformats.org/drawingml/2006/main">
               <a:ext uri="{FF2B5EF4-FFF2-40B4-BE49-F238E27FC236}">
-                <a16:creationId xmlns:a16="http://schemas.microsoft.com/office/drawing/2014/main" id="{E93FFBAF-3FF9-4E1C-A021-64D3D41B4F98}"/>
+                <a16:creationId xmlns:a16="http://schemas.microsoft.com/office/drawing/2014/main" id="{7DFFEFFD-35C2-4892-BBE1-DDFC8F026A81}"/>
               </a:ext>
             </a:extLst>
           </p:cNvPr>
@@ -20157,7 +20663,7 @@
           <p:cNvPr id="31" name="">
             <a:extLst xmlns:a="http://schemas.openxmlformats.org/drawingml/2006/main">
               <a:ext uri="{FF2B5EF4-FFF2-40B4-BE49-F238E27FC236}">
-                <a16:creationId xmlns:a16="http://schemas.microsoft.com/office/drawing/2014/main" id="{5EA450A6-CBBC-4DD5-9E26-D0E511F13DC2}"/>
+                <a16:creationId xmlns:a16="http://schemas.microsoft.com/office/drawing/2014/main" id="{FA871351-380D-4C4F-9C73-6F51759372AC}"/>
               </a:ext>
             </a:extLst>
           </p:cNvPr>
@@ -20207,7 +20713,7 @@
           <p:cNvPr id="32" name="">
             <a:extLst xmlns:a="http://schemas.openxmlformats.org/drawingml/2006/main">
               <a:ext uri="{FF2B5EF4-FFF2-40B4-BE49-F238E27FC236}">
-                <a16:creationId xmlns:a16="http://schemas.microsoft.com/office/drawing/2014/main" id="{73822125-D844-4420-B7DA-A52FC3CDD94E}"/>
+                <a16:creationId xmlns:a16="http://schemas.microsoft.com/office/drawing/2014/main" id="{0BB77C8B-14E8-464A-87CE-902CDDD1A497}"/>
               </a:ext>
             </a:extLst>
           </p:cNvPr>
@@ -20257,7 +20763,7 @@
           <p:cNvPr id="33" name="">
             <a:extLst xmlns:a="http://schemas.openxmlformats.org/drawingml/2006/main">
               <a:ext uri="{FF2B5EF4-FFF2-40B4-BE49-F238E27FC236}">
-                <a16:creationId xmlns:a16="http://schemas.microsoft.com/office/drawing/2014/main" id="{DD27400B-D9C2-4CD2-AB70-D41C054A5DD0}"/>
+                <a16:creationId xmlns:a16="http://schemas.microsoft.com/office/drawing/2014/main" id="{9612B897-2017-4CDB-BC1C-FDB916BBAFC0}"/>
               </a:ext>
             </a:extLst>
           </p:cNvPr>
@@ -20288,7 +20794,7 @@
           <p:cNvPr id="34" name="">
             <a:extLst xmlns:a="http://schemas.openxmlformats.org/drawingml/2006/main">
               <a:ext uri="{FF2B5EF4-FFF2-40B4-BE49-F238E27FC236}">
-                <a16:creationId xmlns:a16="http://schemas.microsoft.com/office/drawing/2014/main" id="{5D7AA774-7D6C-425F-A90A-E968A33A27EA}"/>
+                <a16:creationId xmlns:a16="http://schemas.microsoft.com/office/drawing/2014/main" id="{8CE75C8E-471E-4C2C-A504-5C5ED3E156E6}"/>
               </a:ext>
             </a:extLst>
           </p:cNvPr>
@@ -20338,7 +20844,7 @@
           <p:cNvPr id="35" name="">
             <a:extLst xmlns:a="http://schemas.openxmlformats.org/drawingml/2006/main">
               <a:ext uri="{FF2B5EF4-FFF2-40B4-BE49-F238E27FC236}">
-                <a16:creationId xmlns:a16="http://schemas.microsoft.com/office/drawing/2014/main" id="{FA7EA91B-3AAB-407D-9BDF-69A621346BEF}"/>
+                <a16:creationId xmlns:a16="http://schemas.microsoft.com/office/drawing/2014/main" id="{FE480C71-7221-4D8D-A3E1-076326C2FCA7}"/>
               </a:ext>
             </a:extLst>
           </p:cNvPr>
@@ -20388,7 +20894,7 @@
           <p:cNvPr id="36" name="">
             <a:extLst xmlns:a="http://schemas.openxmlformats.org/drawingml/2006/main">
               <a:ext uri="{FF2B5EF4-FFF2-40B4-BE49-F238E27FC236}">
-                <a16:creationId xmlns:a16="http://schemas.microsoft.com/office/drawing/2014/main" id="{C1